--- a/資安事件因應分析.pptx
+++ b/資安事件因應分析.pptx
@@ -177,7 +177,7 @@
                   <c:v>5</c:v>
                 </c:pt>
                 <c:pt idx="1">
-                  <c:v>2</c:v>
+                  <c:v>3</c:v>
                 </c:pt>
               </c:numCache>
             </c:numRef>
@@ -3514,7 +3514,7 @@
                 <a:ea typeface="Microsoft JhengHei"/>
                 <a:cs typeface="Microsoft JhengHei"/>
               </a:rPr>
-              <a:t>資料期間 2026-08-12 ~ 2026-09-12　｜　MOPS 重大訊息全文檢索　｜　7 家公司</a:t>
+              <a:t>資料期間 2026-08-15 ~ 2026-09-15　｜　MOPS 重大訊息全文檢索　｜　8 家公司</a:t>
             </a:r>
           </a:p>
         </p:txBody>
@@ -3731,7 +3731,7 @@
                 <a:ea typeface="Microsoft JhengHei"/>
                 <a:cs typeface="Microsoft JhengHei"/>
               </a:rPr>
-              <a:t>資料期間內 MOPS 揭露之 7 起資安相關重大訊息</a:t>
+              <a:t>資料期間內 MOPS 揭露之 8 起資安相關重大訊息</a:t>
             </a:r>
           </a:p>
         </p:txBody>
@@ -3814,7 +3814,7 @@
                 <a:ea typeface="Microsoft JhengHei"/>
                 <a:cs typeface="Microsoft JhengHei"/>
               </a:rPr>
-              <a:t>7</a:t>
+              <a:t>8</a:t>
             </a:r>
           </a:p>
         </p:txBody>
@@ -4106,7 +4106,7 @@
         </p:nvGraphicFramePr>
         <p:xfrm>
           <a:off x="548640" y="2697480"/>
-          <a:ext cx="11064240" cy="3072384"/>
+          <a:ext cx="11064240" cy="3456432"/>
         </p:xfrm>
         <a:graphic>
           <a:graphicData uri="http://schemas.openxmlformats.org/drawingml/2006/table">
@@ -4258,7 +4258,7 @@
                           <a:ea typeface="Microsoft JhengHei"/>
                           <a:cs typeface="Microsoft JhengHei"/>
                         </a:rPr>
-                        <a:t>達爾膚</a:t>
+                        <a:t>崴寶</a:t>
                       </a:r>
                     </a:p>
                   </a:txBody>
@@ -4282,7 +4282,7 @@
                           <a:ea typeface="Microsoft JhengHei"/>
                           <a:cs typeface="Microsoft JhengHei"/>
                         </a:rPr>
-                        <a:t>6523</a:t>
+                        <a:t>7744</a:t>
                       </a:r>
                     </a:p>
                   </a:txBody>
@@ -4306,7 +4306,251 @@
                           <a:ea typeface="Microsoft JhengHei"/>
                           <a:cs typeface="Microsoft JhengHei"/>
                         </a:rPr>
+                        <a:t>09/14</a:t>
+                      </a:r>
+                    </a:p>
+                  </a:txBody>
+                  <a:tcPr anchor="ctr" marL="73152" marT="9144" marB="9144">
+                    <a:solidFill>
+                      <a:srgbClr val="FFFFFF"/>
+                    </a:solidFill>
+                  </a:tcPr>
+                </a:tc>
+                <a:tc>
+                  <a:txBody>
+                    <a:bodyPr/>
+                    <a:lstStyle/>
+                    <a:p>
+                      <a:r>
+                        <a:rPr sz="1150" b="1">
+                          <a:solidFill>
+                            <a:srgbClr val="F4A261"/>
+                          </a:solidFill>
+                          <a:latin typeface="Microsoft JhengHei"/>
+                          <a:ea typeface="Microsoft JhengHei"/>
+                          <a:cs typeface="Microsoft JhengHei"/>
+                        </a:rPr>
+                        <a:t>勒索病毒/加密</a:t>
+                      </a:r>
+                    </a:p>
+                  </a:txBody>
+                  <a:tcPr anchor="ctr" marL="73152" marT="9144" marB="9144">
+                    <a:solidFill>
+                      <a:srgbClr val="FFFFFF"/>
+                    </a:solidFill>
+                  </a:tcPr>
+                </a:tc>
+                <a:tc>
+                  <a:txBody>
+                    <a:bodyPr/>
+                    <a:lstStyle/>
+                    <a:p>
+                      <a:r>
+                        <a:rPr sz="1150" b="0">
+                          <a:solidFill>
+                            <a:srgbClr val="1A2233"/>
+                          </a:solidFill>
+                          <a:latin typeface="Microsoft JhengHei"/>
+                          <a:ea typeface="Microsoft JhengHei"/>
+                          <a:cs typeface="Microsoft JhengHei"/>
+                        </a:rPr>
+                        <a:t>經初步評估，本次資安事件未影響公司工廠生產作業，生產活動均維持正常運…</a:t>
+                      </a:r>
+                    </a:p>
+                  </a:txBody>
+                  <a:tcPr anchor="ctr" marL="73152" marT="9144" marB="9144">
+                    <a:solidFill>
+                      <a:srgbClr val="FFFFFF"/>
+                    </a:solidFill>
+                  </a:tcPr>
+                </a:tc>
+              </a:tr>
+              <a:tr h="384048">
+                <a:tc>
+                  <a:txBody>
+                    <a:bodyPr/>
+                    <a:lstStyle/>
+                    <a:p>
+                      <a:r>
+                        <a:rPr sz="1150" b="0">
+                          <a:solidFill>
+                            <a:srgbClr val="1A2233"/>
+                          </a:solidFill>
+                          <a:latin typeface="Microsoft JhengHei"/>
+                          <a:ea typeface="Microsoft JhengHei"/>
+                          <a:cs typeface="Microsoft JhengHei"/>
+                        </a:rPr>
+                        <a:t>達爾膚</a:t>
+                      </a:r>
+                    </a:p>
+                  </a:txBody>
+                  <a:tcPr anchor="ctr" marL="73152" marT="9144" marB="9144">
+                    <a:solidFill>
+                      <a:srgbClr val="EEF2F9"/>
+                    </a:solidFill>
+                  </a:tcPr>
+                </a:tc>
+                <a:tc>
+                  <a:txBody>
+                    <a:bodyPr/>
+                    <a:lstStyle/>
+                    <a:p>
+                      <a:r>
+                        <a:rPr sz="1150" b="0">
+                          <a:solidFill>
+                            <a:srgbClr val="1A2233"/>
+                          </a:solidFill>
+                          <a:latin typeface="Microsoft JhengHei"/>
+                          <a:ea typeface="Microsoft JhengHei"/>
+                          <a:cs typeface="Microsoft JhengHei"/>
+                        </a:rPr>
+                        <a:t>6523</a:t>
+                      </a:r>
+                    </a:p>
+                  </a:txBody>
+                  <a:tcPr anchor="ctr" marL="73152" marT="9144" marB="9144">
+                    <a:solidFill>
+                      <a:srgbClr val="EEF2F9"/>
+                    </a:solidFill>
+                  </a:tcPr>
+                </a:tc>
+                <a:tc>
+                  <a:txBody>
+                    <a:bodyPr/>
+                    <a:lstStyle/>
+                    <a:p>
+                      <a:r>
+                        <a:rPr sz="1150" b="0">
+                          <a:solidFill>
+                            <a:srgbClr val="1A2233"/>
+                          </a:solidFill>
+                          <a:latin typeface="Microsoft JhengHei"/>
+                          <a:ea typeface="Microsoft JhengHei"/>
+                          <a:cs typeface="Microsoft JhengHei"/>
+                        </a:rPr>
                         <a:t>09/11</a:t>
+                      </a:r>
+                    </a:p>
+                  </a:txBody>
+                  <a:tcPr anchor="ctr" marL="73152" marT="9144" marB="9144">
+                    <a:solidFill>
+                      <a:srgbClr val="EEF2F9"/>
+                    </a:solidFill>
+                  </a:tcPr>
+                </a:tc>
+                <a:tc>
+                  <a:txBody>
+                    <a:bodyPr/>
+                    <a:lstStyle/>
+                    <a:p>
+                      <a:r>
+                        <a:rPr sz="1150" b="1">
+                          <a:solidFill>
+                            <a:srgbClr val="E63946"/>
+                          </a:solidFill>
+                          <a:latin typeface="Microsoft JhengHei"/>
+                          <a:ea typeface="Microsoft JhengHei"/>
+                          <a:cs typeface="Microsoft JhengHei"/>
+                        </a:rPr>
+                        <a:t>駭客攻擊</a:t>
+                      </a:r>
+                    </a:p>
+                  </a:txBody>
+                  <a:tcPr anchor="ctr" marL="73152" marT="9144" marB="9144">
+                    <a:solidFill>
+                      <a:srgbClr val="EEF2F9"/>
+                    </a:solidFill>
+                  </a:tcPr>
+                </a:tc>
+                <a:tc>
+                  <a:txBody>
+                    <a:bodyPr/>
+                    <a:lstStyle/>
+                    <a:p>
+                      <a:r>
+                        <a:rPr sz="1150" b="0">
+                          <a:solidFill>
+                            <a:srgbClr val="1A2233"/>
+                          </a:solidFill>
+                          <a:latin typeface="Microsoft JhengHei"/>
+                          <a:ea typeface="Microsoft JhengHei"/>
+                          <a:cs typeface="Microsoft JhengHei"/>
+                        </a:rPr>
+                        <a:t>受影響系統非屬公司現行主要營運系統，亦非對外提供服務之系統，目前評估…</a:t>
+                      </a:r>
+                    </a:p>
+                  </a:txBody>
+                  <a:tcPr anchor="ctr" marL="73152" marT="9144" marB="9144">
+                    <a:solidFill>
+                      <a:srgbClr val="EEF2F9"/>
+                    </a:solidFill>
+                  </a:tcPr>
+                </a:tc>
+              </a:tr>
+              <a:tr h="384048">
+                <a:tc>
+                  <a:txBody>
+                    <a:bodyPr/>
+                    <a:lstStyle/>
+                    <a:p>
+                      <a:r>
+                        <a:rPr sz="1150" b="0">
+                          <a:solidFill>
+                            <a:srgbClr val="1A2233"/>
+                          </a:solidFill>
+                          <a:latin typeface="Microsoft JhengHei"/>
+                          <a:ea typeface="Microsoft JhengHei"/>
+                          <a:cs typeface="Microsoft JhengHei"/>
+                        </a:rPr>
+                        <a:t>大車隊</a:t>
+                      </a:r>
+                    </a:p>
+                  </a:txBody>
+                  <a:tcPr anchor="ctr" marL="73152" marT="9144" marB="9144">
+                    <a:solidFill>
+                      <a:srgbClr val="FFFFFF"/>
+                    </a:solidFill>
+                  </a:tcPr>
+                </a:tc>
+                <a:tc>
+                  <a:txBody>
+                    <a:bodyPr/>
+                    <a:lstStyle/>
+                    <a:p>
+                      <a:r>
+                        <a:rPr sz="1150" b="0">
+                          <a:solidFill>
+                            <a:srgbClr val="1A2233"/>
+                          </a:solidFill>
+                          <a:latin typeface="Microsoft JhengHei"/>
+                          <a:ea typeface="Microsoft JhengHei"/>
+                          <a:cs typeface="Microsoft JhengHei"/>
+                        </a:rPr>
+                        <a:t>2640</a:t>
+                      </a:r>
+                    </a:p>
+                  </a:txBody>
+                  <a:tcPr anchor="ctr" marL="73152" marT="9144" marB="9144">
+                    <a:solidFill>
+                      <a:srgbClr val="FFFFFF"/>
+                    </a:solidFill>
+                  </a:tcPr>
+                </a:tc>
+                <a:tc>
+                  <a:txBody>
+                    <a:bodyPr/>
+                    <a:lstStyle/>
+                    <a:p>
+                      <a:r>
+                        <a:rPr sz="1150" b="0">
+                          <a:solidFill>
+                            <a:srgbClr val="1A2233"/>
+                          </a:solidFill>
+                          <a:latin typeface="Microsoft JhengHei"/>
+                          <a:ea typeface="Microsoft JhengHei"/>
+                          <a:cs typeface="Microsoft JhengHei"/>
+                        </a:rPr>
+                        <a:t>09/09</a:t>
                       </a:r>
                     </a:p>
                   </a:txBody>
@@ -4354,7 +4598,7 @@
                           <a:ea typeface="Microsoft JhengHei"/>
                           <a:cs typeface="Microsoft JhengHei"/>
                         </a:rPr>
-                        <a:t>受影響系統非屬公司現行主要營運系統，亦非對外提供服務之系統，目前評估…</a:t>
+                        <a:t>經初步評估，本事件目前尚未對本公司整體營運及財務造成重大影響。</a:t>
                       </a:r>
                     </a:p>
                   </a:txBody>
@@ -4380,7 +4624,7 @@
                           <a:ea typeface="Microsoft JhengHei"/>
                           <a:cs typeface="Microsoft JhengHei"/>
                         </a:rPr>
-                        <a:t>大車隊</a:t>
+                        <a:t>富爾特</a:t>
                       </a:r>
                     </a:p>
                   </a:txBody>
@@ -4404,7 +4648,7 @@
                           <a:ea typeface="Microsoft JhengHei"/>
                           <a:cs typeface="Microsoft JhengHei"/>
                         </a:rPr>
-                        <a:t>2640</a:t>
+                        <a:t>6136</a:t>
                       </a:r>
                     </a:p>
                   </a:txBody>
@@ -4428,7 +4672,7 @@
                           <a:ea typeface="Microsoft JhengHei"/>
                           <a:cs typeface="Microsoft JhengHei"/>
                         </a:rPr>
-                        <a:t>09/09</a:t>
+                        <a:t>09/07</a:t>
                       </a:r>
                     </a:p>
                   </a:txBody>
@@ -4446,13 +4690,13 @@
                       <a:r>
                         <a:rPr sz="1150" b="1">
                           <a:solidFill>
-                            <a:srgbClr val="E63946"/>
+                            <a:srgbClr val="F4A261"/>
                           </a:solidFill>
                           <a:latin typeface="Microsoft JhengHei"/>
                           <a:ea typeface="Microsoft JhengHei"/>
                           <a:cs typeface="Microsoft JhengHei"/>
                         </a:rPr>
-                        <a:t>駭客攻擊</a:t>
+                        <a:t>勒索病毒/加密</a:t>
                       </a:r>
                     </a:p>
                   </a:txBody>
@@ -4476,7 +4720,7 @@
                           <a:ea typeface="Microsoft JhengHei"/>
                           <a:cs typeface="Microsoft JhengHei"/>
                         </a:rPr>
-                        <a:t>經初步評估，本事件目前尚未對本公司整體營運及財務造成重大影響。</a:t>
+                        <a:t>目前受影響之系統正陸續復原中，對公司整體營運及財務之影響程度尚不致有…</a:t>
                       </a:r>
                     </a:p>
                   </a:txBody>
@@ -4502,7 +4746,7 @@
                           <a:ea typeface="Microsoft JhengHei"/>
                           <a:cs typeface="Microsoft JhengHei"/>
                         </a:rPr>
-                        <a:t>富爾特</a:t>
+                        <a:t>創新服務</a:t>
                       </a:r>
                     </a:p>
                   </a:txBody>
@@ -4526,7 +4770,7 @@
                           <a:ea typeface="Microsoft JhengHei"/>
                           <a:cs typeface="Microsoft JhengHei"/>
                         </a:rPr>
-                        <a:t>6136</a:t>
+                        <a:t>7828</a:t>
                       </a:r>
                     </a:p>
                   </a:txBody>
@@ -4550,7 +4794,7 @@
                           <a:ea typeface="Microsoft JhengHei"/>
                           <a:cs typeface="Microsoft JhengHei"/>
                         </a:rPr>
-                        <a:t>09/07</a:t>
+                        <a:t>09/02</a:t>
                       </a:r>
                     </a:p>
                   </a:txBody>
@@ -4624,7 +4868,7 @@
                           <a:ea typeface="Microsoft JhengHei"/>
                           <a:cs typeface="Microsoft JhengHei"/>
                         </a:rPr>
-                        <a:t>創新服務</a:t>
+                        <a:t>杭特</a:t>
                       </a:r>
                     </a:p>
                   </a:txBody>
@@ -4648,7 +4892,7 @@
                           <a:ea typeface="Microsoft JhengHei"/>
                           <a:cs typeface="Microsoft JhengHei"/>
                         </a:rPr>
-                        <a:t>7828</a:t>
+                        <a:t>3297</a:t>
                       </a:r>
                     </a:p>
                   </a:txBody>
@@ -4672,7 +4916,7 @@
                           <a:ea typeface="Microsoft JhengHei"/>
                           <a:cs typeface="Microsoft JhengHei"/>
                         </a:rPr>
-                        <a:t>09/02</a:t>
+                        <a:t>08/31</a:t>
                       </a:r>
                     </a:p>
                   </a:txBody>
@@ -4690,13 +4934,13 @@
                       <a:r>
                         <a:rPr sz="1150" b="1">
                           <a:solidFill>
-                            <a:srgbClr val="F4A261"/>
+                            <a:srgbClr val="E63946"/>
                           </a:solidFill>
                           <a:latin typeface="Microsoft JhengHei"/>
                           <a:ea typeface="Microsoft JhengHei"/>
                           <a:cs typeface="Microsoft JhengHei"/>
                         </a:rPr>
-                        <a:t>勒索病毒/加密</a:t>
+                        <a:t>駭客攻擊</a:t>
                       </a:r>
                     </a:p>
                   </a:txBody>
@@ -4720,7 +4964,7 @@
                           <a:ea typeface="Microsoft JhengHei"/>
                           <a:cs typeface="Microsoft JhengHei"/>
                         </a:rPr>
-                        <a:t>目前受影響之系統正陸續復原中，對公司整體營運及財務之影響程度尚不致有…</a:t>
+                        <a:t>本公司目前正積極會同技術專家協助調查，初步評估對公司營運暫無重大影響…</a:t>
                       </a:r>
                     </a:p>
                   </a:txBody>
@@ -4746,7 +4990,7 @@
                           <a:ea typeface="Microsoft JhengHei"/>
                           <a:cs typeface="Microsoft JhengHei"/>
                         </a:rPr>
-                        <a:t>杭特</a:t>
+                        <a:t>數字</a:t>
                       </a:r>
                     </a:p>
                   </a:txBody>
@@ -4770,7 +5014,7 @@
                           <a:ea typeface="Microsoft JhengHei"/>
                           <a:cs typeface="Microsoft JhengHei"/>
                         </a:rPr>
-                        <a:t>3297</a:t>
+                        <a:t>5287</a:t>
                       </a:r>
                     </a:p>
                   </a:txBody>
@@ -4794,7 +5038,7 @@
                           <a:ea typeface="Microsoft JhengHei"/>
                           <a:cs typeface="Microsoft JhengHei"/>
                         </a:rPr>
-                        <a:t>08/31</a:t>
+                        <a:t>08/20</a:t>
                       </a:r>
                     </a:p>
                   </a:txBody>
@@ -4842,7 +5086,7 @@
                           <a:ea typeface="Microsoft JhengHei"/>
                           <a:cs typeface="Microsoft JhengHei"/>
                         </a:rPr>
-                        <a:t>本公司目前正積極會同技術專家協助調查，初步評估對公司營運暫無重大影響…</a:t>
+                        <a:t>目前評估對公司營運尚無重大影響</a:t>
                       </a:r>
                     </a:p>
                   </a:txBody>
@@ -4868,7 +5112,7 @@
                           <a:ea typeface="Microsoft JhengHei"/>
                           <a:cs typeface="Microsoft JhengHei"/>
                         </a:rPr>
-                        <a:t>數字</a:t>
+                        <a:t>上詮</a:t>
                       </a:r>
                     </a:p>
                   </a:txBody>
@@ -4892,7 +5136,7 @@
                           <a:ea typeface="Microsoft JhengHei"/>
                           <a:cs typeface="Microsoft JhengHei"/>
                         </a:rPr>
-                        <a:t>5287</a:t>
+                        <a:t>3363</a:t>
                       </a:r>
                     </a:p>
                   </a:txBody>
@@ -4916,7 +5160,7 @@
                           <a:ea typeface="Microsoft JhengHei"/>
                           <a:cs typeface="Microsoft JhengHei"/>
                         </a:rPr>
-                        <a:t>08/20</a:t>
+                        <a:t>08/19</a:t>
                       </a:r>
                     </a:p>
                   </a:txBody>
@@ -4964,135 +5208,13 @@
                           <a:ea typeface="Microsoft JhengHei"/>
                           <a:cs typeface="Microsoft JhengHei"/>
                         </a:rPr>
-                        <a:t>目前評估對公司營運尚無重大影響</a:t>
+                        <a:t>目前評估對公司營運無重大影響。</a:t>
                       </a:r>
                     </a:p>
                   </a:txBody>
                   <a:tcPr anchor="ctr" marL="73152" marT="9144" marB="9144">
                     <a:solidFill>
                       <a:srgbClr val="EEF2F9"/>
-                    </a:solidFill>
-                  </a:tcPr>
-                </a:tc>
-              </a:tr>
-              <a:tr h="384048">
-                <a:tc>
-                  <a:txBody>
-                    <a:bodyPr/>
-                    <a:lstStyle/>
-                    <a:p>
-                      <a:r>
-                        <a:rPr sz="1150" b="0">
-                          <a:solidFill>
-                            <a:srgbClr val="1A2233"/>
-                          </a:solidFill>
-                          <a:latin typeface="Microsoft JhengHei"/>
-                          <a:ea typeface="Microsoft JhengHei"/>
-                          <a:cs typeface="Microsoft JhengHei"/>
-                        </a:rPr>
-                        <a:t>上詮</a:t>
-                      </a:r>
-                    </a:p>
-                  </a:txBody>
-                  <a:tcPr anchor="ctr" marL="73152" marT="9144" marB="9144">
-                    <a:solidFill>
-                      <a:srgbClr val="FFFFFF"/>
-                    </a:solidFill>
-                  </a:tcPr>
-                </a:tc>
-                <a:tc>
-                  <a:txBody>
-                    <a:bodyPr/>
-                    <a:lstStyle/>
-                    <a:p>
-                      <a:r>
-                        <a:rPr sz="1150" b="0">
-                          <a:solidFill>
-                            <a:srgbClr val="1A2233"/>
-                          </a:solidFill>
-                          <a:latin typeface="Microsoft JhengHei"/>
-                          <a:ea typeface="Microsoft JhengHei"/>
-                          <a:cs typeface="Microsoft JhengHei"/>
-                        </a:rPr>
-                        <a:t>3363</a:t>
-                      </a:r>
-                    </a:p>
-                  </a:txBody>
-                  <a:tcPr anchor="ctr" marL="73152" marT="9144" marB="9144">
-                    <a:solidFill>
-                      <a:srgbClr val="FFFFFF"/>
-                    </a:solidFill>
-                  </a:tcPr>
-                </a:tc>
-                <a:tc>
-                  <a:txBody>
-                    <a:bodyPr/>
-                    <a:lstStyle/>
-                    <a:p>
-                      <a:r>
-                        <a:rPr sz="1150" b="0">
-                          <a:solidFill>
-                            <a:srgbClr val="1A2233"/>
-                          </a:solidFill>
-                          <a:latin typeface="Microsoft JhengHei"/>
-                          <a:ea typeface="Microsoft JhengHei"/>
-                          <a:cs typeface="Microsoft JhengHei"/>
-                        </a:rPr>
-                        <a:t>08/19</a:t>
-                      </a:r>
-                    </a:p>
-                  </a:txBody>
-                  <a:tcPr anchor="ctr" marL="73152" marT="9144" marB="9144">
-                    <a:solidFill>
-                      <a:srgbClr val="FFFFFF"/>
-                    </a:solidFill>
-                  </a:tcPr>
-                </a:tc>
-                <a:tc>
-                  <a:txBody>
-                    <a:bodyPr/>
-                    <a:lstStyle/>
-                    <a:p>
-                      <a:r>
-                        <a:rPr sz="1150" b="1">
-                          <a:solidFill>
-                            <a:srgbClr val="E63946"/>
-                          </a:solidFill>
-                          <a:latin typeface="Microsoft JhengHei"/>
-                          <a:ea typeface="Microsoft JhengHei"/>
-                          <a:cs typeface="Microsoft JhengHei"/>
-                        </a:rPr>
-                        <a:t>駭客攻擊</a:t>
-                      </a:r>
-                    </a:p>
-                  </a:txBody>
-                  <a:tcPr anchor="ctr" marL="73152" marT="9144" marB="9144">
-                    <a:solidFill>
-                      <a:srgbClr val="FFFFFF"/>
-                    </a:solidFill>
-                  </a:tcPr>
-                </a:tc>
-                <a:tc>
-                  <a:txBody>
-                    <a:bodyPr/>
-                    <a:lstStyle/>
-                    <a:p>
-                      <a:r>
-                        <a:rPr sz="1150" b="0">
-                          <a:solidFill>
-                            <a:srgbClr val="1A2233"/>
-                          </a:solidFill>
-                          <a:latin typeface="Microsoft JhengHei"/>
-                          <a:ea typeface="Microsoft JhengHei"/>
-                          <a:cs typeface="Microsoft JhengHei"/>
-                        </a:rPr>
-                        <a:t>目前評估對公司營運無重大影響。</a:t>
-                      </a:r>
-                    </a:p>
-                  </a:txBody>
-                  <a:tcPr anchor="ctr" marL="73152" marT="9144" marB="9144">
-                    <a:solidFill>
-                      <a:srgbClr val="FFFFFF"/>
                     </a:solidFill>
                   </a:tcPr>
                 </a:tc>
@@ -5652,7 +5774,7 @@
                 <a:ea typeface="Microsoft JhengHei"/>
                 <a:cs typeface="Microsoft JhengHei"/>
               </a:rPr>
-              <a:t>2 起</a:t>
+              <a:t>3 起</a:t>
             </a:r>
           </a:p>
         </p:txBody>
@@ -5689,7 +5811,7 @@
                 <a:ea typeface="Microsoft JhengHei"/>
                 <a:cs typeface="Microsoft JhengHei"/>
               </a:rPr>
-              <a:t>富爾特、創新服務</a:t>
+              <a:t>崴寶、富爾特、創新服務</a:t>
             </a:r>
           </a:p>
         </p:txBody>
@@ -5877,7 +5999,7 @@
         </p:nvGraphicFramePr>
         <p:xfrm>
           <a:off x="548640" y="1600200"/>
-          <a:ext cx="10789920" cy="3657600"/>
+          <a:ext cx="10789920" cy="4114800"/>
         </p:xfrm>
         <a:graphic>
           <a:graphicData uri="http://schemas.openxmlformats.org/drawingml/2006/table">
@@ -6029,7 +6151,7 @@
                           <a:ea typeface="Microsoft JhengHei"/>
                           <a:cs typeface="Microsoft JhengHei"/>
                         </a:rPr>
-                        <a:t>達爾膚</a:t>
+                        <a:t>崴寶</a:t>
                       </a:r>
                     </a:p>
                   </a:txBody>
@@ -6053,7 +6175,251 @@
                           <a:ea typeface="Microsoft JhengHei"/>
                           <a:cs typeface="Microsoft JhengHei"/>
                         </a:rPr>
+                        <a:t>7744</a:t>
+                      </a:r>
+                    </a:p>
+                  </a:txBody>
+                  <a:tcPr anchor="ctr" marL="73152" marT="9144" marB="9144">
+                    <a:solidFill>
+                      <a:srgbClr val="FFFFFF"/>
+                    </a:solidFill>
+                  </a:tcPr>
+                </a:tc>
+                <a:tc>
+                  <a:txBody>
+                    <a:bodyPr/>
+                    <a:lstStyle/>
+                    <a:p>
+                      <a:r>
+                        <a:rPr sz="1150" b="1">
+                          <a:solidFill>
+                            <a:srgbClr val="F4A261"/>
+                          </a:solidFill>
+                          <a:latin typeface="Microsoft JhengHei"/>
+                          <a:ea typeface="Microsoft JhengHei"/>
+                          <a:cs typeface="Microsoft JhengHei"/>
+                        </a:rPr>
+                        <a:t>勒索病毒/加密</a:t>
+                      </a:r>
+                    </a:p>
+                  </a:txBody>
+                  <a:tcPr anchor="ctr" marL="73152" marT="9144" marB="9144">
+                    <a:solidFill>
+                      <a:srgbClr val="FFFFFF"/>
+                    </a:solidFill>
+                  </a:tcPr>
+                </a:tc>
+                <a:tc>
+                  <a:txBody>
+                    <a:bodyPr/>
+                    <a:lstStyle/>
+                    <a:p>
+                      <a:r>
+                        <a:rPr sz="1150" b="0">
+                          <a:solidFill>
+                            <a:srgbClr val="1A2233"/>
+                          </a:solidFill>
+                          <a:latin typeface="Microsoft JhengHei"/>
+                          <a:ea typeface="Microsoft JhengHei"/>
+                          <a:cs typeface="Microsoft JhengHei"/>
+                        </a:rPr>
+                        <a:t>安永聯合會計師事務所</a:t>
+                      </a:r>
+                    </a:p>
+                  </a:txBody>
+                  <a:tcPr anchor="ctr" marL="73152" marT="9144" marB="9144">
+                    <a:solidFill>
+                      <a:srgbClr val="FFFFFF"/>
+                    </a:solidFill>
+                  </a:tcPr>
+                </a:tc>
+                <a:tc>
+                  <a:txBody>
+                    <a:bodyPr/>
+                    <a:lstStyle/>
+                    <a:p>
+                      <a:r>
+                        <a:rPr sz="1150" b="0">
+                          <a:solidFill>
+                            <a:srgbClr val="1A2233"/>
+                          </a:solidFill>
+                          <a:latin typeface="Microsoft JhengHei"/>
+                          <a:ea typeface="Microsoft JhengHei"/>
+                          <a:cs typeface="Microsoft JhengHei"/>
+                        </a:rPr>
+                        <a:t>黃宇廷、黃子評</a:t>
+                      </a:r>
+                    </a:p>
+                  </a:txBody>
+                  <a:tcPr anchor="ctr" marL="73152" marT="9144" marB="9144">
+                    <a:solidFill>
+                      <a:srgbClr val="FFFFFF"/>
+                    </a:solidFill>
+                  </a:tcPr>
+                </a:tc>
+              </a:tr>
+              <a:tr h="457200">
+                <a:tc>
+                  <a:txBody>
+                    <a:bodyPr/>
+                    <a:lstStyle/>
+                    <a:p>
+                      <a:r>
+                        <a:rPr sz="1150" b="0">
+                          <a:solidFill>
+                            <a:srgbClr val="1A2233"/>
+                          </a:solidFill>
+                          <a:latin typeface="Microsoft JhengHei"/>
+                          <a:ea typeface="Microsoft JhengHei"/>
+                          <a:cs typeface="Microsoft JhengHei"/>
+                        </a:rPr>
+                        <a:t>達爾膚</a:t>
+                      </a:r>
+                    </a:p>
+                  </a:txBody>
+                  <a:tcPr anchor="ctr" marL="73152" marT="9144" marB="9144">
+                    <a:solidFill>
+                      <a:srgbClr val="EEF2F9"/>
+                    </a:solidFill>
+                  </a:tcPr>
+                </a:tc>
+                <a:tc>
+                  <a:txBody>
+                    <a:bodyPr/>
+                    <a:lstStyle/>
+                    <a:p>
+                      <a:r>
+                        <a:rPr sz="1150" b="0">
+                          <a:solidFill>
+                            <a:srgbClr val="1A2233"/>
+                          </a:solidFill>
+                          <a:latin typeface="Microsoft JhengHei"/>
+                          <a:ea typeface="Microsoft JhengHei"/>
+                          <a:cs typeface="Microsoft JhengHei"/>
+                        </a:rPr>
                         <a:t>6523</a:t>
+                      </a:r>
+                    </a:p>
+                  </a:txBody>
+                  <a:tcPr anchor="ctr" marL="73152" marT="9144" marB="9144">
+                    <a:solidFill>
+                      <a:srgbClr val="EEF2F9"/>
+                    </a:solidFill>
+                  </a:tcPr>
+                </a:tc>
+                <a:tc>
+                  <a:txBody>
+                    <a:bodyPr/>
+                    <a:lstStyle/>
+                    <a:p>
+                      <a:r>
+                        <a:rPr sz="1150" b="1">
+                          <a:solidFill>
+                            <a:srgbClr val="E63946"/>
+                          </a:solidFill>
+                          <a:latin typeface="Microsoft JhengHei"/>
+                          <a:ea typeface="Microsoft JhengHei"/>
+                          <a:cs typeface="Microsoft JhengHei"/>
+                        </a:rPr>
+                        <a:t>駭客攻擊</a:t>
+                      </a:r>
+                    </a:p>
+                  </a:txBody>
+                  <a:tcPr anchor="ctr" marL="73152" marT="9144" marB="9144">
+                    <a:solidFill>
+                      <a:srgbClr val="EEF2F9"/>
+                    </a:solidFill>
+                  </a:tcPr>
+                </a:tc>
+                <a:tc>
+                  <a:txBody>
+                    <a:bodyPr/>
+                    <a:lstStyle/>
+                    <a:p>
+                      <a:r>
+                        <a:rPr sz="1150" b="0">
+                          <a:solidFill>
+                            <a:srgbClr val="1A2233"/>
+                          </a:solidFill>
+                          <a:latin typeface="Microsoft JhengHei"/>
+                          <a:ea typeface="Microsoft JhengHei"/>
+                          <a:cs typeface="Microsoft JhengHei"/>
+                        </a:rPr>
+                        <a:t>資誠聯合會計師事務所</a:t>
+                      </a:r>
+                    </a:p>
+                  </a:txBody>
+                  <a:tcPr anchor="ctr" marL="73152" marT="9144" marB="9144">
+                    <a:solidFill>
+                      <a:srgbClr val="EEF2F9"/>
+                    </a:solidFill>
+                  </a:tcPr>
+                </a:tc>
+                <a:tc>
+                  <a:txBody>
+                    <a:bodyPr/>
+                    <a:lstStyle/>
+                    <a:p>
+                      <a:r>
+                        <a:rPr sz="1150" b="0">
+                          <a:solidFill>
+                            <a:srgbClr val="1A2233"/>
+                          </a:solidFill>
+                          <a:latin typeface="Microsoft JhengHei"/>
+                          <a:ea typeface="Microsoft JhengHei"/>
+                          <a:cs typeface="Microsoft JhengHei"/>
+                        </a:rPr>
+                        <a:t>于智帆、葉翠苗</a:t>
+                      </a:r>
+                    </a:p>
+                  </a:txBody>
+                  <a:tcPr anchor="ctr" marL="73152" marT="9144" marB="9144">
+                    <a:solidFill>
+                      <a:srgbClr val="EEF2F9"/>
+                    </a:solidFill>
+                  </a:tcPr>
+                </a:tc>
+              </a:tr>
+              <a:tr h="457200">
+                <a:tc>
+                  <a:txBody>
+                    <a:bodyPr/>
+                    <a:lstStyle/>
+                    <a:p>
+                      <a:r>
+                        <a:rPr sz="1150" b="0">
+                          <a:solidFill>
+                            <a:srgbClr val="1A2233"/>
+                          </a:solidFill>
+                          <a:latin typeface="Microsoft JhengHei"/>
+                          <a:ea typeface="Microsoft JhengHei"/>
+                          <a:cs typeface="Microsoft JhengHei"/>
+                        </a:rPr>
+                        <a:t>大車隊</a:t>
+                      </a:r>
+                    </a:p>
+                  </a:txBody>
+                  <a:tcPr anchor="ctr" marL="73152" marT="9144" marB="9144">
+                    <a:solidFill>
+                      <a:srgbClr val="FFFFFF"/>
+                    </a:solidFill>
+                  </a:tcPr>
+                </a:tc>
+                <a:tc>
+                  <a:txBody>
+                    <a:bodyPr/>
+                    <a:lstStyle/>
+                    <a:p>
+                      <a:r>
+                        <a:rPr sz="1150" b="0">
+                          <a:solidFill>
+                            <a:srgbClr val="1A2233"/>
+                          </a:solidFill>
+                          <a:latin typeface="Microsoft JhengHei"/>
+                          <a:ea typeface="Microsoft JhengHei"/>
+                          <a:cs typeface="Microsoft JhengHei"/>
+                        </a:rPr>
+                        <a:t>2640</a:t>
                       </a:r>
                     </a:p>
                   </a:txBody>
@@ -6125,7 +6491,7 @@
                           <a:ea typeface="Microsoft JhengHei"/>
                           <a:cs typeface="Microsoft JhengHei"/>
                         </a:rPr>
-                        <a:t>于智帆、葉翠苗</a:t>
+                        <a:t>支秉鈞、涂展源</a:t>
                       </a:r>
                     </a:p>
                   </a:txBody>
@@ -6151,7 +6517,7 @@
                           <a:ea typeface="Microsoft JhengHei"/>
                           <a:cs typeface="Microsoft JhengHei"/>
                         </a:rPr>
-                        <a:t>大車隊</a:t>
+                        <a:t>富爾特</a:t>
                       </a:r>
                     </a:p>
                   </a:txBody>
@@ -6175,7 +6541,251 @@
                           <a:ea typeface="Microsoft JhengHei"/>
                           <a:cs typeface="Microsoft JhengHei"/>
                         </a:rPr>
-                        <a:t>2640</a:t>
+                        <a:t>6136</a:t>
+                      </a:r>
+                    </a:p>
+                  </a:txBody>
+                  <a:tcPr anchor="ctr" marL="73152" marT="9144" marB="9144">
+                    <a:solidFill>
+                      <a:srgbClr val="EEF2F9"/>
+                    </a:solidFill>
+                  </a:tcPr>
+                </a:tc>
+                <a:tc>
+                  <a:txBody>
+                    <a:bodyPr/>
+                    <a:lstStyle/>
+                    <a:p>
+                      <a:r>
+                        <a:rPr sz="1150" b="1">
+                          <a:solidFill>
+                            <a:srgbClr val="F4A261"/>
+                          </a:solidFill>
+                          <a:latin typeface="Microsoft JhengHei"/>
+                          <a:ea typeface="Microsoft JhengHei"/>
+                          <a:cs typeface="Microsoft JhengHei"/>
+                        </a:rPr>
+                        <a:t>勒索病毒/加密</a:t>
+                      </a:r>
+                    </a:p>
+                  </a:txBody>
+                  <a:tcPr anchor="ctr" marL="73152" marT="9144" marB="9144">
+                    <a:solidFill>
+                      <a:srgbClr val="EEF2F9"/>
+                    </a:solidFill>
+                  </a:tcPr>
+                </a:tc>
+                <a:tc>
+                  <a:txBody>
+                    <a:bodyPr/>
+                    <a:lstStyle/>
+                    <a:p>
+                      <a:r>
+                        <a:rPr sz="1150" b="0">
+                          <a:solidFill>
+                            <a:srgbClr val="1A2233"/>
+                          </a:solidFill>
+                          <a:latin typeface="Microsoft JhengHei"/>
+                          <a:ea typeface="Microsoft JhengHei"/>
+                          <a:cs typeface="Microsoft JhengHei"/>
+                        </a:rPr>
+                        <a:t>安永聯合會計師事務所</a:t>
+                      </a:r>
+                    </a:p>
+                  </a:txBody>
+                  <a:tcPr anchor="ctr" marL="73152" marT="9144" marB="9144">
+                    <a:solidFill>
+                      <a:srgbClr val="EEF2F9"/>
+                    </a:solidFill>
+                  </a:tcPr>
+                </a:tc>
+                <a:tc>
+                  <a:txBody>
+                    <a:bodyPr/>
+                    <a:lstStyle/>
+                    <a:p>
+                      <a:r>
+                        <a:rPr sz="1150" b="0">
+                          <a:solidFill>
+                            <a:srgbClr val="1A2233"/>
+                          </a:solidFill>
+                          <a:latin typeface="Microsoft JhengHei"/>
+                          <a:ea typeface="Microsoft JhengHei"/>
+                          <a:cs typeface="Microsoft JhengHei"/>
+                        </a:rPr>
+                        <a:t>許新民、余倩如</a:t>
+                      </a:r>
+                    </a:p>
+                  </a:txBody>
+                  <a:tcPr anchor="ctr" marL="73152" marT="9144" marB="9144">
+                    <a:solidFill>
+                      <a:srgbClr val="EEF2F9"/>
+                    </a:solidFill>
+                  </a:tcPr>
+                </a:tc>
+              </a:tr>
+              <a:tr h="457200">
+                <a:tc>
+                  <a:txBody>
+                    <a:bodyPr/>
+                    <a:lstStyle/>
+                    <a:p>
+                      <a:r>
+                        <a:rPr sz="1150" b="0">
+                          <a:solidFill>
+                            <a:srgbClr val="1A2233"/>
+                          </a:solidFill>
+                          <a:latin typeface="Microsoft JhengHei"/>
+                          <a:ea typeface="Microsoft JhengHei"/>
+                          <a:cs typeface="Microsoft JhengHei"/>
+                        </a:rPr>
+                        <a:t>創新服務</a:t>
+                      </a:r>
+                    </a:p>
+                  </a:txBody>
+                  <a:tcPr anchor="ctr" marL="73152" marT="9144" marB="9144">
+                    <a:solidFill>
+                      <a:srgbClr val="FFFFFF"/>
+                    </a:solidFill>
+                  </a:tcPr>
+                </a:tc>
+                <a:tc>
+                  <a:txBody>
+                    <a:bodyPr/>
+                    <a:lstStyle/>
+                    <a:p>
+                      <a:r>
+                        <a:rPr sz="1150" b="0">
+                          <a:solidFill>
+                            <a:srgbClr val="1A2233"/>
+                          </a:solidFill>
+                          <a:latin typeface="Microsoft JhengHei"/>
+                          <a:ea typeface="Microsoft JhengHei"/>
+                          <a:cs typeface="Microsoft JhengHei"/>
+                        </a:rPr>
+                        <a:t>7828</a:t>
+                      </a:r>
+                    </a:p>
+                  </a:txBody>
+                  <a:tcPr anchor="ctr" marL="73152" marT="9144" marB="9144">
+                    <a:solidFill>
+                      <a:srgbClr val="FFFFFF"/>
+                    </a:solidFill>
+                  </a:tcPr>
+                </a:tc>
+                <a:tc>
+                  <a:txBody>
+                    <a:bodyPr/>
+                    <a:lstStyle/>
+                    <a:p>
+                      <a:r>
+                        <a:rPr sz="1150" b="1">
+                          <a:solidFill>
+                            <a:srgbClr val="F4A261"/>
+                          </a:solidFill>
+                          <a:latin typeface="Microsoft JhengHei"/>
+                          <a:ea typeface="Microsoft JhengHei"/>
+                          <a:cs typeface="Microsoft JhengHei"/>
+                        </a:rPr>
+                        <a:t>勒索病毒/加密</a:t>
+                      </a:r>
+                    </a:p>
+                  </a:txBody>
+                  <a:tcPr anchor="ctr" marL="73152" marT="9144" marB="9144">
+                    <a:solidFill>
+                      <a:srgbClr val="FFFFFF"/>
+                    </a:solidFill>
+                  </a:tcPr>
+                </a:tc>
+                <a:tc>
+                  <a:txBody>
+                    <a:bodyPr/>
+                    <a:lstStyle/>
+                    <a:p>
+                      <a:r>
+                        <a:rPr sz="1150" b="0">
+                          <a:solidFill>
+                            <a:srgbClr val="1A2233"/>
+                          </a:solidFill>
+                          <a:latin typeface="Microsoft JhengHei"/>
+                          <a:ea typeface="Microsoft JhengHei"/>
+                          <a:cs typeface="Microsoft JhengHei"/>
+                        </a:rPr>
+                        <a:t>資誠聯合會計師事務所</a:t>
+                      </a:r>
+                    </a:p>
+                  </a:txBody>
+                  <a:tcPr anchor="ctr" marL="73152" marT="9144" marB="9144">
+                    <a:solidFill>
+                      <a:srgbClr val="FFFFFF"/>
+                    </a:solidFill>
+                  </a:tcPr>
+                </a:tc>
+                <a:tc>
+                  <a:txBody>
+                    <a:bodyPr/>
+                    <a:lstStyle/>
+                    <a:p>
+                      <a:r>
+                        <a:rPr sz="1150" b="0">
+                          <a:solidFill>
+                            <a:srgbClr val="1A2233"/>
+                          </a:solidFill>
+                          <a:latin typeface="Microsoft JhengHei"/>
+                          <a:ea typeface="Microsoft JhengHei"/>
+                          <a:cs typeface="Microsoft JhengHei"/>
+                        </a:rPr>
+                        <a:t>蔡欣怡、白淑蒨</a:t>
+                      </a:r>
+                    </a:p>
+                  </a:txBody>
+                  <a:tcPr anchor="ctr" marL="73152" marT="9144" marB="9144">
+                    <a:solidFill>
+                      <a:srgbClr val="FFFFFF"/>
+                    </a:solidFill>
+                  </a:tcPr>
+                </a:tc>
+              </a:tr>
+              <a:tr h="457200">
+                <a:tc>
+                  <a:txBody>
+                    <a:bodyPr/>
+                    <a:lstStyle/>
+                    <a:p>
+                      <a:r>
+                        <a:rPr sz="1150" b="0">
+                          <a:solidFill>
+                            <a:srgbClr val="1A2233"/>
+                          </a:solidFill>
+                          <a:latin typeface="Microsoft JhengHei"/>
+                          <a:ea typeface="Microsoft JhengHei"/>
+                          <a:cs typeface="Microsoft JhengHei"/>
+                        </a:rPr>
+                        <a:t>杭特</a:t>
+                      </a:r>
+                    </a:p>
+                  </a:txBody>
+                  <a:tcPr anchor="ctr" marL="73152" marT="9144" marB="9144">
+                    <a:solidFill>
+                      <a:srgbClr val="EEF2F9"/>
+                    </a:solidFill>
+                  </a:tcPr>
+                </a:tc>
+                <a:tc>
+                  <a:txBody>
+                    <a:bodyPr/>
+                    <a:lstStyle/>
+                    <a:p>
+                      <a:r>
+                        <a:rPr sz="1150" b="0">
+                          <a:solidFill>
+                            <a:srgbClr val="1A2233"/>
+                          </a:solidFill>
+                          <a:latin typeface="Microsoft JhengHei"/>
+                          <a:ea typeface="Microsoft JhengHei"/>
+                          <a:cs typeface="Microsoft JhengHei"/>
+                        </a:rPr>
+                        <a:t>3297</a:t>
                       </a:r>
                     </a:p>
                   </a:txBody>
@@ -6247,7 +6857,7 @@
                           <a:ea typeface="Microsoft JhengHei"/>
                           <a:cs typeface="Microsoft JhengHei"/>
                         </a:rPr>
-                        <a:t>支秉鈞、涂展源</a:t>
+                        <a:t>陳憲正、林瑟凱</a:t>
                       </a:r>
                     </a:p>
                   </a:txBody>
@@ -6273,7 +6883,7 @@
                           <a:ea typeface="Microsoft JhengHei"/>
                           <a:cs typeface="Microsoft JhengHei"/>
                         </a:rPr>
-                        <a:t>富爾特</a:t>
+                        <a:t>數字</a:t>
                       </a:r>
                     </a:p>
                   </a:txBody>
@@ -6297,7 +6907,7 @@
                           <a:ea typeface="Microsoft JhengHei"/>
                           <a:cs typeface="Microsoft JhengHei"/>
                         </a:rPr>
-                        <a:t>6136</a:t>
+                        <a:t>5287</a:t>
                       </a:r>
                     </a:p>
                   </a:txBody>
@@ -6315,13 +6925,13 @@
                       <a:r>
                         <a:rPr sz="1150" b="1">
                           <a:solidFill>
-                            <a:srgbClr val="F4A261"/>
+                            <a:srgbClr val="E63946"/>
                           </a:solidFill>
                           <a:latin typeface="Microsoft JhengHei"/>
                           <a:ea typeface="Microsoft JhengHei"/>
                           <a:cs typeface="Microsoft JhengHei"/>
                         </a:rPr>
-                        <a:t>勒索病毒/加密</a:t>
+                        <a:t>駭客攻擊</a:t>
                       </a:r>
                     </a:p>
                   </a:txBody>
@@ -6345,7 +6955,7 @@
                           <a:ea typeface="Microsoft JhengHei"/>
                           <a:cs typeface="Microsoft JhengHei"/>
                         </a:rPr>
-                        <a:t>安永聯合會計師事務所</a:t>
+                        <a:t>安侯建業聯合會計師事務所</a:t>
                       </a:r>
                     </a:p>
                   </a:txBody>
@@ -6369,7 +6979,7 @@
                           <a:ea typeface="Microsoft JhengHei"/>
                           <a:cs typeface="Microsoft JhengHei"/>
                         </a:rPr>
-                        <a:t>許新民、余倩如</a:t>
+                        <a:t>羅瑞芝、余聖河</a:t>
                       </a:r>
                     </a:p>
                   </a:txBody>
@@ -6395,7 +7005,7 @@
                           <a:ea typeface="Microsoft JhengHei"/>
                           <a:cs typeface="Microsoft JhengHei"/>
                         </a:rPr>
-                        <a:t>創新服務</a:t>
+                        <a:t>上詮</a:t>
                       </a:r>
                     </a:p>
                   </a:txBody>
@@ -6419,7 +7029,7 @@
                           <a:ea typeface="Microsoft JhengHei"/>
                           <a:cs typeface="Microsoft JhengHei"/>
                         </a:rPr>
-                        <a:t>7828</a:t>
+                        <a:t>3363</a:t>
                       </a:r>
                     </a:p>
                   </a:txBody>
@@ -6437,13 +7047,13 @@
                       <a:r>
                         <a:rPr sz="1150" b="1">
                           <a:solidFill>
-                            <a:srgbClr val="F4A261"/>
+                            <a:srgbClr val="E63946"/>
                           </a:solidFill>
                           <a:latin typeface="Microsoft JhengHei"/>
                           <a:ea typeface="Microsoft JhengHei"/>
                           <a:cs typeface="Microsoft JhengHei"/>
                         </a:rPr>
-                        <a:t>勒索病毒/加密</a:t>
+                        <a:t>駭客攻擊</a:t>
                       </a:r>
                     </a:p>
                   </a:txBody>
@@ -6491,379 +7101,13 @@
                           <a:ea typeface="Microsoft JhengHei"/>
                           <a:cs typeface="Microsoft JhengHei"/>
                         </a:rPr>
-                        <a:t>蔡欣怡、白淑蒨</a:t>
+                        <a:t>白淑蒨、李典易</a:t>
                       </a:r>
                     </a:p>
                   </a:txBody>
                   <a:tcPr anchor="ctr" marL="73152" marT="9144" marB="9144">
                     <a:solidFill>
                       <a:srgbClr val="EEF2F9"/>
-                    </a:solidFill>
-                  </a:tcPr>
-                </a:tc>
-              </a:tr>
-              <a:tr h="457200">
-                <a:tc>
-                  <a:txBody>
-                    <a:bodyPr/>
-                    <a:lstStyle/>
-                    <a:p>
-                      <a:r>
-                        <a:rPr sz="1150" b="0">
-                          <a:solidFill>
-                            <a:srgbClr val="1A2233"/>
-                          </a:solidFill>
-                          <a:latin typeface="Microsoft JhengHei"/>
-                          <a:ea typeface="Microsoft JhengHei"/>
-                          <a:cs typeface="Microsoft JhengHei"/>
-                        </a:rPr>
-                        <a:t>杭特</a:t>
-                      </a:r>
-                    </a:p>
-                  </a:txBody>
-                  <a:tcPr anchor="ctr" marL="73152" marT="9144" marB="9144">
-                    <a:solidFill>
-                      <a:srgbClr val="FFFFFF"/>
-                    </a:solidFill>
-                  </a:tcPr>
-                </a:tc>
-                <a:tc>
-                  <a:txBody>
-                    <a:bodyPr/>
-                    <a:lstStyle/>
-                    <a:p>
-                      <a:r>
-                        <a:rPr sz="1150" b="0">
-                          <a:solidFill>
-                            <a:srgbClr val="1A2233"/>
-                          </a:solidFill>
-                          <a:latin typeface="Microsoft JhengHei"/>
-                          <a:ea typeface="Microsoft JhengHei"/>
-                          <a:cs typeface="Microsoft JhengHei"/>
-                        </a:rPr>
-                        <a:t>3297</a:t>
-                      </a:r>
-                    </a:p>
-                  </a:txBody>
-                  <a:tcPr anchor="ctr" marL="73152" marT="9144" marB="9144">
-                    <a:solidFill>
-                      <a:srgbClr val="FFFFFF"/>
-                    </a:solidFill>
-                  </a:tcPr>
-                </a:tc>
-                <a:tc>
-                  <a:txBody>
-                    <a:bodyPr/>
-                    <a:lstStyle/>
-                    <a:p>
-                      <a:r>
-                        <a:rPr sz="1150" b="1">
-                          <a:solidFill>
-                            <a:srgbClr val="E63946"/>
-                          </a:solidFill>
-                          <a:latin typeface="Microsoft JhengHei"/>
-                          <a:ea typeface="Microsoft JhengHei"/>
-                          <a:cs typeface="Microsoft JhengHei"/>
-                        </a:rPr>
-                        <a:t>駭客攻擊</a:t>
-                      </a:r>
-                    </a:p>
-                  </a:txBody>
-                  <a:tcPr anchor="ctr" marL="73152" marT="9144" marB="9144">
-                    <a:solidFill>
-                      <a:srgbClr val="FFFFFF"/>
-                    </a:solidFill>
-                  </a:tcPr>
-                </a:tc>
-                <a:tc>
-                  <a:txBody>
-                    <a:bodyPr/>
-                    <a:lstStyle/>
-                    <a:p>
-                      <a:r>
-                        <a:rPr sz="1150" b="0">
-                          <a:solidFill>
-                            <a:srgbClr val="1A2233"/>
-                          </a:solidFill>
-                          <a:latin typeface="Microsoft JhengHei"/>
-                          <a:ea typeface="Microsoft JhengHei"/>
-                          <a:cs typeface="Microsoft JhengHei"/>
-                        </a:rPr>
-                        <a:t>資誠聯合會計師事務所</a:t>
-                      </a:r>
-                    </a:p>
-                  </a:txBody>
-                  <a:tcPr anchor="ctr" marL="73152" marT="9144" marB="9144">
-                    <a:solidFill>
-                      <a:srgbClr val="FFFFFF"/>
-                    </a:solidFill>
-                  </a:tcPr>
-                </a:tc>
-                <a:tc>
-                  <a:txBody>
-                    <a:bodyPr/>
-                    <a:lstStyle/>
-                    <a:p>
-                      <a:r>
-                        <a:rPr sz="1150" b="0">
-                          <a:solidFill>
-                            <a:srgbClr val="1A2233"/>
-                          </a:solidFill>
-                          <a:latin typeface="Microsoft JhengHei"/>
-                          <a:ea typeface="Microsoft JhengHei"/>
-                          <a:cs typeface="Microsoft JhengHei"/>
-                        </a:rPr>
-                        <a:t>陳憲正、林瑟凱</a:t>
-                      </a:r>
-                    </a:p>
-                  </a:txBody>
-                  <a:tcPr anchor="ctr" marL="73152" marT="9144" marB="9144">
-                    <a:solidFill>
-                      <a:srgbClr val="FFFFFF"/>
-                    </a:solidFill>
-                  </a:tcPr>
-                </a:tc>
-              </a:tr>
-              <a:tr h="457200">
-                <a:tc>
-                  <a:txBody>
-                    <a:bodyPr/>
-                    <a:lstStyle/>
-                    <a:p>
-                      <a:r>
-                        <a:rPr sz="1150" b="0">
-                          <a:solidFill>
-                            <a:srgbClr val="1A2233"/>
-                          </a:solidFill>
-                          <a:latin typeface="Microsoft JhengHei"/>
-                          <a:ea typeface="Microsoft JhengHei"/>
-                          <a:cs typeface="Microsoft JhengHei"/>
-                        </a:rPr>
-                        <a:t>數字</a:t>
-                      </a:r>
-                    </a:p>
-                  </a:txBody>
-                  <a:tcPr anchor="ctr" marL="73152" marT="9144" marB="9144">
-                    <a:solidFill>
-                      <a:srgbClr val="EEF2F9"/>
-                    </a:solidFill>
-                  </a:tcPr>
-                </a:tc>
-                <a:tc>
-                  <a:txBody>
-                    <a:bodyPr/>
-                    <a:lstStyle/>
-                    <a:p>
-                      <a:r>
-                        <a:rPr sz="1150" b="0">
-                          <a:solidFill>
-                            <a:srgbClr val="1A2233"/>
-                          </a:solidFill>
-                          <a:latin typeface="Microsoft JhengHei"/>
-                          <a:ea typeface="Microsoft JhengHei"/>
-                          <a:cs typeface="Microsoft JhengHei"/>
-                        </a:rPr>
-                        <a:t>5287</a:t>
-                      </a:r>
-                    </a:p>
-                  </a:txBody>
-                  <a:tcPr anchor="ctr" marL="73152" marT="9144" marB="9144">
-                    <a:solidFill>
-                      <a:srgbClr val="EEF2F9"/>
-                    </a:solidFill>
-                  </a:tcPr>
-                </a:tc>
-                <a:tc>
-                  <a:txBody>
-                    <a:bodyPr/>
-                    <a:lstStyle/>
-                    <a:p>
-                      <a:r>
-                        <a:rPr sz="1150" b="1">
-                          <a:solidFill>
-                            <a:srgbClr val="E63946"/>
-                          </a:solidFill>
-                          <a:latin typeface="Microsoft JhengHei"/>
-                          <a:ea typeface="Microsoft JhengHei"/>
-                          <a:cs typeface="Microsoft JhengHei"/>
-                        </a:rPr>
-                        <a:t>駭客攻擊</a:t>
-                      </a:r>
-                    </a:p>
-                  </a:txBody>
-                  <a:tcPr anchor="ctr" marL="73152" marT="9144" marB="9144">
-                    <a:solidFill>
-                      <a:srgbClr val="EEF2F9"/>
-                    </a:solidFill>
-                  </a:tcPr>
-                </a:tc>
-                <a:tc>
-                  <a:txBody>
-                    <a:bodyPr/>
-                    <a:lstStyle/>
-                    <a:p>
-                      <a:r>
-                        <a:rPr sz="1150" b="0">
-                          <a:solidFill>
-                            <a:srgbClr val="1A2233"/>
-                          </a:solidFill>
-                          <a:latin typeface="Microsoft JhengHei"/>
-                          <a:ea typeface="Microsoft JhengHei"/>
-                          <a:cs typeface="Microsoft JhengHei"/>
-                        </a:rPr>
-                        <a:t>安侯建業聯合會計師事務所</a:t>
-                      </a:r>
-                    </a:p>
-                  </a:txBody>
-                  <a:tcPr anchor="ctr" marL="73152" marT="9144" marB="9144">
-                    <a:solidFill>
-                      <a:srgbClr val="EEF2F9"/>
-                    </a:solidFill>
-                  </a:tcPr>
-                </a:tc>
-                <a:tc>
-                  <a:txBody>
-                    <a:bodyPr/>
-                    <a:lstStyle/>
-                    <a:p>
-                      <a:r>
-                        <a:rPr sz="1150" b="0">
-                          <a:solidFill>
-                            <a:srgbClr val="1A2233"/>
-                          </a:solidFill>
-                          <a:latin typeface="Microsoft JhengHei"/>
-                          <a:ea typeface="Microsoft JhengHei"/>
-                          <a:cs typeface="Microsoft JhengHei"/>
-                        </a:rPr>
-                        <a:t>羅瑞芝、余聖河</a:t>
-                      </a:r>
-                    </a:p>
-                  </a:txBody>
-                  <a:tcPr anchor="ctr" marL="73152" marT="9144" marB="9144">
-                    <a:solidFill>
-                      <a:srgbClr val="EEF2F9"/>
-                    </a:solidFill>
-                  </a:tcPr>
-                </a:tc>
-              </a:tr>
-              <a:tr h="457200">
-                <a:tc>
-                  <a:txBody>
-                    <a:bodyPr/>
-                    <a:lstStyle/>
-                    <a:p>
-                      <a:r>
-                        <a:rPr sz="1150" b="0">
-                          <a:solidFill>
-                            <a:srgbClr val="1A2233"/>
-                          </a:solidFill>
-                          <a:latin typeface="Microsoft JhengHei"/>
-                          <a:ea typeface="Microsoft JhengHei"/>
-                          <a:cs typeface="Microsoft JhengHei"/>
-                        </a:rPr>
-                        <a:t>上詮</a:t>
-                      </a:r>
-                    </a:p>
-                  </a:txBody>
-                  <a:tcPr anchor="ctr" marL="73152" marT="9144" marB="9144">
-                    <a:solidFill>
-                      <a:srgbClr val="FFFFFF"/>
-                    </a:solidFill>
-                  </a:tcPr>
-                </a:tc>
-                <a:tc>
-                  <a:txBody>
-                    <a:bodyPr/>
-                    <a:lstStyle/>
-                    <a:p>
-                      <a:r>
-                        <a:rPr sz="1150" b="0">
-                          <a:solidFill>
-                            <a:srgbClr val="1A2233"/>
-                          </a:solidFill>
-                          <a:latin typeface="Microsoft JhengHei"/>
-                          <a:ea typeface="Microsoft JhengHei"/>
-                          <a:cs typeface="Microsoft JhengHei"/>
-                        </a:rPr>
-                        <a:t>3363</a:t>
-                      </a:r>
-                    </a:p>
-                  </a:txBody>
-                  <a:tcPr anchor="ctr" marL="73152" marT="9144" marB="9144">
-                    <a:solidFill>
-                      <a:srgbClr val="FFFFFF"/>
-                    </a:solidFill>
-                  </a:tcPr>
-                </a:tc>
-                <a:tc>
-                  <a:txBody>
-                    <a:bodyPr/>
-                    <a:lstStyle/>
-                    <a:p>
-                      <a:r>
-                        <a:rPr sz="1150" b="1">
-                          <a:solidFill>
-                            <a:srgbClr val="E63946"/>
-                          </a:solidFill>
-                          <a:latin typeface="Microsoft JhengHei"/>
-                          <a:ea typeface="Microsoft JhengHei"/>
-                          <a:cs typeface="Microsoft JhengHei"/>
-                        </a:rPr>
-                        <a:t>駭客攻擊</a:t>
-                      </a:r>
-                    </a:p>
-                  </a:txBody>
-                  <a:tcPr anchor="ctr" marL="73152" marT="9144" marB="9144">
-                    <a:solidFill>
-                      <a:srgbClr val="FFFFFF"/>
-                    </a:solidFill>
-                  </a:tcPr>
-                </a:tc>
-                <a:tc>
-                  <a:txBody>
-                    <a:bodyPr/>
-                    <a:lstStyle/>
-                    <a:p>
-                      <a:r>
-                        <a:rPr sz="1150" b="0">
-                          <a:solidFill>
-                            <a:srgbClr val="1A2233"/>
-                          </a:solidFill>
-                          <a:latin typeface="Microsoft JhengHei"/>
-                          <a:ea typeface="Microsoft JhengHei"/>
-                          <a:cs typeface="Microsoft JhengHei"/>
-                        </a:rPr>
-                        <a:t>資誠聯合會計師事務所</a:t>
-                      </a:r>
-                    </a:p>
-                  </a:txBody>
-                  <a:tcPr anchor="ctr" marL="73152" marT="9144" marB="9144">
-                    <a:solidFill>
-                      <a:srgbClr val="FFFFFF"/>
-                    </a:solidFill>
-                  </a:tcPr>
-                </a:tc>
-                <a:tc>
-                  <a:txBody>
-                    <a:bodyPr/>
-                    <a:lstStyle/>
-                    <a:p>
-                      <a:r>
-                        <a:rPr sz="1150" b="0">
-                          <a:solidFill>
-                            <a:srgbClr val="1A2233"/>
-                          </a:solidFill>
-                          <a:latin typeface="Microsoft JhengHei"/>
-                          <a:ea typeface="Microsoft JhengHei"/>
-                          <a:cs typeface="Microsoft JhengHei"/>
-                        </a:rPr>
-                        <a:t>白淑蒨、李典易</a:t>
-                      </a:r>
-                    </a:p>
-                  </a:txBody>
-                  <a:tcPr anchor="ctr" marL="73152" marT="9144" marB="9144">
-                    <a:solidFill>
-                      <a:srgbClr val="FFFFFF"/>
                     </a:solidFill>
                   </a:tcPr>
                 </a:tc>
@@ -8317,7 +8561,7 @@
             <a:avLst/>
           </a:prstGeom>
           <a:solidFill>
-            <a:srgbClr val="E63946"/>
+            <a:srgbClr val="F4A261"/>
           </a:solidFill>
           <a:ln>
             <a:noFill/>
@@ -8378,7 +8622,7 @@
                 <a:ea typeface="Microsoft JhengHei"/>
                 <a:cs typeface="Microsoft JhengHei"/>
               </a:rPr>
-              <a:t>達爾膚 </a:t>
+              <a:t>崴寶 </a:t>
             </a:r>
             <a:r>
               <a:rPr sz="1300" b="0">
@@ -8389,7 +8633,7 @@
                 <a:ea typeface="Microsoft JhengHei"/>
                 <a:cs typeface="Microsoft JhengHei"/>
               </a:rPr>
-              <a:t>6523</a:t>
+              <a:t>7744</a:t>
             </a:r>
           </a:p>
         </p:txBody>
@@ -8409,7 +8653,7 @@
             <a:avLst/>
           </a:prstGeom>
           <a:solidFill>
-            <a:srgbClr val="E63946"/>
+            <a:srgbClr val="F4A261"/>
           </a:solidFill>
           <a:ln>
             <a:noFill/>
@@ -8470,7 +8714,7 @@
                 <a:ea typeface="Microsoft JhengHei"/>
                 <a:cs typeface="Microsoft JhengHei"/>
               </a:rPr>
-              <a:t>駭客攻擊</a:t>
+              <a:t>勒索病毒/加密</a:t>
             </a:r>
           </a:p>
         </p:txBody>
@@ -8505,7 +8749,7 @@
             <a:r>
               <a:rPr sz="1100" b="1">
                 <a:solidFill>
-                  <a:srgbClr val="E63946"/>
+                  <a:srgbClr val="F4A261"/>
                 </a:solidFill>
                 <a:latin typeface="Microsoft JhengHei"/>
                 <a:ea typeface="Microsoft JhengHei"/>
@@ -8522,7 +8766,7 @@
                 <a:ea typeface="Microsoft JhengHei"/>
                 <a:cs typeface="Microsoft JhengHei"/>
               </a:rPr>
-              <a:t>本公司部分內部資訊系統遭受網路攻擊事件，初步評估對公司營運無重大影響。</a:t>
+              <a:t>本公司於115年9月14日上午發現資訊系統遭駭客入侵，部分系統資料遭加密鎖定。本公司立即啟動資安…</a:t>
             </a:r>
           </a:p>
         </p:txBody>
@@ -8557,7 +8801,7 @@
             <a:r>
               <a:rPr sz="1100" b="1">
                 <a:solidFill>
-                  <a:srgbClr val="E63946"/>
+                  <a:srgbClr val="F4A261"/>
                 </a:solidFill>
                 <a:latin typeface="Microsoft JhengHei"/>
                 <a:ea typeface="Microsoft JhengHei"/>
@@ -8574,7 +8818,7 @@
                 <a:ea typeface="Microsoft JhengHei"/>
                 <a:cs typeface="Microsoft JhengHei"/>
               </a:rPr>
-              <a:t>本公司將持續強化網路與資訊基礎架構之安全管控，以確保資訊安全。</a:t>
+              <a:t>本公司將持續配合專業資安團隊進行事件調查與監控，並加強資訊安全管理措施，包括提升端點防護機制、強化網路監控能力、落實帳號…</a:t>
             </a:r>
           </a:p>
         </p:txBody>
@@ -8701,7 +8945,7 @@
                 <a:ea typeface="Microsoft JhengHei"/>
                 <a:cs typeface="Microsoft JhengHei"/>
               </a:rPr>
-              <a:t>大車隊 </a:t>
+              <a:t>達爾膚 </a:t>
             </a:r>
             <a:r>
               <a:rPr sz="1300" b="0">
@@ -8712,7 +8956,7 @@
                 <a:ea typeface="Microsoft JhengHei"/>
                 <a:cs typeface="Microsoft JhengHei"/>
               </a:rPr>
-              <a:t>2640</a:t>
+              <a:t>6523</a:t>
             </a:r>
           </a:p>
         </p:txBody>
@@ -8845,7 +9089,7 @@
                 <a:ea typeface="Microsoft JhengHei"/>
                 <a:cs typeface="Microsoft JhengHei"/>
               </a:rPr>
-              <a:t>本公司重要子公司全球商務科技股份有限公司於今日發現部分資訊系統遭受網路攻擊，已立即啟動資安應變機…</a:t>
+              <a:t>本公司部分內部資訊系統遭受網路攻擊事件，初步評估對公司營運無重大影響。</a:t>
             </a:r>
           </a:p>
         </p:txBody>
@@ -8897,7 +9141,7 @@
                 <a:ea typeface="Microsoft JhengHei"/>
                 <a:cs typeface="Microsoft JhengHei"/>
               </a:rPr>
-              <a:t>公司將持續進行資安鑑識、系統安全強化及相關風險控管作業，受影響系統預期可於短期內逐步恢復正常運作；後續如調查結果或事件發…</a:t>
+              <a:t>本公司將持續強化網路與資訊基礎架構之安全管控，以確保資訊安全。</a:t>
             </a:r>
           </a:p>
         </p:txBody>
@@ -8963,7 +9207,7 @@
             <a:avLst/>
           </a:prstGeom>
           <a:solidFill>
-            <a:srgbClr val="F4A261"/>
+            <a:srgbClr val="E63946"/>
           </a:solidFill>
           <a:ln>
             <a:noFill/>
@@ -9024,7 +9268,7 @@
                 <a:ea typeface="Microsoft JhengHei"/>
                 <a:cs typeface="Microsoft JhengHei"/>
               </a:rPr>
-              <a:t>富爾特 </a:t>
+              <a:t>大車隊 </a:t>
             </a:r>
             <a:r>
               <a:rPr sz="1300" b="0">
@@ -9035,7 +9279,7 @@
                 <a:ea typeface="Microsoft JhengHei"/>
                 <a:cs typeface="Microsoft JhengHei"/>
               </a:rPr>
-              <a:t>6136</a:t>
+              <a:t>2640</a:t>
             </a:r>
           </a:p>
         </p:txBody>
@@ -9055,7 +9299,7 @@
             <a:avLst/>
           </a:prstGeom>
           <a:solidFill>
-            <a:srgbClr val="F4A261"/>
+            <a:srgbClr val="E63946"/>
           </a:solidFill>
           <a:ln>
             <a:noFill/>
@@ -9116,7 +9360,7 @@
                 <a:ea typeface="Microsoft JhengHei"/>
                 <a:cs typeface="Microsoft JhengHei"/>
               </a:rPr>
-              <a:t>勒索病毒/加密</a:t>
+              <a:t>駭客攻擊</a:t>
             </a:r>
           </a:p>
         </p:txBody>
@@ -9151,7 +9395,7 @@
             <a:r>
               <a:rPr sz="1100" b="1">
                 <a:solidFill>
-                  <a:srgbClr val="F4A261"/>
+                  <a:srgbClr val="E63946"/>
                 </a:solidFill>
                 <a:latin typeface="Microsoft JhengHei"/>
                 <a:ea typeface="Microsoft JhengHei"/>
@@ -9168,7 +9412,7 @@
                 <a:ea typeface="Microsoft JhengHei"/>
                 <a:cs typeface="Microsoft JhengHei"/>
               </a:rPr>
-              <a:t>本公司之子公司格帝控股股份有限公司偵測到部份伺服器遭受網路勒索病毒攻擊，致使包含ERP在內之部份…</a:t>
+              <a:t>本公司重要子公司全球商務科技股份有限公司於今日發現部分資訊系統遭受網路攻擊，已立即啟動資安應變機…</a:t>
             </a:r>
           </a:p>
         </p:txBody>
@@ -9203,7 +9447,7 @@
             <a:r>
               <a:rPr sz="1100" b="1">
                 <a:solidFill>
-                  <a:srgbClr val="F4A261"/>
+                  <a:srgbClr val="E63946"/>
                 </a:solidFill>
                 <a:latin typeface="Microsoft JhengHei"/>
                 <a:ea typeface="Microsoft JhengHei"/>
@@ -9220,7 +9464,7 @@
                 <a:ea typeface="Microsoft JhengHei"/>
                 <a:cs typeface="Microsoft JhengHei"/>
               </a:rPr>
-              <a:t>本公司及所屬子公司將持續密集監控，並強化網路與資訊基礎架構之管控，以確保資訊系統安全。</a:t>
+              <a:t>公司將持續進行資安鑑識、系統安全強化及相關風險控管作業，受影響系統預期可於短期內逐步恢復正常運作；後續如調查結果或事件發…</a:t>
             </a:r>
           </a:p>
         </p:txBody>
@@ -9347,7 +9591,7 @@
                 <a:ea typeface="Microsoft JhengHei"/>
                 <a:cs typeface="Microsoft JhengHei"/>
               </a:rPr>
-              <a:t>創新服務 </a:t>
+              <a:t>富爾特 </a:t>
             </a:r>
             <a:r>
               <a:rPr sz="1300" b="0">
@@ -9358,7 +9602,7 @@
                 <a:ea typeface="Microsoft JhengHei"/>
                 <a:cs typeface="Microsoft JhengHei"/>
               </a:rPr>
-              <a:t>7828</a:t>
+              <a:t>6136</a:t>
             </a:r>
           </a:p>
         </p:txBody>
@@ -9491,7 +9735,7 @@
                 <a:ea typeface="Microsoft JhengHei"/>
                 <a:cs typeface="Microsoft JhengHei"/>
               </a:rPr>
-              <a:t>本公司於今日偵測到部份伺服器遭受網路勒索病毒攻擊，致使包含ERP在內之部份資訊系統無法正常運作。</a:t>
+              <a:t>本公司之子公司格帝控股股份有限公司偵測到部份伺服器遭受網路勒索病毒攻擊，致使包含ERP在內之部份…</a:t>
             </a:r>
           </a:p>
         </p:txBody>
@@ -9543,7 +9787,7 @@
                 <a:ea typeface="Microsoft JhengHei"/>
                 <a:cs typeface="Microsoft JhengHei"/>
               </a:rPr>
-              <a:t>本公司將持續密集監控，並強化網路與資訊基礎架構之管控，以確保資訊系統安全。</a:t>
+              <a:t>本公司及所屬子公司將持續密集監控，並強化網路與資訊基礎架構之管控，以確保資訊系統安全。</a:t>
             </a:r>
           </a:p>
         </p:txBody>
@@ -9745,7 +9989,7 @@
             <a:avLst/>
           </a:prstGeom>
           <a:solidFill>
-            <a:srgbClr val="E63946"/>
+            <a:srgbClr val="F4A261"/>
           </a:solidFill>
           <a:ln>
             <a:noFill/>
@@ -9806,7 +10050,7 @@
                 <a:ea typeface="Microsoft JhengHei"/>
                 <a:cs typeface="Microsoft JhengHei"/>
               </a:rPr>
-              <a:t>杭特 </a:t>
+              <a:t>創新服務 </a:t>
             </a:r>
             <a:r>
               <a:rPr sz="1300" b="0">
@@ -9817,7 +10061,7 @@
                 <a:ea typeface="Microsoft JhengHei"/>
                 <a:cs typeface="Microsoft JhengHei"/>
               </a:rPr>
-              <a:t>3297</a:t>
+              <a:t>7828</a:t>
             </a:r>
           </a:p>
         </p:txBody>
@@ -9837,7 +10081,7 @@
             <a:avLst/>
           </a:prstGeom>
           <a:solidFill>
-            <a:srgbClr val="E63946"/>
+            <a:srgbClr val="F4A261"/>
           </a:solidFill>
           <a:ln>
             <a:noFill/>
@@ -9898,7 +10142,7 @@
                 <a:ea typeface="Microsoft JhengHei"/>
                 <a:cs typeface="Microsoft JhengHei"/>
               </a:rPr>
-              <a:t>駭客攻擊</a:t>
+              <a:t>勒索病毒/加密</a:t>
             </a:r>
           </a:p>
         </p:txBody>
@@ -9933,7 +10177,7 @@
             <a:r>
               <a:rPr sz="1100" b="1">
                 <a:solidFill>
-                  <a:srgbClr val="E63946"/>
+                  <a:srgbClr val="F4A261"/>
                 </a:solidFill>
                 <a:latin typeface="Microsoft JhengHei"/>
                 <a:ea typeface="Microsoft JhengHei"/>
@@ -9950,7 +10194,7 @@
                 <a:ea typeface="Microsoft JhengHei"/>
                 <a:cs typeface="Microsoft JhengHei"/>
               </a:rPr>
-              <a:t>本公司資訊系統遭受駭客網路攻擊，初步評估對公司營運暫無重大影響。</a:t>
+              <a:t>本公司於今日偵測到部份伺服器遭受網路勒索病毒攻擊，致使包含ERP在內之部份資訊系統無法正常運作。</a:t>
             </a:r>
           </a:p>
         </p:txBody>
@@ -9985,7 +10229,7 @@
             <a:r>
               <a:rPr sz="1100" b="1">
                 <a:solidFill>
-                  <a:srgbClr val="E63946"/>
+                  <a:srgbClr val="F4A261"/>
                 </a:solidFill>
                 <a:latin typeface="Microsoft JhengHei"/>
                 <a:ea typeface="Microsoft JhengHei"/>
@@ -10002,7 +10246,7 @@
                 <a:ea typeface="Microsoft JhengHei"/>
                 <a:cs typeface="Microsoft JhengHei"/>
               </a:rPr>
-              <a:t>本公司將持續提升網路與資訊基礎架構之安全管控，以確保資訊安全。</a:t>
+              <a:t>本公司將持續密集監控，並強化網路與資訊基礎架構之管控，以確保資訊系統安全。</a:t>
             </a:r>
           </a:p>
         </p:txBody>
@@ -10129,7 +10373,7 @@
                 <a:ea typeface="Microsoft JhengHei"/>
                 <a:cs typeface="Microsoft JhengHei"/>
               </a:rPr>
-              <a:t>數字 </a:t>
+              <a:t>杭特 </a:t>
             </a:r>
             <a:r>
               <a:rPr sz="1300" b="0">
@@ -10140,7 +10384,7 @@
                 <a:ea typeface="Microsoft JhengHei"/>
                 <a:cs typeface="Microsoft JhengHei"/>
               </a:rPr>
-              <a:t>5287</a:t>
+              <a:t>3297</a:t>
             </a:r>
           </a:p>
         </p:txBody>
@@ -10273,7 +10517,7 @@
                 <a:ea typeface="Microsoft JhengHei"/>
                 <a:cs typeface="Microsoft JhengHei"/>
               </a:rPr>
-              <a:t>本公司於115年8月20日發現591網站登入行為異常，經查發現外部攻擊者利用登入機制之弱點，繞過…</a:t>
+              <a:t>本公司資訊系統遭受駭客網路攻擊，初步評估對公司營運暫無重大影響。</a:t>
             </a:r>
           </a:p>
         </p:txBody>
@@ -10325,7 +10569,7 @@
                 <a:ea typeface="Microsoft JhengHei"/>
                 <a:cs typeface="Microsoft JhengHei"/>
               </a:rPr>
-              <a:t>(1)依據安全軟體發展生命週期（SSDLC）框架，持續優化系統開發流程及資安檢視機制。(2)強化登入驗證、存取控制及異常…</a:t>
+              <a:t>本公司將持續提升網路與資訊基礎架構之安全管控，以確保資訊安全。</a:t>
             </a:r>
           </a:p>
         </p:txBody>
@@ -10452,7 +10696,7 @@
                 <a:ea typeface="Microsoft JhengHei"/>
                 <a:cs typeface="Microsoft JhengHei"/>
               </a:rPr>
-              <a:t>上詮 </a:t>
+              <a:t>數字 </a:t>
             </a:r>
             <a:r>
               <a:rPr sz="1300" b="0">
@@ -10463,7 +10707,7 @@
                 <a:ea typeface="Microsoft JhengHei"/>
                 <a:cs typeface="Microsoft JhengHei"/>
               </a:rPr>
-              <a:t>3363</a:t>
+              <a:t>5287</a:t>
             </a:r>
           </a:p>
         </p:txBody>
@@ -10596,7 +10840,7 @@
                 <a:ea typeface="Microsoft JhengHei"/>
                 <a:cs typeface="Microsoft JhengHei"/>
               </a:rPr>
-              <a:t>本公司資訊系統遭受駭客網路攻擊，部分主機與電腦遭受病毒攻擊。</a:t>
+              <a:t>本公司於115年8月20日發現591網站登入行為異常，經查發現外部攻擊者利用登入機制之弱點，繞過…</a:t>
             </a:r>
           </a:p>
         </p:txBody>
@@ -10610,6 +10854,329 @@
         <p:spPr>
           <a:xfrm>
             <a:off x="777240" y="5257800"/>
+            <a:ext cx="4937760" cy="713232"/>
+          </a:xfrm>
+          <a:prstGeom prst="rect">
+            <a:avLst/>
+          </a:prstGeom>
+          <a:noFill/>
+        </p:spPr>
+        <p:txBody>
+          <a:bodyPr wrap="square" anchor="t" lIns="0" rIns="0" tIns="0" bIns="0">
+            <a:spAutoFit/>
+          </a:bodyPr>
+          <a:lstStyle/>
+          <a:p>
+            <a:pPr algn="l">
+              <a:lnSpc>
+                <a:spcPts val="1500"/>
+              </a:lnSpc>
+            </a:pPr>
+            <a:r>
+              <a:rPr sz="1100" b="1">
+                <a:solidFill>
+                  <a:srgbClr val="E63946"/>
+                </a:solidFill>
+                <a:latin typeface="Microsoft JhengHei"/>
+                <a:ea typeface="Microsoft JhengHei"/>
+                <a:cs typeface="Microsoft JhengHei"/>
+              </a:rPr>
+              <a:t>因應　</a:t>
+            </a:r>
+            <a:r>
+              <a:rPr sz="1100" b="0">
+                <a:solidFill>
+                  <a:srgbClr val="1A2233"/>
+                </a:solidFill>
+                <a:latin typeface="Microsoft JhengHei"/>
+                <a:ea typeface="Microsoft JhengHei"/>
+                <a:cs typeface="Microsoft JhengHei"/>
+              </a:rPr>
+              <a:t>(1)依據安全軟體發展生命週期（SSDLC）框架，持續優化系統開發流程及資安檢視機制。(2)強化登入驗證、存取控制及異常…</a:t>
+            </a:r>
+          </a:p>
+        </p:txBody>
+      </p:sp>
+      <p:sp>
+        <p:nvSpPr>
+          <p:cNvPr id="26" name="Rounded Rectangle 25"/>
+          <p:cNvSpPr/>
+          <p:nvPr/>
+        </p:nvSpPr>
+        <p:spPr>
+          <a:xfrm>
+            <a:off x="6172200" y="3886200"/>
+            <a:ext cx="5394960" cy="2148840"/>
+          </a:xfrm>
+          <a:prstGeom prst="roundRect">
+            <a:avLst/>
+          </a:prstGeom>
+          <a:solidFill>
+            <a:srgbClr val="FFFFFF"/>
+          </a:solidFill>
+          <a:ln w="12700">
+            <a:solidFill>
+              <a:srgbClr val="DDE3EE"/>
+            </a:solidFill>
+          </a:ln>
+          <a:effectLst/>
+        </p:spPr>
+        <p:style>
+          <a:lnRef idx="1">
+            <a:schemeClr val="accent1"/>
+          </a:lnRef>
+          <a:fillRef idx="3">
+            <a:schemeClr val="accent1"/>
+          </a:fillRef>
+          <a:effectRef idx="2">
+            <a:schemeClr val="accent1"/>
+          </a:effectRef>
+          <a:fontRef idx="minor">
+            <a:schemeClr val="lt1"/>
+          </a:fontRef>
+        </p:style>
+        <p:txBody>
+          <a:bodyPr rtlCol="0" anchor="ctr"/>
+          <a:lstStyle/>
+          <a:p>
+            <a:pPr algn="ctr"/>
+          </a:p>
+        </p:txBody>
+      </p:sp>
+      <p:sp>
+        <p:nvSpPr>
+          <p:cNvPr id="27" name="Rectangle 26"/>
+          <p:cNvSpPr/>
+          <p:nvPr/>
+        </p:nvSpPr>
+        <p:spPr>
+          <a:xfrm>
+            <a:off x="6172200" y="3886200"/>
+            <a:ext cx="5394960" cy="109728"/>
+          </a:xfrm>
+          <a:prstGeom prst="rect">
+            <a:avLst/>
+          </a:prstGeom>
+          <a:solidFill>
+            <a:srgbClr val="E63946"/>
+          </a:solidFill>
+          <a:ln>
+            <a:noFill/>
+          </a:ln>
+          <a:effectLst/>
+        </p:spPr>
+        <p:style>
+          <a:lnRef idx="1">
+            <a:schemeClr val="accent1"/>
+          </a:lnRef>
+          <a:fillRef idx="3">
+            <a:schemeClr val="accent1"/>
+          </a:fillRef>
+          <a:effectRef idx="2">
+            <a:schemeClr val="accent1"/>
+          </a:effectRef>
+          <a:fontRef idx="minor">
+            <a:schemeClr val="lt1"/>
+          </a:fontRef>
+        </p:style>
+        <p:txBody>
+          <a:bodyPr rtlCol="0" anchor="ctr"/>
+          <a:lstStyle/>
+          <a:p>
+            <a:pPr algn="ctr"/>
+          </a:p>
+        </p:txBody>
+      </p:sp>
+      <p:sp>
+        <p:nvSpPr>
+          <p:cNvPr id="28" name="TextBox 27"/>
+          <p:cNvSpPr txBox="1"/>
+          <p:nvPr/>
+        </p:nvSpPr>
+        <p:spPr>
+          <a:xfrm>
+            <a:off x="6400800" y="4105656"/>
+            <a:ext cx="3657600" cy="365760"/>
+          </a:xfrm>
+          <a:prstGeom prst="rect">
+            <a:avLst/>
+          </a:prstGeom>
+          <a:noFill/>
+        </p:spPr>
+        <p:txBody>
+          <a:bodyPr wrap="square" anchor="ctr" lIns="0" rIns="0" tIns="0" bIns="0">
+            <a:spAutoFit/>
+          </a:bodyPr>
+          <a:lstStyle/>
+          <a:p>
+            <a:pPr algn="l"/>
+            <a:r>
+              <a:rPr sz="1600" b="1">
+                <a:solidFill>
+                  <a:srgbClr val="1A2233"/>
+                </a:solidFill>
+                <a:latin typeface="Microsoft JhengHei"/>
+                <a:ea typeface="Microsoft JhengHei"/>
+                <a:cs typeface="Microsoft JhengHei"/>
+              </a:rPr>
+              <a:t>上詮 </a:t>
+            </a:r>
+            <a:r>
+              <a:rPr sz="1300" b="0">
+                <a:solidFill>
+                  <a:srgbClr val="5C6679"/>
+                </a:solidFill>
+                <a:latin typeface="Microsoft JhengHei"/>
+                <a:ea typeface="Microsoft JhengHei"/>
+                <a:cs typeface="Microsoft JhengHei"/>
+              </a:rPr>
+              <a:t>3363</a:t>
+            </a:r>
+          </a:p>
+        </p:txBody>
+      </p:sp>
+      <p:sp>
+        <p:nvSpPr>
+          <p:cNvPr id="29" name="Rounded Rectangle 28"/>
+          <p:cNvSpPr/>
+          <p:nvPr/>
+        </p:nvSpPr>
+        <p:spPr>
+          <a:xfrm>
+            <a:off x="10149840" y="4123944"/>
+            <a:ext cx="1234440" cy="347472"/>
+          </a:xfrm>
+          <a:prstGeom prst="roundRect">
+            <a:avLst/>
+          </a:prstGeom>
+          <a:solidFill>
+            <a:srgbClr val="E63946"/>
+          </a:solidFill>
+          <a:ln>
+            <a:noFill/>
+          </a:ln>
+          <a:effectLst/>
+        </p:spPr>
+        <p:style>
+          <a:lnRef idx="1">
+            <a:schemeClr val="accent1"/>
+          </a:lnRef>
+          <a:fillRef idx="3">
+            <a:schemeClr val="accent1"/>
+          </a:fillRef>
+          <a:effectRef idx="2">
+            <a:schemeClr val="accent1"/>
+          </a:effectRef>
+          <a:fontRef idx="minor">
+            <a:schemeClr val="lt1"/>
+          </a:fontRef>
+        </p:style>
+        <p:txBody>
+          <a:bodyPr rtlCol="0" anchor="ctr"/>
+          <a:lstStyle/>
+          <a:p>
+            <a:pPr algn="ctr"/>
+          </a:p>
+        </p:txBody>
+      </p:sp>
+      <p:sp>
+        <p:nvSpPr>
+          <p:cNvPr id="30" name="TextBox 29"/>
+          <p:cNvSpPr txBox="1"/>
+          <p:nvPr/>
+        </p:nvSpPr>
+        <p:spPr>
+          <a:xfrm>
+            <a:off x="10149840" y="4123944"/>
+            <a:ext cx="1234440" cy="347472"/>
+          </a:xfrm>
+          <a:prstGeom prst="rect">
+            <a:avLst/>
+          </a:prstGeom>
+          <a:noFill/>
+        </p:spPr>
+        <p:txBody>
+          <a:bodyPr wrap="square" anchor="ctr" lIns="0" rIns="0" tIns="0" bIns="0">
+            <a:spAutoFit/>
+          </a:bodyPr>
+          <a:lstStyle/>
+          <a:p>
+            <a:pPr algn="ctr"/>
+            <a:r>
+              <a:rPr sz="1050" b="1">
+                <a:solidFill>
+                  <a:srgbClr val="FFFFFF"/>
+                </a:solidFill>
+                <a:latin typeface="Microsoft JhengHei"/>
+                <a:ea typeface="Microsoft JhengHei"/>
+                <a:cs typeface="Microsoft JhengHei"/>
+              </a:rPr>
+              <a:t>駭客攻擊</a:t>
+            </a:r>
+          </a:p>
+        </p:txBody>
+      </p:sp>
+      <p:sp>
+        <p:nvSpPr>
+          <p:cNvPr id="31" name="TextBox 30"/>
+          <p:cNvSpPr txBox="1"/>
+          <p:nvPr/>
+        </p:nvSpPr>
+        <p:spPr>
+          <a:xfrm>
+            <a:off x="6400800" y="4599432"/>
+            <a:ext cx="4937760" cy="640080"/>
+          </a:xfrm>
+          <a:prstGeom prst="rect">
+            <a:avLst/>
+          </a:prstGeom>
+          <a:noFill/>
+        </p:spPr>
+        <p:txBody>
+          <a:bodyPr wrap="square" anchor="t" lIns="0" rIns="0" tIns="0" bIns="0">
+            <a:spAutoFit/>
+          </a:bodyPr>
+          <a:lstStyle/>
+          <a:p>
+            <a:pPr algn="l">
+              <a:lnSpc>
+                <a:spcPts val="1500"/>
+              </a:lnSpc>
+            </a:pPr>
+            <a:r>
+              <a:rPr sz="1100" b="1">
+                <a:solidFill>
+                  <a:srgbClr val="E63946"/>
+                </a:solidFill>
+                <a:latin typeface="Microsoft JhengHei"/>
+                <a:ea typeface="Microsoft JhengHei"/>
+                <a:cs typeface="Microsoft JhengHei"/>
+              </a:rPr>
+              <a:t>緣由　</a:t>
+            </a:r>
+            <a:r>
+              <a:rPr sz="1100" b="0">
+                <a:solidFill>
+                  <a:srgbClr val="1A2233"/>
+                </a:solidFill>
+                <a:latin typeface="Microsoft JhengHei"/>
+                <a:ea typeface="Microsoft JhengHei"/>
+                <a:cs typeface="Microsoft JhengHei"/>
+              </a:rPr>
+              <a:t>本公司資訊系統遭受駭客網路攻擊，部分主機與電腦遭受病毒攻擊。</a:t>
+            </a:r>
+          </a:p>
+        </p:txBody>
+      </p:sp>
+      <p:sp>
+        <p:nvSpPr>
+          <p:cNvPr id="32" name="TextBox 31"/>
+          <p:cNvSpPr txBox="1"/>
+          <p:nvPr/>
+        </p:nvSpPr>
+        <p:spPr>
+          <a:xfrm>
+            <a:off x="6400800" y="5257800"/>
             <a:ext cx="4937760" cy="713232"/>
           </a:xfrm>
           <a:prstGeom prst="rect">

--- a/資安事件因應分析.pptx
+++ b/資安事件因應分析.pptx
@@ -12,6 +12,7 @@
     <p:sldId id="260" r:id="rId11"/>
     <p:sldId id="261" r:id="rId12"/>
     <p:sldId id="262" r:id="rId13"/>
+    <p:sldId id="263" r:id="rId14"/>
   </p:sldIdLst>
   <p:sldSz cx="12191695" cy="6858000" type="screen4x3"/>
   <p:notesSz cx="6858000" cy="9144000"/>
@@ -174,7 +175,7 @@
                 <c:formatCode>General</c:formatCode>
                 <c:ptCount val="2"/>
                 <c:pt idx="0">
-                  <c:v>5</c:v>
+                  <c:v>7</c:v>
                 </c:pt>
                 <c:pt idx="1">
                   <c:v>3</c:v>
@@ -3514,7 +3515,7 @@
                 <a:ea typeface="Microsoft JhengHei"/>
                 <a:cs typeface="Microsoft JhengHei"/>
               </a:rPr>
-              <a:t>資料期間 2026-08-15 ~ 2026-09-15　｜　MOPS 重大訊息全文檢索　｜　8 家公司</a:t>
+              <a:t>資料期間 2026-08-16 ~ 2026-09-16　｜　MOPS 重大訊息全文檢索　｜　10 家公司</a:t>
             </a:r>
           </a:p>
         </p:txBody>
@@ -3731,7 +3732,7 @@
                 <a:ea typeface="Microsoft JhengHei"/>
                 <a:cs typeface="Microsoft JhengHei"/>
               </a:rPr>
-              <a:t>資料期間內 MOPS 揭露之 8 起資安相關重大訊息</a:t>
+              <a:t>資料期間內 MOPS 揭露之 10 起資安相關重大訊息</a:t>
             </a:r>
           </a:p>
         </p:txBody>
@@ -3814,7 +3815,7 @@
                 <a:ea typeface="Microsoft JhengHei"/>
                 <a:cs typeface="Microsoft JhengHei"/>
               </a:rPr>
-              <a:t>8</a:t>
+              <a:t>10</a:t>
             </a:r>
           </a:p>
         </p:txBody>
@@ -4106,7 +4107,7 @@
         </p:nvGraphicFramePr>
         <p:xfrm>
           <a:off x="548640" y="2697480"/>
-          <a:ext cx="11064240" cy="3456432"/>
+          <a:ext cx="11064240" cy="3566160"/>
         </p:xfrm>
         <a:graphic>
           <a:graphicData uri="http://schemas.openxmlformats.org/drawingml/2006/table">
@@ -4121,7 +4122,7 @@
                 <a:gridCol w="2286000"/>
                 <a:gridCol w="5120640"/>
               </a:tblGrid>
-              <a:tr h="384048">
+              <a:tr h="324196">
                 <a:tc>
                   <a:txBody>
                     <a:bodyPr/>
@@ -4243,7 +4244,251 @@
                   </a:tcPr>
                 </a:tc>
               </a:tr>
-              <a:tr h="384048">
+              <a:tr h="324196">
+                <a:tc>
+                  <a:txBody>
+                    <a:bodyPr/>
+                    <a:lstStyle/>
+                    <a:p>
+                      <a:r>
+                        <a:rPr sz="1150" b="0">
+                          <a:solidFill>
+                            <a:srgbClr val="1A2233"/>
+                          </a:solidFill>
+                          <a:latin typeface="Microsoft JhengHei"/>
+                          <a:ea typeface="Microsoft JhengHei"/>
+                          <a:cs typeface="Microsoft JhengHei"/>
+                        </a:rPr>
+                        <a:t>長榮航</a:t>
+                      </a:r>
+                    </a:p>
+                  </a:txBody>
+                  <a:tcPr anchor="ctr" marL="73152" marT="9144" marB="9144">
+                    <a:solidFill>
+                      <a:srgbClr val="FFFFFF"/>
+                    </a:solidFill>
+                  </a:tcPr>
+                </a:tc>
+                <a:tc>
+                  <a:txBody>
+                    <a:bodyPr/>
+                    <a:lstStyle/>
+                    <a:p>
+                      <a:r>
+                        <a:rPr sz="1150" b="0">
+                          <a:solidFill>
+                            <a:srgbClr val="1A2233"/>
+                          </a:solidFill>
+                          <a:latin typeface="Microsoft JhengHei"/>
+                          <a:ea typeface="Microsoft JhengHei"/>
+                          <a:cs typeface="Microsoft JhengHei"/>
+                        </a:rPr>
+                        <a:t>2618</a:t>
+                      </a:r>
+                    </a:p>
+                  </a:txBody>
+                  <a:tcPr anchor="ctr" marL="73152" marT="9144" marB="9144">
+                    <a:solidFill>
+                      <a:srgbClr val="FFFFFF"/>
+                    </a:solidFill>
+                  </a:tcPr>
+                </a:tc>
+                <a:tc>
+                  <a:txBody>
+                    <a:bodyPr/>
+                    <a:lstStyle/>
+                    <a:p>
+                      <a:r>
+                        <a:rPr sz="1150" b="0">
+                          <a:solidFill>
+                            <a:srgbClr val="1A2233"/>
+                          </a:solidFill>
+                          <a:latin typeface="Microsoft JhengHei"/>
+                          <a:ea typeface="Microsoft JhengHei"/>
+                          <a:cs typeface="Microsoft JhengHei"/>
+                        </a:rPr>
+                        <a:t>09/15</a:t>
+                      </a:r>
+                    </a:p>
+                  </a:txBody>
+                  <a:tcPr anchor="ctr" marL="73152" marT="9144" marB="9144">
+                    <a:solidFill>
+                      <a:srgbClr val="FFFFFF"/>
+                    </a:solidFill>
+                  </a:tcPr>
+                </a:tc>
+                <a:tc>
+                  <a:txBody>
+                    <a:bodyPr/>
+                    <a:lstStyle/>
+                    <a:p>
+                      <a:r>
+                        <a:rPr sz="1150" b="1">
+                          <a:solidFill>
+                            <a:srgbClr val="E63946"/>
+                          </a:solidFill>
+                          <a:latin typeface="Microsoft JhengHei"/>
+                          <a:ea typeface="Microsoft JhengHei"/>
+                          <a:cs typeface="Microsoft JhengHei"/>
+                        </a:rPr>
+                        <a:t>駭客攻擊</a:t>
+                      </a:r>
+                    </a:p>
+                  </a:txBody>
+                  <a:tcPr anchor="ctr" marL="73152" marT="9144" marB="9144">
+                    <a:solidFill>
+                      <a:srgbClr val="FFFFFF"/>
+                    </a:solidFill>
+                  </a:tcPr>
+                </a:tc>
+                <a:tc>
+                  <a:txBody>
+                    <a:bodyPr/>
+                    <a:lstStyle/>
+                    <a:p>
+                      <a:r>
+                        <a:rPr sz="1150" b="0">
+                          <a:solidFill>
+                            <a:srgbClr val="1A2233"/>
+                          </a:solidFill>
+                          <a:latin typeface="Microsoft JhengHei"/>
+                          <a:ea typeface="Microsoft JhengHei"/>
+                          <a:cs typeface="Microsoft JhengHei"/>
+                        </a:rPr>
+                        <a:t>目前評估對公司所有業務均不受影響。</a:t>
+                      </a:r>
+                    </a:p>
+                  </a:txBody>
+                  <a:tcPr anchor="ctr" marL="73152" marT="9144" marB="9144">
+                    <a:solidFill>
+                      <a:srgbClr val="FFFFFF"/>
+                    </a:solidFill>
+                  </a:tcPr>
+                </a:tc>
+              </a:tr>
+              <a:tr h="324196">
+                <a:tc>
+                  <a:txBody>
+                    <a:bodyPr/>
+                    <a:lstStyle/>
+                    <a:p>
+                      <a:r>
+                        <a:rPr sz="1150" b="0">
+                          <a:solidFill>
+                            <a:srgbClr val="1A2233"/>
+                          </a:solidFill>
+                          <a:latin typeface="Microsoft JhengHei"/>
+                          <a:ea typeface="Microsoft JhengHei"/>
+                          <a:cs typeface="Microsoft JhengHei"/>
+                        </a:rPr>
+                        <a:t>長榮航太</a:t>
+                      </a:r>
+                    </a:p>
+                  </a:txBody>
+                  <a:tcPr anchor="ctr" marL="73152" marT="9144" marB="9144">
+                    <a:solidFill>
+                      <a:srgbClr val="EEF2F9"/>
+                    </a:solidFill>
+                  </a:tcPr>
+                </a:tc>
+                <a:tc>
+                  <a:txBody>
+                    <a:bodyPr/>
+                    <a:lstStyle/>
+                    <a:p>
+                      <a:r>
+                        <a:rPr sz="1150" b="0">
+                          <a:solidFill>
+                            <a:srgbClr val="1A2233"/>
+                          </a:solidFill>
+                          <a:latin typeface="Microsoft JhengHei"/>
+                          <a:ea typeface="Microsoft JhengHei"/>
+                          <a:cs typeface="Microsoft JhengHei"/>
+                        </a:rPr>
+                        <a:t>2645</a:t>
+                      </a:r>
+                    </a:p>
+                  </a:txBody>
+                  <a:tcPr anchor="ctr" marL="73152" marT="9144" marB="9144">
+                    <a:solidFill>
+                      <a:srgbClr val="EEF2F9"/>
+                    </a:solidFill>
+                  </a:tcPr>
+                </a:tc>
+                <a:tc>
+                  <a:txBody>
+                    <a:bodyPr/>
+                    <a:lstStyle/>
+                    <a:p>
+                      <a:r>
+                        <a:rPr sz="1150" b="0">
+                          <a:solidFill>
+                            <a:srgbClr val="1A2233"/>
+                          </a:solidFill>
+                          <a:latin typeface="Microsoft JhengHei"/>
+                          <a:ea typeface="Microsoft JhengHei"/>
+                          <a:cs typeface="Microsoft JhengHei"/>
+                        </a:rPr>
+                        <a:t>09/15</a:t>
+                      </a:r>
+                    </a:p>
+                  </a:txBody>
+                  <a:tcPr anchor="ctr" marL="73152" marT="9144" marB="9144">
+                    <a:solidFill>
+                      <a:srgbClr val="EEF2F9"/>
+                    </a:solidFill>
+                  </a:tcPr>
+                </a:tc>
+                <a:tc>
+                  <a:txBody>
+                    <a:bodyPr/>
+                    <a:lstStyle/>
+                    <a:p>
+                      <a:r>
+                        <a:rPr sz="1150" b="1">
+                          <a:solidFill>
+                            <a:srgbClr val="E63946"/>
+                          </a:solidFill>
+                          <a:latin typeface="Microsoft JhengHei"/>
+                          <a:ea typeface="Microsoft JhengHei"/>
+                          <a:cs typeface="Microsoft JhengHei"/>
+                        </a:rPr>
+                        <a:t>駭客攻擊</a:t>
+                      </a:r>
+                    </a:p>
+                  </a:txBody>
+                  <a:tcPr anchor="ctr" marL="73152" marT="9144" marB="9144">
+                    <a:solidFill>
+                      <a:srgbClr val="EEF2F9"/>
+                    </a:solidFill>
+                  </a:tcPr>
+                </a:tc>
+                <a:tc>
+                  <a:txBody>
+                    <a:bodyPr/>
+                    <a:lstStyle/>
+                    <a:p>
+                      <a:r>
+                        <a:rPr sz="1150" b="0">
+                          <a:solidFill>
+                            <a:srgbClr val="1A2233"/>
+                          </a:solidFill>
+                          <a:latin typeface="Microsoft JhengHei"/>
+                          <a:ea typeface="Microsoft JhengHei"/>
+                          <a:cs typeface="Microsoft JhengHei"/>
+                        </a:rPr>
+                        <a:t>經初步評估，核心資訊系統及營運業務運作皆維持正常，尚未發現公司及涉客…</a:t>
+                      </a:r>
+                    </a:p>
+                  </a:txBody>
+                  <a:tcPr anchor="ctr" marL="73152" marT="9144" marB="9144">
+                    <a:solidFill>
+                      <a:srgbClr val="EEF2F9"/>
+                    </a:solidFill>
+                  </a:tcPr>
+                </a:tc>
+              </a:tr>
+              <a:tr h="324196">
                 <a:tc>
                   <a:txBody>
                     <a:bodyPr/>
@@ -4365,7 +4610,7 @@
                   </a:tcPr>
                 </a:tc>
               </a:tr>
-              <a:tr h="384048">
+              <a:tr h="324196">
                 <a:tc>
                   <a:txBody>
                     <a:bodyPr/>
@@ -4487,7 +4732,7 @@
                   </a:tcPr>
                 </a:tc>
               </a:tr>
-              <a:tr h="384048">
+              <a:tr h="324196">
                 <a:tc>
                   <a:txBody>
                     <a:bodyPr/>
@@ -4609,7 +4854,7 @@
                   </a:tcPr>
                 </a:tc>
               </a:tr>
-              <a:tr h="384048">
+              <a:tr h="324196">
                 <a:tc>
                   <a:txBody>
                     <a:bodyPr/>
@@ -4731,7 +4976,7 @@
                   </a:tcPr>
                 </a:tc>
               </a:tr>
-              <a:tr h="384048">
+              <a:tr h="324196">
                 <a:tc>
                   <a:txBody>
                     <a:bodyPr/>
@@ -4853,7 +5098,7 @@
                   </a:tcPr>
                 </a:tc>
               </a:tr>
-              <a:tr h="384048">
+              <a:tr h="324196">
                 <a:tc>
                   <a:txBody>
                     <a:bodyPr/>
@@ -4975,7 +5220,7 @@
                   </a:tcPr>
                 </a:tc>
               </a:tr>
-              <a:tr h="384048">
+              <a:tr h="324196">
                 <a:tc>
                   <a:txBody>
                     <a:bodyPr/>
@@ -5097,7 +5342,7 @@
                   </a:tcPr>
                 </a:tc>
               </a:tr>
-              <a:tr h="384048">
+              <a:tr h="324200">
                 <a:tc>
                   <a:txBody>
                     <a:bodyPr/>
@@ -5536,7 +5781,7 @@
                 <a:ea typeface="Microsoft JhengHei"/>
                 <a:cs typeface="Microsoft JhengHei"/>
               </a:rPr>
-              <a:t>5 起</a:t>
+              <a:t>7 起</a:t>
             </a:r>
           </a:p>
         </p:txBody>
@@ -5573,7 +5818,7 @@
                 <a:ea typeface="Microsoft JhengHei"/>
                 <a:cs typeface="Microsoft JhengHei"/>
               </a:rPr>
-              <a:t>達爾膚、大車隊、杭特、數字、上詮</a:t>
+              <a:t>長榮航、長榮航太、達爾膚、大車隊、杭特、數字、上詮</a:t>
             </a:r>
           </a:p>
         </p:txBody>
@@ -5999,7 +6244,7 @@
         </p:nvGraphicFramePr>
         <p:xfrm>
           <a:off x="548640" y="1600200"/>
-          <a:ext cx="10789920" cy="4114800"/>
+          <a:ext cx="10789920" cy="4480560"/>
         </p:xfrm>
         <a:graphic>
           <a:graphicData uri="http://schemas.openxmlformats.org/drawingml/2006/table">
@@ -6014,7 +6259,7 @@
                 <a:gridCol w="3383280"/>
                 <a:gridCol w="2606040"/>
               </a:tblGrid>
-              <a:tr h="457200">
+              <a:tr h="407323">
                 <a:tc>
                   <a:txBody>
                     <a:bodyPr/>
@@ -6136,7 +6381,251 @@
                   </a:tcPr>
                 </a:tc>
               </a:tr>
-              <a:tr h="457200">
+              <a:tr h="407323">
+                <a:tc>
+                  <a:txBody>
+                    <a:bodyPr/>
+                    <a:lstStyle/>
+                    <a:p>
+                      <a:r>
+                        <a:rPr sz="1150" b="0">
+                          <a:solidFill>
+                            <a:srgbClr val="1A2233"/>
+                          </a:solidFill>
+                          <a:latin typeface="Microsoft JhengHei"/>
+                          <a:ea typeface="Microsoft JhengHei"/>
+                          <a:cs typeface="Microsoft JhengHei"/>
+                        </a:rPr>
+                        <a:t>長榮航</a:t>
+                      </a:r>
+                    </a:p>
+                  </a:txBody>
+                  <a:tcPr anchor="ctr" marL="73152" marT="9144" marB="9144">
+                    <a:solidFill>
+                      <a:srgbClr val="FFFFFF"/>
+                    </a:solidFill>
+                  </a:tcPr>
+                </a:tc>
+                <a:tc>
+                  <a:txBody>
+                    <a:bodyPr/>
+                    <a:lstStyle/>
+                    <a:p>
+                      <a:r>
+                        <a:rPr sz="1150" b="0">
+                          <a:solidFill>
+                            <a:srgbClr val="1A2233"/>
+                          </a:solidFill>
+                          <a:latin typeface="Microsoft JhengHei"/>
+                          <a:ea typeface="Microsoft JhengHei"/>
+                          <a:cs typeface="Microsoft JhengHei"/>
+                        </a:rPr>
+                        <a:t>2618</a:t>
+                      </a:r>
+                    </a:p>
+                  </a:txBody>
+                  <a:tcPr anchor="ctr" marL="73152" marT="9144" marB="9144">
+                    <a:solidFill>
+                      <a:srgbClr val="FFFFFF"/>
+                    </a:solidFill>
+                  </a:tcPr>
+                </a:tc>
+                <a:tc>
+                  <a:txBody>
+                    <a:bodyPr/>
+                    <a:lstStyle/>
+                    <a:p>
+                      <a:r>
+                        <a:rPr sz="1150" b="1">
+                          <a:solidFill>
+                            <a:srgbClr val="E63946"/>
+                          </a:solidFill>
+                          <a:latin typeface="Microsoft JhengHei"/>
+                          <a:ea typeface="Microsoft JhengHei"/>
+                          <a:cs typeface="Microsoft JhengHei"/>
+                        </a:rPr>
+                        <a:t>駭客攻擊</a:t>
+                      </a:r>
+                    </a:p>
+                  </a:txBody>
+                  <a:tcPr anchor="ctr" marL="73152" marT="9144" marB="9144">
+                    <a:solidFill>
+                      <a:srgbClr val="FFFFFF"/>
+                    </a:solidFill>
+                  </a:tcPr>
+                </a:tc>
+                <a:tc>
+                  <a:txBody>
+                    <a:bodyPr/>
+                    <a:lstStyle/>
+                    <a:p>
+                      <a:r>
+                        <a:rPr sz="1150" b="0">
+                          <a:solidFill>
+                            <a:srgbClr val="1A2233"/>
+                          </a:solidFill>
+                          <a:latin typeface="Microsoft JhengHei"/>
+                          <a:ea typeface="Microsoft JhengHei"/>
+                          <a:cs typeface="Microsoft JhengHei"/>
+                        </a:rPr>
+                        <a:t>安侯建業聯合會計師事務所</a:t>
+                      </a:r>
+                    </a:p>
+                  </a:txBody>
+                  <a:tcPr anchor="ctr" marL="73152" marT="9144" marB="9144">
+                    <a:solidFill>
+                      <a:srgbClr val="FFFFFF"/>
+                    </a:solidFill>
+                  </a:tcPr>
+                </a:tc>
+                <a:tc>
+                  <a:txBody>
+                    <a:bodyPr/>
+                    <a:lstStyle/>
+                    <a:p>
+                      <a:r>
+                        <a:rPr sz="1150" b="0">
+                          <a:solidFill>
+                            <a:srgbClr val="1A2233"/>
+                          </a:solidFill>
+                          <a:latin typeface="Microsoft JhengHei"/>
+                          <a:ea typeface="Microsoft JhengHei"/>
+                          <a:cs typeface="Microsoft JhengHei"/>
+                        </a:rPr>
+                        <a:t>陳雅琳、楊雲筑</a:t>
+                      </a:r>
+                    </a:p>
+                  </a:txBody>
+                  <a:tcPr anchor="ctr" marL="73152" marT="9144" marB="9144">
+                    <a:solidFill>
+                      <a:srgbClr val="FFFFFF"/>
+                    </a:solidFill>
+                  </a:tcPr>
+                </a:tc>
+              </a:tr>
+              <a:tr h="407323">
+                <a:tc>
+                  <a:txBody>
+                    <a:bodyPr/>
+                    <a:lstStyle/>
+                    <a:p>
+                      <a:r>
+                        <a:rPr sz="1150" b="0">
+                          <a:solidFill>
+                            <a:srgbClr val="1A2233"/>
+                          </a:solidFill>
+                          <a:latin typeface="Microsoft JhengHei"/>
+                          <a:ea typeface="Microsoft JhengHei"/>
+                          <a:cs typeface="Microsoft JhengHei"/>
+                        </a:rPr>
+                        <a:t>長榮航太</a:t>
+                      </a:r>
+                    </a:p>
+                  </a:txBody>
+                  <a:tcPr anchor="ctr" marL="73152" marT="9144" marB="9144">
+                    <a:solidFill>
+                      <a:srgbClr val="EEF2F9"/>
+                    </a:solidFill>
+                  </a:tcPr>
+                </a:tc>
+                <a:tc>
+                  <a:txBody>
+                    <a:bodyPr/>
+                    <a:lstStyle/>
+                    <a:p>
+                      <a:r>
+                        <a:rPr sz="1150" b="0">
+                          <a:solidFill>
+                            <a:srgbClr val="1A2233"/>
+                          </a:solidFill>
+                          <a:latin typeface="Microsoft JhengHei"/>
+                          <a:ea typeface="Microsoft JhengHei"/>
+                          <a:cs typeface="Microsoft JhengHei"/>
+                        </a:rPr>
+                        <a:t>2645</a:t>
+                      </a:r>
+                    </a:p>
+                  </a:txBody>
+                  <a:tcPr anchor="ctr" marL="73152" marT="9144" marB="9144">
+                    <a:solidFill>
+                      <a:srgbClr val="EEF2F9"/>
+                    </a:solidFill>
+                  </a:tcPr>
+                </a:tc>
+                <a:tc>
+                  <a:txBody>
+                    <a:bodyPr/>
+                    <a:lstStyle/>
+                    <a:p>
+                      <a:r>
+                        <a:rPr sz="1150" b="1">
+                          <a:solidFill>
+                            <a:srgbClr val="E63946"/>
+                          </a:solidFill>
+                          <a:latin typeface="Microsoft JhengHei"/>
+                          <a:ea typeface="Microsoft JhengHei"/>
+                          <a:cs typeface="Microsoft JhengHei"/>
+                        </a:rPr>
+                        <a:t>駭客攻擊</a:t>
+                      </a:r>
+                    </a:p>
+                  </a:txBody>
+                  <a:tcPr anchor="ctr" marL="73152" marT="9144" marB="9144">
+                    <a:solidFill>
+                      <a:srgbClr val="EEF2F9"/>
+                    </a:solidFill>
+                  </a:tcPr>
+                </a:tc>
+                <a:tc>
+                  <a:txBody>
+                    <a:bodyPr/>
+                    <a:lstStyle/>
+                    <a:p>
+                      <a:r>
+                        <a:rPr sz="1150" b="0">
+                          <a:solidFill>
+                            <a:srgbClr val="1A2233"/>
+                          </a:solidFill>
+                          <a:latin typeface="Microsoft JhengHei"/>
+                          <a:ea typeface="Microsoft JhengHei"/>
+                          <a:cs typeface="Microsoft JhengHei"/>
+                        </a:rPr>
+                        <a:t>安侯建業聯合會計師事務所</a:t>
+                      </a:r>
+                    </a:p>
+                  </a:txBody>
+                  <a:tcPr anchor="ctr" marL="73152" marT="9144" marB="9144">
+                    <a:solidFill>
+                      <a:srgbClr val="EEF2F9"/>
+                    </a:solidFill>
+                  </a:tcPr>
+                </a:tc>
+                <a:tc>
+                  <a:txBody>
+                    <a:bodyPr/>
+                    <a:lstStyle/>
+                    <a:p>
+                      <a:r>
+                        <a:rPr sz="1150" b="0">
+                          <a:solidFill>
+                            <a:srgbClr val="1A2233"/>
+                          </a:solidFill>
+                          <a:latin typeface="Microsoft JhengHei"/>
+                          <a:ea typeface="Microsoft JhengHei"/>
+                          <a:cs typeface="Microsoft JhengHei"/>
+                        </a:rPr>
+                        <a:t>陳雅琳、鄭博仁</a:t>
+                      </a:r>
+                    </a:p>
+                  </a:txBody>
+                  <a:tcPr anchor="ctr" marL="73152" marT="9144" marB="9144">
+                    <a:solidFill>
+                      <a:srgbClr val="EEF2F9"/>
+                    </a:solidFill>
+                  </a:tcPr>
+                </a:tc>
+              </a:tr>
+              <a:tr h="407323">
                 <a:tc>
                   <a:txBody>
                     <a:bodyPr/>
@@ -6258,7 +6747,7 @@
                   </a:tcPr>
                 </a:tc>
               </a:tr>
-              <a:tr h="457200">
+              <a:tr h="407323">
                 <a:tc>
                   <a:txBody>
                     <a:bodyPr/>
@@ -6380,7 +6869,7 @@
                   </a:tcPr>
                 </a:tc>
               </a:tr>
-              <a:tr h="457200">
+              <a:tr h="407323">
                 <a:tc>
                   <a:txBody>
                     <a:bodyPr/>
@@ -6502,7 +6991,7 @@
                   </a:tcPr>
                 </a:tc>
               </a:tr>
-              <a:tr h="457200">
+              <a:tr h="407323">
                 <a:tc>
                   <a:txBody>
                     <a:bodyPr/>
@@ -6624,7 +7113,7 @@
                   </a:tcPr>
                 </a:tc>
               </a:tr>
-              <a:tr h="457200">
+              <a:tr h="407323">
                 <a:tc>
                   <a:txBody>
                     <a:bodyPr/>
@@ -6746,7 +7235,7 @@
                   </a:tcPr>
                 </a:tc>
               </a:tr>
-              <a:tr h="457200">
+              <a:tr h="407323">
                 <a:tc>
                   <a:txBody>
                     <a:bodyPr/>
@@ -6868,7 +7357,7 @@
                   </a:tcPr>
                 </a:tc>
               </a:tr>
-              <a:tr h="457200">
+              <a:tr h="407323">
                 <a:tc>
                   <a:txBody>
                     <a:bodyPr/>
@@ -6990,7 +7479,7 @@
                   </a:tcPr>
                 </a:tc>
               </a:tr>
-              <a:tr h="457200">
+              <a:tr h="407330">
                 <a:tc>
                   <a:txBody>
                     <a:bodyPr/>
@@ -8561,7 +9050,7 @@
             <a:avLst/>
           </a:prstGeom>
           <a:solidFill>
-            <a:srgbClr val="F4A261"/>
+            <a:srgbClr val="E63946"/>
           </a:solidFill>
           <a:ln>
             <a:noFill/>
@@ -8622,7 +9111,7 @@
                 <a:ea typeface="Microsoft JhengHei"/>
                 <a:cs typeface="Microsoft JhengHei"/>
               </a:rPr>
-              <a:t>崴寶 </a:t>
+              <a:t>長榮航 </a:t>
             </a:r>
             <a:r>
               <a:rPr sz="1300" b="0">
@@ -8633,7 +9122,7 @@
                 <a:ea typeface="Microsoft JhengHei"/>
                 <a:cs typeface="Microsoft JhengHei"/>
               </a:rPr>
-              <a:t>7744</a:t>
+              <a:t>2618</a:t>
             </a:r>
           </a:p>
         </p:txBody>
@@ -8653,7 +9142,7 @@
             <a:avLst/>
           </a:prstGeom>
           <a:solidFill>
-            <a:srgbClr val="F4A261"/>
+            <a:srgbClr val="E63946"/>
           </a:solidFill>
           <a:ln>
             <a:noFill/>
@@ -8714,7 +9203,7 @@
                 <a:ea typeface="Microsoft JhengHei"/>
                 <a:cs typeface="Microsoft JhengHei"/>
               </a:rPr>
-              <a:t>勒索病毒/加密</a:t>
+              <a:t>駭客攻擊</a:t>
             </a:r>
           </a:p>
         </p:txBody>
@@ -8749,7 +9238,7 @@
             <a:r>
               <a:rPr sz="1100" b="1">
                 <a:solidFill>
-                  <a:srgbClr val="F4A261"/>
+                  <a:srgbClr val="E63946"/>
                 </a:solidFill>
                 <a:latin typeface="Microsoft JhengHei"/>
                 <a:ea typeface="Microsoft JhengHei"/>
@@ -8766,7 +9255,7 @@
                 <a:ea typeface="Microsoft JhengHei"/>
                 <a:cs typeface="Microsoft JhengHei"/>
               </a:rPr>
-              <a:t>本公司於115年9月14日上午發現資訊系統遭駭客入侵，部分系統資料遭加密鎖定。本公司立即啟動資安…</a:t>
+              <a:t>本公司發現有不明人士透過惡意IP入侵本公司內部資訊環境，取得員工姓名與公務聯繫資訊。</a:t>
             </a:r>
           </a:p>
         </p:txBody>
@@ -8801,7 +9290,7 @@
             <a:r>
               <a:rPr sz="1100" b="1">
                 <a:solidFill>
-                  <a:srgbClr val="F4A261"/>
+                  <a:srgbClr val="E63946"/>
                 </a:solidFill>
                 <a:latin typeface="Microsoft JhengHei"/>
                 <a:ea typeface="Microsoft JhengHei"/>
@@ -8818,7 +9307,7 @@
                 <a:ea typeface="Microsoft JhengHei"/>
                 <a:cs typeface="Microsoft JhengHei"/>
               </a:rPr>
-              <a:t>本公司將持續配合專業資安團隊進行事件調查與監控，並加強資訊安全管理措施，包括提升端點防護機制、強化網路監控能力、落實帳號…</a:t>
+              <a:t>本公司已重新檢視可能造成資安疑慮的因子並加以防範，同時持續加強監控。</a:t>
             </a:r>
           </a:p>
         </p:txBody>
@@ -8945,7 +9434,7 @@
                 <a:ea typeface="Microsoft JhengHei"/>
                 <a:cs typeface="Microsoft JhengHei"/>
               </a:rPr>
-              <a:t>達爾膚 </a:t>
+              <a:t>長榮航太 </a:t>
             </a:r>
             <a:r>
               <a:rPr sz="1300" b="0">
@@ -8956,7 +9445,7 @@
                 <a:ea typeface="Microsoft JhengHei"/>
                 <a:cs typeface="Microsoft JhengHei"/>
               </a:rPr>
-              <a:t>6523</a:t>
+              <a:t>2645</a:t>
             </a:r>
           </a:p>
         </p:txBody>
@@ -9089,7 +9578,7 @@
                 <a:ea typeface="Microsoft JhengHei"/>
                 <a:cs typeface="Microsoft JhengHei"/>
               </a:rPr>
-              <a:t>本公司部分內部資訊系統遭受網路攻擊事件，初步評估對公司營運無重大影響。</a:t>
+              <a:t>本公司發現部分內部資訊系統遭受網路攻擊。</a:t>
             </a:r>
           </a:p>
         </p:txBody>
@@ -9141,7 +9630,7 @@
                 <a:ea typeface="Microsoft JhengHei"/>
                 <a:cs typeface="Microsoft JhengHei"/>
               </a:rPr>
-              <a:t>本公司將持續強化網路與資訊基礎架構之安全管控，以確保資訊安全。</a:t>
+              <a:t>本公司將持續監控公司整體資訊系統運作狀況，並檢討強化現有資安防護措施，以確保資訊安全。</a:t>
             </a:r>
           </a:p>
         </p:txBody>
@@ -9207,7 +9696,7 @@
             <a:avLst/>
           </a:prstGeom>
           <a:solidFill>
-            <a:srgbClr val="E63946"/>
+            <a:srgbClr val="F4A261"/>
           </a:solidFill>
           <a:ln>
             <a:noFill/>
@@ -9268,7 +9757,7 @@
                 <a:ea typeface="Microsoft JhengHei"/>
                 <a:cs typeface="Microsoft JhengHei"/>
               </a:rPr>
-              <a:t>大車隊 </a:t>
+              <a:t>崴寶 </a:t>
             </a:r>
             <a:r>
               <a:rPr sz="1300" b="0">
@@ -9279,7 +9768,7 @@
                 <a:ea typeface="Microsoft JhengHei"/>
                 <a:cs typeface="Microsoft JhengHei"/>
               </a:rPr>
-              <a:t>2640</a:t>
+              <a:t>7744</a:t>
             </a:r>
           </a:p>
         </p:txBody>
@@ -9299,7 +9788,7 @@
             <a:avLst/>
           </a:prstGeom>
           <a:solidFill>
-            <a:srgbClr val="E63946"/>
+            <a:srgbClr val="F4A261"/>
           </a:solidFill>
           <a:ln>
             <a:noFill/>
@@ -9360,7 +9849,7 @@
                 <a:ea typeface="Microsoft JhengHei"/>
                 <a:cs typeface="Microsoft JhengHei"/>
               </a:rPr>
-              <a:t>駭客攻擊</a:t>
+              <a:t>勒索病毒/加密</a:t>
             </a:r>
           </a:p>
         </p:txBody>
@@ -9395,7 +9884,7 @@
             <a:r>
               <a:rPr sz="1100" b="1">
                 <a:solidFill>
-                  <a:srgbClr val="E63946"/>
+                  <a:srgbClr val="F4A261"/>
                 </a:solidFill>
                 <a:latin typeface="Microsoft JhengHei"/>
                 <a:ea typeface="Microsoft JhengHei"/>
@@ -9412,7 +9901,7 @@
                 <a:ea typeface="Microsoft JhengHei"/>
                 <a:cs typeface="Microsoft JhengHei"/>
               </a:rPr>
-              <a:t>本公司重要子公司全球商務科技股份有限公司於今日發現部分資訊系統遭受網路攻擊，已立即啟動資安應變機…</a:t>
+              <a:t>本公司於115年9月14日上午發現資訊系統遭駭客入侵，部分系統資料遭加密鎖定。本公司立即啟動資安…</a:t>
             </a:r>
           </a:p>
         </p:txBody>
@@ -9447,7 +9936,7 @@
             <a:r>
               <a:rPr sz="1100" b="1">
                 <a:solidFill>
-                  <a:srgbClr val="E63946"/>
+                  <a:srgbClr val="F4A261"/>
                 </a:solidFill>
                 <a:latin typeface="Microsoft JhengHei"/>
                 <a:ea typeface="Microsoft JhengHei"/>
@@ -9464,7 +9953,7 @@
                 <a:ea typeface="Microsoft JhengHei"/>
                 <a:cs typeface="Microsoft JhengHei"/>
               </a:rPr>
-              <a:t>公司將持續進行資安鑑識、系統安全強化及相關風險控管作業，受影響系統預期可於短期內逐步恢復正常運作；後續如調查結果或事件發…</a:t>
+              <a:t>本公司將持續配合專業資安團隊進行事件調查與監控，並加強資訊安全管理措施，包括提升端點防護機制、強化網路監控能力、落實帳號…</a:t>
             </a:r>
           </a:p>
         </p:txBody>
@@ -9530,7 +10019,7 @@
             <a:avLst/>
           </a:prstGeom>
           <a:solidFill>
-            <a:srgbClr val="F4A261"/>
+            <a:srgbClr val="E63946"/>
           </a:solidFill>
           <a:ln>
             <a:noFill/>
@@ -9591,7 +10080,7 @@
                 <a:ea typeface="Microsoft JhengHei"/>
                 <a:cs typeface="Microsoft JhengHei"/>
               </a:rPr>
-              <a:t>富爾特 </a:t>
+              <a:t>達爾膚 </a:t>
             </a:r>
             <a:r>
               <a:rPr sz="1300" b="0">
@@ -9602,7 +10091,7 @@
                 <a:ea typeface="Microsoft JhengHei"/>
                 <a:cs typeface="Microsoft JhengHei"/>
               </a:rPr>
-              <a:t>6136</a:t>
+              <a:t>6523</a:t>
             </a:r>
           </a:p>
         </p:txBody>
@@ -9622,7 +10111,7 @@
             <a:avLst/>
           </a:prstGeom>
           <a:solidFill>
-            <a:srgbClr val="F4A261"/>
+            <a:srgbClr val="E63946"/>
           </a:solidFill>
           <a:ln>
             <a:noFill/>
@@ -9683,7 +10172,7 @@
                 <a:ea typeface="Microsoft JhengHei"/>
                 <a:cs typeface="Microsoft JhengHei"/>
               </a:rPr>
-              <a:t>勒索病毒/加密</a:t>
+              <a:t>駭客攻擊</a:t>
             </a:r>
           </a:p>
         </p:txBody>
@@ -9718,7 +10207,7 @@
             <a:r>
               <a:rPr sz="1100" b="1">
                 <a:solidFill>
-                  <a:srgbClr val="F4A261"/>
+                  <a:srgbClr val="E63946"/>
                 </a:solidFill>
                 <a:latin typeface="Microsoft JhengHei"/>
                 <a:ea typeface="Microsoft JhengHei"/>
@@ -9735,7 +10224,7 @@
                 <a:ea typeface="Microsoft JhengHei"/>
                 <a:cs typeface="Microsoft JhengHei"/>
               </a:rPr>
-              <a:t>本公司之子公司格帝控股股份有限公司偵測到部份伺服器遭受網路勒索病毒攻擊，致使包含ERP在內之部份…</a:t>
+              <a:t>本公司部分內部資訊系統遭受網路攻擊事件，初步評估對公司營運無重大影響。</a:t>
             </a:r>
           </a:p>
         </p:txBody>
@@ -9770,7 +10259,7 @@
             <a:r>
               <a:rPr sz="1100" b="1">
                 <a:solidFill>
-                  <a:srgbClr val="F4A261"/>
+                  <a:srgbClr val="E63946"/>
                 </a:solidFill>
                 <a:latin typeface="Microsoft JhengHei"/>
                 <a:ea typeface="Microsoft JhengHei"/>
@@ -9787,7 +10276,7 @@
                 <a:ea typeface="Microsoft JhengHei"/>
                 <a:cs typeface="Microsoft JhengHei"/>
               </a:rPr>
-              <a:t>本公司及所屬子公司將持續密集監控，並強化網路與資訊基礎架構之管控，以確保資訊系統安全。</a:t>
+              <a:t>本公司將持續強化網路與資訊基礎架構之安全管控，以確保資訊安全。</a:t>
             </a:r>
           </a:p>
         </p:txBody>
@@ -9989,7 +10478,7 @@
             <a:avLst/>
           </a:prstGeom>
           <a:solidFill>
-            <a:srgbClr val="F4A261"/>
+            <a:srgbClr val="E63946"/>
           </a:solidFill>
           <a:ln>
             <a:noFill/>
@@ -10050,7 +10539,7 @@
                 <a:ea typeface="Microsoft JhengHei"/>
                 <a:cs typeface="Microsoft JhengHei"/>
               </a:rPr>
-              <a:t>創新服務 </a:t>
+              <a:t>大車隊 </a:t>
             </a:r>
             <a:r>
               <a:rPr sz="1300" b="0">
@@ -10061,7 +10550,7 @@
                 <a:ea typeface="Microsoft JhengHei"/>
                 <a:cs typeface="Microsoft JhengHei"/>
               </a:rPr>
-              <a:t>7828</a:t>
+              <a:t>2640</a:t>
             </a:r>
           </a:p>
         </p:txBody>
@@ -10081,7 +10570,7 @@
             <a:avLst/>
           </a:prstGeom>
           <a:solidFill>
-            <a:srgbClr val="F4A261"/>
+            <a:srgbClr val="E63946"/>
           </a:solidFill>
           <a:ln>
             <a:noFill/>
@@ -10142,7 +10631,7 @@
                 <a:ea typeface="Microsoft JhengHei"/>
                 <a:cs typeface="Microsoft JhengHei"/>
               </a:rPr>
-              <a:t>勒索病毒/加密</a:t>
+              <a:t>駭客攻擊</a:t>
             </a:r>
           </a:p>
         </p:txBody>
@@ -10177,7 +10666,7 @@
             <a:r>
               <a:rPr sz="1100" b="1">
                 <a:solidFill>
-                  <a:srgbClr val="F4A261"/>
+                  <a:srgbClr val="E63946"/>
                 </a:solidFill>
                 <a:latin typeface="Microsoft JhengHei"/>
                 <a:ea typeface="Microsoft JhengHei"/>
@@ -10194,7 +10683,7 @@
                 <a:ea typeface="Microsoft JhengHei"/>
                 <a:cs typeface="Microsoft JhengHei"/>
               </a:rPr>
-              <a:t>本公司於今日偵測到部份伺服器遭受網路勒索病毒攻擊，致使包含ERP在內之部份資訊系統無法正常運作。</a:t>
+              <a:t>本公司重要子公司全球商務科技股份有限公司於今日發現部分資訊系統遭受網路攻擊，已立即啟動資安應變機…</a:t>
             </a:r>
           </a:p>
         </p:txBody>
@@ -10229,7 +10718,7 @@
             <a:r>
               <a:rPr sz="1100" b="1">
                 <a:solidFill>
-                  <a:srgbClr val="F4A261"/>
+                  <a:srgbClr val="E63946"/>
                 </a:solidFill>
                 <a:latin typeface="Microsoft JhengHei"/>
                 <a:ea typeface="Microsoft JhengHei"/>
@@ -10246,7 +10735,7 @@
                 <a:ea typeface="Microsoft JhengHei"/>
                 <a:cs typeface="Microsoft JhengHei"/>
               </a:rPr>
-              <a:t>本公司將持續密集監控，並強化網路與資訊基礎架構之管控，以確保資訊系統安全。</a:t>
+              <a:t>公司將持續進行資安鑑識、系統安全強化及相關風險控管作業，受影響系統預期可於短期內逐步恢復正常運作；後續如調查結果或事件發…</a:t>
             </a:r>
           </a:p>
         </p:txBody>
@@ -10312,7 +10801,7 @@
             <a:avLst/>
           </a:prstGeom>
           <a:solidFill>
-            <a:srgbClr val="E63946"/>
+            <a:srgbClr val="F4A261"/>
           </a:solidFill>
           <a:ln>
             <a:noFill/>
@@ -10373,7 +10862,7 @@
                 <a:ea typeface="Microsoft JhengHei"/>
                 <a:cs typeface="Microsoft JhengHei"/>
               </a:rPr>
-              <a:t>杭特 </a:t>
+              <a:t>富爾特 </a:t>
             </a:r>
             <a:r>
               <a:rPr sz="1300" b="0">
@@ -10384,7 +10873,7 @@
                 <a:ea typeface="Microsoft JhengHei"/>
                 <a:cs typeface="Microsoft JhengHei"/>
               </a:rPr>
-              <a:t>3297</a:t>
+              <a:t>6136</a:t>
             </a:r>
           </a:p>
         </p:txBody>
@@ -10404,7 +10893,7 @@
             <a:avLst/>
           </a:prstGeom>
           <a:solidFill>
-            <a:srgbClr val="E63946"/>
+            <a:srgbClr val="F4A261"/>
           </a:solidFill>
           <a:ln>
             <a:noFill/>
@@ -10465,7 +10954,7 @@
                 <a:ea typeface="Microsoft JhengHei"/>
                 <a:cs typeface="Microsoft JhengHei"/>
               </a:rPr>
-              <a:t>駭客攻擊</a:t>
+              <a:t>勒索病毒/加密</a:t>
             </a:r>
           </a:p>
         </p:txBody>
@@ -10500,7 +10989,7 @@
             <a:r>
               <a:rPr sz="1100" b="1">
                 <a:solidFill>
-                  <a:srgbClr val="E63946"/>
+                  <a:srgbClr val="F4A261"/>
                 </a:solidFill>
                 <a:latin typeface="Microsoft JhengHei"/>
                 <a:ea typeface="Microsoft JhengHei"/>
@@ -10517,7 +11006,7 @@
                 <a:ea typeface="Microsoft JhengHei"/>
                 <a:cs typeface="Microsoft JhengHei"/>
               </a:rPr>
-              <a:t>本公司資訊系統遭受駭客網路攻擊，初步評估對公司營運暫無重大影響。</a:t>
+              <a:t>本公司之子公司格帝控股股份有限公司偵測到部份伺服器遭受網路勒索病毒攻擊，致使包含ERP在內之部份…</a:t>
             </a:r>
           </a:p>
         </p:txBody>
@@ -10552,7 +11041,7 @@
             <a:r>
               <a:rPr sz="1100" b="1">
                 <a:solidFill>
-                  <a:srgbClr val="E63946"/>
+                  <a:srgbClr val="F4A261"/>
                 </a:solidFill>
                 <a:latin typeface="Microsoft JhengHei"/>
                 <a:ea typeface="Microsoft JhengHei"/>
@@ -10569,7 +11058,7 @@
                 <a:ea typeface="Microsoft JhengHei"/>
                 <a:cs typeface="Microsoft JhengHei"/>
               </a:rPr>
-              <a:t>本公司將持續提升網路與資訊基礎架構之安全管控，以確保資訊安全。</a:t>
+              <a:t>本公司及所屬子公司將持續密集監控，並強化網路與資訊基礎架構之管控，以確保資訊系統安全。</a:t>
             </a:r>
           </a:p>
         </p:txBody>
@@ -10635,7 +11124,7 @@
             <a:avLst/>
           </a:prstGeom>
           <a:solidFill>
-            <a:srgbClr val="E63946"/>
+            <a:srgbClr val="F4A261"/>
           </a:solidFill>
           <a:ln>
             <a:noFill/>
@@ -10696,7 +11185,7 @@
                 <a:ea typeface="Microsoft JhengHei"/>
                 <a:cs typeface="Microsoft JhengHei"/>
               </a:rPr>
-              <a:t>數字 </a:t>
+              <a:t>創新服務 </a:t>
             </a:r>
             <a:r>
               <a:rPr sz="1300" b="0">
@@ -10707,7 +11196,7 @@
                 <a:ea typeface="Microsoft JhengHei"/>
                 <a:cs typeface="Microsoft JhengHei"/>
               </a:rPr>
-              <a:t>5287</a:t>
+              <a:t>7828</a:t>
             </a:r>
           </a:p>
         </p:txBody>
@@ -10727,7 +11216,7 @@
             <a:avLst/>
           </a:prstGeom>
           <a:solidFill>
-            <a:srgbClr val="E63946"/>
+            <a:srgbClr val="F4A261"/>
           </a:solidFill>
           <a:ln>
             <a:noFill/>
@@ -10788,7 +11277,7 @@
                 <a:ea typeface="Microsoft JhengHei"/>
                 <a:cs typeface="Microsoft JhengHei"/>
               </a:rPr>
-              <a:t>駭客攻擊</a:t>
+              <a:t>勒索病毒/加密</a:t>
             </a:r>
           </a:p>
         </p:txBody>
@@ -10823,7 +11312,7 @@
             <a:r>
               <a:rPr sz="1100" b="1">
                 <a:solidFill>
-                  <a:srgbClr val="E63946"/>
+                  <a:srgbClr val="F4A261"/>
                 </a:solidFill>
                 <a:latin typeface="Microsoft JhengHei"/>
                 <a:ea typeface="Microsoft JhengHei"/>
@@ -10840,7 +11329,7 @@
                 <a:ea typeface="Microsoft JhengHei"/>
                 <a:cs typeface="Microsoft JhengHei"/>
               </a:rPr>
-              <a:t>本公司於115年8月20日發現591網站登入行為異常，經查發現外部攻擊者利用登入機制之弱點，繞過…</a:t>
+              <a:t>本公司於今日偵測到部份伺服器遭受網路勒索病毒攻擊，致使包含ERP在內之部份資訊系統無法正常運作。</a:t>
             </a:r>
           </a:p>
         </p:txBody>
@@ -10875,7 +11364,7 @@
             <a:r>
               <a:rPr sz="1100" b="1">
                 <a:solidFill>
-                  <a:srgbClr val="E63946"/>
+                  <a:srgbClr val="F4A261"/>
                 </a:solidFill>
                 <a:latin typeface="Microsoft JhengHei"/>
                 <a:ea typeface="Microsoft JhengHei"/>
@@ -10892,7 +11381,7 @@
                 <a:ea typeface="Microsoft JhengHei"/>
                 <a:cs typeface="Microsoft JhengHei"/>
               </a:rPr>
-              <a:t>(1)依據安全軟體發展生命週期（SSDLC）框架，持續優化系統開發流程及資安檢視機制。(2)強化登入驗證、存取控制及異常…</a:t>
+              <a:t>本公司將持續密集監控，並強化網路與資訊基礎架構之管控，以確保資訊系統安全。</a:t>
             </a:r>
           </a:p>
         </p:txBody>
@@ -11019,7 +11508,7 @@
                 <a:ea typeface="Microsoft JhengHei"/>
                 <a:cs typeface="Microsoft JhengHei"/>
               </a:rPr>
-              <a:t>上詮 </a:t>
+              <a:t>杭特 </a:t>
             </a:r>
             <a:r>
               <a:rPr sz="1300" b="0">
@@ -11030,7 +11519,7 @@
                 <a:ea typeface="Microsoft JhengHei"/>
                 <a:cs typeface="Microsoft JhengHei"/>
               </a:rPr>
-              <a:t>3363</a:t>
+              <a:t>3297</a:t>
             </a:r>
           </a:p>
         </p:txBody>
@@ -11163,7 +11652,7 @@
                 <a:ea typeface="Microsoft JhengHei"/>
                 <a:cs typeface="Microsoft JhengHei"/>
               </a:rPr>
-              <a:t>本公司資訊系統遭受駭客網路攻擊，部分主機與電腦遭受病毒攻擊。</a:t>
+              <a:t>本公司資訊系統遭受駭客網路攻擊，初步評估對公司營運暫無重大影響。</a:t>
             </a:r>
           </a:p>
         </p:txBody>
@@ -11177,6 +11666,788 @@
         <p:spPr>
           <a:xfrm>
             <a:off x="6400800" y="5257800"/>
+            <a:ext cx="4937760" cy="713232"/>
+          </a:xfrm>
+          <a:prstGeom prst="rect">
+            <a:avLst/>
+          </a:prstGeom>
+          <a:noFill/>
+        </p:spPr>
+        <p:txBody>
+          <a:bodyPr wrap="square" anchor="t" lIns="0" rIns="0" tIns="0" bIns="0">
+            <a:spAutoFit/>
+          </a:bodyPr>
+          <a:lstStyle/>
+          <a:p>
+            <a:pPr algn="l">
+              <a:lnSpc>
+                <a:spcPts val="1500"/>
+              </a:lnSpc>
+            </a:pPr>
+            <a:r>
+              <a:rPr sz="1100" b="1">
+                <a:solidFill>
+                  <a:srgbClr val="E63946"/>
+                </a:solidFill>
+                <a:latin typeface="Microsoft JhengHei"/>
+                <a:ea typeface="Microsoft JhengHei"/>
+                <a:cs typeface="Microsoft JhengHei"/>
+              </a:rPr>
+              <a:t>因應　</a:t>
+            </a:r>
+            <a:r>
+              <a:rPr sz="1100" b="0">
+                <a:solidFill>
+                  <a:srgbClr val="1A2233"/>
+                </a:solidFill>
+                <a:latin typeface="Microsoft JhengHei"/>
+                <a:ea typeface="Microsoft JhengHei"/>
+                <a:cs typeface="Microsoft JhengHei"/>
+              </a:rPr>
+              <a:t>本公司將持續提升網路與資訊基礎架構之安全管控，以確保資訊安全。</a:t>
+            </a:r>
+          </a:p>
+        </p:txBody>
+      </p:sp>
+    </p:spTree>
+  </p:cSld>
+  <p:clrMapOvr>
+    <a:masterClrMapping/>
+  </p:clrMapOvr>
+</p:sld>
+</file>
+
+<file path=ppt/slides/slide8.xml><?xml version="1.0" encoding="utf-8"?>
+<p:sld xmlns:a="http://schemas.openxmlformats.org/drawingml/2006/main" xmlns:p="http://schemas.openxmlformats.org/presentationml/2006/main" xmlns:r="http://schemas.openxmlformats.org/officeDocument/2006/relationships">
+  <p:cSld>
+    <p:spTree>
+      <p:nvGrpSpPr>
+        <p:cNvPr id="1" name=""/>
+        <p:cNvGrpSpPr/>
+        <p:nvPr/>
+      </p:nvGrpSpPr>
+      <p:grpSpPr/>
+      <p:sp>
+        <p:nvSpPr>
+          <p:cNvPr id="2" name="Rectangle 1"/>
+          <p:cNvSpPr/>
+          <p:nvPr/>
+        </p:nvSpPr>
+        <p:spPr>
+          <a:xfrm>
+            <a:off x="0" y="0"/>
+            <a:ext cx="12191695" cy="6858000"/>
+          </a:xfrm>
+          <a:prstGeom prst="rect">
+            <a:avLst/>
+          </a:prstGeom>
+          <a:solidFill>
+            <a:srgbClr val="F6F8FC"/>
+          </a:solidFill>
+          <a:ln>
+            <a:noFill/>
+          </a:ln>
+          <a:effectLst/>
+        </p:spPr>
+        <p:style>
+          <a:lnRef idx="1">
+            <a:schemeClr val="accent1"/>
+          </a:lnRef>
+          <a:fillRef idx="3">
+            <a:schemeClr val="accent1"/>
+          </a:fillRef>
+          <a:effectRef idx="2">
+            <a:schemeClr val="accent1"/>
+          </a:effectRef>
+          <a:fontRef idx="minor">
+            <a:schemeClr val="lt1"/>
+          </a:fontRef>
+        </p:style>
+        <p:txBody>
+          <a:bodyPr rtlCol="0" anchor="ctr"/>
+          <a:lstStyle/>
+          <a:p>
+            <a:pPr algn="ctr"/>
+          </a:p>
+        </p:txBody>
+      </p:sp>
+      <p:sp>
+        <p:nvSpPr>
+          <p:cNvPr id="3" name="TextBox 2"/>
+          <p:cNvSpPr txBox="1"/>
+          <p:nvPr/>
+        </p:nvSpPr>
+        <p:spPr>
+          <a:xfrm>
+            <a:off x="548640" y="365760"/>
+            <a:ext cx="9144000" cy="640080"/>
+          </a:xfrm>
+          <a:prstGeom prst="rect">
+            <a:avLst/>
+          </a:prstGeom>
+          <a:noFill/>
+        </p:spPr>
+        <p:txBody>
+          <a:bodyPr wrap="square" anchor="t" lIns="0" rIns="0" tIns="0" bIns="0">
+            <a:spAutoFit/>
+          </a:bodyPr>
+          <a:lstStyle/>
+          <a:p>
+            <a:pPr algn="l"/>
+            <a:r>
+              <a:rPr sz="3000" b="1">
+                <a:solidFill>
+                  <a:srgbClr val="1A2233"/>
+                </a:solidFill>
+                <a:latin typeface="Microsoft JhengHei"/>
+                <a:ea typeface="Microsoft JhengHei"/>
+                <a:cs typeface="Microsoft JhengHei"/>
+              </a:rPr>
+              <a:t>個案因應重點（3）</a:t>
+            </a:r>
+          </a:p>
+        </p:txBody>
+      </p:sp>
+      <p:sp>
+        <p:nvSpPr>
+          <p:cNvPr id="4" name="TextBox 3"/>
+          <p:cNvSpPr txBox="1"/>
+          <p:nvPr/>
+        </p:nvSpPr>
+        <p:spPr>
+          <a:xfrm>
+            <a:off x="566928" y="1005840"/>
+            <a:ext cx="10058400" cy="365760"/>
+          </a:xfrm>
+          <a:prstGeom prst="rect">
+            <a:avLst/>
+          </a:prstGeom>
+          <a:noFill/>
+        </p:spPr>
+        <p:txBody>
+          <a:bodyPr wrap="square" anchor="t" lIns="0" rIns="0" tIns="0" bIns="0">
+            <a:spAutoFit/>
+          </a:bodyPr>
+          <a:lstStyle/>
+          <a:p>
+            <a:pPr algn="l"/>
+            <a:r>
+              <a:rPr sz="1300" b="0">
+                <a:solidFill>
+                  <a:srgbClr val="5C6679"/>
+                </a:solidFill>
+                <a:latin typeface="Microsoft JhengHei"/>
+                <a:ea typeface="Microsoft JhengHei"/>
+                <a:cs typeface="Microsoft JhengHei"/>
+              </a:rPr>
+              <a:t>各公司公告之發生緣由與因應措施摘要</a:t>
+            </a:r>
+          </a:p>
+        </p:txBody>
+      </p:sp>
+      <p:sp>
+        <p:nvSpPr>
+          <p:cNvPr id="5" name="Rounded Rectangle 4"/>
+          <p:cNvSpPr/>
+          <p:nvPr/>
+        </p:nvSpPr>
+        <p:spPr>
+          <a:xfrm>
+            <a:off x="548640" y="1554480"/>
+            <a:ext cx="5394960" cy="2148840"/>
+          </a:xfrm>
+          <a:prstGeom prst="roundRect">
+            <a:avLst/>
+          </a:prstGeom>
+          <a:solidFill>
+            <a:srgbClr val="FFFFFF"/>
+          </a:solidFill>
+          <a:ln w="12700">
+            <a:solidFill>
+              <a:srgbClr val="DDE3EE"/>
+            </a:solidFill>
+          </a:ln>
+          <a:effectLst/>
+        </p:spPr>
+        <p:style>
+          <a:lnRef idx="1">
+            <a:schemeClr val="accent1"/>
+          </a:lnRef>
+          <a:fillRef idx="3">
+            <a:schemeClr val="accent1"/>
+          </a:fillRef>
+          <a:effectRef idx="2">
+            <a:schemeClr val="accent1"/>
+          </a:effectRef>
+          <a:fontRef idx="minor">
+            <a:schemeClr val="lt1"/>
+          </a:fontRef>
+        </p:style>
+        <p:txBody>
+          <a:bodyPr rtlCol="0" anchor="ctr"/>
+          <a:lstStyle/>
+          <a:p>
+            <a:pPr algn="ctr"/>
+          </a:p>
+        </p:txBody>
+      </p:sp>
+      <p:sp>
+        <p:nvSpPr>
+          <p:cNvPr id="6" name="Rectangle 5"/>
+          <p:cNvSpPr/>
+          <p:nvPr/>
+        </p:nvSpPr>
+        <p:spPr>
+          <a:xfrm>
+            <a:off x="548640" y="1554480"/>
+            <a:ext cx="5394960" cy="109728"/>
+          </a:xfrm>
+          <a:prstGeom prst="rect">
+            <a:avLst/>
+          </a:prstGeom>
+          <a:solidFill>
+            <a:srgbClr val="E63946"/>
+          </a:solidFill>
+          <a:ln>
+            <a:noFill/>
+          </a:ln>
+          <a:effectLst/>
+        </p:spPr>
+        <p:style>
+          <a:lnRef idx="1">
+            <a:schemeClr val="accent1"/>
+          </a:lnRef>
+          <a:fillRef idx="3">
+            <a:schemeClr val="accent1"/>
+          </a:fillRef>
+          <a:effectRef idx="2">
+            <a:schemeClr val="accent1"/>
+          </a:effectRef>
+          <a:fontRef idx="minor">
+            <a:schemeClr val="lt1"/>
+          </a:fontRef>
+        </p:style>
+        <p:txBody>
+          <a:bodyPr rtlCol="0" anchor="ctr"/>
+          <a:lstStyle/>
+          <a:p>
+            <a:pPr algn="ctr"/>
+          </a:p>
+        </p:txBody>
+      </p:sp>
+      <p:sp>
+        <p:nvSpPr>
+          <p:cNvPr id="7" name="TextBox 6"/>
+          <p:cNvSpPr txBox="1"/>
+          <p:nvPr/>
+        </p:nvSpPr>
+        <p:spPr>
+          <a:xfrm>
+            <a:off x="777240" y="1773936"/>
+            <a:ext cx="3657600" cy="365760"/>
+          </a:xfrm>
+          <a:prstGeom prst="rect">
+            <a:avLst/>
+          </a:prstGeom>
+          <a:noFill/>
+        </p:spPr>
+        <p:txBody>
+          <a:bodyPr wrap="square" anchor="ctr" lIns="0" rIns="0" tIns="0" bIns="0">
+            <a:spAutoFit/>
+          </a:bodyPr>
+          <a:lstStyle/>
+          <a:p>
+            <a:pPr algn="l"/>
+            <a:r>
+              <a:rPr sz="1600" b="1">
+                <a:solidFill>
+                  <a:srgbClr val="1A2233"/>
+                </a:solidFill>
+                <a:latin typeface="Microsoft JhengHei"/>
+                <a:ea typeface="Microsoft JhengHei"/>
+                <a:cs typeface="Microsoft JhengHei"/>
+              </a:rPr>
+              <a:t>數字 </a:t>
+            </a:r>
+            <a:r>
+              <a:rPr sz="1300" b="0">
+                <a:solidFill>
+                  <a:srgbClr val="5C6679"/>
+                </a:solidFill>
+                <a:latin typeface="Microsoft JhengHei"/>
+                <a:ea typeface="Microsoft JhengHei"/>
+                <a:cs typeface="Microsoft JhengHei"/>
+              </a:rPr>
+              <a:t>5287</a:t>
+            </a:r>
+          </a:p>
+        </p:txBody>
+      </p:sp>
+      <p:sp>
+        <p:nvSpPr>
+          <p:cNvPr id="8" name="Rounded Rectangle 7"/>
+          <p:cNvSpPr/>
+          <p:nvPr/>
+        </p:nvSpPr>
+        <p:spPr>
+          <a:xfrm>
+            <a:off x="4526280" y="1792224"/>
+            <a:ext cx="1234440" cy="347472"/>
+          </a:xfrm>
+          <a:prstGeom prst="roundRect">
+            <a:avLst/>
+          </a:prstGeom>
+          <a:solidFill>
+            <a:srgbClr val="E63946"/>
+          </a:solidFill>
+          <a:ln>
+            <a:noFill/>
+          </a:ln>
+          <a:effectLst/>
+        </p:spPr>
+        <p:style>
+          <a:lnRef idx="1">
+            <a:schemeClr val="accent1"/>
+          </a:lnRef>
+          <a:fillRef idx="3">
+            <a:schemeClr val="accent1"/>
+          </a:fillRef>
+          <a:effectRef idx="2">
+            <a:schemeClr val="accent1"/>
+          </a:effectRef>
+          <a:fontRef idx="minor">
+            <a:schemeClr val="lt1"/>
+          </a:fontRef>
+        </p:style>
+        <p:txBody>
+          <a:bodyPr rtlCol="0" anchor="ctr"/>
+          <a:lstStyle/>
+          <a:p>
+            <a:pPr algn="ctr"/>
+          </a:p>
+        </p:txBody>
+      </p:sp>
+      <p:sp>
+        <p:nvSpPr>
+          <p:cNvPr id="9" name="TextBox 8"/>
+          <p:cNvSpPr txBox="1"/>
+          <p:nvPr/>
+        </p:nvSpPr>
+        <p:spPr>
+          <a:xfrm>
+            <a:off x="4526280" y="1792224"/>
+            <a:ext cx="1234440" cy="347472"/>
+          </a:xfrm>
+          <a:prstGeom prst="rect">
+            <a:avLst/>
+          </a:prstGeom>
+          <a:noFill/>
+        </p:spPr>
+        <p:txBody>
+          <a:bodyPr wrap="square" anchor="ctr" lIns="0" rIns="0" tIns="0" bIns="0">
+            <a:spAutoFit/>
+          </a:bodyPr>
+          <a:lstStyle/>
+          <a:p>
+            <a:pPr algn="ctr"/>
+            <a:r>
+              <a:rPr sz="1050" b="1">
+                <a:solidFill>
+                  <a:srgbClr val="FFFFFF"/>
+                </a:solidFill>
+                <a:latin typeface="Microsoft JhengHei"/>
+                <a:ea typeface="Microsoft JhengHei"/>
+                <a:cs typeface="Microsoft JhengHei"/>
+              </a:rPr>
+              <a:t>駭客攻擊</a:t>
+            </a:r>
+          </a:p>
+        </p:txBody>
+      </p:sp>
+      <p:sp>
+        <p:nvSpPr>
+          <p:cNvPr id="10" name="TextBox 9"/>
+          <p:cNvSpPr txBox="1"/>
+          <p:nvPr/>
+        </p:nvSpPr>
+        <p:spPr>
+          <a:xfrm>
+            <a:off x="777240" y="2267712"/>
+            <a:ext cx="4937760" cy="640080"/>
+          </a:xfrm>
+          <a:prstGeom prst="rect">
+            <a:avLst/>
+          </a:prstGeom>
+          <a:noFill/>
+        </p:spPr>
+        <p:txBody>
+          <a:bodyPr wrap="square" anchor="t" lIns="0" rIns="0" tIns="0" bIns="0">
+            <a:spAutoFit/>
+          </a:bodyPr>
+          <a:lstStyle/>
+          <a:p>
+            <a:pPr algn="l">
+              <a:lnSpc>
+                <a:spcPts val="1500"/>
+              </a:lnSpc>
+            </a:pPr>
+            <a:r>
+              <a:rPr sz="1100" b="1">
+                <a:solidFill>
+                  <a:srgbClr val="E63946"/>
+                </a:solidFill>
+                <a:latin typeface="Microsoft JhengHei"/>
+                <a:ea typeface="Microsoft JhengHei"/>
+                <a:cs typeface="Microsoft JhengHei"/>
+              </a:rPr>
+              <a:t>緣由　</a:t>
+            </a:r>
+            <a:r>
+              <a:rPr sz="1100" b="0">
+                <a:solidFill>
+                  <a:srgbClr val="1A2233"/>
+                </a:solidFill>
+                <a:latin typeface="Microsoft JhengHei"/>
+                <a:ea typeface="Microsoft JhengHei"/>
+                <a:cs typeface="Microsoft JhengHei"/>
+              </a:rPr>
+              <a:t>本公司於115年8月20日發現591網站登入行為異常，經查發現外部攻擊者利用登入機制之弱點，繞過…</a:t>
+            </a:r>
+          </a:p>
+        </p:txBody>
+      </p:sp>
+      <p:sp>
+        <p:nvSpPr>
+          <p:cNvPr id="11" name="TextBox 10"/>
+          <p:cNvSpPr txBox="1"/>
+          <p:nvPr/>
+        </p:nvSpPr>
+        <p:spPr>
+          <a:xfrm>
+            <a:off x="777240" y="2926080"/>
+            <a:ext cx="4937760" cy="713232"/>
+          </a:xfrm>
+          <a:prstGeom prst="rect">
+            <a:avLst/>
+          </a:prstGeom>
+          <a:noFill/>
+        </p:spPr>
+        <p:txBody>
+          <a:bodyPr wrap="square" anchor="t" lIns="0" rIns="0" tIns="0" bIns="0">
+            <a:spAutoFit/>
+          </a:bodyPr>
+          <a:lstStyle/>
+          <a:p>
+            <a:pPr algn="l">
+              <a:lnSpc>
+                <a:spcPts val="1500"/>
+              </a:lnSpc>
+            </a:pPr>
+            <a:r>
+              <a:rPr sz="1100" b="1">
+                <a:solidFill>
+                  <a:srgbClr val="E63946"/>
+                </a:solidFill>
+                <a:latin typeface="Microsoft JhengHei"/>
+                <a:ea typeface="Microsoft JhengHei"/>
+                <a:cs typeface="Microsoft JhengHei"/>
+              </a:rPr>
+              <a:t>因應　</a:t>
+            </a:r>
+            <a:r>
+              <a:rPr sz="1100" b="0">
+                <a:solidFill>
+                  <a:srgbClr val="1A2233"/>
+                </a:solidFill>
+                <a:latin typeface="Microsoft JhengHei"/>
+                <a:ea typeface="Microsoft JhengHei"/>
+                <a:cs typeface="Microsoft JhengHei"/>
+              </a:rPr>
+              <a:t>(1)依據安全軟體發展生命週期（SSDLC）框架，持續優化系統開發流程及資安檢視機制。(2)強化登入驗證、存取控制及異常…</a:t>
+            </a:r>
+          </a:p>
+        </p:txBody>
+      </p:sp>
+      <p:sp>
+        <p:nvSpPr>
+          <p:cNvPr id="12" name="Rounded Rectangle 11"/>
+          <p:cNvSpPr/>
+          <p:nvPr/>
+        </p:nvSpPr>
+        <p:spPr>
+          <a:xfrm>
+            <a:off x="6172200" y="1554480"/>
+            <a:ext cx="5394960" cy="2148840"/>
+          </a:xfrm>
+          <a:prstGeom prst="roundRect">
+            <a:avLst/>
+          </a:prstGeom>
+          <a:solidFill>
+            <a:srgbClr val="FFFFFF"/>
+          </a:solidFill>
+          <a:ln w="12700">
+            <a:solidFill>
+              <a:srgbClr val="DDE3EE"/>
+            </a:solidFill>
+          </a:ln>
+          <a:effectLst/>
+        </p:spPr>
+        <p:style>
+          <a:lnRef idx="1">
+            <a:schemeClr val="accent1"/>
+          </a:lnRef>
+          <a:fillRef idx="3">
+            <a:schemeClr val="accent1"/>
+          </a:fillRef>
+          <a:effectRef idx="2">
+            <a:schemeClr val="accent1"/>
+          </a:effectRef>
+          <a:fontRef idx="minor">
+            <a:schemeClr val="lt1"/>
+          </a:fontRef>
+        </p:style>
+        <p:txBody>
+          <a:bodyPr rtlCol="0" anchor="ctr"/>
+          <a:lstStyle/>
+          <a:p>
+            <a:pPr algn="ctr"/>
+          </a:p>
+        </p:txBody>
+      </p:sp>
+      <p:sp>
+        <p:nvSpPr>
+          <p:cNvPr id="13" name="Rectangle 12"/>
+          <p:cNvSpPr/>
+          <p:nvPr/>
+        </p:nvSpPr>
+        <p:spPr>
+          <a:xfrm>
+            <a:off x="6172200" y="1554480"/>
+            <a:ext cx="5394960" cy="109728"/>
+          </a:xfrm>
+          <a:prstGeom prst="rect">
+            <a:avLst/>
+          </a:prstGeom>
+          <a:solidFill>
+            <a:srgbClr val="E63946"/>
+          </a:solidFill>
+          <a:ln>
+            <a:noFill/>
+          </a:ln>
+          <a:effectLst/>
+        </p:spPr>
+        <p:style>
+          <a:lnRef idx="1">
+            <a:schemeClr val="accent1"/>
+          </a:lnRef>
+          <a:fillRef idx="3">
+            <a:schemeClr val="accent1"/>
+          </a:fillRef>
+          <a:effectRef idx="2">
+            <a:schemeClr val="accent1"/>
+          </a:effectRef>
+          <a:fontRef idx="minor">
+            <a:schemeClr val="lt1"/>
+          </a:fontRef>
+        </p:style>
+        <p:txBody>
+          <a:bodyPr rtlCol="0" anchor="ctr"/>
+          <a:lstStyle/>
+          <a:p>
+            <a:pPr algn="ctr"/>
+          </a:p>
+        </p:txBody>
+      </p:sp>
+      <p:sp>
+        <p:nvSpPr>
+          <p:cNvPr id="14" name="TextBox 13"/>
+          <p:cNvSpPr txBox="1"/>
+          <p:nvPr/>
+        </p:nvSpPr>
+        <p:spPr>
+          <a:xfrm>
+            <a:off x="6400800" y="1773936"/>
+            <a:ext cx="3657600" cy="365760"/>
+          </a:xfrm>
+          <a:prstGeom prst="rect">
+            <a:avLst/>
+          </a:prstGeom>
+          <a:noFill/>
+        </p:spPr>
+        <p:txBody>
+          <a:bodyPr wrap="square" anchor="ctr" lIns="0" rIns="0" tIns="0" bIns="0">
+            <a:spAutoFit/>
+          </a:bodyPr>
+          <a:lstStyle/>
+          <a:p>
+            <a:pPr algn="l"/>
+            <a:r>
+              <a:rPr sz="1600" b="1">
+                <a:solidFill>
+                  <a:srgbClr val="1A2233"/>
+                </a:solidFill>
+                <a:latin typeface="Microsoft JhengHei"/>
+                <a:ea typeface="Microsoft JhengHei"/>
+                <a:cs typeface="Microsoft JhengHei"/>
+              </a:rPr>
+              <a:t>上詮 </a:t>
+            </a:r>
+            <a:r>
+              <a:rPr sz="1300" b="0">
+                <a:solidFill>
+                  <a:srgbClr val="5C6679"/>
+                </a:solidFill>
+                <a:latin typeface="Microsoft JhengHei"/>
+                <a:ea typeface="Microsoft JhengHei"/>
+                <a:cs typeface="Microsoft JhengHei"/>
+              </a:rPr>
+              <a:t>3363</a:t>
+            </a:r>
+          </a:p>
+        </p:txBody>
+      </p:sp>
+      <p:sp>
+        <p:nvSpPr>
+          <p:cNvPr id="15" name="Rounded Rectangle 14"/>
+          <p:cNvSpPr/>
+          <p:nvPr/>
+        </p:nvSpPr>
+        <p:spPr>
+          <a:xfrm>
+            <a:off x="10149840" y="1792224"/>
+            <a:ext cx="1234440" cy="347472"/>
+          </a:xfrm>
+          <a:prstGeom prst="roundRect">
+            <a:avLst/>
+          </a:prstGeom>
+          <a:solidFill>
+            <a:srgbClr val="E63946"/>
+          </a:solidFill>
+          <a:ln>
+            <a:noFill/>
+          </a:ln>
+          <a:effectLst/>
+        </p:spPr>
+        <p:style>
+          <a:lnRef idx="1">
+            <a:schemeClr val="accent1"/>
+          </a:lnRef>
+          <a:fillRef idx="3">
+            <a:schemeClr val="accent1"/>
+          </a:fillRef>
+          <a:effectRef idx="2">
+            <a:schemeClr val="accent1"/>
+          </a:effectRef>
+          <a:fontRef idx="minor">
+            <a:schemeClr val="lt1"/>
+          </a:fontRef>
+        </p:style>
+        <p:txBody>
+          <a:bodyPr rtlCol="0" anchor="ctr"/>
+          <a:lstStyle/>
+          <a:p>
+            <a:pPr algn="ctr"/>
+          </a:p>
+        </p:txBody>
+      </p:sp>
+      <p:sp>
+        <p:nvSpPr>
+          <p:cNvPr id="16" name="TextBox 15"/>
+          <p:cNvSpPr txBox="1"/>
+          <p:nvPr/>
+        </p:nvSpPr>
+        <p:spPr>
+          <a:xfrm>
+            <a:off x="10149840" y="1792224"/>
+            <a:ext cx="1234440" cy="347472"/>
+          </a:xfrm>
+          <a:prstGeom prst="rect">
+            <a:avLst/>
+          </a:prstGeom>
+          <a:noFill/>
+        </p:spPr>
+        <p:txBody>
+          <a:bodyPr wrap="square" anchor="ctr" lIns="0" rIns="0" tIns="0" bIns="0">
+            <a:spAutoFit/>
+          </a:bodyPr>
+          <a:lstStyle/>
+          <a:p>
+            <a:pPr algn="ctr"/>
+            <a:r>
+              <a:rPr sz="1050" b="1">
+                <a:solidFill>
+                  <a:srgbClr val="FFFFFF"/>
+                </a:solidFill>
+                <a:latin typeface="Microsoft JhengHei"/>
+                <a:ea typeface="Microsoft JhengHei"/>
+                <a:cs typeface="Microsoft JhengHei"/>
+              </a:rPr>
+              <a:t>駭客攻擊</a:t>
+            </a:r>
+          </a:p>
+        </p:txBody>
+      </p:sp>
+      <p:sp>
+        <p:nvSpPr>
+          <p:cNvPr id="17" name="TextBox 16"/>
+          <p:cNvSpPr txBox="1"/>
+          <p:nvPr/>
+        </p:nvSpPr>
+        <p:spPr>
+          <a:xfrm>
+            <a:off x="6400800" y="2267712"/>
+            <a:ext cx="4937760" cy="640080"/>
+          </a:xfrm>
+          <a:prstGeom prst="rect">
+            <a:avLst/>
+          </a:prstGeom>
+          <a:noFill/>
+        </p:spPr>
+        <p:txBody>
+          <a:bodyPr wrap="square" anchor="t" lIns="0" rIns="0" tIns="0" bIns="0">
+            <a:spAutoFit/>
+          </a:bodyPr>
+          <a:lstStyle/>
+          <a:p>
+            <a:pPr algn="l">
+              <a:lnSpc>
+                <a:spcPts val="1500"/>
+              </a:lnSpc>
+            </a:pPr>
+            <a:r>
+              <a:rPr sz="1100" b="1">
+                <a:solidFill>
+                  <a:srgbClr val="E63946"/>
+                </a:solidFill>
+                <a:latin typeface="Microsoft JhengHei"/>
+                <a:ea typeface="Microsoft JhengHei"/>
+                <a:cs typeface="Microsoft JhengHei"/>
+              </a:rPr>
+              <a:t>緣由　</a:t>
+            </a:r>
+            <a:r>
+              <a:rPr sz="1100" b="0">
+                <a:solidFill>
+                  <a:srgbClr val="1A2233"/>
+                </a:solidFill>
+                <a:latin typeface="Microsoft JhengHei"/>
+                <a:ea typeface="Microsoft JhengHei"/>
+                <a:cs typeface="Microsoft JhengHei"/>
+              </a:rPr>
+              <a:t>本公司資訊系統遭受駭客網路攻擊，部分主機與電腦遭受病毒攻擊。</a:t>
+            </a:r>
+          </a:p>
+        </p:txBody>
+      </p:sp>
+      <p:sp>
+        <p:nvSpPr>
+          <p:cNvPr id="18" name="TextBox 17"/>
+          <p:cNvSpPr txBox="1"/>
+          <p:nvPr/>
+        </p:nvSpPr>
+        <p:spPr>
+          <a:xfrm>
+            <a:off x="6400800" y="2926080"/>
             <a:ext cx="4937760" cy="713232"/>
           </a:xfrm>
           <a:prstGeom prst="rect">

--- a/資安事件因應分析.pptx
+++ b/資安事件因應分析.pptx
@@ -175,7 +175,7 @@
                 <c:formatCode>General</c:formatCode>
                 <c:ptCount val="2"/>
                 <c:pt idx="0">
-                  <c:v>7</c:v>
+                  <c:v>8</c:v>
                 </c:pt>
                 <c:pt idx="1">
                   <c:v>3</c:v>
@@ -3515,7 +3515,7 @@
                 <a:ea typeface="Microsoft JhengHei"/>
                 <a:cs typeface="Microsoft JhengHei"/>
               </a:rPr>
-              <a:t>資料期間 2026-08-16 ~ 2026-09-16　｜　MOPS 重大訊息全文檢索　｜　10 家公司</a:t>
+              <a:t>資料期間 2026-08-19 ~ 2026-09-19　｜　MOPS 重大訊息全文檢索　｜　11 家公司</a:t>
             </a:r>
           </a:p>
         </p:txBody>
@@ -3732,7 +3732,7 @@
                 <a:ea typeface="Microsoft JhengHei"/>
                 <a:cs typeface="Microsoft JhengHei"/>
               </a:rPr>
-              <a:t>資料期間內 MOPS 揭露之 10 起資安相關重大訊息</a:t>
+              <a:t>資料期間內 MOPS 揭露之 11 起資安相關重大訊息</a:t>
             </a:r>
           </a:p>
         </p:txBody>
@@ -3815,7 +3815,7 @@
                 <a:ea typeface="Microsoft JhengHei"/>
                 <a:cs typeface="Microsoft JhengHei"/>
               </a:rPr>
-              <a:t>10</a:t>
+              <a:t>11</a:t>
             </a:r>
           </a:p>
         </p:txBody>
@@ -4122,7 +4122,7 @@
                 <a:gridCol w="2286000"/>
                 <a:gridCol w="5120640"/>
               </a:tblGrid>
-              <a:tr h="324196">
+              <a:tr h="297180">
                 <a:tc>
                   <a:txBody>
                     <a:bodyPr/>
@@ -4244,7 +4244,7 @@
                   </a:tcPr>
                 </a:tc>
               </a:tr>
-              <a:tr h="324196">
+              <a:tr h="297180">
                 <a:tc>
                   <a:txBody>
                     <a:bodyPr/>
@@ -4259,7 +4259,7 @@
                           <a:ea typeface="Microsoft JhengHei"/>
                           <a:cs typeface="Microsoft JhengHei"/>
                         </a:rPr>
-                        <a:t>長榮航</a:t>
+                        <a:t>友訊</a:t>
                       </a:r>
                     </a:p>
                   </a:txBody>
@@ -4283,7 +4283,251 @@
                           <a:ea typeface="Microsoft JhengHei"/>
                           <a:cs typeface="Microsoft JhengHei"/>
                         </a:rPr>
+                        <a:t>2332</a:t>
+                      </a:r>
+                    </a:p>
+                  </a:txBody>
+                  <a:tcPr anchor="ctr" marL="73152" marT="9144" marB="9144">
+                    <a:solidFill>
+                      <a:srgbClr val="FFFFFF"/>
+                    </a:solidFill>
+                  </a:tcPr>
+                </a:tc>
+                <a:tc>
+                  <a:txBody>
+                    <a:bodyPr/>
+                    <a:lstStyle/>
+                    <a:p>
+                      <a:r>
+                        <a:rPr sz="1150" b="0">
+                          <a:solidFill>
+                            <a:srgbClr val="1A2233"/>
+                          </a:solidFill>
+                          <a:latin typeface="Microsoft JhengHei"/>
+                          <a:ea typeface="Microsoft JhengHei"/>
+                          <a:cs typeface="Microsoft JhengHei"/>
+                        </a:rPr>
+                        <a:t>09/18</a:t>
+                      </a:r>
+                    </a:p>
+                  </a:txBody>
+                  <a:tcPr anchor="ctr" marL="73152" marT="9144" marB="9144">
+                    <a:solidFill>
+                      <a:srgbClr val="FFFFFF"/>
+                    </a:solidFill>
+                  </a:tcPr>
+                </a:tc>
+                <a:tc>
+                  <a:txBody>
+                    <a:bodyPr/>
+                    <a:lstStyle/>
+                    <a:p>
+                      <a:r>
+                        <a:rPr sz="1150" b="1">
+                          <a:solidFill>
+                            <a:srgbClr val="E63946"/>
+                          </a:solidFill>
+                          <a:latin typeface="Microsoft JhengHei"/>
+                          <a:ea typeface="Microsoft JhengHei"/>
+                          <a:cs typeface="Microsoft JhengHei"/>
+                        </a:rPr>
+                        <a:t>駭客攻擊</a:t>
+                      </a:r>
+                    </a:p>
+                  </a:txBody>
+                  <a:tcPr anchor="ctr" marL="73152" marT="9144" marB="9144">
+                    <a:solidFill>
+                      <a:srgbClr val="FFFFFF"/>
+                    </a:solidFill>
+                  </a:tcPr>
+                </a:tc>
+                <a:tc>
+                  <a:txBody>
+                    <a:bodyPr/>
+                    <a:lstStyle/>
+                    <a:p>
+                      <a:r>
+                        <a:rPr sz="1150" b="0">
+                          <a:solidFill>
+                            <a:srgbClr val="1A2233"/>
+                          </a:solidFill>
+                          <a:latin typeface="Microsoft JhengHei"/>
+                          <a:ea typeface="Microsoft JhengHei"/>
+                          <a:cs typeface="Microsoft JhengHei"/>
+                        </a:rPr>
+                        <a:t>目前評估對公司營運尚無重大影響</a:t>
+                      </a:r>
+                    </a:p>
+                  </a:txBody>
+                  <a:tcPr anchor="ctr" marL="73152" marT="9144" marB="9144">
+                    <a:solidFill>
+                      <a:srgbClr val="FFFFFF"/>
+                    </a:solidFill>
+                  </a:tcPr>
+                </a:tc>
+              </a:tr>
+              <a:tr h="297180">
+                <a:tc>
+                  <a:txBody>
+                    <a:bodyPr/>
+                    <a:lstStyle/>
+                    <a:p>
+                      <a:r>
+                        <a:rPr sz="1150" b="0">
+                          <a:solidFill>
+                            <a:srgbClr val="1A2233"/>
+                          </a:solidFill>
+                          <a:latin typeface="Microsoft JhengHei"/>
+                          <a:ea typeface="Microsoft JhengHei"/>
+                          <a:cs typeface="Microsoft JhengHei"/>
+                        </a:rPr>
+                        <a:t>長榮航</a:t>
+                      </a:r>
+                    </a:p>
+                  </a:txBody>
+                  <a:tcPr anchor="ctr" marL="73152" marT="9144" marB="9144">
+                    <a:solidFill>
+                      <a:srgbClr val="EEF2F9"/>
+                    </a:solidFill>
+                  </a:tcPr>
+                </a:tc>
+                <a:tc>
+                  <a:txBody>
+                    <a:bodyPr/>
+                    <a:lstStyle/>
+                    <a:p>
+                      <a:r>
+                        <a:rPr sz="1150" b="0">
+                          <a:solidFill>
+                            <a:srgbClr val="1A2233"/>
+                          </a:solidFill>
+                          <a:latin typeface="Microsoft JhengHei"/>
+                          <a:ea typeface="Microsoft JhengHei"/>
+                          <a:cs typeface="Microsoft JhengHei"/>
+                        </a:rPr>
                         <a:t>2618</a:t>
+                      </a:r>
+                    </a:p>
+                  </a:txBody>
+                  <a:tcPr anchor="ctr" marL="73152" marT="9144" marB="9144">
+                    <a:solidFill>
+                      <a:srgbClr val="EEF2F9"/>
+                    </a:solidFill>
+                  </a:tcPr>
+                </a:tc>
+                <a:tc>
+                  <a:txBody>
+                    <a:bodyPr/>
+                    <a:lstStyle/>
+                    <a:p>
+                      <a:r>
+                        <a:rPr sz="1150" b="0">
+                          <a:solidFill>
+                            <a:srgbClr val="1A2233"/>
+                          </a:solidFill>
+                          <a:latin typeface="Microsoft JhengHei"/>
+                          <a:ea typeface="Microsoft JhengHei"/>
+                          <a:cs typeface="Microsoft JhengHei"/>
+                        </a:rPr>
+                        <a:t>09/15</a:t>
+                      </a:r>
+                    </a:p>
+                  </a:txBody>
+                  <a:tcPr anchor="ctr" marL="73152" marT="9144" marB="9144">
+                    <a:solidFill>
+                      <a:srgbClr val="EEF2F9"/>
+                    </a:solidFill>
+                  </a:tcPr>
+                </a:tc>
+                <a:tc>
+                  <a:txBody>
+                    <a:bodyPr/>
+                    <a:lstStyle/>
+                    <a:p>
+                      <a:r>
+                        <a:rPr sz="1150" b="1">
+                          <a:solidFill>
+                            <a:srgbClr val="E63946"/>
+                          </a:solidFill>
+                          <a:latin typeface="Microsoft JhengHei"/>
+                          <a:ea typeface="Microsoft JhengHei"/>
+                          <a:cs typeface="Microsoft JhengHei"/>
+                        </a:rPr>
+                        <a:t>駭客攻擊</a:t>
+                      </a:r>
+                    </a:p>
+                  </a:txBody>
+                  <a:tcPr anchor="ctr" marL="73152" marT="9144" marB="9144">
+                    <a:solidFill>
+                      <a:srgbClr val="EEF2F9"/>
+                    </a:solidFill>
+                  </a:tcPr>
+                </a:tc>
+                <a:tc>
+                  <a:txBody>
+                    <a:bodyPr/>
+                    <a:lstStyle/>
+                    <a:p>
+                      <a:r>
+                        <a:rPr sz="1150" b="0">
+                          <a:solidFill>
+                            <a:srgbClr val="1A2233"/>
+                          </a:solidFill>
+                          <a:latin typeface="Microsoft JhengHei"/>
+                          <a:ea typeface="Microsoft JhengHei"/>
+                          <a:cs typeface="Microsoft JhengHei"/>
+                        </a:rPr>
+                        <a:t>目前評估對公司所有業務均不受影響。</a:t>
+                      </a:r>
+                    </a:p>
+                  </a:txBody>
+                  <a:tcPr anchor="ctr" marL="73152" marT="9144" marB="9144">
+                    <a:solidFill>
+                      <a:srgbClr val="EEF2F9"/>
+                    </a:solidFill>
+                  </a:tcPr>
+                </a:tc>
+              </a:tr>
+              <a:tr h="297180">
+                <a:tc>
+                  <a:txBody>
+                    <a:bodyPr/>
+                    <a:lstStyle/>
+                    <a:p>
+                      <a:r>
+                        <a:rPr sz="1150" b="0">
+                          <a:solidFill>
+                            <a:srgbClr val="1A2233"/>
+                          </a:solidFill>
+                          <a:latin typeface="Microsoft JhengHei"/>
+                          <a:ea typeface="Microsoft JhengHei"/>
+                          <a:cs typeface="Microsoft JhengHei"/>
+                        </a:rPr>
+                        <a:t>長榮航太</a:t>
+                      </a:r>
+                    </a:p>
+                  </a:txBody>
+                  <a:tcPr anchor="ctr" marL="73152" marT="9144" marB="9144">
+                    <a:solidFill>
+                      <a:srgbClr val="FFFFFF"/>
+                    </a:solidFill>
+                  </a:tcPr>
+                </a:tc>
+                <a:tc>
+                  <a:txBody>
+                    <a:bodyPr/>
+                    <a:lstStyle/>
+                    <a:p>
+                      <a:r>
+                        <a:rPr sz="1150" b="0">
+                          <a:solidFill>
+                            <a:srgbClr val="1A2233"/>
+                          </a:solidFill>
+                          <a:latin typeface="Microsoft JhengHei"/>
+                          <a:ea typeface="Microsoft JhengHei"/>
+                          <a:cs typeface="Microsoft JhengHei"/>
+                        </a:rPr>
+                        <a:t>2645</a:t>
                       </a:r>
                     </a:p>
                   </a:txBody>
@@ -4355,7 +4599,7 @@
                           <a:ea typeface="Microsoft JhengHei"/>
                           <a:cs typeface="Microsoft JhengHei"/>
                         </a:rPr>
-                        <a:t>目前評估對公司所有業務均不受影響。</a:t>
+                        <a:t>經初步評估，核心資訊系統及營運業務運作皆維持正常，尚未發現公司及涉客…</a:t>
                       </a:r>
                     </a:p>
                   </a:txBody>
@@ -4366,7 +4610,7 @@
                   </a:tcPr>
                 </a:tc>
               </a:tr>
-              <a:tr h="324196">
+              <a:tr h="297180">
                 <a:tc>
                   <a:txBody>
                     <a:bodyPr/>
@@ -4381,7 +4625,7 @@
                           <a:ea typeface="Microsoft JhengHei"/>
                           <a:cs typeface="Microsoft JhengHei"/>
                         </a:rPr>
-                        <a:t>長榮航太</a:t>
+                        <a:t>崴寶</a:t>
                       </a:r>
                     </a:p>
                   </a:txBody>
@@ -4405,7 +4649,7 @@
                           <a:ea typeface="Microsoft JhengHei"/>
                           <a:cs typeface="Microsoft JhengHei"/>
                         </a:rPr>
-                        <a:t>2645</a:t>
+                        <a:t>7744</a:t>
                       </a:r>
                     </a:p>
                   </a:txBody>
@@ -4429,7 +4673,251 @@
                           <a:ea typeface="Microsoft JhengHei"/>
                           <a:cs typeface="Microsoft JhengHei"/>
                         </a:rPr>
-                        <a:t>09/15</a:t>
+                        <a:t>09/14</a:t>
+                      </a:r>
+                    </a:p>
+                  </a:txBody>
+                  <a:tcPr anchor="ctr" marL="73152" marT="9144" marB="9144">
+                    <a:solidFill>
+                      <a:srgbClr val="EEF2F9"/>
+                    </a:solidFill>
+                  </a:tcPr>
+                </a:tc>
+                <a:tc>
+                  <a:txBody>
+                    <a:bodyPr/>
+                    <a:lstStyle/>
+                    <a:p>
+                      <a:r>
+                        <a:rPr sz="1150" b="1">
+                          <a:solidFill>
+                            <a:srgbClr val="F4A261"/>
+                          </a:solidFill>
+                          <a:latin typeface="Microsoft JhengHei"/>
+                          <a:ea typeface="Microsoft JhengHei"/>
+                          <a:cs typeface="Microsoft JhengHei"/>
+                        </a:rPr>
+                        <a:t>勒索病毒/加密</a:t>
+                      </a:r>
+                    </a:p>
+                  </a:txBody>
+                  <a:tcPr anchor="ctr" marL="73152" marT="9144" marB="9144">
+                    <a:solidFill>
+                      <a:srgbClr val="EEF2F9"/>
+                    </a:solidFill>
+                  </a:tcPr>
+                </a:tc>
+                <a:tc>
+                  <a:txBody>
+                    <a:bodyPr/>
+                    <a:lstStyle/>
+                    <a:p>
+                      <a:r>
+                        <a:rPr sz="1150" b="0">
+                          <a:solidFill>
+                            <a:srgbClr val="1A2233"/>
+                          </a:solidFill>
+                          <a:latin typeface="Microsoft JhengHei"/>
+                          <a:ea typeface="Microsoft JhengHei"/>
+                          <a:cs typeface="Microsoft JhengHei"/>
+                        </a:rPr>
+                        <a:t>經初步評估，本次資安事件未影響公司工廠生產作業，生產活動均維持正常運…</a:t>
+                      </a:r>
+                    </a:p>
+                  </a:txBody>
+                  <a:tcPr anchor="ctr" marL="73152" marT="9144" marB="9144">
+                    <a:solidFill>
+                      <a:srgbClr val="EEF2F9"/>
+                    </a:solidFill>
+                  </a:tcPr>
+                </a:tc>
+              </a:tr>
+              <a:tr h="297180">
+                <a:tc>
+                  <a:txBody>
+                    <a:bodyPr/>
+                    <a:lstStyle/>
+                    <a:p>
+                      <a:r>
+                        <a:rPr sz="1150" b="0">
+                          <a:solidFill>
+                            <a:srgbClr val="1A2233"/>
+                          </a:solidFill>
+                          <a:latin typeface="Microsoft JhengHei"/>
+                          <a:ea typeface="Microsoft JhengHei"/>
+                          <a:cs typeface="Microsoft JhengHei"/>
+                        </a:rPr>
+                        <a:t>達爾膚</a:t>
+                      </a:r>
+                    </a:p>
+                  </a:txBody>
+                  <a:tcPr anchor="ctr" marL="73152" marT="9144" marB="9144">
+                    <a:solidFill>
+                      <a:srgbClr val="FFFFFF"/>
+                    </a:solidFill>
+                  </a:tcPr>
+                </a:tc>
+                <a:tc>
+                  <a:txBody>
+                    <a:bodyPr/>
+                    <a:lstStyle/>
+                    <a:p>
+                      <a:r>
+                        <a:rPr sz="1150" b="0">
+                          <a:solidFill>
+                            <a:srgbClr val="1A2233"/>
+                          </a:solidFill>
+                          <a:latin typeface="Microsoft JhengHei"/>
+                          <a:ea typeface="Microsoft JhengHei"/>
+                          <a:cs typeface="Microsoft JhengHei"/>
+                        </a:rPr>
+                        <a:t>6523</a:t>
+                      </a:r>
+                    </a:p>
+                  </a:txBody>
+                  <a:tcPr anchor="ctr" marL="73152" marT="9144" marB="9144">
+                    <a:solidFill>
+                      <a:srgbClr val="FFFFFF"/>
+                    </a:solidFill>
+                  </a:tcPr>
+                </a:tc>
+                <a:tc>
+                  <a:txBody>
+                    <a:bodyPr/>
+                    <a:lstStyle/>
+                    <a:p>
+                      <a:r>
+                        <a:rPr sz="1150" b="0">
+                          <a:solidFill>
+                            <a:srgbClr val="1A2233"/>
+                          </a:solidFill>
+                          <a:latin typeface="Microsoft JhengHei"/>
+                          <a:ea typeface="Microsoft JhengHei"/>
+                          <a:cs typeface="Microsoft JhengHei"/>
+                        </a:rPr>
+                        <a:t>09/11</a:t>
+                      </a:r>
+                    </a:p>
+                  </a:txBody>
+                  <a:tcPr anchor="ctr" marL="73152" marT="9144" marB="9144">
+                    <a:solidFill>
+                      <a:srgbClr val="FFFFFF"/>
+                    </a:solidFill>
+                  </a:tcPr>
+                </a:tc>
+                <a:tc>
+                  <a:txBody>
+                    <a:bodyPr/>
+                    <a:lstStyle/>
+                    <a:p>
+                      <a:r>
+                        <a:rPr sz="1150" b="1">
+                          <a:solidFill>
+                            <a:srgbClr val="E63946"/>
+                          </a:solidFill>
+                          <a:latin typeface="Microsoft JhengHei"/>
+                          <a:ea typeface="Microsoft JhengHei"/>
+                          <a:cs typeface="Microsoft JhengHei"/>
+                        </a:rPr>
+                        <a:t>駭客攻擊</a:t>
+                      </a:r>
+                    </a:p>
+                  </a:txBody>
+                  <a:tcPr anchor="ctr" marL="73152" marT="9144" marB="9144">
+                    <a:solidFill>
+                      <a:srgbClr val="FFFFFF"/>
+                    </a:solidFill>
+                  </a:tcPr>
+                </a:tc>
+                <a:tc>
+                  <a:txBody>
+                    <a:bodyPr/>
+                    <a:lstStyle/>
+                    <a:p>
+                      <a:r>
+                        <a:rPr sz="1150" b="0">
+                          <a:solidFill>
+                            <a:srgbClr val="1A2233"/>
+                          </a:solidFill>
+                          <a:latin typeface="Microsoft JhengHei"/>
+                          <a:ea typeface="Microsoft JhengHei"/>
+                          <a:cs typeface="Microsoft JhengHei"/>
+                        </a:rPr>
+                        <a:t>受影響系統非屬公司現行主要營運系統，亦非對外提供服務之系統，目前評估…</a:t>
+                      </a:r>
+                    </a:p>
+                  </a:txBody>
+                  <a:tcPr anchor="ctr" marL="73152" marT="9144" marB="9144">
+                    <a:solidFill>
+                      <a:srgbClr val="FFFFFF"/>
+                    </a:solidFill>
+                  </a:tcPr>
+                </a:tc>
+              </a:tr>
+              <a:tr h="297180">
+                <a:tc>
+                  <a:txBody>
+                    <a:bodyPr/>
+                    <a:lstStyle/>
+                    <a:p>
+                      <a:r>
+                        <a:rPr sz="1150" b="0">
+                          <a:solidFill>
+                            <a:srgbClr val="1A2233"/>
+                          </a:solidFill>
+                          <a:latin typeface="Microsoft JhengHei"/>
+                          <a:ea typeface="Microsoft JhengHei"/>
+                          <a:cs typeface="Microsoft JhengHei"/>
+                        </a:rPr>
+                        <a:t>大車隊</a:t>
+                      </a:r>
+                    </a:p>
+                  </a:txBody>
+                  <a:tcPr anchor="ctr" marL="73152" marT="9144" marB="9144">
+                    <a:solidFill>
+                      <a:srgbClr val="EEF2F9"/>
+                    </a:solidFill>
+                  </a:tcPr>
+                </a:tc>
+                <a:tc>
+                  <a:txBody>
+                    <a:bodyPr/>
+                    <a:lstStyle/>
+                    <a:p>
+                      <a:r>
+                        <a:rPr sz="1150" b="0">
+                          <a:solidFill>
+                            <a:srgbClr val="1A2233"/>
+                          </a:solidFill>
+                          <a:latin typeface="Microsoft JhengHei"/>
+                          <a:ea typeface="Microsoft JhengHei"/>
+                          <a:cs typeface="Microsoft JhengHei"/>
+                        </a:rPr>
+                        <a:t>2640</a:t>
+                      </a:r>
+                    </a:p>
+                  </a:txBody>
+                  <a:tcPr anchor="ctr" marL="73152" marT="9144" marB="9144">
+                    <a:solidFill>
+                      <a:srgbClr val="EEF2F9"/>
+                    </a:solidFill>
+                  </a:tcPr>
+                </a:tc>
+                <a:tc>
+                  <a:txBody>
+                    <a:bodyPr/>
+                    <a:lstStyle/>
+                    <a:p>
+                      <a:r>
+                        <a:rPr sz="1150" b="0">
+                          <a:solidFill>
+                            <a:srgbClr val="1A2233"/>
+                          </a:solidFill>
+                          <a:latin typeface="Microsoft JhengHei"/>
+                          <a:ea typeface="Microsoft JhengHei"/>
+                          <a:cs typeface="Microsoft JhengHei"/>
+                        </a:rPr>
+                        <a:t>09/09</a:t>
                       </a:r>
                     </a:p>
                   </a:txBody>
@@ -4477,7 +4965,7 @@
                           <a:ea typeface="Microsoft JhengHei"/>
                           <a:cs typeface="Microsoft JhengHei"/>
                         </a:rPr>
-                        <a:t>經初步評估，核心資訊系統及營運業務運作皆維持正常，尚未發現公司及涉客…</a:t>
+                        <a:t>經初步評估，本事件目前尚未對本公司整體營運及財務造成重大影響。</a:t>
                       </a:r>
                     </a:p>
                   </a:txBody>
@@ -4488,7 +4976,7 @@
                   </a:tcPr>
                 </a:tc>
               </a:tr>
-              <a:tr h="324196">
+              <a:tr h="297180">
                 <a:tc>
                   <a:txBody>
                     <a:bodyPr/>
@@ -4503,7 +4991,7 @@
                           <a:ea typeface="Microsoft JhengHei"/>
                           <a:cs typeface="Microsoft JhengHei"/>
                         </a:rPr>
-                        <a:t>崴寶</a:t>
+                        <a:t>富爾特</a:t>
                       </a:r>
                     </a:p>
                   </a:txBody>
@@ -4527,7 +5015,7 @@
                           <a:ea typeface="Microsoft JhengHei"/>
                           <a:cs typeface="Microsoft JhengHei"/>
                         </a:rPr>
-                        <a:t>7744</a:t>
+                        <a:t>6136</a:t>
                       </a:r>
                     </a:p>
                   </a:txBody>
@@ -4551,7 +5039,7 @@
                           <a:ea typeface="Microsoft JhengHei"/>
                           <a:cs typeface="Microsoft JhengHei"/>
                         </a:rPr>
-                        <a:t>09/14</a:t>
+                        <a:t>09/07</a:t>
                       </a:r>
                     </a:p>
                   </a:txBody>
@@ -4599,7 +5087,7 @@
                           <a:ea typeface="Microsoft JhengHei"/>
                           <a:cs typeface="Microsoft JhengHei"/>
                         </a:rPr>
-                        <a:t>經初步評估，本次資安事件未影響公司工廠生產作業，生產活動均維持正常運…</a:t>
+                        <a:t>目前受影響之系統正陸續復原中，對公司整體營運及財務之影響程度尚不致有…</a:t>
                       </a:r>
                     </a:p>
                   </a:txBody>
@@ -4610,7 +5098,7 @@
                   </a:tcPr>
                 </a:tc>
               </a:tr>
-              <a:tr h="324196">
+              <a:tr h="297180">
                 <a:tc>
                   <a:txBody>
                     <a:bodyPr/>
@@ -4625,7 +5113,7 @@
                           <a:ea typeface="Microsoft JhengHei"/>
                           <a:cs typeface="Microsoft JhengHei"/>
                         </a:rPr>
-                        <a:t>達爾膚</a:t>
+                        <a:t>創新服務</a:t>
                       </a:r>
                     </a:p>
                   </a:txBody>
@@ -4649,7 +5137,7 @@
                           <a:ea typeface="Microsoft JhengHei"/>
                           <a:cs typeface="Microsoft JhengHei"/>
                         </a:rPr>
-                        <a:t>6523</a:t>
+                        <a:t>7828</a:t>
                       </a:r>
                     </a:p>
                   </a:txBody>
@@ -4673,251 +5161,7 @@
                           <a:ea typeface="Microsoft JhengHei"/>
                           <a:cs typeface="Microsoft JhengHei"/>
                         </a:rPr>
-                        <a:t>09/11</a:t>
-                      </a:r>
-                    </a:p>
-                  </a:txBody>
-                  <a:tcPr anchor="ctr" marL="73152" marT="9144" marB="9144">
-                    <a:solidFill>
-                      <a:srgbClr val="EEF2F9"/>
-                    </a:solidFill>
-                  </a:tcPr>
-                </a:tc>
-                <a:tc>
-                  <a:txBody>
-                    <a:bodyPr/>
-                    <a:lstStyle/>
-                    <a:p>
-                      <a:r>
-                        <a:rPr sz="1150" b="1">
-                          <a:solidFill>
-                            <a:srgbClr val="E63946"/>
-                          </a:solidFill>
-                          <a:latin typeface="Microsoft JhengHei"/>
-                          <a:ea typeface="Microsoft JhengHei"/>
-                          <a:cs typeface="Microsoft JhengHei"/>
-                        </a:rPr>
-                        <a:t>駭客攻擊</a:t>
-                      </a:r>
-                    </a:p>
-                  </a:txBody>
-                  <a:tcPr anchor="ctr" marL="73152" marT="9144" marB="9144">
-                    <a:solidFill>
-                      <a:srgbClr val="EEF2F9"/>
-                    </a:solidFill>
-                  </a:tcPr>
-                </a:tc>
-                <a:tc>
-                  <a:txBody>
-                    <a:bodyPr/>
-                    <a:lstStyle/>
-                    <a:p>
-                      <a:r>
-                        <a:rPr sz="1150" b="0">
-                          <a:solidFill>
-                            <a:srgbClr val="1A2233"/>
-                          </a:solidFill>
-                          <a:latin typeface="Microsoft JhengHei"/>
-                          <a:ea typeface="Microsoft JhengHei"/>
-                          <a:cs typeface="Microsoft JhengHei"/>
-                        </a:rPr>
-                        <a:t>受影響系統非屬公司現行主要營運系統，亦非對外提供服務之系統，目前評估…</a:t>
-                      </a:r>
-                    </a:p>
-                  </a:txBody>
-                  <a:tcPr anchor="ctr" marL="73152" marT="9144" marB="9144">
-                    <a:solidFill>
-                      <a:srgbClr val="EEF2F9"/>
-                    </a:solidFill>
-                  </a:tcPr>
-                </a:tc>
-              </a:tr>
-              <a:tr h="324196">
-                <a:tc>
-                  <a:txBody>
-                    <a:bodyPr/>
-                    <a:lstStyle/>
-                    <a:p>
-                      <a:r>
-                        <a:rPr sz="1150" b="0">
-                          <a:solidFill>
-                            <a:srgbClr val="1A2233"/>
-                          </a:solidFill>
-                          <a:latin typeface="Microsoft JhengHei"/>
-                          <a:ea typeface="Microsoft JhengHei"/>
-                          <a:cs typeface="Microsoft JhengHei"/>
-                        </a:rPr>
-                        <a:t>大車隊</a:t>
-                      </a:r>
-                    </a:p>
-                  </a:txBody>
-                  <a:tcPr anchor="ctr" marL="73152" marT="9144" marB="9144">
-                    <a:solidFill>
-                      <a:srgbClr val="FFFFFF"/>
-                    </a:solidFill>
-                  </a:tcPr>
-                </a:tc>
-                <a:tc>
-                  <a:txBody>
-                    <a:bodyPr/>
-                    <a:lstStyle/>
-                    <a:p>
-                      <a:r>
-                        <a:rPr sz="1150" b="0">
-                          <a:solidFill>
-                            <a:srgbClr val="1A2233"/>
-                          </a:solidFill>
-                          <a:latin typeface="Microsoft JhengHei"/>
-                          <a:ea typeface="Microsoft JhengHei"/>
-                          <a:cs typeface="Microsoft JhengHei"/>
-                        </a:rPr>
-                        <a:t>2640</a:t>
-                      </a:r>
-                    </a:p>
-                  </a:txBody>
-                  <a:tcPr anchor="ctr" marL="73152" marT="9144" marB="9144">
-                    <a:solidFill>
-                      <a:srgbClr val="FFFFFF"/>
-                    </a:solidFill>
-                  </a:tcPr>
-                </a:tc>
-                <a:tc>
-                  <a:txBody>
-                    <a:bodyPr/>
-                    <a:lstStyle/>
-                    <a:p>
-                      <a:r>
-                        <a:rPr sz="1150" b="0">
-                          <a:solidFill>
-                            <a:srgbClr val="1A2233"/>
-                          </a:solidFill>
-                          <a:latin typeface="Microsoft JhengHei"/>
-                          <a:ea typeface="Microsoft JhengHei"/>
-                          <a:cs typeface="Microsoft JhengHei"/>
-                        </a:rPr>
-                        <a:t>09/09</a:t>
-                      </a:r>
-                    </a:p>
-                  </a:txBody>
-                  <a:tcPr anchor="ctr" marL="73152" marT="9144" marB="9144">
-                    <a:solidFill>
-                      <a:srgbClr val="FFFFFF"/>
-                    </a:solidFill>
-                  </a:tcPr>
-                </a:tc>
-                <a:tc>
-                  <a:txBody>
-                    <a:bodyPr/>
-                    <a:lstStyle/>
-                    <a:p>
-                      <a:r>
-                        <a:rPr sz="1150" b="1">
-                          <a:solidFill>
-                            <a:srgbClr val="E63946"/>
-                          </a:solidFill>
-                          <a:latin typeface="Microsoft JhengHei"/>
-                          <a:ea typeface="Microsoft JhengHei"/>
-                          <a:cs typeface="Microsoft JhengHei"/>
-                        </a:rPr>
-                        <a:t>駭客攻擊</a:t>
-                      </a:r>
-                    </a:p>
-                  </a:txBody>
-                  <a:tcPr anchor="ctr" marL="73152" marT="9144" marB="9144">
-                    <a:solidFill>
-                      <a:srgbClr val="FFFFFF"/>
-                    </a:solidFill>
-                  </a:tcPr>
-                </a:tc>
-                <a:tc>
-                  <a:txBody>
-                    <a:bodyPr/>
-                    <a:lstStyle/>
-                    <a:p>
-                      <a:r>
-                        <a:rPr sz="1150" b="0">
-                          <a:solidFill>
-                            <a:srgbClr val="1A2233"/>
-                          </a:solidFill>
-                          <a:latin typeface="Microsoft JhengHei"/>
-                          <a:ea typeface="Microsoft JhengHei"/>
-                          <a:cs typeface="Microsoft JhengHei"/>
-                        </a:rPr>
-                        <a:t>經初步評估，本事件目前尚未對本公司整體營運及財務造成重大影響。</a:t>
-                      </a:r>
-                    </a:p>
-                  </a:txBody>
-                  <a:tcPr anchor="ctr" marL="73152" marT="9144" marB="9144">
-                    <a:solidFill>
-                      <a:srgbClr val="FFFFFF"/>
-                    </a:solidFill>
-                  </a:tcPr>
-                </a:tc>
-              </a:tr>
-              <a:tr h="324196">
-                <a:tc>
-                  <a:txBody>
-                    <a:bodyPr/>
-                    <a:lstStyle/>
-                    <a:p>
-                      <a:r>
-                        <a:rPr sz="1150" b="0">
-                          <a:solidFill>
-                            <a:srgbClr val="1A2233"/>
-                          </a:solidFill>
-                          <a:latin typeface="Microsoft JhengHei"/>
-                          <a:ea typeface="Microsoft JhengHei"/>
-                          <a:cs typeface="Microsoft JhengHei"/>
-                        </a:rPr>
-                        <a:t>富爾特</a:t>
-                      </a:r>
-                    </a:p>
-                  </a:txBody>
-                  <a:tcPr anchor="ctr" marL="73152" marT="9144" marB="9144">
-                    <a:solidFill>
-                      <a:srgbClr val="EEF2F9"/>
-                    </a:solidFill>
-                  </a:tcPr>
-                </a:tc>
-                <a:tc>
-                  <a:txBody>
-                    <a:bodyPr/>
-                    <a:lstStyle/>
-                    <a:p>
-                      <a:r>
-                        <a:rPr sz="1150" b="0">
-                          <a:solidFill>
-                            <a:srgbClr val="1A2233"/>
-                          </a:solidFill>
-                          <a:latin typeface="Microsoft JhengHei"/>
-                          <a:ea typeface="Microsoft JhengHei"/>
-                          <a:cs typeface="Microsoft JhengHei"/>
-                        </a:rPr>
-                        <a:t>6136</a:t>
-                      </a:r>
-                    </a:p>
-                  </a:txBody>
-                  <a:tcPr anchor="ctr" marL="73152" marT="9144" marB="9144">
-                    <a:solidFill>
-                      <a:srgbClr val="EEF2F9"/>
-                    </a:solidFill>
-                  </a:tcPr>
-                </a:tc>
-                <a:tc>
-                  <a:txBody>
-                    <a:bodyPr/>
-                    <a:lstStyle/>
-                    <a:p>
-                      <a:r>
-                        <a:rPr sz="1150" b="0">
-                          <a:solidFill>
-                            <a:srgbClr val="1A2233"/>
-                          </a:solidFill>
-                          <a:latin typeface="Microsoft JhengHei"/>
-                          <a:ea typeface="Microsoft JhengHei"/>
-                          <a:cs typeface="Microsoft JhengHei"/>
-                        </a:rPr>
-                        <a:t>09/07</a:t>
+                        <a:t>09/02</a:t>
                       </a:r>
                     </a:p>
                   </a:txBody>
@@ -4976,7 +5220,7 @@
                   </a:tcPr>
                 </a:tc>
               </a:tr>
-              <a:tr h="324196">
+              <a:tr h="297180">
                 <a:tc>
                   <a:txBody>
                     <a:bodyPr/>
@@ -4991,7 +5235,7 @@
                           <a:ea typeface="Microsoft JhengHei"/>
                           <a:cs typeface="Microsoft JhengHei"/>
                         </a:rPr>
-                        <a:t>創新服務</a:t>
+                        <a:t>杭特</a:t>
                       </a:r>
                     </a:p>
                   </a:txBody>
@@ -5015,7 +5259,7 @@
                           <a:ea typeface="Microsoft JhengHei"/>
                           <a:cs typeface="Microsoft JhengHei"/>
                         </a:rPr>
-                        <a:t>7828</a:t>
+                        <a:t>3297</a:t>
                       </a:r>
                     </a:p>
                   </a:txBody>
@@ -5039,7 +5283,7 @@
                           <a:ea typeface="Microsoft JhengHei"/>
                           <a:cs typeface="Microsoft JhengHei"/>
                         </a:rPr>
-                        <a:t>09/02</a:t>
+                        <a:t>08/31</a:t>
                       </a:r>
                     </a:p>
                   </a:txBody>
@@ -5057,13 +5301,13 @@
                       <a:r>
                         <a:rPr sz="1150" b="1">
                           <a:solidFill>
-                            <a:srgbClr val="F4A261"/>
+                            <a:srgbClr val="E63946"/>
                           </a:solidFill>
                           <a:latin typeface="Microsoft JhengHei"/>
                           <a:ea typeface="Microsoft JhengHei"/>
                           <a:cs typeface="Microsoft JhengHei"/>
                         </a:rPr>
-                        <a:t>勒索病毒/加密</a:t>
+                        <a:t>駭客攻擊</a:t>
                       </a:r>
                     </a:p>
                   </a:txBody>
@@ -5087,7 +5331,7 @@
                           <a:ea typeface="Microsoft JhengHei"/>
                           <a:cs typeface="Microsoft JhengHei"/>
                         </a:rPr>
-                        <a:t>目前受影響之系統正陸續復原中，對公司整體營運及財務之影響程度尚不致有…</a:t>
+                        <a:t>本公司目前正積極會同技術專家協助調查，初步評估對公司營運暫無重大影響…</a:t>
                       </a:r>
                     </a:p>
                   </a:txBody>
@@ -5098,7 +5342,7 @@
                   </a:tcPr>
                 </a:tc>
               </a:tr>
-              <a:tr h="324196">
+              <a:tr h="297180">
                 <a:tc>
                   <a:txBody>
                     <a:bodyPr/>
@@ -5113,7 +5357,7 @@
                           <a:ea typeface="Microsoft JhengHei"/>
                           <a:cs typeface="Microsoft JhengHei"/>
                         </a:rPr>
-                        <a:t>杭特</a:t>
+                        <a:t>數字</a:t>
                       </a:r>
                     </a:p>
                   </a:txBody>
@@ -5137,7 +5381,7 @@
                           <a:ea typeface="Microsoft JhengHei"/>
                           <a:cs typeface="Microsoft JhengHei"/>
                         </a:rPr>
-                        <a:t>3297</a:t>
+                        <a:t>5287</a:t>
                       </a:r>
                     </a:p>
                   </a:txBody>
@@ -5161,7 +5405,7 @@
                           <a:ea typeface="Microsoft JhengHei"/>
                           <a:cs typeface="Microsoft JhengHei"/>
                         </a:rPr>
-                        <a:t>08/31</a:t>
+                        <a:t>08/20</a:t>
                       </a:r>
                     </a:p>
                   </a:txBody>
@@ -5209,7 +5453,7 @@
                           <a:ea typeface="Microsoft JhengHei"/>
                           <a:cs typeface="Microsoft JhengHei"/>
                         </a:rPr>
-                        <a:t>本公司目前正積極會同技術專家協助調查，初步評估對公司營運暫無重大影響…</a:t>
+                        <a:t>目前評估對公司營運尚無重大影響</a:t>
                       </a:r>
                     </a:p>
                   </a:txBody>
@@ -5220,7 +5464,7 @@
                   </a:tcPr>
                 </a:tc>
               </a:tr>
-              <a:tr h="324196">
+              <a:tr h="297180">
                 <a:tc>
                   <a:txBody>
                     <a:bodyPr/>
@@ -5235,7 +5479,7 @@
                           <a:ea typeface="Microsoft JhengHei"/>
                           <a:cs typeface="Microsoft JhengHei"/>
                         </a:rPr>
-                        <a:t>數字</a:t>
+                        <a:t>上詮</a:t>
                       </a:r>
                     </a:p>
                   </a:txBody>
@@ -5259,7 +5503,7 @@
                           <a:ea typeface="Microsoft JhengHei"/>
                           <a:cs typeface="Microsoft JhengHei"/>
                         </a:rPr>
-                        <a:t>5287</a:t>
+                        <a:t>3363</a:t>
                       </a:r>
                     </a:p>
                   </a:txBody>
@@ -5283,7 +5527,7 @@
                           <a:ea typeface="Microsoft JhengHei"/>
                           <a:cs typeface="Microsoft JhengHei"/>
                         </a:rPr>
-                        <a:t>08/20</a:t>
+                        <a:t>08/19</a:t>
                       </a:r>
                     </a:p>
                   </a:txBody>
@@ -5331,135 +5575,13 @@
                           <a:ea typeface="Microsoft JhengHei"/>
                           <a:cs typeface="Microsoft JhengHei"/>
                         </a:rPr>
-                        <a:t>目前評估對公司營運尚無重大影響</a:t>
+                        <a:t>目前評估對公司營運無重大影響。</a:t>
                       </a:r>
                     </a:p>
                   </a:txBody>
                   <a:tcPr anchor="ctr" marL="73152" marT="9144" marB="9144">
                     <a:solidFill>
                       <a:srgbClr val="FFFFFF"/>
-                    </a:solidFill>
-                  </a:tcPr>
-                </a:tc>
-              </a:tr>
-              <a:tr h="324200">
-                <a:tc>
-                  <a:txBody>
-                    <a:bodyPr/>
-                    <a:lstStyle/>
-                    <a:p>
-                      <a:r>
-                        <a:rPr sz="1150" b="0">
-                          <a:solidFill>
-                            <a:srgbClr val="1A2233"/>
-                          </a:solidFill>
-                          <a:latin typeface="Microsoft JhengHei"/>
-                          <a:ea typeface="Microsoft JhengHei"/>
-                          <a:cs typeface="Microsoft JhengHei"/>
-                        </a:rPr>
-                        <a:t>上詮</a:t>
-                      </a:r>
-                    </a:p>
-                  </a:txBody>
-                  <a:tcPr anchor="ctr" marL="73152" marT="9144" marB="9144">
-                    <a:solidFill>
-                      <a:srgbClr val="EEF2F9"/>
-                    </a:solidFill>
-                  </a:tcPr>
-                </a:tc>
-                <a:tc>
-                  <a:txBody>
-                    <a:bodyPr/>
-                    <a:lstStyle/>
-                    <a:p>
-                      <a:r>
-                        <a:rPr sz="1150" b="0">
-                          <a:solidFill>
-                            <a:srgbClr val="1A2233"/>
-                          </a:solidFill>
-                          <a:latin typeface="Microsoft JhengHei"/>
-                          <a:ea typeface="Microsoft JhengHei"/>
-                          <a:cs typeface="Microsoft JhengHei"/>
-                        </a:rPr>
-                        <a:t>3363</a:t>
-                      </a:r>
-                    </a:p>
-                  </a:txBody>
-                  <a:tcPr anchor="ctr" marL="73152" marT="9144" marB="9144">
-                    <a:solidFill>
-                      <a:srgbClr val="EEF2F9"/>
-                    </a:solidFill>
-                  </a:tcPr>
-                </a:tc>
-                <a:tc>
-                  <a:txBody>
-                    <a:bodyPr/>
-                    <a:lstStyle/>
-                    <a:p>
-                      <a:r>
-                        <a:rPr sz="1150" b="0">
-                          <a:solidFill>
-                            <a:srgbClr val="1A2233"/>
-                          </a:solidFill>
-                          <a:latin typeface="Microsoft JhengHei"/>
-                          <a:ea typeface="Microsoft JhengHei"/>
-                          <a:cs typeface="Microsoft JhengHei"/>
-                        </a:rPr>
-                        <a:t>08/19</a:t>
-                      </a:r>
-                    </a:p>
-                  </a:txBody>
-                  <a:tcPr anchor="ctr" marL="73152" marT="9144" marB="9144">
-                    <a:solidFill>
-                      <a:srgbClr val="EEF2F9"/>
-                    </a:solidFill>
-                  </a:tcPr>
-                </a:tc>
-                <a:tc>
-                  <a:txBody>
-                    <a:bodyPr/>
-                    <a:lstStyle/>
-                    <a:p>
-                      <a:r>
-                        <a:rPr sz="1150" b="1">
-                          <a:solidFill>
-                            <a:srgbClr val="E63946"/>
-                          </a:solidFill>
-                          <a:latin typeface="Microsoft JhengHei"/>
-                          <a:ea typeface="Microsoft JhengHei"/>
-                          <a:cs typeface="Microsoft JhengHei"/>
-                        </a:rPr>
-                        <a:t>駭客攻擊</a:t>
-                      </a:r>
-                    </a:p>
-                  </a:txBody>
-                  <a:tcPr anchor="ctr" marL="73152" marT="9144" marB="9144">
-                    <a:solidFill>
-                      <a:srgbClr val="EEF2F9"/>
-                    </a:solidFill>
-                  </a:tcPr>
-                </a:tc>
-                <a:tc>
-                  <a:txBody>
-                    <a:bodyPr/>
-                    <a:lstStyle/>
-                    <a:p>
-                      <a:r>
-                        <a:rPr sz="1150" b="0">
-                          <a:solidFill>
-                            <a:srgbClr val="1A2233"/>
-                          </a:solidFill>
-                          <a:latin typeface="Microsoft JhengHei"/>
-                          <a:ea typeface="Microsoft JhengHei"/>
-                          <a:cs typeface="Microsoft JhengHei"/>
-                        </a:rPr>
-                        <a:t>目前評估對公司營運無重大影響。</a:t>
-                      </a:r>
-                    </a:p>
-                  </a:txBody>
-                  <a:tcPr anchor="ctr" marL="73152" marT="9144" marB="9144">
-                    <a:solidFill>
-                      <a:srgbClr val="EEF2F9"/>
                     </a:solidFill>
                   </a:tcPr>
                 </a:tc>
@@ -5781,7 +5903,7 @@
                 <a:ea typeface="Microsoft JhengHei"/>
                 <a:cs typeface="Microsoft JhengHei"/>
               </a:rPr>
-              <a:t>7 起</a:t>
+              <a:t>8 起</a:t>
             </a:r>
           </a:p>
         </p:txBody>
@@ -5818,7 +5940,7 @@
                 <a:ea typeface="Microsoft JhengHei"/>
                 <a:cs typeface="Microsoft JhengHei"/>
               </a:rPr>
-              <a:t>長榮航、長榮航太、達爾膚、大車隊、杭特、數字、上詮</a:t>
+              <a:t>友訊、長榮航、長榮航太、達爾膚、大車隊、杭特、數字、上詮</a:t>
             </a:r>
           </a:p>
         </p:txBody>
@@ -6259,7 +6381,7 @@
                 <a:gridCol w="3383280"/>
                 <a:gridCol w="2606040"/>
               </a:tblGrid>
-              <a:tr h="407323">
+              <a:tr h="373380">
                 <a:tc>
                   <a:txBody>
                     <a:bodyPr/>
@@ -6381,7 +6503,7 @@
                   </a:tcPr>
                 </a:tc>
               </a:tr>
-              <a:tr h="407323">
+              <a:tr h="373380">
                 <a:tc>
                   <a:txBody>
                     <a:bodyPr/>
@@ -6396,7 +6518,7 @@
                           <a:ea typeface="Microsoft JhengHei"/>
                           <a:cs typeface="Microsoft JhengHei"/>
                         </a:rPr>
-                        <a:t>長榮航</a:t>
+                        <a:t>友訊</a:t>
                       </a:r>
                     </a:p>
                   </a:txBody>
@@ -6420,7 +6542,7 @@
                           <a:ea typeface="Microsoft JhengHei"/>
                           <a:cs typeface="Microsoft JhengHei"/>
                         </a:rPr>
-                        <a:t>2618</a:t>
+                        <a:t>2332</a:t>
                       </a:r>
                     </a:p>
                   </a:txBody>
@@ -6492,7 +6614,7 @@
                           <a:ea typeface="Microsoft JhengHei"/>
                           <a:cs typeface="Microsoft JhengHei"/>
                         </a:rPr>
-                        <a:t>陳雅琳、楊雲筑</a:t>
+                        <a:t>梅元貞、謝秋華</a:t>
                       </a:r>
                     </a:p>
                   </a:txBody>
@@ -6503,7 +6625,7 @@
                   </a:tcPr>
                 </a:tc>
               </a:tr>
-              <a:tr h="407323">
+              <a:tr h="373380">
                 <a:tc>
                   <a:txBody>
                     <a:bodyPr/>
@@ -6518,7 +6640,7 @@
                           <a:ea typeface="Microsoft JhengHei"/>
                           <a:cs typeface="Microsoft JhengHei"/>
                         </a:rPr>
-                        <a:t>長榮航太</a:t>
+                        <a:t>長榮航</a:t>
                       </a:r>
                     </a:p>
                   </a:txBody>
@@ -6542,7 +6664,7 @@
                           <a:ea typeface="Microsoft JhengHei"/>
                           <a:cs typeface="Microsoft JhengHei"/>
                         </a:rPr>
-                        <a:t>2645</a:t>
+                        <a:t>2618</a:t>
                       </a:r>
                     </a:p>
                   </a:txBody>
@@ -6614,7 +6736,7 @@
                           <a:ea typeface="Microsoft JhengHei"/>
                           <a:cs typeface="Microsoft JhengHei"/>
                         </a:rPr>
-                        <a:t>陳雅琳、鄭博仁</a:t>
+                        <a:t>陳雅琳、楊雲筑</a:t>
                       </a:r>
                     </a:p>
                   </a:txBody>
@@ -6625,7 +6747,7 @@
                   </a:tcPr>
                 </a:tc>
               </a:tr>
-              <a:tr h="407323">
+              <a:tr h="373380">
                 <a:tc>
                   <a:txBody>
                     <a:bodyPr/>
@@ -6640,7 +6762,7 @@
                           <a:ea typeface="Microsoft JhengHei"/>
                           <a:cs typeface="Microsoft JhengHei"/>
                         </a:rPr>
-                        <a:t>崴寶</a:t>
+                        <a:t>長榮航太</a:t>
                       </a:r>
                     </a:p>
                   </a:txBody>
@@ -6664,7 +6786,495 @@
                           <a:ea typeface="Microsoft JhengHei"/>
                           <a:cs typeface="Microsoft JhengHei"/>
                         </a:rPr>
+                        <a:t>2645</a:t>
+                      </a:r>
+                    </a:p>
+                  </a:txBody>
+                  <a:tcPr anchor="ctr" marL="73152" marT="9144" marB="9144">
+                    <a:solidFill>
+                      <a:srgbClr val="FFFFFF"/>
+                    </a:solidFill>
+                  </a:tcPr>
+                </a:tc>
+                <a:tc>
+                  <a:txBody>
+                    <a:bodyPr/>
+                    <a:lstStyle/>
+                    <a:p>
+                      <a:r>
+                        <a:rPr sz="1150" b="1">
+                          <a:solidFill>
+                            <a:srgbClr val="E63946"/>
+                          </a:solidFill>
+                          <a:latin typeface="Microsoft JhengHei"/>
+                          <a:ea typeface="Microsoft JhengHei"/>
+                          <a:cs typeface="Microsoft JhengHei"/>
+                        </a:rPr>
+                        <a:t>駭客攻擊</a:t>
+                      </a:r>
+                    </a:p>
+                  </a:txBody>
+                  <a:tcPr anchor="ctr" marL="73152" marT="9144" marB="9144">
+                    <a:solidFill>
+                      <a:srgbClr val="FFFFFF"/>
+                    </a:solidFill>
+                  </a:tcPr>
+                </a:tc>
+                <a:tc>
+                  <a:txBody>
+                    <a:bodyPr/>
+                    <a:lstStyle/>
+                    <a:p>
+                      <a:r>
+                        <a:rPr sz="1150" b="0">
+                          <a:solidFill>
+                            <a:srgbClr val="1A2233"/>
+                          </a:solidFill>
+                          <a:latin typeface="Microsoft JhengHei"/>
+                          <a:ea typeface="Microsoft JhengHei"/>
+                          <a:cs typeface="Microsoft JhengHei"/>
+                        </a:rPr>
+                        <a:t>安侯建業聯合會計師事務所</a:t>
+                      </a:r>
+                    </a:p>
+                  </a:txBody>
+                  <a:tcPr anchor="ctr" marL="73152" marT="9144" marB="9144">
+                    <a:solidFill>
+                      <a:srgbClr val="FFFFFF"/>
+                    </a:solidFill>
+                  </a:tcPr>
+                </a:tc>
+                <a:tc>
+                  <a:txBody>
+                    <a:bodyPr/>
+                    <a:lstStyle/>
+                    <a:p>
+                      <a:r>
+                        <a:rPr sz="1150" b="0">
+                          <a:solidFill>
+                            <a:srgbClr val="1A2233"/>
+                          </a:solidFill>
+                          <a:latin typeface="Microsoft JhengHei"/>
+                          <a:ea typeface="Microsoft JhengHei"/>
+                          <a:cs typeface="Microsoft JhengHei"/>
+                        </a:rPr>
+                        <a:t>陳雅琳、鄭博仁</a:t>
+                      </a:r>
+                    </a:p>
+                  </a:txBody>
+                  <a:tcPr anchor="ctr" marL="73152" marT="9144" marB="9144">
+                    <a:solidFill>
+                      <a:srgbClr val="FFFFFF"/>
+                    </a:solidFill>
+                  </a:tcPr>
+                </a:tc>
+              </a:tr>
+              <a:tr h="373380">
+                <a:tc>
+                  <a:txBody>
+                    <a:bodyPr/>
+                    <a:lstStyle/>
+                    <a:p>
+                      <a:r>
+                        <a:rPr sz="1150" b="0">
+                          <a:solidFill>
+                            <a:srgbClr val="1A2233"/>
+                          </a:solidFill>
+                          <a:latin typeface="Microsoft JhengHei"/>
+                          <a:ea typeface="Microsoft JhengHei"/>
+                          <a:cs typeface="Microsoft JhengHei"/>
+                        </a:rPr>
+                        <a:t>崴寶</a:t>
+                      </a:r>
+                    </a:p>
+                  </a:txBody>
+                  <a:tcPr anchor="ctr" marL="73152" marT="9144" marB="9144">
+                    <a:solidFill>
+                      <a:srgbClr val="EEF2F9"/>
+                    </a:solidFill>
+                  </a:tcPr>
+                </a:tc>
+                <a:tc>
+                  <a:txBody>
+                    <a:bodyPr/>
+                    <a:lstStyle/>
+                    <a:p>
+                      <a:r>
+                        <a:rPr sz="1150" b="0">
+                          <a:solidFill>
+                            <a:srgbClr val="1A2233"/>
+                          </a:solidFill>
+                          <a:latin typeface="Microsoft JhengHei"/>
+                          <a:ea typeface="Microsoft JhengHei"/>
+                          <a:cs typeface="Microsoft JhengHei"/>
+                        </a:rPr>
                         <a:t>7744</a:t>
+                      </a:r>
+                    </a:p>
+                  </a:txBody>
+                  <a:tcPr anchor="ctr" marL="73152" marT="9144" marB="9144">
+                    <a:solidFill>
+                      <a:srgbClr val="EEF2F9"/>
+                    </a:solidFill>
+                  </a:tcPr>
+                </a:tc>
+                <a:tc>
+                  <a:txBody>
+                    <a:bodyPr/>
+                    <a:lstStyle/>
+                    <a:p>
+                      <a:r>
+                        <a:rPr sz="1150" b="1">
+                          <a:solidFill>
+                            <a:srgbClr val="F4A261"/>
+                          </a:solidFill>
+                          <a:latin typeface="Microsoft JhengHei"/>
+                          <a:ea typeface="Microsoft JhengHei"/>
+                          <a:cs typeface="Microsoft JhengHei"/>
+                        </a:rPr>
+                        <a:t>勒索病毒/加密</a:t>
+                      </a:r>
+                    </a:p>
+                  </a:txBody>
+                  <a:tcPr anchor="ctr" marL="73152" marT="9144" marB="9144">
+                    <a:solidFill>
+                      <a:srgbClr val="EEF2F9"/>
+                    </a:solidFill>
+                  </a:tcPr>
+                </a:tc>
+                <a:tc>
+                  <a:txBody>
+                    <a:bodyPr/>
+                    <a:lstStyle/>
+                    <a:p>
+                      <a:r>
+                        <a:rPr sz="1150" b="0">
+                          <a:solidFill>
+                            <a:srgbClr val="1A2233"/>
+                          </a:solidFill>
+                          <a:latin typeface="Microsoft JhengHei"/>
+                          <a:ea typeface="Microsoft JhengHei"/>
+                          <a:cs typeface="Microsoft JhengHei"/>
+                        </a:rPr>
+                        <a:t>安永聯合會計師事務所</a:t>
+                      </a:r>
+                    </a:p>
+                  </a:txBody>
+                  <a:tcPr anchor="ctr" marL="73152" marT="9144" marB="9144">
+                    <a:solidFill>
+                      <a:srgbClr val="EEF2F9"/>
+                    </a:solidFill>
+                  </a:tcPr>
+                </a:tc>
+                <a:tc>
+                  <a:txBody>
+                    <a:bodyPr/>
+                    <a:lstStyle/>
+                    <a:p>
+                      <a:r>
+                        <a:rPr sz="1150" b="0">
+                          <a:solidFill>
+                            <a:srgbClr val="1A2233"/>
+                          </a:solidFill>
+                          <a:latin typeface="Microsoft JhengHei"/>
+                          <a:ea typeface="Microsoft JhengHei"/>
+                          <a:cs typeface="Microsoft JhengHei"/>
+                        </a:rPr>
+                        <a:t>黃宇廷、黃子評</a:t>
+                      </a:r>
+                    </a:p>
+                  </a:txBody>
+                  <a:tcPr anchor="ctr" marL="73152" marT="9144" marB="9144">
+                    <a:solidFill>
+                      <a:srgbClr val="EEF2F9"/>
+                    </a:solidFill>
+                  </a:tcPr>
+                </a:tc>
+              </a:tr>
+              <a:tr h="373380">
+                <a:tc>
+                  <a:txBody>
+                    <a:bodyPr/>
+                    <a:lstStyle/>
+                    <a:p>
+                      <a:r>
+                        <a:rPr sz="1150" b="0">
+                          <a:solidFill>
+                            <a:srgbClr val="1A2233"/>
+                          </a:solidFill>
+                          <a:latin typeface="Microsoft JhengHei"/>
+                          <a:ea typeface="Microsoft JhengHei"/>
+                          <a:cs typeface="Microsoft JhengHei"/>
+                        </a:rPr>
+                        <a:t>達爾膚</a:t>
+                      </a:r>
+                    </a:p>
+                  </a:txBody>
+                  <a:tcPr anchor="ctr" marL="73152" marT="9144" marB="9144">
+                    <a:solidFill>
+                      <a:srgbClr val="FFFFFF"/>
+                    </a:solidFill>
+                  </a:tcPr>
+                </a:tc>
+                <a:tc>
+                  <a:txBody>
+                    <a:bodyPr/>
+                    <a:lstStyle/>
+                    <a:p>
+                      <a:r>
+                        <a:rPr sz="1150" b="0">
+                          <a:solidFill>
+                            <a:srgbClr val="1A2233"/>
+                          </a:solidFill>
+                          <a:latin typeface="Microsoft JhengHei"/>
+                          <a:ea typeface="Microsoft JhengHei"/>
+                          <a:cs typeface="Microsoft JhengHei"/>
+                        </a:rPr>
+                        <a:t>6523</a:t>
+                      </a:r>
+                    </a:p>
+                  </a:txBody>
+                  <a:tcPr anchor="ctr" marL="73152" marT="9144" marB="9144">
+                    <a:solidFill>
+                      <a:srgbClr val="FFFFFF"/>
+                    </a:solidFill>
+                  </a:tcPr>
+                </a:tc>
+                <a:tc>
+                  <a:txBody>
+                    <a:bodyPr/>
+                    <a:lstStyle/>
+                    <a:p>
+                      <a:r>
+                        <a:rPr sz="1150" b="1">
+                          <a:solidFill>
+                            <a:srgbClr val="E63946"/>
+                          </a:solidFill>
+                          <a:latin typeface="Microsoft JhengHei"/>
+                          <a:ea typeface="Microsoft JhengHei"/>
+                          <a:cs typeface="Microsoft JhengHei"/>
+                        </a:rPr>
+                        <a:t>駭客攻擊</a:t>
+                      </a:r>
+                    </a:p>
+                  </a:txBody>
+                  <a:tcPr anchor="ctr" marL="73152" marT="9144" marB="9144">
+                    <a:solidFill>
+                      <a:srgbClr val="FFFFFF"/>
+                    </a:solidFill>
+                  </a:tcPr>
+                </a:tc>
+                <a:tc>
+                  <a:txBody>
+                    <a:bodyPr/>
+                    <a:lstStyle/>
+                    <a:p>
+                      <a:r>
+                        <a:rPr sz="1150" b="0">
+                          <a:solidFill>
+                            <a:srgbClr val="1A2233"/>
+                          </a:solidFill>
+                          <a:latin typeface="Microsoft JhengHei"/>
+                          <a:ea typeface="Microsoft JhengHei"/>
+                          <a:cs typeface="Microsoft JhengHei"/>
+                        </a:rPr>
+                        <a:t>資誠聯合會計師事務所</a:t>
+                      </a:r>
+                    </a:p>
+                  </a:txBody>
+                  <a:tcPr anchor="ctr" marL="73152" marT="9144" marB="9144">
+                    <a:solidFill>
+                      <a:srgbClr val="FFFFFF"/>
+                    </a:solidFill>
+                  </a:tcPr>
+                </a:tc>
+                <a:tc>
+                  <a:txBody>
+                    <a:bodyPr/>
+                    <a:lstStyle/>
+                    <a:p>
+                      <a:r>
+                        <a:rPr sz="1150" b="0">
+                          <a:solidFill>
+                            <a:srgbClr val="1A2233"/>
+                          </a:solidFill>
+                          <a:latin typeface="Microsoft JhengHei"/>
+                          <a:ea typeface="Microsoft JhengHei"/>
+                          <a:cs typeface="Microsoft JhengHei"/>
+                        </a:rPr>
+                        <a:t>于智帆、葉翠苗</a:t>
+                      </a:r>
+                    </a:p>
+                  </a:txBody>
+                  <a:tcPr anchor="ctr" marL="73152" marT="9144" marB="9144">
+                    <a:solidFill>
+                      <a:srgbClr val="FFFFFF"/>
+                    </a:solidFill>
+                  </a:tcPr>
+                </a:tc>
+              </a:tr>
+              <a:tr h="373380">
+                <a:tc>
+                  <a:txBody>
+                    <a:bodyPr/>
+                    <a:lstStyle/>
+                    <a:p>
+                      <a:r>
+                        <a:rPr sz="1150" b="0">
+                          <a:solidFill>
+                            <a:srgbClr val="1A2233"/>
+                          </a:solidFill>
+                          <a:latin typeface="Microsoft JhengHei"/>
+                          <a:ea typeface="Microsoft JhengHei"/>
+                          <a:cs typeface="Microsoft JhengHei"/>
+                        </a:rPr>
+                        <a:t>大車隊</a:t>
+                      </a:r>
+                    </a:p>
+                  </a:txBody>
+                  <a:tcPr anchor="ctr" marL="73152" marT="9144" marB="9144">
+                    <a:solidFill>
+                      <a:srgbClr val="EEF2F9"/>
+                    </a:solidFill>
+                  </a:tcPr>
+                </a:tc>
+                <a:tc>
+                  <a:txBody>
+                    <a:bodyPr/>
+                    <a:lstStyle/>
+                    <a:p>
+                      <a:r>
+                        <a:rPr sz="1150" b="0">
+                          <a:solidFill>
+                            <a:srgbClr val="1A2233"/>
+                          </a:solidFill>
+                          <a:latin typeface="Microsoft JhengHei"/>
+                          <a:ea typeface="Microsoft JhengHei"/>
+                          <a:cs typeface="Microsoft JhengHei"/>
+                        </a:rPr>
+                        <a:t>2640</a:t>
+                      </a:r>
+                    </a:p>
+                  </a:txBody>
+                  <a:tcPr anchor="ctr" marL="73152" marT="9144" marB="9144">
+                    <a:solidFill>
+                      <a:srgbClr val="EEF2F9"/>
+                    </a:solidFill>
+                  </a:tcPr>
+                </a:tc>
+                <a:tc>
+                  <a:txBody>
+                    <a:bodyPr/>
+                    <a:lstStyle/>
+                    <a:p>
+                      <a:r>
+                        <a:rPr sz="1150" b="1">
+                          <a:solidFill>
+                            <a:srgbClr val="E63946"/>
+                          </a:solidFill>
+                          <a:latin typeface="Microsoft JhengHei"/>
+                          <a:ea typeface="Microsoft JhengHei"/>
+                          <a:cs typeface="Microsoft JhengHei"/>
+                        </a:rPr>
+                        <a:t>駭客攻擊</a:t>
+                      </a:r>
+                    </a:p>
+                  </a:txBody>
+                  <a:tcPr anchor="ctr" marL="73152" marT="9144" marB="9144">
+                    <a:solidFill>
+                      <a:srgbClr val="EEF2F9"/>
+                    </a:solidFill>
+                  </a:tcPr>
+                </a:tc>
+                <a:tc>
+                  <a:txBody>
+                    <a:bodyPr/>
+                    <a:lstStyle/>
+                    <a:p>
+                      <a:r>
+                        <a:rPr sz="1150" b="0">
+                          <a:solidFill>
+                            <a:srgbClr val="1A2233"/>
+                          </a:solidFill>
+                          <a:latin typeface="Microsoft JhengHei"/>
+                          <a:ea typeface="Microsoft JhengHei"/>
+                          <a:cs typeface="Microsoft JhengHei"/>
+                        </a:rPr>
+                        <a:t>資誠聯合會計師事務所</a:t>
+                      </a:r>
+                    </a:p>
+                  </a:txBody>
+                  <a:tcPr anchor="ctr" marL="73152" marT="9144" marB="9144">
+                    <a:solidFill>
+                      <a:srgbClr val="EEF2F9"/>
+                    </a:solidFill>
+                  </a:tcPr>
+                </a:tc>
+                <a:tc>
+                  <a:txBody>
+                    <a:bodyPr/>
+                    <a:lstStyle/>
+                    <a:p>
+                      <a:r>
+                        <a:rPr sz="1150" b="0">
+                          <a:solidFill>
+                            <a:srgbClr val="1A2233"/>
+                          </a:solidFill>
+                          <a:latin typeface="Microsoft JhengHei"/>
+                          <a:ea typeface="Microsoft JhengHei"/>
+                          <a:cs typeface="Microsoft JhengHei"/>
+                        </a:rPr>
+                        <a:t>支秉鈞、涂展源</a:t>
+                      </a:r>
+                    </a:p>
+                  </a:txBody>
+                  <a:tcPr anchor="ctr" marL="73152" marT="9144" marB="9144">
+                    <a:solidFill>
+                      <a:srgbClr val="EEF2F9"/>
+                    </a:solidFill>
+                  </a:tcPr>
+                </a:tc>
+              </a:tr>
+              <a:tr h="373380">
+                <a:tc>
+                  <a:txBody>
+                    <a:bodyPr/>
+                    <a:lstStyle/>
+                    <a:p>
+                      <a:r>
+                        <a:rPr sz="1150" b="0">
+                          <a:solidFill>
+                            <a:srgbClr val="1A2233"/>
+                          </a:solidFill>
+                          <a:latin typeface="Microsoft JhengHei"/>
+                          <a:ea typeface="Microsoft JhengHei"/>
+                          <a:cs typeface="Microsoft JhengHei"/>
+                        </a:rPr>
+                        <a:t>富爾特</a:t>
+                      </a:r>
+                    </a:p>
+                  </a:txBody>
+                  <a:tcPr anchor="ctr" marL="73152" marT="9144" marB="9144">
+                    <a:solidFill>
+                      <a:srgbClr val="FFFFFF"/>
+                    </a:solidFill>
+                  </a:tcPr>
+                </a:tc>
+                <a:tc>
+                  <a:txBody>
+                    <a:bodyPr/>
+                    <a:lstStyle/>
+                    <a:p>
+                      <a:r>
+                        <a:rPr sz="1150" b="0">
+                          <a:solidFill>
+                            <a:srgbClr val="1A2233"/>
+                          </a:solidFill>
+                          <a:latin typeface="Microsoft JhengHei"/>
+                          <a:ea typeface="Microsoft JhengHei"/>
+                          <a:cs typeface="Microsoft JhengHei"/>
+                        </a:rPr>
+                        <a:t>6136</a:t>
                       </a:r>
                     </a:p>
                   </a:txBody>
@@ -6736,7 +7346,7 @@
                           <a:ea typeface="Microsoft JhengHei"/>
                           <a:cs typeface="Microsoft JhengHei"/>
                         </a:rPr>
-                        <a:t>黃宇廷、黃子評</a:t>
+                        <a:t>許新民、余倩如</a:t>
                       </a:r>
                     </a:p>
                   </a:txBody>
@@ -6747,7 +7357,7 @@
                   </a:tcPr>
                 </a:tc>
               </a:tr>
-              <a:tr h="407323">
+              <a:tr h="373380">
                 <a:tc>
                   <a:txBody>
                     <a:bodyPr/>
@@ -6762,7 +7372,7 @@
                           <a:ea typeface="Microsoft JhengHei"/>
                           <a:cs typeface="Microsoft JhengHei"/>
                         </a:rPr>
-                        <a:t>達爾膚</a:t>
+                        <a:t>創新服務</a:t>
                       </a:r>
                     </a:p>
                   </a:txBody>
@@ -6786,7 +7396,7 @@
                           <a:ea typeface="Microsoft JhengHei"/>
                           <a:cs typeface="Microsoft JhengHei"/>
                         </a:rPr>
-                        <a:t>6523</a:t>
+                        <a:t>7828</a:t>
                       </a:r>
                     </a:p>
                   </a:txBody>
@@ -6804,13 +7414,13 @@
                       <a:r>
                         <a:rPr sz="1150" b="1">
                           <a:solidFill>
-                            <a:srgbClr val="E63946"/>
+                            <a:srgbClr val="F4A261"/>
                           </a:solidFill>
                           <a:latin typeface="Microsoft JhengHei"/>
                           <a:ea typeface="Microsoft JhengHei"/>
                           <a:cs typeface="Microsoft JhengHei"/>
                         </a:rPr>
-                        <a:t>駭客攻擊</a:t>
+                        <a:t>勒索病毒/加密</a:t>
                       </a:r>
                     </a:p>
                   </a:txBody>
@@ -6858,7 +7468,7 @@
                           <a:ea typeface="Microsoft JhengHei"/>
                           <a:cs typeface="Microsoft JhengHei"/>
                         </a:rPr>
-                        <a:t>于智帆、葉翠苗</a:t>
+                        <a:t>蔡欣怡、白淑蒨</a:t>
                       </a:r>
                     </a:p>
                   </a:txBody>
@@ -6869,7 +7479,7 @@
                   </a:tcPr>
                 </a:tc>
               </a:tr>
-              <a:tr h="407323">
+              <a:tr h="373380">
                 <a:tc>
                   <a:txBody>
                     <a:bodyPr/>
@@ -6884,7 +7494,7 @@
                           <a:ea typeface="Microsoft JhengHei"/>
                           <a:cs typeface="Microsoft JhengHei"/>
                         </a:rPr>
-                        <a:t>大車隊</a:t>
+                        <a:t>杭特</a:t>
                       </a:r>
                     </a:p>
                   </a:txBody>
@@ -6908,7 +7518,7 @@
                           <a:ea typeface="Microsoft JhengHei"/>
                           <a:cs typeface="Microsoft JhengHei"/>
                         </a:rPr>
-                        <a:t>2640</a:t>
+                        <a:t>3297</a:t>
                       </a:r>
                     </a:p>
                   </a:txBody>
@@ -6980,7 +7590,7 @@
                           <a:ea typeface="Microsoft JhengHei"/>
                           <a:cs typeface="Microsoft JhengHei"/>
                         </a:rPr>
-                        <a:t>支秉鈞、涂展源</a:t>
+                        <a:t>陳憲正、林瑟凱</a:t>
                       </a:r>
                     </a:p>
                   </a:txBody>
@@ -6991,7 +7601,7 @@
                   </a:tcPr>
                 </a:tc>
               </a:tr>
-              <a:tr h="407323">
+              <a:tr h="373380">
                 <a:tc>
                   <a:txBody>
                     <a:bodyPr/>
@@ -7006,7 +7616,7 @@
                           <a:ea typeface="Microsoft JhengHei"/>
                           <a:cs typeface="Microsoft JhengHei"/>
                         </a:rPr>
-                        <a:t>富爾特</a:t>
+                        <a:t>數字</a:t>
                       </a:r>
                     </a:p>
                   </a:txBody>
@@ -7030,7 +7640,7 @@
                           <a:ea typeface="Microsoft JhengHei"/>
                           <a:cs typeface="Microsoft JhengHei"/>
                         </a:rPr>
-                        <a:t>6136</a:t>
+                        <a:t>5287</a:t>
                       </a:r>
                     </a:p>
                   </a:txBody>
@@ -7048,13 +7658,13 @@
                       <a:r>
                         <a:rPr sz="1150" b="1">
                           <a:solidFill>
-                            <a:srgbClr val="F4A261"/>
+                            <a:srgbClr val="E63946"/>
                           </a:solidFill>
                           <a:latin typeface="Microsoft JhengHei"/>
                           <a:ea typeface="Microsoft JhengHei"/>
                           <a:cs typeface="Microsoft JhengHei"/>
                         </a:rPr>
-                        <a:t>勒索病毒/加密</a:t>
+                        <a:t>駭客攻擊</a:t>
                       </a:r>
                     </a:p>
                   </a:txBody>
@@ -7078,7 +7688,7 @@
                           <a:ea typeface="Microsoft JhengHei"/>
                           <a:cs typeface="Microsoft JhengHei"/>
                         </a:rPr>
-                        <a:t>安永聯合會計師事務所</a:t>
+                        <a:t>安侯建業聯合會計師事務所</a:t>
                       </a:r>
                     </a:p>
                   </a:txBody>
@@ -7102,7 +7712,7 @@
                           <a:ea typeface="Microsoft JhengHei"/>
                           <a:cs typeface="Microsoft JhengHei"/>
                         </a:rPr>
-                        <a:t>許新民、余倩如</a:t>
+                        <a:t>羅瑞芝、余聖河</a:t>
                       </a:r>
                     </a:p>
                   </a:txBody>
@@ -7113,7 +7723,7 @@
                   </a:tcPr>
                 </a:tc>
               </a:tr>
-              <a:tr h="407323">
+              <a:tr h="373380">
                 <a:tc>
                   <a:txBody>
                     <a:bodyPr/>
@@ -7128,7 +7738,7 @@
                           <a:ea typeface="Microsoft JhengHei"/>
                           <a:cs typeface="Microsoft JhengHei"/>
                         </a:rPr>
-                        <a:t>創新服務</a:t>
+                        <a:t>上詮</a:t>
                       </a:r>
                     </a:p>
                   </a:txBody>
@@ -7152,7 +7762,7 @@
                           <a:ea typeface="Microsoft JhengHei"/>
                           <a:cs typeface="Microsoft JhengHei"/>
                         </a:rPr>
-                        <a:t>7828</a:t>
+                        <a:t>3363</a:t>
                       </a:r>
                     </a:p>
                   </a:txBody>
@@ -7170,13 +7780,13 @@
                       <a:r>
                         <a:rPr sz="1150" b="1">
                           <a:solidFill>
-                            <a:srgbClr val="F4A261"/>
+                            <a:srgbClr val="E63946"/>
                           </a:solidFill>
                           <a:latin typeface="Microsoft JhengHei"/>
                           <a:ea typeface="Microsoft JhengHei"/>
                           <a:cs typeface="Microsoft JhengHei"/>
                         </a:rPr>
-                        <a:t>勒索病毒/加密</a:t>
+                        <a:t>駭客攻擊</a:t>
                       </a:r>
                     </a:p>
                   </a:txBody>
@@ -7224,379 +7834,13 @@
                           <a:ea typeface="Microsoft JhengHei"/>
                           <a:cs typeface="Microsoft JhengHei"/>
                         </a:rPr>
-                        <a:t>蔡欣怡、白淑蒨</a:t>
+                        <a:t>白淑蒨、李典易</a:t>
                       </a:r>
                     </a:p>
                   </a:txBody>
                   <a:tcPr anchor="ctr" marL="73152" marT="9144" marB="9144">
                     <a:solidFill>
                       <a:srgbClr val="FFFFFF"/>
-                    </a:solidFill>
-                  </a:tcPr>
-                </a:tc>
-              </a:tr>
-              <a:tr h="407323">
-                <a:tc>
-                  <a:txBody>
-                    <a:bodyPr/>
-                    <a:lstStyle/>
-                    <a:p>
-                      <a:r>
-                        <a:rPr sz="1150" b="0">
-                          <a:solidFill>
-                            <a:srgbClr val="1A2233"/>
-                          </a:solidFill>
-                          <a:latin typeface="Microsoft JhengHei"/>
-                          <a:ea typeface="Microsoft JhengHei"/>
-                          <a:cs typeface="Microsoft JhengHei"/>
-                        </a:rPr>
-                        <a:t>杭特</a:t>
-                      </a:r>
-                    </a:p>
-                  </a:txBody>
-                  <a:tcPr anchor="ctr" marL="73152" marT="9144" marB="9144">
-                    <a:solidFill>
-                      <a:srgbClr val="EEF2F9"/>
-                    </a:solidFill>
-                  </a:tcPr>
-                </a:tc>
-                <a:tc>
-                  <a:txBody>
-                    <a:bodyPr/>
-                    <a:lstStyle/>
-                    <a:p>
-                      <a:r>
-                        <a:rPr sz="1150" b="0">
-                          <a:solidFill>
-                            <a:srgbClr val="1A2233"/>
-                          </a:solidFill>
-                          <a:latin typeface="Microsoft JhengHei"/>
-                          <a:ea typeface="Microsoft JhengHei"/>
-                          <a:cs typeface="Microsoft JhengHei"/>
-                        </a:rPr>
-                        <a:t>3297</a:t>
-                      </a:r>
-                    </a:p>
-                  </a:txBody>
-                  <a:tcPr anchor="ctr" marL="73152" marT="9144" marB="9144">
-                    <a:solidFill>
-                      <a:srgbClr val="EEF2F9"/>
-                    </a:solidFill>
-                  </a:tcPr>
-                </a:tc>
-                <a:tc>
-                  <a:txBody>
-                    <a:bodyPr/>
-                    <a:lstStyle/>
-                    <a:p>
-                      <a:r>
-                        <a:rPr sz="1150" b="1">
-                          <a:solidFill>
-                            <a:srgbClr val="E63946"/>
-                          </a:solidFill>
-                          <a:latin typeface="Microsoft JhengHei"/>
-                          <a:ea typeface="Microsoft JhengHei"/>
-                          <a:cs typeface="Microsoft JhengHei"/>
-                        </a:rPr>
-                        <a:t>駭客攻擊</a:t>
-                      </a:r>
-                    </a:p>
-                  </a:txBody>
-                  <a:tcPr anchor="ctr" marL="73152" marT="9144" marB="9144">
-                    <a:solidFill>
-                      <a:srgbClr val="EEF2F9"/>
-                    </a:solidFill>
-                  </a:tcPr>
-                </a:tc>
-                <a:tc>
-                  <a:txBody>
-                    <a:bodyPr/>
-                    <a:lstStyle/>
-                    <a:p>
-                      <a:r>
-                        <a:rPr sz="1150" b="0">
-                          <a:solidFill>
-                            <a:srgbClr val="1A2233"/>
-                          </a:solidFill>
-                          <a:latin typeface="Microsoft JhengHei"/>
-                          <a:ea typeface="Microsoft JhengHei"/>
-                          <a:cs typeface="Microsoft JhengHei"/>
-                        </a:rPr>
-                        <a:t>資誠聯合會計師事務所</a:t>
-                      </a:r>
-                    </a:p>
-                  </a:txBody>
-                  <a:tcPr anchor="ctr" marL="73152" marT="9144" marB="9144">
-                    <a:solidFill>
-                      <a:srgbClr val="EEF2F9"/>
-                    </a:solidFill>
-                  </a:tcPr>
-                </a:tc>
-                <a:tc>
-                  <a:txBody>
-                    <a:bodyPr/>
-                    <a:lstStyle/>
-                    <a:p>
-                      <a:r>
-                        <a:rPr sz="1150" b="0">
-                          <a:solidFill>
-                            <a:srgbClr val="1A2233"/>
-                          </a:solidFill>
-                          <a:latin typeface="Microsoft JhengHei"/>
-                          <a:ea typeface="Microsoft JhengHei"/>
-                          <a:cs typeface="Microsoft JhengHei"/>
-                        </a:rPr>
-                        <a:t>陳憲正、林瑟凱</a:t>
-                      </a:r>
-                    </a:p>
-                  </a:txBody>
-                  <a:tcPr anchor="ctr" marL="73152" marT="9144" marB="9144">
-                    <a:solidFill>
-                      <a:srgbClr val="EEF2F9"/>
-                    </a:solidFill>
-                  </a:tcPr>
-                </a:tc>
-              </a:tr>
-              <a:tr h="407323">
-                <a:tc>
-                  <a:txBody>
-                    <a:bodyPr/>
-                    <a:lstStyle/>
-                    <a:p>
-                      <a:r>
-                        <a:rPr sz="1150" b="0">
-                          <a:solidFill>
-                            <a:srgbClr val="1A2233"/>
-                          </a:solidFill>
-                          <a:latin typeface="Microsoft JhengHei"/>
-                          <a:ea typeface="Microsoft JhengHei"/>
-                          <a:cs typeface="Microsoft JhengHei"/>
-                        </a:rPr>
-                        <a:t>數字</a:t>
-                      </a:r>
-                    </a:p>
-                  </a:txBody>
-                  <a:tcPr anchor="ctr" marL="73152" marT="9144" marB="9144">
-                    <a:solidFill>
-                      <a:srgbClr val="FFFFFF"/>
-                    </a:solidFill>
-                  </a:tcPr>
-                </a:tc>
-                <a:tc>
-                  <a:txBody>
-                    <a:bodyPr/>
-                    <a:lstStyle/>
-                    <a:p>
-                      <a:r>
-                        <a:rPr sz="1150" b="0">
-                          <a:solidFill>
-                            <a:srgbClr val="1A2233"/>
-                          </a:solidFill>
-                          <a:latin typeface="Microsoft JhengHei"/>
-                          <a:ea typeface="Microsoft JhengHei"/>
-                          <a:cs typeface="Microsoft JhengHei"/>
-                        </a:rPr>
-                        <a:t>5287</a:t>
-                      </a:r>
-                    </a:p>
-                  </a:txBody>
-                  <a:tcPr anchor="ctr" marL="73152" marT="9144" marB="9144">
-                    <a:solidFill>
-                      <a:srgbClr val="FFFFFF"/>
-                    </a:solidFill>
-                  </a:tcPr>
-                </a:tc>
-                <a:tc>
-                  <a:txBody>
-                    <a:bodyPr/>
-                    <a:lstStyle/>
-                    <a:p>
-                      <a:r>
-                        <a:rPr sz="1150" b="1">
-                          <a:solidFill>
-                            <a:srgbClr val="E63946"/>
-                          </a:solidFill>
-                          <a:latin typeface="Microsoft JhengHei"/>
-                          <a:ea typeface="Microsoft JhengHei"/>
-                          <a:cs typeface="Microsoft JhengHei"/>
-                        </a:rPr>
-                        <a:t>駭客攻擊</a:t>
-                      </a:r>
-                    </a:p>
-                  </a:txBody>
-                  <a:tcPr anchor="ctr" marL="73152" marT="9144" marB="9144">
-                    <a:solidFill>
-                      <a:srgbClr val="FFFFFF"/>
-                    </a:solidFill>
-                  </a:tcPr>
-                </a:tc>
-                <a:tc>
-                  <a:txBody>
-                    <a:bodyPr/>
-                    <a:lstStyle/>
-                    <a:p>
-                      <a:r>
-                        <a:rPr sz="1150" b="0">
-                          <a:solidFill>
-                            <a:srgbClr val="1A2233"/>
-                          </a:solidFill>
-                          <a:latin typeface="Microsoft JhengHei"/>
-                          <a:ea typeface="Microsoft JhengHei"/>
-                          <a:cs typeface="Microsoft JhengHei"/>
-                        </a:rPr>
-                        <a:t>安侯建業聯合會計師事務所</a:t>
-                      </a:r>
-                    </a:p>
-                  </a:txBody>
-                  <a:tcPr anchor="ctr" marL="73152" marT="9144" marB="9144">
-                    <a:solidFill>
-                      <a:srgbClr val="FFFFFF"/>
-                    </a:solidFill>
-                  </a:tcPr>
-                </a:tc>
-                <a:tc>
-                  <a:txBody>
-                    <a:bodyPr/>
-                    <a:lstStyle/>
-                    <a:p>
-                      <a:r>
-                        <a:rPr sz="1150" b="0">
-                          <a:solidFill>
-                            <a:srgbClr val="1A2233"/>
-                          </a:solidFill>
-                          <a:latin typeface="Microsoft JhengHei"/>
-                          <a:ea typeface="Microsoft JhengHei"/>
-                          <a:cs typeface="Microsoft JhengHei"/>
-                        </a:rPr>
-                        <a:t>羅瑞芝、余聖河</a:t>
-                      </a:r>
-                    </a:p>
-                  </a:txBody>
-                  <a:tcPr anchor="ctr" marL="73152" marT="9144" marB="9144">
-                    <a:solidFill>
-                      <a:srgbClr val="FFFFFF"/>
-                    </a:solidFill>
-                  </a:tcPr>
-                </a:tc>
-              </a:tr>
-              <a:tr h="407330">
-                <a:tc>
-                  <a:txBody>
-                    <a:bodyPr/>
-                    <a:lstStyle/>
-                    <a:p>
-                      <a:r>
-                        <a:rPr sz="1150" b="0">
-                          <a:solidFill>
-                            <a:srgbClr val="1A2233"/>
-                          </a:solidFill>
-                          <a:latin typeface="Microsoft JhengHei"/>
-                          <a:ea typeface="Microsoft JhengHei"/>
-                          <a:cs typeface="Microsoft JhengHei"/>
-                        </a:rPr>
-                        <a:t>上詮</a:t>
-                      </a:r>
-                    </a:p>
-                  </a:txBody>
-                  <a:tcPr anchor="ctr" marL="73152" marT="9144" marB="9144">
-                    <a:solidFill>
-                      <a:srgbClr val="EEF2F9"/>
-                    </a:solidFill>
-                  </a:tcPr>
-                </a:tc>
-                <a:tc>
-                  <a:txBody>
-                    <a:bodyPr/>
-                    <a:lstStyle/>
-                    <a:p>
-                      <a:r>
-                        <a:rPr sz="1150" b="0">
-                          <a:solidFill>
-                            <a:srgbClr val="1A2233"/>
-                          </a:solidFill>
-                          <a:latin typeface="Microsoft JhengHei"/>
-                          <a:ea typeface="Microsoft JhengHei"/>
-                          <a:cs typeface="Microsoft JhengHei"/>
-                        </a:rPr>
-                        <a:t>3363</a:t>
-                      </a:r>
-                    </a:p>
-                  </a:txBody>
-                  <a:tcPr anchor="ctr" marL="73152" marT="9144" marB="9144">
-                    <a:solidFill>
-                      <a:srgbClr val="EEF2F9"/>
-                    </a:solidFill>
-                  </a:tcPr>
-                </a:tc>
-                <a:tc>
-                  <a:txBody>
-                    <a:bodyPr/>
-                    <a:lstStyle/>
-                    <a:p>
-                      <a:r>
-                        <a:rPr sz="1150" b="1">
-                          <a:solidFill>
-                            <a:srgbClr val="E63946"/>
-                          </a:solidFill>
-                          <a:latin typeface="Microsoft JhengHei"/>
-                          <a:ea typeface="Microsoft JhengHei"/>
-                          <a:cs typeface="Microsoft JhengHei"/>
-                        </a:rPr>
-                        <a:t>駭客攻擊</a:t>
-                      </a:r>
-                    </a:p>
-                  </a:txBody>
-                  <a:tcPr anchor="ctr" marL="73152" marT="9144" marB="9144">
-                    <a:solidFill>
-                      <a:srgbClr val="EEF2F9"/>
-                    </a:solidFill>
-                  </a:tcPr>
-                </a:tc>
-                <a:tc>
-                  <a:txBody>
-                    <a:bodyPr/>
-                    <a:lstStyle/>
-                    <a:p>
-                      <a:r>
-                        <a:rPr sz="1150" b="0">
-                          <a:solidFill>
-                            <a:srgbClr val="1A2233"/>
-                          </a:solidFill>
-                          <a:latin typeface="Microsoft JhengHei"/>
-                          <a:ea typeface="Microsoft JhengHei"/>
-                          <a:cs typeface="Microsoft JhengHei"/>
-                        </a:rPr>
-                        <a:t>資誠聯合會計師事務所</a:t>
-                      </a:r>
-                    </a:p>
-                  </a:txBody>
-                  <a:tcPr anchor="ctr" marL="73152" marT="9144" marB="9144">
-                    <a:solidFill>
-                      <a:srgbClr val="EEF2F9"/>
-                    </a:solidFill>
-                  </a:tcPr>
-                </a:tc>
-                <a:tc>
-                  <a:txBody>
-                    <a:bodyPr/>
-                    <a:lstStyle/>
-                    <a:p>
-                      <a:r>
-                        <a:rPr sz="1150" b="0">
-                          <a:solidFill>
-                            <a:srgbClr val="1A2233"/>
-                          </a:solidFill>
-                          <a:latin typeface="Microsoft JhengHei"/>
-                          <a:ea typeface="Microsoft JhengHei"/>
-                          <a:cs typeface="Microsoft JhengHei"/>
-                        </a:rPr>
-                        <a:t>白淑蒨、李典易</a:t>
-                      </a:r>
-                    </a:p>
-                  </a:txBody>
-                  <a:tcPr anchor="ctr" marL="73152" marT="9144" marB="9144">
-                    <a:solidFill>
-                      <a:srgbClr val="EEF2F9"/>
                     </a:solidFill>
                   </a:tcPr>
                 </a:tc>
@@ -9111,7 +9355,7 @@
                 <a:ea typeface="Microsoft JhengHei"/>
                 <a:cs typeface="Microsoft JhengHei"/>
               </a:rPr>
-              <a:t>長榮航 </a:t>
+              <a:t>友訊 </a:t>
             </a:r>
             <a:r>
               <a:rPr sz="1300" b="0">
@@ -9122,7 +9366,7 @@
                 <a:ea typeface="Microsoft JhengHei"/>
                 <a:cs typeface="Microsoft JhengHei"/>
               </a:rPr>
-              <a:t>2618</a:t>
+              <a:t>2332</a:t>
             </a:r>
           </a:p>
         </p:txBody>
@@ -9255,7 +9499,7 @@
                 <a:ea typeface="Microsoft JhengHei"/>
                 <a:cs typeface="Microsoft JhengHei"/>
               </a:rPr>
-              <a:t>本公司發現有不明人士透過惡意IP入侵本公司內部資訊環境，取得員工姓名與公務聯繫資訊。</a:t>
+              <a:t>本公司網站監控中發現登入記錄異常，查知外部攻擊者利用既有登入機制，以大量帳號密碼進行網站登入驗證…</a:t>
             </a:r>
           </a:p>
         </p:txBody>
@@ -9307,7 +9551,7 @@
                 <a:ea typeface="Microsoft JhengHei"/>
                 <a:cs typeface="Microsoft JhengHei"/>
               </a:rPr>
-              <a:t>本公司已重新檢視可能造成資安疑慮的因子並加以防範，同時持續加強監控。</a:t>
+              <a:t>(1)強化網站登入驗證、存取控制及異常行為偵測機制。(2)強化網頁應用程式防火牆，降低大量或異常登入嘗試之可行性。(3)…</a:t>
             </a:r>
           </a:p>
         </p:txBody>
@@ -9434,7 +9678,7 @@
                 <a:ea typeface="Microsoft JhengHei"/>
                 <a:cs typeface="Microsoft JhengHei"/>
               </a:rPr>
-              <a:t>長榮航太 </a:t>
+              <a:t>長榮航 </a:t>
             </a:r>
             <a:r>
               <a:rPr sz="1300" b="0">
@@ -9445,7 +9689,7 @@
                 <a:ea typeface="Microsoft JhengHei"/>
                 <a:cs typeface="Microsoft JhengHei"/>
               </a:rPr>
-              <a:t>2645</a:t>
+              <a:t>2618</a:t>
             </a:r>
           </a:p>
         </p:txBody>
@@ -9578,7 +9822,7 @@
                 <a:ea typeface="Microsoft JhengHei"/>
                 <a:cs typeface="Microsoft JhengHei"/>
               </a:rPr>
-              <a:t>本公司發現部分內部資訊系統遭受網路攻擊。</a:t>
+              <a:t>本公司發現有不明人士透過惡意IP入侵本公司內部資訊環境，取得員工姓名與公務聯繫資訊。</a:t>
             </a:r>
           </a:p>
         </p:txBody>
@@ -9630,7 +9874,7 @@
                 <a:ea typeface="Microsoft JhengHei"/>
                 <a:cs typeface="Microsoft JhengHei"/>
               </a:rPr>
-              <a:t>本公司將持續監控公司整體資訊系統運作狀況，並檢討強化現有資安防護措施，以確保資訊安全。</a:t>
+              <a:t>本公司已重新檢視可能造成資安疑慮的因子並加以防範，同時持續加強監控。</a:t>
             </a:r>
           </a:p>
         </p:txBody>
@@ -9696,7 +9940,7 @@
             <a:avLst/>
           </a:prstGeom>
           <a:solidFill>
-            <a:srgbClr val="F4A261"/>
+            <a:srgbClr val="E63946"/>
           </a:solidFill>
           <a:ln>
             <a:noFill/>
@@ -9757,7 +10001,7 @@
                 <a:ea typeface="Microsoft JhengHei"/>
                 <a:cs typeface="Microsoft JhengHei"/>
               </a:rPr>
-              <a:t>崴寶 </a:t>
+              <a:t>長榮航太 </a:t>
             </a:r>
             <a:r>
               <a:rPr sz="1300" b="0">
@@ -9768,7 +10012,7 @@
                 <a:ea typeface="Microsoft JhengHei"/>
                 <a:cs typeface="Microsoft JhengHei"/>
               </a:rPr>
-              <a:t>7744</a:t>
+              <a:t>2645</a:t>
             </a:r>
           </a:p>
         </p:txBody>
@@ -9788,7 +10032,7 @@
             <a:avLst/>
           </a:prstGeom>
           <a:solidFill>
-            <a:srgbClr val="F4A261"/>
+            <a:srgbClr val="E63946"/>
           </a:solidFill>
           <a:ln>
             <a:noFill/>
@@ -9849,7 +10093,7 @@
                 <a:ea typeface="Microsoft JhengHei"/>
                 <a:cs typeface="Microsoft JhengHei"/>
               </a:rPr>
-              <a:t>勒索病毒/加密</a:t>
+              <a:t>駭客攻擊</a:t>
             </a:r>
           </a:p>
         </p:txBody>
@@ -9884,7 +10128,7 @@
             <a:r>
               <a:rPr sz="1100" b="1">
                 <a:solidFill>
-                  <a:srgbClr val="F4A261"/>
+                  <a:srgbClr val="E63946"/>
                 </a:solidFill>
                 <a:latin typeface="Microsoft JhengHei"/>
                 <a:ea typeface="Microsoft JhengHei"/>
@@ -9901,7 +10145,7 @@
                 <a:ea typeface="Microsoft JhengHei"/>
                 <a:cs typeface="Microsoft JhengHei"/>
               </a:rPr>
-              <a:t>本公司於115年9月14日上午發現資訊系統遭駭客入侵，部分系統資料遭加密鎖定。本公司立即啟動資安…</a:t>
+              <a:t>本公司發現部分內部資訊系統遭受網路攻擊。</a:t>
             </a:r>
           </a:p>
         </p:txBody>
@@ -9936,7 +10180,7 @@
             <a:r>
               <a:rPr sz="1100" b="1">
                 <a:solidFill>
-                  <a:srgbClr val="F4A261"/>
+                  <a:srgbClr val="E63946"/>
                 </a:solidFill>
                 <a:latin typeface="Microsoft JhengHei"/>
                 <a:ea typeface="Microsoft JhengHei"/>
@@ -9953,7 +10197,7 @@
                 <a:ea typeface="Microsoft JhengHei"/>
                 <a:cs typeface="Microsoft JhengHei"/>
               </a:rPr>
-              <a:t>本公司將持續配合專業資安團隊進行事件調查與監控，並加強資訊安全管理措施，包括提升端點防護機制、強化網路監控能力、落實帳號…</a:t>
+              <a:t>本公司將持續監控公司整體資訊系統運作狀況，並檢討強化現有資安防護措施，以確保資訊安全。</a:t>
             </a:r>
           </a:p>
         </p:txBody>
@@ -10019,7 +10263,7 @@
             <a:avLst/>
           </a:prstGeom>
           <a:solidFill>
-            <a:srgbClr val="E63946"/>
+            <a:srgbClr val="F4A261"/>
           </a:solidFill>
           <a:ln>
             <a:noFill/>
@@ -10080,7 +10324,7 @@
                 <a:ea typeface="Microsoft JhengHei"/>
                 <a:cs typeface="Microsoft JhengHei"/>
               </a:rPr>
-              <a:t>達爾膚 </a:t>
+              <a:t>崴寶 </a:t>
             </a:r>
             <a:r>
               <a:rPr sz="1300" b="0">
@@ -10091,7 +10335,7 @@
                 <a:ea typeface="Microsoft JhengHei"/>
                 <a:cs typeface="Microsoft JhengHei"/>
               </a:rPr>
-              <a:t>6523</a:t>
+              <a:t>7744</a:t>
             </a:r>
           </a:p>
         </p:txBody>
@@ -10111,7 +10355,7 @@
             <a:avLst/>
           </a:prstGeom>
           <a:solidFill>
-            <a:srgbClr val="E63946"/>
+            <a:srgbClr val="F4A261"/>
           </a:solidFill>
           <a:ln>
             <a:noFill/>
@@ -10172,7 +10416,7 @@
                 <a:ea typeface="Microsoft JhengHei"/>
                 <a:cs typeface="Microsoft JhengHei"/>
               </a:rPr>
-              <a:t>駭客攻擊</a:t>
+              <a:t>勒索病毒/加密</a:t>
             </a:r>
           </a:p>
         </p:txBody>
@@ -10207,7 +10451,7 @@
             <a:r>
               <a:rPr sz="1100" b="1">
                 <a:solidFill>
-                  <a:srgbClr val="E63946"/>
+                  <a:srgbClr val="F4A261"/>
                 </a:solidFill>
                 <a:latin typeface="Microsoft JhengHei"/>
                 <a:ea typeface="Microsoft JhengHei"/>
@@ -10224,7 +10468,7 @@
                 <a:ea typeface="Microsoft JhengHei"/>
                 <a:cs typeface="Microsoft JhengHei"/>
               </a:rPr>
-              <a:t>本公司部分內部資訊系統遭受網路攻擊事件，初步評估對公司營運無重大影響。</a:t>
+              <a:t>本公司於115年9月14日上午發現資訊系統遭駭客入侵，部分系統資料遭加密鎖定。本公司立即啟動資安…</a:t>
             </a:r>
           </a:p>
         </p:txBody>
@@ -10259,7 +10503,7 @@
             <a:r>
               <a:rPr sz="1100" b="1">
                 <a:solidFill>
-                  <a:srgbClr val="E63946"/>
+                  <a:srgbClr val="F4A261"/>
                 </a:solidFill>
                 <a:latin typeface="Microsoft JhengHei"/>
                 <a:ea typeface="Microsoft JhengHei"/>
@@ -10276,7 +10520,7 @@
                 <a:ea typeface="Microsoft JhengHei"/>
                 <a:cs typeface="Microsoft JhengHei"/>
               </a:rPr>
-              <a:t>本公司將持續強化網路與資訊基礎架構之安全管控，以確保資訊安全。</a:t>
+              <a:t>本公司將持續配合專業資安團隊進行事件調查與監控，並加強資訊安全管理措施，包括提升端點防護機制、強化網路監控能力、落實帳號…</a:t>
             </a:r>
           </a:p>
         </p:txBody>
@@ -10539,7 +10783,7 @@
                 <a:ea typeface="Microsoft JhengHei"/>
                 <a:cs typeface="Microsoft JhengHei"/>
               </a:rPr>
-              <a:t>大車隊 </a:t>
+              <a:t>達爾膚 </a:t>
             </a:r>
             <a:r>
               <a:rPr sz="1300" b="0">
@@ -10550,7 +10794,7 @@
                 <a:ea typeface="Microsoft JhengHei"/>
                 <a:cs typeface="Microsoft JhengHei"/>
               </a:rPr>
-              <a:t>2640</a:t>
+              <a:t>6523</a:t>
             </a:r>
           </a:p>
         </p:txBody>
@@ -10683,7 +10927,7 @@
                 <a:ea typeface="Microsoft JhengHei"/>
                 <a:cs typeface="Microsoft JhengHei"/>
               </a:rPr>
-              <a:t>本公司重要子公司全球商務科技股份有限公司於今日發現部分資訊系統遭受網路攻擊，已立即啟動資安應變機…</a:t>
+              <a:t>本公司部分內部資訊系統遭受網路攻擊事件，初步評估對公司營運無重大影響。</a:t>
             </a:r>
           </a:p>
         </p:txBody>
@@ -10735,7 +10979,7 @@
                 <a:ea typeface="Microsoft JhengHei"/>
                 <a:cs typeface="Microsoft JhengHei"/>
               </a:rPr>
-              <a:t>公司將持續進行資安鑑識、系統安全強化及相關風險控管作業，受影響系統預期可於短期內逐步恢復正常運作；後續如調查結果或事件發…</a:t>
+              <a:t>本公司將持續強化網路與資訊基礎架構之安全管控，以確保資訊安全。</a:t>
             </a:r>
           </a:p>
         </p:txBody>
@@ -10801,7 +11045,7 @@
             <a:avLst/>
           </a:prstGeom>
           <a:solidFill>
-            <a:srgbClr val="F4A261"/>
+            <a:srgbClr val="E63946"/>
           </a:solidFill>
           <a:ln>
             <a:noFill/>
@@ -10862,7 +11106,7 @@
                 <a:ea typeface="Microsoft JhengHei"/>
                 <a:cs typeface="Microsoft JhengHei"/>
               </a:rPr>
-              <a:t>富爾特 </a:t>
+              <a:t>大車隊 </a:t>
             </a:r>
             <a:r>
               <a:rPr sz="1300" b="0">
@@ -10873,7 +11117,7 @@
                 <a:ea typeface="Microsoft JhengHei"/>
                 <a:cs typeface="Microsoft JhengHei"/>
               </a:rPr>
-              <a:t>6136</a:t>
+              <a:t>2640</a:t>
             </a:r>
           </a:p>
         </p:txBody>
@@ -10893,7 +11137,7 @@
             <a:avLst/>
           </a:prstGeom>
           <a:solidFill>
-            <a:srgbClr val="F4A261"/>
+            <a:srgbClr val="E63946"/>
           </a:solidFill>
           <a:ln>
             <a:noFill/>
@@ -10954,7 +11198,7 @@
                 <a:ea typeface="Microsoft JhengHei"/>
                 <a:cs typeface="Microsoft JhengHei"/>
               </a:rPr>
-              <a:t>勒索病毒/加密</a:t>
+              <a:t>駭客攻擊</a:t>
             </a:r>
           </a:p>
         </p:txBody>
@@ -10989,7 +11233,7 @@
             <a:r>
               <a:rPr sz="1100" b="1">
                 <a:solidFill>
-                  <a:srgbClr val="F4A261"/>
+                  <a:srgbClr val="E63946"/>
                 </a:solidFill>
                 <a:latin typeface="Microsoft JhengHei"/>
                 <a:ea typeface="Microsoft JhengHei"/>
@@ -11006,7 +11250,7 @@
                 <a:ea typeface="Microsoft JhengHei"/>
                 <a:cs typeface="Microsoft JhengHei"/>
               </a:rPr>
-              <a:t>本公司之子公司格帝控股股份有限公司偵測到部份伺服器遭受網路勒索病毒攻擊，致使包含ERP在內之部份…</a:t>
+              <a:t>本公司重要子公司全球商務科技股份有限公司於今日發現部分資訊系統遭受網路攻擊，已立即啟動資安應變機…</a:t>
             </a:r>
           </a:p>
         </p:txBody>
@@ -11041,7 +11285,7 @@
             <a:r>
               <a:rPr sz="1100" b="1">
                 <a:solidFill>
-                  <a:srgbClr val="F4A261"/>
+                  <a:srgbClr val="E63946"/>
                 </a:solidFill>
                 <a:latin typeface="Microsoft JhengHei"/>
                 <a:ea typeface="Microsoft JhengHei"/>
@@ -11058,7 +11302,7 @@
                 <a:ea typeface="Microsoft JhengHei"/>
                 <a:cs typeface="Microsoft JhengHei"/>
               </a:rPr>
-              <a:t>本公司及所屬子公司將持續密集監控，並強化網路與資訊基礎架構之管控，以確保資訊系統安全。</a:t>
+              <a:t>公司將持續進行資安鑑識、系統安全強化及相關風險控管作業，受影響系統預期可於短期內逐步恢復正常運作；後續如調查結果或事件發…</a:t>
             </a:r>
           </a:p>
         </p:txBody>
@@ -11185,7 +11429,7 @@
                 <a:ea typeface="Microsoft JhengHei"/>
                 <a:cs typeface="Microsoft JhengHei"/>
               </a:rPr>
-              <a:t>創新服務 </a:t>
+              <a:t>富爾特 </a:t>
             </a:r>
             <a:r>
               <a:rPr sz="1300" b="0">
@@ -11196,7 +11440,7 @@
                 <a:ea typeface="Microsoft JhengHei"/>
                 <a:cs typeface="Microsoft JhengHei"/>
               </a:rPr>
-              <a:t>7828</a:t>
+              <a:t>6136</a:t>
             </a:r>
           </a:p>
         </p:txBody>
@@ -11329,7 +11573,7 @@
                 <a:ea typeface="Microsoft JhengHei"/>
                 <a:cs typeface="Microsoft JhengHei"/>
               </a:rPr>
-              <a:t>本公司於今日偵測到部份伺服器遭受網路勒索病毒攻擊，致使包含ERP在內之部份資訊系統無法正常運作。</a:t>
+              <a:t>本公司之子公司格帝控股股份有限公司偵測到部份伺服器遭受網路勒索病毒攻擊，致使包含ERP在內之部份…</a:t>
             </a:r>
           </a:p>
         </p:txBody>
@@ -11381,7 +11625,7 @@
                 <a:ea typeface="Microsoft JhengHei"/>
                 <a:cs typeface="Microsoft JhengHei"/>
               </a:rPr>
-              <a:t>本公司將持續密集監控，並強化網路與資訊基礎架構之管控，以確保資訊系統安全。</a:t>
+              <a:t>本公司及所屬子公司將持續密集監控，並強化網路與資訊基礎架構之管控，以確保資訊系統安全。</a:t>
             </a:r>
           </a:p>
         </p:txBody>
@@ -11447,7 +11691,7 @@
             <a:avLst/>
           </a:prstGeom>
           <a:solidFill>
-            <a:srgbClr val="E63946"/>
+            <a:srgbClr val="F4A261"/>
           </a:solidFill>
           <a:ln>
             <a:noFill/>
@@ -11508,7 +11752,7 @@
                 <a:ea typeface="Microsoft JhengHei"/>
                 <a:cs typeface="Microsoft JhengHei"/>
               </a:rPr>
-              <a:t>杭特 </a:t>
+              <a:t>創新服務 </a:t>
             </a:r>
             <a:r>
               <a:rPr sz="1300" b="0">
@@ -11519,7 +11763,7 @@
                 <a:ea typeface="Microsoft JhengHei"/>
                 <a:cs typeface="Microsoft JhengHei"/>
               </a:rPr>
-              <a:t>3297</a:t>
+              <a:t>7828</a:t>
             </a:r>
           </a:p>
         </p:txBody>
@@ -11539,7 +11783,7 @@
             <a:avLst/>
           </a:prstGeom>
           <a:solidFill>
-            <a:srgbClr val="E63946"/>
+            <a:srgbClr val="F4A261"/>
           </a:solidFill>
           <a:ln>
             <a:noFill/>
@@ -11600,7 +11844,7 @@
                 <a:ea typeface="Microsoft JhengHei"/>
                 <a:cs typeface="Microsoft JhengHei"/>
               </a:rPr>
-              <a:t>駭客攻擊</a:t>
+              <a:t>勒索病毒/加密</a:t>
             </a:r>
           </a:p>
         </p:txBody>
@@ -11635,7 +11879,7 @@
             <a:r>
               <a:rPr sz="1100" b="1">
                 <a:solidFill>
-                  <a:srgbClr val="E63946"/>
+                  <a:srgbClr val="F4A261"/>
                 </a:solidFill>
                 <a:latin typeface="Microsoft JhengHei"/>
                 <a:ea typeface="Microsoft JhengHei"/>
@@ -11652,7 +11896,7 @@
                 <a:ea typeface="Microsoft JhengHei"/>
                 <a:cs typeface="Microsoft JhengHei"/>
               </a:rPr>
-              <a:t>本公司資訊系統遭受駭客網路攻擊，初步評估對公司營運暫無重大影響。</a:t>
+              <a:t>本公司於今日偵測到部份伺服器遭受網路勒索病毒攻擊，致使包含ERP在內之部份資訊系統無法正常運作。</a:t>
             </a:r>
           </a:p>
         </p:txBody>
@@ -11687,7 +11931,7 @@
             <a:r>
               <a:rPr sz="1100" b="1">
                 <a:solidFill>
-                  <a:srgbClr val="E63946"/>
+                  <a:srgbClr val="F4A261"/>
                 </a:solidFill>
                 <a:latin typeface="Microsoft JhengHei"/>
                 <a:ea typeface="Microsoft JhengHei"/>
@@ -11704,7 +11948,7 @@
                 <a:ea typeface="Microsoft JhengHei"/>
                 <a:cs typeface="Microsoft JhengHei"/>
               </a:rPr>
-              <a:t>本公司將持續提升網路與資訊基礎架構之安全管控，以確保資訊安全。</a:t>
+              <a:t>本公司將持續密集監控，並強化網路與資訊基礎架構之管控，以確保資訊系統安全。</a:t>
             </a:r>
           </a:p>
         </p:txBody>
@@ -11967,7 +12211,7 @@
                 <a:ea typeface="Microsoft JhengHei"/>
                 <a:cs typeface="Microsoft JhengHei"/>
               </a:rPr>
-              <a:t>數字 </a:t>
+              <a:t>杭特 </a:t>
             </a:r>
             <a:r>
               <a:rPr sz="1300" b="0">
@@ -11978,7 +12222,7 @@
                 <a:ea typeface="Microsoft JhengHei"/>
                 <a:cs typeface="Microsoft JhengHei"/>
               </a:rPr>
-              <a:t>5287</a:t>
+              <a:t>3297</a:t>
             </a:r>
           </a:p>
         </p:txBody>
@@ -12111,7 +12355,7 @@
                 <a:ea typeface="Microsoft JhengHei"/>
                 <a:cs typeface="Microsoft JhengHei"/>
               </a:rPr>
-              <a:t>本公司於115年8月20日發現591網站登入行為異常，經查發現外部攻擊者利用登入機制之弱點，繞過…</a:t>
+              <a:t>本公司資訊系統遭受駭客網路攻擊，初步評估對公司營運暫無重大影響。</a:t>
             </a:r>
           </a:p>
         </p:txBody>
@@ -12163,7 +12407,7 @@
                 <a:ea typeface="Microsoft JhengHei"/>
                 <a:cs typeface="Microsoft JhengHei"/>
               </a:rPr>
-              <a:t>(1)依據安全軟體發展生命週期（SSDLC）框架，持續優化系統開發流程及資安檢視機制。(2)強化登入驗證、存取控制及異常…</a:t>
+              <a:t>本公司將持續提升網路與資訊基礎架構之安全管控，以確保資訊安全。</a:t>
             </a:r>
           </a:p>
         </p:txBody>
@@ -12290,7 +12534,7 @@
                 <a:ea typeface="Microsoft JhengHei"/>
                 <a:cs typeface="Microsoft JhengHei"/>
               </a:rPr>
-              <a:t>上詮 </a:t>
+              <a:t>數字 </a:t>
             </a:r>
             <a:r>
               <a:rPr sz="1300" b="0">
@@ -12301,7 +12545,7 @@
                 <a:ea typeface="Microsoft JhengHei"/>
                 <a:cs typeface="Microsoft JhengHei"/>
               </a:rPr>
-              <a:t>3363</a:t>
+              <a:t>5287</a:t>
             </a:r>
           </a:p>
         </p:txBody>
@@ -12434,7 +12678,7 @@
                 <a:ea typeface="Microsoft JhengHei"/>
                 <a:cs typeface="Microsoft JhengHei"/>
               </a:rPr>
-              <a:t>本公司資訊系統遭受駭客網路攻擊，部分主機與電腦遭受病毒攻擊。</a:t>
+              <a:t>本公司於115年8月20日發現591網站登入行為異常，經查發現外部攻擊者利用登入機制之弱點，繞過…</a:t>
             </a:r>
           </a:p>
         </p:txBody>
@@ -12448,6 +12692,329 @@
         <p:spPr>
           <a:xfrm>
             <a:off x="6400800" y="2926080"/>
+            <a:ext cx="4937760" cy="713232"/>
+          </a:xfrm>
+          <a:prstGeom prst="rect">
+            <a:avLst/>
+          </a:prstGeom>
+          <a:noFill/>
+        </p:spPr>
+        <p:txBody>
+          <a:bodyPr wrap="square" anchor="t" lIns="0" rIns="0" tIns="0" bIns="0">
+            <a:spAutoFit/>
+          </a:bodyPr>
+          <a:lstStyle/>
+          <a:p>
+            <a:pPr algn="l">
+              <a:lnSpc>
+                <a:spcPts val="1500"/>
+              </a:lnSpc>
+            </a:pPr>
+            <a:r>
+              <a:rPr sz="1100" b="1">
+                <a:solidFill>
+                  <a:srgbClr val="E63946"/>
+                </a:solidFill>
+                <a:latin typeface="Microsoft JhengHei"/>
+                <a:ea typeface="Microsoft JhengHei"/>
+                <a:cs typeface="Microsoft JhengHei"/>
+              </a:rPr>
+              <a:t>因應　</a:t>
+            </a:r>
+            <a:r>
+              <a:rPr sz="1100" b="0">
+                <a:solidFill>
+                  <a:srgbClr val="1A2233"/>
+                </a:solidFill>
+                <a:latin typeface="Microsoft JhengHei"/>
+                <a:ea typeface="Microsoft JhengHei"/>
+                <a:cs typeface="Microsoft JhengHei"/>
+              </a:rPr>
+              <a:t>(1)依據安全軟體發展生命週期（SSDLC）框架，持續優化系統開發流程及資安檢視機制。(2)強化登入驗證、存取控制及異常…</a:t>
+            </a:r>
+          </a:p>
+        </p:txBody>
+      </p:sp>
+      <p:sp>
+        <p:nvSpPr>
+          <p:cNvPr id="19" name="Rounded Rectangle 18"/>
+          <p:cNvSpPr/>
+          <p:nvPr/>
+        </p:nvSpPr>
+        <p:spPr>
+          <a:xfrm>
+            <a:off x="548640" y="3886200"/>
+            <a:ext cx="5394960" cy="2148840"/>
+          </a:xfrm>
+          <a:prstGeom prst="roundRect">
+            <a:avLst/>
+          </a:prstGeom>
+          <a:solidFill>
+            <a:srgbClr val="FFFFFF"/>
+          </a:solidFill>
+          <a:ln w="12700">
+            <a:solidFill>
+              <a:srgbClr val="DDE3EE"/>
+            </a:solidFill>
+          </a:ln>
+          <a:effectLst/>
+        </p:spPr>
+        <p:style>
+          <a:lnRef idx="1">
+            <a:schemeClr val="accent1"/>
+          </a:lnRef>
+          <a:fillRef idx="3">
+            <a:schemeClr val="accent1"/>
+          </a:fillRef>
+          <a:effectRef idx="2">
+            <a:schemeClr val="accent1"/>
+          </a:effectRef>
+          <a:fontRef idx="minor">
+            <a:schemeClr val="lt1"/>
+          </a:fontRef>
+        </p:style>
+        <p:txBody>
+          <a:bodyPr rtlCol="0" anchor="ctr"/>
+          <a:lstStyle/>
+          <a:p>
+            <a:pPr algn="ctr"/>
+          </a:p>
+        </p:txBody>
+      </p:sp>
+      <p:sp>
+        <p:nvSpPr>
+          <p:cNvPr id="20" name="Rectangle 19"/>
+          <p:cNvSpPr/>
+          <p:nvPr/>
+        </p:nvSpPr>
+        <p:spPr>
+          <a:xfrm>
+            <a:off x="548640" y="3886200"/>
+            <a:ext cx="5394960" cy="109728"/>
+          </a:xfrm>
+          <a:prstGeom prst="rect">
+            <a:avLst/>
+          </a:prstGeom>
+          <a:solidFill>
+            <a:srgbClr val="E63946"/>
+          </a:solidFill>
+          <a:ln>
+            <a:noFill/>
+          </a:ln>
+          <a:effectLst/>
+        </p:spPr>
+        <p:style>
+          <a:lnRef idx="1">
+            <a:schemeClr val="accent1"/>
+          </a:lnRef>
+          <a:fillRef idx="3">
+            <a:schemeClr val="accent1"/>
+          </a:fillRef>
+          <a:effectRef idx="2">
+            <a:schemeClr val="accent1"/>
+          </a:effectRef>
+          <a:fontRef idx="minor">
+            <a:schemeClr val="lt1"/>
+          </a:fontRef>
+        </p:style>
+        <p:txBody>
+          <a:bodyPr rtlCol="0" anchor="ctr"/>
+          <a:lstStyle/>
+          <a:p>
+            <a:pPr algn="ctr"/>
+          </a:p>
+        </p:txBody>
+      </p:sp>
+      <p:sp>
+        <p:nvSpPr>
+          <p:cNvPr id="21" name="TextBox 20"/>
+          <p:cNvSpPr txBox="1"/>
+          <p:nvPr/>
+        </p:nvSpPr>
+        <p:spPr>
+          <a:xfrm>
+            <a:off x="777240" y="4105656"/>
+            <a:ext cx="3657600" cy="365760"/>
+          </a:xfrm>
+          <a:prstGeom prst="rect">
+            <a:avLst/>
+          </a:prstGeom>
+          <a:noFill/>
+        </p:spPr>
+        <p:txBody>
+          <a:bodyPr wrap="square" anchor="ctr" lIns="0" rIns="0" tIns="0" bIns="0">
+            <a:spAutoFit/>
+          </a:bodyPr>
+          <a:lstStyle/>
+          <a:p>
+            <a:pPr algn="l"/>
+            <a:r>
+              <a:rPr sz="1600" b="1">
+                <a:solidFill>
+                  <a:srgbClr val="1A2233"/>
+                </a:solidFill>
+                <a:latin typeface="Microsoft JhengHei"/>
+                <a:ea typeface="Microsoft JhengHei"/>
+                <a:cs typeface="Microsoft JhengHei"/>
+              </a:rPr>
+              <a:t>上詮 </a:t>
+            </a:r>
+            <a:r>
+              <a:rPr sz="1300" b="0">
+                <a:solidFill>
+                  <a:srgbClr val="5C6679"/>
+                </a:solidFill>
+                <a:latin typeface="Microsoft JhengHei"/>
+                <a:ea typeface="Microsoft JhengHei"/>
+                <a:cs typeface="Microsoft JhengHei"/>
+              </a:rPr>
+              <a:t>3363</a:t>
+            </a:r>
+          </a:p>
+        </p:txBody>
+      </p:sp>
+      <p:sp>
+        <p:nvSpPr>
+          <p:cNvPr id="22" name="Rounded Rectangle 21"/>
+          <p:cNvSpPr/>
+          <p:nvPr/>
+        </p:nvSpPr>
+        <p:spPr>
+          <a:xfrm>
+            <a:off x="4526280" y="4123944"/>
+            <a:ext cx="1234440" cy="347472"/>
+          </a:xfrm>
+          <a:prstGeom prst="roundRect">
+            <a:avLst/>
+          </a:prstGeom>
+          <a:solidFill>
+            <a:srgbClr val="E63946"/>
+          </a:solidFill>
+          <a:ln>
+            <a:noFill/>
+          </a:ln>
+          <a:effectLst/>
+        </p:spPr>
+        <p:style>
+          <a:lnRef idx="1">
+            <a:schemeClr val="accent1"/>
+          </a:lnRef>
+          <a:fillRef idx="3">
+            <a:schemeClr val="accent1"/>
+          </a:fillRef>
+          <a:effectRef idx="2">
+            <a:schemeClr val="accent1"/>
+          </a:effectRef>
+          <a:fontRef idx="minor">
+            <a:schemeClr val="lt1"/>
+          </a:fontRef>
+        </p:style>
+        <p:txBody>
+          <a:bodyPr rtlCol="0" anchor="ctr"/>
+          <a:lstStyle/>
+          <a:p>
+            <a:pPr algn="ctr"/>
+          </a:p>
+        </p:txBody>
+      </p:sp>
+      <p:sp>
+        <p:nvSpPr>
+          <p:cNvPr id="23" name="TextBox 22"/>
+          <p:cNvSpPr txBox="1"/>
+          <p:nvPr/>
+        </p:nvSpPr>
+        <p:spPr>
+          <a:xfrm>
+            <a:off x="4526280" y="4123944"/>
+            <a:ext cx="1234440" cy="347472"/>
+          </a:xfrm>
+          <a:prstGeom prst="rect">
+            <a:avLst/>
+          </a:prstGeom>
+          <a:noFill/>
+        </p:spPr>
+        <p:txBody>
+          <a:bodyPr wrap="square" anchor="ctr" lIns="0" rIns="0" tIns="0" bIns="0">
+            <a:spAutoFit/>
+          </a:bodyPr>
+          <a:lstStyle/>
+          <a:p>
+            <a:pPr algn="ctr"/>
+            <a:r>
+              <a:rPr sz="1050" b="1">
+                <a:solidFill>
+                  <a:srgbClr val="FFFFFF"/>
+                </a:solidFill>
+                <a:latin typeface="Microsoft JhengHei"/>
+                <a:ea typeface="Microsoft JhengHei"/>
+                <a:cs typeface="Microsoft JhengHei"/>
+              </a:rPr>
+              <a:t>駭客攻擊</a:t>
+            </a:r>
+          </a:p>
+        </p:txBody>
+      </p:sp>
+      <p:sp>
+        <p:nvSpPr>
+          <p:cNvPr id="24" name="TextBox 23"/>
+          <p:cNvSpPr txBox="1"/>
+          <p:nvPr/>
+        </p:nvSpPr>
+        <p:spPr>
+          <a:xfrm>
+            <a:off x="777240" y="4599432"/>
+            <a:ext cx="4937760" cy="640080"/>
+          </a:xfrm>
+          <a:prstGeom prst="rect">
+            <a:avLst/>
+          </a:prstGeom>
+          <a:noFill/>
+        </p:spPr>
+        <p:txBody>
+          <a:bodyPr wrap="square" anchor="t" lIns="0" rIns="0" tIns="0" bIns="0">
+            <a:spAutoFit/>
+          </a:bodyPr>
+          <a:lstStyle/>
+          <a:p>
+            <a:pPr algn="l">
+              <a:lnSpc>
+                <a:spcPts val="1500"/>
+              </a:lnSpc>
+            </a:pPr>
+            <a:r>
+              <a:rPr sz="1100" b="1">
+                <a:solidFill>
+                  <a:srgbClr val="E63946"/>
+                </a:solidFill>
+                <a:latin typeface="Microsoft JhengHei"/>
+                <a:ea typeface="Microsoft JhengHei"/>
+                <a:cs typeface="Microsoft JhengHei"/>
+              </a:rPr>
+              <a:t>緣由　</a:t>
+            </a:r>
+            <a:r>
+              <a:rPr sz="1100" b="0">
+                <a:solidFill>
+                  <a:srgbClr val="1A2233"/>
+                </a:solidFill>
+                <a:latin typeface="Microsoft JhengHei"/>
+                <a:ea typeface="Microsoft JhengHei"/>
+                <a:cs typeface="Microsoft JhengHei"/>
+              </a:rPr>
+              <a:t>本公司資訊系統遭受駭客網路攻擊，部分主機與電腦遭受病毒攻擊。</a:t>
+            </a:r>
+          </a:p>
+        </p:txBody>
+      </p:sp>
+      <p:sp>
+        <p:nvSpPr>
+          <p:cNvPr id="25" name="TextBox 24"/>
+          <p:cNvSpPr txBox="1"/>
+          <p:nvPr/>
+        </p:nvSpPr>
+        <p:spPr>
+          <a:xfrm>
+            <a:off x="777240" y="5257800"/>
             <a:ext cx="4937760" cy="713232"/>
           </a:xfrm>
           <a:prstGeom prst="rect">

--- a/資安事件因應分析.pptx
+++ b/資安事件因應分析.pptx
@@ -175,7 +175,7 @@
                 <c:formatCode>General</c:formatCode>
                 <c:ptCount val="2"/>
                 <c:pt idx="0">
-                  <c:v>8</c:v>
+                  <c:v>6</c:v>
                 </c:pt>
                 <c:pt idx="1">
                   <c:v>3</c:v>
@@ -3515,7 +3515,7 @@
                 <a:ea typeface="Microsoft JhengHei"/>
                 <a:cs typeface="Microsoft JhengHei"/>
               </a:rPr>
-              <a:t>資料期間 2026-08-19 ~ 2026-09-19　｜　MOPS 重大訊息全文檢索　｜　11 家公司</a:t>
+              <a:t>資料期間 2026-08-23 ~ 2026-09-23　｜　MOPS 重大訊息全文檢索　｜　9 家公司</a:t>
             </a:r>
           </a:p>
         </p:txBody>
@@ -3732,7 +3732,7 @@
                 <a:ea typeface="Microsoft JhengHei"/>
                 <a:cs typeface="Microsoft JhengHei"/>
               </a:rPr>
-              <a:t>資料期間內 MOPS 揭露之 11 起資安相關重大訊息</a:t>
+              <a:t>資料期間內 MOPS 揭露之 9 起資安相關重大訊息</a:t>
             </a:r>
           </a:p>
         </p:txBody>
@@ -3815,7 +3815,7 @@
                 <a:ea typeface="Microsoft JhengHei"/>
                 <a:cs typeface="Microsoft JhengHei"/>
               </a:rPr>
-              <a:t>11</a:t>
+              <a:t>9</a:t>
             </a:r>
           </a:p>
         </p:txBody>
@@ -4122,7 +4122,7 @@
                 <a:gridCol w="2286000"/>
                 <a:gridCol w="5120640"/>
               </a:tblGrid>
-              <a:tr h="297180">
+              <a:tr h="356616">
                 <a:tc>
                   <a:txBody>
                     <a:bodyPr/>
@@ -4244,7 +4244,7 @@
                   </a:tcPr>
                 </a:tc>
               </a:tr>
-              <a:tr h="297180">
+              <a:tr h="356616">
                 <a:tc>
                   <a:txBody>
                     <a:bodyPr/>
@@ -4366,7 +4366,7 @@
                   </a:tcPr>
                 </a:tc>
               </a:tr>
-              <a:tr h="297180">
+              <a:tr h="356616">
                 <a:tc>
                   <a:txBody>
                     <a:bodyPr/>
@@ -4488,7 +4488,7 @@
                   </a:tcPr>
                 </a:tc>
               </a:tr>
-              <a:tr h="297180">
+              <a:tr h="356616">
                 <a:tc>
                   <a:txBody>
                     <a:bodyPr/>
@@ -4610,7 +4610,7 @@
                   </a:tcPr>
                 </a:tc>
               </a:tr>
-              <a:tr h="297180">
+              <a:tr h="356616">
                 <a:tc>
                   <a:txBody>
                     <a:bodyPr/>
@@ -4732,7 +4732,7 @@
                   </a:tcPr>
                 </a:tc>
               </a:tr>
-              <a:tr h="297180">
+              <a:tr h="356616">
                 <a:tc>
                   <a:txBody>
                     <a:bodyPr/>
@@ -4854,7 +4854,7 @@
                   </a:tcPr>
                 </a:tc>
               </a:tr>
-              <a:tr h="297180">
+              <a:tr h="356616">
                 <a:tc>
                   <a:txBody>
                     <a:bodyPr/>
@@ -4976,7 +4976,7 @@
                   </a:tcPr>
                 </a:tc>
               </a:tr>
-              <a:tr h="297180">
+              <a:tr h="356616">
                 <a:tc>
                   <a:txBody>
                     <a:bodyPr/>
@@ -5098,7 +5098,7 @@
                   </a:tcPr>
                 </a:tc>
               </a:tr>
-              <a:tr h="297180">
+              <a:tr h="356616">
                 <a:tc>
                   <a:txBody>
                     <a:bodyPr/>
@@ -5220,7 +5220,7 @@
                   </a:tcPr>
                 </a:tc>
               </a:tr>
-              <a:tr h="297180">
+              <a:tr h="356616">
                 <a:tc>
                   <a:txBody>
                     <a:bodyPr/>
@@ -5342,250 +5342,6 @@
                   </a:tcPr>
                 </a:tc>
               </a:tr>
-              <a:tr h="297180">
-                <a:tc>
-                  <a:txBody>
-                    <a:bodyPr/>
-                    <a:lstStyle/>
-                    <a:p>
-                      <a:r>
-                        <a:rPr sz="1150" b="0">
-                          <a:solidFill>
-                            <a:srgbClr val="1A2233"/>
-                          </a:solidFill>
-                          <a:latin typeface="Microsoft JhengHei"/>
-                          <a:ea typeface="Microsoft JhengHei"/>
-                          <a:cs typeface="Microsoft JhengHei"/>
-                        </a:rPr>
-                        <a:t>數字</a:t>
-                      </a:r>
-                    </a:p>
-                  </a:txBody>
-                  <a:tcPr anchor="ctr" marL="73152" marT="9144" marB="9144">
-                    <a:solidFill>
-                      <a:srgbClr val="EEF2F9"/>
-                    </a:solidFill>
-                  </a:tcPr>
-                </a:tc>
-                <a:tc>
-                  <a:txBody>
-                    <a:bodyPr/>
-                    <a:lstStyle/>
-                    <a:p>
-                      <a:r>
-                        <a:rPr sz="1150" b="0">
-                          <a:solidFill>
-                            <a:srgbClr val="1A2233"/>
-                          </a:solidFill>
-                          <a:latin typeface="Microsoft JhengHei"/>
-                          <a:ea typeface="Microsoft JhengHei"/>
-                          <a:cs typeface="Microsoft JhengHei"/>
-                        </a:rPr>
-                        <a:t>5287</a:t>
-                      </a:r>
-                    </a:p>
-                  </a:txBody>
-                  <a:tcPr anchor="ctr" marL="73152" marT="9144" marB="9144">
-                    <a:solidFill>
-                      <a:srgbClr val="EEF2F9"/>
-                    </a:solidFill>
-                  </a:tcPr>
-                </a:tc>
-                <a:tc>
-                  <a:txBody>
-                    <a:bodyPr/>
-                    <a:lstStyle/>
-                    <a:p>
-                      <a:r>
-                        <a:rPr sz="1150" b="0">
-                          <a:solidFill>
-                            <a:srgbClr val="1A2233"/>
-                          </a:solidFill>
-                          <a:latin typeface="Microsoft JhengHei"/>
-                          <a:ea typeface="Microsoft JhengHei"/>
-                          <a:cs typeface="Microsoft JhengHei"/>
-                        </a:rPr>
-                        <a:t>08/20</a:t>
-                      </a:r>
-                    </a:p>
-                  </a:txBody>
-                  <a:tcPr anchor="ctr" marL="73152" marT="9144" marB="9144">
-                    <a:solidFill>
-                      <a:srgbClr val="EEF2F9"/>
-                    </a:solidFill>
-                  </a:tcPr>
-                </a:tc>
-                <a:tc>
-                  <a:txBody>
-                    <a:bodyPr/>
-                    <a:lstStyle/>
-                    <a:p>
-                      <a:r>
-                        <a:rPr sz="1150" b="1">
-                          <a:solidFill>
-                            <a:srgbClr val="E63946"/>
-                          </a:solidFill>
-                          <a:latin typeface="Microsoft JhengHei"/>
-                          <a:ea typeface="Microsoft JhengHei"/>
-                          <a:cs typeface="Microsoft JhengHei"/>
-                        </a:rPr>
-                        <a:t>駭客攻擊</a:t>
-                      </a:r>
-                    </a:p>
-                  </a:txBody>
-                  <a:tcPr anchor="ctr" marL="73152" marT="9144" marB="9144">
-                    <a:solidFill>
-                      <a:srgbClr val="EEF2F9"/>
-                    </a:solidFill>
-                  </a:tcPr>
-                </a:tc>
-                <a:tc>
-                  <a:txBody>
-                    <a:bodyPr/>
-                    <a:lstStyle/>
-                    <a:p>
-                      <a:r>
-                        <a:rPr sz="1150" b="0">
-                          <a:solidFill>
-                            <a:srgbClr val="1A2233"/>
-                          </a:solidFill>
-                          <a:latin typeface="Microsoft JhengHei"/>
-                          <a:ea typeface="Microsoft JhengHei"/>
-                          <a:cs typeface="Microsoft JhengHei"/>
-                        </a:rPr>
-                        <a:t>目前評估對公司營運尚無重大影響</a:t>
-                      </a:r>
-                    </a:p>
-                  </a:txBody>
-                  <a:tcPr anchor="ctr" marL="73152" marT="9144" marB="9144">
-                    <a:solidFill>
-                      <a:srgbClr val="EEF2F9"/>
-                    </a:solidFill>
-                  </a:tcPr>
-                </a:tc>
-              </a:tr>
-              <a:tr h="297180">
-                <a:tc>
-                  <a:txBody>
-                    <a:bodyPr/>
-                    <a:lstStyle/>
-                    <a:p>
-                      <a:r>
-                        <a:rPr sz="1150" b="0">
-                          <a:solidFill>
-                            <a:srgbClr val="1A2233"/>
-                          </a:solidFill>
-                          <a:latin typeface="Microsoft JhengHei"/>
-                          <a:ea typeface="Microsoft JhengHei"/>
-                          <a:cs typeface="Microsoft JhengHei"/>
-                        </a:rPr>
-                        <a:t>上詮</a:t>
-                      </a:r>
-                    </a:p>
-                  </a:txBody>
-                  <a:tcPr anchor="ctr" marL="73152" marT="9144" marB="9144">
-                    <a:solidFill>
-                      <a:srgbClr val="FFFFFF"/>
-                    </a:solidFill>
-                  </a:tcPr>
-                </a:tc>
-                <a:tc>
-                  <a:txBody>
-                    <a:bodyPr/>
-                    <a:lstStyle/>
-                    <a:p>
-                      <a:r>
-                        <a:rPr sz="1150" b="0">
-                          <a:solidFill>
-                            <a:srgbClr val="1A2233"/>
-                          </a:solidFill>
-                          <a:latin typeface="Microsoft JhengHei"/>
-                          <a:ea typeface="Microsoft JhengHei"/>
-                          <a:cs typeface="Microsoft JhengHei"/>
-                        </a:rPr>
-                        <a:t>3363</a:t>
-                      </a:r>
-                    </a:p>
-                  </a:txBody>
-                  <a:tcPr anchor="ctr" marL="73152" marT="9144" marB="9144">
-                    <a:solidFill>
-                      <a:srgbClr val="FFFFFF"/>
-                    </a:solidFill>
-                  </a:tcPr>
-                </a:tc>
-                <a:tc>
-                  <a:txBody>
-                    <a:bodyPr/>
-                    <a:lstStyle/>
-                    <a:p>
-                      <a:r>
-                        <a:rPr sz="1150" b="0">
-                          <a:solidFill>
-                            <a:srgbClr val="1A2233"/>
-                          </a:solidFill>
-                          <a:latin typeface="Microsoft JhengHei"/>
-                          <a:ea typeface="Microsoft JhengHei"/>
-                          <a:cs typeface="Microsoft JhengHei"/>
-                        </a:rPr>
-                        <a:t>08/19</a:t>
-                      </a:r>
-                    </a:p>
-                  </a:txBody>
-                  <a:tcPr anchor="ctr" marL="73152" marT="9144" marB="9144">
-                    <a:solidFill>
-                      <a:srgbClr val="FFFFFF"/>
-                    </a:solidFill>
-                  </a:tcPr>
-                </a:tc>
-                <a:tc>
-                  <a:txBody>
-                    <a:bodyPr/>
-                    <a:lstStyle/>
-                    <a:p>
-                      <a:r>
-                        <a:rPr sz="1150" b="1">
-                          <a:solidFill>
-                            <a:srgbClr val="E63946"/>
-                          </a:solidFill>
-                          <a:latin typeface="Microsoft JhengHei"/>
-                          <a:ea typeface="Microsoft JhengHei"/>
-                          <a:cs typeface="Microsoft JhengHei"/>
-                        </a:rPr>
-                        <a:t>駭客攻擊</a:t>
-                      </a:r>
-                    </a:p>
-                  </a:txBody>
-                  <a:tcPr anchor="ctr" marL="73152" marT="9144" marB="9144">
-                    <a:solidFill>
-                      <a:srgbClr val="FFFFFF"/>
-                    </a:solidFill>
-                  </a:tcPr>
-                </a:tc>
-                <a:tc>
-                  <a:txBody>
-                    <a:bodyPr/>
-                    <a:lstStyle/>
-                    <a:p>
-                      <a:r>
-                        <a:rPr sz="1150" b="0">
-                          <a:solidFill>
-                            <a:srgbClr val="1A2233"/>
-                          </a:solidFill>
-                          <a:latin typeface="Microsoft JhengHei"/>
-                          <a:ea typeface="Microsoft JhengHei"/>
-                          <a:cs typeface="Microsoft JhengHei"/>
-                        </a:rPr>
-                        <a:t>目前評估對公司營運無重大影響。</a:t>
-                      </a:r>
-                    </a:p>
-                  </a:txBody>
-                  <a:tcPr anchor="ctr" marL="73152" marT="9144" marB="9144">
-                    <a:solidFill>
-                      <a:srgbClr val="FFFFFF"/>
-                    </a:solidFill>
-                  </a:tcPr>
-                </a:tc>
-              </a:tr>
             </a:tbl>
           </a:graphicData>
         </a:graphic>
@@ -5903,7 +5659,7 @@
                 <a:ea typeface="Microsoft JhengHei"/>
                 <a:cs typeface="Microsoft JhengHei"/>
               </a:rPr>
-              <a:t>8 起</a:t>
+              <a:t>6 起</a:t>
             </a:r>
           </a:p>
         </p:txBody>
@@ -5940,7 +5696,7 @@
                 <a:ea typeface="Microsoft JhengHei"/>
                 <a:cs typeface="Microsoft JhengHei"/>
               </a:rPr>
-              <a:t>友訊、長榮航、長榮航太、達爾膚、大車隊、杭特、數字、上詮</a:t>
+              <a:t>友訊、長榮航、長榮航太、達爾膚、大車隊、杭特</a:t>
             </a:r>
           </a:p>
         </p:txBody>
@@ -6381,7 +6137,7 @@
                 <a:gridCol w="3383280"/>
                 <a:gridCol w="2606040"/>
               </a:tblGrid>
-              <a:tr h="373380">
+              <a:tr h="448056">
                 <a:tc>
                   <a:txBody>
                     <a:bodyPr/>
@@ -6503,7 +6259,7 @@
                   </a:tcPr>
                 </a:tc>
               </a:tr>
-              <a:tr h="373380">
+              <a:tr h="448056">
                 <a:tc>
                   <a:txBody>
                     <a:bodyPr/>
@@ -6625,7 +6381,7 @@
                   </a:tcPr>
                 </a:tc>
               </a:tr>
-              <a:tr h="373380">
+              <a:tr h="448056">
                 <a:tc>
                   <a:txBody>
                     <a:bodyPr/>
@@ -6747,7 +6503,7 @@
                   </a:tcPr>
                 </a:tc>
               </a:tr>
-              <a:tr h="373380">
+              <a:tr h="448056">
                 <a:tc>
                   <a:txBody>
                     <a:bodyPr/>
@@ -6869,7 +6625,7 @@
                   </a:tcPr>
                 </a:tc>
               </a:tr>
-              <a:tr h="373380">
+              <a:tr h="448056">
                 <a:tc>
                   <a:txBody>
                     <a:bodyPr/>
@@ -6991,7 +6747,7 @@
                   </a:tcPr>
                 </a:tc>
               </a:tr>
-              <a:tr h="373380">
+              <a:tr h="448056">
                 <a:tc>
                   <a:txBody>
                     <a:bodyPr/>
@@ -7113,7 +6869,7 @@
                   </a:tcPr>
                 </a:tc>
               </a:tr>
-              <a:tr h="373380">
+              <a:tr h="448056">
                 <a:tc>
                   <a:txBody>
                     <a:bodyPr/>
@@ -7235,7 +6991,7 @@
                   </a:tcPr>
                 </a:tc>
               </a:tr>
-              <a:tr h="373380">
+              <a:tr h="448056">
                 <a:tc>
                   <a:txBody>
                     <a:bodyPr/>
@@ -7357,7 +7113,7 @@
                   </a:tcPr>
                 </a:tc>
               </a:tr>
-              <a:tr h="373380">
+              <a:tr h="448056">
                 <a:tc>
                   <a:txBody>
                     <a:bodyPr/>
@@ -7479,7 +7235,7 @@
                   </a:tcPr>
                 </a:tc>
               </a:tr>
-              <a:tr h="373380">
+              <a:tr h="448056">
                 <a:tc>
                   <a:txBody>
                     <a:bodyPr/>
@@ -7601,250 +7357,6 @@
                   </a:tcPr>
                 </a:tc>
               </a:tr>
-              <a:tr h="373380">
-                <a:tc>
-                  <a:txBody>
-                    <a:bodyPr/>
-                    <a:lstStyle/>
-                    <a:p>
-                      <a:r>
-                        <a:rPr sz="1150" b="0">
-                          <a:solidFill>
-                            <a:srgbClr val="1A2233"/>
-                          </a:solidFill>
-                          <a:latin typeface="Microsoft JhengHei"/>
-                          <a:ea typeface="Microsoft JhengHei"/>
-                          <a:cs typeface="Microsoft JhengHei"/>
-                        </a:rPr>
-                        <a:t>數字</a:t>
-                      </a:r>
-                    </a:p>
-                  </a:txBody>
-                  <a:tcPr anchor="ctr" marL="73152" marT="9144" marB="9144">
-                    <a:solidFill>
-                      <a:srgbClr val="EEF2F9"/>
-                    </a:solidFill>
-                  </a:tcPr>
-                </a:tc>
-                <a:tc>
-                  <a:txBody>
-                    <a:bodyPr/>
-                    <a:lstStyle/>
-                    <a:p>
-                      <a:r>
-                        <a:rPr sz="1150" b="0">
-                          <a:solidFill>
-                            <a:srgbClr val="1A2233"/>
-                          </a:solidFill>
-                          <a:latin typeface="Microsoft JhengHei"/>
-                          <a:ea typeface="Microsoft JhengHei"/>
-                          <a:cs typeface="Microsoft JhengHei"/>
-                        </a:rPr>
-                        <a:t>5287</a:t>
-                      </a:r>
-                    </a:p>
-                  </a:txBody>
-                  <a:tcPr anchor="ctr" marL="73152" marT="9144" marB="9144">
-                    <a:solidFill>
-                      <a:srgbClr val="EEF2F9"/>
-                    </a:solidFill>
-                  </a:tcPr>
-                </a:tc>
-                <a:tc>
-                  <a:txBody>
-                    <a:bodyPr/>
-                    <a:lstStyle/>
-                    <a:p>
-                      <a:r>
-                        <a:rPr sz="1150" b="1">
-                          <a:solidFill>
-                            <a:srgbClr val="E63946"/>
-                          </a:solidFill>
-                          <a:latin typeface="Microsoft JhengHei"/>
-                          <a:ea typeface="Microsoft JhengHei"/>
-                          <a:cs typeface="Microsoft JhengHei"/>
-                        </a:rPr>
-                        <a:t>駭客攻擊</a:t>
-                      </a:r>
-                    </a:p>
-                  </a:txBody>
-                  <a:tcPr anchor="ctr" marL="73152" marT="9144" marB="9144">
-                    <a:solidFill>
-                      <a:srgbClr val="EEF2F9"/>
-                    </a:solidFill>
-                  </a:tcPr>
-                </a:tc>
-                <a:tc>
-                  <a:txBody>
-                    <a:bodyPr/>
-                    <a:lstStyle/>
-                    <a:p>
-                      <a:r>
-                        <a:rPr sz="1150" b="0">
-                          <a:solidFill>
-                            <a:srgbClr val="1A2233"/>
-                          </a:solidFill>
-                          <a:latin typeface="Microsoft JhengHei"/>
-                          <a:ea typeface="Microsoft JhengHei"/>
-                          <a:cs typeface="Microsoft JhengHei"/>
-                        </a:rPr>
-                        <a:t>安侯建業聯合會計師事務所</a:t>
-                      </a:r>
-                    </a:p>
-                  </a:txBody>
-                  <a:tcPr anchor="ctr" marL="73152" marT="9144" marB="9144">
-                    <a:solidFill>
-                      <a:srgbClr val="EEF2F9"/>
-                    </a:solidFill>
-                  </a:tcPr>
-                </a:tc>
-                <a:tc>
-                  <a:txBody>
-                    <a:bodyPr/>
-                    <a:lstStyle/>
-                    <a:p>
-                      <a:r>
-                        <a:rPr sz="1150" b="0">
-                          <a:solidFill>
-                            <a:srgbClr val="1A2233"/>
-                          </a:solidFill>
-                          <a:latin typeface="Microsoft JhengHei"/>
-                          <a:ea typeface="Microsoft JhengHei"/>
-                          <a:cs typeface="Microsoft JhengHei"/>
-                        </a:rPr>
-                        <a:t>羅瑞芝、余聖河</a:t>
-                      </a:r>
-                    </a:p>
-                  </a:txBody>
-                  <a:tcPr anchor="ctr" marL="73152" marT="9144" marB="9144">
-                    <a:solidFill>
-                      <a:srgbClr val="EEF2F9"/>
-                    </a:solidFill>
-                  </a:tcPr>
-                </a:tc>
-              </a:tr>
-              <a:tr h="373380">
-                <a:tc>
-                  <a:txBody>
-                    <a:bodyPr/>
-                    <a:lstStyle/>
-                    <a:p>
-                      <a:r>
-                        <a:rPr sz="1150" b="0">
-                          <a:solidFill>
-                            <a:srgbClr val="1A2233"/>
-                          </a:solidFill>
-                          <a:latin typeface="Microsoft JhengHei"/>
-                          <a:ea typeface="Microsoft JhengHei"/>
-                          <a:cs typeface="Microsoft JhengHei"/>
-                        </a:rPr>
-                        <a:t>上詮</a:t>
-                      </a:r>
-                    </a:p>
-                  </a:txBody>
-                  <a:tcPr anchor="ctr" marL="73152" marT="9144" marB="9144">
-                    <a:solidFill>
-                      <a:srgbClr val="FFFFFF"/>
-                    </a:solidFill>
-                  </a:tcPr>
-                </a:tc>
-                <a:tc>
-                  <a:txBody>
-                    <a:bodyPr/>
-                    <a:lstStyle/>
-                    <a:p>
-                      <a:r>
-                        <a:rPr sz="1150" b="0">
-                          <a:solidFill>
-                            <a:srgbClr val="1A2233"/>
-                          </a:solidFill>
-                          <a:latin typeface="Microsoft JhengHei"/>
-                          <a:ea typeface="Microsoft JhengHei"/>
-                          <a:cs typeface="Microsoft JhengHei"/>
-                        </a:rPr>
-                        <a:t>3363</a:t>
-                      </a:r>
-                    </a:p>
-                  </a:txBody>
-                  <a:tcPr anchor="ctr" marL="73152" marT="9144" marB="9144">
-                    <a:solidFill>
-                      <a:srgbClr val="FFFFFF"/>
-                    </a:solidFill>
-                  </a:tcPr>
-                </a:tc>
-                <a:tc>
-                  <a:txBody>
-                    <a:bodyPr/>
-                    <a:lstStyle/>
-                    <a:p>
-                      <a:r>
-                        <a:rPr sz="1150" b="1">
-                          <a:solidFill>
-                            <a:srgbClr val="E63946"/>
-                          </a:solidFill>
-                          <a:latin typeface="Microsoft JhengHei"/>
-                          <a:ea typeface="Microsoft JhengHei"/>
-                          <a:cs typeface="Microsoft JhengHei"/>
-                        </a:rPr>
-                        <a:t>駭客攻擊</a:t>
-                      </a:r>
-                    </a:p>
-                  </a:txBody>
-                  <a:tcPr anchor="ctr" marL="73152" marT="9144" marB="9144">
-                    <a:solidFill>
-                      <a:srgbClr val="FFFFFF"/>
-                    </a:solidFill>
-                  </a:tcPr>
-                </a:tc>
-                <a:tc>
-                  <a:txBody>
-                    <a:bodyPr/>
-                    <a:lstStyle/>
-                    <a:p>
-                      <a:r>
-                        <a:rPr sz="1150" b="0">
-                          <a:solidFill>
-                            <a:srgbClr val="1A2233"/>
-                          </a:solidFill>
-                          <a:latin typeface="Microsoft JhengHei"/>
-                          <a:ea typeface="Microsoft JhengHei"/>
-                          <a:cs typeface="Microsoft JhengHei"/>
-                        </a:rPr>
-                        <a:t>資誠聯合會計師事務所</a:t>
-                      </a:r>
-                    </a:p>
-                  </a:txBody>
-                  <a:tcPr anchor="ctr" marL="73152" marT="9144" marB="9144">
-                    <a:solidFill>
-                      <a:srgbClr val="FFFFFF"/>
-                    </a:solidFill>
-                  </a:tcPr>
-                </a:tc>
-                <a:tc>
-                  <a:txBody>
-                    <a:bodyPr/>
-                    <a:lstStyle/>
-                    <a:p>
-                      <a:r>
-                        <a:rPr sz="1150" b="0">
-                          <a:solidFill>
-                            <a:srgbClr val="1A2233"/>
-                          </a:solidFill>
-                          <a:latin typeface="Microsoft JhengHei"/>
-                          <a:ea typeface="Microsoft JhengHei"/>
-                          <a:cs typeface="Microsoft JhengHei"/>
-                        </a:rPr>
-                        <a:t>白淑蒨、李典易</a:t>
-                      </a:r>
-                    </a:p>
-                  </a:txBody>
-                  <a:tcPr anchor="ctr" marL="73152" marT="9144" marB="9144">
-                    <a:solidFill>
-                      <a:srgbClr val="FFFFFF"/>
-                    </a:solidFill>
-                  </a:tcPr>
-                </a:tc>
-              </a:tr>
             </a:tbl>
           </a:graphicData>
         </a:graphic>
@@ -12408,652 +11920,6 @@
                 <a:cs typeface="Microsoft JhengHei"/>
               </a:rPr>
               <a:t>本公司將持續提升網路與資訊基礎架構之安全管控，以確保資訊安全。</a:t>
-            </a:r>
-          </a:p>
-        </p:txBody>
-      </p:sp>
-      <p:sp>
-        <p:nvSpPr>
-          <p:cNvPr id="12" name="Rounded Rectangle 11"/>
-          <p:cNvSpPr/>
-          <p:nvPr/>
-        </p:nvSpPr>
-        <p:spPr>
-          <a:xfrm>
-            <a:off x="6172200" y="1554480"/>
-            <a:ext cx="5394960" cy="2148840"/>
-          </a:xfrm>
-          <a:prstGeom prst="roundRect">
-            <a:avLst/>
-          </a:prstGeom>
-          <a:solidFill>
-            <a:srgbClr val="FFFFFF"/>
-          </a:solidFill>
-          <a:ln w="12700">
-            <a:solidFill>
-              <a:srgbClr val="DDE3EE"/>
-            </a:solidFill>
-          </a:ln>
-          <a:effectLst/>
-        </p:spPr>
-        <p:style>
-          <a:lnRef idx="1">
-            <a:schemeClr val="accent1"/>
-          </a:lnRef>
-          <a:fillRef idx="3">
-            <a:schemeClr val="accent1"/>
-          </a:fillRef>
-          <a:effectRef idx="2">
-            <a:schemeClr val="accent1"/>
-          </a:effectRef>
-          <a:fontRef idx="minor">
-            <a:schemeClr val="lt1"/>
-          </a:fontRef>
-        </p:style>
-        <p:txBody>
-          <a:bodyPr rtlCol="0" anchor="ctr"/>
-          <a:lstStyle/>
-          <a:p>
-            <a:pPr algn="ctr"/>
-          </a:p>
-        </p:txBody>
-      </p:sp>
-      <p:sp>
-        <p:nvSpPr>
-          <p:cNvPr id="13" name="Rectangle 12"/>
-          <p:cNvSpPr/>
-          <p:nvPr/>
-        </p:nvSpPr>
-        <p:spPr>
-          <a:xfrm>
-            <a:off x="6172200" y="1554480"/>
-            <a:ext cx="5394960" cy="109728"/>
-          </a:xfrm>
-          <a:prstGeom prst="rect">
-            <a:avLst/>
-          </a:prstGeom>
-          <a:solidFill>
-            <a:srgbClr val="E63946"/>
-          </a:solidFill>
-          <a:ln>
-            <a:noFill/>
-          </a:ln>
-          <a:effectLst/>
-        </p:spPr>
-        <p:style>
-          <a:lnRef idx="1">
-            <a:schemeClr val="accent1"/>
-          </a:lnRef>
-          <a:fillRef idx="3">
-            <a:schemeClr val="accent1"/>
-          </a:fillRef>
-          <a:effectRef idx="2">
-            <a:schemeClr val="accent1"/>
-          </a:effectRef>
-          <a:fontRef idx="minor">
-            <a:schemeClr val="lt1"/>
-          </a:fontRef>
-        </p:style>
-        <p:txBody>
-          <a:bodyPr rtlCol="0" anchor="ctr"/>
-          <a:lstStyle/>
-          <a:p>
-            <a:pPr algn="ctr"/>
-          </a:p>
-        </p:txBody>
-      </p:sp>
-      <p:sp>
-        <p:nvSpPr>
-          <p:cNvPr id="14" name="TextBox 13"/>
-          <p:cNvSpPr txBox="1"/>
-          <p:nvPr/>
-        </p:nvSpPr>
-        <p:spPr>
-          <a:xfrm>
-            <a:off x="6400800" y="1773936"/>
-            <a:ext cx="3657600" cy="365760"/>
-          </a:xfrm>
-          <a:prstGeom prst="rect">
-            <a:avLst/>
-          </a:prstGeom>
-          <a:noFill/>
-        </p:spPr>
-        <p:txBody>
-          <a:bodyPr wrap="square" anchor="ctr" lIns="0" rIns="0" tIns="0" bIns="0">
-            <a:spAutoFit/>
-          </a:bodyPr>
-          <a:lstStyle/>
-          <a:p>
-            <a:pPr algn="l"/>
-            <a:r>
-              <a:rPr sz="1600" b="1">
-                <a:solidFill>
-                  <a:srgbClr val="1A2233"/>
-                </a:solidFill>
-                <a:latin typeface="Microsoft JhengHei"/>
-                <a:ea typeface="Microsoft JhengHei"/>
-                <a:cs typeface="Microsoft JhengHei"/>
-              </a:rPr>
-              <a:t>數字 </a:t>
-            </a:r>
-            <a:r>
-              <a:rPr sz="1300" b="0">
-                <a:solidFill>
-                  <a:srgbClr val="5C6679"/>
-                </a:solidFill>
-                <a:latin typeface="Microsoft JhengHei"/>
-                <a:ea typeface="Microsoft JhengHei"/>
-                <a:cs typeface="Microsoft JhengHei"/>
-              </a:rPr>
-              <a:t>5287</a:t>
-            </a:r>
-          </a:p>
-        </p:txBody>
-      </p:sp>
-      <p:sp>
-        <p:nvSpPr>
-          <p:cNvPr id="15" name="Rounded Rectangle 14"/>
-          <p:cNvSpPr/>
-          <p:nvPr/>
-        </p:nvSpPr>
-        <p:spPr>
-          <a:xfrm>
-            <a:off x="10149840" y="1792224"/>
-            <a:ext cx="1234440" cy="347472"/>
-          </a:xfrm>
-          <a:prstGeom prst="roundRect">
-            <a:avLst/>
-          </a:prstGeom>
-          <a:solidFill>
-            <a:srgbClr val="E63946"/>
-          </a:solidFill>
-          <a:ln>
-            <a:noFill/>
-          </a:ln>
-          <a:effectLst/>
-        </p:spPr>
-        <p:style>
-          <a:lnRef idx="1">
-            <a:schemeClr val="accent1"/>
-          </a:lnRef>
-          <a:fillRef idx="3">
-            <a:schemeClr val="accent1"/>
-          </a:fillRef>
-          <a:effectRef idx="2">
-            <a:schemeClr val="accent1"/>
-          </a:effectRef>
-          <a:fontRef idx="minor">
-            <a:schemeClr val="lt1"/>
-          </a:fontRef>
-        </p:style>
-        <p:txBody>
-          <a:bodyPr rtlCol="0" anchor="ctr"/>
-          <a:lstStyle/>
-          <a:p>
-            <a:pPr algn="ctr"/>
-          </a:p>
-        </p:txBody>
-      </p:sp>
-      <p:sp>
-        <p:nvSpPr>
-          <p:cNvPr id="16" name="TextBox 15"/>
-          <p:cNvSpPr txBox="1"/>
-          <p:nvPr/>
-        </p:nvSpPr>
-        <p:spPr>
-          <a:xfrm>
-            <a:off x="10149840" y="1792224"/>
-            <a:ext cx="1234440" cy="347472"/>
-          </a:xfrm>
-          <a:prstGeom prst="rect">
-            <a:avLst/>
-          </a:prstGeom>
-          <a:noFill/>
-        </p:spPr>
-        <p:txBody>
-          <a:bodyPr wrap="square" anchor="ctr" lIns="0" rIns="0" tIns="0" bIns="0">
-            <a:spAutoFit/>
-          </a:bodyPr>
-          <a:lstStyle/>
-          <a:p>
-            <a:pPr algn="ctr"/>
-            <a:r>
-              <a:rPr sz="1050" b="1">
-                <a:solidFill>
-                  <a:srgbClr val="FFFFFF"/>
-                </a:solidFill>
-                <a:latin typeface="Microsoft JhengHei"/>
-                <a:ea typeface="Microsoft JhengHei"/>
-                <a:cs typeface="Microsoft JhengHei"/>
-              </a:rPr>
-              <a:t>駭客攻擊</a:t>
-            </a:r>
-          </a:p>
-        </p:txBody>
-      </p:sp>
-      <p:sp>
-        <p:nvSpPr>
-          <p:cNvPr id="17" name="TextBox 16"/>
-          <p:cNvSpPr txBox="1"/>
-          <p:nvPr/>
-        </p:nvSpPr>
-        <p:spPr>
-          <a:xfrm>
-            <a:off x="6400800" y="2267712"/>
-            <a:ext cx="4937760" cy="640080"/>
-          </a:xfrm>
-          <a:prstGeom prst="rect">
-            <a:avLst/>
-          </a:prstGeom>
-          <a:noFill/>
-        </p:spPr>
-        <p:txBody>
-          <a:bodyPr wrap="square" anchor="t" lIns="0" rIns="0" tIns="0" bIns="0">
-            <a:spAutoFit/>
-          </a:bodyPr>
-          <a:lstStyle/>
-          <a:p>
-            <a:pPr algn="l">
-              <a:lnSpc>
-                <a:spcPts val="1500"/>
-              </a:lnSpc>
-            </a:pPr>
-            <a:r>
-              <a:rPr sz="1100" b="1">
-                <a:solidFill>
-                  <a:srgbClr val="E63946"/>
-                </a:solidFill>
-                <a:latin typeface="Microsoft JhengHei"/>
-                <a:ea typeface="Microsoft JhengHei"/>
-                <a:cs typeface="Microsoft JhengHei"/>
-              </a:rPr>
-              <a:t>緣由　</a:t>
-            </a:r>
-            <a:r>
-              <a:rPr sz="1100" b="0">
-                <a:solidFill>
-                  <a:srgbClr val="1A2233"/>
-                </a:solidFill>
-                <a:latin typeface="Microsoft JhengHei"/>
-                <a:ea typeface="Microsoft JhengHei"/>
-                <a:cs typeface="Microsoft JhengHei"/>
-              </a:rPr>
-              <a:t>本公司於115年8月20日發現591網站登入行為異常，經查發現外部攻擊者利用登入機制之弱點，繞過…</a:t>
-            </a:r>
-          </a:p>
-        </p:txBody>
-      </p:sp>
-      <p:sp>
-        <p:nvSpPr>
-          <p:cNvPr id="18" name="TextBox 17"/>
-          <p:cNvSpPr txBox="1"/>
-          <p:nvPr/>
-        </p:nvSpPr>
-        <p:spPr>
-          <a:xfrm>
-            <a:off x="6400800" y="2926080"/>
-            <a:ext cx="4937760" cy="713232"/>
-          </a:xfrm>
-          <a:prstGeom prst="rect">
-            <a:avLst/>
-          </a:prstGeom>
-          <a:noFill/>
-        </p:spPr>
-        <p:txBody>
-          <a:bodyPr wrap="square" anchor="t" lIns="0" rIns="0" tIns="0" bIns="0">
-            <a:spAutoFit/>
-          </a:bodyPr>
-          <a:lstStyle/>
-          <a:p>
-            <a:pPr algn="l">
-              <a:lnSpc>
-                <a:spcPts val="1500"/>
-              </a:lnSpc>
-            </a:pPr>
-            <a:r>
-              <a:rPr sz="1100" b="1">
-                <a:solidFill>
-                  <a:srgbClr val="E63946"/>
-                </a:solidFill>
-                <a:latin typeface="Microsoft JhengHei"/>
-                <a:ea typeface="Microsoft JhengHei"/>
-                <a:cs typeface="Microsoft JhengHei"/>
-              </a:rPr>
-              <a:t>因應　</a:t>
-            </a:r>
-            <a:r>
-              <a:rPr sz="1100" b="0">
-                <a:solidFill>
-                  <a:srgbClr val="1A2233"/>
-                </a:solidFill>
-                <a:latin typeface="Microsoft JhengHei"/>
-                <a:ea typeface="Microsoft JhengHei"/>
-                <a:cs typeface="Microsoft JhengHei"/>
-              </a:rPr>
-              <a:t>(1)依據安全軟體發展生命週期（SSDLC）框架，持續優化系統開發流程及資安檢視機制。(2)強化登入驗證、存取控制及異常…</a:t>
-            </a:r>
-          </a:p>
-        </p:txBody>
-      </p:sp>
-      <p:sp>
-        <p:nvSpPr>
-          <p:cNvPr id="19" name="Rounded Rectangle 18"/>
-          <p:cNvSpPr/>
-          <p:nvPr/>
-        </p:nvSpPr>
-        <p:spPr>
-          <a:xfrm>
-            <a:off x="548640" y="3886200"/>
-            <a:ext cx="5394960" cy="2148840"/>
-          </a:xfrm>
-          <a:prstGeom prst="roundRect">
-            <a:avLst/>
-          </a:prstGeom>
-          <a:solidFill>
-            <a:srgbClr val="FFFFFF"/>
-          </a:solidFill>
-          <a:ln w="12700">
-            <a:solidFill>
-              <a:srgbClr val="DDE3EE"/>
-            </a:solidFill>
-          </a:ln>
-          <a:effectLst/>
-        </p:spPr>
-        <p:style>
-          <a:lnRef idx="1">
-            <a:schemeClr val="accent1"/>
-          </a:lnRef>
-          <a:fillRef idx="3">
-            <a:schemeClr val="accent1"/>
-          </a:fillRef>
-          <a:effectRef idx="2">
-            <a:schemeClr val="accent1"/>
-          </a:effectRef>
-          <a:fontRef idx="minor">
-            <a:schemeClr val="lt1"/>
-          </a:fontRef>
-        </p:style>
-        <p:txBody>
-          <a:bodyPr rtlCol="0" anchor="ctr"/>
-          <a:lstStyle/>
-          <a:p>
-            <a:pPr algn="ctr"/>
-          </a:p>
-        </p:txBody>
-      </p:sp>
-      <p:sp>
-        <p:nvSpPr>
-          <p:cNvPr id="20" name="Rectangle 19"/>
-          <p:cNvSpPr/>
-          <p:nvPr/>
-        </p:nvSpPr>
-        <p:spPr>
-          <a:xfrm>
-            <a:off x="548640" y="3886200"/>
-            <a:ext cx="5394960" cy="109728"/>
-          </a:xfrm>
-          <a:prstGeom prst="rect">
-            <a:avLst/>
-          </a:prstGeom>
-          <a:solidFill>
-            <a:srgbClr val="E63946"/>
-          </a:solidFill>
-          <a:ln>
-            <a:noFill/>
-          </a:ln>
-          <a:effectLst/>
-        </p:spPr>
-        <p:style>
-          <a:lnRef idx="1">
-            <a:schemeClr val="accent1"/>
-          </a:lnRef>
-          <a:fillRef idx="3">
-            <a:schemeClr val="accent1"/>
-          </a:fillRef>
-          <a:effectRef idx="2">
-            <a:schemeClr val="accent1"/>
-          </a:effectRef>
-          <a:fontRef idx="minor">
-            <a:schemeClr val="lt1"/>
-          </a:fontRef>
-        </p:style>
-        <p:txBody>
-          <a:bodyPr rtlCol="0" anchor="ctr"/>
-          <a:lstStyle/>
-          <a:p>
-            <a:pPr algn="ctr"/>
-          </a:p>
-        </p:txBody>
-      </p:sp>
-      <p:sp>
-        <p:nvSpPr>
-          <p:cNvPr id="21" name="TextBox 20"/>
-          <p:cNvSpPr txBox="1"/>
-          <p:nvPr/>
-        </p:nvSpPr>
-        <p:spPr>
-          <a:xfrm>
-            <a:off x="777240" y="4105656"/>
-            <a:ext cx="3657600" cy="365760"/>
-          </a:xfrm>
-          <a:prstGeom prst="rect">
-            <a:avLst/>
-          </a:prstGeom>
-          <a:noFill/>
-        </p:spPr>
-        <p:txBody>
-          <a:bodyPr wrap="square" anchor="ctr" lIns="0" rIns="0" tIns="0" bIns="0">
-            <a:spAutoFit/>
-          </a:bodyPr>
-          <a:lstStyle/>
-          <a:p>
-            <a:pPr algn="l"/>
-            <a:r>
-              <a:rPr sz="1600" b="1">
-                <a:solidFill>
-                  <a:srgbClr val="1A2233"/>
-                </a:solidFill>
-                <a:latin typeface="Microsoft JhengHei"/>
-                <a:ea typeface="Microsoft JhengHei"/>
-                <a:cs typeface="Microsoft JhengHei"/>
-              </a:rPr>
-              <a:t>上詮 </a:t>
-            </a:r>
-            <a:r>
-              <a:rPr sz="1300" b="0">
-                <a:solidFill>
-                  <a:srgbClr val="5C6679"/>
-                </a:solidFill>
-                <a:latin typeface="Microsoft JhengHei"/>
-                <a:ea typeface="Microsoft JhengHei"/>
-                <a:cs typeface="Microsoft JhengHei"/>
-              </a:rPr>
-              <a:t>3363</a:t>
-            </a:r>
-          </a:p>
-        </p:txBody>
-      </p:sp>
-      <p:sp>
-        <p:nvSpPr>
-          <p:cNvPr id="22" name="Rounded Rectangle 21"/>
-          <p:cNvSpPr/>
-          <p:nvPr/>
-        </p:nvSpPr>
-        <p:spPr>
-          <a:xfrm>
-            <a:off x="4526280" y="4123944"/>
-            <a:ext cx="1234440" cy="347472"/>
-          </a:xfrm>
-          <a:prstGeom prst="roundRect">
-            <a:avLst/>
-          </a:prstGeom>
-          <a:solidFill>
-            <a:srgbClr val="E63946"/>
-          </a:solidFill>
-          <a:ln>
-            <a:noFill/>
-          </a:ln>
-          <a:effectLst/>
-        </p:spPr>
-        <p:style>
-          <a:lnRef idx="1">
-            <a:schemeClr val="accent1"/>
-          </a:lnRef>
-          <a:fillRef idx="3">
-            <a:schemeClr val="accent1"/>
-          </a:fillRef>
-          <a:effectRef idx="2">
-            <a:schemeClr val="accent1"/>
-          </a:effectRef>
-          <a:fontRef idx="minor">
-            <a:schemeClr val="lt1"/>
-          </a:fontRef>
-        </p:style>
-        <p:txBody>
-          <a:bodyPr rtlCol="0" anchor="ctr"/>
-          <a:lstStyle/>
-          <a:p>
-            <a:pPr algn="ctr"/>
-          </a:p>
-        </p:txBody>
-      </p:sp>
-      <p:sp>
-        <p:nvSpPr>
-          <p:cNvPr id="23" name="TextBox 22"/>
-          <p:cNvSpPr txBox="1"/>
-          <p:nvPr/>
-        </p:nvSpPr>
-        <p:spPr>
-          <a:xfrm>
-            <a:off x="4526280" y="4123944"/>
-            <a:ext cx="1234440" cy="347472"/>
-          </a:xfrm>
-          <a:prstGeom prst="rect">
-            <a:avLst/>
-          </a:prstGeom>
-          <a:noFill/>
-        </p:spPr>
-        <p:txBody>
-          <a:bodyPr wrap="square" anchor="ctr" lIns="0" rIns="0" tIns="0" bIns="0">
-            <a:spAutoFit/>
-          </a:bodyPr>
-          <a:lstStyle/>
-          <a:p>
-            <a:pPr algn="ctr"/>
-            <a:r>
-              <a:rPr sz="1050" b="1">
-                <a:solidFill>
-                  <a:srgbClr val="FFFFFF"/>
-                </a:solidFill>
-                <a:latin typeface="Microsoft JhengHei"/>
-                <a:ea typeface="Microsoft JhengHei"/>
-                <a:cs typeface="Microsoft JhengHei"/>
-              </a:rPr>
-              <a:t>駭客攻擊</a:t>
-            </a:r>
-          </a:p>
-        </p:txBody>
-      </p:sp>
-      <p:sp>
-        <p:nvSpPr>
-          <p:cNvPr id="24" name="TextBox 23"/>
-          <p:cNvSpPr txBox="1"/>
-          <p:nvPr/>
-        </p:nvSpPr>
-        <p:spPr>
-          <a:xfrm>
-            <a:off x="777240" y="4599432"/>
-            <a:ext cx="4937760" cy="640080"/>
-          </a:xfrm>
-          <a:prstGeom prst="rect">
-            <a:avLst/>
-          </a:prstGeom>
-          <a:noFill/>
-        </p:spPr>
-        <p:txBody>
-          <a:bodyPr wrap="square" anchor="t" lIns="0" rIns="0" tIns="0" bIns="0">
-            <a:spAutoFit/>
-          </a:bodyPr>
-          <a:lstStyle/>
-          <a:p>
-            <a:pPr algn="l">
-              <a:lnSpc>
-                <a:spcPts val="1500"/>
-              </a:lnSpc>
-            </a:pPr>
-            <a:r>
-              <a:rPr sz="1100" b="1">
-                <a:solidFill>
-                  <a:srgbClr val="E63946"/>
-                </a:solidFill>
-                <a:latin typeface="Microsoft JhengHei"/>
-                <a:ea typeface="Microsoft JhengHei"/>
-                <a:cs typeface="Microsoft JhengHei"/>
-              </a:rPr>
-              <a:t>緣由　</a:t>
-            </a:r>
-            <a:r>
-              <a:rPr sz="1100" b="0">
-                <a:solidFill>
-                  <a:srgbClr val="1A2233"/>
-                </a:solidFill>
-                <a:latin typeface="Microsoft JhengHei"/>
-                <a:ea typeface="Microsoft JhengHei"/>
-                <a:cs typeface="Microsoft JhengHei"/>
-              </a:rPr>
-              <a:t>本公司資訊系統遭受駭客網路攻擊，部分主機與電腦遭受病毒攻擊。</a:t>
-            </a:r>
-          </a:p>
-        </p:txBody>
-      </p:sp>
-      <p:sp>
-        <p:nvSpPr>
-          <p:cNvPr id="25" name="TextBox 24"/>
-          <p:cNvSpPr txBox="1"/>
-          <p:nvPr/>
-        </p:nvSpPr>
-        <p:spPr>
-          <a:xfrm>
-            <a:off x="777240" y="5257800"/>
-            <a:ext cx="4937760" cy="713232"/>
-          </a:xfrm>
-          <a:prstGeom prst="rect">
-            <a:avLst/>
-          </a:prstGeom>
-          <a:noFill/>
-        </p:spPr>
-        <p:txBody>
-          <a:bodyPr wrap="square" anchor="t" lIns="0" rIns="0" tIns="0" bIns="0">
-            <a:spAutoFit/>
-          </a:bodyPr>
-          <a:lstStyle/>
-          <a:p>
-            <a:pPr algn="l">
-              <a:lnSpc>
-                <a:spcPts val="1500"/>
-              </a:lnSpc>
-            </a:pPr>
-            <a:r>
-              <a:rPr sz="1100" b="1">
-                <a:solidFill>
-                  <a:srgbClr val="E63946"/>
-                </a:solidFill>
-                <a:latin typeface="Microsoft JhengHei"/>
-                <a:ea typeface="Microsoft JhengHei"/>
-                <a:cs typeface="Microsoft JhengHei"/>
-              </a:rPr>
-              <a:t>因應　</a:t>
-            </a:r>
-            <a:r>
-              <a:rPr sz="1100" b="0">
-                <a:solidFill>
-                  <a:srgbClr val="1A2233"/>
-                </a:solidFill>
-                <a:latin typeface="Microsoft JhengHei"/>
-                <a:ea typeface="Microsoft JhengHei"/>
-                <a:cs typeface="Microsoft JhengHei"/>
-              </a:rPr>
-              <a:t>本公司已於第一時間啟動資安防禦，並對網路攻擊進行清查，亦同步持續檢視與提升網路與資訊基礎架構之安全控管，以確保資訊安全。</a:t>
             </a:r>
           </a:p>
         </p:txBody>

--- a/資安事件因應分析.pptx
+++ b/資安事件因應分析.pptx
@@ -154,31 +154,45 @@
               </a:solidFill>
             </c:spPr>
           </c:dPt>
+          <c:dPt>
+            <c:idx val="2"/>
+            <c:spPr>
+              <a:solidFill>
+                <a:srgbClr val="27A6C4"/>
+              </a:solidFill>
+            </c:spPr>
+          </c:dPt>
           <c:cat>
             <c:strRef>
-              <c:f>Sheet1!$A$2:$A$3</c:f>
+              <c:f>Sheet1!$A$2:$A$4</c:f>
               <c:strCache>
-                <c:ptCount val="2"/>
+                <c:ptCount val="3"/>
                 <c:pt idx="0">
                   <c:v>駭客攻擊</c:v>
                 </c:pt>
                 <c:pt idx="1">
                   <c:v>勒索病毒/加密</c:v>
                 </c:pt>
+                <c:pt idx="2">
+                  <c:v>個資外洩</c:v>
+                </c:pt>
               </c:strCache>
             </c:strRef>
           </c:cat>
           <c:val>
             <c:numRef>
-              <c:f>Sheet1!$B$2:$B$3</c:f>
+              <c:f>Sheet1!$B$2:$B$4</c:f>
               <c:numCache>
                 <c:formatCode>General</c:formatCode>
-                <c:ptCount val="2"/>
+                <c:ptCount val="3"/>
                 <c:pt idx="0">
                   <c:v>6</c:v>
                 </c:pt>
                 <c:pt idx="1">
                   <c:v>3</c:v>
+                </c:pt>
+                <c:pt idx="2">
+                  <c:v>1</c:v>
                 </c:pt>
               </c:numCache>
             </c:numRef>
@@ -3515,7 +3529,7 @@
                 <a:ea typeface="Microsoft JhengHei"/>
                 <a:cs typeface="Microsoft JhengHei"/>
               </a:rPr>
-              <a:t>資料期間 2026-08-23 ~ 2026-09-23　｜　MOPS 重大訊息全文檢索　｜　9 家公司</a:t>
+              <a:t>資料期間 2026-08-24 ~ 2026-09-24　｜　MOPS 重大訊息全文檢索　｜　10 家公司</a:t>
             </a:r>
           </a:p>
         </p:txBody>
@@ -3732,7 +3746,7 @@
                 <a:ea typeface="Microsoft JhengHei"/>
                 <a:cs typeface="Microsoft JhengHei"/>
               </a:rPr>
-              <a:t>資料期間內 MOPS 揭露之 9 起資安相關重大訊息</a:t>
+              <a:t>資料期間內 MOPS 揭露之 10 起資安相關重大訊息</a:t>
             </a:r>
           </a:p>
         </p:txBody>
@@ -3815,7 +3829,7 @@
                 <a:ea typeface="Microsoft JhengHei"/>
                 <a:cs typeface="Microsoft JhengHei"/>
               </a:rPr>
-              <a:t>9</a:t>
+              <a:t>10</a:t>
             </a:r>
           </a:p>
         </p:txBody>
@@ -3935,7 +3949,7 @@
                 <a:ea typeface="Microsoft JhengHei"/>
                 <a:cs typeface="Microsoft JhengHei"/>
               </a:rPr>
-              <a:t>2</a:t>
+              <a:t>3</a:t>
             </a:r>
           </a:p>
         </p:txBody>
@@ -4122,7 +4136,7 @@
                 <a:gridCol w="2286000"/>
                 <a:gridCol w="5120640"/>
               </a:tblGrid>
-              <a:tr h="356616">
+              <a:tr h="324196">
                 <a:tc>
                   <a:txBody>
                     <a:bodyPr/>
@@ -4244,7 +4258,7 @@
                   </a:tcPr>
                 </a:tc>
               </a:tr>
-              <a:tr h="356616">
+              <a:tr h="324196">
                 <a:tc>
                   <a:txBody>
                     <a:bodyPr/>
@@ -4259,7 +4273,7 @@
                           <a:ea typeface="Microsoft JhengHei"/>
                           <a:cs typeface="Microsoft JhengHei"/>
                         </a:rPr>
-                        <a:t>友訊</a:t>
+                        <a:t>柏文</a:t>
                       </a:r>
                     </a:p>
                   </a:txBody>
@@ -4283,7 +4297,7 @@
                           <a:ea typeface="Microsoft JhengHei"/>
                           <a:cs typeface="Microsoft JhengHei"/>
                         </a:rPr>
-                        <a:t>2332</a:t>
+                        <a:t>8462</a:t>
                       </a:r>
                     </a:p>
                   </a:txBody>
@@ -4307,7 +4321,251 @@
                           <a:ea typeface="Microsoft JhengHei"/>
                           <a:cs typeface="Microsoft JhengHei"/>
                         </a:rPr>
+                        <a:t>09/23</a:t>
+                      </a:r>
+                    </a:p>
+                  </a:txBody>
+                  <a:tcPr anchor="ctr" marL="73152" marT="9144" marB="9144">
+                    <a:solidFill>
+                      <a:srgbClr val="FFFFFF"/>
+                    </a:solidFill>
+                  </a:tcPr>
+                </a:tc>
+                <a:tc>
+                  <a:txBody>
+                    <a:bodyPr/>
+                    <a:lstStyle/>
+                    <a:p>
+                      <a:r>
+                        <a:rPr sz="1150" b="1">
+                          <a:solidFill>
+                            <a:srgbClr val="27A6C4"/>
+                          </a:solidFill>
+                          <a:latin typeface="Microsoft JhengHei"/>
+                          <a:ea typeface="Microsoft JhengHei"/>
+                          <a:cs typeface="Microsoft JhengHei"/>
+                        </a:rPr>
+                        <a:t>個資外洩</a:t>
+                      </a:r>
+                    </a:p>
+                  </a:txBody>
+                  <a:tcPr anchor="ctr" marL="73152" marT="9144" marB="9144">
+                    <a:solidFill>
+                      <a:srgbClr val="FFFFFF"/>
+                    </a:solidFill>
+                  </a:tcPr>
+                </a:tc>
+                <a:tc>
+                  <a:txBody>
+                    <a:bodyPr/>
+                    <a:lstStyle/>
+                    <a:p>
+                      <a:r>
+                        <a:rPr sz="1150" b="0">
+                          <a:solidFill>
+                            <a:srgbClr val="1A2233"/>
+                          </a:solidFill>
+                          <a:latin typeface="Microsoft JhengHei"/>
+                          <a:ea typeface="Microsoft JhengHei"/>
+                          <a:cs typeface="Microsoft JhengHei"/>
+                        </a:rPr>
+                        <a:t>目前評估對公司營運無重大影響。</a:t>
+                      </a:r>
+                    </a:p>
+                  </a:txBody>
+                  <a:tcPr anchor="ctr" marL="73152" marT="9144" marB="9144">
+                    <a:solidFill>
+                      <a:srgbClr val="FFFFFF"/>
+                    </a:solidFill>
+                  </a:tcPr>
+                </a:tc>
+              </a:tr>
+              <a:tr h="324196">
+                <a:tc>
+                  <a:txBody>
+                    <a:bodyPr/>
+                    <a:lstStyle/>
+                    <a:p>
+                      <a:r>
+                        <a:rPr sz="1150" b="0">
+                          <a:solidFill>
+                            <a:srgbClr val="1A2233"/>
+                          </a:solidFill>
+                          <a:latin typeface="Microsoft JhengHei"/>
+                          <a:ea typeface="Microsoft JhengHei"/>
+                          <a:cs typeface="Microsoft JhengHei"/>
+                        </a:rPr>
+                        <a:t>友訊</a:t>
+                      </a:r>
+                    </a:p>
+                  </a:txBody>
+                  <a:tcPr anchor="ctr" marL="73152" marT="9144" marB="9144">
+                    <a:solidFill>
+                      <a:srgbClr val="EEF2F9"/>
+                    </a:solidFill>
+                  </a:tcPr>
+                </a:tc>
+                <a:tc>
+                  <a:txBody>
+                    <a:bodyPr/>
+                    <a:lstStyle/>
+                    <a:p>
+                      <a:r>
+                        <a:rPr sz="1150" b="0">
+                          <a:solidFill>
+                            <a:srgbClr val="1A2233"/>
+                          </a:solidFill>
+                          <a:latin typeface="Microsoft JhengHei"/>
+                          <a:ea typeface="Microsoft JhengHei"/>
+                          <a:cs typeface="Microsoft JhengHei"/>
+                        </a:rPr>
+                        <a:t>2332</a:t>
+                      </a:r>
+                    </a:p>
+                  </a:txBody>
+                  <a:tcPr anchor="ctr" marL="73152" marT="9144" marB="9144">
+                    <a:solidFill>
+                      <a:srgbClr val="EEF2F9"/>
+                    </a:solidFill>
+                  </a:tcPr>
+                </a:tc>
+                <a:tc>
+                  <a:txBody>
+                    <a:bodyPr/>
+                    <a:lstStyle/>
+                    <a:p>
+                      <a:r>
+                        <a:rPr sz="1150" b="0">
+                          <a:solidFill>
+                            <a:srgbClr val="1A2233"/>
+                          </a:solidFill>
+                          <a:latin typeface="Microsoft JhengHei"/>
+                          <a:ea typeface="Microsoft JhengHei"/>
+                          <a:cs typeface="Microsoft JhengHei"/>
+                        </a:rPr>
                         <a:t>09/18</a:t>
+                      </a:r>
+                    </a:p>
+                  </a:txBody>
+                  <a:tcPr anchor="ctr" marL="73152" marT="9144" marB="9144">
+                    <a:solidFill>
+                      <a:srgbClr val="EEF2F9"/>
+                    </a:solidFill>
+                  </a:tcPr>
+                </a:tc>
+                <a:tc>
+                  <a:txBody>
+                    <a:bodyPr/>
+                    <a:lstStyle/>
+                    <a:p>
+                      <a:r>
+                        <a:rPr sz="1150" b="1">
+                          <a:solidFill>
+                            <a:srgbClr val="E63946"/>
+                          </a:solidFill>
+                          <a:latin typeface="Microsoft JhengHei"/>
+                          <a:ea typeface="Microsoft JhengHei"/>
+                          <a:cs typeface="Microsoft JhengHei"/>
+                        </a:rPr>
+                        <a:t>駭客攻擊</a:t>
+                      </a:r>
+                    </a:p>
+                  </a:txBody>
+                  <a:tcPr anchor="ctr" marL="73152" marT="9144" marB="9144">
+                    <a:solidFill>
+                      <a:srgbClr val="EEF2F9"/>
+                    </a:solidFill>
+                  </a:tcPr>
+                </a:tc>
+                <a:tc>
+                  <a:txBody>
+                    <a:bodyPr/>
+                    <a:lstStyle/>
+                    <a:p>
+                      <a:r>
+                        <a:rPr sz="1150" b="0">
+                          <a:solidFill>
+                            <a:srgbClr val="1A2233"/>
+                          </a:solidFill>
+                          <a:latin typeface="Microsoft JhengHei"/>
+                          <a:ea typeface="Microsoft JhengHei"/>
+                          <a:cs typeface="Microsoft JhengHei"/>
+                        </a:rPr>
+                        <a:t>目前評估對公司營運尚無重大影響</a:t>
+                      </a:r>
+                    </a:p>
+                  </a:txBody>
+                  <a:tcPr anchor="ctr" marL="73152" marT="9144" marB="9144">
+                    <a:solidFill>
+                      <a:srgbClr val="EEF2F9"/>
+                    </a:solidFill>
+                  </a:tcPr>
+                </a:tc>
+              </a:tr>
+              <a:tr h="324196">
+                <a:tc>
+                  <a:txBody>
+                    <a:bodyPr/>
+                    <a:lstStyle/>
+                    <a:p>
+                      <a:r>
+                        <a:rPr sz="1150" b="0">
+                          <a:solidFill>
+                            <a:srgbClr val="1A2233"/>
+                          </a:solidFill>
+                          <a:latin typeface="Microsoft JhengHei"/>
+                          <a:ea typeface="Microsoft JhengHei"/>
+                          <a:cs typeface="Microsoft JhengHei"/>
+                        </a:rPr>
+                        <a:t>長榮航</a:t>
+                      </a:r>
+                    </a:p>
+                  </a:txBody>
+                  <a:tcPr anchor="ctr" marL="73152" marT="9144" marB="9144">
+                    <a:solidFill>
+                      <a:srgbClr val="FFFFFF"/>
+                    </a:solidFill>
+                  </a:tcPr>
+                </a:tc>
+                <a:tc>
+                  <a:txBody>
+                    <a:bodyPr/>
+                    <a:lstStyle/>
+                    <a:p>
+                      <a:r>
+                        <a:rPr sz="1150" b="0">
+                          <a:solidFill>
+                            <a:srgbClr val="1A2233"/>
+                          </a:solidFill>
+                          <a:latin typeface="Microsoft JhengHei"/>
+                          <a:ea typeface="Microsoft JhengHei"/>
+                          <a:cs typeface="Microsoft JhengHei"/>
+                        </a:rPr>
+                        <a:t>2618</a:t>
+                      </a:r>
+                    </a:p>
+                  </a:txBody>
+                  <a:tcPr anchor="ctr" marL="73152" marT="9144" marB="9144">
+                    <a:solidFill>
+                      <a:srgbClr val="FFFFFF"/>
+                    </a:solidFill>
+                  </a:tcPr>
+                </a:tc>
+                <a:tc>
+                  <a:txBody>
+                    <a:bodyPr/>
+                    <a:lstStyle/>
+                    <a:p>
+                      <a:r>
+                        <a:rPr sz="1150" b="0">
+                          <a:solidFill>
+                            <a:srgbClr val="1A2233"/>
+                          </a:solidFill>
+                          <a:latin typeface="Microsoft JhengHei"/>
+                          <a:ea typeface="Microsoft JhengHei"/>
+                          <a:cs typeface="Microsoft JhengHei"/>
+                        </a:rPr>
+                        <a:t>09/15</a:t>
                       </a:r>
                     </a:p>
                   </a:txBody>
@@ -4355,7 +4613,7 @@
                           <a:ea typeface="Microsoft JhengHei"/>
                           <a:cs typeface="Microsoft JhengHei"/>
                         </a:rPr>
-                        <a:t>目前評估對公司營運尚無重大影響</a:t>
+                        <a:t>目前評估對公司所有業務均不受影響。</a:t>
                       </a:r>
                     </a:p>
                   </a:txBody>
@@ -4366,7 +4624,7 @@
                   </a:tcPr>
                 </a:tc>
               </a:tr>
-              <a:tr h="356616">
+              <a:tr h="324196">
                 <a:tc>
                   <a:txBody>
                     <a:bodyPr/>
@@ -4381,7 +4639,7 @@
                           <a:ea typeface="Microsoft JhengHei"/>
                           <a:cs typeface="Microsoft JhengHei"/>
                         </a:rPr>
-                        <a:t>長榮航</a:t>
+                        <a:t>長榮航太</a:t>
                       </a:r>
                     </a:p>
                   </a:txBody>
@@ -4405,7 +4663,7 @@
                           <a:ea typeface="Microsoft JhengHei"/>
                           <a:cs typeface="Microsoft JhengHei"/>
                         </a:rPr>
-                        <a:t>2618</a:t>
+                        <a:t>2645</a:t>
                       </a:r>
                     </a:p>
                   </a:txBody>
@@ -4477,7 +4735,7 @@
                           <a:ea typeface="Microsoft JhengHei"/>
                           <a:cs typeface="Microsoft JhengHei"/>
                         </a:rPr>
-                        <a:t>目前評估對公司所有業務均不受影響。</a:t>
+                        <a:t>經初步評估，核心資訊系統及營運業務運作皆維持正常，尚未發現公司及涉客…</a:t>
                       </a:r>
                     </a:p>
                   </a:txBody>
@@ -4488,7 +4746,7 @@
                   </a:tcPr>
                 </a:tc>
               </a:tr>
-              <a:tr h="356616">
+              <a:tr h="324196">
                 <a:tc>
                   <a:txBody>
                     <a:bodyPr/>
@@ -4503,7 +4761,7 @@
                           <a:ea typeface="Microsoft JhengHei"/>
                           <a:cs typeface="Microsoft JhengHei"/>
                         </a:rPr>
-                        <a:t>長榮航太</a:t>
+                        <a:t>崴寶</a:t>
                       </a:r>
                     </a:p>
                   </a:txBody>
@@ -4527,7 +4785,7 @@
                           <a:ea typeface="Microsoft JhengHei"/>
                           <a:cs typeface="Microsoft JhengHei"/>
                         </a:rPr>
-                        <a:t>2645</a:t>
+                        <a:t>7744</a:t>
                       </a:r>
                     </a:p>
                   </a:txBody>
@@ -4551,7 +4809,251 @@
                           <a:ea typeface="Microsoft JhengHei"/>
                           <a:cs typeface="Microsoft JhengHei"/>
                         </a:rPr>
-                        <a:t>09/15</a:t>
+                        <a:t>09/14</a:t>
+                      </a:r>
+                    </a:p>
+                  </a:txBody>
+                  <a:tcPr anchor="ctr" marL="73152" marT="9144" marB="9144">
+                    <a:solidFill>
+                      <a:srgbClr val="FFFFFF"/>
+                    </a:solidFill>
+                  </a:tcPr>
+                </a:tc>
+                <a:tc>
+                  <a:txBody>
+                    <a:bodyPr/>
+                    <a:lstStyle/>
+                    <a:p>
+                      <a:r>
+                        <a:rPr sz="1150" b="1">
+                          <a:solidFill>
+                            <a:srgbClr val="F4A261"/>
+                          </a:solidFill>
+                          <a:latin typeface="Microsoft JhengHei"/>
+                          <a:ea typeface="Microsoft JhengHei"/>
+                          <a:cs typeface="Microsoft JhengHei"/>
+                        </a:rPr>
+                        <a:t>勒索病毒/加密</a:t>
+                      </a:r>
+                    </a:p>
+                  </a:txBody>
+                  <a:tcPr anchor="ctr" marL="73152" marT="9144" marB="9144">
+                    <a:solidFill>
+                      <a:srgbClr val="FFFFFF"/>
+                    </a:solidFill>
+                  </a:tcPr>
+                </a:tc>
+                <a:tc>
+                  <a:txBody>
+                    <a:bodyPr/>
+                    <a:lstStyle/>
+                    <a:p>
+                      <a:r>
+                        <a:rPr sz="1150" b="0">
+                          <a:solidFill>
+                            <a:srgbClr val="1A2233"/>
+                          </a:solidFill>
+                          <a:latin typeface="Microsoft JhengHei"/>
+                          <a:ea typeface="Microsoft JhengHei"/>
+                          <a:cs typeface="Microsoft JhengHei"/>
+                        </a:rPr>
+                        <a:t>經初步評估，本次資安事件未影響公司工廠生產作業，生產活動均維持正常運…</a:t>
+                      </a:r>
+                    </a:p>
+                  </a:txBody>
+                  <a:tcPr anchor="ctr" marL="73152" marT="9144" marB="9144">
+                    <a:solidFill>
+                      <a:srgbClr val="FFFFFF"/>
+                    </a:solidFill>
+                  </a:tcPr>
+                </a:tc>
+              </a:tr>
+              <a:tr h="324196">
+                <a:tc>
+                  <a:txBody>
+                    <a:bodyPr/>
+                    <a:lstStyle/>
+                    <a:p>
+                      <a:r>
+                        <a:rPr sz="1150" b="0">
+                          <a:solidFill>
+                            <a:srgbClr val="1A2233"/>
+                          </a:solidFill>
+                          <a:latin typeface="Microsoft JhengHei"/>
+                          <a:ea typeface="Microsoft JhengHei"/>
+                          <a:cs typeface="Microsoft JhengHei"/>
+                        </a:rPr>
+                        <a:t>達爾膚</a:t>
+                      </a:r>
+                    </a:p>
+                  </a:txBody>
+                  <a:tcPr anchor="ctr" marL="73152" marT="9144" marB="9144">
+                    <a:solidFill>
+                      <a:srgbClr val="EEF2F9"/>
+                    </a:solidFill>
+                  </a:tcPr>
+                </a:tc>
+                <a:tc>
+                  <a:txBody>
+                    <a:bodyPr/>
+                    <a:lstStyle/>
+                    <a:p>
+                      <a:r>
+                        <a:rPr sz="1150" b="0">
+                          <a:solidFill>
+                            <a:srgbClr val="1A2233"/>
+                          </a:solidFill>
+                          <a:latin typeface="Microsoft JhengHei"/>
+                          <a:ea typeface="Microsoft JhengHei"/>
+                          <a:cs typeface="Microsoft JhengHei"/>
+                        </a:rPr>
+                        <a:t>6523</a:t>
+                      </a:r>
+                    </a:p>
+                  </a:txBody>
+                  <a:tcPr anchor="ctr" marL="73152" marT="9144" marB="9144">
+                    <a:solidFill>
+                      <a:srgbClr val="EEF2F9"/>
+                    </a:solidFill>
+                  </a:tcPr>
+                </a:tc>
+                <a:tc>
+                  <a:txBody>
+                    <a:bodyPr/>
+                    <a:lstStyle/>
+                    <a:p>
+                      <a:r>
+                        <a:rPr sz="1150" b="0">
+                          <a:solidFill>
+                            <a:srgbClr val="1A2233"/>
+                          </a:solidFill>
+                          <a:latin typeface="Microsoft JhengHei"/>
+                          <a:ea typeface="Microsoft JhengHei"/>
+                          <a:cs typeface="Microsoft JhengHei"/>
+                        </a:rPr>
+                        <a:t>09/11</a:t>
+                      </a:r>
+                    </a:p>
+                  </a:txBody>
+                  <a:tcPr anchor="ctr" marL="73152" marT="9144" marB="9144">
+                    <a:solidFill>
+                      <a:srgbClr val="EEF2F9"/>
+                    </a:solidFill>
+                  </a:tcPr>
+                </a:tc>
+                <a:tc>
+                  <a:txBody>
+                    <a:bodyPr/>
+                    <a:lstStyle/>
+                    <a:p>
+                      <a:r>
+                        <a:rPr sz="1150" b="1">
+                          <a:solidFill>
+                            <a:srgbClr val="E63946"/>
+                          </a:solidFill>
+                          <a:latin typeface="Microsoft JhengHei"/>
+                          <a:ea typeface="Microsoft JhengHei"/>
+                          <a:cs typeface="Microsoft JhengHei"/>
+                        </a:rPr>
+                        <a:t>駭客攻擊</a:t>
+                      </a:r>
+                    </a:p>
+                  </a:txBody>
+                  <a:tcPr anchor="ctr" marL="73152" marT="9144" marB="9144">
+                    <a:solidFill>
+                      <a:srgbClr val="EEF2F9"/>
+                    </a:solidFill>
+                  </a:tcPr>
+                </a:tc>
+                <a:tc>
+                  <a:txBody>
+                    <a:bodyPr/>
+                    <a:lstStyle/>
+                    <a:p>
+                      <a:r>
+                        <a:rPr sz="1150" b="0">
+                          <a:solidFill>
+                            <a:srgbClr val="1A2233"/>
+                          </a:solidFill>
+                          <a:latin typeface="Microsoft JhengHei"/>
+                          <a:ea typeface="Microsoft JhengHei"/>
+                          <a:cs typeface="Microsoft JhengHei"/>
+                        </a:rPr>
+                        <a:t>受影響系統非屬公司現行主要營運系統，亦非對外提供服務之系統，目前評估…</a:t>
+                      </a:r>
+                    </a:p>
+                  </a:txBody>
+                  <a:tcPr anchor="ctr" marL="73152" marT="9144" marB="9144">
+                    <a:solidFill>
+                      <a:srgbClr val="EEF2F9"/>
+                    </a:solidFill>
+                  </a:tcPr>
+                </a:tc>
+              </a:tr>
+              <a:tr h="324196">
+                <a:tc>
+                  <a:txBody>
+                    <a:bodyPr/>
+                    <a:lstStyle/>
+                    <a:p>
+                      <a:r>
+                        <a:rPr sz="1150" b="0">
+                          <a:solidFill>
+                            <a:srgbClr val="1A2233"/>
+                          </a:solidFill>
+                          <a:latin typeface="Microsoft JhengHei"/>
+                          <a:ea typeface="Microsoft JhengHei"/>
+                          <a:cs typeface="Microsoft JhengHei"/>
+                        </a:rPr>
+                        <a:t>大車隊</a:t>
+                      </a:r>
+                    </a:p>
+                  </a:txBody>
+                  <a:tcPr anchor="ctr" marL="73152" marT="9144" marB="9144">
+                    <a:solidFill>
+                      <a:srgbClr val="FFFFFF"/>
+                    </a:solidFill>
+                  </a:tcPr>
+                </a:tc>
+                <a:tc>
+                  <a:txBody>
+                    <a:bodyPr/>
+                    <a:lstStyle/>
+                    <a:p>
+                      <a:r>
+                        <a:rPr sz="1150" b="0">
+                          <a:solidFill>
+                            <a:srgbClr val="1A2233"/>
+                          </a:solidFill>
+                          <a:latin typeface="Microsoft JhengHei"/>
+                          <a:ea typeface="Microsoft JhengHei"/>
+                          <a:cs typeface="Microsoft JhengHei"/>
+                        </a:rPr>
+                        <a:t>2640</a:t>
+                      </a:r>
+                    </a:p>
+                  </a:txBody>
+                  <a:tcPr anchor="ctr" marL="73152" marT="9144" marB="9144">
+                    <a:solidFill>
+                      <a:srgbClr val="FFFFFF"/>
+                    </a:solidFill>
+                  </a:tcPr>
+                </a:tc>
+                <a:tc>
+                  <a:txBody>
+                    <a:bodyPr/>
+                    <a:lstStyle/>
+                    <a:p>
+                      <a:r>
+                        <a:rPr sz="1150" b="0">
+                          <a:solidFill>
+                            <a:srgbClr val="1A2233"/>
+                          </a:solidFill>
+                          <a:latin typeface="Microsoft JhengHei"/>
+                          <a:ea typeface="Microsoft JhengHei"/>
+                          <a:cs typeface="Microsoft JhengHei"/>
+                        </a:rPr>
+                        <a:t>09/09</a:t>
                       </a:r>
                     </a:p>
                   </a:txBody>
@@ -4599,7 +5101,7 @@
                           <a:ea typeface="Microsoft JhengHei"/>
                           <a:cs typeface="Microsoft JhengHei"/>
                         </a:rPr>
-                        <a:t>經初步評估，核心資訊系統及營運業務運作皆維持正常，尚未發現公司及涉客…</a:t>
+                        <a:t>經初步評估，本事件目前尚未對本公司整體營運及財務造成重大影響。</a:t>
                       </a:r>
                     </a:p>
                   </a:txBody>
@@ -4610,7 +5112,7 @@
                   </a:tcPr>
                 </a:tc>
               </a:tr>
-              <a:tr h="356616">
+              <a:tr h="324196">
                 <a:tc>
                   <a:txBody>
                     <a:bodyPr/>
@@ -4625,7 +5127,7 @@
                           <a:ea typeface="Microsoft JhengHei"/>
                           <a:cs typeface="Microsoft JhengHei"/>
                         </a:rPr>
-                        <a:t>崴寶</a:t>
+                        <a:t>富爾特</a:t>
                       </a:r>
                     </a:p>
                   </a:txBody>
@@ -4649,7 +5151,7 @@
                           <a:ea typeface="Microsoft JhengHei"/>
                           <a:cs typeface="Microsoft JhengHei"/>
                         </a:rPr>
-                        <a:t>7744</a:t>
+                        <a:t>6136</a:t>
                       </a:r>
                     </a:p>
                   </a:txBody>
@@ -4673,7 +5175,7 @@
                           <a:ea typeface="Microsoft JhengHei"/>
                           <a:cs typeface="Microsoft JhengHei"/>
                         </a:rPr>
-                        <a:t>09/14</a:t>
+                        <a:t>09/07</a:t>
                       </a:r>
                     </a:p>
                   </a:txBody>
@@ -4721,7 +5223,7 @@
                           <a:ea typeface="Microsoft JhengHei"/>
                           <a:cs typeface="Microsoft JhengHei"/>
                         </a:rPr>
-                        <a:t>經初步評估，本次資安事件未影響公司工廠生產作業，生產活動均維持正常運…</a:t>
+                        <a:t>目前受影響之系統正陸續復原中，對公司整體營運及財務之影響程度尚不致有…</a:t>
                       </a:r>
                     </a:p>
                   </a:txBody>
@@ -4732,7 +5234,7 @@
                   </a:tcPr>
                 </a:tc>
               </a:tr>
-              <a:tr h="356616">
+              <a:tr h="324196">
                 <a:tc>
                   <a:txBody>
                     <a:bodyPr/>
@@ -4747,7 +5249,7 @@
                           <a:ea typeface="Microsoft JhengHei"/>
                           <a:cs typeface="Microsoft JhengHei"/>
                         </a:rPr>
-                        <a:t>達爾膚</a:t>
+                        <a:t>創新服務</a:t>
                       </a:r>
                     </a:p>
                   </a:txBody>
@@ -4771,7 +5273,7 @@
                           <a:ea typeface="Microsoft JhengHei"/>
                           <a:cs typeface="Microsoft JhengHei"/>
                         </a:rPr>
-                        <a:t>6523</a:t>
+                        <a:t>7828</a:t>
                       </a:r>
                     </a:p>
                   </a:txBody>
@@ -4795,251 +5297,7 @@
                           <a:ea typeface="Microsoft JhengHei"/>
                           <a:cs typeface="Microsoft JhengHei"/>
                         </a:rPr>
-                        <a:t>09/11</a:t>
-                      </a:r>
-                    </a:p>
-                  </a:txBody>
-                  <a:tcPr anchor="ctr" marL="73152" marT="9144" marB="9144">
-                    <a:solidFill>
-                      <a:srgbClr val="FFFFFF"/>
-                    </a:solidFill>
-                  </a:tcPr>
-                </a:tc>
-                <a:tc>
-                  <a:txBody>
-                    <a:bodyPr/>
-                    <a:lstStyle/>
-                    <a:p>
-                      <a:r>
-                        <a:rPr sz="1150" b="1">
-                          <a:solidFill>
-                            <a:srgbClr val="E63946"/>
-                          </a:solidFill>
-                          <a:latin typeface="Microsoft JhengHei"/>
-                          <a:ea typeface="Microsoft JhengHei"/>
-                          <a:cs typeface="Microsoft JhengHei"/>
-                        </a:rPr>
-                        <a:t>駭客攻擊</a:t>
-                      </a:r>
-                    </a:p>
-                  </a:txBody>
-                  <a:tcPr anchor="ctr" marL="73152" marT="9144" marB="9144">
-                    <a:solidFill>
-                      <a:srgbClr val="FFFFFF"/>
-                    </a:solidFill>
-                  </a:tcPr>
-                </a:tc>
-                <a:tc>
-                  <a:txBody>
-                    <a:bodyPr/>
-                    <a:lstStyle/>
-                    <a:p>
-                      <a:r>
-                        <a:rPr sz="1150" b="0">
-                          <a:solidFill>
-                            <a:srgbClr val="1A2233"/>
-                          </a:solidFill>
-                          <a:latin typeface="Microsoft JhengHei"/>
-                          <a:ea typeface="Microsoft JhengHei"/>
-                          <a:cs typeface="Microsoft JhengHei"/>
-                        </a:rPr>
-                        <a:t>受影響系統非屬公司現行主要營運系統，亦非對外提供服務之系統，目前評估…</a:t>
-                      </a:r>
-                    </a:p>
-                  </a:txBody>
-                  <a:tcPr anchor="ctr" marL="73152" marT="9144" marB="9144">
-                    <a:solidFill>
-                      <a:srgbClr val="FFFFFF"/>
-                    </a:solidFill>
-                  </a:tcPr>
-                </a:tc>
-              </a:tr>
-              <a:tr h="356616">
-                <a:tc>
-                  <a:txBody>
-                    <a:bodyPr/>
-                    <a:lstStyle/>
-                    <a:p>
-                      <a:r>
-                        <a:rPr sz="1150" b="0">
-                          <a:solidFill>
-                            <a:srgbClr val="1A2233"/>
-                          </a:solidFill>
-                          <a:latin typeface="Microsoft JhengHei"/>
-                          <a:ea typeface="Microsoft JhengHei"/>
-                          <a:cs typeface="Microsoft JhengHei"/>
-                        </a:rPr>
-                        <a:t>大車隊</a:t>
-                      </a:r>
-                    </a:p>
-                  </a:txBody>
-                  <a:tcPr anchor="ctr" marL="73152" marT="9144" marB="9144">
-                    <a:solidFill>
-                      <a:srgbClr val="EEF2F9"/>
-                    </a:solidFill>
-                  </a:tcPr>
-                </a:tc>
-                <a:tc>
-                  <a:txBody>
-                    <a:bodyPr/>
-                    <a:lstStyle/>
-                    <a:p>
-                      <a:r>
-                        <a:rPr sz="1150" b="0">
-                          <a:solidFill>
-                            <a:srgbClr val="1A2233"/>
-                          </a:solidFill>
-                          <a:latin typeface="Microsoft JhengHei"/>
-                          <a:ea typeface="Microsoft JhengHei"/>
-                          <a:cs typeface="Microsoft JhengHei"/>
-                        </a:rPr>
-                        <a:t>2640</a:t>
-                      </a:r>
-                    </a:p>
-                  </a:txBody>
-                  <a:tcPr anchor="ctr" marL="73152" marT="9144" marB="9144">
-                    <a:solidFill>
-                      <a:srgbClr val="EEF2F9"/>
-                    </a:solidFill>
-                  </a:tcPr>
-                </a:tc>
-                <a:tc>
-                  <a:txBody>
-                    <a:bodyPr/>
-                    <a:lstStyle/>
-                    <a:p>
-                      <a:r>
-                        <a:rPr sz="1150" b="0">
-                          <a:solidFill>
-                            <a:srgbClr val="1A2233"/>
-                          </a:solidFill>
-                          <a:latin typeface="Microsoft JhengHei"/>
-                          <a:ea typeface="Microsoft JhengHei"/>
-                          <a:cs typeface="Microsoft JhengHei"/>
-                        </a:rPr>
-                        <a:t>09/09</a:t>
-                      </a:r>
-                    </a:p>
-                  </a:txBody>
-                  <a:tcPr anchor="ctr" marL="73152" marT="9144" marB="9144">
-                    <a:solidFill>
-                      <a:srgbClr val="EEF2F9"/>
-                    </a:solidFill>
-                  </a:tcPr>
-                </a:tc>
-                <a:tc>
-                  <a:txBody>
-                    <a:bodyPr/>
-                    <a:lstStyle/>
-                    <a:p>
-                      <a:r>
-                        <a:rPr sz="1150" b="1">
-                          <a:solidFill>
-                            <a:srgbClr val="E63946"/>
-                          </a:solidFill>
-                          <a:latin typeface="Microsoft JhengHei"/>
-                          <a:ea typeface="Microsoft JhengHei"/>
-                          <a:cs typeface="Microsoft JhengHei"/>
-                        </a:rPr>
-                        <a:t>駭客攻擊</a:t>
-                      </a:r>
-                    </a:p>
-                  </a:txBody>
-                  <a:tcPr anchor="ctr" marL="73152" marT="9144" marB="9144">
-                    <a:solidFill>
-                      <a:srgbClr val="EEF2F9"/>
-                    </a:solidFill>
-                  </a:tcPr>
-                </a:tc>
-                <a:tc>
-                  <a:txBody>
-                    <a:bodyPr/>
-                    <a:lstStyle/>
-                    <a:p>
-                      <a:r>
-                        <a:rPr sz="1150" b="0">
-                          <a:solidFill>
-                            <a:srgbClr val="1A2233"/>
-                          </a:solidFill>
-                          <a:latin typeface="Microsoft JhengHei"/>
-                          <a:ea typeface="Microsoft JhengHei"/>
-                          <a:cs typeface="Microsoft JhengHei"/>
-                        </a:rPr>
-                        <a:t>經初步評估，本事件目前尚未對本公司整體營運及財務造成重大影響。</a:t>
-                      </a:r>
-                    </a:p>
-                  </a:txBody>
-                  <a:tcPr anchor="ctr" marL="73152" marT="9144" marB="9144">
-                    <a:solidFill>
-                      <a:srgbClr val="EEF2F9"/>
-                    </a:solidFill>
-                  </a:tcPr>
-                </a:tc>
-              </a:tr>
-              <a:tr h="356616">
-                <a:tc>
-                  <a:txBody>
-                    <a:bodyPr/>
-                    <a:lstStyle/>
-                    <a:p>
-                      <a:r>
-                        <a:rPr sz="1150" b="0">
-                          <a:solidFill>
-                            <a:srgbClr val="1A2233"/>
-                          </a:solidFill>
-                          <a:latin typeface="Microsoft JhengHei"/>
-                          <a:ea typeface="Microsoft JhengHei"/>
-                          <a:cs typeface="Microsoft JhengHei"/>
-                        </a:rPr>
-                        <a:t>富爾特</a:t>
-                      </a:r>
-                    </a:p>
-                  </a:txBody>
-                  <a:tcPr anchor="ctr" marL="73152" marT="9144" marB="9144">
-                    <a:solidFill>
-                      <a:srgbClr val="FFFFFF"/>
-                    </a:solidFill>
-                  </a:tcPr>
-                </a:tc>
-                <a:tc>
-                  <a:txBody>
-                    <a:bodyPr/>
-                    <a:lstStyle/>
-                    <a:p>
-                      <a:r>
-                        <a:rPr sz="1150" b="0">
-                          <a:solidFill>
-                            <a:srgbClr val="1A2233"/>
-                          </a:solidFill>
-                          <a:latin typeface="Microsoft JhengHei"/>
-                          <a:ea typeface="Microsoft JhengHei"/>
-                          <a:cs typeface="Microsoft JhengHei"/>
-                        </a:rPr>
-                        <a:t>6136</a:t>
-                      </a:r>
-                    </a:p>
-                  </a:txBody>
-                  <a:tcPr anchor="ctr" marL="73152" marT="9144" marB="9144">
-                    <a:solidFill>
-                      <a:srgbClr val="FFFFFF"/>
-                    </a:solidFill>
-                  </a:tcPr>
-                </a:tc>
-                <a:tc>
-                  <a:txBody>
-                    <a:bodyPr/>
-                    <a:lstStyle/>
-                    <a:p>
-                      <a:r>
-                        <a:rPr sz="1150" b="0">
-                          <a:solidFill>
-                            <a:srgbClr val="1A2233"/>
-                          </a:solidFill>
-                          <a:latin typeface="Microsoft JhengHei"/>
-                          <a:ea typeface="Microsoft JhengHei"/>
-                          <a:cs typeface="Microsoft JhengHei"/>
-                        </a:rPr>
-                        <a:t>09/07</a:t>
+                        <a:t>09/02</a:t>
                       </a:r>
                     </a:p>
                   </a:txBody>
@@ -5098,7 +5356,7 @@
                   </a:tcPr>
                 </a:tc>
               </a:tr>
-              <a:tr h="356616">
+              <a:tr h="324200">
                 <a:tc>
                   <a:txBody>
                     <a:bodyPr/>
@@ -5113,7 +5371,7 @@
                           <a:ea typeface="Microsoft JhengHei"/>
                           <a:cs typeface="Microsoft JhengHei"/>
                         </a:rPr>
-                        <a:t>創新服務</a:t>
+                        <a:t>杭特</a:t>
                       </a:r>
                     </a:p>
                   </a:txBody>
@@ -5137,7 +5395,7 @@
                           <a:ea typeface="Microsoft JhengHei"/>
                           <a:cs typeface="Microsoft JhengHei"/>
                         </a:rPr>
-                        <a:t>7828</a:t>
+                        <a:t>3297</a:t>
                       </a:r>
                     </a:p>
                   </a:txBody>
@@ -5161,7 +5419,7 @@
                           <a:ea typeface="Microsoft JhengHei"/>
                           <a:cs typeface="Microsoft JhengHei"/>
                         </a:rPr>
-                        <a:t>09/02</a:t>
+                        <a:t>08/31</a:t>
                       </a:r>
                     </a:p>
                   </a:txBody>
@@ -5179,13 +5437,13 @@
                       <a:r>
                         <a:rPr sz="1150" b="1">
                           <a:solidFill>
-                            <a:srgbClr val="F4A261"/>
+                            <a:srgbClr val="E63946"/>
                           </a:solidFill>
                           <a:latin typeface="Microsoft JhengHei"/>
                           <a:ea typeface="Microsoft JhengHei"/>
                           <a:cs typeface="Microsoft JhengHei"/>
                         </a:rPr>
-                        <a:t>勒索病毒/加密</a:t>
+                        <a:t>駭客攻擊</a:t>
                       </a:r>
                     </a:p>
                   </a:txBody>
@@ -5209,135 +5467,13 @@
                           <a:ea typeface="Microsoft JhengHei"/>
                           <a:cs typeface="Microsoft JhengHei"/>
                         </a:rPr>
-                        <a:t>目前受影響之系統正陸續復原中，對公司整體營運及財務之影響程度尚不致有…</a:t>
+                        <a:t>本公司目前正積極會同技術專家協助調查，初步評估對公司營運暫無重大影響…</a:t>
                       </a:r>
                     </a:p>
                   </a:txBody>
                   <a:tcPr anchor="ctr" marL="73152" marT="9144" marB="9144">
                     <a:solidFill>
                       <a:srgbClr val="EEF2F9"/>
-                    </a:solidFill>
-                  </a:tcPr>
-                </a:tc>
-              </a:tr>
-              <a:tr h="356616">
-                <a:tc>
-                  <a:txBody>
-                    <a:bodyPr/>
-                    <a:lstStyle/>
-                    <a:p>
-                      <a:r>
-                        <a:rPr sz="1150" b="0">
-                          <a:solidFill>
-                            <a:srgbClr val="1A2233"/>
-                          </a:solidFill>
-                          <a:latin typeface="Microsoft JhengHei"/>
-                          <a:ea typeface="Microsoft JhengHei"/>
-                          <a:cs typeface="Microsoft JhengHei"/>
-                        </a:rPr>
-                        <a:t>杭特</a:t>
-                      </a:r>
-                    </a:p>
-                  </a:txBody>
-                  <a:tcPr anchor="ctr" marL="73152" marT="9144" marB="9144">
-                    <a:solidFill>
-                      <a:srgbClr val="FFFFFF"/>
-                    </a:solidFill>
-                  </a:tcPr>
-                </a:tc>
-                <a:tc>
-                  <a:txBody>
-                    <a:bodyPr/>
-                    <a:lstStyle/>
-                    <a:p>
-                      <a:r>
-                        <a:rPr sz="1150" b="0">
-                          <a:solidFill>
-                            <a:srgbClr val="1A2233"/>
-                          </a:solidFill>
-                          <a:latin typeface="Microsoft JhengHei"/>
-                          <a:ea typeface="Microsoft JhengHei"/>
-                          <a:cs typeface="Microsoft JhengHei"/>
-                        </a:rPr>
-                        <a:t>3297</a:t>
-                      </a:r>
-                    </a:p>
-                  </a:txBody>
-                  <a:tcPr anchor="ctr" marL="73152" marT="9144" marB="9144">
-                    <a:solidFill>
-                      <a:srgbClr val="FFFFFF"/>
-                    </a:solidFill>
-                  </a:tcPr>
-                </a:tc>
-                <a:tc>
-                  <a:txBody>
-                    <a:bodyPr/>
-                    <a:lstStyle/>
-                    <a:p>
-                      <a:r>
-                        <a:rPr sz="1150" b="0">
-                          <a:solidFill>
-                            <a:srgbClr val="1A2233"/>
-                          </a:solidFill>
-                          <a:latin typeface="Microsoft JhengHei"/>
-                          <a:ea typeface="Microsoft JhengHei"/>
-                          <a:cs typeface="Microsoft JhengHei"/>
-                        </a:rPr>
-                        <a:t>08/31</a:t>
-                      </a:r>
-                    </a:p>
-                  </a:txBody>
-                  <a:tcPr anchor="ctr" marL="73152" marT="9144" marB="9144">
-                    <a:solidFill>
-                      <a:srgbClr val="FFFFFF"/>
-                    </a:solidFill>
-                  </a:tcPr>
-                </a:tc>
-                <a:tc>
-                  <a:txBody>
-                    <a:bodyPr/>
-                    <a:lstStyle/>
-                    <a:p>
-                      <a:r>
-                        <a:rPr sz="1150" b="1">
-                          <a:solidFill>
-                            <a:srgbClr val="E63946"/>
-                          </a:solidFill>
-                          <a:latin typeface="Microsoft JhengHei"/>
-                          <a:ea typeface="Microsoft JhengHei"/>
-                          <a:cs typeface="Microsoft JhengHei"/>
-                        </a:rPr>
-                        <a:t>駭客攻擊</a:t>
-                      </a:r>
-                    </a:p>
-                  </a:txBody>
-                  <a:tcPr anchor="ctr" marL="73152" marT="9144" marB="9144">
-                    <a:solidFill>
-                      <a:srgbClr val="FFFFFF"/>
-                    </a:solidFill>
-                  </a:tcPr>
-                </a:tc>
-                <a:tc>
-                  <a:txBody>
-                    <a:bodyPr/>
-                    <a:lstStyle/>
-                    <a:p>
-                      <a:r>
-                        <a:rPr sz="1150" b="0">
-                          <a:solidFill>
-                            <a:srgbClr val="1A2233"/>
-                          </a:solidFill>
-                          <a:latin typeface="Microsoft JhengHei"/>
-                          <a:ea typeface="Microsoft JhengHei"/>
-                          <a:cs typeface="Microsoft JhengHei"/>
-                        </a:rPr>
-                        <a:t>本公司目前正積極會同技術專家協助調查，初步評估對公司營運暫無重大影響…</a:t>
-                      </a:r>
-                    </a:p>
-                  </a:txBody>
-                  <a:tcPr anchor="ctr" marL="73152" marT="9144" marB="9144">
-                    <a:solidFill>
-                      <a:srgbClr val="FFFFFF"/>
                     </a:solidFill>
                   </a:tcPr>
                 </a:tc>
@@ -5976,6 +6112,244 @@
           </a:p>
         </p:txBody>
       </p:sp>
+      <p:sp>
+        <p:nvSpPr>
+          <p:cNvPr id="18" name="Rounded Rectangle 17"/>
+          <p:cNvSpPr/>
+          <p:nvPr/>
+        </p:nvSpPr>
+        <p:spPr>
+          <a:xfrm>
+            <a:off x="5669280" y="4343400"/>
+            <a:ext cx="6035040" cy="1170432"/>
+          </a:xfrm>
+          <a:prstGeom prst="roundRect">
+            <a:avLst/>
+          </a:prstGeom>
+          <a:solidFill>
+            <a:srgbClr val="FFFFFF"/>
+          </a:solidFill>
+          <a:ln w="12700">
+            <a:solidFill>
+              <a:srgbClr val="DDE3EE"/>
+            </a:solidFill>
+          </a:ln>
+          <a:effectLst/>
+        </p:spPr>
+        <p:style>
+          <a:lnRef idx="1">
+            <a:schemeClr val="accent1"/>
+          </a:lnRef>
+          <a:fillRef idx="3">
+            <a:schemeClr val="accent1"/>
+          </a:fillRef>
+          <a:effectRef idx="2">
+            <a:schemeClr val="accent1"/>
+          </a:effectRef>
+          <a:fontRef idx="minor">
+            <a:schemeClr val="lt1"/>
+          </a:fontRef>
+        </p:style>
+        <p:txBody>
+          <a:bodyPr rtlCol="0" anchor="ctr"/>
+          <a:lstStyle/>
+          <a:p>
+            <a:pPr algn="ctr"/>
+          </a:p>
+        </p:txBody>
+      </p:sp>
+      <p:sp>
+        <p:nvSpPr>
+          <p:cNvPr id="19" name="Rectangle 18"/>
+          <p:cNvSpPr/>
+          <p:nvPr/>
+        </p:nvSpPr>
+        <p:spPr>
+          <a:xfrm>
+            <a:off x="5669280" y="4343400"/>
+            <a:ext cx="109728" cy="1170432"/>
+          </a:xfrm>
+          <a:prstGeom prst="rect">
+            <a:avLst/>
+          </a:prstGeom>
+          <a:solidFill>
+            <a:srgbClr val="27A6C4"/>
+          </a:solidFill>
+          <a:ln>
+            <a:noFill/>
+          </a:ln>
+          <a:effectLst/>
+        </p:spPr>
+        <p:style>
+          <a:lnRef idx="1">
+            <a:schemeClr val="accent1"/>
+          </a:lnRef>
+          <a:fillRef idx="3">
+            <a:schemeClr val="accent1"/>
+          </a:fillRef>
+          <a:effectRef idx="2">
+            <a:schemeClr val="accent1"/>
+          </a:effectRef>
+          <a:fontRef idx="minor">
+            <a:schemeClr val="lt1"/>
+          </a:fontRef>
+        </p:style>
+        <p:txBody>
+          <a:bodyPr rtlCol="0" anchor="ctr"/>
+          <a:lstStyle/>
+          <a:p>
+            <a:pPr algn="ctr"/>
+          </a:p>
+        </p:txBody>
+      </p:sp>
+      <p:sp>
+        <p:nvSpPr>
+          <p:cNvPr id="20" name="TextBox 19"/>
+          <p:cNvSpPr txBox="1"/>
+          <p:nvPr/>
+        </p:nvSpPr>
+        <p:spPr>
+          <a:xfrm>
+            <a:off x="5897880" y="4453128"/>
+            <a:ext cx="4206240" cy="365760"/>
+          </a:xfrm>
+          <a:prstGeom prst="rect">
+            <a:avLst/>
+          </a:prstGeom>
+          <a:noFill/>
+        </p:spPr>
+        <p:txBody>
+          <a:bodyPr wrap="square" anchor="ctr" lIns="0" rIns="0" tIns="0" bIns="0">
+            <a:spAutoFit/>
+          </a:bodyPr>
+          <a:lstStyle/>
+          <a:p>
+            <a:pPr algn="l"/>
+            <a:r>
+              <a:rPr sz="1600" b="1">
+                <a:solidFill>
+                  <a:srgbClr val="1A2233"/>
+                </a:solidFill>
+                <a:latin typeface="Microsoft JhengHei"/>
+                <a:ea typeface="Microsoft JhengHei"/>
+                <a:cs typeface="Microsoft JhengHei"/>
+              </a:rPr>
+              <a:t>個資外洩</a:t>
+            </a:r>
+          </a:p>
+        </p:txBody>
+      </p:sp>
+      <p:sp>
+        <p:nvSpPr>
+          <p:cNvPr id="21" name="TextBox 20"/>
+          <p:cNvSpPr txBox="1"/>
+          <p:nvPr/>
+        </p:nvSpPr>
+        <p:spPr>
+          <a:xfrm>
+            <a:off x="10058400" y="4453128"/>
+            <a:ext cx="1463040" cy="365760"/>
+          </a:xfrm>
+          <a:prstGeom prst="rect">
+            <a:avLst/>
+          </a:prstGeom>
+          <a:noFill/>
+        </p:spPr>
+        <p:txBody>
+          <a:bodyPr wrap="square" anchor="ctr" lIns="0" rIns="0" tIns="0" bIns="0">
+            <a:spAutoFit/>
+          </a:bodyPr>
+          <a:lstStyle/>
+          <a:p>
+            <a:pPr algn="r"/>
+            <a:r>
+              <a:rPr sz="1800" b="1">
+                <a:solidFill>
+                  <a:srgbClr val="27A6C4"/>
+                </a:solidFill>
+                <a:latin typeface="Microsoft JhengHei"/>
+                <a:ea typeface="Microsoft JhengHei"/>
+                <a:cs typeface="Microsoft JhengHei"/>
+              </a:rPr>
+              <a:t>1 起</a:t>
+            </a:r>
+          </a:p>
+        </p:txBody>
+      </p:sp>
+      <p:sp>
+        <p:nvSpPr>
+          <p:cNvPr id="22" name="TextBox 21"/>
+          <p:cNvSpPr txBox="1"/>
+          <p:nvPr/>
+        </p:nvSpPr>
+        <p:spPr>
+          <a:xfrm>
+            <a:off x="5897880" y="4846320"/>
+            <a:ext cx="5577840" cy="274320"/>
+          </a:xfrm>
+          <a:prstGeom prst="rect">
+            <a:avLst/>
+          </a:prstGeom>
+          <a:noFill/>
+        </p:spPr>
+        <p:txBody>
+          <a:bodyPr wrap="square" anchor="t" lIns="0" rIns="0" tIns="0" bIns="0">
+            <a:spAutoFit/>
+          </a:bodyPr>
+          <a:lstStyle/>
+          <a:p>
+            <a:pPr algn="l"/>
+            <a:r>
+              <a:rPr sz="1150" b="1">
+                <a:solidFill>
+                  <a:srgbClr val="1A2233"/>
+                </a:solidFill>
+                <a:latin typeface="Microsoft JhengHei"/>
+                <a:ea typeface="Microsoft JhengHei"/>
+                <a:cs typeface="Microsoft JhengHei"/>
+              </a:rPr>
+              <a:t>柏文</a:t>
+            </a:r>
+          </a:p>
+        </p:txBody>
+      </p:sp>
+      <p:sp>
+        <p:nvSpPr>
+          <p:cNvPr id="23" name="TextBox 22"/>
+          <p:cNvSpPr txBox="1"/>
+          <p:nvPr/>
+        </p:nvSpPr>
+        <p:spPr>
+          <a:xfrm>
+            <a:off x="5897880" y="5111496"/>
+            <a:ext cx="5669280" cy="329184"/>
+          </a:xfrm>
+          <a:prstGeom prst="rect">
+            <a:avLst/>
+          </a:prstGeom>
+          <a:noFill/>
+        </p:spPr>
+        <p:txBody>
+          <a:bodyPr wrap="square" anchor="t" lIns="0" rIns="0" tIns="0" bIns="0">
+            <a:spAutoFit/>
+          </a:bodyPr>
+          <a:lstStyle/>
+          <a:p>
+            <a:pPr algn="l"/>
+            <a:r>
+              <a:rPr sz="1100" b="0">
+                <a:solidFill>
+                  <a:srgbClr val="5C6679"/>
+                </a:solidFill>
+                <a:latin typeface="Microsoft JhengHei"/>
+                <a:ea typeface="Microsoft JhengHei"/>
+                <a:cs typeface="Microsoft JhengHei"/>
+              </a:rPr>
+              <a:t>源自開發流程或委外廠商，須通報並通知當事人</a:t>
+            </a:r>
+          </a:p>
+        </p:txBody>
+      </p:sp>
     </p:spTree>
   </p:cSld>
   <p:clrMapOvr>
@@ -6137,7 +6511,7 @@
                 <a:gridCol w="3383280"/>
                 <a:gridCol w="2606040"/>
               </a:tblGrid>
-              <a:tr h="448056">
+              <a:tr h="407323">
                 <a:tc>
                   <a:txBody>
                     <a:bodyPr/>
@@ -6259,7 +6633,7 @@
                   </a:tcPr>
                 </a:tc>
               </a:tr>
-              <a:tr h="448056">
+              <a:tr h="407323">
                 <a:tc>
                   <a:txBody>
                     <a:bodyPr/>
@@ -6274,7 +6648,7 @@
                           <a:ea typeface="Microsoft JhengHei"/>
                           <a:cs typeface="Microsoft JhengHei"/>
                         </a:rPr>
-                        <a:t>友訊</a:t>
+                        <a:t>柏文</a:t>
                       </a:r>
                     </a:p>
                   </a:txBody>
@@ -6298,7 +6672,251 @@
                           <a:ea typeface="Microsoft JhengHei"/>
                           <a:cs typeface="Microsoft JhengHei"/>
                         </a:rPr>
+                        <a:t>8462</a:t>
+                      </a:r>
+                    </a:p>
+                  </a:txBody>
+                  <a:tcPr anchor="ctr" marL="73152" marT="9144" marB="9144">
+                    <a:solidFill>
+                      <a:srgbClr val="FFFFFF"/>
+                    </a:solidFill>
+                  </a:tcPr>
+                </a:tc>
+                <a:tc>
+                  <a:txBody>
+                    <a:bodyPr/>
+                    <a:lstStyle/>
+                    <a:p>
+                      <a:r>
+                        <a:rPr sz="1150" b="1">
+                          <a:solidFill>
+                            <a:srgbClr val="27A6C4"/>
+                          </a:solidFill>
+                          <a:latin typeface="Microsoft JhengHei"/>
+                          <a:ea typeface="Microsoft JhengHei"/>
+                          <a:cs typeface="Microsoft JhengHei"/>
+                        </a:rPr>
+                        <a:t>個資外洩</a:t>
+                      </a:r>
+                    </a:p>
+                  </a:txBody>
+                  <a:tcPr anchor="ctr" marL="73152" marT="9144" marB="9144">
+                    <a:solidFill>
+                      <a:srgbClr val="FFFFFF"/>
+                    </a:solidFill>
+                  </a:tcPr>
+                </a:tc>
+                <a:tc>
+                  <a:txBody>
+                    <a:bodyPr/>
+                    <a:lstStyle/>
+                    <a:p>
+                      <a:r>
+                        <a:rPr sz="1150" b="0">
+                          <a:solidFill>
+                            <a:srgbClr val="1A2233"/>
+                          </a:solidFill>
+                          <a:latin typeface="Microsoft JhengHei"/>
+                          <a:ea typeface="Microsoft JhengHei"/>
+                          <a:cs typeface="Microsoft JhengHei"/>
+                        </a:rPr>
+                        <a:t>安永聯合會計師事務所</a:t>
+                      </a:r>
+                    </a:p>
+                  </a:txBody>
+                  <a:tcPr anchor="ctr" marL="73152" marT="9144" marB="9144">
+                    <a:solidFill>
+                      <a:srgbClr val="FFFFFF"/>
+                    </a:solidFill>
+                  </a:tcPr>
+                </a:tc>
+                <a:tc>
+                  <a:txBody>
+                    <a:bodyPr/>
+                    <a:lstStyle/>
+                    <a:p>
+                      <a:r>
+                        <a:rPr sz="1150" b="0">
+                          <a:solidFill>
+                            <a:srgbClr val="1A2233"/>
+                          </a:solidFill>
+                          <a:latin typeface="Microsoft JhengHei"/>
+                          <a:ea typeface="Microsoft JhengHei"/>
+                          <a:cs typeface="Microsoft JhengHei"/>
+                        </a:rPr>
+                        <a:t>陳政初、洪國森</a:t>
+                      </a:r>
+                    </a:p>
+                  </a:txBody>
+                  <a:tcPr anchor="ctr" marL="73152" marT="9144" marB="9144">
+                    <a:solidFill>
+                      <a:srgbClr val="FFFFFF"/>
+                    </a:solidFill>
+                  </a:tcPr>
+                </a:tc>
+              </a:tr>
+              <a:tr h="407323">
+                <a:tc>
+                  <a:txBody>
+                    <a:bodyPr/>
+                    <a:lstStyle/>
+                    <a:p>
+                      <a:r>
+                        <a:rPr sz="1150" b="0">
+                          <a:solidFill>
+                            <a:srgbClr val="1A2233"/>
+                          </a:solidFill>
+                          <a:latin typeface="Microsoft JhengHei"/>
+                          <a:ea typeface="Microsoft JhengHei"/>
+                          <a:cs typeface="Microsoft JhengHei"/>
+                        </a:rPr>
+                        <a:t>友訊</a:t>
+                      </a:r>
+                    </a:p>
+                  </a:txBody>
+                  <a:tcPr anchor="ctr" marL="73152" marT="9144" marB="9144">
+                    <a:solidFill>
+                      <a:srgbClr val="EEF2F9"/>
+                    </a:solidFill>
+                  </a:tcPr>
+                </a:tc>
+                <a:tc>
+                  <a:txBody>
+                    <a:bodyPr/>
+                    <a:lstStyle/>
+                    <a:p>
+                      <a:r>
+                        <a:rPr sz="1150" b="0">
+                          <a:solidFill>
+                            <a:srgbClr val="1A2233"/>
+                          </a:solidFill>
+                          <a:latin typeface="Microsoft JhengHei"/>
+                          <a:ea typeface="Microsoft JhengHei"/>
+                          <a:cs typeface="Microsoft JhengHei"/>
+                        </a:rPr>
                         <a:t>2332</a:t>
+                      </a:r>
+                    </a:p>
+                  </a:txBody>
+                  <a:tcPr anchor="ctr" marL="73152" marT="9144" marB="9144">
+                    <a:solidFill>
+                      <a:srgbClr val="EEF2F9"/>
+                    </a:solidFill>
+                  </a:tcPr>
+                </a:tc>
+                <a:tc>
+                  <a:txBody>
+                    <a:bodyPr/>
+                    <a:lstStyle/>
+                    <a:p>
+                      <a:r>
+                        <a:rPr sz="1150" b="1">
+                          <a:solidFill>
+                            <a:srgbClr val="E63946"/>
+                          </a:solidFill>
+                          <a:latin typeface="Microsoft JhengHei"/>
+                          <a:ea typeface="Microsoft JhengHei"/>
+                          <a:cs typeface="Microsoft JhengHei"/>
+                        </a:rPr>
+                        <a:t>駭客攻擊</a:t>
+                      </a:r>
+                    </a:p>
+                  </a:txBody>
+                  <a:tcPr anchor="ctr" marL="73152" marT="9144" marB="9144">
+                    <a:solidFill>
+                      <a:srgbClr val="EEF2F9"/>
+                    </a:solidFill>
+                  </a:tcPr>
+                </a:tc>
+                <a:tc>
+                  <a:txBody>
+                    <a:bodyPr/>
+                    <a:lstStyle/>
+                    <a:p>
+                      <a:r>
+                        <a:rPr sz="1150" b="0">
+                          <a:solidFill>
+                            <a:srgbClr val="1A2233"/>
+                          </a:solidFill>
+                          <a:latin typeface="Microsoft JhengHei"/>
+                          <a:ea typeface="Microsoft JhengHei"/>
+                          <a:cs typeface="Microsoft JhengHei"/>
+                        </a:rPr>
+                        <a:t>安侯建業聯合會計師事務所</a:t>
+                      </a:r>
+                    </a:p>
+                  </a:txBody>
+                  <a:tcPr anchor="ctr" marL="73152" marT="9144" marB="9144">
+                    <a:solidFill>
+                      <a:srgbClr val="EEF2F9"/>
+                    </a:solidFill>
+                  </a:tcPr>
+                </a:tc>
+                <a:tc>
+                  <a:txBody>
+                    <a:bodyPr/>
+                    <a:lstStyle/>
+                    <a:p>
+                      <a:r>
+                        <a:rPr sz="1150" b="0">
+                          <a:solidFill>
+                            <a:srgbClr val="1A2233"/>
+                          </a:solidFill>
+                          <a:latin typeface="Microsoft JhengHei"/>
+                          <a:ea typeface="Microsoft JhengHei"/>
+                          <a:cs typeface="Microsoft JhengHei"/>
+                        </a:rPr>
+                        <a:t>梅元貞、謝秋華</a:t>
+                      </a:r>
+                    </a:p>
+                  </a:txBody>
+                  <a:tcPr anchor="ctr" marL="73152" marT="9144" marB="9144">
+                    <a:solidFill>
+                      <a:srgbClr val="EEF2F9"/>
+                    </a:solidFill>
+                  </a:tcPr>
+                </a:tc>
+              </a:tr>
+              <a:tr h="407323">
+                <a:tc>
+                  <a:txBody>
+                    <a:bodyPr/>
+                    <a:lstStyle/>
+                    <a:p>
+                      <a:r>
+                        <a:rPr sz="1150" b="0">
+                          <a:solidFill>
+                            <a:srgbClr val="1A2233"/>
+                          </a:solidFill>
+                          <a:latin typeface="Microsoft JhengHei"/>
+                          <a:ea typeface="Microsoft JhengHei"/>
+                          <a:cs typeface="Microsoft JhengHei"/>
+                        </a:rPr>
+                        <a:t>長榮航</a:t>
+                      </a:r>
+                    </a:p>
+                  </a:txBody>
+                  <a:tcPr anchor="ctr" marL="73152" marT="9144" marB="9144">
+                    <a:solidFill>
+                      <a:srgbClr val="FFFFFF"/>
+                    </a:solidFill>
+                  </a:tcPr>
+                </a:tc>
+                <a:tc>
+                  <a:txBody>
+                    <a:bodyPr/>
+                    <a:lstStyle/>
+                    <a:p>
+                      <a:r>
+                        <a:rPr sz="1150" b="0">
+                          <a:solidFill>
+                            <a:srgbClr val="1A2233"/>
+                          </a:solidFill>
+                          <a:latin typeface="Microsoft JhengHei"/>
+                          <a:ea typeface="Microsoft JhengHei"/>
+                          <a:cs typeface="Microsoft JhengHei"/>
+                        </a:rPr>
+                        <a:t>2618</a:t>
                       </a:r>
                     </a:p>
                   </a:txBody>
@@ -6370,7 +6988,7 @@
                           <a:ea typeface="Microsoft JhengHei"/>
                           <a:cs typeface="Microsoft JhengHei"/>
                         </a:rPr>
-                        <a:t>梅元貞、謝秋華</a:t>
+                        <a:t>陳雅琳、楊雲筑</a:t>
                       </a:r>
                     </a:p>
                   </a:txBody>
@@ -6381,7 +6999,7 @@
                   </a:tcPr>
                 </a:tc>
               </a:tr>
-              <a:tr h="448056">
+              <a:tr h="407323">
                 <a:tc>
                   <a:txBody>
                     <a:bodyPr/>
@@ -6396,7 +7014,7 @@
                           <a:ea typeface="Microsoft JhengHei"/>
                           <a:cs typeface="Microsoft JhengHei"/>
                         </a:rPr>
-                        <a:t>長榮航</a:t>
+                        <a:t>長榮航太</a:t>
                       </a:r>
                     </a:p>
                   </a:txBody>
@@ -6420,7 +7038,7 @@
                           <a:ea typeface="Microsoft JhengHei"/>
                           <a:cs typeface="Microsoft JhengHei"/>
                         </a:rPr>
-                        <a:t>2618</a:t>
+                        <a:t>2645</a:t>
                       </a:r>
                     </a:p>
                   </a:txBody>
@@ -6492,7 +7110,7 @@
                           <a:ea typeface="Microsoft JhengHei"/>
                           <a:cs typeface="Microsoft JhengHei"/>
                         </a:rPr>
-                        <a:t>陳雅琳、楊雲筑</a:t>
+                        <a:t>陳雅琳、鄭博仁</a:t>
                       </a:r>
                     </a:p>
                   </a:txBody>
@@ -6503,7 +7121,7 @@
                   </a:tcPr>
                 </a:tc>
               </a:tr>
-              <a:tr h="448056">
+              <a:tr h="407323">
                 <a:tc>
                   <a:txBody>
                     <a:bodyPr/>
@@ -6518,7 +7136,7 @@
                           <a:ea typeface="Microsoft JhengHei"/>
                           <a:cs typeface="Microsoft JhengHei"/>
                         </a:rPr>
-                        <a:t>長榮航太</a:t>
+                        <a:t>崴寶</a:t>
                       </a:r>
                     </a:p>
                   </a:txBody>
@@ -6542,7 +7160,251 @@
                           <a:ea typeface="Microsoft JhengHei"/>
                           <a:cs typeface="Microsoft JhengHei"/>
                         </a:rPr>
-                        <a:t>2645</a:t>
+                        <a:t>7744</a:t>
+                      </a:r>
+                    </a:p>
+                  </a:txBody>
+                  <a:tcPr anchor="ctr" marL="73152" marT="9144" marB="9144">
+                    <a:solidFill>
+                      <a:srgbClr val="FFFFFF"/>
+                    </a:solidFill>
+                  </a:tcPr>
+                </a:tc>
+                <a:tc>
+                  <a:txBody>
+                    <a:bodyPr/>
+                    <a:lstStyle/>
+                    <a:p>
+                      <a:r>
+                        <a:rPr sz="1150" b="1">
+                          <a:solidFill>
+                            <a:srgbClr val="F4A261"/>
+                          </a:solidFill>
+                          <a:latin typeface="Microsoft JhengHei"/>
+                          <a:ea typeface="Microsoft JhengHei"/>
+                          <a:cs typeface="Microsoft JhengHei"/>
+                        </a:rPr>
+                        <a:t>勒索病毒/加密</a:t>
+                      </a:r>
+                    </a:p>
+                  </a:txBody>
+                  <a:tcPr anchor="ctr" marL="73152" marT="9144" marB="9144">
+                    <a:solidFill>
+                      <a:srgbClr val="FFFFFF"/>
+                    </a:solidFill>
+                  </a:tcPr>
+                </a:tc>
+                <a:tc>
+                  <a:txBody>
+                    <a:bodyPr/>
+                    <a:lstStyle/>
+                    <a:p>
+                      <a:r>
+                        <a:rPr sz="1150" b="0">
+                          <a:solidFill>
+                            <a:srgbClr val="1A2233"/>
+                          </a:solidFill>
+                          <a:latin typeface="Microsoft JhengHei"/>
+                          <a:ea typeface="Microsoft JhengHei"/>
+                          <a:cs typeface="Microsoft JhengHei"/>
+                        </a:rPr>
+                        <a:t>安永聯合會計師事務所</a:t>
+                      </a:r>
+                    </a:p>
+                  </a:txBody>
+                  <a:tcPr anchor="ctr" marL="73152" marT="9144" marB="9144">
+                    <a:solidFill>
+                      <a:srgbClr val="FFFFFF"/>
+                    </a:solidFill>
+                  </a:tcPr>
+                </a:tc>
+                <a:tc>
+                  <a:txBody>
+                    <a:bodyPr/>
+                    <a:lstStyle/>
+                    <a:p>
+                      <a:r>
+                        <a:rPr sz="1150" b="0">
+                          <a:solidFill>
+                            <a:srgbClr val="1A2233"/>
+                          </a:solidFill>
+                          <a:latin typeface="Microsoft JhengHei"/>
+                          <a:ea typeface="Microsoft JhengHei"/>
+                          <a:cs typeface="Microsoft JhengHei"/>
+                        </a:rPr>
+                        <a:t>黃宇廷、黃子評</a:t>
+                      </a:r>
+                    </a:p>
+                  </a:txBody>
+                  <a:tcPr anchor="ctr" marL="73152" marT="9144" marB="9144">
+                    <a:solidFill>
+                      <a:srgbClr val="FFFFFF"/>
+                    </a:solidFill>
+                  </a:tcPr>
+                </a:tc>
+              </a:tr>
+              <a:tr h="407323">
+                <a:tc>
+                  <a:txBody>
+                    <a:bodyPr/>
+                    <a:lstStyle/>
+                    <a:p>
+                      <a:r>
+                        <a:rPr sz="1150" b="0">
+                          <a:solidFill>
+                            <a:srgbClr val="1A2233"/>
+                          </a:solidFill>
+                          <a:latin typeface="Microsoft JhengHei"/>
+                          <a:ea typeface="Microsoft JhengHei"/>
+                          <a:cs typeface="Microsoft JhengHei"/>
+                        </a:rPr>
+                        <a:t>達爾膚</a:t>
+                      </a:r>
+                    </a:p>
+                  </a:txBody>
+                  <a:tcPr anchor="ctr" marL="73152" marT="9144" marB="9144">
+                    <a:solidFill>
+                      <a:srgbClr val="EEF2F9"/>
+                    </a:solidFill>
+                  </a:tcPr>
+                </a:tc>
+                <a:tc>
+                  <a:txBody>
+                    <a:bodyPr/>
+                    <a:lstStyle/>
+                    <a:p>
+                      <a:r>
+                        <a:rPr sz="1150" b="0">
+                          <a:solidFill>
+                            <a:srgbClr val="1A2233"/>
+                          </a:solidFill>
+                          <a:latin typeface="Microsoft JhengHei"/>
+                          <a:ea typeface="Microsoft JhengHei"/>
+                          <a:cs typeface="Microsoft JhengHei"/>
+                        </a:rPr>
+                        <a:t>6523</a:t>
+                      </a:r>
+                    </a:p>
+                  </a:txBody>
+                  <a:tcPr anchor="ctr" marL="73152" marT="9144" marB="9144">
+                    <a:solidFill>
+                      <a:srgbClr val="EEF2F9"/>
+                    </a:solidFill>
+                  </a:tcPr>
+                </a:tc>
+                <a:tc>
+                  <a:txBody>
+                    <a:bodyPr/>
+                    <a:lstStyle/>
+                    <a:p>
+                      <a:r>
+                        <a:rPr sz="1150" b="1">
+                          <a:solidFill>
+                            <a:srgbClr val="E63946"/>
+                          </a:solidFill>
+                          <a:latin typeface="Microsoft JhengHei"/>
+                          <a:ea typeface="Microsoft JhengHei"/>
+                          <a:cs typeface="Microsoft JhengHei"/>
+                        </a:rPr>
+                        <a:t>駭客攻擊</a:t>
+                      </a:r>
+                    </a:p>
+                  </a:txBody>
+                  <a:tcPr anchor="ctr" marL="73152" marT="9144" marB="9144">
+                    <a:solidFill>
+                      <a:srgbClr val="EEF2F9"/>
+                    </a:solidFill>
+                  </a:tcPr>
+                </a:tc>
+                <a:tc>
+                  <a:txBody>
+                    <a:bodyPr/>
+                    <a:lstStyle/>
+                    <a:p>
+                      <a:r>
+                        <a:rPr sz="1150" b="0">
+                          <a:solidFill>
+                            <a:srgbClr val="1A2233"/>
+                          </a:solidFill>
+                          <a:latin typeface="Microsoft JhengHei"/>
+                          <a:ea typeface="Microsoft JhengHei"/>
+                          <a:cs typeface="Microsoft JhengHei"/>
+                        </a:rPr>
+                        <a:t>資誠聯合會計師事務所</a:t>
+                      </a:r>
+                    </a:p>
+                  </a:txBody>
+                  <a:tcPr anchor="ctr" marL="73152" marT="9144" marB="9144">
+                    <a:solidFill>
+                      <a:srgbClr val="EEF2F9"/>
+                    </a:solidFill>
+                  </a:tcPr>
+                </a:tc>
+                <a:tc>
+                  <a:txBody>
+                    <a:bodyPr/>
+                    <a:lstStyle/>
+                    <a:p>
+                      <a:r>
+                        <a:rPr sz="1150" b="0">
+                          <a:solidFill>
+                            <a:srgbClr val="1A2233"/>
+                          </a:solidFill>
+                          <a:latin typeface="Microsoft JhengHei"/>
+                          <a:ea typeface="Microsoft JhengHei"/>
+                          <a:cs typeface="Microsoft JhengHei"/>
+                        </a:rPr>
+                        <a:t>于智帆、葉翠苗</a:t>
+                      </a:r>
+                    </a:p>
+                  </a:txBody>
+                  <a:tcPr anchor="ctr" marL="73152" marT="9144" marB="9144">
+                    <a:solidFill>
+                      <a:srgbClr val="EEF2F9"/>
+                    </a:solidFill>
+                  </a:tcPr>
+                </a:tc>
+              </a:tr>
+              <a:tr h="407323">
+                <a:tc>
+                  <a:txBody>
+                    <a:bodyPr/>
+                    <a:lstStyle/>
+                    <a:p>
+                      <a:r>
+                        <a:rPr sz="1150" b="0">
+                          <a:solidFill>
+                            <a:srgbClr val="1A2233"/>
+                          </a:solidFill>
+                          <a:latin typeface="Microsoft JhengHei"/>
+                          <a:ea typeface="Microsoft JhengHei"/>
+                          <a:cs typeface="Microsoft JhengHei"/>
+                        </a:rPr>
+                        <a:t>大車隊</a:t>
+                      </a:r>
+                    </a:p>
+                  </a:txBody>
+                  <a:tcPr anchor="ctr" marL="73152" marT="9144" marB="9144">
+                    <a:solidFill>
+                      <a:srgbClr val="FFFFFF"/>
+                    </a:solidFill>
+                  </a:tcPr>
+                </a:tc>
+                <a:tc>
+                  <a:txBody>
+                    <a:bodyPr/>
+                    <a:lstStyle/>
+                    <a:p>
+                      <a:r>
+                        <a:rPr sz="1150" b="0">
+                          <a:solidFill>
+                            <a:srgbClr val="1A2233"/>
+                          </a:solidFill>
+                          <a:latin typeface="Microsoft JhengHei"/>
+                          <a:ea typeface="Microsoft JhengHei"/>
+                          <a:cs typeface="Microsoft JhengHei"/>
+                        </a:rPr>
+                        <a:t>2640</a:t>
                       </a:r>
                     </a:p>
                   </a:txBody>
@@ -6590,7 +7452,7 @@
                           <a:ea typeface="Microsoft JhengHei"/>
                           <a:cs typeface="Microsoft JhengHei"/>
                         </a:rPr>
-                        <a:t>安侯建業聯合會計師事務所</a:t>
+                        <a:t>資誠聯合會計師事務所</a:t>
                       </a:r>
                     </a:p>
                   </a:txBody>
@@ -6614,7 +7476,7 @@
                           <a:ea typeface="Microsoft JhengHei"/>
                           <a:cs typeface="Microsoft JhengHei"/>
                         </a:rPr>
-                        <a:t>陳雅琳、鄭博仁</a:t>
+                        <a:t>支秉鈞、涂展源</a:t>
                       </a:r>
                     </a:p>
                   </a:txBody>
@@ -6625,7 +7487,7 @@
                   </a:tcPr>
                 </a:tc>
               </a:tr>
-              <a:tr h="448056">
+              <a:tr h="407323">
                 <a:tc>
                   <a:txBody>
                     <a:bodyPr/>
@@ -6640,7 +7502,7 @@
                           <a:ea typeface="Microsoft JhengHei"/>
                           <a:cs typeface="Microsoft JhengHei"/>
                         </a:rPr>
-                        <a:t>崴寶</a:t>
+                        <a:t>富爾特</a:t>
                       </a:r>
                     </a:p>
                   </a:txBody>
@@ -6664,7 +7526,7 @@
                           <a:ea typeface="Microsoft JhengHei"/>
                           <a:cs typeface="Microsoft JhengHei"/>
                         </a:rPr>
-                        <a:t>7744</a:t>
+                        <a:t>6136</a:t>
                       </a:r>
                     </a:p>
                   </a:txBody>
@@ -6736,7 +7598,7 @@
                           <a:ea typeface="Microsoft JhengHei"/>
                           <a:cs typeface="Microsoft JhengHei"/>
                         </a:rPr>
-                        <a:t>黃宇廷、黃子評</a:t>
+                        <a:t>許新民、余倩如</a:t>
                       </a:r>
                     </a:p>
                   </a:txBody>
@@ -6747,7 +7609,7 @@
                   </a:tcPr>
                 </a:tc>
               </a:tr>
-              <a:tr h="448056">
+              <a:tr h="407323">
                 <a:tc>
                   <a:txBody>
                     <a:bodyPr/>
@@ -6762,7 +7624,7 @@
                           <a:ea typeface="Microsoft JhengHei"/>
                           <a:cs typeface="Microsoft JhengHei"/>
                         </a:rPr>
-                        <a:t>達爾膚</a:t>
+                        <a:t>創新服務</a:t>
                       </a:r>
                     </a:p>
                   </a:txBody>
@@ -6786,7 +7648,7 @@
                           <a:ea typeface="Microsoft JhengHei"/>
                           <a:cs typeface="Microsoft JhengHei"/>
                         </a:rPr>
-                        <a:t>6523</a:t>
+                        <a:t>7828</a:t>
                       </a:r>
                     </a:p>
                   </a:txBody>
@@ -6804,13 +7666,13 @@
                       <a:r>
                         <a:rPr sz="1150" b="1">
                           <a:solidFill>
-                            <a:srgbClr val="E63946"/>
+                            <a:srgbClr val="F4A261"/>
                           </a:solidFill>
                           <a:latin typeface="Microsoft JhengHei"/>
                           <a:ea typeface="Microsoft JhengHei"/>
                           <a:cs typeface="Microsoft JhengHei"/>
                         </a:rPr>
-                        <a:t>駭客攻擊</a:t>
+                        <a:t>勒索病毒/加密</a:t>
                       </a:r>
                     </a:p>
                   </a:txBody>
@@ -6858,7 +7720,7 @@
                           <a:ea typeface="Microsoft JhengHei"/>
                           <a:cs typeface="Microsoft JhengHei"/>
                         </a:rPr>
-                        <a:t>于智帆、葉翠苗</a:t>
+                        <a:t>蔡欣怡、白淑蒨</a:t>
                       </a:r>
                     </a:p>
                   </a:txBody>
@@ -6869,7 +7731,7 @@
                   </a:tcPr>
                 </a:tc>
               </a:tr>
-              <a:tr h="448056">
+              <a:tr h="407330">
                 <a:tc>
                   <a:txBody>
                     <a:bodyPr/>
@@ -6884,7 +7746,7 @@
                           <a:ea typeface="Microsoft JhengHei"/>
                           <a:cs typeface="Microsoft JhengHei"/>
                         </a:rPr>
-                        <a:t>大車隊</a:t>
+                        <a:t>杭特</a:t>
                       </a:r>
                     </a:p>
                   </a:txBody>
@@ -6908,7 +7770,7 @@
                           <a:ea typeface="Microsoft JhengHei"/>
                           <a:cs typeface="Microsoft JhengHei"/>
                         </a:rPr>
-                        <a:t>2640</a:t>
+                        <a:t>3297</a:t>
                       </a:r>
                     </a:p>
                   </a:txBody>
@@ -6980,379 +7842,13 @@
                           <a:ea typeface="Microsoft JhengHei"/>
                           <a:cs typeface="Microsoft JhengHei"/>
                         </a:rPr>
-                        <a:t>支秉鈞、涂展源</a:t>
+                        <a:t>陳憲正、林瑟凱</a:t>
                       </a:r>
                     </a:p>
                   </a:txBody>
                   <a:tcPr anchor="ctr" marL="73152" marT="9144" marB="9144">
                     <a:solidFill>
                       <a:srgbClr val="EEF2F9"/>
-                    </a:solidFill>
-                  </a:tcPr>
-                </a:tc>
-              </a:tr>
-              <a:tr h="448056">
-                <a:tc>
-                  <a:txBody>
-                    <a:bodyPr/>
-                    <a:lstStyle/>
-                    <a:p>
-                      <a:r>
-                        <a:rPr sz="1150" b="0">
-                          <a:solidFill>
-                            <a:srgbClr val="1A2233"/>
-                          </a:solidFill>
-                          <a:latin typeface="Microsoft JhengHei"/>
-                          <a:ea typeface="Microsoft JhengHei"/>
-                          <a:cs typeface="Microsoft JhengHei"/>
-                        </a:rPr>
-                        <a:t>富爾特</a:t>
-                      </a:r>
-                    </a:p>
-                  </a:txBody>
-                  <a:tcPr anchor="ctr" marL="73152" marT="9144" marB="9144">
-                    <a:solidFill>
-                      <a:srgbClr val="FFFFFF"/>
-                    </a:solidFill>
-                  </a:tcPr>
-                </a:tc>
-                <a:tc>
-                  <a:txBody>
-                    <a:bodyPr/>
-                    <a:lstStyle/>
-                    <a:p>
-                      <a:r>
-                        <a:rPr sz="1150" b="0">
-                          <a:solidFill>
-                            <a:srgbClr val="1A2233"/>
-                          </a:solidFill>
-                          <a:latin typeface="Microsoft JhengHei"/>
-                          <a:ea typeface="Microsoft JhengHei"/>
-                          <a:cs typeface="Microsoft JhengHei"/>
-                        </a:rPr>
-                        <a:t>6136</a:t>
-                      </a:r>
-                    </a:p>
-                  </a:txBody>
-                  <a:tcPr anchor="ctr" marL="73152" marT="9144" marB="9144">
-                    <a:solidFill>
-                      <a:srgbClr val="FFFFFF"/>
-                    </a:solidFill>
-                  </a:tcPr>
-                </a:tc>
-                <a:tc>
-                  <a:txBody>
-                    <a:bodyPr/>
-                    <a:lstStyle/>
-                    <a:p>
-                      <a:r>
-                        <a:rPr sz="1150" b="1">
-                          <a:solidFill>
-                            <a:srgbClr val="F4A261"/>
-                          </a:solidFill>
-                          <a:latin typeface="Microsoft JhengHei"/>
-                          <a:ea typeface="Microsoft JhengHei"/>
-                          <a:cs typeface="Microsoft JhengHei"/>
-                        </a:rPr>
-                        <a:t>勒索病毒/加密</a:t>
-                      </a:r>
-                    </a:p>
-                  </a:txBody>
-                  <a:tcPr anchor="ctr" marL="73152" marT="9144" marB="9144">
-                    <a:solidFill>
-                      <a:srgbClr val="FFFFFF"/>
-                    </a:solidFill>
-                  </a:tcPr>
-                </a:tc>
-                <a:tc>
-                  <a:txBody>
-                    <a:bodyPr/>
-                    <a:lstStyle/>
-                    <a:p>
-                      <a:r>
-                        <a:rPr sz="1150" b="0">
-                          <a:solidFill>
-                            <a:srgbClr val="1A2233"/>
-                          </a:solidFill>
-                          <a:latin typeface="Microsoft JhengHei"/>
-                          <a:ea typeface="Microsoft JhengHei"/>
-                          <a:cs typeface="Microsoft JhengHei"/>
-                        </a:rPr>
-                        <a:t>安永聯合會計師事務所</a:t>
-                      </a:r>
-                    </a:p>
-                  </a:txBody>
-                  <a:tcPr anchor="ctr" marL="73152" marT="9144" marB="9144">
-                    <a:solidFill>
-                      <a:srgbClr val="FFFFFF"/>
-                    </a:solidFill>
-                  </a:tcPr>
-                </a:tc>
-                <a:tc>
-                  <a:txBody>
-                    <a:bodyPr/>
-                    <a:lstStyle/>
-                    <a:p>
-                      <a:r>
-                        <a:rPr sz="1150" b="0">
-                          <a:solidFill>
-                            <a:srgbClr val="1A2233"/>
-                          </a:solidFill>
-                          <a:latin typeface="Microsoft JhengHei"/>
-                          <a:ea typeface="Microsoft JhengHei"/>
-                          <a:cs typeface="Microsoft JhengHei"/>
-                        </a:rPr>
-                        <a:t>許新民、余倩如</a:t>
-                      </a:r>
-                    </a:p>
-                  </a:txBody>
-                  <a:tcPr anchor="ctr" marL="73152" marT="9144" marB="9144">
-                    <a:solidFill>
-                      <a:srgbClr val="FFFFFF"/>
-                    </a:solidFill>
-                  </a:tcPr>
-                </a:tc>
-              </a:tr>
-              <a:tr h="448056">
-                <a:tc>
-                  <a:txBody>
-                    <a:bodyPr/>
-                    <a:lstStyle/>
-                    <a:p>
-                      <a:r>
-                        <a:rPr sz="1150" b="0">
-                          <a:solidFill>
-                            <a:srgbClr val="1A2233"/>
-                          </a:solidFill>
-                          <a:latin typeface="Microsoft JhengHei"/>
-                          <a:ea typeface="Microsoft JhengHei"/>
-                          <a:cs typeface="Microsoft JhengHei"/>
-                        </a:rPr>
-                        <a:t>創新服務</a:t>
-                      </a:r>
-                    </a:p>
-                  </a:txBody>
-                  <a:tcPr anchor="ctr" marL="73152" marT="9144" marB="9144">
-                    <a:solidFill>
-                      <a:srgbClr val="EEF2F9"/>
-                    </a:solidFill>
-                  </a:tcPr>
-                </a:tc>
-                <a:tc>
-                  <a:txBody>
-                    <a:bodyPr/>
-                    <a:lstStyle/>
-                    <a:p>
-                      <a:r>
-                        <a:rPr sz="1150" b="0">
-                          <a:solidFill>
-                            <a:srgbClr val="1A2233"/>
-                          </a:solidFill>
-                          <a:latin typeface="Microsoft JhengHei"/>
-                          <a:ea typeface="Microsoft JhengHei"/>
-                          <a:cs typeface="Microsoft JhengHei"/>
-                        </a:rPr>
-                        <a:t>7828</a:t>
-                      </a:r>
-                    </a:p>
-                  </a:txBody>
-                  <a:tcPr anchor="ctr" marL="73152" marT="9144" marB="9144">
-                    <a:solidFill>
-                      <a:srgbClr val="EEF2F9"/>
-                    </a:solidFill>
-                  </a:tcPr>
-                </a:tc>
-                <a:tc>
-                  <a:txBody>
-                    <a:bodyPr/>
-                    <a:lstStyle/>
-                    <a:p>
-                      <a:r>
-                        <a:rPr sz="1150" b="1">
-                          <a:solidFill>
-                            <a:srgbClr val="F4A261"/>
-                          </a:solidFill>
-                          <a:latin typeface="Microsoft JhengHei"/>
-                          <a:ea typeface="Microsoft JhengHei"/>
-                          <a:cs typeface="Microsoft JhengHei"/>
-                        </a:rPr>
-                        <a:t>勒索病毒/加密</a:t>
-                      </a:r>
-                    </a:p>
-                  </a:txBody>
-                  <a:tcPr anchor="ctr" marL="73152" marT="9144" marB="9144">
-                    <a:solidFill>
-                      <a:srgbClr val="EEF2F9"/>
-                    </a:solidFill>
-                  </a:tcPr>
-                </a:tc>
-                <a:tc>
-                  <a:txBody>
-                    <a:bodyPr/>
-                    <a:lstStyle/>
-                    <a:p>
-                      <a:r>
-                        <a:rPr sz="1150" b="0">
-                          <a:solidFill>
-                            <a:srgbClr val="1A2233"/>
-                          </a:solidFill>
-                          <a:latin typeface="Microsoft JhengHei"/>
-                          <a:ea typeface="Microsoft JhengHei"/>
-                          <a:cs typeface="Microsoft JhengHei"/>
-                        </a:rPr>
-                        <a:t>資誠聯合會計師事務所</a:t>
-                      </a:r>
-                    </a:p>
-                  </a:txBody>
-                  <a:tcPr anchor="ctr" marL="73152" marT="9144" marB="9144">
-                    <a:solidFill>
-                      <a:srgbClr val="EEF2F9"/>
-                    </a:solidFill>
-                  </a:tcPr>
-                </a:tc>
-                <a:tc>
-                  <a:txBody>
-                    <a:bodyPr/>
-                    <a:lstStyle/>
-                    <a:p>
-                      <a:r>
-                        <a:rPr sz="1150" b="0">
-                          <a:solidFill>
-                            <a:srgbClr val="1A2233"/>
-                          </a:solidFill>
-                          <a:latin typeface="Microsoft JhengHei"/>
-                          <a:ea typeface="Microsoft JhengHei"/>
-                          <a:cs typeface="Microsoft JhengHei"/>
-                        </a:rPr>
-                        <a:t>蔡欣怡、白淑蒨</a:t>
-                      </a:r>
-                    </a:p>
-                  </a:txBody>
-                  <a:tcPr anchor="ctr" marL="73152" marT="9144" marB="9144">
-                    <a:solidFill>
-                      <a:srgbClr val="EEF2F9"/>
-                    </a:solidFill>
-                  </a:tcPr>
-                </a:tc>
-              </a:tr>
-              <a:tr h="448056">
-                <a:tc>
-                  <a:txBody>
-                    <a:bodyPr/>
-                    <a:lstStyle/>
-                    <a:p>
-                      <a:r>
-                        <a:rPr sz="1150" b="0">
-                          <a:solidFill>
-                            <a:srgbClr val="1A2233"/>
-                          </a:solidFill>
-                          <a:latin typeface="Microsoft JhengHei"/>
-                          <a:ea typeface="Microsoft JhengHei"/>
-                          <a:cs typeface="Microsoft JhengHei"/>
-                        </a:rPr>
-                        <a:t>杭特</a:t>
-                      </a:r>
-                    </a:p>
-                  </a:txBody>
-                  <a:tcPr anchor="ctr" marL="73152" marT="9144" marB="9144">
-                    <a:solidFill>
-                      <a:srgbClr val="FFFFFF"/>
-                    </a:solidFill>
-                  </a:tcPr>
-                </a:tc>
-                <a:tc>
-                  <a:txBody>
-                    <a:bodyPr/>
-                    <a:lstStyle/>
-                    <a:p>
-                      <a:r>
-                        <a:rPr sz="1150" b="0">
-                          <a:solidFill>
-                            <a:srgbClr val="1A2233"/>
-                          </a:solidFill>
-                          <a:latin typeface="Microsoft JhengHei"/>
-                          <a:ea typeface="Microsoft JhengHei"/>
-                          <a:cs typeface="Microsoft JhengHei"/>
-                        </a:rPr>
-                        <a:t>3297</a:t>
-                      </a:r>
-                    </a:p>
-                  </a:txBody>
-                  <a:tcPr anchor="ctr" marL="73152" marT="9144" marB="9144">
-                    <a:solidFill>
-                      <a:srgbClr val="FFFFFF"/>
-                    </a:solidFill>
-                  </a:tcPr>
-                </a:tc>
-                <a:tc>
-                  <a:txBody>
-                    <a:bodyPr/>
-                    <a:lstStyle/>
-                    <a:p>
-                      <a:r>
-                        <a:rPr sz="1150" b="1">
-                          <a:solidFill>
-                            <a:srgbClr val="E63946"/>
-                          </a:solidFill>
-                          <a:latin typeface="Microsoft JhengHei"/>
-                          <a:ea typeface="Microsoft JhengHei"/>
-                          <a:cs typeface="Microsoft JhengHei"/>
-                        </a:rPr>
-                        <a:t>駭客攻擊</a:t>
-                      </a:r>
-                    </a:p>
-                  </a:txBody>
-                  <a:tcPr anchor="ctr" marL="73152" marT="9144" marB="9144">
-                    <a:solidFill>
-                      <a:srgbClr val="FFFFFF"/>
-                    </a:solidFill>
-                  </a:tcPr>
-                </a:tc>
-                <a:tc>
-                  <a:txBody>
-                    <a:bodyPr/>
-                    <a:lstStyle/>
-                    <a:p>
-                      <a:r>
-                        <a:rPr sz="1150" b="0">
-                          <a:solidFill>
-                            <a:srgbClr val="1A2233"/>
-                          </a:solidFill>
-                          <a:latin typeface="Microsoft JhengHei"/>
-                          <a:ea typeface="Microsoft JhengHei"/>
-                          <a:cs typeface="Microsoft JhengHei"/>
-                        </a:rPr>
-                        <a:t>資誠聯合會計師事務所</a:t>
-                      </a:r>
-                    </a:p>
-                  </a:txBody>
-                  <a:tcPr anchor="ctr" marL="73152" marT="9144" marB="9144">
-                    <a:solidFill>
-                      <a:srgbClr val="FFFFFF"/>
-                    </a:solidFill>
-                  </a:tcPr>
-                </a:tc>
-                <a:tc>
-                  <a:txBody>
-                    <a:bodyPr/>
-                    <a:lstStyle/>
-                    <a:p>
-                      <a:r>
-                        <a:rPr sz="1150" b="0">
-                          <a:solidFill>
-                            <a:srgbClr val="1A2233"/>
-                          </a:solidFill>
-                          <a:latin typeface="Microsoft JhengHei"/>
-                          <a:ea typeface="Microsoft JhengHei"/>
-                          <a:cs typeface="Microsoft JhengHei"/>
-                        </a:rPr>
-                        <a:t>陳憲正、林瑟凱</a:t>
-                      </a:r>
-                    </a:p>
-                  </a:txBody>
-                  <a:tcPr anchor="ctr" marL="73152" marT="9144" marB="9144">
-                    <a:solidFill>
-                      <a:srgbClr val="FFFFFF"/>
                     </a:solidFill>
                   </a:tcPr>
                 </a:tc>
@@ -8806,7 +9302,7 @@
             <a:avLst/>
           </a:prstGeom>
           <a:solidFill>
-            <a:srgbClr val="E63946"/>
+            <a:srgbClr val="27A6C4"/>
           </a:solidFill>
           <a:ln>
             <a:noFill/>
@@ -8867,7 +9363,7 @@
                 <a:ea typeface="Microsoft JhengHei"/>
                 <a:cs typeface="Microsoft JhengHei"/>
               </a:rPr>
-              <a:t>友訊 </a:t>
+              <a:t>柏文 </a:t>
             </a:r>
             <a:r>
               <a:rPr sz="1300" b="0">
@@ -8878,7 +9374,7 @@
                 <a:ea typeface="Microsoft JhengHei"/>
                 <a:cs typeface="Microsoft JhengHei"/>
               </a:rPr>
-              <a:t>2332</a:t>
+              <a:t>8462</a:t>
             </a:r>
           </a:p>
         </p:txBody>
@@ -8898,7 +9394,7 @@
             <a:avLst/>
           </a:prstGeom>
           <a:solidFill>
-            <a:srgbClr val="E63946"/>
+            <a:srgbClr val="27A6C4"/>
           </a:solidFill>
           <a:ln>
             <a:noFill/>
@@ -8959,7 +9455,7 @@
                 <a:ea typeface="Microsoft JhengHei"/>
                 <a:cs typeface="Microsoft JhengHei"/>
               </a:rPr>
-              <a:t>駭客攻擊</a:t>
+              <a:t>個資外洩</a:t>
             </a:r>
           </a:p>
         </p:txBody>
@@ -8994,7 +9490,7 @@
             <a:r>
               <a:rPr sz="1100" b="1">
                 <a:solidFill>
-                  <a:srgbClr val="E63946"/>
+                  <a:srgbClr val="27A6C4"/>
                 </a:solidFill>
                 <a:latin typeface="Microsoft JhengHei"/>
                 <a:ea typeface="Microsoft JhengHei"/>
@@ -9011,7 +9507,7 @@
                 <a:ea typeface="Microsoft JhengHei"/>
                 <a:cs typeface="Microsoft JhengHei"/>
               </a:rPr>
-              <a:t>本公司網站監控中發現登入記錄異常，查知外部攻擊者利用既有登入機制，以大量帳號密碼進行網站登入驗證…</a:t>
+              <a:t>本公司接獲系統委外廠商通知其對外服務系統遭自動化攻擊，並對客戶資料表分頁擷取，其中部分涉及本公司…</a:t>
             </a:r>
           </a:p>
         </p:txBody>
@@ -9046,7 +9542,7 @@
             <a:r>
               <a:rPr sz="1100" b="1">
                 <a:solidFill>
-                  <a:srgbClr val="E63946"/>
+                  <a:srgbClr val="27A6C4"/>
                 </a:solidFill>
                 <a:latin typeface="Microsoft JhengHei"/>
                 <a:ea typeface="Microsoft JhengHei"/>
@@ -9063,7 +9559,7 @@
                 <a:ea typeface="Microsoft JhengHei"/>
                 <a:cs typeface="Microsoft JhengHei"/>
               </a:rPr>
-              <a:t>(1)強化網站登入驗證、存取控制及異常行為偵測機制。(2)強化網頁應用程式防火牆，降低大量或異常登入嘗試之可行性。(3)…</a:t>
+              <a:t>本公司已要求系統委外廠商重新檢視造成資安疑慮因子並加以防範，同時持續針對系統委外廠商加強監控。</a:t>
             </a:r>
           </a:p>
         </p:txBody>
@@ -9190,7 +9686,7 @@
                 <a:ea typeface="Microsoft JhengHei"/>
                 <a:cs typeface="Microsoft JhengHei"/>
               </a:rPr>
-              <a:t>長榮航 </a:t>
+              <a:t>友訊 </a:t>
             </a:r>
             <a:r>
               <a:rPr sz="1300" b="0">
@@ -9201,7 +9697,7 @@
                 <a:ea typeface="Microsoft JhengHei"/>
                 <a:cs typeface="Microsoft JhengHei"/>
               </a:rPr>
-              <a:t>2618</a:t>
+              <a:t>2332</a:t>
             </a:r>
           </a:p>
         </p:txBody>
@@ -9334,7 +9830,7 @@
                 <a:ea typeface="Microsoft JhengHei"/>
                 <a:cs typeface="Microsoft JhengHei"/>
               </a:rPr>
-              <a:t>本公司發現有不明人士透過惡意IP入侵本公司內部資訊環境，取得員工姓名與公務聯繫資訊。</a:t>
+              <a:t>本公司網站監控中發現登入記錄異常，查知外部攻擊者利用既有登入機制，以大量帳號密碼進行網站登入驗證…</a:t>
             </a:r>
           </a:p>
         </p:txBody>
@@ -9386,7 +9882,7 @@
                 <a:ea typeface="Microsoft JhengHei"/>
                 <a:cs typeface="Microsoft JhengHei"/>
               </a:rPr>
-              <a:t>本公司已重新檢視可能造成資安疑慮的因子並加以防範，同時持續加強監控。</a:t>
+              <a:t>(1)強化網站登入驗證、存取控制及異常行為偵測機制。(2)強化網頁應用程式防火牆，降低大量或異常登入嘗試之可行性。(3)…</a:t>
             </a:r>
           </a:p>
         </p:txBody>
@@ -9513,7 +10009,7 @@
                 <a:ea typeface="Microsoft JhengHei"/>
                 <a:cs typeface="Microsoft JhengHei"/>
               </a:rPr>
-              <a:t>長榮航太 </a:t>
+              <a:t>長榮航 </a:t>
             </a:r>
             <a:r>
               <a:rPr sz="1300" b="0">
@@ -9524,7 +10020,7 @@
                 <a:ea typeface="Microsoft JhengHei"/>
                 <a:cs typeface="Microsoft JhengHei"/>
               </a:rPr>
-              <a:t>2645</a:t>
+              <a:t>2618</a:t>
             </a:r>
           </a:p>
         </p:txBody>
@@ -9657,7 +10153,7 @@
                 <a:ea typeface="Microsoft JhengHei"/>
                 <a:cs typeface="Microsoft JhengHei"/>
               </a:rPr>
-              <a:t>本公司發現部分內部資訊系統遭受網路攻擊。</a:t>
+              <a:t>本公司發現有不明人士透過惡意IP入侵本公司內部資訊環境，取得員工姓名與公務聯繫資訊。</a:t>
             </a:r>
           </a:p>
         </p:txBody>
@@ -9709,7 +10205,7 @@
                 <a:ea typeface="Microsoft JhengHei"/>
                 <a:cs typeface="Microsoft JhengHei"/>
               </a:rPr>
-              <a:t>本公司將持續監控公司整體資訊系統運作狀況，並檢討強化現有資安防護措施，以確保資訊安全。</a:t>
+              <a:t>本公司已重新檢視可能造成資安疑慮的因子並加以防範，同時持續加強監控。</a:t>
             </a:r>
           </a:p>
         </p:txBody>
@@ -9775,7 +10271,7 @@
             <a:avLst/>
           </a:prstGeom>
           <a:solidFill>
-            <a:srgbClr val="F4A261"/>
+            <a:srgbClr val="E63946"/>
           </a:solidFill>
           <a:ln>
             <a:noFill/>
@@ -9836,7 +10332,7 @@
                 <a:ea typeface="Microsoft JhengHei"/>
                 <a:cs typeface="Microsoft JhengHei"/>
               </a:rPr>
-              <a:t>崴寶 </a:t>
+              <a:t>長榮航太 </a:t>
             </a:r>
             <a:r>
               <a:rPr sz="1300" b="0">
@@ -9847,7 +10343,7 @@
                 <a:ea typeface="Microsoft JhengHei"/>
                 <a:cs typeface="Microsoft JhengHei"/>
               </a:rPr>
-              <a:t>7744</a:t>
+              <a:t>2645</a:t>
             </a:r>
           </a:p>
         </p:txBody>
@@ -9867,7 +10363,7 @@
             <a:avLst/>
           </a:prstGeom>
           <a:solidFill>
-            <a:srgbClr val="F4A261"/>
+            <a:srgbClr val="E63946"/>
           </a:solidFill>
           <a:ln>
             <a:noFill/>
@@ -9928,7 +10424,7 @@
                 <a:ea typeface="Microsoft JhengHei"/>
                 <a:cs typeface="Microsoft JhengHei"/>
               </a:rPr>
-              <a:t>勒索病毒/加密</a:t>
+              <a:t>駭客攻擊</a:t>
             </a:r>
           </a:p>
         </p:txBody>
@@ -9963,7 +10459,7 @@
             <a:r>
               <a:rPr sz="1100" b="1">
                 <a:solidFill>
-                  <a:srgbClr val="F4A261"/>
+                  <a:srgbClr val="E63946"/>
                 </a:solidFill>
                 <a:latin typeface="Microsoft JhengHei"/>
                 <a:ea typeface="Microsoft JhengHei"/>
@@ -9980,7 +10476,7 @@
                 <a:ea typeface="Microsoft JhengHei"/>
                 <a:cs typeface="Microsoft JhengHei"/>
               </a:rPr>
-              <a:t>本公司於115年9月14日上午發現資訊系統遭駭客入侵，部分系統資料遭加密鎖定。本公司立即啟動資安…</a:t>
+              <a:t>本公司發現部分內部資訊系統遭受網路攻擊。</a:t>
             </a:r>
           </a:p>
         </p:txBody>
@@ -10015,7 +10511,7 @@
             <a:r>
               <a:rPr sz="1100" b="1">
                 <a:solidFill>
-                  <a:srgbClr val="F4A261"/>
+                  <a:srgbClr val="E63946"/>
                 </a:solidFill>
                 <a:latin typeface="Microsoft JhengHei"/>
                 <a:ea typeface="Microsoft JhengHei"/>
@@ -10032,7 +10528,7 @@
                 <a:ea typeface="Microsoft JhengHei"/>
                 <a:cs typeface="Microsoft JhengHei"/>
               </a:rPr>
-              <a:t>本公司將持續配合專業資安團隊進行事件調查與監控，並加強資訊安全管理措施，包括提升端點防護機制、強化網路監控能力、落實帳號…</a:t>
+              <a:t>本公司將持續監控公司整體資訊系統運作狀況，並檢討強化現有資安防護措施，以確保資訊安全。</a:t>
             </a:r>
           </a:p>
         </p:txBody>
@@ -10234,7 +10730,7 @@
             <a:avLst/>
           </a:prstGeom>
           <a:solidFill>
-            <a:srgbClr val="E63946"/>
+            <a:srgbClr val="F4A261"/>
           </a:solidFill>
           <a:ln>
             <a:noFill/>
@@ -10295,7 +10791,7 @@
                 <a:ea typeface="Microsoft JhengHei"/>
                 <a:cs typeface="Microsoft JhengHei"/>
               </a:rPr>
-              <a:t>達爾膚 </a:t>
+              <a:t>崴寶 </a:t>
             </a:r>
             <a:r>
               <a:rPr sz="1300" b="0">
@@ -10306,7 +10802,7 @@
                 <a:ea typeface="Microsoft JhengHei"/>
                 <a:cs typeface="Microsoft JhengHei"/>
               </a:rPr>
-              <a:t>6523</a:t>
+              <a:t>7744</a:t>
             </a:r>
           </a:p>
         </p:txBody>
@@ -10326,7 +10822,7 @@
             <a:avLst/>
           </a:prstGeom>
           <a:solidFill>
-            <a:srgbClr val="E63946"/>
+            <a:srgbClr val="F4A261"/>
           </a:solidFill>
           <a:ln>
             <a:noFill/>
@@ -10387,7 +10883,7 @@
                 <a:ea typeface="Microsoft JhengHei"/>
                 <a:cs typeface="Microsoft JhengHei"/>
               </a:rPr>
-              <a:t>駭客攻擊</a:t>
+              <a:t>勒索病毒/加密</a:t>
             </a:r>
           </a:p>
         </p:txBody>
@@ -10422,7 +10918,7 @@
             <a:r>
               <a:rPr sz="1100" b="1">
                 <a:solidFill>
-                  <a:srgbClr val="E63946"/>
+                  <a:srgbClr val="F4A261"/>
                 </a:solidFill>
                 <a:latin typeface="Microsoft JhengHei"/>
                 <a:ea typeface="Microsoft JhengHei"/>
@@ -10439,7 +10935,7 @@
                 <a:ea typeface="Microsoft JhengHei"/>
                 <a:cs typeface="Microsoft JhengHei"/>
               </a:rPr>
-              <a:t>本公司部分內部資訊系統遭受網路攻擊事件，初步評估對公司營運無重大影響。</a:t>
+              <a:t>本公司於115年9月14日上午發現資訊系統遭駭客入侵，部分系統資料遭加密鎖定。本公司立即啟動資安…</a:t>
             </a:r>
           </a:p>
         </p:txBody>
@@ -10474,7 +10970,7 @@
             <a:r>
               <a:rPr sz="1100" b="1">
                 <a:solidFill>
-                  <a:srgbClr val="E63946"/>
+                  <a:srgbClr val="F4A261"/>
                 </a:solidFill>
                 <a:latin typeface="Microsoft JhengHei"/>
                 <a:ea typeface="Microsoft JhengHei"/>
@@ -10491,7 +10987,7 @@
                 <a:ea typeface="Microsoft JhengHei"/>
                 <a:cs typeface="Microsoft JhengHei"/>
               </a:rPr>
-              <a:t>本公司將持續強化網路與資訊基礎架構之安全管控，以確保資訊安全。</a:t>
+              <a:t>本公司將持續配合專業資安團隊進行事件調查與監控，並加強資訊安全管理措施，包括提升端點防護機制、強化網路監控能力、落實帳號…</a:t>
             </a:r>
           </a:p>
         </p:txBody>
@@ -10618,7 +11114,7 @@
                 <a:ea typeface="Microsoft JhengHei"/>
                 <a:cs typeface="Microsoft JhengHei"/>
               </a:rPr>
-              <a:t>大車隊 </a:t>
+              <a:t>達爾膚 </a:t>
             </a:r>
             <a:r>
               <a:rPr sz="1300" b="0">
@@ -10629,7 +11125,7 @@
                 <a:ea typeface="Microsoft JhengHei"/>
                 <a:cs typeface="Microsoft JhengHei"/>
               </a:rPr>
-              <a:t>2640</a:t>
+              <a:t>6523</a:t>
             </a:r>
           </a:p>
         </p:txBody>
@@ -10762,7 +11258,7 @@
                 <a:ea typeface="Microsoft JhengHei"/>
                 <a:cs typeface="Microsoft JhengHei"/>
               </a:rPr>
-              <a:t>本公司重要子公司全球商務科技股份有限公司於今日發現部分資訊系統遭受網路攻擊，已立即啟動資安應變機…</a:t>
+              <a:t>本公司部分內部資訊系統遭受網路攻擊事件，初步評估對公司營運無重大影響。</a:t>
             </a:r>
           </a:p>
         </p:txBody>
@@ -10814,7 +11310,7 @@
                 <a:ea typeface="Microsoft JhengHei"/>
                 <a:cs typeface="Microsoft JhengHei"/>
               </a:rPr>
-              <a:t>公司將持續進行資安鑑識、系統安全強化及相關風險控管作業，受影響系統預期可於短期內逐步恢復正常運作；後續如調查結果或事件發…</a:t>
+              <a:t>本公司將持續強化網路與資訊基礎架構之安全管控，以確保資訊安全。</a:t>
             </a:r>
           </a:p>
         </p:txBody>
@@ -10880,7 +11376,7 @@
             <a:avLst/>
           </a:prstGeom>
           <a:solidFill>
-            <a:srgbClr val="F4A261"/>
+            <a:srgbClr val="E63946"/>
           </a:solidFill>
           <a:ln>
             <a:noFill/>
@@ -10941,7 +11437,7 @@
                 <a:ea typeface="Microsoft JhengHei"/>
                 <a:cs typeface="Microsoft JhengHei"/>
               </a:rPr>
-              <a:t>富爾特 </a:t>
+              <a:t>大車隊 </a:t>
             </a:r>
             <a:r>
               <a:rPr sz="1300" b="0">
@@ -10952,7 +11448,7 @@
                 <a:ea typeface="Microsoft JhengHei"/>
                 <a:cs typeface="Microsoft JhengHei"/>
               </a:rPr>
-              <a:t>6136</a:t>
+              <a:t>2640</a:t>
             </a:r>
           </a:p>
         </p:txBody>
@@ -10972,7 +11468,7 @@
             <a:avLst/>
           </a:prstGeom>
           <a:solidFill>
-            <a:srgbClr val="F4A261"/>
+            <a:srgbClr val="E63946"/>
           </a:solidFill>
           <a:ln>
             <a:noFill/>
@@ -11033,7 +11529,7 @@
                 <a:ea typeface="Microsoft JhengHei"/>
                 <a:cs typeface="Microsoft JhengHei"/>
               </a:rPr>
-              <a:t>勒索病毒/加密</a:t>
+              <a:t>駭客攻擊</a:t>
             </a:r>
           </a:p>
         </p:txBody>
@@ -11068,7 +11564,7 @@
             <a:r>
               <a:rPr sz="1100" b="1">
                 <a:solidFill>
-                  <a:srgbClr val="F4A261"/>
+                  <a:srgbClr val="E63946"/>
                 </a:solidFill>
                 <a:latin typeface="Microsoft JhengHei"/>
                 <a:ea typeface="Microsoft JhengHei"/>
@@ -11085,7 +11581,7 @@
                 <a:ea typeface="Microsoft JhengHei"/>
                 <a:cs typeface="Microsoft JhengHei"/>
               </a:rPr>
-              <a:t>本公司之子公司格帝控股股份有限公司偵測到部份伺服器遭受網路勒索病毒攻擊，致使包含ERP在內之部份…</a:t>
+              <a:t>本公司重要子公司全球商務科技股份有限公司於今日發現部分資訊系統遭受網路攻擊，已立即啟動資安應變機…</a:t>
             </a:r>
           </a:p>
         </p:txBody>
@@ -11120,7 +11616,7 @@
             <a:r>
               <a:rPr sz="1100" b="1">
                 <a:solidFill>
-                  <a:srgbClr val="F4A261"/>
+                  <a:srgbClr val="E63946"/>
                 </a:solidFill>
                 <a:latin typeface="Microsoft JhengHei"/>
                 <a:ea typeface="Microsoft JhengHei"/>
@@ -11137,7 +11633,7 @@
                 <a:ea typeface="Microsoft JhengHei"/>
                 <a:cs typeface="Microsoft JhengHei"/>
               </a:rPr>
-              <a:t>本公司及所屬子公司將持續密集監控，並強化網路與資訊基礎架構之管控，以確保資訊系統安全。</a:t>
+              <a:t>公司將持續進行資安鑑識、系統安全強化及相關風險控管作業，受影響系統預期可於短期內逐步恢復正常運作；後續如調查結果或事件發…</a:t>
             </a:r>
           </a:p>
         </p:txBody>
@@ -11264,7 +11760,7 @@
                 <a:ea typeface="Microsoft JhengHei"/>
                 <a:cs typeface="Microsoft JhengHei"/>
               </a:rPr>
-              <a:t>創新服務 </a:t>
+              <a:t>富爾特 </a:t>
             </a:r>
             <a:r>
               <a:rPr sz="1300" b="0">
@@ -11275,7 +11771,7 @@
                 <a:ea typeface="Microsoft JhengHei"/>
                 <a:cs typeface="Microsoft JhengHei"/>
               </a:rPr>
-              <a:t>7828</a:t>
+              <a:t>6136</a:t>
             </a:r>
           </a:p>
         </p:txBody>
@@ -11408,7 +11904,7 @@
                 <a:ea typeface="Microsoft JhengHei"/>
                 <a:cs typeface="Microsoft JhengHei"/>
               </a:rPr>
-              <a:t>本公司於今日偵測到部份伺服器遭受網路勒索病毒攻擊，致使包含ERP在內之部份資訊系統無法正常運作。</a:t>
+              <a:t>本公司之子公司格帝控股股份有限公司偵測到部份伺服器遭受網路勒索病毒攻擊，致使包含ERP在內之部份…</a:t>
             </a:r>
           </a:p>
         </p:txBody>
@@ -11460,7 +11956,7 @@
                 <a:ea typeface="Microsoft JhengHei"/>
                 <a:cs typeface="Microsoft JhengHei"/>
               </a:rPr>
-              <a:t>本公司將持續密集監控，並強化網路與資訊基礎架構之管控，以確保資訊系統安全。</a:t>
+              <a:t>本公司及所屬子公司將持續密集監控，並強化網路與資訊基礎架構之管控，以確保資訊系統安全。</a:t>
             </a:r>
           </a:p>
         </p:txBody>
@@ -11662,7 +12158,7 @@
             <a:avLst/>
           </a:prstGeom>
           <a:solidFill>
-            <a:srgbClr val="E63946"/>
+            <a:srgbClr val="F4A261"/>
           </a:solidFill>
           <a:ln>
             <a:noFill/>
@@ -11723,7 +12219,7 @@
                 <a:ea typeface="Microsoft JhengHei"/>
                 <a:cs typeface="Microsoft JhengHei"/>
               </a:rPr>
-              <a:t>杭特 </a:t>
+              <a:t>創新服務 </a:t>
             </a:r>
             <a:r>
               <a:rPr sz="1300" b="0">
@@ -11734,7 +12230,7 @@
                 <a:ea typeface="Microsoft JhengHei"/>
                 <a:cs typeface="Microsoft JhengHei"/>
               </a:rPr>
-              <a:t>3297</a:t>
+              <a:t>7828</a:t>
             </a:r>
           </a:p>
         </p:txBody>
@@ -11751,6 +12247,237 @@
             <a:ext cx="1234440" cy="347472"/>
           </a:xfrm>
           <a:prstGeom prst="roundRect">
+            <a:avLst/>
+          </a:prstGeom>
+          <a:solidFill>
+            <a:srgbClr val="F4A261"/>
+          </a:solidFill>
+          <a:ln>
+            <a:noFill/>
+          </a:ln>
+          <a:effectLst/>
+        </p:spPr>
+        <p:style>
+          <a:lnRef idx="1">
+            <a:schemeClr val="accent1"/>
+          </a:lnRef>
+          <a:fillRef idx="3">
+            <a:schemeClr val="accent1"/>
+          </a:fillRef>
+          <a:effectRef idx="2">
+            <a:schemeClr val="accent1"/>
+          </a:effectRef>
+          <a:fontRef idx="minor">
+            <a:schemeClr val="lt1"/>
+          </a:fontRef>
+        </p:style>
+        <p:txBody>
+          <a:bodyPr rtlCol="0" anchor="ctr"/>
+          <a:lstStyle/>
+          <a:p>
+            <a:pPr algn="ctr"/>
+          </a:p>
+        </p:txBody>
+      </p:sp>
+      <p:sp>
+        <p:nvSpPr>
+          <p:cNvPr id="9" name="TextBox 8"/>
+          <p:cNvSpPr txBox="1"/>
+          <p:nvPr/>
+        </p:nvSpPr>
+        <p:spPr>
+          <a:xfrm>
+            <a:off x="4526280" y="1792224"/>
+            <a:ext cx="1234440" cy="347472"/>
+          </a:xfrm>
+          <a:prstGeom prst="rect">
+            <a:avLst/>
+          </a:prstGeom>
+          <a:noFill/>
+        </p:spPr>
+        <p:txBody>
+          <a:bodyPr wrap="square" anchor="ctr" lIns="0" rIns="0" tIns="0" bIns="0">
+            <a:spAutoFit/>
+          </a:bodyPr>
+          <a:lstStyle/>
+          <a:p>
+            <a:pPr algn="ctr"/>
+            <a:r>
+              <a:rPr sz="1050" b="1">
+                <a:solidFill>
+                  <a:srgbClr val="FFFFFF"/>
+                </a:solidFill>
+                <a:latin typeface="Microsoft JhengHei"/>
+                <a:ea typeface="Microsoft JhengHei"/>
+                <a:cs typeface="Microsoft JhengHei"/>
+              </a:rPr>
+              <a:t>勒索病毒/加密</a:t>
+            </a:r>
+          </a:p>
+        </p:txBody>
+      </p:sp>
+      <p:sp>
+        <p:nvSpPr>
+          <p:cNvPr id="10" name="TextBox 9"/>
+          <p:cNvSpPr txBox="1"/>
+          <p:nvPr/>
+        </p:nvSpPr>
+        <p:spPr>
+          <a:xfrm>
+            <a:off x="777240" y="2267712"/>
+            <a:ext cx="4937760" cy="640080"/>
+          </a:xfrm>
+          <a:prstGeom prst="rect">
+            <a:avLst/>
+          </a:prstGeom>
+          <a:noFill/>
+        </p:spPr>
+        <p:txBody>
+          <a:bodyPr wrap="square" anchor="t" lIns="0" rIns="0" tIns="0" bIns="0">
+            <a:spAutoFit/>
+          </a:bodyPr>
+          <a:lstStyle/>
+          <a:p>
+            <a:pPr algn="l">
+              <a:lnSpc>
+                <a:spcPts val="1500"/>
+              </a:lnSpc>
+            </a:pPr>
+            <a:r>
+              <a:rPr sz="1100" b="1">
+                <a:solidFill>
+                  <a:srgbClr val="F4A261"/>
+                </a:solidFill>
+                <a:latin typeface="Microsoft JhengHei"/>
+                <a:ea typeface="Microsoft JhengHei"/>
+                <a:cs typeface="Microsoft JhengHei"/>
+              </a:rPr>
+              <a:t>緣由　</a:t>
+            </a:r>
+            <a:r>
+              <a:rPr sz="1100" b="0">
+                <a:solidFill>
+                  <a:srgbClr val="1A2233"/>
+                </a:solidFill>
+                <a:latin typeface="Microsoft JhengHei"/>
+                <a:ea typeface="Microsoft JhengHei"/>
+                <a:cs typeface="Microsoft JhengHei"/>
+              </a:rPr>
+              <a:t>本公司於今日偵測到部份伺服器遭受網路勒索病毒攻擊，致使包含ERP在內之部份資訊系統無法正常運作。</a:t>
+            </a:r>
+          </a:p>
+        </p:txBody>
+      </p:sp>
+      <p:sp>
+        <p:nvSpPr>
+          <p:cNvPr id="11" name="TextBox 10"/>
+          <p:cNvSpPr txBox="1"/>
+          <p:nvPr/>
+        </p:nvSpPr>
+        <p:spPr>
+          <a:xfrm>
+            <a:off x="777240" y="2926080"/>
+            <a:ext cx="4937760" cy="713232"/>
+          </a:xfrm>
+          <a:prstGeom prst="rect">
+            <a:avLst/>
+          </a:prstGeom>
+          <a:noFill/>
+        </p:spPr>
+        <p:txBody>
+          <a:bodyPr wrap="square" anchor="t" lIns="0" rIns="0" tIns="0" bIns="0">
+            <a:spAutoFit/>
+          </a:bodyPr>
+          <a:lstStyle/>
+          <a:p>
+            <a:pPr algn="l">
+              <a:lnSpc>
+                <a:spcPts val="1500"/>
+              </a:lnSpc>
+            </a:pPr>
+            <a:r>
+              <a:rPr sz="1100" b="1">
+                <a:solidFill>
+                  <a:srgbClr val="F4A261"/>
+                </a:solidFill>
+                <a:latin typeface="Microsoft JhengHei"/>
+                <a:ea typeface="Microsoft JhengHei"/>
+                <a:cs typeface="Microsoft JhengHei"/>
+              </a:rPr>
+              <a:t>因應　</a:t>
+            </a:r>
+            <a:r>
+              <a:rPr sz="1100" b="0">
+                <a:solidFill>
+                  <a:srgbClr val="1A2233"/>
+                </a:solidFill>
+                <a:latin typeface="Microsoft JhengHei"/>
+                <a:ea typeface="Microsoft JhengHei"/>
+                <a:cs typeface="Microsoft JhengHei"/>
+              </a:rPr>
+              <a:t>本公司將持續密集監控，並強化網路與資訊基礎架構之管控，以確保資訊系統安全。</a:t>
+            </a:r>
+          </a:p>
+        </p:txBody>
+      </p:sp>
+      <p:sp>
+        <p:nvSpPr>
+          <p:cNvPr id="12" name="Rounded Rectangle 11"/>
+          <p:cNvSpPr/>
+          <p:nvPr/>
+        </p:nvSpPr>
+        <p:spPr>
+          <a:xfrm>
+            <a:off x="6172200" y="1554480"/>
+            <a:ext cx="5394960" cy="2148840"/>
+          </a:xfrm>
+          <a:prstGeom prst="roundRect">
+            <a:avLst/>
+          </a:prstGeom>
+          <a:solidFill>
+            <a:srgbClr val="FFFFFF"/>
+          </a:solidFill>
+          <a:ln w="12700">
+            <a:solidFill>
+              <a:srgbClr val="DDE3EE"/>
+            </a:solidFill>
+          </a:ln>
+          <a:effectLst/>
+        </p:spPr>
+        <p:style>
+          <a:lnRef idx="1">
+            <a:schemeClr val="accent1"/>
+          </a:lnRef>
+          <a:fillRef idx="3">
+            <a:schemeClr val="accent1"/>
+          </a:fillRef>
+          <a:effectRef idx="2">
+            <a:schemeClr val="accent1"/>
+          </a:effectRef>
+          <a:fontRef idx="minor">
+            <a:schemeClr val="lt1"/>
+          </a:fontRef>
+        </p:style>
+        <p:txBody>
+          <a:bodyPr rtlCol="0" anchor="ctr"/>
+          <a:lstStyle/>
+          <a:p>
+            <a:pPr algn="ctr"/>
+          </a:p>
+        </p:txBody>
+      </p:sp>
+      <p:sp>
+        <p:nvSpPr>
+          <p:cNvPr id="13" name="Rectangle 12"/>
+          <p:cNvSpPr/>
+          <p:nvPr/>
+        </p:nvSpPr>
+        <p:spPr>
+          <a:xfrm>
+            <a:off x="6172200" y="1554480"/>
+            <a:ext cx="5394960" cy="109728"/>
+          </a:xfrm>
+          <a:prstGeom prst="rect">
             <a:avLst/>
           </a:prstGeom>
           <a:solidFill>
@@ -11785,13 +12512,105 @@
       </p:sp>
       <p:sp>
         <p:nvSpPr>
-          <p:cNvPr id="9" name="TextBox 8"/>
+          <p:cNvPr id="14" name="TextBox 13"/>
           <p:cNvSpPr txBox="1"/>
           <p:nvPr/>
         </p:nvSpPr>
         <p:spPr>
           <a:xfrm>
-            <a:off x="4526280" y="1792224"/>
+            <a:off x="6400800" y="1773936"/>
+            <a:ext cx="3657600" cy="365760"/>
+          </a:xfrm>
+          <a:prstGeom prst="rect">
+            <a:avLst/>
+          </a:prstGeom>
+          <a:noFill/>
+        </p:spPr>
+        <p:txBody>
+          <a:bodyPr wrap="square" anchor="ctr" lIns="0" rIns="0" tIns="0" bIns="0">
+            <a:spAutoFit/>
+          </a:bodyPr>
+          <a:lstStyle/>
+          <a:p>
+            <a:pPr algn="l"/>
+            <a:r>
+              <a:rPr sz="1600" b="1">
+                <a:solidFill>
+                  <a:srgbClr val="1A2233"/>
+                </a:solidFill>
+                <a:latin typeface="Microsoft JhengHei"/>
+                <a:ea typeface="Microsoft JhengHei"/>
+                <a:cs typeface="Microsoft JhengHei"/>
+              </a:rPr>
+              <a:t>杭特 </a:t>
+            </a:r>
+            <a:r>
+              <a:rPr sz="1300" b="0">
+                <a:solidFill>
+                  <a:srgbClr val="5C6679"/>
+                </a:solidFill>
+                <a:latin typeface="Microsoft JhengHei"/>
+                <a:ea typeface="Microsoft JhengHei"/>
+                <a:cs typeface="Microsoft JhengHei"/>
+              </a:rPr>
+              <a:t>3297</a:t>
+            </a:r>
+          </a:p>
+        </p:txBody>
+      </p:sp>
+      <p:sp>
+        <p:nvSpPr>
+          <p:cNvPr id="15" name="Rounded Rectangle 14"/>
+          <p:cNvSpPr/>
+          <p:nvPr/>
+        </p:nvSpPr>
+        <p:spPr>
+          <a:xfrm>
+            <a:off x="10149840" y="1792224"/>
+            <a:ext cx="1234440" cy="347472"/>
+          </a:xfrm>
+          <a:prstGeom prst="roundRect">
+            <a:avLst/>
+          </a:prstGeom>
+          <a:solidFill>
+            <a:srgbClr val="E63946"/>
+          </a:solidFill>
+          <a:ln>
+            <a:noFill/>
+          </a:ln>
+          <a:effectLst/>
+        </p:spPr>
+        <p:style>
+          <a:lnRef idx="1">
+            <a:schemeClr val="accent1"/>
+          </a:lnRef>
+          <a:fillRef idx="3">
+            <a:schemeClr val="accent1"/>
+          </a:fillRef>
+          <a:effectRef idx="2">
+            <a:schemeClr val="accent1"/>
+          </a:effectRef>
+          <a:fontRef idx="minor">
+            <a:schemeClr val="lt1"/>
+          </a:fontRef>
+        </p:style>
+        <p:txBody>
+          <a:bodyPr rtlCol="0" anchor="ctr"/>
+          <a:lstStyle/>
+          <a:p>
+            <a:pPr algn="ctr"/>
+          </a:p>
+        </p:txBody>
+      </p:sp>
+      <p:sp>
+        <p:nvSpPr>
+          <p:cNvPr id="16" name="TextBox 15"/>
+          <p:cNvSpPr txBox="1"/>
+          <p:nvPr/>
+        </p:nvSpPr>
+        <p:spPr>
+          <a:xfrm>
+            <a:off x="10149840" y="1792224"/>
             <a:ext cx="1234440" cy="347472"/>
           </a:xfrm>
           <a:prstGeom prst="rect">
@@ -11822,13 +12641,13 @@
       </p:sp>
       <p:sp>
         <p:nvSpPr>
-          <p:cNvPr id="10" name="TextBox 9"/>
+          <p:cNvPr id="17" name="TextBox 16"/>
           <p:cNvSpPr txBox="1"/>
           <p:nvPr/>
         </p:nvSpPr>
         <p:spPr>
           <a:xfrm>
-            <a:off x="777240" y="2267712"/>
+            <a:off x="6400800" y="2267712"/>
             <a:ext cx="4937760" cy="640080"/>
           </a:xfrm>
           <a:prstGeom prst="rect">
@@ -11874,13 +12693,13 @@
       </p:sp>
       <p:sp>
         <p:nvSpPr>
-          <p:cNvPr id="11" name="TextBox 10"/>
+          <p:cNvPr id="18" name="TextBox 17"/>
           <p:cNvSpPr txBox="1"/>
           <p:nvPr/>
         </p:nvSpPr>
         <p:spPr>
           <a:xfrm>
-            <a:off x="777240" y="2926080"/>
+            <a:off x="6400800" y="2926080"/>
             <a:ext cx="4937760" cy="713232"/>
           </a:xfrm>
           <a:prstGeom prst="rect">

--- a/資安事件因應分析.pptx
+++ b/資安事件因應分析.pptx
@@ -162,11 +162,19 @@
               </a:solidFill>
             </c:spPr>
           </c:dPt>
+          <c:dPt>
+            <c:idx val="3"/>
+            <c:spPr>
+              <a:solidFill>
+                <a:srgbClr val="5C6679"/>
+              </a:solidFill>
+            </c:spPr>
+          </c:dPt>
           <c:cat>
             <c:strRef>
-              <c:f>Sheet1!$A$2:$A$4</c:f>
+              <c:f>Sheet1!$A$2:$A$5</c:f>
               <c:strCache>
-                <c:ptCount val="3"/>
+                <c:ptCount val="4"/>
                 <c:pt idx="0">
                   <c:v>駭客攻擊</c:v>
                 </c:pt>
@@ -176,22 +184,28 @@
                 <c:pt idx="2">
                   <c:v>個資外洩</c:v>
                 </c:pt>
+                <c:pt idx="3">
+                  <c:v>其他</c:v>
+                </c:pt>
               </c:strCache>
             </c:strRef>
           </c:cat>
           <c:val>
             <c:numRef>
-              <c:f>Sheet1!$B$2:$B$4</c:f>
+              <c:f>Sheet1!$B$2:$B$5</c:f>
               <c:numCache>
                 <c:formatCode>General</c:formatCode>
-                <c:ptCount val="3"/>
+                <c:ptCount val="4"/>
                 <c:pt idx="0">
-                  <c:v>6</c:v>
+                  <c:v>7</c:v>
                 </c:pt>
                 <c:pt idx="1">
                   <c:v>3</c:v>
                 </c:pt>
                 <c:pt idx="2">
+                  <c:v>1</c:v>
+                </c:pt>
+                <c:pt idx="3">
                   <c:v>1</c:v>
                 </c:pt>
               </c:numCache>
@@ -3529,7 +3543,7 @@
                 <a:ea typeface="Microsoft JhengHei"/>
                 <a:cs typeface="Microsoft JhengHei"/>
               </a:rPr>
-              <a:t>資料期間 2026-08-24 ~ 2026-09-24　｜　MOPS 重大訊息全文檢索　｜　10 家公司</a:t>
+              <a:t>資料期間 2026-08-30 ~ 2026-09-30　｜　MOPS 重大訊息全文檢索　｜　12 家公司</a:t>
             </a:r>
           </a:p>
         </p:txBody>
@@ -3746,7 +3760,7 @@
                 <a:ea typeface="Microsoft JhengHei"/>
                 <a:cs typeface="Microsoft JhengHei"/>
               </a:rPr>
-              <a:t>資料期間內 MOPS 揭露之 10 起資安相關重大訊息</a:t>
+              <a:t>資料期間內 MOPS 揭露之 12 起資安相關重大訊息</a:t>
             </a:r>
           </a:p>
         </p:txBody>
@@ -3829,7 +3843,7 @@
                 <a:ea typeface="Microsoft JhengHei"/>
                 <a:cs typeface="Microsoft JhengHei"/>
               </a:rPr>
-              <a:t>10</a:t>
+              <a:t>12</a:t>
             </a:r>
           </a:p>
         </p:txBody>
@@ -3949,7 +3963,7 @@
                 <a:ea typeface="Microsoft JhengHei"/>
                 <a:cs typeface="Microsoft JhengHei"/>
               </a:rPr>
-              <a:t>3</a:t>
+              <a:t>4</a:t>
             </a:r>
           </a:p>
         </p:txBody>
@@ -4136,7 +4150,7 @@
                 <a:gridCol w="2286000"/>
                 <a:gridCol w="5120640"/>
               </a:tblGrid>
-              <a:tr h="324196">
+              <a:tr h="274320">
                 <a:tc>
                   <a:txBody>
                     <a:bodyPr/>
@@ -4258,7 +4272,251 @@
                   </a:tcPr>
                 </a:tc>
               </a:tr>
-              <a:tr h="324196">
+              <a:tr h="274320">
+                <a:tc>
+                  <a:txBody>
+                    <a:bodyPr/>
+                    <a:lstStyle/>
+                    <a:p>
+                      <a:r>
+                        <a:rPr sz="1150" b="0">
+                          <a:solidFill>
+                            <a:srgbClr val="1A2233"/>
+                          </a:solidFill>
+                          <a:latin typeface="Microsoft JhengHei"/>
+                          <a:ea typeface="Microsoft JhengHei"/>
+                          <a:cs typeface="Microsoft JhengHei"/>
+                        </a:rPr>
+                        <a:t>神腦</a:t>
+                      </a:r>
+                    </a:p>
+                  </a:txBody>
+                  <a:tcPr anchor="ctr" marL="73152" marT="9144" marB="9144">
+                    <a:solidFill>
+                      <a:srgbClr val="FFFFFF"/>
+                    </a:solidFill>
+                  </a:tcPr>
+                </a:tc>
+                <a:tc>
+                  <a:txBody>
+                    <a:bodyPr/>
+                    <a:lstStyle/>
+                    <a:p>
+                      <a:r>
+                        <a:rPr sz="1150" b="0">
+                          <a:solidFill>
+                            <a:srgbClr val="1A2233"/>
+                          </a:solidFill>
+                          <a:latin typeface="Microsoft JhengHei"/>
+                          <a:ea typeface="Microsoft JhengHei"/>
+                          <a:cs typeface="Microsoft JhengHei"/>
+                        </a:rPr>
+                        <a:t>2450</a:t>
+                      </a:r>
+                    </a:p>
+                  </a:txBody>
+                  <a:tcPr anchor="ctr" marL="73152" marT="9144" marB="9144">
+                    <a:solidFill>
+                      <a:srgbClr val="FFFFFF"/>
+                    </a:solidFill>
+                  </a:tcPr>
+                </a:tc>
+                <a:tc>
+                  <a:txBody>
+                    <a:bodyPr/>
+                    <a:lstStyle/>
+                    <a:p>
+                      <a:r>
+                        <a:rPr sz="1150" b="0">
+                          <a:solidFill>
+                            <a:srgbClr val="1A2233"/>
+                          </a:solidFill>
+                          <a:latin typeface="Microsoft JhengHei"/>
+                          <a:ea typeface="Microsoft JhengHei"/>
+                          <a:cs typeface="Microsoft JhengHei"/>
+                        </a:rPr>
+                        <a:t>09/29</a:t>
+                      </a:r>
+                    </a:p>
+                  </a:txBody>
+                  <a:tcPr anchor="ctr" marL="73152" marT="9144" marB="9144">
+                    <a:solidFill>
+                      <a:srgbClr val="FFFFFF"/>
+                    </a:solidFill>
+                  </a:tcPr>
+                </a:tc>
+                <a:tc>
+                  <a:txBody>
+                    <a:bodyPr/>
+                    <a:lstStyle/>
+                    <a:p>
+                      <a:r>
+                        <a:rPr sz="1150" b="1">
+                          <a:solidFill>
+                            <a:srgbClr val="E63946"/>
+                          </a:solidFill>
+                          <a:latin typeface="Microsoft JhengHei"/>
+                          <a:ea typeface="Microsoft JhengHei"/>
+                          <a:cs typeface="Microsoft JhengHei"/>
+                        </a:rPr>
+                        <a:t>駭客攻擊</a:t>
+                      </a:r>
+                    </a:p>
+                  </a:txBody>
+                  <a:tcPr anchor="ctr" marL="73152" marT="9144" marB="9144">
+                    <a:solidFill>
+                      <a:srgbClr val="FFFFFF"/>
+                    </a:solidFill>
+                  </a:tcPr>
+                </a:tc>
+                <a:tc>
+                  <a:txBody>
+                    <a:bodyPr/>
+                    <a:lstStyle/>
+                    <a:p>
+                      <a:r>
+                        <a:rPr sz="1150" b="0">
+                          <a:solidFill>
+                            <a:srgbClr val="1A2233"/>
+                          </a:solidFill>
+                          <a:latin typeface="Microsoft JhengHei"/>
+                          <a:ea typeface="Microsoft JhengHei"/>
+                          <a:cs typeface="Microsoft JhengHei"/>
+                        </a:rPr>
+                        <a:t>評估對本公司營運、財務及服務提供無重大影響。</a:t>
+                      </a:r>
+                    </a:p>
+                  </a:txBody>
+                  <a:tcPr anchor="ctr" marL="73152" marT="9144" marB="9144">
+                    <a:solidFill>
+                      <a:srgbClr val="FFFFFF"/>
+                    </a:solidFill>
+                  </a:tcPr>
+                </a:tc>
+              </a:tr>
+              <a:tr h="274320">
+                <a:tc>
+                  <a:txBody>
+                    <a:bodyPr/>
+                    <a:lstStyle/>
+                    <a:p>
+                      <a:r>
+                        <a:rPr sz="1150" b="0">
+                          <a:solidFill>
+                            <a:srgbClr val="1A2233"/>
+                          </a:solidFill>
+                          <a:latin typeface="Microsoft JhengHei"/>
+                          <a:ea typeface="Microsoft JhengHei"/>
+                          <a:cs typeface="Microsoft JhengHei"/>
+                        </a:rPr>
+                        <a:t>鈊象</a:t>
+                      </a:r>
+                    </a:p>
+                  </a:txBody>
+                  <a:tcPr anchor="ctr" marL="73152" marT="9144" marB="9144">
+                    <a:solidFill>
+                      <a:srgbClr val="EEF2F9"/>
+                    </a:solidFill>
+                  </a:tcPr>
+                </a:tc>
+                <a:tc>
+                  <a:txBody>
+                    <a:bodyPr/>
+                    <a:lstStyle/>
+                    <a:p>
+                      <a:r>
+                        <a:rPr sz="1150" b="0">
+                          <a:solidFill>
+                            <a:srgbClr val="1A2233"/>
+                          </a:solidFill>
+                          <a:latin typeface="Microsoft JhengHei"/>
+                          <a:ea typeface="Microsoft JhengHei"/>
+                          <a:cs typeface="Microsoft JhengHei"/>
+                        </a:rPr>
+                        <a:t>3293</a:t>
+                      </a:r>
+                    </a:p>
+                  </a:txBody>
+                  <a:tcPr anchor="ctr" marL="73152" marT="9144" marB="9144">
+                    <a:solidFill>
+                      <a:srgbClr val="EEF2F9"/>
+                    </a:solidFill>
+                  </a:tcPr>
+                </a:tc>
+                <a:tc>
+                  <a:txBody>
+                    <a:bodyPr/>
+                    <a:lstStyle/>
+                    <a:p>
+                      <a:r>
+                        <a:rPr sz="1150" b="0">
+                          <a:solidFill>
+                            <a:srgbClr val="1A2233"/>
+                          </a:solidFill>
+                          <a:latin typeface="Microsoft JhengHei"/>
+                          <a:ea typeface="Microsoft JhengHei"/>
+                          <a:cs typeface="Microsoft JhengHei"/>
+                        </a:rPr>
+                        <a:t>09/29</a:t>
+                      </a:r>
+                    </a:p>
+                  </a:txBody>
+                  <a:tcPr anchor="ctr" marL="73152" marT="9144" marB="9144">
+                    <a:solidFill>
+                      <a:srgbClr val="EEF2F9"/>
+                    </a:solidFill>
+                  </a:tcPr>
+                </a:tc>
+                <a:tc>
+                  <a:txBody>
+                    <a:bodyPr/>
+                    <a:lstStyle/>
+                    <a:p>
+                      <a:r>
+                        <a:rPr sz="1150" b="1">
+                          <a:solidFill>
+                            <a:srgbClr val="5C6679"/>
+                          </a:solidFill>
+                          <a:latin typeface="Microsoft JhengHei"/>
+                          <a:ea typeface="Microsoft JhengHei"/>
+                          <a:cs typeface="Microsoft JhengHei"/>
+                        </a:rPr>
+                        <a:t>其他</a:t>
+                      </a:r>
+                    </a:p>
+                  </a:txBody>
+                  <a:tcPr anchor="ctr" marL="73152" marT="9144" marB="9144">
+                    <a:solidFill>
+                      <a:srgbClr val="EEF2F9"/>
+                    </a:solidFill>
+                  </a:tcPr>
+                </a:tc>
+                <a:tc>
+                  <a:txBody>
+                    <a:bodyPr/>
+                    <a:lstStyle/>
+                    <a:p>
+                      <a:r>
+                        <a:rPr sz="1150" b="0">
+                          <a:solidFill>
+                            <a:srgbClr val="1A2233"/>
+                          </a:solidFill>
+                          <a:latin typeface="Microsoft JhengHei"/>
+                          <a:ea typeface="Microsoft JhengHei"/>
+                          <a:cs typeface="Microsoft JhengHei"/>
+                        </a:rPr>
+                        <a:t>目前評估對公司營運尚無重大影響。</a:t>
+                      </a:r>
+                    </a:p>
+                  </a:txBody>
+                  <a:tcPr anchor="ctr" marL="73152" marT="9144" marB="9144">
+                    <a:solidFill>
+                      <a:srgbClr val="EEF2F9"/>
+                    </a:solidFill>
+                  </a:tcPr>
+                </a:tc>
+              </a:tr>
+              <a:tr h="274320">
                 <a:tc>
                   <a:txBody>
                     <a:bodyPr/>
@@ -4380,7 +4638,7 @@
                   </a:tcPr>
                 </a:tc>
               </a:tr>
-              <a:tr h="324196">
+              <a:tr h="274320">
                 <a:tc>
                   <a:txBody>
                     <a:bodyPr/>
@@ -4502,7 +4760,7 @@
                   </a:tcPr>
                 </a:tc>
               </a:tr>
-              <a:tr h="324196">
+              <a:tr h="274320">
                 <a:tc>
                   <a:txBody>
                     <a:bodyPr/>
@@ -4624,7 +4882,7 @@
                   </a:tcPr>
                 </a:tc>
               </a:tr>
-              <a:tr h="324196">
+              <a:tr h="274320">
                 <a:tc>
                   <a:txBody>
                     <a:bodyPr/>
@@ -4746,7 +5004,7 @@
                   </a:tcPr>
                 </a:tc>
               </a:tr>
-              <a:tr h="324196">
+              <a:tr h="274320">
                 <a:tc>
                   <a:txBody>
                     <a:bodyPr/>
@@ -4868,7 +5126,7 @@
                   </a:tcPr>
                 </a:tc>
               </a:tr>
-              <a:tr h="324196">
+              <a:tr h="274320">
                 <a:tc>
                   <a:txBody>
                     <a:bodyPr/>
@@ -4990,7 +5248,7 @@
                   </a:tcPr>
                 </a:tc>
               </a:tr>
-              <a:tr h="324196">
+              <a:tr h="274320">
                 <a:tc>
                   <a:txBody>
                     <a:bodyPr/>
@@ -5112,7 +5370,7 @@
                   </a:tcPr>
                 </a:tc>
               </a:tr>
-              <a:tr h="324196">
+              <a:tr h="274320">
                 <a:tc>
                   <a:txBody>
                     <a:bodyPr/>
@@ -5234,7 +5492,7 @@
                   </a:tcPr>
                 </a:tc>
               </a:tr>
-              <a:tr h="324196">
+              <a:tr h="274320">
                 <a:tc>
                   <a:txBody>
                     <a:bodyPr/>
@@ -5356,7 +5614,7 @@
                   </a:tcPr>
                 </a:tc>
               </a:tr>
-              <a:tr h="324200">
+              <a:tr h="274320">
                 <a:tc>
                   <a:txBody>
                     <a:bodyPr/>
@@ -5795,7 +6053,7 @@
                 <a:ea typeface="Microsoft JhengHei"/>
                 <a:cs typeface="Microsoft JhengHei"/>
               </a:rPr>
-              <a:t>6 起</a:t>
+              <a:t>7 起</a:t>
             </a:r>
           </a:p>
         </p:txBody>
@@ -5832,7 +6090,7 @@
                 <a:ea typeface="Microsoft JhengHei"/>
                 <a:cs typeface="Microsoft JhengHei"/>
               </a:rPr>
-              <a:t>友訊、長榮航、長榮航太、達爾膚、大車隊、杭特</a:t>
+              <a:t>神腦、友訊、長榮航、長榮航太、達爾膚、大車隊、杭特</a:t>
             </a:r>
           </a:p>
         </p:txBody>
@@ -6346,6 +6604,244 @@
                 <a:cs typeface="Microsoft JhengHei"/>
               </a:rPr>
               <a:t>源自開發流程或委外廠商，須通報並通知當事人</a:t>
+            </a:r>
+          </a:p>
+        </p:txBody>
+      </p:sp>
+      <p:sp>
+        <p:nvSpPr>
+          <p:cNvPr id="24" name="Rounded Rectangle 23"/>
+          <p:cNvSpPr/>
+          <p:nvPr/>
+        </p:nvSpPr>
+        <p:spPr>
+          <a:xfrm>
+            <a:off x="5669280" y="5669279"/>
+            <a:ext cx="6035040" cy="1170432"/>
+          </a:xfrm>
+          <a:prstGeom prst="roundRect">
+            <a:avLst/>
+          </a:prstGeom>
+          <a:solidFill>
+            <a:srgbClr val="FFFFFF"/>
+          </a:solidFill>
+          <a:ln w="12700">
+            <a:solidFill>
+              <a:srgbClr val="DDE3EE"/>
+            </a:solidFill>
+          </a:ln>
+          <a:effectLst/>
+        </p:spPr>
+        <p:style>
+          <a:lnRef idx="1">
+            <a:schemeClr val="accent1"/>
+          </a:lnRef>
+          <a:fillRef idx="3">
+            <a:schemeClr val="accent1"/>
+          </a:fillRef>
+          <a:effectRef idx="2">
+            <a:schemeClr val="accent1"/>
+          </a:effectRef>
+          <a:fontRef idx="minor">
+            <a:schemeClr val="lt1"/>
+          </a:fontRef>
+        </p:style>
+        <p:txBody>
+          <a:bodyPr rtlCol="0" anchor="ctr"/>
+          <a:lstStyle/>
+          <a:p>
+            <a:pPr algn="ctr"/>
+          </a:p>
+        </p:txBody>
+      </p:sp>
+      <p:sp>
+        <p:nvSpPr>
+          <p:cNvPr id="25" name="Rectangle 24"/>
+          <p:cNvSpPr/>
+          <p:nvPr/>
+        </p:nvSpPr>
+        <p:spPr>
+          <a:xfrm>
+            <a:off x="5669280" y="5669279"/>
+            <a:ext cx="109728" cy="1170432"/>
+          </a:xfrm>
+          <a:prstGeom prst="rect">
+            <a:avLst/>
+          </a:prstGeom>
+          <a:solidFill>
+            <a:srgbClr val="5C6679"/>
+          </a:solidFill>
+          <a:ln>
+            <a:noFill/>
+          </a:ln>
+          <a:effectLst/>
+        </p:spPr>
+        <p:style>
+          <a:lnRef idx="1">
+            <a:schemeClr val="accent1"/>
+          </a:lnRef>
+          <a:fillRef idx="3">
+            <a:schemeClr val="accent1"/>
+          </a:fillRef>
+          <a:effectRef idx="2">
+            <a:schemeClr val="accent1"/>
+          </a:effectRef>
+          <a:fontRef idx="minor">
+            <a:schemeClr val="lt1"/>
+          </a:fontRef>
+        </p:style>
+        <p:txBody>
+          <a:bodyPr rtlCol="0" anchor="ctr"/>
+          <a:lstStyle/>
+          <a:p>
+            <a:pPr algn="ctr"/>
+          </a:p>
+        </p:txBody>
+      </p:sp>
+      <p:sp>
+        <p:nvSpPr>
+          <p:cNvPr id="26" name="TextBox 25"/>
+          <p:cNvSpPr txBox="1"/>
+          <p:nvPr/>
+        </p:nvSpPr>
+        <p:spPr>
+          <a:xfrm>
+            <a:off x="5897880" y="5779007"/>
+            <a:ext cx="4206240" cy="365760"/>
+          </a:xfrm>
+          <a:prstGeom prst="rect">
+            <a:avLst/>
+          </a:prstGeom>
+          <a:noFill/>
+        </p:spPr>
+        <p:txBody>
+          <a:bodyPr wrap="square" anchor="ctr" lIns="0" rIns="0" tIns="0" bIns="0">
+            <a:spAutoFit/>
+          </a:bodyPr>
+          <a:lstStyle/>
+          <a:p>
+            <a:pPr algn="l"/>
+            <a:r>
+              <a:rPr sz="1600" b="1">
+                <a:solidFill>
+                  <a:srgbClr val="1A2233"/>
+                </a:solidFill>
+                <a:latin typeface="Microsoft JhengHei"/>
+                <a:ea typeface="Microsoft JhengHei"/>
+                <a:cs typeface="Microsoft JhengHei"/>
+              </a:rPr>
+              <a:t>其他</a:t>
+            </a:r>
+          </a:p>
+        </p:txBody>
+      </p:sp>
+      <p:sp>
+        <p:nvSpPr>
+          <p:cNvPr id="27" name="TextBox 26"/>
+          <p:cNvSpPr txBox="1"/>
+          <p:nvPr/>
+        </p:nvSpPr>
+        <p:spPr>
+          <a:xfrm>
+            <a:off x="10058400" y="5779007"/>
+            <a:ext cx="1463040" cy="365760"/>
+          </a:xfrm>
+          <a:prstGeom prst="rect">
+            <a:avLst/>
+          </a:prstGeom>
+          <a:noFill/>
+        </p:spPr>
+        <p:txBody>
+          <a:bodyPr wrap="square" anchor="ctr" lIns="0" rIns="0" tIns="0" bIns="0">
+            <a:spAutoFit/>
+          </a:bodyPr>
+          <a:lstStyle/>
+          <a:p>
+            <a:pPr algn="r"/>
+            <a:r>
+              <a:rPr sz="1800" b="1">
+                <a:solidFill>
+                  <a:srgbClr val="5C6679"/>
+                </a:solidFill>
+                <a:latin typeface="Microsoft JhengHei"/>
+                <a:ea typeface="Microsoft JhengHei"/>
+                <a:cs typeface="Microsoft JhengHei"/>
+              </a:rPr>
+              <a:t>1 起</a:t>
+            </a:r>
+          </a:p>
+        </p:txBody>
+      </p:sp>
+      <p:sp>
+        <p:nvSpPr>
+          <p:cNvPr id="28" name="TextBox 27"/>
+          <p:cNvSpPr txBox="1"/>
+          <p:nvPr/>
+        </p:nvSpPr>
+        <p:spPr>
+          <a:xfrm>
+            <a:off x="5897880" y="6172199"/>
+            <a:ext cx="5577840" cy="274320"/>
+          </a:xfrm>
+          <a:prstGeom prst="rect">
+            <a:avLst/>
+          </a:prstGeom>
+          <a:noFill/>
+        </p:spPr>
+        <p:txBody>
+          <a:bodyPr wrap="square" anchor="t" lIns="0" rIns="0" tIns="0" bIns="0">
+            <a:spAutoFit/>
+          </a:bodyPr>
+          <a:lstStyle/>
+          <a:p>
+            <a:pPr algn="l"/>
+            <a:r>
+              <a:rPr sz="1150" b="1">
+                <a:solidFill>
+                  <a:srgbClr val="1A2233"/>
+                </a:solidFill>
+                <a:latin typeface="Microsoft JhengHei"/>
+                <a:ea typeface="Microsoft JhengHei"/>
+                <a:cs typeface="Microsoft JhengHei"/>
+              </a:rPr>
+              <a:t>鈊象</a:t>
+            </a:r>
+          </a:p>
+        </p:txBody>
+      </p:sp>
+      <p:sp>
+        <p:nvSpPr>
+          <p:cNvPr id="29" name="TextBox 28"/>
+          <p:cNvSpPr txBox="1"/>
+          <p:nvPr/>
+        </p:nvSpPr>
+        <p:spPr>
+          <a:xfrm>
+            <a:off x="5897880" y="6437375"/>
+            <a:ext cx="5669280" cy="329184"/>
+          </a:xfrm>
+          <a:prstGeom prst="rect">
+            <a:avLst/>
+          </a:prstGeom>
+          <a:noFill/>
+        </p:spPr>
+        <p:txBody>
+          <a:bodyPr wrap="square" anchor="t" lIns="0" rIns="0" tIns="0" bIns="0">
+            <a:spAutoFit/>
+          </a:bodyPr>
+          <a:lstStyle/>
+          <a:p>
+            <a:pPr algn="l"/>
+            <a:r>
+              <a:rPr sz="1100" b="0">
+                <a:solidFill>
+                  <a:srgbClr val="5C6679"/>
+                </a:solidFill>
+                <a:latin typeface="Microsoft JhengHei"/>
+                <a:ea typeface="Microsoft JhengHei"/>
+                <a:cs typeface="Microsoft JhengHei"/>
+              </a:rPr>
+              <a:t>其他資安相關事件</a:t>
             </a:r>
           </a:p>
         </p:txBody>
@@ -6511,7 +7007,7 @@
                 <a:gridCol w="3383280"/>
                 <a:gridCol w="2606040"/>
               </a:tblGrid>
-              <a:tr h="407323">
+              <a:tr h="344658">
                 <a:tc>
                   <a:txBody>
                     <a:bodyPr/>
@@ -6633,7 +7129,251 @@
                   </a:tcPr>
                 </a:tc>
               </a:tr>
-              <a:tr h="407323">
+              <a:tr h="344658">
+                <a:tc>
+                  <a:txBody>
+                    <a:bodyPr/>
+                    <a:lstStyle/>
+                    <a:p>
+                      <a:r>
+                        <a:rPr sz="1150" b="0">
+                          <a:solidFill>
+                            <a:srgbClr val="1A2233"/>
+                          </a:solidFill>
+                          <a:latin typeface="Microsoft JhengHei"/>
+                          <a:ea typeface="Microsoft JhengHei"/>
+                          <a:cs typeface="Microsoft JhengHei"/>
+                        </a:rPr>
+                        <a:t>神腦</a:t>
+                      </a:r>
+                    </a:p>
+                  </a:txBody>
+                  <a:tcPr anchor="ctr" marL="73152" marT="9144" marB="9144">
+                    <a:solidFill>
+                      <a:srgbClr val="FFFFFF"/>
+                    </a:solidFill>
+                  </a:tcPr>
+                </a:tc>
+                <a:tc>
+                  <a:txBody>
+                    <a:bodyPr/>
+                    <a:lstStyle/>
+                    <a:p>
+                      <a:r>
+                        <a:rPr sz="1150" b="0">
+                          <a:solidFill>
+                            <a:srgbClr val="1A2233"/>
+                          </a:solidFill>
+                          <a:latin typeface="Microsoft JhengHei"/>
+                          <a:ea typeface="Microsoft JhengHei"/>
+                          <a:cs typeface="Microsoft JhengHei"/>
+                        </a:rPr>
+                        <a:t>2450</a:t>
+                      </a:r>
+                    </a:p>
+                  </a:txBody>
+                  <a:tcPr anchor="ctr" marL="73152" marT="9144" marB="9144">
+                    <a:solidFill>
+                      <a:srgbClr val="FFFFFF"/>
+                    </a:solidFill>
+                  </a:tcPr>
+                </a:tc>
+                <a:tc>
+                  <a:txBody>
+                    <a:bodyPr/>
+                    <a:lstStyle/>
+                    <a:p>
+                      <a:r>
+                        <a:rPr sz="1150" b="1">
+                          <a:solidFill>
+                            <a:srgbClr val="E63946"/>
+                          </a:solidFill>
+                          <a:latin typeface="Microsoft JhengHei"/>
+                          <a:ea typeface="Microsoft JhengHei"/>
+                          <a:cs typeface="Microsoft JhengHei"/>
+                        </a:rPr>
+                        <a:t>駭客攻擊</a:t>
+                      </a:r>
+                    </a:p>
+                  </a:txBody>
+                  <a:tcPr anchor="ctr" marL="73152" marT="9144" marB="9144">
+                    <a:solidFill>
+                      <a:srgbClr val="FFFFFF"/>
+                    </a:solidFill>
+                  </a:tcPr>
+                </a:tc>
+                <a:tc>
+                  <a:txBody>
+                    <a:bodyPr/>
+                    <a:lstStyle/>
+                    <a:p>
+                      <a:r>
+                        <a:rPr sz="1150" b="0">
+                          <a:solidFill>
+                            <a:srgbClr val="1A2233"/>
+                          </a:solidFill>
+                          <a:latin typeface="Microsoft JhengHei"/>
+                          <a:ea typeface="Microsoft JhengHei"/>
+                          <a:cs typeface="Microsoft JhengHei"/>
+                        </a:rPr>
+                        <a:t>資誠聯合會計師事務所</a:t>
+                      </a:r>
+                    </a:p>
+                  </a:txBody>
+                  <a:tcPr anchor="ctr" marL="73152" marT="9144" marB="9144">
+                    <a:solidFill>
+                      <a:srgbClr val="FFFFFF"/>
+                    </a:solidFill>
+                  </a:tcPr>
+                </a:tc>
+                <a:tc>
+                  <a:txBody>
+                    <a:bodyPr/>
+                    <a:lstStyle/>
+                    <a:p>
+                      <a:r>
+                        <a:rPr sz="1150" b="0">
+                          <a:solidFill>
+                            <a:srgbClr val="1A2233"/>
+                          </a:solidFill>
+                          <a:latin typeface="Microsoft JhengHei"/>
+                          <a:ea typeface="Microsoft JhengHei"/>
+                          <a:cs typeface="Microsoft JhengHei"/>
+                        </a:rPr>
+                        <a:t>王銘義、林永智</a:t>
+                      </a:r>
+                    </a:p>
+                  </a:txBody>
+                  <a:tcPr anchor="ctr" marL="73152" marT="9144" marB="9144">
+                    <a:solidFill>
+                      <a:srgbClr val="FFFFFF"/>
+                    </a:solidFill>
+                  </a:tcPr>
+                </a:tc>
+              </a:tr>
+              <a:tr h="344658">
+                <a:tc>
+                  <a:txBody>
+                    <a:bodyPr/>
+                    <a:lstStyle/>
+                    <a:p>
+                      <a:r>
+                        <a:rPr sz="1150" b="0">
+                          <a:solidFill>
+                            <a:srgbClr val="1A2233"/>
+                          </a:solidFill>
+                          <a:latin typeface="Microsoft JhengHei"/>
+                          <a:ea typeface="Microsoft JhengHei"/>
+                          <a:cs typeface="Microsoft JhengHei"/>
+                        </a:rPr>
+                        <a:t>鈊象</a:t>
+                      </a:r>
+                    </a:p>
+                  </a:txBody>
+                  <a:tcPr anchor="ctr" marL="73152" marT="9144" marB="9144">
+                    <a:solidFill>
+                      <a:srgbClr val="EEF2F9"/>
+                    </a:solidFill>
+                  </a:tcPr>
+                </a:tc>
+                <a:tc>
+                  <a:txBody>
+                    <a:bodyPr/>
+                    <a:lstStyle/>
+                    <a:p>
+                      <a:r>
+                        <a:rPr sz="1150" b="0">
+                          <a:solidFill>
+                            <a:srgbClr val="1A2233"/>
+                          </a:solidFill>
+                          <a:latin typeface="Microsoft JhengHei"/>
+                          <a:ea typeface="Microsoft JhengHei"/>
+                          <a:cs typeface="Microsoft JhengHei"/>
+                        </a:rPr>
+                        <a:t>3293</a:t>
+                      </a:r>
+                    </a:p>
+                  </a:txBody>
+                  <a:tcPr anchor="ctr" marL="73152" marT="9144" marB="9144">
+                    <a:solidFill>
+                      <a:srgbClr val="EEF2F9"/>
+                    </a:solidFill>
+                  </a:tcPr>
+                </a:tc>
+                <a:tc>
+                  <a:txBody>
+                    <a:bodyPr/>
+                    <a:lstStyle/>
+                    <a:p>
+                      <a:r>
+                        <a:rPr sz="1150" b="1">
+                          <a:solidFill>
+                            <a:srgbClr val="5C6679"/>
+                          </a:solidFill>
+                          <a:latin typeface="Microsoft JhengHei"/>
+                          <a:ea typeface="Microsoft JhengHei"/>
+                          <a:cs typeface="Microsoft JhengHei"/>
+                        </a:rPr>
+                        <a:t>其他</a:t>
+                      </a:r>
+                    </a:p>
+                  </a:txBody>
+                  <a:tcPr anchor="ctr" marL="73152" marT="9144" marB="9144">
+                    <a:solidFill>
+                      <a:srgbClr val="EEF2F9"/>
+                    </a:solidFill>
+                  </a:tcPr>
+                </a:tc>
+                <a:tc>
+                  <a:txBody>
+                    <a:bodyPr/>
+                    <a:lstStyle/>
+                    <a:p>
+                      <a:r>
+                        <a:rPr sz="1150" b="0">
+                          <a:solidFill>
+                            <a:srgbClr val="1A2233"/>
+                          </a:solidFill>
+                          <a:latin typeface="Microsoft JhengHei"/>
+                          <a:ea typeface="Microsoft JhengHei"/>
+                          <a:cs typeface="Microsoft JhengHei"/>
+                        </a:rPr>
+                        <a:t>勤業眾信聯合會計師事務所</a:t>
+                      </a:r>
+                    </a:p>
+                  </a:txBody>
+                  <a:tcPr anchor="ctr" marL="73152" marT="9144" marB="9144">
+                    <a:solidFill>
+                      <a:srgbClr val="EEF2F9"/>
+                    </a:solidFill>
+                  </a:tcPr>
+                </a:tc>
+                <a:tc>
+                  <a:txBody>
+                    <a:bodyPr/>
+                    <a:lstStyle/>
+                    <a:p>
+                      <a:r>
+                        <a:rPr sz="1150" b="0">
+                          <a:solidFill>
+                            <a:srgbClr val="1A2233"/>
+                          </a:solidFill>
+                          <a:latin typeface="Microsoft JhengHei"/>
+                          <a:ea typeface="Microsoft JhengHei"/>
+                          <a:cs typeface="Microsoft JhengHei"/>
+                        </a:rPr>
+                        <a:t>周仕杰、李東峰</a:t>
+                      </a:r>
+                    </a:p>
+                  </a:txBody>
+                  <a:tcPr anchor="ctr" marL="73152" marT="9144" marB="9144">
+                    <a:solidFill>
+                      <a:srgbClr val="EEF2F9"/>
+                    </a:solidFill>
+                  </a:tcPr>
+                </a:tc>
+              </a:tr>
+              <a:tr h="344658">
                 <a:tc>
                   <a:txBody>
                     <a:bodyPr/>
@@ -6755,7 +7495,7 @@
                   </a:tcPr>
                 </a:tc>
               </a:tr>
-              <a:tr h="407323">
+              <a:tr h="344658">
                 <a:tc>
                   <a:txBody>
                     <a:bodyPr/>
@@ -6877,7 +7617,7 @@
                   </a:tcPr>
                 </a:tc>
               </a:tr>
-              <a:tr h="407323">
+              <a:tr h="344658">
                 <a:tc>
                   <a:txBody>
                     <a:bodyPr/>
@@ -6999,7 +7739,7 @@
                   </a:tcPr>
                 </a:tc>
               </a:tr>
-              <a:tr h="407323">
+              <a:tr h="344658">
                 <a:tc>
                   <a:txBody>
                     <a:bodyPr/>
@@ -7121,7 +7861,7 @@
                   </a:tcPr>
                 </a:tc>
               </a:tr>
-              <a:tr h="407323">
+              <a:tr h="344658">
                 <a:tc>
                   <a:txBody>
                     <a:bodyPr/>
@@ -7243,7 +7983,7 @@
                   </a:tcPr>
                 </a:tc>
               </a:tr>
-              <a:tr h="407323">
+              <a:tr h="344658">
                 <a:tc>
                   <a:txBody>
                     <a:bodyPr/>
@@ -7365,7 +8105,7 @@
                   </a:tcPr>
                 </a:tc>
               </a:tr>
-              <a:tr h="407323">
+              <a:tr h="344658">
                 <a:tc>
                   <a:txBody>
                     <a:bodyPr/>
@@ -7487,7 +8227,7 @@
                   </a:tcPr>
                 </a:tc>
               </a:tr>
-              <a:tr h="407323">
+              <a:tr h="344658">
                 <a:tc>
                   <a:txBody>
                     <a:bodyPr/>
@@ -7609,7 +8349,7 @@
                   </a:tcPr>
                 </a:tc>
               </a:tr>
-              <a:tr h="407323">
+              <a:tr h="344658">
                 <a:tc>
                   <a:txBody>
                     <a:bodyPr/>
@@ -7731,7 +8471,7 @@
                   </a:tcPr>
                 </a:tc>
               </a:tr>
-              <a:tr h="407330">
+              <a:tr h="344664">
                 <a:tc>
                   <a:txBody>
                     <a:bodyPr/>
@@ -9302,7 +10042,7 @@
             <a:avLst/>
           </a:prstGeom>
           <a:solidFill>
-            <a:srgbClr val="27A6C4"/>
+            <a:srgbClr val="E63946"/>
           </a:solidFill>
           <a:ln>
             <a:noFill/>
@@ -9363,7 +10103,7 @@
                 <a:ea typeface="Microsoft JhengHei"/>
                 <a:cs typeface="Microsoft JhengHei"/>
               </a:rPr>
-              <a:t>柏文 </a:t>
+              <a:t>神腦 </a:t>
             </a:r>
             <a:r>
               <a:rPr sz="1300" b="0">
@@ -9374,7 +10114,7 @@
                 <a:ea typeface="Microsoft JhengHei"/>
                 <a:cs typeface="Microsoft JhengHei"/>
               </a:rPr>
-              <a:t>8462</a:t>
+              <a:t>2450</a:t>
             </a:r>
           </a:p>
         </p:txBody>
@@ -9394,7 +10134,7 @@
             <a:avLst/>
           </a:prstGeom>
           <a:solidFill>
-            <a:srgbClr val="27A6C4"/>
+            <a:srgbClr val="E63946"/>
           </a:solidFill>
           <a:ln>
             <a:noFill/>
@@ -9455,7 +10195,7 @@
                 <a:ea typeface="Microsoft JhengHei"/>
                 <a:cs typeface="Microsoft JhengHei"/>
               </a:rPr>
-              <a:t>個資外洩</a:t>
+              <a:t>駭客攻擊</a:t>
             </a:r>
           </a:p>
         </p:txBody>
@@ -9490,7 +10230,7 @@
             <a:r>
               <a:rPr sz="1100" b="1">
                 <a:solidFill>
-                  <a:srgbClr val="27A6C4"/>
+                  <a:srgbClr val="E63946"/>
                 </a:solidFill>
                 <a:latin typeface="Microsoft JhengHei"/>
                 <a:ea typeface="Microsoft JhengHei"/>
@@ -9507,7 +10247,7 @@
                 <a:ea typeface="Microsoft JhengHei"/>
                 <a:cs typeface="Microsoft JhengHei"/>
               </a:rPr>
-              <a:t>本公司接獲系統委外廠商通知其對外服務系統遭自動化攻擊，並對客戶資料表分頁擷取，其中部分涉及本公司…</a:t>
+              <a:t>本公司外部伺服器遭受自動化攻擊事件說明。</a:t>
             </a:r>
           </a:p>
         </p:txBody>
@@ -9542,7 +10282,7 @@
             <a:r>
               <a:rPr sz="1100" b="1">
                 <a:solidFill>
-                  <a:srgbClr val="27A6C4"/>
+                  <a:srgbClr val="E63946"/>
                 </a:solidFill>
                 <a:latin typeface="Microsoft JhengHei"/>
                 <a:ea typeface="Microsoft JhengHei"/>
@@ -9559,7 +10299,7 @@
                 <a:ea typeface="Microsoft JhengHei"/>
                 <a:cs typeface="Microsoft JhengHei"/>
               </a:rPr>
-              <a:t>本公司已要求系統委外廠商重新檢視造成資安疑慮因子並加以防範，同時持續針對系統委外廠商加強監控。</a:t>
+              <a:t>本公司已與第三方資安廠商合作，全面強化網路偵測、系統監控與安全管控，以確保資訊安全。</a:t>
             </a:r>
           </a:p>
         </p:txBody>
@@ -9625,7 +10365,7 @@
             <a:avLst/>
           </a:prstGeom>
           <a:solidFill>
-            <a:srgbClr val="E63946"/>
+            <a:srgbClr val="5C6679"/>
           </a:solidFill>
           <a:ln>
             <a:noFill/>
@@ -9686,7 +10426,7 @@
                 <a:ea typeface="Microsoft JhengHei"/>
                 <a:cs typeface="Microsoft JhengHei"/>
               </a:rPr>
-              <a:t>友訊 </a:t>
+              <a:t>鈊象 </a:t>
             </a:r>
             <a:r>
               <a:rPr sz="1300" b="0">
@@ -9697,7 +10437,7 @@
                 <a:ea typeface="Microsoft JhengHei"/>
                 <a:cs typeface="Microsoft JhengHei"/>
               </a:rPr>
-              <a:t>2332</a:t>
+              <a:t>3293</a:t>
             </a:r>
           </a:p>
         </p:txBody>
@@ -9717,7 +10457,7 @@
             <a:avLst/>
           </a:prstGeom>
           <a:solidFill>
-            <a:srgbClr val="E63946"/>
+            <a:srgbClr val="5C6679"/>
           </a:solidFill>
           <a:ln>
             <a:noFill/>
@@ -9778,7 +10518,7 @@
                 <a:ea typeface="Microsoft JhengHei"/>
                 <a:cs typeface="Microsoft JhengHei"/>
               </a:rPr>
-              <a:t>駭客攻擊</a:t>
+              <a:t>其他</a:t>
             </a:r>
           </a:p>
         </p:txBody>
@@ -9813,7 +10553,7 @@
             <a:r>
               <a:rPr sz="1100" b="1">
                 <a:solidFill>
-                  <a:srgbClr val="E63946"/>
+                  <a:srgbClr val="5C6679"/>
                 </a:solidFill>
                 <a:latin typeface="Microsoft JhengHei"/>
                 <a:ea typeface="Microsoft JhengHei"/>
@@ -9830,7 +10570,7 @@
                 <a:ea typeface="Microsoft JhengHei"/>
                 <a:cs typeface="Microsoft JhengHei"/>
               </a:rPr>
-              <a:t>本公司網站監控中發現登入記錄異常，查知外部攻擊者利用既有登入機制，以大量帳號密碼進行網站登入驗證…</a:t>
+              <a:t>本公司於115年9月29日發現不明IP異常侵入公司營運資訊設備。</a:t>
             </a:r>
           </a:p>
         </p:txBody>
@@ -9865,7 +10605,7 @@
             <a:r>
               <a:rPr sz="1100" b="1">
                 <a:solidFill>
-                  <a:srgbClr val="E63946"/>
+                  <a:srgbClr val="5C6679"/>
                 </a:solidFill>
                 <a:latin typeface="Microsoft JhengHei"/>
                 <a:ea typeface="Microsoft JhengHei"/>
@@ -9882,7 +10622,7 @@
                 <a:ea typeface="Microsoft JhengHei"/>
                 <a:cs typeface="Microsoft JhengHei"/>
               </a:rPr>
-              <a:t>(1)強化網站登入驗證、存取控制及異常行為偵測機制。(2)強化網頁應用程式防火牆，降低大量或異常登入嘗試之可行性。(3)…</a:t>
+              <a:t>持續提升資安防禦，強化監控與防護層級。</a:t>
             </a:r>
           </a:p>
         </p:txBody>
@@ -9948,7 +10688,7 @@
             <a:avLst/>
           </a:prstGeom>
           <a:solidFill>
-            <a:srgbClr val="E63946"/>
+            <a:srgbClr val="27A6C4"/>
           </a:solidFill>
           <a:ln>
             <a:noFill/>
@@ -10009,7 +10749,7 @@
                 <a:ea typeface="Microsoft JhengHei"/>
                 <a:cs typeface="Microsoft JhengHei"/>
               </a:rPr>
-              <a:t>長榮航 </a:t>
+              <a:t>柏文 </a:t>
             </a:r>
             <a:r>
               <a:rPr sz="1300" b="0">
@@ -10020,7 +10760,7 @@
                 <a:ea typeface="Microsoft JhengHei"/>
                 <a:cs typeface="Microsoft JhengHei"/>
               </a:rPr>
-              <a:t>2618</a:t>
+              <a:t>8462</a:t>
             </a:r>
           </a:p>
         </p:txBody>
@@ -10040,7 +10780,7 @@
             <a:avLst/>
           </a:prstGeom>
           <a:solidFill>
-            <a:srgbClr val="E63946"/>
+            <a:srgbClr val="27A6C4"/>
           </a:solidFill>
           <a:ln>
             <a:noFill/>
@@ -10101,7 +10841,7 @@
                 <a:ea typeface="Microsoft JhengHei"/>
                 <a:cs typeface="Microsoft JhengHei"/>
               </a:rPr>
-              <a:t>駭客攻擊</a:t>
+              <a:t>個資外洩</a:t>
             </a:r>
           </a:p>
         </p:txBody>
@@ -10136,7 +10876,7 @@
             <a:r>
               <a:rPr sz="1100" b="1">
                 <a:solidFill>
-                  <a:srgbClr val="E63946"/>
+                  <a:srgbClr val="27A6C4"/>
                 </a:solidFill>
                 <a:latin typeface="Microsoft JhengHei"/>
                 <a:ea typeface="Microsoft JhengHei"/>
@@ -10153,7 +10893,7 @@
                 <a:ea typeface="Microsoft JhengHei"/>
                 <a:cs typeface="Microsoft JhengHei"/>
               </a:rPr>
-              <a:t>本公司發現有不明人士透過惡意IP入侵本公司內部資訊環境，取得員工姓名與公務聯繫資訊。</a:t>
+              <a:t>本公司接獲系統委外廠商通知其對外服務系統遭自動化攻擊，並對客戶資料表分頁擷取，其中部分涉及本公司…</a:t>
             </a:r>
           </a:p>
         </p:txBody>
@@ -10188,7 +10928,7 @@
             <a:r>
               <a:rPr sz="1100" b="1">
                 <a:solidFill>
-                  <a:srgbClr val="E63946"/>
+                  <a:srgbClr val="27A6C4"/>
                 </a:solidFill>
                 <a:latin typeface="Microsoft JhengHei"/>
                 <a:ea typeface="Microsoft JhengHei"/>
@@ -10205,7 +10945,7 @@
                 <a:ea typeface="Microsoft JhengHei"/>
                 <a:cs typeface="Microsoft JhengHei"/>
               </a:rPr>
-              <a:t>本公司已重新檢視可能造成資安疑慮的因子並加以防範，同時持續加強監控。</a:t>
+              <a:t>本公司已要求系統委外廠商重新檢視造成資安疑慮因子並加以防範，同時持續針對系統委外廠商加強監控。</a:t>
             </a:r>
           </a:p>
         </p:txBody>
@@ -10332,7 +11072,7 @@
                 <a:ea typeface="Microsoft JhengHei"/>
                 <a:cs typeface="Microsoft JhengHei"/>
               </a:rPr>
-              <a:t>長榮航太 </a:t>
+              <a:t>友訊 </a:t>
             </a:r>
             <a:r>
               <a:rPr sz="1300" b="0">
@@ -10343,7 +11083,7 @@
                 <a:ea typeface="Microsoft JhengHei"/>
                 <a:cs typeface="Microsoft JhengHei"/>
               </a:rPr>
-              <a:t>2645</a:t>
+              <a:t>2332</a:t>
             </a:r>
           </a:p>
         </p:txBody>
@@ -10476,7 +11216,7 @@
                 <a:ea typeface="Microsoft JhengHei"/>
                 <a:cs typeface="Microsoft JhengHei"/>
               </a:rPr>
-              <a:t>本公司發現部分內部資訊系統遭受網路攻擊。</a:t>
+              <a:t>本公司網站監控中發現登入記錄異常，查知外部攻擊者利用既有登入機制，以大量帳號密碼進行網站登入驗證…</a:t>
             </a:r>
           </a:p>
         </p:txBody>
@@ -10528,7 +11268,7 @@
                 <a:ea typeface="Microsoft JhengHei"/>
                 <a:cs typeface="Microsoft JhengHei"/>
               </a:rPr>
-              <a:t>本公司將持續監控公司整體資訊系統運作狀況，並檢討強化現有資安防護措施，以確保資訊安全。</a:t>
+              <a:t>(1)強化網站登入驗證、存取控制及異常行為偵測機制。(2)強化網頁應用程式防火牆，降低大量或異常登入嘗試之可行性。(3)…</a:t>
             </a:r>
           </a:p>
         </p:txBody>
@@ -10730,7 +11470,7 @@
             <a:avLst/>
           </a:prstGeom>
           <a:solidFill>
-            <a:srgbClr val="F4A261"/>
+            <a:srgbClr val="E63946"/>
           </a:solidFill>
           <a:ln>
             <a:noFill/>
@@ -10791,7 +11531,7 @@
                 <a:ea typeface="Microsoft JhengHei"/>
                 <a:cs typeface="Microsoft JhengHei"/>
               </a:rPr>
-              <a:t>崴寶 </a:t>
+              <a:t>長榮航 </a:t>
             </a:r>
             <a:r>
               <a:rPr sz="1300" b="0">
@@ -10802,7 +11542,7 @@
                 <a:ea typeface="Microsoft JhengHei"/>
                 <a:cs typeface="Microsoft JhengHei"/>
               </a:rPr>
-              <a:t>7744</a:t>
+              <a:t>2618</a:t>
             </a:r>
           </a:p>
         </p:txBody>
@@ -10822,7 +11562,7 @@
             <a:avLst/>
           </a:prstGeom>
           <a:solidFill>
-            <a:srgbClr val="F4A261"/>
+            <a:srgbClr val="E63946"/>
           </a:solidFill>
           <a:ln>
             <a:noFill/>
@@ -10883,7 +11623,7 @@
                 <a:ea typeface="Microsoft JhengHei"/>
                 <a:cs typeface="Microsoft JhengHei"/>
               </a:rPr>
-              <a:t>勒索病毒/加密</a:t>
+              <a:t>駭客攻擊</a:t>
             </a:r>
           </a:p>
         </p:txBody>
@@ -10918,7 +11658,7 @@
             <a:r>
               <a:rPr sz="1100" b="1">
                 <a:solidFill>
-                  <a:srgbClr val="F4A261"/>
+                  <a:srgbClr val="E63946"/>
                 </a:solidFill>
                 <a:latin typeface="Microsoft JhengHei"/>
                 <a:ea typeface="Microsoft JhengHei"/>
@@ -10935,7 +11675,7 @@
                 <a:ea typeface="Microsoft JhengHei"/>
                 <a:cs typeface="Microsoft JhengHei"/>
               </a:rPr>
-              <a:t>本公司於115年9月14日上午發現資訊系統遭駭客入侵，部分系統資料遭加密鎖定。本公司立即啟動資安…</a:t>
+              <a:t>本公司發現有不明人士透過惡意IP入侵本公司內部資訊環境，取得員工姓名與公務聯繫資訊。</a:t>
             </a:r>
           </a:p>
         </p:txBody>
@@ -10970,7 +11710,7 @@
             <a:r>
               <a:rPr sz="1100" b="1">
                 <a:solidFill>
-                  <a:srgbClr val="F4A261"/>
+                  <a:srgbClr val="E63946"/>
                 </a:solidFill>
                 <a:latin typeface="Microsoft JhengHei"/>
                 <a:ea typeface="Microsoft JhengHei"/>
@@ -10987,7 +11727,7 @@
                 <a:ea typeface="Microsoft JhengHei"/>
                 <a:cs typeface="Microsoft JhengHei"/>
               </a:rPr>
-              <a:t>本公司將持續配合專業資安團隊進行事件調查與監控，並加強資訊安全管理措施，包括提升端點防護機制、強化網路監控能力、落實帳號…</a:t>
+              <a:t>本公司已重新檢視可能造成資安疑慮的因子並加以防範，同時持續加強監控。</a:t>
             </a:r>
           </a:p>
         </p:txBody>
@@ -11114,7 +11854,7 @@
                 <a:ea typeface="Microsoft JhengHei"/>
                 <a:cs typeface="Microsoft JhengHei"/>
               </a:rPr>
-              <a:t>達爾膚 </a:t>
+              <a:t>長榮航太 </a:t>
             </a:r>
             <a:r>
               <a:rPr sz="1300" b="0">
@@ -11125,7 +11865,7 @@
                 <a:ea typeface="Microsoft JhengHei"/>
                 <a:cs typeface="Microsoft JhengHei"/>
               </a:rPr>
-              <a:t>6523</a:t>
+              <a:t>2645</a:t>
             </a:r>
           </a:p>
         </p:txBody>
@@ -11258,7 +11998,7 @@
                 <a:ea typeface="Microsoft JhengHei"/>
                 <a:cs typeface="Microsoft JhengHei"/>
               </a:rPr>
-              <a:t>本公司部分內部資訊系統遭受網路攻擊事件，初步評估對公司營運無重大影響。</a:t>
+              <a:t>本公司發現部分內部資訊系統遭受網路攻擊。</a:t>
             </a:r>
           </a:p>
         </p:txBody>
@@ -11310,7 +12050,7 @@
                 <a:ea typeface="Microsoft JhengHei"/>
                 <a:cs typeface="Microsoft JhengHei"/>
               </a:rPr>
-              <a:t>本公司將持續強化網路與資訊基礎架構之安全管控，以確保資訊安全。</a:t>
+              <a:t>本公司將持續監控公司整體資訊系統運作狀況，並檢討強化現有資安防護措施，以確保資訊安全。</a:t>
             </a:r>
           </a:p>
         </p:txBody>
@@ -11376,7 +12116,7 @@
             <a:avLst/>
           </a:prstGeom>
           <a:solidFill>
-            <a:srgbClr val="E63946"/>
+            <a:srgbClr val="F4A261"/>
           </a:solidFill>
           <a:ln>
             <a:noFill/>
@@ -11437,7 +12177,7 @@
                 <a:ea typeface="Microsoft JhengHei"/>
                 <a:cs typeface="Microsoft JhengHei"/>
               </a:rPr>
-              <a:t>大車隊 </a:t>
+              <a:t>崴寶 </a:t>
             </a:r>
             <a:r>
               <a:rPr sz="1300" b="0">
@@ -11448,7 +12188,7 @@
                 <a:ea typeface="Microsoft JhengHei"/>
                 <a:cs typeface="Microsoft JhengHei"/>
               </a:rPr>
-              <a:t>2640</a:t>
+              <a:t>7744</a:t>
             </a:r>
           </a:p>
         </p:txBody>
@@ -11468,7 +12208,7 @@
             <a:avLst/>
           </a:prstGeom>
           <a:solidFill>
-            <a:srgbClr val="E63946"/>
+            <a:srgbClr val="F4A261"/>
           </a:solidFill>
           <a:ln>
             <a:noFill/>
@@ -11529,7 +12269,7 @@
                 <a:ea typeface="Microsoft JhengHei"/>
                 <a:cs typeface="Microsoft JhengHei"/>
               </a:rPr>
-              <a:t>駭客攻擊</a:t>
+              <a:t>勒索病毒/加密</a:t>
             </a:r>
           </a:p>
         </p:txBody>
@@ -11564,7 +12304,7 @@
             <a:r>
               <a:rPr sz="1100" b="1">
                 <a:solidFill>
-                  <a:srgbClr val="E63946"/>
+                  <a:srgbClr val="F4A261"/>
                 </a:solidFill>
                 <a:latin typeface="Microsoft JhengHei"/>
                 <a:ea typeface="Microsoft JhengHei"/>
@@ -11581,7 +12321,7 @@
                 <a:ea typeface="Microsoft JhengHei"/>
                 <a:cs typeface="Microsoft JhengHei"/>
               </a:rPr>
-              <a:t>本公司重要子公司全球商務科技股份有限公司於今日發現部分資訊系統遭受網路攻擊，已立即啟動資安應變機…</a:t>
+              <a:t>本公司於115年9月14日上午發現資訊系統遭駭客入侵，部分系統資料遭加密鎖定。本公司立即啟動資安…</a:t>
             </a:r>
           </a:p>
         </p:txBody>
@@ -11616,7 +12356,7 @@
             <a:r>
               <a:rPr sz="1100" b="1">
                 <a:solidFill>
-                  <a:srgbClr val="E63946"/>
+                  <a:srgbClr val="F4A261"/>
                 </a:solidFill>
                 <a:latin typeface="Microsoft JhengHei"/>
                 <a:ea typeface="Microsoft JhengHei"/>
@@ -11633,7 +12373,7 @@
                 <a:ea typeface="Microsoft JhengHei"/>
                 <a:cs typeface="Microsoft JhengHei"/>
               </a:rPr>
-              <a:t>公司將持續進行資安鑑識、系統安全強化及相關風險控管作業，受影響系統預期可於短期內逐步恢復正常運作；後續如調查結果或事件發…</a:t>
+              <a:t>本公司將持續配合專業資安團隊進行事件調查與監控，並加強資訊安全管理措施，包括提升端點防護機制、強化網路監控能力、落實帳號…</a:t>
             </a:r>
           </a:p>
         </p:txBody>
@@ -11699,7 +12439,7 @@
             <a:avLst/>
           </a:prstGeom>
           <a:solidFill>
-            <a:srgbClr val="F4A261"/>
+            <a:srgbClr val="E63946"/>
           </a:solidFill>
           <a:ln>
             <a:noFill/>
@@ -11760,7 +12500,7 @@
                 <a:ea typeface="Microsoft JhengHei"/>
                 <a:cs typeface="Microsoft JhengHei"/>
               </a:rPr>
-              <a:t>富爾特 </a:t>
+              <a:t>達爾膚 </a:t>
             </a:r>
             <a:r>
               <a:rPr sz="1300" b="0">
@@ -11771,7 +12511,7 @@
                 <a:ea typeface="Microsoft JhengHei"/>
                 <a:cs typeface="Microsoft JhengHei"/>
               </a:rPr>
-              <a:t>6136</a:t>
+              <a:t>6523</a:t>
             </a:r>
           </a:p>
         </p:txBody>
@@ -11791,7 +12531,7 @@
             <a:avLst/>
           </a:prstGeom>
           <a:solidFill>
-            <a:srgbClr val="F4A261"/>
+            <a:srgbClr val="E63946"/>
           </a:solidFill>
           <a:ln>
             <a:noFill/>
@@ -11852,7 +12592,7 @@
                 <a:ea typeface="Microsoft JhengHei"/>
                 <a:cs typeface="Microsoft JhengHei"/>
               </a:rPr>
-              <a:t>勒索病毒/加密</a:t>
+              <a:t>駭客攻擊</a:t>
             </a:r>
           </a:p>
         </p:txBody>
@@ -11887,7 +12627,7 @@
             <a:r>
               <a:rPr sz="1100" b="1">
                 <a:solidFill>
-                  <a:srgbClr val="F4A261"/>
+                  <a:srgbClr val="E63946"/>
                 </a:solidFill>
                 <a:latin typeface="Microsoft JhengHei"/>
                 <a:ea typeface="Microsoft JhengHei"/>
@@ -11904,7 +12644,7 @@
                 <a:ea typeface="Microsoft JhengHei"/>
                 <a:cs typeface="Microsoft JhengHei"/>
               </a:rPr>
-              <a:t>本公司之子公司格帝控股股份有限公司偵測到部份伺服器遭受網路勒索病毒攻擊，致使包含ERP在內之部份…</a:t>
+              <a:t>本公司部分內部資訊系統遭受網路攻擊事件，初步評估對公司營運無重大影響。</a:t>
             </a:r>
           </a:p>
         </p:txBody>
@@ -11939,7 +12679,7 @@
             <a:r>
               <a:rPr sz="1100" b="1">
                 <a:solidFill>
-                  <a:srgbClr val="F4A261"/>
+                  <a:srgbClr val="E63946"/>
                 </a:solidFill>
                 <a:latin typeface="Microsoft JhengHei"/>
                 <a:ea typeface="Microsoft JhengHei"/>
@@ -11956,7 +12696,7 @@
                 <a:ea typeface="Microsoft JhengHei"/>
                 <a:cs typeface="Microsoft JhengHei"/>
               </a:rPr>
-              <a:t>本公司及所屬子公司將持續密集監控，並強化網路與資訊基礎架構之管控，以確保資訊系統安全。</a:t>
+              <a:t>本公司將持續強化網路與資訊基礎架構之安全管控，以確保資訊安全。</a:t>
             </a:r>
           </a:p>
         </p:txBody>
@@ -12158,7 +12898,7 @@
             <a:avLst/>
           </a:prstGeom>
           <a:solidFill>
-            <a:srgbClr val="F4A261"/>
+            <a:srgbClr val="E63946"/>
           </a:solidFill>
           <a:ln>
             <a:noFill/>
@@ -12219,7 +12959,7 @@
                 <a:ea typeface="Microsoft JhengHei"/>
                 <a:cs typeface="Microsoft JhengHei"/>
               </a:rPr>
-              <a:t>創新服務 </a:t>
+              <a:t>大車隊 </a:t>
             </a:r>
             <a:r>
               <a:rPr sz="1300" b="0">
@@ -12230,7 +12970,7 @@
                 <a:ea typeface="Microsoft JhengHei"/>
                 <a:cs typeface="Microsoft JhengHei"/>
               </a:rPr>
-              <a:t>7828</a:t>
+              <a:t>2640</a:t>
             </a:r>
           </a:p>
         </p:txBody>
@@ -12250,7 +12990,7 @@
             <a:avLst/>
           </a:prstGeom>
           <a:solidFill>
-            <a:srgbClr val="F4A261"/>
+            <a:srgbClr val="E63946"/>
           </a:solidFill>
           <a:ln>
             <a:noFill/>
@@ -12311,7 +13051,7 @@
                 <a:ea typeface="Microsoft JhengHei"/>
                 <a:cs typeface="Microsoft JhengHei"/>
               </a:rPr>
-              <a:t>勒索病毒/加密</a:t>
+              <a:t>駭客攻擊</a:t>
             </a:r>
           </a:p>
         </p:txBody>
@@ -12346,7 +13086,7 @@
             <a:r>
               <a:rPr sz="1100" b="1">
                 <a:solidFill>
-                  <a:srgbClr val="F4A261"/>
+                  <a:srgbClr val="E63946"/>
                 </a:solidFill>
                 <a:latin typeface="Microsoft JhengHei"/>
                 <a:ea typeface="Microsoft JhengHei"/>
@@ -12363,7 +13103,7 @@
                 <a:ea typeface="Microsoft JhengHei"/>
                 <a:cs typeface="Microsoft JhengHei"/>
               </a:rPr>
-              <a:t>本公司於今日偵測到部份伺服器遭受網路勒索病毒攻擊，致使包含ERP在內之部份資訊系統無法正常運作。</a:t>
+              <a:t>本公司重要子公司全球商務科技股份有限公司於今日發現部分資訊系統遭受網路攻擊，已立即啟動資安應變機…</a:t>
             </a:r>
           </a:p>
         </p:txBody>
@@ -12398,7 +13138,7 @@
             <a:r>
               <a:rPr sz="1100" b="1">
                 <a:solidFill>
-                  <a:srgbClr val="F4A261"/>
+                  <a:srgbClr val="E63946"/>
                 </a:solidFill>
                 <a:latin typeface="Microsoft JhengHei"/>
                 <a:ea typeface="Microsoft JhengHei"/>
@@ -12415,7 +13155,7 @@
                 <a:ea typeface="Microsoft JhengHei"/>
                 <a:cs typeface="Microsoft JhengHei"/>
               </a:rPr>
-              <a:t>本公司將持續密集監控，並強化網路與資訊基礎架構之管控，以確保資訊系統安全。</a:t>
+              <a:t>公司將持續進行資安鑑識、系統安全強化及相關風險控管作業，受影響系統預期可於短期內逐步恢復正常運作；後續如調查結果或事件發…</a:t>
             </a:r>
           </a:p>
         </p:txBody>
@@ -12481,7 +13221,7 @@
             <a:avLst/>
           </a:prstGeom>
           <a:solidFill>
-            <a:srgbClr val="E63946"/>
+            <a:srgbClr val="F4A261"/>
           </a:solidFill>
           <a:ln>
             <a:noFill/>
@@ -12542,7 +13282,7 @@
                 <a:ea typeface="Microsoft JhengHei"/>
                 <a:cs typeface="Microsoft JhengHei"/>
               </a:rPr>
-              <a:t>杭特 </a:t>
+              <a:t>富爾特 </a:t>
             </a:r>
             <a:r>
               <a:rPr sz="1300" b="0">
@@ -12553,7 +13293,7 @@
                 <a:ea typeface="Microsoft JhengHei"/>
                 <a:cs typeface="Microsoft JhengHei"/>
               </a:rPr>
-              <a:t>3297</a:t>
+              <a:t>6136</a:t>
             </a:r>
           </a:p>
         </p:txBody>
@@ -12570,6 +13310,560 @@
             <a:ext cx="1234440" cy="347472"/>
           </a:xfrm>
           <a:prstGeom prst="roundRect">
+            <a:avLst/>
+          </a:prstGeom>
+          <a:solidFill>
+            <a:srgbClr val="F4A261"/>
+          </a:solidFill>
+          <a:ln>
+            <a:noFill/>
+          </a:ln>
+          <a:effectLst/>
+        </p:spPr>
+        <p:style>
+          <a:lnRef idx="1">
+            <a:schemeClr val="accent1"/>
+          </a:lnRef>
+          <a:fillRef idx="3">
+            <a:schemeClr val="accent1"/>
+          </a:fillRef>
+          <a:effectRef idx="2">
+            <a:schemeClr val="accent1"/>
+          </a:effectRef>
+          <a:fontRef idx="minor">
+            <a:schemeClr val="lt1"/>
+          </a:fontRef>
+        </p:style>
+        <p:txBody>
+          <a:bodyPr rtlCol="0" anchor="ctr"/>
+          <a:lstStyle/>
+          <a:p>
+            <a:pPr algn="ctr"/>
+          </a:p>
+        </p:txBody>
+      </p:sp>
+      <p:sp>
+        <p:nvSpPr>
+          <p:cNvPr id="16" name="TextBox 15"/>
+          <p:cNvSpPr txBox="1"/>
+          <p:nvPr/>
+        </p:nvSpPr>
+        <p:spPr>
+          <a:xfrm>
+            <a:off x="10149840" y="1792224"/>
+            <a:ext cx="1234440" cy="347472"/>
+          </a:xfrm>
+          <a:prstGeom prst="rect">
+            <a:avLst/>
+          </a:prstGeom>
+          <a:noFill/>
+        </p:spPr>
+        <p:txBody>
+          <a:bodyPr wrap="square" anchor="ctr" lIns="0" rIns="0" tIns="0" bIns="0">
+            <a:spAutoFit/>
+          </a:bodyPr>
+          <a:lstStyle/>
+          <a:p>
+            <a:pPr algn="ctr"/>
+            <a:r>
+              <a:rPr sz="1050" b="1">
+                <a:solidFill>
+                  <a:srgbClr val="FFFFFF"/>
+                </a:solidFill>
+                <a:latin typeface="Microsoft JhengHei"/>
+                <a:ea typeface="Microsoft JhengHei"/>
+                <a:cs typeface="Microsoft JhengHei"/>
+              </a:rPr>
+              <a:t>勒索病毒/加密</a:t>
+            </a:r>
+          </a:p>
+        </p:txBody>
+      </p:sp>
+      <p:sp>
+        <p:nvSpPr>
+          <p:cNvPr id="17" name="TextBox 16"/>
+          <p:cNvSpPr txBox="1"/>
+          <p:nvPr/>
+        </p:nvSpPr>
+        <p:spPr>
+          <a:xfrm>
+            <a:off x="6400800" y="2267712"/>
+            <a:ext cx="4937760" cy="640080"/>
+          </a:xfrm>
+          <a:prstGeom prst="rect">
+            <a:avLst/>
+          </a:prstGeom>
+          <a:noFill/>
+        </p:spPr>
+        <p:txBody>
+          <a:bodyPr wrap="square" anchor="t" lIns="0" rIns="0" tIns="0" bIns="0">
+            <a:spAutoFit/>
+          </a:bodyPr>
+          <a:lstStyle/>
+          <a:p>
+            <a:pPr algn="l">
+              <a:lnSpc>
+                <a:spcPts val="1500"/>
+              </a:lnSpc>
+            </a:pPr>
+            <a:r>
+              <a:rPr sz="1100" b="1">
+                <a:solidFill>
+                  <a:srgbClr val="F4A261"/>
+                </a:solidFill>
+                <a:latin typeface="Microsoft JhengHei"/>
+                <a:ea typeface="Microsoft JhengHei"/>
+                <a:cs typeface="Microsoft JhengHei"/>
+              </a:rPr>
+              <a:t>緣由　</a:t>
+            </a:r>
+            <a:r>
+              <a:rPr sz="1100" b="0">
+                <a:solidFill>
+                  <a:srgbClr val="1A2233"/>
+                </a:solidFill>
+                <a:latin typeface="Microsoft JhengHei"/>
+                <a:ea typeface="Microsoft JhengHei"/>
+                <a:cs typeface="Microsoft JhengHei"/>
+              </a:rPr>
+              <a:t>本公司之子公司格帝控股股份有限公司偵測到部份伺服器遭受網路勒索病毒攻擊，致使包含ERP在內之部份…</a:t>
+            </a:r>
+          </a:p>
+        </p:txBody>
+      </p:sp>
+      <p:sp>
+        <p:nvSpPr>
+          <p:cNvPr id="18" name="TextBox 17"/>
+          <p:cNvSpPr txBox="1"/>
+          <p:nvPr/>
+        </p:nvSpPr>
+        <p:spPr>
+          <a:xfrm>
+            <a:off x="6400800" y="2926080"/>
+            <a:ext cx="4937760" cy="713232"/>
+          </a:xfrm>
+          <a:prstGeom prst="rect">
+            <a:avLst/>
+          </a:prstGeom>
+          <a:noFill/>
+        </p:spPr>
+        <p:txBody>
+          <a:bodyPr wrap="square" anchor="t" lIns="0" rIns="0" tIns="0" bIns="0">
+            <a:spAutoFit/>
+          </a:bodyPr>
+          <a:lstStyle/>
+          <a:p>
+            <a:pPr algn="l">
+              <a:lnSpc>
+                <a:spcPts val="1500"/>
+              </a:lnSpc>
+            </a:pPr>
+            <a:r>
+              <a:rPr sz="1100" b="1">
+                <a:solidFill>
+                  <a:srgbClr val="F4A261"/>
+                </a:solidFill>
+                <a:latin typeface="Microsoft JhengHei"/>
+                <a:ea typeface="Microsoft JhengHei"/>
+                <a:cs typeface="Microsoft JhengHei"/>
+              </a:rPr>
+              <a:t>因應　</a:t>
+            </a:r>
+            <a:r>
+              <a:rPr sz="1100" b="0">
+                <a:solidFill>
+                  <a:srgbClr val="1A2233"/>
+                </a:solidFill>
+                <a:latin typeface="Microsoft JhengHei"/>
+                <a:ea typeface="Microsoft JhengHei"/>
+                <a:cs typeface="Microsoft JhengHei"/>
+              </a:rPr>
+              <a:t>本公司及所屬子公司將持續密集監控，並強化網路與資訊基礎架構之管控，以確保資訊系統安全。</a:t>
+            </a:r>
+          </a:p>
+        </p:txBody>
+      </p:sp>
+      <p:sp>
+        <p:nvSpPr>
+          <p:cNvPr id="19" name="Rounded Rectangle 18"/>
+          <p:cNvSpPr/>
+          <p:nvPr/>
+        </p:nvSpPr>
+        <p:spPr>
+          <a:xfrm>
+            <a:off x="548640" y="3886200"/>
+            <a:ext cx="5394960" cy="2148840"/>
+          </a:xfrm>
+          <a:prstGeom prst="roundRect">
+            <a:avLst/>
+          </a:prstGeom>
+          <a:solidFill>
+            <a:srgbClr val="FFFFFF"/>
+          </a:solidFill>
+          <a:ln w="12700">
+            <a:solidFill>
+              <a:srgbClr val="DDE3EE"/>
+            </a:solidFill>
+          </a:ln>
+          <a:effectLst/>
+        </p:spPr>
+        <p:style>
+          <a:lnRef idx="1">
+            <a:schemeClr val="accent1"/>
+          </a:lnRef>
+          <a:fillRef idx="3">
+            <a:schemeClr val="accent1"/>
+          </a:fillRef>
+          <a:effectRef idx="2">
+            <a:schemeClr val="accent1"/>
+          </a:effectRef>
+          <a:fontRef idx="minor">
+            <a:schemeClr val="lt1"/>
+          </a:fontRef>
+        </p:style>
+        <p:txBody>
+          <a:bodyPr rtlCol="0" anchor="ctr"/>
+          <a:lstStyle/>
+          <a:p>
+            <a:pPr algn="ctr"/>
+          </a:p>
+        </p:txBody>
+      </p:sp>
+      <p:sp>
+        <p:nvSpPr>
+          <p:cNvPr id="20" name="Rectangle 19"/>
+          <p:cNvSpPr/>
+          <p:nvPr/>
+        </p:nvSpPr>
+        <p:spPr>
+          <a:xfrm>
+            <a:off x="548640" y="3886200"/>
+            <a:ext cx="5394960" cy="109728"/>
+          </a:xfrm>
+          <a:prstGeom prst="rect">
+            <a:avLst/>
+          </a:prstGeom>
+          <a:solidFill>
+            <a:srgbClr val="F4A261"/>
+          </a:solidFill>
+          <a:ln>
+            <a:noFill/>
+          </a:ln>
+          <a:effectLst/>
+        </p:spPr>
+        <p:style>
+          <a:lnRef idx="1">
+            <a:schemeClr val="accent1"/>
+          </a:lnRef>
+          <a:fillRef idx="3">
+            <a:schemeClr val="accent1"/>
+          </a:fillRef>
+          <a:effectRef idx="2">
+            <a:schemeClr val="accent1"/>
+          </a:effectRef>
+          <a:fontRef idx="minor">
+            <a:schemeClr val="lt1"/>
+          </a:fontRef>
+        </p:style>
+        <p:txBody>
+          <a:bodyPr rtlCol="0" anchor="ctr"/>
+          <a:lstStyle/>
+          <a:p>
+            <a:pPr algn="ctr"/>
+          </a:p>
+        </p:txBody>
+      </p:sp>
+      <p:sp>
+        <p:nvSpPr>
+          <p:cNvPr id="21" name="TextBox 20"/>
+          <p:cNvSpPr txBox="1"/>
+          <p:nvPr/>
+        </p:nvSpPr>
+        <p:spPr>
+          <a:xfrm>
+            <a:off x="777240" y="4105656"/>
+            <a:ext cx="3657600" cy="365760"/>
+          </a:xfrm>
+          <a:prstGeom prst="rect">
+            <a:avLst/>
+          </a:prstGeom>
+          <a:noFill/>
+        </p:spPr>
+        <p:txBody>
+          <a:bodyPr wrap="square" anchor="ctr" lIns="0" rIns="0" tIns="0" bIns="0">
+            <a:spAutoFit/>
+          </a:bodyPr>
+          <a:lstStyle/>
+          <a:p>
+            <a:pPr algn="l"/>
+            <a:r>
+              <a:rPr sz="1600" b="1">
+                <a:solidFill>
+                  <a:srgbClr val="1A2233"/>
+                </a:solidFill>
+                <a:latin typeface="Microsoft JhengHei"/>
+                <a:ea typeface="Microsoft JhengHei"/>
+                <a:cs typeface="Microsoft JhengHei"/>
+              </a:rPr>
+              <a:t>創新服務 </a:t>
+            </a:r>
+            <a:r>
+              <a:rPr sz="1300" b="0">
+                <a:solidFill>
+                  <a:srgbClr val="5C6679"/>
+                </a:solidFill>
+                <a:latin typeface="Microsoft JhengHei"/>
+                <a:ea typeface="Microsoft JhengHei"/>
+                <a:cs typeface="Microsoft JhengHei"/>
+              </a:rPr>
+              <a:t>7828</a:t>
+            </a:r>
+          </a:p>
+        </p:txBody>
+      </p:sp>
+      <p:sp>
+        <p:nvSpPr>
+          <p:cNvPr id="22" name="Rounded Rectangle 21"/>
+          <p:cNvSpPr/>
+          <p:nvPr/>
+        </p:nvSpPr>
+        <p:spPr>
+          <a:xfrm>
+            <a:off x="4526280" y="4123944"/>
+            <a:ext cx="1234440" cy="347472"/>
+          </a:xfrm>
+          <a:prstGeom prst="roundRect">
+            <a:avLst/>
+          </a:prstGeom>
+          <a:solidFill>
+            <a:srgbClr val="F4A261"/>
+          </a:solidFill>
+          <a:ln>
+            <a:noFill/>
+          </a:ln>
+          <a:effectLst/>
+        </p:spPr>
+        <p:style>
+          <a:lnRef idx="1">
+            <a:schemeClr val="accent1"/>
+          </a:lnRef>
+          <a:fillRef idx="3">
+            <a:schemeClr val="accent1"/>
+          </a:fillRef>
+          <a:effectRef idx="2">
+            <a:schemeClr val="accent1"/>
+          </a:effectRef>
+          <a:fontRef idx="minor">
+            <a:schemeClr val="lt1"/>
+          </a:fontRef>
+        </p:style>
+        <p:txBody>
+          <a:bodyPr rtlCol="0" anchor="ctr"/>
+          <a:lstStyle/>
+          <a:p>
+            <a:pPr algn="ctr"/>
+          </a:p>
+        </p:txBody>
+      </p:sp>
+      <p:sp>
+        <p:nvSpPr>
+          <p:cNvPr id="23" name="TextBox 22"/>
+          <p:cNvSpPr txBox="1"/>
+          <p:nvPr/>
+        </p:nvSpPr>
+        <p:spPr>
+          <a:xfrm>
+            <a:off x="4526280" y="4123944"/>
+            <a:ext cx="1234440" cy="347472"/>
+          </a:xfrm>
+          <a:prstGeom prst="rect">
+            <a:avLst/>
+          </a:prstGeom>
+          <a:noFill/>
+        </p:spPr>
+        <p:txBody>
+          <a:bodyPr wrap="square" anchor="ctr" lIns="0" rIns="0" tIns="0" bIns="0">
+            <a:spAutoFit/>
+          </a:bodyPr>
+          <a:lstStyle/>
+          <a:p>
+            <a:pPr algn="ctr"/>
+            <a:r>
+              <a:rPr sz="1050" b="1">
+                <a:solidFill>
+                  <a:srgbClr val="FFFFFF"/>
+                </a:solidFill>
+                <a:latin typeface="Microsoft JhengHei"/>
+                <a:ea typeface="Microsoft JhengHei"/>
+                <a:cs typeface="Microsoft JhengHei"/>
+              </a:rPr>
+              <a:t>勒索病毒/加密</a:t>
+            </a:r>
+          </a:p>
+        </p:txBody>
+      </p:sp>
+      <p:sp>
+        <p:nvSpPr>
+          <p:cNvPr id="24" name="TextBox 23"/>
+          <p:cNvSpPr txBox="1"/>
+          <p:nvPr/>
+        </p:nvSpPr>
+        <p:spPr>
+          <a:xfrm>
+            <a:off x="777240" y="4599432"/>
+            <a:ext cx="4937760" cy="640080"/>
+          </a:xfrm>
+          <a:prstGeom prst="rect">
+            <a:avLst/>
+          </a:prstGeom>
+          <a:noFill/>
+        </p:spPr>
+        <p:txBody>
+          <a:bodyPr wrap="square" anchor="t" lIns="0" rIns="0" tIns="0" bIns="0">
+            <a:spAutoFit/>
+          </a:bodyPr>
+          <a:lstStyle/>
+          <a:p>
+            <a:pPr algn="l">
+              <a:lnSpc>
+                <a:spcPts val="1500"/>
+              </a:lnSpc>
+            </a:pPr>
+            <a:r>
+              <a:rPr sz="1100" b="1">
+                <a:solidFill>
+                  <a:srgbClr val="F4A261"/>
+                </a:solidFill>
+                <a:latin typeface="Microsoft JhengHei"/>
+                <a:ea typeface="Microsoft JhengHei"/>
+                <a:cs typeface="Microsoft JhengHei"/>
+              </a:rPr>
+              <a:t>緣由　</a:t>
+            </a:r>
+            <a:r>
+              <a:rPr sz="1100" b="0">
+                <a:solidFill>
+                  <a:srgbClr val="1A2233"/>
+                </a:solidFill>
+                <a:latin typeface="Microsoft JhengHei"/>
+                <a:ea typeface="Microsoft JhengHei"/>
+                <a:cs typeface="Microsoft JhengHei"/>
+              </a:rPr>
+              <a:t>本公司於今日偵測到部份伺服器遭受網路勒索病毒攻擊，致使包含ERP在內之部份資訊系統無法正常運作。</a:t>
+            </a:r>
+          </a:p>
+        </p:txBody>
+      </p:sp>
+      <p:sp>
+        <p:nvSpPr>
+          <p:cNvPr id="25" name="TextBox 24"/>
+          <p:cNvSpPr txBox="1"/>
+          <p:nvPr/>
+        </p:nvSpPr>
+        <p:spPr>
+          <a:xfrm>
+            <a:off x="777240" y="5257800"/>
+            <a:ext cx="4937760" cy="713232"/>
+          </a:xfrm>
+          <a:prstGeom prst="rect">
+            <a:avLst/>
+          </a:prstGeom>
+          <a:noFill/>
+        </p:spPr>
+        <p:txBody>
+          <a:bodyPr wrap="square" anchor="t" lIns="0" rIns="0" tIns="0" bIns="0">
+            <a:spAutoFit/>
+          </a:bodyPr>
+          <a:lstStyle/>
+          <a:p>
+            <a:pPr algn="l">
+              <a:lnSpc>
+                <a:spcPts val="1500"/>
+              </a:lnSpc>
+            </a:pPr>
+            <a:r>
+              <a:rPr sz="1100" b="1">
+                <a:solidFill>
+                  <a:srgbClr val="F4A261"/>
+                </a:solidFill>
+                <a:latin typeface="Microsoft JhengHei"/>
+                <a:ea typeface="Microsoft JhengHei"/>
+                <a:cs typeface="Microsoft JhengHei"/>
+              </a:rPr>
+              <a:t>因應　</a:t>
+            </a:r>
+            <a:r>
+              <a:rPr sz="1100" b="0">
+                <a:solidFill>
+                  <a:srgbClr val="1A2233"/>
+                </a:solidFill>
+                <a:latin typeface="Microsoft JhengHei"/>
+                <a:ea typeface="Microsoft JhengHei"/>
+                <a:cs typeface="Microsoft JhengHei"/>
+              </a:rPr>
+              <a:t>本公司將持續密集監控，並強化網路與資訊基礎架構之管控，以確保資訊系統安全。</a:t>
+            </a:r>
+          </a:p>
+        </p:txBody>
+      </p:sp>
+      <p:sp>
+        <p:nvSpPr>
+          <p:cNvPr id="26" name="Rounded Rectangle 25"/>
+          <p:cNvSpPr/>
+          <p:nvPr/>
+        </p:nvSpPr>
+        <p:spPr>
+          <a:xfrm>
+            <a:off x="6172200" y="3886200"/>
+            <a:ext cx="5394960" cy="2148840"/>
+          </a:xfrm>
+          <a:prstGeom prst="roundRect">
+            <a:avLst/>
+          </a:prstGeom>
+          <a:solidFill>
+            <a:srgbClr val="FFFFFF"/>
+          </a:solidFill>
+          <a:ln w="12700">
+            <a:solidFill>
+              <a:srgbClr val="DDE3EE"/>
+            </a:solidFill>
+          </a:ln>
+          <a:effectLst/>
+        </p:spPr>
+        <p:style>
+          <a:lnRef idx="1">
+            <a:schemeClr val="accent1"/>
+          </a:lnRef>
+          <a:fillRef idx="3">
+            <a:schemeClr val="accent1"/>
+          </a:fillRef>
+          <a:effectRef idx="2">
+            <a:schemeClr val="accent1"/>
+          </a:effectRef>
+          <a:fontRef idx="minor">
+            <a:schemeClr val="lt1"/>
+          </a:fontRef>
+        </p:style>
+        <p:txBody>
+          <a:bodyPr rtlCol="0" anchor="ctr"/>
+          <a:lstStyle/>
+          <a:p>
+            <a:pPr algn="ctr"/>
+          </a:p>
+        </p:txBody>
+      </p:sp>
+      <p:sp>
+        <p:nvSpPr>
+          <p:cNvPr id="27" name="Rectangle 26"/>
+          <p:cNvSpPr/>
+          <p:nvPr/>
+        </p:nvSpPr>
+        <p:spPr>
+          <a:xfrm>
+            <a:off x="6172200" y="3886200"/>
+            <a:ext cx="5394960" cy="109728"/>
+          </a:xfrm>
+          <a:prstGeom prst="rect">
             <a:avLst/>
           </a:prstGeom>
           <a:solidFill>
@@ -12604,13 +13898,105 @@
       </p:sp>
       <p:sp>
         <p:nvSpPr>
-          <p:cNvPr id="16" name="TextBox 15"/>
+          <p:cNvPr id="28" name="TextBox 27"/>
           <p:cNvSpPr txBox="1"/>
           <p:nvPr/>
         </p:nvSpPr>
         <p:spPr>
           <a:xfrm>
-            <a:off x="10149840" y="1792224"/>
+            <a:off x="6400800" y="4105656"/>
+            <a:ext cx="3657600" cy="365760"/>
+          </a:xfrm>
+          <a:prstGeom prst="rect">
+            <a:avLst/>
+          </a:prstGeom>
+          <a:noFill/>
+        </p:spPr>
+        <p:txBody>
+          <a:bodyPr wrap="square" anchor="ctr" lIns="0" rIns="0" tIns="0" bIns="0">
+            <a:spAutoFit/>
+          </a:bodyPr>
+          <a:lstStyle/>
+          <a:p>
+            <a:pPr algn="l"/>
+            <a:r>
+              <a:rPr sz="1600" b="1">
+                <a:solidFill>
+                  <a:srgbClr val="1A2233"/>
+                </a:solidFill>
+                <a:latin typeface="Microsoft JhengHei"/>
+                <a:ea typeface="Microsoft JhengHei"/>
+                <a:cs typeface="Microsoft JhengHei"/>
+              </a:rPr>
+              <a:t>杭特 </a:t>
+            </a:r>
+            <a:r>
+              <a:rPr sz="1300" b="0">
+                <a:solidFill>
+                  <a:srgbClr val="5C6679"/>
+                </a:solidFill>
+                <a:latin typeface="Microsoft JhengHei"/>
+                <a:ea typeface="Microsoft JhengHei"/>
+                <a:cs typeface="Microsoft JhengHei"/>
+              </a:rPr>
+              <a:t>3297</a:t>
+            </a:r>
+          </a:p>
+        </p:txBody>
+      </p:sp>
+      <p:sp>
+        <p:nvSpPr>
+          <p:cNvPr id="29" name="Rounded Rectangle 28"/>
+          <p:cNvSpPr/>
+          <p:nvPr/>
+        </p:nvSpPr>
+        <p:spPr>
+          <a:xfrm>
+            <a:off x="10149840" y="4123944"/>
+            <a:ext cx="1234440" cy="347472"/>
+          </a:xfrm>
+          <a:prstGeom prst="roundRect">
+            <a:avLst/>
+          </a:prstGeom>
+          <a:solidFill>
+            <a:srgbClr val="E63946"/>
+          </a:solidFill>
+          <a:ln>
+            <a:noFill/>
+          </a:ln>
+          <a:effectLst/>
+        </p:spPr>
+        <p:style>
+          <a:lnRef idx="1">
+            <a:schemeClr val="accent1"/>
+          </a:lnRef>
+          <a:fillRef idx="3">
+            <a:schemeClr val="accent1"/>
+          </a:fillRef>
+          <a:effectRef idx="2">
+            <a:schemeClr val="accent1"/>
+          </a:effectRef>
+          <a:fontRef idx="minor">
+            <a:schemeClr val="lt1"/>
+          </a:fontRef>
+        </p:style>
+        <p:txBody>
+          <a:bodyPr rtlCol="0" anchor="ctr"/>
+          <a:lstStyle/>
+          <a:p>
+            <a:pPr algn="ctr"/>
+          </a:p>
+        </p:txBody>
+      </p:sp>
+      <p:sp>
+        <p:nvSpPr>
+          <p:cNvPr id="30" name="TextBox 29"/>
+          <p:cNvSpPr txBox="1"/>
+          <p:nvPr/>
+        </p:nvSpPr>
+        <p:spPr>
+          <a:xfrm>
+            <a:off x="10149840" y="4123944"/>
             <a:ext cx="1234440" cy="347472"/>
           </a:xfrm>
           <a:prstGeom prst="rect">
@@ -12641,13 +14027,13 @@
       </p:sp>
       <p:sp>
         <p:nvSpPr>
-          <p:cNvPr id="17" name="TextBox 16"/>
+          <p:cNvPr id="31" name="TextBox 30"/>
           <p:cNvSpPr txBox="1"/>
           <p:nvPr/>
         </p:nvSpPr>
         <p:spPr>
           <a:xfrm>
-            <a:off x="6400800" y="2267712"/>
+            <a:off x="6400800" y="4599432"/>
             <a:ext cx="4937760" cy="640080"/>
           </a:xfrm>
           <a:prstGeom prst="rect">
@@ -12693,13 +14079,13 @@
       </p:sp>
       <p:sp>
         <p:nvSpPr>
-          <p:cNvPr id="18" name="TextBox 17"/>
+          <p:cNvPr id="32" name="TextBox 31"/>
           <p:cNvSpPr txBox="1"/>
           <p:nvPr/>
         </p:nvSpPr>
         <p:spPr>
           <a:xfrm>
-            <a:off x="6400800" y="2926080"/>
+            <a:off x="6400800" y="5257800"/>
             <a:ext cx="4937760" cy="713232"/>
           </a:xfrm>
           <a:prstGeom prst="rect">

--- a/資安事件因應分析.pptx
+++ b/資安事件因應分析.pptx
@@ -197,13 +197,13 @@
                 <c:formatCode>General</c:formatCode>
                 <c:ptCount val="4"/>
                 <c:pt idx="0">
-                  <c:v>7</c:v>
+                  <c:v>6</c:v>
                 </c:pt>
                 <c:pt idx="1">
                   <c:v>3</c:v>
                 </c:pt>
                 <c:pt idx="2">
-                  <c:v>1</c:v>
+                  <c:v>2</c:v>
                 </c:pt>
                 <c:pt idx="3">
                   <c:v>1</c:v>
@@ -3543,7 +3543,7 @@
                 <a:ea typeface="Microsoft JhengHei"/>
                 <a:cs typeface="Microsoft JhengHei"/>
               </a:rPr>
-              <a:t>資料期間 2026-08-30 ~ 2026-09-30　｜　MOPS 重大訊息全文檢索　｜　12 家公司</a:t>
+              <a:t>資料期間 2026-09-02 ~ 2026-10-02　｜　MOPS 重大訊息全文檢索　｜　12 家公司</a:t>
             </a:r>
           </a:p>
         </p:txBody>
@@ -4287,7 +4287,7 @@
                           <a:ea typeface="Microsoft JhengHei"/>
                           <a:cs typeface="Microsoft JhengHei"/>
                         </a:rPr>
-                        <a:t>神腦</a:t>
+                        <a:t>安心</a:t>
                       </a:r>
                     </a:p>
                   </a:txBody>
@@ -4311,7 +4311,251 @@
                           <a:ea typeface="Microsoft JhengHei"/>
                           <a:cs typeface="Microsoft JhengHei"/>
                         </a:rPr>
+                        <a:t>1259</a:t>
+                      </a:r>
+                    </a:p>
+                  </a:txBody>
+                  <a:tcPr anchor="ctr" marL="73152" marT="9144" marB="9144">
+                    <a:solidFill>
+                      <a:srgbClr val="FFFFFF"/>
+                    </a:solidFill>
+                  </a:tcPr>
+                </a:tc>
+                <a:tc>
+                  <a:txBody>
+                    <a:bodyPr/>
+                    <a:lstStyle/>
+                    <a:p>
+                      <a:r>
+                        <a:rPr sz="1150" b="0">
+                          <a:solidFill>
+                            <a:srgbClr val="1A2233"/>
+                          </a:solidFill>
+                          <a:latin typeface="Microsoft JhengHei"/>
+                          <a:ea typeface="Microsoft JhengHei"/>
+                          <a:cs typeface="Microsoft JhengHei"/>
+                        </a:rPr>
+                        <a:t>10/01</a:t>
+                      </a:r>
+                    </a:p>
+                  </a:txBody>
+                  <a:tcPr anchor="ctr" marL="73152" marT="9144" marB="9144">
+                    <a:solidFill>
+                      <a:srgbClr val="FFFFFF"/>
+                    </a:solidFill>
+                  </a:tcPr>
+                </a:tc>
+                <a:tc>
+                  <a:txBody>
+                    <a:bodyPr/>
+                    <a:lstStyle/>
+                    <a:p>
+                      <a:r>
+                        <a:rPr sz="1150" b="1">
+                          <a:solidFill>
+                            <a:srgbClr val="27A6C4"/>
+                          </a:solidFill>
+                          <a:latin typeface="Microsoft JhengHei"/>
+                          <a:ea typeface="Microsoft JhengHei"/>
+                          <a:cs typeface="Microsoft JhengHei"/>
+                        </a:rPr>
+                        <a:t>個資外洩</a:t>
+                      </a:r>
+                    </a:p>
+                  </a:txBody>
+                  <a:tcPr anchor="ctr" marL="73152" marT="9144" marB="9144">
+                    <a:solidFill>
+                      <a:srgbClr val="FFFFFF"/>
+                    </a:solidFill>
+                  </a:tcPr>
+                </a:tc>
+                <a:tc>
+                  <a:txBody>
+                    <a:bodyPr/>
+                    <a:lstStyle/>
+                    <a:p>
+                      <a:r>
+                        <a:rPr sz="1150" b="0">
+                          <a:solidFill>
+                            <a:srgbClr val="1A2233"/>
+                          </a:solidFill>
+                          <a:latin typeface="Microsoft JhengHei"/>
+                          <a:ea typeface="Microsoft JhengHei"/>
+                          <a:cs typeface="Microsoft JhengHei"/>
+                        </a:rPr>
+                        <a:t>截至目前為止對公司財務及業務並無重大影響。</a:t>
+                      </a:r>
+                    </a:p>
+                  </a:txBody>
+                  <a:tcPr anchor="ctr" marL="73152" marT="9144" marB="9144">
+                    <a:solidFill>
+                      <a:srgbClr val="FFFFFF"/>
+                    </a:solidFill>
+                  </a:tcPr>
+                </a:tc>
+              </a:tr>
+              <a:tr h="274320">
+                <a:tc>
+                  <a:txBody>
+                    <a:bodyPr/>
+                    <a:lstStyle/>
+                    <a:p>
+                      <a:r>
+                        <a:rPr sz="1150" b="0">
+                          <a:solidFill>
+                            <a:srgbClr val="1A2233"/>
+                          </a:solidFill>
+                          <a:latin typeface="Microsoft JhengHei"/>
+                          <a:ea typeface="Microsoft JhengHei"/>
+                          <a:cs typeface="Microsoft JhengHei"/>
+                        </a:rPr>
+                        <a:t>神腦</a:t>
+                      </a:r>
+                    </a:p>
+                  </a:txBody>
+                  <a:tcPr anchor="ctr" marL="73152" marT="9144" marB="9144">
+                    <a:solidFill>
+                      <a:srgbClr val="EEF2F9"/>
+                    </a:solidFill>
+                  </a:tcPr>
+                </a:tc>
+                <a:tc>
+                  <a:txBody>
+                    <a:bodyPr/>
+                    <a:lstStyle/>
+                    <a:p>
+                      <a:r>
+                        <a:rPr sz="1150" b="0">
+                          <a:solidFill>
+                            <a:srgbClr val="1A2233"/>
+                          </a:solidFill>
+                          <a:latin typeface="Microsoft JhengHei"/>
+                          <a:ea typeface="Microsoft JhengHei"/>
+                          <a:cs typeface="Microsoft JhengHei"/>
+                        </a:rPr>
                         <a:t>2450</a:t>
+                      </a:r>
+                    </a:p>
+                  </a:txBody>
+                  <a:tcPr anchor="ctr" marL="73152" marT="9144" marB="9144">
+                    <a:solidFill>
+                      <a:srgbClr val="EEF2F9"/>
+                    </a:solidFill>
+                  </a:tcPr>
+                </a:tc>
+                <a:tc>
+                  <a:txBody>
+                    <a:bodyPr/>
+                    <a:lstStyle/>
+                    <a:p>
+                      <a:r>
+                        <a:rPr sz="1150" b="0">
+                          <a:solidFill>
+                            <a:srgbClr val="1A2233"/>
+                          </a:solidFill>
+                          <a:latin typeface="Microsoft JhengHei"/>
+                          <a:ea typeface="Microsoft JhengHei"/>
+                          <a:cs typeface="Microsoft JhengHei"/>
+                        </a:rPr>
+                        <a:t>09/29</a:t>
+                      </a:r>
+                    </a:p>
+                  </a:txBody>
+                  <a:tcPr anchor="ctr" marL="73152" marT="9144" marB="9144">
+                    <a:solidFill>
+                      <a:srgbClr val="EEF2F9"/>
+                    </a:solidFill>
+                  </a:tcPr>
+                </a:tc>
+                <a:tc>
+                  <a:txBody>
+                    <a:bodyPr/>
+                    <a:lstStyle/>
+                    <a:p>
+                      <a:r>
+                        <a:rPr sz="1150" b="1">
+                          <a:solidFill>
+                            <a:srgbClr val="E63946"/>
+                          </a:solidFill>
+                          <a:latin typeface="Microsoft JhengHei"/>
+                          <a:ea typeface="Microsoft JhengHei"/>
+                          <a:cs typeface="Microsoft JhengHei"/>
+                        </a:rPr>
+                        <a:t>駭客攻擊</a:t>
+                      </a:r>
+                    </a:p>
+                  </a:txBody>
+                  <a:tcPr anchor="ctr" marL="73152" marT="9144" marB="9144">
+                    <a:solidFill>
+                      <a:srgbClr val="EEF2F9"/>
+                    </a:solidFill>
+                  </a:tcPr>
+                </a:tc>
+                <a:tc>
+                  <a:txBody>
+                    <a:bodyPr/>
+                    <a:lstStyle/>
+                    <a:p>
+                      <a:r>
+                        <a:rPr sz="1150" b="0">
+                          <a:solidFill>
+                            <a:srgbClr val="1A2233"/>
+                          </a:solidFill>
+                          <a:latin typeface="Microsoft JhengHei"/>
+                          <a:ea typeface="Microsoft JhengHei"/>
+                          <a:cs typeface="Microsoft JhengHei"/>
+                        </a:rPr>
+                        <a:t>評估對本公司營運、財務及服務提供無重大影響。</a:t>
+                      </a:r>
+                    </a:p>
+                  </a:txBody>
+                  <a:tcPr anchor="ctr" marL="73152" marT="9144" marB="9144">
+                    <a:solidFill>
+                      <a:srgbClr val="EEF2F9"/>
+                    </a:solidFill>
+                  </a:tcPr>
+                </a:tc>
+              </a:tr>
+              <a:tr h="274320">
+                <a:tc>
+                  <a:txBody>
+                    <a:bodyPr/>
+                    <a:lstStyle/>
+                    <a:p>
+                      <a:r>
+                        <a:rPr sz="1150" b="0">
+                          <a:solidFill>
+                            <a:srgbClr val="1A2233"/>
+                          </a:solidFill>
+                          <a:latin typeface="Microsoft JhengHei"/>
+                          <a:ea typeface="Microsoft JhengHei"/>
+                          <a:cs typeface="Microsoft JhengHei"/>
+                        </a:rPr>
+                        <a:t>鈊象</a:t>
+                      </a:r>
+                    </a:p>
+                  </a:txBody>
+                  <a:tcPr anchor="ctr" marL="73152" marT="9144" marB="9144">
+                    <a:solidFill>
+                      <a:srgbClr val="FFFFFF"/>
+                    </a:solidFill>
+                  </a:tcPr>
+                </a:tc>
+                <a:tc>
+                  <a:txBody>
+                    <a:bodyPr/>
+                    <a:lstStyle/>
+                    <a:p>
+                      <a:r>
+                        <a:rPr sz="1150" b="0">
+                          <a:solidFill>
+                            <a:srgbClr val="1A2233"/>
+                          </a:solidFill>
+                          <a:latin typeface="Microsoft JhengHei"/>
+                          <a:ea typeface="Microsoft JhengHei"/>
+                          <a:cs typeface="Microsoft JhengHei"/>
+                        </a:rPr>
+                        <a:t>3293</a:t>
                       </a:r>
                     </a:p>
                   </a:txBody>
@@ -4336,6 +4580,250 @@
                           <a:cs typeface="Microsoft JhengHei"/>
                         </a:rPr>
                         <a:t>09/29</a:t>
+                      </a:r>
+                    </a:p>
+                  </a:txBody>
+                  <a:tcPr anchor="ctr" marL="73152" marT="9144" marB="9144">
+                    <a:solidFill>
+                      <a:srgbClr val="FFFFFF"/>
+                    </a:solidFill>
+                  </a:tcPr>
+                </a:tc>
+                <a:tc>
+                  <a:txBody>
+                    <a:bodyPr/>
+                    <a:lstStyle/>
+                    <a:p>
+                      <a:r>
+                        <a:rPr sz="1150" b="1">
+                          <a:solidFill>
+                            <a:srgbClr val="5C6679"/>
+                          </a:solidFill>
+                          <a:latin typeface="Microsoft JhengHei"/>
+                          <a:ea typeface="Microsoft JhengHei"/>
+                          <a:cs typeface="Microsoft JhengHei"/>
+                        </a:rPr>
+                        <a:t>其他</a:t>
+                      </a:r>
+                    </a:p>
+                  </a:txBody>
+                  <a:tcPr anchor="ctr" marL="73152" marT="9144" marB="9144">
+                    <a:solidFill>
+                      <a:srgbClr val="FFFFFF"/>
+                    </a:solidFill>
+                  </a:tcPr>
+                </a:tc>
+                <a:tc>
+                  <a:txBody>
+                    <a:bodyPr/>
+                    <a:lstStyle/>
+                    <a:p>
+                      <a:r>
+                        <a:rPr sz="1150" b="0">
+                          <a:solidFill>
+                            <a:srgbClr val="1A2233"/>
+                          </a:solidFill>
+                          <a:latin typeface="Microsoft JhengHei"/>
+                          <a:ea typeface="Microsoft JhengHei"/>
+                          <a:cs typeface="Microsoft JhengHei"/>
+                        </a:rPr>
+                        <a:t>目前評估對公司營運尚無重大影響。</a:t>
+                      </a:r>
+                    </a:p>
+                  </a:txBody>
+                  <a:tcPr anchor="ctr" marL="73152" marT="9144" marB="9144">
+                    <a:solidFill>
+                      <a:srgbClr val="FFFFFF"/>
+                    </a:solidFill>
+                  </a:tcPr>
+                </a:tc>
+              </a:tr>
+              <a:tr h="274320">
+                <a:tc>
+                  <a:txBody>
+                    <a:bodyPr/>
+                    <a:lstStyle/>
+                    <a:p>
+                      <a:r>
+                        <a:rPr sz="1150" b="0">
+                          <a:solidFill>
+                            <a:srgbClr val="1A2233"/>
+                          </a:solidFill>
+                          <a:latin typeface="Microsoft JhengHei"/>
+                          <a:ea typeface="Microsoft JhengHei"/>
+                          <a:cs typeface="Microsoft JhengHei"/>
+                        </a:rPr>
+                        <a:t>柏文</a:t>
+                      </a:r>
+                    </a:p>
+                  </a:txBody>
+                  <a:tcPr anchor="ctr" marL="73152" marT="9144" marB="9144">
+                    <a:solidFill>
+                      <a:srgbClr val="EEF2F9"/>
+                    </a:solidFill>
+                  </a:tcPr>
+                </a:tc>
+                <a:tc>
+                  <a:txBody>
+                    <a:bodyPr/>
+                    <a:lstStyle/>
+                    <a:p>
+                      <a:r>
+                        <a:rPr sz="1150" b="0">
+                          <a:solidFill>
+                            <a:srgbClr val="1A2233"/>
+                          </a:solidFill>
+                          <a:latin typeface="Microsoft JhengHei"/>
+                          <a:ea typeface="Microsoft JhengHei"/>
+                          <a:cs typeface="Microsoft JhengHei"/>
+                        </a:rPr>
+                        <a:t>8462</a:t>
+                      </a:r>
+                    </a:p>
+                  </a:txBody>
+                  <a:tcPr anchor="ctr" marL="73152" marT="9144" marB="9144">
+                    <a:solidFill>
+                      <a:srgbClr val="EEF2F9"/>
+                    </a:solidFill>
+                  </a:tcPr>
+                </a:tc>
+                <a:tc>
+                  <a:txBody>
+                    <a:bodyPr/>
+                    <a:lstStyle/>
+                    <a:p>
+                      <a:r>
+                        <a:rPr sz="1150" b="0">
+                          <a:solidFill>
+                            <a:srgbClr val="1A2233"/>
+                          </a:solidFill>
+                          <a:latin typeface="Microsoft JhengHei"/>
+                          <a:ea typeface="Microsoft JhengHei"/>
+                          <a:cs typeface="Microsoft JhengHei"/>
+                        </a:rPr>
+                        <a:t>09/23</a:t>
+                      </a:r>
+                    </a:p>
+                  </a:txBody>
+                  <a:tcPr anchor="ctr" marL="73152" marT="9144" marB="9144">
+                    <a:solidFill>
+                      <a:srgbClr val="EEF2F9"/>
+                    </a:solidFill>
+                  </a:tcPr>
+                </a:tc>
+                <a:tc>
+                  <a:txBody>
+                    <a:bodyPr/>
+                    <a:lstStyle/>
+                    <a:p>
+                      <a:r>
+                        <a:rPr sz="1150" b="1">
+                          <a:solidFill>
+                            <a:srgbClr val="27A6C4"/>
+                          </a:solidFill>
+                          <a:latin typeface="Microsoft JhengHei"/>
+                          <a:ea typeface="Microsoft JhengHei"/>
+                          <a:cs typeface="Microsoft JhengHei"/>
+                        </a:rPr>
+                        <a:t>個資外洩</a:t>
+                      </a:r>
+                    </a:p>
+                  </a:txBody>
+                  <a:tcPr anchor="ctr" marL="73152" marT="9144" marB="9144">
+                    <a:solidFill>
+                      <a:srgbClr val="EEF2F9"/>
+                    </a:solidFill>
+                  </a:tcPr>
+                </a:tc>
+                <a:tc>
+                  <a:txBody>
+                    <a:bodyPr/>
+                    <a:lstStyle/>
+                    <a:p>
+                      <a:r>
+                        <a:rPr sz="1150" b="0">
+                          <a:solidFill>
+                            <a:srgbClr val="1A2233"/>
+                          </a:solidFill>
+                          <a:latin typeface="Microsoft JhengHei"/>
+                          <a:ea typeface="Microsoft JhengHei"/>
+                          <a:cs typeface="Microsoft JhengHei"/>
+                        </a:rPr>
+                        <a:t>目前評估對公司營運無重大影響。</a:t>
+                      </a:r>
+                    </a:p>
+                  </a:txBody>
+                  <a:tcPr anchor="ctr" marL="73152" marT="9144" marB="9144">
+                    <a:solidFill>
+                      <a:srgbClr val="EEF2F9"/>
+                    </a:solidFill>
+                  </a:tcPr>
+                </a:tc>
+              </a:tr>
+              <a:tr h="274320">
+                <a:tc>
+                  <a:txBody>
+                    <a:bodyPr/>
+                    <a:lstStyle/>
+                    <a:p>
+                      <a:r>
+                        <a:rPr sz="1150" b="0">
+                          <a:solidFill>
+                            <a:srgbClr val="1A2233"/>
+                          </a:solidFill>
+                          <a:latin typeface="Microsoft JhengHei"/>
+                          <a:ea typeface="Microsoft JhengHei"/>
+                          <a:cs typeface="Microsoft JhengHei"/>
+                        </a:rPr>
+                        <a:t>友訊</a:t>
+                      </a:r>
+                    </a:p>
+                  </a:txBody>
+                  <a:tcPr anchor="ctr" marL="73152" marT="9144" marB="9144">
+                    <a:solidFill>
+                      <a:srgbClr val="FFFFFF"/>
+                    </a:solidFill>
+                  </a:tcPr>
+                </a:tc>
+                <a:tc>
+                  <a:txBody>
+                    <a:bodyPr/>
+                    <a:lstStyle/>
+                    <a:p>
+                      <a:r>
+                        <a:rPr sz="1150" b="0">
+                          <a:solidFill>
+                            <a:srgbClr val="1A2233"/>
+                          </a:solidFill>
+                          <a:latin typeface="Microsoft JhengHei"/>
+                          <a:ea typeface="Microsoft JhengHei"/>
+                          <a:cs typeface="Microsoft JhengHei"/>
+                        </a:rPr>
+                        <a:t>2332</a:t>
+                      </a:r>
+                    </a:p>
+                  </a:txBody>
+                  <a:tcPr anchor="ctr" marL="73152" marT="9144" marB="9144">
+                    <a:solidFill>
+                      <a:srgbClr val="FFFFFF"/>
+                    </a:solidFill>
+                  </a:tcPr>
+                </a:tc>
+                <a:tc>
+                  <a:txBody>
+                    <a:bodyPr/>
+                    <a:lstStyle/>
+                    <a:p>
+                      <a:r>
+                        <a:rPr sz="1150" b="0">
+                          <a:solidFill>
+                            <a:srgbClr val="1A2233"/>
+                          </a:solidFill>
+                          <a:latin typeface="Microsoft JhengHei"/>
+                          <a:ea typeface="Microsoft JhengHei"/>
+                          <a:cs typeface="Microsoft JhengHei"/>
+                        </a:rPr>
+                        <a:t>09/18</a:t>
                       </a:r>
                     </a:p>
                   </a:txBody>
@@ -4383,7 +4871,7 @@
                           <a:ea typeface="Microsoft JhengHei"/>
                           <a:cs typeface="Microsoft JhengHei"/>
                         </a:rPr>
-                        <a:t>評估對本公司營運、財務及服務提供無重大影響。</a:t>
+                        <a:t>目前評估對公司營運尚無重大影響</a:t>
                       </a:r>
                     </a:p>
                   </a:txBody>
@@ -4409,7 +4897,7 @@
                           <a:ea typeface="Microsoft JhengHei"/>
                           <a:cs typeface="Microsoft JhengHei"/>
                         </a:rPr>
-                        <a:t>鈊象</a:t>
+                        <a:t>長榮航</a:t>
                       </a:r>
                     </a:p>
                   </a:txBody>
@@ -4433,7 +4921,7 @@
                           <a:ea typeface="Microsoft JhengHei"/>
                           <a:cs typeface="Microsoft JhengHei"/>
                         </a:rPr>
-                        <a:t>3293</a:t>
+                        <a:t>2618</a:t>
                       </a:r>
                     </a:p>
                   </a:txBody>
@@ -4457,251 +4945,7 @@
                           <a:ea typeface="Microsoft JhengHei"/>
                           <a:cs typeface="Microsoft JhengHei"/>
                         </a:rPr>
-                        <a:t>09/29</a:t>
-                      </a:r>
-                    </a:p>
-                  </a:txBody>
-                  <a:tcPr anchor="ctr" marL="73152" marT="9144" marB="9144">
-                    <a:solidFill>
-                      <a:srgbClr val="EEF2F9"/>
-                    </a:solidFill>
-                  </a:tcPr>
-                </a:tc>
-                <a:tc>
-                  <a:txBody>
-                    <a:bodyPr/>
-                    <a:lstStyle/>
-                    <a:p>
-                      <a:r>
-                        <a:rPr sz="1150" b="1">
-                          <a:solidFill>
-                            <a:srgbClr val="5C6679"/>
-                          </a:solidFill>
-                          <a:latin typeface="Microsoft JhengHei"/>
-                          <a:ea typeface="Microsoft JhengHei"/>
-                          <a:cs typeface="Microsoft JhengHei"/>
-                        </a:rPr>
-                        <a:t>其他</a:t>
-                      </a:r>
-                    </a:p>
-                  </a:txBody>
-                  <a:tcPr anchor="ctr" marL="73152" marT="9144" marB="9144">
-                    <a:solidFill>
-                      <a:srgbClr val="EEF2F9"/>
-                    </a:solidFill>
-                  </a:tcPr>
-                </a:tc>
-                <a:tc>
-                  <a:txBody>
-                    <a:bodyPr/>
-                    <a:lstStyle/>
-                    <a:p>
-                      <a:r>
-                        <a:rPr sz="1150" b="0">
-                          <a:solidFill>
-                            <a:srgbClr val="1A2233"/>
-                          </a:solidFill>
-                          <a:latin typeface="Microsoft JhengHei"/>
-                          <a:ea typeface="Microsoft JhengHei"/>
-                          <a:cs typeface="Microsoft JhengHei"/>
-                        </a:rPr>
-                        <a:t>目前評估對公司營運尚無重大影響。</a:t>
-                      </a:r>
-                    </a:p>
-                  </a:txBody>
-                  <a:tcPr anchor="ctr" marL="73152" marT="9144" marB="9144">
-                    <a:solidFill>
-                      <a:srgbClr val="EEF2F9"/>
-                    </a:solidFill>
-                  </a:tcPr>
-                </a:tc>
-              </a:tr>
-              <a:tr h="274320">
-                <a:tc>
-                  <a:txBody>
-                    <a:bodyPr/>
-                    <a:lstStyle/>
-                    <a:p>
-                      <a:r>
-                        <a:rPr sz="1150" b="0">
-                          <a:solidFill>
-                            <a:srgbClr val="1A2233"/>
-                          </a:solidFill>
-                          <a:latin typeface="Microsoft JhengHei"/>
-                          <a:ea typeface="Microsoft JhengHei"/>
-                          <a:cs typeface="Microsoft JhengHei"/>
-                        </a:rPr>
-                        <a:t>柏文</a:t>
-                      </a:r>
-                    </a:p>
-                  </a:txBody>
-                  <a:tcPr anchor="ctr" marL="73152" marT="9144" marB="9144">
-                    <a:solidFill>
-                      <a:srgbClr val="FFFFFF"/>
-                    </a:solidFill>
-                  </a:tcPr>
-                </a:tc>
-                <a:tc>
-                  <a:txBody>
-                    <a:bodyPr/>
-                    <a:lstStyle/>
-                    <a:p>
-                      <a:r>
-                        <a:rPr sz="1150" b="0">
-                          <a:solidFill>
-                            <a:srgbClr val="1A2233"/>
-                          </a:solidFill>
-                          <a:latin typeface="Microsoft JhengHei"/>
-                          <a:ea typeface="Microsoft JhengHei"/>
-                          <a:cs typeface="Microsoft JhengHei"/>
-                        </a:rPr>
-                        <a:t>8462</a:t>
-                      </a:r>
-                    </a:p>
-                  </a:txBody>
-                  <a:tcPr anchor="ctr" marL="73152" marT="9144" marB="9144">
-                    <a:solidFill>
-                      <a:srgbClr val="FFFFFF"/>
-                    </a:solidFill>
-                  </a:tcPr>
-                </a:tc>
-                <a:tc>
-                  <a:txBody>
-                    <a:bodyPr/>
-                    <a:lstStyle/>
-                    <a:p>
-                      <a:r>
-                        <a:rPr sz="1150" b="0">
-                          <a:solidFill>
-                            <a:srgbClr val="1A2233"/>
-                          </a:solidFill>
-                          <a:latin typeface="Microsoft JhengHei"/>
-                          <a:ea typeface="Microsoft JhengHei"/>
-                          <a:cs typeface="Microsoft JhengHei"/>
-                        </a:rPr>
-                        <a:t>09/23</a:t>
-                      </a:r>
-                    </a:p>
-                  </a:txBody>
-                  <a:tcPr anchor="ctr" marL="73152" marT="9144" marB="9144">
-                    <a:solidFill>
-                      <a:srgbClr val="FFFFFF"/>
-                    </a:solidFill>
-                  </a:tcPr>
-                </a:tc>
-                <a:tc>
-                  <a:txBody>
-                    <a:bodyPr/>
-                    <a:lstStyle/>
-                    <a:p>
-                      <a:r>
-                        <a:rPr sz="1150" b="1">
-                          <a:solidFill>
-                            <a:srgbClr val="27A6C4"/>
-                          </a:solidFill>
-                          <a:latin typeface="Microsoft JhengHei"/>
-                          <a:ea typeface="Microsoft JhengHei"/>
-                          <a:cs typeface="Microsoft JhengHei"/>
-                        </a:rPr>
-                        <a:t>個資外洩</a:t>
-                      </a:r>
-                    </a:p>
-                  </a:txBody>
-                  <a:tcPr anchor="ctr" marL="73152" marT="9144" marB="9144">
-                    <a:solidFill>
-                      <a:srgbClr val="FFFFFF"/>
-                    </a:solidFill>
-                  </a:tcPr>
-                </a:tc>
-                <a:tc>
-                  <a:txBody>
-                    <a:bodyPr/>
-                    <a:lstStyle/>
-                    <a:p>
-                      <a:r>
-                        <a:rPr sz="1150" b="0">
-                          <a:solidFill>
-                            <a:srgbClr val="1A2233"/>
-                          </a:solidFill>
-                          <a:latin typeface="Microsoft JhengHei"/>
-                          <a:ea typeface="Microsoft JhengHei"/>
-                          <a:cs typeface="Microsoft JhengHei"/>
-                        </a:rPr>
-                        <a:t>目前評估對公司營運無重大影響。</a:t>
-                      </a:r>
-                    </a:p>
-                  </a:txBody>
-                  <a:tcPr anchor="ctr" marL="73152" marT="9144" marB="9144">
-                    <a:solidFill>
-                      <a:srgbClr val="FFFFFF"/>
-                    </a:solidFill>
-                  </a:tcPr>
-                </a:tc>
-              </a:tr>
-              <a:tr h="274320">
-                <a:tc>
-                  <a:txBody>
-                    <a:bodyPr/>
-                    <a:lstStyle/>
-                    <a:p>
-                      <a:r>
-                        <a:rPr sz="1150" b="0">
-                          <a:solidFill>
-                            <a:srgbClr val="1A2233"/>
-                          </a:solidFill>
-                          <a:latin typeface="Microsoft JhengHei"/>
-                          <a:ea typeface="Microsoft JhengHei"/>
-                          <a:cs typeface="Microsoft JhengHei"/>
-                        </a:rPr>
-                        <a:t>友訊</a:t>
-                      </a:r>
-                    </a:p>
-                  </a:txBody>
-                  <a:tcPr anchor="ctr" marL="73152" marT="9144" marB="9144">
-                    <a:solidFill>
-                      <a:srgbClr val="EEF2F9"/>
-                    </a:solidFill>
-                  </a:tcPr>
-                </a:tc>
-                <a:tc>
-                  <a:txBody>
-                    <a:bodyPr/>
-                    <a:lstStyle/>
-                    <a:p>
-                      <a:r>
-                        <a:rPr sz="1150" b="0">
-                          <a:solidFill>
-                            <a:srgbClr val="1A2233"/>
-                          </a:solidFill>
-                          <a:latin typeface="Microsoft JhengHei"/>
-                          <a:ea typeface="Microsoft JhengHei"/>
-                          <a:cs typeface="Microsoft JhengHei"/>
-                        </a:rPr>
-                        <a:t>2332</a:t>
-                      </a:r>
-                    </a:p>
-                  </a:txBody>
-                  <a:tcPr anchor="ctr" marL="73152" marT="9144" marB="9144">
-                    <a:solidFill>
-                      <a:srgbClr val="EEF2F9"/>
-                    </a:solidFill>
-                  </a:tcPr>
-                </a:tc>
-                <a:tc>
-                  <a:txBody>
-                    <a:bodyPr/>
-                    <a:lstStyle/>
-                    <a:p>
-                      <a:r>
-                        <a:rPr sz="1150" b="0">
-                          <a:solidFill>
-                            <a:srgbClr val="1A2233"/>
-                          </a:solidFill>
-                          <a:latin typeface="Microsoft JhengHei"/>
-                          <a:ea typeface="Microsoft JhengHei"/>
-                          <a:cs typeface="Microsoft JhengHei"/>
-                        </a:rPr>
-                        <a:t>09/18</a:t>
+                        <a:t>09/15</a:t>
                       </a:r>
                     </a:p>
                   </a:txBody>
@@ -4749,7 +4993,7 @@
                           <a:ea typeface="Microsoft JhengHei"/>
                           <a:cs typeface="Microsoft JhengHei"/>
                         </a:rPr>
-                        <a:t>目前評估對公司營運尚無重大影響</a:t>
+                        <a:t>目前評估對公司所有業務均不受影響。</a:t>
                       </a:r>
                     </a:p>
                   </a:txBody>
@@ -4775,7 +5019,7 @@
                           <a:ea typeface="Microsoft JhengHei"/>
                           <a:cs typeface="Microsoft JhengHei"/>
                         </a:rPr>
-                        <a:t>長榮航</a:t>
+                        <a:t>長榮航太</a:t>
                       </a:r>
                     </a:p>
                   </a:txBody>
@@ -4799,7 +5043,7 @@
                           <a:ea typeface="Microsoft JhengHei"/>
                           <a:cs typeface="Microsoft JhengHei"/>
                         </a:rPr>
-                        <a:t>2618</a:t>
+                        <a:t>2645</a:t>
                       </a:r>
                     </a:p>
                   </a:txBody>
@@ -4871,7 +5115,7 @@
                           <a:ea typeface="Microsoft JhengHei"/>
                           <a:cs typeface="Microsoft JhengHei"/>
                         </a:rPr>
-                        <a:t>目前評估對公司所有業務均不受影響。</a:t>
+                        <a:t>經初步評估，核心資訊系統及營運業務運作皆維持正常，尚未發現公司及涉客…</a:t>
                       </a:r>
                     </a:p>
                   </a:txBody>
@@ -4897,7 +5141,7 @@
                           <a:ea typeface="Microsoft JhengHei"/>
                           <a:cs typeface="Microsoft JhengHei"/>
                         </a:rPr>
-                        <a:t>長榮航太</a:t>
+                        <a:t>崴寶</a:t>
                       </a:r>
                     </a:p>
                   </a:txBody>
@@ -4921,7 +5165,7 @@
                           <a:ea typeface="Microsoft JhengHei"/>
                           <a:cs typeface="Microsoft JhengHei"/>
                         </a:rPr>
-                        <a:t>2645</a:t>
+                        <a:t>7744</a:t>
                       </a:r>
                     </a:p>
                   </a:txBody>
@@ -4945,7 +5189,251 @@
                           <a:ea typeface="Microsoft JhengHei"/>
                           <a:cs typeface="Microsoft JhengHei"/>
                         </a:rPr>
-                        <a:t>09/15</a:t>
+                        <a:t>09/14</a:t>
+                      </a:r>
+                    </a:p>
+                  </a:txBody>
+                  <a:tcPr anchor="ctr" marL="73152" marT="9144" marB="9144">
+                    <a:solidFill>
+                      <a:srgbClr val="EEF2F9"/>
+                    </a:solidFill>
+                  </a:tcPr>
+                </a:tc>
+                <a:tc>
+                  <a:txBody>
+                    <a:bodyPr/>
+                    <a:lstStyle/>
+                    <a:p>
+                      <a:r>
+                        <a:rPr sz="1150" b="1">
+                          <a:solidFill>
+                            <a:srgbClr val="F4A261"/>
+                          </a:solidFill>
+                          <a:latin typeface="Microsoft JhengHei"/>
+                          <a:ea typeface="Microsoft JhengHei"/>
+                          <a:cs typeface="Microsoft JhengHei"/>
+                        </a:rPr>
+                        <a:t>勒索病毒/加密</a:t>
+                      </a:r>
+                    </a:p>
+                  </a:txBody>
+                  <a:tcPr anchor="ctr" marL="73152" marT="9144" marB="9144">
+                    <a:solidFill>
+                      <a:srgbClr val="EEF2F9"/>
+                    </a:solidFill>
+                  </a:tcPr>
+                </a:tc>
+                <a:tc>
+                  <a:txBody>
+                    <a:bodyPr/>
+                    <a:lstStyle/>
+                    <a:p>
+                      <a:r>
+                        <a:rPr sz="1150" b="0">
+                          <a:solidFill>
+                            <a:srgbClr val="1A2233"/>
+                          </a:solidFill>
+                          <a:latin typeface="Microsoft JhengHei"/>
+                          <a:ea typeface="Microsoft JhengHei"/>
+                          <a:cs typeface="Microsoft JhengHei"/>
+                        </a:rPr>
+                        <a:t>經初步評估，本次資安事件未影響公司工廠生產作業，生產活動均維持正常運…</a:t>
+                      </a:r>
+                    </a:p>
+                  </a:txBody>
+                  <a:tcPr anchor="ctr" marL="73152" marT="9144" marB="9144">
+                    <a:solidFill>
+                      <a:srgbClr val="EEF2F9"/>
+                    </a:solidFill>
+                  </a:tcPr>
+                </a:tc>
+              </a:tr>
+              <a:tr h="274320">
+                <a:tc>
+                  <a:txBody>
+                    <a:bodyPr/>
+                    <a:lstStyle/>
+                    <a:p>
+                      <a:r>
+                        <a:rPr sz="1150" b="0">
+                          <a:solidFill>
+                            <a:srgbClr val="1A2233"/>
+                          </a:solidFill>
+                          <a:latin typeface="Microsoft JhengHei"/>
+                          <a:ea typeface="Microsoft JhengHei"/>
+                          <a:cs typeface="Microsoft JhengHei"/>
+                        </a:rPr>
+                        <a:t>達爾膚</a:t>
+                      </a:r>
+                    </a:p>
+                  </a:txBody>
+                  <a:tcPr anchor="ctr" marL="73152" marT="9144" marB="9144">
+                    <a:solidFill>
+                      <a:srgbClr val="FFFFFF"/>
+                    </a:solidFill>
+                  </a:tcPr>
+                </a:tc>
+                <a:tc>
+                  <a:txBody>
+                    <a:bodyPr/>
+                    <a:lstStyle/>
+                    <a:p>
+                      <a:r>
+                        <a:rPr sz="1150" b="0">
+                          <a:solidFill>
+                            <a:srgbClr val="1A2233"/>
+                          </a:solidFill>
+                          <a:latin typeface="Microsoft JhengHei"/>
+                          <a:ea typeface="Microsoft JhengHei"/>
+                          <a:cs typeface="Microsoft JhengHei"/>
+                        </a:rPr>
+                        <a:t>6523</a:t>
+                      </a:r>
+                    </a:p>
+                  </a:txBody>
+                  <a:tcPr anchor="ctr" marL="73152" marT="9144" marB="9144">
+                    <a:solidFill>
+                      <a:srgbClr val="FFFFFF"/>
+                    </a:solidFill>
+                  </a:tcPr>
+                </a:tc>
+                <a:tc>
+                  <a:txBody>
+                    <a:bodyPr/>
+                    <a:lstStyle/>
+                    <a:p>
+                      <a:r>
+                        <a:rPr sz="1150" b="0">
+                          <a:solidFill>
+                            <a:srgbClr val="1A2233"/>
+                          </a:solidFill>
+                          <a:latin typeface="Microsoft JhengHei"/>
+                          <a:ea typeface="Microsoft JhengHei"/>
+                          <a:cs typeface="Microsoft JhengHei"/>
+                        </a:rPr>
+                        <a:t>09/11</a:t>
+                      </a:r>
+                    </a:p>
+                  </a:txBody>
+                  <a:tcPr anchor="ctr" marL="73152" marT="9144" marB="9144">
+                    <a:solidFill>
+                      <a:srgbClr val="FFFFFF"/>
+                    </a:solidFill>
+                  </a:tcPr>
+                </a:tc>
+                <a:tc>
+                  <a:txBody>
+                    <a:bodyPr/>
+                    <a:lstStyle/>
+                    <a:p>
+                      <a:r>
+                        <a:rPr sz="1150" b="1">
+                          <a:solidFill>
+                            <a:srgbClr val="E63946"/>
+                          </a:solidFill>
+                          <a:latin typeface="Microsoft JhengHei"/>
+                          <a:ea typeface="Microsoft JhengHei"/>
+                          <a:cs typeface="Microsoft JhengHei"/>
+                        </a:rPr>
+                        <a:t>駭客攻擊</a:t>
+                      </a:r>
+                    </a:p>
+                  </a:txBody>
+                  <a:tcPr anchor="ctr" marL="73152" marT="9144" marB="9144">
+                    <a:solidFill>
+                      <a:srgbClr val="FFFFFF"/>
+                    </a:solidFill>
+                  </a:tcPr>
+                </a:tc>
+                <a:tc>
+                  <a:txBody>
+                    <a:bodyPr/>
+                    <a:lstStyle/>
+                    <a:p>
+                      <a:r>
+                        <a:rPr sz="1150" b="0">
+                          <a:solidFill>
+                            <a:srgbClr val="1A2233"/>
+                          </a:solidFill>
+                          <a:latin typeface="Microsoft JhengHei"/>
+                          <a:ea typeface="Microsoft JhengHei"/>
+                          <a:cs typeface="Microsoft JhengHei"/>
+                        </a:rPr>
+                        <a:t>受影響系統非屬公司現行主要營運系統，亦非對外提供服務之系統，目前評估…</a:t>
+                      </a:r>
+                    </a:p>
+                  </a:txBody>
+                  <a:tcPr anchor="ctr" marL="73152" marT="9144" marB="9144">
+                    <a:solidFill>
+                      <a:srgbClr val="FFFFFF"/>
+                    </a:solidFill>
+                  </a:tcPr>
+                </a:tc>
+              </a:tr>
+              <a:tr h="274320">
+                <a:tc>
+                  <a:txBody>
+                    <a:bodyPr/>
+                    <a:lstStyle/>
+                    <a:p>
+                      <a:r>
+                        <a:rPr sz="1150" b="0">
+                          <a:solidFill>
+                            <a:srgbClr val="1A2233"/>
+                          </a:solidFill>
+                          <a:latin typeface="Microsoft JhengHei"/>
+                          <a:ea typeface="Microsoft JhengHei"/>
+                          <a:cs typeface="Microsoft JhengHei"/>
+                        </a:rPr>
+                        <a:t>大車隊</a:t>
+                      </a:r>
+                    </a:p>
+                  </a:txBody>
+                  <a:tcPr anchor="ctr" marL="73152" marT="9144" marB="9144">
+                    <a:solidFill>
+                      <a:srgbClr val="EEF2F9"/>
+                    </a:solidFill>
+                  </a:tcPr>
+                </a:tc>
+                <a:tc>
+                  <a:txBody>
+                    <a:bodyPr/>
+                    <a:lstStyle/>
+                    <a:p>
+                      <a:r>
+                        <a:rPr sz="1150" b="0">
+                          <a:solidFill>
+                            <a:srgbClr val="1A2233"/>
+                          </a:solidFill>
+                          <a:latin typeface="Microsoft JhengHei"/>
+                          <a:ea typeface="Microsoft JhengHei"/>
+                          <a:cs typeface="Microsoft JhengHei"/>
+                        </a:rPr>
+                        <a:t>2640</a:t>
+                      </a:r>
+                    </a:p>
+                  </a:txBody>
+                  <a:tcPr anchor="ctr" marL="73152" marT="9144" marB="9144">
+                    <a:solidFill>
+                      <a:srgbClr val="EEF2F9"/>
+                    </a:solidFill>
+                  </a:tcPr>
+                </a:tc>
+                <a:tc>
+                  <a:txBody>
+                    <a:bodyPr/>
+                    <a:lstStyle/>
+                    <a:p>
+                      <a:r>
+                        <a:rPr sz="1150" b="0">
+                          <a:solidFill>
+                            <a:srgbClr val="1A2233"/>
+                          </a:solidFill>
+                          <a:latin typeface="Microsoft JhengHei"/>
+                          <a:ea typeface="Microsoft JhengHei"/>
+                          <a:cs typeface="Microsoft JhengHei"/>
+                        </a:rPr>
+                        <a:t>09/09</a:t>
                       </a:r>
                     </a:p>
                   </a:txBody>
@@ -4993,7 +5481,7 @@
                           <a:ea typeface="Microsoft JhengHei"/>
                           <a:cs typeface="Microsoft JhengHei"/>
                         </a:rPr>
-                        <a:t>經初步評估，核心資訊系統及營運業務運作皆維持正常，尚未發現公司及涉客…</a:t>
+                        <a:t>經初步評估，本事件目前尚未對本公司整體營運及財務造成重大影響。</a:t>
                       </a:r>
                     </a:p>
                   </a:txBody>
@@ -5019,7 +5507,7 @@
                           <a:ea typeface="Microsoft JhengHei"/>
                           <a:cs typeface="Microsoft JhengHei"/>
                         </a:rPr>
-                        <a:t>崴寶</a:t>
+                        <a:t>富爾特</a:t>
                       </a:r>
                     </a:p>
                   </a:txBody>
@@ -5043,7 +5531,7 @@
                           <a:ea typeface="Microsoft JhengHei"/>
                           <a:cs typeface="Microsoft JhengHei"/>
                         </a:rPr>
-                        <a:t>7744</a:t>
+                        <a:t>6136</a:t>
                       </a:r>
                     </a:p>
                   </a:txBody>
@@ -5067,495 +5555,7 @@
                           <a:ea typeface="Microsoft JhengHei"/>
                           <a:cs typeface="Microsoft JhengHei"/>
                         </a:rPr>
-                        <a:t>09/14</a:t>
-                      </a:r>
-                    </a:p>
-                  </a:txBody>
-                  <a:tcPr anchor="ctr" marL="73152" marT="9144" marB="9144">
-                    <a:solidFill>
-                      <a:srgbClr val="FFFFFF"/>
-                    </a:solidFill>
-                  </a:tcPr>
-                </a:tc>
-                <a:tc>
-                  <a:txBody>
-                    <a:bodyPr/>
-                    <a:lstStyle/>
-                    <a:p>
-                      <a:r>
-                        <a:rPr sz="1150" b="1">
-                          <a:solidFill>
-                            <a:srgbClr val="F4A261"/>
-                          </a:solidFill>
-                          <a:latin typeface="Microsoft JhengHei"/>
-                          <a:ea typeface="Microsoft JhengHei"/>
-                          <a:cs typeface="Microsoft JhengHei"/>
-                        </a:rPr>
-                        <a:t>勒索病毒/加密</a:t>
-                      </a:r>
-                    </a:p>
-                  </a:txBody>
-                  <a:tcPr anchor="ctr" marL="73152" marT="9144" marB="9144">
-                    <a:solidFill>
-                      <a:srgbClr val="FFFFFF"/>
-                    </a:solidFill>
-                  </a:tcPr>
-                </a:tc>
-                <a:tc>
-                  <a:txBody>
-                    <a:bodyPr/>
-                    <a:lstStyle/>
-                    <a:p>
-                      <a:r>
-                        <a:rPr sz="1150" b="0">
-                          <a:solidFill>
-                            <a:srgbClr val="1A2233"/>
-                          </a:solidFill>
-                          <a:latin typeface="Microsoft JhengHei"/>
-                          <a:ea typeface="Microsoft JhengHei"/>
-                          <a:cs typeface="Microsoft JhengHei"/>
-                        </a:rPr>
-                        <a:t>經初步評估，本次資安事件未影響公司工廠生產作業，生產活動均維持正常運…</a:t>
-                      </a:r>
-                    </a:p>
-                  </a:txBody>
-                  <a:tcPr anchor="ctr" marL="73152" marT="9144" marB="9144">
-                    <a:solidFill>
-                      <a:srgbClr val="FFFFFF"/>
-                    </a:solidFill>
-                  </a:tcPr>
-                </a:tc>
-              </a:tr>
-              <a:tr h="274320">
-                <a:tc>
-                  <a:txBody>
-                    <a:bodyPr/>
-                    <a:lstStyle/>
-                    <a:p>
-                      <a:r>
-                        <a:rPr sz="1150" b="0">
-                          <a:solidFill>
-                            <a:srgbClr val="1A2233"/>
-                          </a:solidFill>
-                          <a:latin typeface="Microsoft JhengHei"/>
-                          <a:ea typeface="Microsoft JhengHei"/>
-                          <a:cs typeface="Microsoft JhengHei"/>
-                        </a:rPr>
-                        <a:t>達爾膚</a:t>
-                      </a:r>
-                    </a:p>
-                  </a:txBody>
-                  <a:tcPr anchor="ctr" marL="73152" marT="9144" marB="9144">
-                    <a:solidFill>
-                      <a:srgbClr val="EEF2F9"/>
-                    </a:solidFill>
-                  </a:tcPr>
-                </a:tc>
-                <a:tc>
-                  <a:txBody>
-                    <a:bodyPr/>
-                    <a:lstStyle/>
-                    <a:p>
-                      <a:r>
-                        <a:rPr sz="1150" b="0">
-                          <a:solidFill>
-                            <a:srgbClr val="1A2233"/>
-                          </a:solidFill>
-                          <a:latin typeface="Microsoft JhengHei"/>
-                          <a:ea typeface="Microsoft JhengHei"/>
-                          <a:cs typeface="Microsoft JhengHei"/>
-                        </a:rPr>
-                        <a:t>6523</a:t>
-                      </a:r>
-                    </a:p>
-                  </a:txBody>
-                  <a:tcPr anchor="ctr" marL="73152" marT="9144" marB="9144">
-                    <a:solidFill>
-                      <a:srgbClr val="EEF2F9"/>
-                    </a:solidFill>
-                  </a:tcPr>
-                </a:tc>
-                <a:tc>
-                  <a:txBody>
-                    <a:bodyPr/>
-                    <a:lstStyle/>
-                    <a:p>
-                      <a:r>
-                        <a:rPr sz="1150" b="0">
-                          <a:solidFill>
-                            <a:srgbClr val="1A2233"/>
-                          </a:solidFill>
-                          <a:latin typeface="Microsoft JhengHei"/>
-                          <a:ea typeface="Microsoft JhengHei"/>
-                          <a:cs typeface="Microsoft JhengHei"/>
-                        </a:rPr>
-                        <a:t>09/11</a:t>
-                      </a:r>
-                    </a:p>
-                  </a:txBody>
-                  <a:tcPr anchor="ctr" marL="73152" marT="9144" marB="9144">
-                    <a:solidFill>
-                      <a:srgbClr val="EEF2F9"/>
-                    </a:solidFill>
-                  </a:tcPr>
-                </a:tc>
-                <a:tc>
-                  <a:txBody>
-                    <a:bodyPr/>
-                    <a:lstStyle/>
-                    <a:p>
-                      <a:r>
-                        <a:rPr sz="1150" b="1">
-                          <a:solidFill>
-                            <a:srgbClr val="E63946"/>
-                          </a:solidFill>
-                          <a:latin typeface="Microsoft JhengHei"/>
-                          <a:ea typeface="Microsoft JhengHei"/>
-                          <a:cs typeface="Microsoft JhengHei"/>
-                        </a:rPr>
-                        <a:t>駭客攻擊</a:t>
-                      </a:r>
-                    </a:p>
-                  </a:txBody>
-                  <a:tcPr anchor="ctr" marL="73152" marT="9144" marB="9144">
-                    <a:solidFill>
-                      <a:srgbClr val="EEF2F9"/>
-                    </a:solidFill>
-                  </a:tcPr>
-                </a:tc>
-                <a:tc>
-                  <a:txBody>
-                    <a:bodyPr/>
-                    <a:lstStyle/>
-                    <a:p>
-                      <a:r>
-                        <a:rPr sz="1150" b="0">
-                          <a:solidFill>
-                            <a:srgbClr val="1A2233"/>
-                          </a:solidFill>
-                          <a:latin typeface="Microsoft JhengHei"/>
-                          <a:ea typeface="Microsoft JhengHei"/>
-                          <a:cs typeface="Microsoft JhengHei"/>
-                        </a:rPr>
-                        <a:t>受影響系統非屬公司現行主要營運系統，亦非對外提供服務之系統，目前評估…</a:t>
-                      </a:r>
-                    </a:p>
-                  </a:txBody>
-                  <a:tcPr anchor="ctr" marL="73152" marT="9144" marB="9144">
-                    <a:solidFill>
-                      <a:srgbClr val="EEF2F9"/>
-                    </a:solidFill>
-                  </a:tcPr>
-                </a:tc>
-              </a:tr>
-              <a:tr h="274320">
-                <a:tc>
-                  <a:txBody>
-                    <a:bodyPr/>
-                    <a:lstStyle/>
-                    <a:p>
-                      <a:r>
-                        <a:rPr sz="1150" b="0">
-                          <a:solidFill>
-                            <a:srgbClr val="1A2233"/>
-                          </a:solidFill>
-                          <a:latin typeface="Microsoft JhengHei"/>
-                          <a:ea typeface="Microsoft JhengHei"/>
-                          <a:cs typeface="Microsoft JhengHei"/>
-                        </a:rPr>
-                        <a:t>大車隊</a:t>
-                      </a:r>
-                    </a:p>
-                  </a:txBody>
-                  <a:tcPr anchor="ctr" marL="73152" marT="9144" marB="9144">
-                    <a:solidFill>
-                      <a:srgbClr val="FFFFFF"/>
-                    </a:solidFill>
-                  </a:tcPr>
-                </a:tc>
-                <a:tc>
-                  <a:txBody>
-                    <a:bodyPr/>
-                    <a:lstStyle/>
-                    <a:p>
-                      <a:r>
-                        <a:rPr sz="1150" b="0">
-                          <a:solidFill>
-                            <a:srgbClr val="1A2233"/>
-                          </a:solidFill>
-                          <a:latin typeface="Microsoft JhengHei"/>
-                          <a:ea typeface="Microsoft JhengHei"/>
-                          <a:cs typeface="Microsoft JhengHei"/>
-                        </a:rPr>
-                        <a:t>2640</a:t>
-                      </a:r>
-                    </a:p>
-                  </a:txBody>
-                  <a:tcPr anchor="ctr" marL="73152" marT="9144" marB="9144">
-                    <a:solidFill>
-                      <a:srgbClr val="FFFFFF"/>
-                    </a:solidFill>
-                  </a:tcPr>
-                </a:tc>
-                <a:tc>
-                  <a:txBody>
-                    <a:bodyPr/>
-                    <a:lstStyle/>
-                    <a:p>
-                      <a:r>
-                        <a:rPr sz="1150" b="0">
-                          <a:solidFill>
-                            <a:srgbClr val="1A2233"/>
-                          </a:solidFill>
-                          <a:latin typeface="Microsoft JhengHei"/>
-                          <a:ea typeface="Microsoft JhengHei"/>
-                          <a:cs typeface="Microsoft JhengHei"/>
-                        </a:rPr>
-                        <a:t>09/09</a:t>
-                      </a:r>
-                    </a:p>
-                  </a:txBody>
-                  <a:tcPr anchor="ctr" marL="73152" marT="9144" marB="9144">
-                    <a:solidFill>
-                      <a:srgbClr val="FFFFFF"/>
-                    </a:solidFill>
-                  </a:tcPr>
-                </a:tc>
-                <a:tc>
-                  <a:txBody>
-                    <a:bodyPr/>
-                    <a:lstStyle/>
-                    <a:p>
-                      <a:r>
-                        <a:rPr sz="1150" b="1">
-                          <a:solidFill>
-                            <a:srgbClr val="E63946"/>
-                          </a:solidFill>
-                          <a:latin typeface="Microsoft JhengHei"/>
-                          <a:ea typeface="Microsoft JhengHei"/>
-                          <a:cs typeface="Microsoft JhengHei"/>
-                        </a:rPr>
-                        <a:t>駭客攻擊</a:t>
-                      </a:r>
-                    </a:p>
-                  </a:txBody>
-                  <a:tcPr anchor="ctr" marL="73152" marT="9144" marB="9144">
-                    <a:solidFill>
-                      <a:srgbClr val="FFFFFF"/>
-                    </a:solidFill>
-                  </a:tcPr>
-                </a:tc>
-                <a:tc>
-                  <a:txBody>
-                    <a:bodyPr/>
-                    <a:lstStyle/>
-                    <a:p>
-                      <a:r>
-                        <a:rPr sz="1150" b="0">
-                          <a:solidFill>
-                            <a:srgbClr val="1A2233"/>
-                          </a:solidFill>
-                          <a:latin typeface="Microsoft JhengHei"/>
-                          <a:ea typeface="Microsoft JhengHei"/>
-                          <a:cs typeface="Microsoft JhengHei"/>
-                        </a:rPr>
-                        <a:t>經初步評估，本事件目前尚未對本公司整體營運及財務造成重大影響。</a:t>
-                      </a:r>
-                    </a:p>
-                  </a:txBody>
-                  <a:tcPr anchor="ctr" marL="73152" marT="9144" marB="9144">
-                    <a:solidFill>
-                      <a:srgbClr val="FFFFFF"/>
-                    </a:solidFill>
-                  </a:tcPr>
-                </a:tc>
-              </a:tr>
-              <a:tr h="274320">
-                <a:tc>
-                  <a:txBody>
-                    <a:bodyPr/>
-                    <a:lstStyle/>
-                    <a:p>
-                      <a:r>
-                        <a:rPr sz="1150" b="0">
-                          <a:solidFill>
-                            <a:srgbClr val="1A2233"/>
-                          </a:solidFill>
-                          <a:latin typeface="Microsoft JhengHei"/>
-                          <a:ea typeface="Microsoft JhengHei"/>
-                          <a:cs typeface="Microsoft JhengHei"/>
-                        </a:rPr>
-                        <a:t>富爾特</a:t>
-                      </a:r>
-                    </a:p>
-                  </a:txBody>
-                  <a:tcPr anchor="ctr" marL="73152" marT="9144" marB="9144">
-                    <a:solidFill>
-                      <a:srgbClr val="EEF2F9"/>
-                    </a:solidFill>
-                  </a:tcPr>
-                </a:tc>
-                <a:tc>
-                  <a:txBody>
-                    <a:bodyPr/>
-                    <a:lstStyle/>
-                    <a:p>
-                      <a:r>
-                        <a:rPr sz="1150" b="0">
-                          <a:solidFill>
-                            <a:srgbClr val="1A2233"/>
-                          </a:solidFill>
-                          <a:latin typeface="Microsoft JhengHei"/>
-                          <a:ea typeface="Microsoft JhengHei"/>
-                          <a:cs typeface="Microsoft JhengHei"/>
-                        </a:rPr>
-                        <a:t>6136</a:t>
-                      </a:r>
-                    </a:p>
-                  </a:txBody>
-                  <a:tcPr anchor="ctr" marL="73152" marT="9144" marB="9144">
-                    <a:solidFill>
-                      <a:srgbClr val="EEF2F9"/>
-                    </a:solidFill>
-                  </a:tcPr>
-                </a:tc>
-                <a:tc>
-                  <a:txBody>
-                    <a:bodyPr/>
-                    <a:lstStyle/>
-                    <a:p>
-                      <a:r>
-                        <a:rPr sz="1150" b="0">
-                          <a:solidFill>
-                            <a:srgbClr val="1A2233"/>
-                          </a:solidFill>
-                          <a:latin typeface="Microsoft JhengHei"/>
-                          <a:ea typeface="Microsoft JhengHei"/>
-                          <a:cs typeface="Microsoft JhengHei"/>
-                        </a:rPr>
                         <a:t>09/07</a:t>
-                      </a:r>
-                    </a:p>
-                  </a:txBody>
-                  <a:tcPr anchor="ctr" marL="73152" marT="9144" marB="9144">
-                    <a:solidFill>
-                      <a:srgbClr val="EEF2F9"/>
-                    </a:solidFill>
-                  </a:tcPr>
-                </a:tc>
-                <a:tc>
-                  <a:txBody>
-                    <a:bodyPr/>
-                    <a:lstStyle/>
-                    <a:p>
-                      <a:r>
-                        <a:rPr sz="1150" b="1">
-                          <a:solidFill>
-                            <a:srgbClr val="F4A261"/>
-                          </a:solidFill>
-                          <a:latin typeface="Microsoft JhengHei"/>
-                          <a:ea typeface="Microsoft JhengHei"/>
-                          <a:cs typeface="Microsoft JhengHei"/>
-                        </a:rPr>
-                        <a:t>勒索病毒/加密</a:t>
-                      </a:r>
-                    </a:p>
-                  </a:txBody>
-                  <a:tcPr anchor="ctr" marL="73152" marT="9144" marB="9144">
-                    <a:solidFill>
-                      <a:srgbClr val="EEF2F9"/>
-                    </a:solidFill>
-                  </a:tcPr>
-                </a:tc>
-                <a:tc>
-                  <a:txBody>
-                    <a:bodyPr/>
-                    <a:lstStyle/>
-                    <a:p>
-                      <a:r>
-                        <a:rPr sz="1150" b="0">
-                          <a:solidFill>
-                            <a:srgbClr val="1A2233"/>
-                          </a:solidFill>
-                          <a:latin typeface="Microsoft JhengHei"/>
-                          <a:ea typeface="Microsoft JhengHei"/>
-                          <a:cs typeface="Microsoft JhengHei"/>
-                        </a:rPr>
-                        <a:t>目前受影響之系統正陸續復原中，對公司整體營運及財務之影響程度尚不致有…</a:t>
-                      </a:r>
-                    </a:p>
-                  </a:txBody>
-                  <a:tcPr anchor="ctr" marL="73152" marT="9144" marB="9144">
-                    <a:solidFill>
-                      <a:srgbClr val="EEF2F9"/>
-                    </a:solidFill>
-                  </a:tcPr>
-                </a:tc>
-              </a:tr>
-              <a:tr h="274320">
-                <a:tc>
-                  <a:txBody>
-                    <a:bodyPr/>
-                    <a:lstStyle/>
-                    <a:p>
-                      <a:r>
-                        <a:rPr sz="1150" b="0">
-                          <a:solidFill>
-                            <a:srgbClr val="1A2233"/>
-                          </a:solidFill>
-                          <a:latin typeface="Microsoft JhengHei"/>
-                          <a:ea typeface="Microsoft JhengHei"/>
-                          <a:cs typeface="Microsoft JhengHei"/>
-                        </a:rPr>
-                        <a:t>創新服務</a:t>
-                      </a:r>
-                    </a:p>
-                  </a:txBody>
-                  <a:tcPr anchor="ctr" marL="73152" marT="9144" marB="9144">
-                    <a:solidFill>
-                      <a:srgbClr val="FFFFFF"/>
-                    </a:solidFill>
-                  </a:tcPr>
-                </a:tc>
-                <a:tc>
-                  <a:txBody>
-                    <a:bodyPr/>
-                    <a:lstStyle/>
-                    <a:p>
-                      <a:r>
-                        <a:rPr sz="1150" b="0">
-                          <a:solidFill>
-                            <a:srgbClr val="1A2233"/>
-                          </a:solidFill>
-                          <a:latin typeface="Microsoft JhengHei"/>
-                          <a:ea typeface="Microsoft JhengHei"/>
-                          <a:cs typeface="Microsoft JhengHei"/>
-                        </a:rPr>
-                        <a:t>7828</a:t>
-                      </a:r>
-                    </a:p>
-                  </a:txBody>
-                  <a:tcPr anchor="ctr" marL="73152" marT="9144" marB="9144">
-                    <a:solidFill>
-                      <a:srgbClr val="FFFFFF"/>
-                    </a:solidFill>
-                  </a:tcPr>
-                </a:tc>
-                <a:tc>
-                  <a:txBody>
-                    <a:bodyPr/>
-                    <a:lstStyle/>
-                    <a:p>
-                      <a:r>
-                        <a:rPr sz="1150" b="0">
-                          <a:solidFill>
-                            <a:srgbClr val="1A2233"/>
-                          </a:solidFill>
-                          <a:latin typeface="Microsoft JhengHei"/>
-                          <a:ea typeface="Microsoft JhengHei"/>
-                          <a:cs typeface="Microsoft JhengHei"/>
-                        </a:rPr>
-                        <a:t>09/02</a:t>
                       </a:r>
                     </a:p>
                   </a:txBody>
@@ -5629,7 +5629,7 @@
                           <a:ea typeface="Microsoft JhengHei"/>
                           <a:cs typeface="Microsoft JhengHei"/>
                         </a:rPr>
-                        <a:t>杭特</a:t>
+                        <a:t>創新服務</a:t>
                       </a:r>
                     </a:p>
                   </a:txBody>
@@ -5653,7 +5653,7 @@
                           <a:ea typeface="Microsoft JhengHei"/>
                           <a:cs typeface="Microsoft JhengHei"/>
                         </a:rPr>
-                        <a:t>3297</a:t>
+                        <a:t>7828</a:t>
                       </a:r>
                     </a:p>
                   </a:txBody>
@@ -5677,7 +5677,7 @@
                           <a:ea typeface="Microsoft JhengHei"/>
                           <a:cs typeface="Microsoft JhengHei"/>
                         </a:rPr>
-                        <a:t>08/31</a:t>
+                        <a:t>09/02</a:t>
                       </a:r>
                     </a:p>
                   </a:txBody>
@@ -5695,13 +5695,13 @@
                       <a:r>
                         <a:rPr sz="1150" b="1">
                           <a:solidFill>
-                            <a:srgbClr val="E63946"/>
+                            <a:srgbClr val="F4A261"/>
                           </a:solidFill>
                           <a:latin typeface="Microsoft JhengHei"/>
                           <a:ea typeface="Microsoft JhengHei"/>
                           <a:cs typeface="Microsoft JhengHei"/>
                         </a:rPr>
-                        <a:t>駭客攻擊</a:t>
+                        <a:t>勒索病毒/加密</a:t>
                       </a:r>
                     </a:p>
                   </a:txBody>
@@ -5725,7 +5725,7 @@
                           <a:ea typeface="Microsoft JhengHei"/>
                           <a:cs typeface="Microsoft JhengHei"/>
                         </a:rPr>
-                        <a:t>本公司目前正積極會同技術專家協助調查，初步評估對公司營運暫無重大影響…</a:t>
+                        <a:t>目前受影響之系統正陸續復原中，對公司整體營運及財務之影響程度尚不致有…</a:t>
                       </a:r>
                     </a:p>
                   </a:txBody>
@@ -6053,7 +6053,7 @@
                 <a:ea typeface="Microsoft JhengHei"/>
                 <a:cs typeface="Microsoft JhengHei"/>
               </a:rPr>
-              <a:t>7 起</a:t>
+              <a:t>6 起</a:t>
             </a:r>
           </a:p>
         </p:txBody>
@@ -6090,7 +6090,7 @@
                 <a:ea typeface="Microsoft JhengHei"/>
                 <a:cs typeface="Microsoft JhengHei"/>
               </a:rPr>
-              <a:t>神腦、友訊、長榮航、長榮航太、達爾膚、大車隊、杭特</a:t>
+              <a:t>神腦、友訊、長榮航、長榮航太、達爾膚、大車隊</a:t>
             </a:r>
           </a:p>
         </p:txBody>
@@ -6529,7 +6529,7 @@
                 <a:ea typeface="Microsoft JhengHei"/>
                 <a:cs typeface="Microsoft JhengHei"/>
               </a:rPr>
-              <a:t>1 起</a:t>
+              <a:t>2 起</a:t>
             </a:r>
           </a:p>
         </p:txBody>
@@ -6566,7 +6566,7 @@
                 <a:ea typeface="Microsoft JhengHei"/>
                 <a:cs typeface="Microsoft JhengHei"/>
               </a:rPr>
-              <a:t>柏文</a:t>
+              <a:t>安心、柏文</a:t>
             </a:r>
           </a:p>
         </p:txBody>
@@ -7144,7 +7144,7 @@
                           <a:ea typeface="Microsoft JhengHei"/>
                           <a:cs typeface="Microsoft JhengHei"/>
                         </a:rPr>
-                        <a:t>神腦</a:t>
+                        <a:t>安心</a:t>
                       </a:r>
                     </a:p>
                   </a:txBody>
@@ -7168,7 +7168,983 @@
                           <a:ea typeface="Microsoft JhengHei"/>
                           <a:cs typeface="Microsoft JhengHei"/>
                         </a:rPr>
+                        <a:t>1259</a:t>
+                      </a:r>
+                    </a:p>
+                  </a:txBody>
+                  <a:tcPr anchor="ctr" marL="73152" marT="9144" marB="9144">
+                    <a:solidFill>
+                      <a:srgbClr val="FFFFFF"/>
+                    </a:solidFill>
+                  </a:tcPr>
+                </a:tc>
+                <a:tc>
+                  <a:txBody>
+                    <a:bodyPr/>
+                    <a:lstStyle/>
+                    <a:p>
+                      <a:r>
+                        <a:rPr sz="1150" b="1">
+                          <a:solidFill>
+                            <a:srgbClr val="27A6C4"/>
+                          </a:solidFill>
+                          <a:latin typeface="Microsoft JhengHei"/>
+                          <a:ea typeface="Microsoft JhengHei"/>
+                          <a:cs typeface="Microsoft JhengHei"/>
+                        </a:rPr>
+                        <a:t>個資外洩</a:t>
+                      </a:r>
+                    </a:p>
+                  </a:txBody>
+                  <a:tcPr anchor="ctr" marL="73152" marT="9144" marB="9144">
+                    <a:solidFill>
+                      <a:srgbClr val="FFFFFF"/>
+                    </a:solidFill>
+                  </a:tcPr>
+                </a:tc>
+                <a:tc>
+                  <a:txBody>
+                    <a:bodyPr/>
+                    <a:lstStyle/>
+                    <a:p>
+                      <a:r>
+                        <a:rPr sz="1150" b="0">
+                          <a:solidFill>
+                            <a:srgbClr val="1A2233"/>
+                          </a:solidFill>
+                          <a:latin typeface="Microsoft JhengHei"/>
+                          <a:ea typeface="Microsoft JhengHei"/>
+                          <a:cs typeface="Microsoft JhengHei"/>
+                        </a:rPr>
+                        <a:t>資誠聯合會計師事務所</a:t>
+                      </a:r>
+                    </a:p>
+                  </a:txBody>
+                  <a:tcPr anchor="ctr" marL="73152" marT="9144" marB="9144">
+                    <a:solidFill>
+                      <a:srgbClr val="FFFFFF"/>
+                    </a:solidFill>
+                  </a:tcPr>
+                </a:tc>
+                <a:tc>
+                  <a:txBody>
+                    <a:bodyPr/>
+                    <a:lstStyle/>
+                    <a:p>
+                      <a:r>
+                        <a:rPr sz="1150" b="0">
+                          <a:solidFill>
+                            <a:srgbClr val="1A2233"/>
+                          </a:solidFill>
+                          <a:latin typeface="Microsoft JhengHei"/>
+                          <a:ea typeface="Microsoft JhengHei"/>
+                          <a:cs typeface="Microsoft JhengHei"/>
+                        </a:rPr>
+                        <a:t>徐明釧、陳怡婷</a:t>
+                      </a:r>
+                    </a:p>
+                  </a:txBody>
+                  <a:tcPr anchor="ctr" marL="73152" marT="9144" marB="9144">
+                    <a:solidFill>
+                      <a:srgbClr val="FFFFFF"/>
+                    </a:solidFill>
+                  </a:tcPr>
+                </a:tc>
+              </a:tr>
+              <a:tr h="344658">
+                <a:tc>
+                  <a:txBody>
+                    <a:bodyPr/>
+                    <a:lstStyle/>
+                    <a:p>
+                      <a:r>
+                        <a:rPr sz="1150" b="0">
+                          <a:solidFill>
+                            <a:srgbClr val="1A2233"/>
+                          </a:solidFill>
+                          <a:latin typeface="Microsoft JhengHei"/>
+                          <a:ea typeface="Microsoft JhengHei"/>
+                          <a:cs typeface="Microsoft JhengHei"/>
+                        </a:rPr>
+                        <a:t>神腦</a:t>
+                      </a:r>
+                    </a:p>
+                  </a:txBody>
+                  <a:tcPr anchor="ctr" marL="73152" marT="9144" marB="9144">
+                    <a:solidFill>
+                      <a:srgbClr val="EEF2F9"/>
+                    </a:solidFill>
+                  </a:tcPr>
+                </a:tc>
+                <a:tc>
+                  <a:txBody>
+                    <a:bodyPr/>
+                    <a:lstStyle/>
+                    <a:p>
+                      <a:r>
+                        <a:rPr sz="1150" b="0">
+                          <a:solidFill>
+                            <a:srgbClr val="1A2233"/>
+                          </a:solidFill>
+                          <a:latin typeface="Microsoft JhengHei"/>
+                          <a:ea typeface="Microsoft JhengHei"/>
+                          <a:cs typeface="Microsoft JhengHei"/>
+                        </a:rPr>
                         <a:t>2450</a:t>
+                      </a:r>
+                    </a:p>
+                  </a:txBody>
+                  <a:tcPr anchor="ctr" marL="73152" marT="9144" marB="9144">
+                    <a:solidFill>
+                      <a:srgbClr val="EEF2F9"/>
+                    </a:solidFill>
+                  </a:tcPr>
+                </a:tc>
+                <a:tc>
+                  <a:txBody>
+                    <a:bodyPr/>
+                    <a:lstStyle/>
+                    <a:p>
+                      <a:r>
+                        <a:rPr sz="1150" b="1">
+                          <a:solidFill>
+                            <a:srgbClr val="E63946"/>
+                          </a:solidFill>
+                          <a:latin typeface="Microsoft JhengHei"/>
+                          <a:ea typeface="Microsoft JhengHei"/>
+                          <a:cs typeface="Microsoft JhengHei"/>
+                        </a:rPr>
+                        <a:t>駭客攻擊</a:t>
+                      </a:r>
+                    </a:p>
+                  </a:txBody>
+                  <a:tcPr anchor="ctr" marL="73152" marT="9144" marB="9144">
+                    <a:solidFill>
+                      <a:srgbClr val="EEF2F9"/>
+                    </a:solidFill>
+                  </a:tcPr>
+                </a:tc>
+                <a:tc>
+                  <a:txBody>
+                    <a:bodyPr/>
+                    <a:lstStyle/>
+                    <a:p>
+                      <a:r>
+                        <a:rPr sz="1150" b="0">
+                          <a:solidFill>
+                            <a:srgbClr val="1A2233"/>
+                          </a:solidFill>
+                          <a:latin typeface="Microsoft JhengHei"/>
+                          <a:ea typeface="Microsoft JhengHei"/>
+                          <a:cs typeface="Microsoft JhengHei"/>
+                        </a:rPr>
+                        <a:t>資誠聯合會計師事務所</a:t>
+                      </a:r>
+                    </a:p>
+                  </a:txBody>
+                  <a:tcPr anchor="ctr" marL="73152" marT="9144" marB="9144">
+                    <a:solidFill>
+                      <a:srgbClr val="EEF2F9"/>
+                    </a:solidFill>
+                  </a:tcPr>
+                </a:tc>
+                <a:tc>
+                  <a:txBody>
+                    <a:bodyPr/>
+                    <a:lstStyle/>
+                    <a:p>
+                      <a:r>
+                        <a:rPr sz="1150" b="0">
+                          <a:solidFill>
+                            <a:srgbClr val="1A2233"/>
+                          </a:solidFill>
+                          <a:latin typeface="Microsoft JhengHei"/>
+                          <a:ea typeface="Microsoft JhengHei"/>
+                          <a:cs typeface="Microsoft JhengHei"/>
+                        </a:rPr>
+                        <a:t>王銘義、林永智</a:t>
+                      </a:r>
+                    </a:p>
+                  </a:txBody>
+                  <a:tcPr anchor="ctr" marL="73152" marT="9144" marB="9144">
+                    <a:solidFill>
+                      <a:srgbClr val="EEF2F9"/>
+                    </a:solidFill>
+                  </a:tcPr>
+                </a:tc>
+              </a:tr>
+              <a:tr h="344658">
+                <a:tc>
+                  <a:txBody>
+                    <a:bodyPr/>
+                    <a:lstStyle/>
+                    <a:p>
+                      <a:r>
+                        <a:rPr sz="1150" b="0">
+                          <a:solidFill>
+                            <a:srgbClr val="1A2233"/>
+                          </a:solidFill>
+                          <a:latin typeface="Microsoft JhengHei"/>
+                          <a:ea typeface="Microsoft JhengHei"/>
+                          <a:cs typeface="Microsoft JhengHei"/>
+                        </a:rPr>
+                        <a:t>鈊象</a:t>
+                      </a:r>
+                    </a:p>
+                  </a:txBody>
+                  <a:tcPr anchor="ctr" marL="73152" marT="9144" marB="9144">
+                    <a:solidFill>
+                      <a:srgbClr val="FFFFFF"/>
+                    </a:solidFill>
+                  </a:tcPr>
+                </a:tc>
+                <a:tc>
+                  <a:txBody>
+                    <a:bodyPr/>
+                    <a:lstStyle/>
+                    <a:p>
+                      <a:r>
+                        <a:rPr sz="1150" b="0">
+                          <a:solidFill>
+                            <a:srgbClr val="1A2233"/>
+                          </a:solidFill>
+                          <a:latin typeface="Microsoft JhengHei"/>
+                          <a:ea typeface="Microsoft JhengHei"/>
+                          <a:cs typeface="Microsoft JhengHei"/>
+                        </a:rPr>
+                        <a:t>3293</a:t>
+                      </a:r>
+                    </a:p>
+                  </a:txBody>
+                  <a:tcPr anchor="ctr" marL="73152" marT="9144" marB="9144">
+                    <a:solidFill>
+                      <a:srgbClr val="FFFFFF"/>
+                    </a:solidFill>
+                  </a:tcPr>
+                </a:tc>
+                <a:tc>
+                  <a:txBody>
+                    <a:bodyPr/>
+                    <a:lstStyle/>
+                    <a:p>
+                      <a:r>
+                        <a:rPr sz="1150" b="1">
+                          <a:solidFill>
+                            <a:srgbClr val="5C6679"/>
+                          </a:solidFill>
+                          <a:latin typeface="Microsoft JhengHei"/>
+                          <a:ea typeface="Microsoft JhengHei"/>
+                          <a:cs typeface="Microsoft JhengHei"/>
+                        </a:rPr>
+                        <a:t>其他</a:t>
+                      </a:r>
+                    </a:p>
+                  </a:txBody>
+                  <a:tcPr anchor="ctr" marL="73152" marT="9144" marB="9144">
+                    <a:solidFill>
+                      <a:srgbClr val="FFFFFF"/>
+                    </a:solidFill>
+                  </a:tcPr>
+                </a:tc>
+                <a:tc>
+                  <a:txBody>
+                    <a:bodyPr/>
+                    <a:lstStyle/>
+                    <a:p>
+                      <a:r>
+                        <a:rPr sz="1150" b="0">
+                          <a:solidFill>
+                            <a:srgbClr val="1A2233"/>
+                          </a:solidFill>
+                          <a:latin typeface="Microsoft JhengHei"/>
+                          <a:ea typeface="Microsoft JhengHei"/>
+                          <a:cs typeface="Microsoft JhengHei"/>
+                        </a:rPr>
+                        <a:t>勤業眾信聯合會計師事務所</a:t>
+                      </a:r>
+                    </a:p>
+                  </a:txBody>
+                  <a:tcPr anchor="ctr" marL="73152" marT="9144" marB="9144">
+                    <a:solidFill>
+                      <a:srgbClr val="FFFFFF"/>
+                    </a:solidFill>
+                  </a:tcPr>
+                </a:tc>
+                <a:tc>
+                  <a:txBody>
+                    <a:bodyPr/>
+                    <a:lstStyle/>
+                    <a:p>
+                      <a:r>
+                        <a:rPr sz="1150" b="0">
+                          <a:solidFill>
+                            <a:srgbClr val="1A2233"/>
+                          </a:solidFill>
+                          <a:latin typeface="Microsoft JhengHei"/>
+                          <a:ea typeface="Microsoft JhengHei"/>
+                          <a:cs typeface="Microsoft JhengHei"/>
+                        </a:rPr>
+                        <a:t>周仕杰、李東峰</a:t>
+                      </a:r>
+                    </a:p>
+                  </a:txBody>
+                  <a:tcPr anchor="ctr" marL="73152" marT="9144" marB="9144">
+                    <a:solidFill>
+                      <a:srgbClr val="FFFFFF"/>
+                    </a:solidFill>
+                  </a:tcPr>
+                </a:tc>
+              </a:tr>
+              <a:tr h="344658">
+                <a:tc>
+                  <a:txBody>
+                    <a:bodyPr/>
+                    <a:lstStyle/>
+                    <a:p>
+                      <a:r>
+                        <a:rPr sz="1150" b="0">
+                          <a:solidFill>
+                            <a:srgbClr val="1A2233"/>
+                          </a:solidFill>
+                          <a:latin typeface="Microsoft JhengHei"/>
+                          <a:ea typeface="Microsoft JhengHei"/>
+                          <a:cs typeface="Microsoft JhengHei"/>
+                        </a:rPr>
+                        <a:t>柏文</a:t>
+                      </a:r>
+                    </a:p>
+                  </a:txBody>
+                  <a:tcPr anchor="ctr" marL="73152" marT="9144" marB="9144">
+                    <a:solidFill>
+                      <a:srgbClr val="EEF2F9"/>
+                    </a:solidFill>
+                  </a:tcPr>
+                </a:tc>
+                <a:tc>
+                  <a:txBody>
+                    <a:bodyPr/>
+                    <a:lstStyle/>
+                    <a:p>
+                      <a:r>
+                        <a:rPr sz="1150" b="0">
+                          <a:solidFill>
+                            <a:srgbClr val="1A2233"/>
+                          </a:solidFill>
+                          <a:latin typeface="Microsoft JhengHei"/>
+                          <a:ea typeface="Microsoft JhengHei"/>
+                          <a:cs typeface="Microsoft JhengHei"/>
+                        </a:rPr>
+                        <a:t>8462</a:t>
+                      </a:r>
+                    </a:p>
+                  </a:txBody>
+                  <a:tcPr anchor="ctr" marL="73152" marT="9144" marB="9144">
+                    <a:solidFill>
+                      <a:srgbClr val="EEF2F9"/>
+                    </a:solidFill>
+                  </a:tcPr>
+                </a:tc>
+                <a:tc>
+                  <a:txBody>
+                    <a:bodyPr/>
+                    <a:lstStyle/>
+                    <a:p>
+                      <a:r>
+                        <a:rPr sz="1150" b="1">
+                          <a:solidFill>
+                            <a:srgbClr val="27A6C4"/>
+                          </a:solidFill>
+                          <a:latin typeface="Microsoft JhengHei"/>
+                          <a:ea typeface="Microsoft JhengHei"/>
+                          <a:cs typeface="Microsoft JhengHei"/>
+                        </a:rPr>
+                        <a:t>個資外洩</a:t>
+                      </a:r>
+                    </a:p>
+                  </a:txBody>
+                  <a:tcPr anchor="ctr" marL="73152" marT="9144" marB="9144">
+                    <a:solidFill>
+                      <a:srgbClr val="EEF2F9"/>
+                    </a:solidFill>
+                  </a:tcPr>
+                </a:tc>
+                <a:tc>
+                  <a:txBody>
+                    <a:bodyPr/>
+                    <a:lstStyle/>
+                    <a:p>
+                      <a:r>
+                        <a:rPr sz="1150" b="0">
+                          <a:solidFill>
+                            <a:srgbClr val="1A2233"/>
+                          </a:solidFill>
+                          <a:latin typeface="Microsoft JhengHei"/>
+                          <a:ea typeface="Microsoft JhengHei"/>
+                          <a:cs typeface="Microsoft JhengHei"/>
+                        </a:rPr>
+                        <a:t>安永聯合會計師事務所</a:t>
+                      </a:r>
+                    </a:p>
+                  </a:txBody>
+                  <a:tcPr anchor="ctr" marL="73152" marT="9144" marB="9144">
+                    <a:solidFill>
+                      <a:srgbClr val="EEF2F9"/>
+                    </a:solidFill>
+                  </a:tcPr>
+                </a:tc>
+                <a:tc>
+                  <a:txBody>
+                    <a:bodyPr/>
+                    <a:lstStyle/>
+                    <a:p>
+                      <a:r>
+                        <a:rPr sz="1150" b="0">
+                          <a:solidFill>
+                            <a:srgbClr val="1A2233"/>
+                          </a:solidFill>
+                          <a:latin typeface="Microsoft JhengHei"/>
+                          <a:ea typeface="Microsoft JhengHei"/>
+                          <a:cs typeface="Microsoft JhengHei"/>
+                        </a:rPr>
+                        <a:t>陳政初、洪國森</a:t>
+                      </a:r>
+                    </a:p>
+                  </a:txBody>
+                  <a:tcPr anchor="ctr" marL="73152" marT="9144" marB="9144">
+                    <a:solidFill>
+                      <a:srgbClr val="EEF2F9"/>
+                    </a:solidFill>
+                  </a:tcPr>
+                </a:tc>
+              </a:tr>
+              <a:tr h="344658">
+                <a:tc>
+                  <a:txBody>
+                    <a:bodyPr/>
+                    <a:lstStyle/>
+                    <a:p>
+                      <a:r>
+                        <a:rPr sz="1150" b="0">
+                          <a:solidFill>
+                            <a:srgbClr val="1A2233"/>
+                          </a:solidFill>
+                          <a:latin typeface="Microsoft JhengHei"/>
+                          <a:ea typeface="Microsoft JhengHei"/>
+                          <a:cs typeface="Microsoft JhengHei"/>
+                        </a:rPr>
+                        <a:t>友訊</a:t>
+                      </a:r>
+                    </a:p>
+                  </a:txBody>
+                  <a:tcPr anchor="ctr" marL="73152" marT="9144" marB="9144">
+                    <a:solidFill>
+                      <a:srgbClr val="FFFFFF"/>
+                    </a:solidFill>
+                  </a:tcPr>
+                </a:tc>
+                <a:tc>
+                  <a:txBody>
+                    <a:bodyPr/>
+                    <a:lstStyle/>
+                    <a:p>
+                      <a:r>
+                        <a:rPr sz="1150" b="0">
+                          <a:solidFill>
+                            <a:srgbClr val="1A2233"/>
+                          </a:solidFill>
+                          <a:latin typeface="Microsoft JhengHei"/>
+                          <a:ea typeface="Microsoft JhengHei"/>
+                          <a:cs typeface="Microsoft JhengHei"/>
+                        </a:rPr>
+                        <a:t>2332</a:t>
+                      </a:r>
+                    </a:p>
+                  </a:txBody>
+                  <a:tcPr anchor="ctr" marL="73152" marT="9144" marB="9144">
+                    <a:solidFill>
+                      <a:srgbClr val="FFFFFF"/>
+                    </a:solidFill>
+                  </a:tcPr>
+                </a:tc>
+                <a:tc>
+                  <a:txBody>
+                    <a:bodyPr/>
+                    <a:lstStyle/>
+                    <a:p>
+                      <a:r>
+                        <a:rPr sz="1150" b="1">
+                          <a:solidFill>
+                            <a:srgbClr val="E63946"/>
+                          </a:solidFill>
+                          <a:latin typeface="Microsoft JhengHei"/>
+                          <a:ea typeface="Microsoft JhengHei"/>
+                          <a:cs typeface="Microsoft JhengHei"/>
+                        </a:rPr>
+                        <a:t>駭客攻擊</a:t>
+                      </a:r>
+                    </a:p>
+                  </a:txBody>
+                  <a:tcPr anchor="ctr" marL="73152" marT="9144" marB="9144">
+                    <a:solidFill>
+                      <a:srgbClr val="FFFFFF"/>
+                    </a:solidFill>
+                  </a:tcPr>
+                </a:tc>
+                <a:tc>
+                  <a:txBody>
+                    <a:bodyPr/>
+                    <a:lstStyle/>
+                    <a:p>
+                      <a:r>
+                        <a:rPr sz="1150" b="0">
+                          <a:solidFill>
+                            <a:srgbClr val="1A2233"/>
+                          </a:solidFill>
+                          <a:latin typeface="Microsoft JhengHei"/>
+                          <a:ea typeface="Microsoft JhengHei"/>
+                          <a:cs typeface="Microsoft JhengHei"/>
+                        </a:rPr>
+                        <a:t>安侯建業聯合會計師事務所</a:t>
+                      </a:r>
+                    </a:p>
+                  </a:txBody>
+                  <a:tcPr anchor="ctr" marL="73152" marT="9144" marB="9144">
+                    <a:solidFill>
+                      <a:srgbClr val="FFFFFF"/>
+                    </a:solidFill>
+                  </a:tcPr>
+                </a:tc>
+                <a:tc>
+                  <a:txBody>
+                    <a:bodyPr/>
+                    <a:lstStyle/>
+                    <a:p>
+                      <a:r>
+                        <a:rPr sz="1150" b="0">
+                          <a:solidFill>
+                            <a:srgbClr val="1A2233"/>
+                          </a:solidFill>
+                          <a:latin typeface="Microsoft JhengHei"/>
+                          <a:ea typeface="Microsoft JhengHei"/>
+                          <a:cs typeface="Microsoft JhengHei"/>
+                        </a:rPr>
+                        <a:t>梅元貞、謝秋華</a:t>
+                      </a:r>
+                    </a:p>
+                  </a:txBody>
+                  <a:tcPr anchor="ctr" marL="73152" marT="9144" marB="9144">
+                    <a:solidFill>
+                      <a:srgbClr val="FFFFFF"/>
+                    </a:solidFill>
+                  </a:tcPr>
+                </a:tc>
+              </a:tr>
+              <a:tr h="344658">
+                <a:tc>
+                  <a:txBody>
+                    <a:bodyPr/>
+                    <a:lstStyle/>
+                    <a:p>
+                      <a:r>
+                        <a:rPr sz="1150" b="0">
+                          <a:solidFill>
+                            <a:srgbClr val="1A2233"/>
+                          </a:solidFill>
+                          <a:latin typeface="Microsoft JhengHei"/>
+                          <a:ea typeface="Microsoft JhengHei"/>
+                          <a:cs typeface="Microsoft JhengHei"/>
+                        </a:rPr>
+                        <a:t>長榮航</a:t>
+                      </a:r>
+                    </a:p>
+                  </a:txBody>
+                  <a:tcPr anchor="ctr" marL="73152" marT="9144" marB="9144">
+                    <a:solidFill>
+                      <a:srgbClr val="EEF2F9"/>
+                    </a:solidFill>
+                  </a:tcPr>
+                </a:tc>
+                <a:tc>
+                  <a:txBody>
+                    <a:bodyPr/>
+                    <a:lstStyle/>
+                    <a:p>
+                      <a:r>
+                        <a:rPr sz="1150" b="0">
+                          <a:solidFill>
+                            <a:srgbClr val="1A2233"/>
+                          </a:solidFill>
+                          <a:latin typeface="Microsoft JhengHei"/>
+                          <a:ea typeface="Microsoft JhengHei"/>
+                          <a:cs typeface="Microsoft JhengHei"/>
+                        </a:rPr>
+                        <a:t>2618</a:t>
+                      </a:r>
+                    </a:p>
+                  </a:txBody>
+                  <a:tcPr anchor="ctr" marL="73152" marT="9144" marB="9144">
+                    <a:solidFill>
+                      <a:srgbClr val="EEF2F9"/>
+                    </a:solidFill>
+                  </a:tcPr>
+                </a:tc>
+                <a:tc>
+                  <a:txBody>
+                    <a:bodyPr/>
+                    <a:lstStyle/>
+                    <a:p>
+                      <a:r>
+                        <a:rPr sz="1150" b="1">
+                          <a:solidFill>
+                            <a:srgbClr val="E63946"/>
+                          </a:solidFill>
+                          <a:latin typeface="Microsoft JhengHei"/>
+                          <a:ea typeface="Microsoft JhengHei"/>
+                          <a:cs typeface="Microsoft JhengHei"/>
+                        </a:rPr>
+                        <a:t>駭客攻擊</a:t>
+                      </a:r>
+                    </a:p>
+                  </a:txBody>
+                  <a:tcPr anchor="ctr" marL="73152" marT="9144" marB="9144">
+                    <a:solidFill>
+                      <a:srgbClr val="EEF2F9"/>
+                    </a:solidFill>
+                  </a:tcPr>
+                </a:tc>
+                <a:tc>
+                  <a:txBody>
+                    <a:bodyPr/>
+                    <a:lstStyle/>
+                    <a:p>
+                      <a:r>
+                        <a:rPr sz="1150" b="0">
+                          <a:solidFill>
+                            <a:srgbClr val="1A2233"/>
+                          </a:solidFill>
+                          <a:latin typeface="Microsoft JhengHei"/>
+                          <a:ea typeface="Microsoft JhengHei"/>
+                          <a:cs typeface="Microsoft JhengHei"/>
+                        </a:rPr>
+                        <a:t>安侯建業聯合會計師事務所</a:t>
+                      </a:r>
+                    </a:p>
+                  </a:txBody>
+                  <a:tcPr anchor="ctr" marL="73152" marT="9144" marB="9144">
+                    <a:solidFill>
+                      <a:srgbClr val="EEF2F9"/>
+                    </a:solidFill>
+                  </a:tcPr>
+                </a:tc>
+                <a:tc>
+                  <a:txBody>
+                    <a:bodyPr/>
+                    <a:lstStyle/>
+                    <a:p>
+                      <a:r>
+                        <a:rPr sz="1150" b="0">
+                          <a:solidFill>
+                            <a:srgbClr val="1A2233"/>
+                          </a:solidFill>
+                          <a:latin typeface="Microsoft JhengHei"/>
+                          <a:ea typeface="Microsoft JhengHei"/>
+                          <a:cs typeface="Microsoft JhengHei"/>
+                        </a:rPr>
+                        <a:t>陳雅琳、楊雲筑</a:t>
+                      </a:r>
+                    </a:p>
+                  </a:txBody>
+                  <a:tcPr anchor="ctr" marL="73152" marT="9144" marB="9144">
+                    <a:solidFill>
+                      <a:srgbClr val="EEF2F9"/>
+                    </a:solidFill>
+                  </a:tcPr>
+                </a:tc>
+              </a:tr>
+              <a:tr h="344658">
+                <a:tc>
+                  <a:txBody>
+                    <a:bodyPr/>
+                    <a:lstStyle/>
+                    <a:p>
+                      <a:r>
+                        <a:rPr sz="1150" b="0">
+                          <a:solidFill>
+                            <a:srgbClr val="1A2233"/>
+                          </a:solidFill>
+                          <a:latin typeface="Microsoft JhengHei"/>
+                          <a:ea typeface="Microsoft JhengHei"/>
+                          <a:cs typeface="Microsoft JhengHei"/>
+                        </a:rPr>
+                        <a:t>長榮航太</a:t>
+                      </a:r>
+                    </a:p>
+                  </a:txBody>
+                  <a:tcPr anchor="ctr" marL="73152" marT="9144" marB="9144">
+                    <a:solidFill>
+                      <a:srgbClr val="FFFFFF"/>
+                    </a:solidFill>
+                  </a:tcPr>
+                </a:tc>
+                <a:tc>
+                  <a:txBody>
+                    <a:bodyPr/>
+                    <a:lstStyle/>
+                    <a:p>
+                      <a:r>
+                        <a:rPr sz="1150" b="0">
+                          <a:solidFill>
+                            <a:srgbClr val="1A2233"/>
+                          </a:solidFill>
+                          <a:latin typeface="Microsoft JhengHei"/>
+                          <a:ea typeface="Microsoft JhengHei"/>
+                          <a:cs typeface="Microsoft JhengHei"/>
+                        </a:rPr>
+                        <a:t>2645</a:t>
+                      </a:r>
+                    </a:p>
+                  </a:txBody>
+                  <a:tcPr anchor="ctr" marL="73152" marT="9144" marB="9144">
+                    <a:solidFill>
+                      <a:srgbClr val="FFFFFF"/>
+                    </a:solidFill>
+                  </a:tcPr>
+                </a:tc>
+                <a:tc>
+                  <a:txBody>
+                    <a:bodyPr/>
+                    <a:lstStyle/>
+                    <a:p>
+                      <a:r>
+                        <a:rPr sz="1150" b="1">
+                          <a:solidFill>
+                            <a:srgbClr val="E63946"/>
+                          </a:solidFill>
+                          <a:latin typeface="Microsoft JhengHei"/>
+                          <a:ea typeface="Microsoft JhengHei"/>
+                          <a:cs typeface="Microsoft JhengHei"/>
+                        </a:rPr>
+                        <a:t>駭客攻擊</a:t>
+                      </a:r>
+                    </a:p>
+                  </a:txBody>
+                  <a:tcPr anchor="ctr" marL="73152" marT="9144" marB="9144">
+                    <a:solidFill>
+                      <a:srgbClr val="FFFFFF"/>
+                    </a:solidFill>
+                  </a:tcPr>
+                </a:tc>
+                <a:tc>
+                  <a:txBody>
+                    <a:bodyPr/>
+                    <a:lstStyle/>
+                    <a:p>
+                      <a:r>
+                        <a:rPr sz="1150" b="0">
+                          <a:solidFill>
+                            <a:srgbClr val="1A2233"/>
+                          </a:solidFill>
+                          <a:latin typeface="Microsoft JhengHei"/>
+                          <a:ea typeface="Microsoft JhengHei"/>
+                          <a:cs typeface="Microsoft JhengHei"/>
+                        </a:rPr>
+                        <a:t>安侯建業聯合會計師事務所</a:t>
+                      </a:r>
+                    </a:p>
+                  </a:txBody>
+                  <a:tcPr anchor="ctr" marL="73152" marT="9144" marB="9144">
+                    <a:solidFill>
+                      <a:srgbClr val="FFFFFF"/>
+                    </a:solidFill>
+                  </a:tcPr>
+                </a:tc>
+                <a:tc>
+                  <a:txBody>
+                    <a:bodyPr/>
+                    <a:lstStyle/>
+                    <a:p>
+                      <a:r>
+                        <a:rPr sz="1150" b="0">
+                          <a:solidFill>
+                            <a:srgbClr val="1A2233"/>
+                          </a:solidFill>
+                          <a:latin typeface="Microsoft JhengHei"/>
+                          <a:ea typeface="Microsoft JhengHei"/>
+                          <a:cs typeface="Microsoft JhengHei"/>
+                        </a:rPr>
+                        <a:t>陳雅琳、鄭博仁</a:t>
+                      </a:r>
+                    </a:p>
+                  </a:txBody>
+                  <a:tcPr anchor="ctr" marL="73152" marT="9144" marB="9144">
+                    <a:solidFill>
+                      <a:srgbClr val="FFFFFF"/>
+                    </a:solidFill>
+                  </a:tcPr>
+                </a:tc>
+              </a:tr>
+              <a:tr h="344658">
+                <a:tc>
+                  <a:txBody>
+                    <a:bodyPr/>
+                    <a:lstStyle/>
+                    <a:p>
+                      <a:r>
+                        <a:rPr sz="1150" b="0">
+                          <a:solidFill>
+                            <a:srgbClr val="1A2233"/>
+                          </a:solidFill>
+                          <a:latin typeface="Microsoft JhengHei"/>
+                          <a:ea typeface="Microsoft JhengHei"/>
+                          <a:cs typeface="Microsoft JhengHei"/>
+                        </a:rPr>
+                        <a:t>崴寶</a:t>
+                      </a:r>
+                    </a:p>
+                  </a:txBody>
+                  <a:tcPr anchor="ctr" marL="73152" marT="9144" marB="9144">
+                    <a:solidFill>
+                      <a:srgbClr val="EEF2F9"/>
+                    </a:solidFill>
+                  </a:tcPr>
+                </a:tc>
+                <a:tc>
+                  <a:txBody>
+                    <a:bodyPr/>
+                    <a:lstStyle/>
+                    <a:p>
+                      <a:r>
+                        <a:rPr sz="1150" b="0">
+                          <a:solidFill>
+                            <a:srgbClr val="1A2233"/>
+                          </a:solidFill>
+                          <a:latin typeface="Microsoft JhengHei"/>
+                          <a:ea typeface="Microsoft JhengHei"/>
+                          <a:cs typeface="Microsoft JhengHei"/>
+                        </a:rPr>
+                        <a:t>7744</a:t>
+                      </a:r>
+                    </a:p>
+                  </a:txBody>
+                  <a:tcPr anchor="ctr" marL="73152" marT="9144" marB="9144">
+                    <a:solidFill>
+                      <a:srgbClr val="EEF2F9"/>
+                    </a:solidFill>
+                  </a:tcPr>
+                </a:tc>
+                <a:tc>
+                  <a:txBody>
+                    <a:bodyPr/>
+                    <a:lstStyle/>
+                    <a:p>
+                      <a:r>
+                        <a:rPr sz="1150" b="1">
+                          <a:solidFill>
+                            <a:srgbClr val="F4A261"/>
+                          </a:solidFill>
+                          <a:latin typeface="Microsoft JhengHei"/>
+                          <a:ea typeface="Microsoft JhengHei"/>
+                          <a:cs typeface="Microsoft JhengHei"/>
+                        </a:rPr>
+                        <a:t>勒索病毒/加密</a:t>
+                      </a:r>
+                    </a:p>
+                  </a:txBody>
+                  <a:tcPr anchor="ctr" marL="73152" marT="9144" marB="9144">
+                    <a:solidFill>
+                      <a:srgbClr val="EEF2F9"/>
+                    </a:solidFill>
+                  </a:tcPr>
+                </a:tc>
+                <a:tc>
+                  <a:txBody>
+                    <a:bodyPr/>
+                    <a:lstStyle/>
+                    <a:p>
+                      <a:r>
+                        <a:rPr sz="1150" b="0">
+                          <a:solidFill>
+                            <a:srgbClr val="1A2233"/>
+                          </a:solidFill>
+                          <a:latin typeface="Microsoft JhengHei"/>
+                          <a:ea typeface="Microsoft JhengHei"/>
+                          <a:cs typeface="Microsoft JhengHei"/>
+                        </a:rPr>
+                        <a:t>安永聯合會計師事務所</a:t>
+                      </a:r>
+                    </a:p>
+                  </a:txBody>
+                  <a:tcPr anchor="ctr" marL="73152" marT="9144" marB="9144">
+                    <a:solidFill>
+                      <a:srgbClr val="EEF2F9"/>
+                    </a:solidFill>
+                  </a:tcPr>
+                </a:tc>
+                <a:tc>
+                  <a:txBody>
+                    <a:bodyPr/>
+                    <a:lstStyle/>
+                    <a:p>
+                      <a:r>
+                        <a:rPr sz="1150" b="0">
+                          <a:solidFill>
+                            <a:srgbClr val="1A2233"/>
+                          </a:solidFill>
+                          <a:latin typeface="Microsoft JhengHei"/>
+                          <a:ea typeface="Microsoft JhengHei"/>
+                          <a:cs typeface="Microsoft JhengHei"/>
+                        </a:rPr>
+                        <a:t>黃宇廷、黃子評</a:t>
+                      </a:r>
+                    </a:p>
+                  </a:txBody>
+                  <a:tcPr anchor="ctr" marL="73152" marT="9144" marB="9144">
+                    <a:solidFill>
+                      <a:srgbClr val="EEF2F9"/>
+                    </a:solidFill>
+                  </a:tcPr>
+                </a:tc>
+              </a:tr>
+              <a:tr h="344658">
+                <a:tc>
+                  <a:txBody>
+                    <a:bodyPr/>
+                    <a:lstStyle/>
+                    <a:p>
+                      <a:r>
+                        <a:rPr sz="1150" b="0">
+                          <a:solidFill>
+                            <a:srgbClr val="1A2233"/>
+                          </a:solidFill>
+                          <a:latin typeface="Microsoft JhengHei"/>
+                          <a:ea typeface="Microsoft JhengHei"/>
+                          <a:cs typeface="Microsoft JhengHei"/>
+                        </a:rPr>
+                        <a:t>達爾膚</a:t>
+                      </a:r>
+                    </a:p>
+                  </a:txBody>
+                  <a:tcPr anchor="ctr" marL="73152" marT="9144" marB="9144">
+                    <a:solidFill>
+                      <a:srgbClr val="FFFFFF"/>
+                    </a:solidFill>
+                  </a:tcPr>
+                </a:tc>
+                <a:tc>
+                  <a:txBody>
+                    <a:bodyPr/>
+                    <a:lstStyle/>
+                    <a:p>
+                      <a:r>
+                        <a:rPr sz="1150" b="0">
+                          <a:solidFill>
+                            <a:srgbClr val="1A2233"/>
+                          </a:solidFill>
+                          <a:latin typeface="Microsoft JhengHei"/>
+                          <a:ea typeface="Microsoft JhengHei"/>
+                          <a:cs typeface="Microsoft JhengHei"/>
+                        </a:rPr>
+                        <a:t>6523</a:t>
                       </a:r>
                     </a:p>
                   </a:txBody>
@@ -7240,7 +8216,7 @@
                           <a:ea typeface="Microsoft JhengHei"/>
                           <a:cs typeface="Microsoft JhengHei"/>
                         </a:rPr>
-                        <a:t>王銘義、林永智</a:t>
+                        <a:t>于智帆、葉翠苗</a:t>
                       </a:r>
                     </a:p>
                   </a:txBody>
@@ -7266,7 +8242,7 @@
                           <a:ea typeface="Microsoft JhengHei"/>
                           <a:cs typeface="Microsoft JhengHei"/>
                         </a:rPr>
-                        <a:t>鈊象</a:t>
+                        <a:t>大車隊</a:t>
                       </a:r>
                     </a:p>
                   </a:txBody>
@@ -7290,251 +8266,7 @@
                           <a:ea typeface="Microsoft JhengHei"/>
                           <a:cs typeface="Microsoft JhengHei"/>
                         </a:rPr>
-                        <a:t>3293</a:t>
-                      </a:r>
-                    </a:p>
-                  </a:txBody>
-                  <a:tcPr anchor="ctr" marL="73152" marT="9144" marB="9144">
-                    <a:solidFill>
-                      <a:srgbClr val="EEF2F9"/>
-                    </a:solidFill>
-                  </a:tcPr>
-                </a:tc>
-                <a:tc>
-                  <a:txBody>
-                    <a:bodyPr/>
-                    <a:lstStyle/>
-                    <a:p>
-                      <a:r>
-                        <a:rPr sz="1150" b="1">
-                          <a:solidFill>
-                            <a:srgbClr val="5C6679"/>
-                          </a:solidFill>
-                          <a:latin typeface="Microsoft JhengHei"/>
-                          <a:ea typeface="Microsoft JhengHei"/>
-                          <a:cs typeface="Microsoft JhengHei"/>
-                        </a:rPr>
-                        <a:t>其他</a:t>
-                      </a:r>
-                    </a:p>
-                  </a:txBody>
-                  <a:tcPr anchor="ctr" marL="73152" marT="9144" marB="9144">
-                    <a:solidFill>
-                      <a:srgbClr val="EEF2F9"/>
-                    </a:solidFill>
-                  </a:tcPr>
-                </a:tc>
-                <a:tc>
-                  <a:txBody>
-                    <a:bodyPr/>
-                    <a:lstStyle/>
-                    <a:p>
-                      <a:r>
-                        <a:rPr sz="1150" b="0">
-                          <a:solidFill>
-                            <a:srgbClr val="1A2233"/>
-                          </a:solidFill>
-                          <a:latin typeface="Microsoft JhengHei"/>
-                          <a:ea typeface="Microsoft JhengHei"/>
-                          <a:cs typeface="Microsoft JhengHei"/>
-                        </a:rPr>
-                        <a:t>勤業眾信聯合會計師事務所</a:t>
-                      </a:r>
-                    </a:p>
-                  </a:txBody>
-                  <a:tcPr anchor="ctr" marL="73152" marT="9144" marB="9144">
-                    <a:solidFill>
-                      <a:srgbClr val="EEF2F9"/>
-                    </a:solidFill>
-                  </a:tcPr>
-                </a:tc>
-                <a:tc>
-                  <a:txBody>
-                    <a:bodyPr/>
-                    <a:lstStyle/>
-                    <a:p>
-                      <a:r>
-                        <a:rPr sz="1150" b="0">
-                          <a:solidFill>
-                            <a:srgbClr val="1A2233"/>
-                          </a:solidFill>
-                          <a:latin typeface="Microsoft JhengHei"/>
-                          <a:ea typeface="Microsoft JhengHei"/>
-                          <a:cs typeface="Microsoft JhengHei"/>
-                        </a:rPr>
-                        <a:t>周仕杰、李東峰</a:t>
-                      </a:r>
-                    </a:p>
-                  </a:txBody>
-                  <a:tcPr anchor="ctr" marL="73152" marT="9144" marB="9144">
-                    <a:solidFill>
-                      <a:srgbClr val="EEF2F9"/>
-                    </a:solidFill>
-                  </a:tcPr>
-                </a:tc>
-              </a:tr>
-              <a:tr h="344658">
-                <a:tc>
-                  <a:txBody>
-                    <a:bodyPr/>
-                    <a:lstStyle/>
-                    <a:p>
-                      <a:r>
-                        <a:rPr sz="1150" b="0">
-                          <a:solidFill>
-                            <a:srgbClr val="1A2233"/>
-                          </a:solidFill>
-                          <a:latin typeface="Microsoft JhengHei"/>
-                          <a:ea typeface="Microsoft JhengHei"/>
-                          <a:cs typeface="Microsoft JhengHei"/>
-                        </a:rPr>
-                        <a:t>柏文</a:t>
-                      </a:r>
-                    </a:p>
-                  </a:txBody>
-                  <a:tcPr anchor="ctr" marL="73152" marT="9144" marB="9144">
-                    <a:solidFill>
-                      <a:srgbClr val="FFFFFF"/>
-                    </a:solidFill>
-                  </a:tcPr>
-                </a:tc>
-                <a:tc>
-                  <a:txBody>
-                    <a:bodyPr/>
-                    <a:lstStyle/>
-                    <a:p>
-                      <a:r>
-                        <a:rPr sz="1150" b="0">
-                          <a:solidFill>
-                            <a:srgbClr val="1A2233"/>
-                          </a:solidFill>
-                          <a:latin typeface="Microsoft JhengHei"/>
-                          <a:ea typeface="Microsoft JhengHei"/>
-                          <a:cs typeface="Microsoft JhengHei"/>
-                        </a:rPr>
-                        <a:t>8462</a:t>
-                      </a:r>
-                    </a:p>
-                  </a:txBody>
-                  <a:tcPr anchor="ctr" marL="73152" marT="9144" marB="9144">
-                    <a:solidFill>
-                      <a:srgbClr val="FFFFFF"/>
-                    </a:solidFill>
-                  </a:tcPr>
-                </a:tc>
-                <a:tc>
-                  <a:txBody>
-                    <a:bodyPr/>
-                    <a:lstStyle/>
-                    <a:p>
-                      <a:r>
-                        <a:rPr sz="1150" b="1">
-                          <a:solidFill>
-                            <a:srgbClr val="27A6C4"/>
-                          </a:solidFill>
-                          <a:latin typeface="Microsoft JhengHei"/>
-                          <a:ea typeface="Microsoft JhengHei"/>
-                          <a:cs typeface="Microsoft JhengHei"/>
-                        </a:rPr>
-                        <a:t>個資外洩</a:t>
-                      </a:r>
-                    </a:p>
-                  </a:txBody>
-                  <a:tcPr anchor="ctr" marL="73152" marT="9144" marB="9144">
-                    <a:solidFill>
-                      <a:srgbClr val="FFFFFF"/>
-                    </a:solidFill>
-                  </a:tcPr>
-                </a:tc>
-                <a:tc>
-                  <a:txBody>
-                    <a:bodyPr/>
-                    <a:lstStyle/>
-                    <a:p>
-                      <a:r>
-                        <a:rPr sz="1150" b="0">
-                          <a:solidFill>
-                            <a:srgbClr val="1A2233"/>
-                          </a:solidFill>
-                          <a:latin typeface="Microsoft JhengHei"/>
-                          <a:ea typeface="Microsoft JhengHei"/>
-                          <a:cs typeface="Microsoft JhengHei"/>
-                        </a:rPr>
-                        <a:t>安永聯合會計師事務所</a:t>
-                      </a:r>
-                    </a:p>
-                  </a:txBody>
-                  <a:tcPr anchor="ctr" marL="73152" marT="9144" marB="9144">
-                    <a:solidFill>
-                      <a:srgbClr val="FFFFFF"/>
-                    </a:solidFill>
-                  </a:tcPr>
-                </a:tc>
-                <a:tc>
-                  <a:txBody>
-                    <a:bodyPr/>
-                    <a:lstStyle/>
-                    <a:p>
-                      <a:r>
-                        <a:rPr sz="1150" b="0">
-                          <a:solidFill>
-                            <a:srgbClr val="1A2233"/>
-                          </a:solidFill>
-                          <a:latin typeface="Microsoft JhengHei"/>
-                          <a:ea typeface="Microsoft JhengHei"/>
-                          <a:cs typeface="Microsoft JhengHei"/>
-                        </a:rPr>
-                        <a:t>陳政初、洪國森</a:t>
-                      </a:r>
-                    </a:p>
-                  </a:txBody>
-                  <a:tcPr anchor="ctr" marL="73152" marT="9144" marB="9144">
-                    <a:solidFill>
-                      <a:srgbClr val="FFFFFF"/>
-                    </a:solidFill>
-                  </a:tcPr>
-                </a:tc>
-              </a:tr>
-              <a:tr h="344658">
-                <a:tc>
-                  <a:txBody>
-                    <a:bodyPr/>
-                    <a:lstStyle/>
-                    <a:p>
-                      <a:r>
-                        <a:rPr sz="1150" b="0">
-                          <a:solidFill>
-                            <a:srgbClr val="1A2233"/>
-                          </a:solidFill>
-                          <a:latin typeface="Microsoft JhengHei"/>
-                          <a:ea typeface="Microsoft JhengHei"/>
-                          <a:cs typeface="Microsoft JhengHei"/>
-                        </a:rPr>
-                        <a:t>友訊</a:t>
-                      </a:r>
-                    </a:p>
-                  </a:txBody>
-                  <a:tcPr anchor="ctr" marL="73152" marT="9144" marB="9144">
-                    <a:solidFill>
-                      <a:srgbClr val="EEF2F9"/>
-                    </a:solidFill>
-                  </a:tcPr>
-                </a:tc>
-                <a:tc>
-                  <a:txBody>
-                    <a:bodyPr/>
-                    <a:lstStyle/>
-                    <a:p>
-                      <a:r>
-                        <a:rPr sz="1150" b="0">
-                          <a:solidFill>
-                            <a:srgbClr val="1A2233"/>
-                          </a:solidFill>
-                          <a:latin typeface="Microsoft JhengHei"/>
-                          <a:ea typeface="Microsoft JhengHei"/>
-                          <a:cs typeface="Microsoft JhengHei"/>
-                        </a:rPr>
-                        <a:t>2332</a:t>
+                        <a:t>2640</a:t>
                       </a:r>
                     </a:p>
                   </a:txBody>
@@ -7582,7 +8314,7 @@
                           <a:ea typeface="Microsoft JhengHei"/>
                           <a:cs typeface="Microsoft JhengHei"/>
                         </a:rPr>
-                        <a:t>安侯建業聯合會計師事務所</a:t>
+                        <a:t>資誠聯合會計師事務所</a:t>
                       </a:r>
                     </a:p>
                   </a:txBody>
@@ -7606,7 +8338,7 @@
                           <a:ea typeface="Microsoft JhengHei"/>
                           <a:cs typeface="Microsoft JhengHei"/>
                         </a:rPr>
-                        <a:t>梅元貞、謝秋華</a:t>
+                        <a:t>支秉鈞、涂展源</a:t>
                       </a:r>
                     </a:p>
                   </a:txBody>
@@ -7632,7 +8364,7 @@
                           <a:ea typeface="Microsoft JhengHei"/>
                           <a:cs typeface="Microsoft JhengHei"/>
                         </a:rPr>
-                        <a:t>長榮航</a:t>
+                        <a:t>富爾特</a:t>
                       </a:r>
                     </a:p>
                   </a:txBody>
@@ -7656,251 +8388,7 @@
                           <a:ea typeface="Microsoft JhengHei"/>
                           <a:cs typeface="Microsoft JhengHei"/>
                         </a:rPr>
-                        <a:t>2618</a:t>
-                      </a:r>
-                    </a:p>
-                  </a:txBody>
-                  <a:tcPr anchor="ctr" marL="73152" marT="9144" marB="9144">
-                    <a:solidFill>
-                      <a:srgbClr val="FFFFFF"/>
-                    </a:solidFill>
-                  </a:tcPr>
-                </a:tc>
-                <a:tc>
-                  <a:txBody>
-                    <a:bodyPr/>
-                    <a:lstStyle/>
-                    <a:p>
-                      <a:r>
-                        <a:rPr sz="1150" b="1">
-                          <a:solidFill>
-                            <a:srgbClr val="E63946"/>
-                          </a:solidFill>
-                          <a:latin typeface="Microsoft JhengHei"/>
-                          <a:ea typeface="Microsoft JhengHei"/>
-                          <a:cs typeface="Microsoft JhengHei"/>
-                        </a:rPr>
-                        <a:t>駭客攻擊</a:t>
-                      </a:r>
-                    </a:p>
-                  </a:txBody>
-                  <a:tcPr anchor="ctr" marL="73152" marT="9144" marB="9144">
-                    <a:solidFill>
-                      <a:srgbClr val="FFFFFF"/>
-                    </a:solidFill>
-                  </a:tcPr>
-                </a:tc>
-                <a:tc>
-                  <a:txBody>
-                    <a:bodyPr/>
-                    <a:lstStyle/>
-                    <a:p>
-                      <a:r>
-                        <a:rPr sz="1150" b="0">
-                          <a:solidFill>
-                            <a:srgbClr val="1A2233"/>
-                          </a:solidFill>
-                          <a:latin typeface="Microsoft JhengHei"/>
-                          <a:ea typeface="Microsoft JhengHei"/>
-                          <a:cs typeface="Microsoft JhengHei"/>
-                        </a:rPr>
-                        <a:t>安侯建業聯合會計師事務所</a:t>
-                      </a:r>
-                    </a:p>
-                  </a:txBody>
-                  <a:tcPr anchor="ctr" marL="73152" marT="9144" marB="9144">
-                    <a:solidFill>
-                      <a:srgbClr val="FFFFFF"/>
-                    </a:solidFill>
-                  </a:tcPr>
-                </a:tc>
-                <a:tc>
-                  <a:txBody>
-                    <a:bodyPr/>
-                    <a:lstStyle/>
-                    <a:p>
-                      <a:r>
-                        <a:rPr sz="1150" b="0">
-                          <a:solidFill>
-                            <a:srgbClr val="1A2233"/>
-                          </a:solidFill>
-                          <a:latin typeface="Microsoft JhengHei"/>
-                          <a:ea typeface="Microsoft JhengHei"/>
-                          <a:cs typeface="Microsoft JhengHei"/>
-                        </a:rPr>
-                        <a:t>陳雅琳、楊雲筑</a:t>
-                      </a:r>
-                    </a:p>
-                  </a:txBody>
-                  <a:tcPr anchor="ctr" marL="73152" marT="9144" marB="9144">
-                    <a:solidFill>
-                      <a:srgbClr val="FFFFFF"/>
-                    </a:solidFill>
-                  </a:tcPr>
-                </a:tc>
-              </a:tr>
-              <a:tr h="344658">
-                <a:tc>
-                  <a:txBody>
-                    <a:bodyPr/>
-                    <a:lstStyle/>
-                    <a:p>
-                      <a:r>
-                        <a:rPr sz="1150" b="0">
-                          <a:solidFill>
-                            <a:srgbClr val="1A2233"/>
-                          </a:solidFill>
-                          <a:latin typeface="Microsoft JhengHei"/>
-                          <a:ea typeface="Microsoft JhengHei"/>
-                          <a:cs typeface="Microsoft JhengHei"/>
-                        </a:rPr>
-                        <a:t>長榮航太</a:t>
-                      </a:r>
-                    </a:p>
-                  </a:txBody>
-                  <a:tcPr anchor="ctr" marL="73152" marT="9144" marB="9144">
-                    <a:solidFill>
-                      <a:srgbClr val="EEF2F9"/>
-                    </a:solidFill>
-                  </a:tcPr>
-                </a:tc>
-                <a:tc>
-                  <a:txBody>
-                    <a:bodyPr/>
-                    <a:lstStyle/>
-                    <a:p>
-                      <a:r>
-                        <a:rPr sz="1150" b="0">
-                          <a:solidFill>
-                            <a:srgbClr val="1A2233"/>
-                          </a:solidFill>
-                          <a:latin typeface="Microsoft JhengHei"/>
-                          <a:ea typeface="Microsoft JhengHei"/>
-                          <a:cs typeface="Microsoft JhengHei"/>
-                        </a:rPr>
-                        <a:t>2645</a:t>
-                      </a:r>
-                    </a:p>
-                  </a:txBody>
-                  <a:tcPr anchor="ctr" marL="73152" marT="9144" marB="9144">
-                    <a:solidFill>
-                      <a:srgbClr val="EEF2F9"/>
-                    </a:solidFill>
-                  </a:tcPr>
-                </a:tc>
-                <a:tc>
-                  <a:txBody>
-                    <a:bodyPr/>
-                    <a:lstStyle/>
-                    <a:p>
-                      <a:r>
-                        <a:rPr sz="1150" b="1">
-                          <a:solidFill>
-                            <a:srgbClr val="E63946"/>
-                          </a:solidFill>
-                          <a:latin typeface="Microsoft JhengHei"/>
-                          <a:ea typeface="Microsoft JhengHei"/>
-                          <a:cs typeface="Microsoft JhengHei"/>
-                        </a:rPr>
-                        <a:t>駭客攻擊</a:t>
-                      </a:r>
-                    </a:p>
-                  </a:txBody>
-                  <a:tcPr anchor="ctr" marL="73152" marT="9144" marB="9144">
-                    <a:solidFill>
-                      <a:srgbClr val="EEF2F9"/>
-                    </a:solidFill>
-                  </a:tcPr>
-                </a:tc>
-                <a:tc>
-                  <a:txBody>
-                    <a:bodyPr/>
-                    <a:lstStyle/>
-                    <a:p>
-                      <a:r>
-                        <a:rPr sz="1150" b="0">
-                          <a:solidFill>
-                            <a:srgbClr val="1A2233"/>
-                          </a:solidFill>
-                          <a:latin typeface="Microsoft JhengHei"/>
-                          <a:ea typeface="Microsoft JhengHei"/>
-                          <a:cs typeface="Microsoft JhengHei"/>
-                        </a:rPr>
-                        <a:t>安侯建業聯合會計師事務所</a:t>
-                      </a:r>
-                    </a:p>
-                  </a:txBody>
-                  <a:tcPr anchor="ctr" marL="73152" marT="9144" marB="9144">
-                    <a:solidFill>
-                      <a:srgbClr val="EEF2F9"/>
-                    </a:solidFill>
-                  </a:tcPr>
-                </a:tc>
-                <a:tc>
-                  <a:txBody>
-                    <a:bodyPr/>
-                    <a:lstStyle/>
-                    <a:p>
-                      <a:r>
-                        <a:rPr sz="1150" b="0">
-                          <a:solidFill>
-                            <a:srgbClr val="1A2233"/>
-                          </a:solidFill>
-                          <a:latin typeface="Microsoft JhengHei"/>
-                          <a:ea typeface="Microsoft JhengHei"/>
-                          <a:cs typeface="Microsoft JhengHei"/>
-                        </a:rPr>
-                        <a:t>陳雅琳、鄭博仁</a:t>
-                      </a:r>
-                    </a:p>
-                  </a:txBody>
-                  <a:tcPr anchor="ctr" marL="73152" marT="9144" marB="9144">
-                    <a:solidFill>
-                      <a:srgbClr val="EEF2F9"/>
-                    </a:solidFill>
-                  </a:tcPr>
-                </a:tc>
-              </a:tr>
-              <a:tr h="344658">
-                <a:tc>
-                  <a:txBody>
-                    <a:bodyPr/>
-                    <a:lstStyle/>
-                    <a:p>
-                      <a:r>
-                        <a:rPr sz="1150" b="0">
-                          <a:solidFill>
-                            <a:srgbClr val="1A2233"/>
-                          </a:solidFill>
-                          <a:latin typeface="Microsoft JhengHei"/>
-                          <a:ea typeface="Microsoft JhengHei"/>
-                          <a:cs typeface="Microsoft JhengHei"/>
-                        </a:rPr>
-                        <a:t>崴寶</a:t>
-                      </a:r>
-                    </a:p>
-                  </a:txBody>
-                  <a:tcPr anchor="ctr" marL="73152" marT="9144" marB="9144">
-                    <a:solidFill>
-                      <a:srgbClr val="FFFFFF"/>
-                    </a:solidFill>
-                  </a:tcPr>
-                </a:tc>
-                <a:tc>
-                  <a:txBody>
-                    <a:bodyPr/>
-                    <a:lstStyle/>
-                    <a:p>
-                      <a:r>
-                        <a:rPr sz="1150" b="0">
-                          <a:solidFill>
-                            <a:srgbClr val="1A2233"/>
-                          </a:solidFill>
-                          <a:latin typeface="Microsoft JhengHei"/>
-                          <a:ea typeface="Microsoft JhengHei"/>
-                          <a:cs typeface="Microsoft JhengHei"/>
-                        </a:rPr>
-                        <a:t>7744</a:t>
+                        <a:t>6136</a:t>
                       </a:r>
                     </a:p>
                   </a:txBody>
@@ -7972,7 +8460,7 @@
                           <a:ea typeface="Microsoft JhengHei"/>
                           <a:cs typeface="Microsoft JhengHei"/>
                         </a:rPr>
-                        <a:t>黃宇廷、黃子評</a:t>
+                        <a:t>許新民、余倩如</a:t>
                       </a:r>
                     </a:p>
                   </a:txBody>
@@ -7983,7 +8471,7 @@
                   </a:tcPr>
                 </a:tc>
               </a:tr>
-              <a:tr h="344658">
+              <a:tr h="344664">
                 <a:tc>
                   <a:txBody>
                     <a:bodyPr/>
@@ -7998,7 +8486,7 @@
                           <a:ea typeface="Microsoft JhengHei"/>
                           <a:cs typeface="Microsoft JhengHei"/>
                         </a:rPr>
-                        <a:t>達爾膚</a:t>
+                        <a:t>創新服務</a:t>
                       </a:r>
                     </a:p>
                   </a:txBody>
@@ -8022,7 +8510,7 @@
                           <a:ea typeface="Microsoft JhengHei"/>
                           <a:cs typeface="Microsoft JhengHei"/>
                         </a:rPr>
-                        <a:t>6523</a:t>
+                        <a:t>7828</a:t>
                       </a:r>
                     </a:p>
                   </a:txBody>
@@ -8040,13 +8528,13 @@
                       <a:r>
                         <a:rPr sz="1150" b="1">
                           <a:solidFill>
-                            <a:srgbClr val="E63946"/>
+                            <a:srgbClr val="F4A261"/>
                           </a:solidFill>
                           <a:latin typeface="Microsoft JhengHei"/>
                           <a:ea typeface="Microsoft JhengHei"/>
                           <a:cs typeface="Microsoft JhengHei"/>
                         </a:rPr>
-                        <a:t>駭客攻擊</a:t>
+                        <a:t>勒索病毒/加密</a:t>
                       </a:r>
                     </a:p>
                   </a:txBody>
@@ -8094,495 +8582,7 @@
                           <a:ea typeface="Microsoft JhengHei"/>
                           <a:cs typeface="Microsoft JhengHei"/>
                         </a:rPr>
-                        <a:t>于智帆、葉翠苗</a:t>
-                      </a:r>
-                    </a:p>
-                  </a:txBody>
-                  <a:tcPr anchor="ctr" marL="73152" marT="9144" marB="9144">
-                    <a:solidFill>
-                      <a:srgbClr val="EEF2F9"/>
-                    </a:solidFill>
-                  </a:tcPr>
-                </a:tc>
-              </a:tr>
-              <a:tr h="344658">
-                <a:tc>
-                  <a:txBody>
-                    <a:bodyPr/>
-                    <a:lstStyle/>
-                    <a:p>
-                      <a:r>
-                        <a:rPr sz="1150" b="0">
-                          <a:solidFill>
-                            <a:srgbClr val="1A2233"/>
-                          </a:solidFill>
-                          <a:latin typeface="Microsoft JhengHei"/>
-                          <a:ea typeface="Microsoft JhengHei"/>
-                          <a:cs typeface="Microsoft JhengHei"/>
-                        </a:rPr>
-                        <a:t>大車隊</a:t>
-                      </a:r>
-                    </a:p>
-                  </a:txBody>
-                  <a:tcPr anchor="ctr" marL="73152" marT="9144" marB="9144">
-                    <a:solidFill>
-                      <a:srgbClr val="FFFFFF"/>
-                    </a:solidFill>
-                  </a:tcPr>
-                </a:tc>
-                <a:tc>
-                  <a:txBody>
-                    <a:bodyPr/>
-                    <a:lstStyle/>
-                    <a:p>
-                      <a:r>
-                        <a:rPr sz="1150" b="0">
-                          <a:solidFill>
-                            <a:srgbClr val="1A2233"/>
-                          </a:solidFill>
-                          <a:latin typeface="Microsoft JhengHei"/>
-                          <a:ea typeface="Microsoft JhengHei"/>
-                          <a:cs typeface="Microsoft JhengHei"/>
-                        </a:rPr>
-                        <a:t>2640</a:t>
-                      </a:r>
-                    </a:p>
-                  </a:txBody>
-                  <a:tcPr anchor="ctr" marL="73152" marT="9144" marB="9144">
-                    <a:solidFill>
-                      <a:srgbClr val="FFFFFF"/>
-                    </a:solidFill>
-                  </a:tcPr>
-                </a:tc>
-                <a:tc>
-                  <a:txBody>
-                    <a:bodyPr/>
-                    <a:lstStyle/>
-                    <a:p>
-                      <a:r>
-                        <a:rPr sz="1150" b="1">
-                          <a:solidFill>
-                            <a:srgbClr val="E63946"/>
-                          </a:solidFill>
-                          <a:latin typeface="Microsoft JhengHei"/>
-                          <a:ea typeface="Microsoft JhengHei"/>
-                          <a:cs typeface="Microsoft JhengHei"/>
-                        </a:rPr>
-                        <a:t>駭客攻擊</a:t>
-                      </a:r>
-                    </a:p>
-                  </a:txBody>
-                  <a:tcPr anchor="ctr" marL="73152" marT="9144" marB="9144">
-                    <a:solidFill>
-                      <a:srgbClr val="FFFFFF"/>
-                    </a:solidFill>
-                  </a:tcPr>
-                </a:tc>
-                <a:tc>
-                  <a:txBody>
-                    <a:bodyPr/>
-                    <a:lstStyle/>
-                    <a:p>
-                      <a:r>
-                        <a:rPr sz="1150" b="0">
-                          <a:solidFill>
-                            <a:srgbClr val="1A2233"/>
-                          </a:solidFill>
-                          <a:latin typeface="Microsoft JhengHei"/>
-                          <a:ea typeface="Microsoft JhengHei"/>
-                          <a:cs typeface="Microsoft JhengHei"/>
-                        </a:rPr>
-                        <a:t>資誠聯合會計師事務所</a:t>
-                      </a:r>
-                    </a:p>
-                  </a:txBody>
-                  <a:tcPr anchor="ctr" marL="73152" marT="9144" marB="9144">
-                    <a:solidFill>
-                      <a:srgbClr val="FFFFFF"/>
-                    </a:solidFill>
-                  </a:tcPr>
-                </a:tc>
-                <a:tc>
-                  <a:txBody>
-                    <a:bodyPr/>
-                    <a:lstStyle/>
-                    <a:p>
-                      <a:r>
-                        <a:rPr sz="1150" b="0">
-                          <a:solidFill>
-                            <a:srgbClr val="1A2233"/>
-                          </a:solidFill>
-                          <a:latin typeface="Microsoft JhengHei"/>
-                          <a:ea typeface="Microsoft JhengHei"/>
-                          <a:cs typeface="Microsoft JhengHei"/>
-                        </a:rPr>
-                        <a:t>支秉鈞、涂展源</a:t>
-                      </a:r>
-                    </a:p>
-                  </a:txBody>
-                  <a:tcPr anchor="ctr" marL="73152" marT="9144" marB="9144">
-                    <a:solidFill>
-                      <a:srgbClr val="FFFFFF"/>
-                    </a:solidFill>
-                  </a:tcPr>
-                </a:tc>
-              </a:tr>
-              <a:tr h="344658">
-                <a:tc>
-                  <a:txBody>
-                    <a:bodyPr/>
-                    <a:lstStyle/>
-                    <a:p>
-                      <a:r>
-                        <a:rPr sz="1150" b="0">
-                          <a:solidFill>
-                            <a:srgbClr val="1A2233"/>
-                          </a:solidFill>
-                          <a:latin typeface="Microsoft JhengHei"/>
-                          <a:ea typeface="Microsoft JhengHei"/>
-                          <a:cs typeface="Microsoft JhengHei"/>
-                        </a:rPr>
-                        <a:t>富爾特</a:t>
-                      </a:r>
-                    </a:p>
-                  </a:txBody>
-                  <a:tcPr anchor="ctr" marL="73152" marT="9144" marB="9144">
-                    <a:solidFill>
-                      <a:srgbClr val="EEF2F9"/>
-                    </a:solidFill>
-                  </a:tcPr>
-                </a:tc>
-                <a:tc>
-                  <a:txBody>
-                    <a:bodyPr/>
-                    <a:lstStyle/>
-                    <a:p>
-                      <a:r>
-                        <a:rPr sz="1150" b="0">
-                          <a:solidFill>
-                            <a:srgbClr val="1A2233"/>
-                          </a:solidFill>
-                          <a:latin typeface="Microsoft JhengHei"/>
-                          <a:ea typeface="Microsoft JhengHei"/>
-                          <a:cs typeface="Microsoft JhengHei"/>
-                        </a:rPr>
-                        <a:t>6136</a:t>
-                      </a:r>
-                    </a:p>
-                  </a:txBody>
-                  <a:tcPr anchor="ctr" marL="73152" marT="9144" marB="9144">
-                    <a:solidFill>
-                      <a:srgbClr val="EEF2F9"/>
-                    </a:solidFill>
-                  </a:tcPr>
-                </a:tc>
-                <a:tc>
-                  <a:txBody>
-                    <a:bodyPr/>
-                    <a:lstStyle/>
-                    <a:p>
-                      <a:r>
-                        <a:rPr sz="1150" b="1">
-                          <a:solidFill>
-                            <a:srgbClr val="F4A261"/>
-                          </a:solidFill>
-                          <a:latin typeface="Microsoft JhengHei"/>
-                          <a:ea typeface="Microsoft JhengHei"/>
-                          <a:cs typeface="Microsoft JhengHei"/>
-                        </a:rPr>
-                        <a:t>勒索病毒/加密</a:t>
-                      </a:r>
-                    </a:p>
-                  </a:txBody>
-                  <a:tcPr anchor="ctr" marL="73152" marT="9144" marB="9144">
-                    <a:solidFill>
-                      <a:srgbClr val="EEF2F9"/>
-                    </a:solidFill>
-                  </a:tcPr>
-                </a:tc>
-                <a:tc>
-                  <a:txBody>
-                    <a:bodyPr/>
-                    <a:lstStyle/>
-                    <a:p>
-                      <a:r>
-                        <a:rPr sz="1150" b="0">
-                          <a:solidFill>
-                            <a:srgbClr val="1A2233"/>
-                          </a:solidFill>
-                          <a:latin typeface="Microsoft JhengHei"/>
-                          <a:ea typeface="Microsoft JhengHei"/>
-                          <a:cs typeface="Microsoft JhengHei"/>
-                        </a:rPr>
-                        <a:t>安永聯合會計師事務所</a:t>
-                      </a:r>
-                    </a:p>
-                  </a:txBody>
-                  <a:tcPr anchor="ctr" marL="73152" marT="9144" marB="9144">
-                    <a:solidFill>
-                      <a:srgbClr val="EEF2F9"/>
-                    </a:solidFill>
-                  </a:tcPr>
-                </a:tc>
-                <a:tc>
-                  <a:txBody>
-                    <a:bodyPr/>
-                    <a:lstStyle/>
-                    <a:p>
-                      <a:r>
-                        <a:rPr sz="1150" b="0">
-                          <a:solidFill>
-                            <a:srgbClr val="1A2233"/>
-                          </a:solidFill>
-                          <a:latin typeface="Microsoft JhengHei"/>
-                          <a:ea typeface="Microsoft JhengHei"/>
-                          <a:cs typeface="Microsoft JhengHei"/>
-                        </a:rPr>
-                        <a:t>許新民、余倩如</a:t>
-                      </a:r>
-                    </a:p>
-                  </a:txBody>
-                  <a:tcPr anchor="ctr" marL="73152" marT="9144" marB="9144">
-                    <a:solidFill>
-                      <a:srgbClr val="EEF2F9"/>
-                    </a:solidFill>
-                  </a:tcPr>
-                </a:tc>
-              </a:tr>
-              <a:tr h="344658">
-                <a:tc>
-                  <a:txBody>
-                    <a:bodyPr/>
-                    <a:lstStyle/>
-                    <a:p>
-                      <a:r>
-                        <a:rPr sz="1150" b="0">
-                          <a:solidFill>
-                            <a:srgbClr val="1A2233"/>
-                          </a:solidFill>
-                          <a:latin typeface="Microsoft JhengHei"/>
-                          <a:ea typeface="Microsoft JhengHei"/>
-                          <a:cs typeface="Microsoft JhengHei"/>
-                        </a:rPr>
-                        <a:t>創新服務</a:t>
-                      </a:r>
-                    </a:p>
-                  </a:txBody>
-                  <a:tcPr anchor="ctr" marL="73152" marT="9144" marB="9144">
-                    <a:solidFill>
-                      <a:srgbClr val="FFFFFF"/>
-                    </a:solidFill>
-                  </a:tcPr>
-                </a:tc>
-                <a:tc>
-                  <a:txBody>
-                    <a:bodyPr/>
-                    <a:lstStyle/>
-                    <a:p>
-                      <a:r>
-                        <a:rPr sz="1150" b="0">
-                          <a:solidFill>
-                            <a:srgbClr val="1A2233"/>
-                          </a:solidFill>
-                          <a:latin typeface="Microsoft JhengHei"/>
-                          <a:ea typeface="Microsoft JhengHei"/>
-                          <a:cs typeface="Microsoft JhengHei"/>
-                        </a:rPr>
-                        <a:t>7828</a:t>
-                      </a:r>
-                    </a:p>
-                  </a:txBody>
-                  <a:tcPr anchor="ctr" marL="73152" marT="9144" marB="9144">
-                    <a:solidFill>
-                      <a:srgbClr val="FFFFFF"/>
-                    </a:solidFill>
-                  </a:tcPr>
-                </a:tc>
-                <a:tc>
-                  <a:txBody>
-                    <a:bodyPr/>
-                    <a:lstStyle/>
-                    <a:p>
-                      <a:r>
-                        <a:rPr sz="1150" b="1">
-                          <a:solidFill>
-                            <a:srgbClr val="F4A261"/>
-                          </a:solidFill>
-                          <a:latin typeface="Microsoft JhengHei"/>
-                          <a:ea typeface="Microsoft JhengHei"/>
-                          <a:cs typeface="Microsoft JhengHei"/>
-                        </a:rPr>
-                        <a:t>勒索病毒/加密</a:t>
-                      </a:r>
-                    </a:p>
-                  </a:txBody>
-                  <a:tcPr anchor="ctr" marL="73152" marT="9144" marB="9144">
-                    <a:solidFill>
-                      <a:srgbClr val="FFFFFF"/>
-                    </a:solidFill>
-                  </a:tcPr>
-                </a:tc>
-                <a:tc>
-                  <a:txBody>
-                    <a:bodyPr/>
-                    <a:lstStyle/>
-                    <a:p>
-                      <a:r>
-                        <a:rPr sz="1150" b="0">
-                          <a:solidFill>
-                            <a:srgbClr val="1A2233"/>
-                          </a:solidFill>
-                          <a:latin typeface="Microsoft JhengHei"/>
-                          <a:ea typeface="Microsoft JhengHei"/>
-                          <a:cs typeface="Microsoft JhengHei"/>
-                        </a:rPr>
-                        <a:t>資誠聯合會計師事務所</a:t>
-                      </a:r>
-                    </a:p>
-                  </a:txBody>
-                  <a:tcPr anchor="ctr" marL="73152" marT="9144" marB="9144">
-                    <a:solidFill>
-                      <a:srgbClr val="FFFFFF"/>
-                    </a:solidFill>
-                  </a:tcPr>
-                </a:tc>
-                <a:tc>
-                  <a:txBody>
-                    <a:bodyPr/>
-                    <a:lstStyle/>
-                    <a:p>
-                      <a:r>
-                        <a:rPr sz="1150" b="0">
-                          <a:solidFill>
-                            <a:srgbClr val="1A2233"/>
-                          </a:solidFill>
-                          <a:latin typeface="Microsoft JhengHei"/>
-                          <a:ea typeface="Microsoft JhengHei"/>
-                          <a:cs typeface="Microsoft JhengHei"/>
-                        </a:rPr>
                         <a:t>蔡欣怡、白淑蒨</a:t>
-                      </a:r>
-                    </a:p>
-                  </a:txBody>
-                  <a:tcPr anchor="ctr" marL="73152" marT="9144" marB="9144">
-                    <a:solidFill>
-                      <a:srgbClr val="FFFFFF"/>
-                    </a:solidFill>
-                  </a:tcPr>
-                </a:tc>
-              </a:tr>
-              <a:tr h="344664">
-                <a:tc>
-                  <a:txBody>
-                    <a:bodyPr/>
-                    <a:lstStyle/>
-                    <a:p>
-                      <a:r>
-                        <a:rPr sz="1150" b="0">
-                          <a:solidFill>
-                            <a:srgbClr val="1A2233"/>
-                          </a:solidFill>
-                          <a:latin typeface="Microsoft JhengHei"/>
-                          <a:ea typeface="Microsoft JhengHei"/>
-                          <a:cs typeface="Microsoft JhengHei"/>
-                        </a:rPr>
-                        <a:t>杭特</a:t>
-                      </a:r>
-                    </a:p>
-                  </a:txBody>
-                  <a:tcPr anchor="ctr" marL="73152" marT="9144" marB="9144">
-                    <a:solidFill>
-                      <a:srgbClr val="EEF2F9"/>
-                    </a:solidFill>
-                  </a:tcPr>
-                </a:tc>
-                <a:tc>
-                  <a:txBody>
-                    <a:bodyPr/>
-                    <a:lstStyle/>
-                    <a:p>
-                      <a:r>
-                        <a:rPr sz="1150" b="0">
-                          <a:solidFill>
-                            <a:srgbClr val="1A2233"/>
-                          </a:solidFill>
-                          <a:latin typeface="Microsoft JhengHei"/>
-                          <a:ea typeface="Microsoft JhengHei"/>
-                          <a:cs typeface="Microsoft JhengHei"/>
-                        </a:rPr>
-                        <a:t>3297</a:t>
-                      </a:r>
-                    </a:p>
-                  </a:txBody>
-                  <a:tcPr anchor="ctr" marL="73152" marT="9144" marB="9144">
-                    <a:solidFill>
-                      <a:srgbClr val="EEF2F9"/>
-                    </a:solidFill>
-                  </a:tcPr>
-                </a:tc>
-                <a:tc>
-                  <a:txBody>
-                    <a:bodyPr/>
-                    <a:lstStyle/>
-                    <a:p>
-                      <a:r>
-                        <a:rPr sz="1150" b="1">
-                          <a:solidFill>
-                            <a:srgbClr val="E63946"/>
-                          </a:solidFill>
-                          <a:latin typeface="Microsoft JhengHei"/>
-                          <a:ea typeface="Microsoft JhengHei"/>
-                          <a:cs typeface="Microsoft JhengHei"/>
-                        </a:rPr>
-                        <a:t>駭客攻擊</a:t>
-                      </a:r>
-                    </a:p>
-                  </a:txBody>
-                  <a:tcPr anchor="ctr" marL="73152" marT="9144" marB="9144">
-                    <a:solidFill>
-                      <a:srgbClr val="EEF2F9"/>
-                    </a:solidFill>
-                  </a:tcPr>
-                </a:tc>
-                <a:tc>
-                  <a:txBody>
-                    <a:bodyPr/>
-                    <a:lstStyle/>
-                    <a:p>
-                      <a:r>
-                        <a:rPr sz="1150" b="0">
-                          <a:solidFill>
-                            <a:srgbClr val="1A2233"/>
-                          </a:solidFill>
-                          <a:latin typeface="Microsoft JhengHei"/>
-                          <a:ea typeface="Microsoft JhengHei"/>
-                          <a:cs typeface="Microsoft JhengHei"/>
-                        </a:rPr>
-                        <a:t>資誠聯合會計師事務所</a:t>
-                      </a:r>
-                    </a:p>
-                  </a:txBody>
-                  <a:tcPr anchor="ctr" marL="73152" marT="9144" marB="9144">
-                    <a:solidFill>
-                      <a:srgbClr val="EEF2F9"/>
-                    </a:solidFill>
-                  </a:tcPr>
-                </a:tc>
-                <a:tc>
-                  <a:txBody>
-                    <a:bodyPr/>
-                    <a:lstStyle/>
-                    <a:p>
-                      <a:r>
-                        <a:rPr sz="1150" b="0">
-                          <a:solidFill>
-                            <a:srgbClr val="1A2233"/>
-                          </a:solidFill>
-                          <a:latin typeface="Microsoft JhengHei"/>
-                          <a:ea typeface="Microsoft JhengHei"/>
-                          <a:cs typeface="Microsoft JhengHei"/>
-                        </a:rPr>
-                        <a:t>陳憲正、林瑟凱</a:t>
                       </a:r>
                     </a:p>
                   </a:txBody>
@@ -10042,7 +10042,7 @@
             <a:avLst/>
           </a:prstGeom>
           <a:solidFill>
-            <a:srgbClr val="E63946"/>
+            <a:srgbClr val="27A6C4"/>
           </a:solidFill>
           <a:ln>
             <a:noFill/>
@@ -10103,7 +10103,7 @@
                 <a:ea typeface="Microsoft JhengHei"/>
                 <a:cs typeface="Microsoft JhengHei"/>
               </a:rPr>
-              <a:t>神腦 </a:t>
+              <a:t>安心 </a:t>
             </a:r>
             <a:r>
               <a:rPr sz="1300" b="0">
@@ -10114,7 +10114,7 @@
                 <a:ea typeface="Microsoft JhengHei"/>
                 <a:cs typeface="Microsoft JhengHei"/>
               </a:rPr>
-              <a:t>2450</a:t>
+              <a:t>1259</a:t>
             </a:r>
           </a:p>
         </p:txBody>
@@ -10134,7 +10134,7 @@
             <a:avLst/>
           </a:prstGeom>
           <a:solidFill>
-            <a:srgbClr val="E63946"/>
+            <a:srgbClr val="27A6C4"/>
           </a:solidFill>
           <a:ln>
             <a:noFill/>
@@ -10195,7 +10195,7 @@
                 <a:ea typeface="Microsoft JhengHei"/>
                 <a:cs typeface="Microsoft JhengHei"/>
               </a:rPr>
-              <a:t>駭客攻擊</a:t>
+              <a:t>個資外洩</a:t>
             </a:r>
           </a:p>
         </p:txBody>
@@ -10230,7 +10230,7 @@
             <a:r>
               <a:rPr sz="1100" b="1">
                 <a:solidFill>
-                  <a:srgbClr val="E63946"/>
+                  <a:srgbClr val="27A6C4"/>
                 </a:solidFill>
                 <a:latin typeface="Microsoft JhengHei"/>
                 <a:ea typeface="Microsoft JhengHei"/>
@@ -10247,7 +10247,7 @@
                 <a:ea typeface="Microsoft JhengHei"/>
                 <a:cs typeface="Microsoft JhengHei"/>
               </a:rPr>
-              <a:t>本公司外部伺服器遭受自動化攻擊事件說明。</a:t>
+              <a:t>消費者反應疑似個資外洩事件</a:t>
             </a:r>
           </a:p>
         </p:txBody>
@@ -10282,7 +10282,7 @@
             <a:r>
               <a:rPr sz="1100" b="1">
                 <a:solidFill>
-                  <a:srgbClr val="E63946"/>
+                  <a:srgbClr val="27A6C4"/>
                 </a:solidFill>
                 <a:latin typeface="Microsoft JhengHei"/>
                 <a:ea typeface="Microsoft JhengHei"/>
@@ -10299,7 +10299,7 @@
                 <a:ea typeface="Microsoft JhengHei"/>
                 <a:cs typeface="Microsoft JhengHei"/>
               </a:rPr>
-              <a:t>本公司已與第三方資安廠商合作，全面強化網路偵測、系統監控與安全管控，以確保資訊安全。</a:t>
+              <a:t>本公司已立即針對本次資安事件啟動應變作業。需特別說明，本次疑似個資外洩事件之平台係由委外廠商管理，非屬本公司自有之MOS…</a:t>
             </a:r>
           </a:p>
         </p:txBody>
@@ -10365,7 +10365,7 @@
             <a:avLst/>
           </a:prstGeom>
           <a:solidFill>
-            <a:srgbClr val="5C6679"/>
+            <a:srgbClr val="E63946"/>
           </a:solidFill>
           <a:ln>
             <a:noFill/>
@@ -10426,7 +10426,7 @@
                 <a:ea typeface="Microsoft JhengHei"/>
                 <a:cs typeface="Microsoft JhengHei"/>
               </a:rPr>
-              <a:t>鈊象 </a:t>
+              <a:t>神腦 </a:t>
             </a:r>
             <a:r>
               <a:rPr sz="1300" b="0">
@@ -10437,7 +10437,7 @@
                 <a:ea typeface="Microsoft JhengHei"/>
                 <a:cs typeface="Microsoft JhengHei"/>
               </a:rPr>
-              <a:t>3293</a:t>
+              <a:t>2450</a:t>
             </a:r>
           </a:p>
         </p:txBody>
@@ -10457,7 +10457,7 @@
             <a:avLst/>
           </a:prstGeom>
           <a:solidFill>
-            <a:srgbClr val="5C6679"/>
+            <a:srgbClr val="E63946"/>
           </a:solidFill>
           <a:ln>
             <a:noFill/>
@@ -10518,7 +10518,7 @@
                 <a:ea typeface="Microsoft JhengHei"/>
                 <a:cs typeface="Microsoft JhengHei"/>
               </a:rPr>
-              <a:t>其他</a:t>
+              <a:t>駭客攻擊</a:t>
             </a:r>
           </a:p>
         </p:txBody>
@@ -10553,7 +10553,7 @@
             <a:r>
               <a:rPr sz="1100" b="1">
                 <a:solidFill>
-                  <a:srgbClr val="5C6679"/>
+                  <a:srgbClr val="E63946"/>
                 </a:solidFill>
                 <a:latin typeface="Microsoft JhengHei"/>
                 <a:ea typeface="Microsoft JhengHei"/>
@@ -10570,7 +10570,7 @@
                 <a:ea typeface="Microsoft JhengHei"/>
                 <a:cs typeface="Microsoft JhengHei"/>
               </a:rPr>
-              <a:t>本公司於115年9月29日發現不明IP異常侵入公司營運資訊設備。</a:t>
+              <a:t>本公司外部伺服器遭受自動化攻擊事件說明。</a:t>
             </a:r>
           </a:p>
         </p:txBody>
@@ -10605,7 +10605,7 @@
             <a:r>
               <a:rPr sz="1100" b="1">
                 <a:solidFill>
-                  <a:srgbClr val="5C6679"/>
+                  <a:srgbClr val="E63946"/>
                 </a:solidFill>
                 <a:latin typeface="Microsoft JhengHei"/>
                 <a:ea typeface="Microsoft JhengHei"/>
@@ -10622,7 +10622,7 @@
                 <a:ea typeface="Microsoft JhengHei"/>
                 <a:cs typeface="Microsoft JhengHei"/>
               </a:rPr>
-              <a:t>持續提升資安防禦，強化監控與防護層級。</a:t>
+              <a:t>本公司已與第三方資安廠商合作，全面強化網路偵測、系統監控與安全管控，以確保資訊安全。</a:t>
             </a:r>
           </a:p>
         </p:txBody>
@@ -10688,7 +10688,7 @@
             <a:avLst/>
           </a:prstGeom>
           <a:solidFill>
-            <a:srgbClr val="27A6C4"/>
+            <a:srgbClr val="5C6679"/>
           </a:solidFill>
           <a:ln>
             <a:noFill/>
@@ -10749,7 +10749,7 @@
                 <a:ea typeface="Microsoft JhengHei"/>
                 <a:cs typeface="Microsoft JhengHei"/>
               </a:rPr>
-              <a:t>柏文 </a:t>
+              <a:t>鈊象 </a:t>
             </a:r>
             <a:r>
               <a:rPr sz="1300" b="0">
@@ -10760,7 +10760,7 @@
                 <a:ea typeface="Microsoft JhengHei"/>
                 <a:cs typeface="Microsoft JhengHei"/>
               </a:rPr>
-              <a:t>8462</a:t>
+              <a:t>3293</a:t>
             </a:r>
           </a:p>
         </p:txBody>
@@ -10780,7 +10780,7 @@
             <a:avLst/>
           </a:prstGeom>
           <a:solidFill>
-            <a:srgbClr val="27A6C4"/>
+            <a:srgbClr val="5C6679"/>
           </a:solidFill>
           <a:ln>
             <a:noFill/>
@@ -10841,7 +10841,7 @@
                 <a:ea typeface="Microsoft JhengHei"/>
                 <a:cs typeface="Microsoft JhengHei"/>
               </a:rPr>
-              <a:t>個資外洩</a:t>
+              <a:t>其他</a:t>
             </a:r>
           </a:p>
         </p:txBody>
@@ -10876,7 +10876,7 @@
             <a:r>
               <a:rPr sz="1100" b="1">
                 <a:solidFill>
-                  <a:srgbClr val="27A6C4"/>
+                  <a:srgbClr val="5C6679"/>
                 </a:solidFill>
                 <a:latin typeface="Microsoft JhengHei"/>
                 <a:ea typeface="Microsoft JhengHei"/>
@@ -10893,7 +10893,7 @@
                 <a:ea typeface="Microsoft JhengHei"/>
                 <a:cs typeface="Microsoft JhengHei"/>
               </a:rPr>
-              <a:t>本公司接獲系統委外廠商通知其對外服務系統遭自動化攻擊，並對客戶資料表分頁擷取，其中部分涉及本公司…</a:t>
+              <a:t>本公司於115年9月29日發現不明IP異常侵入公司營運資訊設備。</a:t>
             </a:r>
           </a:p>
         </p:txBody>
@@ -10928,7 +10928,7 @@
             <a:r>
               <a:rPr sz="1100" b="1">
                 <a:solidFill>
-                  <a:srgbClr val="27A6C4"/>
+                  <a:srgbClr val="5C6679"/>
                 </a:solidFill>
                 <a:latin typeface="Microsoft JhengHei"/>
                 <a:ea typeface="Microsoft JhengHei"/>
@@ -10945,7 +10945,7 @@
                 <a:ea typeface="Microsoft JhengHei"/>
                 <a:cs typeface="Microsoft JhengHei"/>
               </a:rPr>
-              <a:t>本公司已要求系統委外廠商重新檢視造成資安疑慮因子並加以防範，同時持續針對系統委外廠商加強監控。</a:t>
+              <a:t>持續提升資安防禦，強化監控與防護層級。</a:t>
             </a:r>
           </a:p>
         </p:txBody>
@@ -11011,7 +11011,7 @@
             <a:avLst/>
           </a:prstGeom>
           <a:solidFill>
-            <a:srgbClr val="E63946"/>
+            <a:srgbClr val="27A6C4"/>
           </a:solidFill>
           <a:ln>
             <a:noFill/>
@@ -11072,7 +11072,7 @@
                 <a:ea typeface="Microsoft JhengHei"/>
                 <a:cs typeface="Microsoft JhengHei"/>
               </a:rPr>
-              <a:t>友訊 </a:t>
+              <a:t>柏文 </a:t>
             </a:r>
             <a:r>
               <a:rPr sz="1300" b="0">
@@ -11083,7 +11083,7 @@
                 <a:ea typeface="Microsoft JhengHei"/>
                 <a:cs typeface="Microsoft JhengHei"/>
               </a:rPr>
-              <a:t>2332</a:t>
+              <a:t>8462</a:t>
             </a:r>
           </a:p>
         </p:txBody>
@@ -11103,7 +11103,7 @@
             <a:avLst/>
           </a:prstGeom>
           <a:solidFill>
-            <a:srgbClr val="E63946"/>
+            <a:srgbClr val="27A6C4"/>
           </a:solidFill>
           <a:ln>
             <a:noFill/>
@@ -11164,7 +11164,7 @@
                 <a:ea typeface="Microsoft JhengHei"/>
                 <a:cs typeface="Microsoft JhengHei"/>
               </a:rPr>
-              <a:t>駭客攻擊</a:t>
+              <a:t>個資外洩</a:t>
             </a:r>
           </a:p>
         </p:txBody>
@@ -11199,7 +11199,7 @@
             <a:r>
               <a:rPr sz="1100" b="1">
                 <a:solidFill>
-                  <a:srgbClr val="E63946"/>
+                  <a:srgbClr val="27A6C4"/>
                 </a:solidFill>
                 <a:latin typeface="Microsoft JhengHei"/>
                 <a:ea typeface="Microsoft JhengHei"/>
@@ -11216,7 +11216,7 @@
                 <a:ea typeface="Microsoft JhengHei"/>
                 <a:cs typeface="Microsoft JhengHei"/>
               </a:rPr>
-              <a:t>本公司網站監控中發現登入記錄異常，查知外部攻擊者利用既有登入機制，以大量帳號密碼進行網站登入驗證…</a:t>
+              <a:t>本公司接獲系統委外廠商通知其對外服務系統遭自動化攻擊，並對客戶資料表分頁擷取，其中部分涉及本公司…</a:t>
             </a:r>
           </a:p>
         </p:txBody>
@@ -11251,7 +11251,7 @@
             <a:r>
               <a:rPr sz="1100" b="1">
                 <a:solidFill>
-                  <a:srgbClr val="E63946"/>
+                  <a:srgbClr val="27A6C4"/>
                 </a:solidFill>
                 <a:latin typeface="Microsoft JhengHei"/>
                 <a:ea typeface="Microsoft JhengHei"/>
@@ -11268,7 +11268,7 @@
                 <a:ea typeface="Microsoft JhengHei"/>
                 <a:cs typeface="Microsoft JhengHei"/>
               </a:rPr>
-              <a:t>(1)強化網站登入驗證、存取控制及異常行為偵測機制。(2)強化網頁應用程式防火牆，降低大量或異常登入嘗試之可行性。(3)…</a:t>
+              <a:t>本公司已要求系統委外廠商重新檢視造成資安疑慮因子並加以防範，同時持續針對系統委外廠商加強監控。</a:t>
             </a:r>
           </a:p>
         </p:txBody>
@@ -11531,7 +11531,7 @@
                 <a:ea typeface="Microsoft JhengHei"/>
                 <a:cs typeface="Microsoft JhengHei"/>
               </a:rPr>
-              <a:t>長榮航 </a:t>
+              <a:t>友訊 </a:t>
             </a:r>
             <a:r>
               <a:rPr sz="1300" b="0">
@@ -11542,7 +11542,7 @@
                 <a:ea typeface="Microsoft JhengHei"/>
                 <a:cs typeface="Microsoft JhengHei"/>
               </a:rPr>
-              <a:t>2618</a:t>
+              <a:t>2332</a:t>
             </a:r>
           </a:p>
         </p:txBody>
@@ -11675,7 +11675,7 @@
                 <a:ea typeface="Microsoft JhengHei"/>
                 <a:cs typeface="Microsoft JhengHei"/>
               </a:rPr>
-              <a:t>本公司發現有不明人士透過惡意IP入侵本公司內部資訊環境，取得員工姓名與公務聯繫資訊。</a:t>
+              <a:t>本公司網站監控中發現登入記錄異常，查知外部攻擊者利用既有登入機制，以大量帳號密碼進行網站登入驗證…</a:t>
             </a:r>
           </a:p>
         </p:txBody>
@@ -11727,7 +11727,7 @@
                 <a:ea typeface="Microsoft JhengHei"/>
                 <a:cs typeface="Microsoft JhengHei"/>
               </a:rPr>
-              <a:t>本公司已重新檢視可能造成資安疑慮的因子並加以防範，同時持續加強監控。</a:t>
+              <a:t>(1)強化網站登入驗證、存取控制及異常行為偵測機制。(2)強化網頁應用程式防火牆，降低大量或異常登入嘗試之可行性。(3)…</a:t>
             </a:r>
           </a:p>
         </p:txBody>
@@ -11854,7 +11854,7 @@
                 <a:ea typeface="Microsoft JhengHei"/>
                 <a:cs typeface="Microsoft JhengHei"/>
               </a:rPr>
-              <a:t>長榮航太 </a:t>
+              <a:t>長榮航 </a:t>
             </a:r>
             <a:r>
               <a:rPr sz="1300" b="0">
@@ -11865,7 +11865,7 @@
                 <a:ea typeface="Microsoft JhengHei"/>
                 <a:cs typeface="Microsoft JhengHei"/>
               </a:rPr>
-              <a:t>2645</a:t>
+              <a:t>2618</a:t>
             </a:r>
           </a:p>
         </p:txBody>
@@ -11998,7 +11998,7 @@
                 <a:ea typeface="Microsoft JhengHei"/>
                 <a:cs typeface="Microsoft JhengHei"/>
               </a:rPr>
-              <a:t>本公司發現部分內部資訊系統遭受網路攻擊。</a:t>
+              <a:t>本公司發現有不明人士透過惡意IP入侵本公司內部資訊環境，取得員工姓名與公務聯繫資訊。</a:t>
             </a:r>
           </a:p>
         </p:txBody>
@@ -12050,7 +12050,7 @@
                 <a:ea typeface="Microsoft JhengHei"/>
                 <a:cs typeface="Microsoft JhengHei"/>
               </a:rPr>
-              <a:t>本公司將持續監控公司整體資訊系統運作狀況，並檢討強化現有資安防護措施，以確保資訊安全。</a:t>
+              <a:t>本公司已重新檢視可能造成資安疑慮的因子並加以防範，同時持續加強監控。</a:t>
             </a:r>
           </a:p>
         </p:txBody>
@@ -12116,7 +12116,7 @@
             <a:avLst/>
           </a:prstGeom>
           <a:solidFill>
-            <a:srgbClr val="F4A261"/>
+            <a:srgbClr val="E63946"/>
           </a:solidFill>
           <a:ln>
             <a:noFill/>
@@ -12177,7 +12177,7 @@
                 <a:ea typeface="Microsoft JhengHei"/>
                 <a:cs typeface="Microsoft JhengHei"/>
               </a:rPr>
-              <a:t>崴寶 </a:t>
+              <a:t>長榮航太 </a:t>
             </a:r>
             <a:r>
               <a:rPr sz="1300" b="0">
@@ -12188,7 +12188,7 @@
                 <a:ea typeface="Microsoft JhengHei"/>
                 <a:cs typeface="Microsoft JhengHei"/>
               </a:rPr>
-              <a:t>7744</a:t>
+              <a:t>2645</a:t>
             </a:r>
           </a:p>
         </p:txBody>
@@ -12208,7 +12208,7 @@
             <a:avLst/>
           </a:prstGeom>
           <a:solidFill>
-            <a:srgbClr val="F4A261"/>
+            <a:srgbClr val="E63946"/>
           </a:solidFill>
           <a:ln>
             <a:noFill/>
@@ -12269,7 +12269,7 @@
                 <a:ea typeface="Microsoft JhengHei"/>
                 <a:cs typeface="Microsoft JhengHei"/>
               </a:rPr>
-              <a:t>勒索病毒/加密</a:t>
+              <a:t>駭客攻擊</a:t>
             </a:r>
           </a:p>
         </p:txBody>
@@ -12304,7 +12304,7 @@
             <a:r>
               <a:rPr sz="1100" b="1">
                 <a:solidFill>
-                  <a:srgbClr val="F4A261"/>
+                  <a:srgbClr val="E63946"/>
                 </a:solidFill>
                 <a:latin typeface="Microsoft JhengHei"/>
                 <a:ea typeface="Microsoft JhengHei"/>
@@ -12321,7 +12321,7 @@
                 <a:ea typeface="Microsoft JhengHei"/>
                 <a:cs typeface="Microsoft JhengHei"/>
               </a:rPr>
-              <a:t>本公司於115年9月14日上午發現資訊系統遭駭客入侵，部分系統資料遭加密鎖定。本公司立即啟動資安…</a:t>
+              <a:t>本公司發現部分內部資訊系統遭受網路攻擊。</a:t>
             </a:r>
           </a:p>
         </p:txBody>
@@ -12356,7 +12356,7 @@
             <a:r>
               <a:rPr sz="1100" b="1">
                 <a:solidFill>
-                  <a:srgbClr val="F4A261"/>
+                  <a:srgbClr val="E63946"/>
                 </a:solidFill>
                 <a:latin typeface="Microsoft JhengHei"/>
                 <a:ea typeface="Microsoft JhengHei"/>
@@ -12373,7 +12373,7 @@
                 <a:ea typeface="Microsoft JhengHei"/>
                 <a:cs typeface="Microsoft JhengHei"/>
               </a:rPr>
-              <a:t>本公司將持續配合專業資安團隊進行事件調查與監控，並加強資訊安全管理措施，包括提升端點防護機制、強化網路監控能力、落實帳號…</a:t>
+              <a:t>本公司將持續監控公司整體資訊系統運作狀況，並檢討強化現有資安防護措施，以確保資訊安全。</a:t>
             </a:r>
           </a:p>
         </p:txBody>
@@ -12439,7 +12439,7 @@
             <a:avLst/>
           </a:prstGeom>
           <a:solidFill>
-            <a:srgbClr val="E63946"/>
+            <a:srgbClr val="F4A261"/>
           </a:solidFill>
           <a:ln>
             <a:noFill/>
@@ -12500,7 +12500,7 @@
                 <a:ea typeface="Microsoft JhengHei"/>
                 <a:cs typeface="Microsoft JhengHei"/>
               </a:rPr>
-              <a:t>達爾膚 </a:t>
+              <a:t>崴寶 </a:t>
             </a:r>
             <a:r>
               <a:rPr sz="1300" b="0">
@@ -12511,7 +12511,7 @@
                 <a:ea typeface="Microsoft JhengHei"/>
                 <a:cs typeface="Microsoft JhengHei"/>
               </a:rPr>
-              <a:t>6523</a:t>
+              <a:t>7744</a:t>
             </a:r>
           </a:p>
         </p:txBody>
@@ -12531,7 +12531,7 @@
             <a:avLst/>
           </a:prstGeom>
           <a:solidFill>
-            <a:srgbClr val="E63946"/>
+            <a:srgbClr val="F4A261"/>
           </a:solidFill>
           <a:ln>
             <a:noFill/>
@@ -12592,7 +12592,7 @@
                 <a:ea typeface="Microsoft JhengHei"/>
                 <a:cs typeface="Microsoft JhengHei"/>
               </a:rPr>
-              <a:t>駭客攻擊</a:t>
+              <a:t>勒索病毒/加密</a:t>
             </a:r>
           </a:p>
         </p:txBody>
@@ -12627,7 +12627,7 @@
             <a:r>
               <a:rPr sz="1100" b="1">
                 <a:solidFill>
-                  <a:srgbClr val="E63946"/>
+                  <a:srgbClr val="F4A261"/>
                 </a:solidFill>
                 <a:latin typeface="Microsoft JhengHei"/>
                 <a:ea typeface="Microsoft JhengHei"/>
@@ -12644,7 +12644,7 @@
                 <a:ea typeface="Microsoft JhengHei"/>
                 <a:cs typeface="Microsoft JhengHei"/>
               </a:rPr>
-              <a:t>本公司部分內部資訊系統遭受網路攻擊事件，初步評估對公司營運無重大影響。</a:t>
+              <a:t>本公司於115年9月14日上午發現資訊系統遭駭客入侵，部分系統資料遭加密鎖定。本公司立即啟動資安…</a:t>
             </a:r>
           </a:p>
         </p:txBody>
@@ -12679,7 +12679,7 @@
             <a:r>
               <a:rPr sz="1100" b="1">
                 <a:solidFill>
-                  <a:srgbClr val="E63946"/>
+                  <a:srgbClr val="F4A261"/>
                 </a:solidFill>
                 <a:latin typeface="Microsoft JhengHei"/>
                 <a:ea typeface="Microsoft JhengHei"/>
@@ -12696,7 +12696,7 @@
                 <a:ea typeface="Microsoft JhengHei"/>
                 <a:cs typeface="Microsoft JhengHei"/>
               </a:rPr>
-              <a:t>本公司將持續強化網路與資訊基礎架構之安全管控，以確保資訊安全。</a:t>
+              <a:t>本公司將持續配合專業資安團隊進行事件調查與監控，並加強資訊安全管理措施，包括提升端點防護機制、強化網路監控能力、落實帳號…</a:t>
             </a:r>
           </a:p>
         </p:txBody>
@@ -12959,7 +12959,7 @@
                 <a:ea typeface="Microsoft JhengHei"/>
                 <a:cs typeface="Microsoft JhengHei"/>
               </a:rPr>
-              <a:t>大車隊 </a:t>
+              <a:t>達爾膚 </a:t>
             </a:r>
             <a:r>
               <a:rPr sz="1300" b="0">
@@ -12970,7 +12970,7 @@
                 <a:ea typeface="Microsoft JhengHei"/>
                 <a:cs typeface="Microsoft JhengHei"/>
               </a:rPr>
-              <a:t>2640</a:t>
+              <a:t>6523</a:t>
             </a:r>
           </a:p>
         </p:txBody>
@@ -13103,7 +13103,7 @@
                 <a:ea typeface="Microsoft JhengHei"/>
                 <a:cs typeface="Microsoft JhengHei"/>
               </a:rPr>
-              <a:t>本公司重要子公司全球商務科技股份有限公司於今日發現部分資訊系統遭受網路攻擊，已立即啟動資安應變機…</a:t>
+              <a:t>本公司部分內部資訊系統遭受網路攻擊事件，初步評估對公司營運無重大影響。</a:t>
             </a:r>
           </a:p>
         </p:txBody>
@@ -13155,7 +13155,7 @@
                 <a:ea typeface="Microsoft JhengHei"/>
                 <a:cs typeface="Microsoft JhengHei"/>
               </a:rPr>
-              <a:t>公司將持續進行資安鑑識、系統安全強化及相關風險控管作業，受影響系統預期可於短期內逐步恢復正常運作；後續如調查結果或事件發…</a:t>
+              <a:t>本公司將持續強化網路與資訊基礎架構之安全管控，以確保資訊安全。</a:t>
             </a:r>
           </a:p>
         </p:txBody>
@@ -13221,7 +13221,7 @@
             <a:avLst/>
           </a:prstGeom>
           <a:solidFill>
-            <a:srgbClr val="F4A261"/>
+            <a:srgbClr val="E63946"/>
           </a:solidFill>
           <a:ln>
             <a:noFill/>
@@ -13282,7 +13282,7 @@
                 <a:ea typeface="Microsoft JhengHei"/>
                 <a:cs typeface="Microsoft JhengHei"/>
               </a:rPr>
-              <a:t>富爾特 </a:t>
+              <a:t>大車隊 </a:t>
             </a:r>
             <a:r>
               <a:rPr sz="1300" b="0">
@@ -13293,7 +13293,7 @@
                 <a:ea typeface="Microsoft JhengHei"/>
                 <a:cs typeface="Microsoft JhengHei"/>
               </a:rPr>
-              <a:t>6136</a:t>
+              <a:t>2640</a:t>
             </a:r>
           </a:p>
         </p:txBody>
@@ -13313,7 +13313,7 @@
             <a:avLst/>
           </a:prstGeom>
           <a:solidFill>
-            <a:srgbClr val="F4A261"/>
+            <a:srgbClr val="E63946"/>
           </a:solidFill>
           <a:ln>
             <a:noFill/>
@@ -13374,7 +13374,7 @@
                 <a:ea typeface="Microsoft JhengHei"/>
                 <a:cs typeface="Microsoft JhengHei"/>
               </a:rPr>
-              <a:t>勒索病毒/加密</a:t>
+              <a:t>駭客攻擊</a:t>
             </a:r>
           </a:p>
         </p:txBody>
@@ -13409,7 +13409,7 @@
             <a:r>
               <a:rPr sz="1100" b="1">
                 <a:solidFill>
-                  <a:srgbClr val="F4A261"/>
+                  <a:srgbClr val="E63946"/>
                 </a:solidFill>
                 <a:latin typeface="Microsoft JhengHei"/>
                 <a:ea typeface="Microsoft JhengHei"/>
@@ -13426,7 +13426,7 @@
                 <a:ea typeface="Microsoft JhengHei"/>
                 <a:cs typeface="Microsoft JhengHei"/>
               </a:rPr>
-              <a:t>本公司之子公司格帝控股股份有限公司偵測到部份伺服器遭受網路勒索病毒攻擊，致使包含ERP在內之部份…</a:t>
+              <a:t>本公司重要子公司全球商務科技股份有限公司於今日發現部分資訊系統遭受網路攻擊，已立即啟動資安應變機…</a:t>
             </a:r>
           </a:p>
         </p:txBody>
@@ -13461,7 +13461,7 @@
             <a:r>
               <a:rPr sz="1100" b="1">
                 <a:solidFill>
-                  <a:srgbClr val="F4A261"/>
+                  <a:srgbClr val="E63946"/>
                 </a:solidFill>
                 <a:latin typeface="Microsoft JhengHei"/>
                 <a:ea typeface="Microsoft JhengHei"/>
@@ -13478,7 +13478,7 @@
                 <a:ea typeface="Microsoft JhengHei"/>
                 <a:cs typeface="Microsoft JhengHei"/>
               </a:rPr>
-              <a:t>本公司及所屬子公司將持續密集監控，並強化網路與資訊基礎架構之管控，以確保資訊系統安全。</a:t>
+              <a:t>公司將持續進行資安鑑識、系統安全強化及相關風險控管作業，受影響系統預期可於短期內逐步恢復正常運作；後續如調查結果或事件發…</a:t>
             </a:r>
           </a:p>
         </p:txBody>
@@ -13605,7 +13605,7 @@
                 <a:ea typeface="Microsoft JhengHei"/>
                 <a:cs typeface="Microsoft JhengHei"/>
               </a:rPr>
-              <a:t>創新服務 </a:t>
+              <a:t>富爾特 </a:t>
             </a:r>
             <a:r>
               <a:rPr sz="1300" b="0">
@@ -13616,7 +13616,7 @@
                 <a:ea typeface="Microsoft JhengHei"/>
                 <a:cs typeface="Microsoft JhengHei"/>
               </a:rPr>
-              <a:t>7828</a:t>
+              <a:t>6136</a:t>
             </a:r>
           </a:p>
         </p:txBody>
@@ -13749,7 +13749,7 @@
                 <a:ea typeface="Microsoft JhengHei"/>
                 <a:cs typeface="Microsoft JhengHei"/>
               </a:rPr>
-              <a:t>本公司於今日偵測到部份伺服器遭受網路勒索病毒攻擊，致使包含ERP在內之部份資訊系統無法正常運作。</a:t>
+              <a:t>本公司之子公司格帝控股股份有限公司偵測到部份伺服器遭受網路勒索病毒攻擊，致使包含ERP在內之部份…</a:t>
             </a:r>
           </a:p>
         </p:txBody>
@@ -13801,7 +13801,7 @@
                 <a:ea typeface="Microsoft JhengHei"/>
                 <a:cs typeface="Microsoft JhengHei"/>
               </a:rPr>
-              <a:t>本公司將持續密集監控，並強化網路與資訊基礎架構之管控，以確保資訊系統安全。</a:t>
+              <a:t>本公司及所屬子公司將持續密集監控，並強化網路與資訊基礎架構之管控，以確保資訊系統安全。</a:t>
             </a:r>
           </a:p>
         </p:txBody>
@@ -13867,7 +13867,7 @@
             <a:avLst/>
           </a:prstGeom>
           <a:solidFill>
-            <a:srgbClr val="E63946"/>
+            <a:srgbClr val="F4A261"/>
           </a:solidFill>
           <a:ln>
             <a:noFill/>
@@ -13928,7 +13928,7 @@
                 <a:ea typeface="Microsoft JhengHei"/>
                 <a:cs typeface="Microsoft JhengHei"/>
               </a:rPr>
-              <a:t>杭特 </a:t>
+              <a:t>創新服務 </a:t>
             </a:r>
             <a:r>
               <a:rPr sz="1300" b="0">
@@ -13939,7 +13939,7 @@
                 <a:ea typeface="Microsoft JhengHei"/>
                 <a:cs typeface="Microsoft JhengHei"/>
               </a:rPr>
-              <a:t>3297</a:t>
+              <a:t>7828</a:t>
             </a:r>
           </a:p>
         </p:txBody>
@@ -13959,7 +13959,7 @@
             <a:avLst/>
           </a:prstGeom>
           <a:solidFill>
-            <a:srgbClr val="E63946"/>
+            <a:srgbClr val="F4A261"/>
           </a:solidFill>
           <a:ln>
             <a:noFill/>
@@ -14020,7 +14020,7 @@
                 <a:ea typeface="Microsoft JhengHei"/>
                 <a:cs typeface="Microsoft JhengHei"/>
               </a:rPr>
-              <a:t>駭客攻擊</a:t>
+              <a:t>勒索病毒/加密</a:t>
             </a:r>
           </a:p>
         </p:txBody>
@@ -14055,7 +14055,7 @@
             <a:r>
               <a:rPr sz="1100" b="1">
                 <a:solidFill>
-                  <a:srgbClr val="E63946"/>
+                  <a:srgbClr val="F4A261"/>
                 </a:solidFill>
                 <a:latin typeface="Microsoft JhengHei"/>
                 <a:ea typeface="Microsoft JhengHei"/>
@@ -14072,7 +14072,7 @@
                 <a:ea typeface="Microsoft JhengHei"/>
                 <a:cs typeface="Microsoft JhengHei"/>
               </a:rPr>
-              <a:t>本公司資訊系統遭受駭客網路攻擊，初步評估對公司營運暫無重大影響。</a:t>
+              <a:t>本公司於今日偵測到部份伺服器遭受網路勒索病毒攻擊，致使包含ERP在內之部份資訊系統無法正常運作。</a:t>
             </a:r>
           </a:p>
         </p:txBody>
@@ -14107,7 +14107,7 @@
             <a:r>
               <a:rPr sz="1100" b="1">
                 <a:solidFill>
-                  <a:srgbClr val="E63946"/>
+                  <a:srgbClr val="F4A261"/>
                 </a:solidFill>
                 <a:latin typeface="Microsoft JhengHei"/>
                 <a:ea typeface="Microsoft JhengHei"/>
@@ -14124,7 +14124,7 @@
                 <a:ea typeface="Microsoft JhengHei"/>
                 <a:cs typeface="Microsoft JhengHei"/>
               </a:rPr>
-              <a:t>本公司將持續提升網路與資訊基礎架構之安全管控，以確保資訊安全。</a:t>
+              <a:t>本公司將持續密集監控，並強化網路與資訊基礎架構之管控，以確保資訊系統安全。</a:t>
             </a:r>
           </a:p>
         </p:txBody>

--- a/資安事件因應分析.pptx
+++ b/資安事件因應分析.pptx
@@ -200,13 +200,13 @@
                   <c:v>6</c:v>
                 </c:pt>
                 <c:pt idx="1">
-                  <c:v>3</c:v>
+                  <c:v>2</c:v>
                 </c:pt>
                 <c:pt idx="2">
                   <c:v>2</c:v>
                 </c:pt>
                 <c:pt idx="3">
-                  <c:v>1</c:v>
+                  <c:v>2</c:v>
                 </c:pt>
               </c:numCache>
             </c:numRef>
@@ -3543,7 +3543,7 @@
                 <a:ea typeface="Microsoft JhengHei"/>
                 <a:cs typeface="Microsoft JhengHei"/>
               </a:rPr>
-              <a:t>資料期間 2026-09-02 ~ 2026-10-02　｜　MOPS 重大訊息全文檢索　｜　12 家公司</a:t>
+              <a:t>資料期間 2026-09-07 ~ 2026-10-07　｜　MOPS 重大訊息全文檢索　｜　12 家公司</a:t>
             </a:r>
           </a:p>
         </p:txBody>
@@ -4287,7 +4287,7 @@
                           <a:ea typeface="Microsoft JhengHei"/>
                           <a:cs typeface="Microsoft JhengHei"/>
                         </a:rPr>
-                        <a:t>安心</a:t>
+                        <a:t>一零四</a:t>
                       </a:r>
                     </a:p>
                   </a:txBody>
@@ -4311,7 +4311,7 @@
                           <a:ea typeface="Microsoft JhengHei"/>
                           <a:cs typeface="Microsoft JhengHei"/>
                         </a:rPr>
-                        <a:t>1259</a:t>
+                        <a:t>3130</a:t>
                       </a:r>
                     </a:p>
                   </a:txBody>
@@ -4335,7 +4335,495 @@
                           <a:ea typeface="Microsoft JhengHei"/>
                           <a:cs typeface="Microsoft JhengHei"/>
                         </a:rPr>
+                        <a:t>10/06</a:t>
+                      </a:r>
+                    </a:p>
+                  </a:txBody>
+                  <a:tcPr anchor="ctr" marL="73152" marT="9144" marB="9144">
+                    <a:solidFill>
+                      <a:srgbClr val="FFFFFF"/>
+                    </a:solidFill>
+                  </a:tcPr>
+                </a:tc>
+                <a:tc>
+                  <a:txBody>
+                    <a:bodyPr/>
+                    <a:lstStyle/>
+                    <a:p>
+                      <a:r>
+                        <a:rPr sz="1150" b="1">
+                          <a:solidFill>
+                            <a:srgbClr val="5C6679"/>
+                          </a:solidFill>
+                          <a:latin typeface="Microsoft JhengHei"/>
+                          <a:ea typeface="Microsoft JhengHei"/>
+                          <a:cs typeface="Microsoft JhengHei"/>
+                        </a:rPr>
+                        <a:t>其他</a:t>
+                      </a:r>
+                    </a:p>
+                  </a:txBody>
+                  <a:tcPr anchor="ctr" marL="73152" marT="9144" marB="9144">
+                    <a:solidFill>
+                      <a:srgbClr val="FFFFFF"/>
+                    </a:solidFill>
+                  </a:tcPr>
+                </a:tc>
+                <a:tc>
+                  <a:txBody>
+                    <a:bodyPr/>
+                    <a:lstStyle/>
+                    <a:p>
+                      <a:r>
+                        <a:rPr sz="1150" b="0">
+                          <a:solidFill>
+                            <a:srgbClr val="1A2233"/>
+                          </a:solidFill>
+                          <a:latin typeface="Microsoft JhengHei"/>
+                          <a:ea typeface="Microsoft JhengHei"/>
+                          <a:cs typeface="Microsoft JhengHei"/>
+                        </a:rPr>
+                        <a:t>目前系統與營運正常運作，對公司尚無重大影響。相關影響仍持續評估中。</a:t>
+                      </a:r>
+                    </a:p>
+                  </a:txBody>
+                  <a:tcPr anchor="ctr" marL="73152" marT="9144" marB="9144">
+                    <a:solidFill>
+                      <a:srgbClr val="FFFFFF"/>
+                    </a:solidFill>
+                  </a:tcPr>
+                </a:tc>
+              </a:tr>
+              <a:tr h="274320">
+                <a:tc>
+                  <a:txBody>
+                    <a:bodyPr/>
+                    <a:lstStyle/>
+                    <a:p>
+                      <a:r>
+                        <a:rPr sz="1150" b="0">
+                          <a:solidFill>
+                            <a:srgbClr val="1A2233"/>
+                          </a:solidFill>
+                          <a:latin typeface="Microsoft JhengHei"/>
+                          <a:ea typeface="Microsoft JhengHei"/>
+                          <a:cs typeface="Microsoft JhengHei"/>
+                        </a:rPr>
+                        <a:t>安心</a:t>
+                      </a:r>
+                    </a:p>
+                  </a:txBody>
+                  <a:tcPr anchor="ctr" marL="73152" marT="9144" marB="9144">
+                    <a:solidFill>
+                      <a:srgbClr val="EEF2F9"/>
+                    </a:solidFill>
+                  </a:tcPr>
+                </a:tc>
+                <a:tc>
+                  <a:txBody>
+                    <a:bodyPr/>
+                    <a:lstStyle/>
+                    <a:p>
+                      <a:r>
+                        <a:rPr sz="1150" b="0">
+                          <a:solidFill>
+                            <a:srgbClr val="1A2233"/>
+                          </a:solidFill>
+                          <a:latin typeface="Microsoft JhengHei"/>
+                          <a:ea typeface="Microsoft JhengHei"/>
+                          <a:cs typeface="Microsoft JhengHei"/>
+                        </a:rPr>
+                        <a:t>1259</a:t>
+                      </a:r>
+                    </a:p>
+                  </a:txBody>
+                  <a:tcPr anchor="ctr" marL="73152" marT="9144" marB="9144">
+                    <a:solidFill>
+                      <a:srgbClr val="EEF2F9"/>
+                    </a:solidFill>
+                  </a:tcPr>
+                </a:tc>
+                <a:tc>
+                  <a:txBody>
+                    <a:bodyPr/>
+                    <a:lstStyle/>
+                    <a:p>
+                      <a:r>
+                        <a:rPr sz="1150" b="0">
+                          <a:solidFill>
+                            <a:srgbClr val="1A2233"/>
+                          </a:solidFill>
+                          <a:latin typeface="Microsoft JhengHei"/>
+                          <a:ea typeface="Microsoft JhengHei"/>
+                          <a:cs typeface="Microsoft JhengHei"/>
+                        </a:rPr>
                         <a:t>10/01</a:t>
+                      </a:r>
+                    </a:p>
+                  </a:txBody>
+                  <a:tcPr anchor="ctr" marL="73152" marT="9144" marB="9144">
+                    <a:solidFill>
+                      <a:srgbClr val="EEF2F9"/>
+                    </a:solidFill>
+                  </a:tcPr>
+                </a:tc>
+                <a:tc>
+                  <a:txBody>
+                    <a:bodyPr/>
+                    <a:lstStyle/>
+                    <a:p>
+                      <a:r>
+                        <a:rPr sz="1150" b="1">
+                          <a:solidFill>
+                            <a:srgbClr val="27A6C4"/>
+                          </a:solidFill>
+                          <a:latin typeface="Microsoft JhengHei"/>
+                          <a:ea typeface="Microsoft JhengHei"/>
+                          <a:cs typeface="Microsoft JhengHei"/>
+                        </a:rPr>
+                        <a:t>個資外洩</a:t>
+                      </a:r>
+                    </a:p>
+                  </a:txBody>
+                  <a:tcPr anchor="ctr" marL="73152" marT="9144" marB="9144">
+                    <a:solidFill>
+                      <a:srgbClr val="EEF2F9"/>
+                    </a:solidFill>
+                  </a:tcPr>
+                </a:tc>
+                <a:tc>
+                  <a:txBody>
+                    <a:bodyPr/>
+                    <a:lstStyle/>
+                    <a:p>
+                      <a:r>
+                        <a:rPr sz="1150" b="0">
+                          <a:solidFill>
+                            <a:srgbClr val="1A2233"/>
+                          </a:solidFill>
+                          <a:latin typeface="Microsoft JhengHei"/>
+                          <a:ea typeface="Microsoft JhengHei"/>
+                          <a:cs typeface="Microsoft JhengHei"/>
+                        </a:rPr>
+                        <a:t>截至目前為止對公司財務及業務並無重大影響。</a:t>
+                      </a:r>
+                    </a:p>
+                  </a:txBody>
+                  <a:tcPr anchor="ctr" marL="73152" marT="9144" marB="9144">
+                    <a:solidFill>
+                      <a:srgbClr val="EEF2F9"/>
+                    </a:solidFill>
+                  </a:tcPr>
+                </a:tc>
+              </a:tr>
+              <a:tr h="274320">
+                <a:tc>
+                  <a:txBody>
+                    <a:bodyPr/>
+                    <a:lstStyle/>
+                    <a:p>
+                      <a:r>
+                        <a:rPr sz="1150" b="0">
+                          <a:solidFill>
+                            <a:srgbClr val="1A2233"/>
+                          </a:solidFill>
+                          <a:latin typeface="Microsoft JhengHei"/>
+                          <a:ea typeface="Microsoft JhengHei"/>
+                          <a:cs typeface="Microsoft JhengHei"/>
+                        </a:rPr>
+                        <a:t>神腦</a:t>
+                      </a:r>
+                    </a:p>
+                  </a:txBody>
+                  <a:tcPr anchor="ctr" marL="73152" marT="9144" marB="9144">
+                    <a:solidFill>
+                      <a:srgbClr val="FFFFFF"/>
+                    </a:solidFill>
+                  </a:tcPr>
+                </a:tc>
+                <a:tc>
+                  <a:txBody>
+                    <a:bodyPr/>
+                    <a:lstStyle/>
+                    <a:p>
+                      <a:r>
+                        <a:rPr sz="1150" b="0">
+                          <a:solidFill>
+                            <a:srgbClr val="1A2233"/>
+                          </a:solidFill>
+                          <a:latin typeface="Microsoft JhengHei"/>
+                          <a:ea typeface="Microsoft JhengHei"/>
+                          <a:cs typeface="Microsoft JhengHei"/>
+                        </a:rPr>
+                        <a:t>2450</a:t>
+                      </a:r>
+                    </a:p>
+                  </a:txBody>
+                  <a:tcPr anchor="ctr" marL="73152" marT="9144" marB="9144">
+                    <a:solidFill>
+                      <a:srgbClr val="FFFFFF"/>
+                    </a:solidFill>
+                  </a:tcPr>
+                </a:tc>
+                <a:tc>
+                  <a:txBody>
+                    <a:bodyPr/>
+                    <a:lstStyle/>
+                    <a:p>
+                      <a:r>
+                        <a:rPr sz="1150" b="0">
+                          <a:solidFill>
+                            <a:srgbClr val="1A2233"/>
+                          </a:solidFill>
+                          <a:latin typeface="Microsoft JhengHei"/>
+                          <a:ea typeface="Microsoft JhengHei"/>
+                          <a:cs typeface="Microsoft JhengHei"/>
+                        </a:rPr>
+                        <a:t>09/29</a:t>
+                      </a:r>
+                    </a:p>
+                  </a:txBody>
+                  <a:tcPr anchor="ctr" marL="73152" marT="9144" marB="9144">
+                    <a:solidFill>
+                      <a:srgbClr val="FFFFFF"/>
+                    </a:solidFill>
+                  </a:tcPr>
+                </a:tc>
+                <a:tc>
+                  <a:txBody>
+                    <a:bodyPr/>
+                    <a:lstStyle/>
+                    <a:p>
+                      <a:r>
+                        <a:rPr sz="1150" b="1">
+                          <a:solidFill>
+                            <a:srgbClr val="E63946"/>
+                          </a:solidFill>
+                          <a:latin typeface="Microsoft JhengHei"/>
+                          <a:ea typeface="Microsoft JhengHei"/>
+                          <a:cs typeface="Microsoft JhengHei"/>
+                        </a:rPr>
+                        <a:t>駭客攻擊</a:t>
+                      </a:r>
+                    </a:p>
+                  </a:txBody>
+                  <a:tcPr anchor="ctr" marL="73152" marT="9144" marB="9144">
+                    <a:solidFill>
+                      <a:srgbClr val="FFFFFF"/>
+                    </a:solidFill>
+                  </a:tcPr>
+                </a:tc>
+                <a:tc>
+                  <a:txBody>
+                    <a:bodyPr/>
+                    <a:lstStyle/>
+                    <a:p>
+                      <a:r>
+                        <a:rPr sz="1150" b="0">
+                          <a:solidFill>
+                            <a:srgbClr val="1A2233"/>
+                          </a:solidFill>
+                          <a:latin typeface="Microsoft JhengHei"/>
+                          <a:ea typeface="Microsoft JhengHei"/>
+                          <a:cs typeface="Microsoft JhengHei"/>
+                        </a:rPr>
+                        <a:t>評估對本公司營運、財務及服務提供無重大影響。</a:t>
+                      </a:r>
+                    </a:p>
+                  </a:txBody>
+                  <a:tcPr anchor="ctr" marL="73152" marT="9144" marB="9144">
+                    <a:solidFill>
+                      <a:srgbClr val="FFFFFF"/>
+                    </a:solidFill>
+                  </a:tcPr>
+                </a:tc>
+              </a:tr>
+              <a:tr h="274320">
+                <a:tc>
+                  <a:txBody>
+                    <a:bodyPr/>
+                    <a:lstStyle/>
+                    <a:p>
+                      <a:r>
+                        <a:rPr sz="1150" b="0">
+                          <a:solidFill>
+                            <a:srgbClr val="1A2233"/>
+                          </a:solidFill>
+                          <a:latin typeface="Microsoft JhengHei"/>
+                          <a:ea typeface="Microsoft JhengHei"/>
+                          <a:cs typeface="Microsoft JhengHei"/>
+                        </a:rPr>
+                        <a:t>鈊象</a:t>
+                      </a:r>
+                    </a:p>
+                  </a:txBody>
+                  <a:tcPr anchor="ctr" marL="73152" marT="9144" marB="9144">
+                    <a:solidFill>
+                      <a:srgbClr val="EEF2F9"/>
+                    </a:solidFill>
+                  </a:tcPr>
+                </a:tc>
+                <a:tc>
+                  <a:txBody>
+                    <a:bodyPr/>
+                    <a:lstStyle/>
+                    <a:p>
+                      <a:r>
+                        <a:rPr sz="1150" b="0">
+                          <a:solidFill>
+                            <a:srgbClr val="1A2233"/>
+                          </a:solidFill>
+                          <a:latin typeface="Microsoft JhengHei"/>
+                          <a:ea typeface="Microsoft JhengHei"/>
+                          <a:cs typeface="Microsoft JhengHei"/>
+                        </a:rPr>
+                        <a:t>3293</a:t>
+                      </a:r>
+                    </a:p>
+                  </a:txBody>
+                  <a:tcPr anchor="ctr" marL="73152" marT="9144" marB="9144">
+                    <a:solidFill>
+                      <a:srgbClr val="EEF2F9"/>
+                    </a:solidFill>
+                  </a:tcPr>
+                </a:tc>
+                <a:tc>
+                  <a:txBody>
+                    <a:bodyPr/>
+                    <a:lstStyle/>
+                    <a:p>
+                      <a:r>
+                        <a:rPr sz="1150" b="0">
+                          <a:solidFill>
+                            <a:srgbClr val="1A2233"/>
+                          </a:solidFill>
+                          <a:latin typeface="Microsoft JhengHei"/>
+                          <a:ea typeface="Microsoft JhengHei"/>
+                          <a:cs typeface="Microsoft JhengHei"/>
+                        </a:rPr>
+                        <a:t>09/29</a:t>
+                      </a:r>
+                    </a:p>
+                  </a:txBody>
+                  <a:tcPr anchor="ctr" marL="73152" marT="9144" marB="9144">
+                    <a:solidFill>
+                      <a:srgbClr val="EEF2F9"/>
+                    </a:solidFill>
+                  </a:tcPr>
+                </a:tc>
+                <a:tc>
+                  <a:txBody>
+                    <a:bodyPr/>
+                    <a:lstStyle/>
+                    <a:p>
+                      <a:r>
+                        <a:rPr sz="1150" b="1">
+                          <a:solidFill>
+                            <a:srgbClr val="5C6679"/>
+                          </a:solidFill>
+                          <a:latin typeface="Microsoft JhengHei"/>
+                          <a:ea typeface="Microsoft JhengHei"/>
+                          <a:cs typeface="Microsoft JhengHei"/>
+                        </a:rPr>
+                        <a:t>其他</a:t>
+                      </a:r>
+                    </a:p>
+                  </a:txBody>
+                  <a:tcPr anchor="ctr" marL="73152" marT="9144" marB="9144">
+                    <a:solidFill>
+                      <a:srgbClr val="EEF2F9"/>
+                    </a:solidFill>
+                  </a:tcPr>
+                </a:tc>
+                <a:tc>
+                  <a:txBody>
+                    <a:bodyPr/>
+                    <a:lstStyle/>
+                    <a:p>
+                      <a:r>
+                        <a:rPr sz="1150" b="0">
+                          <a:solidFill>
+                            <a:srgbClr val="1A2233"/>
+                          </a:solidFill>
+                          <a:latin typeface="Microsoft JhengHei"/>
+                          <a:ea typeface="Microsoft JhengHei"/>
+                          <a:cs typeface="Microsoft JhengHei"/>
+                        </a:rPr>
+                        <a:t>目前評估對公司營運尚無重大影響。</a:t>
+                      </a:r>
+                    </a:p>
+                  </a:txBody>
+                  <a:tcPr anchor="ctr" marL="73152" marT="9144" marB="9144">
+                    <a:solidFill>
+                      <a:srgbClr val="EEF2F9"/>
+                    </a:solidFill>
+                  </a:tcPr>
+                </a:tc>
+              </a:tr>
+              <a:tr h="274320">
+                <a:tc>
+                  <a:txBody>
+                    <a:bodyPr/>
+                    <a:lstStyle/>
+                    <a:p>
+                      <a:r>
+                        <a:rPr sz="1150" b="0">
+                          <a:solidFill>
+                            <a:srgbClr val="1A2233"/>
+                          </a:solidFill>
+                          <a:latin typeface="Microsoft JhengHei"/>
+                          <a:ea typeface="Microsoft JhengHei"/>
+                          <a:cs typeface="Microsoft JhengHei"/>
+                        </a:rPr>
+                        <a:t>柏文</a:t>
+                      </a:r>
+                    </a:p>
+                  </a:txBody>
+                  <a:tcPr anchor="ctr" marL="73152" marT="9144" marB="9144">
+                    <a:solidFill>
+                      <a:srgbClr val="FFFFFF"/>
+                    </a:solidFill>
+                  </a:tcPr>
+                </a:tc>
+                <a:tc>
+                  <a:txBody>
+                    <a:bodyPr/>
+                    <a:lstStyle/>
+                    <a:p>
+                      <a:r>
+                        <a:rPr sz="1150" b="0">
+                          <a:solidFill>
+                            <a:srgbClr val="1A2233"/>
+                          </a:solidFill>
+                          <a:latin typeface="Microsoft JhengHei"/>
+                          <a:ea typeface="Microsoft JhengHei"/>
+                          <a:cs typeface="Microsoft JhengHei"/>
+                        </a:rPr>
+                        <a:t>8462</a:t>
+                      </a:r>
+                    </a:p>
+                  </a:txBody>
+                  <a:tcPr anchor="ctr" marL="73152" marT="9144" marB="9144">
+                    <a:solidFill>
+                      <a:srgbClr val="FFFFFF"/>
+                    </a:solidFill>
+                  </a:tcPr>
+                </a:tc>
+                <a:tc>
+                  <a:txBody>
+                    <a:bodyPr/>
+                    <a:lstStyle/>
+                    <a:p>
+                      <a:r>
+                        <a:rPr sz="1150" b="0">
+                          <a:solidFill>
+                            <a:srgbClr val="1A2233"/>
+                          </a:solidFill>
+                          <a:latin typeface="Microsoft JhengHei"/>
+                          <a:ea typeface="Microsoft JhengHei"/>
+                          <a:cs typeface="Microsoft JhengHei"/>
+                        </a:rPr>
+                        <a:t>09/23</a:t>
                       </a:r>
                     </a:p>
                   </a:txBody>
@@ -4383,7 +4871,7 @@
                           <a:ea typeface="Microsoft JhengHei"/>
                           <a:cs typeface="Microsoft JhengHei"/>
                         </a:rPr>
-                        <a:t>截至目前為止對公司財務及業務並無重大影響。</a:t>
+                        <a:t>目前評估對公司營運無重大影響。</a:t>
                       </a:r>
                     </a:p>
                   </a:txBody>
@@ -4409,7 +4897,7 @@
                           <a:ea typeface="Microsoft JhengHei"/>
                           <a:cs typeface="Microsoft JhengHei"/>
                         </a:rPr>
-                        <a:t>神腦</a:t>
+                        <a:t>友訊</a:t>
                       </a:r>
                     </a:p>
                   </a:txBody>
@@ -4433,7 +4921,7 @@
                           <a:ea typeface="Microsoft JhengHei"/>
                           <a:cs typeface="Microsoft JhengHei"/>
                         </a:rPr>
-                        <a:t>2450</a:t>
+                        <a:t>2332</a:t>
                       </a:r>
                     </a:p>
                   </a:txBody>
@@ -4457,7 +4945,7 @@
                           <a:ea typeface="Microsoft JhengHei"/>
                           <a:cs typeface="Microsoft JhengHei"/>
                         </a:rPr>
-                        <a:t>09/29</a:t>
+                        <a:t>09/18</a:t>
                       </a:r>
                     </a:p>
                   </a:txBody>
@@ -4505,7 +4993,7 @@
                           <a:ea typeface="Microsoft JhengHei"/>
                           <a:cs typeface="Microsoft JhengHei"/>
                         </a:rPr>
-                        <a:t>評估對本公司營運、財務及服務提供無重大影響。</a:t>
+                        <a:t>目前評估對公司營運尚無重大影響</a:t>
                       </a:r>
                     </a:p>
                   </a:txBody>
@@ -4531,7 +5019,7 @@
                           <a:ea typeface="Microsoft JhengHei"/>
                           <a:cs typeface="Microsoft JhengHei"/>
                         </a:rPr>
-                        <a:t>鈊象</a:t>
+                        <a:t>長榮航</a:t>
                       </a:r>
                     </a:p>
                   </a:txBody>
@@ -4555,7 +5043,7 @@
                           <a:ea typeface="Microsoft JhengHei"/>
                           <a:cs typeface="Microsoft JhengHei"/>
                         </a:rPr>
-                        <a:t>3293</a:t>
+                        <a:t>2618</a:t>
                       </a:r>
                     </a:p>
                   </a:txBody>
@@ -4579,251 +5067,7 @@
                           <a:ea typeface="Microsoft JhengHei"/>
                           <a:cs typeface="Microsoft JhengHei"/>
                         </a:rPr>
-                        <a:t>09/29</a:t>
-                      </a:r>
-                    </a:p>
-                  </a:txBody>
-                  <a:tcPr anchor="ctr" marL="73152" marT="9144" marB="9144">
-                    <a:solidFill>
-                      <a:srgbClr val="FFFFFF"/>
-                    </a:solidFill>
-                  </a:tcPr>
-                </a:tc>
-                <a:tc>
-                  <a:txBody>
-                    <a:bodyPr/>
-                    <a:lstStyle/>
-                    <a:p>
-                      <a:r>
-                        <a:rPr sz="1150" b="1">
-                          <a:solidFill>
-                            <a:srgbClr val="5C6679"/>
-                          </a:solidFill>
-                          <a:latin typeface="Microsoft JhengHei"/>
-                          <a:ea typeface="Microsoft JhengHei"/>
-                          <a:cs typeface="Microsoft JhengHei"/>
-                        </a:rPr>
-                        <a:t>其他</a:t>
-                      </a:r>
-                    </a:p>
-                  </a:txBody>
-                  <a:tcPr anchor="ctr" marL="73152" marT="9144" marB="9144">
-                    <a:solidFill>
-                      <a:srgbClr val="FFFFFF"/>
-                    </a:solidFill>
-                  </a:tcPr>
-                </a:tc>
-                <a:tc>
-                  <a:txBody>
-                    <a:bodyPr/>
-                    <a:lstStyle/>
-                    <a:p>
-                      <a:r>
-                        <a:rPr sz="1150" b="0">
-                          <a:solidFill>
-                            <a:srgbClr val="1A2233"/>
-                          </a:solidFill>
-                          <a:latin typeface="Microsoft JhengHei"/>
-                          <a:ea typeface="Microsoft JhengHei"/>
-                          <a:cs typeface="Microsoft JhengHei"/>
-                        </a:rPr>
-                        <a:t>目前評估對公司營運尚無重大影響。</a:t>
-                      </a:r>
-                    </a:p>
-                  </a:txBody>
-                  <a:tcPr anchor="ctr" marL="73152" marT="9144" marB="9144">
-                    <a:solidFill>
-                      <a:srgbClr val="FFFFFF"/>
-                    </a:solidFill>
-                  </a:tcPr>
-                </a:tc>
-              </a:tr>
-              <a:tr h="274320">
-                <a:tc>
-                  <a:txBody>
-                    <a:bodyPr/>
-                    <a:lstStyle/>
-                    <a:p>
-                      <a:r>
-                        <a:rPr sz="1150" b="0">
-                          <a:solidFill>
-                            <a:srgbClr val="1A2233"/>
-                          </a:solidFill>
-                          <a:latin typeface="Microsoft JhengHei"/>
-                          <a:ea typeface="Microsoft JhengHei"/>
-                          <a:cs typeface="Microsoft JhengHei"/>
-                        </a:rPr>
-                        <a:t>柏文</a:t>
-                      </a:r>
-                    </a:p>
-                  </a:txBody>
-                  <a:tcPr anchor="ctr" marL="73152" marT="9144" marB="9144">
-                    <a:solidFill>
-                      <a:srgbClr val="EEF2F9"/>
-                    </a:solidFill>
-                  </a:tcPr>
-                </a:tc>
-                <a:tc>
-                  <a:txBody>
-                    <a:bodyPr/>
-                    <a:lstStyle/>
-                    <a:p>
-                      <a:r>
-                        <a:rPr sz="1150" b="0">
-                          <a:solidFill>
-                            <a:srgbClr val="1A2233"/>
-                          </a:solidFill>
-                          <a:latin typeface="Microsoft JhengHei"/>
-                          <a:ea typeface="Microsoft JhengHei"/>
-                          <a:cs typeface="Microsoft JhengHei"/>
-                        </a:rPr>
-                        <a:t>8462</a:t>
-                      </a:r>
-                    </a:p>
-                  </a:txBody>
-                  <a:tcPr anchor="ctr" marL="73152" marT="9144" marB="9144">
-                    <a:solidFill>
-                      <a:srgbClr val="EEF2F9"/>
-                    </a:solidFill>
-                  </a:tcPr>
-                </a:tc>
-                <a:tc>
-                  <a:txBody>
-                    <a:bodyPr/>
-                    <a:lstStyle/>
-                    <a:p>
-                      <a:r>
-                        <a:rPr sz="1150" b="0">
-                          <a:solidFill>
-                            <a:srgbClr val="1A2233"/>
-                          </a:solidFill>
-                          <a:latin typeface="Microsoft JhengHei"/>
-                          <a:ea typeface="Microsoft JhengHei"/>
-                          <a:cs typeface="Microsoft JhengHei"/>
-                        </a:rPr>
-                        <a:t>09/23</a:t>
-                      </a:r>
-                    </a:p>
-                  </a:txBody>
-                  <a:tcPr anchor="ctr" marL="73152" marT="9144" marB="9144">
-                    <a:solidFill>
-                      <a:srgbClr val="EEF2F9"/>
-                    </a:solidFill>
-                  </a:tcPr>
-                </a:tc>
-                <a:tc>
-                  <a:txBody>
-                    <a:bodyPr/>
-                    <a:lstStyle/>
-                    <a:p>
-                      <a:r>
-                        <a:rPr sz="1150" b="1">
-                          <a:solidFill>
-                            <a:srgbClr val="27A6C4"/>
-                          </a:solidFill>
-                          <a:latin typeface="Microsoft JhengHei"/>
-                          <a:ea typeface="Microsoft JhengHei"/>
-                          <a:cs typeface="Microsoft JhengHei"/>
-                        </a:rPr>
-                        <a:t>個資外洩</a:t>
-                      </a:r>
-                    </a:p>
-                  </a:txBody>
-                  <a:tcPr anchor="ctr" marL="73152" marT="9144" marB="9144">
-                    <a:solidFill>
-                      <a:srgbClr val="EEF2F9"/>
-                    </a:solidFill>
-                  </a:tcPr>
-                </a:tc>
-                <a:tc>
-                  <a:txBody>
-                    <a:bodyPr/>
-                    <a:lstStyle/>
-                    <a:p>
-                      <a:r>
-                        <a:rPr sz="1150" b="0">
-                          <a:solidFill>
-                            <a:srgbClr val="1A2233"/>
-                          </a:solidFill>
-                          <a:latin typeface="Microsoft JhengHei"/>
-                          <a:ea typeface="Microsoft JhengHei"/>
-                          <a:cs typeface="Microsoft JhengHei"/>
-                        </a:rPr>
-                        <a:t>目前評估對公司營運無重大影響。</a:t>
-                      </a:r>
-                    </a:p>
-                  </a:txBody>
-                  <a:tcPr anchor="ctr" marL="73152" marT="9144" marB="9144">
-                    <a:solidFill>
-                      <a:srgbClr val="EEF2F9"/>
-                    </a:solidFill>
-                  </a:tcPr>
-                </a:tc>
-              </a:tr>
-              <a:tr h="274320">
-                <a:tc>
-                  <a:txBody>
-                    <a:bodyPr/>
-                    <a:lstStyle/>
-                    <a:p>
-                      <a:r>
-                        <a:rPr sz="1150" b="0">
-                          <a:solidFill>
-                            <a:srgbClr val="1A2233"/>
-                          </a:solidFill>
-                          <a:latin typeface="Microsoft JhengHei"/>
-                          <a:ea typeface="Microsoft JhengHei"/>
-                          <a:cs typeface="Microsoft JhengHei"/>
-                        </a:rPr>
-                        <a:t>友訊</a:t>
-                      </a:r>
-                    </a:p>
-                  </a:txBody>
-                  <a:tcPr anchor="ctr" marL="73152" marT="9144" marB="9144">
-                    <a:solidFill>
-                      <a:srgbClr val="FFFFFF"/>
-                    </a:solidFill>
-                  </a:tcPr>
-                </a:tc>
-                <a:tc>
-                  <a:txBody>
-                    <a:bodyPr/>
-                    <a:lstStyle/>
-                    <a:p>
-                      <a:r>
-                        <a:rPr sz="1150" b="0">
-                          <a:solidFill>
-                            <a:srgbClr val="1A2233"/>
-                          </a:solidFill>
-                          <a:latin typeface="Microsoft JhengHei"/>
-                          <a:ea typeface="Microsoft JhengHei"/>
-                          <a:cs typeface="Microsoft JhengHei"/>
-                        </a:rPr>
-                        <a:t>2332</a:t>
-                      </a:r>
-                    </a:p>
-                  </a:txBody>
-                  <a:tcPr anchor="ctr" marL="73152" marT="9144" marB="9144">
-                    <a:solidFill>
-                      <a:srgbClr val="FFFFFF"/>
-                    </a:solidFill>
-                  </a:tcPr>
-                </a:tc>
-                <a:tc>
-                  <a:txBody>
-                    <a:bodyPr/>
-                    <a:lstStyle/>
-                    <a:p>
-                      <a:r>
-                        <a:rPr sz="1150" b="0">
-                          <a:solidFill>
-                            <a:srgbClr val="1A2233"/>
-                          </a:solidFill>
-                          <a:latin typeface="Microsoft JhengHei"/>
-                          <a:ea typeface="Microsoft JhengHei"/>
-                          <a:cs typeface="Microsoft JhengHei"/>
-                        </a:rPr>
-                        <a:t>09/18</a:t>
+                        <a:t>09/15</a:t>
                       </a:r>
                     </a:p>
                   </a:txBody>
@@ -4871,7 +5115,7 @@
                           <a:ea typeface="Microsoft JhengHei"/>
                           <a:cs typeface="Microsoft JhengHei"/>
                         </a:rPr>
-                        <a:t>目前評估對公司營運尚無重大影響</a:t>
+                        <a:t>目前評估對公司所有業務均不受影響。</a:t>
                       </a:r>
                     </a:p>
                   </a:txBody>
@@ -4897,7 +5141,7 @@
                           <a:ea typeface="Microsoft JhengHei"/>
                           <a:cs typeface="Microsoft JhengHei"/>
                         </a:rPr>
-                        <a:t>長榮航</a:t>
+                        <a:t>長榮航太</a:t>
                       </a:r>
                     </a:p>
                   </a:txBody>
@@ -4921,7 +5165,7 @@
                           <a:ea typeface="Microsoft JhengHei"/>
                           <a:cs typeface="Microsoft JhengHei"/>
                         </a:rPr>
-                        <a:t>2618</a:t>
+                        <a:t>2645</a:t>
                       </a:r>
                     </a:p>
                   </a:txBody>
@@ -4993,7 +5237,7 @@
                           <a:ea typeface="Microsoft JhengHei"/>
                           <a:cs typeface="Microsoft JhengHei"/>
                         </a:rPr>
-                        <a:t>目前評估對公司所有業務均不受影響。</a:t>
+                        <a:t>經初步評估，核心資訊系統及營運業務運作皆維持正常，尚未發現公司及涉客…</a:t>
                       </a:r>
                     </a:p>
                   </a:txBody>
@@ -5019,7 +5263,7 @@
                           <a:ea typeface="Microsoft JhengHei"/>
                           <a:cs typeface="Microsoft JhengHei"/>
                         </a:rPr>
-                        <a:t>長榮航太</a:t>
+                        <a:t>崴寶</a:t>
                       </a:r>
                     </a:p>
                   </a:txBody>
@@ -5043,7 +5287,7 @@
                           <a:ea typeface="Microsoft JhengHei"/>
                           <a:cs typeface="Microsoft JhengHei"/>
                         </a:rPr>
-                        <a:t>2645</a:t>
+                        <a:t>7744</a:t>
                       </a:r>
                     </a:p>
                   </a:txBody>
@@ -5067,7 +5311,251 @@
                           <a:ea typeface="Microsoft JhengHei"/>
                           <a:cs typeface="Microsoft JhengHei"/>
                         </a:rPr>
-                        <a:t>09/15</a:t>
+                        <a:t>09/14</a:t>
+                      </a:r>
+                    </a:p>
+                  </a:txBody>
+                  <a:tcPr anchor="ctr" marL="73152" marT="9144" marB="9144">
+                    <a:solidFill>
+                      <a:srgbClr val="FFFFFF"/>
+                    </a:solidFill>
+                  </a:tcPr>
+                </a:tc>
+                <a:tc>
+                  <a:txBody>
+                    <a:bodyPr/>
+                    <a:lstStyle/>
+                    <a:p>
+                      <a:r>
+                        <a:rPr sz="1150" b="1">
+                          <a:solidFill>
+                            <a:srgbClr val="F4A261"/>
+                          </a:solidFill>
+                          <a:latin typeface="Microsoft JhengHei"/>
+                          <a:ea typeface="Microsoft JhengHei"/>
+                          <a:cs typeface="Microsoft JhengHei"/>
+                        </a:rPr>
+                        <a:t>勒索病毒/加密</a:t>
+                      </a:r>
+                    </a:p>
+                  </a:txBody>
+                  <a:tcPr anchor="ctr" marL="73152" marT="9144" marB="9144">
+                    <a:solidFill>
+                      <a:srgbClr val="FFFFFF"/>
+                    </a:solidFill>
+                  </a:tcPr>
+                </a:tc>
+                <a:tc>
+                  <a:txBody>
+                    <a:bodyPr/>
+                    <a:lstStyle/>
+                    <a:p>
+                      <a:r>
+                        <a:rPr sz="1150" b="0">
+                          <a:solidFill>
+                            <a:srgbClr val="1A2233"/>
+                          </a:solidFill>
+                          <a:latin typeface="Microsoft JhengHei"/>
+                          <a:ea typeface="Microsoft JhengHei"/>
+                          <a:cs typeface="Microsoft JhengHei"/>
+                        </a:rPr>
+                        <a:t>經初步評估，本次資安事件未影響公司工廠生產作業，生產活動均維持正常運…</a:t>
+                      </a:r>
+                    </a:p>
+                  </a:txBody>
+                  <a:tcPr anchor="ctr" marL="73152" marT="9144" marB="9144">
+                    <a:solidFill>
+                      <a:srgbClr val="FFFFFF"/>
+                    </a:solidFill>
+                  </a:tcPr>
+                </a:tc>
+              </a:tr>
+              <a:tr h="274320">
+                <a:tc>
+                  <a:txBody>
+                    <a:bodyPr/>
+                    <a:lstStyle/>
+                    <a:p>
+                      <a:r>
+                        <a:rPr sz="1150" b="0">
+                          <a:solidFill>
+                            <a:srgbClr val="1A2233"/>
+                          </a:solidFill>
+                          <a:latin typeface="Microsoft JhengHei"/>
+                          <a:ea typeface="Microsoft JhengHei"/>
+                          <a:cs typeface="Microsoft JhengHei"/>
+                        </a:rPr>
+                        <a:t>達爾膚</a:t>
+                      </a:r>
+                    </a:p>
+                  </a:txBody>
+                  <a:tcPr anchor="ctr" marL="73152" marT="9144" marB="9144">
+                    <a:solidFill>
+                      <a:srgbClr val="EEF2F9"/>
+                    </a:solidFill>
+                  </a:tcPr>
+                </a:tc>
+                <a:tc>
+                  <a:txBody>
+                    <a:bodyPr/>
+                    <a:lstStyle/>
+                    <a:p>
+                      <a:r>
+                        <a:rPr sz="1150" b="0">
+                          <a:solidFill>
+                            <a:srgbClr val="1A2233"/>
+                          </a:solidFill>
+                          <a:latin typeface="Microsoft JhengHei"/>
+                          <a:ea typeface="Microsoft JhengHei"/>
+                          <a:cs typeface="Microsoft JhengHei"/>
+                        </a:rPr>
+                        <a:t>6523</a:t>
+                      </a:r>
+                    </a:p>
+                  </a:txBody>
+                  <a:tcPr anchor="ctr" marL="73152" marT="9144" marB="9144">
+                    <a:solidFill>
+                      <a:srgbClr val="EEF2F9"/>
+                    </a:solidFill>
+                  </a:tcPr>
+                </a:tc>
+                <a:tc>
+                  <a:txBody>
+                    <a:bodyPr/>
+                    <a:lstStyle/>
+                    <a:p>
+                      <a:r>
+                        <a:rPr sz="1150" b="0">
+                          <a:solidFill>
+                            <a:srgbClr val="1A2233"/>
+                          </a:solidFill>
+                          <a:latin typeface="Microsoft JhengHei"/>
+                          <a:ea typeface="Microsoft JhengHei"/>
+                          <a:cs typeface="Microsoft JhengHei"/>
+                        </a:rPr>
+                        <a:t>09/11</a:t>
+                      </a:r>
+                    </a:p>
+                  </a:txBody>
+                  <a:tcPr anchor="ctr" marL="73152" marT="9144" marB="9144">
+                    <a:solidFill>
+                      <a:srgbClr val="EEF2F9"/>
+                    </a:solidFill>
+                  </a:tcPr>
+                </a:tc>
+                <a:tc>
+                  <a:txBody>
+                    <a:bodyPr/>
+                    <a:lstStyle/>
+                    <a:p>
+                      <a:r>
+                        <a:rPr sz="1150" b="1">
+                          <a:solidFill>
+                            <a:srgbClr val="E63946"/>
+                          </a:solidFill>
+                          <a:latin typeface="Microsoft JhengHei"/>
+                          <a:ea typeface="Microsoft JhengHei"/>
+                          <a:cs typeface="Microsoft JhengHei"/>
+                        </a:rPr>
+                        <a:t>駭客攻擊</a:t>
+                      </a:r>
+                    </a:p>
+                  </a:txBody>
+                  <a:tcPr anchor="ctr" marL="73152" marT="9144" marB="9144">
+                    <a:solidFill>
+                      <a:srgbClr val="EEF2F9"/>
+                    </a:solidFill>
+                  </a:tcPr>
+                </a:tc>
+                <a:tc>
+                  <a:txBody>
+                    <a:bodyPr/>
+                    <a:lstStyle/>
+                    <a:p>
+                      <a:r>
+                        <a:rPr sz="1150" b="0">
+                          <a:solidFill>
+                            <a:srgbClr val="1A2233"/>
+                          </a:solidFill>
+                          <a:latin typeface="Microsoft JhengHei"/>
+                          <a:ea typeface="Microsoft JhengHei"/>
+                          <a:cs typeface="Microsoft JhengHei"/>
+                        </a:rPr>
+                        <a:t>受影響系統非屬公司現行主要營運系統，亦非對外提供服務之系統，目前評估…</a:t>
+                      </a:r>
+                    </a:p>
+                  </a:txBody>
+                  <a:tcPr anchor="ctr" marL="73152" marT="9144" marB="9144">
+                    <a:solidFill>
+                      <a:srgbClr val="EEF2F9"/>
+                    </a:solidFill>
+                  </a:tcPr>
+                </a:tc>
+              </a:tr>
+              <a:tr h="274320">
+                <a:tc>
+                  <a:txBody>
+                    <a:bodyPr/>
+                    <a:lstStyle/>
+                    <a:p>
+                      <a:r>
+                        <a:rPr sz="1150" b="0">
+                          <a:solidFill>
+                            <a:srgbClr val="1A2233"/>
+                          </a:solidFill>
+                          <a:latin typeface="Microsoft JhengHei"/>
+                          <a:ea typeface="Microsoft JhengHei"/>
+                          <a:cs typeface="Microsoft JhengHei"/>
+                        </a:rPr>
+                        <a:t>大車隊</a:t>
+                      </a:r>
+                    </a:p>
+                  </a:txBody>
+                  <a:tcPr anchor="ctr" marL="73152" marT="9144" marB="9144">
+                    <a:solidFill>
+                      <a:srgbClr val="FFFFFF"/>
+                    </a:solidFill>
+                  </a:tcPr>
+                </a:tc>
+                <a:tc>
+                  <a:txBody>
+                    <a:bodyPr/>
+                    <a:lstStyle/>
+                    <a:p>
+                      <a:r>
+                        <a:rPr sz="1150" b="0">
+                          <a:solidFill>
+                            <a:srgbClr val="1A2233"/>
+                          </a:solidFill>
+                          <a:latin typeface="Microsoft JhengHei"/>
+                          <a:ea typeface="Microsoft JhengHei"/>
+                          <a:cs typeface="Microsoft JhengHei"/>
+                        </a:rPr>
+                        <a:t>2640</a:t>
+                      </a:r>
+                    </a:p>
+                  </a:txBody>
+                  <a:tcPr anchor="ctr" marL="73152" marT="9144" marB="9144">
+                    <a:solidFill>
+                      <a:srgbClr val="FFFFFF"/>
+                    </a:solidFill>
+                  </a:tcPr>
+                </a:tc>
+                <a:tc>
+                  <a:txBody>
+                    <a:bodyPr/>
+                    <a:lstStyle/>
+                    <a:p>
+                      <a:r>
+                        <a:rPr sz="1150" b="0">
+                          <a:solidFill>
+                            <a:srgbClr val="1A2233"/>
+                          </a:solidFill>
+                          <a:latin typeface="Microsoft JhengHei"/>
+                          <a:ea typeface="Microsoft JhengHei"/>
+                          <a:cs typeface="Microsoft JhengHei"/>
+                        </a:rPr>
+                        <a:t>09/09</a:t>
                       </a:r>
                     </a:p>
                   </a:txBody>
@@ -5115,7 +5603,7 @@
                           <a:ea typeface="Microsoft JhengHei"/>
                           <a:cs typeface="Microsoft JhengHei"/>
                         </a:rPr>
-                        <a:t>經初步評估，核心資訊系統及營運業務運作皆維持正常，尚未發現公司及涉客…</a:t>
+                        <a:t>經初步評估，本事件目前尚未對本公司整體營運及財務造成重大影響。</a:t>
                       </a:r>
                     </a:p>
                   </a:txBody>
@@ -5141,7 +5629,7 @@
                           <a:ea typeface="Microsoft JhengHei"/>
                           <a:cs typeface="Microsoft JhengHei"/>
                         </a:rPr>
-                        <a:t>崴寶</a:t>
+                        <a:t>富爾特</a:t>
                       </a:r>
                     </a:p>
                   </a:txBody>
@@ -5165,7 +5653,7 @@
                           <a:ea typeface="Microsoft JhengHei"/>
                           <a:cs typeface="Microsoft JhengHei"/>
                         </a:rPr>
-                        <a:t>7744</a:t>
+                        <a:t>6136</a:t>
                       </a:r>
                     </a:p>
                   </a:txBody>
@@ -5189,495 +5677,7 @@
                           <a:ea typeface="Microsoft JhengHei"/>
                           <a:cs typeface="Microsoft JhengHei"/>
                         </a:rPr>
-                        <a:t>09/14</a:t>
-                      </a:r>
-                    </a:p>
-                  </a:txBody>
-                  <a:tcPr anchor="ctr" marL="73152" marT="9144" marB="9144">
-                    <a:solidFill>
-                      <a:srgbClr val="EEF2F9"/>
-                    </a:solidFill>
-                  </a:tcPr>
-                </a:tc>
-                <a:tc>
-                  <a:txBody>
-                    <a:bodyPr/>
-                    <a:lstStyle/>
-                    <a:p>
-                      <a:r>
-                        <a:rPr sz="1150" b="1">
-                          <a:solidFill>
-                            <a:srgbClr val="F4A261"/>
-                          </a:solidFill>
-                          <a:latin typeface="Microsoft JhengHei"/>
-                          <a:ea typeface="Microsoft JhengHei"/>
-                          <a:cs typeface="Microsoft JhengHei"/>
-                        </a:rPr>
-                        <a:t>勒索病毒/加密</a:t>
-                      </a:r>
-                    </a:p>
-                  </a:txBody>
-                  <a:tcPr anchor="ctr" marL="73152" marT="9144" marB="9144">
-                    <a:solidFill>
-                      <a:srgbClr val="EEF2F9"/>
-                    </a:solidFill>
-                  </a:tcPr>
-                </a:tc>
-                <a:tc>
-                  <a:txBody>
-                    <a:bodyPr/>
-                    <a:lstStyle/>
-                    <a:p>
-                      <a:r>
-                        <a:rPr sz="1150" b="0">
-                          <a:solidFill>
-                            <a:srgbClr val="1A2233"/>
-                          </a:solidFill>
-                          <a:latin typeface="Microsoft JhengHei"/>
-                          <a:ea typeface="Microsoft JhengHei"/>
-                          <a:cs typeface="Microsoft JhengHei"/>
-                        </a:rPr>
-                        <a:t>經初步評估，本次資安事件未影響公司工廠生產作業，生產活動均維持正常運…</a:t>
-                      </a:r>
-                    </a:p>
-                  </a:txBody>
-                  <a:tcPr anchor="ctr" marL="73152" marT="9144" marB="9144">
-                    <a:solidFill>
-                      <a:srgbClr val="EEF2F9"/>
-                    </a:solidFill>
-                  </a:tcPr>
-                </a:tc>
-              </a:tr>
-              <a:tr h="274320">
-                <a:tc>
-                  <a:txBody>
-                    <a:bodyPr/>
-                    <a:lstStyle/>
-                    <a:p>
-                      <a:r>
-                        <a:rPr sz="1150" b="0">
-                          <a:solidFill>
-                            <a:srgbClr val="1A2233"/>
-                          </a:solidFill>
-                          <a:latin typeface="Microsoft JhengHei"/>
-                          <a:ea typeface="Microsoft JhengHei"/>
-                          <a:cs typeface="Microsoft JhengHei"/>
-                        </a:rPr>
-                        <a:t>達爾膚</a:t>
-                      </a:r>
-                    </a:p>
-                  </a:txBody>
-                  <a:tcPr anchor="ctr" marL="73152" marT="9144" marB="9144">
-                    <a:solidFill>
-                      <a:srgbClr val="FFFFFF"/>
-                    </a:solidFill>
-                  </a:tcPr>
-                </a:tc>
-                <a:tc>
-                  <a:txBody>
-                    <a:bodyPr/>
-                    <a:lstStyle/>
-                    <a:p>
-                      <a:r>
-                        <a:rPr sz="1150" b="0">
-                          <a:solidFill>
-                            <a:srgbClr val="1A2233"/>
-                          </a:solidFill>
-                          <a:latin typeface="Microsoft JhengHei"/>
-                          <a:ea typeface="Microsoft JhengHei"/>
-                          <a:cs typeface="Microsoft JhengHei"/>
-                        </a:rPr>
-                        <a:t>6523</a:t>
-                      </a:r>
-                    </a:p>
-                  </a:txBody>
-                  <a:tcPr anchor="ctr" marL="73152" marT="9144" marB="9144">
-                    <a:solidFill>
-                      <a:srgbClr val="FFFFFF"/>
-                    </a:solidFill>
-                  </a:tcPr>
-                </a:tc>
-                <a:tc>
-                  <a:txBody>
-                    <a:bodyPr/>
-                    <a:lstStyle/>
-                    <a:p>
-                      <a:r>
-                        <a:rPr sz="1150" b="0">
-                          <a:solidFill>
-                            <a:srgbClr val="1A2233"/>
-                          </a:solidFill>
-                          <a:latin typeface="Microsoft JhengHei"/>
-                          <a:ea typeface="Microsoft JhengHei"/>
-                          <a:cs typeface="Microsoft JhengHei"/>
-                        </a:rPr>
-                        <a:t>09/11</a:t>
-                      </a:r>
-                    </a:p>
-                  </a:txBody>
-                  <a:tcPr anchor="ctr" marL="73152" marT="9144" marB="9144">
-                    <a:solidFill>
-                      <a:srgbClr val="FFFFFF"/>
-                    </a:solidFill>
-                  </a:tcPr>
-                </a:tc>
-                <a:tc>
-                  <a:txBody>
-                    <a:bodyPr/>
-                    <a:lstStyle/>
-                    <a:p>
-                      <a:r>
-                        <a:rPr sz="1150" b="1">
-                          <a:solidFill>
-                            <a:srgbClr val="E63946"/>
-                          </a:solidFill>
-                          <a:latin typeface="Microsoft JhengHei"/>
-                          <a:ea typeface="Microsoft JhengHei"/>
-                          <a:cs typeface="Microsoft JhengHei"/>
-                        </a:rPr>
-                        <a:t>駭客攻擊</a:t>
-                      </a:r>
-                    </a:p>
-                  </a:txBody>
-                  <a:tcPr anchor="ctr" marL="73152" marT="9144" marB="9144">
-                    <a:solidFill>
-                      <a:srgbClr val="FFFFFF"/>
-                    </a:solidFill>
-                  </a:tcPr>
-                </a:tc>
-                <a:tc>
-                  <a:txBody>
-                    <a:bodyPr/>
-                    <a:lstStyle/>
-                    <a:p>
-                      <a:r>
-                        <a:rPr sz="1150" b="0">
-                          <a:solidFill>
-                            <a:srgbClr val="1A2233"/>
-                          </a:solidFill>
-                          <a:latin typeface="Microsoft JhengHei"/>
-                          <a:ea typeface="Microsoft JhengHei"/>
-                          <a:cs typeface="Microsoft JhengHei"/>
-                        </a:rPr>
-                        <a:t>受影響系統非屬公司現行主要營運系統，亦非對外提供服務之系統，目前評估…</a:t>
-                      </a:r>
-                    </a:p>
-                  </a:txBody>
-                  <a:tcPr anchor="ctr" marL="73152" marT="9144" marB="9144">
-                    <a:solidFill>
-                      <a:srgbClr val="FFFFFF"/>
-                    </a:solidFill>
-                  </a:tcPr>
-                </a:tc>
-              </a:tr>
-              <a:tr h="274320">
-                <a:tc>
-                  <a:txBody>
-                    <a:bodyPr/>
-                    <a:lstStyle/>
-                    <a:p>
-                      <a:r>
-                        <a:rPr sz="1150" b="0">
-                          <a:solidFill>
-                            <a:srgbClr val="1A2233"/>
-                          </a:solidFill>
-                          <a:latin typeface="Microsoft JhengHei"/>
-                          <a:ea typeface="Microsoft JhengHei"/>
-                          <a:cs typeface="Microsoft JhengHei"/>
-                        </a:rPr>
-                        <a:t>大車隊</a:t>
-                      </a:r>
-                    </a:p>
-                  </a:txBody>
-                  <a:tcPr anchor="ctr" marL="73152" marT="9144" marB="9144">
-                    <a:solidFill>
-                      <a:srgbClr val="EEF2F9"/>
-                    </a:solidFill>
-                  </a:tcPr>
-                </a:tc>
-                <a:tc>
-                  <a:txBody>
-                    <a:bodyPr/>
-                    <a:lstStyle/>
-                    <a:p>
-                      <a:r>
-                        <a:rPr sz="1150" b="0">
-                          <a:solidFill>
-                            <a:srgbClr val="1A2233"/>
-                          </a:solidFill>
-                          <a:latin typeface="Microsoft JhengHei"/>
-                          <a:ea typeface="Microsoft JhengHei"/>
-                          <a:cs typeface="Microsoft JhengHei"/>
-                        </a:rPr>
-                        <a:t>2640</a:t>
-                      </a:r>
-                    </a:p>
-                  </a:txBody>
-                  <a:tcPr anchor="ctr" marL="73152" marT="9144" marB="9144">
-                    <a:solidFill>
-                      <a:srgbClr val="EEF2F9"/>
-                    </a:solidFill>
-                  </a:tcPr>
-                </a:tc>
-                <a:tc>
-                  <a:txBody>
-                    <a:bodyPr/>
-                    <a:lstStyle/>
-                    <a:p>
-                      <a:r>
-                        <a:rPr sz="1150" b="0">
-                          <a:solidFill>
-                            <a:srgbClr val="1A2233"/>
-                          </a:solidFill>
-                          <a:latin typeface="Microsoft JhengHei"/>
-                          <a:ea typeface="Microsoft JhengHei"/>
-                          <a:cs typeface="Microsoft JhengHei"/>
-                        </a:rPr>
-                        <a:t>09/09</a:t>
-                      </a:r>
-                    </a:p>
-                  </a:txBody>
-                  <a:tcPr anchor="ctr" marL="73152" marT="9144" marB="9144">
-                    <a:solidFill>
-                      <a:srgbClr val="EEF2F9"/>
-                    </a:solidFill>
-                  </a:tcPr>
-                </a:tc>
-                <a:tc>
-                  <a:txBody>
-                    <a:bodyPr/>
-                    <a:lstStyle/>
-                    <a:p>
-                      <a:r>
-                        <a:rPr sz="1150" b="1">
-                          <a:solidFill>
-                            <a:srgbClr val="E63946"/>
-                          </a:solidFill>
-                          <a:latin typeface="Microsoft JhengHei"/>
-                          <a:ea typeface="Microsoft JhengHei"/>
-                          <a:cs typeface="Microsoft JhengHei"/>
-                        </a:rPr>
-                        <a:t>駭客攻擊</a:t>
-                      </a:r>
-                    </a:p>
-                  </a:txBody>
-                  <a:tcPr anchor="ctr" marL="73152" marT="9144" marB="9144">
-                    <a:solidFill>
-                      <a:srgbClr val="EEF2F9"/>
-                    </a:solidFill>
-                  </a:tcPr>
-                </a:tc>
-                <a:tc>
-                  <a:txBody>
-                    <a:bodyPr/>
-                    <a:lstStyle/>
-                    <a:p>
-                      <a:r>
-                        <a:rPr sz="1150" b="0">
-                          <a:solidFill>
-                            <a:srgbClr val="1A2233"/>
-                          </a:solidFill>
-                          <a:latin typeface="Microsoft JhengHei"/>
-                          <a:ea typeface="Microsoft JhengHei"/>
-                          <a:cs typeface="Microsoft JhengHei"/>
-                        </a:rPr>
-                        <a:t>經初步評估，本事件目前尚未對本公司整體營運及財務造成重大影響。</a:t>
-                      </a:r>
-                    </a:p>
-                  </a:txBody>
-                  <a:tcPr anchor="ctr" marL="73152" marT="9144" marB="9144">
-                    <a:solidFill>
-                      <a:srgbClr val="EEF2F9"/>
-                    </a:solidFill>
-                  </a:tcPr>
-                </a:tc>
-              </a:tr>
-              <a:tr h="274320">
-                <a:tc>
-                  <a:txBody>
-                    <a:bodyPr/>
-                    <a:lstStyle/>
-                    <a:p>
-                      <a:r>
-                        <a:rPr sz="1150" b="0">
-                          <a:solidFill>
-                            <a:srgbClr val="1A2233"/>
-                          </a:solidFill>
-                          <a:latin typeface="Microsoft JhengHei"/>
-                          <a:ea typeface="Microsoft JhengHei"/>
-                          <a:cs typeface="Microsoft JhengHei"/>
-                        </a:rPr>
-                        <a:t>富爾特</a:t>
-                      </a:r>
-                    </a:p>
-                  </a:txBody>
-                  <a:tcPr anchor="ctr" marL="73152" marT="9144" marB="9144">
-                    <a:solidFill>
-                      <a:srgbClr val="FFFFFF"/>
-                    </a:solidFill>
-                  </a:tcPr>
-                </a:tc>
-                <a:tc>
-                  <a:txBody>
-                    <a:bodyPr/>
-                    <a:lstStyle/>
-                    <a:p>
-                      <a:r>
-                        <a:rPr sz="1150" b="0">
-                          <a:solidFill>
-                            <a:srgbClr val="1A2233"/>
-                          </a:solidFill>
-                          <a:latin typeface="Microsoft JhengHei"/>
-                          <a:ea typeface="Microsoft JhengHei"/>
-                          <a:cs typeface="Microsoft JhengHei"/>
-                        </a:rPr>
-                        <a:t>6136</a:t>
-                      </a:r>
-                    </a:p>
-                  </a:txBody>
-                  <a:tcPr anchor="ctr" marL="73152" marT="9144" marB="9144">
-                    <a:solidFill>
-                      <a:srgbClr val="FFFFFF"/>
-                    </a:solidFill>
-                  </a:tcPr>
-                </a:tc>
-                <a:tc>
-                  <a:txBody>
-                    <a:bodyPr/>
-                    <a:lstStyle/>
-                    <a:p>
-                      <a:r>
-                        <a:rPr sz="1150" b="0">
-                          <a:solidFill>
-                            <a:srgbClr val="1A2233"/>
-                          </a:solidFill>
-                          <a:latin typeface="Microsoft JhengHei"/>
-                          <a:ea typeface="Microsoft JhengHei"/>
-                          <a:cs typeface="Microsoft JhengHei"/>
-                        </a:rPr>
                         <a:t>09/07</a:t>
-                      </a:r>
-                    </a:p>
-                  </a:txBody>
-                  <a:tcPr anchor="ctr" marL="73152" marT="9144" marB="9144">
-                    <a:solidFill>
-                      <a:srgbClr val="FFFFFF"/>
-                    </a:solidFill>
-                  </a:tcPr>
-                </a:tc>
-                <a:tc>
-                  <a:txBody>
-                    <a:bodyPr/>
-                    <a:lstStyle/>
-                    <a:p>
-                      <a:r>
-                        <a:rPr sz="1150" b="1">
-                          <a:solidFill>
-                            <a:srgbClr val="F4A261"/>
-                          </a:solidFill>
-                          <a:latin typeface="Microsoft JhengHei"/>
-                          <a:ea typeface="Microsoft JhengHei"/>
-                          <a:cs typeface="Microsoft JhengHei"/>
-                        </a:rPr>
-                        <a:t>勒索病毒/加密</a:t>
-                      </a:r>
-                    </a:p>
-                  </a:txBody>
-                  <a:tcPr anchor="ctr" marL="73152" marT="9144" marB="9144">
-                    <a:solidFill>
-                      <a:srgbClr val="FFFFFF"/>
-                    </a:solidFill>
-                  </a:tcPr>
-                </a:tc>
-                <a:tc>
-                  <a:txBody>
-                    <a:bodyPr/>
-                    <a:lstStyle/>
-                    <a:p>
-                      <a:r>
-                        <a:rPr sz="1150" b="0">
-                          <a:solidFill>
-                            <a:srgbClr val="1A2233"/>
-                          </a:solidFill>
-                          <a:latin typeface="Microsoft JhengHei"/>
-                          <a:ea typeface="Microsoft JhengHei"/>
-                          <a:cs typeface="Microsoft JhengHei"/>
-                        </a:rPr>
-                        <a:t>目前受影響之系統正陸續復原中，對公司整體營運及財務之影響程度尚不致有…</a:t>
-                      </a:r>
-                    </a:p>
-                  </a:txBody>
-                  <a:tcPr anchor="ctr" marL="73152" marT="9144" marB="9144">
-                    <a:solidFill>
-                      <a:srgbClr val="FFFFFF"/>
-                    </a:solidFill>
-                  </a:tcPr>
-                </a:tc>
-              </a:tr>
-              <a:tr h="274320">
-                <a:tc>
-                  <a:txBody>
-                    <a:bodyPr/>
-                    <a:lstStyle/>
-                    <a:p>
-                      <a:r>
-                        <a:rPr sz="1150" b="0">
-                          <a:solidFill>
-                            <a:srgbClr val="1A2233"/>
-                          </a:solidFill>
-                          <a:latin typeface="Microsoft JhengHei"/>
-                          <a:ea typeface="Microsoft JhengHei"/>
-                          <a:cs typeface="Microsoft JhengHei"/>
-                        </a:rPr>
-                        <a:t>創新服務</a:t>
-                      </a:r>
-                    </a:p>
-                  </a:txBody>
-                  <a:tcPr anchor="ctr" marL="73152" marT="9144" marB="9144">
-                    <a:solidFill>
-                      <a:srgbClr val="EEF2F9"/>
-                    </a:solidFill>
-                  </a:tcPr>
-                </a:tc>
-                <a:tc>
-                  <a:txBody>
-                    <a:bodyPr/>
-                    <a:lstStyle/>
-                    <a:p>
-                      <a:r>
-                        <a:rPr sz="1150" b="0">
-                          <a:solidFill>
-                            <a:srgbClr val="1A2233"/>
-                          </a:solidFill>
-                          <a:latin typeface="Microsoft JhengHei"/>
-                          <a:ea typeface="Microsoft JhengHei"/>
-                          <a:cs typeface="Microsoft JhengHei"/>
-                        </a:rPr>
-                        <a:t>7828</a:t>
-                      </a:r>
-                    </a:p>
-                  </a:txBody>
-                  <a:tcPr anchor="ctr" marL="73152" marT="9144" marB="9144">
-                    <a:solidFill>
-                      <a:srgbClr val="EEF2F9"/>
-                    </a:solidFill>
-                  </a:tcPr>
-                </a:tc>
-                <a:tc>
-                  <a:txBody>
-                    <a:bodyPr/>
-                    <a:lstStyle/>
-                    <a:p>
-                      <a:r>
-                        <a:rPr sz="1150" b="0">
-                          <a:solidFill>
-                            <a:srgbClr val="1A2233"/>
-                          </a:solidFill>
-                          <a:latin typeface="Microsoft JhengHei"/>
-                          <a:ea typeface="Microsoft JhengHei"/>
-                          <a:cs typeface="Microsoft JhengHei"/>
-                        </a:rPr>
-                        <a:t>09/02</a:t>
                       </a:r>
                     </a:p>
                   </a:txBody>
@@ -6291,7 +6291,7 @@
                 <a:ea typeface="Microsoft JhengHei"/>
                 <a:cs typeface="Microsoft JhengHei"/>
               </a:rPr>
-              <a:t>3 起</a:t>
+              <a:t>2 起</a:t>
             </a:r>
           </a:p>
         </p:txBody>
@@ -6328,7 +6328,7 @@
                 <a:ea typeface="Microsoft JhengHei"/>
                 <a:cs typeface="Microsoft JhengHei"/>
               </a:rPr>
-              <a:t>崴寶、富爾特、創新服務</a:t>
+              <a:t>崴寶、富爾特</a:t>
             </a:r>
           </a:p>
         </p:txBody>
@@ -6767,7 +6767,7 @@
                 <a:ea typeface="Microsoft JhengHei"/>
                 <a:cs typeface="Microsoft JhengHei"/>
               </a:rPr>
-              <a:t>1 起</a:t>
+              <a:t>2 起</a:t>
             </a:r>
           </a:p>
         </p:txBody>
@@ -6804,7 +6804,7 @@
                 <a:ea typeface="Microsoft JhengHei"/>
                 <a:cs typeface="Microsoft JhengHei"/>
               </a:rPr>
-              <a:t>鈊象</a:t>
+              <a:t>一零四、鈊象</a:t>
             </a:r>
           </a:p>
         </p:txBody>
@@ -7144,7 +7144,7 @@
                           <a:ea typeface="Microsoft JhengHei"/>
                           <a:cs typeface="Microsoft JhengHei"/>
                         </a:rPr>
-                        <a:t>安心</a:t>
+                        <a:t>一零四</a:t>
                       </a:r>
                     </a:p>
                   </a:txBody>
@@ -7168,7 +7168,495 @@
                           <a:ea typeface="Microsoft JhengHei"/>
                           <a:cs typeface="Microsoft JhengHei"/>
                         </a:rPr>
+                        <a:t>3130</a:t>
+                      </a:r>
+                    </a:p>
+                  </a:txBody>
+                  <a:tcPr anchor="ctr" marL="73152" marT="9144" marB="9144">
+                    <a:solidFill>
+                      <a:srgbClr val="FFFFFF"/>
+                    </a:solidFill>
+                  </a:tcPr>
+                </a:tc>
+                <a:tc>
+                  <a:txBody>
+                    <a:bodyPr/>
+                    <a:lstStyle/>
+                    <a:p>
+                      <a:r>
+                        <a:rPr sz="1150" b="1">
+                          <a:solidFill>
+                            <a:srgbClr val="5C6679"/>
+                          </a:solidFill>
+                          <a:latin typeface="Microsoft JhengHei"/>
+                          <a:ea typeface="Microsoft JhengHei"/>
+                          <a:cs typeface="Microsoft JhengHei"/>
+                        </a:rPr>
+                        <a:t>其他</a:t>
+                      </a:r>
+                    </a:p>
+                  </a:txBody>
+                  <a:tcPr anchor="ctr" marL="73152" marT="9144" marB="9144">
+                    <a:solidFill>
+                      <a:srgbClr val="FFFFFF"/>
+                    </a:solidFill>
+                  </a:tcPr>
+                </a:tc>
+                <a:tc>
+                  <a:txBody>
+                    <a:bodyPr/>
+                    <a:lstStyle/>
+                    <a:p>
+                      <a:r>
+                        <a:rPr sz="1150" b="0">
+                          <a:solidFill>
+                            <a:srgbClr val="1A2233"/>
+                          </a:solidFill>
+                          <a:latin typeface="Microsoft JhengHei"/>
+                          <a:ea typeface="Microsoft JhengHei"/>
+                          <a:cs typeface="Microsoft JhengHei"/>
+                        </a:rPr>
+                        <a:t>安侯建業聯合會計師事務所</a:t>
+                      </a:r>
+                    </a:p>
+                  </a:txBody>
+                  <a:tcPr anchor="ctr" marL="73152" marT="9144" marB="9144">
+                    <a:solidFill>
+                      <a:srgbClr val="FFFFFF"/>
+                    </a:solidFill>
+                  </a:tcPr>
+                </a:tc>
+                <a:tc>
+                  <a:txBody>
+                    <a:bodyPr/>
+                    <a:lstStyle/>
+                    <a:p>
+                      <a:r>
+                        <a:rPr sz="1150" b="0">
+                          <a:solidFill>
+                            <a:srgbClr val="1A2233"/>
+                          </a:solidFill>
+                          <a:latin typeface="Microsoft JhengHei"/>
+                          <a:ea typeface="Microsoft JhengHei"/>
+                          <a:cs typeface="Microsoft JhengHei"/>
+                        </a:rPr>
+                        <a:t>趙敏如、江家齊</a:t>
+                      </a:r>
+                    </a:p>
+                  </a:txBody>
+                  <a:tcPr anchor="ctr" marL="73152" marT="9144" marB="9144">
+                    <a:solidFill>
+                      <a:srgbClr val="FFFFFF"/>
+                    </a:solidFill>
+                  </a:tcPr>
+                </a:tc>
+              </a:tr>
+              <a:tr h="344658">
+                <a:tc>
+                  <a:txBody>
+                    <a:bodyPr/>
+                    <a:lstStyle/>
+                    <a:p>
+                      <a:r>
+                        <a:rPr sz="1150" b="0">
+                          <a:solidFill>
+                            <a:srgbClr val="1A2233"/>
+                          </a:solidFill>
+                          <a:latin typeface="Microsoft JhengHei"/>
+                          <a:ea typeface="Microsoft JhengHei"/>
+                          <a:cs typeface="Microsoft JhengHei"/>
+                        </a:rPr>
+                        <a:t>安心</a:t>
+                      </a:r>
+                    </a:p>
+                  </a:txBody>
+                  <a:tcPr anchor="ctr" marL="73152" marT="9144" marB="9144">
+                    <a:solidFill>
+                      <a:srgbClr val="EEF2F9"/>
+                    </a:solidFill>
+                  </a:tcPr>
+                </a:tc>
+                <a:tc>
+                  <a:txBody>
+                    <a:bodyPr/>
+                    <a:lstStyle/>
+                    <a:p>
+                      <a:r>
+                        <a:rPr sz="1150" b="0">
+                          <a:solidFill>
+                            <a:srgbClr val="1A2233"/>
+                          </a:solidFill>
+                          <a:latin typeface="Microsoft JhengHei"/>
+                          <a:ea typeface="Microsoft JhengHei"/>
+                          <a:cs typeface="Microsoft JhengHei"/>
+                        </a:rPr>
                         <a:t>1259</a:t>
+                      </a:r>
+                    </a:p>
+                  </a:txBody>
+                  <a:tcPr anchor="ctr" marL="73152" marT="9144" marB="9144">
+                    <a:solidFill>
+                      <a:srgbClr val="EEF2F9"/>
+                    </a:solidFill>
+                  </a:tcPr>
+                </a:tc>
+                <a:tc>
+                  <a:txBody>
+                    <a:bodyPr/>
+                    <a:lstStyle/>
+                    <a:p>
+                      <a:r>
+                        <a:rPr sz="1150" b="1">
+                          <a:solidFill>
+                            <a:srgbClr val="27A6C4"/>
+                          </a:solidFill>
+                          <a:latin typeface="Microsoft JhengHei"/>
+                          <a:ea typeface="Microsoft JhengHei"/>
+                          <a:cs typeface="Microsoft JhengHei"/>
+                        </a:rPr>
+                        <a:t>個資外洩</a:t>
+                      </a:r>
+                    </a:p>
+                  </a:txBody>
+                  <a:tcPr anchor="ctr" marL="73152" marT="9144" marB="9144">
+                    <a:solidFill>
+                      <a:srgbClr val="EEF2F9"/>
+                    </a:solidFill>
+                  </a:tcPr>
+                </a:tc>
+                <a:tc>
+                  <a:txBody>
+                    <a:bodyPr/>
+                    <a:lstStyle/>
+                    <a:p>
+                      <a:r>
+                        <a:rPr sz="1150" b="0">
+                          <a:solidFill>
+                            <a:srgbClr val="1A2233"/>
+                          </a:solidFill>
+                          <a:latin typeface="Microsoft JhengHei"/>
+                          <a:ea typeface="Microsoft JhengHei"/>
+                          <a:cs typeface="Microsoft JhengHei"/>
+                        </a:rPr>
+                        <a:t>資誠聯合會計師事務所</a:t>
+                      </a:r>
+                    </a:p>
+                  </a:txBody>
+                  <a:tcPr anchor="ctr" marL="73152" marT="9144" marB="9144">
+                    <a:solidFill>
+                      <a:srgbClr val="EEF2F9"/>
+                    </a:solidFill>
+                  </a:tcPr>
+                </a:tc>
+                <a:tc>
+                  <a:txBody>
+                    <a:bodyPr/>
+                    <a:lstStyle/>
+                    <a:p>
+                      <a:r>
+                        <a:rPr sz="1150" b="0">
+                          <a:solidFill>
+                            <a:srgbClr val="1A2233"/>
+                          </a:solidFill>
+                          <a:latin typeface="Microsoft JhengHei"/>
+                          <a:ea typeface="Microsoft JhengHei"/>
+                          <a:cs typeface="Microsoft JhengHei"/>
+                        </a:rPr>
+                        <a:t>徐明釧、陳怡婷</a:t>
+                      </a:r>
+                    </a:p>
+                  </a:txBody>
+                  <a:tcPr anchor="ctr" marL="73152" marT="9144" marB="9144">
+                    <a:solidFill>
+                      <a:srgbClr val="EEF2F9"/>
+                    </a:solidFill>
+                  </a:tcPr>
+                </a:tc>
+              </a:tr>
+              <a:tr h="344658">
+                <a:tc>
+                  <a:txBody>
+                    <a:bodyPr/>
+                    <a:lstStyle/>
+                    <a:p>
+                      <a:r>
+                        <a:rPr sz="1150" b="0">
+                          <a:solidFill>
+                            <a:srgbClr val="1A2233"/>
+                          </a:solidFill>
+                          <a:latin typeface="Microsoft JhengHei"/>
+                          <a:ea typeface="Microsoft JhengHei"/>
+                          <a:cs typeface="Microsoft JhengHei"/>
+                        </a:rPr>
+                        <a:t>神腦</a:t>
+                      </a:r>
+                    </a:p>
+                  </a:txBody>
+                  <a:tcPr anchor="ctr" marL="73152" marT="9144" marB="9144">
+                    <a:solidFill>
+                      <a:srgbClr val="FFFFFF"/>
+                    </a:solidFill>
+                  </a:tcPr>
+                </a:tc>
+                <a:tc>
+                  <a:txBody>
+                    <a:bodyPr/>
+                    <a:lstStyle/>
+                    <a:p>
+                      <a:r>
+                        <a:rPr sz="1150" b="0">
+                          <a:solidFill>
+                            <a:srgbClr val="1A2233"/>
+                          </a:solidFill>
+                          <a:latin typeface="Microsoft JhengHei"/>
+                          <a:ea typeface="Microsoft JhengHei"/>
+                          <a:cs typeface="Microsoft JhengHei"/>
+                        </a:rPr>
+                        <a:t>2450</a:t>
+                      </a:r>
+                    </a:p>
+                  </a:txBody>
+                  <a:tcPr anchor="ctr" marL="73152" marT="9144" marB="9144">
+                    <a:solidFill>
+                      <a:srgbClr val="FFFFFF"/>
+                    </a:solidFill>
+                  </a:tcPr>
+                </a:tc>
+                <a:tc>
+                  <a:txBody>
+                    <a:bodyPr/>
+                    <a:lstStyle/>
+                    <a:p>
+                      <a:r>
+                        <a:rPr sz="1150" b="1">
+                          <a:solidFill>
+                            <a:srgbClr val="E63946"/>
+                          </a:solidFill>
+                          <a:latin typeface="Microsoft JhengHei"/>
+                          <a:ea typeface="Microsoft JhengHei"/>
+                          <a:cs typeface="Microsoft JhengHei"/>
+                        </a:rPr>
+                        <a:t>駭客攻擊</a:t>
+                      </a:r>
+                    </a:p>
+                  </a:txBody>
+                  <a:tcPr anchor="ctr" marL="73152" marT="9144" marB="9144">
+                    <a:solidFill>
+                      <a:srgbClr val="FFFFFF"/>
+                    </a:solidFill>
+                  </a:tcPr>
+                </a:tc>
+                <a:tc>
+                  <a:txBody>
+                    <a:bodyPr/>
+                    <a:lstStyle/>
+                    <a:p>
+                      <a:r>
+                        <a:rPr sz="1150" b="0">
+                          <a:solidFill>
+                            <a:srgbClr val="1A2233"/>
+                          </a:solidFill>
+                          <a:latin typeface="Microsoft JhengHei"/>
+                          <a:ea typeface="Microsoft JhengHei"/>
+                          <a:cs typeface="Microsoft JhengHei"/>
+                        </a:rPr>
+                        <a:t>資誠聯合會計師事務所</a:t>
+                      </a:r>
+                    </a:p>
+                  </a:txBody>
+                  <a:tcPr anchor="ctr" marL="73152" marT="9144" marB="9144">
+                    <a:solidFill>
+                      <a:srgbClr val="FFFFFF"/>
+                    </a:solidFill>
+                  </a:tcPr>
+                </a:tc>
+                <a:tc>
+                  <a:txBody>
+                    <a:bodyPr/>
+                    <a:lstStyle/>
+                    <a:p>
+                      <a:r>
+                        <a:rPr sz="1150" b="0">
+                          <a:solidFill>
+                            <a:srgbClr val="1A2233"/>
+                          </a:solidFill>
+                          <a:latin typeface="Microsoft JhengHei"/>
+                          <a:ea typeface="Microsoft JhengHei"/>
+                          <a:cs typeface="Microsoft JhengHei"/>
+                        </a:rPr>
+                        <a:t>王銘義、林永智</a:t>
+                      </a:r>
+                    </a:p>
+                  </a:txBody>
+                  <a:tcPr anchor="ctr" marL="73152" marT="9144" marB="9144">
+                    <a:solidFill>
+                      <a:srgbClr val="FFFFFF"/>
+                    </a:solidFill>
+                  </a:tcPr>
+                </a:tc>
+              </a:tr>
+              <a:tr h="344658">
+                <a:tc>
+                  <a:txBody>
+                    <a:bodyPr/>
+                    <a:lstStyle/>
+                    <a:p>
+                      <a:r>
+                        <a:rPr sz="1150" b="0">
+                          <a:solidFill>
+                            <a:srgbClr val="1A2233"/>
+                          </a:solidFill>
+                          <a:latin typeface="Microsoft JhengHei"/>
+                          <a:ea typeface="Microsoft JhengHei"/>
+                          <a:cs typeface="Microsoft JhengHei"/>
+                        </a:rPr>
+                        <a:t>鈊象</a:t>
+                      </a:r>
+                    </a:p>
+                  </a:txBody>
+                  <a:tcPr anchor="ctr" marL="73152" marT="9144" marB="9144">
+                    <a:solidFill>
+                      <a:srgbClr val="EEF2F9"/>
+                    </a:solidFill>
+                  </a:tcPr>
+                </a:tc>
+                <a:tc>
+                  <a:txBody>
+                    <a:bodyPr/>
+                    <a:lstStyle/>
+                    <a:p>
+                      <a:r>
+                        <a:rPr sz="1150" b="0">
+                          <a:solidFill>
+                            <a:srgbClr val="1A2233"/>
+                          </a:solidFill>
+                          <a:latin typeface="Microsoft JhengHei"/>
+                          <a:ea typeface="Microsoft JhengHei"/>
+                          <a:cs typeface="Microsoft JhengHei"/>
+                        </a:rPr>
+                        <a:t>3293</a:t>
+                      </a:r>
+                    </a:p>
+                  </a:txBody>
+                  <a:tcPr anchor="ctr" marL="73152" marT="9144" marB="9144">
+                    <a:solidFill>
+                      <a:srgbClr val="EEF2F9"/>
+                    </a:solidFill>
+                  </a:tcPr>
+                </a:tc>
+                <a:tc>
+                  <a:txBody>
+                    <a:bodyPr/>
+                    <a:lstStyle/>
+                    <a:p>
+                      <a:r>
+                        <a:rPr sz="1150" b="1">
+                          <a:solidFill>
+                            <a:srgbClr val="5C6679"/>
+                          </a:solidFill>
+                          <a:latin typeface="Microsoft JhengHei"/>
+                          <a:ea typeface="Microsoft JhengHei"/>
+                          <a:cs typeface="Microsoft JhengHei"/>
+                        </a:rPr>
+                        <a:t>其他</a:t>
+                      </a:r>
+                    </a:p>
+                  </a:txBody>
+                  <a:tcPr anchor="ctr" marL="73152" marT="9144" marB="9144">
+                    <a:solidFill>
+                      <a:srgbClr val="EEF2F9"/>
+                    </a:solidFill>
+                  </a:tcPr>
+                </a:tc>
+                <a:tc>
+                  <a:txBody>
+                    <a:bodyPr/>
+                    <a:lstStyle/>
+                    <a:p>
+                      <a:r>
+                        <a:rPr sz="1150" b="0">
+                          <a:solidFill>
+                            <a:srgbClr val="1A2233"/>
+                          </a:solidFill>
+                          <a:latin typeface="Microsoft JhengHei"/>
+                          <a:ea typeface="Microsoft JhengHei"/>
+                          <a:cs typeface="Microsoft JhengHei"/>
+                        </a:rPr>
+                        <a:t>勤業眾信聯合會計師事務所</a:t>
+                      </a:r>
+                    </a:p>
+                  </a:txBody>
+                  <a:tcPr anchor="ctr" marL="73152" marT="9144" marB="9144">
+                    <a:solidFill>
+                      <a:srgbClr val="EEF2F9"/>
+                    </a:solidFill>
+                  </a:tcPr>
+                </a:tc>
+                <a:tc>
+                  <a:txBody>
+                    <a:bodyPr/>
+                    <a:lstStyle/>
+                    <a:p>
+                      <a:r>
+                        <a:rPr sz="1150" b="0">
+                          <a:solidFill>
+                            <a:srgbClr val="1A2233"/>
+                          </a:solidFill>
+                          <a:latin typeface="Microsoft JhengHei"/>
+                          <a:ea typeface="Microsoft JhengHei"/>
+                          <a:cs typeface="Microsoft JhengHei"/>
+                        </a:rPr>
+                        <a:t>周仕杰、李東峰</a:t>
+                      </a:r>
+                    </a:p>
+                  </a:txBody>
+                  <a:tcPr anchor="ctr" marL="73152" marT="9144" marB="9144">
+                    <a:solidFill>
+                      <a:srgbClr val="EEF2F9"/>
+                    </a:solidFill>
+                  </a:tcPr>
+                </a:tc>
+              </a:tr>
+              <a:tr h="344658">
+                <a:tc>
+                  <a:txBody>
+                    <a:bodyPr/>
+                    <a:lstStyle/>
+                    <a:p>
+                      <a:r>
+                        <a:rPr sz="1150" b="0">
+                          <a:solidFill>
+                            <a:srgbClr val="1A2233"/>
+                          </a:solidFill>
+                          <a:latin typeface="Microsoft JhengHei"/>
+                          <a:ea typeface="Microsoft JhengHei"/>
+                          <a:cs typeface="Microsoft JhengHei"/>
+                        </a:rPr>
+                        <a:t>柏文</a:t>
+                      </a:r>
+                    </a:p>
+                  </a:txBody>
+                  <a:tcPr anchor="ctr" marL="73152" marT="9144" marB="9144">
+                    <a:solidFill>
+                      <a:srgbClr val="FFFFFF"/>
+                    </a:solidFill>
+                  </a:tcPr>
+                </a:tc>
+                <a:tc>
+                  <a:txBody>
+                    <a:bodyPr/>
+                    <a:lstStyle/>
+                    <a:p>
+                      <a:r>
+                        <a:rPr sz="1150" b="0">
+                          <a:solidFill>
+                            <a:srgbClr val="1A2233"/>
+                          </a:solidFill>
+                          <a:latin typeface="Microsoft JhengHei"/>
+                          <a:ea typeface="Microsoft JhengHei"/>
+                          <a:cs typeface="Microsoft JhengHei"/>
+                        </a:rPr>
+                        <a:t>8462</a:t>
                       </a:r>
                     </a:p>
                   </a:txBody>
@@ -7216,7 +7704,7 @@
                           <a:ea typeface="Microsoft JhengHei"/>
                           <a:cs typeface="Microsoft JhengHei"/>
                         </a:rPr>
-                        <a:t>資誠聯合會計師事務所</a:t>
+                        <a:t>安永聯合會計師事務所</a:t>
                       </a:r>
                     </a:p>
                   </a:txBody>
@@ -7240,7 +7728,7 @@
                           <a:ea typeface="Microsoft JhengHei"/>
                           <a:cs typeface="Microsoft JhengHei"/>
                         </a:rPr>
-                        <a:t>徐明釧、陳怡婷</a:t>
+                        <a:t>洪福讚、陳政初</a:t>
                       </a:r>
                     </a:p>
                   </a:txBody>
@@ -7266,7 +7754,7 @@
                           <a:ea typeface="Microsoft JhengHei"/>
                           <a:cs typeface="Microsoft JhengHei"/>
                         </a:rPr>
-                        <a:t>神腦</a:t>
+                        <a:t>友訊</a:t>
                       </a:r>
                     </a:p>
                   </a:txBody>
@@ -7290,7 +7778,495 @@
                           <a:ea typeface="Microsoft JhengHei"/>
                           <a:cs typeface="Microsoft JhengHei"/>
                         </a:rPr>
-                        <a:t>2450</a:t>
+                        <a:t>2332</a:t>
+                      </a:r>
+                    </a:p>
+                  </a:txBody>
+                  <a:tcPr anchor="ctr" marL="73152" marT="9144" marB="9144">
+                    <a:solidFill>
+                      <a:srgbClr val="EEF2F9"/>
+                    </a:solidFill>
+                  </a:tcPr>
+                </a:tc>
+                <a:tc>
+                  <a:txBody>
+                    <a:bodyPr/>
+                    <a:lstStyle/>
+                    <a:p>
+                      <a:r>
+                        <a:rPr sz="1150" b="1">
+                          <a:solidFill>
+                            <a:srgbClr val="E63946"/>
+                          </a:solidFill>
+                          <a:latin typeface="Microsoft JhengHei"/>
+                          <a:ea typeface="Microsoft JhengHei"/>
+                          <a:cs typeface="Microsoft JhengHei"/>
+                        </a:rPr>
+                        <a:t>駭客攻擊</a:t>
+                      </a:r>
+                    </a:p>
+                  </a:txBody>
+                  <a:tcPr anchor="ctr" marL="73152" marT="9144" marB="9144">
+                    <a:solidFill>
+                      <a:srgbClr val="EEF2F9"/>
+                    </a:solidFill>
+                  </a:tcPr>
+                </a:tc>
+                <a:tc>
+                  <a:txBody>
+                    <a:bodyPr/>
+                    <a:lstStyle/>
+                    <a:p>
+                      <a:r>
+                        <a:rPr sz="1150" b="0">
+                          <a:solidFill>
+                            <a:srgbClr val="1A2233"/>
+                          </a:solidFill>
+                          <a:latin typeface="Microsoft JhengHei"/>
+                          <a:ea typeface="Microsoft JhengHei"/>
+                          <a:cs typeface="Microsoft JhengHei"/>
+                        </a:rPr>
+                        <a:t>安侯建業聯合會計師事務所</a:t>
+                      </a:r>
+                    </a:p>
+                  </a:txBody>
+                  <a:tcPr anchor="ctr" marL="73152" marT="9144" marB="9144">
+                    <a:solidFill>
+                      <a:srgbClr val="EEF2F9"/>
+                    </a:solidFill>
+                  </a:tcPr>
+                </a:tc>
+                <a:tc>
+                  <a:txBody>
+                    <a:bodyPr/>
+                    <a:lstStyle/>
+                    <a:p>
+                      <a:r>
+                        <a:rPr sz="1150" b="0">
+                          <a:solidFill>
+                            <a:srgbClr val="1A2233"/>
+                          </a:solidFill>
+                          <a:latin typeface="Microsoft JhengHei"/>
+                          <a:ea typeface="Microsoft JhengHei"/>
+                          <a:cs typeface="Microsoft JhengHei"/>
+                        </a:rPr>
+                        <a:t>梅元貞、謝秋華</a:t>
+                      </a:r>
+                    </a:p>
+                  </a:txBody>
+                  <a:tcPr anchor="ctr" marL="73152" marT="9144" marB="9144">
+                    <a:solidFill>
+                      <a:srgbClr val="EEF2F9"/>
+                    </a:solidFill>
+                  </a:tcPr>
+                </a:tc>
+              </a:tr>
+              <a:tr h="344658">
+                <a:tc>
+                  <a:txBody>
+                    <a:bodyPr/>
+                    <a:lstStyle/>
+                    <a:p>
+                      <a:r>
+                        <a:rPr sz="1150" b="0">
+                          <a:solidFill>
+                            <a:srgbClr val="1A2233"/>
+                          </a:solidFill>
+                          <a:latin typeface="Microsoft JhengHei"/>
+                          <a:ea typeface="Microsoft JhengHei"/>
+                          <a:cs typeface="Microsoft JhengHei"/>
+                        </a:rPr>
+                        <a:t>長榮航</a:t>
+                      </a:r>
+                    </a:p>
+                  </a:txBody>
+                  <a:tcPr anchor="ctr" marL="73152" marT="9144" marB="9144">
+                    <a:solidFill>
+                      <a:srgbClr val="FFFFFF"/>
+                    </a:solidFill>
+                  </a:tcPr>
+                </a:tc>
+                <a:tc>
+                  <a:txBody>
+                    <a:bodyPr/>
+                    <a:lstStyle/>
+                    <a:p>
+                      <a:r>
+                        <a:rPr sz="1150" b="0">
+                          <a:solidFill>
+                            <a:srgbClr val="1A2233"/>
+                          </a:solidFill>
+                          <a:latin typeface="Microsoft JhengHei"/>
+                          <a:ea typeface="Microsoft JhengHei"/>
+                          <a:cs typeface="Microsoft JhengHei"/>
+                        </a:rPr>
+                        <a:t>2618</a:t>
+                      </a:r>
+                    </a:p>
+                  </a:txBody>
+                  <a:tcPr anchor="ctr" marL="73152" marT="9144" marB="9144">
+                    <a:solidFill>
+                      <a:srgbClr val="FFFFFF"/>
+                    </a:solidFill>
+                  </a:tcPr>
+                </a:tc>
+                <a:tc>
+                  <a:txBody>
+                    <a:bodyPr/>
+                    <a:lstStyle/>
+                    <a:p>
+                      <a:r>
+                        <a:rPr sz="1150" b="1">
+                          <a:solidFill>
+                            <a:srgbClr val="E63946"/>
+                          </a:solidFill>
+                          <a:latin typeface="Microsoft JhengHei"/>
+                          <a:ea typeface="Microsoft JhengHei"/>
+                          <a:cs typeface="Microsoft JhengHei"/>
+                        </a:rPr>
+                        <a:t>駭客攻擊</a:t>
+                      </a:r>
+                    </a:p>
+                  </a:txBody>
+                  <a:tcPr anchor="ctr" marL="73152" marT="9144" marB="9144">
+                    <a:solidFill>
+                      <a:srgbClr val="FFFFFF"/>
+                    </a:solidFill>
+                  </a:tcPr>
+                </a:tc>
+                <a:tc>
+                  <a:txBody>
+                    <a:bodyPr/>
+                    <a:lstStyle/>
+                    <a:p>
+                      <a:r>
+                        <a:rPr sz="1150" b="0">
+                          <a:solidFill>
+                            <a:srgbClr val="1A2233"/>
+                          </a:solidFill>
+                          <a:latin typeface="Microsoft JhengHei"/>
+                          <a:ea typeface="Microsoft JhengHei"/>
+                          <a:cs typeface="Microsoft JhengHei"/>
+                        </a:rPr>
+                        <a:t>安侯建業聯合會計師事務所</a:t>
+                      </a:r>
+                    </a:p>
+                  </a:txBody>
+                  <a:tcPr anchor="ctr" marL="73152" marT="9144" marB="9144">
+                    <a:solidFill>
+                      <a:srgbClr val="FFFFFF"/>
+                    </a:solidFill>
+                  </a:tcPr>
+                </a:tc>
+                <a:tc>
+                  <a:txBody>
+                    <a:bodyPr/>
+                    <a:lstStyle/>
+                    <a:p>
+                      <a:r>
+                        <a:rPr sz="1150" b="0">
+                          <a:solidFill>
+                            <a:srgbClr val="1A2233"/>
+                          </a:solidFill>
+                          <a:latin typeface="Microsoft JhengHei"/>
+                          <a:ea typeface="Microsoft JhengHei"/>
+                          <a:cs typeface="Microsoft JhengHei"/>
+                        </a:rPr>
+                        <a:t>陳雅琳、楊雲筑</a:t>
+                      </a:r>
+                    </a:p>
+                  </a:txBody>
+                  <a:tcPr anchor="ctr" marL="73152" marT="9144" marB="9144">
+                    <a:solidFill>
+                      <a:srgbClr val="FFFFFF"/>
+                    </a:solidFill>
+                  </a:tcPr>
+                </a:tc>
+              </a:tr>
+              <a:tr h="344658">
+                <a:tc>
+                  <a:txBody>
+                    <a:bodyPr/>
+                    <a:lstStyle/>
+                    <a:p>
+                      <a:r>
+                        <a:rPr sz="1150" b="0">
+                          <a:solidFill>
+                            <a:srgbClr val="1A2233"/>
+                          </a:solidFill>
+                          <a:latin typeface="Microsoft JhengHei"/>
+                          <a:ea typeface="Microsoft JhengHei"/>
+                          <a:cs typeface="Microsoft JhengHei"/>
+                        </a:rPr>
+                        <a:t>長榮航太</a:t>
+                      </a:r>
+                    </a:p>
+                  </a:txBody>
+                  <a:tcPr anchor="ctr" marL="73152" marT="9144" marB="9144">
+                    <a:solidFill>
+                      <a:srgbClr val="EEF2F9"/>
+                    </a:solidFill>
+                  </a:tcPr>
+                </a:tc>
+                <a:tc>
+                  <a:txBody>
+                    <a:bodyPr/>
+                    <a:lstStyle/>
+                    <a:p>
+                      <a:r>
+                        <a:rPr sz="1150" b="0">
+                          <a:solidFill>
+                            <a:srgbClr val="1A2233"/>
+                          </a:solidFill>
+                          <a:latin typeface="Microsoft JhengHei"/>
+                          <a:ea typeface="Microsoft JhengHei"/>
+                          <a:cs typeface="Microsoft JhengHei"/>
+                        </a:rPr>
+                        <a:t>2645</a:t>
+                      </a:r>
+                    </a:p>
+                  </a:txBody>
+                  <a:tcPr anchor="ctr" marL="73152" marT="9144" marB="9144">
+                    <a:solidFill>
+                      <a:srgbClr val="EEF2F9"/>
+                    </a:solidFill>
+                  </a:tcPr>
+                </a:tc>
+                <a:tc>
+                  <a:txBody>
+                    <a:bodyPr/>
+                    <a:lstStyle/>
+                    <a:p>
+                      <a:r>
+                        <a:rPr sz="1150" b="1">
+                          <a:solidFill>
+                            <a:srgbClr val="E63946"/>
+                          </a:solidFill>
+                          <a:latin typeface="Microsoft JhengHei"/>
+                          <a:ea typeface="Microsoft JhengHei"/>
+                          <a:cs typeface="Microsoft JhengHei"/>
+                        </a:rPr>
+                        <a:t>駭客攻擊</a:t>
+                      </a:r>
+                    </a:p>
+                  </a:txBody>
+                  <a:tcPr anchor="ctr" marL="73152" marT="9144" marB="9144">
+                    <a:solidFill>
+                      <a:srgbClr val="EEF2F9"/>
+                    </a:solidFill>
+                  </a:tcPr>
+                </a:tc>
+                <a:tc>
+                  <a:txBody>
+                    <a:bodyPr/>
+                    <a:lstStyle/>
+                    <a:p>
+                      <a:r>
+                        <a:rPr sz="1150" b="0">
+                          <a:solidFill>
+                            <a:srgbClr val="1A2233"/>
+                          </a:solidFill>
+                          <a:latin typeface="Microsoft JhengHei"/>
+                          <a:ea typeface="Microsoft JhengHei"/>
+                          <a:cs typeface="Microsoft JhengHei"/>
+                        </a:rPr>
+                        <a:t>安侯建業聯合會計師事務所</a:t>
+                      </a:r>
+                    </a:p>
+                  </a:txBody>
+                  <a:tcPr anchor="ctr" marL="73152" marT="9144" marB="9144">
+                    <a:solidFill>
+                      <a:srgbClr val="EEF2F9"/>
+                    </a:solidFill>
+                  </a:tcPr>
+                </a:tc>
+                <a:tc>
+                  <a:txBody>
+                    <a:bodyPr/>
+                    <a:lstStyle/>
+                    <a:p>
+                      <a:r>
+                        <a:rPr sz="1150" b="0">
+                          <a:solidFill>
+                            <a:srgbClr val="1A2233"/>
+                          </a:solidFill>
+                          <a:latin typeface="Microsoft JhengHei"/>
+                          <a:ea typeface="Microsoft JhengHei"/>
+                          <a:cs typeface="Microsoft JhengHei"/>
+                        </a:rPr>
+                        <a:t>陳雅琳、鄭博仁</a:t>
+                      </a:r>
+                    </a:p>
+                  </a:txBody>
+                  <a:tcPr anchor="ctr" marL="73152" marT="9144" marB="9144">
+                    <a:solidFill>
+                      <a:srgbClr val="EEF2F9"/>
+                    </a:solidFill>
+                  </a:tcPr>
+                </a:tc>
+              </a:tr>
+              <a:tr h="344658">
+                <a:tc>
+                  <a:txBody>
+                    <a:bodyPr/>
+                    <a:lstStyle/>
+                    <a:p>
+                      <a:r>
+                        <a:rPr sz="1150" b="0">
+                          <a:solidFill>
+                            <a:srgbClr val="1A2233"/>
+                          </a:solidFill>
+                          <a:latin typeface="Microsoft JhengHei"/>
+                          <a:ea typeface="Microsoft JhengHei"/>
+                          <a:cs typeface="Microsoft JhengHei"/>
+                        </a:rPr>
+                        <a:t>崴寶</a:t>
+                      </a:r>
+                    </a:p>
+                  </a:txBody>
+                  <a:tcPr anchor="ctr" marL="73152" marT="9144" marB="9144">
+                    <a:solidFill>
+                      <a:srgbClr val="FFFFFF"/>
+                    </a:solidFill>
+                  </a:tcPr>
+                </a:tc>
+                <a:tc>
+                  <a:txBody>
+                    <a:bodyPr/>
+                    <a:lstStyle/>
+                    <a:p>
+                      <a:r>
+                        <a:rPr sz="1150" b="0">
+                          <a:solidFill>
+                            <a:srgbClr val="1A2233"/>
+                          </a:solidFill>
+                          <a:latin typeface="Microsoft JhengHei"/>
+                          <a:ea typeface="Microsoft JhengHei"/>
+                          <a:cs typeface="Microsoft JhengHei"/>
+                        </a:rPr>
+                        <a:t>7744</a:t>
+                      </a:r>
+                    </a:p>
+                  </a:txBody>
+                  <a:tcPr anchor="ctr" marL="73152" marT="9144" marB="9144">
+                    <a:solidFill>
+                      <a:srgbClr val="FFFFFF"/>
+                    </a:solidFill>
+                  </a:tcPr>
+                </a:tc>
+                <a:tc>
+                  <a:txBody>
+                    <a:bodyPr/>
+                    <a:lstStyle/>
+                    <a:p>
+                      <a:r>
+                        <a:rPr sz="1150" b="1">
+                          <a:solidFill>
+                            <a:srgbClr val="F4A261"/>
+                          </a:solidFill>
+                          <a:latin typeface="Microsoft JhengHei"/>
+                          <a:ea typeface="Microsoft JhengHei"/>
+                          <a:cs typeface="Microsoft JhengHei"/>
+                        </a:rPr>
+                        <a:t>勒索病毒/加密</a:t>
+                      </a:r>
+                    </a:p>
+                  </a:txBody>
+                  <a:tcPr anchor="ctr" marL="73152" marT="9144" marB="9144">
+                    <a:solidFill>
+                      <a:srgbClr val="FFFFFF"/>
+                    </a:solidFill>
+                  </a:tcPr>
+                </a:tc>
+                <a:tc>
+                  <a:txBody>
+                    <a:bodyPr/>
+                    <a:lstStyle/>
+                    <a:p>
+                      <a:r>
+                        <a:rPr sz="1150" b="0">
+                          <a:solidFill>
+                            <a:srgbClr val="1A2233"/>
+                          </a:solidFill>
+                          <a:latin typeface="Microsoft JhengHei"/>
+                          <a:ea typeface="Microsoft JhengHei"/>
+                          <a:cs typeface="Microsoft JhengHei"/>
+                        </a:rPr>
+                        <a:t>安永聯合會計師事務所</a:t>
+                      </a:r>
+                    </a:p>
+                  </a:txBody>
+                  <a:tcPr anchor="ctr" marL="73152" marT="9144" marB="9144">
+                    <a:solidFill>
+                      <a:srgbClr val="FFFFFF"/>
+                    </a:solidFill>
+                  </a:tcPr>
+                </a:tc>
+                <a:tc>
+                  <a:txBody>
+                    <a:bodyPr/>
+                    <a:lstStyle/>
+                    <a:p>
+                      <a:r>
+                        <a:rPr sz="1150" b="0">
+                          <a:solidFill>
+                            <a:srgbClr val="1A2233"/>
+                          </a:solidFill>
+                          <a:latin typeface="Microsoft JhengHei"/>
+                          <a:ea typeface="Microsoft JhengHei"/>
+                          <a:cs typeface="Microsoft JhengHei"/>
+                        </a:rPr>
+                        <a:t>黃宇廷、黃子評</a:t>
+                      </a:r>
+                    </a:p>
+                  </a:txBody>
+                  <a:tcPr anchor="ctr" marL="73152" marT="9144" marB="9144">
+                    <a:solidFill>
+                      <a:srgbClr val="FFFFFF"/>
+                    </a:solidFill>
+                  </a:tcPr>
+                </a:tc>
+              </a:tr>
+              <a:tr h="344658">
+                <a:tc>
+                  <a:txBody>
+                    <a:bodyPr/>
+                    <a:lstStyle/>
+                    <a:p>
+                      <a:r>
+                        <a:rPr sz="1150" b="0">
+                          <a:solidFill>
+                            <a:srgbClr val="1A2233"/>
+                          </a:solidFill>
+                          <a:latin typeface="Microsoft JhengHei"/>
+                          <a:ea typeface="Microsoft JhengHei"/>
+                          <a:cs typeface="Microsoft JhengHei"/>
+                        </a:rPr>
+                        <a:t>達爾膚</a:t>
+                      </a:r>
+                    </a:p>
+                  </a:txBody>
+                  <a:tcPr anchor="ctr" marL="73152" marT="9144" marB="9144">
+                    <a:solidFill>
+                      <a:srgbClr val="EEF2F9"/>
+                    </a:solidFill>
+                  </a:tcPr>
+                </a:tc>
+                <a:tc>
+                  <a:txBody>
+                    <a:bodyPr/>
+                    <a:lstStyle/>
+                    <a:p>
+                      <a:r>
+                        <a:rPr sz="1150" b="0">
+                          <a:solidFill>
+                            <a:srgbClr val="1A2233"/>
+                          </a:solidFill>
+                          <a:latin typeface="Microsoft JhengHei"/>
+                          <a:ea typeface="Microsoft JhengHei"/>
+                          <a:cs typeface="Microsoft JhengHei"/>
+                        </a:rPr>
+                        <a:t>6523</a:t>
                       </a:r>
                     </a:p>
                   </a:txBody>
@@ -7362,7 +8338,7 @@
                           <a:ea typeface="Microsoft JhengHei"/>
                           <a:cs typeface="Microsoft JhengHei"/>
                         </a:rPr>
-                        <a:t>王銘義、林永智</a:t>
+                        <a:t>于智帆、葉翠苗</a:t>
                       </a:r>
                     </a:p>
                   </a:txBody>
@@ -7388,7 +8364,7 @@
                           <a:ea typeface="Microsoft JhengHei"/>
                           <a:cs typeface="Microsoft JhengHei"/>
                         </a:rPr>
-                        <a:t>鈊象</a:t>
+                        <a:t>大車隊</a:t>
                       </a:r>
                     </a:p>
                   </a:txBody>
@@ -7412,251 +8388,7 @@
                           <a:ea typeface="Microsoft JhengHei"/>
                           <a:cs typeface="Microsoft JhengHei"/>
                         </a:rPr>
-                        <a:t>3293</a:t>
-                      </a:r>
-                    </a:p>
-                  </a:txBody>
-                  <a:tcPr anchor="ctr" marL="73152" marT="9144" marB="9144">
-                    <a:solidFill>
-                      <a:srgbClr val="FFFFFF"/>
-                    </a:solidFill>
-                  </a:tcPr>
-                </a:tc>
-                <a:tc>
-                  <a:txBody>
-                    <a:bodyPr/>
-                    <a:lstStyle/>
-                    <a:p>
-                      <a:r>
-                        <a:rPr sz="1150" b="1">
-                          <a:solidFill>
-                            <a:srgbClr val="5C6679"/>
-                          </a:solidFill>
-                          <a:latin typeface="Microsoft JhengHei"/>
-                          <a:ea typeface="Microsoft JhengHei"/>
-                          <a:cs typeface="Microsoft JhengHei"/>
-                        </a:rPr>
-                        <a:t>其他</a:t>
-                      </a:r>
-                    </a:p>
-                  </a:txBody>
-                  <a:tcPr anchor="ctr" marL="73152" marT="9144" marB="9144">
-                    <a:solidFill>
-                      <a:srgbClr val="FFFFFF"/>
-                    </a:solidFill>
-                  </a:tcPr>
-                </a:tc>
-                <a:tc>
-                  <a:txBody>
-                    <a:bodyPr/>
-                    <a:lstStyle/>
-                    <a:p>
-                      <a:r>
-                        <a:rPr sz="1150" b="0">
-                          <a:solidFill>
-                            <a:srgbClr val="1A2233"/>
-                          </a:solidFill>
-                          <a:latin typeface="Microsoft JhengHei"/>
-                          <a:ea typeface="Microsoft JhengHei"/>
-                          <a:cs typeface="Microsoft JhengHei"/>
-                        </a:rPr>
-                        <a:t>勤業眾信聯合會計師事務所</a:t>
-                      </a:r>
-                    </a:p>
-                  </a:txBody>
-                  <a:tcPr anchor="ctr" marL="73152" marT="9144" marB="9144">
-                    <a:solidFill>
-                      <a:srgbClr val="FFFFFF"/>
-                    </a:solidFill>
-                  </a:tcPr>
-                </a:tc>
-                <a:tc>
-                  <a:txBody>
-                    <a:bodyPr/>
-                    <a:lstStyle/>
-                    <a:p>
-                      <a:r>
-                        <a:rPr sz="1150" b="0">
-                          <a:solidFill>
-                            <a:srgbClr val="1A2233"/>
-                          </a:solidFill>
-                          <a:latin typeface="Microsoft JhengHei"/>
-                          <a:ea typeface="Microsoft JhengHei"/>
-                          <a:cs typeface="Microsoft JhengHei"/>
-                        </a:rPr>
-                        <a:t>周仕杰、李東峰</a:t>
-                      </a:r>
-                    </a:p>
-                  </a:txBody>
-                  <a:tcPr anchor="ctr" marL="73152" marT="9144" marB="9144">
-                    <a:solidFill>
-                      <a:srgbClr val="FFFFFF"/>
-                    </a:solidFill>
-                  </a:tcPr>
-                </a:tc>
-              </a:tr>
-              <a:tr h="344658">
-                <a:tc>
-                  <a:txBody>
-                    <a:bodyPr/>
-                    <a:lstStyle/>
-                    <a:p>
-                      <a:r>
-                        <a:rPr sz="1150" b="0">
-                          <a:solidFill>
-                            <a:srgbClr val="1A2233"/>
-                          </a:solidFill>
-                          <a:latin typeface="Microsoft JhengHei"/>
-                          <a:ea typeface="Microsoft JhengHei"/>
-                          <a:cs typeface="Microsoft JhengHei"/>
-                        </a:rPr>
-                        <a:t>柏文</a:t>
-                      </a:r>
-                    </a:p>
-                  </a:txBody>
-                  <a:tcPr anchor="ctr" marL="73152" marT="9144" marB="9144">
-                    <a:solidFill>
-                      <a:srgbClr val="EEF2F9"/>
-                    </a:solidFill>
-                  </a:tcPr>
-                </a:tc>
-                <a:tc>
-                  <a:txBody>
-                    <a:bodyPr/>
-                    <a:lstStyle/>
-                    <a:p>
-                      <a:r>
-                        <a:rPr sz="1150" b="0">
-                          <a:solidFill>
-                            <a:srgbClr val="1A2233"/>
-                          </a:solidFill>
-                          <a:latin typeface="Microsoft JhengHei"/>
-                          <a:ea typeface="Microsoft JhengHei"/>
-                          <a:cs typeface="Microsoft JhengHei"/>
-                        </a:rPr>
-                        <a:t>8462</a:t>
-                      </a:r>
-                    </a:p>
-                  </a:txBody>
-                  <a:tcPr anchor="ctr" marL="73152" marT="9144" marB="9144">
-                    <a:solidFill>
-                      <a:srgbClr val="EEF2F9"/>
-                    </a:solidFill>
-                  </a:tcPr>
-                </a:tc>
-                <a:tc>
-                  <a:txBody>
-                    <a:bodyPr/>
-                    <a:lstStyle/>
-                    <a:p>
-                      <a:r>
-                        <a:rPr sz="1150" b="1">
-                          <a:solidFill>
-                            <a:srgbClr val="27A6C4"/>
-                          </a:solidFill>
-                          <a:latin typeface="Microsoft JhengHei"/>
-                          <a:ea typeface="Microsoft JhengHei"/>
-                          <a:cs typeface="Microsoft JhengHei"/>
-                        </a:rPr>
-                        <a:t>個資外洩</a:t>
-                      </a:r>
-                    </a:p>
-                  </a:txBody>
-                  <a:tcPr anchor="ctr" marL="73152" marT="9144" marB="9144">
-                    <a:solidFill>
-                      <a:srgbClr val="EEF2F9"/>
-                    </a:solidFill>
-                  </a:tcPr>
-                </a:tc>
-                <a:tc>
-                  <a:txBody>
-                    <a:bodyPr/>
-                    <a:lstStyle/>
-                    <a:p>
-                      <a:r>
-                        <a:rPr sz="1150" b="0">
-                          <a:solidFill>
-                            <a:srgbClr val="1A2233"/>
-                          </a:solidFill>
-                          <a:latin typeface="Microsoft JhengHei"/>
-                          <a:ea typeface="Microsoft JhengHei"/>
-                          <a:cs typeface="Microsoft JhengHei"/>
-                        </a:rPr>
-                        <a:t>安永聯合會計師事務所</a:t>
-                      </a:r>
-                    </a:p>
-                  </a:txBody>
-                  <a:tcPr anchor="ctr" marL="73152" marT="9144" marB="9144">
-                    <a:solidFill>
-                      <a:srgbClr val="EEF2F9"/>
-                    </a:solidFill>
-                  </a:tcPr>
-                </a:tc>
-                <a:tc>
-                  <a:txBody>
-                    <a:bodyPr/>
-                    <a:lstStyle/>
-                    <a:p>
-                      <a:r>
-                        <a:rPr sz="1150" b="0">
-                          <a:solidFill>
-                            <a:srgbClr val="1A2233"/>
-                          </a:solidFill>
-                          <a:latin typeface="Microsoft JhengHei"/>
-                          <a:ea typeface="Microsoft JhengHei"/>
-                          <a:cs typeface="Microsoft JhengHei"/>
-                        </a:rPr>
-                        <a:t>陳政初、洪國森</a:t>
-                      </a:r>
-                    </a:p>
-                  </a:txBody>
-                  <a:tcPr anchor="ctr" marL="73152" marT="9144" marB="9144">
-                    <a:solidFill>
-                      <a:srgbClr val="EEF2F9"/>
-                    </a:solidFill>
-                  </a:tcPr>
-                </a:tc>
-              </a:tr>
-              <a:tr h="344658">
-                <a:tc>
-                  <a:txBody>
-                    <a:bodyPr/>
-                    <a:lstStyle/>
-                    <a:p>
-                      <a:r>
-                        <a:rPr sz="1150" b="0">
-                          <a:solidFill>
-                            <a:srgbClr val="1A2233"/>
-                          </a:solidFill>
-                          <a:latin typeface="Microsoft JhengHei"/>
-                          <a:ea typeface="Microsoft JhengHei"/>
-                          <a:cs typeface="Microsoft JhengHei"/>
-                        </a:rPr>
-                        <a:t>友訊</a:t>
-                      </a:r>
-                    </a:p>
-                  </a:txBody>
-                  <a:tcPr anchor="ctr" marL="73152" marT="9144" marB="9144">
-                    <a:solidFill>
-                      <a:srgbClr val="FFFFFF"/>
-                    </a:solidFill>
-                  </a:tcPr>
-                </a:tc>
-                <a:tc>
-                  <a:txBody>
-                    <a:bodyPr/>
-                    <a:lstStyle/>
-                    <a:p>
-                      <a:r>
-                        <a:rPr sz="1150" b="0">
-                          <a:solidFill>
-                            <a:srgbClr val="1A2233"/>
-                          </a:solidFill>
-                          <a:latin typeface="Microsoft JhengHei"/>
-                          <a:ea typeface="Microsoft JhengHei"/>
-                          <a:cs typeface="Microsoft JhengHei"/>
-                        </a:rPr>
-                        <a:t>2332</a:t>
+                        <a:t>2640</a:t>
                       </a:r>
                     </a:p>
                   </a:txBody>
@@ -7704,7 +8436,7 @@
                           <a:ea typeface="Microsoft JhengHei"/>
                           <a:cs typeface="Microsoft JhengHei"/>
                         </a:rPr>
-                        <a:t>安侯建業聯合會計師事務所</a:t>
+                        <a:t>資誠聯合會計師事務所</a:t>
                       </a:r>
                     </a:p>
                   </a:txBody>
@@ -7728,7 +8460,7 @@
                           <a:ea typeface="Microsoft JhengHei"/>
                           <a:cs typeface="Microsoft JhengHei"/>
                         </a:rPr>
-                        <a:t>梅元貞、謝秋華</a:t>
+                        <a:t>支秉鈞、涂展源</a:t>
                       </a:r>
                     </a:p>
                   </a:txBody>
@@ -7739,7 +8471,7 @@
                   </a:tcPr>
                 </a:tc>
               </a:tr>
-              <a:tr h="344658">
+              <a:tr h="344664">
                 <a:tc>
                   <a:txBody>
                     <a:bodyPr/>
@@ -7754,7 +8486,7 @@
                           <a:ea typeface="Microsoft JhengHei"/>
                           <a:cs typeface="Microsoft JhengHei"/>
                         </a:rPr>
-                        <a:t>長榮航</a:t>
+                        <a:t>富爾特</a:t>
                       </a:r>
                     </a:p>
                   </a:txBody>
@@ -7778,251 +8510,7 @@
                           <a:ea typeface="Microsoft JhengHei"/>
                           <a:cs typeface="Microsoft JhengHei"/>
                         </a:rPr>
-                        <a:t>2618</a:t>
-                      </a:r>
-                    </a:p>
-                  </a:txBody>
-                  <a:tcPr anchor="ctr" marL="73152" marT="9144" marB="9144">
-                    <a:solidFill>
-                      <a:srgbClr val="EEF2F9"/>
-                    </a:solidFill>
-                  </a:tcPr>
-                </a:tc>
-                <a:tc>
-                  <a:txBody>
-                    <a:bodyPr/>
-                    <a:lstStyle/>
-                    <a:p>
-                      <a:r>
-                        <a:rPr sz="1150" b="1">
-                          <a:solidFill>
-                            <a:srgbClr val="E63946"/>
-                          </a:solidFill>
-                          <a:latin typeface="Microsoft JhengHei"/>
-                          <a:ea typeface="Microsoft JhengHei"/>
-                          <a:cs typeface="Microsoft JhengHei"/>
-                        </a:rPr>
-                        <a:t>駭客攻擊</a:t>
-                      </a:r>
-                    </a:p>
-                  </a:txBody>
-                  <a:tcPr anchor="ctr" marL="73152" marT="9144" marB="9144">
-                    <a:solidFill>
-                      <a:srgbClr val="EEF2F9"/>
-                    </a:solidFill>
-                  </a:tcPr>
-                </a:tc>
-                <a:tc>
-                  <a:txBody>
-                    <a:bodyPr/>
-                    <a:lstStyle/>
-                    <a:p>
-                      <a:r>
-                        <a:rPr sz="1150" b="0">
-                          <a:solidFill>
-                            <a:srgbClr val="1A2233"/>
-                          </a:solidFill>
-                          <a:latin typeface="Microsoft JhengHei"/>
-                          <a:ea typeface="Microsoft JhengHei"/>
-                          <a:cs typeface="Microsoft JhengHei"/>
-                        </a:rPr>
-                        <a:t>安侯建業聯合會計師事務所</a:t>
-                      </a:r>
-                    </a:p>
-                  </a:txBody>
-                  <a:tcPr anchor="ctr" marL="73152" marT="9144" marB="9144">
-                    <a:solidFill>
-                      <a:srgbClr val="EEF2F9"/>
-                    </a:solidFill>
-                  </a:tcPr>
-                </a:tc>
-                <a:tc>
-                  <a:txBody>
-                    <a:bodyPr/>
-                    <a:lstStyle/>
-                    <a:p>
-                      <a:r>
-                        <a:rPr sz="1150" b="0">
-                          <a:solidFill>
-                            <a:srgbClr val="1A2233"/>
-                          </a:solidFill>
-                          <a:latin typeface="Microsoft JhengHei"/>
-                          <a:ea typeface="Microsoft JhengHei"/>
-                          <a:cs typeface="Microsoft JhengHei"/>
-                        </a:rPr>
-                        <a:t>陳雅琳、楊雲筑</a:t>
-                      </a:r>
-                    </a:p>
-                  </a:txBody>
-                  <a:tcPr anchor="ctr" marL="73152" marT="9144" marB="9144">
-                    <a:solidFill>
-                      <a:srgbClr val="EEF2F9"/>
-                    </a:solidFill>
-                  </a:tcPr>
-                </a:tc>
-              </a:tr>
-              <a:tr h="344658">
-                <a:tc>
-                  <a:txBody>
-                    <a:bodyPr/>
-                    <a:lstStyle/>
-                    <a:p>
-                      <a:r>
-                        <a:rPr sz="1150" b="0">
-                          <a:solidFill>
-                            <a:srgbClr val="1A2233"/>
-                          </a:solidFill>
-                          <a:latin typeface="Microsoft JhengHei"/>
-                          <a:ea typeface="Microsoft JhengHei"/>
-                          <a:cs typeface="Microsoft JhengHei"/>
-                        </a:rPr>
-                        <a:t>長榮航太</a:t>
-                      </a:r>
-                    </a:p>
-                  </a:txBody>
-                  <a:tcPr anchor="ctr" marL="73152" marT="9144" marB="9144">
-                    <a:solidFill>
-                      <a:srgbClr val="FFFFFF"/>
-                    </a:solidFill>
-                  </a:tcPr>
-                </a:tc>
-                <a:tc>
-                  <a:txBody>
-                    <a:bodyPr/>
-                    <a:lstStyle/>
-                    <a:p>
-                      <a:r>
-                        <a:rPr sz="1150" b="0">
-                          <a:solidFill>
-                            <a:srgbClr val="1A2233"/>
-                          </a:solidFill>
-                          <a:latin typeface="Microsoft JhengHei"/>
-                          <a:ea typeface="Microsoft JhengHei"/>
-                          <a:cs typeface="Microsoft JhengHei"/>
-                        </a:rPr>
-                        <a:t>2645</a:t>
-                      </a:r>
-                    </a:p>
-                  </a:txBody>
-                  <a:tcPr anchor="ctr" marL="73152" marT="9144" marB="9144">
-                    <a:solidFill>
-                      <a:srgbClr val="FFFFFF"/>
-                    </a:solidFill>
-                  </a:tcPr>
-                </a:tc>
-                <a:tc>
-                  <a:txBody>
-                    <a:bodyPr/>
-                    <a:lstStyle/>
-                    <a:p>
-                      <a:r>
-                        <a:rPr sz="1150" b="1">
-                          <a:solidFill>
-                            <a:srgbClr val="E63946"/>
-                          </a:solidFill>
-                          <a:latin typeface="Microsoft JhengHei"/>
-                          <a:ea typeface="Microsoft JhengHei"/>
-                          <a:cs typeface="Microsoft JhengHei"/>
-                        </a:rPr>
-                        <a:t>駭客攻擊</a:t>
-                      </a:r>
-                    </a:p>
-                  </a:txBody>
-                  <a:tcPr anchor="ctr" marL="73152" marT="9144" marB="9144">
-                    <a:solidFill>
-                      <a:srgbClr val="FFFFFF"/>
-                    </a:solidFill>
-                  </a:tcPr>
-                </a:tc>
-                <a:tc>
-                  <a:txBody>
-                    <a:bodyPr/>
-                    <a:lstStyle/>
-                    <a:p>
-                      <a:r>
-                        <a:rPr sz="1150" b="0">
-                          <a:solidFill>
-                            <a:srgbClr val="1A2233"/>
-                          </a:solidFill>
-                          <a:latin typeface="Microsoft JhengHei"/>
-                          <a:ea typeface="Microsoft JhengHei"/>
-                          <a:cs typeface="Microsoft JhengHei"/>
-                        </a:rPr>
-                        <a:t>安侯建業聯合會計師事務所</a:t>
-                      </a:r>
-                    </a:p>
-                  </a:txBody>
-                  <a:tcPr anchor="ctr" marL="73152" marT="9144" marB="9144">
-                    <a:solidFill>
-                      <a:srgbClr val="FFFFFF"/>
-                    </a:solidFill>
-                  </a:tcPr>
-                </a:tc>
-                <a:tc>
-                  <a:txBody>
-                    <a:bodyPr/>
-                    <a:lstStyle/>
-                    <a:p>
-                      <a:r>
-                        <a:rPr sz="1150" b="0">
-                          <a:solidFill>
-                            <a:srgbClr val="1A2233"/>
-                          </a:solidFill>
-                          <a:latin typeface="Microsoft JhengHei"/>
-                          <a:ea typeface="Microsoft JhengHei"/>
-                          <a:cs typeface="Microsoft JhengHei"/>
-                        </a:rPr>
-                        <a:t>陳雅琳、鄭博仁</a:t>
-                      </a:r>
-                    </a:p>
-                  </a:txBody>
-                  <a:tcPr anchor="ctr" marL="73152" marT="9144" marB="9144">
-                    <a:solidFill>
-                      <a:srgbClr val="FFFFFF"/>
-                    </a:solidFill>
-                  </a:tcPr>
-                </a:tc>
-              </a:tr>
-              <a:tr h="344658">
-                <a:tc>
-                  <a:txBody>
-                    <a:bodyPr/>
-                    <a:lstStyle/>
-                    <a:p>
-                      <a:r>
-                        <a:rPr sz="1150" b="0">
-                          <a:solidFill>
-                            <a:srgbClr val="1A2233"/>
-                          </a:solidFill>
-                          <a:latin typeface="Microsoft JhengHei"/>
-                          <a:ea typeface="Microsoft JhengHei"/>
-                          <a:cs typeface="Microsoft JhengHei"/>
-                        </a:rPr>
-                        <a:t>崴寶</a:t>
-                      </a:r>
-                    </a:p>
-                  </a:txBody>
-                  <a:tcPr anchor="ctr" marL="73152" marT="9144" marB="9144">
-                    <a:solidFill>
-                      <a:srgbClr val="EEF2F9"/>
-                    </a:solidFill>
-                  </a:tcPr>
-                </a:tc>
-                <a:tc>
-                  <a:txBody>
-                    <a:bodyPr/>
-                    <a:lstStyle/>
-                    <a:p>
-                      <a:r>
-                        <a:rPr sz="1150" b="0">
-                          <a:solidFill>
-                            <a:srgbClr val="1A2233"/>
-                          </a:solidFill>
-                          <a:latin typeface="Microsoft JhengHei"/>
-                          <a:ea typeface="Microsoft JhengHei"/>
-                          <a:cs typeface="Microsoft JhengHei"/>
-                        </a:rPr>
-                        <a:t>7744</a:t>
+                        <a:t>6136</a:t>
                       </a:r>
                     </a:p>
                   </a:txBody>
@@ -8094,495 +8582,7 @@
                           <a:ea typeface="Microsoft JhengHei"/>
                           <a:cs typeface="Microsoft JhengHei"/>
                         </a:rPr>
-                        <a:t>黃宇廷、黃子評</a:t>
-                      </a:r>
-                    </a:p>
-                  </a:txBody>
-                  <a:tcPr anchor="ctr" marL="73152" marT="9144" marB="9144">
-                    <a:solidFill>
-                      <a:srgbClr val="EEF2F9"/>
-                    </a:solidFill>
-                  </a:tcPr>
-                </a:tc>
-              </a:tr>
-              <a:tr h="344658">
-                <a:tc>
-                  <a:txBody>
-                    <a:bodyPr/>
-                    <a:lstStyle/>
-                    <a:p>
-                      <a:r>
-                        <a:rPr sz="1150" b="0">
-                          <a:solidFill>
-                            <a:srgbClr val="1A2233"/>
-                          </a:solidFill>
-                          <a:latin typeface="Microsoft JhengHei"/>
-                          <a:ea typeface="Microsoft JhengHei"/>
-                          <a:cs typeface="Microsoft JhengHei"/>
-                        </a:rPr>
-                        <a:t>達爾膚</a:t>
-                      </a:r>
-                    </a:p>
-                  </a:txBody>
-                  <a:tcPr anchor="ctr" marL="73152" marT="9144" marB="9144">
-                    <a:solidFill>
-                      <a:srgbClr val="FFFFFF"/>
-                    </a:solidFill>
-                  </a:tcPr>
-                </a:tc>
-                <a:tc>
-                  <a:txBody>
-                    <a:bodyPr/>
-                    <a:lstStyle/>
-                    <a:p>
-                      <a:r>
-                        <a:rPr sz="1150" b="0">
-                          <a:solidFill>
-                            <a:srgbClr val="1A2233"/>
-                          </a:solidFill>
-                          <a:latin typeface="Microsoft JhengHei"/>
-                          <a:ea typeface="Microsoft JhengHei"/>
-                          <a:cs typeface="Microsoft JhengHei"/>
-                        </a:rPr>
-                        <a:t>6523</a:t>
-                      </a:r>
-                    </a:p>
-                  </a:txBody>
-                  <a:tcPr anchor="ctr" marL="73152" marT="9144" marB="9144">
-                    <a:solidFill>
-                      <a:srgbClr val="FFFFFF"/>
-                    </a:solidFill>
-                  </a:tcPr>
-                </a:tc>
-                <a:tc>
-                  <a:txBody>
-                    <a:bodyPr/>
-                    <a:lstStyle/>
-                    <a:p>
-                      <a:r>
-                        <a:rPr sz="1150" b="1">
-                          <a:solidFill>
-                            <a:srgbClr val="E63946"/>
-                          </a:solidFill>
-                          <a:latin typeface="Microsoft JhengHei"/>
-                          <a:ea typeface="Microsoft JhengHei"/>
-                          <a:cs typeface="Microsoft JhengHei"/>
-                        </a:rPr>
-                        <a:t>駭客攻擊</a:t>
-                      </a:r>
-                    </a:p>
-                  </a:txBody>
-                  <a:tcPr anchor="ctr" marL="73152" marT="9144" marB="9144">
-                    <a:solidFill>
-                      <a:srgbClr val="FFFFFF"/>
-                    </a:solidFill>
-                  </a:tcPr>
-                </a:tc>
-                <a:tc>
-                  <a:txBody>
-                    <a:bodyPr/>
-                    <a:lstStyle/>
-                    <a:p>
-                      <a:r>
-                        <a:rPr sz="1150" b="0">
-                          <a:solidFill>
-                            <a:srgbClr val="1A2233"/>
-                          </a:solidFill>
-                          <a:latin typeface="Microsoft JhengHei"/>
-                          <a:ea typeface="Microsoft JhengHei"/>
-                          <a:cs typeface="Microsoft JhengHei"/>
-                        </a:rPr>
-                        <a:t>資誠聯合會計師事務所</a:t>
-                      </a:r>
-                    </a:p>
-                  </a:txBody>
-                  <a:tcPr anchor="ctr" marL="73152" marT="9144" marB="9144">
-                    <a:solidFill>
-                      <a:srgbClr val="FFFFFF"/>
-                    </a:solidFill>
-                  </a:tcPr>
-                </a:tc>
-                <a:tc>
-                  <a:txBody>
-                    <a:bodyPr/>
-                    <a:lstStyle/>
-                    <a:p>
-                      <a:r>
-                        <a:rPr sz="1150" b="0">
-                          <a:solidFill>
-                            <a:srgbClr val="1A2233"/>
-                          </a:solidFill>
-                          <a:latin typeface="Microsoft JhengHei"/>
-                          <a:ea typeface="Microsoft JhengHei"/>
-                          <a:cs typeface="Microsoft JhengHei"/>
-                        </a:rPr>
-                        <a:t>于智帆、葉翠苗</a:t>
-                      </a:r>
-                    </a:p>
-                  </a:txBody>
-                  <a:tcPr anchor="ctr" marL="73152" marT="9144" marB="9144">
-                    <a:solidFill>
-                      <a:srgbClr val="FFFFFF"/>
-                    </a:solidFill>
-                  </a:tcPr>
-                </a:tc>
-              </a:tr>
-              <a:tr h="344658">
-                <a:tc>
-                  <a:txBody>
-                    <a:bodyPr/>
-                    <a:lstStyle/>
-                    <a:p>
-                      <a:r>
-                        <a:rPr sz="1150" b="0">
-                          <a:solidFill>
-                            <a:srgbClr val="1A2233"/>
-                          </a:solidFill>
-                          <a:latin typeface="Microsoft JhengHei"/>
-                          <a:ea typeface="Microsoft JhengHei"/>
-                          <a:cs typeface="Microsoft JhengHei"/>
-                        </a:rPr>
-                        <a:t>大車隊</a:t>
-                      </a:r>
-                    </a:p>
-                  </a:txBody>
-                  <a:tcPr anchor="ctr" marL="73152" marT="9144" marB="9144">
-                    <a:solidFill>
-                      <a:srgbClr val="EEF2F9"/>
-                    </a:solidFill>
-                  </a:tcPr>
-                </a:tc>
-                <a:tc>
-                  <a:txBody>
-                    <a:bodyPr/>
-                    <a:lstStyle/>
-                    <a:p>
-                      <a:r>
-                        <a:rPr sz="1150" b="0">
-                          <a:solidFill>
-                            <a:srgbClr val="1A2233"/>
-                          </a:solidFill>
-                          <a:latin typeface="Microsoft JhengHei"/>
-                          <a:ea typeface="Microsoft JhengHei"/>
-                          <a:cs typeface="Microsoft JhengHei"/>
-                        </a:rPr>
-                        <a:t>2640</a:t>
-                      </a:r>
-                    </a:p>
-                  </a:txBody>
-                  <a:tcPr anchor="ctr" marL="73152" marT="9144" marB="9144">
-                    <a:solidFill>
-                      <a:srgbClr val="EEF2F9"/>
-                    </a:solidFill>
-                  </a:tcPr>
-                </a:tc>
-                <a:tc>
-                  <a:txBody>
-                    <a:bodyPr/>
-                    <a:lstStyle/>
-                    <a:p>
-                      <a:r>
-                        <a:rPr sz="1150" b="1">
-                          <a:solidFill>
-                            <a:srgbClr val="E63946"/>
-                          </a:solidFill>
-                          <a:latin typeface="Microsoft JhengHei"/>
-                          <a:ea typeface="Microsoft JhengHei"/>
-                          <a:cs typeface="Microsoft JhengHei"/>
-                        </a:rPr>
-                        <a:t>駭客攻擊</a:t>
-                      </a:r>
-                    </a:p>
-                  </a:txBody>
-                  <a:tcPr anchor="ctr" marL="73152" marT="9144" marB="9144">
-                    <a:solidFill>
-                      <a:srgbClr val="EEF2F9"/>
-                    </a:solidFill>
-                  </a:tcPr>
-                </a:tc>
-                <a:tc>
-                  <a:txBody>
-                    <a:bodyPr/>
-                    <a:lstStyle/>
-                    <a:p>
-                      <a:r>
-                        <a:rPr sz="1150" b="0">
-                          <a:solidFill>
-                            <a:srgbClr val="1A2233"/>
-                          </a:solidFill>
-                          <a:latin typeface="Microsoft JhengHei"/>
-                          <a:ea typeface="Microsoft JhengHei"/>
-                          <a:cs typeface="Microsoft JhengHei"/>
-                        </a:rPr>
-                        <a:t>資誠聯合會計師事務所</a:t>
-                      </a:r>
-                    </a:p>
-                  </a:txBody>
-                  <a:tcPr anchor="ctr" marL="73152" marT="9144" marB="9144">
-                    <a:solidFill>
-                      <a:srgbClr val="EEF2F9"/>
-                    </a:solidFill>
-                  </a:tcPr>
-                </a:tc>
-                <a:tc>
-                  <a:txBody>
-                    <a:bodyPr/>
-                    <a:lstStyle/>
-                    <a:p>
-                      <a:r>
-                        <a:rPr sz="1150" b="0">
-                          <a:solidFill>
-                            <a:srgbClr val="1A2233"/>
-                          </a:solidFill>
-                          <a:latin typeface="Microsoft JhengHei"/>
-                          <a:ea typeface="Microsoft JhengHei"/>
-                          <a:cs typeface="Microsoft JhengHei"/>
-                        </a:rPr>
-                        <a:t>支秉鈞、涂展源</a:t>
-                      </a:r>
-                    </a:p>
-                  </a:txBody>
-                  <a:tcPr anchor="ctr" marL="73152" marT="9144" marB="9144">
-                    <a:solidFill>
-                      <a:srgbClr val="EEF2F9"/>
-                    </a:solidFill>
-                  </a:tcPr>
-                </a:tc>
-              </a:tr>
-              <a:tr h="344658">
-                <a:tc>
-                  <a:txBody>
-                    <a:bodyPr/>
-                    <a:lstStyle/>
-                    <a:p>
-                      <a:r>
-                        <a:rPr sz="1150" b="0">
-                          <a:solidFill>
-                            <a:srgbClr val="1A2233"/>
-                          </a:solidFill>
-                          <a:latin typeface="Microsoft JhengHei"/>
-                          <a:ea typeface="Microsoft JhengHei"/>
-                          <a:cs typeface="Microsoft JhengHei"/>
-                        </a:rPr>
-                        <a:t>富爾特</a:t>
-                      </a:r>
-                    </a:p>
-                  </a:txBody>
-                  <a:tcPr anchor="ctr" marL="73152" marT="9144" marB="9144">
-                    <a:solidFill>
-                      <a:srgbClr val="FFFFFF"/>
-                    </a:solidFill>
-                  </a:tcPr>
-                </a:tc>
-                <a:tc>
-                  <a:txBody>
-                    <a:bodyPr/>
-                    <a:lstStyle/>
-                    <a:p>
-                      <a:r>
-                        <a:rPr sz="1150" b="0">
-                          <a:solidFill>
-                            <a:srgbClr val="1A2233"/>
-                          </a:solidFill>
-                          <a:latin typeface="Microsoft JhengHei"/>
-                          <a:ea typeface="Microsoft JhengHei"/>
-                          <a:cs typeface="Microsoft JhengHei"/>
-                        </a:rPr>
-                        <a:t>6136</a:t>
-                      </a:r>
-                    </a:p>
-                  </a:txBody>
-                  <a:tcPr anchor="ctr" marL="73152" marT="9144" marB="9144">
-                    <a:solidFill>
-                      <a:srgbClr val="FFFFFF"/>
-                    </a:solidFill>
-                  </a:tcPr>
-                </a:tc>
-                <a:tc>
-                  <a:txBody>
-                    <a:bodyPr/>
-                    <a:lstStyle/>
-                    <a:p>
-                      <a:r>
-                        <a:rPr sz="1150" b="1">
-                          <a:solidFill>
-                            <a:srgbClr val="F4A261"/>
-                          </a:solidFill>
-                          <a:latin typeface="Microsoft JhengHei"/>
-                          <a:ea typeface="Microsoft JhengHei"/>
-                          <a:cs typeface="Microsoft JhengHei"/>
-                        </a:rPr>
-                        <a:t>勒索病毒/加密</a:t>
-                      </a:r>
-                    </a:p>
-                  </a:txBody>
-                  <a:tcPr anchor="ctr" marL="73152" marT="9144" marB="9144">
-                    <a:solidFill>
-                      <a:srgbClr val="FFFFFF"/>
-                    </a:solidFill>
-                  </a:tcPr>
-                </a:tc>
-                <a:tc>
-                  <a:txBody>
-                    <a:bodyPr/>
-                    <a:lstStyle/>
-                    <a:p>
-                      <a:r>
-                        <a:rPr sz="1150" b="0">
-                          <a:solidFill>
-                            <a:srgbClr val="1A2233"/>
-                          </a:solidFill>
-                          <a:latin typeface="Microsoft JhengHei"/>
-                          <a:ea typeface="Microsoft JhengHei"/>
-                          <a:cs typeface="Microsoft JhengHei"/>
-                        </a:rPr>
-                        <a:t>安永聯合會計師事務所</a:t>
-                      </a:r>
-                    </a:p>
-                  </a:txBody>
-                  <a:tcPr anchor="ctr" marL="73152" marT="9144" marB="9144">
-                    <a:solidFill>
-                      <a:srgbClr val="FFFFFF"/>
-                    </a:solidFill>
-                  </a:tcPr>
-                </a:tc>
-                <a:tc>
-                  <a:txBody>
-                    <a:bodyPr/>
-                    <a:lstStyle/>
-                    <a:p>
-                      <a:r>
-                        <a:rPr sz="1150" b="0">
-                          <a:solidFill>
-                            <a:srgbClr val="1A2233"/>
-                          </a:solidFill>
-                          <a:latin typeface="Microsoft JhengHei"/>
-                          <a:ea typeface="Microsoft JhengHei"/>
-                          <a:cs typeface="Microsoft JhengHei"/>
-                        </a:rPr>
                         <a:t>許新民、余倩如</a:t>
-                      </a:r>
-                    </a:p>
-                  </a:txBody>
-                  <a:tcPr anchor="ctr" marL="73152" marT="9144" marB="9144">
-                    <a:solidFill>
-                      <a:srgbClr val="FFFFFF"/>
-                    </a:solidFill>
-                  </a:tcPr>
-                </a:tc>
-              </a:tr>
-              <a:tr h="344664">
-                <a:tc>
-                  <a:txBody>
-                    <a:bodyPr/>
-                    <a:lstStyle/>
-                    <a:p>
-                      <a:r>
-                        <a:rPr sz="1150" b="0">
-                          <a:solidFill>
-                            <a:srgbClr val="1A2233"/>
-                          </a:solidFill>
-                          <a:latin typeface="Microsoft JhengHei"/>
-                          <a:ea typeface="Microsoft JhengHei"/>
-                          <a:cs typeface="Microsoft JhengHei"/>
-                        </a:rPr>
-                        <a:t>創新服務</a:t>
-                      </a:r>
-                    </a:p>
-                  </a:txBody>
-                  <a:tcPr anchor="ctr" marL="73152" marT="9144" marB="9144">
-                    <a:solidFill>
-                      <a:srgbClr val="EEF2F9"/>
-                    </a:solidFill>
-                  </a:tcPr>
-                </a:tc>
-                <a:tc>
-                  <a:txBody>
-                    <a:bodyPr/>
-                    <a:lstStyle/>
-                    <a:p>
-                      <a:r>
-                        <a:rPr sz="1150" b="0">
-                          <a:solidFill>
-                            <a:srgbClr val="1A2233"/>
-                          </a:solidFill>
-                          <a:latin typeface="Microsoft JhengHei"/>
-                          <a:ea typeface="Microsoft JhengHei"/>
-                          <a:cs typeface="Microsoft JhengHei"/>
-                        </a:rPr>
-                        <a:t>7828</a:t>
-                      </a:r>
-                    </a:p>
-                  </a:txBody>
-                  <a:tcPr anchor="ctr" marL="73152" marT="9144" marB="9144">
-                    <a:solidFill>
-                      <a:srgbClr val="EEF2F9"/>
-                    </a:solidFill>
-                  </a:tcPr>
-                </a:tc>
-                <a:tc>
-                  <a:txBody>
-                    <a:bodyPr/>
-                    <a:lstStyle/>
-                    <a:p>
-                      <a:r>
-                        <a:rPr sz="1150" b="1">
-                          <a:solidFill>
-                            <a:srgbClr val="F4A261"/>
-                          </a:solidFill>
-                          <a:latin typeface="Microsoft JhengHei"/>
-                          <a:ea typeface="Microsoft JhengHei"/>
-                          <a:cs typeface="Microsoft JhengHei"/>
-                        </a:rPr>
-                        <a:t>勒索病毒/加密</a:t>
-                      </a:r>
-                    </a:p>
-                  </a:txBody>
-                  <a:tcPr anchor="ctr" marL="73152" marT="9144" marB="9144">
-                    <a:solidFill>
-                      <a:srgbClr val="EEF2F9"/>
-                    </a:solidFill>
-                  </a:tcPr>
-                </a:tc>
-                <a:tc>
-                  <a:txBody>
-                    <a:bodyPr/>
-                    <a:lstStyle/>
-                    <a:p>
-                      <a:r>
-                        <a:rPr sz="1150" b="0">
-                          <a:solidFill>
-                            <a:srgbClr val="1A2233"/>
-                          </a:solidFill>
-                          <a:latin typeface="Microsoft JhengHei"/>
-                          <a:ea typeface="Microsoft JhengHei"/>
-                          <a:cs typeface="Microsoft JhengHei"/>
-                        </a:rPr>
-                        <a:t>資誠聯合會計師事務所</a:t>
-                      </a:r>
-                    </a:p>
-                  </a:txBody>
-                  <a:tcPr anchor="ctr" marL="73152" marT="9144" marB="9144">
-                    <a:solidFill>
-                      <a:srgbClr val="EEF2F9"/>
-                    </a:solidFill>
-                  </a:tcPr>
-                </a:tc>
-                <a:tc>
-                  <a:txBody>
-                    <a:bodyPr/>
-                    <a:lstStyle/>
-                    <a:p>
-                      <a:r>
-                        <a:rPr sz="1150" b="0">
-                          <a:solidFill>
-                            <a:srgbClr val="1A2233"/>
-                          </a:solidFill>
-                          <a:latin typeface="Microsoft JhengHei"/>
-                          <a:ea typeface="Microsoft JhengHei"/>
-                          <a:cs typeface="Microsoft JhengHei"/>
-                        </a:rPr>
-                        <a:t>蔡欣怡、白淑蒨</a:t>
                       </a:r>
                     </a:p>
                   </a:txBody>
@@ -10042,7 +10042,7 @@
             <a:avLst/>
           </a:prstGeom>
           <a:solidFill>
-            <a:srgbClr val="27A6C4"/>
+            <a:srgbClr val="5C6679"/>
           </a:solidFill>
           <a:ln>
             <a:noFill/>
@@ -10103,7 +10103,7 @@
                 <a:ea typeface="Microsoft JhengHei"/>
                 <a:cs typeface="Microsoft JhengHei"/>
               </a:rPr>
-              <a:t>安心 </a:t>
+              <a:t>一零四 </a:t>
             </a:r>
             <a:r>
               <a:rPr sz="1300" b="0">
@@ -10114,7 +10114,7 @@
                 <a:ea typeface="Microsoft JhengHei"/>
                 <a:cs typeface="Microsoft JhengHei"/>
               </a:rPr>
-              <a:t>1259</a:t>
+              <a:t>3130</a:t>
             </a:r>
           </a:p>
         </p:txBody>
@@ -10134,7 +10134,7 @@
             <a:avLst/>
           </a:prstGeom>
           <a:solidFill>
-            <a:srgbClr val="27A6C4"/>
+            <a:srgbClr val="5C6679"/>
           </a:solidFill>
           <a:ln>
             <a:noFill/>
@@ -10195,7 +10195,7 @@
                 <a:ea typeface="Microsoft JhengHei"/>
                 <a:cs typeface="Microsoft JhengHei"/>
               </a:rPr>
-              <a:t>個資外洩</a:t>
+              <a:t>其他</a:t>
             </a:r>
           </a:p>
         </p:txBody>
@@ -10230,7 +10230,7 @@
             <a:r>
               <a:rPr sz="1100" b="1">
                 <a:solidFill>
-                  <a:srgbClr val="27A6C4"/>
+                  <a:srgbClr val="5C6679"/>
                 </a:solidFill>
                 <a:latin typeface="Microsoft JhengHei"/>
                 <a:ea typeface="Microsoft JhengHei"/>
@@ -10247,7 +10247,7 @@
                 <a:ea typeface="Microsoft JhengHei"/>
                 <a:cs typeface="Microsoft JhengHei"/>
               </a:rPr>
-              <a:t>消費者反應疑似個資外洩事件</a:t>
+              <a:t>本公司偵測到APP系統有異常讀取情形，經調查確認，約12萬筆履歷資料遭未經授權讀取。</a:t>
             </a:r>
           </a:p>
         </p:txBody>
@@ -10282,7 +10282,7 @@
             <a:r>
               <a:rPr sz="1100" b="1">
                 <a:solidFill>
-                  <a:srgbClr val="27A6C4"/>
+                  <a:srgbClr val="5C6679"/>
                 </a:solidFill>
                 <a:latin typeface="Microsoft JhengHei"/>
                 <a:ea typeface="Microsoft JhengHei"/>
@@ -10299,7 +10299,7 @@
                 <a:ea typeface="Microsoft JhengHei"/>
                 <a:cs typeface="Microsoft JhengHei"/>
               </a:rPr>
-              <a:t>本公司已立即針對本次資安事件啟動應變作業。需特別說明，本次疑似個資外洩事件之平台係由委外廠商管理，非屬本公司自有之MOS…</a:t>
+              <a:t>本公司已採取相關防護及阻斷措施，並持續進行資安鑑識及強化資訊安全防護機制。本公司將依調查結果及相關法令辦理後續事宜，如有…</a:t>
             </a:r>
           </a:p>
         </p:txBody>
@@ -10365,7 +10365,7 @@
             <a:avLst/>
           </a:prstGeom>
           <a:solidFill>
-            <a:srgbClr val="E63946"/>
+            <a:srgbClr val="27A6C4"/>
           </a:solidFill>
           <a:ln>
             <a:noFill/>
@@ -10426,7 +10426,7 @@
                 <a:ea typeface="Microsoft JhengHei"/>
                 <a:cs typeface="Microsoft JhengHei"/>
               </a:rPr>
-              <a:t>神腦 </a:t>
+              <a:t>安心 </a:t>
             </a:r>
             <a:r>
               <a:rPr sz="1300" b="0">
@@ -10437,7 +10437,7 @@
                 <a:ea typeface="Microsoft JhengHei"/>
                 <a:cs typeface="Microsoft JhengHei"/>
               </a:rPr>
-              <a:t>2450</a:t>
+              <a:t>1259</a:t>
             </a:r>
           </a:p>
         </p:txBody>
@@ -10457,7 +10457,7 @@
             <a:avLst/>
           </a:prstGeom>
           <a:solidFill>
-            <a:srgbClr val="E63946"/>
+            <a:srgbClr val="27A6C4"/>
           </a:solidFill>
           <a:ln>
             <a:noFill/>
@@ -10518,7 +10518,7 @@
                 <a:ea typeface="Microsoft JhengHei"/>
                 <a:cs typeface="Microsoft JhengHei"/>
               </a:rPr>
-              <a:t>駭客攻擊</a:t>
+              <a:t>個資外洩</a:t>
             </a:r>
           </a:p>
         </p:txBody>
@@ -10553,7 +10553,7 @@
             <a:r>
               <a:rPr sz="1100" b="1">
                 <a:solidFill>
-                  <a:srgbClr val="E63946"/>
+                  <a:srgbClr val="27A6C4"/>
                 </a:solidFill>
                 <a:latin typeface="Microsoft JhengHei"/>
                 <a:ea typeface="Microsoft JhengHei"/>
@@ -10570,7 +10570,7 @@
                 <a:ea typeface="Microsoft JhengHei"/>
                 <a:cs typeface="Microsoft JhengHei"/>
               </a:rPr>
-              <a:t>本公司外部伺服器遭受自動化攻擊事件說明。</a:t>
+              <a:t>消費者反應疑似個資外洩事件</a:t>
             </a:r>
           </a:p>
         </p:txBody>
@@ -10605,7 +10605,7 @@
             <a:r>
               <a:rPr sz="1100" b="1">
                 <a:solidFill>
-                  <a:srgbClr val="E63946"/>
+                  <a:srgbClr val="27A6C4"/>
                 </a:solidFill>
                 <a:latin typeface="Microsoft JhengHei"/>
                 <a:ea typeface="Microsoft JhengHei"/>
@@ -10622,7 +10622,7 @@
                 <a:ea typeface="Microsoft JhengHei"/>
                 <a:cs typeface="Microsoft JhengHei"/>
               </a:rPr>
-              <a:t>本公司已與第三方資安廠商合作，全面強化網路偵測、系統監控與安全管控，以確保資訊安全。</a:t>
+              <a:t>本公司已立即針對本次資安事件啟動應變作業。需特別說明，本次疑似個資外洩事件之平台係由委外廠商管理，非屬本公司自有之MOS…</a:t>
             </a:r>
           </a:p>
         </p:txBody>
@@ -10688,7 +10688,7 @@
             <a:avLst/>
           </a:prstGeom>
           <a:solidFill>
-            <a:srgbClr val="5C6679"/>
+            <a:srgbClr val="E63946"/>
           </a:solidFill>
           <a:ln>
             <a:noFill/>
@@ -10749,7 +10749,7 @@
                 <a:ea typeface="Microsoft JhengHei"/>
                 <a:cs typeface="Microsoft JhengHei"/>
               </a:rPr>
-              <a:t>鈊象 </a:t>
+              <a:t>神腦 </a:t>
             </a:r>
             <a:r>
               <a:rPr sz="1300" b="0">
@@ -10760,7 +10760,7 @@
                 <a:ea typeface="Microsoft JhengHei"/>
                 <a:cs typeface="Microsoft JhengHei"/>
               </a:rPr>
-              <a:t>3293</a:t>
+              <a:t>2450</a:t>
             </a:r>
           </a:p>
         </p:txBody>
@@ -10780,7 +10780,7 @@
             <a:avLst/>
           </a:prstGeom>
           <a:solidFill>
-            <a:srgbClr val="5C6679"/>
+            <a:srgbClr val="E63946"/>
           </a:solidFill>
           <a:ln>
             <a:noFill/>
@@ -10841,7 +10841,7 @@
                 <a:ea typeface="Microsoft JhengHei"/>
                 <a:cs typeface="Microsoft JhengHei"/>
               </a:rPr>
-              <a:t>其他</a:t>
+              <a:t>駭客攻擊</a:t>
             </a:r>
           </a:p>
         </p:txBody>
@@ -10876,7 +10876,7 @@
             <a:r>
               <a:rPr sz="1100" b="1">
                 <a:solidFill>
-                  <a:srgbClr val="5C6679"/>
+                  <a:srgbClr val="E63946"/>
                 </a:solidFill>
                 <a:latin typeface="Microsoft JhengHei"/>
                 <a:ea typeface="Microsoft JhengHei"/>
@@ -10893,7 +10893,7 @@
                 <a:ea typeface="Microsoft JhengHei"/>
                 <a:cs typeface="Microsoft JhengHei"/>
               </a:rPr>
-              <a:t>本公司於115年9月29日發現不明IP異常侵入公司營運資訊設備。</a:t>
+              <a:t>本公司外部伺服器遭受自動化攻擊事件說明。</a:t>
             </a:r>
           </a:p>
         </p:txBody>
@@ -10928,7 +10928,7 @@
             <a:r>
               <a:rPr sz="1100" b="1">
                 <a:solidFill>
-                  <a:srgbClr val="5C6679"/>
+                  <a:srgbClr val="E63946"/>
                 </a:solidFill>
                 <a:latin typeface="Microsoft JhengHei"/>
                 <a:ea typeface="Microsoft JhengHei"/>
@@ -10945,7 +10945,7 @@
                 <a:ea typeface="Microsoft JhengHei"/>
                 <a:cs typeface="Microsoft JhengHei"/>
               </a:rPr>
-              <a:t>持續提升資安防禦，強化監控與防護層級。</a:t>
+              <a:t>本公司已與第三方資安廠商合作，全面強化網路偵測、系統監控與安全管控，以確保資訊安全。</a:t>
             </a:r>
           </a:p>
         </p:txBody>
@@ -11011,7 +11011,7 @@
             <a:avLst/>
           </a:prstGeom>
           <a:solidFill>
-            <a:srgbClr val="27A6C4"/>
+            <a:srgbClr val="5C6679"/>
           </a:solidFill>
           <a:ln>
             <a:noFill/>
@@ -11072,7 +11072,7 @@
                 <a:ea typeface="Microsoft JhengHei"/>
                 <a:cs typeface="Microsoft JhengHei"/>
               </a:rPr>
-              <a:t>柏文 </a:t>
+              <a:t>鈊象 </a:t>
             </a:r>
             <a:r>
               <a:rPr sz="1300" b="0">
@@ -11083,7 +11083,7 @@
                 <a:ea typeface="Microsoft JhengHei"/>
                 <a:cs typeface="Microsoft JhengHei"/>
               </a:rPr>
-              <a:t>8462</a:t>
+              <a:t>3293</a:t>
             </a:r>
           </a:p>
         </p:txBody>
@@ -11103,7 +11103,7 @@
             <a:avLst/>
           </a:prstGeom>
           <a:solidFill>
-            <a:srgbClr val="27A6C4"/>
+            <a:srgbClr val="5C6679"/>
           </a:solidFill>
           <a:ln>
             <a:noFill/>
@@ -11164,7 +11164,7 @@
                 <a:ea typeface="Microsoft JhengHei"/>
                 <a:cs typeface="Microsoft JhengHei"/>
               </a:rPr>
-              <a:t>個資外洩</a:t>
+              <a:t>其他</a:t>
             </a:r>
           </a:p>
         </p:txBody>
@@ -11199,7 +11199,7 @@
             <a:r>
               <a:rPr sz="1100" b="1">
                 <a:solidFill>
-                  <a:srgbClr val="27A6C4"/>
+                  <a:srgbClr val="5C6679"/>
                 </a:solidFill>
                 <a:latin typeface="Microsoft JhengHei"/>
                 <a:ea typeface="Microsoft JhengHei"/>
@@ -11216,7 +11216,7 @@
                 <a:ea typeface="Microsoft JhengHei"/>
                 <a:cs typeface="Microsoft JhengHei"/>
               </a:rPr>
-              <a:t>本公司接獲系統委外廠商通知其對外服務系統遭自動化攻擊，並對客戶資料表分頁擷取，其中部分涉及本公司…</a:t>
+              <a:t>本公司於115年9月29日發現不明IP異常侵入公司營運資訊設備。</a:t>
             </a:r>
           </a:p>
         </p:txBody>
@@ -11251,7 +11251,7 @@
             <a:r>
               <a:rPr sz="1100" b="1">
                 <a:solidFill>
-                  <a:srgbClr val="27A6C4"/>
+                  <a:srgbClr val="5C6679"/>
                 </a:solidFill>
                 <a:latin typeface="Microsoft JhengHei"/>
                 <a:ea typeface="Microsoft JhengHei"/>
@@ -11268,7 +11268,7 @@
                 <a:ea typeface="Microsoft JhengHei"/>
                 <a:cs typeface="Microsoft JhengHei"/>
               </a:rPr>
-              <a:t>本公司已要求系統委外廠商重新檢視造成資安疑慮因子並加以防範，同時持續針對系統委外廠商加強監控。</a:t>
+              <a:t>持續提升資安防禦，強化監控與防護層級。</a:t>
             </a:r>
           </a:p>
         </p:txBody>
@@ -11470,7 +11470,7 @@
             <a:avLst/>
           </a:prstGeom>
           <a:solidFill>
-            <a:srgbClr val="E63946"/>
+            <a:srgbClr val="27A6C4"/>
           </a:solidFill>
           <a:ln>
             <a:noFill/>
@@ -11531,7 +11531,7 @@
                 <a:ea typeface="Microsoft JhengHei"/>
                 <a:cs typeface="Microsoft JhengHei"/>
               </a:rPr>
-              <a:t>友訊 </a:t>
+              <a:t>柏文 </a:t>
             </a:r>
             <a:r>
               <a:rPr sz="1300" b="0">
@@ -11542,7 +11542,7 @@
                 <a:ea typeface="Microsoft JhengHei"/>
                 <a:cs typeface="Microsoft JhengHei"/>
               </a:rPr>
-              <a:t>2332</a:t>
+              <a:t>8462</a:t>
             </a:r>
           </a:p>
         </p:txBody>
@@ -11562,7 +11562,7 @@
             <a:avLst/>
           </a:prstGeom>
           <a:solidFill>
-            <a:srgbClr val="E63946"/>
+            <a:srgbClr val="27A6C4"/>
           </a:solidFill>
           <a:ln>
             <a:noFill/>
@@ -11623,7 +11623,7 @@
                 <a:ea typeface="Microsoft JhengHei"/>
                 <a:cs typeface="Microsoft JhengHei"/>
               </a:rPr>
-              <a:t>駭客攻擊</a:t>
+              <a:t>個資外洩</a:t>
             </a:r>
           </a:p>
         </p:txBody>
@@ -11658,7 +11658,7 @@
             <a:r>
               <a:rPr sz="1100" b="1">
                 <a:solidFill>
-                  <a:srgbClr val="E63946"/>
+                  <a:srgbClr val="27A6C4"/>
                 </a:solidFill>
                 <a:latin typeface="Microsoft JhengHei"/>
                 <a:ea typeface="Microsoft JhengHei"/>
@@ -11675,7 +11675,7 @@
                 <a:ea typeface="Microsoft JhengHei"/>
                 <a:cs typeface="Microsoft JhengHei"/>
               </a:rPr>
-              <a:t>本公司網站監控中發現登入記錄異常，查知外部攻擊者利用既有登入機制，以大量帳號密碼進行網站登入驗證…</a:t>
+              <a:t>本公司接獲系統委外廠商通知其對外服務系統遭自動化攻擊，並對客戶資料表分頁擷取，其中部分涉及本公司…</a:t>
             </a:r>
           </a:p>
         </p:txBody>
@@ -11710,7 +11710,7 @@
             <a:r>
               <a:rPr sz="1100" b="1">
                 <a:solidFill>
-                  <a:srgbClr val="E63946"/>
+                  <a:srgbClr val="27A6C4"/>
                 </a:solidFill>
                 <a:latin typeface="Microsoft JhengHei"/>
                 <a:ea typeface="Microsoft JhengHei"/>
@@ -11727,7 +11727,7 @@
                 <a:ea typeface="Microsoft JhengHei"/>
                 <a:cs typeface="Microsoft JhengHei"/>
               </a:rPr>
-              <a:t>(1)強化網站登入驗證、存取控制及異常行為偵測機制。(2)強化網頁應用程式防火牆，降低大量或異常登入嘗試之可行性。(3)…</a:t>
+              <a:t>本公司已要求系統委外廠商重新檢視造成資安疑慮因子並加以防範，同時持續針對系統委外廠商加強監控。</a:t>
             </a:r>
           </a:p>
         </p:txBody>
@@ -11854,7 +11854,7 @@
                 <a:ea typeface="Microsoft JhengHei"/>
                 <a:cs typeface="Microsoft JhengHei"/>
               </a:rPr>
-              <a:t>長榮航 </a:t>
+              <a:t>友訊 </a:t>
             </a:r>
             <a:r>
               <a:rPr sz="1300" b="0">
@@ -11865,7 +11865,7 @@
                 <a:ea typeface="Microsoft JhengHei"/>
                 <a:cs typeface="Microsoft JhengHei"/>
               </a:rPr>
-              <a:t>2618</a:t>
+              <a:t>2332</a:t>
             </a:r>
           </a:p>
         </p:txBody>
@@ -11998,7 +11998,7 @@
                 <a:ea typeface="Microsoft JhengHei"/>
                 <a:cs typeface="Microsoft JhengHei"/>
               </a:rPr>
-              <a:t>本公司發現有不明人士透過惡意IP入侵本公司內部資訊環境，取得員工姓名與公務聯繫資訊。</a:t>
+              <a:t>本公司網站監控中發現登入記錄異常，查知外部攻擊者利用既有登入機制，以大量帳號密碼進行網站登入驗證…</a:t>
             </a:r>
           </a:p>
         </p:txBody>
@@ -12050,7 +12050,7 @@
                 <a:ea typeface="Microsoft JhengHei"/>
                 <a:cs typeface="Microsoft JhengHei"/>
               </a:rPr>
-              <a:t>本公司已重新檢視可能造成資安疑慮的因子並加以防範，同時持續加強監控。</a:t>
+              <a:t>(1)強化網站登入驗證、存取控制及異常行為偵測機制。(2)強化網頁應用程式防火牆，降低大量或異常登入嘗試之可行性。(3)…</a:t>
             </a:r>
           </a:p>
         </p:txBody>
@@ -12177,7 +12177,7 @@
                 <a:ea typeface="Microsoft JhengHei"/>
                 <a:cs typeface="Microsoft JhengHei"/>
               </a:rPr>
-              <a:t>長榮航太 </a:t>
+              <a:t>長榮航 </a:t>
             </a:r>
             <a:r>
               <a:rPr sz="1300" b="0">
@@ -12188,7 +12188,7 @@
                 <a:ea typeface="Microsoft JhengHei"/>
                 <a:cs typeface="Microsoft JhengHei"/>
               </a:rPr>
-              <a:t>2645</a:t>
+              <a:t>2618</a:t>
             </a:r>
           </a:p>
         </p:txBody>
@@ -12321,7 +12321,7 @@
                 <a:ea typeface="Microsoft JhengHei"/>
                 <a:cs typeface="Microsoft JhengHei"/>
               </a:rPr>
-              <a:t>本公司發現部分內部資訊系統遭受網路攻擊。</a:t>
+              <a:t>本公司發現有不明人士透過惡意IP入侵本公司內部資訊環境，取得員工姓名與公務聯繫資訊。</a:t>
             </a:r>
           </a:p>
         </p:txBody>
@@ -12373,7 +12373,7 @@
                 <a:ea typeface="Microsoft JhengHei"/>
                 <a:cs typeface="Microsoft JhengHei"/>
               </a:rPr>
-              <a:t>本公司將持續監控公司整體資訊系統運作狀況，並檢討強化現有資安防護措施，以確保資訊安全。</a:t>
+              <a:t>本公司已重新檢視可能造成資安疑慮的因子並加以防範，同時持續加強監控。</a:t>
             </a:r>
           </a:p>
         </p:txBody>
@@ -12439,7 +12439,7 @@
             <a:avLst/>
           </a:prstGeom>
           <a:solidFill>
-            <a:srgbClr val="F4A261"/>
+            <a:srgbClr val="E63946"/>
           </a:solidFill>
           <a:ln>
             <a:noFill/>
@@ -12500,7 +12500,7 @@
                 <a:ea typeface="Microsoft JhengHei"/>
                 <a:cs typeface="Microsoft JhengHei"/>
               </a:rPr>
-              <a:t>崴寶 </a:t>
+              <a:t>長榮航太 </a:t>
             </a:r>
             <a:r>
               <a:rPr sz="1300" b="0">
@@ -12511,7 +12511,7 @@
                 <a:ea typeface="Microsoft JhengHei"/>
                 <a:cs typeface="Microsoft JhengHei"/>
               </a:rPr>
-              <a:t>7744</a:t>
+              <a:t>2645</a:t>
             </a:r>
           </a:p>
         </p:txBody>
@@ -12531,7 +12531,7 @@
             <a:avLst/>
           </a:prstGeom>
           <a:solidFill>
-            <a:srgbClr val="F4A261"/>
+            <a:srgbClr val="E63946"/>
           </a:solidFill>
           <a:ln>
             <a:noFill/>
@@ -12592,7 +12592,7 @@
                 <a:ea typeface="Microsoft JhengHei"/>
                 <a:cs typeface="Microsoft JhengHei"/>
               </a:rPr>
-              <a:t>勒索病毒/加密</a:t>
+              <a:t>駭客攻擊</a:t>
             </a:r>
           </a:p>
         </p:txBody>
@@ -12627,7 +12627,7 @@
             <a:r>
               <a:rPr sz="1100" b="1">
                 <a:solidFill>
-                  <a:srgbClr val="F4A261"/>
+                  <a:srgbClr val="E63946"/>
                 </a:solidFill>
                 <a:latin typeface="Microsoft JhengHei"/>
                 <a:ea typeface="Microsoft JhengHei"/>
@@ -12644,7 +12644,7 @@
                 <a:ea typeface="Microsoft JhengHei"/>
                 <a:cs typeface="Microsoft JhengHei"/>
               </a:rPr>
-              <a:t>本公司於115年9月14日上午發現資訊系統遭駭客入侵，部分系統資料遭加密鎖定。本公司立即啟動資安…</a:t>
+              <a:t>本公司發現部分內部資訊系統遭受網路攻擊。</a:t>
             </a:r>
           </a:p>
         </p:txBody>
@@ -12679,7 +12679,7 @@
             <a:r>
               <a:rPr sz="1100" b="1">
                 <a:solidFill>
-                  <a:srgbClr val="F4A261"/>
+                  <a:srgbClr val="E63946"/>
                 </a:solidFill>
                 <a:latin typeface="Microsoft JhengHei"/>
                 <a:ea typeface="Microsoft JhengHei"/>
@@ -12696,7 +12696,7 @@
                 <a:ea typeface="Microsoft JhengHei"/>
                 <a:cs typeface="Microsoft JhengHei"/>
               </a:rPr>
-              <a:t>本公司將持續配合專業資安團隊進行事件調查與監控，並加強資訊安全管理措施，包括提升端點防護機制、強化網路監控能力、落實帳號…</a:t>
+              <a:t>本公司將持續監控公司整體資訊系統運作狀況，並檢討強化現有資安防護措施，以確保資訊安全。</a:t>
             </a:r>
           </a:p>
         </p:txBody>
@@ -12898,7 +12898,7 @@
             <a:avLst/>
           </a:prstGeom>
           <a:solidFill>
-            <a:srgbClr val="E63946"/>
+            <a:srgbClr val="F4A261"/>
           </a:solidFill>
           <a:ln>
             <a:noFill/>
@@ -12959,7 +12959,7 @@
                 <a:ea typeface="Microsoft JhengHei"/>
                 <a:cs typeface="Microsoft JhengHei"/>
               </a:rPr>
-              <a:t>達爾膚 </a:t>
+              <a:t>崴寶 </a:t>
             </a:r>
             <a:r>
               <a:rPr sz="1300" b="0">
@@ -12970,7 +12970,7 @@
                 <a:ea typeface="Microsoft JhengHei"/>
                 <a:cs typeface="Microsoft JhengHei"/>
               </a:rPr>
-              <a:t>6523</a:t>
+              <a:t>7744</a:t>
             </a:r>
           </a:p>
         </p:txBody>
@@ -12990,7 +12990,7 @@
             <a:avLst/>
           </a:prstGeom>
           <a:solidFill>
-            <a:srgbClr val="E63946"/>
+            <a:srgbClr val="F4A261"/>
           </a:solidFill>
           <a:ln>
             <a:noFill/>
@@ -13051,7 +13051,7 @@
                 <a:ea typeface="Microsoft JhengHei"/>
                 <a:cs typeface="Microsoft JhengHei"/>
               </a:rPr>
-              <a:t>駭客攻擊</a:t>
+              <a:t>勒索病毒/加密</a:t>
             </a:r>
           </a:p>
         </p:txBody>
@@ -13086,7 +13086,7 @@
             <a:r>
               <a:rPr sz="1100" b="1">
                 <a:solidFill>
-                  <a:srgbClr val="E63946"/>
+                  <a:srgbClr val="F4A261"/>
                 </a:solidFill>
                 <a:latin typeface="Microsoft JhengHei"/>
                 <a:ea typeface="Microsoft JhengHei"/>
@@ -13103,7 +13103,7 @@
                 <a:ea typeface="Microsoft JhengHei"/>
                 <a:cs typeface="Microsoft JhengHei"/>
               </a:rPr>
-              <a:t>本公司部分內部資訊系統遭受網路攻擊事件，初步評估對公司營運無重大影響。</a:t>
+              <a:t>本公司於115年9月14日上午發現資訊系統遭駭客入侵，部分系統資料遭加密鎖定。本公司立即啟動資安…</a:t>
             </a:r>
           </a:p>
         </p:txBody>
@@ -13138,7 +13138,7 @@
             <a:r>
               <a:rPr sz="1100" b="1">
                 <a:solidFill>
-                  <a:srgbClr val="E63946"/>
+                  <a:srgbClr val="F4A261"/>
                 </a:solidFill>
                 <a:latin typeface="Microsoft JhengHei"/>
                 <a:ea typeface="Microsoft JhengHei"/>
@@ -13155,7 +13155,7 @@
                 <a:ea typeface="Microsoft JhengHei"/>
                 <a:cs typeface="Microsoft JhengHei"/>
               </a:rPr>
-              <a:t>本公司將持續強化網路與資訊基礎架構之安全管控，以確保資訊安全。</a:t>
+              <a:t>本公司將持續配合專業資安團隊進行事件調查與監控，並加強資訊安全管理措施，包括提升端點防護機制、強化網路監控能力、落實帳號…</a:t>
             </a:r>
           </a:p>
         </p:txBody>
@@ -13282,7 +13282,7 @@
                 <a:ea typeface="Microsoft JhengHei"/>
                 <a:cs typeface="Microsoft JhengHei"/>
               </a:rPr>
-              <a:t>大車隊 </a:t>
+              <a:t>達爾膚 </a:t>
             </a:r>
             <a:r>
               <a:rPr sz="1300" b="0">
@@ -13293,7 +13293,7 @@
                 <a:ea typeface="Microsoft JhengHei"/>
                 <a:cs typeface="Microsoft JhengHei"/>
               </a:rPr>
-              <a:t>2640</a:t>
+              <a:t>6523</a:t>
             </a:r>
           </a:p>
         </p:txBody>
@@ -13426,7 +13426,7 @@
                 <a:ea typeface="Microsoft JhengHei"/>
                 <a:cs typeface="Microsoft JhengHei"/>
               </a:rPr>
-              <a:t>本公司重要子公司全球商務科技股份有限公司於今日發現部分資訊系統遭受網路攻擊，已立即啟動資安應變機…</a:t>
+              <a:t>本公司部分內部資訊系統遭受網路攻擊事件，初步評估對公司營運無重大影響。</a:t>
             </a:r>
           </a:p>
         </p:txBody>
@@ -13478,7 +13478,7 @@
                 <a:ea typeface="Microsoft JhengHei"/>
                 <a:cs typeface="Microsoft JhengHei"/>
               </a:rPr>
-              <a:t>公司將持續進行資安鑑識、系統安全強化及相關風險控管作業，受影響系統預期可於短期內逐步恢復正常運作；後續如調查結果或事件發…</a:t>
+              <a:t>本公司將持續強化網路與資訊基礎架構之安全管控，以確保資訊安全。</a:t>
             </a:r>
           </a:p>
         </p:txBody>
@@ -13544,7 +13544,7 @@
             <a:avLst/>
           </a:prstGeom>
           <a:solidFill>
-            <a:srgbClr val="F4A261"/>
+            <a:srgbClr val="E63946"/>
           </a:solidFill>
           <a:ln>
             <a:noFill/>
@@ -13605,7 +13605,7 @@
                 <a:ea typeface="Microsoft JhengHei"/>
                 <a:cs typeface="Microsoft JhengHei"/>
               </a:rPr>
-              <a:t>富爾特 </a:t>
+              <a:t>大車隊 </a:t>
             </a:r>
             <a:r>
               <a:rPr sz="1300" b="0">
@@ -13616,7 +13616,7 @@
                 <a:ea typeface="Microsoft JhengHei"/>
                 <a:cs typeface="Microsoft JhengHei"/>
               </a:rPr>
-              <a:t>6136</a:t>
+              <a:t>2640</a:t>
             </a:r>
           </a:p>
         </p:txBody>
@@ -13636,7 +13636,7 @@
             <a:avLst/>
           </a:prstGeom>
           <a:solidFill>
-            <a:srgbClr val="F4A261"/>
+            <a:srgbClr val="E63946"/>
           </a:solidFill>
           <a:ln>
             <a:noFill/>
@@ -13697,7 +13697,7 @@
                 <a:ea typeface="Microsoft JhengHei"/>
                 <a:cs typeface="Microsoft JhengHei"/>
               </a:rPr>
-              <a:t>勒索病毒/加密</a:t>
+              <a:t>駭客攻擊</a:t>
             </a:r>
           </a:p>
         </p:txBody>
@@ -13732,7 +13732,7 @@
             <a:r>
               <a:rPr sz="1100" b="1">
                 <a:solidFill>
-                  <a:srgbClr val="F4A261"/>
+                  <a:srgbClr val="E63946"/>
                 </a:solidFill>
                 <a:latin typeface="Microsoft JhengHei"/>
                 <a:ea typeface="Microsoft JhengHei"/>
@@ -13749,7 +13749,7 @@
                 <a:ea typeface="Microsoft JhengHei"/>
                 <a:cs typeface="Microsoft JhengHei"/>
               </a:rPr>
-              <a:t>本公司之子公司格帝控股股份有限公司偵測到部份伺服器遭受網路勒索病毒攻擊，致使包含ERP在內之部份…</a:t>
+              <a:t>本公司重要子公司全球商務科技股份有限公司於今日發現部分資訊系統遭受網路攻擊，已立即啟動資安應變機…</a:t>
             </a:r>
           </a:p>
         </p:txBody>
@@ -13784,7 +13784,7 @@
             <a:r>
               <a:rPr sz="1100" b="1">
                 <a:solidFill>
-                  <a:srgbClr val="F4A261"/>
+                  <a:srgbClr val="E63946"/>
                 </a:solidFill>
                 <a:latin typeface="Microsoft JhengHei"/>
                 <a:ea typeface="Microsoft JhengHei"/>
@@ -13801,7 +13801,7 @@
                 <a:ea typeface="Microsoft JhengHei"/>
                 <a:cs typeface="Microsoft JhengHei"/>
               </a:rPr>
-              <a:t>本公司及所屬子公司將持續密集監控，並強化網路與資訊基礎架構之管控，以確保資訊系統安全。</a:t>
+              <a:t>公司將持續進行資安鑑識、系統安全強化及相關風險控管作業，受影響系統預期可於短期內逐步恢復正常運作；後續如調查結果或事件發…</a:t>
             </a:r>
           </a:p>
         </p:txBody>
@@ -13928,7 +13928,7 @@
                 <a:ea typeface="Microsoft JhengHei"/>
                 <a:cs typeface="Microsoft JhengHei"/>
               </a:rPr>
-              <a:t>創新服務 </a:t>
+              <a:t>富爾特 </a:t>
             </a:r>
             <a:r>
               <a:rPr sz="1300" b="0">
@@ -13939,7 +13939,7 @@
                 <a:ea typeface="Microsoft JhengHei"/>
                 <a:cs typeface="Microsoft JhengHei"/>
               </a:rPr>
-              <a:t>7828</a:t>
+              <a:t>6136</a:t>
             </a:r>
           </a:p>
         </p:txBody>
@@ -14072,7 +14072,7 @@
                 <a:ea typeface="Microsoft JhengHei"/>
                 <a:cs typeface="Microsoft JhengHei"/>
               </a:rPr>
-              <a:t>本公司於今日偵測到部份伺服器遭受網路勒索病毒攻擊，致使包含ERP在內之部份資訊系統無法正常運作。</a:t>
+              <a:t>本公司之子公司格帝控股股份有限公司偵測到部份伺服器遭受網路勒索病毒攻擊，致使包含ERP在內之部份…</a:t>
             </a:r>
           </a:p>
         </p:txBody>
@@ -14124,7 +14124,7 @@
                 <a:ea typeface="Microsoft JhengHei"/>
                 <a:cs typeface="Microsoft JhengHei"/>
               </a:rPr>
-              <a:t>本公司將持續密集監控，並強化網路與資訊基礎架構之管控，以確保資訊系統安全。</a:t>
+              <a:t>本公司及所屬子公司將持續密集監控，並強化網路與資訊基礎架構之管控，以確保資訊系統安全。</a:t>
             </a:r>
           </a:p>
         </p:txBody>

--- a/資安事件因應分析.pptx
+++ b/資安事件因應分析.pptx
@@ -13,6 +13,7 @@
     <p:sldId id="261" r:id="rId12"/>
     <p:sldId id="262" r:id="rId13"/>
     <p:sldId id="263" r:id="rId14"/>
+    <p:sldId id="264" r:id="rId15"/>
   </p:sldIdLst>
   <p:sldSz cx="12191695" cy="6858000" type="screen4x3"/>
   <p:notesSz cx="6858000" cy="9144000"/>
@@ -200,13 +201,13 @@
                   <c:v>6</c:v>
                 </c:pt>
                 <c:pt idx="1">
-                  <c:v>2</c:v>
+                  <c:v>1</c:v>
                 </c:pt>
                 <c:pt idx="2">
-                  <c:v>2</c:v>
+                  <c:v>4</c:v>
                 </c:pt>
                 <c:pt idx="3">
-                  <c:v>2</c:v>
+                  <c:v>3</c:v>
                 </c:pt>
               </c:numCache>
             </c:numRef>
@@ -3543,7 +3544,7 @@
                 <a:ea typeface="Microsoft JhengHei"/>
                 <a:cs typeface="Microsoft JhengHei"/>
               </a:rPr>
-              <a:t>資料期間 2026-09-07 ~ 2026-10-07　｜　MOPS 重大訊息全文檢索　｜　12 家公司</a:t>
+              <a:t>資料期間 2026-09-08 ~ 2026-10-08　｜　MOPS 重大訊息全文檢索　｜　14 家公司</a:t>
             </a:r>
           </a:p>
         </p:txBody>
@@ -3760,7 +3761,7 @@
                 <a:ea typeface="Microsoft JhengHei"/>
                 <a:cs typeface="Microsoft JhengHei"/>
               </a:rPr>
-              <a:t>資料期間內 MOPS 揭露之 12 起資安相關重大訊息</a:t>
+              <a:t>資料期間內 MOPS 揭露之 14 起資安相關重大訊息</a:t>
             </a:r>
           </a:p>
         </p:txBody>
@@ -3843,7 +3844,7 @@
                 <a:ea typeface="Microsoft JhengHei"/>
                 <a:cs typeface="Microsoft JhengHei"/>
               </a:rPr>
-              <a:t>12</a:t>
+              <a:t>14</a:t>
             </a:r>
           </a:p>
         </p:txBody>
@@ -4150,7 +4151,7 @@
                 <a:gridCol w="2286000"/>
                 <a:gridCol w="5120640"/>
               </a:tblGrid>
-              <a:tr h="274320">
+              <a:tr h="237744">
                 <a:tc>
                   <a:txBody>
                     <a:bodyPr/>
@@ -4272,7 +4273,7 @@
                   </a:tcPr>
                 </a:tc>
               </a:tr>
-              <a:tr h="274320">
+              <a:tr h="237744">
                 <a:tc>
                   <a:txBody>
                     <a:bodyPr/>
@@ -4287,7 +4288,7 @@
                           <a:ea typeface="Microsoft JhengHei"/>
                           <a:cs typeface="Microsoft JhengHei"/>
                         </a:rPr>
-                        <a:t>一零四</a:t>
+                        <a:t>上福</a:t>
                       </a:r>
                     </a:p>
                   </a:txBody>
@@ -4311,7 +4312,7 @@
                           <a:ea typeface="Microsoft JhengHei"/>
                           <a:cs typeface="Microsoft JhengHei"/>
                         </a:rPr>
-                        <a:t>3130</a:t>
+                        <a:t>6128</a:t>
                       </a:r>
                     </a:p>
                   </a:txBody>
@@ -4335,7 +4336,7 @@
                           <a:ea typeface="Microsoft JhengHei"/>
                           <a:cs typeface="Microsoft JhengHei"/>
                         </a:rPr>
-                        <a:t>10/06</a:t>
+                        <a:t>10/07</a:t>
                       </a:r>
                     </a:p>
                   </a:txBody>
@@ -4383,7 +4384,7 @@
                           <a:ea typeface="Microsoft JhengHei"/>
                           <a:cs typeface="Microsoft JhengHei"/>
                         </a:rPr>
-                        <a:t>目前系統與營運正常運作，對公司尚無重大影響。相關影響仍持續評估中。</a:t>
+                        <a:t>目前評估沒有個資、亦沒有機密或重要文件資料外洩等情事發生，對本公司營…</a:t>
                       </a:r>
                     </a:p>
                   </a:txBody>
@@ -4394,7 +4395,7 @@
                   </a:tcPr>
                 </a:tc>
               </a:tr>
-              <a:tr h="274320">
+              <a:tr h="237744">
                 <a:tc>
                   <a:txBody>
                     <a:bodyPr/>
@@ -4409,7 +4410,7 @@
                           <a:ea typeface="Microsoft JhengHei"/>
                           <a:cs typeface="Microsoft JhengHei"/>
                         </a:rPr>
-                        <a:t>安心</a:t>
+                        <a:t>杏一</a:t>
                       </a:r>
                     </a:p>
                   </a:txBody>
@@ -4433,7 +4434,7 @@
                           <a:ea typeface="Microsoft JhengHei"/>
                           <a:cs typeface="Microsoft JhengHei"/>
                         </a:rPr>
-                        <a:t>1259</a:t>
+                        <a:t>4175</a:t>
                       </a:r>
                     </a:p>
                   </a:txBody>
@@ -4457,7 +4458,7 @@
                           <a:ea typeface="Microsoft JhengHei"/>
                           <a:cs typeface="Microsoft JhengHei"/>
                         </a:rPr>
-                        <a:t>10/01</a:t>
+                        <a:t>10/07</a:t>
                       </a:r>
                     </a:p>
                   </a:txBody>
@@ -4516,7 +4517,7 @@
                   </a:tcPr>
                 </a:tc>
               </a:tr>
-              <a:tr h="274320">
+              <a:tr h="237744">
                 <a:tc>
                   <a:txBody>
                     <a:bodyPr/>
@@ -4531,7 +4532,7 @@
                           <a:ea typeface="Microsoft JhengHei"/>
                           <a:cs typeface="Microsoft JhengHei"/>
                         </a:rPr>
-                        <a:t>神腦</a:t>
+                        <a:t>鈊象</a:t>
                       </a:r>
                     </a:p>
                   </a:txBody>
@@ -4555,7 +4556,7 @@
                           <a:ea typeface="Microsoft JhengHei"/>
                           <a:cs typeface="Microsoft JhengHei"/>
                         </a:rPr>
-                        <a:t>2450</a:t>
+                        <a:t>3293</a:t>
                       </a:r>
                     </a:p>
                   </a:txBody>
@@ -4579,251 +4580,7 @@
                           <a:ea typeface="Microsoft JhengHei"/>
                           <a:cs typeface="Microsoft JhengHei"/>
                         </a:rPr>
-                        <a:t>09/29</a:t>
-                      </a:r>
-                    </a:p>
-                  </a:txBody>
-                  <a:tcPr anchor="ctr" marL="73152" marT="9144" marB="9144">
-                    <a:solidFill>
-                      <a:srgbClr val="FFFFFF"/>
-                    </a:solidFill>
-                  </a:tcPr>
-                </a:tc>
-                <a:tc>
-                  <a:txBody>
-                    <a:bodyPr/>
-                    <a:lstStyle/>
-                    <a:p>
-                      <a:r>
-                        <a:rPr sz="1150" b="1">
-                          <a:solidFill>
-                            <a:srgbClr val="E63946"/>
-                          </a:solidFill>
-                          <a:latin typeface="Microsoft JhengHei"/>
-                          <a:ea typeface="Microsoft JhengHei"/>
-                          <a:cs typeface="Microsoft JhengHei"/>
-                        </a:rPr>
-                        <a:t>駭客攻擊</a:t>
-                      </a:r>
-                    </a:p>
-                  </a:txBody>
-                  <a:tcPr anchor="ctr" marL="73152" marT="9144" marB="9144">
-                    <a:solidFill>
-                      <a:srgbClr val="FFFFFF"/>
-                    </a:solidFill>
-                  </a:tcPr>
-                </a:tc>
-                <a:tc>
-                  <a:txBody>
-                    <a:bodyPr/>
-                    <a:lstStyle/>
-                    <a:p>
-                      <a:r>
-                        <a:rPr sz="1150" b="0">
-                          <a:solidFill>
-                            <a:srgbClr val="1A2233"/>
-                          </a:solidFill>
-                          <a:latin typeface="Microsoft JhengHei"/>
-                          <a:ea typeface="Microsoft JhengHei"/>
-                          <a:cs typeface="Microsoft JhengHei"/>
-                        </a:rPr>
-                        <a:t>評估對本公司營運、財務及服務提供無重大影響。</a:t>
-                      </a:r>
-                    </a:p>
-                  </a:txBody>
-                  <a:tcPr anchor="ctr" marL="73152" marT="9144" marB="9144">
-                    <a:solidFill>
-                      <a:srgbClr val="FFFFFF"/>
-                    </a:solidFill>
-                  </a:tcPr>
-                </a:tc>
-              </a:tr>
-              <a:tr h="274320">
-                <a:tc>
-                  <a:txBody>
-                    <a:bodyPr/>
-                    <a:lstStyle/>
-                    <a:p>
-                      <a:r>
-                        <a:rPr sz="1150" b="0">
-                          <a:solidFill>
-                            <a:srgbClr val="1A2233"/>
-                          </a:solidFill>
-                          <a:latin typeface="Microsoft JhengHei"/>
-                          <a:ea typeface="Microsoft JhengHei"/>
-                          <a:cs typeface="Microsoft JhengHei"/>
-                        </a:rPr>
-                        <a:t>鈊象</a:t>
-                      </a:r>
-                    </a:p>
-                  </a:txBody>
-                  <a:tcPr anchor="ctr" marL="73152" marT="9144" marB="9144">
-                    <a:solidFill>
-                      <a:srgbClr val="EEF2F9"/>
-                    </a:solidFill>
-                  </a:tcPr>
-                </a:tc>
-                <a:tc>
-                  <a:txBody>
-                    <a:bodyPr/>
-                    <a:lstStyle/>
-                    <a:p>
-                      <a:r>
-                        <a:rPr sz="1150" b="0">
-                          <a:solidFill>
-                            <a:srgbClr val="1A2233"/>
-                          </a:solidFill>
-                          <a:latin typeface="Microsoft JhengHei"/>
-                          <a:ea typeface="Microsoft JhengHei"/>
-                          <a:cs typeface="Microsoft JhengHei"/>
-                        </a:rPr>
-                        <a:t>3293</a:t>
-                      </a:r>
-                    </a:p>
-                  </a:txBody>
-                  <a:tcPr anchor="ctr" marL="73152" marT="9144" marB="9144">
-                    <a:solidFill>
-                      <a:srgbClr val="EEF2F9"/>
-                    </a:solidFill>
-                  </a:tcPr>
-                </a:tc>
-                <a:tc>
-                  <a:txBody>
-                    <a:bodyPr/>
-                    <a:lstStyle/>
-                    <a:p>
-                      <a:r>
-                        <a:rPr sz="1150" b="0">
-                          <a:solidFill>
-                            <a:srgbClr val="1A2233"/>
-                          </a:solidFill>
-                          <a:latin typeface="Microsoft JhengHei"/>
-                          <a:ea typeface="Microsoft JhengHei"/>
-                          <a:cs typeface="Microsoft JhengHei"/>
-                        </a:rPr>
-                        <a:t>09/29</a:t>
-                      </a:r>
-                    </a:p>
-                  </a:txBody>
-                  <a:tcPr anchor="ctr" marL="73152" marT="9144" marB="9144">
-                    <a:solidFill>
-                      <a:srgbClr val="EEF2F9"/>
-                    </a:solidFill>
-                  </a:tcPr>
-                </a:tc>
-                <a:tc>
-                  <a:txBody>
-                    <a:bodyPr/>
-                    <a:lstStyle/>
-                    <a:p>
-                      <a:r>
-                        <a:rPr sz="1150" b="1">
-                          <a:solidFill>
-                            <a:srgbClr val="5C6679"/>
-                          </a:solidFill>
-                          <a:latin typeface="Microsoft JhengHei"/>
-                          <a:ea typeface="Microsoft JhengHei"/>
-                          <a:cs typeface="Microsoft JhengHei"/>
-                        </a:rPr>
-                        <a:t>其他</a:t>
-                      </a:r>
-                    </a:p>
-                  </a:txBody>
-                  <a:tcPr anchor="ctr" marL="73152" marT="9144" marB="9144">
-                    <a:solidFill>
-                      <a:srgbClr val="EEF2F9"/>
-                    </a:solidFill>
-                  </a:tcPr>
-                </a:tc>
-                <a:tc>
-                  <a:txBody>
-                    <a:bodyPr/>
-                    <a:lstStyle/>
-                    <a:p>
-                      <a:r>
-                        <a:rPr sz="1150" b="0">
-                          <a:solidFill>
-                            <a:srgbClr val="1A2233"/>
-                          </a:solidFill>
-                          <a:latin typeface="Microsoft JhengHei"/>
-                          <a:ea typeface="Microsoft JhengHei"/>
-                          <a:cs typeface="Microsoft JhengHei"/>
-                        </a:rPr>
-                        <a:t>目前評估對公司營運尚無重大影響。</a:t>
-                      </a:r>
-                    </a:p>
-                  </a:txBody>
-                  <a:tcPr anchor="ctr" marL="73152" marT="9144" marB="9144">
-                    <a:solidFill>
-                      <a:srgbClr val="EEF2F9"/>
-                    </a:solidFill>
-                  </a:tcPr>
-                </a:tc>
-              </a:tr>
-              <a:tr h="274320">
-                <a:tc>
-                  <a:txBody>
-                    <a:bodyPr/>
-                    <a:lstStyle/>
-                    <a:p>
-                      <a:r>
-                        <a:rPr sz="1150" b="0">
-                          <a:solidFill>
-                            <a:srgbClr val="1A2233"/>
-                          </a:solidFill>
-                          <a:latin typeface="Microsoft JhengHei"/>
-                          <a:ea typeface="Microsoft JhengHei"/>
-                          <a:cs typeface="Microsoft JhengHei"/>
-                        </a:rPr>
-                        <a:t>柏文</a:t>
-                      </a:r>
-                    </a:p>
-                  </a:txBody>
-                  <a:tcPr anchor="ctr" marL="73152" marT="9144" marB="9144">
-                    <a:solidFill>
-                      <a:srgbClr val="FFFFFF"/>
-                    </a:solidFill>
-                  </a:tcPr>
-                </a:tc>
-                <a:tc>
-                  <a:txBody>
-                    <a:bodyPr/>
-                    <a:lstStyle/>
-                    <a:p>
-                      <a:r>
-                        <a:rPr sz="1150" b="0">
-                          <a:solidFill>
-                            <a:srgbClr val="1A2233"/>
-                          </a:solidFill>
-                          <a:latin typeface="Microsoft JhengHei"/>
-                          <a:ea typeface="Microsoft JhengHei"/>
-                          <a:cs typeface="Microsoft JhengHei"/>
-                        </a:rPr>
-                        <a:t>8462</a:t>
-                      </a:r>
-                    </a:p>
-                  </a:txBody>
-                  <a:tcPr anchor="ctr" marL="73152" marT="9144" marB="9144">
-                    <a:solidFill>
-                      <a:srgbClr val="FFFFFF"/>
-                    </a:solidFill>
-                  </a:tcPr>
-                </a:tc>
-                <a:tc>
-                  <a:txBody>
-                    <a:bodyPr/>
-                    <a:lstStyle/>
-                    <a:p>
-                      <a:r>
-                        <a:rPr sz="1150" b="0">
-                          <a:solidFill>
-                            <a:srgbClr val="1A2233"/>
-                          </a:solidFill>
-                          <a:latin typeface="Microsoft JhengHei"/>
-                          <a:ea typeface="Microsoft JhengHei"/>
-                          <a:cs typeface="Microsoft JhengHei"/>
-                        </a:rPr>
-                        <a:t>09/23</a:t>
+                        <a:t>10/07</a:t>
                       </a:r>
                     </a:p>
                   </a:txBody>
@@ -4882,7 +4639,7 @@
                   </a:tcPr>
                 </a:tc>
               </a:tr>
-              <a:tr h="274320">
+              <a:tr h="237744">
                 <a:tc>
                   <a:txBody>
                     <a:bodyPr/>
@@ -4897,7 +4654,7 @@
                           <a:ea typeface="Microsoft JhengHei"/>
                           <a:cs typeface="Microsoft JhengHei"/>
                         </a:rPr>
-                        <a:t>友訊</a:t>
+                        <a:t>一零四</a:t>
                       </a:r>
                     </a:p>
                   </a:txBody>
@@ -4921,7 +4678,7 @@
                           <a:ea typeface="Microsoft JhengHei"/>
                           <a:cs typeface="Microsoft JhengHei"/>
                         </a:rPr>
-                        <a:t>2332</a:t>
+                        <a:t>3130</a:t>
                       </a:r>
                     </a:p>
                   </a:txBody>
@@ -4945,7 +4702,251 @@
                           <a:ea typeface="Microsoft JhengHei"/>
                           <a:cs typeface="Microsoft JhengHei"/>
                         </a:rPr>
-                        <a:t>09/18</a:t>
+                        <a:t>10/06</a:t>
+                      </a:r>
+                    </a:p>
+                  </a:txBody>
+                  <a:tcPr anchor="ctr" marL="73152" marT="9144" marB="9144">
+                    <a:solidFill>
+                      <a:srgbClr val="EEF2F9"/>
+                    </a:solidFill>
+                  </a:tcPr>
+                </a:tc>
+                <a:tc>
+                  <a:txBody>
+                    <a:bodyPr/>
+                    <a:lstStyle/>
+                    <a:p>
+                      <a:r>
+                        <a:rPr sz="1150" b="1">
+                          <a:solidFill>
+                            <a:srgbClr val="5C6679"/>
+                          </a:solidFill>
+                          <a:latin typeface="Microsoft JhengHei"/>
+                          <a:ea typeface="Microsoft JhengHei"/>
+                          <a:cs typeface="Microsoft JhengHei"/>
+                        </a:rPr>
+                        <a:t>其他</a:t>
+                      </a:r>
+                    </a:p>
+                  </a:txBody>
+                  <a:tcPr anchor="ctr" marL="73152" marT="9144" marB="9144">
+                    <a:solidFill>
+                      <a:srgbClr val="EEF2F9"/>
+                    </a:solidFill>
+                  </a:tcPr>
+                </a:tc>
+                <a:tc>
+                  <a:txBody>
+                    <a:bodyPr/>
+                    <a:lstStyle/>
+                    <a:p>
+                      <a:r>
+                        <a:rPr sz="1150" b="0">
+                          <a:solidFill>
+                            <a:srgbClr val="1A2233"/>
+                          </a:solidFill>
+                          <a:latin typeface="Microsoft JhengHei"/>
+                          <a:ea typeface="Microsoft JhengHei"/>
+                          <a:cs typeface="Microsoft JhengHei"/>
+                        </a:rPr>
+                        <a:t>目前系統與營運正常運作，對公司尚無重大影響。相關影響仍持續評估中。</a:t>
+                      </a:r>
+                    </a:p>
+                  </a:txBody>
+                  <a:tcPr anchor="ctr" marL="73152" marT="9144" marB="9144">
+                    <a:solidFill>
+                      <a:srgbClr val="EEF2F9"/>
+                    </a:solidFill>
+                  </a:tcPr>
+                </a:tc>
+              </a:tr>
+              <a:tr h="237744">
+                <a:tc>
+                  <a:txBody>
+                    <a:bodyPr/>
+                    <a:lstStyle/>
+                    <a:p>
+                      <a:r>
+                        <a:rPr sz="1150" b="0">
+                          <a:solidFill>
+                            <a:srgbClr val="1A2233"/>
+                          </a:solidFill>
+                          <a:latin typeface="Microsoft JhengHei"/>
+                          <a:ea typeface="Microsoft JhengHei"/>
+                          <a:cs typeface="Microsoft JhengHei"/>
+                        </a:rPr>
+                        <a:t>安心</a:t>
+                      </a:r>
+                    </a:p>
+                  </a:txBody>
+                  <a:tcPr anchor="ctr" marL="73152" marT="9144" marB="9144">
+                    <a:solidFill>
+                      <a:srgbClr val="FFFFFF"/>
+                    </a:solidFill>
+                  </a:tcPr>
+                </a:tc>
+                <a:tc>
+                  <a:txBody>
+                    <a:bodyPr/>
+                    <a:lstStyle/>
+                    <a:p>
+                      <a:r>
+                        <a:rPr sz="1150" b="0">
+                          <a:solidFill>
+                            <a:srgbClr val="1A2233"/>
+                          </a:solidFill>
+                          <a:latin typeface="Microsoft JhengHei"/>
+                          <a:ea typeface="Microsoft JhengHei"/>
+                          <a:cs typeface="Microsoft JhengHei"/>
+                        </a:rPr>
+                        <a:t>1259</a:t>
+                      </a:r>
+                    </a:p>
+                  </a:txBody>
+                  <a:tcPr anchor="ctr" marL="73152" marT="9144" marB="9144">
+                    <a:solidFill>
+                      <a:srgbClr val="FFFFFF"/>
+                    </a:solidFill>
+                  </a:tcPr>
+                </a:tc>
+                <a:tc>
+                  <a:txBody>
+                    <a:bodyPr/>
+                    <a:lstStyle/>
+                    <a:p>
+                      <a:r>
+                        <a:rPr sz="1150" b="0">
+                          <a:solidFill>
+                            <a:srgbClr val="1A2233"/>
+                          </a:solidFill>
+                          <a:latin typeface="Microsoft JhengHei"/>
+                          <a:ea typeface="Microsoft JhengHei"/>
+                          <a:cs typeface="Microsoft JhengHei"/>
+                        </a:rPr>
+                        <a:t>10/01</a:t>
+                      </a:r>
+                    </a:p>
+                  </a:txBody>
+                  <a:tcPr anchor="ctr" marL="73152" marT="9144" marB="9144">
+                    <a:solidFill>
+                      <a:srgbClr val="FFFFFF"/>
+                    </a:solidFill>
+                  </a:tcPr>
+                </a:tc>
+                <a:tc>
+                  <a:txBody>
+                    <a:bodyPr/>
+                    <a:lstStyle/>
+                    <a:p>
+                      <a:r>
+                        <a:rPr sz="1150" b="1">
+                          <a:solidFill>
+                            <a:srgbClr val="27A6C4"/>
+                          </a:solidFill>
+                          <a:latin typeface="Microsoft JhengHei"/>
+                          <a:ea typeface="Microsoft JhengHei"/>
+                          <a:cs typeface="Microsoft JhengHei"/>
+                        </a:rPr>
+                        <a:t>個資外洩</a:t>
+                      </a:r>
+                    </a:p>
+                  </a:txBody>
+                  <a:tcPr anchor="ctr" marL="73152" marT="9144" marB="9144">
+                    <a:solidFill>
+                      <a:srgbClr val="FFFFFF"/>
+                    </a:solidFill>
+                  </a:tcPr>
+                </a:tc>
+                <a:tc>
+                  <a:txBody>
+                    <a:bodyPr/>
+                    <a:lstStyle/>
+                    <a:p>
+                      <a:r>
+                        <a:rPr sz="1150" b="0">
+                          <a:solidFill>
+                            <a:srgbClr val="1A2233"/>
+                          </a:solidFill>
+                          <a:latin typeface="Microsoft JhengHei"/>
+                          <a:ea typeface="Microsoft JhengHei"/>
+                          <a:cs typeface="Microsoft JhengHei"/>
+                        </a:rPr>
+                        <a:t>截至目前為止對公司財務及業務並無重大影響。</a:t>
+                      </a:r>
+                    </a:p>
+                  </a:txBody>
+                  <a:tcPr anchor="ctr" marL="73152" marT="9144" marB="9144">
+                    <a:solidFill>
+                      <a:srgbClr val="FFFFFF"/>
+                    </a:solidFill>
+                  </a:tcPr>
+                </a:tc>
+              </a:tr>
+              <a:tr h="237744">
+                <a:tc>
+                  <a:txBody>
+                    <a:bodyPr/>
+                    <a:lstStyle/>
+                    <a:p>
+                      <a:r>
+                        <a:rPr sz="1150" b="0">
+                          <a:solidFill>
+                            <a:srgbClr val="1A2233"/>
+                          </a:solidFill>
+                          <a:latin typeface="Microsoft JhengHei"/>
+                          <a:ea typeface="Microsoft JhengHei"/>
+                          <a:cs typeface="Microsoft JhengHei"/>
+                        </a:rPr>
+                        <a:t>神腦</a:t>
+                      </a:r>
+                    </a:p>
+                  </a:txBody>
+                  <a:tcPr anchor="ctr" marL="73152" marT="9144" marB="9144">
+                    <a:solidFill>
+                      <a:srgbClr val="EEF2F9"/>
+                    </a:solidFill>
+                  </a:tcPr>
+                </a:tc>
+                <a:tc>
+                  <a:txBody>
+                    <a:bodyPr/>
+                    <a:lstStyle/>
+                    <a:p>
+                      <a:r>
+                        <a:rPr sz="1150" b="0">
+                          <a:solidFill>
+                            <a:srgbClr val="1A2233"/>
+                          </a:solidFill>
+                          <a:latin typeface="Microsoft JhengHei"/>
+                          <a:ea typeface="Microsoft JhengHei"/>
+                          <a:cs typeface="Microsoft JhengHei"/>
+                        </a:rPr>
+                        <a:t>2450</a:t>
+                      </a:r>
+                    </a:p>
+                  </a:txBody>
+                  <a:tcPr anchor="ctr" marL="73152" marT="9144" marB="9144">
+                    <a:solidFill>
+                      <a:srgbClr val="EEF2F9"/>
+                    </a:solidFill>
+                  </a:tcPr>
+                </a:tc>
+                <a:tc>
+                  <a:txBody>
+                    <a:bodyPr/>
+                    <a:lstStyle/>
+                    <a:p>
+                      <a:r>
+                        <a:rPr sz="1150" b="0">
+                          <a:solidFill>
+                            <a:srgbClr val="1A2233"/>
+                          </a:solidFill>
+                          <a:latin typeface="Microsoft JhengHei"/>
+                          <a:ea typeface="Microsoft JhengHei"/>
+                          <a:cs typeface="Microsoft JhengHei"/>
+                        </a:rPr>
+                        <a:t>09/29</a:t>
                       </a:r>
                     </a:p>
                   </a:txBody>
@@ -4993,7 +4994,7 @@
                           <a:ea typeface="Microsoft JhengHei"/>
                           <a:cs typeface="Microsoft JhengHei"/>
                         </a:rPr>
-                        <a:t>目前評估對公司營運尚無重大影響</a:t>
+                        <a:t>評估對本公司營運、財務及服務提供無重大影響。</a:t>
                       </a:r>
                     </a:p>
                   </a:txBody>
@@ -5004,7 +5005,7 @@
                   </a:tcPr>
                 </a:tc>
               </a:tr>
-              <a:tr h="274320">
+              <a:tr h="237744">
                 <a:tc>
                   <a:txBody>
                     <a:bodyPr/>
@@ -5019,7 +5020,7 @@
                           <a:ea typeface="Microsoft JhengHei"/>
                           <a:cs typeface="Microsoft JhengHei"/>
                         </a:rPr>
-                        <a:t>長榮航</a:t>
+                        <a:t>鈊象</a:t>
                       </a:r>
                     </a:p>
                   </a:txBody>
@@ -5043,7 +5044,495 @@
                           <a:ea typeface="Microsoft JhengHei"/>
                           <a:cs typeface="Microsoft JhengHei"/>
                         </a:rPr>
+                        <a:t>3293</a:t>
+                      </a:r>
+                    </a:p>
+                  </a:txBody>
+                  <a:tcPr anchor="ctr" marL="73152" marT="9144" marB="9144">
+                    <a:solidFill>
+                      <a:srgbClr val="FFFFFF"/>
+                    </a:solidFill>
+                  </a:tcPr>
+                </a:tc>
+                <a:tc>
+                  <a:txBody>
+                    <a:bodyPr/>
+                    <a:lstStyle/>
+                    <a:p>
+                      <a:r>
+                        <a:rPr sz="1150" b="0">
+                          <a:solidFill>
+                            <a:srgbClr val="1A2233"/>
+                          </a:solidFill>
+                          <a:latin typeface="Microsoft JhengHei"/>
+                          <a:ea typeface="Microsoft JhengHei"/>
+                          <a:cs typeface="Microsoft JhengHei"/>
+                        </a:rPr>
+                        <a:t>09/29</a:t>
+                      </a:r>
+                    </a:p>
+                  </a:txBody>
+                  <a:tcPr anchor="ctr" marL="73152" marT="9144" marB="9144">
+                    <a:solidFill>
+                      <a:srgbClr val="FFFFFF"/>
+                    </a:solidFill>
+                  </a:tcPr>
+                </a:tc>
+                <a:tc>
+                  <a:txBody>
+                    <a:bodyPr/>
+                    <a:lstStyle/>
+                    <a:p>
+                      <a:r>
+                        <a:rPr sz="1150" b="1">
+                          <a:solidFill>
+                            <a:srgbClr val="5C6679"/>
+                          </a:solidFill>
+                          <a:latin typeface="Microsoft JhengHei"/>
+                          <a:ea typeface="Microsoft JhengHei"/>
+                          <a:cs typeface="Microsoft JhengHei"/>
+                        </a:rPr>
+                        <a:t>其他</a:t>
+                      </a:r>
+                    </a:p>
+                  </a:txBody>
+                  <a:tcPr anchor="ctr" marL="73152" marT="9144" marB="9144">
+                    <a:solidFill>
+                      <a:srgbClr val="FFFFFF"/>
+                    </a:solidFill>
+                  </a:tcPr>
+                </a:tc>
+                <a:tc>
+                  <a:txBody>
+                    <a:bodyPr/>
+                    <a:lstStyle/>
+                    <a:p>
+                      <a:r>
+                        <a:rPr sz="1150" b="0">
+                          <a:solidFill>
+                            <a:srgbClr val="1A2233"/>
+                          </a:solidFill>
+                          <a:latin typeface="Microsoft JhengHei"/>
+                          <a:ea typeface="Microsoft JhengHei"/>
+                          <a:cs typeface="Microsoft JhengHei"/>
+                        </a:rPr>
+                        <a:t>目前評估對公司營運尚無重大影響。</a:t>
+                      </a:r>
+                    </a:p>
+                  </a:txBody>
+                  <a:tcPr anchor="ctr" marL="73152" marT="9144" marB="9144">
+                    <a:solidFill>
+                      <a:srgbClr val="FFFFFF"/>
+                    </a:solidFill>
+                  </a:tcPr>
+                </a:tc>
+              </a:tr>
+              <a:tr h="237744">
+                <a:tc>
+                  <a:txBody>
+                    <a:bodyPr/>
+                    <a:lstStyle/>
+                    <a:p>
+                      <a:r>
+                        <a:rPr sz="1150" b="0">
+                          <a:solidFill>
+                            <a:srgbClr val="1A2233"/>
+                          </a:solidFill>
+                          <a:latin typeface="Microsoft JhengHei"/>
+                          <a:ea typeface="Microsoft JhengHei"/>
+                          <a:cs typeface="Microsoft JhengHei"/>
+                        </a:rPr>
+                        <a:t>柏文</a:t>
+                      </a:r>
+                    </a:p>
+                  </a:txBody>
+                  <a:tcPr anchor="ctr" marL="73152" marT="9144" marB="9144">
+                    <a:solidFill>
+                      <a:srgbClr val="EEF2F9"/>
+                    </a:solidFill>
+                  </a:tcPr>
+                </a:tc>
+                <a:tc>
+                  <a:txBody>
+                    <a:bodyPr/>
+                    <a:lstStyle/>
+                    <a:p>
+                      <a:r>
+                        <a:rPr sz="1150" b="0">
+                          <a:solidFill>
+                            <a:srgbClr val="1A2233"/>
+                          </a:solidFill>
+                          <a:latin typeface="Microsoft JhengHei"/>
+                          <a:ea typeface="Microsoft JhengHei"/>
+                          <a:cs typeface="Microsoft JhengHei"/>
+                        </a:rPr>
+                        <a:t>8462</a:t>
+                      </a:r>
+                    </a:p>
+                  </a:txBody>
+                  <a:tcPr anchor="ctr" marL="73152" marT="9144" marB="9144">
+                    <a:solidFill>
+                      <a:srgbClr val="EEF2F9"/>
+                    </a:solidFill>
+                  </a:tcPr>
+                </a:tc>
+                <a:tc>
+                  <a:txBody>
+                    <a:bodyPr/>
+                    <a:lstStyle/>
+                    <a:p>
+                      <a:r>
+                        <a:rPr sz="1150" b="0">
+                          <a:solidFill>
+                            <a:srgbClr val="1A2233"/>
+                          </a:solidFill>
+                          <a:latin typeface="Microsoft JhengHei"/>
+                          <a:ea typeface="Microsoft JhengHei"/>
+                          <a:cs typeface="Microsoft JhengHei"/>
+                        </a:rPr>
+                        <a:t>09/23</a:t>
+                      </a:r>
+                    </a:p>
+                  </a:txBody>
+                  <a:tcPr anchor="ctr" marL="73152" marT="9144" marB="9144">
+                    <a:solidFill>
+                      <a:srgbClr val="EEF2F9"/>
+                    </a:solidFill>
+                  </a:tcPr>
+                </a:tc>
+                <a:tc>
+                  <a:txBody>
+                    <a:bodyPr/>
+                    <a:lstStyle/>
+                    <a:p>
+                      <a:r>
+                        <a:rPr sz="1150" b="1">
+                          <a:solidFill>
+                            <a:srgbClr val="27A6C4"/>
+                          </a:solidFill>
+                          <a:latin typeface="Microsoft JhengHei"/>
+                          <a:ea typeface="Microsoft JhengHei"/>
+                          <a:cs typeface="Microsoft JhengHei"/>
+                        </a:rPr>
+                        <a:t>個資外洩</a:t>
+                      </a:r>
+                    </a:p>
+                  </a:txBody>
+                  <a:tcPr anchor="ctr" marL="73152" marT="9144" marB="9144">
+                    <a:solidFill>
+                      <a:srgbClr val="EEF2F9"/>
+                    </a:solidFill>
+                  </a:tcPr>
+                </a:tc>
+                <a:tc>
+                  <a:txBody>
+                    <a:bodyPr/>
+                    <a:lstStyle/>
+                    <a:p>
+                      <a:r>
+                        <a:rPr sz="1150" b="0">
+                          <a:solidFill>
+                            <a:srgbClr val="1A2233"/>
+                          </a:solidFill>
+                          <a:latin typeface="Microsoft JhengHei"/>
+                          <a:ea typeface="Microsoft JhengHei"/>
+                          <a:cs typeface="Microsoft JhengHei"/>
+                        </a:rPr>
+                        <a:t>目前評估對公司營運無重大影響。</a:t>
+                      </a:r>
+                    </a:p>
+                  </a:txBody>
+                  <a:tcPr anchor="ctr" marL="73152" marT="9144" marB="9144">
+                    <a:solidFill>
+                      <a:srgbClr val="EEF2F9"/>
+                    </a:solidFill>
+                  </a:tcPr>
+                </a:tc>
+              </a:tr>
+              <a:tr h="237744">
+                <a:tc>
+                  <a:txBody>
+                    <a:bodyPr/>
+                    <a:lstStyle/>
+                    <a:p>
+                      <a:r>
+                        <a:rPr sz="1150" b="0">
+                          <a:solidFill>
+                            <a:srgbClr val="1A2233"/>
+                          </a:solidFill>
+                          <a:latin typeface="Microsoft JhengHei"/>
+                          <a:ea typeface="Microsoft JhengHei"/>
+                          <a:cs typeface="Microsoft JhengHei"/>
+                        </a:rPr>
+                        <a:t>友訊</a:t>
+                      </a:r>
+                    </a:p>
+                  </a:txBody>
+                  <a:tcPr anchor="ctr" marL="73152" marT="9144" marB="9144">
+                    <a:solidFill>
+                      <a:srgbClr val="FFFFFF"/>
+                    </a:solidFill>
+                  </a:tcPr>
+                </a:tc>
+                <a:tc>
+                  <a:txBody>
+                    <a:bodyPr/>
+                    <a:lstStyle/>
+                    <a:p>
+                      <a:r>
+                        <a:rPr sz="1150" b="0">
+                          <a:solidFill>
+                            <a:srgbClr val="1A2233"/>
+                          </a:solidFill>
+                          <a:latin typeface="Microsoft JhengHei"/>
+                          <a:ea typeface="Microsoft JhengHei"/>
+                          <a:cs typeface="Microsoft JhengHei"/>
+                        </a:rPr>
+                        <a:t>2332</a:t>
+                      </a:r>
+                    </a:p>
+                  </a:txBody>
+                  <a:tcPr anchor="ctr" marL="73152" marT="9144" marB="9144">
+                    <a:solidFill>
+                      <a:srgbClr val="FFFFFF"/>
+                    </a:solidFill>
+                  </a:tcPr>
+                </a:tc>
+                <a:tc>
+                  <a:txBody>
+                    <a:bodyPr/>
+                    <a:lstStyle/>
+                    <a:p>
+                      <a:r>
+                        <a:rPr sz="1150" b="0">
+                          <a:solidFill>
+                            <a:srgbClr val="1A2233"/>
+                          </a:solidFill>
+                          <a:latin typeface="Microsoft JhengHei"/>
+                          <a:ea typeface="Microsoft JhengHei"/>
+                          <a:cs typeface="Microsoft JhengHei"/>
+                        </a:rPr>
+                        <a:t>09/18</a:t>
+                      </a:r>
+                    </a:p>
+                  </a:txBody>
+                  <a:tcPr anchor="ctr" marL="73152" marT="9144" marB="9144">
+                    <a:solidFill>
+                      <a:srgbClr val="FFFFFF"/>
+                    </a:solidFill>
+                  </a:tcPr>
+                </a:tc>
+                <a:tc>
+                  <a:txBody>
+                    <a:bodyPr/>
+                    <a:lstStyle/>
+                    <a:p>
+                      <a:r>
+                        <a:rPr sz="1150" b="1">
+                          <a:solidFill>
+                            <a:srgbClr val="E63946"/>
+                          </a:solidFill>
+                          <a:latin typeface="Microsoft JhengHei"/>
+                          <a:ea typeface="Microsoft JhengHei"/>
+                          <a:cs typeface="Microsoft JhengHei"/>
+                        </a:rPr>
+                        <a:t>駭客攻擊</a:t>
+                      </a:r>
+                    </a:p>
+                  </a:txBody>
+                  <a:tcPr anchor="ctr" marL="73152" marT="9144" marB="9144">
+                    <a:solidFill>
+                      <a:srgbClr val="FFFFFF"/>
+                    </a:solidFill>
+                  </a:tcPr>
+                </a:tc>
+                <a:tc>
+                  <a:txBody>
+                    <a:bodyPr/>
+                    <a:lstStyle/>
+                    <a:p>
+                      <a:r>
+                        <a:rPr sz="1150" b="0">
+                          <a:solidFill>
+                            <a:srgbClr val="1A2233"/>
+                          </a:solidFill>
+                          <a:latin typeface="Microsoft JhengHei"/>
+                          <a:ea typeface="Microsoft JhengHei"/>
+                          <a:cs typeface="Microsoft JhengHei"/>
+                        </a:rPr>
+                        <a:t>目前評估對公司營運尚無重大影響</a:t>
+                      </a:r>
+                    </a:p>
+                  </a:txBody>
+                  <a:tcPr anchor="ctr" marL="73152" marT="9144" marB="9144">
+                    <a:solidFill>
+                      <a:srgbClr val="FFFFFF"/>
+                    </a:solidFill>
+                  </a:tcPr>
+                </a:tc>
+              </a:tr>
+              <a:tr h="237744">
+                <a:tc>
+                  <a:txBody>
+                    <a:bodyPr/>
+                    <a:lstStyle/>
+                    <a:p>
+                      <a:r>
+                        <a:rPr sz="1150" b="0">
+                          <a:solidFill>
+                            <a:srgbClr val="1A2233"/>
+                          </a:solidFill>
+                          <a:latin typeface="Microsoft JhengHei"/>
+                          <a:ea typeface="Microsoft JhengHei"/>
+                          <a:cs typeface="Microsoft JhengHei"/>
+                        </a:rPr>
+                        <a:t>長榮航</a:t>
+                      </a:r>
+                    </a:p>
+                  </a:txBody>
+                  <a:tcPr anchor="ctr" marL="73152" marT="9144" marB="9144">
+                    <a:solidFill>
+                      <a:srgbClr val="EEF2F9"/>
+                    </a:solidFill>
+                  </a:tcPr>
+                </a:tc>
+                <a:tc>
+                  <a:txBody>
+                    <a:bodyPr/>
+                    <a:lstStyle/>
+                    <a:p>
+                      <a:r>
+                        <a:rPr sz="1150" b="0">
+                          <a:solidFill>
+                            <a:srgbClr val="1A2233"/>
+                          </a:solidFill>
+                          <a:latin typeface="Microsoft JhengHei"/>
+                          <a:ea typeface="Microsoft JhengHei"/>
+                          <a:cs typeface="Microsoft JhengHei"/>
+                        </a:rPr>
                         <a:t>2618</a:t>
+                      </a:r>
+                    </a:p>
+                  </a:txBody>
+                  <a:tcPr anchor="ctr" marL="73152" marT="9144" marB="9144">
+                    <a:solidFill>
+                      <a:srgbClr val="EEF2F9"/>
+                    </a:solidFill>
+                  </a:tcPr>
+                </a:tc>
+                <a:tc>
+                  <a:txBody>
+                    <a:bodyPr/>
+                    <a:lstStyle/>
+                    <a:p>
+                      <a:r>
+                        <a:rPr sz="1150" b="0">
+                          <a:solidFill>
+                            <a:srgbClr val="1A2233"/>
+                          </a:solidFill>
+                          <a:latin typeface="Microsoft JhengHei"/>
+                          <a:ea typeface="Microsoft JhengHei"/>
+                          <a:cs typeface="Microsoft JhengHei"/>
+                        </a:rPr>
+                        <a:t>09/15</a:t>
+                      </a:r>
+                    </a:p>
+                  </a:txBody>
+                  <a:tcPr anchor="ctr" marL="73152" marT="9144" marB="9144">
+                    <a:solidFill>
+                      <a:srgbClr val="EEF2F9"/>
+                    </a:solidFill>
+                  </a:tcPr>
+                </a:tc>
+                <a:tc>
+                  <a:txBody>
+                    <a:bodyPr/>
+                    <a:lstStyle/>
+                    <a:p>
+                      <a:r>
+                        <a:rPr sz="1150" b="1">
+                          <a:solidFill>
+                            <a:srgbClr val="E63946"/>
+                          </a:solidFill>
+                          <a:latin typeface="Microsoft JhengHei"/>
+                          <a:ea typeface="Microsoft JhengHei"/>
+                          <a:cs typeface="Microsoft JhengHei"/>
+                        </a:rPr>
+                        <a:t>駭客攻擊</a:t>
+                      </a:r>
+                    </a:p>
+                  </a:txBody>
+                  <a:tcPr anchor="ctr" marL="73152" marT="9144" marB="9144">
+                    <a:solidFill>
+                      <a:srgbClr val="EEF2F9"/>
+                    </a:solidFill>
+                  </a:tcPr>
+                </a:tc>
+                <a:tc>
+                  <a:txBody>
+                    <a:bodyPr/>
+                    <a:lstStyle/>
+                    <a:p>
+                      <a:r>
+                        <a:rPr sz="1150" b="0">
+                          <a:solidFill>
+                            <a:srgbClr val="1A2233"/>
+                          </a:solidFill>
+                          <a:latin typeface="Microsoft JhengHei"/>
+                          <a:ea typeface="Microsoft JhengHei"/>
+                          <a:cs typeface="Microsoft JhengHei"/>
+                        </a:rPr>
+                        <a:t>目前評估對公司所有業務均不受影響。</a:t>
+                      </a:r>
+                    </a:p>
+                  </a:txBody>
+                  <a:tcPr anchor="ctr" marL="73152" marT="9144" marB="9144">
+                    <a:solidFill>
+                      <a:srgbClr val="EEF2F9"/>
+                    </a:solidFill>
+                  </a:tcPr>
+                </a:tc>
+              </a:tr>
+              <a:tr h="237744">
+                <a:tc>
+                  <a:txBody>
+                    <a:bodyPr/>
+                    <a:lstStyle/>
+                    <a:p>
+                      <a:r>
+                        <a:rPr sz="1150" b="0">
+                          <a:solidFill>
+                            <a:srgbClr val="1A2233"/>
+                          </a:solidFill>
+                          <a:latin typeface="Microsoft JhengHei"/>
+                          <a:ea typeface="Microsoft JhengHei"/>
+                          <a:cs typeface="Microsoft JhengHei"/>
+                        </a:rPr>
+                        <a:t>長榮航太</a:t>
+                      </a:r>
+                    </a:p>
+                  </a:txBody>
+                  <a:tcPr anchor="ctr" marL="73152" marT="9144" marB="9144">
+                    <a:solidFill>
+                      <a:srgbClr val="FFFFFF"/>
+                    </a:solidFill>
+                  </a:tcPr>
+                </a:tc>
+                <a:tc>
+                  <a:txBody>
+                    <a:bodyPr/>
+                    <a:lstStyle/>
+                    <a:p>
+                      <a:r>
+                        <a:rPr sz="1150" b="0">
+                          <a:solidFill>
+                            <a:srgbClr val="1A2233"/>
+                          </a:solidFill>
+                          <a:latin typeface="Microsoft JhengHei"/>
+                          <a:ea typeface="Microsoft JhengHei"/>
+                          <a:cs typeface="Microsoft JhengHei"/>
+                        </a:rPr>
+                        <a:t>2645</a:t>
                       </a:r>
                     </a:p>
                   </a:txBody>
@@ -5115,7 +5604,7 @@
                           <a:ea typeface="Microsoft JhengHei"/>
                           <a:cs typeface="Microsoft JhengHei"/>
                         </a:rPr>
-                        <a:t>目前評估對公司所有業務均不受影響。</a:t>
+                        <a:t>經初步評估，核心資訊系統及營運業務運作皆維持正常，尚未發現公司及涉客…</a:t>
                       </a:r>
                     </a:p>
                   </a:txBody>
@@ -5126,7 +5615,7 @@
                   </a:tcPr>
                 </a:tc>
               </a:tr>
-              <a:tr h="274320">
+              <a:tr h="237744">
                 <a:tc>
                   <a:txBody>
                     <a:bodyPr/>
@@ -5141,7 +5630,7 @@
                           <a:ea typeface="Microsoft JhengHei"/>
                           <a:cs typeface="Microsoft JhengHei"/>
                         </a:rPr>
-                        <a:t>長榮航太</a:t>
+                        <a:t>崴寶</a:t>
                       </a:r>
                     </a:p>
                   </a:txBody>
@@ -5165,7 +5654,7 @@
                           <a:ea typeface="Microsoft JhengHei"/>
                           <a:cs typeface="Microsoft JhengHei"/>
                         </a:rPr>
-                        <a:t>2645</a:t>
+                        <a:t>7744</a:t>
                       </a:r>
                     </a:p>
                   </a:txBody>
@@ -5189,7 +5678,251 @@
                           <a:ea typeface="Microsoft JhengHei"/>
                           <a:cs typeface="Microsoft JhengHei"/>
                         </a:rPr>
-                        <a:t>09/15</a:t>
+                        <a:t>09/14</a:t>
+                      </a:r>
+                    </a:p>
+                  </a:txBody>
+                  <a:tcPr anchor="ctr" marL="73152" marT="9144" marB="9144">
+                    <a:solidFill>
+                      <a:srgbClr val="EEF2F9"/>
+                    </a:solidFill>
+                  </a:tcPr>
+                </a:tc>
+                <a:tc>
+                  <a:txBody>
+                    <a:bodyPr/>
+                    <a:lstStyle/>
+                    <a:p>
+                      <a:r>
+                        <a:rPr sz="1150" b="1">
+                          <a:solidFill>
+                            <a:srgbClr val="F4A261"/>
+                          </a:solidFill>
+                          <a:latin typeface="Microsoft JhengHei"/>
+                          <a:ea typeface="Microsoft JhengHei"/>
+                          <a:cs typeface="Microsoft JhengHei"/>
+                        </a:rPr>
+                        <a:t>勒索病毒/加密</a:t>
+                      </a:r>
+                    </a:p>
+                  </a:txBody>
+                  <a:tcPr anchor="ctr" marL="73152" marT="9144" marB="9144">
+                    <a:solidFill>
+                      <a:srgbClr val="EEF2F9"/>
+                    </a:solidFill>
+                  </a:tcPr>
+                </a:tc>
+                <a:tc>
+                  <a:txBody>
+                    <a:bodyPr/>
+                    <a:lstStyle/>
+                    <a:p>
+                      <a:r>
+                        <a:rPr sz="1150" b="0">
+                          <a:solidFill>
+                            <a:srgbClr val="1A2233"/>
+                          </a:solidFill>
+                          <a:latin typeface="Microsoft JhengHei"/>
+                          <a:ea typeface="Microsoft JhengHei"/>
+                          <a:cs typeface="Microsoft JhengHei"/>
+                        </a:rPr>
+                        <a:t>經初步評估，本次資安事件未影響公司工廠生產作業，生產活動均維持正常運…</a:t>
+                      </a:r>
+                    </a:p>
+                  </a:txBody>
+                  <a:tcPr anchor="ctr" marL="73152" marT="9144" marB="9144">
+                    <a:solidFill>
+                      <a:srgbClr val="EEF2F9"/>
+                    </a:solidFill>
+                  </a:tcPr>
+                </a:tc>
+              </a:tr>
+              <a:tr h="237744">
+                <a:tc>
+                  <a:txBody>
+                    <a:bodyPr/>
+                    <a:lstStyle/>
+                    <a:p>
+                      <a:r>
+                        <a:rPr sz="1150" b="0">
+                          <a:solidFill>
+                            <a:srgbClr val="1A2233"/>
+                          </a:solidFill>
+                          <a:latin typeface="Microsoft JhengHei"/>
+                          <a:ea typeface="Microsoft JhengHei"/>
+                          <a:cs typeface="Microsoft JhengHei"/>
+                        </a:rPr>
+                        <a:t>達爾膚</a:t>
+                      </a:r>
+                    </a:p>
+                  </a:txBody>
+                  <a:tcPr anchor="ctr" marL="73152" marT="9144" marB="9144">
+                    <a:solidFill>
+                      <a:srgbClr val="FFFFFF"/>
+                    </a:solidFill>
+                  </a:tcPr>
+                </a:tc>
+                <a:tc>
+                  <a:txBody>
+                    <a:bodyPr/>
+                    <a:lstStyle/>
+                    <a:p>
+                      <a:r>
+                        <a:rPr sz="1150" b="0">
+                          <a:solidFill>
+                            <a:srgbClr val="1A2233"/>
+                          </a:solidFill>
+                          <a:latin typeface="Microsoft JhengHei"/>
+                          <a:ea typeface="Microsoft JhengHei"/>
+                          <a:cs typeface="Microsoft JhengHei"/>
+                        </a:rPr>
+                        <a:t>6523</a:t>
+                      </a:r>
+                    </a:p>
+                  </a:txBody>
+                  <a:tcPr anchor="ctr" marL="73152" marT="9144" marB="9144">
+                    <a:solidFill>
+                      <a:srgbClr val="FFFFFF"/>
+                    </a:solidFill>
+                  </a:tcPr>
+                </a:tc>
+                <a:tc>
+                  <a:txBody>
+                    <a:bodyPr/>
+                    <a:lstStyle/>
+                    <a:p>
+                      <a:r>
+                        <a:rPr sz="1150" b="0">
+                          <a:solidFill>
+                            <a:srgbClr val="1A2233"/>
+                          </a:solidFill>
+                          <a:latin typeface="Microsoft JhengHei"/>
+                          <a:ea typeface="Microsoft JhengHei"/>
+                          <a:cs typeface="Microsoft JhengHei"/>
+                        </a:rPr>
+                        <a:t>09/11</a:t>
+                      </a:r>
+                    </a:p>
+                  </a:txBody>
+                  <a:tcPr anchor="ctr" marL="73152" marT="9144" marB="9144">
+                    <a:solidFill>
+                      <a:srgbClr val="FFFFFF"/>
+                    </a:solidFill>
+                  </a:tcPr>
+                </a:tc>
+                <a:tc>
+                  <a:txBody>
+                    <a:bodyPr/>
+                    <a:lstStyle/>
+                    <a:p>
+                      <a:r>
+                        <a:rPr sz="1150" b="1">
+                          <a:solidFill>
+                            <a:srgbClr val="E63946"/>
+                          </a:solidFill>
+                          <a:latin typeface="Microsoft JhengHei"/>
+                          <a:ea typeface="Microsoft JhengHei"/>
+                          <a:cs typeface="Microsoft JhengHei"/>
+                        </a:rPr>
+                        <a:t>駭客攻擊</a:t>
+                      </a:r>
+                    </a:p>
+                  </a:txBody>
+                  <a:tcPr anchor="ctr" marL="73152" marT="9144" marB="9144">
+                    <a:solidFill>
+                      <a:srgbClr val="FFFFFF"/>
+                    </a:solidFill>
+                  </a:tcPr>
+                </a:tc>
+                <a:tc>
+                  <a:txBody>
+                    <a:bodyPr/>
+                    <a:lstStyle/>
+                    <a:p>
+                      <a:r>
+                        <a:rPr sz="1150" b="0">
+                          <a:solidFill>
+                            <a:srgbClr val="1A2233"/>
+                          </a:solidFill>
+                          <a:latin typeface="Microsoft JhengHei"/>
+                          <a:ea typeface="Microsoft JhengHei"/>
+                          <a:cs typeface="Microsoft JhengHei"/>
+                        </a:rPr>
+                        <a:t>受影響系統非屬公司現行主要營運系統，亦非對外提供服務之系統，目前評估…</a:t>
+                      </a:r>
+                    </a:p>
+                  </a:txBody>
+                  <a:tcPr anchor="ctr" marL="73152" marT="9144" marB="9144">
+                    <a:solidFill>
+                      <a:srgbClr val="FFFFFF"/>
+                    </a:solidFill>
+                  </a:tcPr>
+                </a:tc>
+              </a:tr>
+              <a:tr h="237744">
+                <a:tc>
+                  <a:txBody>
+                    <a:bodyPr/>
+                    <a:lstStyle/>
+                    <a:p>
+                      <a:r>
+                        <a:rPr sz="1150" b="0">
+                          <a:solidFill>
+                            <a:srgbClr val="1A2233"/>
+                          </a:solidFill>
+                          <a:latin typeface="Microsoft JhengHei"/>
+                          <a:ea typeface="Microsoft JhengHei"/>
+                          <a:cs typeface="Microsoft JhengHei"/>
+                        </a:rPr>
+                        <a:t>大車隊</a:t>
+                      </a:r>
+                    </a:p>
+                  </a:txBody>
+                  <a:tcPr anchor="ctr" marL="73152" marT="9144" marB="9144">
+                    <a:solidFill>
+                      <a:srgbClr val="EEF2F9"/>
+                    </a:solidFill>
+                  </a:tcPr>
+                </a:tc>
+                <a:tc>
+                  <a:txBody>
+                    <a:bodyPr/>
+                    <a:lstStyle/>
+                    <a:p>
+                      <a:r>
+                        <a:rPr sz="1150" b="0">
+                          <a:solidFill>
+                            <a:srgbClr val="1A2233"/>
+                          </a:solidFill>
+                          <a:latin typeface="Microsoft JhengHei"/>
+                          <a:ea typeface="Microsoft JhengHei"/>
+                          <a:cs typeface="Microsoft JhengHei"/>
+                        </a:rPr>
+                        <a:t>2640</a:t>
+                      </a:r>
+                    </a:p>
+                  </a:txBody>
+                  <a:tcPr anchor="ctr" marL="73152" marT="9144" marB="9144">
+                    <a:solidFill>
+                      <a:srgbClr val="EEF2F9"/>
+                    </a:solidFill>
+                  </a:tcPr>
+                </a:tc>
+                <a:tc>
+                  <a:txBody>
+                    <a:bodyPr/>
+                    <a:lstStyle/>
+                    <a:p>
+                      <a:r>
+                        <a:rPr sz="1150" b="0">
+                          <a:solidFill>
+                            <a:srgbClr val="1A2233"/>
+                          </a:solidFill>
+                          <a:latin typeface="Microsoft JhengHei"/>
+                          <a:ea typeface="Microsoft JhengHei"/>
+                          <a:cs typeface="Microsoft JhengHei"/>
+                        </a:rPr>
+                        <a:t>09/09</a:t>
                       </a:r>
                     </a:p>
                   </a:txBody>
@@ -5237,495 +5970,7 @@
                           <a:ea typeface="Microsoft JhengHei"/>
                           <a:cs typeface="Microsoft JhengHei"/>
                         </a:rPr>
-                        <a:t>經初步評估，核心資訊系統及營運業務運作皆維持正常，尚未發現公司及涉客…</a:t>
-                      </a:r>
-                    </a:p>
-                  </a:txBody>
-                  <a:tcPr anchor="ctr" marL="73152" marT="9144" marB="9144">
-                    <a:solidFill>
-                      <a:srgbClr val="EEF2F9"/>
-                    </a:solidFill>
-                  </a:tcPr>
-                </a:tc>
-              </a:tr>
-              <a:tr h="274320">
-                <a:tc>
-                  <a:txBody>
-                    <a:bodyPr/>
-                    <a:lstStyle/>
-                    <a:p>
-                      <a:r>
-                        <a:rPr sz="1150" b="0">
-                          <a:solidFill>
-                            <a:srgbClr val="1A2233"/>
-                          </a:solidFill>
-                          <a:latin typeface="Microsoft JhengHei"/>
-                          <a:ea typeface="Microsoft JhengHei"/>
-                          <a:cs typeface="Microsoft JhengHei"/>
-                        </a:rPr>
-                        <a:t>崴寶</a:t>
-                      </a:r>
-                    </a:p>
-                  </a:txBody>
-                  <a:tcPr anchor="ctr" marL="73152" marT="9144" marB="9144">
-                    <a:solidFill>
-                      <a:srgbClr val="FFFFFF"/>
-                    </a:solidFill>
-                  </a:tcPr>
-                </a:tc>
-                <a:tc>
-                  <a:txBody>
-                    <a:bodyPr/>
-                    <a:lstStyle/>
-                    <a:p>
-                      <a:r>
-                        <a:rPr sz="1150" b="0">
-                          <a:solidFill>
-                            <a:srgbClr val="1A2233"/>
-                          </a:solidFill>
-                          <a:latin typeface="Microsoft JhengHei"/>
-                          <a:ea typeface="Microsoft JhengHei"/>
-                          <a:cs typeface="Microsoft JhengHei"/>
-                        </a:rPr>
-                        <a:t>7744</a:t>
-                      </a:r>
-                    </a:p>
-                  </a:txBody>
-                  <a:tcPr anchor="ctr" marL="73152" marT="9144" marB="9144">
-                    <a:solidFill>
-                      <a:srgbClr val="FFFFFF"/>
-                    </a:solidFill>
-                  </a:tcPr>
-                </a:tc>
-                <a:tc>
-                  <a:txBody>
-                    <a:bodyPr/>
-                    <a:lstStyle/>
-                    <a:p>
-                      <a:r>
-                        <a:rPr sz="1150" b="0">
-                          <a:solidFill>
-                            <a:srgbClr val="1A2233"/>
-                          </a:solidFill>
-                          <a:latin typeface="Microsoft JhengHei"/>
-                          <a:ea typeface="Microsoft JhengHei"/>
-                          <a:cs typeface="Microsoft JhengHei"/>
-                        </a:rPr>
-                        <a:t>09/14</a:t>
-                      </a:r>
-                    </a:p>
-                  </a:txBody>
-                  <a:tcPr anchor="ctr" marL="73152" marT="9144" marB="9144">
-                    <a:solidFill>
-                      <a:srgbClr val="FFFFFF"/>
-                    </a:solidFill>
-                  </a:tcPr>
-                </a:tc>
-                <a:tc>
-                  <a:txBody>
-                    <a:bodyPr/>
-                    <a:lstStyle/>
-                    <a:p>
-                      <a:r>
-                        <a:rPr sz="1150" b="1">
-                          <a:solidFill>
-                            <a:srgbClr val="F4A261"/>
-                          </a:solidFill>
-                          <a:latin typeface="Microsoft JhengHei"/>
-                          <a:ea typeface="Microsoft JhengHei"/>
-                          <a:cs typeface="Microsoft JhengHei"/>
-                        </a:rPr>
-                        <a:t>勒索病毒/加密</a:t>
-                      </a:r>
-                    </a:p>
-                  </a:txBody>
-                  <a:tcPr anchor="ctr" marL="73152" marT="9144" marB="9144">
-                    <a:solidFill>
-                      <a:srgbClr val="FFFFFF"/>
-                    </a:solidFill>
-                  </a:tcPr>
-                </a:tc>
-                <a:tc>
-                  <a:txBody>
-                    <a:bodyPr/>
-                    <a:lstStyle/>
-                    <a:p>
-                      <a:r>
-                        <a:rPr sz="1150" b="0">
-                          <a:solidFill>
-                            <a:srgbClr val="1A2233"/>
-                          </a:solidFill>
-                          <a:latin typeface="Microsoft JhengHei"/>
-                          <a:ea typeface="Microsoft JhengHei"/>
-                          <a:cs typeface="Microsoft JhengHei"/>
-                        </a:rPr>
-                        <a:t>經初步評估，本次資安事件未影響公司工廠生產作業，生產活動均維持正常運…</a:t>
-                      </a:r>
-                    </a:p>
-                  </a:txBody>
-                  <a:tcPr anchor="ctr" marL="73152" marT="9144" marB="9144">
-                    <a:solidFill>
-                      <a:srgbClr val="FFFFFF"/>
-                    </a:solidFill>
-                  </a:tcPr>
-                </a:tc>
-              </a:tr>
-              <a:tr h="274320">
-                <a:tc>
-                  <a:txBody>
-                    <a:bodyPr/>
-                    <a:lstStyle/>
-                    <a:p>
-                      <a:r>
-                        <a:rPr sz="1150" b="0">
-                          <a:solidFill>
-                            <a:srgbClr val="1A2233"/>
-                          </a:solidFill>
-                          <a:latin typeface="Microsoft JhengHei"/>
-                          <a:ea typeface="Microsoft JhengHei"/>
-                          <a:cs typeface="Microsoft JhengHei"/>
-                        </a:rPr>
-                        <a:t>達爾膚</a:t>
-                      </a:r>
-                    </a:p>
-                  </a:txBody>
-                  <a:tcPr anchor="ctr" marL="73152" marT="9144" marB="9144">
-                    <a:solidFill>
-                      <a:srgbClr val="EEF2F9"/>
-                    </a:solidFill>
-                  </a:tcPr>
-                </a:tc>
-                <a:tc>
-                  <a:txBody>
-                    <a:bodyPr/>
-                    <a:lstStyle/>
-                    <a:p>
-                      <a:r>
-                        <a:rPr sz="1150" b="0">
-                          <a:solidFill>
-                            <a:srgbClr val="1A2233"/>
-                          </a:solidFill>
-                          <a:latin typeface="Microsoft JhengHei"/>
-                          <a:ea typeface="Microsoft JhengHei"/>
-                          <a:cs typeface="Microsoft JhengHei"/>
-                        </a:rPr>
-                        <a:t>6523</a:t>
-                      </a:r>
-                    </a:p>
-                  </a:txBody>
-                  <a:tcPr anchor="ctr" marL="73152" marT="9144" marB="9144">
-                    <a:solidFill>
-                      <a:srgbClr val="EEF2F9"/>
-                    </a:solidFill>
-                  </a:tcPr>
-                </a:tc>
-                <a:tc>
-                  <a:txBody>
-                    <a:bodyPr/>
-                    <a:lstStyle/>
-                    <a:p>
-                      <a:r>
-                        <a:rPr sz="1150" b="0">
-                          <a:solidFill>
-                            <a:srgbClr val="1A2233"/>
-                          </a:solidFill>
-                          <a:latin typeface="Microsoft JhengHei"/>
-                          <a:ea typeface="Microsoft JhengHei"/>
-                          <a:cs typeface="Microsoft JhengHei"/>
-                        </a:rPr>
-                        <a:t>09/11</a:t>
-                      </a:r>
-                    </a:p>
-                  </a:txBody>
-                  <a:tcPr anchor="ctr" marL="73152" marT="9144" marB="9144">
-                    <a:solidFill>
-                      <a:srgbClr val="EEF2F9"/>
-                    </a:solidFill>
-                  </a:tcPr>
-                </a:tc>
-                <a:tc>
-                  <a:txBody>
-                    <a:bodyPr/>
-                    <a:lstStyle/>
-                    <a:p>
-                      <a:r>
-                        <a:rPr sz="1150" b="1">
-                          <a:solidFill>
-                            <a:srgbClr val="E63946"/>
-                          </a:solidFill>
-                          <a:latin typeface="Microsoft JhengHei"/>
-                          <a:ea typeface="Microsoft JhengHei"/>
-                          <a:cs typeface="Microsoft JhengHei"/>
-                        </a:rPr>
-                        <a:t>駭客攻擊</a:t>
-                      </a:r>
-                    </a:p>
-                  </a:txBody>
-                  <a:tcPr anchor="ctr" marL="73152" marT="9144" marB="9144">
-                    <a:solidFill>
-                      <a:srgbClr val="EEF2F9"/>
-                    </a:solidFill>
-                  </a:tcPr>
-                </a:tc>
-                <a:tc>
-                  <a:txBody>
-                    <a:bodyPr/>
-                    <a:lstStyle/>
-                    <a:p>
-                      <a:r>
-                        <a:rPr sz="1150" b="0">
-                          <a:solidFill>
-                            <a:srgbClr val="1A2233"/>
-                          </a:solidFill>
-                          <a:latin typeface="Microsoft JhengHei"/>
-                          <a:ea typeface="Microsoft JhengHei"/>
-                          <a:cs typeface="Microsoft JhengHei"/>
-                        </a:rPr>
-                        <a:t>受影響系統非屬公司現行主要營運系統，亦非對外提供服務之系統，目前評估…</a:t>
-                      </a:r>
-                    </a:p>
-                  </a:txBody>
-                  <a:tcPr anchor="ctr" marL="73152" marT="9144" marB="9144">
-                    <a:solidFill>
-                      <a:srgbClr val="EEF2F9"/>
-                    </a:solidFill>
-                  </a:tcPr>
-                </a:tc>
-              </a:tr>
-              <a:tr h="274320">
-                <a:tc>
-                  <a:txBody>
-                    <a:bodyPr/>
-                    <a:lstStyle/>
-                    <a:p>
-                      <a:r>
-                        <a:rPr sz="1150" b="0">
-                          <a:solidFill>
-                            <a:srgbClr val="1A2233"/>
-                          </a:solidFill>
-                          <a:latin typeface="Microsoft JhengHei"/>
-                          <a:ea typeface="Microsoft JhengHei"/>
-                          <a:cs typeface="Microsoft JhengHei"/>
-                        </a:rPr>
-                        <a:t>大車隊</a:t>
-                      </a:r>
-                    </a:p>
-                  </a:txBody>
-                  <a:tcPr anchor="ctr" marL="73152" marT="9144" marB="9144">
-                    <a:solidFill>
-                      <a:srgbClr val="FFFFFF"/>
-                    </a:solidFill>
-                  </a:tcPr>
-                </a:tc>
-                <a:tc>
-                  <a:txBody>
-                    <a:bodyPr/>
-                    <a:lstStyle/>
-                    <a:p>
-                      <a:r>
-                        <a:rPr sz="1150" b="0">
-                          <a:solidFill>
-                            <a:srgbClr val="1A2233"/>
-                          </a:solidFill>
-                          <a:latin typeface="Microsoft JhengHei"/>
-                          <a:ea typeface="Microsoft JhengHei"/>
-                          <a:cs typeface="Microsoft JhengHei"/>
-                        </a:rPr>
-                        <a:t>2640</a:t>
-                      </a:r>
-                    </a:p>
-                  </a:txBody>
-                  <a:tcPr anchor="ctr" marL="73152" marT="9144" marB="9144">
-                    <a:solidFill>
-                      <a:srgbClr val="FFFFFF"/>
-                    </a:solidFill>
-                  </a:tcPr>
-                </a:tc>
-                <a:tc>
-                  <a:txBody>
-                    <a:bodyPr/>
-                    <a:lstStyle/>
-                    <a:p>
-                      <a:r>
-                        <a:rPr sz="1150" b="0">
-                          <a:solidFill>
-                            <a:srgbClr val="1A2233"/>
-                          </a:solidFill>
-                          <a:latin typeface="Microsoft JhengHei"/>
-                          <a:ea typeface="Microsoft JhengHei"/>
-                          <a:cs typeface="Microsoft JhengHei"/>
-                        </a:rPr>
-                        <a:t>09/09</a:t>
-                      </a:r>
-                    </a:p>
-                  </a:txBody>
-                  <a:tcPr anchor="ctr" marL="73152" marT="9144" marB="9144">
-                    <a:solidFill>
-                      <a:srgbClr val="FFFFFF"/>
-                    </a:solidFill>
-                  </a:tcPr>
-                </a:tc>
-                <a:tc>
-                  <a:txBody>
-                    <a:bodyPr/>
-                    <a:lstStyle/>
-                    <a:p>
-                      <a:r>
-                        <a:rPr sz="1150" b="1">
-                          <a:solidFill>
-                            <a:srgbClr val="E63946"/>
-                          </a:solidFill>
-                          <a:latin typeface="Microsoft JhengHei"/>
-                          <a:ea typeface="Microsoft JhengHei"/>
-                          <a:cs typeface="Microsoft JhengHei"/>
-                        </a:rPr>
-                        <a:t>駭客攻擊</a:t>
-                      </a:r>
-                    </a:p>
-                  </a:txBody>
-                  <a:tcPr anchor="ctr" marL="73152" marT="9144" marB="9144">
-                    <a:solidFill>
-                      <a:srgbClr val="FFFFFF"/>
-                    </a:solidFill>
-                  </a:tcPr>
-                </a:tc>
-                <a:tc>
-                  <a:txBody>
-                    <a:bodyPr/>
-                    <a:lstStyle/>
-                    <a:p>
-                      <a:r>
-                        <a:rPr sz="1150" b="0">
-                          <a:solidFill>
-                            <a:srgbClr val="1A2233"/>
-                          </a:solidFill>
-                          <a:latin typeface="Microsoft JhengHei"/>
-                          <a:ea typeface="Microsoft JhengHei"/>
-                          <a:cs typeface="Microsoft JhengHei"/>
-                        </a:rPr>
                         <a:t>經初步評估，本事件目前尚未對本公司整體營運及財務造成重大影響。</a:t>
-                      </a:r>
-                    </a:p>
-                  </a:txBody>
-                  <a:tcPr anchor="ctr" marL="73152" marT="9144" marB="9144">
-                    <a:solidFill>
-                      <a:srgbClr val="FFFFFF"/>
-                    </a:solidFill>
-                  </a:tcPr>
-                </a:tc>
-              </a:tr>
-              <a:tr h="274320">
-                <a:tc>
-                  <a:txBody>
-                    <a:bodyPr/>
-                    <a:lstStyle/>
-                    <a:p>
-                      <a:r>
-                        <a:rPr sz="1150" b="0">
-                          <a:solidFill>
-                            <a:srgbClr val="1A2233"/>
-                          </a:solidFill>
-                          <a:latin typeface="Microsoft JhengHei"/>
-                          <a:ea typeface="Microsoft JhengHei"/>
-                          <a:cs typeface="Microsoft JhengHei"/>
-                        </a:rPr>
-                        <a:t>富爾特</a:t>
-                      </a:r>
-                    </a:p>
-                  </a:txBody>
-                  <a:tcPr anchor="ctr" marL="73152" marT="9144" marB="9144">
-                    <a:solidFill>
-                      <a:srgbClr val="EEF2F9"/>
-                    </a:solidFill>
-                  </a:tcPr>
-                </a:tc>
-                <a:tc>
-                  <a:txBody>
-                    <a:bodyPr/>
-                    <a:lstStyle/>
-                    <a:p>
-                      <a:r>
-                        <a:rPr sz="1150" b="0">
-                          <a:solidFill>
-                            <a:srgbClr val="1A2233"/>
-                          </a:solidFill>
-                          <a:latin typeface="Microsoft JhengHei"/>
-                          <a:ea typeface="Microsoft JhengHei"/>
-                          <a:cs typeface="Microsoft JhengHei"/>
-                        </a:rPr>
-                        <a:t>6136</a:t>
-                      </a:r>
-                    </a:p>
-                  </a:txBody>
-                  <a:tcPr anchor="ctr" marL="73152" marT="9144" marB="9144">
-                    <a:solidFill>
-                      <a:srgbClr val="EEF2F9"/>
-                    </a:solidFill>
-                  </a:tcPr>
-                </a:tc>
-                <a:tc>
-                  <a:txBody>
-                    <a:bodyPr/>
-                    <a:lstStyle/>
-                    <a:p>
-                      <a:r>
-                        <a:rPr sz="1150" b="0">
-                          <a:solidFill>
-                            <a:srgbClr val="1A2233"/>
-                          </a:solidFill>
-                          <a:latin typeface="Microsoft JhengHei"/>
-                          <a:ea typeface="Microsoft JhengHei"/>
-                          <a:cs typeface="Microsoft JhengHei"/>
-                        </a:rPr>
-                        <a:t>09/07</a:t>
-                      </a:r>
-                    </a:p>
-                  </a:txBody>
-                  <a:tcPr anchor="ctr" marL="73152" marT="9144" marB="9144">
-                    <a:solidFill>
-                      <a:srgbClr val="EEF2F9"/>
-                    </a:solidFill>
-                  </a:tcPr>
-                </a:tc>
-                <a:tc>
-                  <a:txBody>
-                    <a:bodyPr/>
-                    <a:lstStyle/>
-                    <a:p>
-                      <a:r>
-                        <a:rPr sz="1150" b="1">
-                          <a:solidFill>
-                            <a:srgbClr val="F4A261"/>
-                          </a:solidFill>
-                          <a:latin typeface="Microsoft JhengHei"/>
-                          <a:ea typeface="Microsoft JhengHei"/>
-                          <a:cs typeface="Microsoft JhengHei"/>
-                        </a:rPr>
-                        <a:t>勒索病毒/加密</a:t>
-                      </a:r>
-                    </a:p>
-                  </a:txBody>
-                  <a:tcPr anchor="ctr" marL="73152" marT="9144" marB="9144">
-                    <a:solidFill>
-                      <a:srgbClr val="EEF2F9"/>
-                    </a:solidFill>
-                  </a:tcPr>
-                </a:tc>
-                <a:tc>
-                  <a:txBody>
-                    <a:bodyPr/>
-                    <a:lstStyle/>
-                    <a:p>
-                      <a:r>
-                        <a:rPr sz="1150" b="0">
-                          <a:solidFill>
-                            <a:srgbClr val="1A2233"/>
-                          </a:solidFill>
-                          <a:latin typeface="Microsoft JhengHei"/>
-                          <a:ea typeface="Microsoft JhengHei"/>
-                          <a:cs typeface="Microsoft JhengHei"/>
-                        </a:rPr>
-                        <a:t>目前受影響之系統正陸續復原中，對公司整體營運及財務之影響程度尚不致有…</a:t>
                       </a:r>
                     </a:p>
                   </a:txBody>
@@ -6291,7 +6536,7 @@
                 <a:ea typeface="Microsoft JhengHei"/>
                 <a:cs typeface="Microsoft JhengHei"/>
               </a:rPr>
-              <a:t>2 起</a:t>
+              <a:t>1 起</a:t>
             </a:r>
           </a:p>
         </p:txBody>
@@ -6328,7 +6573,7 @@
                 <a:ea typeface="Microsoft JhengHei"/>
                 <a:cs typeface="Microsoft JhengHei"/>
               </a:rPr>
-              <a:t>崴寶、富爾特</a:t>
+              <a:t>崴寶</a:t>
             </a:r>
           </a:p>
         </p:txBody>
@@ -6529,7 +6774,7 @@
                 <a:ea typeface="Microsoft JhengHei"/>
                 <a:cs typeface="Microsoft JhengHei"/>
               </a:rPr>
-              <a:t>2 起</a:t>
+              <a:t>4 起</a:t>
             </a:r>
           </a:p>
         </p:txBody>
@@ -6566,7 +6811,7 @@
                 <a:ea typeface="Microsoft JhengHei"/>
                 <a:cs typeface="Microsoft JhengHei"/>
               </a:rPr>
-              <a:t>安心、柏文</a:t>
+              <a:t>杏一、鈊象、安心、柏文</a:t>
             </a:r>
           </a:p>
         </p:txBody>
@@ -6767,7 +7012,7 @@
                 <a:ea typeface="Microsoft JhengHei"/>
                 <a:cs typeface="Microsoft JhengHei"/>
               </a:rPr>
-              <a:t>2 起</a:t>
+              <a:t>3 起</a:t>
             </a:r>
           </a:p>
         </p:txBody>
@@ -6804,7 +7049,7 @@
                 <a:ea typeface="Microsoft JhengHei"/>
                 <a:cs typeface="Microsoft JhengHei"/>
               </a:rPr>
-              <a:t>一零四、鈊象</a:t>
+              <a:t>上福、一零四、鈊象</a:t>
             </a:r>
           </a:p>
         </p:txBody>
@@ -7007,7 +7252,7 @@
                 <a:gridCol w="3383280"/>
                 <a:gridCol w="2606040"/>
               </a:tblGrid>
-              <a:tr h="344658">
+              <a:tr h="298704">
                 <a:tc>
                   <a:txBody>
                     <a:bodyPr/>
@@ -7129,7 +7374,7 @@
                   </a:tcPr>
                 </a:tc>
               </a:tr>
-              <a:tr h="344658">
+              <a:tr h="298704">
                 <a:tc>
                   <a:txBody>
                     <a:bodyPr/>
@@ -7144,7 +7389,7 @@
                           <a:ea typeface="Microsoft JhengHei"/>
                           <a:cs typeface="Microsoft JhengHei"/>
                         </a:rPr>
-                        <a:t>一零四</a:t>
+                        <a:t>上福</a:t>
                       </a:r>
                     </a:p>
                   </a:txBody>
@@ -7168,7 +7413,7 @@
                           <a:ea typeface="Microsoft JhengHei"/>
                           <a:cs typeface="Microsoft JhengHei"/>
                         </a:rPr>
-                        <a:t>3130</a:t>
+                        <a:t>6128</a:t>
                       </a:r>
                     </a:p>
                   </a:txBody>
@@ -7216,7 +7461,7 @@
                           <a:ea typeface="Microsoft JhengHei"/>
                           <a:cs typeface="Microsoft JhengHei"/>
                         </a:rPr>
-                        <a:t>安侯建業聯合會計師事務所</a:t>
+                        <a:t>安永聯合會計師事務所</a:t>
                       </a:r>
                     </a:p>
                   </a:txBody>
@@ -7240,7 +7485,7 @@
                           <a:ea typeface="Microsoft JhengHei"/>
                           <a:cs typeface="Microsoft JhengHei"/>
                         </a:rPr>
-                        <a:t>趙敏如、江家齊</a:t>
+                        <a:t>黃宇廷、賴書晨</a:t>
                       </a:r>
                     </a:p>
                   </a:txBody>
@@ -7251,7 +7496,7 @@
                   </a:tcPr>
                 </a:tc>
               </a:tr>
-              <a:tr h="344658">
+              <a:tr h="298704">
                 <a:tc>
                   <a:txBody>
                     <a:bodyPr/>
@@ -7266,7 +7511,7 @@
                           <a:ea typeface="Microsoft JhengHei"/>
                           <a:cs typeface="Microsoft JhengHei"/>
                         </a:rPr>
-                        <a:t>安心</a:t>
+                        <a:t>杏一</a:t>
                       </a:r>
                     </a:p>
                   </a:txBody>
@@ -7290,7 +7535,7 @@
                           <a:ea typeface="Microsoft JhengHei"/>
                           <a:cs typeface="Microsoft JhengHei"/>
                         </a:rPr>
-                        <a:t>1259</a:t>
+                        <a:t>4175</a:t>
                       </a:r>
                     </a:p>
                   </a:txBody>
@@ -7338,6 +7583,494 @@
                           <a:ea typeface="Microsoft JhengHei"/>
                           <a:cs typeface="Microsoft JhengHei"/>
                         </a:rPr>
+                        <a:t>勤業眾信聯合會計師事務所</a:t>
+                      </a:r>
+                    </a:p>
+                  </a:txBody>
+                  <a:tcPr anchor="ctr" marL="73152" marT="9144" marB="9144">
+                    <a:solidFill>
+                      <a:srgbClr val="EEF2F9"/>
+                    </a:solidFill>
+                  </a:tcPr>
+                </a:tc>
+                <a:tc>
+                  <a:txBody>
+                    <a:bodyPr/>
+                    <a:lstStyle/>
+                    <a:p>
+                      <a:r>
+                        <a:rPr sz="1150" b="0">
+                          <a:solidFill>
+                            <a:srgbClr val="1A2233"/>
+                          </a:solidFill>
+                          <a:latin typeface="Microsoft JhengHei"/>
+                          <a:ea typeface="Microsoft JhengHei"/>
+                          <a:cs typeface="Microsoft JhengHei"/>
+                        </a:rPr>
+                        <a:t>池瑞全、蔡宗遠</a:t>
+                      </a:r>
+                    </a:p>
+                  </a:txBody>
+                  <a:tcPr anchor="ctr" marL="73152" marT="9144" marB="9144">
+                    <a:solidFill>
+                      <a:srgbClr val="EEF2F9"/>
+                    </a:solidFill>
+                  </a:tcPr>
+                </a:tc>
+              </a:tr>
+              <a:tr h="298704">
+                <a:tc>
+                  <a:txBody>
+                    <a:bodyPr/>
+                    <a:lstStyle/>
+                    <a:p>
+                      <a:r>
+                        <a:rPr sz="1150" b="0">
+                          <a:solidFill>
+                            <a:srgbClr val="1A2233"/>
+                          </a:solidFill>
+                          <a:latin typeface="Microsoft JhengHei"/>
+                          <a:ea typeface="Microsoft JhengHei"/>
+                          <a:cs typeface="Microsoft JhengHei"/>
+                        </a:rPr>
+                        <a:t>鈊象</a:t>
+                      </a:r>
+                    </a:p>
+                  </a:txBody>
+                  <a:tcPr anchor="ctr" marL="73152" marT="9144" marB="9144">
+                    <a:solidFill>
+                      <a:srgbClr val="FFFFFF"/>
+                    </a:solidFill>
+                  </a:tcPr>
+                </a:tc>
+                <a:tc>
+                  <a:txBody>
+                    <a:bodyPr/>
+                    <a:lstStyle/>
+                    <a:p>
+                      <a:r>
+                        <a:rPr sz="1150" b="0">
+                          <a:solidFill>
+                            <a:srgbClr val="1A2233"/>
+                          </a:solidFill>
+                          <a:latin typeface="Microsoft JhengHei"/>
+                          <a:ea typeface="Microsoft JhengHei"/>
+                          <a:cs typeface="Microsoft JhengHei"/>
+                        </a:rPr>
+                        <a:t>3293</a:t>
+                      </a:r>
+                    </a:p>
+                  </a:txBody>
+                  <a:tcPr anchor="ctr" marL="73152" marT="9144" marB="9144">
+                    <a:solidFill>
+                      <a:srgbClr val="FFFFFF"/>
+                    </a:solidFill>
+                  </a:tcPr>
+                </a:tc>
+                <a:tc>
+                  <a:txBody>
+                    <a:bodyPr/>
+                    <a:lstStyle/>
+                    <a:p>
+                      <a:r>
+                        <a:rPr sz="1150" b="1">
+                          <a:solidFill>
+                            <a:srgbClr val="27A6C4"/>
+                          </a:solidFill>
+                          <a:latin typeface="Microsoft JhengHei"/>
+                          <a:ea typeface="Microsoft JhengHei"/>
+                          <a:cs typeface="Microsoft JhengHei"/>
+                        </a:rPr>
+                        <a:t>個資外洩</a:t>
+                      </a:r>
+                    </a:p>
+                  </a:txBody>
+                  <a:tcPr anchor="ctr" marL="73152" marT="9144" marB="9144">
+                    <a:solidFill>
+                      <a:srgbClr val="FFFFFF"/>
+                    </a:solidFill>
+                  </a:tcPr>
+                </a:tc>
+                <a:tc>
+                  <a:txBody>
+                    <a:bodyPr/>
+                    <a:lstStyle/>
+                    <a:p>
+                      <a:r>
+                        <a:rPr sz="1150" b="0">
+                          <a:solidFill>
+                            <a:srgbClr val="1A2233"/>
+                          </a:solidFill>
+                          <a:latin typeface="Microsoft JhengHei"/>
+                          <a:ea typeface="Microsoft JhengHei"/>
+                          <a:cs typeface="Microsoft JhengHei"/>
+                        </a:rPr>
+                        <a:t>勤業眾信聯合會計師事務所</a:t>
+                      </a:r>
+                    </a:p>
+                  </a:txBody>
+                  <a:tcPr anchor="ctr" marL="73152" marT="9144" marB="9144">
+                    <a:solidFill>
+                      <a:srgbClr val="FFFFFF"/>
+                    </a:solidFill>
+                  </a:tcPr>
+                </a:tc>
+                <a:tc>
+                  <a:txBody>
+                    <a:bodyPr/>
+                    <a:lstStyle/>
+                    <a:p>
+                      <a:r>
+                        <a:rPr sz="1150" b="0">
+                          <a:solidFill>
+                            <a:srgbClr val="1A2233"/>
+                          </a:solidFill>
+                          <a:latin typeface="Microsoft JhengHei"/>
+                          <a:ea typeface="Microsoft JhengHei"/>
+                          <a:cs typeface="Microsoft JhengHei"/>
+                        </a:rPr>
+                        <a:t>周仕杰、李東峰</a:t>
+                      </a:r>
+                    </a:p>
+                  </a:txBody>
+                  <a:tcPr anchor="ctr" marL="73152" marT="9144" marB="9144">
+                    <a:solidFill>
+                      <a:srgbClr val="FFFFFF"/>
+                    </a:solidFill>
+                  </a:tcPr>
+                </a:tc>
+              </a:tr>
+              <a:tr h="298704">
+                <a:tc>
+                  <a:txBody>
+                    <a:bodyPr/>
+                    <a:lstStyle/>
+                    <a:p>
+                      <a:r>
+                        <a:rPr sz="1150" b="0">
+                          <a:solidFill>
+                            <a:srgbClr val="1A2233"/>
+                          </a:solidFill>
+                          <a:latin typeface="Microsoft JhengHei"/>
+                          <a:ea typeface="Microsoft JhengHei"/>
+                          <a:cs typeface="Microsoft JhengHei"/>
+                        </a:rPr>
+                        <a:t>一零四</a:t>
+                      </a:r>
+                    </a:p>
+                  </a:txBody>
+                  <a:tcPr anchor="ctr" marL="73152" marT="9144" marB="9144">
+                    <a:solidFill>
+                      <a:srgbClr val="EEF2F9"/>
+                    </a:solidFill>
+                  </a:tcPr>
+                </a:tc>
+                <a:tc>
+                  <a:txBody>
+                    <a:bodyPr/>
+                    <a:lstStyle/>
+                    <a:p>
+                      <a:r>
+                        <a:rPr sz="1150" b="0">
+                          <a:solidFill>
+                            <a:srgbClr val="1A2233"/>
+                          </a:solidFill>
+                          <a:latin typeface="Microsoft JhengHei"/>
+                          <a:ea typeface="Microsoft JhengHei"/>
+                          <a:cs typeface="Microsoft JhengHei"/>
+                        </a:rPr>
+                        <a:t>3130</a:t>
+                      </a:r>
+                    </a:p>
+                  </a:txBody>
+                  <a:tcPr anchor="ctr" marL="73152" marT="9144" marB="9144">
+                    <a:solidFill>
+                      <a:srgbClr val="EEF2F9"/>
+                    </a:solidFill>
+                  </a:tcPr>
+                </a:tc>
+                <a:tc>
+                  <a:txBody>
+                    <a:bodyPr/>
+                    <a:lstStyle/>
+                    <a:p>
+                      <a:r>
+                        <a:rPr sz="1150" b="1">
+                          <a:solidFill>
+                            <a:srgbClr val="5C6679"/>
+                          </a:solidFill>
+                          <a:latin typeface="Microsoft JhengHei"/>
+                          <a:ea typeface="Microsoft JhengHei"/>
+                          <a:cs typeface="Microsoft JhengHei"/>
+                        </a:rPr>
+                        <a:t>其他</a:t>
+                      </a:r>
+                    </a:p>
+                  </a:txBody>
+                  <a:tcPr anchor="ctr" marL="73152" marT="9144" marB="9144">
+                    <a:solidFill>
+                      <a:srgbClr val="EEF2F9"/>
+                    </a:solidFill>
+                  </a:tcPr>
+                </a:tc>
+                <a:tc>
+                  <a:txBody>
+                    <a:bodyPr/>
+                    <a:lstStyle/>
+                    <a:p>
+                      <a:r>
+                        <a:rPr sz="1150" b="0">
+                          <a:solidFill>
+                            <a:srgbClr val="1A2233"/>
+                          </a:solidFill>
+                          <a:latin typeface="Microsoft JhengHei"/>
+                          <a:ea typeface="Microsoft JhengHei"/>
+                          <a:cs typeface="Microsoft JhengHei"/>
+                        </a:rPr>
+                        <a:t>安侯建業聯合會計師事務所</a:t>
+                      </a:r>
+                    </a:p>
+                  </a:txBody>
+                  <a:tcPr anchor="ctr" marL="73152" marT="9144" marB="9144">
+                    <a:solidFill>
+                      <a:srgbClr val="EEF2F9"/>
+                    </a:solidFill>
+                  </a:tcPr>
+                </a:tc>
+                <a:tc>
+                  <a:txBody>
+                    <a:bodyPr/>
+                    <a:lstStyle/>
+                    <a:p>
+                      <a:r>
+                        <a:rPr sz="1150" b="0">
+                          <a:solidFill>
+                            <a:srgbClr val="1A2233"/>
+                          </a:solidFill>
+                          <a:latin typeface="Microsoft JhengHei"/>
+                          <a:ea typeface="Microsoft JhengHei"/>
+                          <a:cs typeface="Microsoft JhengHei"/>
+                        </a:rPr>
+                        <a:t>趙敏如、江家齊</a:t>
+                      </a:r>
+                    </a:p>
+                  </a:txBody>
+                  <a:tcPr anchor="ctr" marL="73152" marT="9144" marB="9144">
+                    <a:solidFill>
+                      <a:srgbClr val="EEF2F9"/>
+                    </a:solidFill>
+                  </a:tcPr>
+                </a:tc>
+              </a:tr>
+              <a:tr h="298704">
+                <a:tc>
+                  <a:txBody>
+                    <a:bodyPr/>
+                    <a:lstStyle/>
+                    <a:p>
+                      <a:r>
+                        <a:rPr sz="1150" b="0">
+                          <a:solidFill>
+                            <a:srgbClr val="1A2233"/>
+                          </a:solidFill>
+                          <a:latin typeface="Microsoft JhengHei"/>
+                          <a:ea typeface="Microsoft JhengHei"/>
+                          <a:cs typeface="Microsoft JhengHei"/>
+                        </a:rPr>
+                        <a:t>安心</a:t>
+                      </a:r>
+                    </a:p>
+                  </a:txBody>
+                  <a:tcPr anchor="ctr" marL="73152" marT="9144" marB="9144">
+                    <a:solidFill>
+                      <a:srgbClr val="FFFFFF"/>
+                    </a:solidFill>
+                  </a:tcPr>
+                </a:tc>
+                <a:tc>
+                  <a:txBody>
+                    <a:bodyPr/>
+                    <a:lstStyle/>
+                    <a:p>
+                      <a:r>
+                        <a:rPr sz="1150" b="0">
+                          <a:solidFill>
+                            <a:srgbClr val="1A2233"/>
+                          </a:solidFill>
+                          <a:latin typeface="Microsoft JhengHei"/>
+                          <a:ea typeface="Microsoft JhengHei"/>
+                          <a:cs typeface="Microsoft JhengHei"/>
+                        </a:rPr>
+                        <a:t>1259</a:t>
+                      </a:r>
+                    </a:p>
+                  </a:txBody>
+                  <a:tcPr anchor="ctr" marL="73152" marT="9144" marB="9144">
+                    <a:solidFill>
+                      <a:srgbClr val="FFFFFF"/>
+                    </a:solidFill>
+                  </a:tcPr>
+                </a:tc>
+                <a:tc>
+                  <a:txBody>
+                    <a:bodyPr/>
+                    <a:lstStyle/>
+                    <a:p>
+                      <a:r>
+                        <a:rPr sz="1150" b="1">
+                          <a:solidFill>
+                            <a:srgbClr val="27A6C4"/>
+                          </a:solidFill>
+                          <a:latin typeface="Microsoft JhengHei"/>
+                          <a:ea typeface="Microsoft JhengHei"/>
+                          <a:cs typeface="Microsoft JhengHei"/>
+                        </a:rPr>
+                        <a:t>個資外洩</a:t>
+                      </a:r>
+                    </a:p>
+                  </a:txBody>
+                  <a:tcPr anchor="ctr" marL="73152" marT="9144" marB="9144">
+                    <a:solidFill>
+                      <a:srgbClr val="FFFFFF"/>
+                    </a:solidFill>
+                  </a:tcPr>
+                </a:tc>
+                <a:tc>
+                  <a:txBody>
+                    <a:bodyPr/>
+                    <a:lstStyle/>
+                    <a:p>
+                      <a:r>
+                        <a:rPr sz="1150" b="0">
+                          <a:solidFill>
+                            <a:srgbClr val="1A2233"/>
+                          </a:solidFill>
+                          <a:latin typeface="Microsoft JhengHei"/>
+                          <a:ea typeface="Microsoft JhengHei"/>
+                          <a:cs typeface="Microsoft JhengHei"/>
+                        </a:rPr>
+                        <a:t>資誠聯合會計師事務所</a:t>
+                      </a:r>
+                    </a:p>
+                  </a:txBody>
+                  <a:tcPr anchor="ctr" marL="73152" marT="9144" marB="9144">
+                    <a:solidFill>
+                      <a:srgbClr val="FFFFFF"/>
+                    </a:solidFill>
+                  </a:tcPr>
+                </a:tc>
+                <a:tc>
+                  <a:txBody>
+                    <a:bodyPr/>
+                    <a:lstStyle/>
+                    <a:p>
+                      <a:r>
+                        <a:rPr sz="1150" b="0">
+                          <a:solidFill>
+                            <a:srgbClr val="1A2233"/>
+                          </a:solidFill>
+                          <a:latin typeface="Microsoft JhengHei"/>
+                          <a:ea typeface="Microsoft JhengHei"/>
+                          <a:cs typeface="Microsoft JhengHei"/>
+                        </a:rPr>
+                        <a:t>徐明釧、陳怡婷</a:t>
+                      </a:r>
+                    </a:p>
+                  </a:txBody>
+                  <a:tcPr anchor="ctr" marL="73152" marT="9144" marB="9144">
+                    <a:solidFill>
+                      <a:srgbClr val="FFFFFF"/>
+                    </a:solidFill>
+                  </a:tcPr>
+                </a:tc>
+              </a:tr>
+              <a:tr h="298704">
+                <a:tc>
+                  <a:txBody>
+                    <a:bodyPr/>
+                    <a:lstStyle/>
+                    <a:p>
+                      <a:r>
+                        <a:rPr sz="1150" b="0">
+                          <a:solidFill>
+                            <a:srgbClr val="1A2233"/>
+                          </a:solidFill>
+                          <a:latin typeface="Microsoft JhengHei"/>
+                          <a:ea typeface="Microsoft JhengHei"/>
+                          <a:cs typeface="Microsoft JhengHei"/>
+                        </a:rPr>
+                        <a:t>神腦</a:t>
+                      </a:r>
+                    </a:p>
+                  </a:txBody>
+                  <a:tcPr anchor="ctr" marL="73152" marT="9144" marB="9144">
+                    <a:solidFill>
+                      <a:srgbClr val="EEF2F9"/>
+                    </a:solidFill>
+                  </a:tcPr>
+                </a:tc>
+                <a:tc>
+                  <a:txBody>
+                    <a:bodyPr/>
+                    <a:lstStyle/>
+                    <a:p>
+                      <a:r>
+                        <a:rPr sz="1150" b="0">
+                          <a:solidFill>
+                            <a:srgbClr val="1A2233"/>
+                          </a:solidFill>
+                          <a:latin typeface="Microsoft JhengHei"/>
+                          <a:ea typeface="Microsoft JhengHei"/>
+                          <a:cs typeface="Microsoft JhengHei"/>
+                        </a:rPr>
+                        <a:t>2450</a:t>
+                      </a:r>
+                    </a:p>
+                  </a:txBody>
+                  <a:tcPr anchor="ctr" marL="73152" marT="9144" marB="9144">
+                    <a:solidFill>
+                      <a:srgbClr val="EEF2F9"/>
+                    </a:solidFill>
+                  </a:tcPr>
+                </a:tc>
+                <a:tc>
+                  <a:txBody>
+                    <a:bodyPr/>
+                    <a:lstStyle/>
+                    <a:p>
+                      <a:r>
+                        <a:rPr sz="1150" b="1">
+                          <a:solidFill>
+                            <a:srgbClr val="E63946"/>
+                          </a:solidFill>
+                          <a:latin typeface="Microsoft JhengHei"/>
+                          <a:ea typeface="Microsoft JhengHei"/>
+                          <a:cs typeface="Microsoft JhengHei"/>
+                        </a:rPr>
+                        <a:t>駭客攻擊</a:t>
+                      </a:r>
+                    </a:p>
+                  </a:txBody>
+                  <a:tcPr anchor="ctr" marL="73152" marT="9144" marB="9144">
+                    <a:solidFill>
+                      <a:srgbClr val="EEF2F9"/>
+                    </a:solidFill>
+                  </a:tcPr>
+                </a:tc>
+                <a:tc>
+                  <a:txBody>
+                    <a:bodyPr/>
+                    <a:lstStyle/>
+                    <a:p>
+                      <a:r>
+                        <a:rPr sz="1150" b="0">
+                          <a:solidFill>
+                            <a:srgbClr val="1A2233"/>
+                          </a:solidFill>
+                          <a:latin typeface="Microsoft JhengHei"/>
+                          <a:ea typeface="Microsoft JhengHei"/>
+                          <a:cs typeface="Microsoft JhengHei"/>
+                        </a:rPr>
                         <a:t>資誠聯合會計師事務所</a:t>
                       </a:r>
                     </a:p>
@@ -7362,7 +8095,7 @@
                           <a:ea typeface="Microsoft JhengHei"/>
                           <a:cs typeface="Microsoft JhengHei"/>
                         </a:rPr>
-                        <a:t>徐明釧、陳怡婷</a:t>
+                        <a:t>王銘義、林永智</a:t>
                       </a:r>
                     </a:p>
                   </a:txBody>
@@ -7373,7 +8106,7 @@
                   </a:tcPr>
                 </a:tc>
               </a:tr>
-              <a:tr h="344658">
+              <a:tr h="298704">
                 <a:tc>
                   <a:txBody>
                     <a:bodyPr/>
@@ -7388,7 +8121,7 @@
                           <a:ea typeface="Microsoft JhengHei"/>
                           <a:cs typeface="Microsoft JhengHei"/>
                         </a:rPr>
-                        <a:t>神腦</a:t>
+                        <a:t>鈊象</a:t>
                       </a:r>
                     </a:p>
                   </a:txBody>
@@ -7412,7 +8145,739 @@
                           <a:ea typeface="Microsoft JhengHei"/>
                           <a:cs typeface="Microsoft JhengHei"/>
                         </a:rPr>
-                        <a:t>2450</a:t>
+                        <a:t>3293</a:t>
+                      </a:r>
+                    </a:p>
+                  </a:txBody>
+                  <a:tcPr anchor="ctr" marL="73152" marT="9144" marB="9144">
+                    <a:solidFill>
+                      <a:srgbClr val="FFFFFF"/>
+                    </a:solidFill>
+                  </a:tcPr>
+                </a:tc>
+                <a:tc>
+                  <a:txBody>
+                    <a:bodyPr/>
+                    <a:lstStyle/>
+                    <a:p>
+                      <a:r>
+                        <a:rPr sz="1150" b="1">
+                          <a:solidFill>
+                            <a:srgbClr val="5C6679"/>
+                          </a:solidFill>
+                          <a:latin typeface="Microsoft JhengHei"/>
+                          <a:ea typeface="Microsoft JhengHei"/>
+                          <a:cs typeface="Microsoft JhengHei"/>
+                        </a:rPr>
+                        <a:t>其他</a:t>
+                      </a:r>
+                    </a:p>
+                  </a:txBody>
+                  <a:tcPr anchor="ctr" marL="73152" marT="9144" marB="9144">
+                    <a:solidFill>
+                      <a:srgbClr val="FFFFFF"/>
+                    </a:solidFill>
+                  </a:tcPr>
+                </a:tc>
+                <a:tc>
+                  <a:txBody>
+                    <a:bodyPr/>
+                    <a:lstStyle/>
+                    <a:p>
+                      <a:r>
+                        <a:rPr sz="1150" b="0">
+                          <a:solidFill>
+                            <a:srgbClr val="1A2233"/>
+                          </a:solidFill>
+                          <a:latin typeface="Microsoft JhengHei"/>
+                          <a:ea typeface="Microsoft JhengHei"/>
+                          <a:cs typeface="Microsoft JhengHei"/>
+                        </a:rPr>
+                        <a:t>勤業眾信聯合會計師事務所</a:t>
+                      </a:r>
+                    </a:p>
+                  </a:txBody>
+                  <a:tcPr anchor="ctr" marL="73152" marT="9144" marB="9144">
+                    <a:solidFill>
+                      <a:srgbClr val="FFFFFF"/>
+                    </a:solidFill>
+                  </a:tcPr>
+                </a:tc>
+                <a:tc>
+                  <a:txBody>
+                    <a:bodyPr/>
+                    <a:lstStyle/>
+                    <a:p>
+                      <a:r>
+                        <a:rPr sz="1150" b="0">
+                          <a:solidFill>
+                            <a:srgbClr val="1A2233"/>
+                          </a:solidFill>
+                          <a:latin typeface="Microsoft JhengHei"/>
+                          <a:ea typeface="Microsoft JhengHei"/>
+                          <a:cs typeface="Microsoft JhengHei"/>
+                        </a:rPr>
+                        <a:t>周仕杰、李東峰</a:t>
+                      </a:r>
+                    </a:p>
+                  </a:txBody>
+                  <a:tcPr anchor="ctr" marL="73152" marT="9144" marB="9144">
+                    <a:solidFill>
+                      <a:srgbClr val="FFFFFF"/>
+                    </a:solidFill>
+                  </a:tcPr>
+                </a:tc>
+              </a:tr>
+              <a:tr h="298704">
+                <a:tc>
+                  <a:txBody>
+                    <a:bodyPr/>
+                    <a:lstStyle/>
+                    <a:p>
+                      <a:r>
+                        <a:rPr sz="1150" b="0">
+                          <a:solidFill>
+                            <a:srgbClr val="1A2233"/>
+                          </a:solidFill>
+                          <a:latin typeface="Microsoft JhengHei"/>
+                          <a:ea typeface="Microsoft JhengHei"/>
+                          <a:cs typeface="Microsoft JhengHei"/>
+                        </a:rPr>
+                        <a:t>柏文</a:t>
+                      </a:r>
+                    </a:p>
+                  </a:txBody>
+                  <a:tcPr anchor="ctr" marL="73152" marT="9144" marB="9144">
+                    <a:solidFill>
+                      <a:srgbClr val="EEF2F9"/>
+                    </a:solidFill>
+                  </a:tcPr>
+                </a:tc>
+                <a:tc>
+                  <a:txBody>
+                    <a:bodyPr/>
+                    <a:lstStyle/>
+                    <a:p>
+                      <a:r>
+                        <a:rPr sz="1150" b="0">
+                          <a:solidFill>
+                            <a:srgbClr val="1A2233"/>
+                          </a:solidFill>
+                          <a:latin typeface="Microsoft JhengHei"/>
+                          <a:ea typeface="Microsoft JhengHei"/>
+                          <a:cs typeface="Microsoft JhengHei"/>
+                        </a:rPr>
+                        <a:t>8462</a:t>
+                      </a:r>
+                    </a:p>
+                  </a:txBody>
+                  <a:tcPr anchor="ctr" marL="73152" marT="9144" marB="9144">
+                    <a:solidFill>
+                      <a:srgbClr val="EEF2F9"/>
+                    </a:solidFill>
+                  </a:tcPr>
+                </a:tc>
+                <a:tc>
+                  <a:txBody>
+                    <a:bodyPr/>
+                    <a:lstStyle/>
+                    <a:p>
+                      <a:r>
+                        <a:rPr sz="1150" b="1">
+                          <a:solidFill>
+                            <a:srgbClr val="27A6C4"/>
+                          </a:solidFill>
+                          <a:latin typeface="Microsoft JhengHei"/>
+                          <a:ea typeface="Microsoft JhengHei"/>
+                          <a:cs typeface="Microsoft JhengHei"/>
+                        </a:rPr>
+                        <a:t>個資外洩</a:t>
+                      </a:r>
+                    </a:p>
+                  </a:txBody>
+                  <a:tcPr anchor="ctr" marL="73152" marT="9144" marB="9144">
+                    <a:solidFill>
+                      <a:srgbClr val="EEF2F9"/>
+                    </a:solidFill>
+                  </a:tcPr>
+                </a:tc>
+                <a:tc>
+                  <a:txBody>
+                    <a:bodyPr/>
+                    <a:lstStyle/>
+                    <a:p>
+                      <a:r>
+                        <a:rPr sz="1150" b="0">
+                          <a:solidFill>
+                            <a:srgbClr val="1A2233"/>
+                          </a:solidFill>
+                          <a:latin typeface="Microsoft JhengHei"/>
+                          <a:ea typeface="Microsoft JhengHei"/>
+                          <a:cs typeface="Microsoft JhengHei"/>
+                        </a:rPr>
+                        <a:t>安永聯合會計師事務所</a:t>
+                      </a:r>
+                    </a:p>
+                  </a:txBody>
+                  <a:tcPr anchor="ctr" marL="73152" marT="9144" marB="9144">
+                    <a:solidFill>
+                      <a:srgbClr val="EEF2F9"/>
+                    </a:solidFill>
+                  </a:tcPr>
+                </a:tc>
+                <a:tc>
+                  <a:txBody>
+                    <a:bodyPr/>
+                    <a:lstStyle/>
+                    <a:p>
+                      <a:r>
+                        <a:rPr sz="1150" b="0">
+                          <a:solidFill>
+                            <a:srgbClr val="1A2233"/>
+                          </a:solidFill>
+                          <a:latin typeface="Microsoft JhengHei"/>
+                          <a:ea typeface="Microsoft JhengHei"/>
+                          <a:cs typeface="Microsoft JhengHei"/>
+                        </a:rPr>
+                        <a:t>洪福讚、陳政初</a:t>
+                      </a:r>
+                    </a:p>
+                  </a:txBody>
+                  <a:tcPr anchor="ctr" marL="73152" marT="9144" marB="9144">
+                    <a:solidFill>
+                      <a:srgbClr val="EEF2F9"/>
+                    </a:solidFill>
+                  </a:tcPr>
+                </a:tc>
+              </a:tr>
+              <a:tr h="298704">
+                <a:tc>
+                  <a:txBody>
+                    <a:bodyPr/>
+                    <a:lstStyle/>
+                    <a:p>
+                      <a:r>
+                        <a:rPr sz="1150" b="0">
+                          <a:solidFill>
+                            <a:srgbClr val="1A2233"/>
+                          </a:solidFill>
+                          <a:latin typeface="Microsoft JhengHei"/>
+                          <a:ea typeface="Microsoft JhengHei"/>
+                          <a:cs typeface="Microsoft JhengHei"/>
+                        </a:rPr>
+                        <a:t>友訊</a:t>
+                      </a:r>
+                    </a:p>
+                  </a:txBody>
+                  <a:tcPr anchor="ctr" marL="73152" marT="9144" marB="9144">
+                    <a:solidFill>
+                      <a:srgbClr val="FFFFFF"/>
+                    </a:solidFill>
+                  </a:tcPr>
+                </a:tc>
+                <a:tc>
+                  <a:txBody>
+                    <a:bodyPr/>
+                    <a:lstStyle/>
+                    <a:p>
+                      <a:r>
+                        <a:rPr sz="1150" b="0">
+                          <a:solidFill>
+                            <a:srgbClr val="1A2233"/>
+                          </a:solidFill>
+                          <a:latin typeface="Microsoft JhengHei"/>
+                          <a:ea typeface="Microsoft JhengHei"/>
+                          <a:cs typeface="Microsoft JhengHei"/>
+                        </a:rPr>
+                        <a:t>2332</a:t>
+                      </a:r>
+                    </a:p>
+                  </a:txBody>
+                  <a:tcPr anchor="ctr" marL="73152" marT="9144" marB="9144">
+                    <a:solidFill>
+                      <a:srgbClr val="FFFFFF"/>
+                    </a:solidFill>
+                  </a:tcPr>
+                </a:tc>
+                <a:tc>
+                  <a:txBody>
+                    <a:bodyPr/>
+                    <a:lstStyle/>
+                    <a:p>
+                      <a:r>
+                        <a:rPr sz="1150" b="1">
+                          <a:solidFill>
+                            <a:srgbClr val="E63946"/>
+                          </a:solidFill>
+                          <a:latin typeface="Microsoft JhengHei"/>
+                          <a:ea typeface="Microsoft JhengHei"/>
+                          <a:cs typeface="Microsoft JhengHei"/>
+                        </a:rPr>
+                        <a:t>駭客攻擊</a:t>
+                      </a:r>
+                    </a:p>
+                  </a:txBody>
+                  <a:tcPr anchor="ctr" marL="73152" marT="9144" marB="9144">
+                    <a:solidFill>
+                      <a:srgbClr val="FFFFFF"/>
+                    </a:solidFill>
+                  </a:tcPr>
+                </a:tc>
+                <a:tc>
+                  <a:txBody>
+                    <a:bodyPr/>
+                    <a:lstStyle/>
+                    <a:p>
+                      <a:r>
+                        <a:rPr sz="1150" b="0">
+                          <a:solidFill>
+                            <a:srgbClr val="1A2233"/>
+                          </a:solidFill>
+                          <a:latin typeface="Microsoft JhengHei"/>
+                          <a:ea typeface="Microsoft JhengHei"/>
+                          <a:cs typeface="Microsoft JhengHei"/>
+                        </a:rPr>
+                        <a:t>安侯建業聯合會計師事務所</a:t>
+                      </a:r>
+                    </a:p>
+                  </a:txBody>
+                  <a:tcPr anchor="ctr" marL="73152" marT="9144" marB="9144">
+                    <a:solidFill>
+                      <a:srgbClr val="FFFFFF"/>
+                    </a:solidFill>
+                  </a:tcPr>
+                </a:tc>
+                <a:tc>
+                  <a:txBody>
+                    <a:bodyPr/>
+                    <a:lstStyle/>
+                    <a:p>
+                      <a:r>
+                        <a:rPr sz="1150" b="0">
+                          <a:solidFill>
+                            <a:srgbClr val="1A2233"/>
+                          </a:solidFill>
+                          <a:latin typeface="Microsoft JhengHei"/>
+                          <a:ea typeface="Microsoft JhengHei"/>
+                          <a:cs typeface="Microsoft JhengHei"/>
+                        </a:rPr>
+                        <a:t>梅元貞、謝秋華</a:t>
+                      </a:r>
+                    </a:p>
+                  </a:txBody>
+                  <a:tcPr anchor="ctr" marL="73152" marT="9144" marB="9144">
+                    <a:solidFill>
+                      <a:srgbClr val="FFFFFF"/>
+                    </a:solidFill>
+                  </a:tcPr>
+                </a:tc>
+              </a:tr>
+              <a:tr h="298704">
+                <a:tc>
+                  <a:txBody>
+                    <a:bodyPr/>
+                    <a:lstStyle/>
+                    <a:p>
+                      <a:r>
+                        <a:rPr sz="1150" b="0">
+                          <a:solidFill>
+                            <a:srgbClr val="1A2233"/>
+                          </a:solidFill>
+                          <a:latin typeface="Microsoft JhengHei"/>
+                          <a:ea typeface="Microsoft JhengHei"/>
+                          <a:cs typeface="Microsoft JhengHei"/>
+                        </a:rPr>
+                        <a:t>長榮航</a:t>
+                      </a:r>
+                    </a:p>
+                  </a:txBody>
+                  <a:tcPr anchor="ctr" marL="73152" marT="9144" marB="9144">
+                    <a:solidFill>
+                      <a:srgbClr val="EEF2F9"/>
+                    </a:solidFill>
+                  </a:tcPr>
+                </a:tc>
+                <a:tc>
+                  <a:txBody>
+                    <a:bodyPr/>
+                    <a:lstStyle/>
+                    <a:p>
+                      <a:r>
+                        <a:rPr sz="1150" b="0">
+                          <a:solidFill>
+                            <a:srgbClr val="1A2233"/>
+                          </a:solidFill>
+                          <a:latin typeface="Microsoft JhengHei"/>
+                          <a:ea typeface="Microsoft JhengHei"/>
+                          <a:cs typeface="Microsoft JhengHei"/>
+                        </a:rPr>
+                        <a:t>2618</a:t>
+                      </a:r>
+                    </a:p>
+                  </a:txBody>
+                  <a:tcPr anchor="ctr" marL="73152" marT="9144" marB="9144">
+                    <a:solidFill>
+                      <a:srgbClr val="EEF2F9"/>
+                    </a:solidFill>
+                  </a:tcPr>
+                </a:tc>
+                <a:tc>
+                  <a:txBody>
+                    <a:bodyPr/>
+                    <a:lstStyle/>
+                    <a:p>
+                      <a:r>
+                        <a:rPr sz="1150" b="1">
+                          <a:solidFill>
+                            <a:srgbClr val="E63946"/>
+                          </a:solidFill>
+                          <a:latin typeface="Microsoft JhengHei"/>
+                          <a:ea typeface="Microsoft JhengHei"/>
+                          <a:cs typeface="Microsoft JhengHei"/>
+                        </a:rPr>
+                        <a:t>駭客攻擊</a:t>
+                      </a:r>
+                    </a:p>
+                  </a:txBody>
+                  <a:tcPr anchor="ctr" marL="73152" marT="9144" marB="9144">
+                    <a:solidFill>
+                      <a:srgbClr val="EEF2F9"/>
+                    </a:solidFill>
+                  </a:tcPr>
+                </a:tc>
+                <a:tc>
+                  <a:txBody>
+                    <a:bodyPr/>
+                    <a:lstStyle/>
+                    <a:p>
+                      <a:r>
+                        <a:rPr sz="1150" b="0">
+                          <a:solidFill>
+                            <a:srgbClr val="1A2233"/>
+                          </a:solidFill>
+                          <a:latin typeface="Microsoft JhengHei"/>
+                          <a:ea typeface="Microsoft JhengHei"/>
+                          <a:cs typeface="Microsoft JhengHei"/>
+                        </a:rPr>
+                        <a:t>安侯建業聯合會計師事務所</a:t>
+                      </a:r>
+                    </a:p>
+                  </a:txBody>
+                  <a:tcPr anchor="ctr" marL="73152" marT="9144" marB="9144">
+                    <a:solidFill>
+                      <a:srgbClr val="EEF2F9"/>
+                    </a:solidFill>
+                  </a:tcPr>
+                </a:tc>
+                <a:tc>
+                  <a:txBody>
+                    <a:bodyPr/>
+                    <a:lstStyle/>
+                    <a:p>
+                      <a:r>
+                        <a:rPr sz="1150" b="0">
+                          <a:solidFill>
+                            <a:srgbClr val="1A2233"/>
+                          </a:solidFill>
+                          <a:latin typeface="Microsoft JhengHei"/>
+                          <a:ea typeface="Microsoft JhengHei"/>
+                          <a:cs typeface="Microsoft JhengHei"/>
+                        </a:rPr>
+                        <a:t>陳雅琳、楊雲筑</a:t>
+                      </a:r>
+                    </a:p>
+                  </a:txBody>
+                  <a:tcPr anchor="ctr" marL="73152" marT="9144" marB="9144">
+                    <a:solidFill>
+                      <a:srgbClr val="EEF2F9"/>
+                    </a:solidFill>
+                  </a:tcPr>
+                </a:tc>
+              </a:tr>
+              <a:tr h="298704">
+                <a:tc>
+                  <a:txBody>
+                    <a:bodyPr/>
+                    <a:lstStyle/>
+                    <a:p>
+                      <a:r>
+                        <a:rPr sz="1150" b="0">
+                          <a:solidFill>
+                            <a:srgbClr val="1A2233"/>
+                          </a:solidFill>
+                          <a:latin typeface="Microsoft JhengHei"/>
+                          <a:ea typeface="Microsoft JhengHei"/>
+                          <a:cs typeface="Microsoft JhengHei"/>
+                        </a:rPr>
+                        <a:t>長榮航太</a:t>
+                      </a:r>
+                    </a:p>
+                  </a:txBody>
+                  <a:tcPr anchor="ctr" marL="73152" marT="9144" marB="9144">
+                    <a:solidFill>
+                      <a:srgbClr val="FFFFFF"/>
+                    </a:solidFill>
+                  </a:tcPr>
+                </a:tc>
+                <a:tc>
+                  <a:txBody>
+                    <a:bodyPr/>
+                    <a:lstStyle/>
+                    <a:p>
+                      <a:r>
+                        <a:rPr sz="1150" b="0">
+                          <a:solidFill>
+                            <a:srgbClr val="1A2233"/>
+                          </a:solidFill>
+                          <a:latin typeface="Microsoft JhengHei"/>
+                          <a:ea typeface="Microsoft JhengHei"/>
+                          <a:cs typeface="Microsoft JhengHei"/>
+                        </a:rPr>
+                        <a:t>2645</a:t>
+                      </a:r>
+                    </a:p>
+                  </a:txBody>
+                  <a:tcPr anchor="ctr" marL="73152" marT="9144" marB="9144">
+                    <a:solidFill>
+                      <a:srgbClr val="FFFFFF"/>
+                    </a:solidFill>
+                  </a:tcPr>
+                </a:tc>
+                <a:tc>
+                  <a:txBody>
+                    <a:bodyPr/>
+                    <a:lstStyle/>
+                    <a:p>
+                      <a:r>
+                        <a:rPr sz="1150" b="1">
+                          <a:solidFill>
+                            <a:srgbClr val="E63946"/>
+                          </a:solidFill>
+                          <a:latin typeface="Microsoft JhengHei"/>
+                          <a:ea typeface="Microsoft JhengHei"/>
+                          <a:cs typeface="Microsoft JhengHei"/>
+                        </a:rPr>
+                        <a:t>駭客攻擊</a:t>
+                      </a:r>
+                    </a:p>
+                  </a:txBody>
+                  <a:tcPr anchor="ctr" marL="73152" marT="9144" marB="9144">
+                    <a:solidFill>
+                      <a:srgbClr val="FFFFFF"/>
+                    </a:solidFill>
+                  </a:tcPr>
+                </a:tc>
+                <a:tc>
+                  <a:txBody>
+                    <a:bodyPr/>
+                    <a:lstStyle/>
+                    <a:p>
+                      <a:r>
+                        <a:rPr sz="1150" b="0">
+                          <a:solidFill>
+                            <a:srgbClr val="1A2233"/>
+                          </a:solidFill>
+                          <a:latin typeface="Microsoft JhengHei"/>
+                          <a:ea typeface="Microsoft JhengHei"/>
+                          <a:cs typeface="Microsoft JhengHei"/>
+                        </a:rPr>
+                        <a:t>安侯建業聯合會計師事務所</a:t>
+                      </a:r>
+                    </a:p>
+                  </a:txBody>
+                  <a:tcPr anchor="ctr" marL="73152" marT="9144" marB="9144">
+                    <a:solidFill>
+                      <a:srgbClr val="FFFFFF"/>
+                    </a:solidFill>
+                  </a:tcPr>
+                </a:tc>
+                <a:tc>
+                  <a:txBody>
+                    <a:bodyPr/>
+                    <a:lstStyle/>
+                    <a:p>
+                      <a:r>
+                        <a:rPr sz="1150" b="0">
+                          <a:solidFill>
+                            <a:srgbClr val="1A2233"/>
+                          </a:solidFill>
+                          <a:latin typeface="Microsoft JhengHei"/>
+                          <a:ea typeface="Microsoft JhengHei"/>
+                          <a:cs typeface="Microsoft JhengHei"/>
+                        </a:rPr>
+                        <a:t>陳雅琳、鄭博仁</a:t>
+                      </a:r>
+                    </a:p>
+                  </a:txBody>
+                  <a:tcPr anchor="ctr" marL="73152" marT="9144" marB="9144">
+                    <a:solidFill>
+                      <a:srgbClr val="FFFFFF"/>
+                    </a:solidFill>
+                  </a:tcPr>
+                </a:tc>
+              </a:tr>
+              <a:tr h="298704">
+                <a:tc>
+                  <a:txBody>
+                    <a:bodyPr/>
+                    <a:lstStyle/>
+                    <a:p>
+                      <a:r>
+                        <a:rPr sz="1150" b="0">
+                          <a:solidFill>
+                            <a:srgbClr val="1A2233"/>
+                          </a:solidFill>
+                          <a:latin typeface="Microsoft JhengHei"/>
+                          <a:ea typeface="Microsoft JhengHei"/>
+                          <a:cs typeface="Microsoft JhengHei"/>
+                        </a:rPr>
+                        <a:t>崴寶</a:t>
+                      </a:r>
+                    </a:p>
+                  </a:txBody>
+                  <a:tcPr anchor="ctr" marL="73152" marT="9144" marB="9144">
+                    <a:solidFill>
+                      <a:srgbClr val="EEF2F9"/>
+                    </a:solidFill>
+                  </a:tcPr>
+                </a:tc>
+                <a:tc>
+                  <a:txBody>
+                    <a:bodyPr/>
+                    <a:lstStyle/>
+                    <a:p>
+                      <a:r>
+                        <a:rPr sz="1150" b="0">
+                          <a:solidFill>
+                            <a:srgbClr val="1A2233"/>
+                          </a:solidFill>
+                          <a:latin typeface="Microsoft JhengHei"/>
+                          <a:ea typeface="Microsoft JhengHei"/>
+                          <a:cs typeface="Microsoft JhengHei"/>
+                        </a:rPr>
+                        <a:t>7744</a:t>
+                      </a:r>
+                    </a:p>
+                  </a:txBody>
+                  <a:tcPr anchor="ctr" marL="73152" marT="9144" marB="9144">
+                    <a:solidFill>
+                      <a:srgbClr val="EEF2F9"/>
+                    </a:solidFill>
+                  </a:tcPr>
+                </a:tc>
+                <a:tc>
+                  <a:txBody>
+                    <a:bodyPr/>
+                    <a:lstStyle/>
+                    <a:p>
+                      <a:r>
+                        <a:rPr sz="1150" b="1">
+                          <a:solidFill>
+                            <a:srgbClr val="F4A261"/>
+                          </a:solidFill>
+                          <a:latin typeface="Microsoft JhengHei"/>
+                          <a:ea typeface="Microsoft JhengHei"/>
+                          <a:cs typeface="Microsoft JhengHei"/>
+                        </a:rPr>
+                        <a:t>勒索病毒/加密</a:t>
+                      </a:r>
+                    </a:p>
+                  </a:txBody>
+                  <a:tcPr anchor="ctr" marL="73152" marT="9144" marB="9144">
+                    <a:solidFill>
+                      <a:srgbClr val="EEF2F9"/>
+                    </a:solidFill>
+                  </a:tcPr>
+                </a:tc>
+                <a:tc>
+                  <a:txBody>
+                    <a:bodyPr/>
+                    <a:lstStyle/>
+                    <a:p>
+                      <a:r>
+                        <a:rPr sz="1150" b="0">
+                          <a:solidFill>
+                            <a:srgbClr val="1A2233"/>
+                          </a:solidFill>
+                          <a:latin typeface="Microsoft JhengHei"/>
+                          <a:ea typeface="Microsoft JhengHei"/>
+                          <a:cs typeface="Microsoft JhengHei"/>
+                        </a:rPr>
+                        <a:t>安永聯合會計師事務所</a:t>
+                      </a:r>
+                    </a:p>
+                  </a:txBody>
+                  <a:tcPr anchor="ctr" marL="73152" marT="9144" marB="9144">
+                    <a:solidFill>
+                      <a:srgbClr val="EEF2F9"/>
+                    </a:solidFill>
+                  </a:tcPr>
+                </a:tc>
+                <a:tc>
+                  <a:txBody>
+                    <a:bodyPr/>
+                    <a:lstStyle/>
+                    <a:p>
+                      <a:r>
+                        <a:rPr sz="1150" b="0">
+                          <a:solidFill>
+                            <a:srgbClr val="1A2233"/>
+                          </a:solidFill>
+                          <a:latin typeface="Microsoft JhengHei"/>
+                          <a:ea typeface="Microsoft JhengHei"/>
+                          <a:cs typeface="Microsoft JhengHei"/>
+                        </a:rPr>
+                        <a:t>黃宇廷、黃子評</a:t>
+                      </a:r>
+                    </a:p>
+                  </a:txBody>
+                  <a:tcPr anchor="ctr" marL="73152" marT="9144" marB="9144">
+                    <a:solidFill>
+                      <a:srgbClr val="EEF2F9"/>
+                    </a:solidFill>
+                  </a:tcPr>
+                </a:tc>
+              </a:tr>
+              <a:tr h="298704">
+                <a:tc>
+                  <a:txBody>
+                    <a:bodyPr/>
+                    <a:lstStyle/>
+                    <a:p>
+                      <a:r>
+                        <a:rPr sz="1150" b="0">
+                          <a:solidFill>
+                            <a:srgbClr val="1A2233"/>
+                          </a:solidFill>
+                          <a:latin typeface="Microsoft JhengHei"/>
+                          <a:ea typeface="Microsoft JhengHei"/>
+                          <a:cs typeface="Microsoft JhengHei"/>
+                        </a:rPr>
+                        <a:t>達爾膚</a:t>
+                      </a:r>
+                    </a:p>
+                  </a:txBody>
+                  <a:tcPr anchor="ctr" marL="73152" marT="9144" marB="9144">
+                    <a:solidFill>
+                      <a:srgbClr val="FFFFFF"/>
+                    </a:solidFill>
+                  </a:tcPr>
+                </a:tc>
+                <a:tc>
+                  <a:txBody>
+                    <a:bodyPr/>
+                    <a:lstStyle/>
+                    <a:p>
+                      <a:r>
+                        <a:rPr sz="1150" b="0">
+                          <a:solidFill>
+                            <a:srgbClr val="1A2233"/>
+                          </a:solidFill>
+                          <a:latin typeface="Microsoft JhengHei"/>
+                          <a:ea typeface="Microsoft JhengHei"/>
+                          <a:cs typeface="Microsoft JhengHei"/>
+                        </a:rPr>
+                        <a:t>6523</a:t>
                       </a:r>
                     </a:p>
                   </a:txBody>
@@ -7484,7 +8949,7 @@
                           <a:ea typeface="Microsoft JhengHei"/>
                           <a:cs typeface="Microsoft JhengHei"/>
                         </a:rPr>
-                        <a:t>王銘義、林永智</a:t>
+                        <a:t>于智帆、葉翠苗</a:t>
                       </a:r>
                     </a:p>
                   </a:txBody>
@@ -7495,7 +8960,7 @@
                   </a:tcPr>
                 </a:tc>
               </a:tr>
-              <a:tr h="344658">
+              <a:tr h="298704">
                 <a:tc>
                   <a:txBody>
                     <a:bodyPr/>
@@ -7510,7 +8975,7 @@
                           <a:ea typeface="Microsoft JhengHei"/>
                           <a:cs typeface="Microsoft JhengHei"/>
                         </a:rPr>
-                        <a:t>鈊象</a:t>
+                        <a:t>大車隊</a:t>
                       </a:r>
                     </a:p>
                   </a:txBody>
@@ -7534,739 +8999,7 @@
                           <a:ea typeface="Microsoft JhengHei"/>
                           <a:cs typeface="Microsoft JhengHei"/>
                         </a:rPr>
-                        <a:t>3293</a:t>
-                      </a:r>
-                    </a:p>
-                  </a:txBody>
-                  <a:tcPr anchor="ctr" marL="73152" marT="9144" marB="9144">
-                    <a:solidFill>
-                      <a:srgbClr val="EEF2F9"/>
-                    </a:solidFill>
-                  </a:tcPr>
-                </a:tc>
-                <a:tc>
-                  <a:txBody>
-                    <a:bodyPr/>
-                    <a:lstStyle/>
-                    <a:p>
-                      <a:r>
-                        <a:rPr sz="1150" b="1">
-                          <a:solidFill>
-                            <a:srgbClr val="5C6679"/>
-                          </a:solidFill>
-                          <a:latin typeface="Microsoft JhengHei"/>
-                          <a:ea typeface="Microsoft JhengHei"/>
-                          <a:cs typeface="Microsoft JhengHei"/>
-                        </a:rPr>
-                        <a:t>其他</a:t>
-                      </a:r>
-                    </a:p>
-                  </a:txBody>
-                  <a:tcPr anchor="ctr" marL="73152" marT="9144" marB="9144">
-                    <a:solidFill>
-                      <a:srgbClr val="EEF2F9"/>
-                    </a:solidFill>
-                  </a:tcPr>
-                </a:tc>
-                <a:tc>
-                  <a:txBody>
-                    <a:bodyPr/>
-                    <a:lstStyle/>
-                    <a:p>
-                      <a:r>
-                        <a:rPr sz="1150" b="0">
-                          <a:solidFill>
-                            <a:srgbClr val="1A2233"/>
-                          </a:solidFill>
-                          <a:latin typeface="Microsoft JhengHei"/>
-                          <a:ea typeface="Microsoft JhengHei"/>
-                          <a:cs typeface="Microsoft JhengHei"/>
-                        </a:rPr>
-                        <a:t>勤業眾信聯合會計師事務所</a:t>
-                      </a:r>
-                    </a:p>
-                  </a:txBody>
-                  <a:tcPr anchor="ctr" marL="73152" marT="9144" marB="9144">
-                    <a:solidFill>
-                      <a:srgbClr val="EEF2F9"/>
-                    </a:solidFill>
-                  </a:tcPr>
-                </a:tc>
-                <a:tc>
-                  <a:txBody>
-                    <a:bodyPr/>
-                    <a:lstStyle/>
-                    <a:p>
-                      <a:r>
-                        <a:rPr sz="1150" b="0">
-                          <a:solidFill>
-                            <a:srgbClr val="1A2233"/>
-                          </a:solidFill>
-                          <a:latin typeface="Microsoft JhengHei"/>
-                          <a:ea typeface="Microsoft JhengHei"/>
-                          <a:cs typeface="Microsoft JhengHei"/>
-                        </a:rPr>
-                        <a:t>周仕杰、李東峰</a:t>
-                      </a:r>
-                    </a:p>
-                  </a:txBody>
-                  <a:tcPr anchor="ctr" marL="73152" marT="9144" marB="9144">
-                    <a:solidFill>
-                      <a:srgbClr val="EEF2F9"/>
-                    </a:solidFill>
-                  </a:tcPr>
-                </a:tc>
-              </a:tr>
-              <a:tr h="344658">
-                <a:tc>
-                  <a:txBody>
-                    <a:bodyPr/>
-                    <a:lstStyle/>
-                    <a:p>
-                      <a:r>
-                        <a:rPr sz="1150" b="0">
-                          <a:solidFill>
-                            <a:srgbClr val="1A2233"/>
-                          </a:solidFill>
-                          <a:latin typeface="Microsoft JhengHei"/>
-                          <a:ea typeface="Microsoft JhengHei"/>
-                          <a:cs typeface="Microsoft JhengHei"/>
-                        </a:rPr>
-                        <a:t>柏文</a:t>
-                      </a:r>
-                    </a:p>
-                  </a:txBody>
-                  <a:tcPr anchor="ctr" marL="73152" marT="9144" marB="9144">
-                    <a:solidFill>
-                      <a:srgbClr val="FFFFFF"/>
-                    </a:solidFill>
-                  </a:tcPr>
-                </a:tc>
-                <a:tc>
-                  <a:txBody>
-                    <a:bodyPr/>
-                    <a:lstStyle/>
-                    <a:p>
-                      <a:r>
-                        <a:rPr sz="1150" b="0">
-                          <a:solidFill>
-                            <a:srgbClr val="1A2233"/>
-                          </a:solidFill>
-                          <a:latin typeface="Microsoft JhengHei"/>
-                          <a:ea typeface="Microsoft JhengHei"/>
-                          <a:cs typeface="Microsoft JhengHei"/>
-                        </a:rPr>
-                        <a:t>8462</a:t>
-                      </a:r>
-                    </a:p>
-                  </a:txBody>
-                  <a:tcPr anchor="ctr" marL="73152" marT="9144" marB="9144">
-                    <a:solidFill>
-                      <a:srgbClr val="FFFFFF"/>
-                    </a:solidFill>
-                  </a:tcPr>
-                </a:tc>
-                <a:tc>
-                  <a:txBody>
-                    <a:bodyPr/>
-                    <a:lstStyle/>
-                    <a:p>
-                      <a:r>
-                        <a:rPr sz="1150" b="1">
-                          <a:solidFill>
-                            <a:srgbClr val="27A6C4"/>
-                          </a:solidFill>
-                          <a:latin typeface="Microsoft JhengHei"/>
-                          <a:ea typeface="Microsoft JhengHei"/>
-                          <a:cs typeface="Microsoft JhengHei"/>
-                        </a:rPr>
-                        <a:t>個資外洩</a:t>
-                      </a:r>
-                    </a:p>
-                  </a:txBody>
-                  <a:tcPr anchor="ctr" marL="73152" marT="9144" marB="9144">
-                    <a:solidFill>
-                      <a:srgbClr val="FFFFFF"/>
-                    </a:solidFill>
-                  </a:tcPr>
-                </a:tc>
-                <a:tc>
-                  <a:txBody>
-                    <a:bodyPr/>
-                    <a:lstStyle/>
-                    <a:p>
-                      <a:r>
-                        <a:rPr sz="1150" b="0">
-                          <a:solidFill>
-                            <a:srgbClr val="1A2233"/>
-                          </a:solidFill>
-                          <a:latin typeface="Microsoft JhengHei"/>
-                          <a:ea typeface="Microsoft JhengHei"/>
-                          <a:cs typeface="Microsoft JhengHei"/>
-                        </a:rPr>
-                        <a:t>安永聯合會計師事務所</a:t>
-                      </a:r>
-                    </a:p>
-                  </a:txBody>
-                  <a:tcPr anchor="ctr" marL="73152" marT="9144" marB="9144">
-                    <a:solidFill>
-                      <a:srgbClr val="FFFFFF"/>
-                    </a:solidFill>
-                  </a:tcPr>
-                </a:tc>
-                <a:tc>
-                  <a:txBody>
-                    <a:bodyPr/>
-                    <a:lstStyle/>
-                    <a:p>
-                      <a:r>
-                        <a:rPr sz="1150" b="0">
-                          <a:solidFill>
-                            <a:srgbClr val="1A2233"/>
-                          </a:solidFill>
-                          <a:latin typeface="Microsoft JhengHei"/>
-                          <a:ea typeface="Microsoft JhengHei"/>
-                          <a:cs typeface="Microsoft JhengHei"/>
-                        </a:rPr>
-                        <a:t>洪福讚、陳政初</a:t>
-                      </a:r>
-                    </a:p>
-                  </a:txBody>
-                  <a:tcPr anchor="ctr" marL="73152" marT="9144" marB="9144">
-                    <a:solidFill>
-                      <a:srgbClr val="FFFFFF"/>
-                    </a:solidFill>
-                  </a:tcPr>
-                </a:tc>
-              </a:tr>
-              <a:tr h="344658">
-                <a:tc>
-                  <a:txBody>
-                    <a:bodyPr/>
-                    <a:lstStyle/>
-                    <a:p>
-                      <a:r>
-                        <a:rPr sz="1150" b="0">
-                          <a:solidFill>
-                            <a:srgbClr val="1A2233"/>
-                          </a:solidFill>
-                          <a:latin typeface="Microsoft JhengHei"/>
-                          <a:ea typeface="Microsoft JhengHei"/>
-                          <a:cs typeface="Microsoft JhengHei"/>
-                        </a:rPr>
-                        <a:t>友訊</a:t>
-                      </a:r>
-                    </a:p>
-                  </a:txBody>
-                  <a:tcPr anchor="ctr" marL="73152" marT="9144" marB="9144">
-                    <a:solidFill>
-                      <a:srgbClr val="EEF2F9"/>
-                    </a:solidFill>
-                  </a:tcPr>
-                </a:tc>
-                <a:tc>
-                  <a:txBody>
-                    <a:bodyPr/>
-                    <a:lstStyle/>
-                    <a:p>
-                      <a:r>
-                        <a:rPr sz="1150" b="0">
-                          <a:solidFill>
-                            <a:srgbClr val="1A2233"/>
-                          </a:solidFill>
-                          <a:latin typeface="Microsoft JhengHei"/>
-                          <a:ea typeface="Microsoft JhengHei"/>
-                          <a:cs typeface="Microsoft JhengHei"/>
-                        </a:rPr>
-                        <a:t>2332</a:t>
-                      </a:r>
-                    </a:p>
-                  </a:txBody>
-                  <a:tcPr anchor="ctr" marL="73152" marT="9144" marB="9144">
-                    <a:solidFill>
-                      <a:srgbClr val="EEF2F9"/>
-                    </a:solidFill>
-                  </a:tcPr>
-                </a:tc>
-                <a:tc>
-                  <a:txBody>
-                    <a:bodyPr/>
-                    <a:lstStyle/>
-                    <a:p>
-                      <a:r>
-                        <a:rPr sz="1150" b="1">
-                          <a:solidFill>
-                            <a:srgbClr val="E63946"/>
-                          </a:solidFill>
-                          <a:latin typeface="Microsoft JhengHei"/>
-                          <a:ea typeface="Microsoft JhengHei"/>
-                          <a:cs typeface="Microsoft JhengHei"/>
-                        </a:rPr>
-                        <a:t>駭客攻擊</a:t>
-                      </a:r>
-                    </a:p>
-                  </a:txBody>
-                  <a:tcPr anchor="ctr" marL="73152" marT="9144" marB="9144">
-                    <a:solidFill>
-                      <a:srgbClr val="EEF2F9"/>
-                    </a:solidFill>
-                  </a:tcPr>
-                </a:tc>
-                <a:tc>
-                  <a:txBody>
-                    <a:bodyPr/>
-                    <a:lstStyle/>
-                    <a:p>
-                      <a:r>
-                        <a:rPr sz="1150" b="0">
-                          <a:solidFill>
-                            <a:srgbClr val="1A2233"/>
-                          </a:solidFill>
-                          <a:latin typeface="Microsoft JhengHei"/>
-                          <a:ea typeface="Microsoft JhengHei"/>
-                          <a:cs typeface="Microsoft JhengHei"/>
-                        </a:rPr>
-                        <a:t>安侯建業聯合會計師事務所</a:t>
-                      </a:r>
-                    </a:p>
-                  </a:txBody>
-                  <a:tcPr anchor="ctr" marL="73152" marT="9144" marB="9144">
-                    <a:solidFill>
-                      <a:srgbClr val="EEF2F9"/>
-                    </a:solidFill>
-                  </a:tcPr>
-                </a:tc>
-                <a:tc>
-                  <a:txBody>
-                    <a:bodyPr/>
-                    <a:lstStyle/>
-                    <a:p>
-                      <a:r>
-                        <a:rPr sz="1150" b="0">
-                          <a:solidFill>
-                            <a:srgbClr val="1A2233"/>
-                          </a:solidFill>
-                          <a:latin typeface="Microsoft JhengHei"/>
-                          <a:ea typeface="Microsoft JhengHei"/>
-                          <a:cs typeface="Microsoft JhengHei"/>
-                        </a:rPr>
-                        <a:t>梅元貞、謝秋華</a:t>
-                      </a:r>
-                    </a:p>
-                  </a:txBody>
-                  <a:tcPr anchor="ctr" marL="73152" marT="9144" marB="9144">
-                    <a:solidFill>
-                      <a:srgbClr val="EEF2F9"/>
-                    </a:solidFill>
-                  </a:tcPr>
-                </a:tc>
-              </a:tr>
-              <a:tr h="344658">
-                <a:tc>
-                  <a:txBody>
-                    <a:bodyPr/>
-                    <a:lstStyle/>
-                    <a:p>
-                      <a:r>
-                        <a:rPr sz="1150" b="0">
-                          <a:solidFill>
-                            <a:srgbClr val="1A2233"/>
-                          </a:solidFill>
-                          <a:latin typeface="Microsoft JhengHei"/>
-                          <a:ea typeface="Microsoft JhengHei"/>
-                          <a:cs typeface="Microsoft JhengHei"/>
-                        </a:rPr>
-                        <a:t>長榮航</a:t>
-                      </a:r>
-                    </a:p>
-                  </a:txBody>
-                  <a:tcPr anchor="ctr" marL="73152" marT="9144" marB="9144">
-                    <a:solidFill>
-                      <a:srgbClr val="FFFFFF"/>
-                    </a:solidFill>
-                  </a:tcPr>
-                </a:tc>
-                <a:tc>
-                  <a:txBody>
-                    <a:bodyPr/>
-                    <a:lstStyle/>
-                    <a:p>
-                      <a:r>
-                        <a:rPr sz="1150" b="0">
-                          <a:solidFill>
-                            <a:srgbClr val="1A2233"/>
-                          </a:solidFill>
-                          <a:latin typeface="Microsoft JhengHei"/>
-                          <a:ea typeface="Microsoft JhengHei"/>
-                          <a:cs typeface="Microsoft JhengHei"/>
-                        </a:rPr>
-                        <a:t>2618</a:t>
-                      </a:r>
-                    </a:p>
-                  </a:txBody>
-                  <a:tcPr anchor="ctr" marL="73152" marT="9144" marB="9144">
-                    <a:solidFill>
-                      <a:srgbClr val="FFFFFF"/>
-                    </a:solidFill>
-                  </a:tcPr>
-                </a:tc>
-                <a:tc>
-                  <a:txBody>
-                    <a:bodyPr/>
-                    <a:lstStyle/>
-                    <a:p>
-                      <a:r>
-                        <a:rPr sz="1150" b="1">
-                          <a:solidFill>
-                            <a:srgbClr val="E63946"/>
-                          </a:solidFill>
-                          <a:latin typeface="Microsoft JhengHei"/>
-                          <a:ea typeface="Microsoft JhengHei"/>
-                          <a:cs typeface="Microsoft JhengHei"/>
-                        </a:rPr>
-                        <a:t>駭客攻擊</a:t>
-                      </a:r>
-                    </a:p>
-                  </a:txBody>
-                  <a:tcPr anchor="ctr" marL="73152" marT="9144" marB="9144">
-                    <a:solidFill>
-                      <a:srgbClr val="FFFFFF"/>
-                    </a:solidFill>
-                  </a:tcPr>
-                </a:tc>
-                <a:tc>
-                  <a:txBody>
-                    <a:bodyPr/>
-                    <a:lstStyle/>
-                    <a:p>
-                      <a:r>
-                        <a:rPr sz="1150" b="0">
-                          <a:solidFill>
-                            <a:srgbClr val="1A2233"/>
-                          </a:solidFill>
-                          <a:latin typeface="Microsoft JhengHei"/>
-                          <a:ea typeface="Microsoft JhengHei"/>
-                          <a:cs typeface="Microsoft JhengHei"/>
-                        </a:rPr>
-                        <a:t>安侯建業聯合會計師事務所</a:t>
-                      </a:r>
-                    </a:p>
-                  </a:txBody>
-                  <a:tcPr anchor="ctr" marL="73152" marT="9144" marB="9144">
-                    <a:solidFill>
-                      <a:srgbClr val="FFFFFF"/>
-                    </a:solidFill>
-                  </a:tcPr>
-                </a:tc>
-                <a:tc>
-                  <a:txBody>
-                    <a:bodyPr/>
-                    <a:lstStyle/>
-                    <a:p>
-                      <a:r>
-                        <a:rPr sz="1150" b="0">
-                          <a:solidFill>
-                            <a:srgbClr val="1A2233"/>
-                          </a:solidFill>
-                          <a:latin typeface="Microsoft JhengHei"/>
-                          <a:ea typeface="Microsoft JhengHei"/>
-                          <a:cs typeface="Microsoft JhengHei"/>
-                        </a:rPr>
-                        <a:t>陳雅琳、楊雲筑</a:t>
-                      </a:r>
-                    </a:p>
-                  </a:txBody>
-                  <a:tcPr anchor="ctr" marL="73152" marT="9144" marB="9144">
-                    <a:solidFill>
-                      <a:srgbClr val="FFFFFF"/>
-                    </a:solidFill>
-                  </a:tcPr>
-                </a:tc>
-              </a:tr>
-              <a:tr h="344658">
-                <a:tc>
-                  <a:txBody>
-                    <a:bodyPr/>
-                    <a:lstStyle/>
-                    <a:p>
-                      <a:r>
-                        <a:rPr sz="1150" b="0">
-                          <a:solidFill>
-                            <a:srgbClr val="1A2233"/>
-                          </a:solidFill>
-                          <a:latin typeface="Microsoft JhengHei"/>
-                          <a:ea typeface="Microsoft JhengHei"/>
-                          <a:cs typeface="Microsoft JhengHei"/>
-                        </a:rPr>
-                        <a:t>長榮航太</a:t>
-                      </a:r>
-                    </a:p>
-                  </a:txBody>
-                  <a:tcPr anchor="ctr" marL="73152" marT="9144" marB="9144">
-                    <a:solidFill>
-                      <a:srgbClr val="EEF2F9"/>
-                    </a:solidFill>
-                  </a:tcPr>
-                </a:tc>
-                <a:tc>
-                  <a:txBody>
-                    <a:bodyPr/>
-                    <a:lstStyle/>
-                    <a:p>
-                      <a:r>
-                        <a:rPr sz="1150" b="0">
-                          <a:solidFill>
-                            <a:srgbClr val="1A2233"/>
-                          </a:solidFill>
-                          <a:latin typeface="Microsoft JhengHei"/>
-                          <a:ea typeface="Microsoft JhengHei"/>
-                          <a:cs typeface="Microsoft JhengHei"/>
-                        </a:rPr>
-                        <a:t>2645</a:t>
-                      </a:r>
-                    </a:p>
-                  </a:txBody>
-                  <a:tcPr anchor="ctr" marL="73152" marT="9144" marB="9144">
-                    <a:solidFill>
-                      <a:srgbClr val="EEF2F9"/>
-                    </a:solidFill>
-                  </a:tcPr>
-                </a:tc>
-                <a:tc>
-                  <a:txBody>
-                    <a:bodyPr/>
-                    <a:lstStyle/>
-                    <a:p>
-                      <a:r>
-                        <a:rPr sz="1150" b="1">
-                          <a:solidFill>
-                            <a:srgbClr val="E63946"/>
-                          </a:solidFill>
-                          <a:latin typeface="Microsoft JhengHei"/>
-                          <a:ea typeface="Microsoft JhengHei"/>
-                          <a:cs typeface="Microsoft JhengHei"/>
-                        </a:rPr>
-                        <a:t>駭客攻擊</a:t>
-                      </a:r>
-                    </a:p>
-                  </a:txBody>
-                  <a:tcPr anchor="ctr" marL="73152" marT="9144" marB="9144">
-                    <a:solidFill>
-                      <a:srgbClr val="EEF2F9"/>
-                    </a:solidFill>
-                  </a:tcPr>
-                </a:tc>
-                <a:tc>
-                  <a:txBody>
-                    <a:bodyPr/>
-                    <a:lstStyle/>
-                    <a:p>
-                      <a:r>
-                        <a:rPr sz="1150" b="0">
-                          <a:solidFill>
-                            <a:srgbClr val="1A2233"/>
-                          </a:solidFill>
-                          <a:latin typeface="Microsoft JhengHei"/>
-                          <a:ea typeface="Microsoft JhengHei"/>
-                          <a:cs typeface="Microsoft JhengHei"/>
-                        </a:rPr>
-                        <a:t>安侯建業聯合會計師事務所</a:t>
-                      </a:r>
-                    </a:p>
-                  </a:txBody>
-                  <a:tcPr anchor="ctr" marL="73152" marT="9144" marB="9144">
-                    <a:solidFill>
-                      <a:srgbClr val="EEF2F9"/>
-                    </a:solidFill>
-                  </a:tcPr>
-                </a:tc>
-                <a:tc>
-                  <a:txBody>
-                    <a:bodyPr/>
-                    <a:lstStyle/>
-                    <a:p>
-                      <a:r>
-                        <a:rPr sz="1150" b="0">
-                          <a:solidFill>
-                            <a:srgbClr val="1A2233"/>
-                          </a:solidFill>
-                          <a:latin typeface="Microsoft JhengHei"/>
-                          <a:ea typeface="Microsoft JhengHei"/>
-                          <a:cs typeface="Microsoft JhengHei"/>
-                        </a:rPr>
-                        <a:t>陳雅琳、鄭博仁</a:t>
-                      </a:r>
-                    </a:p>
-                  </a:txBody>
-                  <a:tcPr anchor="ctr" marL="73152" marT="9144" marB="9144">
-                    <a:solidFill>
-                      <a:srgbClr val="EEF2F9"/>
-                    </a:solidFill>
-                  </a:tcPr>
-                </a:tc>
-              </a:tr>
-              <a:tr h="344658">
-                <a:tc>
-                  <a:txBody>
-                    <a:bodyPr/>
-                    <a:lstStyle/>
-                    <a:p>
-                      <a:r>
-                        <a:rPr sz="1150" b="0">
-                          <a:solidFill>
-                            <a:srgbClr val="1A2233"/>
-                          </a:solidFill>
-                          <a:latin typeface="Microsoft JhengHei"/>
-                          <a:ea typeface="Microsoft JhengHei"/>
-                          <a:cs typeface="Microsoft JhengHei"/>
-                        </a:rPr>
-                        <a:t>崴寶</a:t>
-                      </a:r>
-                    </a:p>
-                  </a:txBody>
-                  <a:tcPr anchor="ctr" marL="73152" marT="9144" marB="9144">
-                    <a:solidFill>
-                      <a:srgbClr val="FFFFFF"/>
-                    </a:solidFill>
-                  </a:tcPr>
-                </a:tc>
-                <a:tc>
-                  <a:txBody>
-                    <a:bodyPr/>
-                    <a:lstStyle/>
-                    <a:p>
-                      <a:r>
-                        <a:rPr sz="1150" b="0">
-                          <a:solidFill>
-                            <a:srgbClr val="1A2233"/>
-                          </a:solidFill>
-                          <a:latin typeface="Microsoft JhengHei"/>
-                          <a:ea typeface="Microsoft JhengHei"/>
-                          <a:cs typeface="Microsoft JhengHei"/>
-                        </a:rPr>
-                        <a:t>7744</a:t>
-                      </a:r>
-                    </a:p>
-                  </a:txBody>
-                  <a:tcPr anchor="ctr" marL="73152" marT="9144" marB="9144">
-                    <a:solidFill>
-                      <a:srgbClr val="FFFFFF"/>
-                    </a:solidFill>
-                  </a:tcPr>
-                </a:tc>
-                <a:tc>
-                  <a:txBody>
-                    <a:bodyPr/>
-                    <a:lstStyle/>
-                    <a:p>
-                      <a:r>
-                        <a:rPr sz="1150" b="1">
-                          <a:solidFill>
-                            <a:srgbClr val="F4A261"/>
-                          </a:solidFill>
-                          <a:latin typeface="Microsoft JhengHei"/>
-                          <a:ea typeface="Microsoft JhengHei"/>
-                          <a:cs typeface="Microsoft JhengHei"/>
-                        </a:rPr>
-                        <a:t>勒索病毒/加密</a:t>
-                      </a:r>
-                    </a:p>
-                  </a:txBody>
-                  <a:tcPr anchor="ctr" marL="73152" marT="9144" marB="9144">
-                    <a:solidFill>
-                      <a:srgbClr val="FFFFFF"/>
-                    </a:solidFill>
-                  </a:tcPr>
-                </a:tc>
-                <a:tc>
-                  <a:txBody>
-                    <a:bodyPr/>
-                    <a:lstStyle/>
-                    <a:p>
-                      <a:r>
-                        <a:rPr sz="1150" b="0">
-                          <a:solidFill>
-                            <a:srgbClr val="1A2233"/>
-                          </a:solidFill>
-                          <a:latin typeface="Microsoft JhengHei"/>
-                          <a:ea typeface="Microsoft JhengHei"/>
-                          <a:cs typeface="Microsoft JhengHei"/>
-                        </a:rPr>
-                        <a:t>安永聯合會計師事務所</a:t>
-                      </a:r>
-                    </a:p>
-                  </a:txBody>
-                  <a:tcPr anchor="ctr" marL="73152" marT="9144" marB="9144">
-                    <a:solidFill>
-                      <a:srgbClr val="FFFFFF"/>
-                    </a:solidFill>
-                  </a:tcPr>
-                </a:tc>
-                <a:tc>
-                  <a:txBody>
-                    <a:bodyPr/>
-                    <a:lstStyle/>
-                    <a:p>
-                      <a:r>
-                        <a:rPr sz="1150" b="0">
-                          <a:solidFill>
-                            <a:srgbClr val="1A2233"/>
-                          </a:solidFill>
-                          <a:latin typeface="Microsoft JhengHei"/>
-                          <a:ea typeface="Microsoft JhengHei"/>
-                          <a:cs typeface="Microsoft JhengHei"/>
-                        </a:rPr>
-                        <a:t>黃宇廷、黃子評</a:t>
-                      </a:r>
-                    </a:p>
-                  </a:txBody>
-                  <a:tcPr anchor="ctr" marL="73152" marT="9144" marB="9144">
-                    <a:solidFill>
-                      <a:srgbClr val="FFFFFF"/>
-                    </a:solidFill>
-                  </a:tcPr>
-                </a:tc>
-              </a:tr>
-              <a:tr h="344658">
-                <a:tc>
-                  <a:txBody>
-                    <a:bodyPr/>
-                    <a:lstStyle/>
-                    <a:p>
-                      <a:r>
-                        <a:rPr sz="1150" b="0">
-                          <a:solidFill>
-                            <a:srgbClr val="1A2233"/>
-                          </a:solidFill>
-                          <a:latin typeface="Microsoft JhengHei"/>
-                          <a:ea typeface="Microsoft JhengHei"/>
-                          <a:cs typeface="Microsoft JhengHei"/>
-                        </a:rPr>
-                        <a:t>達爾膚</a:t>
-                      </a:r>
-                    </a:p>
-                  </a:txBody>
-                  <a:tcPr anchor="ctr" marL="73152" marT="9144" marB="9144">
-                    <a:solidFill>
-                      <a:srgbClr val="EEF2F9"/>
-                    </a:solidFill>
-                  </a:tcPr>
-                </a:tc>
-                <a:tc>
-                  <a:txBody>
-                    <a:bodyPr/>
-                    <a:lstStyle/>
-                    <a:p>
-                      <a:r>
-                        <a:rPr sz="1150" b="0">
-                          <a:solidFill>
-                            <a:srgbClr val="1A2233"/>
-                          </a:solidFill>
-                          <a:latin typeface="Microsoft JhengHei"/>
-                          <a:ea typeface="Microsoft JhengHei"/>
-                          <a:cs typeface="Microsoft JhengHei"/>
-                        </a:rPr>
-                        <a:t>6523</a:t>
+                        <a:t>2640</a:t>
                       </a:r>
                     </a:p>
                   </a:txBody>
@@ -8338,251 +9071,7 @@
                           <a:ea typeface="Microsoft JhengHei"/>
                           <a:cs typeface="Microsoft JhengHei"/>
                         </a:rPr>
-                        <a:t>于智帆、葉翠苗</a:t>
-                      </a:r>
-                    </a:p>
-                  </a:txBody>
-                  <a:tcPr anchor="ctr" marL="73152" marT="9144" marB="9144">
-                    <a:solidFill>
-                      <a:srgbClr val="EEF2F9"/>
-                    </a:solidFill>
-                  </a:tcPr>
-                </a:tc>
-              </a:tr>
-              <a:tr h="344658">
-                <a:tc>
-                  <a:txBody>
-                    <a:bodyPr/>
-                    <a:lstStyle/>
-                    <a:p>
-                      <a:r>
-                        <a:rPr sz="1150" b="0">
-                          <a:solidFill>
-                            <a:srgbClr val="1A2233"/>
-                          </a:solidFill>
-                          <a:latin typeface="Microsoft JhengHei"/>
-                          <a:ea typeface="Microsoft JhengHei"/>
-                          <a:cs typeface="Microsoft JhengHei"/>
-                        </a:rPr>
-                        <a:t>大車隊</a:t>
-                      </a:r>
-                    </a:p>
-                  </a:txBody>
-                  <a:tcPr anchor="ctr" marL="73152" marT="9144" marB="9144">
-                    <a:solidFill>
-                      <a:srgbClr val="FFFFFF"/>
-                    </a:solidFill>
-                  </a:tcPr>
-                </a:tc>
-                <a:tc>
-                  <a:txBody>
-                    <a:bodyPr/>
-                    <a:lstStyle/>
-                    <a:p>
-                      <a:r>
-                        <a:rPr sz="1150" b="0">
-                          <a:solidFill>
-                            <a:srgbClr val="1A2233"/>
-                          </a:solidFill>
-                          <a:latin typeface="Microsoft JhengHei"/>
-                          <a:ea typeface="Microsoft JhengHei"/>
-                          <a:cs typeface="Microsoft JhengHei"/>
-                        </a:rPr>
-                        <a:t>2640</a:t>
-                      </a:r>
-                    </a:p>
-                  </a:txBody>
-                  <a:tcPr anchor="ctr" marL="73152" marT="9144" marB="9144">
-                    <a:solidFill>
-                      <a:srgbClr val="FFFFFF"/>
-                    </a:solidFill>
-                  </a:tcPr>
-                </a:tc>
-                <a:tc>
-                  <a:txBody>
-                    <a:bodyPr/>
-                    <a:lstStyle/>
-                    <a:p>
-                      <a:r>
-                        <a:rPr sz="1150" b="1">
-                          <a:solidFill>
-                            <a:srgbClr val="E63946"/>
-                          </a:solidFill>
-                          <a:latin typeface="Microsoft JhengHei"/>
-                          <a:ea typeface="Microsoft JhengHei"/>
-                          <a:cs typeface="Microsoft JhengHei"/>
-                        </a:rPr>
-                        <a:t>駭客攻擊</a:t>
-                      </a:r>
-                    </a:p>
-                  </a:txBody>
-                  <a:tcPr anchor="ctr" marL="73152" marT="9144" marB="9144">
-                    <a:solidFill>
-                      <a:srgbClr val="FFFFFF"/>
-                    </a:solidFill>
-                  </a:tcPr>
-                </a:tc>
-                <a:tc>
-                  <a:txBody>
-                    <a:bodyPr/>
-                    <a:lstStyle/>
-                    <a:p>
-                      <a:r>
-                        <a:rPr sz="1150" b="0">
-                          <a:solidFill>
-                            <a:srgbClr val="1A2233"/>
-                          </a:solidFill>
-                          <a:latin typeface="Microsoft JhengHei"/>
-                          <a:ea typeface="Microsoft JhengHei"/>
-                          <a:cs typeface="Microsoft JhengHei"/>
-                        </a:rPr>
-                        <a:t>資誠聯合會計師事務所</a:t>
-                      </a:r>
-                    </a:p>
-                  </a:txBody>
-                  <a:tcPr anchor="ctr" marL="73152" marT="9144" marB="9144">
-                    <a:solidFill>
-                      <a:srgbClr val="FFFFFF"/>
-                    </a:solidFill>
-                  </a:tcPr>
-                </a:tc>
-                <a:tc>
-                  <a:txBody>
-                    <a:bodyPr/>
-                    <a:lstStyle/>
-                    <a:p>
-                      <a:r>
-                        <a:rPr sz="1150" b="0">
-                          <a:solidFill>
-                            <a:srgbClr val="1A2233"/>
-                          </a:solidFill>
-                          <a:latin typeface="Microsoft JhengHei"/>
-                          <a:ea typeface="Microsoft JhengHei"/>
-                          <a:cs typeface="Microsoft JhengHei"/>
-                        </a:rPr>
                         <a:t>支秉鈞、涂展源</a:t>
-                      </a:r>
-                    </a:p>
-                  </a:txBody>
-                  <a:tcPr anchor="ctr" marL="73152" marT="9144" marB="9144">
-                    <a:solidFill>
-                      <a:srgbClr val="FFFFFF"/>
-                    </a:solidFill>
-                  </a:tcPr>
-                </a:tc>
-              </a:tr>
-              <a:tr h="344664">
-                <a:tc>
-                  <a:txBody>
-                    <a:bodyPr/>
-                    <a:lstStyle/>
-                    <a:p>
-                      <a:r>
-                        <a:rPr sz="1150" b="0">
-                          <a:solidFill>
-                            <a:srgbClr val="1A2233"/>
-                          </a:solidFill>
-                          <a:latin typeface="Microsoft JhengHei"/>
-                          <a:ea typeface="Microsoft JhengHei"/>
-                          <a:cs typeface="Microsoft JhengHei"/>
-                        </a:rPr>
-                        <a:t>富爾特</a:t>
-                      </a:r>
-                    </a:p>
-                  </a:txBody>
-                  <a:tcPr anchor="ctr" marL="73152" marT="9144" marB="9144">
-                    <a:solidFill>
-                      <a:srgbClr val="EEF2F9"/>
-                    </a:solidFill>
-                  </a:tcPr>
-                </a:tc>
-                <a:tc>
-                  <a:txBody>
-                    <a:bodyPr/>
-                    <a:lstStyle/>
-                    <a:p>
-                      <a:r>
-                        <a:rPr sz="1150" b="0">
-                          <a:solidFill>
-                            <a:srgbClr val="1A2233"/>
-                          </a:solidFill>
-                          <a:latin typeface="Microsoft JhengHei"/>
-                          <a:ea typeface="Microsoft JhengHei"/>
-                          <a:cs typeface="Microsoft JhengHei"/>
-                        </a:rPr>
-                        <a:t>6136</a:t>
-                      </a:r>
-                    </a:p>
-                  </a:txBody>
-                  <a:tcPr anchor="ctr" marL="73152" marT="9144" marB="9144">
-                    <a:solidFill>
-                      <a:srgbClr val="EEF2F9"/>
-                    </a:solidFill>
-                  </a:tcPr>
-                </a:tc>
-                <a:tc>
-                  <a:txBody>
-                    <a:bodyPr/>
-                    <a:lstStyle/>
-                    <a:p>
-                      <a:r>
-                        <a:rPr sz="1150" b="1">
-                          <a:solidFill>
-                            <a:srgbClr val="F4A261"/>
-                          </a:solidFill>
-                          <a:latin typeface="Microsoft JhengHei"/>
-                          <a:ea typeface="Microsoft JhengHei"/>
-                          <a:cs typeface="Microsoft JhengHei"/>
-                        </a:rPr>
-                        <a:t>勒索病毒/加密</a:t>
-                      </a:r>
-                    </a:p>
-                  </a:txBody>
-                  <a:tcPr anchor="ctr" marL="73152" marT="9144" marB="9144">
-                    <a:solidFill>
-                      <a:srgbClr val="EEF2F9"/>
-                    </a:solidFill>
-                  </a:tcPr>
-                </a:tc>
-                <a:tc>
-                  <a:txBody>
-                    <a:bodyPr/>
-                    <a:lstStyle/>
-                    <a:p>
-                      <a:r>
-                        <a:rPr sz="1150" b="0">
-                          <a:solidFill>
-                            <a:srgbClr val="1A2233"/>
-                          </a:solidFill>
-                          <a:latin typeface="Microsoft JhengHei"/>
-                          <a:ea typeface="Microsoft JhengHei"/>
-                          <a:cs typeface="Microsoft JhengHei"/>
-                        </a:rPr>
-                        <a:t>安永聯合會計師事務所</a:t>
-                      </a:r>
-                    </a:p>
-                  </a:txBody>
-                  <a:tcPr anchor="ctr" marL="73152" marT="9144" marB="9144">
-                    <a:solidFill>
-                      <a:srgbClr val="EEF2F9"/>
-                    </a:solidFill>
-                  </a:tcPr>
-                </a:tc>
-                <a:tc>
-                  <a:txBody>
-                    <a:bodyPr/>
-                    <a:lstStyle/>
-                    <a:p>
-                      <a:r>
-                        <a:rPr sz="1150" b="0">
-                          <a:solidFill>
-                            <a:srgbClr val="1A2233"/>
-                          </a:solidFill>
-                          <a:latin typeface="Microsoft JhengHei"/>
-                          <a:ea typeface="Microsoft JhengHei"/>
-                          <a:cs typeface="Microsoft JhengHei"/>
-                        </a:rPr>
-                        <a:t>許新民、余倩如</a:t>
                       </a:r>
                     </a:p>
                   </a:txBody>
@@ -10103,7 +10592,7 @@
                 <a:ea typeface="Microsoft JhengHei"/>
                 <a:cs typeface="Microsoft JhengHei"/>
               </a:rPr>
-              <a:t>一零四 </a:t>
+              <a:t>上福 </a:t>
             </a:r>
             <a:r>
               <a:rPr sz="1300" b="0">
@@ -10114,7 +10603,7 @@
                 <a:ea typeface="Microsoft JhengHei"/>
                 <a:cs typeface="Microsoft JhengHei"/>
               </a:rPr>
-              <a:t>3130</a:t>
+              <a:t>6128</a:t>
             </a:r>
           </a:p>
         </p:txBody>
@@ -10247,7 +10736,7 @@
                 <a:ea typeface="Microsoft JhengHei"/>
                 <a:cs typeface="Microsoft JhengHei"/>
               </a:rPr>
-              <a:t>本公司偵測到APP系統有異常讀取情形，經調查確認，約12萬筆履歷資料遭未經授權讀取。</a:t>
+              <a:t>KatunCorporation發現資訊安全異常事件，經調查發現部分資訊系統有異常存取行為。</a:t>
             </a:r>
           </a:p>
         </p:txBody>
@@ -10299,7 +10788,7 @@
                 <a:ea typeface="Microsoft JhengHei"/>
                 <a:cs typeface="Microsoft JhengHei"/>
               </a:rPr>
-              <a:t>本公司已採取相關防護及阻斷措施，並持續進行資安鑑識及強化資訊安全防護機制。本公司將依調查結果及相關法令辦理後續事宜，如有…</a:t>
+              <a:t>KatunCorporation將持續進行事件調查、鑑識分析及監控作業，並進一步強化資訊安全管理、遠端存取管控、網路安全…</a:t>
             </a:r>
           </a:p>
         </p:txBody>
@@ -10426,7 +10915,7 @@
                 <a:ea typeface="Microsoft JhengHei"/>
                 <a:cs typeface="Microsoft JhengHei"/>
               </a:rPr>
-              <a:t>安心 </a:t>
+              <a:t>杏一 </a:t>
             </a:r>
             <a:r>
               <a:rPr sz="1300" b="0">
@@ -10437,7 +10926,7 @@
                 <a:ea typeface="Microsoft JhengHei"/>
                 <a:cs typeface="Microsoft JhengHei"/>
               </a:rPr>
-              <a:t>1259</a:t>
+              <a:t>4175</a:t>
             </a:r>
           </a:p>
         </p:txBody>
@@ -10570,7 +11059,7 @@
                 <a:ea typeface="Microsoft JhengHei"/>
                 <a:cs typeface="Microsoft JhengHei"/>
               </a:rPr>
-              <a:t>消費者反應疑似個資外洩事件</a:t>
+              <a:t>本公司接獲消費者反映疑似個資外洩事件</a:t>
             </a:r>
           </a:p>
         </p:txBody>
@@ -10622,7 +11111,7 @@
                 <a:ea typeface="Microsoft JhengHei"/>
                 <a:cs typeface="Microsoft JhengHei"/>
               </a:rPr>
-              <a:t>本公司已立即針對本次資安事件啟動應變作業。需特別說明，本次疑似個資外洩事件之平台係由委外廠商管理，非屬本公司自有之MOS…</a:t>
+              <a:t>(1)本公司已立即啟動資安事件應變作業，針對相關系統、存取紀錄及可能涉及之資料範圍進行調查，並要求官網平台委外廠商同步進…</a:t>
             </a:r>
           </a:p>
         </p:txBody>
@@ -10688,7 +11177,7 @@
             <a:avLst/>
           </a:prstGeom>
           <a:solidFill>
-            <a:srgbClr val="E63946"/>
+            <a:srgbClr val="27A6C4"/>
           </a:solidFill>
           <a:ln>
             <a:noFill/>
@@ -10749,7 +11238,7 @@
                 <a:ea typeface="Microsoft JhengHei"/>
                 <a:cs typeface="Microsoft JhengHei"/>
               </a:rPr>
-              <a:t>神腦 </a:t>
+              <a:t>鈊象 </a:t>
             </a:r>
             <a:r>
               <a:rPr sz="1300" b="0">
@@ -10760,7 +11249,7 @@
                 <a:ea typeface="Microsoft JhengHei"/>
                 <a:cs typeface="Microsoft JhengHei"/>
               </a:rPr>
-              <a:t>2450</a:t>
+              <a:t>3293</a:t>
             </a:r>
           </a:p>
         </p:txBody>
@@ -10780,7 +11269,7 @@
             <a:avLst/>
           </a:prstGeom>
           <a:solidFill>
-            <a:srgbClr val="E63946"/>
+            <a:srgbClr val="27A6C4"/>
           </a:solidFill>
           <a:ln>
             <a:noFill/>
@@ -10841,7 +11330,7 @@
                 <a:ea typeface="Microsoft JhengHei"/>
                 <a:cs typeface="Microsoft JhengHei"/>
               </a:rPr>
-              <a:t>駭客攻擊</a:t>
+              <a:t>個資外洩</a:t>
             </a:r>
           </a:p>
         </p:txBody>
@@ -10876,7 +11365,7 @@
             <a:r>
               <a:rPr sz="1100" b="1">
                 <a:solidFill>
-                  <a:srgbClr val="E63946"/>
+                  <a:srgbClr val="27A6C4"/>
                 </a:solidFill>
                 <a:latin typeface="Microsoft JhengHei"/>
                 <a:ea typeface="Microsoft JhengHei"/>
@@ -10893,7 +11382,7 @@
                 <a:ea typeface="Microsoft JhengHei"/>
                 <a:cs typeface="Microsoft JhengHei"/>
               </a:rPr>
-              <a:t>本公司外部伺服器遭受自動化攻擊事件說明。</a:t>
+              <a:t>本公司於115年9月29日發現不明IP異常侵入公司營運資訊設備，造成公司遊戲營運資料外洩，包含部…</a:t>
             </a:r>
           </a:p>
         </p:txBody>
@@ -10928,7 +11417,7 @@
             <a:r>
               <a:rPr sz="1100" b="1">
                 <a:solidFill>
-                  <a:srgbClr val="E63946"/>
+                  <a:srgbClr val="27A6C4"/>
                 </a:solidFill>
                 <a:latin typeface="Microsoft JhengHei"/>
                 <a:ea typeface="Microsoft JhengHei"/>
@@ -10945,7 +11434,7 @@
                 <a:ea typeface="Microsoft JhengHei"/>
                 <a:cs typeface="Microsoft JhengHei"/>
               </a:rPr>
-              <a:t>本公司已與第三方資安廠商合作，全面強化網路偵測、系統監控與安全管控，以確保資訊安全。</a:t>
+              <a:t>(1)持續提升資安防禦，強化監控與防護層級。(2)委由外部專業資安團隊協助事件調查，並於相關主機部署偵測及防護機制。(3…</a:t>
             </a:r>
           </a:p>
         </p:txBody>
@@ -11072,7 +11561,7 @@
                 <a:ea typeface="Microsoft JhengHei"/>
                 <a:cs typeface="Microsoft JhengHei"/>
               </a:rPr>
-              <a:t>鈊象 </a:t>
+              <a:t>一零四 </a:t>
             </a:r>
             <a:r>
               <a:rPr sz="1300" b="0">
@@ -11083,7 +11572,7 @@
                 <a:ea typeface="Microsoft JhengHei"/>
                 <a:cs typeface="Microsoft JhengHei"/>
               </a:rPr>
-              <a:t>3293</a:t>
+              <a:t>3130</a:t>
             </a:r>
           </a:p>
         </p:txBody>
@@ -11216,7 +11705,7 @@
                 <a:ea typeface="Microsoft JhengHei"/>
                 <a:cs typeface="Microsoft JhengHei"/>
               </a:rPr>
-              <a:t>本公司於115年9月29日發現不明IP異常侵入公司營運資訊設備。</a:t>
+              <a:t>本公司偵測到APP系統有異常讀取情形，經調查確認，約12萬筆履歷資料遭未經授權讀取。</a:t>
             </a:r>
           </a:p>
         </p:txBody>
@@ -11268,7 +11757,7 @@
                 <a:ea typeface="Microsoft JhengHei"/>
                 <a:cs typeface="Microsoft JhengHei"/>
               </a:rPr>
-              <a:t>持續提升資安防禦，強化監控與防護層級。</a:t>
+              <a:t>本公司已採取相關防護及阻斷措施，並持續進行資安鑑識及強化資訊安全防護機制。本公司將依調查結果及相關法令辦理後續事宜，如有…</a:t>
             </a:r>
           </a:p>
         </p:txBody>
@@ -11531,7 +12020,7 @@
                 <a:ea typeface="Microsoft JhengHei"/>
                 <a:cs typeface="Microsoft JhengHei"/>
               </a:rPr>
-              <a:t>柏文 </a:t>
+              <a:t>安心 </a:t>
             </a:r>
             <a:r>
               <a:rPr sz="1300" b="0">
@@ -11542,7 +12031,7 @@
                 <a:ea typeface="Microsoft JhengHei"/>
                 <a:cs typeface="Microsoft JhengHei"/>
               </a:rPr>
-              <a:t>8462</a:t>
+              <a:t>1259</a:t>
             </a:r>
           </a:p>
         </p:txBody>
@@ -11675,7 +12164,7 @@
                 <a:ea typeface="Microsoft JhengHei"/>
                 <a:cs typeface="Microsoft JhengHei"/>
               </a:rPr>
-              <a:t>本公司接獲系統委外廠商通知其對外服務系統遭自動化攻擊，並對客戶資料表分頁擷取，其中部分涉及本公司…</a:t>
+              <a:t>消費者反應疑似個資外洩事件</a:t>
             </a:r>
           </a:p>
         </p:txBody>
@@ -11727,7 +12216,7 @@
                 <a:ea typeface="Microsoft JhengHei"/>
                 <a:cs typeface="Microsoft JhengHei"/>
               </a:rPr>
-              <a:t>本公司已要求系統委外廠商重新檢視造成資安疑慮因子並加以防範，同時持續針對系統委外廠商加強監控。</a:t>
+              <a:t>本公司已立即針對本次資安事件啟動應變作業。需特別說明，本次疑似個資外洩事件之平台係由委外廠商管理，非屬本公司自有之MOS…</a:t>
             </a:r>
           </a:p>
         </p:txBody>
@@ -11854,7 +12343,7 @@
                 <a:ea typeface="Microsoft JhengHei"/>
                 <a:cs typeface="Microsoft JhengHei"/>
               </a:rPr>
-              <a:t>友訊 </a:t>
+              <a:t>神腦 </a:t>
             </a:r>
             <a:r>
               <a:rPr sz="1300" b="0">
@@ -11865,7 +12354,7 @@
                 <a:ea typeface="Microsoft JhengHei"/>
                 <a:cs typeface="Microsoft JhengHei"/>
               </a:rPr>
-              <a:t>2332</a:t>
+              <a:t>2450</a:t>
             </a:r>
           </a:p>
         </p:txBody>
@@ -11998,7 +12487,7 @@
                 <a:ea typeface="Microsoft JhengHei"/>
                 <a:cs typeface="Microsoft JhengHei"/>
               </a:rPr>
-              <a:t>本公司網站監控中發現登入記錄異常，查知外部攻擊者利用既有登入機制，以大量帳號密碼進行網站登入驗證…</a:t>
+              <a:t>本公司外部伺服器遭受自動化攻擊事件說明。</a:t>
             </a:r>
           </a:p>
         </p:txBody>
@@ -12050,7 +12539,7 @@
                 <a:ea typeface="Microsoft JhengHei"/>
                 <a:cs typeface="Microsoft JhengHei"/>
               </a:rPr>
-              <a:t>(1)強化網站登入驗證、存取控制及異常行為偵測機制。(2)強化網頁應用程式防火牆，降低大量或異常登入嘗試之可行性。(3)…</a:t>
+              <a:t>本公司已與第三方資安廠商合作，全面強化網路偵測、系統監控與安全管控，以確保資訊安全。</a:t>
             </a:r>
           </a:p>
         </p:txBody>
@@ -12116,7 +12605,7 @@
             <a:avLst/>
           </a:prstGeom>
           <a:solidFill>
-            <a:srgbClr val="E63946"/>
+            <a:srgbClr val="5C6679"/>
           </a:solidFill>
           <a:ln>
             <a:noFill/>
@@ -12177,7 +12666,7 @@
                 <a:ea typeface="Microsoft JhengHei"/>
                 <a:cs typeface="Microsoft JhengHei"/>
               </a:rPr>
-              <a:t>長榮航 </a:t>
+              <a:t>鈊象 </a:t>
             </a:r>
             <a:r>
               <a:rPr sz="1300" b="0">
@@ -12188,7 +12677,7 @@
                 <a:ea typeface="Microsoft JhengHei"/>
                 <a:cs typeface="Microsoft JhengHei"/>
               </a:rPr>
-              <a:t>2618</a:t>
+              <a:t>3293</a:t>
             </a:r>
           </a:p>
         </p:txBody>
@@ -12208,7 +12697,7 @@
             <a:avLst/>
           </a:prstGeom>
           <a:solidFill>
-            <a:srgbClr val="E63946"/>
+            <a:srgbClr val="5C6679"/>
           </a:solidFill>
           <a:ln>
             <a:noFill/>
@@ -12269,7 +12758,7 @@
                 <a:ea typeface="Microsoft JhengHei"/>
                 <a:cs typeface="Microsoft JhengHei"/>
               </a:rPr>
-              <a:t>駭客攻擊</a:t>
+              <a:t>其他</a:t>
             </a:r>
           </a:p>
         </p:txBody>
@@ -12304,7 +12793,7 @@
             <a:r>
               <a:rPr sz="1100" b="1">
                 <a:solidFill>
-                  <a:srgbClr val="E63946"/>
+                  <a:srgbClr val="5C6679"/>
                 </a:solidFill>
                 <a:latin typeface="Microsoft JhengHei"/>
                 <a:ea typeface="Microsoft JhengHei"/>
@@ -12321,7 +12810,7 @@
                 <a:ea typeface="Microsoft JhengHei"/>
                 <a:cs typeface="Microsoft JhengHei"/>
               </a:rPr>
-              <a:t>本公司發現有不明人士透過惡意IP入侵本公司內部資訊環境，取得員工姓名與公務聯繫資訊。</a:t>
+              <a:t>本公司於115年9月29日發現不明IP異常侵入公司營運資訊設備。</a:t>
             </a:r>
           </a:p>
         </p:txBody>
@@ -12356,7 +12845,7 @@
             <a:r>
               <a:rPr sz="1100" b="1">
                 <a:solidFill>
-                  <a:srgbClr val="E63946"/>
+                  <a:srgbClr val="5C6679"/>
                 </a:solidFill>
                 <a:latin typeface="Microsoft JhengHei"/>
                 <a:ea typeface="Microsoft JhengHei"/>
@@ -12373,7 +12862,7 @@
                 <a:ea typeface="Microsoft JhengHei"/>
                 <a:cs typeface="Microsoft JhengHei"/>
               </a:rPr>
-              <a:t>本公司已重新檢視可能造成資安疑慮的因子並加以防範，同時持續加強監控。</a:t>
+              <a:t>持續提升資安防禦，強化監控與防護層級。</a:t>
             </a:r>
           </a:p>
         </p:txBody>
@@ -12439,7 +12928,7 @@
             <a:avLst/>
           </a:prstGeom>
           <a:solidFill>
-            <a:srgbClr val="E63946"/>
+            <a:srgbClr val="27A6C4"/>
           </a:solidFill>
           <a:ln>
             <a:noFill/>
@@ -12500,7 +12989,7 @@
                 <a:ea typeface="Microsoft JhengHei"/>
                 <a:cs typeface="Microsoft JhengHei"/>
               </a:rPr>
-              <a:t>長榮航太 </a:t>
+              <a:t>柏文 </a:t>
             </a:r>
             <a:r>
               <a:rPr sz="1300" b="0">
@@ -12511,7 +13000,7 @@
                 <a:ea typeface="Microsoft JhengHei"/>
                 <a:cs typeface="Microsoft JhengHei"/>
               </a:rPr>
-              <a:t>2645</a:t>
+              <a:t>8462</a:t>
             </a:r>
           </a:p>
         </p:txBody>
@@ -12531,7 +13020,7 @@
             <a:avLst/>
           </a:prstGeom>
           <a:solidFill>
-            <a:srgbClr val="E63946"/>
+            <a:srgbClr val="27A6C4"/>
           </a:solidFill>
           <a:ln>
             <a:noFill/>
@@ -12592,7 +13081,7 @@
                 <a:ea typeface="Microsoft JhengHei"/>
                 <a:cs typeface="Microsoft JhengHei"/>
               </a:rPr>
-              <a:t>駭客攻擊</a:t>
+              <a:t>個資外洩</a:t>
             </a:r>
           </a:p>
         </p:txBody>
@@ -12627,7 +13116,7 @@
             <a:r>
               <a:rPr sz="1100" b="1">
                 <a:solidFill>
-                  <a:srgbClr val="E63946"/>
+                  <a:srgbClr val="27A6C4"/>
                 </a:solidFill>
                 <a:latin typeface="Microsoft JhengHei"/>
                 <a:ea typeface="Microsoft JhengHei"/>
@@ -12644,7 +13133,7 @@
                 <a:ea typeface="Microsoft JhengHei"/>
                 <a:cs typeface="Microsoft JhengHei"/>
               </a:rPr>
-              <a:t>本公司發現部分內部資訊系統遭受網路攻擊。</a:t>
+              <a:t>本公司接獲系統委外廠商通知其對外服務系統遭自動化攻擊，並對客戶資料表分頁擷取，其中部分涉及本公司…</a:t>
             </a:r>
           </a:p>
         </p:txBody>
@@ -12679,7 +13168,7 @@
             <a:r>
               <a:rPr sz="1100" b="1">
                 <a:solidFill>
-                  <a:srgbClr val="E63946"/>
+                  <a:srgbClr val="27A6C4"/>
                 </a:solidFill>
                 <a:latin typeface="Microsoft JhengHei"/>
                 <a:ea typeface="Microsoft JhengHei"/>
@@ -12696,7 +13185,7 @@
                 <a:ea typeface="Microsoft JhengHei"/>
                 <a:cs typeface="Microsoft JhengHei"/>
               </a:rPr>
-              <a:t>本公司將持續監控公司整體資訊系統運作狀況，並檢討強化現有資安防護措施，以確保資訊安全。</a:t>
+              <a:t>本公司已要求系統委外廠商重新檢視造成資安疑慮因子並加以防範，同時持續針對系統委外廠商加強監控。</a:t>
             </a:r>
           </a:p>
         </p:txBody>
@@ -12898,7 +13387,7 @@
             <a:avLst/>
           </a:prstGeom>
           <a:solidFill>
-            <a:srgbClr val="F4A261"/>
+            <a:srgbClr val="E63946"/>
           </a:solidFill>
           <a:ln>
             <a:noFill/>
@@ -12959,7 +13448,7 @@
                 <a:ea typeface="Microsoft JhengHei"/>
                 <a:cs typeface="Microsoft JhengHei"/>
               </a:rPr>
-              <a:t>崴寶 </a:t>
+              <a:t>友訊 </a:t>
             </a:r>
             <a:r>
               <a:rPr sz="1300" b="0">
@@ -12970,7 +13459,7 @@
                 <a:ea typeface="Microsoft JhengHei"/>
                 <a:cs typeface="Microsoft JhengHei"/>
               </a:rPr>
-              <a:t>7744</a:t>
+              <a:t>2332</a:t>
             </a:r>
           </a:p>
         </p:txBody>
@@ -12990,7 +13479,7 @@
             <a:avLst/>
           </a:prstGeom>
           <a:solidFill>
-            <a:srgbClr val="F4A261"/>
+            <a:srgbClr val="E63946"/>
           </a:solidFill>
           <a:ln>
             <a:noFill/>
@@ -13051,7 +13540,7 @@
                 <a:ea typeface="Microsoft JhengHei"/>
                 <a:cs typeface="Microsoft JhengHei"/>
               </a:rPr>
-              <a:t>勒索病毒/加密</a:t>
+              <a:t>駭客攻擊</a:t>
             </a:r>
           </a:p>
         </p:txBody>
@@ -13086,7 +13575,7 @@
             <a:r>
               <a:rPr sz="1100" b="1">
                 <a:solidFill>
-                  <a:srgbClr val="F4A261"/>
+                  <a:srgbClr val="E63946"/>
                 </a:solidFill>
                 <a:latin typeface="Microsoft JhengHei"/>
                 <a:ea typeface="Microsoft JhengHei"/>
@@ -13103,7 +13592,7 @@
                 <a:ea typeface="Microsoft JhengHei"/>
                 <a:cs typeface="Microsoft JhengHei"/>
               </a:rPr>
-              <a:t>本公司於115年9月14日上午發現資訊系統遭駭客入侵，部分系統資料遭加密鎖定。本公司立即啟動資安…</a:t>
+              <a:t>本公司網站監控中發現登入記錄異常，查知外部攻擊者利用既有登入機制，以大量帳號密碼進行網站登入驗證…</a:t>
             </a:r>
           </a:p>
         </p:txBody>
@@ -13138,7 +13627,7 @@
             <a:r>
               <a:rPr sz="1100" b="1">
                 <a:solidFill>
-                  <a:srgbClr val="F4A261"/>
+                  <a:srgbClr val="E63946"/>
                 </a:solidFill>
                 <a:latin typeface="Microsoft JhengHei"/>
                 <a:ea typeface="Microsoft JhengHei"/>
@@ -13155,7 +13644,7 @@
                 <a:ea typeface="Microsoft JhengHei"/>
                 <a:cs typeface="Microsoft JhengHei"/>
               </a:rPr>
-              <a:t>本公司將持續配合專業資安團隊進行事件調查與監控，並加強資訊安全管理措施，包括提升端點防護機制、強化網路監控能力、落實帳號…</a:t>
+              <a:t>(1)強化網站登入驗證、存取控制及異常行為偵測機制。(2)強化網頁應用程式防火牆，降低大量或異常登入嘗試之可行性。(3)…</a:t>
             </a:r>
           </a:p>
         </p:txBody>
@@ -13282,7 +13771,7 @@
                 <a:ea typeface="Microsoft JhengHei"/>
                 <a:cs typeface="Microsoft JhengHei"/>
               </a:rPr>
-              <a:t>達爾膚 </a:t>
+              <a:t>長榮航 </a:t>
             </a:r>
             <a:r>
               <a:rPr sz="1300" b="0">
@@ -13293,7 +13782,7 @@
                 <a:ea typeface="Microsoft JhengHei"/>
                 <a:cs typeface="Microsoft JhengHei"/>
               </a:rPr>
-              <a:t>6523</a:t>
+              <a:t>2618</a:t>
             </a:r>
           </a:p>
         </p:txBody>
@@ -13426,7 +13915,7 @@
                 <a:ea typeface="Microsoft JhengHei"/>
                 <a:cs typeface="Microsoft JhengHei"/>
               </a:rPr>
-              <a:t>本公司部分內部資訊系統遭受網路攻擊事件，初步評估對公司營運無重大影響。</a:t>
+              <a:t>本公司發現有不明人士透過惡意IP入侵本公司內部資訊環境，取得員工姓名與公務聯繫資訊。</a:t>
             </a:r>
           </a:p>
         </p:txBody>
@@ -13478,7 +13967,7 @@
                 <a:ea typeface="Microsoft JhengHei"/>
                 <a:cs typeface="Microsoft JhengHei"/>
               </a:rPr>
-              <a:t>本公司將持續強化網路與資訊基礎架構之安全管控，以確保資訊安全。</a:t>
+              <a:t>本公司已重新檢視可能造成資安疑慮的因子並加以防範，同時持續加強監控。</a:t>
             </a:r>
           </a:p>
         </p:txBody>
@@ -13605,7 +14094,7 @@
                 <a:ea typeface="Microsoft JhengHei"/>
                 <a:cs typeface="Microsoft JhengHei"/>
               </a:rPr>
-              <a:t>大車隊 </a:t>
+              <a:t>長榮航太 </a:t>
             </a:r>
             <a:r>
               <a:rPr sz="1300" b="0">
@@ -13616,7 +14105,7 @@
                 <a:ea typeface="Microsoft JhengHei"/>
                 <a:cs typeface="Microsoft JhengHei"/>
               </a:rPr>
-              <a:t>2640</a:t>
+              <a:t>2645</a:t>
             </a:r>
           </a:p>
         </p:txBody>
@@ -13749,7 +14238,7 @@
                 <a:ea typeface="Microsoft JhengHei"/>
                 <a:cs typeface="Microsoft JhengHei"/>
               </a:rPr>
-              <a:t>本公司重要子公司全球商務科技股份有限公司於今日發現部分資訊系統遭受網路攻擊，已立即啟動資安應變機…</a:t>
+              <a:t>本公司發現部分內部資訊系統遭受網路攻擊。</a:t>
             </a:r>
           </a:p>
         </p:txBody>
@@ -13801,7 +14290,7 @@
                 <a:ea typeface="Microsoft JhengHei"/>
                 <a:cs typeface="Microsoft JhengHei"/>
               </a:rPr>
-              <a:t>公司將持續進行資安鑑識、系統安全強化及相關風險控管作業，受影響系統預期可於短期內逐步恢復正常運作；後續如調查結果或事件發…</a:t>
+              <a:t>本公司將持續監控公司整體資訊系統運作狀況，並檢討強化現有資安防護措施，以確保資訊安全。</a:t>
             </a:r>
           </a:p>
         </p:txBody>
@@ -13928,7 +14417,7 @@
                 <a:ea typeface="Microsoft JhengHei"/>
                 <a:cs typeface="Microsoft JhengHei"/>
               </a:rPr>
-              <a:t>富爾特 </a:t>
+              <a:t>崴寶 </a:t>
             </a:r>
             <a:r>
               <a:rPr sz="1300" b="0">
@@ -13939,7 +14428,7 @@
                 <a:ea typeface="Microsoft JhengHei"/>
                 <a:cs typeface="Microsoft JhengHei"/>
               </a:rPr>
-              <a:t>6136</a:t>
+              <a:t>7744</a:t>
             </a:r>
           </a:p>
         </p:txBody>
@@ -14072,7 +14561,7 @@
                 <a:ea typeface="Microsoft JhengHei"/>
                 <a:cs typeface="Microsoft JhengHei"/>
               </a:rPr>
-              <a:t>本公司之子公司格帝控股股份有限公司偵測到部份伺服器遭受網路勒索病毒攻擊，致使包含ERP在內之部份…</a:t>
+              <a:t>本公司於115年9月14日上午發現資訊系統遭駭客入侵，部分系統資料遭加密鎖定。本公司立即啟動資安…</a:t>
             </a:r>
           </a:p>
         </p:txBody>
@@ -14124,7 +14613,789 @@
                 <a:ea typeface="Microsoft JhengHei"/>
                 <a:cs typeface="Microsoft JhengHei"/>
               </a:rPr>
-              <a:t>本公司及所屬子公司將持續密集監控，並強化網路與資訊基礎架構之管控，以確保資訊系統安全。</a:t>
+              <a:t>本公司將持續配合專業資安團隊進行事件調查與監控，並加強資訊安全管理措施，包括提升端點防護機制、強化網路監控能力、落實帳號…</a:t>
+            </a:r>
+          </a:p>
+        </p:txBody>
+      </p:sp>
+    </p:spTree>
+  </p:cSld>
+  <p:clrMapOvr>
+    <a:masterClrMapping/>
+  </p:clrMapOvr>
+</p:sld>
+</file>
+
+<file path=ppt/slides/slide9.xml><?xml version="1.0" encoding="utf-8"?>
+<p:sld xmlns:a="http://schemas.openxmlformats.org/drawingml/2006/main" xmlns:p="http://schemas.openxmlformats.org/presentationml/2006/main" xmlns:r="http://schemas.openxmlformats.org/officeDocument/2006/relationships">
+  <p:cSld>
+    <p:spTree>
+      <p:nvGrpSpPr>
+        <p:cNvPr id="1" name=""/>
+        <p:cNvGrpSpPr/>
+        <p:nvPr/>
+      </p:nvGrpSpPr>
+      <p:grpSpPr/>
+      <p:sp>
+        <p:nvSpPr>
+          <p:cNvPr id="2" name="Rectangle 1"/>
+          <p:cNvSpPr/>
+          <p:nvPr/>
+        </p:nvSpPr>
+        <p:spPr>
+          <a:xfrm>
+            <a:off x="0" y="0"/>
+            <a:ext cx="12191695" cy="6858000"/>
+          </a:xfrm>
+          <a:prstGeom prst="rect">
+            <a:avLst/>
+          </a:prstGeom>
+          <a:solidFill>
+            <a:srgbClr val="F6F8FC"/>
+          </a:solidFill>
+          <a:ln>
+            <a:noFill/>
+          </a:ln>
+          <a:effectLst/>
+        </p:spPr>
+        <p:style>
+          <a:lnRef idx="1">
+            <a:schemeClr val="accent1"/>
+          </a:lnRef>
+          <a:fillRef idx="3">
+            <a:schemeClr val="accent1"/>
+          </a:fillRef>
+          <a:effectRef idx="2">
+            <a:schemeClr val="accent1"/>
+          </a:effectRef>
+          <a:fontRef idx="minor">
+            <a:schemeClr val="lt1"/>
+          </a:fontRef>
+        </p:style>
+        <p:txBody>
+          <a:bodyPr rtlCol="0" anchor="ctr"/>
+          <a:lstStyle/>
+          <a:p>
+            <a:pPr algn="ctr"/>
+          </a:p>
+        </p:txBody>
+      </p:sp>
+      <p:sp>
+        <p:nvSpPr>
+          <p:cNvPr id="3" name="TextBox 2"/>
+          <p:cNvSpPr txBox="1"/>
+          <p:nvPr/>
+        </p:nvSpPr>
+        <p:spPr>
+          <a:xfrm>
+            <a:off x="548640" y="365760"/>
+            <a:ext cx="9144000" cy="640080"/>
+          </a:xfrm>
+          <a:prstGeom prst="rect">
+            <a:avLst/>
+          </a:prstGeom>
+          <a:noFill/>
+        </p:spPr>
+        <p:txBody>
+          <a:bodyPr wrap="square" anchor="t" lIns="0" rIns="0" tIns="0" bIns="0">
+            <a:spAutoFit/>
+          </a:bodyPr>
+          <a:lstStyle/>
+          <a:p>
+            <a:pPr algn="l"/>
+            <a:r>
+              <a:rPr sz="3000" b="1">
+                <a:solidFill>
+                  <a:srgbClr val="1A2233"/>
+                </a:solidFill>
+                <a:latin typeface="Microsoft JhengHei"/>
+                <a:ea typeface="Microsoft JhengHei"/>
+                <a:cs typeface="Microsoft JhengHei"/>
+              </a:rPr>
+              <a:t>個案因應重點（4）</a:t>
+            </a:r>
+          </a:p>
+        </p:txBody>
+      </p:sp>
+      <p:sp>
+        <p:nvSpPr>
+          <p:cNvPr id="4" name="TextBox 3"/>
+          <p:cNvSpPr txBox="1"/>
+          <p:nvPr/>
+        </p:nvSpPr>
+        <p:spPr>
+          <a:xfrm>
+            <a:off x="566928" y="1005840"/>
+            <a:ext cx="10058400" cy="365760"/>
+          </a:xfrm>
+          <a:prstGeom prst="rect">
+            <a:avLst/>
+          </a:prstGeom>
+          <a:noFill/>
+        </p:spPr>
+        <p:txBody>
+          <a:bodyPr wrap="square" anchor="t" lIns="0" rIns="0" tIns="0" bIns="0">
+            <a:spAutoFit/>
+          </a:bodyPr>
+          <a:lstStyle/>
+          <a:p>
+            <a:pPr algn="l"/>
+            <a:r>
+              <a:rPr sz="1300" b="0">
+                <a:solidFill>
+                  <a:srgbClr val="5C6679"/>
+                </a:solidFill>
+                <a:latin typeface="Microsoft JhengHei"/>
+                <a:ea typeface="Microsoft JhengHei"/>
+                <a:cs typeface="Microsoft JhengHei"/>
+              </a:rPr>
+              <a:t>各公司公告之發生緣由與因應措施摘要</a:t>
+            </a:r>
+          </a:p>
+        </p:txBody>
+      </p:sp>
+      <p:sp>
+        <p:nvSpPr>
+          <p:cNvPr id="5" name="Rounded Rectangle 4"/>
+          <p:cNvSpPr/>
+          <p:nvPr/>
+        </p:nvSpPr>
+        <p:spPr>
+          <a:xfrm>
+            <a:off x="548640" y="1554480"/>
+            <a:ext cx="5394960" cy="2148840"/>
+          </a:xfrm>
+          <a:prstGeom prst="roundRect">
+            <a:avLst/>
+          </a:prstGeom>
+          <a:solidFill>
+            <a:srgbClr val="FFFFFF"/>
+          </a:solidFill>
+          <a:ln w="12700">
+            <a:solidFill>
+              <a:srgbClr val="DDE3EE"/>
+            </a:solidFill>
+          </a:ln>
+          <a:effectLst/>
+        </p:spPr>
+        <p:style>
+          <a:lnRef idx="1">
+            <a:schemeClr val="accent1"/>
+          </a:lnRef>
+          <a:fillRef idx="3">
+            <a:schemeClr val="accent1"/>
+          </a:fillRef>
+          <a:effectRef idx="2">
+            <a:schemeClr val="accent1"/>
+          </a:effectRef>
+          <a:fontRef idx="minor">
+            <a:schemeClr val="lt1"/>
+          </a:fontRef>
+        </p:style>
+        <p:txBody>
+          <a:bodyPr rtlCol="0" anchor="ctr"/>
+          <a:lstStyle/>
+          <a:p>
+            <a:pPr algn="ctr"/>
+          </a:p>
+        </p:txBody>
+      </p:sp>
+      <p:sp>
+        <p:nvSpPr>
+          <p:cNvPr id="6" name="Rectangle 5"/>
+          <p:cNvSpPr/>
+          <p:nvPr/>
+        </p:nvSpPr>
+        <p:spPr>
+          <a:xfrm>
+            <a:off x="548640" y="1554480"/>
+            <a:ext cx="5394960" cy="109728"/>
+          </a:xfrm>
+          <a:prstGeom prst="rect">
+            <a:avLst/>
+          </a:prstGeom>
+          <a:solidFill>
+            <a:srgbClr val="E63946"/>
+          </a:solidFill>
+          <a:ln>
+            <a:noFill/>
+          </a:ln>
+          <a:effectLst/>
+        </p:spPr>
+        <p:style>
+          <a:lnRef idx="1">
+            <a:schemeClr val="accent1"/>
+          </a:lnRef>
+          <a:fillRef idx="3">
+            <a:schemeClr val="accent1"/>
+          </a:fillRef>
+          <a:effectRef idx="2">
+            <a:schemeClr val="accent1"/>
+          </a:effectRef>
+          <a:fontRef idx="minor">
+            <a:schemeClr val="lt1"/>
+          </a:fontRef>
+        </p:style>
+        <p:txBody>
+          <a:bodyPr rtlCol="0" anchor="ctr"/>
+          <a:lstStyle/>
+          <a:p>
+            <a:pPr algn="ctr"/>
+          </a:p>
+        </p:txBody>
+      </p:sp>
+      <p:sp>
+        <p:nvSpPr>
+          <p:cNvPr id="7" name="TextBox 6"/>
+          <p:cNvSpPr txBox="1"/>
+          <p:nvPr/>
+        </p:nvSpPr>
+        <p:spPr>
+          <a:xfrm>
+            <a:off x="777240" y="1773936"/>
+            <a:ext cx="3657600" cy="365760"/>
+          </a:xfrm>
+          <a:prstGeom prst="rect">
+            <a:avLst/>
+          </a:prstGeom>
+          <a:noFill/>
+        </p:spPr>
+        <p:txBody>
+          <a:bodyPr wrap="square" anchor="ctr" lIns="0" rIns="0" tIns="0" bIns="0">
+            <a:spAutoFit/>
+          </a:bodyPr>
+          <a:lstStyle/>
+          <a:p>
+            <a:pPr algn="l"/>
+            <a:r>
+              <a:rPr sz="1600" b="1">
+                <a:solidFill>
+                  <a:srgbClr val="1A2233"/>
+                </a:solidFill>
+                <a:latin typeface="Microsoft JhengHei"/>
+                <a:ea typeface="Microsoft JhengHei"/>
+                <a:cs typeface="Microsoft JhengHei"/>
+              </a:rPr>
+              <a:t>達爾膚 </a:t>
+            </a:r>
+            <a:r>
+              <a:rPr sz="1300" b="0">
+                <a:solidFill>
+                  <a:srgbClr val="5C6679"/>
+                </a:solidFill>
+                <a:latin typeface="Microsoft JhengHei"/>
+                <a:ea typeface="Microsoft JhengHei"/>
+                <a:cs typeface="Microsoft JhengHei"/>
+              </a:rPr>
+              <a:t>6523</a:t>
+            </a:r>
+          </a:p>
+        </p:txBody>
+      </p:sp>
+      <p:sp>
+        <p:nvSpPr>
+          <p:cNvPr id="8" name="Rounded Rectangle 7"/>
+          <p:cNvSpPr/>
+          <p:nvPr/>
+        </p:nvSpPr>
+        <p:spPr>
+          <a:xfrm>
+            <a:off x="4526280" y="1792224"/>
+            <a:ext cx="1234440" cy="347472"/>
+          </a:xfrm>
+          <a:prstGeom prst="roundRect">
+            <a:avLst/>
+          </a:prstGeom>
+          <a:solidFill>
+            <a:srgbClr val="E63946"/>
+          </a:solidFill>
+          <a:ln>
+            <a:noFill/>
+          </a:ln>
+          <a:effectLst/>
+        </p:spPr>
+        <p:style>
+          <a:lnRef idx="1">
+            <a:schemeClr val="accent1"/>
+          </a:lnRef>
+          <a:fillRef idx="3">
+            <a:schemeClr val="accent1"/>
+          </a:fillRef>
+          <a:effectRef idx="2">
+            <a:schemeClr val="accent1"/>
+          </a:effectRef>
+          <a:fontRef idx="minor">
+            <a:schemeClr val="lt1"/>
+          </a:fontRef>
+        </p:style>
+        <p:txBody>
+          <a:bodyPr rtlCol="0" anchor="ctr"/>
+          <a:lstStyle/>
+          <a:p>
+            <a:pPr algn="ctr"/>
+          </a:p>
+        </p:txBody>
+      </p:sp>
+      <p:sp>
+        <p:nvSpPr>
+          <p:cNvPr id="9" name="TextBox 8"/>
+          <p:cNvSpPr txBox="1"/>
+          <p:nvPr/>
+        </p:nvSpPr>
+        <p:spPr>
+          <a:xfrm>
+            <a:off x="4526280" y="1792224"/>
+            <a:ext cx="1234440" cy="347472"/>
+          </a:xfrm>
+          <a:prstGeom prst="rect">
+            <a:avLst/>
+          </a:prstGeom>
+          <a:noFill/>
+        </p:spPr>
+        <p:txBody>
+          <a:bodyPr wrap="square" anchor="ctr" lIns="0" rIns="0" tIns="0" bIns="0">
+            <a:spAutoFit/>
+          </a:bodyPr>
+          <a:lstStyle/>
+          <a:p>
+            <a:pPr algn="ctr"/>
+            <a:r>
+              <a:rPr sz="1050" b="1">
+                <a:solidFill>
+                  <a:srgbClr val="FFFFFF"/>
+                </a:solidFill>
+                <a:latin typeface="Microsoft JhengHei"/>
+                <a:ea typeface="Microsoft JhengHei"/>
+                <a:cs typeface="Microsoft JhengHei"/>
+              </a:rPr>
+              <a:t>駭客攻擊</a:t>
+            </a:r>
+          </a:p>
+        </p:txBody>
+      </p:sp>
+      <p:sp>
+        <p:nvSpPr>
+          <p:cNvPr id="10" name="TextBox 9"/>
+          <p:cNvSpPr txBox="1"/>
+          <p:nvPr/>
+        </p:nvSpPr>
+        <p:spPr>
+          <a:xfrm>
+            <a:off x="777240" y="2267712"/>
+            <a:ext cx="4937760" cy="640080"/>
+          </a:xfrm>
+          <a:prstGeom prst="rect">
+            <a:avLst/>
+          </a:prstGeom>
+          <a:noFill/>
+        </p:spPr>
+        <p:txBody>
+          <a:bodyPr wrap="square" anchor="t" lIns="0" rIns="0" tIns="0" bIns="0">
+            <a:spAutoFit/>
+          </a:bodyPr>
+          <a:lstStyle/>
+          <a:p>
+            <a:pPr algn="l">
+              <a:lnSpc>
+                <a:spcPts val="1500"/>
+              </a:lnSpc>
+            </a:pPr>
+            <a:r>
+              <a:rPr sz="1100" b="1">
+                <a:solidFill>
+                  <a:srgbClr val="E63946"/>
+                </a:solidFill>
+                <a:latin typeface="Microsoft JhengHei"/>
+                <a:ea typeface="Microsoft JhengHei"/>
+                <a:cs typeface="Microsoft JhengHei"/>
+              </a:rPr>
+              <a:t>緣由　</a:t>
+            </a:r>
+            <a:r>
+              <a:rPr sz="1100" b="0">
+                <a:solidFill>
+                  <a:srgbClr val="1A2233"/>
+                </a:solidFill>
+                <a:latin typeface="Microsoft JhengHei"/>
+                <a:ea typeface="Microsoft JhengHei"/>
+                <a:cs typeface="Microsoft JhengHei"/>
+              </a:rPr>
+              <a:t>本公司部分內部資訊系統遭受網路攻擊事件，初步評估對公司營運無重大影響。</a:t>
+            </a:r>
+          </a:p>
+        </p:txBody>
+      </p:sp>
+      <p:sp>
+        <p:nvSpPr>
+          <p:cNvPr id="11" name="TextBox 10"/>
+          <p:cNvSpPr txBox="1"/>
+          <p:nvPr/>
+        </p:nvSpPr>
+        <p:spPr>
+          <a:xfrm>
+            <a:off x="777240" y="2926080"/>
+            <a:ext cx="4937760" cy="713232"/>
+          </a:xfrm>
+          <a:prstGeom prst="rect">
+            <a:avLst/>
+          </a:prstGeom>
+          <a:noFill/>
+        </p:spPr>
+        <p:txBody>
+          <a:bodyPr wrap="square" anchor="t" lIns="0" rIns="0" tIns="0" bIns="0">
+            <a:spAutoFit/>
+          </a:bodyPr>
+          <a:lstStyle/>
+          <a:p>
+            <a:pPr algn="l">
+              <a:lnSpc>
+                <a:spcPts val="1500"/>
+              </a:lnSpc>
+            </a:pPr>
+            <a:r>
+              <a:rPr sz="1100" b="1">
+                <a:solidFill>
+                  <a:srgbClr val="E63946"/>
+                </a:solidFill>
+                <a:latin typeface="Microsoft JhengHei"/>
+                <a:ea typeface="Microsoft JhengHei"/>
+                <a:cs typeface="Microsoft JhengHei"/>
+              </a:rPr>
+              <a:t>因應　</a:t>
+            </a:r>
+            <a:r>
+              <a:rPr sz="1100" b="0">
+                <a:solidFill>
+                  <a:srgbClr val="1A2233"/>
+                </a:solidFill>
+                <a:latin typeface="Microsoft JhengHei"/>
+                <a:ea typeface="Microsoft JhengHei"/>
+                <a:cs typeface="Microsoft JhengHei"/>
+              </a:rPr>
+              <a:t>本公司將持續強化網路與資訊基礎架構之安全管控，以確保資訊安全。</a:t>
+            </a:r>
+          </a:p>
+        </p:txBody>
+      </p:sp>
+      <p:sp>
+        <p:nvSpPr>
+          <p:cNvPr id="12" name="Rounded Rectangle 11"/>
+          <p:cNvSpPr/>
+          <p:nvPr/>
+        </p:nvSpPr>
+        <p:spPr>
+          <a:xfrm>
+            <a:off x="6172200" y="1554480"/>
+            <a:ext cx="5394960" cy="2148840"/>
+          </a:xfrm>
+          <a:prstGeom prst="roundRect">
+            <a:avLst/>
+          </a:prstGeom>
+          <a:solidFill>
+            <a:srgbClr val="FFFFFF"/>
+          </a:solidFill>
+          <a:ln w="12700">
+            <a:solidFill>
+              <a:srgbClr val="DDE3EE"/>
+            </a:solidFill>
+          </a:ln>
+          <a:effectLst/>
+        </p:spPr>
+        <p:style>
+          <a:lnRef idx="1">
+            <a:schemeClr val="accent1"/>
+          </a:lnRef>
+          <a:fillRef idx="3">
+            <a:schemeClr val="accent1"/>
+          </a:fillRef>
+          <a:effectRef idx="2">
+            <a:schemeClr val="accent1"/>
+          </a:effectRef>
+          <a:fontRef idx="minor">
+            <a:schemeClr val="lt1"/>
+          </a:fontRef>
+        </p:style>
+        <p:txBody>
+          <a:bodyPr rtlCol="0" anchor="ctr"/>
+          <a:lstStyle/>
+          <a:p>
+            <a:pPr algn="ctr"/>
+          </a:p>
+        </p:txBody>
+      </p:sp>
+      <p:sp>
+        <p:nvSpPr>
+          <p:cNvPr id="13" name="Rectangle 12"/>
+          <p:cNvSpPr/>
+          <p:nvPr/>
+        </p:nvSpPr>
+        <p:spPr>
+          <a:xfrm>
+            <a:off x="6172200" y="1554480"/>
+            <a:ext cx="5394960" cy="109728"/>
+          </a:xfrm>
+          <a:prstGeom prst="rect">
+            <a:avLst/>
+          </a:prstGeom>
+          <a:solidFill>
+            <a:srgbClr val="E63946"/>
+          </a:solidFill>
+          <a:ln>
+            <a:noFill/>
+          </a:ln>
+          <a:effectLst/>
+        </p:spPr>
+        <p:style>
+          <a:lnRef idx="1">
+            <a:schemeClr val="accent1"/>
+          </a:lnRef>
+          <a:fillRef idx="3">
+            <a:schemeClr val="accent1"/>
+          </a:fillRef>
+          <a:effectRef idx="2">
+            <a:schemeClr val="accent1"/>
+          </a:effectRef>
+          <a:fontRef idx="minor">
+            <a:schemeClr val="lt1"/>
+          </a:fontRef>
+        </p:style>
+        <p:txBody>
+          <a:bodyPr rtlCol="0" anchor="ctr"/>
+          <a:lstStyle/>
+          <a:p>
+            <a:pPr algn="ctr"/>
+          </a:p>
+        </p:txBody>
+      </p:sp>
+      <p:sp>
+        <p:nvSpPr>
+          <p:cNvPr id="14" name="TextBox 13"/>
+          <p:cNvSpPr txBox="1"/>
+          <p:nvPr/>
+        </p:nvSpPr>
+        <p:spPr>
+          <a:xfrm>
+            <a:off x="6400800" y="1773936"/>
+            <a:ext cx="3657600" cy="365760"/>
+          </a:xfrm>
+          <a:prstGeom prst="rect">
+            <a:avLst/>
+          </a:prstGeom>
+          <a:noFill/>
+        </p:spPr>
+        <p:txBody>
+          <a:bodyPr wrap="square" anchor="ctr" lIns="0" rIns="0" tIns="0" bIns="0">
+            <a:spAutoFit/>
+          </a:bodyPr>
+          <a:lstStyle/>
+          <a:p>
+            <a:pPr algn="l"/>
+            <a:r>
+              <a:rPr sz="1600" b="1">
+                <a:solidFill>
+                  <a:srgbClr val="1A2233"/>
+                </a:solidFill>
+                <a:latin typeface="Microsoft JhengHei"/>
+                <a:ea typeface="Microsoft JhengHei"/>
+                <a:cs typeface="Microsoft JhengHei"/>
+              </a:rPr>
+              <a:t>大車隊 </a:t>
+            </a:r>
+            <a:r>
+              <a:rPr sz="1300" b="0">
+                <a:solidFill>
+                  <a:srgbClr val="5C6679"/>
+                </a:solidFill>
+                <a:latin typeface="Microsoft JhengHei"/>
+                <a:ea typeface="Microsoft JhengHei"/>
+                <a:cs typeface="Microsoft JhengHei"/>
+              </a:rPr>
+              <a:t>2640</a:t>
+            </a:r>
+          </a:p>
+        </p:txBody>
+      </p:sp>
+      <p:sp>
+        <p:nvSpPr>
+          <p:cNvPr id="15" name="Rounded Rectangle 14"/>
+          <p:cNvSpPr/>
+          <p:nvPr/>
+        </p:nvSpPr>
+        <p:spPr>
+          <a:xfrm>
+            <a:off x="10149840" y="1792224"/>
+            <a:ext cx="1234440" cy="347472"/>
+          </a:xfrm>
+          <a:prstGeom prst="roundRect">
+            <a:avLst/>
+          </a:prstGeom>
+          <a:solidFill>
+            <a:srgbClr val="E63946"/>
+          </a:solidFill>
+          <a:ln>
+            <a:noFill/>
+          </a:ln>
+          <a:effectLst/>
+        </p:spPr>
+        <p:style>
+          <a:lnRef idx="1">
+            <a:schemeClr val="accent1"/>
+          </a:lnRef>
+          <a:fillRef idx="3">
+            <a:schemeClr val="accent1"/>
+          </a:fillRef>
+          <a:effectRef idx="2">
+            <a:schemeClr val="accent1"/>
+          </a:effectRef>
+          <a:fontRef idx="minor">
+            <a:schemeClr val="lt1"/>
+          </a:fontRef>
+        </p:style>
+        <p:txBody>
+          <a:bodyPr rtlCol="0" anchor="ctr"/>
+          <a:lstStyle/>
+          <a:p>
+            <a:pPr algn="ctr"/>
+          </a:p>
+        </p:txBody>
+      </p:sp>
+      <p:sp>
+        <p:nvSpPr>
+          <p:cNvPr id="16" name="TextBox 15"/>
+          <p:cNvSpPr txBox="1"/>
+          <p:nvPr/>
+        </p:nvSpPr>
+        <p:spPr>
+          <a:xfrm>
+            <a:off x="10149840" y="1792224"/>
+            <a:ext cx="1234440" cy="347472"/>
+          </a:xfrm>
+          <a:prstGeom prst="rect">
+            <a:avLst/>
+          </a:prstGeom>
+          <a:noFill/>
+        </p:spPr>
+        <p:txBody>
+          <a:bodyPr wrap="square" anchor="ctr" lIns="0" rIns="0" tIns="0" bIns="0">
+            <a:spAutoFit/>
+          </a:bodyPr>
+          <a:lstStyle/>
+          <a:p>
+            <a:pPr algn="ctr"/>
+            <a:r>
+              <a:rPr sz="1050" b="1">
+                <a:solidFill>
+                  <a:srgbClr val="FFFFFF"/>
+                </a:solidFill>
+                <a:latin typeface="Microsoft JhengHei"/>
+                <a:ea typeface="Microsoft JhengHei"/>
+                <a:cs typeface="Microsoft JhengHei"/>
+              </a:rPr>
+              <a:t>駭客攻擊</a:t>
+            </a:r>
+          </a:p>
+        </p:txBody>
+      </p:sp>
+      <p:sp>
+        <p:nvSpPr>
+          <p:cNvPr id="17" name="TextBox 16"/>
+          <p:cNvSpPr txBox="1"/>
+          <p:nvPr/>
+        </p:nvSpPr>
+        <p:spPr>
+          <a:xfrm>
+            <a:off x="6400800" y="2267712"/>
+            <a:ext cx="4937760" cy="640080"/>
+          </a:xfrm>
+          <a:prstGeom prst="rect">
+            <a:avLst/>
+          </a:prstGeom>
+          <a:noFill/>
+        </p:spPr>
+        <p:txBody>
+          <a:bodyPr wrap="square" anchor="t" lIns="0" rIns="0" tIns="0" bIns="0">
+            <a:spAutoFit/>
+          </a:bodyPr>
+          <a:lstStyle/>
+          <a:p>
+            <a:pPr algn="l">
+              <a:lnSpc>
+                <a:spcPts val="1500"/>
+              </a:lnSpc>
+            </a:pPr>
+            <a:r>
+              <a:rPr sz="1100" b="1">
+                <a:solidFill>
+                  <a:srgbClr val="E63946"/>
+                </a:solidFill>
+                <a:latin typeface="Microsoft JhengHei"/>
+                <a:ea typeface="Microsoft JhengHei"/>
+                <a:cs typeface="Microsoft JhengHei"/>
+              </a:rPr>
+              <a:t>緣由　</a:t>
+            </a:r>
+            <a:r>
+              <a:rPr sz="1100" b="0">
+                <a:solidFill>
+                  <a:srgbClr val="1A2233"/>
+                </a:solidFill>
+                <a:latin typeface="Microsoft JhengHei"/>
+                <a:ea typeface="Microsoft JhengHei"/>
+                <a:cs typeface="Microsoft JhengHei"/>
+              </a:rPr>
+              <a:t>本公司重要子公司全球商務科技股份有限公司於今日發現部分資訊系統遭受網路攻擊，已立即啟動資安應變機…</a:t>
+            </a:r>
+          </a:p>
+        </p:txBody>
+      </p:sp>
+      <p:sp>
+        <p:nvSpPr>
+          <p:cNvPr id="18" name="TextBox 17"/>
+          <p:cNvSpPr txBox="1"/>
+          <p:nvPr/>
+        </p:nvSpPr>
+        <p:spPr>
+          <a:xfrm>
+            <a:off x="6400800" y="2926080"/>
+            <a:ext cx="4937760" cy="713232"/>
+          </a:xfrm>
+          <a:prstGeom prst="rect">
+            <a:avLst/>
+          </a:prstGeom>
+          <a:noFill/>
+        </p:spPr>
+        <p:txBody>
+          <a:bodyPr wrap="square" anchor="t" lIns="0" rIns="0" tIns="0" bIns="0">
+            <a:spAutoFit/>
+          </a:bodyPr>
+          <a:lstStyle/>
+          <a:p>
+            <a:pPr algn="l">
+              <a:lnSpc>
+                <a:spcPts val="1500"/>
+              </a:lnSpc>
+            </a:pPr>
+            <a:r>
+              <a:rPr sz="1100" b="1">
+                <a:solidFill>
+                  <a:srgbClr val="E63946"/>
+                </a:solidFill>
+                <a:latin typeface="Microsoft JhengHei"/>
+                <a:ea typeface="Microsoft JhengHei"/>
+                <a:cs typeface="Microsoft JhengHei"/>
+              </a:rPr>
+              <a:t>因應　</a:t>
+            </a:r>
+            <a:r>
+              <a:rPr sz="1100" b="0">
+                <a:solidFill>
+                  <a:srgbClr val="1A2233"/>
+                </a:solidFill>
+                <a:latin typeface="Microsoft JhengHei"/>
+                <a:ea typeface="Microsoft JhengHei"/>
+                <a:cs typeface="Microsoft JhengHei"/>
+              </a:rPr>
+              <a:t>公司將持續進行資安鑑識、系統安全強化及相關風險控管作業，受影響系統預期可於短期內逐步恢復正常運作；後續如調查結果或事件發…</a:t>
             </a:r>
           </a:p>
         </p:txBody>

--- a/資安事件因應分析.pptx
+++ b/資安事件因應分析.pptx
@@ -207,7 +207,7 @@
                   <c:v>4</c:v>
                 </c:pt>
                 <c:pt idx="3">
-                  <c:v>3</c:v>
+                  <c:v>4</c:v>
                 </c:pt>
               </c:numCache>
             </c:numRef>
@@ -3544,7 +3544,7 @@
                 <a:ea typeface="Microsoft JhengHei"/>
                 <a:cs typeface="Microsoft JhengHei"/>
               </a:rPr>
-              <a:t>資料期間 2026-09-08 ~ 2026-10-08　｜　MOPS 重大訊息全文檢索　｜　14 家公司</a:t>
+              <a:t>資料期間 2026-09-09 ~ 2026-10-09　｜　MOPS 重大訊息全文檢索　｜　15 家公司</a:t>
             </a:r>
           </a:p>
         </p:txBody>
@@ -3761,7 +3761,7 @@
                 <a:ea typeface="Microsoft JhengHei"/>
                 <a:cs typeface="Microsoft JhengHei"/>
               </a:rPr>
-              <a:t>資料期間內 MOPS 揭露之 14 起資安相關重大訊息</a:t>
+              <a:t>資料期間內 MOPS 揭露之 15 起資安相關重大訊息</a:t>
             </a:r>
           </a:p>
         </p:txBody>
@@ -3844,7 +3844,7 @@
                 <a:ea typeface="Microsoft JhengHei"/>
                 <a:cs typeface="Microsoft JhengHei"/>
               </a:rPr>
-              <a:t>14</a:t>
+              <a:t>15</a:t>
             </a:r>
           </a:p>
         </p:txBody>
@@ -4151,7 +4151,7 @@
                 <a:gridCol w="2286000"/>
                 <a:gridCol w="5120640"/>
               </a:tblGrid>
-              <a:tr h="237744">
+              <a:tr h="222885">
                 <a:tc>
                   <a:txBody>
                     <a:bodyPr/>
@@ -4273,7 +4273,7 @@
                   </a:tcPr>
                 </a:tc>
               </a:tr>
-              <a:tr h="237744">
+              <a:tr h="222885">
                 <a:tc>
                   <a:txBody>
                     <a:bodyPr/>
@@ -4288,7 +4288,7 @@
                           <a:ea typeface="Microsoft JhengHei"/>
                           <a:cs typeface="Microsoft JhengHei"/>
                         </a:rPr>
-                        <a:t>上福</a:t>
+                        <a:t>緯致</a:t>
                       </a:r>
                     </a:p>
                   </a:txBody>
@@ -4312,7 +4312,7 @@
                           <a:ea typeface="Microsoft JhengHei"/>
                           <a:cs typeface="Microsoft JhengHei"/>
                         </a:rPr>
-                        <a:t>6128</a:t>
+                        <a:t>4953</a:t>
                       </a:r>
                     </a:p>
                   </a:txBody>
@@ -4336,7 +4336,7 @@
                           <a:ea typeface="Microsoft JhengHei"/>
                           <a:cs typeface="Microsoft JhengHei"/>
                         </a:rPr>
-                        <a:t>10/07</a:t>
+                        <a:t>10/09</a:t>
                       </a:r>
                     </a:p>
                   </a:txBody>
@@ -4384,7 +4384,7 @@
                           <a:ea typeface="Microsoft JhengHei"/>
                           <a:cs typeface="Microsoft JhengHei"/>
                         </a:rPr>
-                        <a:t>目前評估沒有個資、亦沒有機密或重要文件資料外洩等情事發生，對本公司營…</a:t>
+                        <a:t>目前公司整體系統與營運正常運作，對公司尚無重大影響。</a:t>
                       </a:r>
                     </a:p>
                   </a:txBody>
@@ -4395,7 +4395,7 @@
                   </a:tcPr>
                 </a:tc>
               </a:tr>
-              <a:tr h="237744">
+              <a:tr h="222885">
                 <a:tc>
                   <a:txBody>
                     <a:bodyPr/>
@@ -4410,7 +4410,7 @@
                           <a:ea typeface="Microsoft JhengHei"/>
                           <a:cs typeface="Microsoft JhengHei"/>
                         </a:rPr>
-                        <a:t>杏一</a:t>
+                        <a:t>上福</a:t>
                       </a:r>
                     </a:p>
                   </a:txBody>
@@ -4434,7 +4434,251 @@
                           <a:ea typeface="Microsoft JhengHei"/>
                           <a:cs typeface="Microsoft JhengHei"/>
                         </a:rPr>
+                        <a:t>6128</a:t>
+                      </a:r>
+                    </a:p>
+                  </a:txBody>
+                  <a:tcPr anchor="ctr" marL="73152" marT="9144" marB="9144">
+                    <a:solidFill>
+                      <a:srgbClr val="EEF2F9"/>
+                    </a:solidFill>
+                  </a:tcPr>
+                </a:tc>
+                <a:tc>
+                  <a:txBody>
+                    <a:bodyPr/>
+                    <a:lstStyle/>
+                    <a:p>
+                      <a:r>
+                        <a:rPr sz="1150" b="0">
+                          <a:solidFill>
+                            <a:srgbClr val="1A2233"/>
+                          </a:solidFill>
+                          <a:latin typeface="Microsoft JhengHei"/>
+                          <a:ea typeface="Microsoft JhengHei"/>
+                          <a:cs typeface="Microsoft JhengHei"/>
+                        </a:rPr>
+                        <a:t>10/07</a:t>
+                      </a:r>
+                    </a:p>
+                  </a:txBody>
+                  <a:tcPr anchor="ctr" marL="73152" marT="9144" marB="9144">
+                    <a:solidFill>
+                      <a:srgbClr val="EEF2F9"/>
+                    </a:solidFill>
+                  </a:tcPr>
+                </a:tc>
+                <a:tc>
+                  <a:txBody>
+                    <a:bodyPr/>
+                    <a:lstStyle/>
+                    <a:p>
+                      <a:r>
+                        <a:rPr sz="1150" b="1">
+                          <a:solidFill>
+                            <a:srgbClr val="5C6679"/>
+                          </a:solidFill>
+                          <a:latin typeface="Microsoft JhengHei"/>
+                          <a:ea typeface="Microsoft JhengHei"/>
+                          <a:cs typeface="Microsoft JhengHei"/>
+                        </a:rPr>
+                        <a:t>其他</a:t>
+                      </a:r>
+                    </a:p>
+                  </a:txBody>
+                  <a:tcPr anchor="ctr" marL="73152" marT="9144" marB="9144">
+                    <a:solidFill>
+                      <a:srgbClr val="EEF2F9"/>
+                    </a:solidFill>
+                  </a:tcPr>
+                </a:tc>
+                <a:tc>
+                  <a:txBody>
+                    <a:bodyPr/>
+                    <a:lstStyle/>
+                    <a:p>
+                      <a:r>
+                        <a:rPr sz="1150" b="0">
+                          <a:solidFill>
+                            <a:srgbClr val="1A2233"/>
+                          </a:solidFill>
+                          <a:latin typeface="Microsoft JhengHei"/>
+                          <a:ea typeface="Microsoft JhengHei"/>
+                          <a:cs typeface="Microsoft JhengHei"/>
+                        </a:rPr>
+                        <a:t>目前評估沒有個資、亦沒有機密或重要文件資料外洩等情事發生，對本公司營…</a:t>
+                      </a:r>
+                    </a:p>
+                  </a:txBody>
+                  <a:tcPr anchor="ctr" marL="73152" marT="9144" marB="9144">
+                    <a:solidFill>
+                      <a:srgbClr val="EEF2F9"/>
+                    </a:solidFill>
+                  </a:tcPr>
+                </a:tc>
+              </a:tr>
+              <a:tr h="222885">
+                <a:tc>
+                  <a:txBody>
+                    <a:bodyPr/>
+                    <a:lstStyle/>
+                    <a:p>
+                      <a:r>
+                        <a:rPr sz="1150" b="0">
+                          <a:solidFill>
+                            <a:srgbClr val="1A2233"/>
+                          </a:solidFill>
+                          <a:latin typeface="Microsoft JhengHei"/>
+                          <a:ea typeface="Microsoft JhengHei"/>
+                          <a:cs typeface="Microsoft JhengHei"/>
+                        </a:rPr>
+                        <a:t>杏一</a:t>
+                      </a:r>
+                    </a:p>
+                  </a:txBody>
+                  <a:tcPr anchor="ctr" marL="73152" marT="9144" marB="9144">
+                    <a:solidFill>
+                      <a:srgbClr val="FFFFFF"/>
+                    </a:solidFill>
+                  </a:tcPr>
+                </a:tc>
+                <a:tc>
+                  <a:txBody>
+                    <a:bodyPr/>
+                    <a:lstStyle/>
+                    <a:p>
+                      <a:r>
+                        <a:rPr sz="1150" b="0">
+                          <a:solidFill>
+                            <a:srgbClr val="1A2233"/>
+                          </a:solidFill>
+                          <a:latin typeface="Microsoft JhengHei"/>
+                          <a:ea typeface="Microsoft JhengHei"/>
+                          <a:cs typeface="Microsoft JhengHei"/>
+                        </a:rPr>
                         <a:t>4175</a:t>
+                      </a:r>
+                    </a:p>
+                  </a:txBody>
+                  <a:tcPr anchor="ctr" marL="73152" marT="9144" marB="9144">
+                    <a:solidFill>
+                      <a:srgbClr val="FFFFFF"/>
+                    </a:solidFill>
+                  </a:tcPr>
+                </a:tc>
+                <a:tc>
+                  <a:txBody>
+                    <a:bodyPr/>
+                    <a:lstStyle/>
+                    <a:p>
+                      <a:r>
+                        <a:rPr sz="1150" b="0">
+                          <a:solidFill>
+                            <a:srgbClr val="1A2233"/>
+                          </a:solidFill>
+                          <a:latin typeface="Microsoft JhengHei"/>
+                          <a:ea typeface="Microsoft JhengHei"/>
+                          <a:cs typeface="Microsoft JhengHei"/>
+                        </a:rPr>
+                        <a:t>10/07</a:t>
+                      </a:r>
+                    </a:p>
+                  </a:txBody>
+                  <a:tcPr anchor="ctr" marL="73152" marT="9144" marB="9144">
+                    <a:solidFill>
+                      <a:srgbClr val="FFFFFF"/>
+                    </a:solidFill>
+                  </a:tcPr>
+                </a:tc>
+                <a:tc>
+                  <a:txBody>
+                    <a:bodyPr/>
+                    <a:lstStyle/>
+                    <a:p>
+                      <a:r>
+                        <a:rPr sz="1150" b="1">
+                          <a:solidFill>
+                            <a:srgbClr val="27A6C4"/>
+                          </a:solidFill>
+                          <a:latin typeface="Microsoft JhengHei"/>
+                          <a:ea typeface="Microsoft JhengHei"/>
+                          <a:cs typeface="Microsoft JhengHei"/>
+                        </a:rPr>
+                        <a:t>個資外洩</a:t>
+                      </a:r>
+                    </a:p>
+                  </a:txBody>
+                  <a:tcPr anchor="ctr" marL="73152" marT="9144" marB="9144">
+                    <a:solidFill>
+                      <a:srgbClr val="FFFFFF"/>
+                    </a:solidFill>
+                  </a:tcPr>
+                </a:tc>
+                <a:tc>
+                  <a:txBody>
+                    <a:bodyPr/>
+                    <a:lstStyle/>
+                    <a:p>
+                      <a:r>
+                        <a:rPr sz="1150" b="0">
+                          <a:solidFill>
+                            <a:srgbClr val="1A2233"/>
+                          </a:solidFill>
+                          <a:latin typeface="Microsoft JhengHei"/>
+                          <a:ea typeface="Microsoft JhengHei"/>
+                          <a:cs typeface="Microsoft JhengHei"/>
+                        </a:rPr>
+                        <a:t>截至目前為止對公司財務及業務並無重大影響。</a:t>
+                      </a:r>
+                    </a:p>
+                  </a:txBody>
+                  <a:tcPr anchor="ctr" marL="73152" marT="9144" marB="9144">
+                    <a:solidFill>
+                      <a:srgbClr val="FFFFFF"/>
+                    </a:solidFill>
+                  </a:tcPr>
+                </a:tc>
+              </a:tr>
+              <a:tr h="222885">
+                <a:tc>
+                  <a:txBody>
+                    <a:bodyPr/>
+                    <a:lstStyle/>
+                    <a:p>
+                      <a:r>
+                        <a:rPr sz="1150" b="0">
+                          <a:solidFill>
+                            <a:srgbClr val="1A2233"/>
+                          </a:solidFill>
+                          <a:latin typeface="Microsoft JhengHei"/>
+                          <a:ea typeface="Microsoft JhengHei"/>
+                          <a:cs typeface="Microsoft JhengHei"/>
+                        </a:rPr>
+                        <a:t>鈊象</a:t>
+                      </a:r>
+                    </a:p>
+                  </a:txBody>
+                  <a:tcPr anchor="ctr" marL="73152" marT="9144" marB="9144">
+                    <a:solidFill>
+                      <a:srgbClr val="EEF2F9"/>
+                    </a:solidFill>
+                  </a:tcPr>
+                </a:tc>
+                <a:tc>
+                  <a:txBody>
+                    <a:bodyPr/>
+                    <a:lstStyle/>
+                    <a:p>
+                      <a:r>
+                        <a:rPr sz="1150" b="0">
+                          <a:solidFill>
+                            <a:srgbClr val="1A2233"/>
+                          </a:solidFill>
+                          <a:latin typeface="Microsoft JhengHei"/>
+                          <a:ea typeface="Microsoft JhengHei"/>
+                          <a:cs typeface="Microsoft JhengHei"/>
+                        </a:rPr>
+                        <a:t>3293</a:t>
                       </a:r>
                     </a:p>
                   </a:txBody>
@@ -4506,7 +4750,7 @@
                           <a:ea typeface="Microsoft JhengHei"/>
                           <a:cs typeface="Microsoft JhengHei"/>
                         </a:rPr>
-                        <a:t>截至目前為止對公司財務及業務並無重大影響。</a:t>
+                        <a:t>目前評估對公司營運無重大影響。</a:t>
                       </a:r>
                     </a:p>
                   </a:txBody>
@@ -4517,7 +4761,7 @@
                   </a:tcPr>
                 </a:tc>
               </a:tr>
-              <a:tr h="237744">
+              <a:tr h="222885">
                 <a:tc>
                   <a:txBody>
                     <a:bodyPr/>
@@ -4532,7 +4776,7 @@
                           <a:ea typeface="Microsoft JhengHei"/>
                           <a:cs typeface="Microsoft JhengHei"/>
                         </a:rPr>
-                        <a:t>鈊象</a:t>
+                        <a:t>一零四</a:t>
                       </a:r>
                     </a:p>
                   </a:txBody>
@@ -4556,7 +4800,7 @@
                           <a:ea typeface="Microsoft JhengHei"/>
                           <a:cs typeface="Microsoft JhengHei"/>
                         </a:rPr>
-                        <a:t>3293</a:t>
+                        <a:t>3130</a:t>
                       </a:r>
                     </a:p>
                   </a:txBody>
@@ -4580,7 +4824,495 @@
                           <a:ea typeface="Microsoft JhengHei"/>
                           <a:cs typeface="Microsoft JhengHei"/>
                         </a:rPr>
-                        <a:t>10/07</a:t>
+                        <a:t>10/06</a:t>
+                      </a:r>
+                    </a:p>
+                  </a:txBody>
+                  <a:tcPr anchor="ctr" marL="73152" marT="9144" marB="9144">
+                    <a:solidFill>
+                      <a:srgbClr val="FFFFFF"/>
+                    </a:solidFill>
+                  </a:tcPr>
+                </a:tc>
+                <a:tc>
+                  <a:txBody>
+                    <a:bodyPr/>
+                    <a:lstStyle/>
+                    <a:p>
+                      <a:r>
+                        <a:rPr sz="1150" b="1">
+                          <a:solidFill>
+                            <a:srgbClr val="5C6679"/>
+                          </a:solidFill>
+                          <a:latin typeface="Microsoft JhengHei"/>
+                          <a:ea typeface="Microsoft JhengHei"/>
+                          <a:cs typeface="Microsoft JhengHei"/>
+                        </a:rPr>
+                        <a:t>其他</a:t>
+                      </a:r>
+                    </a:p>
+                  </a:txBody>
+                  <a:tcPr anchor="ctr" marL="73152" marT="9144" marB="9144">
+                    <a:solidFill>
+                      <a:srgbClr val="FFFFFF"/>
+                    </a:solidFill>
+                  </a:tcPr>
+                </a:tc>
+                <a:tc>
+                  <a:txBody>
+                    <a:bodyPr/>
+                    <a:lstStyle/>
+                    <a:p>
+                      <a:r>
+                        <a:rPr sz="1150" b="0">
+                          <a:solidFill>
+                            <a:srgbClr val="1A2233"/>
+                          </a:solidFill>
+                          <a:latin typeface="Microsoft JhengHei"/>
+                          <a:ea typeface="Microsoft JhengHei"/>
+                          <a:cs typeface="Microsoft JhengHei"/>
+                        </a:rPr>
+                        <a:t>目前系統與營運正常運作，對公司尚無重大影響。相關影響仍持續評估中。</a:t>
+                      </a:r>
+                    </a:p>
+                  </a:txBody>
+                  <a:tcPr anchor="ctr" marL="73152" marT="9144" marB="9144">
+                    <a:solidFill>
+                      <a:srgbClr val="FFFFFF"/>
+                    </a:solidFill>
+                  </a:tcPr>
+                </a:tc>
+              </a:tr>
+              <a:tr h="222885">
+                <a:tc>
+                  <a:txBody>
+                    <a:bodyPr/>
+                    <a:lstStyle/>
+                    <a:p>
+                      <a:r>
+                        <a:rPr sz="1150" b="0">
+                          <a:solidFill>
+                            <a:srgbClr val="1A2233"/>
+                          </a:solidFill>
+                          <a:latin typeface="Microsoft JhengHei"/>
+                          <a:ea typeface="Microsoft JhengHei"/>
+                          <a:cs typeface="Microsoft JhengHei"/>
+                        </a:rPr>
+                        <a:t>安心</a:t>
+                      </a:r>
+                    </a:p>
+                  </a:txBody>
+                  <a:tcPr anchor="ctr" marL="73152" marT="9144" marB="9144">
+                    <a:solidFill>
+                      <a:srgbClr val="EEF2F9"/>
+                    </a:solidFill>
+                  </a:tcPr>
+                </a:tc>
+                <a:tc>
+                  <a:txBody>
+                    <a:bodyPr/>
+                    <a:lstStyle/>
+                    <a:p>
+                      <a:r>
+                        <a:rPr sz="1150" b="0">
+                          <a:solidFill>
+                            <a:srgbClr val="1A2233"/>
+                          </a:solidFill>
+                          <a:latin typeface="Microsoft JhengHei"/>
+                          <a:ea typeface="Microsoft JhengHei"/>
+                          <a:cs typeface="Microsoft JhengHei"/>
+                        </a:rPr>
+                        <a:t>1259</a:t>
+                      </a:r>
+                    </a:p>
+                  </a:txBody>
+                  <a:tcPr anchor="ctr" marL="73152" marT="9144" marB="9144">
+                    <a:solidFill>
+                      <a:srgbClr val="EEF2F9"/>
+                    </a:solidFill>
+                  </a:tcPr>
+                </a:tc>
+                <a:tc>
+                  <a:txBody>
+                    <a:bodyPr/>
+                    <a:lstStyle/>
+                    <a:p>
+                      <a:r>
+                        <a:rPr sz="1150" b="0">
+                          <a:solidFill>
+                            <a:srgbClr val="1A2233"/>
+                          </a:solidFill>
+                          <a:latin typeface="Microsoft JhengHei"/>
+                          <a:ea typeface="Microsoft JhengHei"/>
+                          <a:cs typeface="Microsoft JhengHei"/>
+                        </a:rPr>
+                        <a:t>10/01</a:t>
+                      </a:r>
+                    </a:p>
+                  </a:txBody>
+                  <a:tcPr anchor="ctr" marL="73152" marT="9144" marB="9144">
+                    <a:solidFill>
+                      <a:srgbClr val="EEF2F9"/>
+                    </a:solidFill>
+                  </a:tcPr>
+                </a:tc>
+                <a:tc>
+                  <a:txBody>
+                    <a:bodyPr/>
+                    <a:lstStyle/>
+                    <a:p>
+                      <a:r>
+                        <a:rPr sz="1150" b="1">
+                          <a:solidFill>
+                            <a:srgbClr val="27A6C4"/>
+                          </a:solidFill>
+                          <a:latin typeface="Microsoft JhengHei"/>
+                          <a:ea typeface="Microsoft JhengHei"/>
+                          <a:cs typeface="Microsoft JhengHei"/>
+                        </a:rPr>
+                        <a:t>個資外洩</a:t>
+                      </a:r>
+                    </a:p>
+                  </a:txBody>
+                  <a:tcPr anchor="ctr" marL="73152" marT="9144" marB="9144">
+                    <a:solidFill>
+                      <a:srgbClr val="EEF2F9"/>
+                    </a:solidFill>
+                  </a:tcPr>
+                </a:tc>
+                <a:tc>
+                  <a:txBody>
+                    <a:bodyPr/>
+                    <a:lstStyle/>
+                    <a:p>
+                      <a:r>
+                        <a:rPr sz="1150" b="0">
+                          <a:solidFill>
+                            <a:srgbClr val="1A2233"/>
+                          </a:solidFill>
+                          <a:latin typeface="Microsoft JhengHei"/>
+                          <a:ea typeface="Microsoft JhengHei"/>
+                          <a:cs typeface="Microsoft JhengHei"/>
+                        </a:rPr>
+                        <a:t>截至目前為止對公司財務及業務並無重大影響。</a:t>
+                      </a:r>
+                    </a:p>
+                  </a:txBody>
+                  <a:tcPr anchor="ctr" marL="73152" marT="9144" marB="9144">
+                    <a:solidFill>
+                      <a:srgbClr val="EEF2F9"/>
+                    </a:solidFill>
+                  </a:tcPr>
+                </a:tc>
+              </a:tr>
+              <a:tr h="222885">
+                <a:tc>
+                  <a:txBody>
+                    <a:bodyPr/>
+                    <a:lstStyle/>
+                    <a:p>
+                      <a:r>
+                        <a:rPr sz="1150" b="0">
+                          <a:solidFill>
+                            <a:srgbClr val="1A2233"/>
+                          </a:solidFill>
+                          <a:latin typeface="Microsoft JhengHei"/>
+                          <a:ea typeface="Microsoft JhengHei"/>
+                          <a:cs typeface="Microsoft JhengHei"/>
+                        </a:rPr>
+                        <a:t>神腦</a:t>
+                      </a:r>
+                    </a:p>
+                  </a:txBody>
+                  <a:tcPr anchor="ctr" marL="73152" marT="9144" marB="9144">
+                    <a:solidFill>
+                      <a:srgbClr val="FFFFFF"/>
+                    </a:solidFill>
+                  </a:tcPr>
+                </a:tc>
+                <a:tc>
+                  <a:txBody>
+                    <a:bodyPr/>
+                    <a:lstStyle/>
+                    <a:p>
+                      <a:r>
+                        <a:rPr sz="1150" b="0">
+                          <a:solidFill>
+                            <a:srgbClr val="1A2233"/>
+                          </a:solidFill>
+                          <a:latin typeface="Microsoft JhengHei"/>
+                          <a:ea typeface="Microsoft JhengHei"/>
+                          <a:cs typeface="Microsoft JhengHei"/>
+                        </a:rPr>
+                        <a:t>2450</a:t>
+                      </a:r>
+                    </a:p>
+                  </a:txBody>
+                  <a:tcPr anchor="ctr" marL="73152" marT="9144" marB="9144">
+                    <a:solidFill>
+                      <a:srgbClr val="FFFFFF"/>
+                    </a:solidFill>
+                  </a:tcPr>
+                </a:tc>
+                <a:tc>
+                  <a:txBody>
+                    <a:bodyPr/>
+                    <a:lstStyle/>
+                    <a:p>
+                      <a:r>
+                        <a:rPr sz="1150" b="0">
+                          <a:solidFill>
+                            <a:srgbClr val="1A2233"/>
+                          </a:solidFill>
+                          <a:latin typeface="Microsoft JhengHei"/>
+                          <a:ea typeface="Microsoft JhengHei"/>
+                          <a:cs typeface="Microsoft JhengHei"/>
+                        </a:rPr>
+                        <a:t>09/29</a:t>
+                      </a:r>
+                    </a:p>
+                  </a:txBody>
+                  <a:tcPr anchor="ctr" marL="73152" marT="9144" marB="9144">
+                    <a:solidFill>
+                      <a:srgbClr val="FFFFFF"/>
+                    </a:solidFill>
+                  </a:tcPr>
+                </a:tc>
+                <a:tc>
+                  <a:txBody>
+                    <a:bodyPr/>
+                    <a:lstStyle/>
+                    <a:p>
+                      <a:r>
+                        <a:rPr sz="1150" b="1">
+                          <a:solidFill>
+                            <a:srgbClr val="E63946"/>
+                          </a:solidFill>
+                          <a:latin typeface="Microsoft JhengHei"/>
+                          <a:ea typeface="Microsoft JhengHei"/>
+                          <a:cs typeface="Microsoft JhengHei"/>
+                        </a:rPr>
+                        <a:t>駭客攻擊</a:t>
+                      </a:r>
+                    </a:p>
+                  </a:txBody>
+                  <a:tcPr anchor="ctr" marL="73152" marT="9144" marB="9144">
+                    <a:solidFill>
+                      <a:srgbClr val="FFFFFF"/>
+                    </a:solidFill>
+                  </a:tcPr>
+                </a:tc>
+                <a:tc>
+                  <a:txBody>
+                    <a:bodyPr/>
+                    <a:lstStyle/>
+                    <a:p>
+                      <a:r>
+                        <a:rPr sz="1150" b="0">
+                          <a:solidFill>
+                            <a:srgbClr val="1A2233"/>
+                          </a:solidFill>
+                          <a:latin typeface="Microsoft JhengHei"/>
+                          <a:ea typeface="Microsoft JhengHei"/>
+                          <a:cs typeface="Microsoft JhengHei"/>
+                        </a:rPr>
+                        <a:t>評估對本公司營運、財務及服務提供無重大影響。</a:t>
+                      </a:r>
+                    </a:p>
+                  </a:txBody>
+                  <a:tcPr anchor="ctr" marL="73152" marT="9144" marB="9144">
+                    <a:solidFill>
+                      <a:srgbClr val="FFFFFF"/>
+                    </a:solidFill>
+                  </a:tcPr>
+                </a:tc>
+              </a:tr>
+              <a:tr h="222885">
+                <a:tc>
+                  <a:txBody>
+                    <a:bodyPr/>
+                    <a:lstStyle/>
+                    <a:p>
+                      <a:r>
+                        <a:rPr sz="1150" b="0">
+                          <a:solidFill>
+                            <a:srgbClr val="1A2233"/>
+                          </a:solidFill>
+                          <a:latin typeface="Microsoft JhengHei"/>
+                          <a:ea typeface="Microsoft JhengHei"/>
+                          <a:cs typeface="Microsoft JhengHei"/>
+                        </a:rPr>
+                        <a:t>鈊象</a:t>
+                      </a:r>
+                    </a:p>
+                  </a:txBody>
+                  <a:tcPr anchor="ctr" marL="73152" marT="9144" marB="9144">
+                    <a:solidFill>
+                      <a:srgbClr val="EEF2F9"/>
+                    </a:solidFill>
+                  </a:tcPr>
+                </a:tc>
+                <a:tc>
+                  <a:txBody>
+                    <a:bodyPr/>
+                    <a:lstStyle/>
+                    <a:p>
+                      <a:r>
+                        <a:rPr sz="1150" b="0">
+                          <a:solidFill>
+                            <a:srgbClr val="1A2233"/>
+                          </a:solidFill>
+                          <a:latin typeface="Microsoft JhengHei"/>
+                          <a:ea typeface="Microsoft JhengHei"/>
+                          <a:cs typeface="Microsoft JhengHei"/>
+                        </a:rPr>
+                        <a:t>3293</a:t>
+                      </a:r>
+                    </a:p>
+                  </a:txBody>
+                  <a:tcPr anchor="ctr" marL="73152" marT="9144" marB="9144">
+                    <a:solidFill>
+                      <a:srgbClr val="EEF2F9"/>
+                    </a:solidFill>
+                  </a:tcPr>
+                </a:tc>
+                <a:tc>
+                  <a:txBody>
+                    <a:bodyPr/>
+                    <a:lstStyle/>
+                    <a:p>
+                      <a:r>
+                        <a:rPr sz="1150" b="0">
+                          <a:solidFill>
+                            <a:srgbClr val="1A2233"/>
+                          </a:solidFill>
+                          <a:latin typeface="Microsoft JhengHei"/>
+                          <a:ea typeface="Microsoft JhengHei"/>
+                          <a:cs typeface="Microsoft JhengHei"/>
+                        </a:rPr>
+                        <a:t>09/29</a:t>
+                      </a:r>
+                    </a:p>
+                  </a:txBody>
+                  <a:tcPr anchor="ctr" marL="73152" marT="9144" marB="9144">
+                    <a:solidFill>
+                      <a:srgbClr val="EEF2F9"/>
+                    </a:solidFill>
+                  </a:tcPr>
+                </a:tc>
+                <a:tc>
+                  <a:txBody>
+                    <a:bodyPr/>
+                    <a:lstStyle/>
+                    <a:p>
+                      <a:r>
+                        <a:rPr sz="1150" b="1">
+                          <a:solidFill>
+                            <a:srgbClr val="5C6679"/>
+                          </a:solidFill>
+                          <a:latin typeface="Microsoft JhengHei"/>
+                          <a:ea typeface="Microsoft JhengHei"/>
+                          <a:cs typeface="Microsoft JhengHei"/>
+                        </a:rPr>
+                        <a:t>其他</a:t>
+                      </a:r>
+                    </a:p>
+                  </a:txBody>
+                  <a:tcPr anchor="ctr" marL="73152" marT="9144" marB="9144">
+                    <a:solidFill>
+                      <a:srgbClr val="EEF2F9"/>
+                    </a:solidFill>
+                  </a:tcPr>
+                </a:tc>
+                <a:tc>
+                  <a:txBody>
+                    <a:bodyPr/>
+                    <a:lstStyle/>
+                    <a:p>
+                      <a:r>
+                        <a:rPr sz="1150" b="0">
+                          <a:solidFill>
+                            <a:srgbClr val="1A2233"/>
+                          </a:solidFill>
+                          <a:latin typeface="Microsoft JhengHei"/>
+                          <a:ea typeface="Microsoft JhengHei"/>
+                          <a:cs typeface="Microsoft JhengHei"/>
+                        </a:rPr>
+                        <a:t>目前評估對公司營運尚無重大影響。</a:t>
+                      </a:r>
+                    </a:p>
+                  </a:txBody>
+                  <a:tcPr anchor="ctr" marL="73152" marT="9144" marB="9144">
+                    <a:solidFill>
+                      <a:srgbClr val="EEF2F9"/>
+                    </a:solidFill>
+                  </a:tcPr>
+                </a:tc>
+              </a:tr>
+              <a:tr h="222885">
+                <a:tc>
+                  <a:txBody>
+                    <a:bodyPr/>
+                    <a:lstStyle/>
+                    <a:p>
+                      <a:r>
+                        <a:rPr sz="1150" b="0">
+                          <a:solidFill>
+                            <a:srgbClr val="1A2233"/>
+                          </a:solidFill>
+                          <a:latin typeface="Microsoft JhengHei"/>
+                          <a:ea typeface="Microsoft JhengHei"/>
+                          <a:cs typeface="Microsoft JhengHei"/>
+                        </a:rPr>
+                        <a:t>柏文</a:t>
+                      </a:r>
+                    </a:p>
+                  </a:txBody>
+                  <a:tcPr anchor="ctr" marL="73152" marT="9144" marB="9144">
+                    <a:solidFill>
+                      <a:srgbClr val="FFFFFF"/>
+                    </a:solidFill>
+                  </a:tcPr>
+                </a:tc>
+                <a:tc>
+                  <a:txBody>
+                    <a:bodyPr/>
+                    <a:lstStyle/>
+                    <a:p>
+                      <a:r>
+                        <a:rPr sz="1150" b="0">
+                          <a:solidFill>
+                            <a:srgbClr val="1A2233"/>
+                          </a:solidFill>
+                          <a:latin typeface="Microsoft JhengHei"/>
+                          <a:ea typeface="Microsoft JhengHei"/>
+                          <a:cs typeface="Microsoft JhengHei"/>
+                        </a:rPr>
+                        <a:t>8462</a:t>
+                      </a:r>
+                    </a:p>
+                  </a:txBody>
+                  <a:tcPr anchor="ctr" marL="73152" marT="9144" marB="9144">
+                    <a:solidFill>
+                      <a:srgbClr val="FFFFFF"/>
+                    </a:solidFill>
+                  </a:tcPr>
+                </a:tc>
+                <a:tc>
+                  <a:txBody>
+                    <a:bodyPr/>
+                    <a:lstStyle/>
+                    <a:p>
+                      <a:r>
+                        <a:rPr sz="1150" b="0">
+                          <a:solidFill>
+                            <a:srgbClr val="1A2233"/>
+                          </a:solidFill>
+                          <a:latin typeface="Microsoft JhengHei"/>
+                          <a:ea typeface="Microsoft JhengHei"/>
+                          <a:cs typeface="Microsoft JhengHei"/>
+                        </a:rPr>
+                        <a:t>09/23</a:t>
                       </a:r>
                     </a:p>
                   </a:txBody>
@@ -4639,7 +5371,7 @@
                   </a:tcPr>
                 </a:tc>
               </a:tr>
-              <a:tr h="237744">
+              <a:tr h="222885">
                 <a:tc>
                   <a:txBody>
                     <a:bodyPr/>
@@ -4654,7 +5386,7 @@
                           <a:ea typeface="Microsoft JhengHei"/>
                           <a:cs typeface="Microsoft JhengHei"/>
                         </a:rPr>
-                        <a:t>一零四</a:t>
+                        <a:t>友訊</a:t>
                       </a:r>
                     </a:p>
                   </a:txBody>
@@ -4678,7 +5410,7 @@
                           <a:ea typeface="Microsoft JhengHei"/>
                           <a:cs typeface="Microsoft JhengHei"/>
                         </a:rPr>
-                        <a:t>3130</a:t>
+                        <a:t>2332</a:t>
                       </a:r>
                     </a:p>
                   </a:txBody>
@@ -4702,251 +5434,7 @@
                           <a:ea typeface="Microsoft JhengHei"/>
                           <a:cs typeface="Microsoft JhengHei"/>
                         </a:rPr>
-                        <a:t>10/06</a:t>
-                      </a:r>
-                    </a:p>
-                  </a:txBody>
-                  <a:tcPr anchor="ctr" marL="73152" marT="9144" marB="9144">
-                    <a:solidFill>
-                      <a:srgbClr val="EEF2F9"/>
-                    </a:solidFill>
-                  </a:tcPr>
-                </a:tc>
-                <a:tc>
-                  <a:txBody>
-                    <a:bodyPr/>
-                    <a:lstStyle/>
-                    <a:p>
-                      <a:r>
-                        <a:rPr sz="1150" b="1">
-                          <a:solidFill>
-                            <a:srgbClr val="5C6679"/>
-                          </a:solidFill>
-                          <a:latin typeface="Microsoft JhengHei"/>
-                          <a:ea typeface="Microsoft JhengHei"/>
-                          <a:cs typeface="Microsoft JhengHei"/>
-                        </a:rPr>
-                        <a:t>其他</a:t>
-                      </a:r>
-                    </a:p>
-                  </a:txBody>
-                  <a:tcPr anchor="ctr" marL="73152" marT="9144" marB="9144">
-                    <a:solidFill>
-                      <a:srgbClr val="EEF2F9"/>
-                    </a:solidFill>
-                  </a:tcPr>
-                </a:tc>
-                <a:tc>
-                  <a:txBody>
-                    <a:bodyPr/>
-                    <a:lstStyle/>
-                    <a:p>
-                      <a:r>
-                        <a:rPr sz="1150" b="0">
-                          <a:solidFill>
-                            <a:srgbClr val="1A2233"/>
-                          </a:solidFill>
-                          <a:latin typeface="Microsoft JhengHei"/>
-                          <a:ea typeface="Microsoft JhengHei"/>
-                          <a:cs typeface="Microsoft JhengHei"/>
-                        </a:rPr>
-                        <a:t>目前系統與營運正常運作，對公司尚無重大影響。相關影響仍持續評估中。</a:t>
-                      </a:r>
-                    </a:p>
-                  </a:txBody>
-                  <a:tcPr anchor="ctr" marL="73152" marT="9144" marB="9144">
-                    <a:solidFill>
-                      <a:srgbClr val="EEF2F9"/>
-                    </a:solidFill>
-                  </a:tcPr>
-                </a:tc>
-              </a:tr>
-              <a:tr h="237744">
-                <a:tc>
-                  <a:txBody>
-                    <a:bodyPr/>
-                    <a:lstStyle/>
-                    <a:p>
-                      <a:r>
-                        <a:rPr sz="1150" b="0">
-                          <a:solidFill>
-                            <a:srgbClr val="1A2233"/>
-                          </a:solidFill>
-                          <a:latin typeface="Microsoft JhengHei"/>
-                          <a:ea typeface="Microsoft JhengHei"/>
-                          <a:cs typeface="Microsoft JhengHei"/>
-                        </a:rPr>
-                        <a:t>安心</a:t>
-                      </a:r>
-                    </a:p>
-                  </a:txBody>
-                  <a:tcPr anchor="ctr" marL="73152" marT="9144" marB="9144">
-                    <a:solidFill>
-                      <a:srgbClr val="FFFFFF"/>
-                    </a:solidFill>
-                  </a:tcPr>
-                </a:tc>
-                <a:tc>
-                  <a:txBody>
-                    <a:bodyPr/>
-                    <a:lstStyle/>
-                    <a:p>
-                      <a:r>
-                        <a:rPr sz="1150" b="0">
-                          <a:solidFill>
-                            <a:srgbClr val="1A2233"/>
-                          </a:solidFill>
-                          <a:latin typeface="Microsoft JhengHei"/>
-                          <a:ea typeface="Microsoft JhengHei"/>
-                          <a:cs typeface="Microsoft JhengHei"/>
-                        </a:rPr>
-                        <a:t>1259</a:t>
-                      </a:r>
-                    </a:p>
-                  </a:txBody>
-                  <a:tcPr anchor="ctr" marL="73152" marT="9144" marB="9144">
-                    <a:solidFill>
-                      <a:srgbClr val="FFFFFF"/>
-                    </a:solidFill>
-                  </a:tcPr>
-                </a:tc>
-                <a:tc>
-                  <a:txBody>
-                    <a:bodyPr/>
-                    <a:lstStyle/>
-                    <a:p>
-                      <a:r>
-                        <a:rPr sz="1150" b="0">
-                          <a:solidFill>
-                            <a:srgbClr val="1A2233"/>
-                          </a:solidFill>
-                          <a:latin typeface="Microsoft JhengHei"/>
-                          <a:ea typeface="Microsoft JhengHei"/>
-                          <a:cs typeface="Microsoft JhengHei"/>
-                        </a:rPr>
-                        <a:t>10/01</a:t>
-                      </a:r>
-                    </a:p>
-                  </a:txBody>
-                  <a:tcPr anchor="ctr" marL="73152" marT="9144" marB="9144">
-                    <a:solidFill>
-                      <a:srgbClr val="FFFFFF"/>
-                    </a:solidFill>
-                  </a:tcPr>
-                </a:tc>
-                <a:tc>
-                  <a:txBody>
-                    <a:bodyPr/>
-                    <a:lstStyle/>
-                    <a:p>
-                      <a:r>
-                        <a:rPr sz="1150" b="1">
-                          <a:solidFill>
-                            <a:srgbClr val="27A6C4"/>
-                          </a:solidFill>
-                          <a:latin typeface="Microsoft JhengHei"/>
-                          <a:ea typeface="Microsoft JhengHei"/>
-                          <a:cs typeface="Microsoft JhengHei"/>
-                        </a:rPr>
-                        <a:t>個資外洩</a:t>
-                      </a:r>
-                    </a:p>
-                  </a:txBody>
-                  <a:tcPr anchor="ctr" marL="73152" marT="9144" marB="9144">
-                    <a:solidFill>
-                      <a:srgbClr val="FFFFFF"/>
-                    </a:solidFill>
-                  </a:tcPr>
-                </a:tc>
-                <a:tc>
-                  <a:txBody>
-                    <a:bodyPr/>
-                    <a:lstStyle/>
-                    <a:p>
-                      <a:r>
-                        <a:rPr sz="1150" b="0">
-                          <a:solidFill>
-                            <a:srgbClr val="1A2233"/>
-                          </a:solidFill>
-                          <a:latin typeface="Microsoft JhengHei"/>
-                          <a:ea typeface="Microsoft JhengHei"/>
-                          <a:cs typeface="Microsoft JhengHei"/>
-                        </a:rPr>
-                        <a:t>截至目前為止對公司財務及業務並無重大影響。</a:t>
-                      </a:r>
-                    </a:p>
-                  </a:txBody>
-                  <a:tcPr anchor="ctr" marL="73152" marT="9144" marB="9144">
-                    <a:solidFill>
-                      <a:srgbClr val="FFFFFF"/>
-                    </a:solidFill>
-                  </a:tcPr>
-                </a:tc>
-              </a:tr>
-              <a:tr h="237744">
-                <a:tc>
-                  <a:txBody>
-                    <a:bodyPr/>
-                    <a:lstStyle/>
-                    <a:p>
-                      <a:r>
-                        <a:rPr sz="1150" b="0">
-                          <a:solidFill>
-                            <a:srgbClr val="1A2233"/>
-                          </a:solidFill>
-                          <a:latin typeface="Microsoft JhengHei"/>
-                          <a:ea typeface="Microsoft JhengHei"/>
-                          <a:cs typeface="Microsoft JhengHei"/>
-                        </a:rPr>
-                        <a:t>神腦</a:t>
-                      </a:r>
-                    </a:p>
-                  </a:txBody>
-                  <a:tcPr anchor="ctr" marL="73152" marT="9144" marB="9144">
-                    <a:solidFill>
-                      <a:srgbClr val="EEF2F9"/>
-                    </a:solidFill>
-                  </a:tcPr>
-                </a:tc>
-                <a:tc>
-                  <a:txBody>
-                    <a:bodyPr/>
-                    <a:lstStyle/>
-                    <a:p>
-                      <a:r>
-                        <a:rPr sz="1150" b="0">
-                          <a:solidFill>
-                            <a:srgbClr val="1A2233"/>
-                          </a:solidFill>
-                          <a:latin typeface="Microsoft JhengHei"/>
-                          <a:ea typeface="Microsoft JhengHei"/>
-                          <a:cs typeface="Microsoft JhengHei"/>
-                        </a:rPr>
-                        <a:t>2450</a:t>
-                      </a:r>
-                    </a:p>
-                  </a:txBody>
-                  <a:tcPr anchor="ctr" marL="73152" marT="9144" marB="9144">
-                    <a:solidFill>
-                      <a:srgbClr val="EEF2F9"/>
-                    </a:solidFill>
-                  </a:tcPr>
-                </a:tc>
-                <a:tc>
-                  <a:txBody>
-                    <a:bodyPr/>
-                    <a:lstStyle/>
-                    <a:p>
-                      <a:r>
-                        <a:rPr sz="1150" b="0">
-                          <a:solidFill>
-                            <a:srgbClr val="1A2233"/>
-                          </a:solidFill>
-                          <a:latin typeface="Microsoft JhengHei"/>
-                          <a:ea typeface="Microsoft JhengHei"/>
-                          <a:cs typeface="Microsoft JhengHei"/>
-                        </a:rPr>
-                        <a:t>09/29</a:t>
+                        <a:t>09/18</a:t>
                       </a:r>
                     </a:p>
                   </a:txBody>
@@ -4994,7 +5482,7 @@
                           <a:ea typeface="Microsoft JhengHei"/>
                           <a:cs typeface="Microsoft JhengHei"/>
                         </a:rPr>
-                        <a:t>評估對本公司營運、財務及服務提供無重大影響。</a:t>
+                        <a:t>目前評估對公司營運尚無重大影響</a:t>
                       </a:r>
                     </a:p>
                   </a:txBody>
@@ -5005,7 +5493,7 @@
                   </a:tcPr>
                 </a:tc>
               </a:tr>
-              <a:tr h="237744">
+              <a:tr h="222885">
                 <a:tc>
                   <a:txBody>
                     <a:bodyPr/>
@@ -5020,7 +5508,7 @@
                           <a:ea typeface="Microsoft JhengHei"/>
                           <a:cs typeface="Microsoft JhengHei"/>
                         </a:rPr>
-                        <a:t>鈊象</a:t>
+                        <a:t>長榮航</a:t>
                       </a:r>
                     </a:p>
                   </a:txBody>
@@ -5044,7 +5532,7 @@
                           <a:ea typeface="Microsoft JhengHei"/>
                           <a:cs typeface="Microsoft JhengHei"/>
                         </a:rPr>
-                        <a:t>3293</a:t>
+                        <a:t>2618</a:t>
                       </a:r>
                     </a:p>
                   </a:txBody>
@@ -5068,251 +5556,7 @@
                           <a:ea typeface="Microsoft JhengHei"/>
                           <a:cs typeface="Microsoft JhengHei"/>
                         </a:rPr>
-                        <a:t>09/29</a:t>
-                      </a:r>
-                    </a:p>
-                  </a:txBody>
-                  <a:tcPr anchor="ctr" marL="73152" marT="9144" marB="9144">
-                    <a:solidFill>
-                      <a:srgbClr val="FFFFFF"/>
-                    </a:solidFill>
-                  </a:tcPr>
-                </a:tc>
-                <a:tc>
-                  <a:txBody>
-                    <a:bodyPr/>
-                    <a:lstStyle/>
-                    <a:p>
-                      <a:r>
-                        <a:rPr sz="1150" b="1">
-                          <a:solidFill>
-                            <a:srgbClr val="5C6679"/>
-                          </a:solidFill>
-                          <a:latin typeface="Microsoft JhengHei"/>
-                          <a:ea typeface="Microsoft JhengHei"/>
-                          <a:cs typeface="Microsoft JhengHei"/>
-                        </a:rPr>
-                        <a:t>其他</a:t>
-                      </a:r>
-                    </a:p>
-                  </a:txBody>
-                  <a:tcPr anchor="ctr" marL="73152" marT="9144" marB="9144">
-                    <a:solidFill>
-                      <a:srgbClr val="FFFFFF"/>
-                    </a:solidFill>
-                  </a:tcPr>
-                </a:tc>
-                <a:tc>
-                  <a:txBody>
-                    <a:bodyPr/>
-                    <a:lstStyle/>
-                    <a:p>
-                      <a:r>
-                        <a:rPr sz="1150" b="0">
-                          <a:solidFill>
-                            <a:srgbClr val="1A2233"/>
-                          </a:solidFill>
-                          <a:latin typeface="Microsoft JhengHei"/>
-                          <a:ea typeface="Microsoft JhengHei"/>
-                          <a:cs typeface="Microsoft JhengHei"/>
-                        </a:rPr>
-                        <a:t>目前評估對公司營運尚無重大影響。</a:t>
-                      </a:r>
-                    </a:p>
-                  </a:txBody>
-                  <a:tcPr anchor="ctr" marL="73152" marT="9144" marB="9144">
-                    <a:solidFill>
-                      <a:srgbClr val="FFFFFF"/>
-                    </a:solidFill>
-                  </a:tcPr>
-                </a:tc>
-              </a:tr>
-              <a:tr h="237744">
-                <a:tc>
-                  <a:txBody>
-                    <a:bodyPr/>
-                    <a:lstStyle/>
-                    <a:p>
-                      <a:r>
-                        <a:rPr sz="1150" b="0">
-                          <a:solidFill>
-                            <a:srgbClr val="1A2233"/>
-                          </a:solidFill>
-                          <a:latin typeface="Microsoft JhengHei"/>
-                          <a:ea typeface="Microsoft JhengHei"/>
-                          <a:cs typeface="Microsoft JhengHei"/>
-                        </a:rPr>
-                        <a:t>柏文</a:t>
-                      </a:r>
-                    </a:p>
-                  </a:txBody>
-                  <a:tcPr anchor="ctr" marL="73152" marT="9144" marB="9144">
-                    <a:solidFill>
-                      <a:srgbClr val="EEF2F9"/>
-                    </a:solidFill>
-                  </a:tcPr>
-                </a:tc>
-                <a:tc>
-                  <a:txBody>
-                    <a:bodyPr/>
-                    <a:lstStyle/>
-                    <a:p>
-                      <a:r>
-                        <a:rPr sz="1150" b="0">
-                          <a:solidFill>
-                            <a:srgbClr val="1A2233"/>
-                          </a:solidFill>
-                          <a:latin typeface="Microsoft JhengHei"/>
-                          <a:ea typeface="Microsoft JhengHei"/>
-                          <a:cs typeface="Microsoft JhengHei"/>
-                        </a:rPr>
-                        <a:t>8462</a:t>
-                      </a:r>
-                    </a:p>
-                  </a:txBody>
-                  <a:tcPr anchor="ctr" marL="73152" marT="9144" marB="9144">
-                    <a:solidFill>
-                      <a:srgbClr val="EEF2F9"/>
-                    </a:solidFill>
-                  </a:tcPr>
-                </a:tc>
-                <a:tc>
-                  <a:txBody>
-                    <a:bodyPr/>
-                    <a:lstStyle/>
-                    <a:p>
-                      <a:r>
-                        <a:rPr sz="1150" b="0">
-                          <a:solidFill>
-                            <a:srgbClr val="1A2233"/>
-                          </a:solidFill>
-                          <a:latin typeface="Microsoft JhengHei"/>
-                          <a:ea typeface="Microsoft JhengHei"/>
-                          <a:cs typeface="Microsoft JhengHei"/>
-                        </a:rPr>
-                        <a:t>09/23</a:t>
-                      </a:r>
-                    </a:p>
-                  </a:txBody>
-                  <a:tcPr anchor="ctr" marL="73152" marT="9144" marB="9144">
-                    <a:solidFill>
-                      <a:srgbClr val="EEF2F9"/>
-                    </a:solidFill>
-                  </a:tcPr>
-                </a:tc>
-                <a:tc>
-                  <a:txBody>
-                    <a:bodyPr/>
-                    <a:lstStyle/>
-                    <a:p>
-                      <a:r>
-                        <a:rPr sz="1150" b="1">
-                          <a:solidFill>
-                            <a:srgbClr val="27A6C4"/>
-                          </a:solidFill>
-                          <a:latin typeface="Microsoft JhengHei"/>
-                          <a:ea typeface="Microsoft JhengHei"/>
-                          <a:cs typeface="Microsoft JhengHei"/>
-                        </a:rPr>
-                        <a:t>個資外洩</a:t>
-                      </a:r>
-                    </a:p>
-                  </a:txBody>
-                  <a:tcPr anchor="ctr" marL="73152" marT="9144" marB="9144">
-                    <a:solidFill>
-                      <a:srgbClr val="EEF2F9"/>
-                    </a:solidFill>
-                  </a:tcPr>
-                </a:tc>
-                <a:tc>
-                  <a:txBody>
-                    <a:bodyPr/>
-                    <a:lstStyle/>
-                    <a:p>
-                      <a:r>
-                        <a:rPr sz="1150" b="0">
-                          <a:solidFill>
-                            <a:srgbClr val="1A2233"/>
-                          </a:solidFill>
-                          <a:latin typeface="Microsoft JhengHei"/>
-                          <a:ea typeface="Microsoft JhengHei"/>
-                          <a:cs typeface="Microsoft JhengHei"/>
-                        </a:rPr>
-                        <a:t>目前評估對公司營運無重大影響。</a:t>
-                      </a:r>
-                    </a:p>
-                  </a:txBody>
-                  <a:tcPr anchor="ctr" marL="73152" marT="9144" marB="9144">
-                    <a:solidFill>
-                      <a:srgbClr val="EEF2F9"/>
-                    </a:solidFill>
-                  </a:tcPr>
-                </a:tc>
-              </a:tr>
-              <a:tr h="237744">
-                <a:tc>
-                  <a:txBody>
-                    <a:bodyPr/>
-                    <a:lstStyle/>
-                    <a:p>
-                      <a:r>
-                        <a:rPr sz="1150" b="0">
-                          <a:solidFill>
-                            <a:srgbClr val="1A2233"/>
-                          </a:solidFill>
-                          <a:latin typeface="Microsoft JhengHei"/>
-                          <a:ea typeface="Microsoft JhengHei"/>
-                          <a:cs typeface="Microsoft JhengHei"/>
-                        </a:rPr>
-                        <a:t>友訊</a:t>
-                      </a:r>
-                    </a:p>
-                  </a:txBody>
-                  <a:tcPr anchor="ctr" marL="73152" marT="9144" marB="9144">
-                    <a:solidFill>
-                      <a:srgbClr val="FFFFFF"/>
-                    </a:solidFill>
-                  </a:tcPr>
-                </a:tc>
-                <a:tc>
-                  <a:txBody>
-                    <a:bodyPr/>
-                    <a:lstStyle/>
-                    <a:p>
-                      <a:r>
-                        <a:rPr sz="1150" b="0">
-                          <a:solidFill>
-                            <a:srgbClr val="1A2233"/>
-                          </a:solidFill>
-                          <a:latin typeface="Microsoft JhengHei"/>
-                          <a:ea typeface="Microsoft JhengHei"/>
-                          <a:cs typeface="Microsoft JhengHei"/>
-                        </a:rPr>
-                        <a:t>2332</a:t>
-                      </a:r>
-                    </a:p>
-                  </a:txBody>
-                  <a:tcPr anchor="ctr" marL="73152" marT="9144" marB="9144">
-                    <a:solidFill>
-                      <a:srgbClr val="FFFFFF"/>
-                    </a:solidFill>
-                  </a:tcPr>
-                </a:tc>
-                <a:tc>
-                  <a:txBody>
-                    <a:bodyPr/>
-                    <a:lstStyle/>
-                    <a:p>
-                      <a:r>
-                        <a:rPr sz="1150" b="0">
-                          <a:solidFill>
-                            <a:srgbClr val="1A2233"/>
-                          </a:solidFill>
-                          <a:latin typeface="Microsoft JhengHei"/>
-                          <a:ea typeface="Microsoft JhengHei"/>
-                          <a:cs typeface="Microsoft JhengHei"/>
-                        </a:rPr>
-                        <a:t>09/18</a:t>
+                        <a:t>09/15</a:t>
                       </a:r>
                     </a:p>
                   </a:txBody>
@@ -5360,7 +5604,7 @@
                           <a:ea typeface="Microsoft JhengHei"/>
                           <a:cs typeface="Microsoft JhengHei"/>
                         </a:rPr>
-                        <a:t>目前評估對公司營運尚無重大影響</a:t>
+                        <a:t>目前評估對公司所有業務均不受影響。</a:t>
                       </a:r>
                     </a:p>
                   </a:txBody>
@@ -5371,7 +5615,7 @@
                   </a:tcPr>
                 </a:tc>
               </a:tr>
-              <a:tr h="237744">
+              <a:tr h="222885">
                 <a:tc>
                   <a:txBody>
                     <a:bodyPr/>
@@ -5386,7 +5630,7 @@
                           <a:ea typeface="Microsoft JhengHei"/>
                           <a:cs typeface="Microsoft JhengHei"/>
                         </a:rPr>
-                        <a:t>長榮航</a:t>
+                        <a:t>長榮航太</a:t>
                       </a:r>
                     </a:p>
                   </a:txBody>
@@ -5410,7 +5654,7 @@
                           <a:ea typeface="Microsoft JhengHei"/>
                           <a:cs typeface="Microsoft JhengHei"/>
                         </a:rPr>
-                        <a:t>2618</a:t>
+                        <a:t>2645</a:t>
                       </a:r>
                     </a:p>
                   </a:txBody>
@@ -5482,7 +5726,7 @@
                           <a:ea typeface="Microsoft JhengHei"/>
                           <a:cs typeface="Microsoft JhengHei"/>
                         </a:rPr>
-                        <a:t>目前評估對公司所有業務均不受影響。</a:t>
+                        <a:t>經初步評估，核心資訊系統及營運業務運作皆維持正常，尚未發現公司及涉客…</a:t>
                       </a:r>
                     </a:p>
                   </a:txBody>
@@ -5493,7 +5737,7 @@
                   </a:tcPr>
                 </a:tc>
               </a:tr>
-              <a:tr h="237744">
+              <a:tr h="222885">
                 <a:tc>
                   <a:txBody>
                     <a:bodyPr/>
@@ -5508,7 +5752,7 @@
                           <a:ea typeface="Microsoft JhengHei"/>
                           <a:cs typeface="Microsoft JhengHei"/>
                         </a:rPr>
-                        <a:t>長榮航太</a:t>
+                        <a:t>崴寶</a:t>
                       </a:r>
                     </a:p>
                   </a:txBody>
@@ -5532,7 +5776,7 @@
                           <a:ea typeface="Microsoft JhengHei"/>
                           <a:cs typeface="Microsoft JhengHei"/>
                         </a:rPr>
-                        <a:t>2645</a:t>
+                        <a:t>7744</a:t>
                       </a:r>
                     </a:p>
                   </a:txBody>
@@ -5556,7 +5800,251 @@
                           <a:ea typeface="Microsoft JhengHei"/>
                           <a:cs typeface="Microsoft JhengHei"/>
                         </a:rPr>
-                        <a:t>09/15</a:t>
+                        <a:t>09/14</a:t>
+                      </a:r>
+                    </a:p>
+                  </a:txBody>
+                  <a:tcPr anchor="ctr" marL="73152" marT="9144" marB="9144">
+                    <a:solidFill>
+                      <a:srgbClr val="FFFFFF"/>
+                    </a:solidFill>
+                  </a:tcPr>
+                </a:tc>
+                <a:tc>
+                  <a:txBody>
+                    <a:bodyPr/>
+                    <a:lstStyle/>
+                    <a:p>
+                      <a:r>
+                        <a:rPr sz="1150" b="1">
+                          <a:solidFill>
+                            <a:srgbClr val="F4A261"/>
+                          </a:solidFill>
+                          <a:latin typeface="Microsoft JhengHei"/>
+                          <a:ea typeface="Microsoft JhengHei"/>
+                          <a:cs typeface="Microsoft JhengHei"/>
+                        </a:rPr>
+                        <a:t>勒索病毒/加密</a:t>
+                      </a:r>
+                    </a:p>
+                  </a:txBody>
+                  <a:tcPr anchor="ctr" marL="73152" marT="9144" marB="9144">
+                    <a:solidFill>
+                      <a:srgbClr val="FFFFFF"/>
+                    </a:solidFill>
+                  </a:tcPr>
+                </a:tc>
+                <a:tc>
+                  <a:txBody>
+                    <a:bodyPr/>
+                    <a:lstStyle/>
+                    <a:p>
+                      <a:r>
+                        <a:rPr sz="1150" b="0">
+                          <a:solidFill>
+                            <a:srgbClr val="1A2233"/>
+                          </a:solidFill>
+                          <a:latin typeface="Microsoft JhengHei"/>
+                          <a:ea typeface="Microsoft JhengHei"/>
+                          <a:cs typeface="Microsoft JhengHei"/>
+                        </a:rPr>
+                        <a:t>經初步評估，本次資安事件未影響公司工廠生產作業，生產活動均維持正常運…</a:t>
+                      </a:r>
+                    </a:p>
+                  </a:txBody>
+                  <a:tcPr anchor="ctr" marL="73152" marT="9144" marB="9144">
+                    <a:solidFill>
+                      <a:srgbClr val="FFFFFF"/>
+                    </a:solidFill>
+                  </a:tcPr>
+                </a:tc>
+              </a:tr>
+              <a:tr h="222885">
+                <a:tc>
+                  <a:txBody>
+                    <a:bodyPr/>
+                    <a:lstStyle/>
+                    <a:p>
+                      <a:r>
+                        <a:rPr sz="1150" b="0">
+                          <a:solidFill>
+                            <a:srgbClr val="1A2233"/>
+                          </a:solidFill>
+                          <a:latin typeface="Microsoft JhengHei"/>
+                          <a:ea typeface="Microsoft JhengHei"/>
+                          <a:cs typeface="Microsoft JhengHei"/>
+                        </a:rPr>
+                        <a:t>達爾膚</a:t>
+                      </a:r>
+                    </a:p>
+                  </a:txBody>
+                  <a:tcPr anchor="ctr" marL="73152" marT="9144" marB="9144">
+                    <a:solidFill>
+                      <a:srgbClr val="EEF2F9"/>
+                    </a:solidFill>
+                  </a:tcPr>
+                </a:tc>
+                <a:tc>
+                  <a:txBody>
+                    <a:bodyPr/>
+                    <a:lstStyle/>
+                    <a:p>
+                      <a:r>
+                        <a:rPr sz="1150" b="0">
+                          <a:solidFill>
+                            <a:srgbClr val="1A2233"/>
+                          </a:solidFill>
+                          <a:latin typeface="Microsoft JhengHei"/>
+                          <a:ea typeface="Microsoft JhengHei"/>
+                          <a:cs typeface="Microsoft JhengHei"/>
+                        </a:rPr>
+                        <a:t>6523</a:t>
+                      </a:r>
+                    </a:p>
+                  </a:txBody>
+                  <a:tcPr anchor="ctr" marL="73152" marT="9144" marB="9144">
+                    <a:solidFill>
+                      <a:srgbClr val="EEF2F9"/>
+                    </a:solidFill>
+                  </a:tcPr>
+                </a:tc>
+                <a:tc>
+                  <a:txBody>
+                    <a:bodyPr/>
+                    <a:lstStyle/>
+                    <a:p>
+                      <a:r>
+                        <a:rPr sz="1150" b="0">
+                          <a:solidFill>
+                            <a:srgbClr val="1A2233"/>
+                          </a:solidFill>
+                          <a:latin typeface="Microsoft JhengHei"/>
+                          <a:ea typeface="Microsoft JhengHei"/>
+                          <a:cs typeface="Microsoft JhengHei"/>
+                        </a:rPr>
+                        <a:t>09/11</a:t>
+                      </a:r>
+                    </a:p>
+                  </a:txBody>
+                  <a:tcPr anchor="ctr" marL="73152" marT="9144" marB="9144">
+                    <a:solidFill>
+                      <a:srgbClr val="EEF2F9"/>
+                    </a:solidFill>
+                  </a:tcPr>
+                </a:tc>
+                <a:tc>
+                  <a:txBody>
+                    <a:bodyPr/>
+                    <a:lstStyle/>
+                    <a:p>
+                      <a:r>
+                        <a:rPr sz="1150" b="1">
+                          <a:solidFill>
+                            <a:srgbClr val="E63946"/>
+                          </a:solidFill>
+                          <a:latin typeface="Microsoft JhengHei"/>
+                          <a:ea typeface="Microsoft JhengHei"/>
+                          <a:cs typeface="Microsoft JhengHei"/>
+                        </a:rPr>
+                        <a:t>駭客攻擊</a:t>
+                      </a:r>
+                    </a:p>
+                  </a:txBody>
+                  <a:tcPr anchor="ctr" marL="73152" marT="9144" marB="9144">
+                    <a:solidFill>
+                      <a:srgbClr val="EEF2F9"/>
+                    </a:solidFill>
+                  </a:tcPr>
+                </a:tc>
+                <a:tc>
+                  <a:txBody>
+                    <a:bodyPr/>
+                    <a:lstStyle/>
+                    <a:p>
+                      <a:r>
+                        <a:rPr sz="1150" b="0">
+                          <a:solidFill>
+                            <a:srgbClr val="1A2233"/>
+                          </a:solidFill>
+                          <a:latin typeface="Microsoft JhengHei"/>
+                          <a:ea typeface="Microsoft JhengHei"/>
+                          <a:cs typeface="Microsoft JhengHei"/>
+                        </a:rPr>
+                        <a:t>受影響系統非屬公司現行主要營運系統，亦非對外提供服務之系統，目前評估…</a:t>
+                      </a:r>
+                    </a:p>
+                  </a:txBody>
+                  <a:tcPr anchor="ctr" marL="73152" marT="9144" marB="9144">
+                    <a:solidFill>
+                      <a:srgbClr val="EEF2F9"/>
+                    </a:solidFill>
+                  </a:tcPr>
+                </a:tc>
+              </a:tr>
+              <a:tr h="222885">
+                <a:tc>
+                  <a:txBody>
+                    <a:bodyPr/>
+                    <a:lstStyle/>
+                    <a:p>
+                      <a:r>
+                        <a:rPr sz="1150" b="0">
+                          <a:solidFill>
+                            <a:srgbClr val="1A2233"/>
+                          </a:solidFill>
+                          <a:latin typeface="Microsoft JhengHei"/>
+                          <a:ea typeface="Microsoft JhengHei"/>
+                          <a:cs typeface="Microsoft JhengHei"/>
+                        </a:rPr>
+                        <a:t>大車隊</a:t>
+                      </a:r>
+                    </a:p>
+                  </a:txBody>
+                  <a:tcPr anchor="ctr" marL="73152" marT="9144" marB="9144">
+                    <a:solidFill>
+                      <a:srgbClr val="FFFFFF"/>
+                    </a:solidFill>
+                  </a:tcPr>
+                </a:tc>
+                <a:tc>
+                  <a:txBody>
+                    <a:bodyPr/>
+                    <a:lstStyle/>
+                    <a:p>
+                      <a:r>
+                        <a:rPr sz="1150" b="0">
+                          <a:solidFill>
+                            <a:srgbClr val="1A2233"/>
+                          </a:solidFill>
+                          <a:latin typeface="Microsoft JhengHei"/>
+                          <a:ea typeface="Microsoft JhengHei"/>
+                          <a:cs typeface="Microsoft JhengHei"/>
+                        </a:rPr>
+                        <a:t>2640</a:t>
+                      </a:r>
+                    </a:p>
+                  </a:txBody>
+                  <a:tcPr anchor="ctr" marL="73152" marT="9144" marB="9144">
+                    <a:solidFill>
+                      <a:srgbClr val="FFFFFF"/>
+                    </a:solidFill>
+                  </a:tcPr>
+                </a:tc>
+                <a:tc>
+                  <a:txBody>
+                    <a:bodyPr/>
+                    <a:lstStyle/>
+                    <a:p>
+                      <a:r>
+                        <a:rPr sz="1150" b="0">
+                          <a:solidFill>
+                            <a:srgbClr val="1A2233"/>
+                          </a:solidFill>
+                          <a:latin typeface="Microsoft JhengHei"/>
+                          <a:ea typeface="Microsoft JhengHei"/>
+                          <a:cs typeface="Microsoft JhengHei"/>
+                        </a:rPr>
+                        <a:t>09/09</a:t>
                       </a:r>
                     </a:p>
                   </a:txBody>
@@ -5604,379 +6092,13 @@
                           <a:ea typeface="Microsoft JhengHei"/>
                           <a:cs typeface="Microsoft JhengHei"/>
                         </a:rPr>
-                        <a:t>經初步評估，核心資訊系統及營運業務運作皆維持正常，尚未發現公司及涉客…</a:t>
+                        <a:t>經初步評估，本事件目前尚未對本公司整體營運及財務造成重大影響。</a:t>
                       </a:r>
                     </a:p>
                   </a:txBody>
                   <a:tcPr anchor="ctr" marL="73152" marT="9144" marB="9144">
                     <a:solidFill>
                       <a:srgbClr val="FFFFFF"/>
-                    </a:solidFill>
-                  </a:tcPr>
-                </a:tc>
-              </a:tr>
-              <a:tr h="237744">
-                <a:tc>
-                  <a:txBody>
-                    <a:bodyPr/>
-                    <a:lstStyle/>
-                    <a:p>
-                      <a:r>
-                        <a:rPr sz="1150" b="0">
-                          <a:solidFill>
-                            <a:srgbClr val="1A2233"/>
-                          </a:solidFill>
-                          <a:latin typeface="Microsoft JhengHei"/>
-                          <a:ea typeface="Microsoft JhengHei"/>
-                          <a:cs typeface="Microsoft JhengHei"/>
-                        </a:rPr>
-                        <a:t>崴寶</a:t>
-                      </a:r>
-                    </a:p>
-                  </a:txBody>
-                  <a:tcPr anchor="ctr" marL="73152" marT="9144" marB="9144">
-                    <a:solidFill>
-                      <a:srgbClr val="EEF2F9"/>
-                    </a:solidFill>
-                  </a:tcPr>
-                </a:tc>
-                <a:tc>
-                  <a:txBody>
-                    <a:bodyPr/>
-                    <a:lstStyle/>
-                    <a:p>
-                      <a:r>
-                        <a:rPr sz="1150" b="0">
-                          <a:solidFill>
-                            <a:srgbClr val="1A2233"/>
-                          </a:solidFill>
-                          <a:latin typeface="Microsoft JhengHei"/>
-                          <a:ea typeface="Microsoft JhengHei"/>
-                          <a:cs typeface="Microsoft JhengHei"/>
-                        </a:rPr>
-                        <a:t>7744</a:t>
-                      </a:r>
-                    </a:p>
-                  </a:txBody>
-                  <a:tcPr anchor="ctr" marL="73152" marT="9144" marB="9144">
-                    <a:solidFill>
-                      <a:srgbClr val="EEF2F9"/>
-                    </a:solidFill>
-                  </a:tcPr>
-                </a:tc>
-                <a:tc>
-                  <a:txBody>
-                    <a:bodyPr/>
-                    <a:lstStyle/>
-                    <a:p>
-                      <a:r>
-                        <a:rPr sz="1150" b="0">
-                          <a:solidFill>
-                            <a:srgbClr val="1A2233"/>
-                          </a:solidFill>
-                          <a:latin typeface="Microsoft JhengHei"/>
-                          <a:ea typeface="Microsoft JhengHei"/>
-                          <a:cs typeface="Microsoft JhengHei"/>
-                        </a:rPr>
-                        <a:t>09/14</a:t>
-                      </a:r>
-                    </a:p>
-                  </a:txBody>
-                  <a:tcPr anchor="ctr" marL="73152" marT="9144" marB="9144">
-                    <a:solidFill>
-                      <a:srgbClr val="EEF2F9"/>
-                    </a:solidFill>
-                  </a:tcPr>
-                </a:tc>
-                <a:tc>
-                  <a:txBody>
-                    <a:bodyPr/>
-                    <a:lstStyle/>
-                    <a:p>
-                      <a:r>
-                        <a:rPr sz="1150" b="1">
-                          <a:solidFill>
-                            <a:srgbClr val="F4A261"/>
-                          </a:solidFill>
-                          <a:latin typeface="Microsoft JhengHei"/>
-                          <a:ea typeface="Microsoft JhengHei"/>
-                          <a:cs typeface="Microsoft JhengHei"/>
-                        </a:rPr>
-                        <a:t>勒索病毒/加密</a:t>
-                      </a:r>
-                    </a:p>
-                  </a:txBody>
-                  <a:tcPr anchor="ctr" marL="73152" marT="9144" marB="9144">
-                    <a:solidFill>
-                      <a:srgbClr val="EEF2F9"/>
-                    </a:solidFill>
-                  </a:tcPr>
-                </a:tc>
-                <a:tc>
-                  <a:txBody>
-                    <a:bodyPr/>
-                    <a:lstStyle/>
-                    <a:p>
-                      <a:r>
-                        <a:rPr sz="1150" b="0">
-                          <a:solidFill>
-                            <a:srgbClr val="1A2233"/>
-                          </a:solidFill>
-                          <a:latin typeface="Microsoft JhengHei"/>
-                          <a:ea typeface="Microsoft JhengHei"/>
-                          <a:cs typeface="Microsoft JhengHei"/>
-                        </a:rPr>
-                        <a:t>經初步評估，本次資安事件未影響公司工廠生產作業，生產活動均維持正常運…</a:t>
-                      </a:r>
-                    </a:p>
-                  </a:txBody>
-                  <a:tcPr anchor="ctr" marL="73152" marT="9144" marB="9144">
-                    <a:solidFill>
-                      <a:srgbClr val="EEF2F9"/>
-                    </a:solidFill>
-                  </a:tcPr>
-                </a:tc>
-              </a:tr>
-              <a:tr h="237744">
-                <a:tc>
-                  <a:txBody>
-                    <a:bodyPr/>
-                    <a:lstStyle/>
-                    <a:p>
-                      <a:r>
-                        <a:rPr sz="1150" b="0">
-                          <a:solidFill>
-                            <a:srgbClr val="1A2233"/>
-                          </a:solidFill>
-                          <a:latin typeface="Microsoft JhengHei"/>
-                          <a:ea typeface="Microsoft JhengHei"/>
-                          <a:cs typeface="Microsoft JhengHei"/>
-                        </a:rPr>
-                        <a:t>達爾膚</a:t>
-                      </a:r>
-                    </a:p>
-                  </a:txBody>
-                  <a:tcPr anchor="ctr" marL="73152" marT="9144" marB="9144">
-                    <a:solidFill>
-                      <a:srgbClr val="FFFFFF"/>
-                    </a:solidFill>
-                  </a:tcPr>
-                </a:tc>
-                <a:tc>
-                  <a:txBody>
-                    <a:bodyPr/>
-                    <a:lstStyle/>
-                    <a:p>
-                      <a:r>
-                        <a:rPr sz="1150" b="0">
-                          <a:solidFill>
-                            <a:srgbClr val="1A2233"/>
-                          </a:solidFill>
-                          <a:latin typeface="Microsoft JhengHei"/>
-                          <a:ea typeface="Microsoft JhengHei"/>
-                          <a:cs typeface="Microsoft JhengHei"/>
-                        </a:rPr>
-                        <a:t>6523</a:t>
-                      </a:r>
-                    </a:p>
-                  </a:txBody>
-                  <a:tcPr anchor="ctr" marL="73152" marT="9144" marB="9144">
-                    <a:solidFill>
-                      <a:srgbClr val="FFFFFF"/>
-                    </a:solidFill>
-                  </a:tcPr>
-                </a:tc>
-                <a:tc>
-                  <a:txBody>
-                    <a:bodyPr/>
-                    <a:lstStyle/>
-                    <a:p>
-                      <a:r>
-                        <a:rPr sz="1150" b="0">
-                          <a:solidFill>
-                            <a:srgbClr val="1A2233"/>
-                          </a:solidFill>
-                          <a:latin typeface="Microsoft JhengHei"/>
-                          <a:ea typeface="Microsoft JhengHei"/>
-                          <a:cs typeface="Microsoft JhengHei"/>
-                        </a:rPr>
-                        <a:t>09/11</a:t>
-                      </a:r>
-                    </a:p>
-                  </a:txBody>
-                  <a:tcPr anchor="ctr" marL="73152" marT="9144" marB="9144">
-                    <a:solidFill>
-                      <a:srgbClr val="FFFFFF"/>
-                    </a:solidFill>
-                  </a:tcPr>
-                </a:tc>
-                <a:tc>
-                  <a:txBody>
-                    <a:bodyPr/>
-                    <a:lstStyle/>
-                    <a:p>
-                      <a:r>
-                        <a:rPr sz="1150" b="1">
-                          <a:solidFill>
-                            <a:srgbClr val="E63946"/>
-                          </a:solidFill>
-                          <a:latin typeface="Microsoft JhengHei"/>
-                          <a:ea typeface="Microsoft JhengHei"/>
-                          <a:cs typeface="Microsoft JhengHei"/>
-                        </a:rPr>
-                        <a:t>駭客攻擊</a:t>
-                      </a:r>
-                    </a:p>
-                  </a:txBody>
-                  <a:tcPr anchor="ctr" marL="73152" marT="9144" marB="9144">
-                    <a:solidFill>
-                      <a:srgbClr val="FFFFFF"/>
-                    </a:solidFill>
-                  </a:tcPr>
-                </a:tc>
-                <a:tc>
-                  <a:txBody>
-                    <a:bodyPr/>
-                    <a:lstStyle/>
-                    <a:p>
-                      <a:r>
-                        <a:rPr sz="1150" b="0">
-                          <a:solidFill>
-                            <a:srgbClr val="1A2233"/>
-                          </a:solidFill>
-                          <a:latin typeface="Microsoft JhengHei"/>
-                          <a:ea typeface="Microsoft JhengHei"/>
-                          <a:cs typeface="Microsoft JhengHei"/>
-                        </a:rPr>
-                        <a:t>受影響系統非屬公司現行主要營運系統，亦非對外提供服務之系統，目前評估…</a:t>
-                      </a:r>
-                    </a:p>
-                  </a:txBody>
-                  <a:tcPr anchor="ctr" marL="73152" marT="9144" marB="9144">
-                    <a:solidFill>
-                      <a:srgbClr val="FFFFFF"/>
-                    </a:solidFill>
-                  </a:tcPr>
-                </a:tc>
-              </a:tr>
-              <a:tr h="237744">
-                <a:tc>
-                  <a:txBody>
-                    <a:bodyPr/>
-                    <a:lstStyle/>
-                    <a:p>
-                      <a:r>
-                        <a:rPr sz="1150" b="0">
-                          <a:solidFill>
-                            <a:srgbClr val="1A2233"/>
-                          </a:solidFill>
-                          <a:latin typeface="Microsoft JhengHei"/>
-                          <a:ea typeface="Microsoft JhengHei"/>
-                          <a:cs typeface="Microsoft JhengHei"/>
-                        </a:rPr>
-                        <a:t>大車隊</a:t>
-                      </a:r>
-                    </a:p>
-                  </a:txBody>
-                  <a:tcPr anchor="ctr" marL="73152" marT="9144" marB="9144">
-                    <a:solidFill>
-                      <a:srgbClr val="EEF2F9"/>
-                    </a:solidFill>
-                  </a:tcPr>
-                </a:tc>
-                <a:tc>
-                  <a:txBody>
-                    <a:bodyPr/>
-                    <a:lstStyle/>
-                    <a:p>
-                      <a:r>
-                        <a:rPr sz="1150" b="0">
-                          <a:solidFill>
-                            <a:srgbClr val="1A2233"/>
-                          </a:solidFill>
-                          <a:latin typeface="Microsoft JhengHei"/>
-                          <a:ea typeface="Microsoft JhengHei"/>
-                          <a:cs typeface="Microsoft JhengHei"/>
-                        </a:rPr>
-                        <a:t>2640</a:t>
-                      </a:r>
-                    </a:p>
-                  </a:txBody>
-                  <a:tcPr anchor="ctr" marL="73152" marT="9144" marB="9144">
-                    <a:solidFill>
-                      <a:srgbClr val="EEF2F9"/>
-                    </a:solidFill>
-                  </a:tcPr>
-                </a:tc>
-                <a:tc>
-                  <a:txBody>
-                    <a:bodyPr/>
-                    <a:lstStyle/>
-                    <a:p>
-                      <a:r>
-                        <a:rPr sz="1150" b="0">
-                          <a:solidFill>
-                            <a:srgbClr val="1A2233"/>
-                          </a:solidFill>
-                          <a:latin typeface="Microsoft JhengHei"/>
-                          <a:ea typeface="Microsoft JhengHei"/>
-                          <a:cs typeface="Microsoft JhengHei"/>
-                        </a:rPr>
-                        <a:t>09/09</a:t>
-                      </a:r>
-                    </a:p>
-                  </a:txBody>
-                  <a:tcPr anchor="ctr" marL="73152" marT="9144" marB="9144">
-                    <a:solidFill>
-                      <a:srgbClr val="EEF2F9"/>
-                    </a:solidFill>
-                  </a:tcPr>
-                </a:tc>
-                <a:tc>
-                  <a:txBody>
-                    <a:bodyPr/>
-                    <a:lstStyle/>
-                    <a:p>
-                      <a:r>
-                        <a:rPr sz="1150" b="1">
-                          <a:solidFill>
-                            <a:srgbClr val="E63946"/>
-                          </a:solidFill>
-                          <a:latin typeface="Microsoft JhengHei"/>
-                          <a:ea typeface="Microsoft JhengHei"/>
-                          <a:cs typeface="Microsoft JhengHei"/>
-                        </a:rPr>
-                        <a:t>駭客攻擊</a:t>
-                      </a:r>
-                    </a:p>
-                  </a:txBody>
-                  <a:tcPr anchor="ctr" marL="73152" marT="9144" marB="9144">
-                    <a:solidFill>
-                      <a:srgbClr val="EEF2F9"/>
-                    </a:solidFill>
-                  </a:tcPr>
-                </a:tc>
-                <a:tc>
-                  <a:txBody>
-                    <a:bodyPr/>
-                    <a:lstStyle/>
-                    <a:p>
-                      <a:r>
-                        <a:rPr sz="1150" b="0">
-                          <a:solidFill>
-                            <a:srgbClr val="1A2233"/>
-                          </a:solidFill>
-                          <a:latin typeface="Microsoft JhengHei"/>
-                          <a:ea typeface="Microsoft JhengHei"/>
-                          <a:cs typeface="Microsoft JhengHei"/>
-                        </a:rPr>
-                        <a:t>經初步評估，本事件目前尚未對本公司整體營運及財務造成重大影響。</a:t>
-                      </a:r>
-                    </a:p>
-                  </a:txBody>
-                  <a:tcPr anchor="ctr" marL="73152" marT="9144" marB="9144">
-                    <a:solidFill>
-                      <a:srgbClr val="EEF2F9"/>
                     </a:solidFill>
                   </a:tcPr>
                 </a:tc>
@@ -7012,7 +7134,7 @@
                 <a:ea typeface="Microsoft JhengHei"/>
                 <a:cs typeface="Microsoft JhengHei"/>
               </a:rPr>
-              <a:t>3 起</a:t>
+              <a:t>4 起</a:t>
             </a:r>
           </a:p>
         </p:txBody>
@@ -7049,7 +7171,7 @@
                 <a:ea typeface="Microsoft JhengHei"/>
                 <a:cs typeface="Microsoft JhengHei"/>
               </a:rPr>
-              <a:t>上福、一零四、鈊象</a:t>
+              <a:t>緯致、上福、一零四、鈊象</a:t>
             </a:r>
           </a:p>
         </p:txBody>
@@ -7252,7 +7374,7 @@
                 <a:gridCol w="3383280"/>
                 <a:gridCol w="2606040"/>
               </a:tblGrid>
-              <a:tr h="298704">
+              <a:tr h="280035">
                 <a:tc>
                   <a:txBody>
                     <a:bodyPr/>
@@ -7374,7 +7496,7 @@
                   </a:tcPr>
                 </a:tc>
               </a:tr>
-              <a:tr h="298704">
+              <a:tr h="280035">
                 <a:tc>
                   <a:txBody>
                     <a:bodyPr/>
@@ -7389,7 +7511,7 @@
                           <a:ea typeface="Microsoft JhengHei"/>
                           <a:cs typeface="Microsoft JhengHei"/>
                         </a:rPr>
-                        <a:t>上福</a:t>
+                        <a:t>緯致</a:t>
                       </a:r>
                     </a:p>
                   </a:txBody>
@@ -7413,7 +7535,7 @@
                           <a:ea typeface="Microsoft JhengHei"/>
                           <a:cs typeface="Microsoft JhengHei"/>
                         </a:rPr>
-                        <a:t>6128</a:t>
+                        <a:t>4953</a:t>
                       </a:r>
                     </a:p>
                   </a:txBody>
@@ -7461,7 +7583,7 @@
                           <a:ea typeface="Microsoft JhengHei"/>
                           <a:cs typeface="Microsoft JhengHei"/>
                         </a:rPr>
-                        <a:t>安永聯合會計師事務所</a:t>
+                        <a:t>安侯建業聯合會計師事務所</a:t>
                       </a:r>
                     </a:p>
                   </a:txBody>
@@ -7485,7 +7607,7 @@
                           <a:ea typeface="Microsoft JhengHei"/>
                           <a:cs typeface="Microsoft JhengHei"/>
                         </a:rPr>
-                        <a:t>黃宇廷、賴書晨</a:t>
+                        <a:t>唐嘉鍵、楊雲筑</a:t>
                       </a:r>
                     </a:p>
                   </a:txBody>
@@ -7496,7 +7618,7 @@
                   </a:tcPr>
                 </a:tc>
               </a:tr>
-              <a:tr h="298704">
+              <a:tr h="280035">
                 <a:tc>
                   <a:txBody>
                     <a:bodyPr/>
@@ -7511,7 +7633,7 @@
                           <a:ea typeface="Microsoft JhengHei"/>
                           <a:cs typeface="Microsoft JhengHei"/>
                         </a:rPr>
-                        <a:t>杏一</a:t>
+                        <a:t>上福</a:t>
                       </a:r>
                     </a:p>
                   </a:txBody>
@@ -7535,7 +7657,251 @@
                           <a:ea typeface="Microsoft JhengHei"/>
                           <a:cs typeface="Microsoft JhengHei"/>
                         </a:rPr>
+                        <a:t>6128</a:t>
+                      </a:r>
+                    </a:p>
+                  </a:txBody>
+                  <a:tcPr anchor="ctr" marL="73152" marT="9144" marB="9144">
+                    <a:solidFill>
+                      <a:srgbClr val="EEF2F9"/>
+                    </a:solidFill>
+                  </a:tcPr>
+                </a:tc>
+                <a:tc>
+                  <a:txBody>
+                    <a:bodyPr/>
+                    <a:lstStyle/>
+                    <a:p>
+                      <a:r>
+                        <a:rPr sz="1150" b="1">
+                          <a:solidFill>
+                            <a:srgbClr val="5C6679"/>
+                          </a:solidFill>
+                          <a:latin typeface="Microsoft JhengHei"/>
+                          <a:ea typeface="Microsoft JhengHei"/>
+                          <a:cs typeface="Microsoft JhengHei"/>
+                        </a:rPr>
+                        <a:t>其他</a:t>
+                      </a:r>
+                    </a:p>
+                  </a:txBody>
+                  <a:tcPr anchor="ctr" marL="73152" marT="9144" marB="9144">
+                    <a:solidFill>
+                      <a:srgbClr val="EEF2F9"/>
+                    </a:solidFill>
+                  </a:tcPr>
+                </a:tc>
+                <a:tc>
+                  <a:txBody>
+                    <a:bodyPr/>
+                    <a:lstStyle/>
+                    <a:p>
+                      <a:r>
+                        <a:rPr sz="1150" b="0">
+                          <a:solidFill>
+                            <a:srgbClr val="1A2233"/>
+                          </a:solidFill>
+                          <a:latin typeface="Microsoft JhengHei"/>
+                          <a:ea typeface="Microsoft JhengHei"/>
+                          <a:cs typeface="Microsoft JhengHei"/>
+                        </a:rPr>
+                        <a:t>安永聯合會計師事務所</a:t>
+                      </a:r>
+                    </a:p>
+                  </a:txBody>
+                  <a:tcPr anchor="ctr" marL="73152" marT="9144" marB="9144">
+                    <a:solidFill>
+                      <a:srgbClr val="EEF2F9"/>
+                    </a:solidFill>
+                  </a:tcPr>
+                </a:tc>
+                <a:tc>
+                  <a:txBody>
+                    <a:bodyPr/>
+                    <a:lstStyle/>
+                    <a:p>
+                      <a:r>
+                        <a:rPr sz="1150" b="0">
+                          <a:solidFill>
+                            <a:srgbClr val="1A2233"/>
+                          </a:solidFill>
+                          <a:latin typeface="Microsoft JhengHei"/>
+                          <a:ea typeface="Microsoft JhengHei"/>
+                          <a:cs typeface="Microsoft JhengHei"/>
+                        </a:rPr>
+                        <a:t>黃宇廷、賴書晨</a:t>
+                      </a:r>
+                    </a:p>
+                  </a:txBody>
+                  <a:tcPr anchor="ctr" marL="73152" marT="9144" marB="9144">
+                    <a:solidFill>
+                      <a:srgbClr val="EEF2F9"/>
+                    </a:solidFill>
+                  </a:tcPr>
+                </a:tc>
+              </a:tr>
+              <a:tr h="280035">
+                <a:tc>
+                  <a:txBody>
+                    <a:bodyPr/>
+                    <a:lstStyle/>
+                    <a:p>
+                      <a:r>
+                        <a:rPr sz="1150" b="0">
+                          <a:solidFill>
+                            <a:srgbClr val="1A2233"/>
+                          </a:solidFill>
+                          <a:latin typeface="Microsoft JhengHei"/>
+                          <a:ea typeface="Microsoft JhengHei"/>
+                          <a:cs typeface="Microsoft JhengHei"/>
+                        </a:rPr>
+                        <a:t>杏一</a:t>
+                      </a:r>
+                    </a:p>
+                  </a:txBody>
+                  <a:tcPr anchor="ctr" marL="73152" marT="9144" marB="9144">
+                    <a:solidFill>
+                      <a:srgbClr val="FFFFFF"/>
+                    </a:solidFill>
+                  </a:tcPr>
+                </a:tc>
+                <a:tc>
+                  <a:txBody>
+                    <a:bodyPr/>
+                    <a:lstStyle/>
+                    <a:p>
+                      <a:r>
+                        <a:rPr sz="1150" b="0">
+                          <a:solidFill>
+                            <a:srgbClr val="1A2233"/>
+                          </a:solidFill>
+                          <a:latin typeface="Microsoft JhengHei"/>
+                          <a:ea typeface="Microsoft JhengHei"/>
+                          <a:cs typeface="Microsoft JhengHei"/>
+                        </a:rPr>
                         <a:t>4175</a:t>
+                      </a:r>
+                    </a:p>
+                  </a:txBody>
+                  <a:tcPr anchor="ctr" marL="73152" marT="9144" marB="9144">
+                    <a:solidFill>
+                      <a:srgbClr val="FFFFFF"/>
+                    </a:solidFill>
+                  </a:tcPr>
+                </a:tc>
+                <a:tc>
+                  <a:txBody>
+                    <a:bodyPr/>
+                    <a:lstStyle/>
+                    <a:p>
+                      <a:r>
+                        <a:rPr sz="1150" b="1">
+                          <a:solidFill>
+                            <a:srgbClr val="27A6C4"/>
+                          </a:solidFill>
+                          <a:latin typeface="Microsoft JhengHei"/>
+                          <a:ea typeface="Microsoft JhengHei"/>
+                          <a:cs typeface="Microsoft JhengHei"/>
+                        </a:rPr>
+                        <a:t>個資外洩</a:t>
+                      </a:r>
+                    </a:p>
+                  </a:txBody>
+                  <a:tcPr anchor="ctr" marL="73152" marT="9144" marB="9144">
+                    <a:solidFill>
+                      <a:srgbClr val="FFFFFF"/>
+                    </a:solidFill>
+                  </a:tcPr>
+                </a:tc>
+                <a:tc>
+                  <a:txBody>
+                    <a:bodyPr/>
+                    <a:lstStyle/>
+                    <a:p>
+                      <a:r>
+                        <a:rPr sz="1150" b="0">
+                          <a:solidFill>
+                            <a:srgbClr val="1A2233"/>
+                          </a:solidFill>
+                          <a:latin typeface="Microsoft JhengHei"/>
+                          <a:ea typeface="Microsoft JhengHei"/>
+                          <a:cs typeface="Microsoft JhengHei"/>
+                        </a:rPr>
+                        <a:t>勤業眾信聯合會計師事務所</a:t>
+                      </a:r>
+                    </a:p>
+                  </a:txBody>
+                  <a:tcPr anchor="ctr" marL="73152" marT="9144" marB="9144">
+                    <a:solidFill>
+                      <a:srgbClr val="FFFFFF"/>
+                    </a:solidFill>
+                  </a:tcPr>
+                </a:tc>
+                <a:tc>
+                  <a:txBody>
+                    <a:bodyPr/>
+                    <a:lstStyle/>
+                    <a:p>
+                      <a:r>
+                        <a:rPr sz="1150" b="0">
+                          <a:solidFill>
+                            <a:srgbClr val="1A2233"/>
+                          </a:solidFill>
+                          <a:latin typeface="Microsoft JhengHei"/>
+                          <a:ea typeface="Microsoft JhengHei"/>
+                          <a:cs typeface="Microsoft JhengHei"/>
+                        </a:rPr>
+                        <a:t>池瑞全、蔡宗遠</a:t>
+                      </a:r>
+                    </a:p>
+                  </a:txBody>
+                  <a:tcPr anchor="ctr" marL="73152" marT="9144" marB="9144">
+                    <a:solidFill>
+                      <a:srgbClr val="FFFFFF"/>
+                    </a:solidFill>
+                  </a:tcPr>
+                </a:tc>
+              </a:tr>
+              <a:tr h="280035">
+                <a:tc>
+                  <a:txBody>
+                    <a:bodyPr/>
+                    <a:lstStyle/>
+                    <a:p>
+                      <a:r>
+                        <a:rPr sz="1150" b="0">
+                          <a:solidFill>
+                            <a:srgbClr val="1A2233"/>
+                          </a:solidFill>
+                          <a:latin typeface="Microsoft JhengHei"/>
+                          <a:ea typeface="Microsoft JhengHei"/>
+                          <a:cs typeface="Microsoft JhengHei"/>
+                        </a:rPr>
+                        <a:t>鈊象</a:t>
+                      </a:r>
+                    </a:p>
+                  </a:txBody>
+                  <a:tcPr anchor="ctr" marL="73152" marT="9144" marB="9144">
+                    <a:solidFill>
+                      <a:srgbClr val="EEF2F9"/>
+                    </a:solidFill>
+                  </a:tcPr>
+                </a:tc>
+                <a:tc>
+                  <a:txBody>
+                    <a:bodyPr/>
+                    <a:lstStyle/>
+                    <a:p>
+                      <a:r>
+                        <a:rPr sz="1150" b="0">
+                          <a:solidFill>
+                            <a:srgbClr val="1A2233"/>
+                          </a:solidFill>
+                          <a:latin typeface="Microsoft JhengHei"/>
+                          <a:ea typeface="Microsoft JhengHei"/>
+                          <a:cs typeface="Microsoft JhengHei"/>
+                        </a:rPr>
+                        <a:t>3293</a:t>
                       </a:r>
                     </a:p>
                   </a:txBody>
@@ -7607,7 +7973,7 @@
                           <a:ea typeface="Microsoft JhengHei"/>
                           <a:cs typeface="Microsoft JhengHei"/>
                         </a:rPr>
-                        <a:t>池瑞全、蔡宗遠</a:t>
+                        <a:t>周仕杰、李東峰</a:t>
                       </a:r>
                     </a:p>
                   </a:txBody>
@@ -7618,7 +7984,7 @@
                   </a:tcPr>
                 </a:tc>
               </a:tr>
-              <a:tr h="298704">
+              <a:tr h="280035">
                 <a:tc>
                   <a:txBody>
                     <a:bodyPr/>
@@ -7633,7 +7999,7 @@
                           <a:ea typeface="Microsoft JhengHei"/>
                           <a:cs typeface="Microsoft JhengHei"/>
                         </a:rPr>
-                        <a:t>鈊象</a:t>
+                        <a:t>一零四</a:t>
                       </a:r>
                     </a:p>
                   </a:txBody>
@@ -7657,7 +8023,495 @@
                           <a:ea typeface="Microsoft JhengHei"/>
                           <a:cs typeface="Microsoft JhengHei"/>
                         </a:rPr>
+                        <a:t>3130</a:t>
+                      </a:r>
+                    </a:p>
+                  </a:txBody>
+                  <a:tcPr anchor="ctr" marL="73152" marT="9144" marB="9144">
+                    <a:solidFill>
+                      <a:srgbClr val="FFFFFF"/>
+                    </a:solidFill>
+                  </a:tcPr>
+                </a:tc>
+                <a:tc>
+                  <a:txBody>
+                    <a:bodyPr/>
+                    <a:lstStyle/>
+                    <a:p>
+                      <a:r>
+                        <a:rPr sz="1150" b="1">
+                          <a:solidFill>
+                            <a:srgbClr val="5C6679"/>
+                          </a:solidFill>
+                          <a:latin typeface="Microsoft JhengHei"/>
+                          <a:ea typeface="Microsoft JhengHei"/>
+                          <a:cs typeface="Microsoft JhengHei"/>
+                        </a:rPr>
+                        <a:t>其他</a:t>
+                      </a:r>
+                    </a:p>
+                  </a:txBody>
+                  <a:tcPr anchor="ctr" marL="73152" marT="9144" marB="9144">
+                    <a:solidFill>
+                      <a:srgbClr val="FFFFFF"/>
+                    </a:solidFill>
+                  </a:tcPr>
+                </a:tc>
+                <a:tc>
+                  <a:txBody>
+                    <a:bodyPr/>
+                    <a:lstStyle/>
+                    <a:p>
+                      <a:r>
+                        <a:rPr sz="1150" b="0">
+                          <a:solidFill>
+                            <a:srgbClr val="1A2233"/>
+                          </a:solidFill>
+                          <a:latin typeface="Microsoft JhengHei"/>
+                          <a:ea typeface="Microsoft JhengHei"/>
+                          <a:cs typeface="Microsoft JhengHei"/>
+                        </a:rPr>
+                        <a:t>安侯建業聯合會計師事務所</a:t>
+                      </a:r>
+                    </a:p>
+                  </a:txBody>
+                  <a:tcPr anchor="ctr" marL="73152" marT="9144" marB="9144">
+                    <a:solidFill>
+                      <a:srgbClr val="FFFFFF"/>
+                    </a:solidFill>
+                  </a:tcPr>
+                </a:tc>
+                <a:tc>
+                  <a:txBody>
+                    <a:bodyPr/>
+                    <a:lstStyle/>
+                    <a:p>
+                      <a:r>
+                        <a:rPr sz="1150" b="0">
+                          <a:solidFill>
+                            <a:srgbClr val="1A2233"/>
+                          </a:solidFill>
+                          <a:latin typeface="Microsoft JhengHei"/>
+                          <a:ea typeface="Microsoft JhengHei"/>
+                          <a:cs typeface="Microsoft JhengHei"/>
+                        </a:rPr>
+                        <a:t>趙敏如、江家齊</a:t>
+                      </a:r>
+                    </a:p>
+                  </a:txBody>
+                  <a:tcPr anchor="ctr" marL="73152" marT="9144" marB="9144">
+                    <a:solidFill>
+                      <a:srgbClr val="FFFFFF"/>
+                    </a:solidFill>
+                  </a:tcPr>
+                </a:tc>
+              </a:tr>
+              <a:tr h="280035">
+                <a:tc>
+                  <a:txBody>
+                    <a:bodyPr/>
+                    <a:lstStyle/>
+                    <a:p>
+                      <a:r>
+                        <a:rPr sz="1150" b="0">
+                          <a:solidFill>
+                            <a:srgbClr val="1A2233"/>
+                          </a:solidFill>
+                          <a:latin typeface="Microsoft JhengHei"/>
+                          <a:ea typeface="Microsoft JhengHei"/>
+                          <a:cs typeface="Microsoft JhengHei"/>
+                        </a:rPr>
+                        <a:t>安心</a:t>
+                      </a:r>
+                    </a:p>
+                  </a:txBody>
+                  <a:tcPr anchor="ctr" marL="73152" marT="9144" marB="9144">
+                    <a:solidFill>
+                      <a:srgbClr val="EEF2F9"/>
+                    </a:solidFill>
+                  </a:tcPr>
+                </a:tc>
+                <a:tc>
+                  <a:txBody>
+                    <a:bodyPr/>
+                    <a:lstStyle/>
+                    <a:p>
+                      <a:r>
+                        <a:rPr sz="1150" b="0">
+                          <a:solidFill>
+                            <a:srgbClr val="1A2233"/>
+                          </a:solidFill>
+                          <a:latin typeface="Microsoft JhengHei"/>
+                          <a:ea typeface="Microsoft JhengHei"/>
+                          <a:cs typeface="Microsoft JhengHei"/>
+                        </a:rPr>
+                        <a:t>1259</a:t>
+                      </a:r>
+                    </a:p>
+                  </a:txBody>
+                  <a:tcPr anchor="ctr" marL="73152" marT="9144" marB="9144">
+                    <a:solidFill>
+                      <a:srgbClr val="EEF2F9"/>
+                    </a:solidFill>
+                  </a:tcPr>
+                </a:tc>
+                <a:tc>
+                  <a:txBody>
+                    <a:bodyPr/>
+                    <a:lstStyle/>
+                    <a:p>
+                      <a:r>
+                        <a:rPr sz="1150" b="1">
+                          <a:solidFill>
+                            <a:srgbClr val="27A6C4"/>
+                          </a:solidFill>
+                          <a:latin typeface="Microsoft JhengHei"/>
+                          <a:ea typeface="Microsoft JhengHei"/>
+                          <a:cs typeface="Microsoft JhengHei"/>
+                        </a:rPr>
+                        <a:t>個資外洩</a:t>
+                      </a:r>
+                    </a:p>
+                  </a:txBody>
+                  <a:tcPr anchor="ctr" marL="73152" marT="9144" marB="9144">
+                    <a:solidFill>
+                      <a:srgbClr val="EEF2F9"/>
+                    </a:solidFill>
+                  </a:tcPr>
+                </a:tc>
+                <a:tc>
+                  <a:txBody>
+                    <a:bodyPr/>
+                    <a:lstStyle/>
+                    <a:p>
+                      <a:r>
+                        <a:rPr sz="1150" b="0">
+                          <a:solidFill>
+                            <a:srgbClr val="1A2233"/>
+                          </a:solidFill>
+                          <a:latin typeface="Microsoft JhengHei"/>
+                          <a:ea typeface="Microsoft JhengHei"/>
+                          <a:cs typeface="Microsoft JhengHei"/>
+                        </a:rPr>
+                        <a:t>資誠聯合會計師事務所</a:t>
+                      </a:r>
+                    </a:p>
+                  </a:txBody>
+                  <a:tcPr anchor="ctr" marL="73152" marT="9144" marB="9144">
+                    <a:solidFill>
+                      <a:srgbClr val="EEF2F9"/>
+                    </a:solidFill>
+                  </a:tcPr>
+                </a:tc>
+                <a:tc>
+                  <a:txBody>
+                    <a:bodyPr/>
+                    <a:lstStyle/>
+                    <a:p>
+                      <a:r>
+                        <a:rPr sz="1150" b="0">
+                          <a:solidFill>
+                            <a:srgbClr val="1A2233"/>
+                          </a:solidFill>
+                          <a:latin typeface="Microsoft JhengHei"/>
+                          <a:ea typeface="Microsoft JhengHei"/>
+                          <a:cs typeface="Microsoft JhengHei"/>
+                        </a:rPr>
+                        <a:t>徐明釧、陳怡婷</a:t>
+                      </a:r>
+                    </a:p>
+                  </a:txBody>
+                  <a:tcPr anchor="ctr" marL="73152" marT="9144" marB="9144">
+                    <a:solidFill>
+                      <a:srgbClr val="EEF2F9"/>
+                    </a:solidFill>
+                  </a:tcPr>
+                </a:tc>
+              </a:tr>
+              <a:tr h="280035">
+                <a:tc>
+                  <a:txBody>
+                    <a:bodyPr/>
+                    <a:lstStyle/>
+                    <a:p>
+                      <a:r>
+                        <a:rPr sz="1150" b="0">
+                          <a:solidFill>
+                            <a:srgbClr val="1A2233"/>
+                          </a:solidFill>
+                          <a:latin typeface="Microsoft JhengHei"/>
+                          <a:ea typeface="Microsoft JhengHei"/>
+                          <a:cs typeface="Microsoft JhengHei"/>
+                        </a:rPr>
+                        <a:t>神腦</a:t>
+                      </a:r>
+                    </a:p>
+                  </a:txBody>
+                  <a:tcPr anchor="ctr" marL="73152" marT="9144" marB="9144">
+                    <a:solidFill>
+                      <a:srgbClr val="FFFFFF"/>
+                    </a:solidFill>
+                  </a:tcPr>
+                </a:tc>
+                <a:tc>
+                  <a:txBody>
+                    <a:bodyPr/>
+                    <a:lstStyle/>
+                    <a:p>
+                      <a:r>
+                        <a:rPr sz="1150" b="0">
+                          <a:solidFill>
+                            <a:srgbClr val="1A2233"/>
+                          </a:solidFill>
+                          <a:latin typeface="Microsoft JhengHei"/>
+                          <a:ea typeface="Microsoft JhengHei"/>
+                          <a:cs typeface="Microsoft JhengHei"/>
+                        </a:rPr>
+                        <a:t>2450</a:t>
+                      </a:r>
+                    </a:p>
+                  </a:txBody>
+                  <a:tcPr anchor="ctr" marL="73152" marT="9144" marB="9144">
+                    <a:solidFill>
+                      <a:srgbClr val="FFFFFF"/>
+                    </a:solidFill>
+                  </a:tcPr>
+                </a:tc>
+                <a:tc>
+                  <a:txBody>
+                    <a:bodyPr/>
+                    <a:lstStyle/>
+                    <a:p>
+                      <a:r>
+                        <a:rPr sz="1150" b="1">
+                          <a:solidFill>
+                            <a:srgbClr val="E63946"/>
+                          </a:solidFill>
+                          <a:latin typeface="Microsoft JhengHei"/>
+                          <a:ea typeface="Microsoft JhengHei"/>
+                          <a:cs typeface="Microsoft JhengHei"/>
+                        </a:rPr>
+                        <a:t>駭客攻擊</a:t>
+                      </a:r>
+                    </a:p>
+                  </a:txBody>
+                  <a:tcPr anchor="ctr" marL="73152" marT="9144" marB="9144">
+                    <a:solidFill>
+                      <a:srgbClr val="FFFFFF"/>
+                    </a:solidFill>
+                  </a:tcPr>
+                </a:tc>
+                <a:tc>
+                  <a:txBody>
+                    <a:bodyPr/>
+                    <a:lstStyle/>
+                    <a:p>
+                      <a:r>
+                        <a:rPr sz="1150" b="0">
+                          <a:solidFill>
+                            <a:srgbClr val="1A2233"/>
+                          </a:solidFill>
+                          <a:latin typeface="Microsoft JhengHei"/>
+                          <a:ea typeface="Microsoft JhengHei"/>
+                          <a:cs typeface="Microsoft JhengHei"/>
+                        </a:rPr>
+                        <a:t>資誠聯合會計師事務所</a:t>
+                      </a:r>
+                    </a:p>
+                  </a:txBody>
+                  <a:tcPr anchor="ctr" marL="73152" marT="9144" marB="9144">
+                    <a:solidFill>
+                      <a:srgbClr val="FFFFFF"/>
+                    </a:solidFill>
+                  </a:tcPr>
+                </a:tc>
+                <a:tc>
+                  <a:txBody>
+                    <a:bodyPr/>
+                    <a:lstStyle/>
+                    <a:p>
+                      <a:r>
+                        <a:rPr sz="1150" b="0">
+                          <a:solidFill>
+                            <a:srgbClr val="1A2233"/>
+                          </a:solidFill>
+                          <a:latin typeface="Microsoft JhengHei"/>
+                          <a:ea typeface="Microsoft JhengHei"/>
+                          <a:cs typeface="Microsoft JhengHei"/>
+                        </a:rPr>
+                        <a:t>王銘義、林永智</a:t>
+                      </a:r>
+                    </a:p>
+                  </a:txBody>
+                  <a:tcPr anchor="ctr" marL="73152" marT="9144" marB="9144">
+                    <a:solidFill>
+                      <a:srgbClr val="FFFFFF"/>
+                    </a:solidFill>
+                  </a:tcPr>
+                </a:tc>
+              </a:tr>
+              <a:tr h="280035">
+                <a:tc>
+                  <a:txBody>
+                    <a:bodyPr/>
+                    <a:lstStyle/>
+                    <a:p>
+                      <a:r>
+                        <a:rPr sz="1150" b="0">
+                          <a:solidFill>
+                            <a:srgbClr val="1A2233"/>
+                          </a:solidFill>
+                          <a:latin typeface="Microsoft JhengHei"/>
+                          <a:ea typeface="Microsoft JhengHei"/>
+                          <a:cs typeface="Microsoft JhengHei"/>
+                        </a:rPr>
+                        <a:t>鈊象</a:t>
+                      </a:r>
+                    </a:p>
+                  </a:txBody>
+                  <a:tcPr anchor="ctr" marL="73152" marT="9144" marB="9144">
+                    <a:solidFill>
+                      <a:srgbClr val="EEF2F9"/>
+                    </a:solidFill>
+                  </a:tcPr>
+                </a:tc>
+                <a:tc>
+                  <a:txBody>
+                    <a:bodyPr/>
+                    <a:lstStyle/>
+                    <a:p>
+                      <a:r>
+                        <a:rPr sz="1150" b="0">
+                          <a:solidFill>
+                            <a:srgbClr val="1A2233"/>
+                          </a:solidFill>
+                          <a:latin typeface="Microsoft JhengHei"/>
+                          <a:ea typeface="Microsoft JhengHei"/>
+                          <a:cs typeface="Microsoft JhengHei"/>
+                        </a:rPr>
                         <a:t>3293</a:t>
+                      </a:r>
+                    </a:p>
+                  </a:txBody>
+                  <a:tcPr anchor="ctr" marL="73152" marT="9144" marB="9144">
+                    <a:solidFill>
+                      <a:srgbClr val="EEF2F9"/>
+                    </a:solidFill>
+                  </a:tcPr>
+                </a:tc>
+                <a:tc>
+                  <a:txBody>
+                    <a:bodyPr/>
+                    <a:lstStyle/>
+                    <a:p>
+                      <a:r>
+                        <a:rPr sz="1150" b="1">
+                          <a:solidFill>
+                            <a:srgbClr val="5C6679"/>
+                          </a:solidFill>
+                          <a:latin typeface="Microsoft JhengHei"/>
+                          <a:ea typeface="Microsoft JhengHei"/>
+                          <a:cs typeface="Microsoft JhengHei"/>
+                        </a:rPr>
+                        <a:t>其他</a:t>
+                      </a:r>
+                    </a:p>
+                  </a:txBody>
+                  <a:tcPr anchor="ctr" marL="73152" marT="9144" marB="9144">
+                    <a:solidFill>
+                      <a:srgbClr val="EEF2F9"/>
+                    </a:solidFill>
+                  </a:tcPr>
+                </a:tc>
+                <a:tc>
+                  <a:txBody>
+                    <a:bodyPr/>
+                    <a:lstStyle/>
+                    <a:p>
+                      <a:r>
+                        <a:rPr sz="1150" b="0">
+                          <a:solidFill>
+                            <a:srgbClr val="1A2233"/>
+                          </a:solidFill>
+                          <a:latin typeface="Microsoft JhengHei"/>
+                          <a:ea typeface="Microsoft JhengHei"/>
+                          <a:cs typeface="Microsoft JhengHei"/>
+                        </a:rPr>
+                        <a:t>勤業眾信聯合會計師事務所</a:t>
+                      </a:r>
+                    </a:p>
+                  </a:txBody>
+                  <a:tcPr anchor="ctr" marL="73152" marT="9144" marB="9144">
+                    <a:solidFill>
+                      <a:srgbClr val="EEF2F9"/>
+                    </a:solidFill>
+                  </a:tcPr>
+                </a:tc>
+                <a:tc>
+                  <a:txBody>
+                    <a:bodyPr/>
+                    <a:lstStyle/>
+                    <a:p>
+                      <a:r>
+                        <a:rPr sz="1150" b="0">
+                          <a:solidFill>
+                            <a:srgbClr val="1A2233"/>
+                          </a:solidFill>
+                          <a:latin typeface="Microsoft JhengHei"/>
+                          <a:ea typeface="Microsoft JhengHei"/>
+                          <a:cs typeface="Microsoft JhengHei"/>
+                        </a:rPr>
+                        <a:t>周仕杰、李東峰</a:t>
+                      </a:r>
+                    </a:p>
+                  </a:txBody>
+                  <a:tcPr anchor="ctr" marL="73152" marT="9144" marB="9144">
+                    <a:solidFill>
+                      <a:srgbClr val="EEF2F9"/>
+                    </a:solidFill>
+                  </a:tcPr>
+                </a:tc>
+              </a:tr>
+              <a:tr h="280035">
+                <a:tc>
+                  <a:txBody>
+                    <a:bodyPr/>
+                    <a:lstStyle/>
+                    <a:p>
+                      <a:r>
+                        <a:rPr sz="1150" b="0">
+                          <a:solidFill>
+                            <a:srgbClr val="1A2233"/>
+                          </a:solidFill>
+                          <a:latin typeface="Microsoft JhengHei"/>
+                          <a:ea typeface="Microsoft JhengHei"/>
+                          <a:cs typeface="Microsoft JhengHei"/>
+                        </a:rPr>
+                        <a:t>柏文</a:t>
+                      </a:r>
+                    </a:p>
+                  </a:txBody>
+                  <a:tcPr anchor="ctr" marL="73152" marT="9144" marB="9144">
+                    <a:solidFill>
+                      <a:srgbClr val="FFFFFF"/>
+                    </a:solidFill>
+                  </a:tcPr>
+                </a:tc>
+                <a:tc>
+                  <a:txBody>
+                    <a:bodyPr/>
+                    <a:lstStyle/>
+                    <a:p>
+                      <a:r>
+                        <a:rPr sz="1150" b="0">
+                          <a:solidFill>
+                            <a:srgbClr val="1A2233"/>
+                          </a:solidFill>
+                          <a:latin typeface="Microsoft JhengHei"/>
+                          <a:ea typeface="Microsoft JhengHei"/>
+                          <a:cs typeface="Microsoft JhengHei"/>
+                        </a:rPr>
+                        <a:t>8462</a:t>
                       </a:r>
                     </a:p>
                   </a:txBody>
@@ -7705,7 +8559,7 @@
                           <a:ea typeface="Microsoft JhengHei"/>
                           <a:cs typeface="Microsoft JhengHei"/>
                         </a:rPr>
-                        <a:t>勤業眾信聯合會計師事務所</a:t>
+                        <a:t>安永聯合會計師事務所</a:t>
                       </a:r>
                     </a:p>
                   </a:txBody>
@@ -7729,7 +8583,7 @@
                           <a:ea typeface="Microsoft JhengHei"/>
                           <a:cs typeface="Microsoft JhengHei"/>
                         </a:rPr>
-                        <a:t>周仕杰、李東峰</a:t>
+                        <a:t>洪福讚、陳政初</a:t>
                       </a:r>
                     </a:p>
                   </a:txBody>
@@ -7740,7 +8594,7 @@
                   </a:tcPr>
                 </a:tc>
               </a:tr>
-              <a:tr h="298704">
+              <a:tr h="280035">
                 <a:tc>
                   <a:txBody>
                     <a:bodyPr/>
@@ -7755,7 +8609,7 @@
                           <a:ea typeface="Microsoft JhengHei"/>
                           <a:cs typeface="Microsoft JhengHei"/>
                         </a:rPr>
-                        <a:t>一零四</a:t>
+                        <a:t>友訊</a:t>
                       </a:r>
                     </a:p>
                   </a:txBody>
@@ -7779,7 +8633,7 @@
                           <a:ea typeface="Microsoft JhengHei"/>
                           <a:cs typeface="Microsoft JhengHei"/>
                         </a:rPr>
-                        <a:t>3130</a:t>
+                        <a:t>2332</a:t>
                       </a:r>
                     </a:p>
                   </a:txBody>
@@ -7797,13 +8651,13 @@
                       <a:r>
                         <a:rPr sz="1150" b="1">
                           <a:solidFill>
-                            <a:srgbClr val="5C6679"/>
+                            <a:srgbClr val="E63946"/>
                           </a:solidFill>
                           <a:latin typeface="Microsoft JhengHei"/>
                           <a:ea typeface="Microsoft JhengHei"/>
                           <a:cs typeface="Microsoft JhengHei"/>
                         </a:rPr>
-                        <a:t>其他</a:t>
+                        <a:t>駭客攻擊</a:t>
                       </a:r>
                     </a:p>
                   </a:txBody>
@@ -7851,7 +8705,7 @@
                           <a:ea typeface="Microsoft JhengHei"/>
                           <a:cs typeface="Microsoft JhengHei"/>
                         </a:rPr>
-                        <a:t>趙敏如、江家齊</a:t>
+                        <a:t>梅元貞、謝秋華</a:t>
                       </a:r>
                     </a:p>
                   </a:txBody>
@@ -7862,7 +8716,7 @@
                   </a:tcPr>
                 </a:tc>
               </a:tr>
-              <a:tr h="298704">
+              <a:tr h="280035">
                 <a:tc>
                   <a:txBody>
                     <a:bodyPr/>
@@ -7877,7 +8731,7 @@
                           <a:ea typeface="Microsoft JhengHei"/>
                           <a:cs typeface="Microsoft JhengHei"/>
                         </a:rPr>
-                        <a:t>安心</a:t>
+                        <a:t>長榮航</a:t>
                       </a:r>
                     </a:p>
                   </a:txBody>
@@ -7901,7 +8755,7 @@
                           <a:ea typeface="Microsoft JhengHei"/>
                           <a:cs typeface="Microsoft JhengHei"/>
                         </a:rPr>
-                        <a:t>1259</a:t>
+                        <a:t>2618</a:t>
                       </a:r>
                     </a:p>
                   </a:txBody>
@@ -7919,13 +8773,13 @@
                       <a:r>
                         <a:rPr sz="1150" b="1">
                           <a:solidFill>
-                            <a:srgbClr val="27A6C4"/>
+                            <a:srgbClr val="E63946"/>
                           </a:solidFill>
                           <a:latin typeface="Microsoft JhengHei"/>
                           <a:ea typeface="Microsoft JhengHei"/>
                           <a:cs typeface="Microsoft JhengHei"/>
                         </a:rPr>
-                        <a:t>個資外洩</a:t>
+                        <a:t>駭客攻擊</a:t>
                       </a:r>
                     </a:p>
                   </a:txBody>
@@ -7949,7 +8803,7 @@
                           <a:ea typeface="Microsoft JhengHei"/>
                           <a:cs typeface="Microsoft JhengHei"/>
                         </a:rPr>
-                        <a:t>資誠聯合會計師事務所</a:t>
+                        <a:t>安侯建業聯合會計師事務所</a:t>
                       </a:r>
                     </a:p>
                   </a:txBody>
@@ -7973,7 +8827,7 @@
                           <a:ea typeface="Microsoft JhengHei"/>
                           <a:cs typeface="Microsoft JhengHei"/>
                         </a:rPr>
-                        <a:t>徐明釧、陳怡婷</a:t>
+                        <a:t>陳雅琳、楊雲筑</a:t>
                       </a:r>
                     </a:p>
                   </a:txBody>
@@ -7984,7 +8838,7 @@
                   </a:tcPr>
                 </a:tc>
               </a:tr>
-              <a:tr h="298704">
+              <a:tr h="280035">
                 <a:tc>
                   <a:txBody>
                     <a:bodyPr/>
@@ -7999,7 +8853,7 @@
                           <a:ea typeface="Microsoft JhengHei"/>
                           <a:cs typeface="Microsoft JhengHei"/>
                         </a:rPr>
-                        <a:t>神腦</a:t>
+                        <a:t>長榮航太</a:t>
                       </a:r>
                     </a:p>
                   </a:txBody>
@@ -8023,7 +8877,251 @@
                           <a:ea typeface="Microsoft JhengHei"/>
                           <a:cs typeface="Microsoft JhengHei"/>
                         </a:rPr>
-                        <a:t>2450</a:t>
+                        <a:t>2645</a:t>
+                      </a:r>
+                    </a:p>
+                  </a:txBody>
+                  <a:tcPr anchor="ctr" marL="73152" marT="9144" marB="9144">
+                    <a:solidFill>
+                      <a:srgbClr val="EEF2F9"/>
+                    </a:solidFill>
+                  </a:tcPr>
+                </a:tc>
+                <a:tc>
+                  <a:txBody>
+                    <a:bodyPr/>
+                    <a:lstStyle/>
+                    <a:p>
+                      <a:r>
+                        <a:rPr sz="1150" b="1">
+                          <a:solidFill>
+                            <a:srgbClr val="E63946"/>
+                          </a:solidFill>
+                          <a:latin typeface="Microsoft JhengHei"/>
+                          <a:ea typeface="Microsoft JhengHei"/>
+                          <a:cs typeface="Microsoft JhengHei"/>
+                        </a:rPr>
+                        <a:t>駭客攻擊</a:t>
+                      </a:r>
+                    </a:p>
+                  </a:txBody>
+                  <a:tcPr anchor="ctr" marL="73152" marT="9144" marB="9144">
+                    <a:solidFill>
+                      <a:srgbClr val="EEF2F9"/>
+                    </a:solidFill>
+                  </a:tcPr>
+                </a:tc>
+                <a:tc>
+                  <a:txBody>
+                    <a:bodyPr/>
+                    <a:lstStyle/>
+                    <a:p>
+                      <a:r>
+                        <a:rPr sz="1150" b="0">
+                          <a:solidFill>
+                            <a:srgbClr val="1A2233"/>
+                          </a:solidFill>
+                          <a:latin typeface="Microsoft JhengHei"/>
+                          <a:ea typeface="Microsoft JhengHei"/>
+                          <a:cs typeface="Microsoft JhengHei"/>
+                        </a:rPr>
+                        <a:t>安侯建業聯合會計師事務所</a:t>
+                      </a:r>
+                    </a:p>
+                  </a:txBody>
+                  <a:tcPr anchor="ctr" marL="73152" marT="9144" marB="9144">
+                    <a:solidFill>
+                      <a:srgbClr val="EEF2F9"/>
+                    </a:solidFill>
+                  </a:tcPr>
+                </a:tc>
+                <a:tc>
+                  <a:txBody>
+                    <a:bodyPr/>
+                    <a:lstStyle/>
+                    <a:p>
+                      <a:r>
+                        <a:rPr sz="1150" b="0">
+                          <a:solidFill>
+                            <a:srgbClr val="1A2233"/>
+                          </a:solidFill>
+                          <a:latin typeface="Microsoft JhengHei"/>
+                          <a:ea typeface="Microsoft JhengHei"/>
+                          <a:cs typeface="Microsoft JhengHei"/>
+                        </a:rPr>
+                        <a:t>陳雅琳、鄭博仁</a:t>
+                      </a:r>
+                    </a:p>
+                  </a:txBody>
+                  <a:tcPr anchor="ctr" marL="73152" marT="9144" marB="9144">
+                    <a:solidFill>
+                      <a:srgbClr val="EEF2F9"/>
+                    </a:solidFill>
+                  </a:tcPr>
+                </a:tc>
+              </a:tr>
+              <a:tr h="280035">
+                <a:tc>
+                  <a:txBody>
+                    <a:bodyPr/>
+                    <a:lstStyle/>
+                    <a:p>
+                      <a:r>
+                        <a:rPr sz="1150" b="0">
+                          <a:solidFill>
+                            <a:srgbClr val="1A2233"/>
+                          </a:solidFill>
+                          <a:latin typeface="Microsoft JhengHei"/>
+                          <a:ea typeface="Microsoft JhengHei"/>
+                          <a:cs typeface="Microsoft JhengHei"/>
+                        </a:rPr>
+                        <a:t>崴寶</a:t>
+                      </a:r>
+                    </a:p>
+                  </a:txBody>
+                  <a:tcPr anchor="ctr" marL="73152" marT="9144" marB="9144">
+                    <a:solidFill>
+                      <a:srgbClr val="FFFFFF"/>
+                    </a:solidFill>
+                  </a:tcPr>
+                </a:tc>
+                <a:tc>
+                  <a:txBody>
+                    <a:bodyPr/>
+                    <a:lstStyle/>
+                    <a:p>
+                      <a:r>
+                        <a:rPr sz="1150" b="0">
+                          <a:solidFill>
+                            <a:srgbClr val="1A2233"/>
+                          </a:solidFill>
+                          <a:latin typeface="Microsoft JhengHei"/>
+                          <a:ea typeface="Microsoft JhengHei"/>
+                          <a:cs typeface="Microsoft JhengHei"/>
+                        </a:rPr>
+                        <a:t>7744</a:t>
+                      </a:r>
+                    </a:p>
+                  </a:txBody>
+                  <a:tcPr anchor="ctr" marL="73152" marT="9144" marB="9144">
+                    <a:solidFill>
+                      <a:srgbClr val="FFFFFF"/>
+                    </a:solidFill>
+                  </a:tcPr>
+                </a:tc>
+                <a:tc>
+                  <a:txBody>
+                    <a:bodyPr/>
+                    <a:lstStyle/>
+                    <a:p>
+                      <a:r>
+                        <a:rPr sz="1150" b="1">
+                          <a:solidFill>
+                            <a:srgbClr val="F4A261"/>
+                          </a:solidFill>
+                          <a:latin typeface="Microsoft JhengHei"/>
+                          <a:ea typeface="Microsoft JhengHei"/>
+                          <a:cs typeface="Microsoft JhengHei"/>
+                        </a:rPr>
+                        <a:t>勒索病毒/加密</a:t>
+                      </a:r>
+                    </a:p>
+                  </a:txBody>
+                  <a:tcPr anchor="ctr" marL="73152" marT="9144" marB="9144">
+                    <a:solidFill>
+                      <a:srgbClr val="FFFFFF"/>
+                    </a:solidFill>
+                  </a:tcPr>
+                </a:tc>
+                <a:tc>
+                  <a:txBody>
+                    <a:bodyPr/>
+                    <a:lstStyle/>
+                    <a:p>
+                      <a:r>
+                        <a:rPr sz="1150" b="0">
+                          <a:solidFill>
+                            <a:srgbClr val="1A2233"/>
+                          </a:solidFill>
+                          <a:latin typeface="Microsoft JhengHei"/>
+                          <a:ea typeface="Microsoft JhengHei"/>
+                          <a:cs typeface="Microsoft JhengHei"/>
+                        </a:rPr>
+                        <a:t>安永聯合會計師事務所</a:t>
+                      </a:r>
+                    </a:p>
+                  </a:txBody>
+                  <a:tcPr anchor="ctr" marL="73152" marT="9144" marB="9144">
+                    <a:solidFill>
+                      <a:srgbClr val="FFFFFF"/>
+                    </a:solidFill>
+                  </a:tcPr>
+                </a:tc>
+                <a:tc>
+                  <a:txBody>
+                    <a:bodyPr/>
+                    <a:lstStyle/>
+                    <a:p>
+                      <a:r>
+                        <a:rPr sz="1150" b="0">
+                          <a:solidFill>
+                            <a:srgbClr val="1A2233"/>
+                          </a:solidFill>
+                          <a:latin typeface="Microsoft JhengHei"/>
+                          <a:ea typeface="Microsoft JhengHei"/>
+                          <a:cs typeface="Microsoft JhengHei"/>
+                        </a:rPr>
+                        <a:t>黃宇廷、黃子評</a:t>
+                      </a:r>
+                    </a:p>
+                  </a:txBody>
+                  <a:tcPr anchor="ctr" marL="73152" marT="9144" marB="9144">
+                    <a:solidFill>
+                      <a:srgbClr val="FFFFFF"/>
+                    </a:solidFill>
+                  </a:tcPr>
+                </a:tc>
+              </a:tr>
+              <a:tr h="280035">
+                <a:tc>
+                  <a:txBody>
+                    <a:bodyPr/>
+                    <a:lstStyle/>
+                    <a:p>
+                      <a:r>
+                        <a:rPr sz="1150" b="0">
+                          <a:solidFill>
+                            <a:srgbClr val="1A2233"/>
+                          </a:solidFill>
+                          <a:latin typeface="Microsoft JhengHei"/>
+                          <a:ea typeface="Microsoft JhengHei"/>
+                          <a:cs typeface="Microsoft JhengHei"/>
+                        </a:rPr>
+                        <a:t>達爾膚</a:t>
+                      </a:r>
+                    </a:p>
+                  </a:txBody>
+                  <a:tcPr anchor="ctr" marL="73152" marT="9144" marB="9144">
+                    <a:solidFill>
+                      <a:srgbClr val="EEF2F9"/>
+                    </a:solidFill>
+                  </a:tcPr>
+                </a:tc>
+                <a:tc>
+                  <a:txBody>
+                    <a:bodyPr/>
+                    <a:lstStyle/>
+                    <a:p>
+                      <a:r>
+                        <a:rPr sz="1150" b="0">
+                          <a:solidFill>
+                            <a:srgbClr val="1A2233"/>
+                          </a:solidFill>
+                          <a:latin typeface="Microsoft JhengHei"/>
+                          <a:ea typeface="Microsoft JhengHei"/>
+                          <a:cs typeface="Microsoft JhengHei"/>
+                        </a:rPr>
+                        <a:t>6523</a:t>
                       </a:r>
                     </a:p>
                   </a:txBody>
@@ -8095,7 +9193,7 @@
                           <a:ea typeface="Microsoft JhengHei"/>
                           <a:cs typeface="Microsoft JhengHei"/>
                         </a:rPr>
-                        <a:t>王銘義、林永智</a:t>
+                        <a:t>于智帆、葉翠苗</a:t>
                       </a:r>
                     </a:p>
                   </a:txBody>
@@ -8106,7 +9204,7 @@
                   </a:tcPr>
                 </a:tc>
               </a:tr>
-              <a:tr h="298704">
+              <a:tr h="280035">
                 <a:tc>
                   <a:txBody>
                     <a:bodyPr/>
@@ -8121,7 +9219,7 @@
                           <a:ea typeface="Microsoft JhengHei"/>
                           <a:cs typeface="Microsoft JhengHei"/>
                         </a:rPr>
-                        <a:t>鈊象</a:t>
+                        <a:t>大車隊</a:t>
                       </a:r>
                     </a:p>
                   </a:txBody>
@@ -8145,739 +9243,7 @@
                           <a:ea typeface="Microsoft JhengHei"/>
                           <a:cs typeface="Microsoft JhengHei"/>
                         </a:rPr>
-                        <a:t>3293</a:t>
-                      </a:r>
-                    </a:p>
-                  </a:txBody>
-                  <a:tcPr anchor="ctr" marL="73152" marT="9144" marB="9144">
-                    <a:solidFill>
-                      <a:srgbClr val="FFFFFF"/>
-                    </a:solidFill>
-                  </a:tcPr>
-                </a:tc>
-                <a:tc>
-                  <a:txBody>
-                    <a:bodyPr/>
-                    <a:lstStyle/>
-                    <a:p>
-                      <a:r>
-                        <a:rPr sz="1150" b="1">
-                          <a:solidFill>
-                            <a:srgbClr val="5C6679"/>
-                          </a:solidFill>
-                          <a:latin typeface="Microsoft JhengHei"/>
-                          <a:ea typeface="Microsoft JhengHei"/>
-                          <a:cs typeface="Microsoft JhengHei"/>
-                        </a:rPr>
-                        <a:t>其他</a:t>
-                      </a:r>
-                    </a:p>
-                  </a:txBody>
-                  <a:tcPr anchor="ctr" marL="73152" marT="9144" marB="9144">
-                    <a:solidFill>
-                      <a:srgbClr val="FFFFFF"/>
-                    </a:solidFill>
-                  </a:tcPr>
-                </a:tc>
-                <a:tc>
-                  <a:txBody>
-                    <a:bodyPr/>
-                    <a:lstStyle/>
-                    <a:p>
-                      <a:r>
-                        <a:rPr sz="1150" b="0">
-                          <a:solidFill>
-                            <a:srgbClr val="1A2233"/>
-                          </a:solidFill>
-                          <a:latin typeface="Microsoft JhengHei"/>
-                          <a:ea typeface="Microsoft JhengHei"/>
-                          <a:cs typeface="Microsoft JhengHei"/>
-                        </a:rPr>
-                        <a:t>勤業眾信聯合會計師事務所</a:t>
-                      </a:r>
-                    </a:p>
-                  </a:txBody>
-                  <a:tcPr anchor="ctr" marL="73152" marT="9144" marB="9144">
-                    <a:solidFill>
-                      <a:srgbClr val="FFFFFF"/>
-                    </a:solidFill>
-                  </a:tcPr>
-                </a:tc>
-                <a:tc>
-                  <a:txBody>
-                    <a:bodyPr/>
-                    <a:lstStyle/>
-                    <a:p>
-                      <a:r>
-                        <a:rPr sz="1150" b="0">
-                          <a:solidFill>
-                            <a:srgbClr val="1A2233"/>
-                          </a:solidFill>
-                          <a:latin typeface="Microsoft JhengHei"/>
-                          <a:ea typeface="Microsoft JhengHei"/>
-                          <a:cs typeface="Microsoft JhengHei"/>
-                        </a:rPr>
-                        <a:t>周仕杰、李東峰</a:t>
-                      </a:r>
-                    </a:p>
-                  </a:txBody>
-                  <a:tcPr anchor="ctr" marL="73152" marT="9144" marB="9144">
-                    <a:solidFill>
-                      <a:srgbClr val="FFFFFF"/>
-                    </a:solidFill>
-                  </a:tcPr>
-                </a:tc>
-              </a:tr>
-              <a:tr h="298704">
-                <a:tc>
-                  <a:txBody>
-                    <a:bodyPr/>
-                    <a:lstStyle/>
-                    <a:p>
-                      <a:r>
-                        <a:rPr sz="1150" b="0">
-                          <a:solidFill>
-                            <a:srgbClr val="1A2233"/>
-                          </a:solidFill>
-                          <a:latin typeface="Microsoft JhengHei"/>
-                          <a:ea typeface="Microsoft JhengHei"/>
-                          <a:cs typeface="Microsoft JhengHei"/>
-                        </a:rPr>
-                        <a:t>柏文</a:t>
-                      </a:r>
-                    </a:p>
-                  </a:txBody>
-                  <a:tcPr anchor="ctr" marL="73152" marT="9144" marB="9144">
-                    <a:solidFill>
-                      <a:srgbClr val="EEF2F9"/>
-                    </a:solidFill>
-                  </a:tcPr>
-                </a:tc>
-                <a:tc>
-                  <a:txBody>
-                    <a:bodyPr/>
-                    <a:lstStyle/>
-                    <a:p>
-                      <a:r>
-                        <a:rPr sz="1150" b="0">
-                          <a:solidFill>
-                            <a:srgbClr val="1A2233"/>
-                          </a:solidFill>
-                          <a:latin typeface="Microsoft JhengHei"/>
-                          <a:ea typeface="Microsoft JhengHei"/>
-                          <a:cs typeface="Microsoft JhengHei"/>
-                        </a:rPr>
-                        <a:t>8462</a:t>
-                      </a:r>
-                    </a:p>
-                  </a:txBody>
-                  <a:tcPr anchor="ctr" marL="73152" marT="9144" marB="9144">
-                    <a:solidFill>
-                      <a:srgbClr val="EEF2F9"/>
-                    </a:solidFill>
-                  </a:tcPr>
-                </a:tc>
-                <a:tc>
-                  <a:txBody>
-                    <a:bodyPr/>
-                    <a:lstStyle/>
-                    <a:p>
-                      <a:r>
-                        <a:rPr sz="1150" b="1">
-                          <a:solidFill>
-                            <a:srgbClr val="27A6C4"/>
-                          </a:solidFill>
-                          <a:latin typeface="Microsoft JhengHei"/>
-                          <a:ea typeface="Microsoft JhengHei"/>
-                          <a:cs typeface="Microsoft JhengHei"/>
-                        </a:rPr>
-                        <a:t>個資外洩</a:t>
-                      </a:r>
-                    </a:p>
-                  </a:txBody>
-                  <a:tcPr anchor="ctr" marL="73152" marT="9144" marB="9144">
-                    <a:solidFill>
-                      <a:srgbClr val="EEF2F9"/>
-                    </a:solidFill>
-                  </a:tcPr>
-                </a:tc>
-                <a:tc>
-                  <a:txBody>
-                    <a:bodyPr/>
-                    <a:lstStyle/>
-                    <a:p>
-                      <a:r>
-                        <a:rPr sz="1150" b="0">
-                          <a:solidFill>
-                            <a:srgbClr val="1A2233"/>
-                          </a:solidFill>
-                          <a:latin typeface="Microsoft JhengHei"/>
-                          <a:ea typeface="Microsoft JhengHei"/>
-                          <a:cs typeface="Microsoft JhengHei"/>
-                        </a:rPr>
-                        <a:t>安永聯合會計師事務所</a:t>
-                      </a:r>
-                    </a:p>
-                  </a:txBody>
-                  <a:tcPr anchor="ctr" marL="73152" marT="9144" marB="9144">
-                    <a:solidFill>
-                      <a:srgbClr val="EEF2F9"/>
-                    </a:solidFill>
-                  </a:tcPr>
-                </a:tc>
-                <a:tc>
-                  <a:txBody>
-                    <a:bodyPr/>
-                    <a:lstStyle/>
-                    <a:p>
-                      <a:r>
-                        <a:rPr sz="1150" b="0">
-                          <a:solidFill>
-                            <a:srgbClr val="1A2233"/>
-                          </a:solidFill>
-                          <a:latin typeface="Microsoft JhengHei"/>
-                          <a:ea typeface="Microsoft JhengHei"/>
-                          <a:cs typeface="Microsoft JhengHei"/>
-                        </a:rPr>
-                        <a:t>洪福讚、陳政初</a:t>
-                      </a:r>
-                    </a:p>
-                  </a:txBody>
-                  <a:tcPr anchor="ctr" marL="73152" marT="9144" marB="9144">
-                    <a:solidFill>
-                      <a:srgbClr val="EEF2F9"/>
-                    </a:solidFill>
-                  </a:tcPr>
-                </a:tc>
-              </a:tr>
-              <a:tr h="298704">
-                <a:tc>
-                  <a:txBody>
-                    <a:bodyPr/>
-                    <a:lstStyle/>
-                    <a:p>
-                      <a:r>
-                        <a:rPr sz="1150" b="0">
-                          <a:solidFill>
-                            <a:srgbClr val="1A2233"/>
-                          </a:solidFill>
-                          <a:latin typeface="Microsoft JhengHei"/>
-                          <a:ea typeface="Microsoft JhengHei"/>
-                          <a:cs typeface="Microsoft JhengHei"/>
-                        </a:rPr>
-                        <a:t>友訊</a:t>
-                      </a:r>
-                    </a:p>
-                  </a:txBody>
-                  <a:tcPr anchor="ctr" marL="73152" marT="9144" marB="9144">
-                    <a:solidFill>
-                      <a:srgbClr val="FFFFFF"/>
-                    </a:solidFill>
-                  </a:tcPr>
-                </a:tc>
-                <a:tc>
-                  <a:txBody>
-                    <a:bodyPr/>
-                    <a:lstStyle/>
-                    <a:p>
-                      <a:r>
-                        <a:rPr sz="1150" b="0">
-                          <a:solidFill>
-                            <a:srgbClr val="1A2233"/>
-                          </a:solidFill>
-                          <a:latin typeface="Microsoft JhengHei"/>
-                          <a:ea typeface="Microsoft JhengHei"/>
-                          <a:cs typeface="Microsoft JhengHei"/>
-                        </a:rPr>
-                        <a:t>2332</a:t>
-                      </a:r>
-                    </a:p>
-                  </a:txBody>
-                  <a:tcPr anchor="ctr" marL="73152" marT="9144" marB="9144">
-                    <a:solidFill>
-                      <a:srgbClr val="FFFFFF"/>
-                    </a:solidFill>
-                  </a:tcPr>
-                </a:tc>
-                <a:tc>
-                  <a:txBody>
-                    <a:bodyPr/>
-                    <a:lstStyle/>
-                    <a:p>
-                      <a:r>
-                        <a:rPr sz="1150" b="1">
-                          <a:solidFill>
-                            <a:srgbClr val="E63946"/>
-                          </a:solidFill>
-                          <a:latin typeface="Microsoft JhengHei"/>
-                          <a:ea typeface="Microsoft JhengHei"/>
-                          <a:cs typeface="Microsoft JhengHei"/>
-                        </a:rPr>
-                        <a:t>駭客攻擊</a:t>
-                      </a:r>
-                    </a:p>
-                  </a:txBody>
-                  <a:tcPr anchor="ctr" marL="73152" marT="9144" marB="9144">
-                    <a:solidFill>
-                      <a:srgbClr val="FFFFFF"/>
-                    </a:solidFill>
-                  </a:tcPr>
-                </a:tc>
-                <a:tc>
-                  <a:txBody>
-                    <a:bodyPr/>
-                    <a:lstStyle/>
-                    <a:p>
-                      <a:r>
-                        <a:rPr sz="1150" b="0">
-                          <a:solidFill>
-                            <a:srgbClr val="1A2233"/>
-                          </a:solidFill>
-                          <a:latin typeface="Microsoft JhengHei"/>
-                          <a:ea typeface="Microsoft JhengHei"/>
-                          <a:cs typeface="Microsoft JhengHei"/>
-                        </a:rPr>
-                        <a:t>安侯建業聯合會計師事務所</a:t>
-                      </a:r>
-                    </a:p>
-                  </a:txBody>
-                  <a:tcPr anchor="ctr" marL="73152" marT="9144" marB="9144">
-                    <a:solidFill>
-                      <a:srgbClr val="FFFFFF"/>
-                    </a:solidFill>
-                  </a:tcPr>
-                </a:tc>
-                <a:tc>
-                  <a:txBody>
-                    <a:bodyPr/>
-                    <a:lstStyle/>
-                    <a:p>
-                      <a:r>
-                        <a:rPr sz="1150" b="0">
-                          <a:solidFill>
-                            <a:srgbClr val="1A2233"/>
-                          </a:solidFill>
-                          <a:latin typeface="Microsoft JhengHei"/>
-                          <a:ea typeface="Microsoft JhengHei"/>
-                          <a:cs typeface="Microsoft JhengHei"/>
-                        </a:rPr>
-                        <a:t>梅元貞、謝秋華</a:t>
-                      </a:r>
-                    </a:p>
-                  </a:txBody>
-                  <a:tcPr anchor="ctr" marL="73152" marT="9144" marB="9144">
-                    <a:solidFill>
-                      <a:srgbClr val="FFFFFF"/>
-                    </a:solidFill>
-                  </a:tcPr>
-                </a:tc>
-              </a:tr>
-              <a:tr h="298704">
-                <a:tc>
-                  <a:txBody>
-                    <a:bodyPr/>
-                    <a:lstStyle/>
-                    <a:p>
-                      <a:r>
-                        <a:rPr sz="1150" b="0">
-                          <a:solidFill>
-                            <a:srgbClr val="1A2233"/>
-                          </a:solidFill>
-                          <a:latin typeface="Microsoft JhengHei"/>
-                          <a:ea typeface="Microsoft JhengHei"/>
-                          <a:cs typeface="Microsoft JhengHei"/>
-                        </a:rPr>
-                        <a:t>長榮航</a:t>
-                      </a:r>
-                    </a:p>
-                  </a:txBody>
-                  <a:tcPr anchor="ctr" marL="73152" marT="9144" marB="9144">
-                    <a:solidFill>
-                      <a:srgbClr val="EEF2F9"/>
-                    </a:solidFill>
-                  </a:tcPr>
-                </a:tc>
-                <a:tc>
-                  <a:txBody>
-                    <a:bodyPr/>
-                    <a:lstStyle/>
-                    <a:p>
-                      <a:r>
-                        <a:rPr sz="1150" b="0">
-                          <a:solidFill>
-                            <a:srgbClr val="1A2233"/>
-                          </a:solidFill>
-                          <a:latin typeface="Microsoft JhengHei"/>
-                          <a:ea typeface="Microsoft JhengHei"/>
-                          <a:cs typeface="Microsoft JhengHei"/>
-                        </a:rPr>
-                        <a:t>2618</a:t>
-                      </a:r>
-                    </a:p>
-                  </a:txBody>
-                  <a:tcPr anchor="ctr" marL="73152" marT="9144" marB="9144">
-                    <a:solidFill>
-                      <a:srgbClr val="EEF2F9"/>
-                    </a:solidFill>
-                  </a:tcPr>
-                </a:tc>
-                <a:tc>
-                  <a:txBody>
-                    <a:bodyPr/>
-                    <a:lstStyle/>
-                    <a:p>
-                      <a:r>
-                        <a:rPr sz="1150" b="1">
-                          <a:solidFill>
-                            <a:srgbClr val="E63946"/>
-                          </a:solidFill>
-                          <a:latin typeface="Microsoft JhengHei"/>
-                          <a:ea typeface="Microsoft JhengHei"/>
-                          <a:cs typeface="Microsoft JhengHei"/>
-                        </a:rPr>
-                        <a:t>駭客攻擊</a:t>
-                      </a:r>
-                    </a:p>
-                  </a:txBody>
-                  <a:tcPr anchor="ctr" marL="73152" marT="9144" marB="9144">
-                    <a:solidFill>
-                      <a:srgbClr val="EEF2F9"/>
-                    </a:solidFill>
-                  </a:tcPr>
-                </a:tc>
-                <a:tc>
-                  <a:txBody>
-                    <a:bodyPr/>
-                    <a:lstStyle/>
-                    <a:p>
-                      <a:r>
-                        <a:rPr sz="1150" b="0">
-                          <a:solidFill>
-                            <a:srgbClr val="1A2233"/>
-                          </a:solidFill>
-                          <a:latin typeface="Microsoft JhengHei"/>
-                          <a:ea typeface="Microsoft JhengHei"/>
-                          <a:cs typeface="Microsoft JhengHei"/>
-                        </a:rPr>
-                        <a:t>安侯建業聯合會計師事務所</a:t>
-                      </a:r>
-                    </a:p>
-                  </a:txBody>
-                  <a:tcPr anchor="ctr" marL="73152" marT="9144" marB="9144">
-                    <a:solidFill>
-                      <a:srgbClr val="EEF2F9"/>
-                    </a:solidFill>
-                  </a:tcPr>
-                </a:tc>
-                <a:tc>
-                  <a:txBody>
-                    <a:bodyPr/>
-                    <a:lstStyle/>
-                    <a:p>
-                      <a:r>
-                        <a:rPr sz="1150" b="0">
-                          <a:solidFill>
-                            <a:srgbClr val="1A2233"/>
-                          </a:solidFill>
-                          <a:latin typeface="Microsoft JhengHei"/>
-                          <a:ea typeface="Microsoft JhengHei"/>
-                          <a:cs typeface="Microsoft JhengHei"/>
-                        </a:rPr>
-                        <a:t>陳雅琳、楊雲筑</a:t>
-                      </a:r>
-                    </a:p>
-                  </a:txBody>
-                  <a:tcPr anchor="ctr" marL="73152" marT="9144" marB="9144">
-                    <a:solidFill>
-                      <a:srgbClr val="EEF2F9"/>
-                    </a:solidFill>
-                  </a:tcPr>
-                </a:tc>
-              </a:tr>
-              <a:tr h="298704">
-                <a:tc>
-                  <a:txBody>
-                    <a:bodyPr/>
-                    <a:lstStyle/>
-                    <a:p>
-                      <a:r>
-                        <a:rPr sz="1150" b="0">
-                          <a:solidFill>
-                            <a:srgbClr val="1A2233"/>
-                          </a:solidFill>
-                          <a:latin typeface="Microsoft JhengHei"/>
-                          <a:ea typeface="Microsoft JhengHei"/>
-                          <a:cs typeface="Microsoft JhengHei"/>
-                        </a:rPr>
-                        <a:t>長榮航太</a:t>
-                      </a:r>
-                    </a:p>
-                  </a:txBody>
-                  <a:tcPr anchor="ctr" marL="73152" marT="9144" marB="9144">
-                    <a:solidFill>
-                      <a:srgbClr val="FFFFFF"/>
-                    </a:solidFill>
-                  </a:tcPr>
-                </a:tc>
-                <a:tc>
-                  <a:txBody>
-                    <a:bodyPr/>
-                    <a:lstStyle/>
-                    <a:p>
-                      <a:r>
-                        <a:rPr sz="1150" b="0">
-                          <a:solidFill>
-                            <a:srgbClr val="1A2233"/>
-                          </a:solidFill>
-                          <a:latin typeface="Microsoft JhengHei"/>
-                          <a:ea typeface="Microsoft JhengHei"/>
-                          <a:cs typeface="Microsoft JhengHei"/>
-                        </a:rPr>
-                        <a:t>2645</a:t>
-                      </a:r>
-                    </a:p>
-                  </a:txBody>
-                  <a:tcPr anchor="ctr" marL="73152" marT="9144" marB="9144">
-                    <a:solidFill>
-                      <a:srgbClr val="FFFFFF"/>
-                    </a:solidFill>
-                  </a:tcPr>
-                </a:tc>
-                <a:tc>
-                  <a:txBody>
-                    <a:bodyPr/>
-                    <a:lstStyle/>
-                    <a:p>
-                      <a:r>
-                        <a:rPr sz="1150" b="1">
-                          <a:solidFill>
-                            <a:srgbClr val="E63946"/>
-                          </a:solidFill>
-                          <a:latin typeface="Microsoft JhengHei"/>
-                          <a:ea typeface="Microsoft JhengHei"/>
-                          <a:cs typeface="Microsoft JhengHei"/>
-                        </a:rPr>
-                        <a:t>駭客攻擊</a:t>
-                      </a:r>
-                    </a:p>
-                  </a:txBody>
-                  <a:tcPr anchor="ctr" marL="73152" marT="9144" marB="9144">
-                    <a:solidFill>
-                      <a:srgbClr val="FFFFFF"/>
-                    </a:solidFill>
-                  </a:tcPr>
-                </a:tc>
-                <a:tc>
-                  <a:txBody>
-                    <a:bodyPr/>
-                    <a:lstStyle/>
-                    <a:p>
-                      <a:r>
-                        <a:rPr sz="1150" b="0">
-                          <a:solidFill>
-                            <a:srgbClr val="1A2233"/>
-                          </a:solidFill>
-                          <a:latin typeface="Microsoft JhengHei"/>
-                          <a:ea typeface="Microsoft JhengHei"/>
-                          <a:cs typeface="Microsoft JhengHei"/>
-                        </a:rPr>
-                        <a:t>安侯建業聯合會計師事務所</a:t>
-                      </a:r>
-                    </a:p>
-                  </a:txBody>
-                  <a:tcPr anchor="ctr" marL="73152" marT="9144" marB="9144">
-                    <a:solidFill>
-                      <a:srgbClr val="FFFFFF"/>
-                    </a:solidFill>
-                  </a:tcPr>
-                </a:tc>
-                <a:tc>
-                  <a:txBody>
-                    <a:bodyPr/>
-                    <a:lstStyle/>
-                    <a:p>
-                      <a:r>
-                        <a:rPr sz="1150" b="0">
-                          <a:solidFill>
-                            <a:srgbClr val="1A2233"/>
-                          </a:solidFill>
-                          <a:latin typeface="Microsoft JhengHei"/>
-                          <a:ea typeface="Microsoft JhengHei"/>
-                          <a:cs typeface="Microsoft JhengHei"/>
-                        </a:rPr>
-                        <a:t>陳雅琳、鄭博仁</a:t>
-                      </a:r>
-                    </a:p>
-                  </a:txBody>
-                  <a:tcPr anchor="ctr" marL="73152" marT="9144" marB="9144">
-                    <a:solidFill>
-                      <a:srgbClr val="FFFFFF"/>
-                    </a:solidFill>
-                  </a:tcPr>
-                </a:tc>
-              </a:tr>
-              <a:tr h="298704">
-                <a:tc>
-                  <a:txBody>
-                    <a:bodyPr/>
-                    <a:lstStyle/>
-                    <a:p>
-                      <a:r>
-                        <a:rPr sz="1150" b="0">
-                          <a:solidFill>
-                            <a:srgbClr val="1A2233"/>
-                          </a:solidFill>
-                          <a:latin typeface="Microsoft JhengHei"/>
-                          <a:ea typeface="Microsoft JhengHei"/>
-                          <a:cs typeface="Microsoft JhengHei"/>
-                        </a:rPr>
-                        <a:t>崴寶</a:t>
-                      </a:r>
-                    </a:p>
-                  </a:txBody>
-                  <a:tcPr anchor="ctr" marL="73152" marT="9144" marB="9144">
-                    <a:solidFill>
-                      <a:srgbClr val="EEF2F9"/>
-                    </a:solidFill>
-                  </a:tcPr>
-                </a:tc>
-                <a:tc>
-                  <a:txBody>
-                    <a:bodyPr/>
-                    <a:lstStyle/>
-                    <a:p>
-                      <a:r>
-                        <a:rPr sz="1150" b="0">
-                          <a:solidFill>
-                            <a:srgbClr val="1A2233"/>
-                          </a:solidFill>
-                          <a:latin typeface="Microsoft JhengHei"/>
-                          <a:ea typeface="Microsoft JhengHei"/>
-                          <a:cs typeface="Microsoft JhengHei"/>
-                        </a:rPr>
-                        <a:t>7744</a:t>
-                      </a:r>
-                    </a:p>
-                  </a:txBody>
-                  <a:tcPr anchor="ctr" marL="73152" marT="9144" marB="9144">
-                    <a:solidFill>
-                      <a:srgbClr val="EEF2F9"/>
-                    </a:solidFill>
-                  </a:tcPr>
-                </a:tc>
-                <a:tc>
-                  <a:txBody>
-                    <a:bodyPr/>
-                    <a:lstStyle/>
-                    <a:p>
-                      <a:r>
-                        <a:rPr sz="1150" b="1">
-                          <a:solidFill>
-                            <a:srgbClr val="F4A261"/>
-                          </a:solidFill>
-                          <a:latin typeface="Microsoft JhengHei"/>
-                          <a:ea typeface="Microsoft JhengHei"/>
-                          <a:cs typeface="Microsoft JhengHei"/>
-                        </a:rPr>
-                        <a:t>勒索病毒/加密</a:t>
-                      </a:r>
-                    </a:p>
-                  </a:txBody>
-                  <a:tcPr anchor="ctr" marL="73152" marT="9144" marB="9144">
-                    <a:solidFill>
-                      <a:srgbClr val="EEF2F9"/>
-                    </a:solidFill>
-                  </a:tcPr>
-                </a:tc>
-                <a:tc>
-                  <a:txBody>
-                    <a:bodyPr/>
-                    <a:lstStyle/>
-                    <a:p>
-                      <a:r>
-                        <a:rPr sz="1150" b="0">
-                          <a:solidFill>
-                            <a:srgbClr val="1A2233"/>
-                          </a:solidFill>
-                          <a:latin typeface="Microsoft JhengHei"/>
-                          <a:ea typeface="Microsoft JhengHei"/>
-                          <a:cs typeface="Microsoft JhengHei"/>
-                        </a:rPr>
-                        <a:t>安永聯合會計師事務所</a:t>
-                      </a:r>
-                    </a:p>
-                  </a:txBody>
-                  <a:tcPr anchor="ctr" marL="73152" marT="9144" marB="9144">
-                    <a:solidFill>
-                      <a:srgbClr val="EEF2F9"/>
-                    </a:solidFill>
-                  </a:tcPr>
-                </a:tc>
-                <a:tc>
-                  <a:txBody>
-                    <a:bodyPr/>
-                    <a:lstStyle/>
-                    <a:p>
-                      <a:r>
-                        <a:rPr sz="1150" b="0">
-                          <a:solidFill>
-                            <a:srgbClr val="1A2233"/>
-                          </a:solidFill>
-                          <a:latin typeface="Microsoft JhengHei"/>
-                          <a:ea typeface="Microsoft JhengHei"/>
-                          <a:cs typeface="Microsoft JhengHei"/>
-                        </a:rPr>
-                        <a:t>黃宇廷、黃子評</a:t>
-                      </a:r>
-                    </a:p>
-                  </a:txBody>
-                  <a:tcPr anchor="ctr" marL="73152" marT="9144" marB="9144">
-                    <a:solidFill>
-                      <a:srgbClr val="EEF2F9"/>
-                    </a:solidFill>
-                  </a:tcPr>
-                </a:tc>
-              </a:tr>
-              <a:tr h="298704">
-                <a:tc>
-                  <a:txBody>
-                    <a:bodyPr/>
-                    <a:lstStyle/>
-                    <a:p>
-                      <a:r>
-                        <a:rPr sz="1150" b="0">
-                          <a:solidFill>
-                            <a:srgbClr val="1A2233"/>
-                          </a:solidFill>
-                          <a:latin typeface="Microsoft JhengHei"/>
-                          <a:ea typeface="Microsoft JhengHei"/>
-                          <a:cs typeface="Microsoft JhengHei"/>
-                        </a:rPr>
-                        <a:t>達爾膚</a:t>
-                      </a:r>
-                    </a:p>
-                  </a:txBody>
-                  <a:tcPr anchor="ctr" marL="73152" marT="9144" marB="9144">
-                    <a:solidFill>
-                      <a:srgbClr val="FFFFFF"/>
-                    </a:solidFill>
-                  </a:tcPr>
-                </a:tc>
-                <a:tc>
-                  <a:txBody>
-                    <a:bodyPr/>
-                    <a:lstStyle/>
-                    <a:p>
-                      <a:r>
-                        <a:rPr sz="1150" b="0">
-                          <a:solidFill>
-                            <a:srgbClr val="1A2233"/>
-                          </a:solidFill>
-                          <a:latin typeface="Microsoft JhengHei"/>
-                          <a:ea typeface="Microsoft JhengHei"/>
-                          <a:cs typeface="Microsoft JhengHei"/>
-                        </a:rPr>
-                        <a:t>6523</a:t>
+                        <a:t>2640</a:t>
                       </a:r>
                     </a:p>
                   </a:txBody>
@@ -8949,135 +9315,13 @@
                           <a:ea typeface="Microsoft JhengHei"/>
                           <a:cs typeface="Microsoft JhengHei"/>
                         </a:rPr>
-                        <a:t>于智帆、葉翠苗</a:t>
+                        <a:t>支秉鈞、涂展源</a:t>
                       </a:r>
                     </a:p>
                   </a:txBody>
                   <a:tcPr anchor="ctr" marL="73152" marT="9144" marB="9144">
                     <a:solidFill>
                       <a:srgbClr val="FFFFFF"/>
-                    </a:solidFill>
-                  </a:tcPr>
-                </a:tc>
-              </a:tr>
-              <a:tr h="298704">
-                <a:tc>
-                  <a:txBody>
-                    <a:bodyPr/>
-                    <a:lstStyle/>
-                    <a:p>
-                      <a:r>
-                        <a:rPr sz="1150" b="0">
-                          <a:solidFill>
-                            <a:srgbClr val="1A2233"/>
-                          </a:solidFill>
-                          <a:latin typeface="Microsoft JhengHei"/>
-                          <a:ea typeface="Microsoft JhengHei"/>
-                          <a:cs typeface="Microsoft JhengHei"/>
-                        </a:rPr>
-                        <a:t>大車隊</a:t>
-                      </a:r>
-                    </a:p>
-                  </a:txBody>
-                  <a:tcPr anchor="ctr" marL="73152" marT="9144" marB="9144">
-                    <a:solidFill>
-                      <a:srgbClr val="EEF2F9"/>
-                    </a:solidFill>
-                  </a:tcPr>
-                </a:tc>
-                <a:tc>
-                  <a:txBody>
-                    <a:bodyPr/>
-                    <a:lstStyle/>
-                    <a:p>
-                      <a:r>
-                        <a:rPr sz="1150" b="0">
-                          <a:solidFill>
-                            <a:srgbClr val="1A2233"/>
-                          </a:solidFill>
-                          <a:latin typeface="Microsoft JhengHei"/>
-                          <a:ea typeface="Microsoft JhengHei"/>
-                          <a:cs typeface="Microsoft JhengHei"/>
-                        </a:rPr>
-                        <a:t>2640</a:t>
-                      </a:r>
-                    </a:p>
-                  </a:txBody>
-                  <a:tcPr anchor="ctr" marL="73152" marT="9144" marB="9144">
-                    <a:solidFill>
-                      <a:srgbClr val="EEF2F9"/>
-                    </a:solidFill>
-                  </a:tcPr>
-                </a:tc>
-                <a:tc>
-                  <a:txBody>
-                    <a:bodyPr/>
-                    <a:lstStyle/>
-                    <a:p>
-                      <a:r>
-                        <a:rPr sz="1150" b="1">
-                          <a:solidFill>
-                            <a:srgbClr val="E63946"/>
-                          </a:solidFill>
-                          <a:latin typeface="Microsoft JhengHei"/>
-                          <a:ea typeface="Microsoft JhengHei"/>
-                          <a:cs typeface="Microsoft JhengHei"/>
-                        </a:rPr>
-                        <a:t>駭客攻擊</a:t>
-                      </a:r>
-                    </a:p>
-                  </a:txBody>
-                  <a:tcPr anchor="ctr" marL="73152" marT="9144" marB="9144">
-                    <a:solidFill>
-                      <a:srgbClr val="EEF2F9"/>
-                    </a:solidFill>
-                  </a:tcPr>
-                </a:tc>
-                <a:tc>
-                  <a:txBody>
-                    <a:bodyPr/>
-                    <a:lstStyle/>
-                    <a:p>
-                      <a:r>
-                        <a:rPr sz="1150" b="0">
-                          <a:solidFill>
-                            <a:srgbClr val="1A2233"/>
-                          </a:solidFill>
-                          <a:latin typeface="Microsoft JhengHei"/>
-                          <a:ea typeface="Microsoft JhengHei"/>
-                          <a:cs typeface="Microsoft JhengHei"/>
-                        </a:rPr>
-                        <a:t>資誠聯合會計師事務所</a:t>
-                      </a:r>
-                    </a:p>
-                  </a:txBody>
-                  <a:tcPr anchor="ctr" marL="73152" marT="9144" marB="9144">
-                    <a:solidFill>
-                      <a:srgbClr val="EEF2F9"/>
-                    </a:solidFill>
-                  </a:tcPr>
-                </a:tc>
-                <a:tc>
-                  <a:txBody>
-                    <a:bodyPr/>
-                    <a:lstStyle/>
-                    <a:p>
-                      <a:r>
-                        <a:rPr sz="1150" b="0">
-                          <a:solidFill>
-                            <a:srgbClr val="1A2233"/>
-                          </a:solidFill>
-                          <a:latin typeface="Microsoft JhengHei"/>
-                          <a:ea typeface="Microsoft JhengHei"/>
-                          <a:cs typeface="Microsoft JhengHei"/>
-                        </a:rPr>
-                        <a:t>支秉鈞、涂展源</a:t>
-                      </a:r>
-                    </a:p>
-                  </a:txBody>
-                  <a:tcPr anchor="ctr" marL="73152" marT="9144" marB="9144">
-                    <a:solidFill>
-                      <a:srgbClr val="EEF2F9"/>
                     </a:solidFill>
                   </a:tcPr>
                 </a:tc>
@@ -10592,7 +10836,7 @@
                 <a:ea typeface="Microsoft JhengHei"/>
                 <a:cs typeface="Microsoft JhengHei"/>
               </a:rPr>
-              <a:t>上福 </a:t>
+              <a:t>緯致 </a:t>
             </a:r>
             <a:r>
               <a:rPr sz="1300" b="0">
@@ -10603,7 +10847,7 @@
                 <a:ea typeface="Microsoft JhengHei"/>
                 <a:cs typeface="Microsoft JhengHei"/>
               </a:rPr>
-              <a:t>6128</a:t>
+              <a:t>4953</a:t>
             </a:r>
           </a:p>
         </p:txBody>
@@ -10736,7 +10980,7 @@
                 <a:ea typeface="Microsoft JhengHei"/>
                 <a:cs typeface="Microsoft JhengHei"/>
               </a:rPr>
-              <a:t>KatunCorporation發現資訊安全異常事件，經調查發現部分資訊系統有異常存取行為。</a:t>
+              <a:t>本公司偵測到內部系統有異常存取情形，經調查確認，部分員工資訊與公務聯繫資訊遭未經授權存取。</a:t>
             </a:r>
           </a:p>
         </p:txBody>
@@ -10788,7 +11032,7 @@
                 <a:ea typeface="Microsoft JhengHei"/>
                 <a:cs typeface="Microsoft JhengHei"/>
               </a:rPr>
-              <a:t>KatunCorporation將持續進行事件調查、鑑識分析及監控作業，並進一步強化資訊安全管理、遠端存取管控、網路安全…</a:t>
+              <a:t>本公司已採取相關防護、阻斷及修補措施，並持續強化資訊安全防護機制。</a:t>
             </a:r>
           </a:p>
         </p:txBody>
@@ -10854,7 +11098,7 @@
             <a:avLst/>
           </a:prstGeom>
           <a:solidFill>
-            <a:srgbClr val="27A6C4"/>
+            <a:srgbClr val="5C6679"/>
           </a:solidFill>
           <a:ln>
             <a:noFill/>
@@ -10915,7 +11159,7 @@
                 <a:ea typeface="Microsoft JhengHei"/>
                 <a:cs typeface="Microsoft JhengHei"/>
               </a:rPr>
-              <a:t>杏一 </a:t>
+              <a:t>上福 </a:t>
             </a:r>
             <a:r>
               <a:rPr sz="1300" b="0">
@@ -10926,7 +11170,7 @@
                 <a:ea typeface="Microsoft JhengHei"/>
                 <a:cs typeface="Microsoft JhengHei"/>
               </a:rPr>
-              <a:t>4175</a:t>
+              <a:t>6128</a:t>
             </a:r>
           </a:p>
         </p:txBody>
@@ -10946,7 +11190,7 @@
             <a:avLst/>
           </a:prstGeom>
           <a:solidFill>
-            <a:srgbClr val="27A6C4"/>
+            <a:srgbClr val="5C6679"/>
           </a:solidFill>
           <a:ln>
             <a:noFill/>
@@ -11007,7 +11251,7 @@
                 <a:ea typeface="Microsoft JhengHei"/>
                 <a:cs typeface="Microsoft JhengHei"/>
               </a:rPr>
-              <a:t>個資外洩</a:t>
+              <a:t>其他</a:t>
             </a:r>
           </a:p>
         </p:txBody>
@@ -11042,7 +11286,7 @@
             <a:r>
               <a:rPr sz="1100" b="1">
                 <a:solidFill>
-                  <a:srgbClr val="27A6C4"/>
+                  <a:srgbClr val="5C6679"/>
                 </a:solidFill>
                 <a:latin typeface="Microsoft JhengHei"/>
                 <a:ea typeface="Microsoft JhengHei"/>
@@ -11059,7 +11303,7 @@
                 <a:ea typeface="Microsoft JhengHei"/>
                 <a:cs typeface="Microsoft JhengHei"/>
               </a:rPr>
-              <a:t>本公司接獲消費者反映疑似個資外洩事件</a:t>
+              <a:t>KatunCorporation發現資訊安全異常事件，經調查發現部分資訊系統有異常存取行為。</a:t>
             </a:r>
           </a:p>
         </p:txBody>
@@ -11094,7 +11338,7 @@
             <a:r>
               <a:rPr sz="1100" b="1">
                 <a:solidFill>
-                  <a:srgbClr val="27A6C4"/>
+                  <a:srgbClr val="5C6679"/>
                 </a:solidFill>
                 <a:latin typeface="Microsoft JhengHei"/>
                 <a:ea typeface="Microsoft JhengHei"/>
@@ -11111,7 +11355,7 @@
                 <a:ea typeface="Microsoft JhengHei"/>
                 <a:cs typeface="Microsoft JhengHei"/>
               </a:rPr>
-              <a:t>(1)本公司已立即啟動資安事件應變作業，針對相關系統、存取紀錄及可能涉及之資料範圍進行調查，並要求官網平台委外廠商同步進…</a:t>
+              <a:t>KatunCorporation將持續進行事件調查、鑑識分析及監控作業，並進一步強化資訊安全管理、遠端存取管控、網路安全…</a:t>
             </a:r>
           </a:p>
         </p:txBody>
@@ -11238,7 +11482,7 @@
                 <a:ea typeface="Microsoft JhengHei"/>
                 <a:cs typeface="Microsoft JhengHei"/>
               </a:rPr>
-              <a:t>鈊象 </a:t>
+              <a:t>杏一 </a:t>
             </a:r>
             <a:r>
               <a:rPr sz="1300" b="0">
@@ -11249,7 +11493,7 @@
                 <a:ea typeface="Microsoft JhengHei"/>
                 <a:cs typeface="Microsoft JhengHei"/>
               </a:rPr>
-              <a:t>3293</a:t>
+              <a:t>4175</a:t>
             </a:r>
           </a:p>
         </p:txBody>
@@ -11382,7 +11626,7 @@
                 <a:ea typeface="Microsoft JhengHei"/>
                 <a:cs typeface="Microsoft JhengHei"/>
               </a:rPr>
-              <a:t>本公司於115年9月29日發現不明IP異常侵入公司營運資訊設備，造成公司遊戲營運資料外洩，包含部…</a:t>
+              <a:t>本公司接獲消費者反映疑似個資外洩事件</a:t>
             </a:r>
           </a:p>
         </p:txBody>
@@ -11434,7 +11678,7 @@
                 <a:ea typeface="Microsoft JhengHei"/>
                 <a:cs typeface="Microsoft JhengHei"/>
               </a:rPr>
-              <a:t>(1)持續提升資安防禦，強化監控與防護層級。(2)委由外部專業資安團隊協助事件調查，並於相關主機部署偵測及防護機制。(3…</a:t>
+              <a:t>(1)本公司已立即啟動資安事件應變作業，針對相關系統、存取紀錄及可能涉及之資料範圍進行調查，並要求官網平台委外廠商同步進…</a:t>
             </a:r>
           </a:p>
         </p:txBody>
@@ -11500,7 +11744,7 @@
             <a:avLst/>
           </a:prstGeom>
           <a:solidFill>
-            <a:srgbClr val="5C6679"/>
+            <a:srgbClr val="27A6C4"/>
           </a:solidFill>
           <a:ln>
             <a:noFill/>
@@ -11561,7 +11805,7 @@
                 <a:ea typeface="Microsoft JhengHei"/>
                 <a:cs typeface="Microsoft JhengHei"/>
               </a:rPr>
-              <a:t>一零四 </a:t>
+              <a:t>鈊象 </a:t>
             </a:r>
             <a:r>
               <a:rPr sz="1300" b="0">
@@ -11572,7 +11816,7 @@
                 <a:ea typeface="Microsoft JhengHei"/>
                 <a:cs typeface="Microsoft JhengHei"/>
               </a:rPr>
-              <a:t>3130</a:t>
+              <a:t>3293</a:t>
             </a:r>
           </a:p>
         </p:txBody>
@@ -11592,7 +11836,7 @@
             <a:avLst/>
           </a:prstGeom>
           <a:solidFill>
-            <a:srgbClr val="5C6679"/>
+            <a:srgbClr val="27A6C4"/>
           </a:solidFill>
           <a:ln>
             <a:noFill/>
@@ -11653,7 +11897,7 @@
                 <a:ea typeface="Microsoft JhengHei"/>
                 <a:cs typeface="Microsoft JhengHei"/>
               </a:rPr>
-              <a:t>其他</a:t>
+              <a:t>個資外洩</a:t>
             </a:r>
           </a:p>
         </p:txBody>
@@ -11688,7 +11932,7 @@
             <a:r>
               <a:rPr sz="1100" b="1">
                 <a:solidFill>
-                  <a:srgbClr val="5C6679"/>
+                  <a:srgbClr val="27A6C4"/>
                 </a:solidFill>
                 <a:latin typeface="Microsoft JhengHei"/>
                 <a:ea typeface="Microsoft JhengHei"/>
@@ -11705,7 +11949,7 @@
                 <a:ea typeface="Microsoft JhengHei"/>
                 <a:cs typeface="Microsoft JhengHei"/>
               </a:rPr>
-              <a:t>本公司偵測到APP系統有異常讀取情形，經調查確認，約12萬筆履歷資料遭未經授權讀取。</a:t>
+              <a:t>本公司於115年9月29日發現不明IP異常侵入公司營運資訊設備，造成公司遊戲營運資料外洩，包含部…</a:t>
             </a:r>
           </a:p>
         </p:txBody>
@@ -11740,7 +11984,7 @@
             <a:r>
               <a:rPr sz="1100" b="1">
                 <a:solidFill>
-                  <a:srgbClr val="5C6679"/>
+                  <a:srgbClr val="27A6C4"/>
                 </a:solidFill>
                 <a:latin typeface="Microsoft JhengHei"/>
                 <a:ea typeface="Microsoft JhengHei"/>
@@ -11757,7 +12001,7 @@
                 <a:ea typeface="Microsoft JhengHei"/>
                 <a:cs typeface="Microsoft JhengHei"/>
               </a:rPr>
-              <a:t>本公司已採取相關防護及阻斷措施，並持續進行資安鑑識及強化資訊安全防護機制。本公司將依調查結果及相關法令辦理後續事宜，如有…</a:t>
+              <a:t>(1)持續提升資安防禦，強化監控與防護層級。(2)委由外部專業資安團隊協助事件調查，並於相關主機部署偵測及防護機制。(3…</a:t>
             </a:r>
           </a:p>
         </p:txBody>
@@ -11959,7 +12203,7 @@
             <a:avLst/>
           </a:prstGeom>
           <a:solidFill>
-            <a:srgbClr val="27A6C4"/>
+            <a:srgbClr val="5C6679"/>
           </a:solidFill>
           <a:ln>
             <a:noFill/>
@@ -12020,7 +12264,7 @@
                 <a:ea typeface="Microsoft JhengHei"/>
                 <a:cs typeface="Microsoft JhengHei"/>
               </a:rPr>
-              <a:t>安心 </a:t>
+              <a:t>一零四 </a:t>
             </a:r>
             <a:r>
               <a:rPr sz="1300" b="0">
@@ -12031,7 +12275,7 @@
                 <a:ea typeface="Microsoft JhengHei"/>
                 <a:cs typeface="Microsoft JhengHei"/>
               </a:rPr>
-              <a:t>1259</a:t>
+              <a:t>3130</a:t>
             </a:r>
           </a:p>
         </p:txBody>
@@ -12051,7 +12295,7 @@
             <a:avLst/>
           </a:prstGeom>
           <a:solidFill>
-            <a:srgbClr val="27A6C4"/>
+            <a:srgbClr val="5C6679"/>
           </a:solidFill>
           <a:ln>
             <a:noFill/>
@@ -12112,7 +12356,7 @@
                 <a:ea typeface="Microsoft JhengHei"/>
                 <a:cs typeface="Microsoft JhengHei"/>
               </a:rPr>
-              <a:t>個資外洩</a:t>
+              <a:t>其他</a:t>
             </a:r>
           </a:p>
         </p:txBody>
@@ -12147,7 +12391,7 @@
             <a:r>
               <a:rPr sz="1100" b="1">
                 <a:solidFill>
-                  <a:srgbClr val="27A6C4"/>
+                  <a:srgbClr val="5C6679"/>
                 </a:solidFill>
                 <a:latin typeface="Microsoft JhengHei"/>
                 <a:ea typeface="Microsoft JhengHei"/>
@@ -12164,7 +12408,7 @@
                 <a:ea typeface="Microsoft JhengHei"/>
                 <a:cs typeface="Microsoft JhengHei"/>
               </a:rPr>
-              <a:t>消費者反應疑似個資外洩事件</a:t>
+              <a:t>本公司偵測到APP系統有異常讀取情形，經調查確認，約12萬筆履歷資料遭未經授權讀取。</a:t>
             </a:r>
           </a:p>
         </p:txBody>
@@ -12199,7 +12443,7 @@
             <a:r>
               <a:rPr sz="1100" b="1">
                 <a:solidFill>
-                  <a:srgbClr val="27A6C4"/>
+                  <a:srgbClr val="5C6679"/>
                 </a:solidFill>
                 <a:latin typeface="Microsoft JhengHei"/>
                 <a:ea typeface="Microsoft JhengHei"/>
@@ -12216,7 +12460,7 @@
                 <a:ea typeface="Microsoft JhengHei"/>
                 <a:cs typeface="Microsoft JhengHei"/>
               </a:rPr>
-              <a:t>本公司已立即針對本次資安事件啟動應變作業。需特別說明，本次疑似個資外洩事件之平台係由委外廠商管理，非屬本公司自有之MOS…</a:t>
+              <a:t>本公司已採取相關防護及阻斷措施，並持續進行資安鑑識及強化資訊安全防護機制。本公司將依調查結果及相關法令辦理後續事宜，如有…</a:t>
             </a:r>
           </a:p>
         </p:txBody>
@@ -12282,7 +12526,7 @@
             <a:avLst/>
           </a:prstGeom>
           <a:solidFill>
-            <a:srgbClr val="E63946"/>
+            <a:srgbClr val="27A6C4"/>
           </a:solidFill>
           <a:ln>
             <a:noFill/>
@@ -12343,7 +12587,7 @@
                 <a:ea typeface="Microsoft JhengHei"/>
                 <a:cs typeface="Microsoft JhengHei"/>
               </a:rPr>
-              <a:t>神腦 </a:t>
+              <a:t>安心 </a:t>
             </a:r>
             <a:r>
               <a:rPr sz="1300" b="0">
@@ -12354,7 +12598,7 @@
                 <a:ea typeface="Microsoft JhengHei"/>
                 <a:cs typeface="Microsoft JhengHei"/>
               </a:rPr>
-              <a:t>2450</a:t>
+              <a:t>1259</a:t>
             </a:r>
           </a:p>
         </p:txBody>
@@ -12374,7 +12618,7 @@
             <a:avLst/>
           </a:prstGeom>
           <a:solidFill>
-            <a:srgbClr val="E63946"/>
+            <a:srgbClr val="27A6C4"/>
           </a:solidFill>
           <a:ln>
             <a:noFill/>
@@ -12435,7 +12679,7 @@
                 <a:ea typeface="Microsoft JhengHei"/>
                 <a:cs typeface="Microsoft JhengHei"/>
               </a:rPr>
-              <a:t>駭客攻擊</a:t>
+              <a:t>個資外洩</a:t>
             </a:r>
           </a:p>
         </p:txBody>
@@ -12470,7 +12714,7 @@
             <a:r>
               <a:rPr sz="1100" b="1">
                 <a:solidFill>
-                  <a:srgbClr val="E63946"/>
+                  <a:srgbClr val="27A6C4"/>
                 </a:solidFill>
                 <a:latin typeface="Microsoft JhengHei"/>
                 <a:ea typeface="Microsoft JhengHei"/>
@@ -12487,7 +12731,7 @@
                 <a:ea typeface="Microsoft JhengHei"/>
                 <a:cs typeface="Microsoft JhengHei"/>
               </a:rPr>
-              <a:t>本公司外部伺服器遭受自動化攻擊事件說明。</a:t>
+              <a:t>消費者反應疑似個資外洩事件</a:t>
             </a:r>
           </a:p>
         </p:txBody>
@@ -12522,7 +12766,7 @@
             <a:r>
               <a:rPr sz="1100" b="1">
                 <a:solidFill>
-                  <a:srgbClr val="E63946"/>
+                  <a:srgbClr val="27A6C4"/>
                 </a:solidFill>
                 <a:latin typeface="Microsoft JhengHei"/>
                 <a:ea typeface="Microsoft JhengHei"/>
@@ -12539,7 +12783,7 @@
                 <a:ea typeface="Microsoft JhengHei"/>
                 <a:cs typeface="Microsoft JhengHei"/>
               </a:rPr>
-              <a:t>本公司已與第三方資安廠商合作，全面強化網路偵測、系統監控與安全管控，以確保資訊安全。</a:t>
+              <a:t>本公司已立即針對本次資安事件啟動應變作業。需特別說明，本次疑似個資外洩事件之平台係由委外廠商管理，非屬本公司自有之MOS…</a:t>
             </a:r>
           </a:p>
         </p:txBody>
@@ -12605,7 +12849,7 @@
             <a:avLst/>
           </a:prstGeom>
           <a:solidFill>
-            <a:srgbClr val="5C6679"/>
+            <a:srgbClr val="E63946"/>
           </a:solidFill>
           <a:ln>
             <a:noFill/>
@@ -12666,7 +12910,7 @@
                 <a:ea typeface="Microsoft JhengHei"/>
                 <a:cs typeface="Microsoft JhengHei"/>
               </a:rPr>
-              <a:t>鈊象 </a:t>
+              <a:t>神腦 </a:t>
             </a:r>
             <a:r>
               <a:rPr sz="1300" b="0">
@@ -12677,7 +12921,7 @@
                 <a:ea typeface="Microsoft JhengHei"/>
                 <a:cs typeface="Microsoft JhengHei"/>
               </a:rPr>
-              <a:t>3293</a:t>
+              <a:t>2450</a:t>
             </a:r>
           </a:p>
         </p:txBody>
@@ -12697,7 +12941,7 @@
             <a:avLst/>
           </a:prstGeom>
           <a:solidFill>
-            <a:srgbClr val="5C6679"/>
+            <a:srgbClr val="E63946"/>
           </a:solidFill>
           <a:ln>
             <a:noFill/>
@@ -12758,7 +13002,7 @@
                 <a:ea typeface="Microsoft JhengHei"/>
                 <a:cs typeface="Microsoft JhengHei"/>
               </a:rPr>
-              <a:t>其他</a:t>
+              <a:t>駭客攻擊</a:t>
             </a:r>
           </a:p>
         </p:txBody>
@@ -12793,7 +13037,7 @@
             <a:r>
               <a:rPr sz="1100" b="1">
                 <a:solidFill>
-                  <a:srgbClr val="5C6679"/>
+                  <a:srgbClr val="E63946"/>
                 </a:solidFill>
                 <a:latin typeface="Microsoft JhengHei"/>
                 <a:ea typeface="Microsoft JhengHei"/>
@@ -12810,7 +13054,7 @@
                 <a:ea typeface="Microsoft JhengHei"/>
                 <a:cs typeface="Microsoft JhengHei"/>
               </a:rPr>
-              <a:t>本公司於115年9月29日發現不明IP異常侵入公司營運資訊設備。</a:t>
+              <a:t>本公司外部伺服器遭受自動化攻擊事件說明。</a:t>
             </a:r>
           </a:p>
         </p:txBody>
@@ -12845,7 +13089,7 @@
             <a:r>
               <a:rPr sz="1100" b="1">
                 <a:solidFill>
-                  <a:srgbClr val="5C6679"/>
+                  <a:srgbClr val="E63946"/>
                 </a:solidFill>
                 <a:latin typeface="Microsoft JhengHei"/>
                 <a:ea typeface="Microsoft JhengHei"/>
@@ -12862,7 +13106,7 @@
                 <a:ea typeface="Microsoft JhengHei"/>
                 <a:cs typeface="Microsoft JhengHei"/>
               </a:rPr>
-              <a:t>持續提升資安防禦，強化監控與防護層級。</a:t>
+              <a:t>本公司已與第三方資安廠商合作，全面強化網路偵測、系統監控與安全管控，以確保資訊安全。</a:t>
             </a:r>
           </a:p>
         </p:txBody>
@@ -12928,7 +13172,7 @@
             <a:avLst/>
           </a:prstGeom>
           <a:solidFill>
-            <a:srgbClr val="27A6C4"/>
+            <a:srgbClr val="5C6679"/>
           </a:solidFill>
           <a:ln>
             <a:noFill/>
@@ -12989,7 +13233,7 @@
                 <a:ea typeface="Microsoft JhengHei"/>
                 <a:cs typeface="Microsoft JhengHei"/>
               </a:rPr>
-              <a:t>柏文 </a:t>
+              <a:t>鈊象 </a:t>
             </a:r>
             <a:r>
               <a:rPr sz="1300" b="0">
@@ -13000,7 +13244,7 @@
                 <a:ea typeface="Microsoft JhengHei"/>
                 <a:cs typeface="Microsoft JhengHei"/>
               </a:rPr>
-              <a:t>8462</a:t>
+              <a:t>3293</a:t>
             </a:r>
           </a:p>
         </p:txBody>
@@ -13020,7 +13264,7 @@
             <a:avLst/>
           </a:prstGeom>
           <a:solidFill>
-            <a:srgbClr val="27A6C4"/>
+            <a:srgbClr val="5C6679"/>
           </a:solidFill>
           <a:ln>
             <a:noFill/>
@@ -13081,7 +13325,7 @@
                 <a:ea typeface="Microsoft JhengHei"/>
                 <a:cs typeface="Microsoft JhengHei"/>
               </a:rPr>
-              <a:t>個資外洩</a:t>
+              <a:t>其他</a:t>
             </a:r>
           </a:p>
         </p:txBody>
@@ -13116,7 +13360,7 @@
             <a:r>
               <a:rPr sz="1100" b="1">
                 <a:solidFill>
-                  <a:srgbClr val="27A6C4"/>
+                  <a:srgbClr val="5C6679"/>
                 </a:solidFill>
                 <a:latin typeface="Microsoft JhengHei"/>
                 <a:ea typeface="Microsoft JhengHei"/>
@@ -13133,7 +13377,7 @@
                 <a:ea typeface="Microsoft JhengHei"/>
                 <a:cs typeface="Microsoft JhengHei"/>
               </a:rPr>
-              <a:t>本公司接獲系統委外廠商通知其對外服務系統遭自動化攻擊，並對客戶資料表分頁擷取，其中部分涉及本公司…</a:t>
+              <a:t>本公司於115年9月29日發現不明IP異常侵入公司營運資訊設備。</a:t>
             </a:r>
           </a:p>
         </p:txBody>
@@ -13168,7 +13412,7 @@
             <a:r>
               <a:rPr sz="1100" b="1">
                 <a:solidFill>
-                  <a:srgbClr val="27A6C4"/>
+                  <a:srgbClr val="5C6679"/>
                 </a:solidFill>
                 <a:latin typeface="Microsoft JhengHei"/>
                 <a:ea typeface="Microsoft JhengHei"/>
@@ -13185,7 +13429,7 @@
                 <a:ea typeface="Microsoft JhengHei"/>
                 <a:cs typeface="Microsoft JhengHei"/>
               </a:rPr>
-              <a:t>本公司已要求系統委外廠商重新檢視造成資安疑慮因子並加以防範，同時持續針對系統委外廠商加強監控。</a:t>
+              <a:t>持續提升資安防禦，強化監控與防護層級。</a:t>
             </a:r>
           </a:p>
         </p:txBody>
@@ -13387,7 +13631,7 @@
             <a:avLst/>
           </a:prstGeom>
           <a:solidFill>
-            <a:srgbClr val="E63946"/>
+            <a:srgbClr val="27A6C4"/>
           </a:solidFill>
           <a:ln>
             <a:noFill/>
@@ -13448,7 +13692,7 @@
                 <a:ea typeface="Microsoft JhengHei"/>
                 <a:cs typeface="Microsoft JhengHei"/>
               </a:rPr>
-              <a:t>友訊 </a:t>
+              <a:t>柏文 </a:t>
             </a:r>
             <a:r>
               <a:rPr sz="1300" b="0">
@@ -13459,7 +13703,7 @@
                 <a:ea typeface="Microsoft JhengHei"/>
                 <a:cs typeface="Microsoft JhengHei"/>
               </a:rPr>
-              <a:t>2332</a:t>
+              <a:t>8462</a:t>
             </a:r>
           </a:p>
         </p:txBody>
@@ -13479,7 +13723,7 @@
             <a:avLst/>
           </a:prstGeom>
           <a:solidFill>
-            <a:srgbClr val="E63946"/>
+            <a:srgbClr val="27A6C4"/>
           </a:solidFill>
           <a:ln>
             <a:noFill/>
@@ -13540,7 +13784,7 @@
                 <a:ea typeface="Microsoft JhengHei"/>
                 <a:cs typeface="Microsoft JhengHei"/>
               </a:rPr>
-              <a:t>駭客攻擊</a:t>
+              <a:t>個資外洩</a:t>
             </a:r>
           </a:p>
         </p:txBody>
@@ -13575,7 +13819,7 @@
             <a:r>
               <a:rPr sz="1100" b="1">
                 <a:solidFill>
-                  <a:srgbClr val="E63946"/>
+                  <a:srgbClr val="27A6C4"/>
                 </a:solidFill>
                 <a:latin typeface="Microsoft JhengHei"/>
                 <a:ea typeface="Microsoft JhengHei"/>
@@ -13592,7 +13836,7 @@
                 <a:ea typeface="Microsoft JhengHei"/>
                 <a:cs typeface="Microsoft JhengHei"/>
               </a:rPr>
-              <a:t>本公司網站監控中發現登入記錄異常，查知外部攻擊者利用既有登入機制，以大量帳號密碼進行網站登入驗證…</a:t>
+              <a:t>本公司接獲系統委外廠商通知其對外服務系統遭自動化攻擊，並對客戶資料表分頁擷取，其中部分涉及本公司…</a:t>
             </a:r>
           </a:p>
         </p:txBody>
@@ -13627,7 +13871,7 @@
             <a:r>
               <a:rPr sz="1100" b="1">
                 <a:solidFill>
-                  <a:srgbClr val="E63946"/>
+                  <a:srgbClr val="27A6C4"/>
                 </a:solidFill>
                 <a:latin typeface="Microsoft JhengHei"/>
                 <a:ea typeface="Microsoft JhengHei"/>
@@ -13644,7 +13888,7 @@
                 <a:ea typeface="Microsoft JhengHei"/>
                 <a:cs typeface="Microsoft JhengHei"/>
               </a:rPr>
-              <a:t>(1)強化網站登入驗證、存取控制及異常行為偵測機制。(2)強化網頁應用程式防火牆，降低大量或異常登入嘗試之可行性。(3)…</a:t>
+              <a:t>本公司已要求系統委外廠商重新檢視造成資安疑慮因子並加以防範，同時持續針對系統委外廠商加強監控。</a:t>
             </a:r>
           </a:p>
         </p:txBody>
@@ -13771,7 +14015,7 @@
                 <a:ea typeface="Microsoft JhengHei"/>
                 <a:cs typeface="Microsoft JhengHei"/>
               </a:rPr>
-              <a:t>長榮航 </a:t>
+              <a:t>友訊 </a:t>
             </a:r>
             <a:r>
               <a:rPr sz="1300" b="0">
@@ -13782,7 +14026,7 @@
                 <a:ea typeface="Microsoft JhengHei"/>
                 <a:cs typeface="Microsoft JhengHei"/>
               </a:rPr>
-              <a:t>2618</a:t>
+              <a:t>2332</a:t>
             </a:r>
           </a:p>
         </p:txBody>
@@ -13915,7 +14159,7 @@
                 <a:ea typeface="Microsoft JhengHei"/>
                 <a:cs typeface="Microsoft JhengHei"/>
               </a:rPr>
-              <a:t>本公司發現有不明人士透過惡意IP入侵本公司內部資訊環境，取得員工姓名與公務聯繫資訊。</a:t>
+              <a:t>本公司網站監控中發現登入記錄異常，查知外部攻擊者利用既有登入機制，以大量帳號密碼進行網站登入驗證…</a:t>
             </a:r>
           </a:p>
         </p:txBody>
@@ -13967,7 +14211,7 @@
                 <a:ea typeface="Microsoft JhengHei"/>
                 <a:cs typeface="Microsoft JhengHei"/>
               </a:rPr>
-              <a:t>本公司已重新檢視可能造成資安疑慮的因子並加以防範，同時持續加強監控。</a:t>
+              <a:t>(1)強化網站登入驗證、存取控制及異常行為偵測機制。(2)強化網頁應用程式防火牆，降低大量或異常登入嘗試之可行性。(3)…</a:t>
             </a:r>
           </a:p>
         </p:txBody>
@@ -14094,7 +14338,7 @@
                 <a:ea typeface="Microsoft JhengHei"/>
                 <a:cs typeface="Microsoft JhengHei"/>
               </a:rPr>
-              <a:t>長榮航太 </a:t>
+              <a:t>長榮航 </a:t>
             </a:r>
             <a:r>
               <a:rPr sz="1300" b="0">
@@ -14105,7 +14349,7 @@
                 <a:ea typeface="Microsoft JhengHei"/>
                 <a:cs typeface="Microsoft JhengHei"/>
               </a:rPr>
-              <a:t>2645</a:t>
+              <a:t>2618</a:t>
             </a:r>
           </a:p>
         </p:txBody>
@@ -14238,7 +14482,7 @@
                 <a:ea typeface="Microsoft JhengHei"/>
                 <a:cs typeface="Microsoft JhengHei"/>
               </a:rPr>
-              <a:t>本公司發現部分內部資訊系統遭受網路攻擊。</a:t>
+              <a:t>本公司發現有不明人士透過惡意IP入侵本公司內部資訊環境，取得員工姓名與公務聯繫資訊。</a:t>
             </a:r>
           </a:p>
         </p:txBody>
@@ -14290,7 +14534,7 @@
                 <a:ea typeface="Microsoft JhengHei"/>
                 <a:cs typeface="Microsoft JhengHei"/>
               </a:rPr>
-              <a:t>本公司將持續監控公司整體資訊系統運作狀況，並檢討強化現有資安防護措施，以確保資訊安全。</a:t>
+              <a:t>本公司已重新檢視可能造成資安疑慮的因子並加以防範，同時持續加強監控。</a:t>
             </a:r>
           </a:p>
         </p:txBody>
@@ -14356,7 +14600,7 @@
             <a:avLst/>
           </a:prstGeom>
           <a:solidFill>
-            <a:srgbClr val="F4A261"/>
+            <a:srgbClr val="E63946"/>
           </a:solidFill>
           <a:ln>
             <a:noFill/>
@@ -14417,7 +14661,7 @@
                 <a:ea typeface="Microsoft JhengHei"/>
                 <a:cs typeface="Microsoft JhengHei"/>
               </a:rPr>
-              <a:t>崴寶 </a:t>
+              <a:t>長榮航太 </a:t>
             </a:r>
             <a:r>
               <a:rPr sz="1300" b="0">
@@ -14428,7 +14672,7 @@
                 <a:ea typeface="Microsoft JhengHei"/>
                 <a:cs typeface="Microsoft JhengHei"/>
               </a:rPr>
-              <a:t>7744</a:t>
+              <a:t>2645</a:t>
             </a:r>
           </a:p>
         </p:txBody>
@@ -14448,7 +14692,7 @@
             <a:avLst/>
           </a:prstGeom>
           <a:solidFill>
-            <a:srgbClr val="F4A261"/>
+            <a:srgbClr val="E63946"/>
           </a:solidFill>
           <a:ln>
             <a:noFill/>
@@ -14509,7 +14753,7 @@
                 <a:ea typeface="Microsoft JhengHei"/>
                 <a:cs typeface="Microsoft JhengHei"/>
               </a:rPr>
-              <a:t>勒索病毒/加密</a:t>
+              <a:t>駭客攻擊</a:t>
             </a:r>
           </a:p>
         </p:txBody>
@@ -14544,7 +14788,7 @@
             <a:r>
               <a:rPr sz="1100" b="1">
                 <a:solidFill>
-                  <a:srgbClr val="F4A261"/>
+                  <a:srgbClr val="E63946"/>
                 </a:solidFill>
                 <a:latin typeface="Microsoft JhengHei"/>
                 <a:ea typeface="Microsoft JhengHei"/>
@@ -14561,7 +14805,7 @@
                 <a:ea typeface="Microsoft JhengHei"/>
                 <a:cs typeface="Microsoft JhengHei"/>
               </a:rPr>
-              <a:t>本公司於115年9月14日上午發現資訊系統遭駭客入侵，部分系統資料遭加密鎖定。本公司立即啟動資安…</a:t>
+              <a:t>本公司發現部分內部資訊系統遭受網路攻擊。</a:t>
             </a:r>
           </a:p>
         </p:txBody>
@@ -14596,7 +14840,7 @@
             <a:r>
               <a:rPr sz="1100" b="1">
                 <a:solidFill>
-                  <a:srgbClr val="F4A261"/>
+                  <a:srgbClr val="E63946"/>
                 </a:solidFill>
                 <a:latin typeface="Microsoft JhengHei"/>
                 <a:ea typeface="Microsoft JhengHei"/>
@@ -14613,7 +14857,7 @@
                 <a:ea typeface="Microsoft JhengHei"/>
                 <a:cs typeface="Microsoft JhengHei"/>
               </a:rPr>
-              <a:t>本公司將持續配合專業資安團隊進行事件調查與監控，並加強資訊安全管理措施，包括提升端點防護機制、強化網路監控能力、落實帳號…</a:t>
+              <a:t>本公司將持續監控公司整體資訊系統運作狀況，並檢討強化現有資安防護措施，以確保資訊安全。</a:t>
             </a:r>
           </a:p>
         </p:txBody>
@@ -14815,7 +15059,7 @@
             <a:avLst/>
           </a:prstGeom>
           <a:solidFill>
-            <a:srgbClr val="E63946"/>
+            <a:srgbClr val="F4A261"/>
           </a:solidFill>
           <a:ln>
             <a:noFill/>
@@ -14876,7 +15120,7 @@
                 <a:ea typeface="Microsoft JhengHei"/>
                 <a:cs typeface="Microsoft JhengHei"/>
               </a:rPr>
-              <a:t>達爾膚 </a:t>
+              <a:t>崴寶 </a:t>
             </a:r>
             <a:r>
               <a:rPr sz="1300" b="0">
@@ -14887,7 +15131,7 @@
                 <a:ea typeface="Microsoft JhengHei"/>
                 <a:cs typeface="Microsoft JhengHei"/>
               </a:rPr>
-              <a:t>6523</a:t>
+              <a:t>7744</a:t>
             </a:r>
           </a:p>
         </p:txBody>
@@ -14907,7 +15151,7 @@
             <a:avLst/>
           </a:prstGeom>
           <a:solidFill>
-            <a:srgbClr val="E63946"/>
+            <a:srgbClr val="F4A261"/>
           </a:solidFill>
           <a:ln>
             <a:noFill/>
@@ -14968,7 +15212,7 @@
                 <a:ea typeface="Microsoft JhengHei"/>
                 <a:cs typeface="Microsoft JhengHei"/>
               </a:rPr>
-              <a:t>駭客攻擊</a:t>
+              <a:t>勒索病毒/加密</a:t>
             </a:r>
           </a:p>
         </p:txBody>
@@ -15003,7 +15247,7 @@
             <a:r>
               <a:rPr sz="1100" b="1">
                 <a:solidFill>
-                  <a:srgbClr val="E63946"/>
+                  <a:srgbClr val="F4A261"/>
                 </a:solidFill>
                 <a:latin typeface="Microsoft JhengHei"/>
                 <a:ea typeface="Microsoft JhengHei"/>
@@ -15020,7 +15264,7 @@
                 <a:ea typeface="Microsoft JhengHei"/>
                 <a:cs typeface="Microsoft JhengHei"/>
               </a:rPr>
-              <a:t>本公司部分內部資訊系統遭受網路攻擊事件，初步評估對公司營運無重大影響。</a:t>
+              <a:t>本公司於115年9月14日上午發現資訊系統遭駭客入侵，部分系統資料遭加密鎖定。本公司立即啟動資安…</a:t>
             </a:r>
           </a:p>
         </p:txBody>
@@ -15055,7 +15299,7 @@
             <a:r>
               <a:rPr sz="1100" b="1">
                 <a:solidFill>
-                  <a:srgbClr val="E63946"/>
+                  <a:srgbClr val="F4A261"/>
                 </a:solidFill>
                 <a:latin typeface="Microsoft JhengHei"/>
                 <a:ea typeface="Microsoft JhengHei"/>
@@ -15072,7 +15316,7 @@
                 <a:ea typeface="Microsoft JhengHei"/>
                 <a:cs typeface="Microsoft JhengHei"/>
               </a:rPr>
-              <a:t>本公司將持續強化網路與資訊基礎架構之安全管控，以確保資訊安全。</a:t>
+              <a:t>本公司將持續配合專業資安團隊進行事件調查與監控，並加強資訊安全管理措施，包括提升端點防護機制、強化網路監控能力、落實帳號…</a:t>
             </a:r>
           </a:p>
         </p:txBody>
@@ -15199,7 +15443,7 @@
                 <a:ea typeface="Microsoft JhengHei"/>
                 <a:cs typeface="Microsoft JhengHei"/>
               </a:rPr>
-              <a:t>大車隊 </a:t>
+              <a:t>達爾膚 </a:t>
             </a:r>
             <a:r>
               <a:rPr sz="1300" b="0">
@@ -15210,7 +15454,7 @@
                 <a:ea typeface="Microsoft JhengHei"/>
                 <a:cs typeface="Microsoft JhengHei"/>
               </a:rPr>
-              <a:t>2640</a:t>
+              <a:t>6523</a:t>
             </a:r>
           </a:p>
         </p:txBody>
@@ -15343,7 +15587,7 @@
                 <a:ea typeface="Microsoft JhengHei"/>
                 <a:cs typeface="Microsoft JhengHei"/>
               </a:rPr>
-              <a:t>本公司重要子公司全球商務科技股份有限公司於今日發現部分資訊系統遭受網路攻擊，已立即啟動資安應變機…</a:t>
+              <a:t>本公司部分內部資訊系統遭受網路攻擊事件，初步評估對公司營運無重大影響。</a:t>
             </a:r>
           </a:p>
         </p:txBody>
@@ -15357,6 +15601,329 @@
         <p:spPr>
           <a:xfrm>
             <a:off x="6400800" y="2926080"/>
+            <a:ext cx="4937760" cy="713232"/>
+          </a:xfrm>
+          <a:prstGeom prst="rect">
+            <a:avLst/>
+          </a:prstGeom>
+          <a:noFill/>
+        </p:spPr>
+        <p:txBody>
+          <a:bodyPr wrap="square" anchor="t" lIns="0" rIns="0" tIns="0" bIns="0">
+            <a:spAutoFit/>
+          </a:bodyPr>
+          <a:lstStyle/>
+          <a:p>
+            <a:pPr algn="l">
+              <a:lnSpc>
+                <a:spcPts val="1500"/>
+              </a:lnSpc>
+            </a:pPr>
+            <a:r>
+              <a:rPr sz="1100" b="1">
+                <a:solidFill>
+                  <a:srgbClr val="E63946"/>
+                </a:solidFill>
+                <a:latin typeface="Microsoft JhengHei"/>
+                <a:ea typeface="Microsoft JhengHei"/>
+                <a:cs typeface="Microsoft JhengHei"/>
+              </a:rPr>
+              <a:t>因應　</a:t>
+            </a:r>
+            <a:r>
+              <a:rPr sz="1100" b="0">
+                <a:solidFill>
+                  <a:srgbClr val="1A2233"/>
+                </a:solidFill>
+                <a:latin typeface="Microsoft JhengHei"/>
+                <a:ea typeface="Microsoft JhengHei"/>
+                <a:cs typeface="Microsoft JhengHei"/>
+              </a:rPr>
+              <a:t>本公司將持續強化網路與資訊基礎架構之安全管控，以確保資訊安全。</a:t>
+            </a:r>
+          </a:p>
+        </p:txBody>
+      </p:sp>
+      <p:sp>
+        <p:nvSpPr>
+          <p:cNvPr id="19" name="Rounded Rectangle 18"/>
+          <p:cNvSpPr/>
+          <p:nvPr/>
+        </p:nvSpPr>
+        <p:spPr>
+          <a:xfrm>
+            <a:off x="548640" y="3886200"/>
+            <a:ext cx="5394960" cy="2148840"/>
+          </a:xfrm>
+          <a:prstGeom prst="roundRect">
+            <a:avLst/>
+          </a:prstGeom>
+          <a:solidFill>
+            <a:srgbClr val="FFFFFF"/>
+          </a:solidFill>
+          <a:ln w="12700">
+            <a:solidFill>
+              <a:srgbClr val="DDE3EE"/>
+            </a:solidFill>
+          </a:ln>
+          <a:effectLst/>
+        </p:spPr>
+        <p:style>
+          <a:lnRef idx="1">
+            <a:schemeClr val="accent1"/>
+          </a:lnRef>
+          <a:fillRef idx="3">
+            <a:schemeClr val="accent1"/>
+          </a:fillRef>
+          <a:effectRef idx="2">
+            <a:schemeClr val="accent1"/>
+          </a:effectRef>
+          <a:fontRef idx="minor">
+            <a:schemeClr val="lt1"/>
+          </a:fontRef>
+        </p:style>
+        <p:txBody>
+          <a:bodyPr rtlCol="0" anchor="ctr"/>
+          <a:lstStyle/>
+          <a:p>
+            <a:pPr algn="ctr"/>
+          </a:p>
+        </p:txBody>
+      </p:sp>
+      <p:sp>
+        <p:nvSpPr>
+          <p:cNvPr id="20" name="Rectangle 19"/>
+          <p:cNvSpPr/>
+          <p:nvPr/>
+        </p:nvSpPr>
+        <p:spPr>
+          <a:xfrm>
+            <a:off x="548640" y="3886200"/>
+            <a:ext cx="5394960" cy="109728"/>
+          </a:xfrm>
+          <a:prstGeom prst="rect">
+            <a:avLst/>
+          </a:prstGeom>
+          <a:solidFill>
+            <a:srgbClr val="E63946"/>
+          </a:solidFill>
+          <a:ln>
+            <a:noFill/>
+          </a:ln>
+          <a:effectLst/>
+        </p:spPr>
+        <p:style>
+          <a:lnRef idx="1">
+            <a:schemeClr val="accent1"/>
+          </a:lnRef>
+          <a:fillRef idx="3">
+            <a:schemeClr val="accent1"/>
+          </a:fillRef>
+          <a:effectRef idx="2">
+            <a:schemeClr val="accent1"/>
+          </a:effectRef>
+          <a:fontRef idx="minor">
+            <a:schemeClr val="lt1"/>
+          </a:fontRef>
+        </p:style>
+        <p:txBody>
+          <a:bodyPr rtlCol="0" anchor="ctr"/>
+          <a:lstStyle/>
+          <a:p>
+            <a:pPr algn="ctr"/>
+          </a:p>
+        </p:txBody>
+      </p:sp>
+      <p:sp>
+        <p:nvSpPr>
+          <p:cNvPr id="21" name="TextBox 20"/>
+          <p:cNvSpPr txBox="1"/>
+          <p:nvPr/>
+        </p:nvSpPr>
+        <p:spPr>
+          <a:xfrm>
+            <a:off x="777240" y="4105656"/>
+            <a:ext cx="3657600" cy="365760"/>
+          </a:xfrm>
+          <a:prstGeom prst="rect">
+            <a:avLst/>
+          </a:prstGeom>
+          <a:noFill/>
+        </p:spPr>
+        <p:txBody>
+          <a:bodyPr wrap="square" anchor="ctr" lIns="0" rIns="0" tIns="0" bIns="0">
+            <a:spAutoFit/>
+          </a:bodyPr>
+          <a:lstStyle/>
+          <a:p>
+            <a:pPr algn="l"/>
+            <a:r>
+              <a:rPr sz="1600" b="1">
+                <a:solidFill>
+                  <a:srgbClr val="1A2233"/>
+                </a:solidFill>
+                <a:latin typeface="Microsoft JhengHei"/>
+                <a:ea typeface="Microsoft JhengHei"/>
+                <a:cs typeface="Microsoft JhengHei"/>
+              </a:rPr>
+              <a:t>大車隊 </a:t>
+            </a:r>
+            <a:r>
+              <a:rPr sz="1300" b="0">
+                <a:solidFill>
+                  <a:srgbClr val="5C6679"/>
+                </a:solidFill>
+                <a:latin typeface="Microsoft JhengHei"/>
+                <a:ea typeface="Microsoft JhengHei"/>
+                <a:cs typeface="Microsoft JhengHei"/>
+              </a:rPr>
+              <a:t>2640</a:t>
+            </a:r>
+          </a:p>
+        </p:txBody>
+      </p:sp>
+      <p:sp>
+        <p:nvSpPr>
+          <p:cNvPr id="22" name="Rounded Rectangle 21"/>
+          <p:cNvSpPr/>
+          <p:nvPr/>
+        </p:nvSpPr>
+        <p:spPr>
+          <a:xfrm>
+            <a:off x="4526280" y="4123944"/>
+            <a:ext cx="1234440" cy="347472"/>
+          </a:xfrm>
+          <a:prstGeom prst="roundRect">
+            <a:avLst/>
+          </a:prstGeom>
+          <a:solidFill>
+            <a:srgbClr val="E63946"/>
+          </a:solidFill>
+          <a:ln>
+            <a:noFill/>
+          </a:ln>
+          <a:effectLst/>
+        </p:spPr>
+        <p:style>
+          <a:lnRef idx="1">
+            <a:schemeClr val="accent1"/>
+          </a:lnRef>
+          <a:fillRef idx="3">
+            <a:schemeClr val="accent1"/>
+          </a:fillRef>
+          <a:effectRef idx="2">
+            <a:schemeClr val="accent1"/>
+          </a:effectRef>
+          <a:fontRef idx="minor">
+            <a:schemeClr val="lt1"/>
+          </a:fontRef>
+        </p:style>
+        <p:txBody>
+          <a:bodyPr rtlCol="0" anchor="ctr"/>
+          <a:lstStyle/>
+          <a:p>
+            <a:pPr algn="ctr"/>
+          </a:p>
+        </p:txBody>
+      </p:sp>
+      <p:sp>
+        <p:nvSpPr>
+          <p:cNvPr id="23" name="TextBox 22"/>
+          <p:cNvSpPr txBox="1"/>
+          <p:nvPr/>
+        </p:nvSpPr>
+        <p:spPr>
+          <a:xfrm>
+            <a:off x="4526280" y="4123944"/>
+            <a:ext cx="1234440" cy="347472"/>
+          </a:xfrm>
+          <a:prstGeom prst="rect">
+            <a:avLst/>
+          </a:prstGeom>
+          <a:noFill/>
+        </p:spPr>
+        <p:txBody>
+          <a:bodyPr wrap="square" anchor="ctr" lIns="0" rIns="0" tIns="0" bIns="0">
+            <a:spAutoFit/>
+          </a:bodyPr>
+          <a:lstStyle/>
+          <a:p>
+            <a:pPr algn="ctr"/>
+            <a:r>
+              <a:rPr sz="1050" b="1">
+                <a:solidFill>
+                  <a:srgbClr val="FFFFFF"/>
+                </a:solidFill>
+                <a:latin typeface="Microsoft JhengHei"/>
+                <a:ea typeface="Microsoft JhengHei"/>
+                <a:cs typeface="Microsoft JhengHei"/>
+              </a:rPr>
+              <a:t>駭客攻擊</a:t>
+            </a:r>
+          </a:p>
+        </p:txBody>
+      </p:sp>
+      <p:sp>
+        <p:nvSpPr>
+          <p:cNvPr id="24" name="TextBox 23"/>
+          <p:cNvSpPr txBox="1"/>
+          <p:nvPr/>
+        </p:nvSpPr>
+        <p:spPr>
+          <a:xfrm>
+            <a:off x="777240" y="4599432"/>
+            <a:ext cx="4937760" cy="640080"/>
+          </a:xfrm>
+          <a:prstGeom prst="rect">
+            <a:avLst/>
+          </a:prstGeom>
+          <a:noFill/>
+        </p:spPr>
+        <p:txBody>
+          <a:bodyPr wrap="square" anchor="t" lIns="0" rIns="0" tIns="0" bIns="0">
+            <a:spAutoFit/>
+          </a:bodyPr>
+          <a:lstStyle/>
+          <a:p>
+            <a:pPr algn="l">
+              <a:lnSpc>
+                <a:spcPts val="1500"/>
+              </a:lnSpc>
+            </a:pPr>
+            <a:r>
+              <a:rPr sz="1100" b="1">
+                <a:solidFill>
+                  <a:srgbClr val="E63946"/>
+                </a:solidFill>
+                <a:latin typeface="Microsoft JhengHei"/>
+                <a:ea typeface="Microsoft JhengHei"/>
+                <a:cs typeface="Microsoft JhengHei"/>
+              </a:rPr>
+              <a:t>緣由　</a:t>
+            </a:r>
+            <a:r>
+              <a:rPr sz="1100" b="0">
+                <a:solidFill>
+                  <a:srgbClr val="1A2233"/>
+                </a:solidFill>
+                <a:latin typeface="Microsoft JhengHei"/>
+                <a:ea typeface="Microsoft JhengHei"/>
+                <a:cs typeface="Microsoft JhengHei"/>
+              </a:rPr>
+              <a:t>本公司重要子公司全球商務科技股份有限公司於今日發現部分資訊系統遭受網路攻擊，已立即啟動資安應變機…</a:t>
+            </a:r>
+          </a:p>
+        </p:txBody>
+      </p:sp>
+      <p:sp>
+        <p:nvSpPr>
+          <p:cNvPr id="25" name="TextBox 24"/>
+          <p:cNvSpPr txBox="1"/>
+          <p:nvPr/>
+        </p:nvSpPr>
+        <p:spPr>
+          <a:xfrm>
+            <a:off x="777240" y="5257800"/>
             <a:ext cx="4937760" cy="713232"/>
           </a:xfrm>
           <a:prstGeom prst="rect">

--- a/資安事件因應分析.pptx
+++ b/資安事件因應分析.pptx
@@ -13,7 +13,6 @@
     <p:sldId id="261" r:id="rId12"/>
     <p:sldId id="262" r:id="rId13"/>
     <p:sldId id="263" r:id="rId14"/>
-    <p:sldId id="264" r:id="rId15"/>
   </p:sldIdLst>
   <p:sldSz cx="12191695" cy="6858000" type="screen4x3"/>
   <p:notesSz cx="6858000" cy="9144000"/>
@@ -151,20 +150,12 @@
             <c:idx val="1"/>
             <c:spPr>
               <a:solidFill>
-                <a:srgbClr val="F4A261"/>
+                <a:srgbClr val="27A6C4"/>
               </a:solidFill>
             </c:spPr>
           </c:dPt>
           <c:dPt>
             <c:idx val="2"/>
-            <c:spPr>
-              <a:solidFill>
-                <a:srgbClr val="27A6C4"/>
-              </a:solidFill>
-            </c:spPr>
-          </c:dPt>
-          <c:dPt>
-            <c:idx val="3"/>
             <c:spPr>
               <a:solidFill>
                 <a:srgbClr val="5C6679"/>
@@ -173,19 +164,16 @@
           </c:dPt>
           <c:cat>
             <c:strRef>
-              <c:f>Sheet1!$A$2:$A$5</c:f>
+              <c:f>Sheet1!$A$2:$A$4</c:f>
               <c:strCache>
-                <c:ptCount val="4"/>
+                <c:ptCount val="3"/>
                 <c:pt idx="0">
                   <c:v>駭客攻擊</c:v>
                 </c:pt>
                 <c:pt idx="1">
-                  <c:v>勒索病毒/加密</c:v>
+                  <c:v>個資外洩</c:v>
                 </c:pt>
                 <c:pt idx="2">
-                  <c:v>個資外洩</c:v>
-                </c:pt>
-                <c:pt idx="3">
                   <c:v>其他</c:v>
                 </c:pt>
               </c:strCache>
@@ -193,20 +181,17 @@
           </c:cat>
           <c:val>
             <c:numRef>
-              <c:f>Sheet1!$B$2:$B$5</c:f>
+              <c:f>Sheet1!$B$2:$B$4</c:f>
               <c:numCache>
                 <c:formatCode>General</c:formatCode>
-                <c:ptCount val="4"/>
+                <c:ptCount val="3"/>
                 <c:pt idx="0">
-                  <c:v>6</c:v>
+                  <c:v>4</c:v>
                 </c:pt>
                 <c:pt idx="1">
-                  <c:v>1</c:v>
+                  <c:v>4</c:v>
                 </c:pt>
                 <c:pt idx="2">
-                  <c:v>4</c:v>
-                </c:pt>
-                <c:pt idx="3">
                   <c:v>4</c:v>
                 </c:pt>
               </c:numCache>
@@ -3544,7 +3529,7 @@
                 <a:ea typeface="Microsoft JhengHei"/>
                 <a:cs typeface="Microsoft JhengHei"/>
               </a:rPr>
-              <a:t>資料期間 2026-09-09 ~ 2026-10-09　｜　MOPS 重大訊息全文檢索　｜　15 家公司</a:t>
+              <a:t>資料期間 2026-09-15 ~ 2026-10-15　｜　MOPS 重大訊息全文檢索　｜　12 家公司</a:t>
             </a:r>
           </a:p>
         </p:txBody>
@@ -3761,7 +3746,7 @@
                 <a:ea typeface="Microsoft JhengHei"/>
                 <a:cs typeface="Microsoft JhengHei"/>
               </a:rPr>
-              <a:t>資料期間內 MOPS 揭露之 15 起資安相關重大訊息</a:t>
+              <a:t>資料期間內 MOPS 揭露之 12 起資安相關重大訊息</a:t>
             </a:r>
           </a:p>
         </p:txBody>
@@ -3844,7 +3829,7 @@
                 <a:ea typeface="Microsoft JhengHei"/>
                 <a:cs typeface="Microsoft JhengHei"/>
               </a:rPr>
-              <a:t>15</a:t>
+              <a:t>12</a:t>
             </a:r>
           </a:p>
         </p:txBody>
@@ -3964,7 +3949,7 @@
                 <a:ea typeface="Microsoft JhengHei"/>
                 <a:cs typeface="Microsoft JhengHei"/>
               </a:rPr>
-              <a:t>4</a:t>
+              <a:t>3</a:t>
             </a:r>
           </a:p>
         </p:txBody>
@@ -4151,7 +4136,7 @@
                 <a:gridCol w="2286000"/>
                 <a:gridCol w="5120640"/>
               </a:tblGrid>
-              <a:tr h="222885">
+              <a:tr h="274320">
                 <a:tc>
                   <a:txBody>
                     <a:bodyPr/>
@@ -4273,7 +4258,7 @@
                   </a:tcPr>
                 </a:tc>
               </a:tr>
-              <a:tr h="222885">
+              <a:tr h="274320">
                 <a:tc>
                   <a:txBody>
                     <a:bodyPr/>
@@ -4395,7 +4380,7 @@
                   </a:tcPr>
                 </a:tc>
               </a:tr>
-              <a:tr h="222885">
+              <a:tr h="274320">
                 <a:tc>
                   <a:txBody>
                     <a:bodyPr/>
@@ -4517,7 +4502,7 @@
                   </a:tcPr>
                 </a:tc>
               </a:tr>
-              <a:tr h="222885">
+              <a:tr h="274320">
                 <a:tc>
                   <a:txBody>
                     <a:bodyPr/>
@@ -4639,7 +4624,7 @@
                   </a:tcPr>
                 </a:tc>
               </a:tr>
-              <a:tr h="222885">
+              <a:tr h="274320">
                 <a:tc>
                   <a:txBody>
                     <a:bodyPr/>
@@ -4761,7 +4746,7 @@
                   </a:tcPr>
                 </a:tc>
               </a:tr>
-              <a:tr h="222885">
+              <a:tr h="274320">
                 <a:tc>
                   <a:txBody>
                     <a:bodyPr/>
@@ -4883,7 +4868,7 @@
                   </a:tcPr>
                 </a:tc>
               </a:tr>
-              <a:tr h="222885">
+              <a:tr h="274320">
                 <a:tc>
                   <a:txBody>
                     <a:bodyPr/>
@@ -5005,7 +4990,7 @@
                   </a:tcPr>
                 </a:tc>
               </a:tr>
-              <a:tr h="222885">
+              <a:tr h="274320">
                 <a:tc>
                   <a:txBody>
                     <a:bodyPr/>
@@ -5127,7 +5112,7 @@
                   </a:tcPr>
                 </a:tc>
               </a:tr>
-              <a:tr h="222885">
+              <a:tr h="274320">
                 <a:tc>
                   <a:txBody>
                     <a:bodyPr/>
@@ -5249,7 +5234,7 @@
                   </a:tcPr>
                 </a:tc>
               </a:tr>
-              <a:tr h="222885">
+              <a:tr h="274320">
                 <a:tc>
                   <a:txBody>
                     <a:bodyPr/>
@@ -5371,7 +5356,7 @@
                   </a:tcPr>
                 </a:tc>
               </a:tr>
-              <a:tr h="222885">
+              <a:tr h="274320">
                 <a:tc>
                   <a:txBody>
                     <a:bodyPr/>
@@ -5493,7 +5478,7 @@
                   </a:tcPr>
                 </a:tc>
               </a:tr>
-              <a:tr h="222885">
+              <a:tr h="274320">
                 <a:tc>
                   <a:txBody>
                     <a:bodyPr/>
@@ -5615,7 +5600,7 @@
                   </a:tcPr>
                 </a:tc>
               </a:tr>
-              <a:tr h="222885">
+              <a:tr h="274320">
                 <a:tc>
                   <a:txBody>
                     <a:bodyPr/>
@@ -5737,372 +5722,6 @@
                   </a:tcPr>
                 </a:tc>
               </a:tr>
-              <a:tr h="222885">
-                <a:tc>
-                  <a:txBody>
-                    <a:bodyPr/>
-                    <a:lstStyle/>
-                    <a:p>
-                      <a:r>
-                        <a:rPr sz="1150" b="0">
-                          <a:solidFill>
-                            <a:srgbClr val="1A2233"/>
-                          </a:solidFill>
-                          <a:latin typeface="Microsoft JhengHei"/>
-                          <a:ea typeface="Microsoft JhengHei"/>
-                          <a:cs typeface="Microsoft JhengHei"/>
-                        </a:rPr>
-                        <a:t>崴寶</a:t>
-                      </a:r>
-                    </a:p>
-                  </a:txBody>
-                  <a:tcPr anchor="ctr" marL="73152" marT="9144" marB="9144">
-                    <a:solidFill>
-                      <a:srgbClr val="FFFFFF"/>
-                    </a:solidFill>
-                  </a:tcPr>
-                </a:tc>
-                <a:tc>
-                  <a:txBody>
-                    <a:bodyPr/>
-                    <a:lstStyle/>
-                    <a:p>
-                      <a:r>
-                        <a:rPr sz="1150" b="0">
-                          <a:solidFill>
-                            <a:srgbClr val="1A2233"/>
-                          </a:solidFill>
-                          <a:latin typeface="Microsoft JhengHei"/>
-                          <a:ea typeface="Microsoft JhengHei"/>
-                          <a:cs typeface="Microsoft JhengHei"/>
-                        </a:rPr>
-                        <a:t>7744</a:t>
-                      </a:r>
-                    </a:p>
-                  </a:txBody>
-                  <a:tcPr anchor="ctr" marL="73152" marT="9144" marB="9144">
-                    <a:solidFill>
-                      <a:srgbClr val="FFFFFF"/>
-                    </a:solidFill>
-                  </a:tcPr>
-                </a:tc>
-                <a:tc>
-                  <a:txBody>
-                    <a:bodyPr/>
-                    <a:lstStyle/>
-                    <a:p>
-                      <a:r>
-                        <a:rPr sz="1150" b="0">
-                          <a:solidFill>
-                            <a:srgbClr val="1A2233"/>
-                          </a:solidFill>
-                          <a:latin typeface="Microsoft JhengHei"/>
-                          <a:ea typeface="Microsoft JhengHei"/>
-                          <a:cs typeface="Microsoft JhengHei"/>
-                        </a:rPr>
-                        <a:t>09/14</a:t>
-                      </a:r>
-                    </a:p>
-                  </a:txBody>
-                  <a:tcPr anchor="ctr" marL="73152" marT="9144" marB="9144">
-                    <a:solidFill>
-                      <a:srgbClr val="FFFFFF"/>
-                    </a:solidFill>
-                  </a:tcPr>
-                </a:tc>
-                <a:tc>
-                  <a:txBody>
-                    <a:bodyPr/>
-                    <a:lstStyle/>
-                    <a:p>
-                      <a:r>
-                        <a:rPr sz="1150" b="1">
-                          <a:solidFill>
-                            <a:srgbClr val="F4A261"/>
-                          </a:solidFill>
-                          <a:latin typeface="Microsoft JhengHei"/>
-                          <a:ea typeface="Microsoft JhengHei"/>
-                          <a:cs typeface="Microsoft JhengHei"/>
-                        </a:rPr>
-                        <a:t>勒索病毒/加密</a:t>
-                      </a:r>
-                    </a:p>
-                  </a:txBody>
-                  <a:tcPr anchor="ctr" marL="73152" marT="9144" marB="9144">
-                    <a:solidFill>
-                      <a:srgbClr val="FFFFFF"/>
-                    </a:solidFill>
-                  </a:tcPr>
-                </a:tc>
-                <a:tc>
-                  <a:txBody>
-                    <a:bodyPr/>
-                    <a:lstStyle/>
-                    <a:p>
-                      <a:r>
-                        <a:rPr sz="1150" b="0">
-                          <a:solidFill>
-                            <a:srgbClr val="1A2233"/>
-                          </a:solidFill>
-                          <a:latin typeface="Microsoft JhengHei"/>
-                          <a:ea typeface="Microsoft JhengHei"/>
-                          <a:cs typeface="Microsoft JhengHei"/>
-                        </a:rPr>
-                        <a:t>經初步評估，本次資安事件未影響公司工廠生產作業，生產活動均維持正常運…</a:t>
-                      </a:r>
-                    </a:p>
-                  </a:txBody>
-                  <a:tcPr anchor="ctr" marL="73152" marT="9144" marB="9144">
-                    <a:solidFill>
-                      <a:srgbClr val="FFFFFF"/>
-                    </a:solidFill>
-                  </a:tcPr>
-                </a:tc>
-              </a:tr>
-              <a:tr h="222885">
-                <a:tc>
-                  <a:txBody>
-                    <a:bodyPr/>
-                    <a:lstStyle/>
-                    <a:p>
-                      <a:r>
-                        <a:rPr sz="1150" b="0">
-                          <a:solidFill>
-                            <a:srgbClr val="1A2233"/>
-                          </a:solidFill>
-                          <a:latin typeface="Microsoft JhengHei"/>
-                          <a:ea typeface="Microsoft JhengHei"/>
-                          <a:cs typeface="Microsoft JhengHei"/>
-                        </a:rPr>
-                        <a:t>達爾膚</a:t>
-                      </a:r>
-                    </a:p>
-                  </a:txBody>
-                  <a:tcPr anchor="ctr" marL="73152" marT="9144" marB="9144">
-                    <a:solidFill>
-                      <a:srgbClr val="EEF2F9"/>
-                    </a:solidFill>
-                  </a:tcPr>
-                </a:tc>
-                <a:tc>
-                  <a:txBody>
-                    <a:bodyPr/>
-                    <a:lstStyle/>
-                    <a:p>
-                      <a:r>
-                        <a:rPr sz="1150" b="0">
-                          <a:solidFill>
-                            <a:srgbClr val="1A2233"/>
-                          </a:solidFill>
-                          <a:latin typeface="Microsoft JhengHei"/>
-                          <a:ea typeface="Microsoft JhengHei"/>
-                          <a:cs typeface="Microsoft JhengHei"/>
-                        </a:rPr>
-                        <a:t>6523</a:t>
-                      </a:r>
-                    </a:p>
-                  </a:txBody>
-                  <a:tcPr anchor="ctr" marL="73152" marT="9144" marB="9144">
-                    <a:solidFill>
-                      <a:srgbClr val="EEF2F9"/>
-                    </a:solidFill>
-                  </a:tcPr>
-                </a:tc>
-                <a:tc>
-                  <a:txBody>
-                    <a:bodyPr/>
-                    <a:lstStyle/>
-                    <a:p>
-                      <a:r>
-                        <a:rPr sz="1150" b="0">
-                          <a:solidFill>
-                            <a:srgbClr val="1A2233"/>
-                          </a:solidFill>
-                          <a:latin typeface="Microsoft JhengHei"/>
-                          <a:ea typeface="Microsoft JhengHei"/>
-                          <a:cs typeface="Microsoft JhengHei"/>
-                        </a:rPr>
-                        <a:t>09/11</a:t>
-                      </a:r>
-                    </a:p>
-                  </a:txBody>
-                  <a:tcPr anchor="ctr" marL="73152" marT="9144" marB="9144">
-                    <a:solidFill>
-                      <a:srgbClr val="EEF2F9"/>
-                    </a:solidFill>
-                  </a:tcPr>
-                </a:tc>
-                <a:tc>
-                  <a:txBody>
-                    <a:bodyPr/>
-                    <a:lstStyle/>
-                    <a:p>
-                      <a:r>
-                        <a:rPr sz="1150" b="1">
-                          <a:solidFill>
-                            <a:srgbClr val="E63946"/>
-                          </a:solidFill>
-                          <a:latin typeface="Microsoft JhengHei"/>
-                          <a:ea typeface="Microsoft JhengHei"/>
-                          <a:cs typeface="Microsoft JhengHei"/>
-                        </a:rPr>
-                        <a:t>駭客攻擊</a:t>
-                      </a:r>
-                    </a:p>
-                  </a:txBody>
-                  <a:tcPr anchor="ctr" marL="73152" marT="9144" marB="9144">
-                    <a:solidFill>
-                      <a:srgbClr val="EEF2F9"/>
-                    </a:solidFill>
-                  </a:tcPr>
-                </a:tc>
-                <a:tc>
-                  <a:txBody>
-                    <a:bodyPr/>
-                    <a:lstStyle/>
-                    <a:p>
-                      <a:r>
-                        <a:rPr sz="1150" b="0">
-                          <a:solidFill>
-                            <a:srgbClr val="1A2233"/>
-                          </a:solidFill>
-                          <a:latin typeface="Microsoft JhengHei"/>
-                          <a:ea typeface="Microsoft JhengHei"/>
-                          <a:cs typeface="Microsoft JhengHei"/>
-                        </a:rPr>
-                        <a:t>受影響系統非屬公司現行主要營運系統，亦非對外提供服務之系統，目前評估…</a:t>
-                      </a:r>
-                    </a:p>
-                  </a:txBody>
-                  <a:tcPr anchor="ctr" marL="73152" marT="9144" marB="9144">
-                    <a:solidFill>
-                      <a:srgbClr val="EEF2F9"/>
-                    </a:solidFill>
-                  </a:tcPr>
-                </a:tc>
-              </a:tr>
-              <a:tr h="222885">
-                <a:tc>
-                  <a:txBody>
-                    <a:bodyPr/>
-                    <a:lstStyle/>
-                    <a:p>
-                      <a:r>
-                        <a:rPr sz="1150" b="0">
-                          <a:solidFill>
-                            <a:srgbClr val="1A2233"/>
-                          </a:solidFill>
-                          <a:latin typeface="Microsoft JhengHei"/>
-                          <a:ea typeface="Microsoft JhengHei"/>
-                          <a:cs typeface="Microsoft JhengHei"/>
-                        </a:rPr>
-                        <a:t>大車隊</a:t>
-                      </a:r>
-                    </a:p>
-                  </a:txBody>
-                  <a:tcPr anchor="ctr" marL="73152" marT="9144" marB="9144">
-                    <a:solidFill>
-                      <a:srgbClr val="FFFFFF"/>
-                    </a:solidFill>
-                  </a:tcPr>
-                </a:tc>
-                <a:tc>
-                  <a:txBody>
-                    <a:bodyPr/>
-                    <a:lstStyle/>
-                    <a:p>
-                      <a:r>
-                        <a:rPr sz="1150" b="0">
-                          <a:solidFill>
-                            <a:srgbClr val="1A2233"/>
-                          </a:solidFill>
-                          <a:latin typeface="Microsoft JhengHei"/>
-                          <a:ea typeface="Microsoft JhengHei"/>
-                          <a:cs typeface="Microsoft JhengHei"/>
-                        </a:rPr>
-                        <a:t>2640</a:t>
-                      </a:r>
-                    </a:p>
-                  </a:txBody>
-                  <a:tcPr anchor="ctr" marL="73152" marT="9144" marB="9144">
-                    <a:solidFill>
-                      <a:srgbClr val="FFFFFF"/>
-                    </a:solidFill>
-                  </a:tcPr>
-                </a:tc>
-                <a:tc>
-                  <a:txBody>
-                    <a:bodyPr/>
-                    <a:lstStyle/>
-                    <a:p>
-                      <a:r>
-                        <a:rPr sz="1150" b="0">
-                          <a:solidFill>
-                            <a:srgbClr val="1A2233"/>
-                          </a:solidFill>
-                          <a:latin typeface="Microsoft JhengHei"/>
-                          <a:ea typeface="Microsoft JhengHei"/>
-                          <a:cs typeface="Microsoft JhengHei"/>
-                        </a:rPr>
-                        <a:t>09/09</a:t>
-                      </a:r>
-                    </a:p>
-                  </a:txBody>
-                  <a:tcPr anchor="ctr" marL="73152" marT="9144" marB="9144">
-                    <a:solidFill>
-                      <a:srgbClr val="FFFFFF"/>
-                    </a:solidFill>
-                  </a:tcPr>
-                </a:tc>
-                <a:tc>
-                  <a:txBody>
-                    <a:bodyPr/>
-                    <a:lstStyle/>
-                    <a:p>
-                      <a:r>
-                        <a:rPr sz="1150" b="1">
-                          <a:solidFill>
-                            <a:srgbClr val="E63946"/>
-                          </a:solidFill>
-                          <a:latin typeface="Microsoft JhengHei"/>
-                          <a:ea typeface="Microsoft JhengHei"/>
-                          <a:cs typeface="Microsoft JhengHei"/>
-                        </a:rPr>
-                        <a:t>駭客攻擊</a:t>
-                      </a:r>
-                    </a:p>
-                  </a:txBody>
-                  <a:tcPr anchor="ctr" marL="73152" marT="9144" marB="9144">
-                    <a:solidFill>
-                      <a:srgbClr val="FFFFFF"/>
-                    </a:solidFill>
-                  </a:tcPr>
-                </a:tc>
-                <a:tc>
-                  <a:txBody>
-                    <a:bodyPr/>
-                    <a:lstStyle/>
-                    <a:p>
-                      <a:r>
-                        <a:rPr sz="1150" b="0">
-                          <a:solidFill>
-                            <a:srgbClr val="1A2233"/>
-                          </a:solidFill>
-                          <a:latin typeface="Microsoft JhengHei"/>
-                          <a:ea typeface="Microsoft JhengHei"/>
-                          <a:cs typeface="Microsoft JhengHei"/>
-                        </a:rPr>
-                        <a:t>經初步評估，本事件目前尚未對本公司整體營運及財務造成重大影響。</a:t>
-                      </a:r>
-                    </a:p>
-                  </a:txBody>
-                  <a:tcPr anchor="ctr" marL="73152" marT="9144" marB="9144">
-                    <a:solidFill>
-                      <a:srgbClr val="FFFFFF"/>
-                    </a:solidFill>
-                  </a:tcPr>
-                </a:tc>
-              </a:tr>
             </a:tbl>
           </a:graphicData>
         </a:graphic>
@@ -6420,7 +6039,7 @@
                 <a:ea typeface="Microsoft JhengHei"/>
                 <a:cs typeface="Microsoft JhengHei"/>
               </a:rPr>
-              <a:t>6 起</a:t>
+              <a:t>4 起</a:t>
             </a:r>
           </a:p>
         </p:txBody>
@@ -6457,7 +6076,7 @@
                 <a:ea typeface="Microsoft JhengHei"/>
                 <a:cs typeface="Microsoft JhengHei"/>
               </a:rPr>
-              <a:t>神腦、友訊、長榮航、長榮航太、達爾膚、大車隊</a:t>
+              <a:t>神腦、友訊、長榮航、長榮航太</a:t>
             </a:r>
           </a:p>
         </p:txBody>
@@ -6560,7 +6179,7 @@
             <a:avLst/>
           </a:prstGeom>
           <a:solidFill>
-            <a:srgbClr val="F4A261"/>
+            <a:srgbClr val="27A6C4"/>
           </a:solidFill>
           <a:ln>
             <a:noFill/>
@@ -6621,7 +6240,7 @@
                 <a:ea typeface="Microsoft JhengHei"/>
                 <a:cs typeface="Microsoft JhengHei"/>
               </a:rPr>
-              <a:t>勒索病毒/加密</a:t>
+              <a:t>個資外洩</a:t>
             </a:r>
           </a:p>
         </p:txBody>
@@ -6652,13 +6271,13 @@
             <a:r>
               <a:rPr sz="1800" b="1">
                 <a:solidFill>
-                  <a:srgbClr val="F4A261"/>
+                  <a:srgbClr val="27A6C4"/>
                 </a:solidFill>
                 <a:latin typeface="Microsoft JhengHei"/>
                 <a:ea typeface="Microsoft JhengHei"/>
                 <a:cs typeface="Microsoft JhengHei"/>
               </a:rPr>
-              <a:t>1 起</a:t>
+              <a:t>4 起</a:t>
             </a:r>
           </a:p>
         </p:txBody>
@@ -6695,7 +6314,7 @@
                 <a:ea typeface="Microsoft JhengHei"/>
                 <a:cs typeface="Microsoft JhengHei"/>
               </a:rPr>
-              <a:t>崴寶</a:t>
+              <a:t>杏一、鈊象、安心、柏文</a:t>
             </a:r>
           </a:p>
         </p:txBody>
@@ -6732,7 +6351,7 @@
                 <a:ea typeface="Microsoft JhengHei"/>
                 <a:cs typeface="Microsoft JhengHei"/>
               </a:rPr>
-              <a:t>伺服器資料遭加密，須系統隔離與資料復原</a:t>
+              <a:t>源自開發流程或委外廠商，須通報並通知當事人</a:t>
             </a:r>
           </a:p>
         </p:txBody>
@@ -6798,244 +6417,6 @@
             <a:avLst/>
           </a:prstGeom>
           <a:solidFill>
-            <a:srgbClr val="27A6C4"/>
-          </a:solidFill>
-          <a:ln>
-            <a:noFill/>
-          </a:ln>
-          <a:effectLst/>
-        </p:spPr>
-        <p:style>
-          <a:lnRef idx="1">
-            <a:schemeClr val="accent1"/>
-          </a:lnRef>
-          <a:fillRef idx="3">
-            <a:schemeClr val="accent1"/>
-          </a:fillRef>
-          <a:effectRef idx="2">
-            <a:schemeClr val="accent1"/>
-          </a:effectRef>
-          <a:fontRef idx="minor">
-            <a:schemeClr val="lt1"/>
-          </a:fontRef>
-        </p:style>
-        <p:txBody>
-          <a:bodyPr rtlCol="0" anchor="ctr"/>
-          <a:lstStyle/>
-          <a:p>
-            <a:pPr algn="ctr"/>
-          </a:p>
-        </p:txBody>
-      </p:sp>
-      <p:sp>
-        <p:nvSpPr>
-          <p:cNvPr id="20" name="TextBox 19"/>
-          <p:cNvSpPr txBox="1"/>
-          <p:nvPr/>
-        </p:nvSpPr>
-        <p:spPr>
-          <a:xfrm>
-            <a:off x="5897880" y="4453128"/>
-            <a:ext cx="4206240" cy="365760"/>
-          </a:xfrm>
-          <a:prstGeom prst="rect">
-            <a:avLst/>
-          </a:prstGeom>
-          <a:noFill/>
-        </p:spPr>
-        <p:txBody>
-          <a:bodyPr wrap="square" anchor="ctr" lIns="0" rIns="0" tIns="0" bIns="0">
-            <a:spAutoFit/>
-          </a:bodyPr>
-          <a:lstStyle/>
-          <a:p>
-            <a:pPr algn="l"/>
-            <a:r>
-              <a:rPr sz="1600" b="1">
-                <a:solidFill>
-                  <a:srgbClr val="1A2233"/>
-                </a:solidFill>
-                <a:latin typeface="Microsoft JhengHei"/>
-                <a:ea typeface="Microsoft JhengHei"/>
-                <a:cs typeface="Microsoft JhengHei"/>
-              </a:rPr>
-              <a:t>個資外洩</a:t>
-            </a:r>
-          </a:p>
-        </p:txBody>
-      </p:sp>
-      <p:sp>
-        <p:nvSpPr>
-          <p:cNvPr id="21" name="TextBox 20"/>
-          <p:cNvSpPr txBox="1"/>
-          <p:nvPr/>
-        </p:nvSpPr>
-        <p:spPr>
-          <a:xfrm>
-            <a:off x="10058400" y="4453128"/>
-            <a:ext cx="1463040" cy="365760"/>
-          </a:xfrm>
-          <a:prstGeom prst="rect">
-            <a:avLst/>
-          </a:prstGeom>
-          <a:noFill/>
-        </p:spPr>
-        <p:txBody>
-          <a:bodyPr wrap="square" anchor="ctr" lIns="0" rIns="0" tIns="0" bIns="0">
-            <a:spAutoFit/>
-          </a:bodyPr>
-          <a:lstStyle/>
-          <a:p>
-            <a:pPr algn="r"/>
-            <a:r>
-              <a:rPr sz="1800" b="1">
-                <a:solidFill>
-                  <a:srgbClr val="27A6C4"/>
-                </a:solidFill>
-                <a:latin typeface="Microsoft JhengHei"/>
-                <a:ea typeface="Microsoft JhengHei"/>
-                <a:cs typeface="Microsoft JhengHei"/>
-              </a:rPr>
-              <a:t>4 起</a:t>
-            </a:r>
-          </a:p>
-        </p:txBody>
-      </p:sp>
-      <p:sp>
-        <p:nvSpPr>
-          <p:cNvPr id="22" name="TextBox 21"/>
-          <p:cNvSpPr txBox="1"/>
-          <p:nvPr/>
-        </p:nvSpPr>
-        <p:spPr>
-          <a:xfrm>
-            <a:off x="5897880" y="4846320"/>
-            <a:ext cx="5577840" cy="274320"/>
-          </a:xfrm>
-          <a:prstGeom prst="rect">
-            <a:avLst/>
-          </a:prstGeom>
-          <a:noFill/>
-        </p:spPr>
-        <p:txBody>
-          <a:bodyPr wrap="square" anchor="t" lIns="0" rIns="0" tIns="0" bIns="0">
-            <a:spAutoFit/>
-          </a:bodyPr>
-          <a:lstStyle/>
-          <a:p>
-            <a:pPr algn="l"/>
-            <a:r>
-              <a:rPr sz="1150" b="1">
-                <a:solidFill>
-                  <a:srgbClr val="1A2233"/>
-                </a:solidFill>
-                <a:latin typeface="Microsoft JhengHei"/>
-                <a:ea typeface="Microsoft JhengHei"/>
-                <a:cs typeface="Microsoft JhengHei"/>
-              </a:rPr>
-              <a:t>杏一、鈊象、安心、柏文</a:t>
-            </a:r>
-          </a:p>
-        </p:txBody>
-      </p:sp>
-      <p:sp>
-        <p:nvSpPr>
-          <p:cNvPr id="23" name="TextBox 22"/>
-          <p:cNvSpPr txBox="1"/>
-          <p:nvPr/>
-        </p:nvSpPr>
-        <p:spPr>
-          <a:xfrm>
-            <a:off x="5897880" y="5111496"/>
-            <a:ext cx="5669280" cy="329184"/>
-          </a:xfrm>
-          <a:prstGeom prst="rect">
-            <a:avLst/>
-          </a:prstGeom>
-          <a:noFill/>
-        </p:spPr>
-        <p:txBody>
-          <a:bodyPr wrap="square" anchor="t" lIns="0" rIns="0" tIns="0" bIns="0">
-            <a:spAutoFit/>
-          </a:bodyPr>
-          <a:lstStyle/>
-          <a:p>
-            <a:pPr algn="l"/>
-            <a:r>
-              <a:rPr sz="1100" b="0">
-                <a:solidFill>
-                  <a:srgbClr val="5C6679"/>
-                </a:solidFill>
-                <a:latin typeface="Microsoft JhengHei"/>
-                <a:ea typeface="Microsoft JhengHei"/>
-                <a:cs typeface="Microsoft JhengHei"/>
-              </a:rPr>
-              <a:t>源自開發流程或委外廠商，須通報並通知當事人</a:t>
-            </a:r>
-          </a:p>
-        </p:txBody>
-      </p:sp>
-      <p:sp>
-        <p:nvSpPr>
-          <p:cNvPr id="24" name="Rounded Rectangle 23"/>
-          <p:cNvSpPr/>
-          <p:nvPr/>
-        </p:nvSpPr>
-        <p:spPr>
-          <a:xfrm>
-            <a:off x="5669280" y="5669279"/>
-            <a:ext cx="6035040" cy="1170432"/>
-          </a:xfrm>
-          <a:prstGeom prst="roundRect">
-            <a:avLst/>
-          </a:prstGeom>
-          <a:solidFill>
-            <a:srgbClr val="FFFFFF"/>
-          </a:solidFill>
-          <a:ln w="12700">
-            <a:solidFill>
-              <a:srgbClr val="DDE3EE"/>
-            </a:solidFill>
-          </a:ln>
-          <a:effectLst/>
-        </p:spPr>
-        <p:style>
-          <a:lnRef idx="1">
-            <a:schemeClr val="accent1"/>
-          </a:lnRef>
-          <a:fillRef idx="3">
-            <a:schemeClr val="accent1"/>
-          </a:fillRef>
-          <a:effectRef idx="2">
-            <a:schemeClr val="accent1"/>
-          </a:effectRef>
-          <a:fontRef idx="minor">
-            <a:schemeClr val="lt1"/>
-          </a:fontRef>
-        </p:style>
-        <p:txBody>
-          <a:bodyPr rtlCol="0" anchor="ctr"/>
-          <a:lstStyle/>
-          <a:p>
-            <a:pPr algn="ctr"/>
-          </a:p>
-        </p:txBody>
-      </p:sp>
-      <p:sp>
-        <p:nvSpPr>
-          <p:cNvPr id="25" name="Rectangle 24"/>
-          <p:cNvSpPr/>
-          <p:nvPr/>
-        </p:nvSpPr>
-        <p:spPr>
-          <a:xfrm>
-            <a:off x="5669280" y="5669279"/>
-            <a:ext cx="109728" cy="1170432"/>
-          </a:xfrm>
-          <a:prstGeom prst="rect">
-            <a:avLst/>
-          </a:prstGeom>
-          <a:solidFill>
             <a:srgbClr val="5C6679"/>
           </a:solidFill>
           <a:ln>
@@ -7067,13 +6448,13 @@
       </p:sp>
       <p:sp>
         <p:nvSpPr>
-          <p:cNvPr id="26" name="TextBox 25"/>
+          <p:cNvPr id="20" name="TextBox 19"/>
           <p:cNvSpPr txBox="1"/>
           <p:nvPr/>
         </p:nvSpPr>
         <p:spPr>
           <a:xfrm>
-            <a:off x="5897880" y="5779007"/>
+            <a:off x="5897880" y="4453128"/>
             <a:ext cx="4206240" cy="365760"/>
           </a:xfrm>
           <a:prstGeom prst="rect">
@@ -7104,13 +6485,13 @@
       </p:sp>
       <p:sp>
         <p:nvSpPr>
-          <p:cNvPr id="27" name="TextBox 26"/>
+          <p:cNvPr id="21" name="TextBox 20"/>
           <p:cNvSpPr txBox="1"/>
           <p:nvPr/>
         </p:nvSpPr>
         <p:spPr>
           <a:xfrm>
-            <a:off x="10058400" y="5779007"/>
+            <a:off x="10058400" y="4453128"/>
             <a:ext cx="1463040" cy="365760"/>
           </a:xfrm>
           <a:prstGeom prst="rect">
@@ -7141,13 +6522,13 @@
       </p:sp>
       <p:sp>
         <p:nvSpPr>
-          <p:cNvPr id="28" name="TextBox 27"/>
+          <p:cNvPr id="22" name="TextBox 21"/>
           <p:cNvSpPr txBox="1"/>
           <p:nvPr/>
         </p:nvSpPr>
         <p:spPr>
           <a:xfrm>
-            <a:off x="5897880" y="6172199"/>
+            <a:off x="5897880" y="4846320"/>
             <a:ext cx="5577840" cy="274320"/>
           </a:xfrm>
           <a:prstGeom prst="rect">
@@ -7178,13 +6559,13 @@
       </p:sp>
       <p:sp>
         <p:nvSpPr>
-          <p:cNvPr id="29" name="TextBox 28"/>
+          <p:cNvPr id="23" name="TextBox 22"/>
           <p:cNvSpPr txBox="1"/>
           <p:nvPr/>
         </p:nvSpPr>
         <p:spPr>
           <a:xfrm>
-            <a:off x="5897880" y="6437375"/>
+            <a:off x="5897880" y="5111496"/>
             <a:ext cx="5669280" cy="329184"/>
           </a:xfrm>
           <a:prstGeom prst="rect">
@@ -7374,7 +6755,7 @@
                 <a:gridCol w="3383280"/>
                 <a:gridCol w="2606040"/>
               </a:tblGrid>
-              <a:tr h="280035">
+              <a:tr h="344658">
                 <a:tc>
                   <a:txBody>
                     <a:bodyPr/>
@@ -7496,7 +6877,7 @@
                   </a:tcPr>
                 </a:tc>
               </a:tr>
-              <a:tr h="280035">
+              <a:tr h="344658">
                 <a:tc>
                   <a:txBody>
                     <a:bodyPr/>
@@ -7618,7 +6999,7 @@
                   </a:tcPr>
                 </a:tc>
               </a:tr>
-              <a:tr h="280035">
+              <a:tr h="344658">
                 <a:tc>
                   <a:txBody>
                     <a:bodyPr/>
@@ -7740,7 +7121,7 @@
                   </a:tcPr>
                 </a:tc>
               </a:tr>
-              <a:tr h="280035">
+              <a:tr h="344658">
                 <a:tc>
                   <a:txBody>
                     <a:bodyPr/>
@@ -7862,7 +7243,7 @@
                   </a:tcPr>
                 </a:tc>
               </a:tr>
-              <a:tr h="280035">
+              <a:tr h="344658">
                 <a:tc>
                   <a:txBody>
                     <a:bodyPr/>
@@ -7984,7 +7365,7 @@
                   </a:tcPr>
                 </a:tc>
               </a:tr>
-              <a:tr h="280035">
+              <a:tr h="344658">
                 <a:tc>
                   <a:txBody>
                     <a:bodyPr/>
@@ -8106,7 +7487,7 @@
                   </a:tcPr>
                 </a:tc>
               </a:tr>
-              <a:tr h="280035">
+              <a:tr h="344658">
                 <a:tc>
                   <a:txBody>
                     <a:bodyPr/>
@@ -8228,7 +7609,7 @@
                   </a:tcPr>
                 </a:tc>
               </a:tr>
-              <a:tr h="280035">
+              <a:tr h="344658">
                 <a:tc>
                   <a:txBody>
                     <a:bodyPr/>
@@ -8350,7 +7731,7 @@
                   </a:tcPr>
                 </a:tc>
               </a:tr>
-              <a:tr h="280035">
+              <a:tr h="344658">
                 <a:tc>
                   <a:txBody>
                     <a:bodyPr/>
@@ -8472,7 +7853,7 @@
                   </a:tcPr>
                 </a:tc>
               </a:tr>
-              <a:tr h="280035">
+              <a:tr h="344658">
                 <a:tc>
                   <a:txBody>
                     <a:bodyPr/>
@@ -8594,7 +7975,7 @@
                   </a:tcPr>
                 </a:tc>
               </a:tr>
-              <a:tr h="280035">
+              <a:tr h="344658">
                 <a:tc>
                   <a:txBody>
                     <a:bodyPr/>
@@ -8716,7 +8097,7 @@
                   </a:tcPr>
                 </a:tc>
               </a:tr>
-              <a:tr h="280035">
+              <a:tr h="344658">
                 <a:tc>
                   <a:txBody>
                     <a:bodyPr/>
@@ -8838,7 +8219,7 @@
                   </a:tcPr>
                 </a:tc>
               </a:tr>
-              <a:tr h="280035">
+              <a:tr h="344664">
                 <a:tc>
                   <a:txBody>
                     <a:bodyPr/>
@@ -8960,372 +8341,6 @@
                   </a:tcPr>
                 </a:tc>
               </a:tr>
-              <a:tr h="280035">
-                <a:tc>
-                  <a:txBody>
-                    <a:bodyPr/>
-                    <a:lstStyle/>
-                    <a:p>
-                      <a:r>
-                        <a:rPr sz="1150" b="0">
-                          <a:solidFill>
-                            <a:srgbClr val="1A2233"/>
-                          </a:solidFill>
-                          <a:latin typeface="Microsoft JhengHei"/>
-                          <a:ea typeface="Microsoft JhengHei"/>
-                          <a:cs typeface="Microsoft JhengHei"/>
-                        </a:rPr>
-                        <a:t>崴寶</a:t>
-                      </a:r>
-                    </a:p>
-                  </a:txBody>
-                  <a:tcPr anchor="ctr" marL="73152" marT="9144" marB="9144">
-                    <a:solidFill>
-                      <a:srgbClr val="FFFFFF"/>
-                    </a:solidFill>
-                  </a:tcPr>
-                </a:tc>
-                <a:tc>
-                  <a:txBody>
-                    <a:bodyPr/>
-                    <a:lstStyle/>
-                    <a:p>
-                      <a:r>
-                        <a:rPr sz="1150" b="0">
-                          <a:solidFill>
-                            <a:srgbClr val="1A2233"/>
-                          </a:solidFill>
-                          <a:latin typeface="Microsoft JhengHei"/>
-                          <a:ea typeface="Microsoft JhengHei"/>
-                          <a:cs typeface="Microsoft JhengHei"/>
-                        </a:rPr>
-                        <a:t>7744</a:t>
-                      </a:r>
-                    </a:p>
-                  </a:txBody>
-                  <a:tcPr anchor="ctr" marL="73152" marT="9144" marB="9144">
-                    <a:solidFill>
-                      <a:srgbClr val="FFFFFF"/>
-                    </a:solidFill>
-                  </a:tcPr>
-                </a:tc>
-                <a:tc>
-                  <a:txBody>
-                    <a:bodyPr/>
-                    <a:lstStyle/>
-                    <a:p>
-                      <a:r>
-                        <a:rPr sz="1150" b="1">
-                          <a:solidFill>
-                            <a:srgbClr val="F4A261"/>
-                          </a:solidFill>
-                          <a:latin typeface="Microsoft JhengHei"/>
-                          <a:ea typeface="Microsoft JhengHei"/>
-                          <a:cs typeface="Microsoft JhengHei"/>
-                        </a:rPr>
-                        <a:t>勒索病毒/加密</a:t>
-                      </a:r>
-                    </a:p>
-                  </a:txBody>
-                  <a:tcPr anchor="ctr" marL="73152" marT="9144" marB="9144">
-                    <a:solidFill>
-                      <a:srgbClr val="FFFFFF"/>
-                    </a:solidFill>
-                  </a:tcPr>
-                </a:tc>
-                <a:tc>
-                  <a:txBody>
-                    <a:bodyPr/>
-                    <a:lstStyle/>
-                    <a:p>
-                      <a:r>
-                        <a:rPr sz="1150" b="0">
-                          <a:solidFill>
-                            <a:srgbClr val="1A2233"/>
-                          </a:solidFill>
-                          <a:latin typeface="Microsoft JhengHei"/>
-                          <a:ea typeface="Microsoft JhengHei"/>
-                          <a:cs typeface="Microsoft JhengHei"/>
-                        </a:rPr>
-                        <a:t>安永聯合會計師事務所</a:t>
-                      </a:r>
-                    </a:p>
-                  </a:txBody>
-                  <a:tcPr anchor="ctr" marL="73152" marT="9144" marB="9144">
-                    <a:solidFill>
-                      <a:srgbClr val="FFFFFF"/>
-                    </a:solidFill>
-                  </a:tcPr>
-                </a:tc>
-                <a:tc>
-                  <a:txBody>
-                    <a:bodyPr/>
-                    <a:lstStyle/>
-                    <a:p>
-                      <a:r>
-                        <a:rPr sz="1150" b="0">
-                          <a:solidFill>
-                            <a:srgbClr val="1A2233"/>
-                          </a:solidFill>
-                          <a:latin typeface="Microsoft JhengHei"/>
-                          <a:ea typeface="Microsoft JhengHei"/>
-                          <a:cs typeface="Microsoft JhengHei"/>
-                        </a:rPr>
-                        <a:t>黃宇廷、黃子評</a:t>
-                      </a:r>
-                    </a:p>
-                  </a:txBody>
-                  <a:tcPr anchor="ctr" marL="73152" marT="9144" marB="9144">
-                    <a:solidFill>
-                      <a:srgbClr val="FFFFFF"/>
-                    </a:solidFill>
-                  </a:tcPr>
-                </a:tc>
-              </a:tr>
-              <a:tr h="280035">
-                <a:tc>
-                  <a:txBody>
-                    <a:bodyPr/>
-                    <a:lstStyle/>
-                    <a:p>
-                      <a:r>
-                        <a:rPr sz="1150" b="0">
-                          <a:solidFill>
-                            <a:srgbClr val="1A2233"/>
-                          </a:solidFill>
-                          <a:latin typeface="Microsoft JhengHei"/>
-                          <a:ea typeface="Microsoft JhengHei"/>
-                          <a:cs typeface="Microsoft JhengHei"/>
-                        </a:rPr>
-                        <a:t>達爾膚</a:t>
-                      </a:r>
-                    </a:p>
-                  </a:txBody>
-                  <a:tcPr anchor="ctr" marL="73152" marT="9144" marB="9144">
-                    <a:solidFill>
-                      <a:srgbClr val="EEF2F9"/>
-                    </a:solidFill>
-                  </a:tcPr>
-                </a:tc>
-                <a:tc>
-                  <a:txBody>
-                    <a:bodyPr/>
-                    <a:lstStyle/>
-                    <a:p>
-                      <a:r>
-                        <a:rPr sz="1150" b="0">
-                          <a:solidFill>
-                            <a:srgbClr val="1A2233"/>
-                          </a:solidFill>
-                          <a:latin typeface="Microsoft JhengHei"/>
-                          <a:ea typeface="Microsoft JhengHei"/>
-                          <a:cs typeface="Microsoft JhengHei"/>
-                        </a:rPr>
-                        <a:t>6523</a:t>
-                      </a:r>
-                    </a:p>
-                  </a:txBody>
-                  <a:tcPr anchor="ctr" marL="73152" marT="9144" marB="9144">
-                    <a:solidFill>
-                      <a:srgbClr val="EEF2F9"/>
-                    </a:solidFill>
-                  </a:tcPr>
-                </a:tc>
-                <a:tc>
-                  <a:txBody>
-                    <a:bodyPr/>
-                    <a:lstStyle/>
-                    <a:p>
-                      <a:r>
-                        <a:rPr sz="1150" b="1">
-                          <a:solidFill>
-                            <a:srgbClr val="E63946"/>
-                          </a:solidFill>
-                          <a:latin typeface="Microsoft JhengHei"/>
-                          <a:ea typeface="Microsoft JhengHei"/>
-                          <a:cs typeface="Microsoft JhengHei"/>
-                        </a:rPr>
-                        <a:t>駭客攻擊</a:t>
-                      </a:r>
-                    </a:p>
-                  </a:txBody>
-                  <a:tcPr anchor="ctr" marL="73152" marT="9144" marB="9144">
-                    <a:solidFill>
-                      <a:srgbClr val="EEF2F9"/>
-                    </a:solidFill>
-                  </a:tcPr>
-                </a:tc>
-                <a:tc>
-                  <a:txBody>
-                    <a:bodyPr/>
-                    <a:lstStyle/>
-                    <a:p>
-                      <a:r>
-                        <a:rPr sz="1150" b="0">
-                          <a:solidFill>
-                            <a:srgbClr val="1A2233"/>
-                          </a:solidFill>
-                          <a:latin typeface="Microsoft JhengHei"/>
-                          <a:ea typeface="Microsoft JhengHei"/>
-                          <a:cs typeface="Microsoft JhengHei"/>
-                        </a:rPr>
-                        <a:t>資誠聯合會計師事務所</a:t>
-                      </a:r>
-                    </a:p>
-                  </a:txBody>
-                  <a:tcPr anchor="ctr" marL="73152" marT="9144" marB="9144">
-                    <a:solidFill>
-                      <a:srgbClr val="EEF2F9"/>
-                    </a:solidFill>
-                  </a:tcPr>
-                </a:tc>
-                <a:tc>
-                  <a:txBody>
-                    <a:bodyPr/>
-                    <a:lstStyle/>
-                    <a:p>
-                      <a:r>
-                        <a:rPr sz="1150" b="0">
-                          <a:solidFill>
-                            <a:srgbClr val="1A2233"/>
-                          </a:solidFill>
-                          <a:latin typeface="Microsoft JhengHei"/>
-                          <a:ea typeface="Microsoft JhengHei"/>
-                          <a:cs typeface="Microsoft JhengHei"/>
-                        </a:rPr>
-                        <a:t>于智帆、葉翠苗</a:t>
-                      </a:r>
-                    </a:p>
-                  </a:txBody>
-                  <a:tcPr anchor="ctr" marL="73152" marT="9144" marB="9144">
-                    <a:solidFill>
-                      <a:srgbClr val="EEF2F9"/>
-                    </a:solidFill>
-                  </a:tcPr>
-                </a:tc>
-              </a:tr>
-              <a:tr h="280035">
-                <a:tc>
-                  <a:txBody>
-                    <a:bodyPr/>
-                    <a:lstStyle/>
-                    <a:p>
-                      <a:r>
-                        <a:rPr sz="1150" b="0">
-                          <a:solidFill>
-                            <a:srgbClr val="1A2233"/>
-                          </a:solidFill>
-                          <a:latin typeface="Microsoft JhengHei"/>
-                          <a:ea typeface="Microsoft JhengHei"/>
-                          <a:cs typeface="Microsoft JhengHei"/>
-                        </a:rPr>
-                        <a:t>大車隊</a:t>
-                      </a:r>
-                    </a:p>
-                  </a:txBody>
-                  <a:tcPr anchor="ctr" marL="73152" marT="9144" marB="9144">
-                    <a:solidFill>
-                      <a:srgbClr val="FFFFFF"/>
-                    </a:solidFill>
-                  </a:tcPr>
-                </a:tc>
-                <a:tc>
-                  <a:txBody>
-                    <a:bodyPr/>
-                    <a:lstStyle/>
-                    <a:p>
-                      <a:r>
-                        <a:rPr sz="1150" b="0">
-                          <a:solidFill>
-                            <a:srgbClr val="1A2233"/>
-                          </a:solidFill>
-                          <a:latin typeface="Microsoft JhengHei"/>
-                          <a:ea typeface="Microsoft JhengHei"/>
-                          <a:cs typeface="Microsoft JhengHei"/>
-                        </a:rPr>
-                        <a:t>2640</a:t>
-                      </a:r>
-                    </a:p>
-                  </a:txBody>
-                  <a:tcPr anchor="ctr" marL="73152" marT="9144" marB="9144">
-                    <a:solidFill>
-                      <a:srgbClr val="FFFFFF"/>
-                    </a:solidFill>
-                  </a:tcPr>
-                </a:tc>
-                <a:tc>
-                  <a:txBody>
-                    <a:bodyPr/>
-                    <a:lstStyle/>
-                    <a:p>
-                      <a:r>
-                        <a:rPr sz="1150" b="1">
-                          <a:solidFill>
-                            <a:srgbClr val="E63946"/>
-                          </a:solidFill>
-                          <a:latin typeface="Microsoft JhengHei"/>
-                          <a:ea typeface="Microsoft JhengHei"/>
-                          <a:cs typeface="Microsoft JhengHei"/>
-                        </a:rPr>
-                        <a:t>駭客攻擊</a:t>
-                      </a:r>
-                    </a:p>
-                  </a:txBody>
-                  <a:tcPr anchor="ctr" marL="73152" marT="9144" marB="9144">
-                    <a:solidFill>
-                      <a:srgbClr val="FFFFFF"/>
-                    </a:solidFill>
-                  </a:tcPr>
-                </a:tc>
-                <a:tc>
-                  <a:txBody>
-                    <a:bodyPr/>
-                    <a:lstStyle/>
-                    <a:p>
-                      <a:r>
-                        <a:rPr sz="1150" b="0">
-                          <a:solidFill>
-                            <a:srgbClr val="1A2233"/>
-                          </a:solidFill>
-                          <a:latin typeface="Microsoft JhengHei"/>
-                          <a:ea typeface="Microsoft JhengHei"/>
-                          <a:cs typeface="Microsoft JhengHei"/>
-                        </a:rPr>
-                        <a:t>資誠聯合會計師事務所</a:t>
-                      </a:r>
-                    </a:p>
-                  </a:txBody>
-                  <a:tcPr anchor="ctr" marL="73152" marT="9144" marB="9144">
-                    <a:solidFill>
-                      <a:srgbClr val="FFFFFF"/>
-                    </a:solidFill>
-                  </a:tcPr>
-                </a:tc>
-                <a:tc>
-                  <a:txBody>
-                    <a:bodyPr/>
-                    <a:lstStyle/>
-                    <a:p>
-                      <a:r>
-                        <a:rPr sz="1150" b="0">
-                          <a:solidFill>
-                            <a:srgbClr val="1A2233"/>
-                          </a:solidFill>
-                          <a:latin typeface="Microsoft JhengHei"/>
-                          <a:ea typeface="Microsoft JhengHei"/>
-                          <a:cs typeface="Microsoft JhengHei"/>
-                        </a:rPr>
-                        <a:t>支秉鈞、涂展源</a:t>
-                      </a:r>
-                    </a:p>
-                  </a:txBody>
-                  <a:tcPr anchor="ctr" marL="73152" marT="9144" marB="9144">
-                    <a:solidFill>
-                      <a:srgbClr val="FFFFFF"/>
-                    </a:solidFill>
-                  </a:tcPr>
-                </a:tc>
-              </a:tr>
             </a:tbl>
           </a:graphicData>
         </a:graphic>
@@ -14858,1111 +13873,6 @@
                 <a:cs typeface="Microsoft JhengHei"/>
               </a:rPr>
               <a:t>本公司將持續監控公司整體資訊系統運作狀況，並檢討強化現有資安防護措施，以確保資訊安全。</a:t>
-            </a:r>
-          </a:p>
-        </p:txBody>
-      </p:sp>
-    </p:spTree>
-  </p:cSld>
-  <p:clrMapOvr>
-    <a:masterClrMapping/>
-  </p:clrMapOvr>
-</p:sld>
-</file>
-
-<file path=ppt/slides/slide9.xml><?xml version="1.0" encoding="utf-8"?>
-<p:sld xmlns:a="http://schemas.openxmlformats.org/drawingml/2006/main" xmlns:p="http://schemas.openxmlformats.org/presentationml/2006/main" xmlns:r="http://schemas.openxmlformats.org/officeDocument/2006/relationships">
-  <p:cSld>
-    <p:spTree>
-      <p:nvGrpSpPr>
-        <p:cNvPr id="1" name=""/>
-        <p:cNvGrpSpPr/>
-        <p:nvPr/>
-      </p:nvGrpSpPr>
-      <p:grpSpPr/>
-      <p:sp>
-        <p:nvSpPr>
-          <p:cNvPr id="2" name="Rectangle 1"/>
-          <p:cNvSpPr/>
-          <p:nvPr/>
-        </p:nvSpPr>
-        <p:spPr>
-          <a:xfrm>
-            <a:off x="0" y="0"/>
-            <a:ext cx="12191695" cy="6858000"/>
-          </a:xfrm>
-          <a:prstGeom prst="rect">
-            <a:avLst/>
-          </a:prstGeom>
-          <a:solidFill>
-            <a:srgbClr val="F6F8FC"/>
-          </a:solidFill>
-          <a:ln>
-            <a:noFill/>
-          </a:ln>
-          <a:effectLst/>
-        </p:spPr>
-        <p:style>
-          <a:lnRef idx="1">
-            <a:schemeClr val="accent1"/>
-          </a:lnRef>
-          <a:fillRef idx="3">
-            <a:schemeClr val="accent1"/>
-          </a:fillRef>
-          <a:effectRef idx="2">
-            <a:schemeClr val="accent1"/>
-          </a:effectRef>
-          <a:fontRef idx="minor">
-            <a:schemeClr val="lt1"/>
-          </a:fontRef>
-        </p:style>
-        <p:txBody>
-          <a:bodyPr rtlCol="0" anchor="ctr"/>
-          <a:lstStyle/>
-          <a:p>
-            <a:pPr algn="ctr"/>
-          </a:p>
-        </p:txBody>
-      </p:sp>
-      <p:sp>
-        <p:nvSpPr>
-          <p:cNvPr id="3" name="TextBox 2"/>
-          <p:cNvSpPr txBox="1"/>
-          <p:nvPr/>
-        </p:nvSpPr>
-        <p:spPr>
-          <a:xfrm>
-            <a:off x="548640" y="365760"/>
-            <a:ext cx="9144000" cy="640080"/>
-          </a:xfrm>
-          <a:prstGeom prst="rect">
-            <a:avLst/>
-          </a:prstGeom>
-          <a:noFill/>
-        </p:spPr>
-        <p:txBody>
-          <a:bodyPr wrap="square" anchor="t" lIns="0" rIns="0" tIns="0" bIns="0">
-            <a:spAutoFit/>
-          </a:bodyPr>
-          <a:lstStyle/>
-          <a:p>
-            <a:pPr algn="l"/>
-            <a:r>
-              <a:rPr sz="3000" b="1">
-                <a:solidFill>
-                  <a:srgbClr val="1A2233"/>
-                </a:solidFill>
-                <a:latin typeface="Microsoft JhengHei"/>
-                <a:ea typeface="Microsoft JhengHei"/>
-                <a:cs typeface="Microsoft JhengHei"/>
-              </a:rPr>
-              <a:t>個案因應重點（4）</a:t>
-            </a:r>
-          </a:p>
-        </p:txBody>
-      </p:sp>
-      <p:sp>
-        <p:nvSpPr>
-          <p:cNvPr id="4" name="TextBox 3"/>
-          <p:cNvSpPr txBox="1"/>
-          <p:nvPr/>
-        </p:nvSpPr>
-        <p:spPr>
-          <a:xfrm>
-            <a:off x="566928" y="1005840"/>
-            <a:ext cx="10058400" cy="365760"/>
-          </a:xfrm>
-          <a:prstGeom prst="rect">
-            <a:avLst/>
-          </a:prstGeom>
-          <a:noFill/>
-        </p:spPr>
-        <p:txBody>
-          <a:bodyPr wrap="square" anchor="t" lIns="0" rIns="0" tIns="0" bIns="0">
-            <a:spAutoFit/>
-          </a:bodyPr>
-          <a:lstStyle/>
-          <a:p>
-            <a:pPr algn="l"/>
-            <a:r>
-              <a:rPr sz="1300" b="0">
-                <a:solidFill>
-                  <a:srgbClr val="5C6679"/>
-                </a:solidFill>
-                <a:latin typeface="Microsoft JhengHei"/>
-                <a:ea typeface="Microsoft JhengHei"/>
-                <a:cs typeface="Microsoft JhengHei"/>
-              </a:rPr>
-              <a:t>各公司公告之發生緣由與因應措施摘要</a:t>
-            </a:r>
-          </a:p>
-        </p:txBody>
-      </p:sp>
-      <p:sp>
-        <p:nvSpPr>
-          <p:cNvPr id="5" name="Rounded Rectangle 4"/>
-          <p:cNvSpPr/>
-          <p:nvPr/>
-        </p:nvSpPr>
-        <p:spPr>
-          <a:xfrm>
-            <a:off x="548640" y="1554480"/>
-            <a:ext cx="5394960" cy="2148840"/>
-          </a:xfrm>
-          <a:prstGeom prst="roundRect">
-            <a:avLst/>
-          </a:prstGeom>
-          <a:solidFill>
-            <a:srgbClr val="FFFFFF"/>
-          </a:solidFill>
-          <a:ln w="12700">
-            <a:solidFill>
-              <a:srgbClr val="DDE3EE"/>
-            </a:solidFill>
-          </a:ln>
-          <a:effectLst/>
-        </p:spPr>
-        <p:style>
-          <a:lnRef idx="1">
-            <a:schemeClr val="accent1"/>
-          </a:lnRef>
-          <a:fillRef idx="3">
-            <a:schemeClr val="accent1"/>
-          </a:fillRef>
-          <a:effectRef idx="2">
-            <a:schemeClr val="accent1"/>
-          </a:effectRef>
-          <a:fontRef idx="minor">
-            <a:schemeClr val="lt1"/>
-          </a:fontRef>
-        </p:style>
-        <p:txBody>
-          <a:bodyPr rtlCol="0" anchor="ctr"/>
-          <a:lstStyle/>
-          <a:p>
-            <a:pPr algn="ctr"/>
-          </a:p>
-        </p:txBody>
-      </p:sp>
-      <p:sp>
-        <p:nvSpPr>
-          <p:cNvPr id="6" name="Rectangle 5"/>
-          <p:cNvSpPr/>
-          <p:nvPr/>
-        </p:nvSpPr>
-        <p:spPr>
-          <a:xfrm>
-            <a:off x="548640" y="1554480"/>
-            <a:ext cx="5394960" cy="109728"/>
-          </a:xfrm>
-          <a:prstGeom prst="rect">
-            <a:avLst/>
-          </a:prstGeom>
-          <a:solidFill>
-            <a:srgbClr val="F4A261"/>
-          </a:solidFill>
-          <a:ln>
-            <a:noFill/>
-          </a:ln>
-          <a:effectLst/>
-        </p:spPr>
-        <p:style>
-          <a:lnRef idx="1">
-            <a:schemeClr val="accent1"/>
-          </a:lnRef>
-          <a:fillRef idx="3">
-            <a:schemeClr val="accent1"/>
-          </a:fillRef>
-          <a:effectRef idx="2">
-            <a:schemeClr val="accent1"/>
-          </a:effectRef>
-          <a:fontRef idx="minor">
-            <a:schemeClr val="lt1"/>
-          </a:fontRef>
-        </p:style>
-        <p:txBody>
-          <a:bodyPr rtlCol="0" anchor="ctr"/>
-          <a:lstStyle/>
-          <a:p>
-            <a:pPr algn="ctr"/>
-          </a:p>
-        </p:txBody>
-      </p:sp>
-      <p:sp>
-        <p:nvSpPr>
-          <p:cNvPr id="7" name="TextBox 6"/>
-          <p:cNvSpPr txBox="1"/>
-          <p:nvPr/>
-        </p:nvSpPr>
-        <p:spPr>
-          <a:xfrm>
-            <a:off x="777240" y="1773936"/>
-            <a:ext cx="3657600" cy="365760"/>
-          </a:xfrm>
-          <a:prstGeom prst="rect">
-            <a:avLst/>
-          </a:prstGeom>
-          <a:noFill/>
-        </p:spPr>
-        <p:txBody>
-          <a:bodyPr wrap="square" anchor="ctr" lIns="0" rIns="0" tIns="0" bIns="0">
-            <a:spAutoFit/>
-          </a:bodyPr>
-          <a:lstStyle/>
-          <a:p>
-            <a:pPr algn="l"/>
-            <a:r>
-              <a:rPr sz="1600" b="1">
-                <a:solidFill>
-                  <a:srgbClr val="1A2233"/>
-                </a:solidFill>
-                <a:latin typeface="Microsoft JhengHei"/>
-                <a:ea typeface="Microsoft JhengHei"/>
-                <a:cs typeface="Microsoft JhengHei"/>
-              </a:rPr>
-              <a:t>崴寶 </a:t>
-            </a:r>
-            <a:r>
-              <a:rPr sz="1300" b="0">
-                <a:solidFill>
-                  <a:srgbClr val="5C6679"/>
-                </a:solidFill>
-                <a:latin typeface="Microsoft JhengHei"/>
-                <a:ea typeface="Microsoft JhengHei"/>
-                <a:cs typeface="Microsoft JhengHei"/>
-              </a:rPr>
-              <a:t>7744</a:t>
-            </a:r>
-          </a:p>
-        </p:txBody>
-      </p:sp>
-      <p:sp>
-        <p:nvSpPr>
-          <p:cNvPr id="8" name="Rounded Rectangle 7"/>
-          <p:cNvSpPr/>
-          <p:nvPr/>
-        </p:nvSpPr>
-        <p:spPr>
-          <a:xfrm>
-            <a:off x="4526280" y="1792224"/>
-            <a:ext cx="1234440" cy="347472"/>
-          </a:xfrm>
-          <a:prstGeom prst="roundRect">
-            <a:avLst/>
-          </a:prstGeom>
-          <a:solidFill>
-            <a:srgbClr val="F4A261"/>
-          </a:solidFill>
-          <a:ln>
-            <a:noFill/>
-          </a:ln>
-          <a:effectLst/>
-        </p:spPr>
-        <p:style>
-          <a:lnRef idx="1">
-            <a:schemeClr val="accent1"/>
-          </a:lnRef>
-          <a:fillRef idx="3">
-            <a:schemeClr val="accent1"/>
-          </a:fillRef>
-          <a:effectRef idx="2">
-            <a:schemeClr val="accent1"/>
-          </a:effectRef>
-          <a:fontRef idx="minor">
-            <a:schemeClr val="lt1"/>
-          </a:fontRef>
-        </p:style>
-        <p:txBody>
-          <a:bodyPr rtlCol="0" anchor="ctr"/>
-          <a:lstStyle/>
-          <a:p>
-            <a:pPr algn="ctr"/>
-          </a:p>
-        </p:txBody>
-      </p:sp>
-      <p:sp>
-        <p:nvSpPr>
-          <p:cNvPr id="9" name="TextBox 8"/>
-          <p:cNvSpPr txBox="1"/>
-          <p:nvPr/>
-        </p:nvSpPr>
-        <p:spPr>
-          <a:xfrm>
-            <a:off x="4526280" y="1792224"/>
-            <a:ext cx="1234440" cy="347472"/>
-          </a:xfrm>
-          <a:prstGeom prst="rect">
-            <a:avLst/>
-          </a:prstGeom>
-          <a:noFill/>
-        </p:spPr>
-        <p:txBody>
-          <a:bodyPr wrap="square" anchor="ctr" lIns="0" rIns="0" tIns="0" bIns="0">
-            <a:spAutoFit/>
-          </a:bodyPr>
-          <a:lstStyle/>
-          <a:p>
-            <a:pPr algn="ctr"/>
-            <a:r>
-              <a:rPr sz="1050" b="1">
-                <a:solidFill>
-                  <a:srgbClr val="FFFFFF"/>
-                </a:solidFill>
-                <a:latin typeface="Microsoft JhengHei"/>
-                <a:ea typeface="Microsoft JhengHei"/>
-                <a:cs typeface="Microsoft JhengHei"/>
-              </a:rPr>
-              <a:t>勒索病毒/加密</a:t>
-            </a:r>
-          </a:p>
-        </p:txBody>
-      </p:sp>
-      <p:sp>
-        <p:nvSpPr>
-          <p:cNvPr id="10" name="TextBox 9"/>
-          <p:cNvSpPr txBox="1"/>
-          <p:nvPr/>
-        </p:nvSpPr>
-        <p:spPr>
-          <a:xfrm>
-            <a:off x="777240" y="2267712"/>
-            <a:ext cx="4937760" cy="640080"/>
-          </a:xfrm>
-          <a:prstGeom prst="rect">
-            <a:avLst/>
-          </a:prstGeom>
-          <a:noFill/>
-        </p:spPr>
-        <p:txBody>
-          <a:bodyPr wrap="square" anchor="t" lIns="0" rIns="0" tIns="0" bIns="0">
-            <a:spAutoFit/>
-          </a:bodyPr>
-          <a:lstStyle/>
-          <a:p>
-            <a:pPr algn="l">
-              <a:lnSpc>
-                <a:spcPts val="1500"/>
-              </a:lnSpc>
-            </a:pPr>
-            <a:r>
-              <a:rPr sz="1100" b="1">
-                <a:solidFill>
-                  <a:srgbClr val="F4A261"/>
-                </a:solidFill>
-                <a:latin typeface="Microsoft JhengHei"/>
-                <a:ea typeface="Microsoft JhengHei"/>
-                <a:cs typeface="Microsoft JhengHei"/>
-              </a:rPr>
-              <a:t>緣由　</a:t>
-            </a:r>
-            <a:r>
-              <a:rPr sz="1100" b="0">
-                <a:solidFill>
-                  <a:srgbClr val="1A2233"/>
-                </a:solidFill>
-                <a:latin typeface="Microsoft JhengHei"/>
-                <a:ea typeface="Microsoft JhengHei"/>
-                <a:cs typeface="Microsoft JhengHei"/>
-              </a:rPr>
-              <a:t>本公司於115年9月14日上午發現資訊系統遭駭客入侵，部分系統資料遭加密鎖定。本公司立即啟動資安…</a:t>
-            </a:r>
-          </a:p>
-        </p:txBody>
-      </p:sp>
-      <p:sp>
-        <p:nvSpPr>
-          <p:cNvPr id="11" name="TextBox 10"/>
-          <p:cNvSpPr txBox="1"/>
-          <p:nvPr/>
-        </p:nvSpPr>
-        <p:spPr>
-          <a:xfrm>
-            <a:off x="777240" y="2926080"/>
-            <a:ext cx="4937760" cy="713232"/>
-          </a:xfrm>
-          <a:prstGeom prst="rect">
-            <a:avLst/>
-          </a:prstGeom>
-          <a:noFill/>
-        </p:spPr>
-        <p:txBody>
-          <a:bodyPr wrap="square" anchor="t" lIns="0" rIns="0" tIns="0" bIns="0">
-            <a:spAutoFit/>
-          </a:bodyPr>
-          <a:lstStyle/>
-          <a:p>
-            <a:pPr algn="l">
-              <a:lnSpc>
-                <a:spcPts val="1500"/>
-              </a:lnSpc>
-            </a:pPr>
-            <a:r>
-              <a:rPr sz="1100" b="1">
-                <a:solidFill>
-                  <a:srgbClr val="F4A261"/>
-                </a:solidFill>
-                <a:latin typeface="Microsoft JhengHei"/>
-                <a:ea typeface="Microsoft JhengHei"/>
-                <a:cs typeface="Microsoft JhengHei"/>
-              </a:rPr>
-              <a:t>因應　</a:t>
-            </a:r>
-            <a:r>
-              <a:rPr sz="1100" b="0">
-                <a:solidFill>
-                  <a:srgbClr val="1A2233"/>
-                </a:solidFill>
-                <a:latin typeface="Microsoft JhengHei"/>
-                <a:ea typeface="Microsoft JhengHei"/>
-                <a:cs typeface="Microsoft JhengHei"/>
-              </a:rPr>
-              <a:t>本公司將持續配合專業資安團隊進行事件調查與監控，並加強資訊安全管理措施，包括提升端點防護機制、強化網路監控能力、落實帳號…</a:t>
-            </a:r>
-          </a:p>
-        </p:txBody>
-      </p:sp>
-      <p:sp>
-        <p:nvSpPr>
-          <p:cNvPr id="12" name="Rounded Rectangle 11"/>
-          <p:cNvSpPr/>
-          <p:nvPr/>
-        </p:nvSpPr>
-        <p:spPr>
-          <a:xfrm>
-            <a:off x="6172200" y="1554480"/>
-            <a:ext cx="5394960" cy="2148840"/>
-          </a:xfrm>
-          <a:prstGeom prst="roundRect">
-            <a:avLst/>
-          </a:prstGeom>
-          <a:solidFill>
-            <a:srgbClr val="FFFFFF"/>
-          </a:solidFill>
-          <a:ln w="12700">
-            <a:solidFill>
-              <a:srgbClr val="DDE3EE"/>
-            </a:solidFill>
-          </a:ln>
-          <a:effectLst/>
-        </p:spPr>
-        <p:style>
-          <a:lnRef idx="1">
-            <a:schemeClr val="accent1"/>
-          </a:lnRef>
-          <a:fillRef idx="3">
-            <a:schemeClr val="accent1"/>
-          </a:fillRef>
-          <a:effectRef idx="2">
-            <a:schemeClr val="accent1"/>
-          </a:effectRef>
-          <a:fontRef idx="minor">
-            <a:schemeClr val="lt1"/>
-          </a:fontRef>
-        </p:style>
-        <p:txBody>
-          <a:bodyPr rtlCol="0" anchor="ctr"/>
-          <a:lstStyle/>
-          <a:p>
-            <a:pPr algn="ctr"/>
-          </a:p>
-        </p:txBody>
-      </p:sp>
-      <p:sp>
-        <p:nvSpPr>
-          <p:cNvPr id="13" name="Rectangle 12"/>
-          <p:cNvSpPr/>
-          <p:nvPr/>
-        </p:nvSpPr>
-        <p:spPr>
-          <a:xfrm>
-            <a:off x="6172200" y="1554480"/>
-            <a:ext cx="5394960" cy="109728"/>
-          </a:xfrm>
-          <a:prstGeom prst="rect">
-            <a:avLst/>
-          </a:prstGeom>
-          <a:solidFill>
-            <a:srgbClr val="E63946"/>
-          </a:solidFill>
-          <a:ln>
-            <a:noFill/>
-          </a:ln>
-          <a:effectLst/>
-        </p:spPr>
-        <p:style>
-          <a:lnRef idx="1">
-            <a:schemeClr val="accent1"/>
-          </a:lnRef>
-          <a:fillRef idx="3">
-            <a:schemeClr val="accent1"/>
-          </a:fillRef>
-          <a:effectRef idx="2">
-            <a:schemeClr val="accent1"/>
-          </a:effectRef>
-          <a:fontRef idx="minor">
-            <a:schemeClr val="lt1"/>
-          </a:fontRef>
-        </p:style>
-        <p:txBody>
-          <a:bodyPr rtlCol="0" anchor="ctr"/>
-          <a:lstStyle/>
-          <a:p>
-            <a:pPr algn="ctr"/>
-          </a:p>
-        </p:txBody>
-      </p:sp>
-      <p:sp>
-        <p:nvSpPr>
-          <p:cNvPr id="14" name="TextBox 13"/>
-          <p:cNvSpPr txBox="1"/>
-          <p:nvPr/>
-        </p:nvSpPr>
-        <p:spPr>
-          <a:xfrm>
-            <a:off x="6400800" y="1773936"/>
-            <a:ext cx="3657600" cy="365760"/>
-          </a:xfrm>
-          <a:prstGeom prst="rect">
-            <a:avLst/>
-          </a:prstGeom>
-          <a:noFill/>
-        </p:spPr>
-        <p:txBody>
-          <a:bodyPr wrap="square" anchor="ctr" lIns="0" rIns="0" tIns="0" bIns="0">
-            <a:spAutoFit/>
-          </a:bodyPr>
-          <a:lstStyle/>
-          <a:p>
-            <a:pPr algn="l"/>
-            <a:r>
-              <a:rPr sz="1600" b="1">
-                <a:solidFill>
-                  <a:srgbClr val="1A2233"/>
-                </a:solidFill>
-                <a:latin typeface="Microsoft JhengHei"/>
-                <a:ea typeface="Microsoft JhengHei"/>
-                <a:cs typeface="Microsoft JhengHei"/>
-              </a:rPr>
-              <a:t>達爾膚 </a:t>
-            </a:r>
-            <a:r>
-              <a:rPr sz="1300" b="0">
-                <a:solidFill>
-                  <a:srgbClr val="5C6679"/>
-                </a:solidFill>
-                <a:latin typeface="Microsoft JhengHei"/>
-                <a:ea typeface="Microsoft JhengHei"/>
-                <a:cs typeface="Microsoft JhengHei"/>
-              </a:rPr>
-              <a:t>6523</a:t>
-            </a:r>
-          </a:p>
-        </p:txBody>
-      </p:sp>
-      <p:sp>
-        <p:nvSpPr>
-          <p:cNvPr id="15" name="Rounded Rectangle 14"/>
-          <p:cNvSpPr/>
-          <p:nvPr/>
-        </p:nvSpPr>
-        <p:spPr>
-          <a:xfrm>
-            <a:off x="10149840" y="1792224"/>
-            <a:ext cx="1234440" cy="347472"/>
-          </a:xfrm>
-          <a:prstGeom prst="roundRect">
-            <a:avLst/>
-          </a:prstGeom>
-          <a:solidFill>
-            <a:srgbClr val="E63946"/>
-          </a:solidFill>
-          <a:ln>
-            <a:noFill/>
-          </a:ln>
-          <a:effectLst/>
-        </p:spPr>
-        <p:style>
-          <a:lnRef idx="1">
-            <a:schemeClr val="accent1"/>
-          </a:lnRef>
-          <a:fillRef idx="3">
-            <a:schemeClr val="accent1"/>
-          </a:fillRef>
-          <a:effectRef idx="2">
-            <a:schemeClr val="accent1"/>
-          </a:effectRef>
-          <a:fontRef idx="minor">
-            <a:schemeClr val="lt1"/>
-          </a:fontRef>
-        </p:style>
-        <p:txBody>
-          <a:bodyPr rtlCol="0" anchor="ctr"/>
-          <a:lstStyle/>
-          <a:p>
-            <a:pPr algn="ctr"/>
-          </a:p>
-        </p:txBody>
-      </p:sp>
-      <p:sp>
-        <p:nvSpPr>
-          <p:cNvPr id="16" name="TextBox 15"/>
-          <p:cNvSpPr txBox="1"/>
-          <p:nvPr/>
-        </p:nvSpPr>
-        <p:spPr>
-          <a:xfrm>
-            <a:off x="10149840" y="1792224"/>
-            <a:ext cx="1234440" cy="347472"/>
-          </a:xfrm>
-          <a:prstGeom prst="rect">
-            <a:avLst/>
-          </a:prstGeom>
-          <a:noFill/>
-        </p:spPr>
-        <p:txBody>
-          <a:bodyPr wrap="square" anchor="ctr" lIns="0" rIns="0" tIns="0" bIns="0">
-            <a:spAutoFit/>
-          </a:bodyPr>
-          <a:lstStyle/>
-          <a:p>
-            <a:pPr algn="ctr"/>
-            <a:r>
-              <a:rPr sz="1050" b="1">
-                <a:solidFill>
-                  <a:srgbClr val="FFFFFF"/>
-                </a:solidFill>
-                <a:latin typeface="Microsoft JhengHei"/>
-                <a:ea typeface="Microsoft JhengHei"/>
-                <a:cs typeface="Microsoft JhengHei"/>
-              </a:rPr>
-              <a:t>駭客攻擊</a:t>
-            </a:r>
-          </a:p>
-        </p:txBody>
-      </p:sp>
-      <p:sp>
-        <p:nvSpPr>
-          <p:cNvPr id="17" name="TextBox 16"/>
-          <p:cNvSpPr txBox="1"/>
-          <p:nvPr/>
-        </p:nvSpPr>
-        <p:spPr>
-          <a:xfrm>
-            <a:off x="6400800" y="2267712"/>
-            <a:ext cx="4937760" cy="640080"/>
-          </a:xfrm>
-          <a:prstGeom prst="rect">
-            <a:avLst/>
-          </a:prstGeom>
-          <a:noFill/>
-        </p:spPr>
-        <p:txBody>
-          <a:bodyPr wrap="square" anchor="t" lIns="0" rIns="0" tIns="0" bIns="0">
-            <a:spAutoFit/>
-          </a:bodyPr>
-          <a:lstStyle/>
-          <a:p>
-            <a:pPr algn="l">
-              <a:lnSpc>
-                <a:spcPts val="1500"/>
-              </a:lnSpc>
-            </a:pPr>
-            <a:r>
-              <a:rPr sz="1100" b="1">
-                <a:solidFill>
-                  <a:srgbClr val="E63946"/>
-                </a:solidFill>
-                <a:latin typeface="Microsoft JhengHei"/>
-                <a:ea typeface="Microsoft JhengHei"/>
-                <a:cs typeface="Microsoft JhengHei"/>
-              </a:rPr>
-              <a:t>緣由　</a:t>
-            </a:r>
-            <a:r>
-              <a:rPr sz="1100" b="0">
-                <a:solidFill>
-                  <a:srgbClr val="1A2233"/>
-                </a:solidFill>
-                <a:latin typeface="Microsoft JhengHei"/>
-                <a:ea typeface="Microsoft JhengHei"/>
-                <a:cs typeface="Microsoft JhengHei"/>
-              </a:rPr>
-              <a:t>本公司部分內部資訊系統遭受網路攻擊事件，初步評估對公司營運無重大影響。</a:t>
-            </a:r>
-          </a:p>
-        </p:txBody>
-      </p:sp>
-      <p:sp>
-        <p:nvSpPr>
-          <p:cNvPr id="18" name="TextBox 17"/>
-          <p:cNvSpPr txBox="1"/>
-          <p:nvPr/>
-        </p:nvSpPr>
-        <p:spPr>
-          <a:xfrm>
-            <a:off x="6400800" y="2926080"/>
-            <a:ext cx="4937760" cy="713232"/>
-          </a:xfrm>
-          <a:prstGeom prst="rect">
-            <a:avLst/>
-          </a:prstGeom>
-          <a:noFill/>
-        </p:spPr>
-        <p:txBody>
-          <a:bodyPr wrap="square" anchor="t" lIns="0" rIns="0" tIns="0" bIns="0">
-            <a:spAutoFit/>
-          </a:bodyPr>
-          <a:lstStyle/>
-          <a:p>
-            <a:pPr algn="l">
-              <a:lnSpc>
-                <a:spcPts val="1500"/>
-              </a:lnSpc>
-            </a:pPr>
-            <a:r>
-              <a:rPr sz="1100" b="1">
-                <a:solidFill>
-                  <a:srgbClr val="E63946"/>
-                </a:solidFill>
-                <a:latin typeface="Microsoft JhengHei"/>
-                <a:ea typeface="Microsoft JhengHei"/>
-                <a:cs typeface="Microsoft JhengHei"/>
-              </a:rPr>
-              <a:t>因應　</a:t>
-            </a:r>
-            <a:r>
-              <a:rPr sz="1100" b="0">
-                <a:solidFill>
-                  <a:srgbClr val="1A2233"/>
-                </a:solidFill>
-                <a:latin typeface="Microsoft JhengHei"/>
-                <a:ea typeface="Microsoft JhengHei"/>
-                <a:cs typeface="Microsoft JhengHei"/>
-              </a:rPr>
-              <a:t>本公司將持續強化網路與資訊基礎架構之安全管控，以確保資訊安全。</a:t>
-            </a:r>
-          </a:p>
-        </p:txBody>
-      </p:sp>
-      <p:sp>
-        <p:nvSpPr>
-          <p:cNvPr id="19" name="Rounded Rectangle 18"/>
-          <p:cNvSpPr/>
-          <p:nvPr/>
-        </p:nvSpPr>
-        <p:spPr>
-          <a:xfrm>
-            <a:off x="548640" y="3886200"/>
-            <a:ext cx="5394960" cy="2148840"/>
-          </a:xfrm>
-          <a:prstGeom prst="roundRect">
-            <a:avLst/>
-          </a:prstGeom>
-          <a:solidFill>
-            <a:srgbClr val="FFFFFF"/>
-          </a:solidFill>
-          <a:ln w="12700">
-            <a:solidFill>
-              <a:srgbClr val="DDE3EE"/>
-            </a:solidFill>
-          </a:ln>
-          <a:effectLst/>
-        </p:spPr>
-        <p:style>
-          <a:lnRef idx="1">
-            <a:schemeClr val="accent1"/>
-          </a:lnRef>
-          <a:fillRef idx="3">
-            <a:schemeClr val="accent1"/>
-          </a:fillRef>
-          <a:effectRef idx="2">
-            <a:schemeClr val="accent1"/>
-          </a:effectRef>
-          <a:fontRef idx="minor">
-            <a:schemeClr val="lt1"/>
-          </a:fontRef>
-        </p:style>
-        <p:txBody>
-          <a:bodyPr rtlCol="0" anchor="ctr"/>
-          <a:lstStyle/>
-          <a:p>
-            <a:pPr algn="ctr"/>
-          </a:p>
-        </p:txBody>
-      </p:sp>
-      <p:sp>
-        <p:nvSpPr>
-          <p:cNvPr id="20" name="Rectangle 19"/>
-          <p:cNvSpPr/>
-          <p:nvPr/>
-        </p:nvSpPr>
-        <p:spPr>
-          <a:xfrm>
-            <a:off x="548640" y="3886200"/>
-            <a:ext cx="5394960" cy="109728"/>
-          </a:xfrm>
-          <a:prstGeom prst="rect">
-            <a:avLst/>
-          </a:prstGeom>
-          <a:solidFill>
-            <a:srgbClr val="E63946"/>
-          </a:solidFill>
-          <a:ln>
-            <a:noFill/>
-          </a:ln>
-          <a:effectLst/>
-        </p:spPr>
-        <p:style>
-          <a:lnRef idx="1">
-            <a:schemeClr val="accent1"/>
-          </a:lnRef>
-          <a:fillRef idx="3">
-            <a:schemeClr val="accent1"/>
-          </a:fillRef>
-          <a:effectRef idx="2">
-            <a:schemeClr val="accent1"/>
-          </a:effectRef>
-          <a:fontRef idx="minor">
-            <a:schemeClr val="lt1"/>
-          </a:fontRef>
-        </p:style>
-        <p:txBody>
-          <a:bodyPr rtlCol="0" anchor="ctr"/>
-          <a:lstStyle/>
-          <a:p>
-            <a:pPr algn="ctr"/>
-          </a:p>
-        </p:txBody>
-      </p:sp>
-      <p:sp>
-        <p:nvSpPr>
-          <p:cNvPr id="21" name="TextBox 20"/>
-          <p:cNvSpPr txBox="1"/>
-          <p:nvPr/>
-        </p:nvSpPr>
-        <p:spPr>
-          <a:xfrm>
-            <a:off x="777240" y="4105656"/>
-            <a:ext cx="3657600" cy="365760"/>
-          </a:xfrm>
-          <a:prstGeom prst="rect">
-            <a:avLst/>
-          </a:prstGeom>
-          <a:noFill/>
-        </p:spPr>
-        <p:txBody>
-          <a:bodyPr wrap="square" anchor="ctr" lIns="0" rIns="0" tIns="0" bIns="0">
-            <a:spAutoFit/>
-          </a:bodyPr>
-          <a:lstStyle/>
-          <a:p>
-            <a:pPr algn="l"/>
-            <a:r>
-              <a:rPr sz="1600" b="1">
-                <a:solidFill>
-                  <a:srgbClr val="1A2233"/>
-                </a:solidFill>
-                <a:latin typeface="Microsoft JhengHei"/>
-                <a:ea typeface="Microsoft JhengHei"/>
-                <a:cs typeface="Microsoft JhengHei"/>
-              </a:rPr>
-              <a:t>大車隊 </a:t>
-            </a:r>
-            <a:r>
-              <a:rPr sz="1300" b="0">
-                <a:solidFill>
-                  <a:srgbClr val="5C6679"/>
-                </a:solidFill>
-                <a:latin typeface="Microsoft JhengHei"/>
-                <a:ea typeface="Microsoft JhengHei"/>
-                <a:cs typeface="Microsoft JhengHei"/>
-              </a:rPr>
-              <a:t>2640</a:t>
-            </a:r>
-          </a:p>
-        </p:txBody>
-      </p:sp>
-      <p:sp>
-        <p:nvSpPr>
-          <p:cNvPr id="22" name="Rounded Rectangle 21"/>
-          <p:cNvSpPr/>
-          <p:nvPr/>
-        </p:nvSpPr>
-        <p:spPr>
-          <a:xfrm>
-            <a:off x="4526280" y="4123944"/>
-            <a:ext cx="1234440" cy="347472"/>
-          </a:xfrm>
-          <a:prstGeom prst="roundRect">
-            <a:avLst/>
-          </a:prstGeom>
-          <a:solidFill>
-            <a:srgbClr val="E63946"/>
-          </a:solidFill>
-          <a:ln>
-            <a:noFill/>
-          </a:ln>
-          <a:effectLst/>
-        </p:spPr>
-        <p:style>
-          <a:lnRef idx="1">
-            <a:schemeClr val="accent1"/>
-          </a:lnRef>
-          <a:fillRef idx="3">
-            <a:schemeClr val="accent1"/>
-          </a:fillRef>
-          <a:effectRef idx="2">
-            <a:schemeClr val="accent1"/>
-          </a:effectRef>
-          <a:fontRef idx="minor">
-            <a:schemeClr val="lt1"/>
-          </a:fontRef>
-        </p:style>
-        <p:txBody>
-          <a:bodyPr rtlCol="0" anchor="ctr"/>
-          <a:lstStyle/>
-          <a:p>
-            <a:pPr algn="ctr"/>
-          </a:p>
-        </p:txBody>
-      </p:sp>
-      <p:sp>
-        <p:nvSpPr>
-          <p:cNvPr id="23" name="TextBox 22"/>
-          <p:cNvSpPr txBox="1"/>
-          <p:nvPr/>
-        </p:nvSpPr>
-        <p:spPr>
-          <a:xfrm>
-            <a:off x="4526280" y="4123944"/>
-            <a:ext cx="1234440" cy="347472"/>
-          </a:xfrm>
-          <a:prstGeom prst="rect">
-            <a:avLst/>
-          </a:prstGeom>
-          <a:noFill/>
-        </p:spPr>
-        <p:txBody>
-          <a:bodyPr wrap="square" anchor="ctr" lIns="0" rIns="0" tIns="0" bIns="0">
-            <a:spAutoFit/>
-          </a:bodyPr>
-          <a:lstStyle/>
-          <a:p>
-            <a:pPr algn="ctr"/>
-            <a:r>
-              <a:rPr sz="1050" b="1">
-                <a:solidFill>
-                  <a:srgbClr val="FFFFFF"/>
-                </a:solidFill>
-                <a:latin typeface="Microsoft JhengHei"/>
-                <a:ea typeface="Microsoft JhengHei"/>
-                <a:cs typeface="Microsoft JhengHei"/>
-              </a:rPr>
-              <a:t>駭客攻擊</a:t>
-            </a:r>
-          </a:p>
-        </p:txBody>
-      </p:sp>
-      <p:sp>
-        <p:nvSpPr>
-          <p:cNvPr id="24" name="TextBox 23"/>
-          <p:cNvSpPr txBox="1"/>
-          <p:nvPr/>
-        </p:nvSpPr>
-        <p:spPr>
-          <a:xfrm>
-            <a:off x="777240" y="4599432"/>
-            <a:ext cx="4937760" cy="640080"/>
-          </a:xfrm>
-          <a:prstGeom prst="rect">
-            <a:avLst/>
-          </a:prstGeom>
-          <a:noFill/>
-        </p:spPr>
-        <p:txBody>
-          <a:bodyPr wrap="square" anchor="t" lIns="0" rIns="0" tIns="0" bIns="0">
-            <a:spAutoFit/>
-          </a:bodyPr>
-          <a:lstStyle/>
-          <a:p>
-            <a:pPr algn="l">
-              <a:lnSpc>
-                <a:spcPts val="1500"/>
-              </a:lnSpc>
-            </a:pPr>
-            <a:r>
-              <a:rPr sz="1100" b="1">
-                <a:solidFill>
-                  <a:srgbClr val="E63946"/>
-                </a:solidFill>
-                <a:latin typeface="Microsoft JhengHei"/>
-                <a:ea typeface="Microsoft JhengHei"/>
-                <a:cs typeface="Microsoft JhengHei"/>
-              </a:rPr>
-              <a:t>緣由　</a:t>
-            </a:r>
-            <a:r>
-              <a:rPr sz="1100" b="0">
-                <a:solidFill>
-                  <a:srgbClr val="1A2233"/>
-                </a:solidFill>
-                <a:latin typeface="Microsoft JhengHei"/>
-                <a:ea typeface="Microsoft JhengHei"/>
-                <a:cs typeface="Microsoft JhengHei"/>
-              </a:rPr>
-              <a:t>本公司重要子公司全球商務科技股份有限公司於今日發現部分資訊系統遭受網路攻擊，已立即啟動資安應變機…</a:t>
-            </a:r>
-          </a:p>
-        </p:txBody>
-      </p:sp>
-      <p:sp>
-        <p:nvSpPr>
-          <p:cNvPr id="25" name="TextBox 24"/>
-          <p:cNvSpPr txBox="1"/>
-          <p:nvPr/>
-        </p:nvSpPr>
-        <p:spPr>
-          <a:xfrm>
-            <a:off x="777240" y="5257800"/>
-            <a:ext cx="4937760" cy="713232"/>
-          </a:xfrm>
-          <a:prstGeom prst="rect">
-            <a:avLst/>
-          </a:prstGeom>
-          <a:noFill/>
-        </p:spPr>
-        <p:txBody>
-          <a:bodyPr wrap="square" anchor="t" lIns="0" rIns="0" tIns="0" bIns="0">
-            <a:spAutoFit/>
-          </a:bodyPr>
-          <a:lstStyle/>
-          <a:p>
-            <a:pPr algn="l">
-              <a:lnSpc>
-                <a:spcPts val="1500"/>
-              </a:lnSpc>
-            </a:pPr>
-            <a:r>
-              <a:rPr sz="1100" b="1">
-                <a:solidFill>
-                  <a:srgbClr val="E63946"/>
-                </a:solidFill>
-                <a:latin typeface="Microsoft JhengHei"/>
-                <a:ea typeface="Microsoft JhengHei"/>
-                <a:cs typeface="Microsoft JhengHei"/>
-              </a:rPr>
-              <a:t>因應　</a:t>
-            </a:r>
-            <a:r>
-              <a:rPr sz="1100" b="0">
-                <a:solidFill>
-                  <a:srgbClr val="1A2233"/>
-                </a:solidFill>
-                <a:latin typeface="Microsoft JhengHei"/>
-                <a:ea typeface="Microsoft JhengHei"/>
-                <a:cs typeface="Microsoft JhengHei"/>
-              </a:rPr>
-              <a:t>公司將持續進行資安鑑識、系統安全強化及相關風險控管作業，受影響系統預期可於短期內逐步恢復正常運作；後續如調查結果或事件發…</a:t>
             </a:r>
           </a:p>
         </p:txBody>

--- a/資安事件因應分析.pptx
+++ b/資安事件因應分析.pptx
@@ -186,7 +186,7 @@
                 <c:formatCode>General</c:formatCode>
                 <c:ptCount val="3"/>
                 <c:pt idx="0">
-                  <c:v>4</c:v>
+                  <c:v>3</c:v>
                 </c:pt>
                 <c:pt idx="1">
                   <c:v>4</c:v>
@@ -3529,7 +3529,7 @@
                 <a:ea typeface="Microsoft JhengHei"/>
                 <a:cs typeface="Microsoft JhengHei"/>
               </a:rPr>
-              <a:t>資料期間 2026-09-15 ~ 2026-10-15　｜　MOPS 重大訊息全文檢索　｜　12 家公司</a:t>
+              <a:t>資料期間 2026-09-16 ~ 2026-10-16　｜　MOPS 重大訊息全文檢索　｜　11 家公司</a:t>
             </a:r>
           </a:p>
         </p:txBody>
@@ -3746,7 +3746,7 @@
                 <a:ea typeface="Microsoft JhengHei"/>
                 <a:cs typeface="Microsoft JhengHei"/>
               </a:rPr>
-              <a:t>資料期間內 MOPS 揭露之 12 起資安相關重大訊息</a:t>
+              <a:t>資料期間內 MOPS 揭露之 11 起資安相關重大訊息</a:t>
             </a:r>
           </a:p>
         </p:txBody>
@@ -3829,7 +3829,7 @@
                 <a:ea typeface="Microsoft JhengHei"/>
                 <a:cs typeface="Microsoft JhengHei"/>
               </a:rPr>
-              <a:t>12</a:t>
+              <a:t>11</a:t>
             </a:r>
           </a:p>
         </p:txBody>
@@ -4136,7 +4136,7 @@
                 <a:gridCol w="2286000"/>
                 <a:gridCol w="5120640"/>
               </a:tblGrid>
-              <a:tr h="274320">
+              <a:tr h="297180">
                 <a:tc>
                   <a:txBody>
                     <a:bodyPr/>
@@ -4258,7 +4258,7 @@
                   </a:tcPr>
                 </a:tc>
               </a:tr>
-              <a:tr h="274320">
+              <a:tr h="297180">
                 <a:tc>
                   <a:txBody>
                     <a:bodyPr/>
@@ -4273,7 +4273,7 @@
                           <a:ea typeface="Microsoft JhengHei"/>
                           <a:cs typeface="Microsoft JhengHei"/>
                         </a:rPr>
-                        <a:t>緯致</a:t>
+                        <a:t>91APP*-KY</a:t>
                       </a:r>
                     </a:p>
                   </a:txBody>
@@ -4297,7 +4297,7 @@
                           <a:ea typeface="Microsoft JhengHei"/>
                           <a:cs typeface="Microsoft JhengHei"/>
                         </a:rPr>
-                        <a:t>4953</a:t>
+                        <a:t>6741</a:t>
                       </a:r>
                     </a:p>
                   </a:txBody>
@@ -4321,7 +4321,251 @@
                           <a:ea typeface="Microsoft JhengHei"/>
                           <a:cs typeface="Microsoft JhengHei"/>
                         </a:rPr>
+                        <a:t>10/16</a:t>
+                      </a:r>
+                    </a:p>
+                  </a:txBody>
+                  <a:tcPr anchor="ctr" marL="73152" marT="9144" marB="9144">
+                    <a:solidFill>
+                      <a:srgbClr val="FFFFFF"/>
+                    </a:solidFill>
+                  </a:tcPr>
+                </a:tc>
+                <a:tc>
+                  <a:txBody>
+                    <a:bodyPr/>
+                    <a:lstStyle/>
+                    <a:p>
+                      <a:r>
+                        <a:rPr sz="1150" b="1">
+                          <a:solidFill>
+                            <a:srgbClr val="E63946"/>
+                          </a:solidFill>
+                          <a:latin typeface="Microsoft JhengHei"/>
+                          <a:ea typeface="Microsoft JhengHei"/>
+                          <a:cs typeface="Microsoft JhengHei"/>
+                        </a:rPr>
+                        <a:t>駭客攻擊</a:t>
+                      </a:r>
+                    </a:p>
+                  </a:txBody>
+                  <a:tcPr anchor="ctr" marL="73152" marT="9144" marB="9144">
+                    <a:solidFill>
+                      <a:srgbClr val="FFFFFF"/>
+                    </a:solidFill>
+                  </a:tcPr>
+                </a:tc>
+                <a:tc>
+                  <a:txBody>
+                    <a:bodyPr/>
+                    <a:lstStyle/>
+                    <a:p>
+                      <a:r>
+                        <a:rPr sz="1150" b="0">
+                          <a:solidFill>
+                            <a:srgbClr val="1A2233"/>
+                          </a:solidFill>
+                          <a:latin typeface="Microsoft JhengHei"/>
+                          <a:ea typeface="Microsoft JhengHei"/>
+                          <a:cs typeface="Microsoft JhengHei"/>
+                        </a:rPr>
+                        <a:t>目前評估對公司營運無重大影響。</a:t>
+                      </a:r>
+                    </a:p>
+                  </a:txBody>
+                  <a:tcPr anchor="ctr" marL="73152" marT="9144" marB="9144">
+                    <a:solidFill>
+                      <a:srgbClr val="FFFFFF"/>
+                    </a:solidFill>
+                  </a:tcPr>
+                </a:tc>
+              </a:tr>
+              <a:tr h="297180">
+                <a:tc>
+                  <a:txBody>
+                    <a:bodyPr/>
+                    <a:lstStyle/>
+                    <a:p>
+                      <a:r>
+                        <a:rPr sz="1150" b="0">
+                          <a:solidFill>
+                            <a:srgbClr val="1A2233"/>
+                          </a:solidFill>
+                          <a:latin typeface="Microsoft JhengHei"/>
+                          <a:ea typeface="Microsoft JhengHei"/>
+                          <a:cs typeface="Microsoft JhengHei"/>
+                        </a:rPr>
+                        <a:t>緯致</a:t>
+                      </a:r>
+                    </a:p>
+                  </a:txBody>
+                  <a:tcPr anchor="ctr" marL="73152" marT="9144" marB="9144">
+                    <a:solidFill>
+                      <a:srgbClr val="EEF2F9"/>
+                    </a:solidFill>
+                  </a:tcPr>
+                </a:tc>
+                <a:tc>
+                  <a:txBody>
+                    <a:bodyPr/>
+                    <a:lstStyle/>
+                    <a:p>
+                      <a:r>
+                        <a:rPr sz="1150" b="0">
+                          <a:solidFill>
+                            <a:srgbClr val="1A2233"/>
+                          </a:solidFill>
+                          <a:latin typeface="Microsoft JhengHei"/>
+                          <a:ea typeface="Microsoft JhengHei"/>
+                          <a:cs typeface="Microsoft JhengHei"/>
+                        </a:rPr>
+                        <a:t>4953</a:t>
+                      </a:r>
+                    </a:p>
+                  </a:txBody>
+                  <a:tcPr anchor="ctr" marL="73152" marT="9144" marB="9144">
+                    <a:solidFill>
+                      <a:srgbClr val="EEF2F9"/>
+                    </a:solidFill>
+                  </a:tcPr>
+                </a:tc>
+                <a:tc>
+                  <a:txBody>
+                    <a:bodyPr/>
+                    <a:lstStyle/>
+                    <a:p>
+                      <a:r>
+                        <a:rPr sz="1150" b="0">
+                          <a:solidFill>
+                            <a:srgbClr val="1A2233"/>
+                          </a:solidFill>
+                          <a:latin typeface="Microsoft JhengHei"/>
+                          <a:ea typeface="Microsoft JhengHei"/>
+                          <a:cs typeface="Microsoft JhengHei"/>
+                        </a:rPr>
                         <a:t>10/09</a:t>
+                      </a:r>
+                    </a:p>
+                  </a:txBody>
+                  <a:tcPr anchor="ctr" marL="73152" marT="9144" marB="9144">
+                    <a:solidFill>
+                      <a:srgbClr val="EEF2F9"/>
+                    </a:solidFill>
+                  </a:tcPr>
+                </a:tc>
+                <a:tc>
+                  <a:txBody>
+                    <a:bodyPr/>
+                    <a:lstStyle/>
+                    <a:p>
+                      <a:r>
+                        <a:rPr sz="1150" b="1">
+                          <a:solidFill>
+                            <a:srgbClr val="5C6679"/>
+                          </a:solidFill>
+                          <a:latin typeface="Microsoft JhengHei"/>
+                          <a:ea typeface="Microsoft JhengHei"/>
+                          <a:cs typeface="Microsoft JhengHei"/>
+                        </a:rPr>
+                        <a:t>其他</a:t>
+                      </a:r>
+                    </a:p>
+                  </a:txBody>
+                  <a:tcPr anchor="ctr" marL="73152" marT="9144" marB="9144">
+                    <a:solidFill>
+                      <a:srgbClr val="EEF2F9"/>
+                    </a:solidFill>
+                  </a:tcPr>
+                </a:tc>
+                <a:tc>
+                  <a:txBody>
+                    <a:bodyPr/>
+                    <a:lstStyle/>
+                    <a:p>
+                      <a:r>
+                        <a:rPr sz="1150" b="0">
+                          <a:solidFill>
+                            <a:srgbClr val="1A2233"/>
+                          </a:solidFill>
+                          <a:latin typeface="Microsoft JhengHei"/>
+                          <a:ea typeface="Microsoft JhengHei"/>
+                          <a:cs typeface="Microsoft JhengHei"/>
+                        </a:rPr>
+                        <a:t>目前公司整體系統與營運正常運作，對公司尚無重大影響。</a:t>
+                      </a:r>
+                    </a:p>
+                  </a:txBody>
+                  <a:tcPr anchor="ctr" marL="73152" marT="9144" marB="9144">
+                    <a:solidFill>
+                      <a:srgbClr val="EEF2F9"/>
+                    </a:solidFill>
+                  </a:tcPr>
+                </a:tc>
+              </a:tr>
+              <a:tr h="297180">
+                <a:tc>
+                  <a:txBody>
+                    <a:bodyPr/>
+                    <a:lstStyle/>
+                    <a:p>
+                      <a:r>
+                        <a:rPr sz="1150" b="0">
+                          <a:solidFill>
+                            <a:srgbClr val="1A2233"/>
+                          </a:solidFill>
+                          <a:latin typeface="Microsoft JhengHei"/>
+                          <a:ea typeface="Microsoft JhengHei"/>
+                          <a:cs typeface="Microsoft JhengHei"/>
+                        </a:rPr>
+                        <a:t>上福</a:t>
+                      </a:r>
+                    </a:p>
+                  </a:txBody>
+                  <a:tcPr anchor="ctr" marL="73152" marT="9144" marB="9144">
+                    <a:solidFill>
+                      <a:srgbClr val="FFFFFF"/>
+                    </a:solidFill>
+                  </a:tcPr>
+                </a:tc>
+                <a:tc>
+                  <a:txBody>
+                    <a:bodyPr/>
+                    <a:lstStyle/>
+                    <a:p>
+                      <a:r>
+                        <a:rPr sz="1150" b="0">
+                          <a:solidFill>
+                            <a:srgbClr val="1A2233"/>
+                          </a:solidFill>
+                          <a:latin typeface="Microsoft JhengHei"/>
+                          <a:ea typeface="Microsoft JhengHei"/>
+                          <a:cs typeface="Microsoft JhengHei"/>
+                        </a:rPr>
+                        <a:t>6128</a:t>
+                      </a:r>
+                    </a:p>
+                  </a:txBody>
+                  <a:tcPr anchor="ctr" marL="73152" marT="9144" marB="9144">
+                    <a:solidFill>
+                      <a:srgbClr val="FFFFFF"/>
+                    </a:solidFill>
+                  </a:tcPr>
+                </a:tc>
+                <a:tc>
+                  <a:txBody>
+                    <a:bodyPr/>
+                    <a:lstStyle/>
+                    <a:p>
+                      <a:r>
+                        <a:rPr sz="1150" b="0">
+                          <a:solidFill>
+                            <a:srgbClr val="1A2233"/>
+                          </a:solidFill>
+                          <a:latin typeface="Microsoft JhengHei"/>
+                          <a:ea typeface="Microsoft JhengHei"/>
+                          <a:cs typeface="Microsoft JhengHei"/>
+                        </a:rPr>
+                        <a:t>10/07</a:t>
                       </a:r>
                     </a:p>
                   </a:txBody>
@@ -4369,7 +4613,7 @@
                           <a:ea typeface="Microsoft JhengHei"/>
                           <a:cs typeface="Microsoft JhengHei"/>
                         </a:rPr>
-                        <a:t>目前公司整體系統與營運正常運作，對公司尚無重大影響。</a:t>
+                        <a:t>目前評估沒有個資、亦沒有機密或重要文件資料外洩等情事發生，對本公司營…</a:t>
                       </a:r>
                     </a:p>
                   </a:txBody>
@@ -4380,7 +4624,7 @@
                   </a:tcPr>
                 </a:tc>
               </a:tr>
-              <a:tr h="274320">
+              <a:tr h="297180">
                 <a:tc>
                   <a:txBody>
                     <a:bodyPr/>
@@ -4395,7 +4639,7 @@
                           <a:ea typeface="Microsoft JhengHei"/>
                           <a:cs typeface="Microsoft JhengHei"/>
                         </a:rPr>
-                        <a:t>上福</a:t>
+                        <a:t>杏一</a:t>
                       </a:r>
                     </a:p>
                   </a:txBody>
@@ -4419,7 +4663,7 @@
                           <a:ea typeface="Microsoft JhengHei"/>
                           <a:cs typeface="Microsoft JhengHei"/>
                         </a:rPr>
-                        <a:t>6128</a:t>
+                        <a:t>4175</a:t>
                       </a:r>
                     </a:p>
                   </a:txBody>
@@ -4461,13 +4705,13 @@
                       <a:r>
                         <a:rPr sz="1150" b="1">
                           <a:solidFill>
-                            <a:srgbClr val="5C6679"/>
+                            <a:srgbClr val="27A6C4"/>
                           </a:solidFill>
                           <a:latin typeface="Microsoft JhengHei"/>
                           <a:ea typeface="Microsoft JhengHei"/>
                           <a:cs typeface="Microsoft JhengHei"/>
                         </a:rPr>
-                        <a:t>其他</a:t>
+                        <a:t>個資外洩</a:t>
                       </a:r>
                     </a:p>
                   </a:txBody>
@@ -4491,7 +4735,7 @@
                           <a:ea typeface="Microsoft JhengHei"/>
                           <a:cs typeface="Microsoft JhengHei"/>
                         </a:rPr>
-                        <a:t>目前評估沒有個資、亦沒有機密或重要文件資料外洩等情事發生，對本公司營…</a:t>
+                        <a:t>截至目前為止對公司財務及業務並無重大影響。</a:t>
                       </a:r>
                     </a:p>
                   </a:txBody>
@@ -4502,7 +4746,7 @@
                   </a:tcPr>
                 </a:tc>
               </a:tr>
-              <a:tr h="274320">
+              <a:tr h="297180">
                 <a:tc>
                   <a:txBody>
                     <a:bodyPr/>
@@ -4517,7 +4761,7 @@
                           <a:ea typeface="Microsoft JhengHei"/>
                           <a:cs typeface="Microsoft JhengHei"/>
                         </a:rPr>
-                        <a:t>杏一</a:t>
+                        <a:t>鈊象</a:t>
                       </a:r>
                     </a:p>
                   </a:txBody>
@@ -4541,7 +4785,7 @@
                           <a:ea typeface="Microsoft JhengHei"/>
                           <a:cs typeface="Microsoft JhengHei"/>
                         </a:rPr>
-                        <a:t>4175</a:t>
+                        <a:t>3293</a:t>
                       </a:r>
                     </a:p>
                   </a:txBody>
@@ -4613,7 +4857,7 @@
                           <a:ea typeface="Microsoft JhengHei"/>
                           <a:cs typeface="Microsoft JhengHei"/>
                         </a:rPr>
-                        <a:t>截至目前為止對公司財務及業務並無重大影響。</a:t>
+                        <a:t>目前評估對公司營運無重大影響。</a:t>
                       </a:r>
                     </a:p>
                   </a:txBody>
@@ -4624,7 +4868,7 @@
                   </a:tcPr>
                 </a:tc>
               </a:tr>
-              <a:tr h="274320">
+              <a:tr h="297180">
                 <a:tc>
                   <a:txBody>
                     <a:bodyPr/>
@@ -4639,7 +4883,7 @@
                           <a:ea typeface="Microsoft JhengHei"/>
                           <a:cs typeface="Microsoft JhengHei"/>
                         </a:rPr>
-                        <a:t>鈊象</a:t>
+                        <a:t>一零四</a:t>
                       </a:r>
                     </a:p>
                   </a:txBody>
@@ -4663,7 +4907,7 @@
                           <a:ea typeface="Microsoft JhengHei"/>
                           <a:cs typeface="Microsoft JhengHei"/>
                         </a:rPr>
-                        <a:t>3293</a:t>
+                        <a:t>3130</a:t>
                       </a:r>
                     </a:p>
                   </a:txBody>
@@ -4687,7 +4931,495 @@
                           <a:ea typeface="Microsoft JhengHei"/>
                           <a:cs typeface="Microsoft JhengHei"/>
                         </a:rPr>
-                        <a:t>10/07</a:t>
+                        <a:t>10/06</a:t>
+                      </a:r>
+                    </a:p>
+                  </a:txBody>
+                  <a:tcPr anchor="ctr" marL="73152" marT="9144" marB="9144">
+                    <a:solidFill>
+                      <a:srgbClr val="EEF2F9"/>
+                    </a:solidFill>
+                  </a:tcPr>
+                </a:tc>
+                <a:tc>
+                  <a:txBody>
+                    <a:bodyPr/>
+                    <a:lstStyle/>
+                    <a:p>
+                      <a:r>
+                        <a:rPr sz="1150" b="1">
+                          <a:solidFill>
+                            <a:srgbClr val="5C6679"/>
+                          </a:solidFill>
+                          <a:latin typeface="Microsoft JhengHei"/>
+                          <a:ea typeface="Microsoft JhengHei"/>
+                          <a:cs typeface="Microsoft JhengHei"/>
+                        </a:rPr>
+                        <a:t>其他</a:t>
+                      </a:r>
+                    </a:p>
+                  </a:txBody>
+                  <a:tcPr anchor="ctr" marL="73152" marT="9144" marB="9144">
+                    <a:solidFill>
+                      <a:srgbClr val="EEF2F9"/>
+                    </a:solidFill>
+                  </a:tcPr>
+                </a:tc>
+                <a:tc>
+                  <a:txBody>
+                    <a:bodyPr/>
+                    <a:lstStyle/>
+                    <a:p>
+                      <a:r>
+                        <a:rPr sz="1150" b="0">
+                          <a:solidFill>
+                            <a:srgbClr val="1A2233"/>
+                          </a:solidFill>
+                          <a:latin typeface="Microsoft JhengHei"/>
+                          <a:ea typeface="Microsoft JhengHei"/>
+                          <a:cs typeface="Microsoft JhengHei"/>
+                        </a:rPr>
+                        <a:t>目前系統與營運正常運作，對公司尚無重大影響。相關影響仍持續評估中。</a:t>
+                      </a:r>
+                    </a:p>
+                  </a:txBody>
+                  <a:tcPr anchor="ctr" marL="73152" marT="9144" marB="9144">
+                    <a:solidFill>
+                      <a:srgbClr val="EEF2F9"/>
+                    </a:solidFill>
+                  </a:tcPr>
+                </a:tc>
+              </a:tr>
+              <a:tr h="297180">
+                <a:tc>
+                  <a:txBody>
+                    <a:bodyPr/>
+                    <a:lstStyle/>
+                    <a:p>
+                      <a:r>
+                        <a:rPr sz="1150" b="0">
+                          <a:solidFill>
+                            <a:srgbClr val="1A2233"/>
+                          </a:solidFill>
+                          <a:latin typeface="Microsoft JhengHei"/>
+                          <a:ea typeface="Microsoft JhengHei"/>
+                          <a:cs typeface="Microsoft JhengHei"/>
+                        </a:rPr>
+                        <a:t>安心</a:t>
+                      </a:r>
+                    </a:p>
+                  </a:txBody>
+                  <a:tcPr anchor="ctr" marL="73152" marT="9144" marB="9144">
+                    <a:solidFill>
+                      <a:srgbClr val="FFFFFF"/>
+                    </a:solidFill>
+                  </a:tcPr>
+                </a:tc>
+                <a:tc>
+                  <a:txBody>
+                    <a:bodyPr/>
+                    <a:lstStyle/>
+                    <a:p>
+                      <a:r>
+                        <a:rPr sz="1150" b="0">
+                          <a:solidFill>
+                            <a:srgbClr val="1A2233"/>
+                          </a:solidFill>
+                          <a:latin typeface="Microsoft JhengHei"/>
+                          <a:ea typeface="Microsoft JhengHei"/>
+                          <a:cs typeface="Microsoft JhengHei"/>
+                        </a:rPr>
+                        <a:t>1259</a:t>
+                      </a:r>
+                    </a:p>
+                  </a:txBody>
+                  <a:tcPr anchor="ctr" marL="73152" marT="9144" marB="9144">
+                    <a:solidFill>
+                      <a:srgbClr val="FFFFFF"/>
+                    </a:solidFill>
+                  </a:tcPr>
+                </a:tc>
+                <a:tc>
+                  <a:txBody>
+                    <a:bodyPr/>
+                    <a:lstStyle/>
+                    <a:p>
+                      <a:r>
+                        <a:rPr sz="1150" b="0">
+                          <a:solidFill>
+                            <a:srgbClr val="1A2233"/>
+                          </a:solidFill>
+                          <a:latin typeface="Microsoft JhengHei"/>
+                          <a:ea typeface="Microsoft JhengHei"/>
+                          <a:cs typeface="Microsoft JhengHei"/>
+                        </a:rPr>
+                        <a:t>10/01</a:t>
+                      </a:r>
+                    </a:p>
+                  </a:txBody>
+                  <a:tcPr anchor="ctr" marL="73152" marT="9144" marB="9144">
+                    <a:solidFill>
+                      <a:srgbClr val="FFFFFF"/>
+                    </a:solidFill>
+                  </a:tcPr>
+                </a:tc>
+                <a:tc>
+                  <a:txBody>
+                    <a:bodyPr/>
+                    <a:lstStyle/>
+                    <a:p>
+                      <a:r>
+                        <a:rPr sz="1150" b="1">
+                          <a:solidFill>
+                            <a:srgbClr val="27A6C4"/>
+                          </a:solidFill>
+                          <a:latin typeface="Microsoft JhengHei"/>
+                          <a:ea typeface="Microsoft JhengHei"/>
+                          <a:cs typeface="Microsoft JhengHei"/>
+                        </a:rPr>
+                        <a:t>個資外洩</a:t>
+                      </a:r>
+                    </a:p>
+                  </a:txBody>
+                  <a:tcPr anchor="ctr" marL="73152" marT="9144" marB="9144">
+                    <a:solidFill>
+                      <a:srgbClr val="FFFFFF"/>
+                    </a:solidFill>
+                  </a:tcPr>
+                </a:tc>
+                <a:tc>
+                  <a:txBody>
+                    <a:bodyPr/>
+                    <a:lstStyle/>
+                    <a:p>
+                      <a:r>
+                        <a:rPr sz="1150" b="0">
+                          <a:solidFill>
+                            <a:srgbClr val="1A2233"/>
+                          </a:solidFill>
+                          <a:latin typeface="Microsoft JhengHei"/>
+                          <a:ea typeface="Microsoft JhengHei"/>
+                          <a:cs typeface="Microsoft JhengHei"/>
+                        </a:rPr>
+                        <a:t>截至目前為止對公司財務及業務並無重大影響。</a:t>
+                      </a:r>
+                    </a:p>
+                  </a:txBody>
+                  <a:tcPr anchor="ctr" marL="73152" marT="9144" marB="9144">
+                    <a:solidFill>
+                      <a:srgbClr val="FFFFFF"/>
+                    </a:solidFill>
+                  </a:tcPr>
+                </a:tc>
+              </a:tr>
+              <a:tr h="297180">
+                <a:tc>
+                  <a:txBody>
+                    <a:bodyPr/>
+                    <a:lstStyle/>
+                    <a:p>
+                      <a:r>
+                        <a:rPr sz="1150" b="0">
+                          <a:solidFill>
+                            <a:srgbClr val="1A2233"/>
+                          </a:solidFill>
+                          <a:latin typeface="Microsoft JhengHei"/>
+                          <a:ea typeface="Microsoft JhengHei"/>
+                          <a:cs typeface="Microsoft JhengHei"/>
+                        </a:rPr>
+                        <a:t>神腦</a:t>
+                      </a:r>
+                    </a:p>
+                  </a:txBody>
+                  <a:tcPr anchor="ctr" marL="73152" marT="9144" marB="9144">
+                    <a:solidFill>
+                      <a:srgbClr val="EEF2F9"/>
+                    </a:solidFill>
+                  </a:tcPr>
+                </a:tc>
+                <a:tc>
+                  <a:txBody>
+                    <a:bodyPr/>
+                    <a:lstStyle/>
+                    <a:p>
+                      <a:r>
+                        <a:rPr sz="1150" b="0">
+                          <a:solidFill>
+                            <a:srgbClr val="1A2233"/>
+                          </a:solidFill>
+                          <a:latin typeface="Microsoft JhengHei"/>
+                          <a:ea typeface="Microsoft JhengHei"/>
+                          <a:cs typeface="Microsoft JhengHei"/>
+                        </a:rPr>
+                        <a:t>2450</a:t>
+                      </a:r>
+                    </a:p>
+                  </a:txBody>
+                  <a:tcPr anchor="ctr" marL="73152" marT="9144" marB="9144">
+                    <a:solidFill>
+                      <a:srgbClr val="EEF2F9"/>
+                    </a:solidFill>
+                  </a:tcPr>
+                </a:tc>
+                <a:tc>
+                  <a:txBody>
+                    <a:bodyPr/>
+                    <a:lstStyle/>
+                    <a:p>
+                      <a:r>
+                        <a:rPr sz="1150" b="0">
+                          <a:solidFill>
+                            <a:srgbClr val="1A2233"/>
+                          </a:solidFill>
+                          <a:latin typeface="Microsoft JhengHei"/>
+                          <a:ea typeface="Microsoft JhengHei"/>
+                          <a:cs typeface="Microsoft JhengHei"/>
+                        </a:rPr>
+                        <a:t>09/29</a:t>
+                      </a:r>
+                    </a:p>
+                  </a:txBody>
+                  <a:tcPr anchor="ctr" marL="73152" marT="9144" marB="9144">
+                    <a:solidFill>
+                      <a:srgbClr val="EEF2F9"/>
+                    </a:solidFill>
+                  </a:tcPr>
+                </a:tc>
+                <a:tc>
+                  <a:txBody>
+                    <a:bodyPr/>
+                    <a:lstStyle/>
+                    <a:p>
+                      <a:r>
+                        <a:rPr sz="1150" b="1">
+                          <a:solidFill>
+                            <a:srgbClr val="E63946"/>
+                          </a:solidFill>
+                          <a:latin typeface="Microsoft JhengHei"/>
+                          <a:ea typeface="Microsoft JhengHei"/>
+                          <a:cs typeface="Microsoft JhengHei"/>
+                        </a:rPr>
+                        <a:t>駭客攻擊</a:t>
+                      </a:r>
+                    </a:p>
+                  </a:txBody>
+                  <a:tcPr anchor="ctr" marL="73152" marT="9144" marB="9144">
+                    <a:solidFill>
+                      <a:srgbClr val="EEF2F9"/>
+                    </a:solidFill>
+                  </a:tcPr>
+                </a:tc>
+                <a:tc>
+                  <a:txBody>
+                    <a:bodyPr/>
+                    <a:lstStyle/>
+                    <a:p>
+                      <a:r>
+                        <a:rPr sz="1150" b="0">
+                          <a:solidFill>
+                            <a:srgbClr val="1A2233"/>
+                          </a:solidFill>
+                          <a:latin typeface="Microsoft JhengHei"/>
+                          <a:ea typeface="Microsoft JhengHei"/>
+                          <a:cs typeface="Microsoft JhengHei"/>
+                        </a:rPr>
+                        <a:t>評估對本公司營運、財務及服務提供無重大影響。</a:t>
+                      </a:r>
+                    </a:p>
+                  </a:txBody>
+                  <a:tcPr anchor="ctr" marL="73152" marT="9144" marB="9144">
+                    <a:solidFill>
+                      <a:srgbClr val="EEF2F9"/>
+                    </a:solidFill>
+                  </a:tcPr>
+                </a:tc>
+              </a:tr>
+              <a:tr h="297180">
+                <a:tc>
+                  <a:txBody>
+                    <a:bodyPr/>
+                    <a:lstStyle/>
+                    <a:p>
+                      <a:r>
+                        <a:rPr sz="1150" b="0">
+                          <a:solidFill>
+                            <a:srgbClr val="1A2233"/>
+                          </a:solidFill>
+                          <a:latin typeface="Microsoft JhengHei"/>
+                          <a:ea typeface="Microsoft JhengHei"/>
+                          <a:cs typeface="Microsoft JhengHei"/>
+                        </a:rPr>
+                        <a:t>鈊象</a:t>
+                      </a:r>
+                    </a:p>
+                  </a:txBody>
+                  <a:tcPr anchor="ctr" marL="73152" marT="9144" marB="9144">
+                    <a:solidFill>
+                      <a:srgbClr val="FFFFFF"/>
+                    </a:solidFill>
+                  </a:tcPr>
+                </a:tc>
+                <a:tc>
+                  <a:txBody>
+                    <a:bodyPr/>
+                    <a:lstStyle/>
+                    <a:p>
+                      <a:r>
+                        <a:rPr sz="1150" b="0">
+                          <a:solidFill>
+                            <a:srgbClr val="1A2233"/>
+                          </a:solidFill>
+                          <a:latin typeface="Microsoft JhengHei"/>
+                          <a:ea typeface="Microsoft JhengHei"/>
+                          <a:cs typeface="Microsoft JhengHei"/>
+                        </a:rPr>
+                        <a:t>3293</a:t>
+                      </a:r>
+                    </a:p>
+                  </a:txBody>
+                  <a:tcPr anchor="ctr" marL="73152" marT="9144" marB="9144">
+                    <a:solidFill>
+                      <a:srgbClr val="FFFFFF"/>
+                    </a:solidFill>
+                  </a:tcPr>
+                </a:tc>
+                <a:tc>
+                  <a:txBody>
+                    <a:bodyPr/>
+                    <a:lstStyle/>
+                    <a:p>
+                      <a:r>
+                        <a:rPr sz="1150" b="0">
+                          <a:solidFill>
+                            <a:srgbClr val="1A2233"/>
+                          </a:solidFill>
+                          <a:latin typeface="Microsoft JhengHei"/>
+                          <a:ea typeface="Microsoft JhengHei"/>
+                          <a:cs typeface="Microsoft JhengHei"/>
+                        </a:rPr>
+                        <a:t>09/29</a:t>
+                      </a:r>
+                    </a:p>
+                  </a:txBody>
+                  <a:tcPr anchor="ctr" marL="73152" marT="9144" marB="9144">
+                    <a:solidFill>
+                      <a:srgbClr val="FFFFFF"/>
+                    </a:solidFill>
+                  </a:tcPr>
+                </a:tc>
+                <a:tc>
+                  <a:txBody>
+                    <a:bodyPr/>
+                    <a:lstStyle/>
+                    <a:p>
+                      <a:r>
+                        <a:rPr sz="1150" b="1">
+                          <a:solidFill>
+                            <a:srgbClr val="5C6679"/>
+                          </a:solidFill>
+                          <a:latin typeface="Microsoft JhengHei"/>
+                          <a:ea typeface="Microsoft JhengHei"/>
+                          <a:cs typeface="Microsoft JhengHei"/>
+                        </a:rPr>
+                        <a:t>其他</a:t>
+                      </a:r>
+                    </a:p>
+                  </a:txBody>
+                  <a:tcPr anchor="ctr" marL="73152" marT="9144" marB="9144">
+                    <a:solidFill>
+                      <a:srgbClr val="FFFFFF"/>
+                    </a:solidFill>
+                  </a:tcPr>
+                </a:tc>
+                <a:tc>
+                  <a:txBody>
+                    <a:bodyPr/>
+                    <a:lstStyle/>
+                    <a:p>
+                      <a:r>
+                        <a:rPr sz="1150" b="0">
+                          <a:solidFill>
+                            <a:srgbClr val="1A2233"/>
+                          </a:solidFill>
+                          <a:latin typeface="Microsoft JhengHei"/>
+                          <a:ea typeface="Microsoft JhengHei"/>
+                          <a:cs typeface="Microsoft JhengHei"/>
+                        </a:rPr>
+                        <a:t>目前評估對公司營運尚無重大影響。</a:t>
+                      </a:r>
+                    </a:p>
+                  </a:txBody>
+                  <a:tcPr anchor="ctr" marL="73152" marT="9144" marB="9144">
+                    <a:solidFill>
+                      <a:srgbClr val="FFFFFF"/>
+                    </a:solidFill>
+                  </a:tcPr>
+                </a:tc>
+              </a:tr>
+              <a:tr h="297180">
+                <a:tc>
+                  <a:txBody>
+                    <a:bodyPr/>
+                    <a:lstStyle/>
+                    <a:p>
+                      <a:r>
+                        <a:rPr sz="1150" b="0">
+                          <a:solidFill>
+                            <a:srgbClr val="1A2233"/>
+                          </a:solidFill>
+                          <a:latin typeface="Microsoft JhengHei"/>
+                          <a:ea typeface="Microsoft JhengHei"/>
+                          <a:cs typeface="Microsoft JhengHei"/>
+                        </a:rPr>
+                        <a:t>柏文</a:t>
+                      </a:r>
+                    </a:p>
+                  </a:txBody>
+                  <a:tcPr anchor="ctr" marL="73152" marT="9144" marB="9144">
+                    <a:solidFill>
+                      <a:srgbClr val="EEF2F9"/>
+                    </a:solidFill>
+                  </a:tcPr>
+                </a:tc>
+                <a:tc>
+                  <a:txBody>
+                    <a:bodyPr/>
+                    <a:lstStyle/>
+                    <a:p>
+                      <a:r>
+                        <a:rPr sz="1150" b="0">
+                          <a:solidFill>
+                            <a:srgbClr val="1A2233"/>
+                          </a:solidFill>
+                          <a:latin typeface="Microsoft JhengHei"/>
+                          <a:ea typeface="Microsoft JhengHei"/>
+                          <a:cs typeface="Microsoft JhengHei"/>
+                        </a:rPr>
+                        <a:t>8462</a:t>
+                      </a:r>
+                    </a:p>
+                  </a:txBody>
+                  <a:tcPr anchor="ctr" marL="73152" marT="9144" marB="9144">
+                    <a:solidFill>
+                      <a:srgbClr val="EEF2F9"/>
+                    </a:solidFill>
+                  </a:tcPr>
+                </a:tc>
+                <a:tc>
+                  <a:txBody>
+                    <a:bodyPr/>
+                    <a:lstStyle/>
+                    <a:p>
+                      <a:r>
+                        <a:rPr sz="1150" b="0">
+                          <a:solidFill>
+                            <a:srgbClr val="1A2233"/>
+                          </a:solidFill>
+                          <a:latin typeface="Microsoft JhengHei"/>
+                          <a:ea typeface="Microsoft JhengHei"/>
+                          <a:cs typeface="Microsoft JhengHei"/>
+                        </a:rPr>
+                        <a:t>09/23</a:t>
                       </a:r>
                     </a:p>
                   </a:txBody>
@@ -4746,7 +5478,7 @@
                   </a:tcPr>
                 </a:tc>
               </a:tr>
-              <a:tr h="274320">
+              <a:tr h="297180">
                 <a:tc>
                   <a:txBody>
                     <a:bodyPr/>
@@ -4761,7 +5493,7 @@
                           <a:ea typeface="Microsoft JhengHei"/>
                           <a:cs typeface="Microsoft JhengHei"/>
                         </a:rPr>
-                        <a:t>一零四</a:t>
+                        <a:t>友訊</a:t>
                       </a:r>
                     </a:p>
                   </a:txBody>
@@ -4785,7 +5517,7 @@
                           <a:ea typeface="Microsoft JhengHei"/>
                           <a:cs typeface="Microsoft JhengHei"/>
                         </a:rPr>
-                        <a:t>3130</a:t>
+                        <a:t>2332</a:t>
                       </a:r>
                     </a:p>
                   </a:txBody>
@@ -4809,251 +5541,7 @@
                           <a:ea typeface="Microsoft JhengHei"/>
                           <a:cs typeface="Microsoft JhengHei"/>
                         </a:rPr>
-                        <a:t>10/06</a:t>
-                      </a:r>
-                    </a:p>
-                  </a:txBody>
-                  <a:tcPr anchor="ctr" marL="73152" marT="9144" marB="9144">
-                    <a:solidFill>
-                      <a:srgbClr val="FFFFFF"/>
-                    </a:solidFill>
-                  </a:tcPr>
-                </a:tc>
-                <a:tc>
-                  <a:txBody>
-                    <a:bodyPr/>
-                    <a:lstStyle/>
-                    <a:p>
-                      <a:r>
-                        <a:rPr sz="1150" b="1">
-                          <a:solidFill>
-                            <a:srgbClr val="5C6679"/>
-                          </a:solidFill>
-                          <a:latin typeface="Microsoft JhengHei"/>
-                          <a:ea typeface="Microsoft JhengHei"/>
-                          <a:cs typeface="Microsoft JhengHei"/>
-                        </a:rPr>
-                        <a:t>其他</a:t>
-                      </a:r>
-                    </a:p>
-                  </a:txBody>
-                  <a:tcPr anchor="ctr" marL="73152" marT="9144" marB="9144">
-                    <a:solidFill>
-                      <a:srgbClr val="FFFFFF"/>
-                    </a:solidFill>
-                  </a:tcPr>
-                </a:tc>
-                <a:tc>
-                  <a:txBody>
-                    <a:bodyPr/>
-                    <a:lstStyle/>
-                    <a:p>
-                      <a:r>
-                        <a:rPr sz="1150" b="0">
-                          <a:solidFill>
-                            <a:srgbClr val="1A2233"/>
-                          </a:solidFill>
-                          <a:latin typeface="Microsoft JhengHei"/>
-                          <a:ea typeface="Microsoft JhengHei"/>
-                          <a:cs typeface="Microsoft JhengHei"/>
-                        </a:rPr>
-                        <a:t>目前系統與營運正常運作，對公司尚無重大影響。相關影響仍持續評估中。</a:t>
-                      </a:r>
-                    </a:p>
-                  </a:txBody>
-                  <a:tcPr anchor="ctr" marL="73152" marT="9144" marB="9144">
-                    <a:solidFill>
-                      <a:srgbClr val="FFFFFF"/>
-                    </a:solidFill>
-                  </a:tcPr>
-                </a:tc>
-              </a:tr>
-              <a:tr h="274320">
-                <a:tc>
-                  <a:txBody>
-                    <a:bodyPr/>
-                    <a:lstStyle/>
-                    <a:p>
-                      <a:r>
-                        <a:rPr sz="1150" b="0">
-                          <a:solidFill>
-                            <a:srgbClr val="1A2233"/>
-                          </a:solidFill>
-                          <a:latin typeface="Microsoft JhengHei"/>
-                          <a:ea typeface="Microsoft JhengHei"/>
-                          <a:cs typeface="Microsoft JhengHei"/>
-                        </a:rPr>
-                        <a:t>安心</a:t>
-                      </a:r>
-                    </a:p>
-                  </a:txBody>
-                  <a:tcPr anchor="ctr" marL="73152" marT="9144" marB="9144">
-                    <a:solidFill>
-                      <a:srgbClr val="EEF2F9"/>
-                    </a:solidFill>
-                  </a:tcPr>
-                </a:tc>
-                <a:tc>
-                  <a:txBody>
-                    <a:bodyPr/>
-                    <a:lstStyle/>
-                    <a:p>
-                      <a:r>
-                        <a:rPr sz="1150" b="0">
-                          <a:solidFill>
-                            <a:srgbClr val="1A2233"/>
-                          </a:solidFill>
-                          <a:latin typeface="Microsoft JhengHei"/>
-                          <a:ea typeface="Microsoft JhengHei"/>
-                          <a:cs typeface="Microsoft JhengHei"/>
-                        </a:rPr>
-                        <a:t>1259</a:t>
-                      </a:r>
-                    </a:p>
-                  </a:txBody>
-                  <a:tcPr anchor="ctr" marL="73152" marT="9144" marB="9144">
-                    <a:solidFill>
-                      <a:srgbClr val="EEF2F9"/>
-                    </a:solidFill>
-                  </a:tcPr>
-                </a:tc>
-                <a:tc>
-                  <a:txBody>
-                    <a:bodyPr/>
-                    <a:lstStyle/>
-                    <a:p>
-                      <a:r>
-                        <a:rPr sz="1150" b="0">
-                          <a:solidFill>
-                            <a:srgbClr val="1A2233"/>
-                          </a:solidFill>
-                          <a:latin typeface="Microsoft JhengHei"/>
-                          <a:ea typeface="Microsoft JhengHei"/>
-                          <a:cs typeface="Microsoft JhengHei"/>
-                        </a:rPr>
-                        <a:t>10/01</a:t>
-                      </a:r>
-                    </a:p>
-                  </a:txBody>
-                  <a:tcPr anchor="ctr" marL="73152" marT="9144" marB="9144">
-                    <a:solidFill>
-                      <a:srgbClr val="EEF2F9"/>
-                    </a:solidFill>
-                  </a:tcPr>
-                </a:tc>
-                <a:tc>
-                  <a:txBody>
-                    <a:bodyPr/>
-                    <a:lstStyle/>
-                    <a:p>
-                      <a:r>
-                        <a:rPr sz="1150" b="1">
-                          <a:solidFill>
-                            <a:srgbClr val="27A6C4"/>
-                          </a:solidFill>
-                          <a:latin typeface="Microsoft JhengHei"/>
-                          <a:ea typeface="Microsoft JhengHei"/>
-                          <a:cs typeface="Microsoft JhengHei"/>
-                        </a:rPr>
-                        <a:t>個資外洩</a:t>
-                      </a:r>
-                    </a:p>
-                  </a:txBody>
-                  <a:tcPr anchor="ctr" marL="73152" marT="9144" marB="9144">
-                    <a:solidFill>
-                      <a:srgbClr val="EEF2F9"/>
-                    </a:solidFill>
-                  </a:tcPr>
-                </a:tc>
-                <a:tc>
-                  <a:txBody>
-                    <a:bodyPr/>
-                    <a:lstStyle/>
-                    <a:p>
-                      <a:r>
-                        <a:rPr sz="1150" b="0">
-                          <a:solidFill>
-                            <a:srgbClr val="1A2233"/>
-                          </a:solidFill>
-                          <a:latin typeface="Microsoft JhengHei"/>
-                          <a:ea typeface="Microsoft JhengHei"/>
-                          <a:cs typeface="Microsoft JhengHei"/>
-                        </a:rPr>
-                        <a:t>截至目前為止對公司財務及業務並無重大影響。</a:t>
-                      </a:r>
-                    </a:p>
-                  </a:txBody>
-                  <a:tcPr anchor="ctr" marL="73152" marT="9144" marB="9144">
-                    <a:solidFill>
-                      <a:srgbClr val="EEF2F9"/>
-                    </a:solidFill>
-                  </a:tcPr>
-                </a:tc>
-              </a:tr>
-              <a:tr h="274320">
-                <a:tc>
-                  <a:txBody>
-                    <a:bodyPr/>
-                    <a:lstStyle/>
-                    <a:p>
-                      <a:r>
-                        <a:rPr sz="1150" b="0">
-                          <a:solidFill>
-                            <a:srgbClr val="1A2233"/>
-                          </a:solidFill>
-                          <a:latin typeface="Microsoft JhengHei"/>
-                          <a:ea typeface="Microsoft JhengHei"/>
-                          <a:cs typeface="Microsoft JhengHei"/>
-                        </a:rPr>
-                        <a:t>神腦</a:t>
-                      </a:r>
-                    </a:p>
-                  </a:txBody>
-                  <a:tcPr anchor="ctr" marL="73152" marT="9144" marB="9144">
-                    <a:solidFill>
-                      <a:srgbClr val="FFFFFF"/>
-                    </a:solidFill>
-                  </a:tcPr>
-                </a:tc>
-                <a:tc>
-                  <a:txBody>
-                    <a:bodyPr/>
-                    <a:lstStyle/>
-                    <a:p>
-                      <a:r>
-                        <a:rPr sz="1150" b="0">
-                          <a:solidFill>
-                            <a:srgbClr val="1A2233"/>
-                          </a:solidFill>
-                          <a:latin typeface="Microsoft JhengHei"/>
-                          <a:ea typeface="Microsoft JhengHei"/>
-                          <a:cs typeface="Microsoft JhengHei"/>
-                        </a:rPr>
-                        <a:t>2450</a:t>
-                      </a:r>
-                    </a:p>
-                  </a:txBody>
-                  <a:tcPr anchor="ctr" marL="73152" marT="9144" marB="9144">
-                    <a:solidFill>
-                      <a:srgbClr val="FFFFFF"/>
-                    </a:solidFill>
-                  </a:tcPr>
-                </a:tc>
-                <a:tc>
-                  <a:txBody>
-                    <a:bodyPr/>
-                    <a:lstStyle/>
-                    <a:p>
-                      <a:r>
-                        <a:rPr sz="1150" b="0">
-                          <a:solidFill>
-                            <a:srgbClr val="1A2233"/>
-                          </a:solidFill>
-                          <a:latin typeface="Microsoft JhengHei"/>
-                          <a:ea typeface="Microsoft JhengHei"/>
-                          <a:cs typeface="Microsoft JhengHei"/>
-                        </a:rPr>
-                        <a:t>09/29</a:t>
+                        <a:t>09/18</a:t>
                       </a:r>
                     </a:p>
                   </a:txBody>
@@ -5101,623 +5589,13 @@
                           <a:ea typeface="Microsoft JhengHei"/>
                           <a:cs typeface="Microsoft JhengHei"/>
                         </a:rPr>
-                        <a:t>評估對本公司營運、財務及服務提供無重大影響。</a:t>
+                        <a:t>目前評估對公司營運尚無重大影響</a:t>
                       </a:r>
                     </a:p>
                   </a:txBody>
                   <a:tcPr anchor="ctr" marL="73152" marT="9144" marB="9144">
                     <a:solidFill>
                       <a:srgbClr val="FFFFFF"/>
-                    </a:solidFill>
-                  </a:tcPr>
-                </a:tc>
-              </a:tr>
-              <a:tr h="274320">
-                <a:tc>
-                  <a:txBody>
-                    <a:bodyPr/>
-                    <a:lstStyle/>
-                    <a:p>
-                      <a:r>
-                        <a:rPr sz="1150" b="0">
-                          <a:solidFill>
-                            <a:srgbClr val="1A2233"/>
-                          </a:solidFill>
-                          <a:latin typeface="Microsoft JhengHei"/>
-                          <a:ea typeface="Microsoft JhengHei"/>
-                          <a:cs typeface="Microsoft JhengHei"/>
-                        </a:rPr>
-                        <a:t>鈊象</a:t>
-                      </a:r>
-                    </a:p>
-                  </a:txBody>
-                  <a:tcPr anchor="ctr" marL="73152" marT="9144" marB="9144">
-                    <a:solidFill>
-                      <a:srgbClr val="EEF2F9"/>
-                    </a:solidFill>
-                  </a:tcPr>
-                </a:tc>
-                <a:tc>
-                  <a:txBody>
-                    <a:bodyPr/>
-                    <a:lstStyle/>
-                    <a:p>
-                      <a:r>
-                        <a:rPr sz="1150" b="0">
-                          <a:solidFill>
-                            <a:srgbClr val="1A2233"/>
-                          </a:solidFill>
-                          <a:latin typeface="Microsoft JhengHei"/>
-                          <a:ea typeface="Microsoft JhengHei"/>
-                          <a:cs typeface="Microsoft JhengHei"/>
-                        </a:rPr>
-                        <a:t>3293</a:t>
-                      </a:r>
-                    </a:p>
-                  </a:txBody>
-                  <a:tcPr anchor="ctr" marL="73152" marT="9144" marB="9144">
-                    <a:solidFill>
-                      <a:srgbClr val="EEF2F9"/>
-                    </a:solidFill>
-                  </a:tcPr>
-                </a:tc>
-                <a:tc>
-                  <a:txBody>
-                    <a:bodyPr/>
-                    <a:lstStyle/>
-                    <a:p>
-                      <a:r>
-                        <a:rPr sz="1150" b="0">
-                          <a:solidFill>
-                            <a:srgbClr val="1A2233"/>
-                          </a:solidFill>
-                          <a:latin typeface="Microsoft JhengHei"/>
-                          <a:ea typeface="Microsoft JhengHei"/>
-                          <a:cs typeface="Microsoft JhengHei"/>
-                        </a:rPr>
-                        <a:t>09/29</a:t>
-                      </a:r>
-                    </a:p>
-                  </a:txBody>
-                  <a:tcPr anchor="ctr" marL="73152" marT="9144" marB="9144">
-                    <a:solidFill>
-                      <a:srgbClr val="EEF2F9"/>
-                    </a:solidFill>
-                  </a:tcPr>
-                </a:tc>
-                <a:tc>
-                  <a:txBody>
-                    <a:bodyPr/>
-                    <a:lstStyle/>
-                    <a:p>
-                      <a:r>
-                        <a:rPr sz="1150" b="1">
-                          <a:solidFill>
-                            <a:srgbClr val="5C6679"/>
-                          </a:solidFill>
-                          <a:latin typeface="Microsoft JhengHei"/>
-                          <a:ea typeface="Microsoft JhengHei"/>
-                          <a:cs typeface="Microsoft JhengHei"/>
-                        </a:rPr>
-                        <a:t>其他</a:t>
-                      </a:r>
-                    </a:p>
-                  </a:txBody>
-                  <a:tcPr anchor="ctr" marL="73152" marT="9144" marB="9144">
-                    <a:solidFill>
-                      <a:srgbClr val="EEF2F9"/>
-                    </a:solidFill>
-                  </a:tcPr>
-                </a:tc>
-                <a:tc>
-                  <a:txBody>
-                    <a:bodyPr/>
-                    <a:lstStyle/>
-                    <a:p>
-                      <a:r>
-                        <a:rPr sz="1150" b="0">
-                          <a:solidFill>
-                            <a:srgbClr val="1A2233"/>
-                          </a:solidFill>
-                          <a:latin typeface="Microsoft JhengHei"/>
-                          <a:ea typeface="Microsoft JhengHei"/>
-                          <a:cs typeface="Microsoft JhengHei"/>
-                        </a:rPr>
-                        <a:t>目前評估對公司營運尚無重大影響。</a:t>
-                      </a:r>
-                    </a:p>
-                  </a:txBody>
-                  <a:tcPr anchor="ctr" marL="73152" marT="9144" marB="9144">
-                    <a:solidFill>
-                      <a:srgbClr val="EEF2F9"/>
-                    </a:solidFill>
-                  </a:tcPr>
-                </a:tc>
-              </a:tr>
-              <a:tr h="274320">
-                <a:tc>
-                  <a:txBody>
-                    <a:bodyPr/>
-                    <a:lstStyle/>
-                    <a:p>
-                      <a:r>
-                        <a:rPr sz="1150" b="0">
-                          <a:solidFill>
-                            <a:srgbClr val="1A2233"/>
-                          </a:solidFill>
-                          <a:latin typeface="Microsoft JhengHei"/>
-                          <a:ea typeface="Microsoft JhengHei"/>
-                          <a:cs typeface="Microsoft JhengHei"/>
-                        </a:rPr>
-                        <a:t>柏文</a:t>
-                      </a:r>
-                    </a:p>
-                  </a:txBody>
-                  <a:tcPr anchor="ctr" marL="73152" marT="9144" marB="9144">
-                    <a:solidFill>
-                      <a:srgbClr val="FFFFFF"/>
-                    </a:solidFill>
-                  </a:tcPr>
-                </a:tc>
-                <a:tc>
-                  <a:txBody>
-                    <a:bodyPr/>
-                    <a:lstStyle/>
-                    <a:p>
-                      <a:r>
-                        <a:rPr sz="1150" b="0">
-                          <a:solidFill>
-                            <a:srgbClr val="1A2233"/>
-                          </a:solidFill>
-                          <a:latin typeface="Microsoft JhengHei"/>
-                          <a:ea typeface="Microsoft JhengHei"/>
-                          <a:cs typeface="Microsoft JhengHei"/>
-                        </a:rPr>
-                        <a:t>8462</a:t>
-                      </a:r>
-                    </a:p>
-                  </a:txBody>
-                  <a:tcPr anchor="ctr" marL="73152" marT="9144" marB="9144">
-                    <a:solidFill>
-                      <a:srgbClr val="FFFFFF"/>
-                    </a:solidFill>
-                  </a:tcPr>
-                </a:tc>
-                <a:tc>
-                  <a:txBody>
-                    <a:bodyPr/>
-                    <a:lstStyle/>
-                    <a:p>
-                      <a:r>
-                        <a:rPr sz="1150" b="0">
-                          <a:solidFill>
-                            <a:srgbClr val="1A2233"/>
-                          </a:solidFill>
-                          <a:latin typeface="Microsoft JhengHei"/>
-                          <a:ea typeface="Microsoft JhengHei"/>
-                          <a:cs typeface="Microsoft JhengHei"/>
-                        </a:rPr>
-                        <a:t>09/23</a:t>
-                      </a:r>
-                    </a:p>
-                  </a:txBody>
-                  <a:tcPr anchor="ctr" marL="73152" marT="9144" marB="9144">
-                    <a:solidFill>
-                      <a:srgbClr val="FFFFFF"/>
-                    </a:solidFill>
-                  </a:tcPr>
-                </a:tc>
-                <a:tc>
-                  <a:txBody>
-                    <a:bodyPr/>
-                    <a:lstStyle/>
-                    <a:p>
-                      <a:r>
-                        <a:rPr sz="1150" b="1">
-                          <a:solidFill>
-                            <a:srgbClr val="27A6C4"/>
-                          </a:solidFill>
-                          <a:latin typeface="Microsoft JhengHei"/>
-                          <a:ea typeface="Microsoft JhengHei"/>
-                          <a:cs typeface="Microsoft JhengHei"/>
-                        </a:rPr>
-                        <a:t>個資外洩</a:t>
-                      </a:r>
-                    </a:p>
-                  </a:txBody>
-                  <a:tcPr anchor="ctr" marL="73152" marT="9144" marB="9144">
-                    <a:solidFill>
-                      <a:srgbClr val="FFFFFF"/>
-                    </a:solidFill>
-                  </a:tcPr>
-                </a:tc>
-                <a:tc>
-                  <a:txBody>
-                    <a:bodyPr/>
-                    <a:lstStyle/>
-                    <a:p>
-                      <a:r>
-                        <a:rPr sz="1150" b="0">
-                          <a:solidFill>
-                            <a:srgbClr val="1A2233"/>
-                          </a:solidFill>
-                          <a:latin typeface="Microsoft JhengHei"/>
-                          <a:ea typeface="Microsoft JhengHei"/>
-                          <a:cs typeface="Microsoft JhengHei"/>
-                        </a:rPr>
-                        <a:t>目前評估對公司營運無重大影響。</a:t>
-                      </a:r>
-                    </a:p>
-                  </a:txBody>
-                  <a:tcPr anchor="ctr" marL="73152" marT="9144" marB="9144">
-                    <a:solidFill>
-                      <a:srgbClr val="FFFFFF"/>
-                    </a:solidFill>
-                  </a:tcPr>
-                </a:tc>
-              </a:tr>
-              <a:tr h="274320">
-                <a:tc>
-                  <a:txBody>
-                    <a:bodyPr/>
-                    <a:lstStyle/>
-                    <a:p>
-                      <a:r>
-                        <a:rPr sz="1150" b="0">
-                          <a:solidFill>
-                            <a:srgbClr val="1A2233"/>
-                          </a:solidFill>
-                          <a:latin typeface="Microsoft JhengHei"/>
-                          <a:ea typeface="Microsoft JhengHei"/>
-                          <a:cs typeface="Microsoft JhengHei"/>
-                        </a:rPr>
-                        <a:t>友訊</a:t>
-                      </a:r>
-                    </a:p>
-                  </a:txBody>
-                  <a:tcPr anchor="ctr" marL="73152" marT="9144" marB="9144">
-                    <a:solidFill>
-                      <a:srgbClr val="EEF2F9"/>
-                    </a:solidFill>
-                  </a:tcPr>
-                </a:tc>
-                <a:tc>
-                  <a:txBody>
-                    <a:bodyPr/>
-                    <a:lstStyle/>
-                    <a:p>
-                      <a:r>
-                        <a:rPr sz="1150" b="0">
-                          <a:solidFill>
-                            <a:srgbClr val="1A2233"/>
-                          </a:solidFill>
-                          <a:latin typeface="Microsoft JhengHei"/>
-                          <a:ea typeface="Microsoft JhengHei"/>
-                          <a:cs typeface="Microsoft JhengHei"/>
-                        </a:rPr>
-                        <a:t>2332</a:t>
-                      </a:r>
-                    </a:p>
-                  </a:txBody>
-                  <a:tcPr anchor="ctr" marL="73152" marT="9144" marB="9144">
-                    <a:solidFill>
-                      <a:srgbClr val="EEF2F9"/>
-                    </a:solidFill>
-                  </a:tcPr>
-                </a:tc>
-                <a:tc>
-                  <a:txBody>
-                    <a:bodyPr/>
-                    <a:lstStyle/>
-                    <a:p>
-                      <a:r>
-                        <a:rPr sz="1150" b="0">
-                          <a:solidFill>
-                            <a:srgbClr val="1A2233"/>
-                          </a:solidFill>
-                          <a:latin typeface="Microsoft JhengHei"/>
-                          <a:ea typeface="Microsoft JhengHei"/>
-                          <a:cs typeface="Microsoft JhengHei"/>
-                        </a:rPr>
-                        <a:t>09/18</a:t>
-                      </a:r>
-                    </a:p>
-                  </a:txBody>
-                  <a:tcPr anchor="ctr" marL="73152" marT="9144" marB="9144">
-                    <a:solidFill>
-                      <a:srgbClr val="EEF2F9"/>
-                    </a:solidFill>
-                  </a:tcPr>
-                </a:tc>
-                <a:tc>
-                  <a:txBody>
-                    <a:bodyPr/>
-                    <a:lstStyle/>
-                    <a:p>
-                      <a:r>
-                        <a:rPr sz="1150" b="1">
-                          <a:solidFill>
-                            <a:srgbClr val="E63946"/>
-                          </a:solidFill>
-                          <a:latin typeface="Microsoft JhengHei"/>
-                          <a:ea typeface="Microsoft JhengHei"/>
-                          <a:cs typeface="Microsoft JhengHei"/>
-                        </a:rPr>
-                        <a:t>駭客攻擊</a:t>
-                      </a:r>
-                    </a:p>
-                  </a:txBody>
-                  <a:tcPr anchor="ctr" marL="73152" marT="9144" marB="9144">
-                    <a:solidFill>
-                      <a:srgbClr val="EEF2F9"/>
-                    </a:solidFill>
-                  </a:tcPr>
-                </a:tc>
-                <a:tc>
-                  <a:txBody>
-                    <a:bodyPr/>
-                    <a:lstStyle/>
-                    <a:p>
-                      <a:r>
-                        <a:rPr sz="1150" b="0">
-                          <a:solidFill>
-                            <a:srgbClr val="1A2233"/>
-                          </a:solidFill>
-                          <a:latin typeface="Microsoft JhengHei"/>
-                          <a:ea typeface="Microsoft JhengHei"/>
-                          <a:cs typeface="Microsoft JhengHei"/>
-                        </a:rPr>
-                        <a:t>目前評估對公司營運尚無重大影響</a:t>
-                      </a:r>
-                    </a:p>
-                  </a:txBody>
-                  <a:tcPr anchor="ctr" marL="73152" marT="9144" marB="9144">
-                    <a:solidFill>
-                      <a:srgbClr val="EEF2F9"/>
-                    </a:solidFill>
-                  </a:tcPr>
-                </a:tc>
-              </a:tr>
-              <a:tr h="274320">
-                <a:tc>
-                  <a:txBody>
-                    <a:bodyPr/>
-                    <a:lstStyle/>
-                    <a:p>
-                      <a:r>
-                        <a:rPr sz="1150" b="0">
-                          <a:solidFill>
-                            <a:srgbClr val="1A2233"/>
-                          </a:solidFill>
-                          <a:latin typeface="Microsoft JhengHei"/>
-                          <a:ea typeface="Microsoft JhengHei"/>
-                          <a:cs typeface="Microsoft JhengHei"/>
-                        </a:rPr>
-                        <a:t>長榮航</a:t>
-                      </a:r>
-                    </a:p>
-                  </a:txBody>
-                  <a:tcPr anchor="ctr" marL="73152" marT="9144" marB="9144">
-                    <a:solidFill>
-                      <a:srgbClr val="FFFFFF"/>
-                    </a:solidFill>
-                  </a:tcPr>
-                </a:tc>
-                <a:tc>
-                  <a:txBody>
-                    <a:bodyPr/>
-                    <a:lstStyle/>
-                    <a:p>
-                      <a:r>
-                        <a:rPr sz="1150" b="0">
-                          <a:solidFill>
-                            <a:srgbClr val="1A2233"/>
-                          </a:solidFill>
-                          <a:latin typeface="Microsoft JhengHei"/>
-                          <a:ea typeface="Microsoft JhengHei"/>
-                          <a:cs typeface="Microsoft JhengHei"/>
-                        </a:rPr>
-                        <a:t>2618</a:t>
-                      </a:r>
-                    </a:p>
-                  </a:txBody>
-                  <a:tcPr anchor="ctr" marL="73152" marT="9144" marB="9144">
-                    <a:solidFill>
-                      <a:srgbClr val="FFFFFF"/>
-                    </a:solidFill>
-                  </a:tcPr>
-                </a:tc>
-                <a:tc>
-                  <a:txBody>
-                    <a:bodyPr/>
-                    <a:lstStyle/>
-                    <a:p>
-                      <a:r>
-                        <a:rPr sz="1150" b="0">
-                          <a:solidFill>
-                            <a:srgbClr val="1A2233"/>
-                          </a:solidFill>
-                          <a:latin typeface="Microsoft JhengHei"/>
-                          <a:ea typeface="Microsoft JhengHei"/>
-                          <a:cs typeface="Microsoft JhengHei"/>
-                        </a:rPr>
-                        <a:t>09/15</a:t>
-                      </a:r>
-                    </a:p>
-                  </a:txBody>
-                  <a:tcPr anchor="ctr" marL="73152" marT="9144" marB="9144">
-                    <a:solidFill>
-                      <a:srgbClr val="FFFFFF"/>
-                    </a:solidFill>
-                  </a:tcPr>
-                </a:tc>
-                <a:tc>
-                  <a:txBody>
-                    <a:bodyPr/>
-                    <a:lstStyle/>
-                    <a:p>
-                      <a:r>
-                        <a:rPr sz="1150" b="1">
-                          <a:solidFill>
-                            <a:srgbClr val="E63946"/>
-                          </a:solidFill>
-                          <a:latin typeface="Microsoft JhengHei"/>
-                          <a:ea typeface="Microsoft JhengHei"/>
-                          <a:cs typeface="Microsoft JhengHei"/>
-                        </a:rPr>
-                        <a:t>駭客攻擊</a:t>
-                      </a:r>
-                    </a:p>
-                  </a:txBody>
-                  <a:tcPr anchor="ctr" marL="73152" marT="9144" marB="9144">
-                    <a:solidFill>
-                      <a:srgbClr val="FFFFFF"/>
-                    </a:solidFill>
-                  </a:tcPr>
-                </a:tc>
-                <a:tc>
-                  <a:txBody>
-                    <a:bodyPr/>
-                    <a:lstStyle/>
-                    <a:p>
-                      <a:r>
-                        <a:rPr sz="1150" b="0">
-                          <a:solidFill>
-                            <a:srgbClr val="1A2233"/>
-                          </a:solidFill>
-                          <a:latin typeface="Microsoft JhengHei"/>
-                          <a:ea typeface="Microsoft JhengHei"/>
-                          <a:cs typeface="Microsoft JhengHei"/>
-                        </a:rPr>
-                        <a:t>目前評估對公司所有業務均不受影響。</a:t>
-                      </a:r>
-                    </a:p>
-                  </a:txBody>
-                  <a:tcPr anchor="ctr" marL="73152" marT="9144" marB="9144">
-                    <a:solidFill>
-                      <a:srgbClr val="FFFFFF"/>
-                    </a:solidFill>
-                  </a:tcPr>
-                </a:tc>
-              </a:tr>
-              <a:tr h="274320">
-                <a:tc>
-                  <a:txBody>
-                    <a:bodyPr/>
-                    <a:lstStyle/>
-                    <a:p>
-                      <a:r>
-                        <a:rPr sz="1150" b="0">
-                          <a:solidFill>
-                            <a:srgbClr val="1A2233"/>
-                          </a:solidFill>
-                          <a:latin typeface="Microsoft JhengHei"/>
-                          <a:ea typeface="Microsoft JhengHei"/>
-                          <a:cs typeface="Microsoft JhengHei"/>
-                        </a:rPr>
-                        <a:t>長榮航太</a:t>
-                      </a:r>
-                    </a:p>
-                  </a:txBody>
-                  <a:tcPr anchor="ctr" marL="73152" marT="9144" marB="9144">
-                    <a:solidFill>
-                      <a:srgbClr val="EEF2F9"/>
-                    </a:solidFill>
-                  </a:tcPr>
-                </a:tc>
-                <a:tc>
-                  <a:txBody>
-                    <a:bodyPr/>
-                    <a:lstStyle/>
-                    <a:p>
-                      <a:r>
-                        <a:rPr sz="1150" b="0">
-                          <a:solidFill>
-                            <a:srgbClr val="1A2233"/>
-                          </a:solidFill>
-                          <a:latin typeface="Microsoft JhengHei"/>
-                          <a:ea typeface="Microsoft JhengHei"/>
-                          <a:cs typeface="Microsoft JhengHei"/>
-                        </a:rPr>
-                        <a:t>2645</a:t>
-                      </a:r>
-                    </a:p>
-                  </a:txBody>
-                  <a:tcPr anchor="ctr" marL="73152" marT="9144" marB="9144">
-                    <a:solidFill>
-                      <a:srgbClr val="EEF2F9"/>
-                    </a:solidFill>
-                  </a:tcPr>
-                </a:tc>
-                <a:tc>
-                  <a:txBody>
-                    <a:bodyPr/>
-                    <a:lstStyle/>
-                    <a:p>
-                      <a:r>
-                        <a:rPr sz="1150" b="0">
-                          <a:solidFill>
-                            <a:srgbClr val="1A2233"/>
-                          </a:solidFill>
-                          <a:latin typeface="Microsoft JhengHei"/>
-                          <a:ea typeface="Microsoft JhengHei"/>
-                          <a:cs typeface="Microsoft JhengHei"/>
-                        </a:rPr>
-                        <a:t>09/15</a:t>
-                      </a:r>
-                    </a:p>
-                  </a:txBody>
-                  <a:tcPr anchor="ctr" marL="73152" marT="9144" marB="9144">
-                    <a:solidFill>
-                      <a:srgbClr val="EEF2F9"/>
-                    </a:solidFill>
-                  </a:tcPr>
-                </a:tc>
-                <a:tc>
-                  <a:txBody>
-                    <a:bodyPr/>
-                    <a:lstStyle/>
-                    <a:p>
-                      <a:r>
-                        <a:rPr sz="1150" b="1">
-                          <a:solidFill>
-                            <a:srgbClr val="E63946"/>
-                          </a:solidFill>
-                          <a:latin typeface="Microsoft JhengHei"/>
-                          <a:ea typeface="Microsoft JhengHei"/>
-                          <a:cs typeface="Microsoft JhengHei"/>
-                        </a:rPr>
-                        <a:t>駭客攻擊</a:t>
-                      </a:r>
-                    </a:p>
-                  </a:txBody>
-                  <a:tcPr anchor="ctr" marL="73152" marT="9144" marB="9144">
-                    <a:solidFill>
-                      <a:srgbClr val="EEF2F9"/>
-                    </a:solidFill>
-                  </a:tcPr>
-                </a:tc>
-                <a:tc>
-                  <a:txBody>
-                    <a:bodyPr/>
-                    <a:lstStyle/>
-                    <a:p>
-                      <a:r>
-                        <a:rPr sz="1150" b="0">
-                          <a:solidFill>
-                            <a:srgbClr val="1A2233"/>
-                          </a:solidFill>
-                          <a:latin typeface="Microsoft JhengHei"/>
-                          <a:ea typeface="Microsoft JhengHei"/>
-                          <a:cs typeface="Microsoft JhengHei"/>
-                        </a:rPr>
-                        <a:t>經初步評估，核心資訊系統及營運業務運作皆維持正常，尚未發現公司及涉客…</a:t>
-                      </a:r>
-                    </a:p>
-                  </a:txBody>
-                  <a:tcPr anchor="ctr" marL="73152" marT="9144" marB="9144">
-                    <a:solidFill>
-                      <a:srgbClr val="EEF2F9"/>
                     </a:solidFill>
                   </a:tcPr>
                 </a:tc>
@@ -6039,7 +5917,7 @@
                 <a:ea typeface="Microsoft JhengHei"/>
                 <a:cs typeface="Microsoft JhengHei"/>
               </a:rPr>
-              <a:t>4 起</a:t>
+              <a:t>3 起</a:t>
             </a:r>
           </a:p>
         </p:txBody>
@@ -6076,7 +5954,7 @@
                 <a:ea typeface="Microsoft JhengHei"/>
                 <a:cs typeface="Microsoft JhengHei"/>
               </a:rPr>
-              <a:t>神腦、友訊、長榮航、長榮航太</a:t>
+              <a:t>91APP*-KY、神腦、友訊</a:t>
             </a:r>
           </a:p>
         </p:txBody>
@@ -6755,7 +6633,7 @@
                 <a:gridCol w="3383280"/>
                 <a:gridCol w="2606040"/>
               </a:tblGrid>
-              <a:tr h="344658">
+              <a:tr h="373380">
                 <a:tc>
                   <a:txBody>
                     <a:bodyPr/>
@@ -6877,7 +6755,7 @@
                   </a:tcPr>
                 </a:tc>
               </a:tr>
-              <a:tr h="344658">
+              <a:tr h="373380">
                 <a:tc>
                   <a:txBody>
                     <a:bodyPr/>
@@ -6892,7 +6770,7 @@
                           <a:ea typeface="Microsoft JhengHei"/>
                           <a:cs typeface="Microsoft JhengHei"/>
                         </a:rPr>
-                        <a:t>緯致</a:t>
+                        <a:t>91APP*-KY</a:t>
                       </a:r>
                     </a:p>
                   </a:txBody>
@@ -6916,7 +6794,251 @@
                           <a:ea typeface="Microsoft JhengHei"/>
                           <a:cs typeface="Microsoft JhengHei"/>
                         </a:rPr>
+                        <a:t>6741</a:t>
+                      </a:r>
+                    </a:p>
+                  </a:txBody>
+                  <a:tcPr anchor="ctr" marL="73152" marT="9144" marB="9144">
+                    <a:solidFill>
+                      <a:srgbClr val="FFFFFF"/>
+                    </a:solidFill>
+                  </a:tcPr>
+                </a:tc>
+                <a:tc>
+                  <a:txBody>
+                    <a:bodyPr/>
+                    <a:lstStyle/>
+                    <a:p>
+                      <a:r>
+                        <a:rPr sz="1150" b="1">
+                          <a:solidFill>
+                            <a:srgbClr val="E63946"/>
+                          </a:solidFill>
+                          <a:latin typeface="Microsoft JhengHei"/>
+                          <a:ea typeface="Microsoft JhengHei"/>
+                          <a:cs typeface="Microsoft JhengHei"/>
+                        </a:rPr>
+                        <a:t>駭客攻擊</a:t>
+                      </a:r>
+                    </a:p>
+                  </a:txBody>
+                  <a:tcPr anchor="ctr" marL="73152" marT="9144" marB="9144">
+                    <a:solidFill>
+                      <a:srgbClr val="FFFFFF"/>
+                    </a:solidFill>
+                  </a:tcPr>
+                </a:tc>
+                <a:tc>
+                  <a:txBody>
+                    <a:bodyPr/>
+                    <a:lstStyle/>
+                    <a:p>
+                      <a:r>
+                        <a:rPr sz="1150" b="0">
+                          <a:solidFill>
+                            <a:srgbClr val="1A2233"/>
+                          </a:solidFill>
+                          <a:latin typeface="Microsoft JhengHei"/>
+                          <a:ea typeface="Microsoft JhengHei"/>
+                          <a:cs typeface="Microsoft JhengHei"/>
+                        </a:rPr>
+                        <a:t>勤業眾信聯合會計師事務所</a:t>
+                      </a:r>
+                    </a:p>
+                  </a:txBody>
+                  <a:tcPr anchor="ctr" marL="73152" marT="9144" marB="9144">
+                    <a:solidFill>
+                      <a:srgbClr val="FFFFFF"/>
+                    </a:solidFill>
+                  </a:tcPr>
+                </a:tc>
+                <a:tc>
+                  <a:txBody>
+                    <a:bodyPr/>
+                    <a:lstStyle/>
+                    <a:p>
+                      <a:r>
+                        <a:rPr sz="1150" b="0">
+                          <a:solidFill>
+                            <a:srgbClr val="1A2233"/>
+                          </a:solidFill>
+                          <a:latin typeface="Microsoft JhengHei"/>
+                          <a:ea typeface="Microsoft JhengHei"/>
+                          <a:cs typeface="Microsoft JhengHei"/>
+                        </a:rPr>
+                        <a:t>曾建銘、王攀發</a:t>
+                      </a:r>
+                    </a:p>
+                  </a:txBody>
+                  <a:tcPr anchor="ctr" marL="73152" marT="9144" marB="9144">
+                    <a:solidFill>
+                      <a:srgbClr val="FFFFFF"/>
+                    </a:solidFill>
+                  </a:tcPr>
+                </a:tc>
+              </a:tr>
+              <a:tr h="373380">
+                <a:tc>
+                  <a:txBody>
+                    <a:bodyPr/>
+                    <a:lstStyle/>
+                    <a:p>
+                      <a:r>
+                        <a:rPr sz="1150" b="0">
+                          <a:solidFill>
+                            <a:srgbClr val="1A2233"/>
+                          </a:solidFill>
+                          <a:latin typeface="Microsoft JhengHei"/>
+                          <a:ea typeface="Microsoft JhengHei"/>
+                          <a:cs typeface="Microsoft JhengHei"/>
+                        </a:rPr>
+                        <a:t>緯致</a:t>
+                      </a:r>
+                    </a:p>
+                  </a:txBody>
+                  <a:tcPr anchor="ctr" marL="73152" marT="9144" marB="9144">
+                    <a:solidFill>
+                      <a:srgbClr val="EEF2F9"/>
+                    </a:solidFill>
+                  </a:tcPr>
+                </a:tc>
+                <a:tc>
+                  <a:txBody>
+                    <a:bodyPr/>
+                    <a:lstStyle/>
+                    <a:p>
+                      <a:r>
+                        <a:rPr sz="1150" b="0">
+                          <a:solidFill>
+                            <a:srgbClr val="1A2233"/>
+                          </a:solidFill>
+                          <a:latin typeface="Microsoft JhengHei"/>
+                          <a:ea typeface="Microsoft JhengHei"/>
+                          <a:cs typeface="Microsoft JhengHei"/>
+                        </a:rPr>
                         <a:t>4953</a:t>
+                      </a:r>
+                    </a:p>
+                  </a:txBody>
+                  <a:tcPr anchor="ctr" marL="73152" marT="9144" marB="9144">
+                    <a:solidFill>
+                      <a:srgbClr val="EEF2F9"/>
+                    </a:solidFill>
+                  </a:tcPr>
+                </a:tc>
+                <a:tc>
+                  <a:txBody>
+                    <a:bodyPr/>
+                    <a:lstStyle/>
+                    <a:p>
+                      <a:r>
+                        <a:rPr sz="1150" b="1">
+                          <a:solidFill>
+                            <a:srgbClr val="5C6679"/>
+                          </a:solidFill>
+                          <a:latin typeface="Microsoft JhengHei"/>
+                          <a:ea typeface="Microsoft JhengHei"/>
+                          <a:cs typeface="Microsoft JhengHei"/>
+                        </a:rPr>
+                        <a:t>其他</a:t>
+                      </a:r>
+                    </a:p>
+                  </a:txBody>
+                  <a:tcPr anchor="ctr" marL="73152" marT="9144" marB="9144">
+                    <a:solidFill>
+                      <a:srgbClr val="EEF2F9"/>
+                    </a:solidFill>
+                  </a:tcPr>
+                </a:tc>
+                <a:tc>
+                  <a:txBody>
+                    <a:bodyPr/>
+                    <a:lstStyle/>
+                    <a:p>
+                      <a:r>
+                        <a:rPr sz="1150" b="0">
+                          <a:solidFill>
+                            <a:srgbClr val="1A2233"/>
+                          </a:solidFill>
+                          <a:latin typeface="Microsoft JhengHei"/>
+                          <a:ea typeface="Microsoft JhengHei"/>
+                          <a:cs typeface="Microsoft JhengHei"/>
+                        </a:rPr>
+                        <a:t>安侯建業聯合會計師事務所</a:t>
+                      </a:r>
+                    </a:p>
+                  </a:txBody>
+                  <a:tcPr anchor="ctr" marL="73152" marT="9144" marB="9144">
+                    <a:solidFill>
+                      <a:srgbClr val="EEF2F9"/>
+                    </a:solidFill>
+                  </a:tcPr>
+                </a:tc>
+                <a:tc>
+                  <a:txBody>
+                    <a:bodyPr/>
+                    <a:lstStyle/>
+                    <a:p>
+                      <a:r>
+                        <a:rPr sz="1150" b="0">
+                          <a:solidFill>
+                            <a:srgbClr val="1A2233"/>
+                          </a:solidFill>
+                          <a:latin typeface="Microsoft JhengHei"/>
+                          <a:ea typeface="Microsoft JhengHei"/>
+                          <a:cs typeface="Microsoft JhengHei"/>
+                        </a:rPr>
+                        <a:t>唐嘉鍵、楊雲筑</a:t>
+                      </a:r>
+                    </a:p>
+                  </a:txBody>
+                  <a:tcPr anchor="ctr" marL="73152" marT="9144" marB="9144">
+                    <a:solidFill>
+                      <a:srgbClr val="EEF2F9"/>
+                    </a:solidFill>
+                  </a:tcPr>
+                </a:tc>
+              </a:tr>
+              <a:tr h="373380">
+                <a:tc>
+                  <a:txBody>
+                    <a:bodyPr/>
+                    <a:lstStyle/>
+                    <a:p>
+                      <a:r>
+                        <a:rPr sz="1150" b="0">
+                          <a:solidFill>
+                            <a:srgbClr val="1A2233"/>
+                          </a:solidFill>
+                          <a:latin typeface="Microsoft JhengHei"/>
+                          <a:ea typeface="Microsoft JhengHei"/>
+                          <a:cs typeface="Microsoft JhengHei"/>
+                        </a:rPr>
+                        <a:t>上福</a:t>
+                      </a:r>
+                    </a:p>
+                  </a:txBody>
+                  <a:tcPr anchor="ctr" marL="73152" marT="9144" marB="9144">
+                    <a:solidFill>
+                      <a:srgbClr val="FFFFFF"/>
+                    </a:solidFill>
+                  </a:tcPr>
+                </a:tc>
+                <a:tc>
+                  <a:txBody>
+                    <a:bodyPr/>
+                    <a:lstStyle/>
+                    <a:p>
+                      <a:r>
+                        <a:rPr sz="1150" b="0">
+                          <a:solidFill>
+                            <a:srgbClr val="1A2233"/>
+                          </a:solidFill>
+                          <a:latin typeface="Microsoft JhengHei"/>
+                          <a:ea typeface="Microsoft JhengHei"/>
+                          <a:cs typeface="Microsoft JhengHei"/>
+                        </a:rPr>
+                        <a:t>6128</a:t>
                       </a:r>
                     </a:p>
                   </a:txBody>
@@ -6964,7 +7086,7 @@
                           <a:ea typeface="Microsoft JhengHei"/>
                           <a:cs typeface="Microsoft JhengHei"/>
                         </a:rPr>
-                        <a:t>安侯建業聯合會計師事務所</a:t>
+                        <a:t>安永聯合會計師事務所</a:t>
                       </a:r>
                     </a:p>
                   </a:txBody>
@@ -6988,7 +7110,7 @@
                           <a:ea typeface="Microsoft JhengHei"/>
                           <a:cs typeface="Microsoft JhengHei"/>
                         </a:rPr>
-                        <a:t>唐嘉鍵、楊雲筑</a:t>
+                        <a:t>黃宇廷、賴書晨</a:t>
                       </a:r>
                     </a:p>
                   </a:txBody>
@@ -6999,7 +7121,7 @@
                   </a:tcPr>
                 </a:tc>
               </a:tr>
-              <a:tr h="344658">
+              <a:tr h="373380">
                 <a:tc>
                   <a:txBody>
                     <a:bodyPr/>
@@ -7014,7 +7136,7 @@
                           <a:ea typeface="Microsoft JhengHei"/>
                           <a:cs typeface="Microsoft JhengHei"/>
                         </a:rPr>
-                        <a:t>上福</a:t>
+                        <a:t>杏一</a:t>
                       </a:r>
                     </a:p>
                   </a:txBody>
@@ -7038,7 +7160,7 @@
                           <a:ea typeface="Microsoft JhengHei"/>
                           <a:cs typeface="Microsoft JhengHei"/>
                         </a:rPr>
-                        <a:t>6128</a:t>
+                        <a:t>4175</a:t>
                       </a:r>
                     </a:p>
                   </a:txBody>
@@ -7056,13 +7178,13 @@
                       <a:r>
                         <a:rPr sz="1150" b="1">
                           <a:solidFill>
-                            <a:srgbClr val="5C6679"/>
+                            <a:srgbClr val="27A6C4"/>
                           </a:solidFill>
                           <a:latin typeface="Microsoft JhengHei"/>
                           <a:ea typeface="Microsoft JhengHei"/>
                           <a:cs typeface="Microsoft JhengHei"/>
                         </a:rPr>
-                        <a:t>其他</a:t>
+                        <a:t>個資外洩</a:t>
                       </a:r>
                     </a:p>
                   </a:txBody>
@@ -7086,7 +7208,7 @@
                           <a:ea typeface="Microsoft JhengHei"/>
                           <a:cs typeface="Microsoft JhengHei"/>
                         </a:rPr>
-                        <a:t>安永聯合會計師事務所</a:t>
+                        <a:t>勤業眾信聯合會計師事務所</a:t>
                       </a:r>
                     </a:p>
                   </a:txBody>
@@ -7110,7 +7232,7 @@
                           <a:ea typeface="Microsoft JhengHei"/>
                           <a:cs typeface="Microsoft JhengHei"/>
                         </a:rPr>
-                        <a:t>黃宇廷、賴書晨</a:t>
+                        <a:t>池瑞全、蔡宗遠</a:t>
                       </a:r>
                     </a:p>
                   </a:txBody>
@@ -7121,7 +7243,7 @@
                   </a:tcPr>
                 </a:tc>
               </a:tr>
-              <a:tr h="344658">
+              <a:tr h="373380">
                 <a:tc>
                   <a:txBody>
                     <a:bodyPr/>
@@ -7136,7 +7258,7 @@
                           <a:ea typeface="Microsoft JhengHei"/>
                           <a:cs typeface="Microsoft JhengHei"/>
                         </a:rPr>
-                        <a:t>杏一</a:t>
+                        <a:t>鈊象</a:t>
                       </a:r>
                     </a:p>
                   </a:txBody>
@@ -7160,7 +7282,7 @@
                           <a:ea typeface="Microsoft JhengHei"/>
                           <a:cs typeface="Microsoft JhengHei"/>
                         </a:rPr>
-                        <a:t>4175</a:t>
+                        <a:t>3293</a:t>
                       </a:r>
                     </a:p>
                   </a:txBody>
@@ -7232,7 +7354,7 @@
                           <a:ea typeface="Microsoft JhengHei"/>
                           <a:cs typeface="Microsoft JhengHei"/>
                         </a:rPr>
-                        <a:t>池瑞全、蔡宗遠</a:t>
+                        <a:t>周仕杰、李東峰</a:t>
                       </a:r>
                     </a:p>
                   </a:txBody>
@@ -7243,7 +7365,7 @@
                   </a:tcPr>
                 </a:tc>
               </a:tr>
-              <a:tr h="344658">
+              <a:tr h="373380">
                 <a:tc>
                   <a:txBody>
                     <a:bodyPr/>
@@ -7258,7 +7380,7 @@
                           <a:ea typeface="Microsoft JhengHei"/>
                           <a:cs typeface="Microsoft JhengHei"/>
                         </a:rPr>
-                        <a:t>鈊象</a:t>
+                        <a:t>一零四</a:t>
                       </a:r>
                     </a:p>
                   </a:txBody>
@@ -7282,7 +7404,495 @@
                           <a:ea typeface="Microsoft JhengHei"/>
                           <a:cs typeface="Microsoft JhengHei"/>
                         </a:rPr>
+                        <a:t>3130</a:t>
+                      </a:r>
+                    </a:p>
+                  </a:txBody>
+                  <a:tcPr anchor="ctr" marL="73152" marT="9144" marB="9144">
+                    <a:solidFill>
+                      <a:srgbClr val="EEF2F9"/>
+                    </a:solidFill>
+                  </a:tcPr>
+                </a:tc>
+                <a:tc>
+                  <a:txBody>
+                    <a:bodyPr/>
+                    <a:lstStyle/>
+                    <a:p>
+                      <a:r>
+                        <a:rPr sz="1150" b="1">
+                          <a:solidFill>
+                            <a:srgbClr val="5C6679"/>
+                          </a:solidFill>
+                          <a:latin typeface="Microsoft JhengHei"/>
+                          <a:ea typeface="Microsoft JhengHei"/>
+                          <a:cs typeface="Microsoft JhengHei"/>
+                        </a:rPr>
+                        <a:t>其他</a:t>
+                      </a:r>
+                    </a:p>
+                  </a:txBody>
+                  <a:tcPr anchor="ctr" marL="73152" marT="9144" marB="9144">
+                    <a:solidFill>
+                      <a:srgbClr val="EEF2F9"/>
+                    </a:solidFill>
+                  </a:tcPr>
+                </a:tc>
+                <a:tc>
+                  <a:txBody>
+                    <a:bodyPr/>
+                    <a:lstStyle/>
+                    <a:p>
+                      <a:r>
+                        <a:rPr sz="1150" b="0">
+                          <a:solidFill>
+                            <a:srgbClr val="1A2233"/>
+                          </a:solidFill>
+                          <a:latin typeface="Microsoft JhengHei"/>
+                          <a:ea typeface="Microsoft JhengHei"/>
+                          <a:cs typeface="Microsoft JhengHei"/>
+                        </a:rPr>
+                        <a:t>安侯建業聯合會計師事務所</a:t>
+                      </a:r>
+                    </a:p>
+                  </a:txBody>
+                  <a:tcPr anchor="ctr" marL="73152" marT="9144" marB="9144">
+                    <a:solidFill>
+                      <a:srgbClr val="EEF2F9"/>
+                    </a:solidFill>
+                  </a:tcPr>
+                </a:tc>
+                <a:tc>
+                  <a:txBody>
+                    <a:bodyPr/>
+                    <a:lstStyle/>
+                    <a:p>
+                      <a:r>
+                        <a:rPr sz="1150" b="0">
+                          <a:solidFill>
+                            <a:srgbClr val="1A2233"/>
+                          </a:solidFill>
+                          <a:latin typeface="Microsoft JhengHei"/>
+                          <a:ea typeface="Microsoft JhengHei"/>
+                          <a:cs typeface="Microsoft JhengHei"/>
+                        </a:rPr>
+                        <a:t>趙敏如、江家齊</a:t>
+                      </a:r>
+                    </a:p>
+                  </a:txBody>
+                  <a:tcPr anchor="ctr" marL="73152" marT="9144" marB="9144">
+                    <a:solidFill>
+                      <a:srgbClr val="EEF2F9"/>
+                    </a:solidFill>
+                  </a:tcPr>
+                </a:tc>
+              </a:tr>
+              <a:tr h="373380">
+                <a:tc>
+                  <a:txBody>
+                    <a:bodyPr/>
+                    <a:lstStyle/>
+                    <a:p>
+                      <a:r>
+                        <a:rPr sz="1150" b="0">
+                          <a:solidFill>
+                            <a:srgbClr val="1A2233"/>
+                          </a:solidFill>
+                          <a:latin typeface="Microsoft JhengHei"/>
+                          <a:ea typeface="Microsoft JhengHei"/>
+                          <a:cs typeface="Microsoft JhengHei"/>
+                        </a:rPr>
+                        <a:t>安心</a:t>
+                      </a:r>
+                    </a:p>
+                  </a:txBody>
+                  <a:tcPr anchor="ctr" marL="73152" marT="9144" marB="9144">
+                    <a:solidFill>
+                      <a:srgbClr val="FFFFFF"/>
+                    </a:solidFill>
+                  </a:tcPr>
+                </a:tc>
+                <a:tc>
+                  <a:txBody>
+                    <a:bodyPr/>
+                    <a:lstStyle/>
+                    <a:p>
+                      <a:r>
+                        <a:rPr sz="1150" b="0">
+                          <a:solidFill>
+                            <a:srgbClr val="1A2233"/>
+                          </a:solidFill>
+                          <a:latin typeface="Microsoft JhengHei"/>
+                          <a:ea typeface="Microsoft JhengHei"/>
+                          <a:cs typeface="Microsoft JhengHei"/>
+                        </a:rPr>
+                        <a:t>1259</a:t>
+                      </a:r>
+                    </a:p>
+                  </a:txBody>
+                  <a:tcPr anchor="ctr" marL="73152" marT="9144" marB="9144">
+                    <a:solidFill>
+                      <a:srgbClr val="FFFFFF"/>
+                    </a:solidFill>
+                  </a:tcPr>
+                </a:tc>
+                <a:tc>
+                  <a:txBody>
+                    <a:bodyPr/>
+                    <a:lstStyle/>
+                    <a:p>
+                      <a:r>
+                        <a:rPr sz="1150" b="1">
+                          <a:solidFill>
+                            <a:srgbClr val="27A6C4"/>
+                          </a:solidFill>
+                          <a:latin typeface="Microsoft JhengHei"/>
+                          <a:ea typeface="Microsoft JhengHei"/>
+                          <a:cs typeface="Microsoft JhengHei"/>
+                        </a:rPr>
+                        <a:t>個資外洩</a:t>
+                      </a:r>
+                    </a:p>
+                  </a:txBody>
+                  <a:tcPr anchor="ctr" marL="73152" marT="9144" marB="9144">
+                    <a:solidFill>
+                      <a:srgbClr val="FFFFFF"/>
+                    </a:solidFill>
+                  </a:tcPr>
+                </a:tc>
+                <a:tc>
+                  <a:txBody>
+                    <a:bodyPr/>
+                    <a:lstStyle/>
+                    <a:p>
+                      <a:r>
+                        <a:rPr sz="1150" b="0">
+                          <a:solidFill>
+                            <a:srgbClr val="1A2233"/>
+                          </a:solidFill>
+                          <a:latin typeface="Microsoft JhengHei"/>
+                          <a:ea typeface="Microsoft JhengHei"/>
+                          <a:cs typeface="Microsoft JhengHei"/>
+                        </a:rPr>
+                        <a:t>資誠聯合會計師事務所</a:t>
+                      </a:r>
+                    </a:p>
+                  </a:txBody>
+                  <a:tcPr anchor="ctr" marL="73152" marT="9144" marB="9144">
+                    <a:solidFill>
+                      <a:srgbClr val="FFFFFF"/>
+                    </a:solidFill>
+                  </a:tcPr>
+                </a:tc>
+                <a:tc>
+                  <a:txBody>
+                    <a:bodyPr/>
+                    <a:lstStyle/>
+                    <a:p>
+                      <a:r>
+                        <a:rPr sz="1150" b="0">
+                          <a:solidFill>
+                            <a:srgbClr val="1A2233"/>
+                          </a:solidFill>
+                          <a:latin typeface="Microsoft JhengHei"/>
+                          <a:ea typeface="Microsoft JhengHei"/>
+                          <a:cs typeface="Microsoft JhengHei"/>
+                        </a:rPr>
+                        <a:t>徐明釧、陳怡婷</a:t>
+                      </a:r>
+                    </a:p>
+                  </a:txBody>
+                  <a:tcPr anchor="ctr" marL="73152" marT="9144" marB="9144">
+                    <a:solidFill>
+                      <a:srgbClr val="FFFFFF"/>
+                    </a:solidFill>
+                  </a:tcPr>
+                </a:tc>
+              </a:tr>
+              <a:tr h="373380">
+                <a:tc>
+                  <a:txBody>
+                    <a:bodyPr/>
+                    <a:lstStyle/>
+                    <a:p>
+                      <a:r>
+                        <a:rPr sz="1150" b="0">
+                          <a:solidFill>
+                            <a:srgbClr val="1A2233"/>
+                          </a:solidFill>
+                          <a:latin typeface="Microsoft JhengHei"/>
+                          <a:ea typeface="Microsoft JhengHei"/>
+                          <a:cs typeface="Microsoft JhengHei"/>
+                        </a:rPr>
+                        <a:t>神腦</a:t>
+                      </a:r>
+                    </a:p>
+                  </a:txBody>
+                  <a:tcPr anchor="ctr" marL="73152" marT="9144" marB="9144">
+                    <a:solidFill>
+                      <a:srgbClr val="EEF2F9"/>
+                    </a:solidFill>
+                  </a:tcPr>
+                </a:tc>
+                <a:tc>
+                  <a:txBody>
+                    <a:bodyPr/>
+                    <a:lstStyle/>
+                    <a:p>
+                      <a:r>
+                        <a:rPr sz="1150" b="0">
+                          <a:solidFill>
+                            <a:srgbClr val="1A2233"/>
+                          </a:solidFill>
+                          <a:latin typeface="Microsoft JhengHei"/>
+                          <a:ea typeface="Microsoft JhengHei"/>
+                          <a:cs typeface="Microsoft JhengHei"/>
+                        </a:rPr>
+                        <a:t>2450</a:t>
+                      </a:r>
+                    </a:p>
+                  </a:txBody>
+                  <a:tcPr anchor="ctr" marL="73152" marT="9144" marB="9144">
+                    <a:solidFill>
+                      <a:srgbClr val="EEF2F9"/>
+                    </a:solidFill>
+                  </a:tcPr>
+                </a:tc>
+                <a:tc>
+                  <a:txBody>
+                    <a:bodyPr/>
+                    <a:lstStyle/>
+                    <a:p>
+                      <a:r>
+                        <a:rPr sz="1150" b="1">
+                          <a:solidFill>
+                            <a:srgbClr val="E63946"/>
+                          </a:solidFill>
+                          <a:latin typeface="Microsoft JhengHei"/>
+                          <a:ea typeface="Microsoft JhengHei"/>
+                          <a:cs typeface="Microsoft JhengHei"/>
+                        </a:rPr>
+                        <a:t>駭客攻擊</a:t>
+                      </a:r>
+                    </a:p>
+                  </a:txBody>
+                  <a:tcPr anchor="ctr" marL="73152" marT="9144" marB="9144">
+                    <a:solidFill>
+                      <a:srgbClr val="EEF2F9"/>
+                    </a:solidFill>
+                  </a:tcPr>
+                </a:tc>
+                <a:tc>
+                  <a:txBody>
+                    <a:bodyPr/>
+                    <a:lstStyle/>
+                    <a:p>
+                      <a:r>
+                        <a:rPr sz="1150" b="0">
+                          <a:solidFill>
+                            <a:srgbClr val="1A2233"/>
+                          </a:solidFill>
+                          <a:latin typeface="Microsoft JhengHei"/>
+                          <a:ea typeface="Microsoft JhengHei"/>
+                          <a:cs typeface="Microsoft JhengHei"/>
+                        </a:rPr>
+                        <a:t>資誠聯合會計師事務所</a:t>
+                      </a:r>
+                    </a:p>
+                  </a:txBody>
+                  <a:tcPr anchor="ctr" marL="73152" marT="9144" marB="9144">
+                    <a:solidFill>
+                      <a:srgbClr val="EEF2F9"/>
+                    </a:solidFill>
+                  </a:tcPr>
+                </a:tc>
+                <a:tc>
+                  <a:txBody>
+                    <a:bodyPr/>
+                    <a:lstStyle/>
+                    <a:p>
+                      <a:r>
+                        <a:rPr sz="1150" b="0">
+                          <a:solidFill>
+                            <a:srgbClr val="1A2233"/>
+                          </a:solidFill>
+                          <a:latin typeface="Microsoft JhengHei"/>
+                          <a:ea typeface="Microsoft JhengHei"/>
+                          <a:cs typeface="Microsoft JhengHei"/>
+                        </a:rPr>
+                        <a:t>王銘義、林永智</a:t>
+                      </a:r>
+                    </a:p>
+                  </a:txBody>
+                  <a:tcPr anchor="ctr" marL="73152" marT="9144" marB="9144">
+                    <a:solidFill>
+                      <a:srgbClr val="EEF2F9"/>
+                    </a:solidFill>
+                  </a:tcPr>
+                </a:tc>
+              </a:tr>
+              <a:tr h="373380">
+                <a:tc>
+                  <a:txBody>
+                    <a:bodyPr/>
+                    <a:lstStyle/>
+                    <a:p>
+                      <a:r>
+                        <a:rPr sz="1150" b="0">
+                          <a:solidFill>
+                            <a:srgbClr val="1A2233"/>
+                          </a:solidFill>
+                          <a:latin typeface="Microsoft JhengHei"/>
+                          <a:ea typeface="Microsoft JhengHei"/>
+                          <a:cs typeface="Microsoft JhengHei"/>
+                        </a:rPr>
+                        <a:t>鈊象</a:t>
+                      </a:r>
+                    </a:p>
+                  </a:txBody>
+                  <a:tcPr anchor="ctr" marL="73152" marT="9144" marB="9144">
+                    <a:solidFill>
+                      <a:srgbClr val="FFFFFF"/>
+                    </a:solidFill>
+                  </a:tcPr>
+                </a:tc>
+                <a:tc>
+                  <a:txBody>
+                    <a:bodyPr/>
+                    <a:lstStyle/>
+                    <a:p>
+                      <a:r>
+                        <a:rPr sz="1150" b="0">
+                          <a:solidFill>
+                            <a:srgbClr val="1A2233"/>
+                          </a:solidFill>
+                          <a:latin typeface="Microsoft JhengHei"/>
+                          <a:ea typeface="Microsoft JhengHei"/>
+                          <a:cs typeface="Microsoft JhengHei"/>
+                        </a:rPr>
                         <a:t>3293</a:t>
+                      </a:r>
+                    </a:p>
+                  </a:txBody>
+                  <a:tcPr anchor="ctr" marL="73152" marT="9144" marB="9144">
+                    <a:solidFill>
+                      <a:srgbClr val="FFFFFF"/>
+                    </a:solidFill>
+                  </a:tcPr>
+                </a:tc>
+                <a:tc>
+                  <a:txBody>
+                    <a:bodyPr/>
+                    <a:lstStyle/>
+                    <a:p>
+                      <a:r>
+                        <a:rPr sz="1150" b="1">
+                          <a:solidFill>
+                            <a:srgbClr val="5C6679"/>
+                          </a:solidFill>
+                          <a:latin typeface="Microsoft JhengHei"/>
+                          <a:ea typeface="Microsoft JhengHei"/>
+                          <a:cs typeface="Microsoft JhengHei"/>
+                        </a:rPr>
+                        <a:t>其他</a:t>
+                      </a:r>
+                    </a:p>
+                  </a:txBody>
+                  <a:tcPr anchor="ctr" marL="73152" marT="9144" marB="9144">
+                    <a:solidFill>
+                      <a:srgbClr val="FFFFFF"/>
+                    </a:solidFill>
+                  </a:tcPr>
+                </a:tc>
+                <a:tc>
+                  <a:txBody>
+                    <a:bodyPr/>
+                    <a:lstStyle/>
+                    <a:p>
+                      <a:r>
+                        <a:rPr sz="1150" b="0">
+                          <a:solidFill>
+                            <a:srgbClr val="1A2233"/>
+                          </a:solidFill>
+                          <a:latin typeface="Microsoft JhengHei"/>
+                          <a:ea typeface="Microsoft JhengHei"/>
+                          <a:cs typeface="Microsoft JhengHei"/>
+                        </a:rPr>
+                        <a:t>勤業眾信聯合會計師事務所</a:t>
+                      </a:r>
+                    </a:p>
+                  </a:txBody>
+                  <a:tcPr anchor="ctr" marL="73152" marT="9144" marB="9144">
+                    <a:solidFill>
+                      <a:srgbClr val="FFFFFF"/>
+                    </a:solidFill>
+                  </a:tcPr>
+                </a:tc>
+                <a:tc>
+                  <a:txBody>
+                    <a:bodyPr/>
+                    <a:lstStyle/>
+                    <a:p>
+                      <a:r>
+                        <a:rPr sz="1150" b="0">
+                          <a:solidFill>
+                            <a:srgbClr val="1A2233"/>
+                          </a:solidFill>
+                          <a:latin typeface="Microsoft JhengHei"/>
+                          <a:ea typeface="Microsoft JhengHei"/>
+                          <a:cs typeface="Microsoft JhengHei"/>
+                        </a:rPr>
+                        <a:t>周仕杰、李東峰</a:t>
+                      </a:r>
+                    </a:p>
+                  </a:txBody>
+                  <a:tcPr anchor="ctr" marL="73152" marT="9144" marB="9144">
+                    <a:solidFill>
+                      <a:srgbClr val="FFFFFF"/>
+                    </a:solidFill>
+                  </a:tcPr>
+                </a:tc>
+              </a:tr>
+              <a:tr h="373380">
+                <a:tc>
+                  <a:txBody>
+                    <a:bodyPr/>
+                    <a:lstStyle/>
+                    <a:p>
+                      <a:r>
+                        <a:rPr sz="1150" b="0">
+                          <a:solidFill>
+                            <a:srgbClr val="1A2233"/>
+                          </a:solidFill>
+                          <a:latin typeface="Microsoft JhengHei"/>
+                          <a:ea typeface="Microsoft JhengHei"/>
+                          <a:cs typeface="Microsoft JhengHei"/>
+                        </a:rPr>
+                        <a:t>柏文</a:t>
+                      </a:r>
+                    </a:p>
+                  </a:txBody>
+                  <a:tcPr anchor="ctr" marL="73152" marT="9144" marB="9144">
+                    <a:solidFill>
+                      <a:srgbClr val="EEF2F9"/>
+                    </a:solidFill>
+                  </a:tcPr>
+                </a:tc>
+                <a:tc>
+                  <a:txBody>
+                    <a:bodyPr/>
+                    <a:lstStyle/>
+                    <a:p>
+                      <a:r>
+                        <a:rPr sz="1150" b="0">
+                          <a:solidFill>
+                            <a:srgbClr val="1A2233"/>
+                          </a:solidFill>
+                          <a:latin typeface="Microsoft JhengHei"/>
+                          <a:ea typeface="Microsoft JhengHei"/>
+                          <a:cs typeface="Microsoft JhengHei"/>
+                        </a:rPr>
+                        <a:t>8462</a:t>
                       </a:r>
                     </a:p>
                   </a:txBody>
@@ -7330,7 +7940,7 @@
                           <a:ea typeface="Microsoft JhengHei"/>
                           <a:cs typeface="Microsoft JhengHei"/>
                         </a:rPr>
-                        <a:t>勤業眾信聯合會計師事務所</a:t>
+                        <a:t>—</a:t>
                       </a:r>
                     </a:p>
                   </a:txBody>
@@ -7354,7 +7964,7 @@
                           <a:ea typeface="Microsoft JhengHei"/>
                           <a:cs typeface="Microsoft JhengHei"/>
                         </a:rPr>
-                        <a:t>周仕杰、李東峰</a:t>
+                        <a:t>—</a:t>
                       </a:r>
                     </a:p>
                   </a:txBody>
@@ -7365,7 +7975,7 @@
                   </a:tcPr>
                 </a:tc>
               </a:tr>
-              <a:tr h="344658">
+              <a:tr h="373380">
                 <a:tc>
                   <a:txBody>
                     <a:bodyPr/>
@@ -7380,7 +7990,7 @@
                           <a:ea typeface="Microsoft JhengHei"/>
                           <a:cs typeface="Microsoft JhengHei"/>
                         </a:rPr>
-                        <a:t>一零四</a:t>
+                        <a:t>友訊</a:t>
                       </a:r>
                     </a:p>
                   </a:txBody>
@@ -7404,739 +8014,7 @@
                           <a:ea typeface="Microsoft JhengHei"/>
                           <a:cs typeface="Microsoft JhengHei"/>
                         </a:rPr>
-                        <a:t>3130</a:t>
-                      </a:r>
-                    </a:p>
-                  </a:txBody>
-                  <a:tcPr anchor="ctr" marL="73152" marT="9144" marB="9144">
-                    <a:solidFill>
-                      <a:srgbClr val="FFFFFF"/>
-                    </a:solidFill>
-                  </a:tcPr>
-                </a:tc>
-                <a:tc>
-                  <a:txBody>
-                    <a:bodyPr/>
-                    <a:lstStyle/>
-                    <a:p>
-                      <a:r>
-                        <a:rPr sz="1150" b="1">
-                          <a:solidFill>
-                            <a:srgbClr val="5C6679"/>
-                          </a:solidFill>
-                          <a:latin typeface="Microsoft JhengHei"/>
-                          <a:ea typeface="Microsoft JhengHei"/>
-                          <a:cs typeface="Microsoft JhengHei"/>
-                        </a:rPr>
-                        <a:t>其他</a:t>
-                      </a:r>
-                    </a:p>
-                  </a:txBody>
-                  <a:tcPr anchor="ctr" marL="73152" marT="9144" marB="9144">
-                    <a:solidFill>
-                      <a:srgbClr val="FFFFFF"/>
-                    </a:solidFill>
-                  </a:tcPr>
-                </a:tc>
-                <a:tc>
-                  <a:txBody>
-                    <a:bodyPr/>
-                    <a:lstStyle/>
-                    <a:p>
-                      <a:r>
-                        <a:rPr sz="1150" b="0">
-                          <a:solidFill>
-                            <a:srgbClr val="1A2233"/>
-                          </a:solidFill>
-                          <a:latin typeface="Microsoft JhengHei"/>
-                          <a:ea typeface="Microsoft JhengHei"/>
-                          <a:cs typeface="Microsoft JhengHei"/>
-                        </a:rPr>
-                        <a:t>安侯建業聯合會計師事務所</a:t>
-                      </a:r>
-                    </a:p>
-                  </a:txBody>
-                  <a:tcPr anchor="ctr" marL="73152" marT="9144" marB="9144">
-                    <a:solidFill>
-                      <a:srgbClr val="FFFFFF"/>
-                    </a:solidFill>
-                  </a:tcPr>
-                </a:tc>
-                <a:tc>
-                  <a:txBody>
-                    <a:bodyPr/>
-                    <a:lstStyle/>
-                    <a:p>
-                      <a:r>
-                        <a:rPr sz="1150" b="0">
-                          <a:solidFill>
-                            <a:srgbClr val="1A2233"/>
-                          </a:solidFill>
-                          <a:latin typeface="Microsoft JhengHei"/>
-                          <a:ea typeface="Microsoft JhengHei"/>
-                          <a:cs typeface="Microsoft JhengHei"/>
-                        </a:rPr>
-                        <a:t>趙敏如、江家齊</a:t>
-                      </a:r>
-                    </a:p>
-                  </a:txBody>
-                  <a:tcPr anchor="ctr" marL="73152" marT="9144" marB="9144">
-                    <a:solidFill>
-                      <a:srgbClr val="FFFFFF"/>
-                    </a:solidFill>
-                  </a:tcPr>
-                </a:tc>
-              </a:tr>
-              <a:tr h="344658">
-                <a:tc>
-                  <a:txBody>
-                    <a:bodyPr/>
-                    <a:lstStyle/>
-                    <a:p>
-                      <a:r>
-                        <a:rPr sz="1150" b="0">
-                          <a:solidFill>
-                            <a:srgbClr val="1A2233"/>
-                          </a:solidFill>
-                          <a:latin typeface="Microsoft JhengHei"/>
-                          <a:ea typeface="Microsoft JhengHei"/>
-                          <a:cs typeface="Microsoft JhengHei"/>
-                        </a:rPr>
-                        <a:t>安心</a:t>
-                      </a:r>
-                    </a:p>
-                  </a:txBody>
-                  <a:tcPr anchor="ctr" marL="73152" marT="9144" marB="9144">
-                    <a:solidFill>
-                      <a:srgbClr val="EEF2F9"/>
-                    </a:solidFill>
-                  </a:tcPr>
-                </a:tc>
-                <a:tc>
-                  <a:txBody>
-                    <a:bodyPr/>
-                    <a:lstStyle/>
-                    <a:p>
-                      <a:r>
-                        <a:rPr sz="1150" b="0">
-                          <a:solidFill>
-                            <a:srgbClr val="1A2233"/>
-                          </a:solidFill>
-                          <a:latin typeface="Microsoft JhengHei"/>
-                          <a:ea typeface="Microsoft JhengHei"/>
-                          <a:cs typeface="Microsoft JhengHei"/>
-                        </a:rPr>
-                        <a:t>1259</a:t>
-                      </a:r>
-                    </a:p>
-                  </a:txBody>
-                  <a:tcPr anchor="ctr" marL="73152" marT="9144" marB="9144">
-                    <a:solidFill>
-                      <a:srgbClr val="EEF2F9"/>
-                    </a:solidFill>
-                  </a:tcPr>
-                </a:tc>
-                <a:tc>
-                  <a:txBody>
-                    <a:bodyPr/>
-                    <a:lstStyle/>
-                    <a:p>
-                      <a:r>
-                        <a:rPr sz="1150" b="1">
-                          <a:solidFill>
-                            <a:srgbClr val="27A6C4"/>
-                          </a:solidFill>
-                          <a:latin typeface="Microsoft JhengHei"/>
-                          <a:ea typeface="Microsoft JhengHei"/>
-                          <a:cs typeface="Microsoft JhengHei"/>
-                        </a:rPr>
-                        <a:t>個資外洩</a:t>
-                      </a:r>
-                    </a:p>
-                  </a:txBody>
-                  <a:tcPr anchor="ctr" marL="73152" marT="9144" marB="9144">
-                    <a:solidFill>
-                      <a:srgbClr val="EEF2F9"/>
-                    </a:solidFill>
-                  </a:tcPr>
-                </a:tc>
-                <a:tc>
-                  <a:txBody>
-                    <a:bodyPr/>
-                    <a:lstStyle/>
-                    <a:p>
-                      <a:r>
-                        <a:rPr sz="1150" b="0">
-                          <a:solidFill>
-                            <a:srgbClr val="1A2233"/>
-                          </a:solidFill>
-                          <a:latin typeface="Microsoft JhengHei"/>
-                          <a:ea typeface="Microsoft JhengHei"/>
-                          <a:cs typeface="Microsoft JhengHei"/>
-                        </a:rPr>
-                        <a:t>資誠聯合會計師事務所</a:t>
-                      </a:r>
-                    </a:p>
-                  </a:txBody>
-                  <a:tcPr anchor="ctr" marL="73152" marT="9144" marB="9144">
-                    <a:solidFill>
-                      <a:srgbClr val="EEF2F9"/>
-                    </a:solidFill>
-                  </a:tcPr>
-                </a:tc>
-                <a:tc>
-                  <a:txBody>
-                    <a:bodyPr/>
-                    <a:lstStyle/>
-                    <a:p>
-                      <a:r>
-                        <a:rPr sz="1150" b="0">
-                          <a:solidFill>
-                            <a:srgbClr val="1A2233"/>
-                          </a:solidFill>
-                          <a:latin typeface="Microsoft JhengHei"/>
-                          <a:ea typeface="Microsoft JhengHei"/>
-                          <a:cs typeface="Microsoft JhengHei"/>
-                        </a:rPr>
-                        <a:t>徐明釧、陳怡婷</a:t>
-                      </a:r>
-                    </a:p>
-                  </a:txBody>
-                  <a:tcPr anchor="ctr" marL="73152" marT="9144" marB="9144">
-                    <a:solidFill>
-                      <a:srgbClr val="EEF2F9"/>
-                    </a:solidFill>
-                  </a:tcPr>
-                </a:tc>
-              </a:tr>
-              <a:tr h="344658">
-                <a:tc>
-                  <a:txBody>
-                    <a:bodyPr/>
-                    <a:lstStyle/>
-                    <a:p>
-                      <a:r>
-                        <a:rPr sz="1150" b="0">
-                          <a:solidFill>
-                            <a:srgbClr val="1A2233"/>
-                          </a:solidFill>
-                          <a:latin typeface="Microsoft JhengHei"/>
-                          <a:ea typeface="Microsoft JhengHei"/>
-                          <a:cs typeface="Microsoft JhengHei"/>
-                        </a:rPr>
-                        <a:t>神腦</a:t>
-                      </a:r>
-                    </a:p>
-                  </a:txBody>
-                  <a:tcPr anchor="ctr" marL="73152" marT="9144" marB="9144">
-                    <a:solidFill>
-                      <a:srgbClr val="FFFFFF"/>
-                    </a:solidFill>
-                  </a:tcPr>
-                </a:tc>
-                <a:tc>
-                  <a:txBody>
-                    <a:bodyPr/>
-                    <a:lstStyle/>
-                    <a:p>
-                      <a:r>
-                        <a:rPr sz="1150" b="0">
-                          <a:solidFill>
-                            <a:srgbClr val="1A2233"/>
-                          </a:solidFill>
-                          <a:latin typeface="Microsoft JhengHei"/>
-                          <a:ea typeface="Microsoft JhengHei"/>
-                          <a:cs typeface="Microsoft JhengHei"/>
-                        </a:rPr>
-                        <a:t>2450</a:t>
-                      </a:r>
-                    </a:p>
-                  </a:txBody>
-                  <a:tcPr anchor="ctr" marL="73152" marT="9144" marB="9144">
-                    <a:solidFill>
-                      <a:srgbClr val="FFFFFF"/>
-                    </a:solidFill>
-                  </a:tcPr>
-                </a:tc>
-                <a:tc>
-                  <a:txBody>
-                    <a:bodyPr/>
-                    <a:lstStyle/>
-                    <a:p>
-                      <a:r>
-                        <a:rPr sz="1150" b="1">
-                          <a:solidFill>
-                            <a:srgbClr val="E63946"/>
-                          </a:solidFill>
-                          <a:latin typeface="Microsoft JhengHei"/>
-                          <a:ea typeface="Microsoft JhengHei"/>
-                          <a:cs typeface="Microsoft JhengHei"/>
-                        </a:rPr>
-                        <a:t>駭客攻擊</a:t>
-                      </a:r>
-                    </a:p>
-                  </a:txBody>
-                  <a:tcPr anchor="ctr" marL="73152" marT="9144" marB="9144">
-                    <a:solidFill>
-                      <a:srgbClr val="FFFFFF"/>
-                    </a:solidFill>
-                  </a:tcPr>
-                </a:tc>
-                <a:tc>
-                  <a:txBody>
-                    <a:bodyPr/>
-                    <a:lstStyle/>
-                    <a:p>
-                      <a:r>
-                        <a:rPr sz="1150" b="0">
-                          <a:solidFill>
-                            <a:srgbClr val="1A2233"/>
-                          </a:solidFill>
-                          <a:latin typeface="Microsoft JhengHei"/>
-                          <a:ea typeface="Microsoft JhengHei"/>
-                          <a:cs typeface="Microsoft JhengHei"/>
-                        </a:rPr>
-                        <a:t>資誠聯合會計師事務所</a:t>
-                      </a:r>
-                    </a:p>
-                  </a:txBody>
-                  <a:tcPr anchor="ctr" marL="73152" marT="9144" marB="9144">
-                    <a:solidFill>
-                      <a:srgbClr val="FFFFFF"/>
-                    </a:solidFill>
-                  </a:tcPr>
-                </a:tc>
-                <a:tc>
-                  <a:txBody>
-                    <a:bodyPr/>
-                    <a:lstStyle/>
-                    <a:p>
-                      <a:r>
-                        <a:rPr sz="1150" b="0">
-                          <a:solidFill>
-                            <a:srgbClr val="1A2233"/>
-                          </a:solidFill>
-                          <a:latin typeface="Microsoft JhengHei"/>
-                          <a:ea typeface="Microsoft JhengHei"/>
-                          <a:cs typeface="Microsoft JhengHei"/>
-                        </a:rPr>
-                        <a:t>王銘義、林永智</a:t>
-                      </a:r>
-                    </a:p>
-                  </a:txBody>
-                  <a:tcPr anchor="ctr" marL="73152" marT="9144" marB="9144">
-                    <a:solidFill>
-                      <a:srgbClr val="FFFFFF"/>
-                    </a:solidFill>
-                  </a:tcPr>
-                </a:tc>
-              </a:tr>
-              <a:tr h="344658">
-                <a:tc>
-                  <a:txBody>
-                    <a:bodyPr/>
-                    <a:lstStyle/>
-                    <a:p>
-                      <a:r>
-                        <a:rPr sz="1150" b="0">
-                          <a:solidFill>
-                            <a:srgbClr val="1A2233"/>
-                          </a:solidFill>
-                          <a:latin typeface="Microsoft JhengHei"/>
-                          <a:ea typeface="Microsoft JhengHei"/>
-                          <a:cs typeface="Microsoft JhengHei"/>
-                        </a:rPr>
-                        <a:t>鈊象</a:t>
-                      </a:r>
-                    </a:p>
-                  </a:txBody>
-                  <a:tcPr anchor="ctr" marL="73152" marT="9144" marB="9144">
-                    <a:solidFill>
-                      <a:srgbClr val="EEF2F9"/>
-                    </a:solidFill>
-                  </a:tcPr>
-                </a:tc>
-                <a:tc>
-                  <a:txBody>
-                    <a:bodyPr/>
-                    <a:lstStyle/>
-                    <a:p>
-                      <a:r>
-                        <a:rPr sz="1150" b="0">
-                          <a:solidFill>
-                            <a:srgbClr val="1A2233"/>
-                          </a:solidFill>
-                          <a:latin typeface="Microsoft JhengHei"/>
-                          <a:ea typeface="Microsoft JhengHei"/>
-                          <a:cs typeface="Microsoft JhengHei"/>
-                        </a:rPr>
-                        <a:t>3293</a:t>
-                      </a:r>
-                    </a:p>
-                  </a:txBody>
-                  <a:tcPr anchor="ctr" marL="73152" marT="9144" marB="9144">
-                    <a:solidFill>
-                      <a:srgbClr val="EEF2F9"/>
-                    </a:solidFill>
-                  </a:tcPr>
-                </a:tc>
-                <a:tc>
-                  <a:txBody>
-                    <a:bodyPr/>
-                    <a:lstStyle/>
-                    <a:p>
-                      <a:r>
-                        <a:rPr sz="1150" b="1">
-                          <a:solidFill>
-                            <a:srgbClr val="5C6679"/>
-                          </a:solidFill>
-                          <a:latin typeface="Microsoft JhengHei"/>
-                          <a:ea typeface="Microsoft JhengHei"/>
-                          <a:cs typeface="Microsoft JhengHei"/>
-                        </a:rPr>
-                        <a:t>其他</a:t>
-                      </a:r>
-                    </a:p>
-                  </a:txBody>
-                  <a:tcPr anchor="ctr" marL="73152" marT="9144" marB="9144">
-                    <a:solidFill>
-                      <a:srgbClr val="EEF2F9"/>
-                    </a:solidFill>
-                  </a:tcPr>
-                </a:tc>
-                <a:tc>
-                  <a:txBody>
-                    <a:bodyPr/>
-                    <a:lstStyle/>
-                    <a:p>
-                      <a:r>
-                        <a:rPr sz="1150" b="0">
-                          <a:solidFill>
-                            <a:srgbClr val="1A2233"/>
-                          </a:solidFill>
-                          <a:latin typeface="Microsoft JhengHei"/>
-                          <a:ea typeface="Microsoft JhengHei"/>
-                          <a:cs typeface="Microsoft JhengHei"/>
-                        </a:rPr>
-                        <a:t>勤業眾信聯合會計師事務所</a:t>
-                      </a:r>
-                    </a:p>
-                  </a:txBody>
-                  <a:tcPr anchor="ctr" marL="73152" marT="9144" marB="9144">
-                    <a:solidFill>
-                      <a:srgbClr val="EEF2F9"/>
-                    </a:solidFill>
-                  </a:tcPr>
-                </a:tc>
-                <a:tc>
-                  <a:txBody>
-                    <a:bodyPr/>
-                    <a:lstStyle/>
-                    <a:p>
-                      <a:r>
-                        <a:rPr sz="1150" b="0">
-                          <a:solidFill>
-                            <a:srgbClr val="1A2233"/>
-                          </a:solidFill>
-                          <a:latin typeface="Microsoft JhengHei"/>
-                          <a:ea typeface="Microsoft JhengHei"/>
-                          <a:cs typeface="Microsoft JhengHei"/>
-                        </a:rPr>
-                        <a:t>周仕杰、李東峰</a:t>
-                      </a:r>
-                    </a:p>
-                  </a:txBody>
-                  <a:tcPr anchor="ctr" marL="73152" marT="9144" marB="9144">
-                    <a:solidFill>
-                      <a:srgbClr val="EEF2F9"/>
-                    </a:solidFill>
-                  </a:tcPr>
-                </a:tc>
-              </a:tr>
-              <a:tr h="344658">
-                <a:tc>
-                  <a:txBody>
-                    <a:bodyPr/>
-                    <a:lstStyle/>
-                    <a:p>
-                      <a:r>
-                        <a:rPr sz="1150" b="0">
-                          <a:solidFill>
-                            <a:srgbClr val="1A2233"/>
-                          </a:solidFill>
-                          <a:latin typeface="Microsoft JhengHei"/>
-                          <a:ea typeface="Microsoft JhengHei"/>
-                          <a:cs typeface="Microsoft JhengHei"/>
-                        </a:rPr>
-                        <a:t>柏文</a:t>
-                      </a:r>
-                    </a:p>
-                  </a:txBody>
-                  <a:tcPr anchor="ctr" marL="73152" marT="9144" marB="9144">
-                    <a:solidFill>
-                      <a:srgbClr val="FFFFFF"/>
-                    </a:solidFill>
-                  </a:tcPr>
-                </a:tc>
-                <a:tc>
-                  <a:txBody>
-                    <a:bodyPr/>
-                    <a:lstStyle/>
-                    <a:p>
-                      <a:r>
-                        <a:rPr sz="1150" b="0">
-                          <a:solidFill>
-                            <a:srgbClr val="1A2233"/>
-                          </a:solidFill>
-                          <a:latin typeface="Microsoft JhengHei"/>
-                          <a:ea typeface="Microsoft JhengHei"/>
-                          <a:cs typeface="Microsoft JhengHei"/>
-                        </a:rPr>
-                        <a:t>8462</a:t>
-                      </a:r>
-                    </a:p>
-                  </a:txBody>
-                  <a:tcPr anchor="ctr" marL="73152" marT="9144" marB="9144">
-                    <a:solidFill>
-                      <a:srgbClr val="FFFFFF"/>
-                    </a:solidFill>
-                  </a:tcPr>
-                </a:tc>
-                <a:tc>
-                  <a:txBody>
-                    <a:bodyPr/>
-                    <a:lstStyle/>
-                    <a:p>
-                      <a:r>
-                        <a:rPr sz="1150" b="1">
-                          <a:solidFill>
-                            <a:srgbClr val="27A6C4"/>
-                          </a:solidFill>
-                          <a:latin typeface="Microsoft JhengHei"/>
-                          <a:ea typeface="Microsoft JhengHei"/>
-                          <a:cs typeface="Microsoft JhengHei"/>
-                        </a:rPr>
-                        <a:t>個資外洩</a:t>
-                      </a:r>
-                    </a:p>
-                  </a:txBody>
-                  <a:tcPr anchor="ctr" marL="73152" marT="9144" marB="9144">
-                    <a:solidFill>
-                      <a:srgbClr val="FFFFFF"/>
-                    </a:solidFill>
-                  </a:tcPr>
-                </a:tc>
-                <a:tc>
-                  <a:txBody>
-                    <a:bodyPr/>
-                    <a:lstStyle/>
-                    <a:p>
-                      <a:r>
-                        <a:rPr sz="1150" b="0">
-                          <a:solidFill>
-                            <a:srgbClr val="1A2233"/>
-                          </a:solidFill>
-                          <a:latin typeface="Microsoft JhengHei"/>
-                          <a:ea typeface="Microsoft JhengHei"/>
-                          <a:cs typeface="Microsoft JhengHei"/>
-                        </a:rPr>
-                        <a:t>安永聯合會計師事務所</a:t>
-                      </a:r>
-                    </a:p>
-                  </a:txBody>
-                  <a:tcPr anchor="ctr" marL="73152" marT="9144" marB="9144">
-                    <a:solidFill>
-                      <a:srgbClr val="FFFFFF"/>
-                    </a:solidFill>
-                  </a:tcPr>
-                </a:tc>
-                <a:tc>
-                  <a:txBody>
-                    <a:bodyPr/>
-                    <a:lstStyle/>
-                    <a:p>
-                      <a:r>
-                        <a:rPr sz="1150" b="0">
-                          <a:solidFill>
-                            <a:srgbClr val="1A2233"/>
-                          </a:solidFill>
-                          <a:latin typeface="Microsoft JhengHei"/>
-                          <a:ea typeface="Microsoft JhengHei"/>
-                          <a:cs typeface="Microsoft JhengHei"/>
-                        </a:rPr>
-                        <a:t>洪福讚、陳政初</a:t>
-                      </a:r>
-                    </a:p>
-                  </a:txBody>
-                  <a:tcPr anchor="ctr" marL="73152" marT="9144" marB="9144">
-                    <a:solidFill>
-                      <a:srgbClr val="FFFFFF"/>
-                    </a:solidFill>
-                  </a:tcPr>
-                </a:tc>
-              </a:tr>
-              <a:tr h="344658">
-                <a:tc>
-                  <a:txBody>
-                    <a:bodyPr/>
-                    <a:lstStyle/>
-                    <a:p>
-                      <a:r>
-                        <a:rPr sz="1150" b="0">
-                          <a:solidFill>
-                            <a:srgbClr val="1A2233"/>
-                          </a:solidFill>
-                          <a:latin typeface="Microsoft JhengHei"/>
-                          <a:ea typeface="Microsoft JhengHei"/>
-                          <a:cs typeface="Microsoft JhengHei"/>
-                        </a:rPr>
-                        <a:t>友訊</a:t>
-                      </a:r>
-                    </a:p>
-                  </a:txBody>
-                  <a:tcPr anchor="ctr" marL="73152" marT="9144" marB="9144">
-                    <a:solidFill>
-                      <a:srgbClr val="EEF2F9"/>
-                    </a:solidFill>
-                  </a:tcPr>
-                </a:tc>
-                <a:tc>
-                  <a:txBody>
-                    <a:bodyPr/>
-                    <a:lstStyle/>
-                    <a:p>
-                      <a:r>
-                        <a:rPr sz="1150" b="0">
-                          <a:solidFill>
-                            <a:srgbClr val="1A2233"/>
-                          </a:solidFill>
-                          <a:latin typeface="Microsoft JhengHei"/>
-                          <a:ea typeface="Microsoft JhengHei"/>
-                          <a:cs typeface="Microsoft JhengHei"/>
-                        </a:rPr>
                         <a:t>2332</a:t>
-                      </a:r>
-                    </a:p>
-                  </a:txBody>
-                  <a:tcPr anchor="ctr" marL="73152" marT="9144" marB="9144">
-                    <a:solidFill>
-                      <a:srgbClr val="EEF2F9"/>
-                    </a:solidFill>
-                  </a:tcPr>
-                </a:tc>
-                <a:tc>
-                  <a:txBody>
-                    <a:bodyPr/>
-                    <a:lstStyle/>
-                    <a:p>
-                      <a:r>
-                        <a:rPr sz="1150" b="1">
-                          <a:solidFill>
-                            <a:srgbClr val="E63946"/>
-                          </a:solidFill>
-                          <a:latin typeface="Microsoft JhengHei"/>
-                          <a:ea typeface="Microsoft JhengHei"/>
-                          <a:cs typeface="Microsoft JhengHei"/>
-                        </a:rPr>
-                        <a:t>駭客攻擊</a:t>
-                      </a:r>
-                    </a:p>
-                  </a:txBody>
-                  <a:tcPr anchor="ctr" marL="73152" marT="9144" marB="9144">
-                    <a:solidFill>
-                      <a:srgbClr val="EEF2F9"/>
-                    </a:solidFill>
-                  </a:tcPr>
-                </a:tc>
-                <a:tc>
-                  <a:txBody>
-                    <a:bodyPr/>
-                    <a:lstStyle/>
-                    <a:p>
-                      <a:r>
-                        <a:rPr sz="1150" b="0">
-                          <a:solidFill>
-                            <a:srgbClr val="1A2233"/>
-                          </a:solidFill>
-                          <a:latin typeface="Microsoft JhengHei"/>
-                          <a:ea typeface="Microsoft JhengHei"/>
-                          <a:cs typeface="Microsoft JhengHei"/>
-                        </a:rPr>
-                        <a:t>安侯建業聯合會計師事務所</a:t>
-                      </a:r>
-                    </a:p>
-                  </a:txBody>
-                  <a:tcPr anchor="ctr" marL="73152" marT="9144" marB="9144">
-                    <a:solidFill>
-                      <a:srgbClr val="EEF2F9"/>
-                    </a:solidFill>
-                  </a:tcPr>
-                </a:tc>
-                <a:tc>
-                  <a:txBody>
-                    <a:bodyPr/>
-                    <a:lstStyle/>
-                    <a:p>
-                      <a:r>
-                        <a:rPr sz="1150" b="0">
-                          <a:solidFill>
-                            <a:srgbClr val="1A2233"/>
-                          </a:solidFill>
-                          <a:latin typeface="Microsoft JhengHei"/>
-                          <a:ea typeface="Microsoft JhengHei"/>
-                          <a:cs typeface="Microsoft JhengHei"/>
-                        </a:rPr>
-                        <a:t>梅元貞、謝秋華</a:t>
-                      </a:r>
-                    </a:p>
-                  </a:txBody>
-                  <a:tcPr anchor="ctr" marL="73152" marT="9144" marB="9144">
-                    <a:solidFill>
-                      <a:srgbClr val="EEF2F9"/>
-                    </a:solidFill>
-                  </a:tcPr>
-                </a:tc>
-              </a:tr>
-              <a:tr h="344658">
-                <a:tc>
-                  <a:txBody>
-                    <a:bodyPr/>
-                    <a:lstStyle/>
-                    <a:p>
-                      <a:r>
-                        <a:rPr sz="1150" b="0">
-                          <a:solidFill>
-                            <a:srgbClr val="1A2233"/>
-                          </a:solidFill>
-                          <a:latin typeface="Microsoft JhengHei"/>
-                          <a:ea typeface="Microsoft JhengHei"/>
-                          <a:cs typeface="Microsoft JhengHei"/>
-                        </a:rPr>
-                        <a:t>長榮航</a:t>
-                      </a:r>
-                    </a:p>
-                  </a:txBody>
-                  <a:tcPr anchor="ctr" marL="73152" marT="9144" marB="9144">
-                    <a:solidFill>
-                      <a:srgbClr val="FFFFFF"/>
-                    </a:solidFill>
-                  </a:tcPr>
-                </a:tc>
-                <a:tc>
-                  <a:txBody>
-                    <a:bodyPr/>
-                    <a:lstStyle/>
-                    <a:p>
-                      <a:r>
-                        <a:rPr sz="1150" b="0">
-                          <a:solidFill>
-                            <a:srgbClr val="1A2233"/>
-                          </a:solidFill>
-                          <a:latin typeface="Microsoft JhengHei"/>
-                          <a:ea typeface="Microsoft JhengHei"/>
-                          <a:cs typeface="Microsoft JhengHei"/>
-                        </a:rPr>
-                        <a:t>2618</a:t>
                       </a:r>
                     </a:p>
                   </a:txBody>
@@ -8208,135 +8086,13 @@
                           <a:ea typeface="Microsoft JhengHei"/>
                           <a:cs typeface="Microsoft JhengHei"/>
                         </a:rPr>
-                        <a:t>陳雅琳、楊雲筑</a:t>
+                        <a:t>梅元貞、謝秋華</a:t>
                       </a:r>
                     </a:p>
                   </a:txBody>
                   <a:tcPr anchor="ctr" marL="73152" marT="9144" marB="9144">
                     <a:solidFill>
                       <a:srgbClr val="FFFFFF"/>
-                    </a:solidFill>
-                  </a:tcPr>
-                </a:tc>
-              </a:tr>
-              <a:tr h="344664">
-                <a:tc>
-                  <a:txBody>
-                    <a:bodyPr/>
-                    <a:lstStyle/>
-                    <a:p>
-                      <a:r>
-                        <a:rPr sz="1150" b="0">
-                          <a:solidFill>
-                            <a:srgbClr val="1A2233"/>
-                          </a:solidFill>
-                          <a:latin typeface="Microsoft JhengHei"/>
-                          <a:ea typeface="Microsoft JhengHei"/>
-                          <a:cs typeface="Microsoft JhengHei"/>
-                        </a:rPr>
-                        <a:t>長榮航太</a:t>
-                      </a:r>
-                    </a:p>
-                  </a:txBody>
-                  <a:tcPr anchor="ctr" marL="73152" marT="9144" marB="9144">
-                    <a:solidFill>
-                      <a:srgbClr val="EEF2F9"/>
-                    </a:solidFill>
-                  </a:tcPr>
-                </a:tc>
-                <a:tc>
-                  <a:txBody>
-                    <a:bodyPr/>
-                    <a:lstStyle/>
-                    <a:p>
-                      <a:r>
-                        <a:rPr sz="1150" b="0">
-                          <a:solidFill>
-                            <a:srgbClr val="1A2233"/>
-                          </a:solidFill>
-                          <a:latin typeface="Microsoft JhengHei"/>
-                          <a:ea typeface="Microsoft JhengHei"/>
-                          <a:cs typeface="Microsoft JhengHei"/>
-                        </a:rPr>
-                        <a:t>2645</a:t>
-                      </a:r>
-                    </a:p>
-                  </a:txBody>
-                  <a:tcPr anchor="ctr" marL="73152" marT="9144" marB="9144">
-                    <a:solidFill>
-                      <a:srgbClr val="EEF2F9"/>
-                    </a:solidFill>
-                  </a:tcPr>
-                </a:tc>
-                <a:tc>
-                  <a:txBody>
-                    <a:bodyPr/>
-                    <a:lstStyle/>
-                    <a:p>
-                      <a:r>
-                        <a:rPr sz="1150" b="1">
-                          <a:solidFill>
-                            <a:srgbClr val="E63946"/>
-                          </a:solidFill>
-                          <a:latin typeface="Microsoft JhengHei"/>
-                          <a:ea typeface="Microsoft JhengHei"/>
-                          <a:cs typeface="Microsoft JhengHei"/>
-                        </a:rPr>
-                        <a:t>駭客攻擊</a:t>
-                      </a:r>
-                    </a:p>
-                  </a:txBody>
-                  <a:tcPr anchor="ctr" marL="73152" marT="9144" marB="9144">
-                    <a:solidFill>
-                      <a:srgbClr val="EEF2F9"/>
-                    </a:solidFill>
-                  </a:tcPr>
-                </a:tc>
-                <a:tc>
-                  <a:txBody>
-                    <a:bodyPr/>
-                    <a:lstStyle/>
-                    <a:p>
-                      <a:r>
-                        <a:rPr sz="1150" b="0">
-                          <a:solidFill>
-                            <a:srgbClr val="1A2233"/>
-                          </a:solidFill>
-                          <a:latin typeface="Microsoft JhengHei"/>
-                          <a:ea typeface="Microsoft JhengHei"/>
-                          <a:cs typeface="Microsoft JhengHei"/>
-                        </a:rPr>
-                        <a:t>安侯建業聯合會計師事務所</a:t>
-                      </a:r>
-                    </a:p>
-                  </a:txBody>
-                  <a:tcPr anchor="ctr" marL="73152" marT="9144" marB="9144">
-                    <a:solidFill>
-                      <a:srgbClr val="EEF2F9"/>
-                    </a:solidFill>
-                  </a:tcPr>
-                </a:tc>
-                <a:tc>
-                  <a:txBody>
-                    <a:bodyPr/>
-                    <a:lstStyle/>
-                    <a:p>
-                      <a:r>
-                        <a:rPr sz="1150" b="0">
-                          <a:solidFill>
-                            <a:srgbClr val="1A2233"/>
-                          </a:solidFill>
-                          <a:latin typeface="Microsoft JhengHei"/>
-                          <a:ea typeface="Microsoft JhengHei"/>
-                          <a:cs typeface="Microsoft JhengHei"/>
-                        </a:rPr>
-                        <a:t>陳雅琳、鄭博仁</a:t>
-                      </a:r>
-                    </a:p>
-                  </a:txBody>
-                  <a:tcPr anchor="ctr" marL="73152" marT="9144" marB="9144">
-                    <a:solidFill>
-                      <a:srgbClr val="EEF2F9"/>
                     </a:solidFill>
                   </a:tcPr>
                 </a:tc>
@@ -9790,7 +9546,7 @@
             <a:avLst/>
           </a:prstGeom>
           <a:solidFill>
-            <a:srgbClr val="5C6679"/>
+            <a:srgbClr val="E63946"/>
           </a:solidFill>
           <a:ln>
             <a:noFill/>
@@ -9851,7 +9607,7 @@
                 <a:ea typeface="Microsoft JhengHei"/>
                 <a:cs typeface="Microsoft JhengHei"/>
               </a:rPr>
-              <a:t>緯致 </a:t>
+              <a:t>91APP*-KY </a:t>
             </a:r>
             <a:r>
               <a:rPr sz="1300" b="0">
@@ -9862,7 +9618,7 @@
                 <a:ea typeface="Microsoft JhengHei"/>
                 <a:cs typeface="Microsoft JhengHei"/>
               </a:rPr>
-              <a:t>4953</a:t>
+              <a:t>6741</a:t>
             </a:r>
           </a:p>
         </p:txBody>
@@ -9882,7 +9638,7 @@
             <a:avLst/>
           </a:prstGeom>
           <a:solidFill>
-            <a:srgbClr val="5C6679"/>
+            <a:srgbClr val="E63946"/>
           </a:solidFill>
           <a:ln>
             <a:noFill/>
@@ -9943,7 +9699,7 @@
                 <a:ea typeface="Microsoft JhengHei"/>
                 <a:cs typeface="Microsoft JhengHei"/>
               </a:rPr>
-              <a:t>其他</a:t>
+              <a:t>駭客攻擊</a:t>
             </a:r>
           </a:p>
         </p:txBody>
@@ -9978,7 +9734,7 @@
             <a:r>
               <a:rPr sz="1100" b="1">
                 <a:solidFill>
-                  <a:srgbClr val="5C6679"/>
+                  <a:srgbClr val="E63946"/>
                 </a:solidFill>
                 <a:latin typeface="Microsoft JhengHei"/>
                 <a:ea typeface="Microsoft JhengHei"/>
@@ -9995,7 +9751,7 @@
                 <a:ea typeface="Microsoft JhengHei"/>
                 <a:cs typeface="Microsoft JhengHei"/>
               </a:rPr>
-              <a:t>本公司偵測到內部系統有異常存取情形，經調查確認，部分員工資訊與公務聯繫資訊遭未經授權存取。</a:t>
+              <a:t>本公司CommerceCloud資料庫受到自動化攻擊事件說明。</a:t>
             </a:r>
           </a:p>
         </p:txBody>
@@ -10030,7 +9786,7 @@
             <a:r>
               <a:rPr sz="1100" b="1">
                 <a:solidFill>
-                  <a:srgbClr val="5C6679"/>
+                  <a:srgbClr val="E63946"/>
                 </a:solidFill>
                 <a:latin typeface="Microsoft JhengHei"/>
                 <a:ea typeface="Microsoft JhengHei"/>
@@ -10047,7 +9803,7 @@
                 <a:ea typeface="Microsoft JhengHei"/>
                 <a:cs typeface="Microsoft JhengHei"/>
               </a:rPr>
-              <a:t>本公司已採取相關防護、阻斷及修補措施，並持續強化資訊安全防護機制。</a:t>
+              <a:t>(1)強化監控防禦：升級全天候監控，全面提升系統防護層級。(2)委外第三方公正單位調查：協同外部專家深入調查，並於相關主…</a:t>
             </a:r>
           </a:p>
         </p:txBody>
@@ -10174,7 +9930,7 @@
                 <a:ea typeface="Microsoft JhengHei"/>
                 <a:cs typeface="Microsoft JhengHei"/>
               </a:rPr>
-              <a:t>上福 </a:t>
+              <a:t>緯致 </a:t>
             </a:r>
             <a:r>
               <a:rPr sz="1300" b="0">
@@ -10185,7 +9941,7 @@
                 <a:ea typeface="Microsoft JhengHei"/>
                 <a:cs typeface="Microsoft JhengHei"/>
               </a:rPr>
-              <a:t>6128</a:t>
+              <a:t>4953</a:t>
             </a:r>
           </a:p>
         </p:txBody>
@@ -10318,7 +10074,7 @@
                 <a:ea typeface="Microsoft JhengHei"/>
                 <a:cs typeface="Microsoft JhengHei"/>
               </a:rPr>
-              <a:t>KatunCorporation發現資訊安全異常事件，經調查發現部分資訊系統有異常存取行為。</a:t>
+              <a:t>本公司偵測到內部系統有異常存取情形，經調查確認，部分員工資訊與公務聯繫資訊遭未經授權存取。</a:t>
             </a:r>
           </a:p>
         </p:txBody>
@@ -10370,7 +10126,7 @@
                 <a:ea typeface="Microsoft JhengHei"/>
                 <a:cs typeface="Microsoft JhengHei"/>
               </a:rPr>
-              <a:t>KatunCorporation將持續進行事件調查、鑑識分析及監控作業，並進一步強化資訊安全管理、遠端存取管控、網路安全…</a:t>
+              <a:t>本公司已採取相關防護、阻斷及修補措施，並持續強化資訊安全防護機制。</a:t>
             </a:r>
           </a:p>
         </p:txBody>
@@ -10436,7 +10192,7 @@
             <a:avLst/>
           </a:prstGeom>
           <a:solidFill>
-            <a:srgbClr val="27A6C4"/>
+            <a:srgbClr val="5C6679"/>
           </a:solidFill>
           <a:ln>
             <a:noFill/>
@@ -10497,7 +10253,7 @@
                 <a:ea typeface="Microsoft JhengHei"/>
                 <a:cs typeface="Microsoft JhengHei"/>
               </a:rPr>
-              <a:t>杏一 </a:t>
+              <a:t>上福 </a:t>
             </a:r>
             <a:r>
               <a:rPr sz="1300" b="0">
@@ -10508,7 +10264,7 @@
                 <a:ea typeface="Microsoft JhengHei"/>
                 <a:cs typeface="Microsoft JhengHei"/>
               </a:rPr>
-              <a:t>4175</a:t>
+              <a:t>6128</a:t>
             </a:r>
           </a:p>
         </p:txBody>
@@ -10528,7 +10284,7 @@
             <a:avLst/>
           </a:prstGeom>
           <a:solidFill>
-            <a:srgbClr val="27A6C4"/>
+            <a:srgbClr val="5C6679"/>
           </a:solidFill>
           <a:ln>
             <a:noFill/>
@@ -10589,7 +10345,7 @@
                 <a:ea typeface="Microsoft JhengHei"/>
                 <a:cs typeface="Microsoft JhengHei"/>
               </a:rPr>
-              <a:t>個資外洩</a:t>
+              <a:t>其他</a:t>
             </a:r>
           </a:p>
         </p:txBody>
@@ -10624,7 +10380,7 @@
             <a:r>
               <a:rPr sz="1100" b="1">
                 <a:solidFill>
-                  <a:srgbClr val="27A6C4"/>
+                  <a:srgbClr val="5C6679"/>
                 </a:solidFill>
                 <a:latin typeface="Microsoft JhengHei"/>
                 <a:ea typeface="Microsoft JhengHei"/>
@@ -10641,7 +10397,7 @@
                 <a:ea typeface="Microsoft JhengHei"/>
                 <a:cs typeface="Microsoft JhengHei"/>
               </a:rPr>
-              <a:t>本公司接獲消費者反映疑似個資外洩事件</a:t>
+              <a:t>KatunCorporation發現資訊安全異常事件，經調查發現部分資訊系統有異常存取行為。</a:t>
             </a:r>
           </a:p>
         </p:txBody>
@@ -10676,7 +10432,7 @@
             <a:r>
               <a:rPr sz="1100" b="1">
                 <a:solidFill>
-                  <a:srgbClr val="27A6C4"/>
+                  <a:srgbClr val="5C6679"/>
                 </a:solidFill>
                 <a:latin typeface="Microsoft JhengHei"/>
                 <a:ea typeface="Microsoft JhengHei"/>
@@ -10693,7 +10449,7 @@
                 <a:ea typeface="Microsoft JhengHei"/>
                 <a:cs typeface="Microsoft JhengHei"/>
               </a:rPr>
-              <a:t>(1)本公司已立即啟動資安事件應變作業，針對相關系統、存取紀錄及可能涉及之資料範圍進行調查，並要求官網平台委外廠商同步進…</a:t>
+              <a:t>KatunCorporation將持續進行事件調查、鑑識分析及監控作業，並進一步強化資訊安全管理、遠端存取管控、網路安全…</a:t>
             </a:r>
           </a:p>
         </p:txBody>
@@ -10820,7 +10576,7 @@
                 <a:ea typeface="Microsoft JhengHei"/>
                 <a:cs typeface="Microsoft JhengHei"/>
               </a:rPr>
-              <a:t>鈊象 </a:t>
+              <a:t>杏一 </a:t>
             </a:r>
             <a:r>
               <a:rPr sz="1300" b="0">
@@ -10831,7 +10587,7 @@
                 <a:ea typeface="Microsoft JhengHei"/>
                 <a:cs typeface="Microsoft JhengHei"/>
               </a:rPr>
-              <a:t>3293</a:t>
+              <a:t>4175</a:t>
             </a:r>
           </a:p>
         </p:txBody>
@@ -10964,7 +10720,7 @@
                 <a:ea typeface="Microsoft JhengHei"/>
                 <a:cs typeface="Microsoft JhengHei"/>
               </a:rPr>
-              <a:t>本公司於115年9月29日發現不明IP異常侵入公司營運資訊設備，造成公司遊戲營運資料外洩，包含部…</a:t>
+              <a:t>本公司接獲消費者反映疑似個資外洩事件</a:t>
             </a:r>
           </a:p>
         </p:txBody>
@@ -11016,7 +10772,7 @@
                 <a:ea typeface="Microsoft JhengHei"/>
                 <a:cs typeface="Microsoft JhengHei"/>
               </a:rPr>
-              <a:t>(1)持續提升資安防禦，強化監控與防護層級。(2)委由外部專業資安團隊協助事件調查，並於相關主機部署偵測及防護機制。(3…</a:t>
+              <a:t>(1)本公司已立即啟動資安事件應變作業，針對相關系統、存取紀錄及可能涉及之資料範圍進行調查，並要求官網平台委外廠商同步進…</a:t>
             </a:r>
           </a:p>
         </p:txBody>
@@ -11218,7 +10974,7 @@
             <a:avLst/>
           </a:prstGeom>
           <a:solidFill>
-            <a:srgbClr val="5C6679"/>
+            <a:srgbClr val="27A6C4"/>
           </a:solidFill>
           <a:ln>
             <a:noFill/>
@@ -11279,7 +11035,7 @@
                 <a:ea typeface="Microsoft JhengHei"/>
                 <a:cs typeface="Microsoft JhengHei"/>
               </a:rPr>
-              <a:t>一零四 </a:t>
+              <a:t>鈊象 </a:t>
             </a:r>
             <a:r>
               <a:rPr sz="1300" b="0">
@@ -11290,7 +11046,7 @@
                 <a:ea typeface="Microsoft JhengHei"/>
                 <a:cs typeface="Microsoft JhengHei"/>
               </a:rPr>
-              <a:t>3130</a:t>
+              <a:t>3293</a:t>
             </a:r>
           </a:p>
         </p:txBody>
@@ -11310,7 +11066,7 @@
             <a:avLst/>
           </a:prstGeom>
           <a:solidFill>
-            <a:srgbClr val="5C6679"/>
+            <a:srgbClr val="27A6C4"/>
           </a:solidFill>
           <a:ln>
             <a:noFill/>
@@ -11371,7 +11127,7 @@
                 <a:ea typeface="Microsoft JhengHei"/>
                 <a:cs typeface="Microsoft JhengHei"/>
               </a:rPr>
-              <a:t>其他</a:t>
+              <a:t>個資外洩</a:t>
             </a:r>
           </a:p>
         </p:txBody>
@@ -11406,7 +11162,7 @@
             <a:r>
               <a:rPr sz="1100" b="1">
                 <a:solidFill>
-                  <a:srgbClr val="5C6679"/>
+                  <a:srgbClr val="27A6C4"/>
                 </a:solidFill>
                 <a:latin typeface="Microsoft JhengHei"/>
                 <a:ea typeface="Microsoft JhengHei"/>
@@ -11423,7 +11179,7 @@
                 <a:ea typeface="Microsoft JhengHei"/>
                 <a:cs typeface="Microsoft JhengHei"/>
               </a:rPr>
-              <a:t>本公司偵測到APP系統有異常讀取情形，經調查確認，約12萬筆履歷資料遭未經授權讀取。</a:t>
+              <a:t>本公司於115年9月29日發現不明IP異常侵入公司營運資訊設備，造成公司遊戲營運資料外洩，包含部…</a:t>
             </a:r>
           </a:p>
         </p:txBody>
@@ -11458,7 +11214,7 @@
             <a:r>
               <a:rPr sz="1100" b="1">
                 <a:solidFill>
-                  <a:srgbClr val="5C6679"/>
+                  <a:srgbClr val="27A6C4"/>
                 </a:solidFill>
                 <a:latin typeface="Microsoft JhengHei"/>
                 <a:ea typeface="Microsoft JhengHei"/>
@@ -11475,7 +11231,7 @@
                 <a:ea typeface="Microsoft JhengHei"/>
                 <a:cs typeface="Microsoft JhengHei"/>
               </a:rPr>
-              <a:t>本公司已採取相關防護及阻斷措施，並持續進行資安鑑識及強化資訊安全防護機制。本公司將依調查結果及相關法令辦理後續事宜，如有…</a:t>
+              <a:t>(1)持續提升資安防禦，強化監控與防護層級。(2)委由外部專業資安團隊協助事件調查，並於相關主機部署偵測及防護機制。(3…</a:t>
             </a:r>
           </a:p>
         </p:txBody>
@@ -11541,7 +11297,7 @@
             <a:avLst/>
           </a:prstGeom>
           <a:solidFill>
-            <a:srgbClr val="27A6C4"/>
+            <a:srgbClr val="5C6679"/>
           </a:solidFill>
           <a:ln>
             <a:noFill/>
@@ -11602,7 +11358,7 @@
                 <a:ea typeface="Microsoft JhengHei"/>
                 <a:cs typeface="Microsoft JhengHei"/>
               </a:rPr>
-              <a:t>安心 </a:t>
+              <a:t>一零四 </a:t>
             </a:r>
             <a:r>
               <a:rPr sz="1300" b="0">
@@ -11613,7 +11369,7 @@
                 <a:ea typeface="Microsoft JhengHei"/>
                 <a:cs typeface="Microsoft JhengHei"/>
               </a:rPr>
-              <a:t>1259</a:t>
+              <a:t>3130</a:t>
             </a:r>
           </a:p>
         </p:txBody>
@@ -11633,7 +11389,7 @@
             <a:avLst/>
           </a:prstGeom>
           <a:solidFill>
-            <a:srgbClr val="27A6C4"/>
+            <a:srgbClr val="5C6679"/>
           </a:solidFill>
           <a:ln>
             <a:noFill/>
@@ -11694,7 +11450,7 @@
                 <a:ea typeface="Microsoft JhengHei"/>
                 <a:cs typeface="Microsoft JhengHei"/>
               </a:rPr>
-              <a:t>個資外洩</a:t>
+              <a:t>其他</a:t>
             </a:r>
           </a:p>
         </p:txBody>
@@ -11729,7 +11485,7 @@
             <a:r>
               <a:rPr sz="1100" b="1">
                 <a:solidFill>
-                  <a:srgbClr val="27A6C4"/>
+                  <a:srgbClr val="5C6679"/>
                 </a:solidFill>
                 <a:latin typeface="Microsoft JhengHei"/>
                 <a:ea typeface="Microsoft JhengHei"/>
@@ -11746,7 +11502,7 @@
                 <a:ea typeface="Microsoft JhengHei"/>
                 <a:cs typeface="Microsoft JhengHei"/>
               </a:rPr>
-              <a:t>消費者反應疑似個資外洩事件</a:t>
+              <a:t>本公司偵測到APP系統有異常讀取情形，經調查確認，約12萬筆履歷資料遭未經授權讀取。</a:t>
             </a:r>
           </a:p>
         </p:txBody>
@@ -11781,7 +11537,7 @@
             <a:r>
               <a:rPr sz="1100" b="1">
                 <a:solidFill>
-                  <a:srgbClr val="27A6C4"/>
+                  <a:srgbClr val="5C6679"/>
                 </a:solidFill>
                 <a:latin typeface="Microsoft JhengHei"/>
                 <a:ea typeface="Microsoft JhengHei"/>
@@ -11798,7 +11554,7 @@
                 <a:ea typeface="Microsoft JhengHei"/>
                 <a:cs typeface="Microsoft JhengHei"/>
               </a:rPr>
-              <a:t>本公司已立即針對本次資安事件啟動應變作業。需特別說明，本次疑似個資外洩事件之平台係由委外廠商管理，非屬本公司自有之MOS…</a:t>
+              <a:t>本公司已採取相關防護及阻斷措施，並持續進行資安鑑識及強化資訊安全防護機制。本公司將依調查結果及相關法令辦理後續事宜，如有…</a:t>
             </a:r>
           </a:p>
         </p:txBody>
@@ -11864,7 +11620,7 @@
             <a:avLst/>
           </a:prstGeom>
           <a:solidFill>
-            <a:srgbClr val="E63946"/>
+            <a:srgbClr val="27A6C4"/>
           </a:solidFill>
           <a:ln>
             <a:noFill/>
@@ -11925,7 +11681,7 @@
                 <a:ea typeface="Microsoft JhengHei"/>
                 <a:cs typeface="Microsoft JhengHei"/>
               </a:rPr>
-              <a:t>神腦 </a:t>
+              <a:t>安心 </a:t>
             </a:r>
             <a:r>
               <a:rPr sz="1300" b="0">
@@ -11936,7 +11692,7 @@
                 <a:ea typeface="Microsoft JhengHei"/>
                 <a:cs typeface="Microsoft JhengHei"/>
               </a:rPr>
-              <a:t>2450</a:t>
+              <a:t>1259</a:t>
             </a:r>
           </a:p>
         </p:txBody>
@@ -11956,7 +11712,7 @@
             <a:avLst/>
           </a:prstGeom>
           <a:solidFill>
-            <a:srgbClr val="E63946"/>
+            <a:srgbClr val="27A6C4"/>
           </a:solidFill>
           <a:ln>
             <a:noFill/>
@@ -12017,7 +11773,7 @@
                 <a:ea typeface="Microsoft JhengHei"/>
                 <a:cs typeface="Microsoft JhengHei"/>
               </a:rPr>
-              <a:t>駭客攻擊</a:t>
+              <a:t>個資外洩</a:t>
             </a:r>
           </a:p>
         </p:txBody>
@@ -12052,7 +11808,7 @@
             <a:r>
               <a:rPr sz="1100" b="1">
                 <a:solidFill>
-                  <a:srgbClr val="E63946"/>
+                  <a:srgbClr val="27A6C4"/>
                 </a:solidFill>
                 <a:latin typeface="Microsoft JhengHei"/>
                 <a:ea typeface="Microsoft JhengHei"/>
@@ -12069,7 +11825,7 @@
                 <a:ea typeface="Microsoft JhengHei"/>
                 <a:cs typeface="Microsoft JhengHei"/>
               </a:rPr>
-              <a:t>本公司外部伺服器遭受自動化攻擊事件說明。</a:t>
+              <a:t>消費者反應疑似個資外洩事件</a:t>
             </a:r>
           </a:p>
         </p:txBody>
@@ -12104,7 +11860,7 @@
             <a:r>
               <a:rPr sz="1100" b="1">
                 <a:solidFill>
-                  <a:srgbClr val="E63946"/>
+                  <a:srgbClr val="27A6C4"/>
                 </a:solidFill>
                 <a:latin typeface="Microsoft JhengHei"/>
                 <a:ea typeface="Microsoft JhengHei"/>
@@ -12121,7 +11877,7 @@
                 <a:ea typeface="Microsoft JhengHei"/>
                 <a:cs typeface="Microsoft JhengHei"/>
               </a:rPr>
-              <a:t>本公司已與第三方資安廠商合作，全面強化網路偵測、系統監控與安全管控，以確保資訊安全。</a:t>
+              <a:t>本公司已立即針對本次資安事件啟動應變作業。需特別說明，本次疑似個資外洩事件之平台係由委外廠商管理，非屬本公司自有之MOS…</a:t>
             </a:r>
           </a:p>
         </p:txBody>
@@ -12187,7 +11943,7 @@
             <a:avLst/>
           </a:prstGeom>
           <a:solidFill>
-            <a:srgbClr val="5C6679"/>
+            <a:srgbClr val="E63946"/>
           </a:solidFill>
           <a:ln>
             <a:noFill/>
@@ -12248,7 +12004,7 @@
                 <a:ea typeface="Microsoft JhengHei"/>
                 <a:cs typeface="Microsoft JhengHei"/>
               </a:rPr>
-              <a:t>鈊象 </a:t>
+              <a:t>神腦 </a:t>
             </a:r>
             <a:r>
               <a:rPr sz="1300" b="0">
@@ -12259,7 +12015,7 @@
                 <a:ea typeface="Microsoft JhengHei"/>
                 <a:cs typeface="Microsoft JhengHei"/>
               </a:rPr>
-              <a:t>3293</a:t>
+              <a:t>2450</a:t>
             </a:r>
           </a:p>
         </p:txBody>
@@ -12279,7 +12035,7 @@
             <a:avLst/>
           </a:prstGeom>
           <a:solidFill>
-            <a:srgbClr val="5C6679"/>
+            <a:srgbClr val="E63946"/>
           </a:solidFill>
           <a:ln>
             <a:noFill/>
@@ -12340,7 +12096,7 @@
                 <a:ea typeface="Microsoft JhengHei"/>
                 <a:cs typeface="Microsoft JhengHei"/>
               </a:rPr>
-              <a:t>其他</a:t>
+              <a:t>駭客攻擊</a:t>
             </a:r>
           </a:p>
         </p:txBody>
@@ -12375,7 +12131,7 @@
             <a:r>
               <a:rPr sz="1100" b="1">
                 <a:solidFill>
-                  <a:srgbClr val="5C6679"/>
+                  <a:srgbClr val="E63946"/>
                 </a:solidFill>
                 <a:latin typeface="Microsoft JhengHei"/>
                 <a:ea typeface="Microsoft JhengHei"/>
@@ -12392,7 +12148,7 @@
                 <a:ea typeface="Microsoft JhengHei"/>
                 <a:cs typeface="Microsoft JhengHei"/>
               </a:rPr>
-              <a:t>本公司於115年9月29日發現不明IP異常侵入公司營運資訊設備。</a:t>
+              <a:t>本公司外部伺服器遭受自動化攻擊事件說明。</a:t>
             </a:r>
           </a:p>
         </p:txBody>
@@ -12427,7 +12183,7 @@
             <a:r>
               <a:rPr sz="1100" b="1">
                 <a:solidFill>
-                  <a:srgbClr val="5C6679"/>
+                  <a:srgbClr val="E63946"/>
                 </a:solidFill>
                 <a:latin typeface="Microsoft JhengHei"/>
                 <a:ea typeface="Microsoft JhengHei"/>
@@ -12444,7 +12200,7 @@
                 <a:ea typeface="Microsoft JhengHei"/>
                 <a:cs typeface="Microsoft JhengHei"/>
               </a:rPr>
-              <a:t>持續提升資安防禦，強化監控與防護層級。</a:t>
+              <a:t>本公司已與第三方資安廠商合作，全面強化網路偵測、系統監控與安全管控，以確保資訊安全。</a:t>
             </a:r>
           </a:p>
         </p:txBody>
@@ -12646,7 +12402,7 @@
             <a:avLst/>
           </a:prstGeom>
           <a:solidFill>
-            <a:srgbClr val="27A6C4"/>
+            <a:srgbClr val="5C6679"/>
           </a:solidFill>
           <a:ln>
             <a:noFill/>
@@ -12707,7 +12463,7 @@
                 <a:ea typeface="Microsoft JhengHei"/>
                 <a:cs typeface="Microsoft JhengHei"/>
               </a:rPr>
-              <a:t>柏文 </a:t>
+              <a:t>鈊象 </a:t>
             </a:r>
             <a:r>
               <a:rPr sz="1300" b="0">
@@ -12718,7 +12474,7 @@
                 <a:ea typeface="Microsoft JhengHei"/>
                 <a:cs typeface="Microsoft JhengHei"/>
               </a:rPr>
-              <a:t>8462</a:t>
+              <a:t>3293</a:t>
             </a:r>
           </a:p>
         </p:txBody>
@@ -12738,7 +12494,7 @@
             <a:avLst/>
           </a:prstGeom>
           <a:solidFill>
-            <a:srgbClr val="27A6C4"/>
+            <a:srgbClr val="5C6679"/>
           </a:solidFill>
           <a:ln>
             <a:noFill/>
@@ -12799,7 +12555,7 @@
                 <a:ea typeface="Microsoft JhengHei"/>
                 <a:cs typeface="Microsoft JhengHei"/>
               </a:rPr>
-              <a:t>個資外洩</a:t>
+              <a:t>其他</a:t>
             </a:r>
           </a:p>
         </p:txBody>
@@ -12834,7 +12590,7 @@
             <a:r>
               <a:rPr sz="1100" b="1">
                 <a:solidFill>
-                  <a:srgbClr val="27A6C4"/>
+                  <a:srgbClr val="5C6679"/>
                 </a:solidFill>
                 <a:latin typeface="Microsoft JhengHei"/>
                 <a:ea typeface="Microsoft JhengHei"/>
@@ -12851,7 +12607,7 @@
                 <a:ea typeface="Microsoft JhengHei"/>
                 <a:cs typeface="Microsoft JhengHei"/>
               </a:rPr>
-              <a:t>本公司接獲系統委外廠商通知其對外服務系統遭自動化攻擊，並對客戶資料表分頁擷取，其中部分涉及本公司…</a:t>
+              <a:t>本公司於115年9月29日發現不明IP異常侵入公司營運資訊設備。</a:t>
             </a:r>
           </a:p>
         </p:txBody>
@@ -12886,7 +12642,7 @@
             <a:r>
               <a:rPr sz="1100" b="1">
                 <a:solidFill>
-                  <a:srgbClr val="27A6C4"/>
+                  <a:srgbClr val="5C6679"/>
                 </a:solidFill>
                 <a:latin typeface="Microsoft JhengHei"/>
                 <a:ea typeface="Microsoft JhengHei"/>
@@ -12903,7 +12659,7 @@
                 <a:ea typeface="Microsoft JhengHei"/>
                 <a:cs typeface="Microsoft JhengHei"/>
               </a:rPr>
-              <a:t>本公司已要求系統委外廠商重新檢視造成資安疑慮因子並加以防範，同時持續針對系統委外廠商加強監控。</a:t>
+              <a:t>持續提升資安防禦，強化監控與防護層級。</a:t>
             </a:r>
           </a:p>
         </p:txBody>
@@ -12969,7 +12725,7 @@
             <a:avLst/>
           </a:prstGeom>
           <a:solidFill>
-            <a:srgbClr val="E63946"/>
+            <a:srgbClr val="27A6C4"/>
           </a:solidFill>
           <a:ln>
             <a:noFill/>
@@ -13030,7 +12786,7 @@
                 <a:ea typeface="Microsoft JhengHei"/>
                 <a:cs typeface="Microsoft JhengHei"/>
               </a:rPr>
-              <a:t>友訊 </a:t>
+              <a:t>柏文 </a:t>
             </a:r>
             <a:r>
               <a:rPr sz="1300" b="0">
@@ -13041,7 +12797,7 @@
                 <a:ea typeface="Microsoft JhengHei"/>
                 <a:cs typeface="Microsoft JhengHei"/>
               </a:rPr>
-              <a:t>2332</a:t>
+              <a:t>8462</a:t>
             </a:r>
           </a:p>
         </p:txBody>
@@ -13061,7 +12817,7 @@
             <a:avLst/>
           </a:prstGeom>
           <a:solidFill>
-            <a:srgbClr val="E63946"/>
+            <a:srgbClr val="27A6C4"/>
           </a:solidFill>
           <a:ln>
             <a:noFill/>
@@ -13122,7 +12878,7 @@
                 <a:ea typeface="Microsoft JhengHei"/>
                 <a:cs typeface="Microsoft JhengHei"/>
               </a:rPr>
-              <a:t>駭客攻擊</a:t>
+              <a:t>個資外洩</a:t>
             </a:r>
           </a:p>
         </p:txBody>
@@ -13157,7 +12913,7 @@
             <a:r>
               <a:rPr sz="1100" b="1">
                 <a:solidFill>
-                  <a:srgbClr val="E63946"/>
+                  <a:srgbClr val="27A6C4"/>
                 </a:solidFill>
                 <a:latin typeface="Microsoft JhengHei"/>
                 <a:ea typeface="Microsoft JhengHei"/>
@@ -13174,7 +12930,7 @@
                 <a:ea typeface="Microsoft JhengHei"/>
                 <a:cs typeface="Microsoft JhengHei"/>
               </a:rPr>
-              <a:t>本公司網站監控中發現登入記錄異常，查知外部攻擊者利用既有登入機制，以大量帳號密碼進行網站登入驗證…</a:t>
+              <a:t>本公司接獲系統委外廠商通知其對外服務系統遭自動化攻擊，並對客戶資料表分頁擷取，其中部分涉及本公司…</a:t>
             </a:r>
           </a:p>
         </p:txBody>
@@ -13209,7 +12965,7 @@
             <a:r>
               <a:rPr sz="1100" b="1">
                 <a:solidFill>
-                  <a:srgbClr val="E63946"/>
+                  <a:srgbClr val="27A6C4"/>
                 </a:solidFill>
                 <a:latin typeface="Microsoft JhengHei"/>
                 <a:ea typeface="Microsoft JhengHei"/>
@@ -13226,7 +12982,7 @@
                 <a:ea typeface="Microsoft JhengHei"/>
                 <a:cs typeface="Microsoft JhengHei"/>
               </a:rPr>
-              <a:t>(1)強化網站登入驗證、存取控制及異常行為偵測機制。(2)強化網頁應用程式防火牆，降低大量或異常登入嘗試之可行性。(3)…</a:t>
+              <a:t>本公司已要求系統委外廠商重新檢視造成資安疑慮因子並加以防範，同時持續針對系統委外廠商加強監控。</a:t>
             </a:r>
           </a:p>
         </p:txBody>
@@ -13353,7 +13109,7 @@
                 <a:ea typeface="Microsoft JhengHei"/>
                 <a:cs typeface="Microsoft JhengHei"/>
               </a:rPr>
-              <a:t>長榮航 </a:t>
+              <a:t>友訊 </a:t>
             </a:r>
             <a:r>
               <a:rPr sz="1300" b="0">
@@ -13364,7 +13120,7 @@
                 <a:ea typeface="Microsoft JhengHei"/>
                 <a:cs typeface="Microsoft JhengHei"/>
               </a:rPr>
-              <a:t>2618</a:t>
+              <a:t>2332</a:t>
             </a:r>
           </a:p>
         </p:txBody>
@@ -13497,7 +13253,7 @@
                 <a:ea typeface="Microsoft JhengHei"/>
                 <a:cs typeface="Microsoft JhengHei"/>
               </a:rPr>
-              <a:t>本公司發現有不明人士透過惡意IP入侵本公司內部資訊環境，取得員工姓名與公務聯繫資訊。</a:t>
+              <a:t>本公司網站監控中發現登入記錄異常，查知外部攻擊者利用既有登入機制，以大量帳號密碼進行網站登入驗證…</a:t>
             </a:r>
           </a:p>
         </p:txBody>
@@ -13549,330 +13305,7 @@
                 <a:ea typeface="Microsoft JhengHei"/>
                 <a:cs typeface="Microsoft JhengHei"/>
               </a:rPr>
-              <a:t>本公司已重新檢視可能造成資安疑慮的因子並加以防範，同時持續加強監控。</a:t>
-            </a:r>
-          </a:p>
-        </p:txBody>
-      </p:sp>
-      <p:sp>
-        <p:nvSpPr>
-          <p:cNvPr id="26" name="Rounded Rectangle 25"/>
-          <p:cNvSpPr/>
-          <p:nvPr/>
-        </p:nvSpPr>
-        <p:spPr>
-          <a:xfrm>
-            <a:off x="6172200" y="3886200"/>
-            <a:ext cx="5394960" cy="2148840"/>
-          </a:xfrm>
-          <a:prstGeom prst="roundRect">
-            <a:avLst/>
-          </a:prstGeom>
-          <a:solidFill>
-            <a:srgbClr val="FFFFFF"/>
-          </a:solidFill>
-          <a:ln w="12700">
-            <a:solidFill>
-              <a:srgbClr val="DDE3EE"/>
-            </a:solidFill>
-          </a:ln>
-          <a:effectLst/>
-        </p:spPr>
-        <p:style>
-          <a:lnRef idx="1">
-            <a:schemeClr val="accent1"/>
-          </a:lnRef>
-          <a:fillRef idx="3">
-            <a:schemeClr val="accent1"/>
-          </a:fillRef>
-          <a:effectRef idx="2">
-            <a:schemeClr val="accent1"/>
-          </a:effectRef>
-          <a:fontRef idx="minor">
-            <a:schemeClr val="lt1"/>
-          </a:fontRef>
-        </p:style>
-        <p:txBody>
-          <a:bodyPr rtlCol="0" anchor="ctr"/>
-          <a:lstStyle/>
-          <a:p>
-            <a:pPr algn="ctr"/>
-          </a:p>
-        </p:txBody>
-      </p:sp>
-      <p:sp>
-        <p:nvSpPr>
-          <p:cNvPr id="27" name="Rectangle 26"/>
-          <p:cNvSpPr/>
-          <p:nvPr/>
-        </p:nvSpPr>
-        <p:spPr>
-          <a:xfrm>
-            <a:off x="6172200" y="3886200"/>
-            <a:ext cx="5394960" cy="109728"/>
-          </a:xfrm>
-          <a:prstGeom prst="rect">
-            <a:avLst/>
-          </a:prstGeom>
-          <a:solidFill>
-            <a:srgbClr val="E63946"/>
-          </a:solidFill>
-          <a:ln>
-            <a:noFill/>
-          </a:ln>
-          <a:effectLst/>
-        </p:spPr>
-        <p:style>
-          <a:lnRef idx="1">
-            <a:schemeClr val="accent1"/>
-          </a:lnRef>
-          <a:fillRef idx="3">
-            <a:schemeClr val="accent1"/>
-          </a:fillRef>
-          <a:effectRef idx="2">
-            <a:schemeClr val="accent1"/>
-          </a:effectRef>
-          <a:fontRef idx="minor">
-            <a:schemeClr val="lt1"/>
-          </a:fontRef>
-        </p:style>
-        <p:txBody>
-          <a:bodyPr rtlCol="0" anchor="ctr"/>
-          <a:lstStyle/>
-          <a:p>
-            <a:pPr algn="ctr"/>
-          </a:p>
-        </p:txBody>
-      </p:sp>
-      <p:sp>
-        <p:nvSpPr>
-          <p:cNvPr id="28" name="TextBox 27"/>
-          <p:cNvSpPr txBox="1"/>
-          <p:nvPr/>
-        </p:nvSpPr>
-        <p:spPr>
-          <a:xfrm>
-            <a:off x="6400800" y="4105656"/>
-            <a:ext cx="3657600" cy="365760"/>
-          </a:xfrm>
-          <a:prstGeom prst="rect">
-            <a:avLst/>
-          </a:prstGeom>
-          <a:noFill/>
-        </p:spPr>
-        <p:txBody>
-          <a:bodyPr wrap="square" anchor="ctr" lIns="0" rIns="0" tIns="0" bIns="0">
-            <a:spAutoFit/>
-          </a:bodyPr>
-          <a:lstStyle/>
-          <a:p>
-            <a:pPr algn="l"/>
-            <a:r>
-              <a:rPr sz="1600" b="1">
-                <a:solidFill>
-                  <a:srgbClr val="1A2233"/>
-                </a:solidFill>
-                <a:latin typeface="Microsoft JhengHei"/>
-                <a:ea typeface="Microsoft JhengHei"/>
-                <a:cs typeface="Microsoft JhengHei"/>
-              </a:rPr>
-              <a:t>長榮航太 </a:t>
-            </a:r>
-            <a:r>
-              <a:rPr sz="1300" b="0">
-                <a:solidFill>
-                  <a:srgbClr val="5C6679"/>
-                </a:solidFill>
-                <a:latin typeface="Microsoft JhengHei"/>
-                <a:ea typeface="Microsoft JhengHei"/>
-                <a:cs typeface="Microsoft JhengHei"/>
-              </a:rPr>
-              <a:t>2645</a:t>
-            </a:r>
-          </a:p>
-        </p:txBody>
-      </p:sp>
-      <p:sp>
-        <p:nvSpPr>
-          <p:cNvPr id="29" name="Rounded Rectangle 28"/>
-          <p:cNvSpPr/>
-          <p:nvPr/>
-        </p:nvSpPr>
-        <p:spPr>
-          <a:xfrm>
-            <a:off x="10149840" y="4123944"/>
-            <a:ext cx="1234440" cy="347472"/>
-          </a:xfrm>
-          <a:prstGeom prst="roundRect">
-            <a:avLst/>
-          </a:prstGeom>
-          <a:solidFill>
-            <a:srgbClr val="E63946"/>
-          </a:solidFill>
-          <a:ln>
-            <a:noFill/>
-          </a:ln>
-          <a:effectLst/>
-        </p:spPr>
-        <p:style>
-          <a:lnRef idx="1">
-            <a:schemeClr val="accent1"/>
-          </a:lnRef>
-          <a:fillRef idx="3">
-            <a:schemeClr val="accent1"/>
-          </a:fillRef>
-          <a:effectRef idx="2">
-            <a:schemeClr val="accent1"/>
-          </a:effectRef>
-          <a:fontRef idx="minor">
-            <a:schemeClr val="lt1"/>
-          </a:fontRef>
-        </p:style>
-        <p:txBody>
-          <a:bodyPr rtlCol="0" anchor="ctr"/>
-          <a:lstStyle/>
-          <a:p>
-            <a:pPr algn="ctr"/>
-          </a:p>
-        </p:txBody>
-      </p:sp>
-      <p:sp>
-        <p:nvSpPr>
-          <p:cNvPr id="30" name="TextBox 29"/>
-          <p:cNvSpPr txBox="1"/>
-          <p:nvPr/>
-        </p:nvSpPr>
-        <p:spPr>
-          <a:xfrm>
-            <a:off x="10149840" y="4123944"/>
-            <a:ext cx="1234440" cy="347472"/>
-          </a:xfrm>
-          <a:prstGeom prst="rect">
-            <a:avLst/>
-          </a:prstGeom>
-          <a:noFill/>
-        </p:spPr>
-        <p:txBody>
-          <a:bodyPr wrap="square" anchor="ctr" lIns="0" rIns="0" tIns="0" bIns="0">
-            <a:spAutoFit/>
-          </a:bodyPr>
-          <a:lstStyle/>
-          <a:p>
-            <a:pPr algn="ctr"/>
-            <a:r>
-              <a:rPr sz="1050" b="1">
-                <a:solidFill>
-                  <a:srgbClr val="FFFFFF"/>
-                </a:solidFill>
-                <a:latin typeface="Microsoft JhengHei"/>
-                <a:ea typeface="Microsoft JhengHei"/>
-                <a:cs typeface="Microsoft JhengHei"/>
-              </a:rPr>
-              <a:t>駭客攻擊</a:t>
-            </a:r>
-          </a:p>
-        </p:txBody>
-      </p:sp>
-      <p:sp>
-        <p:nvSpPr>
-          <p:cNvPr id="31" name="TextBox 30"/>
-          <p:cNvSpPr txBox="1"/>
-          <p:nvPr/>
-        </p:nvSpPr>
-        <p:spPr>
-          <a:xfrm>
-            <a:off x="6400800" y="4599432"/>
-            <a:ext cx="4937760" cy="640080"/>
-          </a:xfrm>
-          <a:prstGeom prst="rect">
-            <a:avLst/>
-          </a:prstGeom>
-          <a:noFill/>
-        </p:spPr>
-        <p:txBody>
-          <a:bodyPr wrap="square" anchor="t" lIns="0" rIns="0" tIns="0" bIns="0">
-            <a:spAutoFit/>
-          </a:bodyPr>
-          <a:lstStyle/>
-          <a:p>
-            <a:pPr algn="l">
-              <a:lnSpc>
-                <a:spcPts val="1500"/>
-              </a:lnSpc>
-            </a:pPr>
-            <a:r>
-              <a:rPr sz="1100" b="1">
-                <a:solidFill>
-                  <a:srgbClr val="E63946"/>
-                </a:solidFill>
-                <a:latin typeface="Microsoft JhengHei"/>
-                <a:ea typeface="Microsoft JhengHei"/>
-                <a:cs typeface="Microsoft JhengHei"/>
-              </a:rPr>
-              <a:t>緣由　</a:t>
-            </a:r>
-            <a:r>
-              <a:rPr sz="1100" b="0">
-                <a:solidFill>
-                  <a:srgbClr val="1A2233"/>
-                </a:solidFill>
-                <a:latin typeface="Microsoft JhengHei"/>
-                <a:ea typeface="Microsoft JhengHei"/>
-                <a:cs typeface="Microsoft JhengHei"/>
-              </a:rPr>
-              <a:t>本公司發現部分內部資訊系統遭受網路攻擊。</a:t>
-            </a:r>
-          </a:p>
-        </p:txBody>
-      </p:sp>
-      <p:sp>
-        <p:nvSpPr>
-          <p:cNvPr id="32" name="TextBox 31"/>
-          <p:cNvSpPr txBox="1"/>
-          <p:nvPr/>
-        </p:nvSpPr>
-        <p:spPr>
-          <a:xfrm>
-            <a:off x="6400800" y="5257800"/>
-            <a:ext cx="4937760" cy="713232"/>
-          </a:xfrm>
-          <a:prstGeom prst="rect">
-            <a:avLst/>
-          </a:prstGeom>
-          <a:noFill/>
-        </p:spPr>
-        <p:txBody>
-          <a:bodyPr wrap="square" anchor="t" lIns="0" rIns="0" tIns="0" bIns="0">
-            <a:spAutoFit/>
-          </a:bodyPr>
-          <a:lstStyle/>
-          <a:p>
-            <a:pPr algn="l">
-              <a:lnSpc>
-                <a:spcPts val="1500"/>
-              </a:lnSpc>
-            </a:pPr>
-            <a:r>
-              <a:rPr sz="1100" b="1">
-                <a:solidFill>
-                  <a:srgbClr val="E63946"/>
-                </a:solidFill>
-                <a:latin typeface="Microsoft JhengHei"/>
-                <a:ea typeface="Microsoft JhengHei"/>
-                <a:cs typeface="Microsoft JhengHei"/>
-              </a:rPr>
-              <a:t>因應　</a:t>
-            </a:r>
-            <a:r>
-              <a:rPr sz="1100" b="0">
-                <a:solidFill>
-                  <a:srgbClr val="1A2233"/>
-                </a:solidFill>
-                <a:latin typeface="Microsoft JhengHei"/>
-                <a:ea typeface="Microsoft JhengHei"/>
-                <a:cs typeface="Microsoft JhengHei"/>
-              </a:rPr>
-              <a:t>本公司將持續監控公司整體資訊系統運作狀況，並檢討強化現有資安防護措施，以確保資訊安全。</a:t>
+              <a:t>(1)強化網站登入驗證、存取控制及異常行為偵測機制。(2)強化網頁應用程式防火牆，降低大量或異常登入嘗試之可行性。(3)…</a:t>
             </a:r>
           </a:p>
         </p:txBody>

--- a/資安事件因應分析.pptx
+++ b/資安事件因應分析.pptx
@@ -186,10 +186,10 @@
                 <c:formatCode>General</c:formatCode>
                 <c:ptCount val="3"/>
                 <c:pt idx="0">
-                  <c:v>3</c:v>
+                  <c:v>2</c:v>
                 </c:pt>
                 <c:pt idx="1">
-                  <c:v>4</c:v>
+                  <c:v>5</c:v>
                 </c:pt>
                 <c:pt idx="2">
                   <c:v>4</c:v>
@@ -3529,7 +3529,7 @@
                 <a:ea typeface="Microsoft JhengHei"/>
                 <a:cs typeface="Microsoft JhengHei"/>
               </a:rPr>
-              <a:t>資料期間 2026-09-16 ~ 2026-10-16　｜　MOPS 重大訊息全文檢索　｜　11 家公司</a:t>
+              <a:t>資料期間 2026-09-20 ~ 2026-10-20　｜　MOPS 重大訊息全文檢索　｜　11 家公司</a:t>
             </a:r>
           </a:p>
         </p:txBody>
@@ -4273,7 +4273,7 @@
                           <a:ea typeface="Microsoft JhengHei"/>
                           <a:cs typeface="Microsoft JhengHei"/>
                         </a:rPr>
-                        <a:t>91APP*-KY</a:t>
+                        <a:t>滿心</a:t>
                       </a:r>
                     </a:p>
                   </a:txBody>
@@ -4297,7 +4297,7 @@
                           <a:ea typeface="Microsoft JhengHei"/>
                           <a:cs typeface="Microsoft JhengHei"/>
                         </a:rPr>
-                        <a:t>6741</a:t>
+                        <a:t>2916</a:t>
                       </a:r>
                     </a:p>
                   </a:txBody>
@@ -4321,7 +4321,7 @@
                           <a:ea typeface="Microsoft JhengHei"/>
                           <a:cs typeface="Microsoft JhengHei"/>
                         </a:rPr>
-                        <a:t>10/16</a:t>
+                        <a:t>10/19</a:t>
                       </a:r>
                     </a:p>
                   </a:txBody>
@@ -4339,13 +4339,13 @@
                       <a:r>
                         <a:rPr sz="1150" b="1">
                           <a:solidFill>
-                            <a:srgbClr val="E63946"/>
+                            <a:srgbClr val="27A6C4"/>
                           </a:solidFill>
                           <a:latin typeface="Microsoft JhengHei"/>
                           <a:ea typeface="Microsoft JhengHei"/>
                           <a:cs typeface="Microsoft JhengHei"/>
                         </a:rPr>
-                        <a:t>駭客攻擊</a:t>
+                        <a:t>個資外洩</a:t>
                       </a:r>
                     </a:p>
                   </a:txBody>
@@ -4369,7 +4369,7 @@
                           <a:ea typeface="Microsoft JhengHei"/>
                           <a:cs typeface="Microsoft JhengHei"/>
                         </a:rPr>
-                        <a:t>目前評估對公司營運無重大影響。</a:t>
+                        <a:t>截至目前為止對公司財務及業務並無重大影響.</a:t>
                       </a:r>
                     </a:p>
                   </a:txBody>
@@ -4395,7 +4395,7 @@
                           <a:ea typeface="Microsoft JhengHei"/>
                           <a:cs typeface="Microsoft JhengHei"/>
                         </a:rPr>
-                        <a:t>緯致</a:t>
+                        <a:t>91APP*-KY</a:t>
                       </a:r>
                     </a:p>
                   </a:txBody>
@@ -4419,7 +4419,7 @@
                           <a:ea typeface="Microsoft JhengHei"/>
                           <a:cs typeface="Microsoft JhengHei"/>
                         </a:rPr>
-                        <a:t>4953</a:t>
+                        <a:t>6741</a:t>
                       </a:r>
                     </a:p>
                   </a:txBody>
@@ -4443,7 +4443,251 @@
                           <a:ea typeface="Microsoft JhengHei"/>
                           <a:cs typeface="Microsoft JhengHei"/>
                         </a:rPr>
+                        <a:t>10/16</a:t>
+                      </a:r>
+                    </a:p>
+                  </a:txBody>
+                  <a:tcPr anchor="ctr" marL="73152" marT="9144" marB="9144">
+                    <a:solidFill>
+                      <a:srgbClr val="EEF2F9"/>
+                    </a:solidFill>
+                  </a:tcPr>
+                </a:tc>
+                <a:tc>
+                  <a:txBody>
+                    <a:bodyPr/>
+                    <a:lstStyle/>
+                    <a:p>
+                      <a:r>
+                        <a:rPr sz="1150" b="1">
+                          <a:solidFill>
+                            <a:srgbClr val="E63946"/>
+                          </a:solidFill>
+                          <a:latin typeface="Microsoft JhengHei"/>
+                          <a:ea typeface="Microsoft JhengHei"/>
+                          <a:cs typeface="Microsoft JhengHei"/>
+                        </a:rPr>
+                        <a:t>駭客攻擊</a:t>
+                      </a:r>
+                    </a:p>
+                  </a:txBody>
+                  <a:tcPr anchor="ctr" marL="73152" marT="9144" marB="9144">
+                    <a:solidFill>
+                      <a:srgbClr val="EEF2F9"/>
+                    </a:solidFill>
+                  </a:tcPr>
+                </a:tc>
+                <a:tc>
+                  <a:txBody>
+                    <a:bodyPr/>
+                    <a:lstStyle/>
+                    <a:p>
+                      <a:r>
+                        <a:rPr sz="1150" b="0">
+                          <a:solidFill>
+                            <a:srgbClr val="1A2233"/>
+                          </a:solidFill>
+                          <a:latin typeface="Microsoft JhengHei"/>
+                          <a:ea typeface="Microsoft JhengHei"/>
+                          <a:cs typeface="Microsoft JhengHei"/>
+                        </a:rPr>
+                        <a:t>目前評估對公司營運無重大影響。</a:t>
+                      </a:r>
+                    </a:p>
+                  </a:txBody>
+                  <a:tcPr anchor="ctr" marL="73152" marT="9144" marB="9144">
+                    <a:solidFill>
+                      <a:srgbClr val="EEF2F9"/>
+                    </a:solidFill>
+                  </a:tcPr>
+                </a:tc>
+              </a:tr>
+              <a:tr h="297180">
+                <a:tc>
+                  <a:txBody>
+                    <a:bodyPr/>
+                    <a:lstStyle/>
+                    <a:p>
+                      <a:r>
+                        <a:rPr sz="1150" b="0">
+                          <a:solidFill>
+                            <a:srgbClr val="1A2233"/>
+                          </a:solidFill>
+                          <a:latin typeface="Microsoft JhengHei"/>
+                          <a:ea typeface="Microsoft JhengHei"/>
+                          <a:cs typeface="Microsoft JhengHei"/>
+                        </a:rPr>
+                        <a:t>緯致</a:t>
+                      </a:r>
+                    </a:p>
+                  </a:txBody>
+                  <a:tcPr anchor="ctr" marL="73152" marT="9144" marB="9144">
+                    <a:solidFill>
+                      <a:srgbClr val="FFFFFF"/>
+                    </a:solidFill>
+                  </a:tcPr>
+                </a:tc>
+                <a:tc>
+                  <a:txBody>
+                    <a:bodyPr/>
+                    <a:lstStyle/>
+                    <a:p>
+                      <a:r>
+                        <a:rPr sz="1150" b="0">
+                          <a:solidFill>
+                            <a:srgbClr val="1A2233"/>
+                          </a:solidFill>
+                          <a:latin typeface="Microsoft JhengHei"/>
+                          <a:ea typeface="Microsoft JhengHei"/>
+                          <a:cs typeface="Microsoft JhengHei"/>
+                        </a:rPr>
+                        <a:t>4953</a:t>
+                      </a:r>
+                    </a:p>
+                  </a:txBody>
+                  <a:tcPr anchor="ctr" marL="73152" marT="9144" marB="9144">
+                    <a:solidFill>
+                      <a:srgbClr val="FFFFFF"/>
+                    </a:solidFill>
+                  </a:tcPr>
+                </a:tc>
+                <a:tc>
+                  <a:txBody>
+                    <a:bodyPr/>
+                    <a:lstStyle/>
+                    <a:p>
+                      <a:r>
+                        <a:rPr sz="1150" b="0">
+                          <a:solidFill>
+                            <a:srgbClr val="1A2233"/>
+                          </a:solidFill>
+                          <a:latin typeface="Microsoft JhengHei"/>
+                          <a:ea typeface="Microsoft JhengHei"/>
+                          <a:cs typeface="Microsoft JhengHei"/>
+                        </a:rPr>
                         <a:t>10/09</a:t>
+                      </a:r>
+                    </a:p>
+                  </a:txBody>
+                  <a:tcPr anchor="ctr" marL="73152" marT="9144" marB="9144">
+                    <a:solidFill>
+                      <a:srgbClr val="FFFFFF"/>
+                    </a:solidFill>
+                  </a:tcPr>
+                </a:tc>
+                <a:tc>
+                  <a:txBody>
+                    <a:bodyPr/>
+                    <a:lstStyle/>
+                    <a:p>
+                      <a:r>
+                        <a:rPr sz="1150" b="1">
+                          <a:solidFill>
+                            <a:srgbClr val="5C6679"/>
+                          </a:solidFill>
+                          <a:latin typeface="Microsoft JhengHei"/>
+                          <a:ea typeface="Microsoft JhengHei"/>
+                          <a:cs typeface="Microsoft JhengHei"/>
+                        </a:rPr>
+                        <a:t>其他</a:t>
+                      </a:r>
+                    </a:p>
+                  </a:txBody>
+                  <a:tcPr anchor="ctr" marL="73152" marT="9144" marB="9144">
+                    <a:solidFill>
+                      <a:srgbClr val="FFFFFF"/>
+                    </a:solidFill>
+                  </a:tcPr>
+                </a:tc>
+                <a:tc>
+                  <a:txBody>
+                    <a:bodyPr/>
+                    <a:lstStyle/>
+                    <a:p>
+                      <a:r>
+                        <a:rPr sz="1150" b="0">
+                          <a:solidFill>
+                            <a:srgbClr val="1A2233"/>
+                          </a:solidFill>
+                          <a:latin typeface="Microsoft JhengHei"/>
+                          <a:ea typeface="Microsoft JhengHei"/>
+                          <a:cs typeface="Microsoft JhengHei"/>
+                        </a:rPr>
+                        <a:t>目前公司整體系統與營運正常運作，對公司尚無重大影響。</a:t>
+                      </a:r>
+                    </a:p>
+                  </a:txBody>
+                  <a:tcPr anchor="ctr" marL="73152" marT="9144" marB="9144">
+                    <a:solidFill>
+                      <a:srgbClr val="FFFFFF"/>
+                    </a:solidFill>
+                  </a:tcPr>
+                </a:tc>
+              </a:tr>
+              <a:tr h="297180">
+                <a:tc>
+                  <a:txBody>
+                    <a:bodyPr/>
+                    <a:lstStyle/>
+                    <a:p>
+                      <a:r>
+                        <a:rPr sz="1150" b="0">
+                          <a:solidFill>
+                            <a:srgbClr val="1A2233"/>
+                          </a:solidFill>
+                          <a:latin typeface="Microsoft JhengHei"/>
+                          <a:ea typeface="Microsoft JhengHei"/>
+                          <a:cs typeface="Microsoft JhengHei"/>
+                        </a:rPr>
+                        <a:t>上福</a:t>
+                      </a:r>
+                    </a:p>
+                  </a:txBody>
+                  <a:tcPr anchor="ctr" marL="73152" marT="9144" marB="9144">
+                    <a:solidFill>
+                      <a:srgbClr val="EEF2F9"/>
+                    </a:solidFill>
+                  </a:tcPr>
+                </a:tc>
+                <a:tc>
+                  <a:txBody>
+                    <a:bodyPr/>
+                    <a:lstStyle/>
+                    <a:p>
+                      <a:r>
+                        <a:rPr sz="1150" b="0">
+                          <a:solidFill>
+                            <a:srgbClr val="1A2233"/>
+                          </a:solidFill>
+                          <a:latin typeface="Microsoft JhengHei"/>
+                          <a:ea typeface="Microsoft JhengHei"/>
+                          <a:cs typeface="Microsoft JhengHei"/>
+                        </a:rPr>
+                        <a:t>6128</a:t>
+                      </a:r>
+                    </a:p>
+                  </a:txBody>
+                  <a:tcPr anchor="ctr" marL="73152" marT="9144" marB="9144">
+                    <a:solidFill>
+                      <a:srgbClr val="EEF2F9"/>
+                    </a:solidFill>
+                  </a:tcPr>
+                </a:tc>
+                <a:tc>
+                  <a:txBody>
+                    <a:bodyPr/>
+                    <a:lstStyle/>
+                    <a:p>
+                      <a:r>
+                        <a:rPr sz="1150" b="0">
+                          <a:solidFill>
+                            <a:srgbClr val="1A2233"/>
+                          </a:solidFill>
+                          <a:latin typeface="Microsoft JhengHei"/>
+                          <a:ea typeface="Microsoft JhengHei"/>
+                          <a:cs typeface="Microsoft JhengHei"/>
+                        </a:rPr>
+                        <a:t>10/07</a:t>
                       </a:r>
                     </a:p>
                   </a:txBody>
@@ -4491,7 +4735,7 @@
                           <a:ea typeface="Microsoft JhengHei"/>
                           <a:cs typeface="Microsoft JhengHei"/>
                         </a:rPr>
-                        <a:t>目前公司整體系統與營運正常運作，對公司尚無重大影響。</a:t>
+                        <a:t>目前評估沒有個資、亦沒有機密或重要文件資料外洩等情事發生，對本公司營…</a:t>
                       </a:r>
                     </a:p>
                   </a:txBody>
@@ -4517,7 +4761,7 @@
                           <a:ea typeface="Microsoft JhengHei"/>
                           <a:cs typeface="Microsoft JhengHei"/>
                         </a:rPr>
-                        <a:t>上福</a:t>
+                        <a:t>杏一</a:t>
                       </a:r>
                     </a:p>
                   </a:txBody>
@@ -4541,7 +4785,7 @@
                           <a:ea typeface="Microsoft JhengHei"/>
                           <a:cs typeface="Microsoft JhengHei"/>
                         </a:rPr>
-                        <a:t>6128</a:t>
+                        <a:t>4175</a:t>
                       </a:r>
                     </a:p>
                   </a:txBody>
@@ -4566,6 +4810,250 @@
                           <a:cs typeface="Microsoft JhengHei"/>
                         </a:rPr>
                         <a:t>10/07</a:t>
+                      </a:r>
+                    </a:p>
+                  </a:txBody>
+                  <a:tcPr anchor="ctr" marL="73152" marT="9144" marB="9144">
+                    <a:solidFill>
+                      <a:srgbClr val="FFFFFF"/>
+                    </a:solidFill>
+                  </a:tcPr>
+                </a:tc>
+                <a:tc>
+                  <a:txBody>
+                    <a:bodyPr/>
+                    <a:lstStyle/>
+                    <a:p>
+                      <a:r>
+                        <a:rPr sz="1150" b="1">
+                          <a:solidFill>
+                            <a:srgbClr val="27A6C4"/>
+                          </a:solidFill>
+                          <a:latin typeface="Microsoft JhengHei"/>
+                          <a:ea typeface="Microsoft JhengHei"/>
+                          <a:cs typeface="Microsoft JhengHei"/>
+                        </a:rPr>
+                        <a:t>個資外洩</a:t>
+                      </a:r>
+                    </a:p>
+                  </a:txBody>
+                  <a:tcPr anchor="ctr" marL="73152" marT="9144" marB="9144">
+                    <a:solidFill>
+                      <a:srgbClr val="FFFFFF"/>
+                    </a:solidFill>
+                  </a:tcPr>
+                </a:tc>
+                <a:tc>
+                  <a:txBody>
+                    <a:bodyPr/>
+                    <a:lstStyle/>
+                    <a:p>
+                      <a:r>
+                        <a:rPr sz="1150" b="0">
+                          <a:solidFill>
+                            <a:srgbClr val="1A2233"/>
+                          </a:solidFill>
+                          <a:latin typeface="Microsoft JhengHei"/>
+                          <a:ea typeface="Microsoft JhengHei"/>
+                          <a:cs typeface="Microsoft JhengHei"/>
+                        </a:rPr>
+                        <a:t>截至目前為止對公司財務及業務並無重大影響。</a:t>
+                      </a:r>
+                    </a:p>
+                  </a:txBody>
+                  <a:tcPr anchor="ctr" marL="73152" marT="9144" marB="9144">
+                    <a:solidFill>
+                      <a:srgbClr val="FFFFFF"/>
+                    </a:solidFill>
+                  </a:tcPr>
+                </a:tc>
+              </a:tr>
+              <a:tr h="297180">
+                <a:tc>
+                  <a:txBody>
+                    <a:bodyPr/>
+                    <a:lstStyle/>
+                    <a:p>
+                      <a:r>
+                        <a:rPr sz="1150" b="0">
+                          <a:solidFill>
+                            <a:srgbClr val="1A2233"/>
+                          </a:solidFill>
+                          <a:latin typeface="Microsoft JhengHei"/>
+                          <a:ea typeface="Microsoft JhengHei"/>
+                          <a:cs typeface="Microsoft JhengHei"/>
+                        </a:rPr>
+                        <a:t>鈊象</a:t>
+                      </a:r>
+                    </a:p>
+                  </a:txBody>
+                  <a:tcPr anchor="ctr" marL="73152" marT="9144" marB="9144">
+                    <a:solidFill>
+                      <a:srgbClr val="EEF2F9"/>
+                    </a:solidFill>
+                  </a:tcPr>
+                </a:tc>
+                <a:tc>
+                  <a:txBody>
+                    <a:bodyPr/>
+                    <a:lstStyle/>
+                    <a:p>
+                      <a:r>
+                        <a:rPr sz="1150" b="0">
+                          <a:solidFill>
+                            <a:srgbClr val="1A2233"/>
+                          </a:solidFill>
+                          <a:latin typeface="Microsoft JhengHei"/>
+                          <a:ea typeface="Microsoft JhengHei"/>
+                          <a:cs typeface="Microsoft JhengHei"/>
+                        </a:rPr>
+                        <a:t>3293</a:t>
+                      </a:r>
+                    </a:p>
+                  </a:txBody>
+                  <a:tcPr anchor="ctr" marL="73152" marT="9144" marB="9144">
+                    <a:solidFill>
+                      <a:srgbClr val="EEF2F9"/>
+                    </a:solidFill>
+                  </a:tcPr>
+                </a:tc>
+                <a:tc>
+                  <a:txBody>
+                    <a:bodyPr/>
+                    <a:lstStyle/>
+                    <a:p>
+                      <a:r>
+                        <a:rPr sz="1150" b="0">
+                          <a:solidFill>
+                            <a:srgbClr val="1A2233"/>
+                          </a:solidFill>
+                          <a:latin typeface="Microsoft JhengHei"/>
+                          <a:ea typeface="Microsoft JhengHei"/>
+                          <a:cs typeface="Microsoft JhengHei"/>
+                        </a:rPr>
+                        <a:t>10/07</a:t>
+                      </a:r>
+                    </a:p>
+                  </a:txBody>
+                  <a:tcPr anchor="ctr" marL="73152" marT="9144" marB="9144">
+                    <a:solidFill>
+                      <a:srgbClr val="EEF2F9"/>
+                    </a:solidFill>
+                  </a:tcPr>
+                </a:tc>
+                <a:tc>
+                  <a:txBody>
+                    <a:bodyPr/>
+                    <a:lstStyle/>
+                    <a:p>
+                      <a:r>
+                        <a:rPr sz="1150" b="1">
+                          <a:solidFill>
+                            <a:srgbClr val="27A6C4"/>
+                          </a:solidFill>
+                          <a:latin typeface="Microsoft JhengHei"/>
+                          <a:ea typeface="Microsoft JhengHei"/>
+                          <a:cs typeface="Microsoft JhengHei"/>
+                        </a:rPr>
+                        <a:t>個資外洩</a:t>
+                      </a:r>
+                    </a:p>
+                  </a:txBody>
+                  <a:tcPr anchor="ctr" marL="73152" marT="9144" marB="9144">
+                    <a:solidFill>
+                      <a:srgbClr val="EEF2F9"/>
+                    </a:solidFill>
+                  </a:tcPr>
+                </a:tc>
+                <a:tc>
+                  <a:txBody>
+                    <a:bodyPr/>
+                    <a:lstStyle/>
+                    <a:p>
+                      <a:r>
+                        <a:rPr sz="1150" b="0">
+                          <a:solidFill>
+                            <a:srgbClr val="1A2233"/>
+                          </a:solidFill>
+                          <a:latin typeface="Microsoft JhengHei"/>
+                          <a:ea typeface="Microsoft JhengHei"/>
+                          <a:cs typeface="Microsoft JhengHei"/>
+                        </a:rPr>
+                        <a:t>目前評估對公司營運無重大影響。</a:t>
+                      </a:r>
+                    </a:p>
+                  </a:txBody>
+                  <a:tcPr anchor="ctr" marL="73152" marT="9144" marB="9144">
+                    <a:solidFill>
+                      <a:srgbClr val="EEF2F9"/>
+                    </a:solidFill>
+                  </a:tcPr>
+                </a:tc>
+              </a:tr>
+              <a:tr h="297180">
+                <a:tc>
+                  <a:txBody>
+                    <a:bodyPr/>
+                    <a:lstStyle/>
+                    <a:p>
+                      <a:r>
+                        <a:rPr sz="1150" b="0">
+                          <a:solidFill>
+                            <a:srgbClr val="1A2233"/>
+                          </a:solidFill>
+                          <a:latin typeface="Microsoft JhengHei"/>
+                          <a:ea typeface="Microsoft JhengHei"/>
+                          <a:cs typeface="Microsoft JhengHei"/>
+                        </a:rPr>
+                        <a:t>一零四</a:t>
+                      </a:r>
+                    </a:p>
+                  </a:txBody>
+                  <a:tcPr anchor="ctr" marL="73152" marT="9144" marB="9144">
+                    <a:solidFill>
+                      <a:srgbClr val="FFFFFF"/>
+                    </a:solidFill>
+                  </a:tcPr>
+                </a:tc>
+                <a:tc>
+                  <a:txBody>
+                    <a:bodyPr/>
+                    <a:lstStyle/>
+                    <a:p>
+                      <a:r>
+                        <a:rPr sz="1150" b="0">
+                          <a:solidFill>
+                            <a:srgbClr val="1A2233"/>
+                          </a:solidFill>
+                          <a:latin typeface="Microsoft JhengHei"/>
+                          <a:ea typeface="Microsoft JhengHei"/>
+                          <a:cs typeface="Microsoft JhengHei"/>
+                        </a:rPr>
+                        <a:t>3130</a:t>
+                      </a:r>
+                    </a:p>
+                  </a:txBody>
+                  <a:tcPr anchor="ctr" marL="73152" marT="9144" marB="9144">
+                    <a:solidFill>
+                      <a:srgbClr val="FFFFFF"/>
+                    </a:solidFill>
+                  </a:tcPr>
+                </a:tc>
+                <a:tc>
+                  <a:txBody>
+                    <a:bodyPr/>
+                    <a:lstStyle/>
+                    <a:p>
+                      <a:r>
+                        <a:rPr sz="1150" b="0">
+                          <a:solidFill>
+                            <a:srgbClr val="1A2233"/>
+                          </a:solidFill>
+                          <a:latin typeface="Microsoft JhengHei"/>
+                          <a:ea typeface="Microsoft JhengHei"/>
+                          <a:cs typeface="Microsoft JhengHei"/>
+                        </a:rPr>
+                        <a:t>10/06</a:t>
                       </a:r>
                     </a:p>
                   </a:txBody>
@@ -4613,7 +5101,7 @@
                           <a:ea typeface="Microsoft JhengHei"/>
                           <a:cs typeface="Microsoft JhengHei"/>
                         </a:rPr>
-                        <a:t>目前評估沒有個資、亦沒有機密或重要文件資料外洩等情事發生，對本公司營…</a:t>
+                        <a:t>目前系統與營運正常運作，對公司尚無重大影響。相關影響仍持續評估中。</a:t>
                       </a:r>
                     </a:p>
                   </a:txBody>
@@ -4639,7 +5127,7 @@
                           <a:ea typeface="Microsoft JhengHei"/>
                           <a:cs typeface="Microsoft JhengHei"/>
                         </a:rPr>
-                        <a:t>杏一</a:t>
+                        <a:t>安心</a:t>
                       </a:r>
                     </a:p>
                   </a:txBody>
@@ -4663,7 +5151,7 @@
                           <a:ea typeface="Microsoft JhengHei"/>
                           <a:cs typeface="Microsoft JhengHei"/>
                         </a:rPr>
-                        <a:t>4175</a:t>
+                        <a:t>1259</a:t>
                       </a:r>
                     </a:p>
                   </a:txBody>
@@ -4687,7 +5175,7 @@
                           <a:ea typeface="Microsoft JhengHei"/>
                           <a:cs typeface="Microsoft JhengHei"/>
                         </a:rPr>
-                        <a:t>10/07</a:t>
+                        <a:t>10/01</a:t>
                       </a:r>
                     </a:p>
                   </a:txBody>
@@ -4761,7 +5249,7 @@
                           <a:ea typeface="Microsoft JhengHei"/>
                           <a:cs typeface="Microsoft JhengHei"/>
                         </a:rPr>
-                        <a:t>鈊象</a:t>
+                        <a:t>神腦</a:t>
                       </a:r>
                     </a:p>
                   </a:txBody>
@@ -4785,7 +5273,7 @@
                           <a:ea typeface="Microsoft JhengHei"/>
                           <a:cs typeface="Microsoft JhengHei"/>
                         </a:rPr>
-                        <a:t>3293</a:t>
+                        <a:t>2450</a:t>
                       </a:r>
                     </a:p>
                   </a:txBody>
@@ -4809,7 +5297,251 @@
                           <a:ea typeface="Microsoft JhengHei"/>
                           <a:cs typeface="Microsoft JhengHei"/>
                         </a:rPr>
-                        <a:t>10/07</a:t>
+                        <a:t>09/29</a:t>
+                      </a:r>
+                    </a:p>
+                  </a:txBody>
+                  <a:tcPr anchor="ctr" marL="73152" marT="9144" marB="9144">
+                    <a:solidFill>
+                      <a:srgbClr val="FFFFFF"/>
+                    </a:solidFill>
+                  </a:tcPr>
+                </a:tc>
+                <a:tc>
+                  <a:txBody>
+                    <a:bodyPr/>
+                    <a:lstStyle/>
+                    <a:p>
+                      <a:r>
+                        <a:rPr sz="1150" b="1">
+                          <a:solidFill>
+                            <a:srgbClr val="E63946"/>
+                          </a:solidFill>
+                          <a:latin typeface="Microsoft JhengHei"/>
+                          <a:ea typeface="Microsoft JhengHei"/>
+                          <a:cs typeface="Microsoft JhengHei"/>
+                        </a:rPr>
+                        <a:t>駭客攻擊</a:t>
+                      </a:r>
+                    </a:p>
+                  </a:txBody>
+                  <a:tcPr anchor="ctr" marL="73152" marT="9144" marB="9144">
+                    <a:solidFill>
+                      <a:srgbClr val="FFFFFF"/>
+                    </a:solidFill>
+                  </a:tcPr>
+                </a:tc>
+                <a:tc>
+                  <a:txBody>
+                    <a:bodyPr/>
+                    <a:lstStyle/>
+                    <a:p>
+                      <a:r>
+                        <a:rPr sz="1150" b="0">
+                          <a:solidFill>
+                            <a:srgbClr val="1A2233"/>
+                          </a:solidFill>
+                          <a:latin typeface="Microsoft JhengHei"/>
+                          <a:ea typeface="Microsoft JhengHei"/>
+                          <a:cs typeface="Microsoft JhengHei"/>
+                        </a:rPr>
+                        <a:t>評估對本公司營運、財務及服務提供無重大影響。</a:t>
+                      </a:r>
+                    </a:p>
+                  </a:txBody>
+                  <a:tcPr anchor="ctr" marL="73152" marT="9144" marB="9144">
+                    <a:solidFill>
+                      <a:srgbClr val="FFFFFF"/>
+                    </a:solidFill>
+                  </a:tcPr>
+                </a:tc>
+              </a:tr>
+              <a:tr h="297180">
+                <a:tc>
+                  <a:txBody>
+                    <a:bodyPr/>
+                    <a:lstStyle/>
+                    <a:p>
+                      <a:r>
+                        <a:rPr sz="1150" b="0">
+                          <a:solidFill>
+                            <a:srgbClr val="1A2233"/>
+                          </a:solidFill>
+                          <a:latin typeface="Microsoft JhengHei"/>
+                          <a:ea typeface="Microsoft JhengHei"/>
+                          <a:cs typeface="Microsoft JhengHei"/>
+                        </a:rPr>
+                        <a:t>鈊象</a:t>
+                      </a:r>
+                    </a:p>
+                  </a:txBody>
+                  <a:tcPr anchor="ctr" marL="73152" marT="9144" marB="9144">
+                    <a:solidFill>
+                      <a:srgbClr val="EEF2F9"/>
+                    </a:solidFill>
+                  </a:tcPr>
+                </a:tc>
+                <a:tc>
+                  <a:txBody>
+                    <a:bodyPr/>
+                    <a:lstStyle/>
+                    <a:p>
+                      <a:r>
+                        <a:rPr sz="1150" b="0">
+                          <a:solidFill>
+                            <a:srgbClr val="1A2233"/>
+                          </a:solidFill>
+                          <a:latin typeface="Microsoft JhengHei"/>
+                          <a:ea typeface="Microsoft JhengHei"/>
+                          <a:cs typeface="Microsoft JhengHei"/>
+                        </a:rPr>
+                        <a:t>3293</a:t>
+                      </a:r>
+                    </a:p>
+                  </a:txBody>
+                  <a:tcPr anchor="ctr" marL="73152" marT="9144" marB="9144">
+                    <a:solidFill>
+                      <a:srgbClr val="EEF2F9"/>
+                    </a:solidFill>
+                  </a:tcPr>
+                </a:tc>
+                <a:tc>
+                  <a:txBody>
+                    <a:bodyPr/>
+                    <a:lstStyle/>
+                    <a:p>
+                      <a:r>
+                        <a:rPr sz="1150" b="0">
+                          <a:solidFill>
+                            <a:srgbClr val="1A2233"/>
+                          </a:solidFill>
+                          <a:latin typeface="Microsoft JhengHei"/>
+                          <a:ea typeface="Microsoft JhengHei"/>
+                          <a:cs typeface="Microsoft JhengHei"/>
+                        </a:rPr>
+                        <a:t>09/29</a:t>
+                      </a:r>
+                    </a:p>
+                  </a:txBody>
+                  <a:tcPr anchor="ctr" marL="73152" marT="9144" marB="9144">
+                    <a:solidFill>
+                      <a:srgbClr val="EEF2F9"/>
+                    </a:solidFill>
+                  </a:tcPr>
+                </a:tc>
+                <a:tc>
+                  <a:txBody>
+                    <a:bodyPr/>
+                    <a:lstStyle/>
+                    <a:p>
+                      <a:r>
+                        <a:rPr sz="1150" b="1">
+                          <a:solidFill>
+                            <a:srgbClr val="5C6679"/>
+                          </a:solidFill>
+                          <a:latin typeface="Microsoft JhengHei"/>
+                          <a:ea typeface="Microsoft JhengHei"/>
+                          <a:cs typeface="Microsoft JhengHei"/>
+                        </a:rPr>
+                        <a:t>其他</a:t>
+                      </a:r>
+                    </a:p>
+                  </a:txBody>
+                  <a:tcPr anchor="ctr" marL="73152" marT="9144" marB="9144">
+                    <a:solidFill>
+                      <a:srgbClr val="EEF2F9"/>
+                    </a:solidFill>
+                  </a:tcPr>
+                </a:tc>
+                <a:tc>
+                  <a:txBody>
+                    <a:bodyPr/>
+                    <a:lstStyle/>
+                    <a:p>
+                      <a:r>
+                        <a:rPr sz="1150" b="0">
+                          <a:solidFill>
+                            <a:srgbClr val="1A2233"/>
+                          </a:solidFill>
+                          <a:latin typeface="Microsoft JhengHei"/>
+                          <a:ea typeface="Microsoft JhengHei"/>
+                          <a:cs typeface="Microsoft JhengHei"/>
+                        </a:rPr>
+                        <a:t>目前評估對公司營運尚無重大影響。</a:t>
+                      </a:r>
+                    </a:p>
+                  </a:txBody>
+                  <a:tcPr anchor="ctr" marL="73152" marT="9144" marB="9144">
+                    <a:solidFill>
+                      <a:srgbClr val="EEF2F9"/>
+                    </a:solidFill>
+                  </a:tcPr>
+                </a:tc>
+              </a:tr>
+              <a:tr h="297180">
+                <a:tc>
+                  <a:txBody>
+                    <a:bodyPr/>
+                    <a:lstStyle/>
+                    <a:p>
+                      <a:r>
+                        <a:rPr sz="1150" b="0">
+                          <a:solidFill>
+                            <a:srgbClr val="1A2233"/>
+                          </a:solidFill>
+                          <a:latin typeface="Microsoft JhengHei"/>
+                          <a:ea typeface="Microsoft JhengHei"/>
+                          <a:cs typeface="Microsoft JhengHei"/>
+                        </a:rPr>
+                        <a:t>柏文</a:t>
+                      </a:r>
+                    </a:p>
+                  </a:txBody>
+                  <a:tcPr anchor="ctr" marL="73152" marT="9144" marB="9144">
+                    <a:solidFill>
+                      <a:srgbClr val="FFFFFF"/>
+                    </a:solidFill>
+                  </a:tcPr>
+                </a:tc>
+                <a:tc>
+                  <a:txBody>
+                    <a:bodyPr/>
+                    <a:lstStyle/>
+                    <a:p>
+                      <a:r>
+                        <a:rPr sz="1150" b="0">
+                          <a:solidFill>
+                            <a:srgbClr val="1A2233"/>
+                          </a:solidFill>
+                          <a:latin typeface="Microsoft JhengHei"/>
+                          <a:ea typeface="Microsoft JhengHei"/>
+                          <a:cs typeface="Microsoft JhengHei"/>
+                        </a:rPr>
+                        <a:t>8462</a:t>
+                      </a:r>
+                    </a:p>
+                  </a:txBody>
+                  <a:tcPr anchor="ctr" marL="73152" marT="9144" marB="9144">
+                    <a:solidFill>
+                      <a:srgbClr val="FFFFFF"/>
+                    </a:solidFill>
+                  </a:tcPr>
+                </a:tc>
+                <a:tc>
+                  <a:txBody>
+                    <a:bodyPr/>
+                    <a:lstStyle/>
+                    <a:p>
+                      <a:r>
+                        <a:rPr sz="1150" b="0">
+                          <a:solidFill>
+                            <a:srgbClr val="1A2233"/>
+                          </a:solidFill>
+                          <a:latin typeface="Microsoft JhengHei"/>
+                          <a:ea typeface="Microsoft JhengHei"/>
+                          <a:cs typeface="Microsoft JhengHei"/>
+                        </a:rPr>
+                        <a:t>09/23</a:t>
                       </a:r>
                     </a:p>
                   </a:txBody>
@@ -4868,738 +5600,6 @@
                   </a:tcPr>
                 </a:tc>
               </a:tr>
-              <a:tr h="297180">
-                <a:tc>
-                  <a:txBody>
-                    <a:bodyPr/>
-                    <a:lstStyle/>
-                    <a:p>
-                      <a:r>
-                        <a:rPr sz="1150" b="0">
-                          <a:solidFill>
-                            <a:srgbClr val="1A2233"/>
-                          </a:solidFill>
-                          <a:latin typeface="Microsoft JhengHei"/>
-                          <a:ea typeface="Microsoft JhengHei"/>
-                          <a:cs typeface="Microsoft JhengHei"/>
-                        </a:rPr>
-                        <a:t>一零四</a:t>
-                      </a:r>
-                    </a:p>
-                  </a:txBody>
-                  <a:tcPr anchor="ctr" marL="73152" marT="9144" marB="9144">
-                    <a:solidFill>
-                      <a:srgbClr val="EEF2F9"/>
-                    </a:solidFill>
-                  </a:tcPr>
-                </a:tc>
-                <a:tc>
-                  <a:txBody>
-                    <a:bodyPr/>
-                    <a:lstStyle/>
-                    <a:p>
-                      <a:r>
-                        <a:rPr sz="1150" b="0">
-                          <a:solidFill>
-                            <a:srgbClr val="1A2233"/>
-                          </a:solidFill>
-                          <a:latin typeface="Microsoft JhengHei"/>
-                          <a:ea typeface="Microsoft JhengHei"/>
-                          <a:cs typeface="Microsoft JhengHei"/>
-                        </a:rPr>
-                        <a:t>3130</a:t>
-                      </a:r>
-                    </a:p>
-                  </a:txBody>
-                  <a:tcPr anchor="ctr" marL="73152" marT="9144" marB="9144">
-                    <a:solidFill>
-                      <a:srgbClr val="EEF2F9"/>
-                    </a:solidFill>
-                  </a:tcPr>
-                </a:tc>
-                <a:tc>
-                  <a:txBody>
-                    <a:bodyPr/>
-                    <a:lstStyle/>
-                    <a:p>
-                      <a:r>
-                        <a:rPr sz="1150" b="0">
-                          <a:solidFill>
-                            <a:srgbClr val="1A2233"/>
-                          </a:solidFill>
-                          <a:latin typeface="Microsoft JhengHei"/>
-                          <a:ea typeface="Microsoft JhengHei"/>
-                          <a:cs typeface="Microsoft JhengHei"/>
-                        </a:rPr>
-                        <a:t>10/06</a:t>
-                      </a:r>
-                    </a:p>
-                  </a:txBody>
-                  <a:tcPr anchor="ctr" marL="73152" marT="9144" marB="9144">
-                    <a:solidFill>
-                      <a:srgbClr val="EEF2F9"/>
-                    </a:solidFill>
-                  </a:tcPr>
-                </a:tc>
-                <a:tc>
-                  <a:txBody>
-                    <a:bodyPr/>
-                    <a:lstStyle/>
-                    <a:p>
-                      <a:r>
-                        <a:rPr sz="1150" b="1">
-                          <a:solidFill>
-                            <a:srgbClr val="5C6679"/>
-                          </a:solidFill>
-                          <a:latin typeface="Microsoft JhengHei"/>
-                          <a:ea typeface="Microsoft JhengHei"/>
-                          <a:cs typeface="Microsoft JhengHei"/>
-                        </a:rPr>
-                        <a:t>其他</a:t>
-                      </a:r>
-                    </a:p>
-                  </a:txBody>
-                  <a:tcPr anchor="ctr" marL="73152" marT="9144" marB="9144">
-                    <a:solidFill>
-                      <a:srgbClr val="EEF2F9"/>
-                    </a:solidFill>
-                  </a:tcPr>
-                </a:tc>
-                <a:tc>
-                  <a:txBody>
-                    <a:bodyPr/>
-                    <a:lstStyle/>
-                    <a:p>
-                      <a:r>
-                        <a:rPr sz="1150" b="0">
-                          <a:solidFill>
-                            <a:srgbClr val="1A2233"/>
-                          </a:solidFill>
-                          <a:latin typeface="Microsoft JhengHei"/>
-                          <a:ea typeface="Microsoft JhengHei"/>
-                          <a:cs typeface="Microsoft JhengHei"/>
-                        </a:rPr>
-                        <a:t>目前系統與營運正常運作，對公司尚無重大影響。相關影響仍持續評估中。</a:t>
-                      </a:r>
-                    </a:p>
-                  </a:txBody>
-                  <a:tcPr anchor="ctr" marL="73152" marT="9144" marB="9144">
-                    <a:solidFill>
-                      <a:srgbClr val="EEF2F9"/>
-                    </a:solidFill>
-                  </a:tcPr>
-                </a:tc>
-              </a:tr>
-              <a:tr h="297180">
-                <a:tc>
-                  <a:txBody>
-                    <a:bodyPr/>
-                    <a:lstStyle/>
-                    <a:p>
-                      <a:r>
-                        <a:rPr sz="1150" b="0">
-                          <a:solidFill>
-                            <a:srgbClr val="1A2233"/>
-                          </a:solidFill>
-                          <a:latin typeface="Microsoft JhengHei"/>
-                          <a:ea typeface="Microsoft JhengHei"/>
-                          <a:cs typeface="Microsoft JhengHei"/>
-                        </a:rPr>
-                        <a:t>安心</a:t>
-                      </a:r>
-                    </a:p>
-                  </a:txBody>
-                  <a:tcPr anchor="ctr" marL="73152" marT="9144" marB="9144">
-                    <a:solidFill>
-                      <a:srgbClr val="FFFFFF"/>
-                    </a:solidFill>
-                  </a:tcPr>
-                </a:tc>
-                <a:tc>
-                  <a:txBody>
-                    <a:bodyPr/>
-                    <a:lstStyle/>
-                    <a:p>
-                      <a:r>
-                        <a:rPr sz="1150" b="0">
-                          <a:solidFill>
-                            <a:srgbClr val="1A2233"/>
-                          </a:solidFill>
-                          <a:latin typeface="Microsoft JhengHei"/>
-                          <a:ea typeface="Microsoft JhengHei"/>
-                          <a:cs typeface="Microsoft JhengHei"/>
-                        </a:rPr>
-                        <a:t>1259</a:t>
-                      </a:r>
-                    </a:p>
-                  </a:txBody>
-                  <a:tcPr anchor="ctr" marL="73152" marT="9144" marB="9144">
-                    <a:solidFill>
-                      <a:srgbClr val="FFFFFF"/>
-                    </a:solidFill>
-                  </a:tcPr>
-                </a:tc>
-                <a:tc>
-                  <a:txBody>
-                    <a:bodyPr/>
-                    <a:lstStyle/>
-                    <a:p>
-                      <a:r>
-                        <a:rPr sz="1150" b="0">
-                          <a:solidFill>
-                            <a:srgbClr val="1A2233"/>
-                          </a:solidFill>
-                          <a:latin typeface="Microsoft JhengHei"/>
-                          <a:ea typeface="Microsoft JhengHei"/>
-                          <a:cs typeface="Microsoft JhengHei"/>
-                        </a:rPr>
-                        <a:t>10/01</a:t>
-                      </a:r>
-                    </a:p>
-                  </a:txBody>
-                  <a:tcPr anchor="ctr" marL="73152" marT="9144" marB="9144">
-                    <a:solidFill>
-                      <a:srgbClr val="FFFFFF"/>
-                    </a:solidFill>
-                  </a:tcPr>
-                </a:tc>
-                <a:tc>
-                  <a:txBody>
-                    <a:bodyPr/>
-                    <a:lstStyle/>
-                    <a:p>
-                      <a:r>
-                        <a:rPr sz="1150" b="1">
-                          <a:solidFill>
-                            <a:srgbClr val="27A6C4"/>
-                          </a:solidFill>
-                          <a:latin typeface="Microsoft JhengHei"/>
-                          <a:ea typeface="Microsoft JhengHei"/>
-                          <a:cs typeface="Microsoft JhengHei"/>
-                        </a:rPr>
-                        <a:t>個資外洩</a:t>
-                      </a:r>
-                    </a:p>
-                  </a:txBody>
-                  <a:tcPr anchor="ctr" marL="73152" marT="9144" marB="9144">
-                    <a:solidFill>
-                      <a:srgbClr val="FFFFFF"/>
-                    </a:solidFill>
-                  </a:tcPr>
-                </a:tc>
-                <a:tc>
-                  <a:txBody>
-                    <a:bodyPr/>
-                    <a:lstStyle/>
-                    <a:p>
-                      <a:r>
-                        <a:rPr sz="1150" b="0">
-                          <a:solidFill>
-                            <a:srgbClr val="1A2233"/>
-                          </a:solidFill>
-                          <a:latin typeface="Microsoft JhengHei"/>
-                          <a:ea typeface="Microsoft JhengHei"/>
-                          <a:cs typeface="Microsoft JhengHei"/>
-                        </a:rPr>
-                        <a:t>截至目前為止對公司財務及業務並無重大影響。</a:t>
-                      </a:r>
-                    </a:p>
-                  </a:txBody>
-                  <a:tcPr anchor="ctr" marL="73152" marT="9144" marB="9144">
-                    <a:solidFill>
-                      <a:srgbClr val="FFFFFF"/>
-                    </a:solidFill>
-                  </a:tcPr>
-                </a:tc>
-              </a:tr>
-              <a:tr h="297180">
-                <a:tc>
-                  <a:txBody>
-                    <a:bodyPr/>
-                    <a:lstStyle/>
-                    <a:p>
-                      <a:r>
-                        <a:rPr sz="1150" b="0">
-                          <a:solidFill>
-                            <a:srgbClr val="1A2233"/>
-                          </a:solidFill>
-                          <a:latin typeface="Microsoft JhengHei"/>
-                          <a:ea typeface="Microsoft JhengHei"/>
-                          <a:cs typeface="Microsoft JhengHei"/>
-                        </a:rPr>
-                        <a:t>神腦</a:t>
-                      </a:r>
-                    </a:p>
-                  </a:txBody>
-                  <a:tcPr anchor="ctr" marL="73152" marT="9144" marB="9144">
-                    <a:solidFill>
-                      <a:srgbClr val="EEF2F9"/>
-                    </a:solidFill>
-                  </a:tcPr>
-                </a:tc>
-                <a:tc>
-                  <a:txBody>
-                    <a:bodyPr/>
-                    <a:lstStyle/>
-                    <a:p>
-                      <a:r>
-                        <a:rPr sz="1150" b="0">
-                          <a:solidFill>
-                            <a:srgbClr val="1A2233"/>
-                          </a:solidFill>
-                          <a:latin typeface="Microsoft JhengHei"/>
-                          <a:ea typeface="Microsoft JhengHei"/>
-                          <a:cs typeface="Microsoft JhengHei"/>
-                        </a:rPr>
-                        <a:t>2450</a:t>
-                      </a:r>
-                    </a:p>
-                  </a:txBody>
-                  <a:tcPr anchor="ctr" marL="73152" marT="9144" marB="9144">
-                    <a:solidFill>
-                      <a:srgbClr val="EEF2F9"/>
-                    </a:solidFill>
-                  </a:tcPr>
-                </a:tc>
-                <a:tc>
-                  <a:txBody>
-                    <a:bodyPr/>
-                    <a:lstStyle/>
-                    <a:p>
-                      <a:r>
-                        <a:rPr sz="1150" b="0">
-                          <a:solidFill>
-                            <a:srgbClr val="1A2233"/>
-                          </a:solidFill>
-                          <a:latin typeface="Microsoft JhengHei"/>
-                          <a:ea typeface="Microsoft JhengHei"/>
-                          <a:cs typeface="Microsoft JhengHei"/>
-                        </a:rPr>
-                        <a:t>09/29</a:t>
-                      </a:r>
-                    </a:p>
-                  </a:txBody>
-                  <a:tcPr anchor="ctr" marL="73152" marT="9144" marB="9144">
-                    <a:solidFill>
-                      <a:srgbClr val="EEF2F9"/>
-                    </a:solidFill>
-                  </a:tcPr>
-                </a:tc>
-                <a:tc>
-                  <a:txBody>
-                    <a:bodyPr/>
-                    <a:lstStyle/>
-                    <a:p>
-                      <a:r>
-                        <a:rPr sz="1150" b="1">
-                          <a:solidFill>
-                            <a:srgbClr val="E63946"/>
-                          </a:solidFill>
-                          <a:latin typeface="Microsoft JhengHei"/>
-                          <a:ea typeface="Microsoft JhengHei"/>
-                          <a:cs typeface="Microsoft JhengHei"/>
-                        </a:rPr>
-                        <a:t>駭客攻擊</a:t>
-                      </a:r>
-                    </a:p>
-                  </a:txBody>
-                  <a:tcPr anchor="ctr" marL="73152" marT="9144" marB="9144">
-                    <a:solidFill>
-                      <a:srgbClr val="EEF2F9"/>
-                    </a:solidFill>
-                  </a:tcPr>
-                </a:tc>
-                <a:tc>
-                  <a:txBody>
-                    <a:bodyPr/>
-                    <a:lstStyle/>
-                    <a:p>
-                      <a:r>
-                        <a:rPr sz="1150" b="0">
-                          <a:solidFill>
-                            <a:srgbClr val="1A2233"/>
-                          </a:solidFill>
-                          <a:latin typeface="Microsoft JhengHei"/>
-                          <a:ea typeface="Microsoft JhengHei"/>
-                          <a:cs typeface="Microsoft JhengHei"/>
-                        </a:rPr>
-                        <a:t>評估對本公司營運、財務及服務提供無重大影響。</a:t>
-                      </a:r>
-                    </a:p>
-                  </a:txBody>
-                  <a:tcPr anchor="ctr" marL="73152" marT="9144" marB="9144">
-                    <a:solidFill>
-                      <a:srgbClr val="EEF2F9"/>
-                    </a:solidFill>
-                  </a:tcPr>
-                </a:tc>
-              </a:tr>
-              <a:tr h="297180">
-                <a:tc>
-                  <a:txBody>
-                    <a:bodyPr/>
-                    <a:lstStyle/>
-                    <a:p>
-                      <a:r>
-                        <a:rPr sz="1150" b="0">
-                          <a:solidFill>
-                            <a:srgbClr val="1A2233"/>
-                          </a:solidFill>
-                          <a:latin typeface="Microsoft JhengHei"/>
-                          <a:ea typeface="Microsoft JhengHei"/>
-                          <a:cs typeface="Microsoft JhengHei"/>
-                        </a:rPr>
-                        <a:t>鈊象</a:t>
-                      </a:r>
-                    </a:p>
-                  </a:txBody>
-                  <a:tcPr anchor="ctr" marL="73152" marT="9144" marB="9144">
-                    <a:solidFill>
-                      <a:srgbClr val="FFFFFF"/>
-                    </a:solidFill>
-                  </a:tcPr>
-                </a:tc>
-                <a:tc>
-                  <a:txBody>
-                    <a:bodyPr/>
-                    <a:lstStyle/>
-                    <a:p>
-                      <a:r>
-                        <a:rPr sz="1150" b="0">
-                          <a:solidFill>
-                            <a:srgbClr val="1A2233"/>
-                          </a:solidFill>
-                          <a:latin typeface="Microsoft JhengHei"/>
-                          <a:ea typeface="Microsoft JhengHei"/>
-                          <a:cs typeface="Microsoft JhengHei"/>
-                        </a:rPr>
-                        <a:t>3293</a:t>
-                      </a:r>
-                    </a:p>
-                  </a:txBody>
-                  <a:tcPr anchor="ctr" marL="73152" marT="9144" marB="9144">
-                    <a:solidFill>
-                      <a:srgbClr val="FFFFFF"/>
-                    </a:solidFill>
-                  </a:tcPr>
-                </a:tc>
-                <a:tc>
-                  <a:txBody>
-                    <a:bodyPr/>
-                    <a:lstStyle/>
-                    <a:p>
-                      <a:r>
-                        <a:rPr sz="1150" b="0">
-                          <a:solidFill>
-                            <a:srgbClr val="1A2233"/>
-                          </a:solidFill>
-                          <a:latin typeface="Microsoft JhengHei"/>
-                          <a:ea typeface="Microsoft JhengHei"/>
-                          <a:cs typeface="Microsoft JhengHei"/>
-                        </a:rPr>
-                        <a:t>09/29</a:t>
-                      </a:r>
-                    </a:p>
-                  </a:txBody>
-                  <a:tcPr anchor="ctr" marL="73152" marT="9144" marB="9144">
-                    <a:solidFill>
-                      <a:srgbClr val="FFFFFF"/>
-                    </a:solidFill>
-                  </a:tcPr>
-                </a:tc>
-                <a:tc>
-                  <a:txBody>
-                    <a:bodyPr/>
-                    <a:lstStyle/>
-                    <a:p>
-                      <a:r>
-                        <a:rPr sz="1150" b="1">
-                          <a:solidFill>
-                            <a:srgbClr val="5C6679"/>
-                          </a:solidFill>
-                          <a:latin typeface="Microsoft JhengHei"/>
-                          <a:ea typeface="Microsoft JhengHei"/>
-                          <a:cs typeface="Microsoft JhengHei"/>
-                        </a:rPr>
-                        <a:t>其他</a:t>
-                      </a:r>
-                    </a:p>
-                  </a:txBody>
-                  <a:tcPr anchor="ctr" marL="73152" marT="9144" marB="9144">
-                    <a:solidFill>
-                      <a:srgbClr val="FFFFFF"/>
-                    </a:solidFill>
-                  </a:tcPr>
-                </a:tc>
-                <a:tc>
-                  <a:txBody>
-                    <a:bodyPr/>
-                    <a:lstStyle/>
-                    <a:p>
-                      <a:r>
-                        <a:rPr sz="1150" b="0">
-                          <a:solidFill>
-                            <a:srgbClr val="1A2233"/>
-                          </a:solidFill>
-                          <a:latin typeface="Microsoft JhengHei"/>
-                          <a:ea typeface="Microsoft JhengHei"/>
-                          <a:cs typeface="Microsoft JhengHei"/>
-                        </a:rPr>
-                        <a:t>目前評估對公司營運尚無重大影響。</a:t>
-                      </a:r>
-                    </a:p>
-                  </a:txBody>
-                  <a:tcPr anchor="ctr" marL="73152" marT="9144" marB="9144">
-                    <a:solidFill>
-                      <a:srgbClr val="FFFFFF"/>
-                    </a:solidFill>
-                  </a:tcPr>
-                </a:tc>
-              </a:tr>
-              <a:tr h="297180">
-                <a:tc>
-                  <a:txBody>
-                    <a:bodyPr/>
-                    <a:lstStyle/>
-                    <a:p>
-                      <a:r>
-                        <a:rPr sz="1150" b="0">
-                          <a:solidFill>
-                            <a:srgbClr val="1A2233"/>
-                          </a:solidFill>
-                          <a:latin typeface="Microsoft JhengHei"/>
-                          <a:ea typeface="Microsoft JhengHei"/>
-                          <a:cs typeface="Microsoft JhengHei"/>
-                        </a:rPr>
-                        <a:t>柏文</a:t>
-                      </a:r>
-                    </a:p>
-                  </a:txBody>
-                  <a:tcPr anchor="ctr" marL="73152" marT="9144" marB="9144">
-                    <a:solidFill>
-                      <a:srgbClr val="EEF2F9"/>
-                    </a:solidFill>
-                  </a:tcPr>
-                </a:tc>
-                <a:tc>
-                  <a:txBody>
-                    <a:bodyPr/>
-                    <a:lstStyle/>
-                    <a:p>
-                      <a:r>
-                        <a:rPr sz="1150" b="0">
-                          <a:solidFill>
-                            <a:srgbClr val="1A2233"/>
-                          </a:solidFill>
-                          <a:latin typeface="Microsoft JhengHei"/>
-                          <a:ea typeface="Microsoft JhengHei"/>
-                          <a:cs typeface="Microsoft JhengHei"/>
-                        </a:rPr>
-                        <a:t>8462</a:t>
-                      </a:r>
-                    </a:p>
-                  </a:txBody>
-                  <a:tcPr anchor="ctr" marL="73152" marT="9144" marB="9144">
-                    <a:solidFill>
-                      <a:srgbClr val="EEF2F9"/>
-                    </a:solidFill>
-                  </a:tcPr>
-                </a:tc>
-                <a:tc>
-                  <a:txBody>
-                    <a:bodyPr/>
-                    <a:lstStyle/>
-                    <a:p>
-                      <a:r>
-                        <a:rPr sz="1150" b="0">
-                          <a:solidFill>
-                            <a:srgbClr val="1A2233"/>
-                          </a:solidFill>
-                          <a:latin typeface="Microsoft JhengHei"/>
-                          <a:ea typeface="Microsoft JhengHei"/>
-                          <a:cs typeface="Microsoft JhengHei"/>
-                        </a:rPr>
-                        <a:t>09/23</a:t>
-                      </a:r>
-                    </a:p>
-                  </a:txBody>
-                  <a:tcPr anchor="ctr" marL="73152" marT="9144" marB="9144">
-                    <a:solidFill>
-                      <a:srgbClr val="EEF2F9"/>
-                    </a:solidFill>
-                  </a:tcPr>
-                </a:tc>
-                <a:tc>
-                  <a:txBody>
-                    <a:bodyPr/>
-                    <a:lstStyle/>
-                    <a:p>
-                      <a:r>
-                        <a:rPr sz="1150" b="1">
-                          <a:solidFill>
-                            <a:srgbClr val="27A6C4"/>
-                          </a:solidFill>
-                          <a:latin typeface="Microsoft JhengHei"/>
-                          <a:ea typeface="Microsoft JhengHei"/>
-                          <a:cs typeface="Microsoft JhengHei"/>
-                        </a:rPr>
-                        <a:t>個資外洩</a:t>
-                      </a:r>
-                    </a:p>
-                  </a:txBody>
-                  <a:tcPr anchor="ctr" marL="73152" marT="9144" marB="9144">
-                    <a:solidFill>
-                      <a:srgbClr val="EEF2F9"/>
-                    </a:solidFill>
-                  </a:tcPr>
-                </a:tc>
-                <a:tc>
-                  <a:txBody>
-                    <a:bodyPr/>
-                    <a:lstStyle/>
-                    <a:p>
-                      <a:r>
-                        <a:rPr sz="1150" b="0">
-                          <a:solidFill>
-                            <a:srgbClr val="1A2233"/>
-                          </a:solidFill>
-                          <a:latin typeface="Microsoft JhengHei"/>
-                          <a:ea typeface="Microsoft JhengHei"/>
-                          <a:cs typeface="Microsoft JhengHei"/>
-                        </a:rPr>
-                        <a:t>目前評估對公司營運無重大影響。</a:t>
-                      </a:r>
-                    </a:p>
-                  </a:txBody>
-                  <a:tcPr anchor="ctr" marL="73152" marT="9144" marB="9144">
-                    <a:solidFill>
-                      <a:srgbClr val="EEF2F9"/>
-                    </a:solidFill>
-                  </a:tcPr>
-                </a:tc>
-              </a:tr>
-              <a:tr h="297180">
-                <a:tc>
-                  <a:txBody>
-                    <a:bodyPr/>
-                    <a:lstStyle/>
-                    <a:p>
-                      <a:r>
-                        <a:rPr sz="1150" b="0">
-                          <a:solidFill>
-                            <a:srgbClr val="1A2233"/>
-                          </a:solidFill>
-                          <a:latin typeface="Microsoft JhengHei"/>
-                          <a:ea typeface="Microsoft JhengHei"/>
-                          <a:cs typeface="Microsoft JhengHei"/>
-                        </a:rPr>
-                        <a:t>友訊</a:t>
-                      </a:r>
-                    </a:p>
-                  </a:txBody>
-                  <a:tcPr anchor="ctr" marL="73152" marT="9144" marB="9144">
-                    <a:solidFill>
-                      <a:srgbClr val="FFFFFF"/>
-                    </a:solidFill>
-                  </a:tcPr>
-                </a:tc>
-                <a:tc>
-                  <a:txBody>
-                    <a:bodyPr/>
-                    <a:lstStyle/>
-                    <a:p>
-                      <a:r>
-                        <a:rPr sz="1150" b="0">
-                          <a:solidFill>
-                            <a:srgbClr val="1A2233"/>
-                          </a:solidFill>
-                          <a:latin typeface="Microsoft JhengHei"/>
-                          <a:ea typeface="Microsoft JhengHei"/>
-                          <a:cs typeface="Microsoft JhengHei"/>
-                        </a:rPr>
-                        <a:t>2332</a:t>
-                      </a:r>
-                    </a:p>
-                  </a:txBody>
-                  <a:tcPr anchor="ctr" marL="73152" marT="9144" marB="9144">
-                    <a:solidFill>
-                      <a:srgbClr val="FFFFFF"/>
-                    </a:solidFill>
-                  </a:tcPr>
-                </a:tc>
-                <a:tc>
-                  <a:txBody>
-                    <a:bodyPr/>
-                    <a:lstStyle/>
-                    <a:p>
-                      <a:r>
-                        <a:rPr sz="1150" b="0">
-                          <a:solidFill>
-                            <a:srgbClr val="1A2233"/>
-                          </a:solidFill>
-                          <a:latin typeface="Microsoft JhengHei"/>
-                          <a:ea typeface="Microsoft JhengHei"/>
-                          <a:cs typeface="Microsoft JhengHei"/>
-                        </a:rPr>
-                        <a:t>09/18</a:t>
-                      </a:r>
-                    </a:p>
-                  </a:txBody>
-                  <a:tcPr anchor="ctr" marL="73152" marT="9144" marB="9144">
-                    <a:solidFill>
-                      <a:srgbClr val="FFFFFF"/>
-                    </a:solidFill>
-                  </a:tcPr>
-                </a:tc>
-                <a:tc>
-                  <a:txBody>
-                    <a:bodyPr/>
-                    <a:lstStyle/>
-                    <a:p>
-                      <a:r>
-                        <a:rPr sz="1150" b="1">
-                          <a:solidFill>
-                            <a:srgbClr val="E63946"/>
-                          </a:solidFill>
-                          <a:latin typeface="Microsoft JhengHei"/>
-                          <a:ea typeface="Microsoft JhengHei"/>
-                          <a:cs typeface="Microsoft JhengHei"/>
-                        </a:rPr>
-                        <a:t>駭客攻擊</a:t>
-                      </a:r>
-                    </a:p>
-                  </a:txBody>
-                  <a:tcPr anchor="ctr" marL="73152" marT="9144" marB="9144">
-                    <a:solidFill>
-                      <a:srgbClr val="FFFFFF"/>
-                    </a:solidFill>
-                  </a:tcPr>
-                </a:tc>
-                <a:tc>
-                  <a:txBody>
-                    <a:bodyPr/>
-                    <a:lstStyle/>
-                    <a:p>
-                      <a:r>
-                        <a:rPr sz="1150" b="0">
-                          <a:solidFill>
-                            <a:srgbClr val="1A2233"/>
-                          </a:solidFill>
-                          <a:latin typeface="Microsoft JhengHei"/>
-                          <a:ea typeface="Microsoft JhengHei"/>
-                          <a:cs typeface="Microsoft JhengHei"/>
-                        </a:rPr>
-                        <a:t>目前評估對公司營運尚無重大影響</a:t>
-                      </a:r>
-                    </a:p>
-                  </a:txBody>
-                  <a:tcPr anchor="ctr" marL="73152" marT="9144" marB="9144">
-                    <a:solidFill>
-                      <a:srgbClr val="FFFFFF"/>
-                    </a:solidFill>
-                  </a:tcPr>
-                </a:tc>
-              </a:tr>
             </a:tbl>
           </a:graphicData>
         </a:graphic>
@@ -5917,7 +5917,7 @@
                 <a:ea typeface="Microsoft JhengHei"/>
                 <a:cs typeface="Microsoft JhengHei"/>
               </a:rPr>
-              <a:t>3 起</a:t>
+              <a:t>2 起</a:t>
             </a:r>
           </a:p>
         </p:txBody>
@@ -5954,7 +5954,7 @@
                 <a:ea typeface="Microsoft JhengHei"/>
                 <a:cs typeface="Microsoft JhengHei"/>
               </a:rPr>
-              <a:t>91APP*-KY、神腦、友訊</a:t>
+              <a:t>91APP*-KY、神腦</a:t>
             </a:r>
           </a:p>
         </p:txBody>
@@ -6155,7 +6155,7 @@
                 <a:ea typeface="Microsoft JhengHei"/>
                 <a:cs typeface="Microsoft JhengHei"/>
               </a:rPr>
-              <a:t>4 起</a:t>
+              <a:t>5 起</a:t>
             </a:r>
           </a:p>
         </p:txBody>
@@ -6192,7 +6192,7 @@
                 <a:ea typeface="Microsoft JhengHei"/>
                 <a:cs typeface="Microsoft JhengHei"/>
               </a:rPr>
-              <a:t>杏一、鈊象、安心、柏文</a:t>
+              <a:t>滿心、杏一、鈊象、安心、柏文</a:t>
             </a:r>
           </a:p>
         </p:txBody>
@@ -6770,7 +6770,7 @@
                           <a:ea typeface="Microsoft JhengHei"/>
                           <a:cs typeface="Microsoft JhengHei"/>
                         </a:rPr>
-                        <a:t>91APP*-KY</a:t>
+                        <a:t>滿心</a:t>
                       </a:r>
                     </a:p>
                   </a:txBody>
@@ -6794,13 +6794,135 @@
                           <a:ea typeface="Microsoft JhengHei"/>
                           <a:cs typeface="Microsoft JhengHei"/>
                         </a:rPr>
+                        <a:t>2916</a:t>
+                      </a:r>
+                    </a:p>
+                  </a:txBody>
+                  <a:tcPr anchor="ctr" marL="73152" marT="9144" marB="9144">
+                    <a:solidFill>
+                      <a:srgbClr val="FFFFFF"/>
+                    </a:solidFill>
+                  </a:tcPr>
+                </a:tc>
+                <a:tc>
+                  <a:txBody>
+                    <a:bodyPr/>
+                    <a:lstStyle/>
+                    <a:p>
+                      <a:r>
+                        <a:rPr sz="1150" b="1">
+                          <a:solidFill>
+                            <a:srgbClr val="27A6C4"/>
+                          </a:solidFill>
+                          <a:latin typeface="Microsoft JhengHei"/>
+                          <a:ea typeface="Microsoft JhengHei"/>
+                          <a:cs typeface="Microsoft JhengHei"/>
+                        </a:rPr>
+                        <a:t>個資外洩</a:t>
+                      </a:r>
+                    </a:p>
+                  </a:txBody>
+                  <a:tcPr anchor="ctr" marL="73152" marT="9144" marB="9144">
+                    <a:solidFill>
+                      <a:srgbClr val="FFFFFF"/>
+                    </a:solidFill>
+                  </a:tcPr>
+                </a:tc>
+                <a:tc>
+                  <a:txBody>
+                    <a:bodyPr/>
+                    <a:lstStyle/>
+                    <a:p>
+                      <a:r>
+                        <a:rPr sz="1150" b="0">
+                          <a:solidFill>
+                            <a:srgbClr val="1A2233"/>
+                          </a:solidFill>
+                          <a:latin typeface="Microsoft JhengHei"/>
+                          <a:ea typeface="Microsoft JhengHei"/>
+                          <a:cs typeface="Microsoft JhengHei"/>
+                        </a:rPr>
+                        <a:t>安侯建業聯合會計師事務所</a:t>
+                      </a:r>
+                    </a:p>
+                  </a:txBody>
+                  <a:tcPr anchor="ctr" marL="73152" marT="9144" marB="9144">
+                    <a:solidFill>
+                      <a:srgbClr val="FFFFFF"/>
+                    </a:solidFill>
+                  </a:tcPr>
+                </a:tc>
+                <a:tc>
+                  <a:txBody>
+                    <a:bodyPr/>
+                    <a:lstStyle/>
+                    <a:p>
+                      <a:r>
+                        <a:rPr sz="1150" b="0">
+                          <a:solidFill>
+                            <a:srgbClr val="1A2233"/>
+                          </a:solidFill>
+                          <a:latin typeface="Microsoft JhengHei"/>
+                          <a:ea typeface="Microsoft JhengHei"/>
+                          <a:cs typeface="Microsoft JhengHei"/>
+                        </a:rPr>
+                        <a:t>陳宜君、許淑敏</a:t>
+                      </a:r>
+                    </a:p>
+                  </a:txBody>
+                  <a:tcPr anchor="ctr" marL="73152" marT="9144" marB="9144">
+                    <a:solidFill>
+                      <a:srgbClr val="FFFFFF"/>
+                    </a:solidFill>
+                  </a:tcPr>
+                </a:tc>
+              </a:tr>
+              <a:tr h="373380">
+                <a:tc>
+                  <a:txBody>
+                    <a:bodyPr/>
+                    <a:lstStyle/>
+                    <a:p>
+                      <a:r>
+                        <a:rPr sz="1150" b="0">
+                          <a:solidFill>
+                            <a:srgbClr val="1A2233"/>
+                          </a:solidFill>
+                          <a:latin typeface="Microsoft JhengHei"/>
+                          <a:ea typeface="Microsoft JhengHei"/>
+                          <a:cs typeface="Microsoft JhengHei"/>
+                        </a:rPr>
+                        <a:t>91APP*-KY</a:t>
+                      </a:r>
+                    </a:p>
+                  </a:txBody>
+                  <a:tcPr anchor="ctr" marL="73152" marT="9144" marB="9144">
+                    <a:solidFill>
+                      <a:srgbClr val="EEF2F9"/>
+                    </a:solidFill>
+                  </a:tcPr>
+                </a:tc>
+                <a:tc>
+                  <a:txBody>
+                    <a:bodyPr/>
+                    <a:lstStyle/>
+                    <a:p>
+                      <a:r>
+                        <a:rPr sz="1150" b="0">
+                          <a:solidFill>
+                            <a:srgbClr val="1A2233"/>
+                          </a:solidFill>
+                          <a:latin typeface="Microsoft JhengHei"/>
+                          <a:ea typeface="Microsoft JhengHei"/>
+                          <a:cs typeface="Microsoft JhengHei"/>
+                        </a:rPr>
                         <a:t>6741</a:t>
                       </a:r>
                     </a:p>
                   </a:txBody>
                   <a:tcPr anchor="ctr" marL="73152" marT="9144" marB="9144">
                     <a:solidFill>
-                      <a:srgbClr val="FFFFFF"/>
+                      <a:srgbClr val="EEF2F9"/>
                     </a:solidFill>
                   </a:tcPr>
                 </a:tc>
@@ -6819,6 +6941,372 @@
                           <a:cs typeface="Microsoft JhengHei"/>
                         </a:rPr>
                         <a:t>駭客攻擊</a:t>
+                      </a:r>
+                    </a:p>
+                  </a:txBody>
+                  <a:tcPr anchor="ctr" marL="73152" marT="9144" marB="9144">
+                    <a:solidFill>
+                      <a:srgbClr val="EEF2F9"/>
+                    </a:solidFill>
+                  </a:tcPr>
+                </a:tc>
+                <a:tc>
+                  <a:txBody>
+                    <a:bodyPr/>
+                    <a:lstStyle/>
+                    <a:p>
+                      <a:r>
+                        <a:rPr sz="1150" b="0">
+                          <a:solidFill>
+                            <a:srgbClr val="1A2233"/>
+                          </a:solidFill>
+                          <a:latin typeface="Microsoft JhengHei"/>
+                          <a:ea typeface="Microsoft JhengHei"/>
+                          <a:cs typeface="Microsoft JhengHei"/>
+                        </a:rPr>
+                        <a:t>勤業眾信聯合會計師事務所</a:t>
+                      </a:r>
+                    </a:p>
+                  </a:txBody>
+                  <a:tcPr anchor="ctr" marL="73152" marT="9144" marB="9144">
+                    <a:solidFill>
+                      <a:srgbClr val="EEF2F9"/>
+                    </a:solidFill>
+                  </a:tcPr>
+                </a:tc>
+                <a:tc>
+                  <a:txBody>
+                    <a:bodyPr/>
+                    <a:lstStyle/>
+                    <a:p>
+                      <a:r>
+                        <a:rPr sz="1150" b="0">
+                          <a:solidFill>
+                            <a:srgbClr val="1A2233"/>
+                          </a:solidFill>
+                          <a:latin typeface="Microsoft JhengHei"/>
+                          <a:ea typeface="Microsoft JhengHei"/>
+                          <a:cs typeface="Microsoft JhengHei"/>
+                        </a:rPr>
+                        <a:t>曾建銘、王攀發</a:t>
+                      </a:r>
+                    </a:p>
+                  </a:txBody>
+                  <a:tcPr anchor="ctr" marL="73152" marT="9144" marB="9144">
+                    <a:solidFill>
+                      <a:srgbClr val="EEF2F9"/>
+                    </a:solidFill>
+                  </a:tcPr>
+                </a:tc>
+              </a:tr>
+              <a:tr h="373380">
+                <a:tc>
+                  <a:txBody>
+                    <a:bodyPr/>
+                    <a:lstStyle/>
+                    <a:p>
+                      <a:r>
+                        <a:rPr sz="1150" b="0">
+                          <a:solidFill>
+                            <a:srgbClr val="1A2233"/>
+                          </a:solidFill>
+                          <a:latin typeface="Microsoft JhengHei"/>
+                          <a:ea typeface="Microsoft JhengHei"/>
+                          <a:cs typeface="Microsoft JhengHei"/>
+                        </a:rPr>
+                        <a:t>緯致</a:t>
+                      </a:r>
+                    </a:p>
+                  </a:txBody>
+                  <a:tcPr anchor="ctr" marL="73152" marT="9144" marB="9144">
+                    <a:solidFill>
+                      <a:srgbClr val="FFFFFF"/>
+                    </a:solidFill>
+                  </a:tcPr>
+                </a:tc>
+                <a:tc>
+                  <a:txBody>
+                    <a:bodyPr/>
+                    <a:lstStyle/>
+                    <a:p>
+                      <a:r>
+                        <a:rPr sz="1150" b="0">
+                          <a:solidFill>
+                            <a:srgbClr val="1A2233"/>
+                          </a:solidFill>
+                          <a:latin typeface="Microsoft JhengHei"/>
+                          <a:ea typeface="Microsoft JhengHei"/>
+                          <a:cs typeface="Microsoft JhengHei"/>
+                        </a:rPr>
+                        <a:t>4953</a:t>
+                      </a:r>
+                    </a:p>
+                  </a:txBody>
+                  <a:tcPr anchor="ctr" marL="73152" marT="9144" marB="9144">
+                    <a:solidFill>
+                      <a:srgbClr val="FFFFFF"/>
+                    </a:solidFill>
+                  </a:tcPr>
+                </a:tc>
+                <a:tc>
+                  <a:txBody>
+                    <a:bodyPr/>
+                    <a:lstStyle/>
+                    <a:p>
+                      <a:r>
+                        <a:rPr sz="1150" b="1">
+                          <a:solidFill>
+                            <a:srgbClr val="5C6679"/>
+                          </a:solidFill>
+                          <a:latin typeface="Microsoft JhengHei"/>
+                          <a:ea typeface="Microsoft JhengHei"/>
+                          <a:cs typeface="Microsoft JhengHei"/>
+                        </a:rPr>
+                        <a:t>其他</a:t>
+                      </a:r>
+                    </a:p>
+                  </a:txBody>
+                  <a:tcPr anchor="ctr" marL="73152" marT="9144" marB="9144">
+                    <a:solidFill>
+                      <a:srgbClr val="FFFFFF"/>
+                    </a:solidFill>
+                  </a:tcPr>
+                </a:tc>
+                <a:tc>
+                  <a:txBody>
+                    <a:bodyPr/>
+                    <a:lstStyle/>
+                    <a:p>
+                      <a:r>
+                        <a:rPr sz="1150" b="0">
+                          <a:solidFill>
+                            <a:srgbClr val="1A2233"/>
+                          </a:solidFill>
+                          <a:latin typeface="Microsoft JhengHei"/>
+                          <a:ea typeface="Microsoft JhengHei"/>
+                          <a:cs typeface="Microsoft JhengHei"/>
+                        </a:rPr>
+                        <a:t>安侯建業聯合會計師事務所</a:t>
+                      </a:r>
+                    </a:p>
+                  </a:txBody>
+                  <a:tcPr anchor="ctr" marL="73152" marT="9144" marB="9144">
+                    <a:solidFill>
+                      <a:srgbClr val="FFFFFF"/>
+                    </a:solidFill>
+                  </a:tcPr>
+                </a:tc>
+                <a:tc>
+                  <a:txBody>
+                    <a:bodyPr/>
+                    <a:lstStyle/>
+                    <a:p>
+                      <a:r>
+                        <a:rPr sz="1150" b="0">
+                          <a:solidFill>
+                            <a:srgbClr val="1A2233"/>
+                          </a:solidFill>
+                          <a:latin typeface="Microsoft JhengHei"/>
+                          <a:ea typeface="Microsoft JhengHei"/>
+                          <a:cs typeface="Microsoft JhengHei"/>
+                        </a:rPr>
+                        <a:t>唐嘉鍵、楊雲筑</a:t>
+                      </a:r>
+                    </a:p>
+                  </a:txBody>
+                  <a:tcPr anchor="ctr" marL="73152" marT="9144" marB="9144">
+                    <a:solidFill>
+                      <a:srgbClr val="FFFFFF"/>
+                    </a:solidFill>
+                  </a:tcPr>
+                </a:tc>
+              </a:tr>
+              <a:tr h="373380">
+                <a:tc>
+                  <a:txBody>
+                    <a:bodyPr/>
+                    <a:lstStyle/>
+                    <a:p>
+                      <a:r>
+                        <a:rPr sz="1150" b="0">
+                          <a:solidFill>
+                            <a:srgbClr val="1A2233"/>
+                          </a:solidFill>
+                          <a:latin typeface="Microsoft JhengHei"/>
+                          <a:ea typeface="Microsoft JhengHei"/>
+                          <a:cs typeface="Microsoft JhengHei"/>
+                        </a:rPr>
+                        <a:t>上福</a:t>
+                      </a:r>
+                    </a:p>
+                  </a:txBody>
+                  <a:tcPr anchor="ctr" marL="73152" marT="9144" marB="9144">
+                    <a:solidFill>
+                      <a:srgbClr val="EEF2F9"/>
+                    </a:solidFill>
+                  </a:tcPr>
+                </a:tc>
+                <a:tc>
+                  <a:txBody>
+                    <a:bodyPr/>
+                    <a:lstStyle/>
+                    <a:p>
+                      <a:r>
+                        <a:rPr sz="1150" b="0">
+                          <a:solidFill>
+                            <a:srgbClr val="1A2233"/>
+                          </a:solidFill>
+                          <a:latin typeface="Microsoft JhengHei"/>
+                          <a:ea typeface="Microsoft JhengHei"/>
+                          <a:cs typeface="Microsoft JhengHei"/>
+                        </a:rPr>
+                        <a:t>6128</a:t>
+                      </a:r>
+                    </a:p>
+                  </a:txBody>
+                  <a:tcPr anchor="ctr" marL="73152" marT="9144" marB="9144">
+                    <a:solidFill>
+                      <a:srgbClr val="EEF2F9"/>
+                    </a:solidFill>
+                  </a:tcPr>
+                </a:tc>
+                <a:tc>
+                  <a:txBody>
+                    <a:bodyPr/>
+                    <a:lstStyle/>
+                    <a:p>
+                      <a:r>
+                        <a:rPr sz="1150" b="1">
+                          <a:solidFill>
+                            <a:srgbClr val="5C6679"/>
+                          </a:solidFill>
+                          <a:latin typeface="Microsoft JhengHei"/>
+                          <a:ea typeface="Microsoft JhengHei"/>
+                          <a:cs typeface="Microsoft JhengHei"/>
+                        </a:rPr>
+                        <a:t>其他</a:t>
+                      </a:r>
+                    </a:p>
+                  </a:txBody>
+                  <a:tcPr anchor="ctr" marL="73152" marT="9144" marB="9144">
+                    <a:solidFill>
+                      <a:srgbClr val="EEF2F9"/>
+                    </a:solidFill>
+                  </a:tcPr>
+                </a:tc>
+                <a:tc>
+                  <a:txBody>
+                    <a:bodyPr/>
+                    <a:lstStyle/>
+                    <a:p>
+                      <a:r>
+                        <a:rPr sz="1150" b="0">
+                          <a:solidFill>
+                            <a:srgbClr val="1A2233"/>
+                          </a:solidFill>
+                          <a:latin typeface="Microsoft JhengHei"/>
+                          <a:ea typeface="Microsoft JhengHei"/>
+                          <a:cs typeface="Microsoft JhengHei"/>
+                        </a:rPr>
+                        <a:t>安永聯合會計師事務所</a:t>
+                      </a:r>
+                    </a:p>
+                  </a:txBody>
+                  <a:tcPr anchor="ctr" marL="73152" marT="9144" marB="9144">
+                    <a:solidFill>
+                      <a:srgbClr val="EEF2F9"/>
+                    </a:solidFill>
+                  </a:tcPr>
+                </a:tc>
+                <a:tc>
+                  <a:txBody>
+                    <a:bodyPr/>
+                    <a:lstStyle/>
+                    <a:p>
+                      <a:r>
+                        <a:rPr sz="1150" b="0">
+                          <a:solidFill>
+                            <a:srgbClr val="1A2233"/>
+                          </a:solidFill>
+                          <a:latin typeface="Microsoft JhengHei"/>
+                          <a:ea typeface="Microsoft JhengHei"/>
+                          <a:cs typeface="Microsoft JhengHei"/>
+                        </a:rPr>
+                        <a:t>黃宇廷、賴書晨</a:t>
+                      </a:r>
+                    </a:p>
+                  </a:txBody>
+                  <a:tcPr anchor="ctr" marL="73152" marT="9144" marB="9144">
+                    <a:solidFill>
+                      <a:srgbClr val="EEF2F9"/>
+                    </a:solidFill>
+                  </a:tcPr>
+                </a:tc>
+              </a:tr>
+              <a:tr h="373380">
+                <a:tc>
+                  <a:txBody>
+                    <a:bodyPr/>
+                    <a:lstStyle/>
+                    <a:p>
+                      <a:r>
+                        <a:rPr sz="1150" b="0">
+                          <a:solidFill>
+                            <a:srgbClr val="1A2233"/>
+                          </a:solidFill>
+                          <a:latin typeface="Microsoft JhengHei"/>
+                          <a:ea typeface="Microsoft JhengHei"/>
+                          <a:cs typeface="Microsoft JhengHei"/>
+                        </a:rPr>
+                        <a:t>杏一</a:t>
+                      </a:r>
+                    </a:p>
+                  </a:txBody>
+                  <a:tcPr anchor="ctr" marL="73152" marT="9144" marB="9144">
+                    <a:solidFill>
+                      <a:srgbClr val="FFFFFF"/>
+                    </a:solidFill>
+                  </a:tcPr>
+                </a:tc>
+                <a:tc>
+                  <a:txBody>
+                    <a:bodyPr/>
+                    <a:lstStyle/>
+                    <a:p>
+                      <a:r>
+                        <a:rPr sz="1150" b="0">
+                          <a:solidFill>
+                            <a:srgbClr val="1A2233"/>
+                          </a:solidFill>
+                          <a:latin typeface="Microsoft JhengHei"/>
+                          <a:ea typeface="Microsoft JhengHei"/>
+                          <a:cs typeface="Microsoft JhengHei"/>
+                        </a:rPr>
+                        <a:t>4175</a:t>
+                      </a:r>
+                    </a:p>
+                  </a:txBody>
+                  <a:tcPr anchor="ctr" marL="73152" marT="9144" marB="9144">
+                    <a:solidFill>
+                      <a:srgbClr val="FFFFFF"/>
+                    </a:solidFill>
+                  </a:tcPr>
+                </a:tc>
+                <a:tc>
+                  <a:txBody>
+                    <a:bodyPr/>
+                    <a:lstStyle/>
+                    <a:p>
+                      <a:r>
+                        <a:rPr sz="1150" b="1">
+                          <a:solidFill>
+                            <a:srgbClr val="27A6C4"/>
+                          </a:solidFill>
+                          <a:latin typeface="Microsoft JhengHei"/>
+                          <a:ea typeface="Microsoft JhengHei"/>
+                          <a:cs typeface="Microsoft JhengHei"/>
+                        </a:rPr>
+                        <a:t>個資外洩</a:t>
                       </a:r>
                     </a:p>
                   </a:txBody>
@@ -6866,7 +7354,7 @@
                           <a:ea typeface="Microsoft JhengHei"/>
                           <a:cs typeface="Microsoft JhengHei"/>
                         </a:rPr>
-                        <a:t>曾建銘、王攀發</a:t>
+                        <a:t>池瑞全、蔡宗遠</a:t>
                       </a:r>
                     </a:p>
                   </a:txBody>
@@ -6892,7 +7380,7 @@
                           <a:ea typeface="Microsoft JhengHei"/>
                           <a:cs typeface="Microsoft JhengHei"/>
                         </a:rPr>
-                        <a:t>緯致</a:t>
+                        <a:t>鈊象</a:t>
                       </a:r>
                     </a:p>
                   </a:txBody>
@@ -6916,251 +7404,7 @@
                           <a:ea typeface="Microsoft JhengHei"/>
                           <a:cs typeface="Microsoft JhengHei"/>
                         </a:rPr>
-                        <a:t>4953</a:t>
-                      </a:r>
-                    </a:p>
-                  </a:txBody>
-                  <a:tcPr anchor="ctr" marL="73152" marT="9144" marB="9144">
-                    <a:solidFill>
-                      <a:srgbClr val="EEF2F9"/>
-                    </a:solidFill>
-                  </a:tcPr>
-                </a:tc>
-                <a:tc>
-                  <a:txBody>
-                    <a:bodyPr/>
-                    <a:lstStyle/>
-                    <a:p>
-                      <a:r>
-                        <a:rPr sz="1150" b="1">
-                          <a:solidFill>
-                            <a:srgbClr val="5C6679"/>
-                          </a:solidFill>
-                          <a:latin typeface="Microsoft JhengHei"/>
-                          <a:ea typeface="Microsoft JhengHei"/>
-                          <a:cs typeface="Microsoft JhengHei"/>
-                        </a:rPr>
-                        <a:t>其他</a:t>
-                      </a:r>
-                    </a:p>
-                  </a:txBody>
-                  <a:tcPr anchor="ctr" marL="73152" marT="9144" marB="9144">
-                    <a:solidFill>
-                      <a:srgbClr val="EEF2F9"/>
-                    </a:solidFill>
-                  </a:tcPr>
-                </a:tc>
-                <a:tc>
-                  <a:txBody>
-                    <a:bodyPr/>
-                    <a:lstStyle/>
-                    <a:p>
-                      <a:r>
-                        <a:rPr sz="1150" b="0">
-                          <a:solidFill>
-                            <a:srgbClr val="1A2233"/>
-                          </a:solidFill>
-                          <a:latin typeface="Microsoft JhengHei"/>
-                          <a:ea typeface="Microsoft JhengHei"/>
-                          <a:cs typeface="Microsoft JhengHei"/>
-                        </a:rPr>
-                        <a:t>安侯建業聯合會計師事務所</a:t>
-                      </a:r>
-                    </a:p>
-                  </a:txBody>
-                  <a:tcPr anchor="ctr" marL="73152" marT="9144" marB="9144">
-                    <a:solidFill>
-                      <a:srgbClr val="EEF2F9"/>
-                    </a:solidFill>
-                  </a:tcPr>
-                </a:tc>
-                <a:tc>
-                  <a:txBody>
-                    <a:bodyPr/>
-                    <a:lstStyle/>
-                    <a:p>
-                      <a:r>
-                        <a:rPr sz="1150" b="0">
-                          <a:solidFill>
-                            <a:srgbClr val="1A2233"/>
-                          </a:solidFill>
-                          <a:latin typeface="Microsoft JhengHei"/>
-                          <a:ea typeface="Microsoft JhengHei"/>
-                          <a:cs typeface="Microsoft JhengHei"/>
-                        </a:rPr>
-                        <a:t>唐嘉鍵、楊雲筑</a:t>
-                      </a:r>
-                    </a:p>
-                  </a:txBody>
-                  <a:tcPr anchor="ctr" marL="73152" marT="9144" marB="9144">
-                    <a:solidFill>
-                      <a:srgbClr val="EEF2F9"/>
-                    </a:solidFill>
-                  </a:tcPr>
-                </a:tc>
-              </a:tr>
-              <a:tr h="373380">
-                <a:tc>
-                  <a:txBody>
-                    <a:bodyPr/>
-                    <a:lstStyle/>
-                    <a:p>
-                      <a:r>
-                        <a:rPr sz="1150" b="0">
-                          <a:solidFill>
-                            <a:srgbClr val="1A2233"/>
-                          </a:solidFill>
-                          <a:latin typeface="Microsoft JhengHei"/>
-                          <a:ea typeface="Microsoft JhengHei"/>
-                          <a:cs typeface="Microsoft JhengHei"/>
-                        </a:rPr>
-                        <a:t>上福</a:t>
-                      </a:r>
-                    </a:p>
-                  </a:txBody>
-                  <a:tcPr anchor="ctr" marL="73152" marT="9144" marB="9144">
-                    <a:solidFill>
-                      <a:srgbClr val="FFFFFF"/>
-                    </a:solidFill>
-                  </a:tcPr>
-                </a:tc>
-                <a:tc>
-                  <a:txBody>
-                    <a:bodyPr/>
-                    <a:lstStyle/>
-                    <a:p>
-                      <a:r>
-                        <a:rPr sz="1150" b="0">
-                          <a:solidFill>
-                            <a:srgbClr val="1A2233"/>
-                          </a:solidFill>
-                          <a:latin typeface="Microsoft JhengHei"/>
-                          <a:ea typeface="Microsoft JhengHei"/>
-                          <a:cs typeface="Microsoft JhengHei"/>
-                        </a:rPr>
-                        <a:t>6128</a:t>
-                      </a:r>
-                    </a:p>
-                  </a:txBody>
-                  <a:tcPr anchor="ctr" marL="73152" marT="9144" marB="9144">
-                    <a:solidFill>
-                      <a:srgbClr val="FFFFFF"/>
-                    </a:solidFill>
-                  </a:tcPr>
-                </a:tc>
-                <a:tc>
-                  <a:txBody>
-                    <a:bodyPr/>
-                    <a:lstStyle/>
-                    <a:p>
-                      <a:r>
-                        <a:rPr sz="1150" b="1">
-                          <a:solidFill>
-                            <a:srgbClr val="5C6679"/>
-                          </a:solidFill>
-                          <a:latin typeface="Microsoft JhengHei"/>
-                          <a:ea typeface="Microsoft JhengHei"/>
-                          <a:cs typeface="Microsoft JhengHei"/>
-                        </a:rPr>
-                        <a:t>其他</a:t>
-                      </a:r>
-                    </a:p>
-                  </a:txBody>
-                  <a:tcPr anchor="ctr" marL="73152" marT="9144" marB="9144">
-                    <a:solidFill>
-                      <a:srgbClr val="FFFFFF"/>
-                    </a:solidFill>
-                  </a:tcPr>
-                </a:tc>
-                <a:tc>
-                  <a:txBody>
-                    <a:bodyPr/>
-                    <a:lstStyle/>
-                    <a:p>
-                      <a:r>
-                        <a:rPr sz="1150" b="0">
-                          <a:solidFill>
-                            <a:srgbClr val="1A2233"/>
-                          </a:solidFill>
-                          <a:latin typeface="Microsoft JhengHei"/>
-                          <a:ea typeface="Microsoft JhengHei"/>
-                          <a:cs typeface="Microsoft JhengHei"/>
-                        </a:rPr>
-                        <a:t>安永聯合會計師事務所</a:t>
-                      </a:r>
-                    </a:p>
-                  </a:txBody>
-                  <a:tcPr anchor="ctr" marL="73152" marT="9144" marB="9144">
-                    <a:solidFill>
-                      <a:srgbClr val="FFFFFF"/>
-                    </a:solidFill>
-                  </a:tcPr>
-                </a:tc>
-                <a:tc>
-                  <a:txBody>
-                    <a:bodyPr/>
-                    <a:lstStyle/>
-                    <a:p>
-                      <a:r>
-                        <a:rPr sz="1150" b="0">
-                          <a:solidFill>
-                            <a:srgbClr val="1A2233"/>
-                          </a:solidFill>
-                          <a:latin typeface="Microsoft JhengHei"/>
-                          <a:ea typeface="Microsoft JhengHei"/>
-                          <a:cs typeface="Microsoft JhengHei"/>
-                        </a:rPr>
-                        <a:t>黃宇廷、賴書晨</a:t>
-                      </a:r>
-                    </a:p>
-                  </a:txBody>
-                  <a:tcPr anchor="ctr" marL="73152" marT="9144" marB="9144">
-                    <a:solidFill>
-                      <a:srgbClr val="FFFFFF"/>
-                    </a:solidFill>
-                  </a:tcPr>
-                </a:tc>
-              </a:tr>
-              <a:tr h="373380">
-                <a:tc>
-                  <a:txBody>
-                    <a:bodyPr/>
-                    <a:lstStyle/>
-                    <a:p>
-                      <a:r>
-                        <a:rPr sz="1150" b="0">
-                          <a:solidFill>
-                            <a:srgbClr val="1A2233"/>
-                          </a:solidFill>
-                          <a:latin typeface="Microsoft JhengHei"/>
-                          <a:ea typeface="Microsoft JhengHei"/>
-                          <a:cs typeface="Microsoft JhengHei"/>
-                        </a:rPr>
-                        <a:t>杏一</a:t>
-                      </a:r>
-                    </a:p>
-                  </a:txBody>
-                  <a:tcPr anchor="ctr" marL="73152" marT="9144" marB="9144">
-                    <a:solidFill>
-                      <a:srgbClr val="EEF2F9"/>
-                    </a:solidFill>
-                  </a:tcPr>
-                </a:tc>
-                <a:tc>
-                  <a:txBody>
-                    <a:bodyPr/>
-                    <a:lstStyle/>
-                    <a:p>
-                      <a:r>
-                        <a:rPr sz="1150" b="0">
-                          <a:solidFill>
-                            <a:srgbClr val="1A2233"/>
-                          </a:solidFill>
-                          <a:latin typeface="Microsoft JhengHei"/>
-                          <a:ea typeface="Microsoft JhengHei"/>
-                          <a:cs typeface="Microsoft JhengHei"/>
-                        </a:rPr>
-                        <a:t>4175</a:t>
+                        <a:t>3293</a:t>
                       </a:r>
                     </a:p>
                   </a:txBody>
@@ -7232,7 +7476,7 @@
                           <a:ea typeface="Microsoft JhengHei"/>
                           <a:cs typeface="Microsoft JhengHei"/>
                         </a:rPr>
-                        <a:t>池瑞全、蔡宗遠</a:t>
+                        <a:t>周仕杰、李東峰</a:t>
                       </a:r>
                     </a:p>
                   </a:txBody>
@@ -7258,7 +7502,7 @@
                           <a:ea typeface="Microsoft JhengHei"/>
                           <a:cs typeface="Microsoft JhengHei"/>
                         </a:rPr>
-                        <a:t>鈊象</a:t>
+                        <a:t>一零四</a:t>
                       </a:r>
                     </a:p>
                   </a:txBody>
@@ -7282,7 +7526,495 @@
                           <a:ea typeface="Microsoft JhengHei"/>
                           <a:cs typeface="Microsoft JhengHei"/>
                         </a:rPr>
+                        <a:t>3130</a:t>
+                      </a:r>
+                    </a:p>
+                  </a:txBody>
+                  <a:tcPr anchor="ctr" marL="73152" marT="9144" marB="9144">
+                    <a:solidFill>
+                      <a:srgbClr val="FFFFFF"/>
+                    </a:solidFill>
+                  </a:tcPr>
+                </a:tc>
+                <a:tc>
+                  <a:txBody>
+                    <a:bodyPr/>
+                    <a:lstStyle/>
+                    <a:p>
+                      <a:r>
+                        <a:rPr sz="1150" b="1">
+                          <a:solidFill>
+                            <a:srgbClr val="5C6679"/>
+                          </a:solidFill>
+                          <a:latin typeface="Microsoft JhengHei"/>
+                          <a:ea typeface="Microsoft JhengHei"/>
+                          <a:cs typeface="Microsoft JhengHei"/>
+                        </a:rPr>
+                        <a:t>其他</a:t>
+                      </a:r>
+                    </a:p>
+                  </a:txBody>
+                  <a:tcPr anchor="ctr" marL="73152" marT="9144" marB="9144">
+                    <a:solidFill>
+                      <a:srgbClr val="FFFFFF"/>
+                    </a:solidFill>
+                  </a:tcPr>
+                </a:tc>
+                <a:tc>
+                  <a:txBody>
+                    <a:bodyPr/>
+                    <a:lstStyle/>
+                    <a:p>
+                      <a:r>
+                        <a:rPr sz="1150" b="0">
+                          <a:solidFill>
+                            <a:srgbClr val="1A2233"/>
+                          </a:solidFill>
+                          <a:latin typeface="Microsoft JhengHei"/>
+                          <a:ea typeface="Microsoft JhengHei"/>
+                          <a:cs typeface="Microsoft JhengHei"/>
+                        </a:rPr>
+                        <a:t>安侯建業聯合會計師事務所</a:t>
+                      </a:r>
+                    </a:p>
+                  </a:txBody>
+                  <a:tcPr anchor="ctr" marL="73152" marT="9144" marB="9144">
+                    <a:solidFill>
+                      <a:srgbClr val="FFFFFF"/>
+                    </a:solidFill>
+                  </a:tcPr>
+                </a:tc>
+                <a:tc>
+                  <a:txBody>
+                    <a:bodyPr/>
+                    <a:lstStyle/>
+                    <a:p>
+                      <a:r>
+                        <a:rPr sz="1150" b="0">
+                          <a:solidFill>
+                            <a:srgbClr val="1A2233"/>
+                          </a:solidFill>
+                          <a:latin typeface="Microsoft JhengHei"/>
+                          <a:ea typeface="Microsoft JhengHei"/>
+                          <a:cs typeface="Microsoft JhengHei"/>
+                        </a:rPr>
+                        <a:t>趙敏如、江家齊</a:t>
+                      </a:r>
+                    </a:p>
+                  </a:txBody>
+                  <a:tcPr anchor="ctr" marL="73152" marT="9144" marB="9144">
+                    <a:solidFill>
+                      <a:srgbClr val="FFFFFF"/>
+                    </a:solidFill>
+                  </a:tcPr>
+                </a:tc>
+              </a:tr>
+              <a:tr h="373380">
+                <a:tc>
+                  <a:txBody>
+                    <a:bodyPr/>
+                    <a:lstStyle/>
+                    <a:p>
+                      <a:r>
+                        <a:rPr sz="1150" b="0">
+                          <a:solidFill>
+                            <a:srgbClr val="1A2233"/>
+                          </a:solidFill>
+                          <a:latin typeface="Microsoft JhengHei"/>
+                          <a:ea typeface="Microsoft JhengHei"/>
+                          <a:cs typeface="Microsoft JhengHei"/>
+                        </a:rPr>
+                        <a:t>安心</a:t>
+                      </a:r>
+                    </a:p>
+                  </a:txBody>
+                  <a:tcPr anchor="ctr" marL="73152" marT="9144" marB="9144">
+                    <a:solidFill>
+                      <a:srgbClr val="EEF2F9"/>
+                    </a:solidFill>
+                  </a:tcPr>
+                </a:tc>
+                <a:tc>
+                  <a:txBody>
+                    <a:bodyPr/>
+                    <a:lstStyle/>
+                    <a:p>
+                      <a:r>
+                        <a:rPr sz="1150" b="0">
+                          <a:solidFill>
+                            <a:srgbClr val="1A2233"/>
+                          </a:solidFill>
+                          <a:latin typeface="Microsoft JhengHei"/>
+                          <a:ea typeface="Microsoft JhengHei"/>
+                          <a:cs typeface="Microsoft JhengHei"/>
+                        </a:rPr>
+                        <a:t>1259</a:t>
+                      </a:r>
+                    </a:p>
+                  </a:txBody>
+                  <a:tcPr anchor="ctr" marL="73152" marT="9144" marB="9144">
+                    <a:solidFill>
+                      <a:srgbClr val="EEF2F9"/>
+                    </a:solidFill>
+                  </a:tcPr>
+                </a:tc>
+                <a:tc>
+                  <a:txBody>
+                    <a:bodyPr/>
+                    <a:lstStyle/>
+                    <a:p>
+                      <a:r>
+                        <a:rPr sz="1150" b="1">
+                          <a:solidFill>
+                            <a:srgbClr val="27A6C4"/>
+                          </a:solidFill>
+                          <a:latin typeface="Microsoft JhengHei"/>
+                          <a:ea typeface="Microsoft JhengHei"/>
+                          <a:cs typeface="Microsoft JhengHei"/>
+                        </a:rPr>
+                        <a:t>個資外洩</a:t>
+                      </a:r>
+                    </a:p>
+                  </a:txBody>
+                  <a:tcPr anchor="ctr" marL="73152" marT="9144" marB="9144">
+                    <a:solidFill>
+                      <a:srgbClr val="EEF2F9"/>
+                    </a:solidFill>
+                  </a:tcPr>
+                </a:tc>
+                <a:tc>
+                  <a:txBody>
+                    <a:bodyPr/>
+                    <a:lstStyle/>
+                    <a:p>
+                      <a:r>
+                        <a:rPr sz="1150" b="0">
+                          <a:solidFill>
+                            <a:srgbClr val="1A2233"/>
+                          </a:solidFill>
+                          <a:latin typeface="Microsoft JhengHei"/>
+                          <a:ea typeface="Microsoft JhengHei"/>
+                          <a:cs typeface="Microsoft JhengHei"/>
+                        </a:rPr>
+                        <a:t>資誠聯合會計師事務所</a:t>
+                      </a:r>
+                    </a:p>
+                  </a:txBody>
+                  <a:tcPr anchor="ctr" marL="73152" marT="9144" marB="9144">
+                    <a:solidFill>
+                      <a:srgbClr val="EEF2F9"/>
+                    </a:solidFill>
+                  </a:tcPr>
+                </a:tc>
+                <a:tc>
+                  <a:txBody>
+                    <a:bodyPr/>
+                    <a:lstStyle/>
+                    <a:p>
+                      <a:r>
+                        <a:rPr sz="1150" b="0">
+                          <a:solidFill>
+                            <a:srgbClr val="1A2233"/>
+                          </a:solidFill>
+                          <a:latin typeface="Microsoft JhengHei"/>
+                          <a:ea typeface="Microsoft JhengHei"/>
+                          <a:cs typeface="Microsoft JhengHei"/>
+                        </a:rPr>
+                        <a:t>徐明釧、陳怡婷</a:t>
+                      </a:r>
+                    </a:p>
+                  </a:txBody>
+                  <a:tcPr anchor="ctr" marL="73152" marT="9144" marB="9144">
+                    <a:solidFill>
+                      <a:srgbClr val="EEF2F9"/>
+                    </a:solidFill>
+                  </a:tcPr>
+                </a:tc>
+              </a:tr>
+              <a:tr h="373380">
+                <a:tc>
+                  <a:txBody>
+                    <a:bodyPr/>
+                    <a:lstStyle/>
+                    <a:p>
+                      <a:r>
+                        <a:rPr sz="1150" b="0">
+                          <a:solidFill>
+                            <a:srgbClr val="1A2233"/>
+                          </a:solidFill>
+                          <a:latin typeface="Microsoft JhengHei"/>
+                          <a:ea typeface="Microsoft JhengHei"/>
+                          <a:cs typeface="Microsoft JhengHei"/>
+                        </a:rPr>
+                        <a:t>神腦</a:t>
+                      </a:r>
+                    </a:p>
+                  </a:txBody>
+                  <a:tcPr anchor="ctr" marL="73152" marT="9144" marB="9144">
+                    <a:solidFill>
+                      <a:srgbClr val="FFFFFF"/>
+                    </a:solidFill>
+                  </a:tcPr>
+                </a:tc>
+                <a:tc>
+                  <a:txBody>
+                    <a:bodyPr/>
+                    <a:lstStyle/>
+                    <a:p>
+                      <a:r>
+                        <a:rPr sz="1150" b="0">
+                          <a:solidFill>
+                            <a:srgbClr val="1A2233"/>
+                          </a:solidFill>
+                          <a:latin typeface="Microsoft JhengHei"/>
+                          <a:ea typeface="Microsoft JhengHei"/>
+                          <a:cs typeface="Microsoft JhengHei"/>
+                        </a:rPr>
+                        <a:t>2450</a:t>
+                      </a:r>
+                    </a:p>
+                  </a:txBody>
+                  <a:tcPr anchor="ctr" marL="73152" marT="9144" marB="9144">
+                    <a:solidFill>
+                      <a:srgbClr val="FFFFFF"/>
+                    </a:solidFill>
+                  </a:tcPr>
+                </a:tc>
+                <a:tc>
+                  <a:txBody>
+                    <a:bodyPr/>
+                    <a:lstStyle/>
+                    <a:p>
+                      <a:r>
+                        <a:rPr sz="1150" b="1">
+                          <a:solidFill>
+                            <a:srgbClr val="E63946"/>
+                          </a:solidFill>
+                          <a:latin typeface="Microsoft JhengHei"/>
+                          <a:ea typeface="Microsoft JhengHei"/>
+                          <a:cs typeface="Microsoft JhengHei"/>
+                        </a:rPr>
+                        <a:t>駭客攻擊</a:t>
+                      </a:r>
+                    </a:p>
+                  </a:txBody>
+                  <a:tcPr anchor="ctr" marL="73152" marT="9144" marB="9144">
+                    <a:solidFill>
+                      <a:srgbClr val="FFFFFF"/>
+                    </a:solidFill>
+                  </a:tcPr>
+                </a:tc>
+                <a:tc>
+                  <a:txBody>
+                    <a:bodyPr/>
+                    <a:lstStyle/>
+                    <a:p>
+                      <a:r>
+                        <a:rPr sz="1150" b="0">
+                          <a:solidFill>
+                            <a:srgbClr val="1A2233"/>
+                          </a:solidFill>
+                          <a:latin typeface="Microsoft JhengHei"/>
+                          <a:ea typeface="Microsoft JhengHei"/>
+                          <a:cs typeface="Microsoft JhengHei"/>
+                        </a:rPr>
+                        <a:t>資誠聯合會計師事務所</a:t>
+                      </a:r>
+                    </a:p>
+                  </a:txBody>
+                  <a:tcPr anchor="ctr" marL="73152" marT="9144" marB="9144">
+                    <a:solidFill>
+                      <a:srgbClr val="FFFFFF"/>
+                    </a:solidFill>
+                  </a:tcPr>
+                </a:tc>
+                <a:tc>
+                  <a:txBody>
+                    <a:bodyPr/>
+                    <a:lstStyle/>
+                    <a:p>
+                      <a:r>
+                        <a:rPr sz="1150" b="0">
+                          <a:solidFill>
+                            <a:srgbClr val="1A2233"/>
+                          </a:solidFill>
+                          <a:latin typeface="Microsoft JhengHei"/>
+                          <a:ea typeface="Microsoft JhengHei"/>
+                          <a:cs typeface="Microsoft JhengHei"/>
+                        </a:rPr>
+                        <a:t>王銘義、林永智</a:t>
+                      </a:r>
+                    </a:p>
+                  </a:txBody>
+                  <a:tcPr anchor="ctr" marL="73152" marT="9144" marB="9144">
+                    <a:solidFill>
+                      <a:srgbClr val="FFFFFF"/>
+                    </a:solidFill>
+                  </a:tcPr>
+                </a:tc>
+              </a:tr>
+              <a:tr h="373380">
+                <a:tc>
+                  <a:txBody>
+                    <a:bodyPr/>
+                    <a:lstStyle/>
+                    <a:p>
+                      <a:r>
+                        <a:rPr sz="1150" b="0">
+                          <a:solidFill>
+                            <a:srgbClr val="1A2233"/>
+                          </a:solidFill>
+                          <a:latin typeface="Microsoft JhengHei"/>
+                          <a:ea typeface="Microsoft JhengHei"/>
+                          <a:cs typeface="Microsoft JhengHei"/>
+                        </a:rPr>
+                        <a:t>鈊象</a:t>
+                      </a:r>
+                    </a:p>
+                  </a:txBody>
+                  <a:tcPr anchor="ctr" marL="73152" marT="9144" marB="9144">
+                    <a:solidFill>
+                      <a:srgbClr val="EEF2F9"/>
+                    </a:solidFill>
+                  </a:tcPr>
+                </a:tc>
+                <a:tc>
+                  <a:txBody>
+                    <a:bodyPr/>
+                    <a:lstStyle/>
+                    <a:p>
+                      <a:r>
+                        <a:rPr sz="1150" b="0">
+                          <a:solidFill>
+                            <a:srgbClr val="1A2233"/>
+                          </a:solidFill>
+                          <a:latin typeface="Microsoft JhengHei"/>
+                          <a:ea typeface="Microsoft JhengHei"/>
+                          <a:cs typeface="Microsoft JhengHei"/>
+                        </a:rPr>
                         <a:t>3293</a:t>
+                      </a:r>
+                    </a:p>
+                  </a:txBody>
+                  <a:tcPr anchor="ctr" marL="73152" marT="9144" marB="9144">
+                    <a:solidFill>
+                      <a:srgbClr val="EEF2F9"/>
+                    </a:solidFill>
+                  </a:tcPr>
+                </a:tc>
+                <a:tc>
+                  <a:txBody>
+                    <a:bodyPr/>
+                    <a:lstStyle/>
+                    <a:p>
+                      <a:r>
+                        <a:rPr sz="1150" b="1">
+                          <a:solidFill>
+                            <a:srgbClr val="5C6679"/>
+                          </a:solidFill>
+                          <a:latin typeface="Microsoft JhengHei"/>
+                          <a:ea typeface="Microsoft JhengHei"/>
+                          <a:cs typeface="Microsoft JhengHei"/>
+                        </a:rPr>
+                        <a:t>其他</a:t>
+                      </a:r>
+                    </a:p>
+                  </a:txBody>
+                  <a:tcPr anchor="ctr" marL="73152" marT="9144" marB="9144">
+                    <a:solidFill>
+                      <a:srgbClr val="EEF2F9"/>
+                    </a:solidFill>
+                  </a:tcPr>
+                </a:tc>
+                <a:tc>
+                  <a:txBody>
+                    <a:bodyPr/>
+                    <a:lstStyle/>
+                    <a:p>
+                      <a:r>
+                        <a:rPr sz="1150" b="0">
+                          <a:solidFill>
+                            <a:srgbClr val="1A2233"/>
+                          </a:solidFill>
+                          <a:latin typeface="Microsoft JhengHei"/>
+                          <a:ea typeface="Microsoft JhengHei"/>
+                          <a:cs typeface="Microsoft JhengHei"/>
+                        </a:rPr>
+                        <a:t>勤業眾信聯合會計師事務所</a:t>
+                      </a:r>
+                    </a:p>
+                  </a:txBody>
+                  <a:tcPr anchor="ctr" marL="73152" marT="9144" marB="9144">
+                    <a:solidFill>
+                      <a:srgbClr val="EEF2F9"/>
+                    </a:solidFill>
+                  </a:tcPr>
+                </a:tc>
+                <a:tc>
+                  <a:txBody>
+                    <a:bodyPr/>
+                    <a:lstStyle/>
+                    <a:p>
+                      <a:r>
+                        <a:rPr sz="1150" b="0">
+                          <a:solidFill>
+                            <a:srgbClr val="1A2233"/>
+                          </a:solidFill>
+                          <a:latin typeface="Microsoft JhengHei"/>
+                          <a:ea typeface="Microsoft JhengHei"/>
+                          <a:cs typeface="Microsoft JhengHei"/>
+                        </a:rPr>
+                        <a:t>周仕杰、李東峰</a:t>
+                      </a:r>
+                    </a:p>
+                  </a:txBody>
+                  <a:tcPr anchor="ctr" marL="73152" marT="9144" marB="9144">
+                    <a:solidFill>
+                      <a:srgbClr val="EEF2F9"/>
+                    </a:solidFill>
+                  </a:tcPr>
+                </a:tc>
+              </a:tr>
+              <a:tr h="373380">
+                <a:tc>
+                  <a:txBody>
+                    <a:bodyPr/>
+                    <a:lstStyle/>
+                    <a:p>
+                      <a:r>
+                        <a:rPr sz="1150" b="0">
+                          <a:solidFill>
+                            <a:srgbClr val="1A2233"/>
+                          </a:solidFill>
+                          <a:latin typeface="Microsoft JhengHei"/>
+                          <a:ea typeface="Microsoft JhengHei"/>
+                          <a:cs typeface="Microsoft JhengHei"/>
+                        </a:rPr>
+                        <a:t>柏文</a:t>
+                      </a:r>
+                    </a:p>
+                  </a:txBody>
+                  <a:tcPr anchor="ctr" marL="73152" marT="9144" marB="9144">
+                    <a:solidFill>
+                      <a:srgbClr val="FFFFFF"/>
+                    </a:solidFill>
+                  </a:tcPr>
+                </a:tc>
+                <a:tc>
+                  <a:txBody>
+                    <a:bodyPr/>
+                    <a:lstStyle/>
+                    <a:p>
+                      <a:r>
+                        <a:rPr sz="1150" b="0">
+                          <a:solidFill>
+                            <a:srgbClr val="1A2233"/>
+                          </a:solidFill>
+                          <a:latin typeface="Microsoft JhengHei"/>
+                          <a:ea typeface="Microsoft JhengHei"/>
+                          <a:cs typeface="Microsoft JhengHei"/>
+                        </a:rPr>
+                        <a:t>8462</a:t>
                       </a:r>
                     </a:p>
                   </a:txBody>
@@ -7330,7 +8062,7 @@
                           <a:ea typeface="Microsoft JhengHei"/>
                           <a:cs typeface="Microsoft JhengHei"/>
                         </a:rPr>
-                        <a:t>勤業眾信聯合會計師事務所</a:t>
+                        <a:t>安永聯合會計師事務所</a:t>
                       </a:r>
                     </a:p>
                   </a:txBody>
@@ -7354,739 +8086,7 @@
                           <a:ea typeface="Microsoft JhengHei"/>
                           <a:cs typeface="Microsoft JhengHei"/>
                         </a:rPr>
-                        <a:t>周仕杰、李東峰</a:t>
-                      </a:r>
-                    </a:p>
-                  </a:txBody>
-                  <a:tcPr anchor="ctr" marL="73152" marT="9144" marB="9144">
-                    <a:solidFill>
-                      <a:srgbClr val="FFFFFF"/>
-                    </a:solidFill>
-                  </a:tcPr>
-                </a:tc>
-              </a:tr>
-              <a:tr h="373380">
-                <a:tc>
-                  <a:txBody>
-                    <a:bodyPr/>
-                    <a:lstStyle/>
-                    <a:p>
-                      <a:r>
-                        <a:rPr sz="1150" b="0">
-                          <a:solidFill>
-                            <a:srgbClr val="1A2233"/>
-                          </a:solidFill>
-                          <a:latin typeface="Microsoft JhengHei"/>
-                          <a:ea typeface="Microsoft JhengHei"/>
-                          <a:cs typeface="Microsoft JhengHei"/>
-                        </a:rPr>
-                        <a:t>一零四</a:t>
-                      </a:r>
-                    </a:p>
-                  </a:txBody>
-                  <a:tcPr anchor="ctr" marL="73152" marT="9144" marB="9144">
-                    <a:solidFill>
-                      <a:srgbClr val="EEF2F9"/>
-                    </a:solidFill>
-                  </a:tcPr>
-                </a:tc>
-                <a:tc>
-                  <a:txBody>
-                    <a:bodyPr/>
-                    <a:lstStyle/>
-                    <a:p>
-                      <a:r>
-                        <a:rPr sz="1150" b="0">
-                          <a:solidFill>
-                            <a:srgbClr val="1A2233"/>
-                          </a:solidFill>
-                          <a:latin typeface="Microsoft JhengHei"/>
-                          <a:ea typeface="Microsoft JhengHei"/>
-                          <a:cs typeface="Microsoft JhengHei"/>
-                        </a:rPr>
-                        <a:t>3130</a:t>
-                      </a:r>
-                    </a:p>
-                  </a:txBody>
-                  <a:tcPr anchor="ctr" marL="73152" marT="9144" marB="9144">
-                    <a:solidFill>
-                      <a:srgbClr val="EEF2F9"/>
-                    </a:solidFill>
-                  </a:tcPr>
-                </a:tc>
-                <a:tc>
-                  <a:txBody>
-                    <a:bodyPr/>
-                    <a:lstStyle/>
-                    <a:p>
-                      <a:r>
-                        <a:rPr sz="1150" b="1">
-                          <a:solidFill>
-                            <a:srgbClr val="5C6679"/>
-                          </a:solidFill>
-                          <a:latin typeface="Microsoft JhengHei"/>
-                          <a:ea typeface="Microsoft JhengHei"/>
-                          <a:cs typeface="Microsoft JhengHei"/>
-                        </a:rPr>
-                        <a:t>其他</a:t>
-                      </a:r>
-                    </a:p>
-                  </a:txBody>
-                  <a:tcPr anchor="ctr" marL="73152" marT="9144" marB="9144">
-                    <a:solidFill>
-                      <a:srgbClr val="EEF2F9"/>
-                    </a:solidFill>
-                  </a:tcPr>
-                </a:tc>
-                <a:tc>
-                  <a:txBody>
-                    <a:bodyPr/>
-                    <a:lstStyle/>
-                    <a:p>
-                      <a:r>
-                        <a:rPr sz="1150" b="0">
-                          <a:solidFill>
-                            <a:srgbClr val="1A2233"/>
-                          </a:solidFill>
-                          <a:latin typeface="Microsoft JhengHei"/>
-                          <a:ea typeface="Microsoft JhengHei"/>
-                          <a:cs typeface="Microsoft JhengHei"/>
-                        </a:rPr>
-                        <a:t>安侯建業聯合會計師事務所</a:t>
-                      </a:r>
-                    </a:p>
-                  </a:txBody>
-                  <a:tcPr anchor="ctr" marL="73152" marT="9144" marB="9144">
-                    <a:solidFill>
-                      <a:srgbClr val="EEF2F9"/>
-                    </a:solidFill>
-                  </a:tcPr>
-                </a:tc>
-                <a:tc>
-                  <a:txBody>
-                    <a:bodyPr/>
-                    <a:lstStyle/>
-                    <a:p>
-                      <a:r>
-                        <a:rPr sz="1150" b="0">
-                          <a:solidFill>
-                            <a:srgbClr val="1A2233"/>
-                          </a:solidFill>
-                          <a:latin typeface="Microsoft JhengHei"/>
-                          <a:ea typeface="Microsoft JhengHei"/>
-                          <a:cs typeface="Microsoft JhengHei"/>
-                        </a:rPr>
-                        <a:t>趙敏如、江家齊</a:t>
-                      </a:r>
-                    </a:p>
-                  </a:txBody>
-                  <a:tcPr anchor="ctr" marL="73152" marT="9144" marB="9144">
-                    <a:solidFill>
-                      <a:srgbClr val="EEF2F9"/>
-                    </a:solidFill>
-                  </a:tcPr>
-                </a:tc>
-              </a:tr>
-              <a:tr h="373380">
-                <a:tc>
-                  <a:txBody>
-                    <a:bodyPr/>
-                    <a:lstStyle/>
-                    <a:p>
-                      <a:r>
-                        <a:rPr sz="1150" b="0">
-                          <a:solidFill>
-                            <a:srgbClr val="1A2233"/>
-                          </a:solidFill>
-                          <a:latin typeface="Microsoft JhengHei"/>
-                          <a:ea typeface="Microsoft JhengHei"/>
-                          <a:cs typeface="Microsoft JhengHei"/>
-                        </a:rPr>
-                        <a:t>安心</a:t>
-                      </a:r>
-                    </a:p>
-                  </a:txBody>
-                  <a:tcPr anchor="ctr" marL="73152" marT="9144" marB="9144">
-                    <a:solidFill>
-                      <a:srgbClr val="FFFFFF"/>
-                    </a:solidFill>
-                  </a:tcPr>
-                </a:tc>
-                <a:tc>
-                  <a:txBody>
-                    <a:bodyPr/>
-                    <a:lstStyle/>
-                    <a:p>
-                      <a:r>
-                        <a:rPr sz="1150" b="0">
-                          <a:solidFill>
-                            <a:srgbClr val="1A2233"/>
-                          </a:solidFill>
-                          <a:latin typeface="Microsoft JhengHei"/>
-                          <a:ea typeface="Microsoft JhengHei"/>
-                          <a:cs typeface="Microsoft JhengHei"/>
-                        </a:rPr>
-                        <a:t>1259</a:t>
-                      </a:r>
-                    </a:p>
-                  </a:txBody>
-                  <a:tcPr anchor="ctr" marL="73152" marT="9144" marB="9144">
-                    <a:solidFill>
-                      <a:srgbClr val="FFFFFF"/>
-                    </a:solidFill>
-                  </a:tcPr>
-                </a:tc>
-                <a:tc>
-                  <a:txBody>
-                    <a:bodyPr/>
-                    <a:lstStyle/>
-                    <a:p>
-                      <a:r>
-                        <a:rPr sz="1150" b="1">
-                          <a:solidFill>
-                            <a:srgbClr val="27A6C4"/>
-                          </a:solidFill>
-                          <a:latin typeface="Microsoft JhengHei"/>
-                          <a:ea typeface="Microsoft JhengHei"/>
-                          <a:cs typeface="Microsoft JhengHei"/>
-                        </a:rPr>
-                        <a:t>個資外洩</a:t>
-                      </a:r>
-                    </a:p>
-                  </a:txBody>
-                  <a:tcPr anchor="ctr" marL="73152" marT="9144" marB="9144">
-                    <a:solidFill>
-                      <a:srgbClr val="FFFFFF"/>
-                    </a:solidFill>
-                  </a:tcPr>
-                </a:tc>
-                <a:tc>
-                  <a:txBody>
-                    <a:bodyPr/>
-                    <a:lstStyle/>
-                    <a:p>
-                      <a:r>
-                        <a:rPr sz="1150" b="0">
-                          <a:solidFill>
-                            <a:srgbClr val="1A2233"/>
-                          </a:solidFill>
-                          <a:latin typeface="Microsoft JhengHei"/>
-                          <a:ea typeface="Microsoft JhengHei"/>
-                          <a:cs typeface="Microsoft JhengHei"/>
-                        </a:rPr>
-                        <a:t>資誠聯合會計師事務所</a:t>
-                      </a:r>
-                    </a:p>
-                  </a:txBody>
-                  <a:tcPr anchor="ctr" marL="73152" marT="9144" marB="9144">
-                    <a:solidFill>
-                      <a:srgbClr val="FFFFFF"/>
-                    </a:solidFill>
-                  </a:tcPr>
-                </a:tc>
-                <a:tc>
-                  <a:txBody>
-                    <a:bodyPr/>
-                    <a:lstStyle/>
-                    <a:p>
-                      <a:r>
-                        <a:rPr sz="1150" b="0">
-                          <a:solidFill>
-                            <a:srgbClr val="1A2233"/>
-                          </a:solidFill>
-                          <a:latin typeface="Microsoft JhengHei"/>
-                          <a:ea typeface="Microsoft JhengHei"/>
-                          <a:cs typeface="Microsoft JhengHei"/>
-                        </a:rPr>
-                        <a:t>徐明釧、陳怡婷</a:t>
-                      </a:r>
-                    </a:p>
-                  </a:txBody>
-                  <a:tcPr anchor="ctr" marL="73152" marT="9144" marB="9144">
-                    <a:solidFill>
-                      <a:srgbClr val="FFFFFF"/>
-                    </a:solidFill>
-                  </a:tcPr>
-                </a:tc>
-              </a:tr>
-              <a:tr h="373380">
-                <a:tc>
-                  <a:txBody>
-                    <a:bodyPr/>
-                    <a:lstStyle/>
-                    <a:p>
-                      <a:r>
-                        <a:rPr sz="1150" b="0">
-                          <a:solidFill>
-                            <a:srgbClr val="1A2233"/>
-                          </a:solidFill>
-                          <a:latin typeface="Microsoft JhengHei"/>
-                          <a:ea typeface="Microsoft JhengHei"/>
-                          <a:cs typeface="Microsoft JhengHei"/>
-                        </a:rPr>
-                        <a:t>神腦</a:t>
-                      </a:r>
-                    </a:p>
-                  </a:txBody>
-                  <a:tcPr anchor="ctr" marL="73152" marT="9144" marB="9144">
-                    <a:solidFill>
-                      <a:srgbClr val="EEF2F9"/>
-                    </a:solidFill>
-                  </a:tcPr>
-                </a:tc>
-                <a:tc>
-                  <a:txBody>
-                    <a:bodyPr/>
-                    <a:lstStyle/>
-                    <a:p>
-                      <a:r>
-                        <a:rPr sz="1150" b="0">
-                          <a:solidFill>
-                            <a:srgbClr val="1A2233"/>
-                          </a:solidFill>
-                          <a:latin typeface="Microsoft JhengHei"/>
-                          <a:ea typeface="Microsoft JhengHei"/>
-                          <a:cs typeface="Microsoft JhengHei"/>
-                        </a:rPr>
-                        <a:t>2450</a:t>
-                      </a:r>
-                    </a:p>
-                  </a:txBody>
-                  <a:tcPr anchor="ctr" marL="73152" marT="9144" marB="9144">
-                    <a:solidFill>
-                      <a:srgbClr val="EEF2F9"/>
-                    </a:solidFill>
-                  </a:tcPr>
-                </a:tc>
-                <a:tc>
-                  <a:txBody>
-                    <a:bodyPr/>
-                    <a:lstStyle/>
-                    <a:p>
-                      <a:r>
-                        <a:rPr sz="1150" b="1">
-                          <a:solidFill>
-                            <a:srgbClr val="E63946"/>
-                          </a:solidFill>
-                          <a:latin typeface="Microsoft JhengHei"/>
-                          <a:ea typeface="Microsoft JhengHei"/>
-                          <a:cs typeface="Microsoft JhengHei"/>
-                        </a:rPr>
-                        <a:t>駭客攻擊</a:t>
-                      </a:r>
-                    </a:p>
-                  </a:txBody>
-                  <a:tcPr anchor="ctr" marL="73152" marT="9144" marB="9144">
-                    <a:solidFill>
-                      <a:srgbClr val="EEF2F9"/>
-                    </a:solidFill>
-                  </a:tcPr>
-                </a:tc>
-                <a:tc>
-                  <a:txBody>
-                    <a:bodyPr/>
-                    <a:lstStyle/>
-                    <a:p>
-                      <a:r>
-                        <a:rPr sz="1150" b="0">
-                          <a:solidFill>
-                            <a:srgbClr val="1A2233"/>
-                          </a:solidFill>
-                          <a:latin typeface="Microsoft JhengHei"/>
-                          <a:ea typeface="Microsoft JhengHei"/>
-                          <a:cs typeface="Microsoft JhengHei"/>
-                        </a:rPr>
-                        <a:t>資誠聯合會計師事務所</a:t>
-                      </a:r>
-                    </a:p>
-                  </a:txBody>
-                  <a:tcPr anchor="ctr" marL="73152" marT="9144" marB="9144">
-                    <a:solidFill>
-                      <a:srgbClr val="EEF2F9"/>
-                    </a:solidFill>
-                  </a:tcPr>
-                </a:tc>
-                <a:tc>
-                  <a:txBody>
-                    <a:bodyPr/>
-                    <a:lstStyle/>
-                    <a:p>
-                      <a:r>
-                        <a:rPr sz="1150" b="0">
-                          <a:solidFill>
-                            <a:srgbClr val="1A2233"/>
-                          </a:solidFill>
-                          <a:latin typeface="Microsoft JhengHei"/>
-                          <a:ea typeface="Microsoft JhengHei"/>
-                          <a:cs typeface="Microsoft JhengHei"/>
-                        </a:rPr>
-                        <a:t>王銘義、林永智</a:t>
-                      </a:r>
-                    </a:p>
-                  </a:txBody>
-                  <a:tcPr anchor="ctr" marL="73152" marT="9144" marB="9144">
-                    <a:solidFill>
-                      <a:srgbClr val="EEF2F9"/>
-                    </a:solidFill>
-                  </a:tcPr>
-                </a:tc>
-              </a:tr>
-              <a:tr h="373380">
-                <a:tc>
-                  <a:txBody>
-                    <a:bodyPr/>
-                    <a:lstStyle/>
-                    <a:p>
-                      <a:r>
-                        <a:rPr sz="1150" b="0">
-                          <a:solidFill>
-                            <a:srgbClr val="1A2233"/>
-                          </a:solidFill>
-                          <a:latin typeface="Microsoft JhengHei"/>
-                          <a:ea typeface="Microsoft JhengHei"/>
-                          <a:cs typeface="Microsoft JhengHei"/>
-                        </a:rPr>
-                        <a:t>鈊象</a:t>
-                      </a:r>
-                    </a:p>
-                  </a:txBody>
-                  <a:tcPr anchor="ctr" marL="73152" marT="9144" marB="9144">
-                    <a:solidFill>
-                      <a:srgbClr val="FFFFFF"/>
-                    </a:solidFill>
-                  </a:tcPr>
-                </a:tc>
-                <a:tc>
-                  <a:txBody>
-                    <a:bodyPr/>
-                    <a:lstStyle/>
-                    <a:p>
-                      <a:r>
-                        <a:rPr sz="1150" b="0">
-                          <a:solidFill>
-                            <a:srgbClr val="1A2233"/>
-                          </a:solidFill>
-                          <a:latin typeface="Microsoft JhengHei"/>
-                          <a:ea typeface="Microsoft JhengHei"/>
-                          <a:cs typeface="Microsoft JhengHei"/>
-                        </a:rPr>
-                        <a:t>3293</a:t>
-                      </a:r>
-                    </a:p>
-                  </a:txBody>
-                  <a:tcPr anchor="ctr" marL="73152" marT="9144" marB="9144">
-                    <a:solidFill>
-                      <a:srgbClr val="FFFFFF"/>
-                    </a:solidFill>
-                  </a:tcPr>
-                </a:tc>
-                <a:tc>
-                  <a:txBody>
-                    <a:bodyPr/>
-                    <a:lstStyle/>
-                    <a:p>
-                      <a:r>
-                        <a:rPr sz="1150" b="1">
-                          <a:solidFill>
-                            <a:srgbClr val="5C6679"/>
-                          </a:solidFill>
-                          <a:latin typeface="Microsoft JhengHei"/>
-                          <a:ea typeface="Microsoft JhengHei"/>
-                          <a:cs typeface="Microsoft JhengHei"/>
-                        </a:rPr>
-                        <a:t>其他</a:t>
-                      </a:r>
-                    </a:p>
-                  </a:txBody>
-                  <a:tcPr anchor="ctr" marL="73152" marT="9144" marB="9144">
-                    <a:solidFill>
-                      <a:srgbClr val="FFFFFF"/>
-                    </a:solidFill>
-                  </a:tcPr>
-                </a:tc>
-                <a:tc>
-                  <a:txBody>
-                    <a:bodyPr/>
-                    <a:lstStyle/>
-                    <a:p>
-                      <a:r>
-                        <a:rPr sz="1150" b="0">
-                          <a:solidFill>
-                            <a:srgbClr val="1A2233"/>
-                          </a:solidFill>
-                          <a:latin typeface="Microsoft JhengHei"/>
-                          <a:ea typeface="Microsoft JhengHei"/>
-                          <a:cs typeface="Microsoft JhengHei"/>
-                        </a:rPr>
-                        <a:t>勤業眾信聯合會計師事務所</a:t>
-                      </a:r>
-                    </a:p>
-                  </a:txBody>
-                  <a:tcPr anchor="ctr" marL="73152" marT="9144" marB="9144">
-                    <a:solidFill>
-                      <a:srgbClr val="FFFFFF"/>
-                    </a:solidFill>
-                  </a:tcPr>
-                </a:tc>
-                <a:tc>
-                  <a:txBody>
-                    <a:bodyPr/>
-                    <a:lstStyle/>
-                    <a:p>
-                      <a:r>
-                        <a:rPr sz="1150" b="0">
-                          <a:solidFill>
-                            <a:srgbClr val="1A2233"/>
-                          </a:solidFill>
-                          <a:latin typeface="Microsoft JhengHei"/>
-                          <a:ea typeface="Microsoft JhengHei"/>
-                          <a:cs typeface="Microsoft JhengHei"/>
-                        </a:rPr>
-                        <a:t>周仕杰、李東峰</a:t>
-                      </a:r>
-                    </a:p>
-                  </a:txBody>
-                  <a:tcPr anchor="ctr" marL="73152" marT="9144" marB="9144">
-                    <a:solidFill>
-                      <a:srgbClr val="FFFFFF"/>
-                    </a:solidFill>
-                  </a:tcPr>
-                </a:tc>
-              </a:tr>
-              <a:tr h="373380">
-                <a:tc>
-                  <a:txBody>
-                    <a:bodyPr/>
-                    <a:lstStyle/>
-                    <a:p>
-                      <a:r>
-                        <a:rPr sz="1150" b="0">
-                          <a:solidFill>
-                            <a:srgbClr val="1A2233"/>
-                          </a:solidFill>
-                          <a:latin typeface="Microsoft JhengHei"/>
-                          <a:ea typeface="Microsoft JhengHei"/>
-                          <a:cs typeface="Microsoft JhengHei"/>
-                        </a:rPr>
-                        <a:t>柏文</a:t>
-                      </a:r>
-                    </a:p>
-                  </a:txBody>
-                  <a:tcPr anchor="ctr" marL="73152" marT="9144" marB="9144">
-                    <a:solidFill>
-                      <a:srgbClr val="EEF2F9"/>
-                    </a:solidFill>
-                  </a:tcPr>
-                </a:tc>
-                <a:tc>
-                  <a:txBody>
-                    <a:bodyPr/>
-                    <a:lstStyle/>
-                    <a:p>
-                      <a:r>
-                        <a:rPr sz="1150" b="0">
-                          <a:solidFill>
-                            <a:srgbClr val="1A2233"/>
-                          </a:solidFill>
-                          <a:latin typeface="Microsoft JhengHei"/>
-                          <a:ea typeface="Microsoft JhengHei"/>
-                          <a:cs typeface="Microsoft JhengHei"/>
-                        </a:rPr>
-                        <a:t>8462</a:t>
-                      </a:r>
-                    </a:p>
-                  </a:txBody>
-                  <a:tcPr anchor="ctr" marL="73152" marT="9144" marB="9144">
-                    <a:solidFill>
-                      <a:srgbClr val="EEF2F9"/>
-                    </a:solidFill>
-                  </a:tcPr>
-                </a:tc>
-                <a:tc>
-                  <a:txBody>
-                    <a:bodyPr/>
-                    <a:lstStyle/>
-                    <a:p>
-                      <a:r>
-                        <a:rPr sz="1150" b="1">
-                          <a:solidFill>
-                            <a:srgbClr val="27A6C4"/>
-                          </a:solidFill>
-                          <a:latin typeface="Microsoft JhengHei"/>
-                          <a:ea typeface="Microsoft JhengHei"/>
-                          <a:cs typeface="Microsoft JhengHei"/>
-                        </a:rPr>
-                        <a:t>個資外洩</a:t>
-                      </a:r>
-                    </a:p>
-                  </a:txBody>
-                  <a:tcPr anchor="ctr" marL="73152" marT="9144" marB="9144">
-                    <a:solidFill>
-                      <a:srgbClr val="EEF2F9"/>
-                    </a:solidFill>
-                  </a:tcPr>
-                </a:tc>
-                <a:tc>
-                  <a:txBody>
-                    <a:bodyPr/>
-                    <a:lstStyle/>
-                    <a:p>
-                      <a:r>
-                        <a:rPr sz="1150" b="0">
-                          <a:solidFill>
-                            <a:srgbClr val="1A2233"/>
-                          </a:solidFill>
-                          <a:latin typeface="Microsoft JhengHei"/>
-                          <a:ea typeface="Microsoft JhengHei"/>
-                          <a:cs typeface="Microsoft JhengHei"/>
-                        </a:rPr>
-                        <a:t>—</a:t>
-                      </a:r>
-                    </a:p>
-                  </a:txBody>
-                  <a:tcPr anchor="ctr" marL="73152" marT="9144" marB="9144">
-                    <a:solidFill>
-                      <a:srgbClr val="EEF2F9"/>
-                    </a:solidFill>
-                  </a:tcPr>
-                </a:tc>
-                <a:tc>
-                  <a:txBody>
-                    <a:bodyPr/>
-                    <a:lstStyle/>
-                    <a:p>
-                      <a:r>
-                        <a:rPr sz="1150" b="0">
-                          <a:solidFill>
-                            <a:srgbClr val="1A2233"/>
-                          </a:solidFill>
-                          <a:latin typeface="Microsoft JhengHei"/>
-                          <a:ea typeface="Microsoft JhengHei"/>
-                          <a:cs typeface="Microsoft JhengHei"/>
-                        </a:rPr>
-                        <a:t>—</a:t>
-                      </a:r>
-                    </a:p>
-                  </a:txBody>
-                  <a:tcPr anchor="ctr" marL="73152" marT="9144" marB="9144">
-                    <a:solidFill>
-                      <a:srgbClr val="EEF2F9"/>
-                    </a:solidFill>
-                  </a:tcPr>
-                </a:tc>
-              </a:tr>
-              <a:tr h="373380">
-                <a:tc>
-                  <a:txBody>
-                    <a:bodyPr/>
-                    <a:lstStyle/>
-                    <a:p>
-                      <a:r>
-                        <a:rPr sz="1150" b="0">
-                          <a:solidFill>
-                            <a:srgbClr val="1A2233"/>
-                          </a:solidFill>
-                          <a:latin typeface="Microsoft JhengHei"/>
-                          <a:ea typeface="Microsoft JhengHei"/>
-                          <a:cs typeface="Microsoft JhengHei"/>
-                        </a:rPr>
-                        <a:t>友訊</a:t>
-                      </a:r>
-                    </a:p>
-                  </a:txBody>
-                  <a:tcPr anchor="ctr" marL="73152" marT="9144" marB="9144">
-                    <a:solidFill>
-                      <a:srgbClr val="FFFFFF"/>
-                    </a:solidFill>
-                  </a:tcPr>
-                </a:tc>
-                <a:tc>
-                  <a:txBody>
-                    <a:bodyPr/>
-                    <a:lstStyle/>
-                    <a:p>
-                      <a:r>
-                        <a:rPr sz="1150" b="0">
-                          <a:solidFill>
-                            <a:srgbClr val="1A2233"/>
-                          </a:solidFill>
-                          <a:latin typeface="Microsoft JhengHei"/>
-                          <a:ea typeface="Microsoft JhengHei"/>
-                          <a:cs typeface="Microsoft JhengHei"/>
-                        </a:rPr>
-                        <a:t>2332</a:t>
-                      </a:r>
-                    </a:p>
-                  </a:txBody>
-                  <a:tcPr anchor="ctr" marL="73152" marT="9144" marB="9144">
-                    <a:solidFill>
-                      <a:srgbClr val="FFFFFF"/>
-                    </a:solidFill>
-                  </a:tcPr>
-                </a:tc>
-                <a:tc>
-                  <a:txBody>
-                    <a:bodyPr/>
-                    <a:lstStyle/>
-                    <a:p>
-                      <a:r>
-                        <a:rPr sz="1150" b="1">
-                          <a:solidFill>
-                            <a:srgbClr val="E63946"/>
-                          </a:solidFill>
-                          <a:latin typeface="Microsoft JhengHei"/>
-                          <a:ea typeface="Microsoft JhengHei"/>
-                          <a:cs typeface="Microsoft JhengHei"/>
-                        </a:rPr>
-                        <a:t>駭客攻擊</a:t>
-                      </a:r>
-                    </a:p>
-                  </a:txBody>
-                  <a:tcPr anchor="ctr" marL="73152" marT="9144" marB="9144">
-                    <a:solidFill>
-                      <a:srgbClr val="FFFFFF"/>
-                    </a:solidFill>
-                  </a:tcPr>
-                </a:tc>
-                <a:tc>
-                  <a:txBody>
-                    <a:bodyPr/>
-                    <a:lstStyle/>
-                    <a:p>
-                      <a:r>
-                        <a:rPr sz="1150" b="0">
-                          <a:solidFill>
-                            <a:srgbClr val="1A2233"/>
-                          </a:solidFill>
-                          <a:latin typeface="Microsoft JhengHei"/>
-                          <a:ea typeface="Microsoft JhengHei"/>
-                          <a:cs typeface="Microsoft JhengHei"/>
-                        </a:rPr>
-                        <a:t>安侯建業聯合會計師事務所</a:t>
-                      </a:r>
-                    </a:p>
-                  </a:txBody>
-                  <a:tcPr anchor="ctr" marL="73152" marT="9144" marB="9144">
-                    <a:solidFill>
-                      <a:srgbClr val="FFFFFF"/>
-                    </a:solidFill>
-                  </a:tcPr>
-                </a:tc>
-                <a:tc>
-                  <a:txBody>
-                    <a:bodyPr/>
-                    <a:lstStyle/>
-                    <a:p>
-                      <a:r>
-                        <a:rPr sz="1150" b="0">
-                          <a:solidFill>
-                            <a:srgbClr val="1A2233"/>
-                          </a:solidFill>
-                          <a:latin typeface="Microsoft JhengHei"/>
-                          <a:ea typeface="Microsoft JhengHei"/>
-                          <a:cs typeface="Microsoft JhengHei"/>
-                        </a:rPr>
-                        <a:t>梅元貞、謝秋華</a:t>
+                        <a:t>洪福讚、陳政初</a:t>
                       </a:r>
                     </a:p>
                   </a:txBody>
@@ -9546,7 +9546,7 @@
             <a:avLst/>
           </a:prstGeom>
           <a:solidFill>
-            <a:srgbClr val="E63946"/>
+            <a:srgbClr val="27A6C4"/>
           </a:solidFill>
           <a:ln>
             <a:noFill/>
@@ -9607,7 +9607,7 @@
                 <a:ea typeface="Microsoft JhengHei"/>
                 <a:cs typeface="Microsoft JhengHei"/>
               </a:rPr>
-              <a:t>91APP*-KY </a:t>
+              <a:t>滿心 </a:t>
             </a:r>
             <a:r>
               <a:rPr sz="1300" b="0">
@@ -9618,7 +9618,7 @@
                 <a:ea typeface="Microsoft JhengHei"/>
                 <a:cs typeface="Microsoft JhengHei"/>
               </a:rPr>
-              <a:t>6741</a:t>
+              <a:t>2916</a:t>
             </a:r>
           </a:p>
         </p:txBody>
@@ -9638,7 +9638,7 @@
             <a:avLst/>
           </a:prstGeom>
           <a:solidFill>
-            <a:srgbClr val="E63946"/>
+            <a:srgbClr val="27A6C4"/>
           </a:solidFill>
           <a:ln>
             <a:noFill/>
@@ -9699,7 +9699,7 @@
                 <a:ea typeface="Microsoft JhengHei"/>
                 <a:cs typeface="Microsoft JhengHei"/>
               </a:rPr>
-              <a:t>駭客攻擊</a:t>
+              <a:t>個資外洩</a:t>
             </a:r>
           </a:p>
         </p:txBody>
@@ -9734,7 +9734,7 @@
             <a:r>
               <a:rPr sz="1100" b="1">
                 <a:solidFill>
-                  <a:srgbClr val="E63946"/>
+                  <a:srgbClr val="27A6C4"/>
                 </a:solidFill>
                 <a:latin typeface="Microsoft JhengHei"/>
                 <a:ea typeface="Microsoft JhengHei"/>
@@ -9751,7 +9751,7 @@
                 <a:ea typeface="Microsoft JhengHei"/>
                 <a:cs typeface="Microsoft JhengHei"/>
               </a:rPr>
-              <a:t>本公司CommerceCloud資料庫受到自動化攻擊事件說明。</a:t>
+              <a:t>本公司委外服務平台業者所提供之資料庫發生自動化攻擊事件,部分資訊遭非法擷取,本公司近日接獲消費者…</a:t>
             </a:r>
           </a:p>
         </p:txBody>
@@ -9786,7 +9786,7 @@
             <a:r>
               <a:rPr sz="1100" b="1">
                 <a:solidFill>
-                  <a:srgbClr val="E63946"/>
+                  <a:srgbClr val="27A6C4"/>
                 </a:solidFill>
                 <a:latin typeface="Microsoft JhengHei"/>
                 <a:ea typeface="Microsoft JhengHei"/>
@@ -9803,7 +9803,7 @@
                 <a:ea typeface="Microsoft JhengHei"/>
                 <a:cs typeface="Microsoft JhengHei"/>
               </a:rPr>
-              <a:t>(1)強化監控防禦：升級全天候監控，全面提升系統防護層級。(2)委外第三方公正單位調查：協同外部專家深入調查，並於相關主…</a:t>
+              <a:t>(1)本公司已立即啟動資安事件應變作業,針對相關系統與存取紀錄及可能涉及之資料範圍進行調查,並要求委外服務平台業者同步進…</a:t>
             </a:r>
           </a:p>
         </p:txBody>
@@ -9869,7 +9869,7 @@
             <a:avLst/>
           </a:prstGeom>
           <a:solidFill>
-            <a:srgbClr val="5C6679"/>
+            <a:srgbClr val="E63946"/>
           </a:solidFill>
           <a:ln>
             <a:noFill/>
@@ -9930,7 +9930,7 @@
                 <a:ea typeface="Microsoft JhengHei"/>
                 <a:cs typeface="Microsoft JhengHei"/>
               </a:rPr>
-              <a:t>緯致 </a:t>
+              <a:t>91APP*-KY </a:t>
             </a:r>
             <a:r>
               <a:rPr sz="1300" b="0">
@@ -9941,7 +9941,7 @@
                 <a:ea typeface="Microsoft JhengHei"/>
                 <a:cs typeface="Microsoft JhengHei"/>
               </a:rPr>
-              <a:t>4953</a:t>
+              <a:t>6741</a:t>
             </a:r>
           </a:p>
         </p:txBody>
@@ -9961,7 +9961,7 @@
             <a:avLst/>
           </a:prstGeom>
           <a:solidFill>
-            <a:srgbClr val="5C6679"/>
+            <a:srgbClr val="E63946"/>
           </a:solidFill>
           <a:ln>
             <a:noFill/>
@@ -10022,7 +10022,7 @@
                 <a:ea typeface="Microsoft JhengHei"/>
                 <a:cs typeface="Microsoft JhengHei"/>
               </a:rPr>
-              <a:t>其他</a:t>
+              <a:t>駭客攻擊</a:t>
             </a:r>
           </a:p>
         </p:txBody>
@@ -10057,7 +10057,7 @@
             <a:r>
               <a:rPr sz="1100" b="1">
                 <a:solidFill>
-                  <a:srgbClr val="5C6679"/>
+                  <a:srgbClr val="E63946"/>
                 </a:solidFill>
                 <a:latin typeface="Microsoft JhengHei"/>
                 <a:ea typeface="Microsoft JhengHei"/>
@@ -10074,7 +10074,7 @@
                 <a:ea typeface="Microsoft JhengHei"/>
                 <a:cs typeface="Microsoft JhengHei"/>
               </a:rPr>
-              <a:t>本公司偵測到內部系統有異常存取情形，經調查確認，部分員工資訊與公務聯繫資訊遭未經授權存取。</a:t>
+              <a:t>本公司CommerceCloud資料庫受到自動化攻擊事件說明。</a:t>
             </a:r>
           </a:p>
         </p:txBody>
@@ -10109,7 +10109,7 @@
             <a:r>
               <a:rPr sz="1100" b="1">
                 <a:solidFill>
-                  <a:srgbClr val="5C6679"/>
+                  <a:srgbClr val="E63946"/>
                 </a:solidFill>
                 <a:latin typeface="Microsoft JhengHei"/>
                 <a:ea typeface="Microsoft JhengHei"/>
@@ -10126,7 +10126,7 @@
                 <a:ea typeface="Microsoft JhengHei"/>
                 <a:cs typeface="Microsoft JhengHei"/>
               </a:rPr>
-              <a:t>本公司已採取相關防護、阻斷及修補措施，並持續強化資訊安全防護機制。</a:t>
+              <a:t>(1)強化監控防禦：升級全天候監控，全面提升系統防護層級。(2)委外第三方公正單位調查：協同外部專家深入調查，並於相關主…</a:t>
             </a:r>
           </a:p>
         </p:txBody>
@@ -10253,7 +10253,7 @@
                 <a:ea typeface="Microsoft JhengHei"/>
                 <a:cs typeface="Microsoft JhengHei"/>
               </a:rPr>
-              <a:t>上福 </a:t>
+              <a:t>緯致 </a:t>
             </a:r>
             <a:r>
               <a:rPr sz="1300" b="0">
@@ -10264,7 +10264,7 @@
                 <a:ea typeface="Microsoft JhengHei"/>
                 <a:cs typeface="Microsoft JhengHei"/>
               </a:rPr>
-              <a:t>6128</a:t>
+              <a:t>4953</a:t>
             </a:r>
           </a:p>
         </p:txBody>
@@ -10397,7 +10397,7 @@
                 <a:ea typeface="Microsoft JhengHei"/>
                 <a:cs typeface="Microsoft JhengHei"/>
               </a:rPr>
-              <a:t>KatunCorporation發現資訊安全異常事件，經調查發現部分資訊系統有異常存取行為。</a:t>
+              <a:t>本公司偵測到內部系統有異常存取情形，經調查確認，部分員工資訊與公務聯繫資訊遭未經授權存取。</a:t>
             </a:r>
           </a:p>
         </p:txBody>
@@ -10449,7 +10449,7 @@
                 <a:ea typeface="Microsoft JhengHei"/>
                 <a:cs typeface="Microsoft JhengHei"/>
               </a:rPr>
-              <a:t>KatunCorporation將持續進行事件調查、鑑識分析及監控作業，並進一步強化資訊安全管理、遠端存取管控、網路安全…</a:t>
+              <a:t>本公司已採取相關防護、阻斷及修補措施，並持續強化資訊安全防護機制。</a:t>
             </a:r>
           </a:p>
         </p:txBody>
@@ -10515,7 +10515,7 @@
             <a:avLst/>
           </a:prstGeom>
           <a:solidFill>
-            <a:srgbClr val="27A6C4"/>
+            <a:srgbClr val="5C6679"/>
           </a:solidFill>
           <a:ln>
             <a:noFill/>
@@ -10576,7 +10576,7 @@
                 <a:ea typeface="Microsoft JhengHei"/>
                 <a:cs typeface="Microsoft JhengHei"/>
               </a:rPr>
-              <a:t>杏一 </a:t>
+              <a:t>上福 </a:t>
             </a:r>
             <a:r>
               <a:rPr sz="1300" b="0">
@@ -10587,7 +10587,7 @@
                 <a:ea typeface="Microsoft JhengHei"/>
                 <a:cs typeface="Microsoft JhengHei"/>
               </a:rPr>
-              <a:t>4175</a:t>
+              <a:t>6128</a:t>
             </a:r>
           </a:p>
         </p:txBody>
@@ -10607,7 +10607,7 @@
             <a:avLst/>
           </a:prstGeom>
           <a:solidFill>
-            <a:srgbClr val="27A6C4"/>
+            <a:srgbClr val="5C6679"/>
           </a:solidFill>
           <a:ln>
             <a:noFill/>
@@ -10668,7 +10668,7 @@
                 <a:ea typeface="Microsoft JhengHei"/>
                 <a:cs typeface="Microsoft JhengHei"/>
               </a:rPr>
-              <a:t>個資外洩</a:t>
+              <a:t>其他</a:t>
             </a:r>
           </a:p>
         </p:txBody>
@@ -10703,7 +10703,7 @@
             <a:r>
               <a:rPr sz="1100" b="1">
                 <a:solidFill>
-                  <a:srgbClr val="27A6C4"/>
+                  <a:srgbClr val="5C6679"/>
                 </a:solidFill>
                 <a:latin typeface="Microsoft JhengHei"/>
                 <a:ea typeface="Microsoft JhengHei"/>
@@ -10720,7 +10720,7 @@
                 <a:ea typeface="Microsoft JhengHei"/>
                 <a:cs typeface="Microsoft JhengHei"/>
               </a:rPr>
-              <a:t>本公司接獲消費者反映疑似個資外洩事件</a:t>
+              <a:t>KatunCorporation發現資訊安全異常事件，經調查發現部分資訊系統有異常存取行為。</a:t>
             </a:r>
           </a:p>
         </p:txBody>
@@ -10755,7 +10755,7 @@
             <a:r>
               <a:rPr sz="1100" b="1">
                 <a:solidFill>
-                  <a:srgbClr val="27A6C4"/>
+                  <a:srgbClr val="5C6679"/>
                 </a:solidFill>
                 <a:latin typeface="Microsoft JhengHei"/>
                 <a:ea typeface="Microsoft JhengHei"/>
@@ -10772,7 +10772,7 @@
                 <a:ea typeface="Microsoft JhengHei"/>
                 <a:cs typeface="Microsoft JhengHei"/>
               </a:rPr>
-              <a:t>(1)本公司已立即啟動資安事件應變作業，針對相關系統、存取紀錄及可能涉及之資料範圍進行調查，並要求官網平台委外廠商同步進…</a:t>
+              <a:t>KatunCorporation將持續進行事件調查、鑑識分析及監控作業，並進一步強化資訊安全管理、遠端存取管控、網路安全…</a:t>
             </a:r>
           </a:p>
         </p:txBody>
@@ -11035,7 +11035,7 @@
                 <a:ea typeface="Microsoft JhengHei"/>
                 <a:cs typeface="Microsoft JhengHei"/>
               </a:rPr>
-              <a:t>鈊象 </a:t>
+              <a:t>杏一 </a:t>
             </a:r>
             <a:r>
               <a:rPr sz="1300" b="0">
@@ -11046,7 +11046,7 @@
                 <a:ea typeface="Microsoft JhengHei"/>
                 <a:cs typeface="Microsoft JhengHei"/>
               </a:rPr>
-              <a:t>3293</a:t>
+              <a:t>4175</a:t>
             </a:r>
           </a:p>
         </p:txBody>
@@ -11179,7 +11179,7 @@
                 <a:ea typeface="Microsoft JhengHei"/>
                 <a:cs typeface="Microsoft JhengHei"/>
               </a:rPr>
-              <a:t>本公司於115年9月29日發現不明IP異常侵入公司營運資訊設備，造成公司遊戲營運資料外洩，包含部…</a:t>
+              <a:t>本公司接獲消費者反映疑似個資外洩事件</a:t>
             </a:r>
           </a:p>
         </p:txBody>
@@ -11231,7 +11231,7 @@
                 <a:ea typeface="Microsoft JhengHei"/>
                 <a:cs typeface="Microsoft JhengHei"/>
               </a:rPr>
-              <a:t>(1)持續提升資安防禦，強化監控與防護層級。(2)委由外部專業資安團隊協助事件調查，並於相關主機部署偵測及防護機制。(3…</a:t>
+              <a:t>(1)本公司已立即啟動資安事件應變作業，針對相關系統、存取紀錄及可能涉及之資料範圍進行調查，並要求官網平台委外廠商同步進…</a:t>
             </a:r>
           </a:p>
         </p:txBody>
@@ -11297,7 +11297,7 @@
             <a:avLst/>
           </a:prstGeom>
           <a:solidFill>
-            <a:srgbClr val="5C6679"/>
+            <a:srgbClr val="27A6C4"/>
           </a:solidFill>
           <a:ln>
             <a:noFill/>
@@ -11358,7 +11358,7 @@
                 <a:ea typeface="Microsoft JhengHei"/>
                 <a:cs typeface="Microsoft JhengHei"/>
               </a:rPr>
-              <a:t>一零四 </a:t>
+              <a:t>鈊象 </a:t>
             </a:r>
             <a:r>
               <a:rPr sz="1300" b="0">
@@ -11369,7 +11369,7 @@
                 <a:ea typeface="Microsoft JhengHei"/>
                 <a:cs typeface="Microsoft JhengHei"/>
               </a:rPr>
-              <a:t>3130</a:t>
+              <a:t>3293</a:t>
             </a:r>
           </a:p>
         </p:txBody>
@@ -11389,7 +11389,7 @@
             <a:avLst/>
           </a:prstGeom>
           <a:solidFill>
-            <a:srgbClr val="5C6679"/>
+            <a:srgbClr val="27A6C4"/>
           </a:solidFill>
           <a:ln>
             <a:noFill/>
@@ -11450,7 +11450,7 @@
                 <a:ea typeface="Microsoft JhengHei"/>
                 <a:cs typeface="Microsoft JhengHei"/>
               </a:rPr>
-              <a:t>其他</a:t>
+              <a:t>個資外洩</a:t>
             </a:r>
           </a:p>
         </p:txBody>
@@ -11485,7 +11485,7 @@
             <a:r>
               <a:rPr sz="1100" b="1">
                 <a:solidFill>
-                  <a:srgbClr val="5C6679"/>
+                  <a:srgbClr val="27A6C4"/>
                 </a:solidFill>
                 <a:latin typeface="Microsoft JhengHei"/>
                 <a:ea typeface="Microsoft JhengHei"/>
@@ -11502,7 +11502,7 @@
                 <a:ea typeface="Microsoft JhengHei"/>
                 <a:cs typeface="Microsoft JhengHei"/>
               </a:rPr>
-              <a:t>本公司偵測到APP系統有異常讀取情形，經調查確認，約12萬筆履歷資料遭未經授權讀取。</a:t>
+              <a:t>本公司於115年9月29日發現不明IP異常侵入公司營運資訊設備，造成公司遊戲營運資料外洩，包含部…</a:t>
             </a:r>
           </a:p>
         </p:txBody>
@@ -11537,7 +11537,7 @@
             <a:r>
               <a:rPr sz="1100" b="1">
                 <a:solidFill>
-                  <a:srgbClr val="5C6679"/>
+                  <a:srgbClr val="27A6C4"/>
                 </a:solidFill>
                 <a:latin typeface="Microsoft JhengHei"/>
                 <a:ea typeface="Microsoft JhengHei"/>
@@ -11554,7 +11554,7 @@
                 <a:ea typeface="Microsoft JhengHei"/>
                 <a:cs typeface="Microsoft JhengHei"/>
               </a:rPr>
-              <a:t>本公司已採取相關防護及阻斷措施，並持續進行資安鑑識及強化資訊安全防護機制。本公司將依調查結果及相關法令辦理後續事宜，如有…</a:t>
+              <a:t>(1)持續提升資安防禦，強化監控與防護層級。(2)委由外部專業資安團隊協助事件調查，並於相關主機部署偵測及防護機制。(3…</a:t>
             </a:r>
           </a:p>
         </p:txBody>
@@ -11620,7 +11620,7 @@
             <a:avLst/>
           </a:prstGeom>
           <a:solidFill>
-            <a:srgbClr val="27A6C4"/>
+            <a:srgbClr val="5C6679"/>
           </a:solidFill>
           <a:ln>
             <a:noFill/>
@@ -11681,7 +11681,7 @@
                 <a:ea typeface="Microsoft JhengHei"/>
                 <a:cs typeface="Microsoft JhengHei"/>
               </a:rPr>
-              <a:t>安心 </a:t>
+              <a:t>一零四 </a:t>
             </a:r>
             <a:r>
               <a:rPr sz="1300" b="0">
@@ -11692,7 +11692,7 @@
                 <a:ea typeface="Microsoft JhengHei"/>
                 <a:cs typeface="Microsoft JhengHei"/>
               </a:rPr>
-              <a:t>1259</a:t>
+              <a:t>3130</a:t>
             </a:r>
           </a:p>
         </p:txBody>
@@ -11712,7 +11712,7 @@
             <a:avLst/>
           </a:prstGeom>
           <a:solidFill>
-            <a:srgbClr val="27A6C4"/>
+            <a:srgbClr val="5C6679"/>
           </a:solidFill>
           <a:ln>
             <a:noFill/>
@@ -11773,7 +11773,7 @@
                 <a:ea typeface="Microsoft JhengHei"/>
                 <a:cs typeface="Microsoft JhengHei"/>
               </a:rPr>
-              <a:t>個資外洩</a:t>
+              <a:t>其他</a:t>
             </a:r>
           </a:p>
         </p:txBody>
@@ -11808,7 +11808,7 @@
             <a:r>
               <a:rPr sz="1100" b="1">
                 <a:solidFill>
-                  <a:srgbClr val="27A6C4"/>
+                  <a:srgbClr val="5C6679"/>
                 </a:solidFill>
                 <a:latin typeface="Microsoft JhengHei"/>
                 <a:ea typeface="Microsoft JhengHei"/>
@@ -11825,7 +11825,7 @@
                 <a:ea typeface="Microsoft JhengHei"/>
                 <a:cs typeface="Microsoft JhengHei"/>
               </a:rPr>
-              <a:t>消費者反應疑似個資外洩事件</a:t>
+              <a:t>本公司偵測到APP系統有異常讀取情形，經調查確認，約12萬筆履歷資料遭未經授權讀取。</a:t>
             </a:r>
           </a:p>
         </p:txBody>
@@ -11860,7 +11860,7 @@
             <a:r>
               <a:rPr sz="1100" b="1">
                 <a:solidFill>
-                  <a:srgbClr val="27A6C4"/>
+                  <a:srgbClr val="5C6679"/>
                 </a:solidFill>
                 <a:latin typeface="Microsoft JhengHei"/>
                 <a:ea typeface="Microsoft JhengHei"/>
@@ -11877,7 +11877,7 @@
                 <a:ea typeface="Microsoft JhengHei"/>
                 <a:cs typeface="Microsoft JhengHei"/>
               </a:rPr>
-              <a:t>本公司已立即針對本次資安事件啟動應變作業。需特別說明，本次疑似個資外洩事件之平台係由委外廠商管理，非屬本公司自有之MOS…</a:t>
+              <a:t>本公司已採取相關防護及阻斷措施，並持續進行資安鑑識及強化資訊安全防護機制。本公司將依調查結果及相關法令辦理後續事宜，如有…</a:t>
             </a:r>
           </a:p>
         </p:txBody>
@@ -11943,7 +11943,7 @@
             <a:avLst/>
           </a:prstGeom>
           <a:solidFill>
-            <a:srgbClr val="E63946"/>
+            <a:srgbClr val="27A6C4"/>
           </a:solidFill>
           <a:ln>
             <a:noFill/>
@@ -12004,7 +12004,7 @@
                 <a:ea typeface="Microsoft JhengHei"/>
                 <a:cs typeface="Microsoft JhengHei"/>
               </a:rPr>
-              <a:t>神腦 </a:t>
+              <a:t>安心 </a:t>
             </a:r>
             <a:r>
               <a:rPr sz="1300" b="0">
@@ -12015,7 +12015,7 @@
                 <a:ea typeface="Microsoft JhengHei"/>
                 <a:cs typeface="Microsoft JhengHei"/>
               </a:rPr>
-              <a:t>2450</a:t>
+              <a:t>1259</a:t>
             </a:r>
           </a:p>
         </p:txBody>
@@ -12035,7 +12035,7 @@
             <a:avLst/>
           </a:prstGeom>
           <a:solidFill>
-            <a:srgbClr val="E63946"/>
+            <a:srgbClr val="27A6C4"/>
           </a:solidFill>
           <a:ln>
             <a:noFill/>
@@ -12096,7 +12096,7 @@
                 <a:ea typeface="Microsoft JhengHei"/>
                 <a:cs typeface="Microsoft JhengHei"/>
               </a:rPr>
-              <a:t>駭客攻擊</a:t>
+              <a:t>個資外洩</a:t>
             </a:r>
           </a:p>
         </p:txBody>
@@ -12131,7 +12131,7 @@
             <a:r>
               <a:rPr sz="1100" b="1">
                 <a:solidFill>
-                  <a:srgbClr val="E63946"/>
+                  <a:srgbClr val="27A6C4"/>
                 </a:solidFill>
                 <a:latin typeface="Microsoft JhengHei"/>
                 <a:ea typeface="Microsoft JhengHei"/>
@@ -12148,7 +12148,7 @@
                 <a:ea typeface="Microsoft JhengHei"/>
                 <a:cs typeface="Microsoft JhengHei"/>
               </a:rPr>
-              <a:t>本公司外部伺服器遭受自動化攻擊事件說明。</a:t>
+              <a:t>消費者反應疑似個資外洩事件</a:t>
             </a:r>
           </a:p>
         </p:txBody>
@@ -12183,7 +12183,7 @@
             <a:r>
               <a:rPr sz="1100" b="1">
                 <a:solidFill>
-                  <a:srgbClr val="E63946"/>
+                  <a:srgbClr val="27A6C4"/>
                 </a:solidFill>
                 <a:latin typeface="Microsoft JhengHei"/>
                 <a:ea typeface="Microsoft JhengHei"/>
@@ -12200,7 +12200,7 @@
                 <a:ea typeface="Microsoft JhengHei"/>
                 <a:cs typeface="Microsoft JhengHei"/>
               </a:rPr>
-              <a:t>本公司已與第三方資安廠商合作，全面強化網路偵測、系統監控與安全管控，以確保資訊安全。</a:t>
+              <a:t>本公司已立即針對本次資安事件啟動應變作業。需特別說明，本次疑似個資外洩事件之平台係由委外廠商管理，非屬本公司自有之MOS…</a:t>
             </a:r>
           </a:p>
         </p:txBody>
@@ -12402,7 +12402,7 @@
             <a:avLst/>
           </a:prstGeom>
           <a:solidFill>
-            <a:srgbClr val="5C6679"/>
+            <a:srgbClr val="E63946"/>
           </a:solidFill>
           <a:ln>
             <a:noFill/>
@@ -12463,7 +12463,7 @@
                 <a:ea typeface="Microsoft JhengHei"/>
                 <a:cs typeface="Microsoft JhengHei"/>
               </a:rPr>
-              <a:t>鈊象 </a:t>
+              <a:t>神腦 </a:t>
             </a:r>
             <a:r>
               <a:rPr sz="1300" b="0">
@@ -12474,7 +12474,7 @@
                 <a:ea typeface="Microsoft JhengHei"/>
                 <a:cs typeface="Microsoft JhengHei"/>
               </a:rPr>
-              <a:t>3293</a:t>
+              <a:t>2450</a:t>
             </a:r>
           </a:p>
         </p:txBody>
@@ -12494,7 +12494,7 @@
             <a:avLst/>
           </a:prstGeom>
           <a:solidFill>
-            <a:srgbClr val="5C6679"/>
+            <a:srgbClr val="E63946"/>
           </a:solidFill>
           <a:ln>
             <a:noFill/>
@@ -12555,7 +12555,7 @@
                 <a:ea typeface="Microsoft JhengHei"/>
                 <a:cs typeface="Microsoft JhengHei"/>
               </a:rPr>
-              <a:t>其他</a:t>
+              <a:t>駭客攻擊</a:t>
             </a:r>
           </a:p>
         </p:txBody>
@@ -12590,7 +12590,7 @@
             <a:r>
               <a:rPr sz="1100" b="1">
                 <a:solidFill>
-                  <a:srgbClr val="5C6679"/>
+                  <a:srgbClr val="E63946"/>
                 </a:solidFill>
                 <a:latin typeface="Microsoft JhengHei"/>
                 <a:ea typeface="Microsoft JhengHei"/>
@@ -12607,7 +12607,7 @@
                 <a:ea typeface="Microsoft JhengHei"/>
                 <a:cs typeface="Microsoft JhengHei"/>
               </a:rPr>
-              <a:t>本公司於115年9月29日發現不明IP異常侵入公司營運資訊設備。</a:t>
+              <a:t>本公司外部伺服器遭受自動化攻擊事件說明。</a:t>
             </a:r>
           </a:p>
         </p:txBody>
@@ -12642,7 +12642,7 @@
             <a:r>
               <a:rPr sz="1100" b="1">
                 <a:solidFill>
-                  <a:srgbClr val="5C6679"/>
+                  <a:srgbClr val="E63946"/>
                 </a:solidFill>
                 <a:latin typeface="Microsoft JhengHei"/>
                 <a:ea typeface="Microsoft JhengHei"/>
@@ -12659,7 +12659,7 @@
                 <a:ea typeface="Microsoft JhengHei"/>
                 <a:cs typeface="Microsoft JhengHei"/>
               </a:rPr>
-              <a:t>持續提升資安防禦，強化監控與防護層級。</a:t>
+              <a:t>本公司已與第三方資安廠商合作，全面強化網路偵測、系統監控與安全管控，以確保資訊安全。</a:t>
             </a:r>
           </a:p>
         </p:txBody>
@@ -12725,7 +12725,7 @@
             <a:avLst/>
           </a:prstGeom>
           <a:solidFill>
-            <a:srgbClr val="27A6C4"/>
+            <a:srgbClr val="5C6679"/>
           </a:solidFill>
           <a:ln>
             <a:noFill/>
@@ -12786,7 +12786,7 @@
                 <a:ea typeface="Microsoft JhengHei"/>
                 <a:cs typeface="Microsoft JhengHei"/>
               </a:rPr>
-              <a:t>柏文 </a:t>
+              <a:t>鈊象 </a:t>
             </a:r>
             <a:r>
               <a:rPr sz="1300" b="0">
@@ -12797,7 +12797,7 @@
                 <a:ea typeface="Microsoft JhengHei"/>
                 <a:cs typeface="Microsoft JhengHei"/>
               </a:rPr>
-              <a:t>8462</a:t>
+              <a:t>3293</a:t>
             </a:r>
           </a:p>
         </p:txBody>
@@ -12817,7 +12817,7 @@
             <a:avLst/>
           </a:prstGeom>
           <a:solidFill>
-            <a:srgbClr val="27A6C4"/>
+            <a:srgbClr val="5C6679"/>
           </a:solidFill>
           <a:ln>
             <a:noFill/>
@@ -12878,7 +12878,7 @@
                 <a:ea typeface="Microsoft JhengHei"/>
                 <a:cs typeface="Microsoft JhengHei"/>
               </a:rPr>
-              <a:t>個資外洩</a:t>
+              <a:t>其他</a:t>
             </a:r>
           </a:p>
         </p:txBody>
@@ -12913,7 +12913,7 @@
             <a:r>
               <a:rPr sz="1100" b="1">
                 <a:solidFill>
-                  <a:srgbClr val="27A6C4"/>
+                  <a:srgbClr val="5C6679"/>
                 </a:solidFill>
                 <a:latin typeface="Microsoft JhengHei"/>
                 <a:ea typeface="Microsoft JhengHei"/>
@@ -12930,7 +12930,7 @@
                 <a:ea typeface="Microsoft JhengHei"/>
                 <a:cs typeface="Microsoft JhengHei"/>
               </a:rPr>
-              <a:t>本公司接獲系統委外廠商通知其對外服務系統遭自動化攻擊，並對客戶資料表分頁擷取，其中部分涉及本公司…</a:t>
+              <a:t>本公司於115年9月29日發現不明IP異常侵入公司營運資訊設備。</a:t>
             </a:r>
           </a:p>
         </p:txBody>
@@ -12965,7 +12965,7 @@
             <a:r>
               <a:rPr sz="1100" b="1">
                 <a:solidFill>
-                  <a:srgbClr val="27A6C4"/>
+                  <a:srgbClr val="5C6679"/>
                 </a:solidFill>
                 <a:latin typeface="Microsoft JhengHei"/>
                 <a:ea typeface="Microsoft JhengHei"/>
@@ -12982,7 +12982,7 @@
                 <a:ea typeface="Microsoft JhengHei"/>
                 <a:cs typeface="Microsoft JhengHei"/>
               </a:rPr>
-              <a:t>本公司已要求系統委外廠商重新檢視造成資安疑慮因子並加以防範，同時持續針對系統委外廠商加強監控。</a:t>
+              <a:t>持續提升資安防禦，強化監控與防護層級。</a:t>
             </a:r>
           </a:p>
         </p:txBody>
@@ -13048,7 +13048,7 @@
             <a:avLst/>
           </a:prstGeom>
           <a:solidFill>
-            <a:srgbClr val="E63946"/>
+            <a:srgbClr val="27A6C4"/>
           </a:solidFill>
           <a:ln>
             <a:noFill/>
@@ -13109,7 +13109,7 @@
                 <a:ea typeface="Microsoft JhengHei"/>
                 <a:cs typeface="Microsoft JhengHei"/>
               </a:rPr>
-              <a:t>友訊 </a:t>
+              <a:t>柏文 </a:t>
             </a:r>
             <a:r>
               <a:rPr sz="1300" b="0">
@@ -13120,7 +13120,7 @@
                 <a:ea typeface="Microsoft JhengHei"/>
                 <a:cs typeface="Microsoft JhengHei"/>
               </a:rPr>
-              <a:t>2332</a:t>
+              <a:t>8462</a:t>
             </a:r>
           </a:p>
         </p:txBody>
@@ -13140,7 +13140,7 @@
             <a:avLst/>
           </a:prstGeom>
           <a:solidFill>
-            <a:srgbClr val="E63946"/>
+            <a:srgbClr val="27A6C4"/>
           </a:solidFill>
           <a:ln>
             <a:noFill/>
@@ -13201,7 +13201,7 @@
                 <a:ea typeface="Microsoft JhengHei"/>
                 <a:cs typeface="Microsoft JhengHei"/>
               </a:rPr>
-              <a:t>駭客攻擊</a:t>
+              <a:t>個資外洩</a:t>
             </a:r>
           </a:p>
         </p:txBody>
@@ -13236,7 +13236,7 @@
             <a:r>
               <a:rPr sz="1100" b="1">
                 <a:solidFill>
-                  <a:srgbClr val="E63946"/>
+                  <a:srgbClr val="27A6C4"/>
                 </a:solidFill>
                 <a:latin typeface="Microsoft JhengHei"/>
                 <a:ea typeface="Microsoft JhengHei"/>
@@ -13253,7 +13253,7 @@
                 <a:ea typeface="Microsoft JhengHei"/>
                 <a:cs typeface="Microsoft JhengHei"/>
               </a:rPr>
-              <a:t>本公司網站監控中發現登入記錄異常，查知外部攻擊者利用既有登入機制，以大量帳號密碼進行網站登入驗證…</a:t>
+              <a:t>本公司接獲系統委外廠商通知其對外服務系統遭自動化攻擊，並對客戶資料表分頁擷取，其中部分涉及本公司…</a:t>
             </a:r>
           </a:p>
         </p:txBody>
@@ -13288,7 +13288,7 @@
             <a:r>
               <a:rPr sz="1100" b="1">
                 <a:solidFill>
-                  <a:srgbClr val="E63946"/>
+                  <a:srgbClr val="27A6C4"/>
                 </a:solidFill>
                 <a:latin typeface="Microsoft JhengHei"/>
                 <a:ea typeface="Microsoft JhengHei"/>
@@ -13305,7 +13305,7 @@
                 <a:ea typeface="Microsoft JhengHei"/>
                 <a:cs typeface="Microsoft JhengHei"/>
               </a:rPr>
-              <a:t>(1)強化網站登入驗證、存取控制及異常行為偵測機制。(2)強化網頁應用程式防火牆，降低大量或異常登入嘗試之可行性。(3)…</a:t>
+              <a:t>本公司已要求系統委外廠商重新檢視造成資安疑慮因子並加以防範，同時持續針對系統委外廠商加強監控。</a:t>
             </a:r>
           </a:p>
         </p:txBody>

--- a/資安事件因應分析.pptx
+++ b/資安事件因應分析.pptx
@@ -186,13 +186,13 @@
                 <c:formatCode>General</c:formatCode>
                 <c:ptCount val="3"/>
                 <c:pt idx="0">
-                  <c:v>2</c:v>
+                  <c:v>3</c:v>
                 </c:pt>
                 <c:pt idx="1">
-                  <c:v>5</c:v>
+                  <c:v>3</c:v>
                 </c:pt>
                 <c:pt idx="2">
-                  <c:v>4</c:v>
+                  <c:v>3</c:v>
                 </c:pt>
               </c:numCache>
             </c:numRef>
@@ -3529,7 +3529,7 @@
                 <a:ea typeface="Microsoft JhengHei"/>
                 <a:cs typeface="Microsoft JhengHei"/>
               </a:rPr>
-              <a:t>資料期間 2026-09-20 ~ 2026-10-20　｜　MOPS 重大訊息全文檢索　｜　11 家公司</a:t>
+              <a:t>資料期間 2026-09-22 ~ 2026-10-22　｜　MOPS 重大訊息全文檢索　｜　9 家公司</a:t>
             </a:r>
           </a:p>
         </p:txBody>
@@ -3746,7 +3746,7 @@
                 <a:ea typeface="Microsoft JhengHei"/>
                 <a:cs typeface="Microsoft JhengHei"/>
               </a:rPr>
-              <a:t>資料期間內 MOPS 揭露之 11 起資安相關重大訊息</a:t>
+              <a:t>資料期間內 MOPS 揭露之 9 起資安相關重大訊息</a:t>
             </a:r>
           </a:p>
         </p:txBody>
@@ -3829,7 +3829,7 @@
                 <a:ea typeface="Microsoft JhengHei"/>
                 <a:cs typeface="Microsoft JhengHei"/>
               </a:rPr>
-              <a:t>11</a:t>
+              <a:t>9</a:t>
             </a:r>
           </a:p>
         </p:txBody>
@@ -4136,7 +4136,7 @@
                 <a:gridCol w="2286000"/>
                 <a:gridCol w="5120640"/>
               </a:tblGrid>
-              <a:tr h="297180">
+              <a:tr h="356616">
                 <a:tc>
                   <a:txBody>
                     <a:bodyPr/>
@@ -4258,7 +4258,7 @@
                   </a:tcPr>
                 </a:tc>
               </a:tr>
-              <a:tr h="297180">
+              <a:tr h="356616">
                 <a:tc>
                   <a:txBody>
                     <a:bodyPr/>
@@ -4273,7 +4273,7 @@
                           <a:ea typeface="Microsoft JhengHei"/>
                           <a:cs typeface="Microsoft JhengHei"/>
                         </a:rPr>
-                        <a:t>滿心</a:t>
+                        <a:t>美食-KY</a:t>
                       </a:r>
                     </a:p>
                   </a:txBody>
@@ -4297,7 +4297,7 @@
                           <a:ea typeface="Microsoft JhengHei"/>
                           <a:cs typeface="Microsoft JhengHei"/>
                         </a:rPr>
-                        <a:t>2916</a:t>
+                        <a:t>2723</a:t>
                       </a:r>
                     </a:p>
                   </a:txBody>
@@ -4321,13 +4321,135 @@
                           <a:ea typeface="Microsoft JhengHei"/>
                           <a:cs typeface="Microsoft JhengHei"/>
                         </a:rPr>
+                        <a:t>10/21</a:t>
+                      </a:r>
+                    </a:p>
+                  </a:txBody>
+                  <a:tcPr anchor="ctr" marL="73152" marT="9144" marB="9144">
+                    <a:solidFill>
+                      <a:srgbClr val="FFFFFF"/>
+                    </a:solidFill>
+                  </a:tcPr>
+                </a:tc>
+                <a:tc>
+                  <a:txBody>
+                    <a:bodyPr/>
+                    <a:lstStyle/>
+                    <a:p>
+                      <a:r>
+                        <a:rPr sz="1150" b="1">
+                          <a:solidFill>
+                            <a:srgbClr val="E63946"/>
+                          </a:solidFill>
+                          <a:latin typeface="Microsoft JhengHei"/>
+                          <a:ea typeface="Microsoft JhengHei"/>
+                          <a:cs typeface="Microsoft JhengHei"/>
+                        </a:rPr>
+                        <a:t>駭客攻擊</a:t>
+                      </a:r>
+                    </a:p>
+                  </a:txBody>
+                  <a:tcPr anchor="ctr" marL="73152" marT="9144" marB="9144">
+                    <a:solidFill>
+                      <a:srgbClr val="FFFFFF"/>
+                    </a:solidFill>
+                  </a:tcPr>
+                </a:tc>
+                <a:tc>
+                  <a:txBody>
+                    <a:bodyPr/>
+                    <a:lstStyle/>
+                    <a:p>
+                      <a:r>
+                        <a:rPr sz="1150" b="0">
+                          <a:solidFill>
+                            <a:srgbClr val="1A2233"/>
+                          </a:solidFill>
+                          <a:latin typeface="Microsoft JhengHei"/>
+                          <a:ea typeface="Microsoft JhengHei"/>
+                          <a:cs typeface="Microsoft JhengHei"/>
+                        </a:rPr>
+                        <a:t>經初步評估，並綜合考量係單一市場事件，目前尚未對合併公司整體之營運及…</a:t>
+                      </a:r>
+                    </a:p>
+                  </a:txBody>
+                  <a:tcPr anchor="ctr" marL="73152" marT="9144" marB="9144">
+                    <a:solidFill>
+                      <a:srgbClr val="FFFFFF"/>
+                    </a:solidFill>
+                  </a:tcPr>
+                </a:tc>
+              </a:tr>
+              <a:tr h="356616">
+                <a:tc>
+                  <a:txBody>
+                    <a:bodyPr/>
+                    <a:lstStyle/>
+                    <a:p>
+                      <a:r>
+                        <a:rPr sz="1150" b="0">
+                          <a:solidFill>
+                            <a:srgbClr val="1A2233"/>
+                          </a:solidFill>
+                          <a:latin typeface="Microsoft JhengHei"/>
+                          <a:ea typeface="Microsoft JhengHei"/>
+                          <a:cs typeface="Microsoft JhengHei"/>
+                        </a:rPr>
+                        <a:t>滿心</a:t>
+                      </a:r>
+                    </a:p>
+                  </a:txBody>
+                  <a:tcPr anchor="ctr" marL="73152" marT="9144" marB="9144">
+                    <a:solidFill>
+                      <a:srgbClr val="EEF2F9"/>
+                    </a:solidFill>
+                  </a:tcPr>
+                </a:tc>
+                <a:tc>
+                  <a:txBody>
+                    <a:bodyPr/>
+                    <a:lstStyle/>
+                    <a:p>
+                      <a:r>
+                        <a:rPr sz="1150" b="0">
+                          <a:solidFill>
+                            <a:srgbClr val="1A2233"/>
+                          </a:solidFill>
+                          <a:latin typeface="Microsoft JhengHei"/>
+                          <a:ea typeface="Microsoft JhengHei"/>
+                          <a:cs typeface="Microsoft JhengHei"/>
+                        </a:rPr>
+                        <a:t>2916</a:t>
+                      </a:r>
+                    </a:p>
+                  </a:txBody>
+                  <a:tcPr anchor="ctr" marL="73152" marT="9144" marB="9144">
+                    <a:solidFill>
+                      <a:srgbClr val="EEF2F9"/>
+                    </a:solidFill>
+                  </a:tcPr>
+                </a:tc>
+                <a:tc>
+                  <a:txBody>
+                    <a:bodyPr/>
+                    <a:lstStyle/>
+                    <a:p>
+                      <a:r>
+                        <a:rPr sz="1150" b="0">
+                          <a:solidFill>
+                            <a:srgbClr val="1A2233"/>
+                          </a:solidFill>
+                          <a:latin typeface="Microsoft JhengHei"/>
+                          <a:ea typeface="Microsoft JhengHei"/>
+                          <a:cs typeface="Microsoft JhengHei"/>
+                        </a:rPr>
                         <a:t>10/19</a:t>
                       </a:r>
                     </a:p>
                   </a:txBody>
                   <a:tcPr anchor="ctr" marL="73152" marT="9144" marB="9144">
                     <a:solidFill>
-                      <a:srgbClr val="FFFFFF"/>
+                      <a:srgbClr val="EEF2F9"/>
                     </a:solidFill>
                   </a:tcPr>
                 </a:tc>
@@ -4351,7 +4473,7 @@
                   </a:txBody>
                   <a:tcPr anchor="ctr" marL="73152" marT="9144" marB="9144">
                     <a:solidFill>
-                      <a:srgbClr val="FFFFFF"/>
+                      <a:srgbClr val="EEF2F9"/>
                     </a:solidFill>
                   </a:tcPr>
                 </a:tc>
@@ -4375,12 +4497,12 @@
                   </a:txBody>
                   <a:tcPr anchor="ctr" marL="73152" marT="9144" marB="9144">
                     <a:solidFill>
-                      <a:srgbClr val="FFFFFF"/>
+                      <a:srgbClr val="EEF2F9"/>
                     </a:solidFill>
                   </a:tcPr>
                 </a:tc>
               </a:tr>
-              <a:tr h="297180">
+              <a:tr h="356616">
                 <a:tc>
                   <a:txBody>
                     <a:bodyPr/>
@@ -4401,7 +4523,7 @@
                   </a:txBody>
                   <a:tcPr anchor="ctr" marL="73152" marT="9144" marB="9144">
                     <a:solidFill>
-                      <a:srgbClr val="EEF2F9"/>
+                      <a:srgbClr val="FFFFFF"/>
                     </a:solidFill>
                   </a:tcPr>
                 </a:tc>
@@ -4425,7 +4547,7 @@
                   </a:txBody>
                   <a:tcPr anchor="ctr" marL="73152" marT="9144" marB="9144">
                     <a:solidFill>
-                      <a:srgbClr val="EEF2F9"/>
+                      <a:srgbClr val="FFFFFF"/>
                     </a:solidFill>
                   </a:tcPr>
                 </a:tc>
@@ -4449,7 +4571,7 @@
                   </a:txBody>
                   <a:tcPr anchor="ctr" marL="73152" marT="9144" marB="9144">
                     <a:solidFill>
-                      <a:srgbClr val="EEF2F9"/>
+                      <a:srgbClr val="FFFFFF"/>
                     </a:solidFill>
                   </a:tcPr>
                 </a:tc>
@@ -4473,7 +4595,7 @@
                   </a:txBody>
                   <a:tcPr anchor="ctr" marL="73152" marT="9144" marB="9144">
                     <a:solidFill>
-                      <a:srgbClr val="EEF2F9"/>
+                      <a:srgbClr val="FFFFFF"/>
                     </a:solidFill>
                   </a:tcPr>
                 </a:tc>
@@ -4497,134 +4619,12 @@
                   </a:txBody>
                   <a:tcPr anchor="ctr" marL="73152" marT="9144" marB="9144">
                     <a:solidFill>
-                      <a:srgbClr val="EEF2F9"/>
-                    </a:solidFill>
-                  </a:tcPr>
-                </a:tc>
-              </a:tr>
-              <a:tr h="297180">
-                <a:tc>
-                  <a:txBody>
-                    <a:bodyPr/>
-                    <a:lstStyle/>
-                    <a:p>
-                      <a:r>
-                        <a:rPr sz="1150" b="0">
-                          <a:solidFill>
-                            <a:srgbClr val="1A2233"/>
-                          </a:solidFill>
-                          <a:latin typeface="Microsoft JhengHei"/>
-                          <a:ea typeface="Microsoft JhengHei"/>
-                          <a:cs typeface="Microsoft JhengHei"/>
-                        </a:rPr>
-                        <a:t>緯致</a:t>
-                      </a:r>
-                    </a:p>
-                  </a:txBody>
-                  <a:tcPr anchor="ctr" marL="73152" marT="9144" marB="9144">
-                    <a:solidFill>
-                      <a:srgbClr val="FFFFFF"/>
-                    </a:solidFill>
-                  </a:tcPr>
-                </a:tc>
-                <a:tc>
-                  <a:txBody>
-                    <a:bodyPr/>
-                    <a:lstStyle/>
-                    <a:p>
-                      <a:r>
-                        <a:rPr sz="1150" b="0">
-                          <a:solidFill>
-                            <a:srgbClr val="1A2233"/>
-                          </a:solidFill>
-                          <a:latin typeface="Microsoft JhengHei"/>
-                          <a:ea typeface="Microsoft JhengHei"/>
-                          <a:cs typeface="Microsoft JhengHei"/>
-                        </a:rPr>
-                        <a:t>4953</a:t>
-                      </a:r>
-                    </a:p>
-                  </a:txBody>
-                  <a:tcPr anchor="ctr" marL="73152" marT="9144" marB="9144">
-                    <a:solidFill>
-                      <a:srgbClr val="FFFFFF"/>
-                    </a:solidFill>
-                  </a:tcPr>
-                </a:tc>
-                <a:tc>
-                  <a:txBody>
-                    <a:bodyPr/>
-                    <a:lstStyle/>
-                    <a:p>
-                      <a:r>
-                        <a:rPr sz="1150" b="0">
-                          <a:solidFill>
-                            <a:srgbClr val="1A2233"/>
-                          </a:solidFill>
-                          <a:latin typeface="Microsoft JhengHei"/>
-                          <a:ea typeface="Microsoft JhengHei"/>
-                          <a:cs typeface="Microsoft JhengHei"/>
-                        </a:rPr>
-                        <a:t>10/09</a:t>
-                      </a:r>
-                    </a:p>
-                  </a:txBody>
-                  <a:tcPr anchor="ctr" marL="73152" marT="9144" marB="9144">
-                    <a:solidFill>
-                      <a:srgbClr val="FFFFFF"/>
-                    </a:solidFill>
-                  </a:tcPr>
-                </a:tc>
-                <a:tc>
-                  <a:txBody>
-                    <a:bodyPr/>
-                    <a:lstStyle/>
-                    <a:p>
-                      <a:r>
-                        <a:rPr sz="1150" b="1">
-                          <a:solidFill>
-                            <a:srgbClr val="5C6679"/>
-                          </a:solidFill>
-                          <a:latin typeface="Microsoft JhengHei"/>
-                          <a:ea typeface="Microsoft JhengHei"/>
-                          <a:cs typeface="Microsoft JhengHei"/>
-                        </a:rPr>
-                        <a:t>其他</a:t>
-                      </a:r>
-                    </a:p>
-                  </a:txBody>
-                  <a:tcPr anchor="ctr" marL="73152" marT="9144" marB="9144">
-                    <a:solidFill>
-                      <a:srgbClr val="FFFFFF"/>
-                    </a:solidFill>
-                  </a:tcPr>
-                </a:tc>
-                <a:tc>
-                  <a:txBody>
-                    <a:bodyPr/>
-                    <a:lstStyle/>
-                    <a:p>
-                      <a:r>
-                        <a:rPr sz="1150" b="0">
-                          <a:solidFill>
-                            <a:srgbClr val="1A2233"/>
-                          </a:solidFill>
-                          <a:latin typeface="Microsoft JhengHei"/>
-                          <a:ea typeface="Microsoft JhengHei"/>
-                          <a:cs typeface="Microsoft JhengHei"/>
-                        </a:rPr>
-                        <a:t>目前公司整體系統與營運正常運作，對公司尚無重大影響。</a:t>
-                      </a:r>
-                    </a:p>
-                  </a:txBody>
-                  <a:tcPr anchor="ctr" marL="73152" marT="9144" marB="9144">
-                    <a:solidFill>
                       <a:srgbClr val="FFFFFF"/>
                     </a:solidFill>
                   </a:tcPr>
                 </a:tc>
               </a:tr>
-              <a:tr h="297180">
+              <a:tr h="356616">
                 <a:tc>
                   <a:txBody>
                     <a:bodyPr/>
@@ -4746,7 +4746,7 @@
                   </a:tcPr>
                 </a:tc>
               </a:tr>
-              <a:tr h="297180">
+              <a:tr h="356616">
                 <a:tc>
                   <a:txBody>
                     <a:bodyPr/>
@@ -4761,7 +4761,7 @@
                           <a:ea typeface="Microsoft JhengHei"/>
                           <a:cs typeface="Microsoft JhengHei"/>
                         </a:rPr>
-                        <a:t>杏一</a:t>
+                        <a:t>鈊象</a:t>
                       </a:r>
                     </a:p>
                   </a:txBody>
@@ -4785,7 +4785,7 @@
                           <a:ea typeface="Microsoft JhengHei"/>
                           <a:cs typeface="Microsoft JhengHei"/>
                         </a:rPr>
-                        <a:t>4175</a:t>
+                        <a:t>3293</a:t>
                       </a:r>
                     </a:p>
                   </a:txBody>
@@ -4857,7 +4857,7 @@
                           <a:ea typeface="Microsoft JhengHei"/>
                           <a:cs typeface="Microsoft JhengHei"/>
                         </a:rPr>
-                        <a:t>截至目前為止對公司財務及業務並無重大影響。</a:t>
+                        <a:t>目前評估對公司營運無重大影響。</a:t>
                       </a:r>
                     </a:p>
                   </a:txBody>
@@ -4868,7 +4868,7 @@
                   </a:tcPr>
                 </a:tc>
               </a:tr>
-              <a:tr h="297180">
+              <a:tr h="356616">
                 <a:tc>
                   <a:txBody>
                     <a:bodyPr/>
@@ -4883,7 +4883,7 @@
                           <a:ea typeface="Microsoft JhengHei"/>
                           <a:cs typeface="Microsoft JhengHei"/>
                         </a:rPr>
-                        <a:t>鈊象</a:t>
+                        <a:t>一零四</a:t>
                       </a:r>
                     </a:p>
                   </a:txBody>
@@ -4907,7 +4907,7 @@
                           <a:ea typeface="Microsoft JhengHei"/>
                           <a:cs typeface="Microsoft JhengHei"/>
                         </a:rPr>
-                        <a:t>3293</a:t>
+                        <a:t>3130</a:t>
                       </a:r>
                     </a:p>
                   </a:txBody>
@@ -4931,7 +4931,7 @@
                           <a:ea typeface="Microsoft JhengHei"/>
                           <a:cs typeface="Microsoft JhengHei"/>
                         </a:rPr>
-                        <a:t>10/07</a:t>
+                        <a:t>10/06</a:t>
                       </a:r>
                     </a:p>
                   </a:txBody>
@@ -4949,13 +4949,13 @@
                       <a:r>
                         <a:rPr sz="1150" b="1">
                           <a:solidFill>
-                            <a:srgbClr val="27A6C4"/>
+                            <a:srgbClr val="5C6679"/>
                           </a:solidFill>
                           <a:latin typeface="Microsoft JhengHei"/>
                           <a:ea typeface="Microsoft JhengHei"/>
                           <a:cs typeface="Microsoft JhengHei"/>
                         </a:rPr>
-                        <a:t>個資外洩</a:t>
+                        <a:t>其他</a:t>
                       </a:r>
                     </a:p>
                   </a:txBody>
@@ -4979,7 +4979,7 @@
                           <a:ea typeface="Microsoft JhengHei"/>
                           <a:cs typeface="Microsoft JhengHei"/>
                         </a:rPr>
-                        <a:t>目前評估對公司營運無重大影響。</a:t>
+                        <a:t>目前系統與營運正常運作，對公司尚無重大影響。相關影響仍持續評估中。</a:t>
                       </a:r>
                     </a:p>
                   </a:txBody>
@@ -4990,251 +4990,7 @@
                   </a:tcPr>
                 </a:tc>
               </a:tr>
-              <a:tr h="297180">
-                <a:tc>
-                  <a:txBody>
-                    <a:bodyPr/>
-                    <a:lstStyle/>
-                    <a:p>
-                      <a:r>
-                        <a:rPr sz="1150" b="0">
-                          <a:solidFill>
-                            <a:srgbClr val="1A2233"/>
-                          </a:solidFill>
-                          <a:latin typeface="Microsoft JhengHei"/>
-                          <a:ea typeface="Microsoft JhengHei"/>
-                          <a:cs typeface="Microsoft JhengHei"/>
-                        </a:rPr>
-                        <a:t>一零四</a:t>
-                      </a:r>
-                    </a:p>
-                  </a:txBody>
-                  <a:tcPr anchor="ctr" marL="73152" marT="9144" marB="9144">
-                    <a:solidFill>
-                      <a:srgbClr val="FFFFFF"/>
-                    </a:solidFill>
-                  </a:tcPr>
-                </a:tc>
-                <a:tc>
-                  <a:txBody>
-                    <a:bodyPr/>
-                    <a:lstStyle/>
-                    <a:p>
-                      <a:r>
-                        <a:rPr sz="1150" b="0">
-                          <a:solidFill>
-                            <a:srgbClr val="1A2233"/>
-                          </a:solidFill>
-                          <a:latin typeface="Microsoft JhengHei"/>
-                          <a:ea typeface="Microsoft JhengHei"/>
-                          <a:cs typeface="Microsoft JhengHei"/>
-                        </a:rPr>
-                        <a:t>3130</a:t>
-                      </a:r>
-                    </a:p>
-                  </a:txBody>
-                  <a:tcPr anchor="ctr" marL="73152" marT="9144" marB="9144">
-                    <a:solidFill>
-                      <a:srgbClr val="FFFFFF"/>
-                    </a:solidFill>
-                  </a:tcPr>
-                </a:tc>
-                <a:tc>
-                  <a:txBody>
-                    <a:bodyPr/>
-                    <a:lstStyle/>
-                    <a:p>
-                      <a:r>
-                        <a:rPr sz="1150" b="0">
-                          <a:solidFill>
-                            <a:srgbClr val="1A2233"/>
-                          </a:solidFill>
-                          <a:latin typeface="Microsoft JhengHei"/>
-                          <a:ea typeface="Microsoft JhengHei"/>
-                          <a:cs typeface="Microsoft JhengHei"/>
-                        </a:rPr>
-                        <a:t>10/06</a:t>
-                      </a:r>
-                    </a:p>
-                  </a:txBody>
-                  <a:tcPr anchor="ctr" marL="73152" marT="9144" marB="9144">
-                    <a:solidFill>
-                      <a:srgbClr val="FFFFFF"/>
-                    </a:solidFill>
-                  </a:tcPr>
-                </a:tc>
-                <a:tc>
-                  <a:txBody>
-                    <a:bodyPr/>
-                    <a:lstStyle/>
-                    <a:p>
-                      <a:r>
-                        <a:rPr sz="1150" b="1">
-                          <a:solidFill>
-                            <a:srgbClr val="5C6679"/>
-                          </a:solidFill>
-                          <a:latin typeface="Microsoft JhengHei"/>
-                          <a:ea typeface="Microsoft JhengHei"/>
-                          <a:cs typeface="Microsoft JhengHei"/>
-                        </a:rPr>
-                        <a:t>其他</a:t>
-                      </a:r>
-                    </a:p>
-                  </a:txBody>
-                  <a:tcPr anchor="ctr" marL="73152" marT="9144" marB="9144">
-                    <a:solidFill>
-                      <a:srgbClr val="FFFFFF"/>
-                    </a:solidFill>
-                  </a:tcPr>
-                </a:tc>
-                <a:tc>
-                  <a:txBody>
-                    <a:bodyPr/>
-                    <a:lstStyle/>
-                    <a:p>
-                      <a:r>
-                        <a:rPr sz="1150" b="0">
-                          <a:solidFill>
-                            <a:srgbClr val="1A2233"/>
-                          </a:solidFill>
-                          <a:latin typeface="Microsoft JhengHei"/>
-                          <a:ea typeface="Microsoft JhengHei"/>
-                          <a:cs typeface="Microsoft JhengHei"/>
-                        </a:rPr>
-                        <a:t>目前系統與營運正常運作，對公司尚無重大影響。相關影響仍持續評估中。</a:t>
-                      </a:r>
-                    </a:p>
-                  </a:txBody>
-                  <a:tcPr anchor="ctr" marL="73152" marT="9144" marB="9144">
-                    <a:solidFill>
-                      <a:srgbClr val="FFFFFF"/>
-                    </a:solidFill>
-                  </a:tcPr>
-                </a:tc>
-              </a:tr>
-              <a:tr h="297180">
-                <a:tc>
-                  <a:txBody>
-                    <a:bodyPr/>
-                    <a:lstStyle/>
-                    <a:p>
-                      <a:r>
-                        <a:rPr sz="1150" b="0">
-                          <a:solidFill>
-                            <a:srgbClr val="1A2233"/>
-                          </a:solidFill>
-                          <a:latin typeface="Microsoft JhengHei"/>
-                          <a:ea typeface="Microsoft JhengHei"/>
-                          <a:cs typeface="Microsoft JhengHei"/>
-                        </a:rPr>
-                        <a:t>安心</a:t>
-                      </a:r>
-                    </a:p>
-                  </a:txBody>
-                  <a:tcPr anchor="ctr" marL="73152" marT="9144" marB="9144">
-                    <a:solidFill>
-                      <a:srgbClr val="EEF2F9"/>
-                    </a:solidFill>
-                  </a:tcPr>
-                </a:tc>
-                <a:tc>
-                  <a:txBody>
-                    <a:bodyPr/>
-                    <a:lstStyle/>
-                    <a:p>
-                      <a:r>
-                        <a:rPr sz="1150" b="0">
-                          <a:solidFill>
-                            <a:srgbClr val="1A2233"/>
-                          </a:solidFill>
-                          <a:latin typeface="Microsoft JhengHei"/>
-                          <a:ea typeface="Microsoft JhengHei"/>
-                          <a:cs typeface="Microsoft JhengHei"/>
-                        </a:rPr>
-                        <a:t>1259</a:t>
-                      </a:r>
-                    </a:p>
-                  </a:txBody>
-                  <a:tcPr anchor="ctr" marL="73152" marT="9144" marB="9144">
-                    <a:solidFill>
-                      <a:srgbClr val="EEF2F9"/>
-                    </a:solidFill>
-                  </a:tcPr>
-                </a:tc>
-                <a:tc>
-                  <a:txBody>
-                    <a:bodyPr/>
-                    <a:lstStyle/>
-                    <a:p>
-                      <a:r>
-                        <a:rPr sz="1150" b="0">
-                          <a:solidFill>
-                            <a:srgbClr val="1A2233"/>
-                          </a:solidFill>
-                          <a:latin typeface="Microsoft JhengHei"/>
-                          <a:ea typeface="Microsoft JhengHei"/>
-                          <a:cs typeface="Microsoft JhengHei"/>
-                        </a:rPr>
-                        <a:t>10/01</a:t>
-                      </a:r>
-                    </a:p>
-                  </a:txBody>
-                  <a:tcPr anchor="ctr" marL="73152" marT="9144" marB="9144">
-                    <a:solidFill>
-                      <a:srgbClr val="EEF2F9"/>
-                    </a:solidFill>
-                  </a:tcPr>
-                </a:tc>
-                <a:tc>
-                  <a:txBody>
-                    <a:bodyPr/>
-                    <a:lstStyle/>
-                    <a:p>
-                      <a:r>
-                        <a:rPr sz="1150" b="1">
-                          <a:solidFill>
-                            <a:srgbClr val="27A6C4"/>
-                          </a:solidFill>
-                          <a:latin typeface="Microsoft JhengHei"/>
-                          <a:ea typeface="Microsoft JhengHei"/>
-                          <a:cs typeface="Microsoft JhengHei"/>
-                        </a:rPr>
-                        <a:t>個資外洩</a:t>
-                      </a:r>
-                    </a:p>
-                  </a:txBody>
-                  <a:tcPr anchor="ctr" marL="73152" marT="9144" marB="9144">
-                    <a:solidFill>
-                      <a:srgbClr val="EEF2F9"/>
-                    </a:solidFill>
-                  </a:tcPr>
-                </a:tc>
-                <a:tc>
-                  <a:txBody>
-                    <a:bodyPr/>
-                    <a:lstStyle/>
-                    <a:p>
-                      <a:r>
-                        <a:rPr sz="1150" b="0">
-                          <a:solidFill>
-                            <a:srgbClr val="1A2233"/>
-                          </a:solidFill>
-                          <a:latin typeface="Microsoft JhengHei"/>
-                          <a:ea typeface="Microsoft JhengHei"/>
-                          <a:cs typeface="Microsoft JhengHei"/>
-                        </a:rPr>
-                        <a:t>截至目前為止對公司財務及業務並無重大影響。</a:t>
-                      </a:r>
-                    </a:p>
-                  </a:txBody>
-                  <a:tcPr anchor="ctr" marL="73152" marT="9144" marB="9144">
-                    <a:solidFill>
-                      <a:srgbClr val="EEF2F9"/>
-                    </a:solidFill>
-                  </a:tcPr>
-                </a:tc>
-              </a:tr>
-              <a:tr h="297180">
+              <a:tr h="356616">
                 <a:tc>
                   <a:txBody>
                     <a:bodyPr/>
@@ -5356,7 +5112,7 @@
                   </a:tcPr>
                 </a:tc>
               </a:tr>
-              <a:tr h="297180">
+              <a:tr h="356616">
                 <a:tc>
                   <a:txBody>
                     <a:bodyPr/>
@@ -5478,7 +5234,7 @@
                   </a:tcPr>
                 </a:tc>
               </a:tr>
-              <a:tr h="297180">
+              <a:tr h="356616">
                 <a:tc>
                   <a:txBody>
                     <a:bodyPr/>
@@ -5917,7 +5673,7 @@
                 <a:ea typeface="Microsoft JhengHei"/>
                 <a:cs typeface="Microsoft JhengHei"/>
               </a:rPr>
-              <a:t>2 起</a:t>
+              <a:t>3 起</a:t>
             </a:r>
           </a:p>
         </p:txBody>
@@ -5954,7 +5710,7 @@
                 <a:ea typeface="Microsoft JhengHei"/>
                 <a:cs typeface="Microsoft JhengHei"/>
               </a:rPr>
-              <a:t>91APP*-KY、神腦</a:t>
+              <a:t>美食-KY、91APP*-KY、神腦</a:t>
             </a:r>
           </a:p>
         </p:txBody>
@@ -6155,7 +5911,7 @@
                 <a:ea typeface="Microsoft JhengHei"/>
                 <a:cs typeface="Microsoft JhengHei"/>
               </a:rPr>
-              <a:t>5 起</a:t>
+              <a:t>3 起</a:t>
             </a:r>
           </a:p>
         </p:txBody>
@@ -6192,7 +5948,7 @@
                 <a:ea typeface="Microsoft JhengHei"/>
                 <a:cs typeface="Microsoft JhengHei"/>
               </a:rPr>
-              <a:t>滿心、杏一、鈊象、安心、柏文</a:t>
+              <a:t>滿心、鈊象、柏文</a:t>
             </a:r>
           </a:p>
         </p:txBody>
@@ -6393,7 +6149,7 @@
                 <a:ea typeface="Microsoft JhengHei"/>
                 <a:cs typeface="Microsoft JhengHei"/>
               </a:rPr>
-              <a:t>4 起</a:t>
+              <a:t>3 起</a:t>
             </a:r>
           </a:p>
         </p:txBody>
@@ -6430,7 +6186,7 @@
                 <a:ea typeface="Microsoft JhengHei"/>
                 <a:cs typeface="Microsoft JhengHei"/>
               </a:rPr>
-              <a:t>緯致、上福、一零四、鈊象</a:t>
+              <a:t>上福、一零四、鈊象</a:t>
             </a:r>
           </a:p>
         </p:txBody>
@@ -6633,7 +6389,7 @@
                 <a:gridCol w="3383280"/>
                 <a:gridCol w="2606040"/>
               </a:tblGrid>
-              <a:tr h="373380">
+              <a:tr h="448056">
                 <a:tc>
                   <a:txBody>
                     <a:bodyPr/>
@@ -6755,7 +6511,7 @@
                   </a:tcPr>
                 </a:tc>
               </a:tr>
-              <a:tr h="373380">
+              <a:tr h="448056">
                 <a:tc>
                   <a:txBody>
                     <a:bodyPr/>
@@ -6770,7 +6526,7 @@
                           <a:ea typeface="Microsoft JhengHei"/>
                           <a:cs typeface="Microsoft JhengHei"/>
                         </a:rPr>
-                        <a:t>滿心</a:t>
+                        <a:t>美食-KY</a:t>
                       </a:r>
                     </a:p>
                   </a:txBody>
@@ -6794,13 +6550,135 @@
                           <a:ea typeface="Microsoft JhengHei"/>
                           <a:cs typeface="Microsoft JhengHei"/>
                         </a:rPr>
+                        <a:t>2723</a:t>
+                      </a:r>
+                    </a:p>
+                  </a:txBody>
+                  <a:tcPr anchor="ctr" marL="73152" marT="9144" marB="9144">
+                    <a:solidFill>
+                      <a:srgbClr val="FFFFFF"/>
+                    </a:solidFill>
+                  </a:tcPr>
+                </a:tc>
+                <a:tc>
+                  <a:txBody>
+                    <a:bodyPr/>
+                    <a:lstStyle/>
+                    <a:p>
+                      <a:r>
+                        <a:rPr sz="1150" b="1">
+                          <a:solidFill>
+                            <a:srgbClr val="E63946"/>
+                          </a:solidFill>
+                          <a:latin typeface="Microsoft JhengHei"/>
+                          <a:ea typeface="Microsoft JhengHei"/>
+                          <a:cs typeface="Microsoft JhengHei"/>
+                        </a:rPr>
+                        <a:t>駭客攻擊</a:t>
+                      </a:r>
+                    </a:p>
+                  </a:txBody>
+                  <a:tcPr anchor="ctr" marL="73152" marT="9144" marB="9144">
+                    <a:solidFill>
+                      <a:srgbClr val="FFFFFF"/>
+                    </a:solidFill>
+                  </a:tcPr>
+                </a:tc>
+                <a:tc>
+                  <a:txBody>
+                    <a:bodyPr/>
+                    <a:lstStyle/>
+                    <a:p>
+                      <a:r>
+                        <a:rPr sz="1150" b="0">
+                          <a:solidFill>
+                            <a:srgbClr val="1A2233"/>
+                          </a:solidFill>
+                          <a:latin typeface="Microsoft JhengHei"/>
+                          <a:ea typeface="Microsoft JhengHei"/>
+                          <a:cs typeface="Microsoft JhengHei"/>
+                        </a:rPr>
+                        <a:t>勤業眾信聯合會計師事務所</a:t>
+                      </a:r>
+                    </a:p>
+                  </a:txBody>
+                  <a:tcPr anchor="ctr" marL="73152" marT="9144" marB="9144">
+                    <a:solidFill>
+                      <a:srgbClr val="FFFFFF"/>
+                    </a:solidFill>
+                  </a:tcPr>
+                </a:tc>
+                <a:tc>
+                  <a:txBody>
+                    <a:bodyPr/>
+                    <a:lstStyle/>
+                    <a:p>
+                      <a:r>
+                        <a:rPr sz="1150" b="0">
+                          <a:solidFill>
+                            <a:srgbClr val="1A2233"/>
+                          </a:solidFill>
+                          <a:latin typeface="Microsoft JhengHei"/>
+                          <a:ea typeface="Microsoft JhengHei"/>
+                          <a:cs typeface="Microsoft JhengHei"/>
+                        </a:rPr>
+                        <a:t>彭以驊、謝明忠</a:t>
+                      </a:r>
+                    </a:p>
+                  </a:txBody>
+                  <a:tcPr anchor="ctr" marL="73152" marT="9144" marB="9144">
+                    <a:solidFill>
+                      <a:srgbClr val="FFFFFF"/>
+                    </a:solidFill>
+                  </a:tcPr>
+                </a:tc>
+              </a:tr>
+              <a:tr h="448056">
+                <a:tc>
+                  <a:txBody>
+                    <a:bodyPr/>
+                    <a:lstStyle/>
+                    <a:p>
+                      <a:r>
+                        <a:rPr sz="1150" b="0">
+                          <a:solidFill>
+                            <a:srgbClr val="1A2233"/>
+                          </a:solidFill>
+                          <a:latin typeface="Microsoft JhengHei"/>
+                          <a:ea typeface="Microsoft JhengHei"/>
+                          <a:cs typeface="Microsoft JhengHei"/>
+                        </a:rPr>
+                        <a:t>滿心</a:t>
+                      </a:r>
+                    </a:p>
+                  </a:txBody>
+                  <a:tcPr anchor="ctr" marL="73152" marT="9144" marB="9144">
+                    <a:solidFill>
+                      <a:srgbClr val="EEF2F9"/>
+                    </a:solidFill>
+                  </a:tcPr>
+                </a:tc>
+                <a:tc>
+                  <a:txBody>
+                    <a:bodyPr/>
+                    <a:lstStyle/>
+                    <a:p>
+                      <a:r>
+                        <a:rPr sz="1150" b="0">
+                          <a:solidFill>
+                            <a:srgbClr val="1A2233"/>
+                          </a:solidFill>
+                          <a:latin typeface="Microsoft JhengHei"/>
+                          <a:ea typeface="Microsoft JhengHei"/>
+                          <a:cs typeface="Microsoft JhengHei"/>
+                        </a:rPr>
                         <a:t>2916</a:t>
                       </a:r>
                     </a:p>
                   </a:txBody>
                   <a:tcPr anchor="ctr" marL="73152" marT="9144" marB="9144">
                     <a:solidFill>
-                      <a:srgbClr val="FFFFFF"/>
+                      <a:srgbClr val="EEF2F9"/>
                     </a:solidFill>
                   </a:tcPr>
                 </a:tc>
@@ -6824,7 +6702,7 @@
                   </a:txBody>
                   <a:tcPr anchor="ctr" marL="73152" marT="9144" marB="9144">
                     <a:solidFill>
-                      <a:srgbClr val="FFFFFF"/>
+                      <a:srgbClr val="EEF2F9"/>
                     </a:solidFill>
                   </a:tcPr>
                 </a:tc>
@@ -6848,7 +6726,7 @@
                   </a:txBody>
                   <a:tcPr anchor="ctr" marL="73152" marT="9144" marB="9144">
                     <a:solidFill>
-                      <a:srgbClr val="FFFFFF"/>
+                      <a:srgbClr val="EEF2F9"/>
                     </a:solidFill>
                   </a:tcPr>
                 </a:tc>
@@ -6872,12 +6750,12 @@
                   </a:txBody>
                   <a:tcPr anchor="ctr" marL="73152" marT="9144" marB="9144">
                     <a:solidFill>
-                      <a:srgbClr val="FFFFFF"/>
+                      <a:srgbClr val="EEF2F9"/>
                     </a:solidFill>
                   </a:tcPr>
                 </a:tc>
               </a:tr>
-              <a:tr h="373380">
+              <a:tr h="448056">
                 <a:tc>
                   <a:txBody>
                     <a:bodyPr/>
@@ -6898,7 +6776,7 @@
                   </a:txBody>
                   <a:tcPr anchor="ctr" marL="73152" marT="9144" marB="9144">
                     <a:solidFill>
-                      <a:srgbClr val="EEF2F9"/>
+                      <a:srgbClr val="FFFFFF"/>
                     </a:solidFill>
                   </a:tcPr>
                 </a:tc>
@@ -6922,7 +6800,7 @@
                   </a:txBody>
                   <a:tcPr anchor="ctr" marL="73152" marT="9144" marB="9144">
                     <a:solidFill>
-                      <a:srgbClr val="EEF2F9"/>
+                      <a:srgbClr val="FFFFFF"/>
                     </a:solidFill>
                   </a:tcPr>
                 </a:tc>
@@ -6946,7 +6824,7 @@
                   </a:txBody>
                   <a:tcPr anchor="ctr" marL="73152" marT="9144" marB="9144">
                     <a:solidFill>
-                      <a:srgbClr val="EEF2F9"/>
+                      <a:srgbClr val="FFFFFF"/>
                     </a:solidFill>
                   </a:tcPr>
                 </a:tc>
@@ -6970,7 +6848,7 @@
                   </a:txBody>
                   <a:tcPr anchor="ctr" marL="73152" marT="9144" marB="9144">
                     <a:solidFill>
-                      <a:srgbClr val="EEF2F9"/>
+                      <a:srgbClr val="FFFFFF"/>
                     </a:solidFill>
                   </a:tcPr>
                 </a:tc>
@@ -6994,134 +6872,12 @@
                   </a:txBody>
                   <a:tcPr anchor="ctr" marL="73152" marT="9144" marB="9144">
                     <a:solidFill>
-                      <a:srgbClr val="EEF2F9"/>
-                    </a:solidFill>
-                  </a:tcPr>
-                </a:tc>
-              </a:tr>
-              <a:tr h="373380">
-                <a:tc>
-                  <a:txBody>
-                    <a:bodyPr/>
-                    <a:lstStyle/>
-                    <a:p>
-                      <a:r>
-                        <a:rPr sz="1150" b="0">
-                          <a:solidFill>
-                            <a:srgbClr val="1A2233"/>
-                          </a:solidFill>
-                          <a:latin typeface="Microsoft JhengHei"/>
-                          <a:ea typeface="Microsoft JhengHei"/>
-                          <a:cs typeface="Microsoft JhengHei"/>
-                        </a:rPr>
-                        <a:t>緯致</a:t>
-                      </a:r>
-                    </a:p>
-                  </a:txBody>
-                  <a:tcPr anchor="ctr" marL="73152" marT="9144" marB="9144">
-                    <a:solidFill>
-                      <a:srgbClr val="FFFFFF"/>
-                    </a:solidFill>
-                  </a:tcPr>
-                </a:tc>
-                <a:tc>
-                  <a:txBody>
-                    <a:bodyPr/>
-                    <a:lstStyle/>
-                    <a:p>
-                      <a:r>
-                        <a:rPr sz="1150" b="0">
-                          <a:solidFill>
-                            <a:srgbClr val="1A2233"/>
-                          </a:solidFill>
-                          <a:latin typeface="Microsoft JhengHei"/>
-                          <a:ea typeface="Microsoft JhengHei"/>
-                          <a:cs typeface="Microsoft JhengHei"/>
-                        </a:rPr>
-                        <a:t>4953</a:t>
-                      </a:r>
-                    </a:p>
-                  </a:txBody>
-                  <a:tcPr anchor="ctr" marL="73152" marT="9144" marB="9144">
-                    <a:solidFill>
-                      <a:srgbClr val="FFFFFF"/>
-                    </a:solidFill>
-                  </a:tcPr>
-                </a:tc>
-                <a:tc>
-                  <a:txBody>
-                    <a:bodyPr/>
-                    <a:lstStyle/>
-                    <a:p>
-                      <a:r>
-                        <a:rPr sz="1150" b="1">
-                          <a:solidFill>
-                            <a:srgbClr val="5C6679"/>
-                          </a:solidFill>
-                          <a:latin typeface="Microsoft JhengHei"/>
-                          <a:ea typeface="Microsoft JhengHei"/>
-                          <a:cs typeface="Microsoft JhengHei"/>
-                        </a:rPr>
-                        <a:t>其他</a:t>
-                      </a:r>
-                    </a:p>
-                  </a:txBody>
-                  <a:tcPr anchor="ctr" marL="73152" marT="9144" marB="9144">
-                    <a:solidFill>
-                      <a:srgbClr val="FFFFFF"/>
-                    </a:solidFill>
-                  </a:tcPr>
-                </a:tc>
-                <a:tc>
-                  <a:txBody>
-                    <a:bodyPr/>
-                    <a:lstStyle/>
-                    <a:p>
-                      <a:r>
-                        <a:rPr sz="1150" b="0">
-                          <a:solidFill>
-                            <a:srgbClr val="1A2233"/>
-                          </a:solidFill>
-                          <a:latin typeface="Microsoft JhengHei"/>
-                          <a:ea typeface="Microsoft JhengHei"/>
-                          <a:cs typeface="Microsoft JhengHei"/>
-                        </a:rPr>
-                        <a:t>安侯建業聯合會計師事務所</a:t>
-                      </a:r>
-                    </a:p>
-                  </a:txBody>
-                  <a:tcPr anchor="ctr" marL="73152" marT="9144" marB="9144">
-                    <a:solidFill>
-                      <a:srgbClr val="FFFFFF"/>
-                    </a:solidFill>
-                  </a:tcPr>
-                </a:tc>
-                <a:tc>
-                  <a:txBody>
-                    <a:bodyPr/>
-                    <a:lstStyle/>
-                    <a:p>
-                      <a:r>
-                        <a:rPr sz="1150" b="0">
-                          <a:solidFill>
-                            <a:srgbClr val="1A2233"/>
-                          </a:solidFill>
-                          <a:latin typeface="Microsoft JhengHei"/>
-                          <a:ea typeface="Microsoft JhengHei"/>
-                          <a:cs typeface="Microsoft JhengHei"/>
-                        </a:rPr>
-                        <a:t>唐嘉鍵、楊雲筑</a:t>
-                      </a:r>
-                    </a:p>
-                  </a:txBody>
-                  <a:tcPr anchor="ctr" marL="73152" marT="9144" marB="9144">
-                    <a:solidFill>
                       <a:srgbClr val="FFFFFF"/>
                     </a:solidFill>
                   </a:tcPr>
                 </a:tc>
               </a:tr>
-              <a:tr h="373380">
+              <a:tr h="448056">
                 <a:tc>
                   <a:txBody>
                     <a:bodyPr/>
@@ -7243,7 +6999,7 @@
                   </a:tcPr>
                 </a:tc>
               </a:tr>
-              <a:tr h="373380">
+              <a:tr h="448056">
                 <a:tc>
                   <a:txBody>
                     <a:bodyPr/>
@@ -7258,7 +7014,7 @@
                           <a:ea typeface="Microsoft JhengHei"/>
                           <a:cs typeface="Microsoft JhengHei"/>
                         </a:rPr>
-                        <a:t>杏一</a:t>
+                        <a:t>鈊象</a:t>
                       </a:r>
                     </a:p>
                   </a:txBody>
@@ -7282,7 +7038,7 @@
                           <a:ea typeface="Microsoft JhengHei"/>
                           <a:cs typeface="Microsoft JhengHei"/>
                         </a:rPr>
-                        <a:t>4175</a:t>
+                        <a:t>3293</a:t>
                       </a:r>
                     </a:p>
                   </a:txBody>
@@ -7354,7 +7110,7 @@
                           <a:ea typeface="Microsoft JhengHei"/>
                           <a:cs typeface="Microsoft JhengHei"/>
                         </a:rPr>
-                        <a:t>池瑞全、蔡宗遠</a:t>
+                        <a:t>周仕杰、李東峰</a:t>
                       </a:r>
                     </a:p>
                   </a:txBody>
@@ -7365,7 +7121,7 @@
                   </a:tcPr>
                 </a:tc>
               </a:tr>
-              <a:tr h="373380">
+              <a:tr h="448056">
                 <a:tc>
                   <a:txBody>
                     <a:bodyPr/>
@@ -7380,7 +7136,7 @@
                           <a:ea typeface="Microsoft JhengHei"/>
                           <a:cs typeface="Microsoft JhengHei"/>
                         </a:rPr>
-                        <a:t>鈊象</a:t>
+                        <a:t>一零四</a:t>
                       </a:r>
                     </a:p>
                   </a:txBody>
@@ -7404,7 +7160,7 @@
                           <a:ea typeface="Microsoft JhengHei"/>
                           <a:cs typeface="Microsoft JhengHei"/>
                         </a:rPr>
-                        <a:t>3293</a:t>
+                        <a:t>3130</a:t>
                       </a:r>
                     </a:p>
                   </a:txBody>
@@ -7422,13 +7178,13 @@
                       <a:r>
                         <a:rPr sz="1150" b="1">
                           <a:solidFill>
-                            <a:srgbClr val="27A6C4"/>
+                            <a:srgbClr val="5C6679"/>
                           </a:solidFill>
                           <a:latin typeface="Microsoft JhengHei"/>
                           <a:ea typeface="Microsoft JhengHei"/>
                           <a:cs typeface="Microsoft JhengHei"/>
                         </a:rPr>
-                        <a:t>個資外洩</a:t>
+                        <a:t>其他</a:t>
                       </a:r>
                     </a:p>
                   </a:txBody>
@@ -7452,7 +7208,7 @@
                           <a:ea typeface="Microsoft JhengHei"/>
                           <a:cs typeface="Microsoft JhengHei"/>
                         </a:rPr>
-                        <a:t>勤業眾信聯合會計師事務所</a:t>
+                        <a:t>安侯建業聯合會計師事務所</a:t>
                       </a:r>
                     </a:p>
                   </a:txBody>
@@ -7476,7 +7232,7 @@
                           <a:ea typeface="Microsoft JhengHei"/>
                           <a:cs typeface="Microsoft JhengHei"/>
                         </a:rPr>
-                        <a:t>周仕杰、李東峰</a:t>
+                        <a:t>趙敏如、江家齊</a:t>
                       </a:r>
                     </a:p>
                   </a:txBody>
@@ -7487,251 +7243,7 @@
                   </a:tcPr>
                 </a:tc>
               </a:tr>
-              <a:tr h="373380">
-                <a:tc>
-                  <a:txBody>
-                    <a:bodyPr/>
-                    <a:lstStyle/>
-                    <a:p>
-                      <a:r>
-                        <a:rPr sz="1150" b="0">
-                          <a:solidFill>
-                            <a:srgbClr val="1A2233"/>
-                          </a:solidFill>
-                          <a:latin typeface="Microsoft JhengHei"/>
-                          <a:ea typeface="Microsoft JhengHei"/>
-                          <a:cs typeface="Microsoft JhengHei"/>
-                        </a:rPr>
-                        <a:t>一零四</a:t>
-                      </a:r>
-                    </a:p>
-                  </a:txBody>
-                  <a:tcPr anchor="ctr" marL="73152" marT="9144" marB="9144">
-                    <a:solidFill>
-                      <a:srgbClr val="FFFFFF"/>
-                    </a:solidFill>
-                  </a:tcPr>
-                </a:tc>
-                <a:tc>
-                  <a:txBody>
-                    <a:bodyPr/>
-                    <a:lstStyle/>
-                    <a:p>
-                      <a:r>
-                        <a:rPr sz="1150" b="0">
-                          <a:solidFill>
-                            <a:srgbClr val="1A2233"/>
-                          </a:solidFill>
-                          <a:latin typeface="Microsoft JhengHei"/>
-                          <a:ea typeface="Microsoft JhengHei"/>
-                          <a:cs typeface="Microsoft JhengHei"/>
-                        </a:rPr>
-                        <a:t>3130</a:t>
-                      </a:r>
-                    </a:p>
-                  </a:txBody>
-                  <a:tcPr anchor="ctr" marL="73152" marT="9144" marB="9144">
-                    <a:solidFill>
-                      <a:srgbClr val="FFFFFF"/>
-                    </a:solidFill>
-                  </a:tcPr>
-                </a:tc>
-                <a:tc>
-                  <a:txBody>
-                    <a:bodyPr/>
-                    <a:lstStyle/>
-                    <a:p>
-                      <a:r>
-                        <a:rPr sz="1150" b="1">
-                          <a:solidFill>
-                            <a:srgbClr val="5C6679"/>
-                          </a:solidFill>
-                          <a:latin typeface="Microsoft JhengHei"/>
-                          <a:ea typeface="Microsoft JhengHei"/>
-                          <a:cs typeface="Microsoft JhengHei"/>
-                        </a:rPr>
-                        <a:t>其他</a:t>
-                      </a:r>
-                    </a:p>
-                  </a:txBody>
-                  <a:tcPr anchor="ctr" marL="73152" marT="9144" marB="9144">
-                    <a:solidFill>
-                      <a:srgbClr val="FFFFFF"/>
-                    </a:solidFill>
-                  </a:tcPr>
-                </a:tc>
-                <a:tc>
-                  <a:txBody>
-                    <a:bodyPr/>
-                    <a:lstStyle/>
-                    <a:p>
-                      <a:r>
-                        <a:rPr sz="1150" b="0">
-                          <a:solidFill>
-                            <a:srgbClr val="1A2233"/>
-                          </a:solidFill>
-                          <a:latin typeface="Microsoft JhengHei"/>
-                          <a:ea typeface="Microsoft JhengHei"/>
-                          <a:cs typeface="Microsoft JhengHei"/>
-                        </a:rPr>
-                        <a:t>安侯建業聯合會計師事務所</a:t>
-                      </a:r>
-                    </a:p>
-                  </a:txBody>
-                  <a:tcPr anchor="ctr" marL="73152" marT="9144" marB="9144">
-                    <a:solidFill>
-                      <a:srgbClr val="FFFFFF"/>
-                    </a:solidFill>
-                  </a:tcPr>
-                </a:tc>
-                <a:tc>
-                  <a:txBody>
-                    <a:bodyPr/>
-                    <a:lstStyle/>
-                    <a:p>
-                      <a:r>
-                        <a:rPr sz="1150" b="0">
-                          <a:solidFill>
-                            <a:srgbClr val="1A2233"/>
-                          </a:solidFill>
-                          <a:latin typeface="Microsoft JhengHei"/>
-                          <a:ea typeface="Microsoft JhengHei"/>
-                          <a:cs typeface="Microsoft JhengHei"/>
-                        </a:rPr>
-                        <a:t>趙敏如、江家齊</a:t>
-                      </a:r>
-                    </a:p>
-                  </a:txBody>
-                  <a:tcPr anchor="ctr" marL="73152" marT="9144" marB="9144">
-                    <a:solidFill>
-                      <a:srgbClr val="FFFFFF"/>
-                    </a:solidFill>
-                  </a:tcPr>
-                </a:tc>
-              </a:tr>
-              <a:tr h="373380">
-                <a:tc>
-                  <a:txBody>
-                    <a:bodyPr/>
-                    <a:lstStyle/>
-                    <a:p>
-                      <a:r>
-                        <a:rPr sz="1150" b="0">
-                          <a:solidFill>
-                            <a:srgbClr val="1A2233"/>
-                          </a:solidFill>
-                          <a:latin typeface="Microsoft JhengHei"/>
-                          <a:ea typeface="Microsoft JhengHei"/>
-                          <a:cs typeface="Microsoft JhengHei"/>
-                        </a:rPr>
-                        <a:t>安心</a:t>
-                      </a:r>
-                    </a:p>
-                  </a:txBody>
-                  <a:tcPr anchor="ctr" marL="73152" marT="9144" marB="9144">
-                    <a:solidFill>
-                      <a:srgbClr val="EEF2F9"/>
-                    </a:solidFill>
-                  </a:tcPr>
-                </a:tc>
-                <a:tc>
-                  <a:txBody>
-                    <a:bodyPr/>
-                    <a:lstStyle/>
-                    <a:p>
-                      <a:r>
-                        <a:rPr sz="1150" b="0">
-                          <a:solidFill>
-                            <a:srgbClr val="1A2233"/>
-                          </a:solidFill>
-                          <a:latin typeface="Microsoft JhengHei"/>
-                          <a:ea typeface="Microsoft JhengHei"/>
-                          <a:cs typeface="Microsoft JhengHei"/>
-                        </a:rPr>
-                        <a:t>1259</a:t>
-                      </a:r>
-                    </a:p>
-                  </a:txBody>
-                  <a:tcPr anchor="ctr" marL="73152" marT="9144" marB="9144">
-                    <a:solidFill>
-                      <a:srgbClr val="EEF2F9"/>
-                    </a:solidFill>
-                  </a:tcPr>
-                </a:tc>
-                <a:tc>
-                  <a:txBody>
-                    <a:bodyPr/>
-                    <a:lstStyle/>
-                    <a:p>
-                      <a:r>
-                        <a:rPr sz="1150" b="1">
-                          <a:solidFill>
-                            <a:srgbClr val="27A6C4"/>
-                          </a:solidFill>
-                          <a:latin typeface="Microsoft JhengHei"/>
-                          <a:ea typeface="Microsoft JhengHei"/>
-                          <a:cs typeface="Microsoft JhengHei"/>
-                        </a:rPr>
-                        <a:t>個資外洩</a:t>
-                      </a:r>
-                    </a:p>
-                  </a:txBody>
-                  <a:tcPr anchor="ctr" marL="73152" marT="9144" marB="9144">
-                    <a:solidFill>
-                      <a:srgbClr val="EEF2F9"/>
-                    </a:solidFill>
-                  </a:tcPr>
-                </a:tc>
-                <a:tc>
-                  <a:txBody>
-                    <a:bodyPr/>
-                    <a:lstStyle/>
-                    <a:p>
-                      <a:r>
-                        <a:rPr sz="1150" b="0">
-                          <a:solidFill>
-                            <a:srgbClr val="1A2233"/>
-                          </a:solidFill>
-                          <a:latin typeface="Microsoft JhengHei"/>
-                          <a:ea typeface="Microsoft JhengHei"/>
-                          <a:cs typeface="Microsoft JhengHei"/>
-                        </a:rPr>
-                        <a:t>資誠聯合會計師事務所</a:t>
-                      </a:r>
-                    </a:p>
-                  </a:txBody>
-                  <a:tcPr anchor="ctr" marL="73152" marT="9144" marB="9144">
-                    <a:solidFill>
-                      <a:srgbClr val="EEF2F9"/>
-                    </a:solidFill>
-                  </a:tcPr>
-                </a:tc>
-                <a:tc>
-                  <a:txBody>
-                    <a:bodyPr/>
-                    <a:lstStyle/>
-                    <a:p>
-                      <a:r>
-                        <a:rPr sz="1150" b="0">
-                          <a:solidFill>
-                            <a:srgbClr val="1A2233"/>
-                          </a:solidFill>
-                          <a:latin typeface="Microsoft JhengHei"/>
-                          <a:ea typeface="Microsoft JhengHei"/>
-                          <a:cs typeface="Microsoft JhengHei"/>
-                        </a:rPr>
-                        <a:t>徐明釧、陳怡婷</a:t>
-                      </a:r>
-                    </a:p>
-                  </a:txBody>
-                  <a:tcPr anchor="ctr" marL="73152" marT="9144" marB="9144">
-                    <a:solidFill>
-                      <a:srgbClr val="EEF2F9"/>
-                    </a:solidFill>
-                  </a:tcPr>
-                </a:tc>
-              </a:tr>
-              <a:tr h="373380">
+              <a:tr h="448056">
                 <a:tc>
                   <a:txBody>
                     <a:bodyPr/>
@@ -7853,7 +7365,7 @@
                   </a:tcPr>
                 </a:tc>
               </a:tr>
-              <a:tr h="373380">
+              <a:tr h="448056">
                 <a:tc>
                   <a:txBody>
                     <a:bodyPr/>
@@ -7975,7 +7487,7 @@
                   </a:tcPr>
                 </a:tc>
               </a:tr>
-              <a:tr h="373380">
+              <a:tr h="448056">
                 <a:tc>
                   <a:txBody>
                     <a:bodyPr/>
@@ -9546,7 +9058,7 @@
             <a:avLst/>
           </a:prstGeom>
           <a:solidFill>
-            <a:srgbClr val="27A6C4"/>
+            <a:srgbClr val="E63946"/>
           </a:solidFill>
           <a:ln>
             <a:noFill/>
@@ -9607,7 +9119,7 @@
                 <a:ea typeface="Microsoft JhengHei"/>
                 <a:cs typeface="Microsoft JhengHei"/>
               </a:rPr>
-              <a:t>滿心 </a:t>
+              <a:t>美食-KY </a:t>
             </a:r>
             <a:r>
               <a:rPr sz="1300" b="0">
@@ -9618,7 +9130,7 @@
                 <a:ea typeface="Microsoft JhengHei"/>
                 <a:cs typeface="Microsoft JhengHei"/>
               </a:rPr>
-              <a:t>2916</a:t>
+              <a:t>2723</a:t>
             </a:r>
           </a:p>
         </p:txBody>
@@ -9638,7 +9150,7 @@
             <a:avLst/>
           </a:prstGeom>
           <a:solidFill>
-            <a:srgbClr val="27A6C4"/>
+            <a:srgbClr val="E63946"/>
           </a:solidFill>
           <a:ln>
             <a:noFill/>
@@ -9699,7 +9211,7 @@
                 <a:ea typeface="Microsoft JhengHei"/>
                 <a:cs typeface="Microsoft JhengHei"/>
               </a:rPr>
-              <a:t>個資外洩</a:t>
+              <a:t>駭客攻擊</a:t>
             </a:r>
           </a:p>
         </p:txBody>
@@ -9734,7 +9246,7 @@
             <a:r>
               <a:rPr sz="1100" b="1">
                 <a:solidFill>
-                  <a:srgbClr val="27A6C4"/>
+                  <a:srgbClr val="E63946"/>
                 </a:solidFill>
                 <a:latin typeface="Microsoft JhengHei"/>
                 <a:ea typeface="Microsoft JhengHei"/>
@@ -9751,7 +9263,7 @@
                 <a:ea typeface="Microsoft JhengHei"/>
                 <a:cs typeface="Microsoft JhengHei"/>
               </a:rPr>
-              <a:t>本公司委外服務平台業者所提供之資料庫發生自動化攻擊事件,部分資訊遭非法擷取,本公司近日接獲消費者…</a:t>
+              <a:t>台灣子公司美食達人股份有限公司於今日發現部分資訊系統遭受網路攻擊，已立即啟動資安應變機制，並委請…</a:t>
             </a:r>
           </a:p>
         </p:txBody>
@@ -9786,7 +9298,7 @@
             <a:r>
               <a:rPr sz="1100" b="1">
                 <a:solidFill>
-                  <a:srgbClr val="27A6C4"/>
+                  <a:srgbClr val="E63946"/>
                 </a:solidFill>
                 <a:latin typeface="Microsoft JhengHei"/>
                 <a:ea typeface="Microsoft JhengHei"/>
@@ -9803,7 +9315,7 @@
                 <a:ea typeface="Microsoft JhengHei"/>
                 <a:cs typeface="Microsoft JhengHei"/>
               </a:rPr>
-              <a:t>(1)本公司已立即啟動資安事件應變作業,針對相關系統與存取紀錄及可能涉及之資料範圍進行調查,並要求委外服務平台業者同步進…</a:t>
+              <a:t>公司將持續進行資安鑑識、系統安全強化及相關風險控管作業，受影響系統預期可逐步恢復運作；後續如調查結果或事件發展有重大變化…</a:t>
             </a:r>
           </a:p>
         </p:txBody>
@@ -9869,7 +9381,7 @@
             <a:avLst/>
           </a:prstGeom>
           <a:solidFill>
-            <a:srgbClr val="E63946"/>
+            <a:srgbClr val="27A6C4"/>
           </a:solidFill>
           <a:ln>
             <a:noFill/>
@@ -9930,7 +9442,7 @@
                 <a:ea typeface="Microsoft JhengHei"/>
                 <a:cs typeface="Microsoft JhengHei"/>
               </a:rPr>
-              <a:t>91APP*-KY </a:t>
+              <a:t>滿心 </a:t>
             </a:r>
             <a:r>
               <a:rPr sz="1300" b="0">
@@ -9941,7 +9453,7 @@
                 <a:ea typeface="Microsoft JhengHei"/>
                 <a:cs typeface="Microsoft JhengHei"/>
               </a:rPr>
-              <a:t>6741</a:t>
+              <a:t>2916</a:t>
             </a:r>
           </a:p>
         </p:txBody>
@@ -9961,7 +9473,7 @@
             <a:avLst/>
           </a:prstGeom>
           <a:solidFill>
-            <a:srgbClr val="E63946"/>
+            <a:srgbClr val="27A6C4"/>
           </a:solidFill>
           <a:ln>
             <a:noFill/>
@@ -10022,7 +9534,7 @@
                 <a:ea typeface="Microsoft JhengHei"/>
                 <a:cs typeface="Microsoft JhengHei"/>
               </a:rPr>
-              <a:t>駭客攻擊</a:t>
+              <a:t>個資外洩</a:t>
             </a:r>
           </a:p>
         </p:txBody>
@@ -10057,7 +9569,7 @@
             <a:r>
               <a:rPr sz="1100" b="1">
                 <a:solidFill>
-                  <a:srgbClr val="E63946"/>
+                  <a:srgbClr val="27A6C4"/>
                 </a:solidFill>
                 <a:latin typeface="Microsoft JhengHei"/>
                 <a:ea typeface="Microsoft JhengHei"/>
@@ -10074,7 +9586,7 @@
                 <a:ea typeface="Microsoft JhengHei"/>
                 <a:cs typeface="Microsoft JhengHei"/>
               </a:rPr>
-              <a:t>本公司CommerceCloud資料庫受到自動化攻擊事件說明。</a:t>
+              <a:t>本公司委外服務平台業者所提供之資料庫發生自動化攻擊事件,部分資訊遭非法擷取,本公司近日接獲消費者…</a:t>
             </a:r>
           </a:p>
         </p:txBody>
@@ -10109,7 +9621,7 @@
             <a:r>
               <a:rPr sz="1100" b="1">
                 <a:solidFill>
-                  <a:srgbClr val="E63946"/>
+                  <a:srgbClr val="27A6C4"/>
                 </a:solidFill>
                 <a:latin typeface="Microsoft JhengHei"/>
                 <a:ea typeface="Microsoft JhengHei"/>
@@ -10126,7 +9638,7 @@
                 <a:ea typeface="Microsoft JhengHei"/>
                 <a:cs typeface="Microsoft JhengHei"/>
               </a:rPr>
-              <a:t>(1)強化監控防禦：升級全天候監控，全面提升系統防護層級。(2)委外第三方公正單位調查：協同外部專家深入調查，並於相關主…</a:t>
+              <a:t>(1)本公司已立即啟動資安事件應變作業,針對相關系統與存取紀錄及可能涉及之資料範圍進行調查,並要求委外服務平台業者同步進…</a:t>
             </a:r>
           </a:p>
         </p:txBody>
@@ -10192,7 +9704,7 @@
             <a:avLst/>
           </a:prstGeom>
           <a:solidFill>
-            <a:srgbClr val="5C6679"/>
+            <a:srgbClr val="E63946"/>
           </a:solidFill>
           <a:ln>
             <a:noFill/>
@@ -10253,7 +9765,7 @@
                 <a:ea typeface="Microsoft JhengHei"/>
                 <a:cs typeface="Microsoft JhengHei"/>
               </a:rPr>
-              <a:t>緯致 </a:t>
+              <a:t>91APP*-KY </a:t>
             </a:r>
             <a:r>
               <a:rPr sz="1300" b="0">
@@ -10264,7 +9776,7 @@
                 <a:ea typeface="Microsoft JhengHei"/>
                 <a:cs typeface="Microsoft JhengHei"/>
               </a:rPr>
-              <a:t>4953</a:t>
+              <a:t>6741</a:t>
             </a:r>
           </a:p>
         </p:txBody>
@@ -10284,7 +9796,7 @@
             <a:avLst/>
           </a:prstGeom>
           <a:solidFill>
-            <a:srgbClr val="5C6679"/>
+            <a:srgbClr val="E63946"/>
           </a:solidFill>
           <a:ln>
             <a:noFill/>
@@ -10345,7 +9857,7 @@
                 <a:ea typeface="Microsoft JhengHei"/>
                 <a:cs typeface="Microsoft JhengHei"/>
               </a:rPr>
-              <a:t>其他</a:t>
+              <a:t>駭客攻擊</a:t>
             </a:r>
           </a:p>
         </p:txBody>
@@ -10380,7 +9892,7 @@
             <a:r>
               <a:rPr sz="1100" b="1">
                 <a:solidFill>
-                  <a:srgbClr val="5C6679"/>
+                  <a:srgbClr val="E63946"/>
                 </a:solidFill>
                 <a:latin typeface="Microsoft JhengHei"/>
                 <a:ea typeface="Microsoft JhengHei"/>
@@ -10397,7 +9909,7 @@
                 <a:ea typeface="Microsoft JhengHei"/>
                 <a:cs typeface="Microsoft JhengHei"/>
               </a:rPr>
-              <a:t>本公司偵測到內部系統有異常存取情形，經調查確認，部分員工資訊與公務聯繫資訊遭未經授權存取。</a:t>
+              <a:t>本公司CommerceCloud資料庫受到自動化攻擊事件說明。</a:t>
             </a:r>
           </a:p>
         </p:txBody>
@@ -10432,7 +9944,7 @@
             <a:r>
               <a:rPr sz="1100" b="1">
                 <a:solidFill>
-                  <a:srgbClr val="5C6679"/>
+                  <a:srgbClr val="E63946"/>
                 </a:solidFill>
                 <a:latin typeface="Microsoft JhengHei"/>
                 <a:ea typeface="Microsoft JhengHei"/>
@@ -10449,7 +9961,7 @@
                 <a:ea typeface="Microsoft JhengHei"/>
                 <a:cs typeface="Microsoft JhengHei"/>
               </a:rPr>
-              <a:t>本公司已採取相關防護、阻斷及修補措施，並持續強化資訊安全防護機制。</a:t>
+              <a:t>(1)強化監控防禦：升級全天候監控，全面提升系統防護層級。(2)委外第三方公正單位調查：協同外部專家深入調查，並於相關主…</a:t>
             </a:r>
           </a:p>
         </p:txBody>
@@ -11035,7 +10547,7 @@
                 <a:ea typeface="Microsoft JhengHei"/>
                 <a:cs typeface="Microsoft JhengHei"/>
               </a:rPr>
-              <a:t>杏一 </a:t>
+              <a:t>鈊象 </a:t>
             </a:r>
             <a:r>
               <a:rPr sz="1300" b="0">
@@ -11046,7 +10558,7 @@
                 <a:ea typeface="Microsoft JhengHei"/>
                 <a:cs typeface="Microsoft JhengHei"/>
               </a:rPr>
-              <a:t>4175</a:t>
+              <a:t>3293</a:t>
             </a:r>
           </a:p>
         </p:txBody>
@@ -11179,7 +10691,7 @@
                 <a:ea typeface="Microsoft JhengHei"/>
                 <a:cs typeface="Microsoft JhengHei"/>
               </a:rPr>
-              <a:t>本公司接獲消費者反映疑似個資外洩事件</a:t>
+              <a:t>本公司於115年9月29日發現不明IP異常侵入公司營運資訊設備，造成公司遊戲營運資料外洩，包含部…</a:t>
             </a:r>
           </a:p>
         </p:txBody>
@@ -11231,7 +10743,7 @@
                 <a:ea typeface="Microsoft JhengHei"/>
                 <a:cs typeface="Microsoft JhengHei"/>
               </a:rPr>
-              <a:t>(1)本公司已立即啟動資安事件應變作業，針對相關系統、存取紀錄及可能涉及之資料範圍進行調查，並要求官網平台委外廠商同步進…</a:t>
+              <a:t>(1)持續提升資安防禦，強化監控與防護層級。(2)委由外部專業資安團隊協助事件調查，並於相關主機部署偵測及防護機制。(3…</a:t>
             </a:r>
           </a:p>
         </p:txBody>
@@ -11297,7 +10809,7 @@
             <a:avLst/>
           </a:prstGeom>
           <a:solidFill>
-            <a:srgbClr val="27A6C4"/>
+            <a:srgbClr val="5C6679"/>
           </a:solidFill>
           <a:ln>
             <a:noFill/>
@@ -11358,7 +10870,7 @@
                 <a:ea typeface="Microsoft JhengHei"/>
                 <a:cs typeface="Microsoft JhengHei"/>
               </a:rPr>
-              <a:t>鈊象 </a:t>
+              <a:t>一零四 </a:t>
             </a:r>
             <a:r>
               <a:rPr sz="1300" b="0">
@@ -11369,7 +10881,7 @@
                 <a:ea typeface="Microsoft JhengHei"/>
                 <a:cs typeface="Microsoft JhengHei"/>
               </a:rPr>
-              <a:t>3293</a:t>
+              <a:t>3130</a:t>
             </a:r>
           </a:p>
         </p:txBody>
@@ -11389,7 +10901,7 @@
             <a:avLst/>
           </a:prstGeom>
           <a:solidFill>
-            <a:srgbClr val="27A6C4"/>
+            <a:srgbClr val="5C6679"/>
           </a:solidFill>
           <a:ln>
             <a:noFill/>
@@ -11450,7 +10962,7 @@
                 <a:ea typeface="Microsoft JhengHei"/>
                 <a:cs typeface="Microsoft JhengHei"/>
               </a:rPr>
-              <a:t>個資外洩</a:t>
+              <a:t>其他</a:t>
             </a:r>
           </a:p>
         </p:txBody>
@@ -11485,7 +10997,7 @@
             <a:r>
               <a:rPr sz="1100" b="1">
                 <a:solidFill>
-                  <a:srgbClr val="27A6C4"/>
+                  <a:srgbClr val="5C6679"/>
                 </a:solidFill>
                 <a:latin typeface="Microsoft JhengHei"/>
                 <a:ea typeface="Microsoft JhengHei"/>
@@ -11502,7 +11014,7 @@
                 <a:ea typeface="Microsoft JhengHei"/>
                 <a:cs typeface="Microsoft JhengHei"/>
               </a:rPr>
-              <a:t>本公司於115年9月29日發現不明IP異常侵入公司營運資訊設備，造成公司遊戲營運資料外洩，包含部…</a:t>
+              <a:t>本公司偵測到APP系統有異常讀取情形，經調查確認，約12萬筆履歷資料遭未經授權讀取。</a:t>
             </a:r>
           </a:p>
         </p:txBody>
@@ -11537,7 +11049,7 @@
             <a:r>
               <a:rPr sz="1100" b="1">
                 <a:solidFill>
-                  <a:srgbClr val="27A6C4"/>
+                  <a:srgbClr val="5C6679"/>
                 </a:solidFill>
                 <a:latin typeface="Microsoft JhengHei"/>
                 <a:ea typeface="Microsoft JhengHei"/>
@@ -11554,7 +11066,7 @@
                 <a:ea typeface="Microsoft JhengHei"/>
                 <a:cs typeface="Microsoft JhengHei"/>
               </a:rPr>
-              <a:t>(1)持續提升資安防禦，強化監控與防護層級。(2)委由外部專業資安團隊協助事件調查，並於相關主機部署偵測及防護機制。(3…</a:t>
+              <a:t>本公司已採取相關防護及阻斷措施，並持續進行資安鑑識及強化資訊安全防護機制。本公司將依調查結果及相關法令辦理後續事宜，如有…</a:t>
             </a:r>
           </a:p>
         </p:txBody>
@@ -11620,7 +11132,7 @@
             <a:avLst/>
           </a:prstGeom>
           <a:solidFill>
-            <a:srgbClr val="5C6679"/>
+            <a:srgbClr val="E63946"/>
           </a:solidFill>
           <a:ln>
             <a:noFill/>
@@ -11681,7 +11193,7 @@
                 <a:ea typeface="Microsoft JhengHei"/>
                 <a:cs typeface="Microsoft JhengHei"/>
               </a:rPr>
-              <a:t>一零四 </a:t>
+              <a:t>神腦 </a:t>
             </a:r>
             <a:r>
               <a:rPr sz="1300" b="0">
@@ -11692,7 +11204,7 @@
                 <a:ea typeface="Microsoft JhengHei"/>
                 <a:cs typeface="Microsoft JhengHei"/>
               </a:rPr>
-              <a:t>3130</a:t>
+              <a:t>2450</a:t>
             </a:r>
           </a:p>
         </p:txBody>
@@ -11712,7 +11224,7 @@
             <a:avLst/>
           </a:prstGeom>
           <a:solidFill>
-            <a:srgbClr val="5C6679"/>
+            <a:srgbClr val="E63946"/>
           </a:solidFill>
           <a:ln>
             <a:noFill/>
@@ -11773,7 +11285,7 @@
                 <a:ea typeface="Microsoft JhengHei"/>
                 <a:cs typeface="Microsoft JhengHei"/>
               </a:rPr>
-              <a:t>其他</a:t>
+              <a:t>駭客攻擊</a:t>
             </a:r>
           </a:p>
         </p:txBody>
@@ -11808,7 +11320,7 @@
             <a:r>
               <a:rPr sz="1100" b="1">
                 <a:solidFill>
-                  <a:srgbClr val="5C6679"/>
+                  <a:srgbClr val="E63946"/>
                 </a:solidFill>
                 <a:latin typeface="Microsoft JhengHei"/>
                 <a:ea typeface="Microsoft JhengHei"/>
@@ -11825,7 +11337,7 @@
                 <a:ea typeface="Microsoft JhengHei"/>
                 <a:cs typeface="Microsoft JhengHei"/>
               </a:rPr>
-              <a:t>本公司偵測到APP系統有異常讀取情形，經調查確認，約12萬筆履歷資料遭未經授權讀取。</a:t>
+              <a:t>本公司外部伺服器遭受自動化攻擊事件說明。</a:t>
             </a:r>
           </a:p>
         </p:txBody>
@@ -11860,7 +11372,7 @@
             <a:r>
               <a:rPr sz="1100" b="1">
                 <a:solidFill>
-                  <a:srgbClr val="5C6679"/>
+                  <a:srgbClr val="E63946"/>
                 </a:solidFill>
                 <a:latin typeface="Microsoft JhengHei"/>
                 <a:ea typeface="Microsoft JhengHei"/>
@@ -11877,7 +11389,7 @@
                 <a:ea typeface="Microsoft JhengHei"/>
                 <a:cs typeface="Microsoft JhengHei"/>
               </a:rPr>
-              <a:t>本公司已採取相關防護及阻斷措施，並持續進行資安鑑識及強化資訊安全防護機制。本公司將依調查結果及相關法令辦理後續事宜，如有…</a:t>
+              <a:t>本公司已與第三方資安廠商合作，全面強化網路偵測、系統監控與安全管控，以確保資訊安全。</a:t>
             </a:r>
           </a:p>
         </p:txBody>
@@ -11943,7 +11455,7 @@
             <a:avLst/>
           </a:prstGeom>
           <a:solidFill>
-            <a:srgbClr val="27A6C4"/>
+            <a:srgbClr val="5C6679"/>
           </a:solidFill>
           <a:ln>
             <a:noFill/>
@@ -12004,7 +11516,7 @@
                 <a:ea typeface="Microsoft JhengHei"/>
                 <a:cs typeface="Microsoft JhengHei"/>
               </a:rPr>
-              <a:t>安心 </a:t>
+              <a:t>鈊象 </a:t>
             </a:r>
             <a:r>
               <a:rPr sz="1300" b="0">
@@ -12015,7 +11527,7 @@
                 <a:ea typeface="Microsoft JhengHei"/>
                 <a:cs typeface="Microsoft JhengHei"/>
               </a:rPr>
-              <a:t>1259</a:t>
+              <a:t>3293</a:t>
             </a:r>
           </a:p>
         </p:txBody>
@@ -12035,7 +11547,7 @@
             <a:avLst/>
           </a:prstGeom>
           <a:solidFill>
-            <a:srgbClr val="27A6C4"/>
+            <a:srgbClr val="5C6679"/>
           </a:solidFill>
           <a:ln>
             <a:noFill/>
@@ -12096,7 +11608,7 @@
                 <a:ea typeface="Microsoft JhengHei"/>
                 <a:cs typeface="Microsoft JhengHei"/>
               </a:rPr>
-              <a:t>個資外洩</a:t>
+              <a:t>其他</a:t>
             </a:r>
           </a:p>
         </p:txBody>
@@ -12131,7 +11643,7 @@
             <a:r>
               <a:rPr sz="1100" b="1">
                 <a:solidFill>
-                  <a:srgbClr val="27A6C4"/>
+                  <a:srgbClr val="5C6679"/>
                 </a:solidFill>
                 <a:latin typeface="Microsoft JhengHei"/>
                 <a:ea typeface="Microsoft JhengHei"/>
@@ -12148,7 +11660,7 @@
                 <a:ea typeface="Microsoft JhengHei"/>
                 <a:cs typeface="Microsoft JhengHei"/>
               </a:rPr>
-              <a:t>消費者反應疑似個資外洩事件</a:t>
+              <a:t>本公司於115年9月29日發現不明IP異常侵入公司營運資訊設備。</a:t>
             </a:r>
           </a:p>
         </p:txBody>
@@ -12183,7 +11695,7 @@
             <a:r>
               <a:rPr sz="1100" b="1">
                 <a:solidFill>
-                  <a:srgbClr val="27A6C4"/>
+                  <a:srgbClr val="5C6679"/>
                 </a:solidFill>
                 <a:latin typeface="Microsoft JhengHei"/>
                 <a:ea typeface="Microsoft JhengHei"/>
@@ -12200,7 +11712,7 @@
                 <a:ea typeface="Microsoft JhengHei"/>
                 <a:cs typeface="Microsoft JhengHei"/>
               </a:rPr>
-              <a:t>本公司已立即針對本次資安事件啟動應變作業。需特別說明，本次疑似個資外洩事件之平台係由委外廠商管理，非屬本公司自有之MOS…</a:t>
+              <a:t>持續提升資安防禦，強化監控與防護層級。</a:t>
             </a:r>
           </a:p>
         </p:txBody>
@@ -12402,7 +11914,7 @@
             <a:avLst/>
           </a:prstGeom>
           <a:solidFill>
-            <a:srgbClr val="E63946"/>
+            <a:srgbClr val="27A6C4"/>
           </a:solidFill>
           <a:ln>
             <a:noFill/>
@@ -12463,7 +11975,7 @@
                 <a:ea typeface="Microsoft JhengHei"/>
                 <a:cs typeface="Microsoft JhengHei"/>
               </a:rPr>
-              <a:t>神腦 </a:t>
+              <a:t>柏文 </a:t>
             </a:r>
             <a:r>
               <a:rPr sz="1300" b="0">
@@ -12474,7 +11986,7 @@
                 <a:ea typeface="Microsoft JhengHei"/>
                 <a:cs typeface="Microsoft JhengHei"/>
               </a:rPr>
-              <a:t>2450</a:t>
+              <a:t>8462</a:t>
             </a:r>
           </a:p>
         </p:txBody>
@@ -12491,560 +12003,6 @@
             <a:ext cx="1234440" cy="347472"/>
           </a:xfrm>
           <a:prstGeom prst="roundRect">
-            <a:avLst/>
-          </a:prstGeom>
-          <a:solidFill>
-            <a:srgbClr val="E63946"/>
-          </a:solidFill>
-          <a:ln>
-            <a:noFill/>
-          </a:ln>
-          <a:effectLst/>
-        </p:spPr>
-        <p:style>
-          <a:lnRef idx="1">
-            <a:schemeClr val="accent1"/>
-          </a:lnRef>
-          <a:fillRef idx="3">
-            <a:schemeClr val="accent1"/>
-          </a:fillRef>
-          <a:effectRef idx="2">
-            <a:schemeClr val="accent1"/>
-          </a:effectRef>
-          <a:fontRef idx="minor">
-            <a:schemeClr val="lt1"/>
-          </a:fontRef>
-        </p:style>
-        <p:txBody>
-          <a:bodyPr rtlCol="0" anchor="ctr"/>
-          <a:lstStyle/>
-          <a:p>
-            <a:pPr algn="ctr"/>
-          </a:p>
-        </p:txBody>
-      </p:sp>
-      <p:sp>
-        <p:nvSpPr>
-          <p:cNvPr id="9" name="TextBox 8"/>
-          <p:cNvSpPr txBox="1"/>
-          <p:nvPr/>
-        </p:nvSpPr>
-        <p:spPr>
-          <a:xfrm>
-            <a:off x="4526280" y="1792224"/>
-            <a:ext cx="1234440" cy="347472"/>
-          </a:xfrm>
-          <a:prstGeom prst="rect">
-            <a:avLst/>
-          </a:prstGeom>
-          <a:noFill/>
-        </p:spPr>
-        <p:txBody>
-          <a:bodyPr wrap="square" anchor="ctr" lIns="0" rIns="0" tIns="0" bIns="0">
-            <a:spAutoFit/>
-          </a:bodyPr>
-          <a:lstStyle/>
-          <a:p>
-            <a:pPr algn="ctr"/>
-            <a:r>
-              <a:rPr sz="1050" b="1">
-                <a:solidFill>
-                  <a:srgbClr val="FFFFFF"/>
-                </a:solidFill>
-                <a:latin typeface="Microsoft JhengHei"/>
-                <a:ea typeface="Microsoft JhengHei"/>
-                <a:cs typeface="Microsoft JhengHei"/>
-              </a:rPr>
-              <a:t>駭客攻擊</a:t>
-            </a:r>
-          </a:p>
-        </p:txBody>
-      </p:sp>
-      <p:sp>
-        <p:nvSpPr>
-          <p:cNvPr id="10" name="TextBox 9"/>
-          <p:cNvSpPr txBox="1"/>
-          <p:nvPr/>
-        </p:nvSpPr>
-        <p:spPr>
-          <a:xfrm>
-            <a:off x="777240" y="2267712"/>
-            <a:ext cx="4937760" cy="640080"/>
-          </a:xfrm>
-          <a:prstGeom prst="rect">
-            <a:avLst/>
-          </a:prstGeom>
-          <a:noFill/>
-        </p:spPr>
-        <p:txBody>
-          <a:bodyPr wrap="square" anchor="t" lIns="0" rIns="0" tIns="0" bIns="0">
-            <a:spAutoFit/>
-          </a:bodyPr>
-          <a:lstStyle/>
-          <a:p>
-            <a:pPr algn="l">
-              <a:lnSpc>
-                <a:spcPts val="1500"/>
-              </a:lnSpc>
-            </a:pPr>
-            <a:r>
-              <a:rPr sz="1100" b="1">
-                <a:solidFill>
-                  <a:srgbClr val="E63946"/>
-                </a:solidFill>
-                <a:latin typeface="Microsoft JhengHei"/>
-                <a:ea typeface="Microsoft JhengHei"/>
-                <a:cs typeface="Microsoft JhengHei"/>
-              </a:rPr>
-              <a:t>緣由　</a:t>
-            </a:r>
-            <a:r>
-              <a:rPr sz="1100" b="0">
-                <a:solidFill>
-                  <a:srgbClr val="1A2233"/>
-                </a:solidFill>
-                <a:latin typeface="Microsoft JhengHei"/>
-                <a:ea typeface="Microsoft JhengHei"/>
-                <a:cs typeface="Microsoft JhengHei"/>
-              </a:rPr>
-              <a:t>本公司外部伺服器遭受自動化攻擊事件說明。</a:t>
-            </a:r>
-          </a:p>
-        </p:txBody>
-      </p:sp>
-      <p:sp>
-        <p:nvSpPr>
-          <p:cNvPr id="11" name="TextBox 10"/>
-          <p:cNvSpPr txBox="1"/>
-          <p:nvPr/>
-        </p:nvSpPr>
-        <p:spPr>
-          <a:xfrm>
-            <a:off x="777240" y="2926080"/>
-            <a:ext cx="4937760" cy="713232"/>
-          </a:xfrm>
-          <a:prstGeom prst="rect">
-            <a:avLst/>
-          </a:prstGeom>
-          <a:noFill/>
-        </p:spPr>
-        <p:txBody>
-          <a:bodyPr wrap="square" anchor="t" lIns="0" rIns="0" tIns="0" bIns="0">
-            <a:spAutoFit/>
-          </a:bodyPr>
-          <a:lstStyle/>
-          <a:p>
-            <a:pPr algn="l">
-              <a:lnSpc>
-                <a:spcPts val="1500"/>
-              </a:lnSpc>
-            </a:pPr>
-            <a:r>
-              <a:rPr sz="1100" b="1">
-                <a:solidFill>
-                  <a:srgbClr val="E63946"/>
-                </a:solidFill>
-                <a:latin typeface="Microsoft JhengHei"/>
-                <a:ea typeface="Microsoft JhengHei"/>
-                <a:cs typeface="Microsoft JhengHei"/>
-              </a:rPr>
-              <a:t>因應　</a:t>
-            </a:r>
-            <a:r>
-              <a:rPr sz="1100" b="0">
-                <a:solidFill>
-                  <a:srgbClr val="1A2233"/>
-                </a:solidFill>
-                <a:latin typeface="Microsoft JhengHei"/>
-                <a:ea typeface="Microsoft JhengHei"/>
-                <a:cs typeface="Microsoft JhengHei"/>
-              </a:rPr>
-              <a:t>本公司已與第三方資安廠商合作，全面強化網路偵測、系統監控與安全管控，以確保資訊安全。</a:t>
-            </a:r>
-          </a:p>
-        </p:txBody>
-      </p:sp>
-      <p:sp>
-        <p:nvSpPr>
-          <p:cNvPr id="12" name="Rounded Rectangle 11"/>
-          <p:cNvSpPr/>
-          <p:nvPr/>
-        </p:nvSpPr>
-        <p:spPr>
-          <a:xfrm>
-            <a:off x="6172200" y="1554480"/>
-            <a:ext cx="5394960" cy="2148840"/>
-          </a:xfrm>
-          <a:prstGeom prst="roundRect">
-            <a:avLst/>
-          </a:prstGeom>
-          <a:solidFill>
-            <a:srgbClr val="FFFFFF"/>
-          </a:solidFill>
-          <a:ln w="12700">
-            <a:solidFill>
-              <a:srgbClr val="DDE3EE"/>
-            </a:solidFill>
-          </a:ln>
-          <a:effectLst/>
-        </p:spPr>
-        <p:style>
-          <a:lnRef idx="1">
-            <a:schemeClr val="accent1"/>
-          </a:lnRef>
-          <a:fillRef idx="3">
-            <a:schemeClr val="accent1"/>
-          </a:fillRef>
-          <a:effectRef idx="2">
-            <a:schemeClr val="accent1"/>
-          </a:effectRef>
-          <a:fontRef idx="minor">
-            <a:schemeClr val="lt1"/>
-          </a:fontRef>
-        </p:style>
-        <p:txBody>
-          <a:bodyPr rtlCol="0" anchor="ctr"/>
-          <a:lstStyle/>
-          <a:p>
-            <a:pPr algn="ctr"/>
-          </a:p>
-        </p:txBody>
-      </p:sp>
-      <p:sp>
-        <p:nvSpPr>
-          <p:cNvPr id="13" name="Rectangle 12"/>
-          <p:cNvSpPr/>
-          <p:nvPr/>
-        </p:nvSpPr>
-        <p:spPr>
-          <a:xfrm>
-            <a:off x="6172200" y="1554480"/>
-            <a:ext cx="5394960" cy="109728"/>
-          </a:xfrm>
-          <a:prstGeom prst="rect">
-            <a:avLst/>
-          </a:prstGeom>
-          <a:solidFill>
-            <a:srgbClr val="5C6679"/>
-          </a:solidFill>
-          <a:ln>
-            <a:noFill/>
-          </a:ln>
-          <a:effectLst/>
-        </p:spPr>
-        <p:style>
-          <a:lnRef idx="1">
-            <a:schemeClr val="accent1"/>
-          </a:lnRef>
-          <a:fillRef idx="3">
-            <a:schemeClr val="accent1"/>
-          </a:fillRef>
-          <a:effectRef idx="2">
-            <a:schemeClr val="accent1"/>
-          </a:effectRef>
-          <a:fontRef idx="minor">
-            <a:schemeClr val="lt1"/>
-          </a:fontRef>
-        </p:style>
-        <p:txBody>
-          <a:bodyPr rtlCol="0" anchor="ctr"/>
-          <a:lstStyle/>
-          <a:p>
-            <a:pPr algn="ctr"/>
-          </a:p>
-        </p:txBody>
-      </p:sp>
-      <p:sp>
-        <p:nvSpPr>
-          <p:cNvPr id="14" name="TextBox 13"/>
-          <p:cNvSpPr txBox="1"/>
-          <p:nvPr/>
-        </p:nvSpPr>
-        <p:spPr>
-          <a:xfrm>
-            <a:off x="6400800" y="1773936"/>
-            <a:ext cx="3657600" cy="365760"/>
-          </a:xfrm>
-          <a:prstGeom prst="rect">
-            <a:avLst/>
-          </a:prstGeom>
-          <a:noFill/>
-        </p:spPr>
-        <p:txBody>
-          <a:bodyPr wrap="square" anchor="ctr" lIns="0" rIns="0" tIns="0" bIns="0">
-            <a:spAutoFit/>
-          </a:bodyPr>
-          <a:lstStyle/>
-          <a:p>
-            <a:pPr algn="l"/>
-            <a:r>
-              <a:rPr sz="1600" b="1">
-                <a:solidFill>
-                  <a:srgbClr val="1A2233"/>
-                </a:solidFill>
-                <a:latin typeface="Microsoft JhengHei"/>
-                <a:ea typeface="Microsoft JhengHei"/>
-                <a:cs typeface="Microsoft JhengHei"/>
-              </a:rPr>
-              <a:t>鈊象 </a:t>
-            </a:r>
-            <a:r>
-              <a:rPr sz="1300" b="0">
-                <a:solidFill>
-                  <a:srgbClr val="5C6679"/>
-                </a:solidFill>
-                <a:latin typeface="Microsoft JhengHei"/>
-                <a:ea typeface="Microsoft JhengHei"/>
-                <a:cs typeface="Microsoft JhengHei"/>
-              </a:rPr>
-              <a:t>3293</a:t>
-            </a:r>
-          </a:p>
-        </p:txBody>
-      </p:sp>
-      <p:sp>
-        <p:nvSpPr>
-          <p:cNvPr id="15" name="Rounded Rectangle 14"/>
-          <p:cNvSpPr/>
-          <p:nvPr/>
-        </p:nvSpPr>
-        <p:spPr>
-          <a:xfrm>
-            <a:off x="10149840" y="1792224"/>
-            <a:ext cx="1234440" cy="347472"/>
-          </a:xfrm>
-          <a:prstGeom prst="roundRect">
-            <a:avLst/>
-          </a:prstGeom>
-          <a:solidFill>
-            <a:srgbClr val="5C6679"/>
-          </a:solidFill>
-          <a:ln>
-            <a:noFill/>
-          </a:ln>
-          <a:effectLst/>
-        </p:spPr>
-        <p:style>
-          <a:lnRef idx="1">
-            <a:schemeClr val="accent1"/>
-          </a:lnRef>
-          <a:fillRef idx="3">
-            <a:schemeClr val="accent1"/>
-          </a:fillRef>
-          <a:effectRef idx="2">
-            <a:schemeClr val="accent1"/>
-          </a:effectRef>
-          <a:fontRef idx="minor">
-            <a:schemeClr val="lt1"/>
-          </a:fontRef>
-        </p:style>
-        <p:txBody>
-          <a:bodyPr rtlCol="0" anchor="ctr"/>
-          <a:lstStyle/>
-          <a:p>
-            <a:pPr algn="ctr"/>
-          </a:p>
-        </p:txBody>
-      </p:sp>
-      <p:sp>
-        <p:nvSpPr>
-          <p:cNvPr id="16" name="TextBox 15"/>
-          <p:cNvSpPr txBox="1"/>
-          <p:nvPr/>
-        </p:nvSpPr>
-        <p:spPr>
-          <a:xfrm>
-            <a:off x="10149840" y="1792224"/>
-            <a:ext cx="1234440" cy="347472"/>
-          </a:xfrm>
-          <a:prstGeom prst="rect">
-            <a:avLst/>
-          </a:prstGeom>
-          <a:noFill/>
-        </p:spPr>
-        <p:txBody>
-          <a:bodyPr wrap="square" anchor="ctr" lIns="0" rIns="0" tIns="0" bIns="0">
-            <a:spAutoFit/>
-          </a:bodyPr>
-          <a:lstStyle/>
-          <a:p>
-            <a:pPr algn="ctr"/>
-            <a:r>
-              <a:rPr sz="1050" b="1">
-                <a:solidFill>
-                  <a:srgbClr val="FFFFFF"/>
-                </a:solidFill>
-                <a:latin typeface="Microsoft JhengHei"/>
-                <a:ea typeface="Microsoft JhengHei"/>
-                <a:cs typeface="Microsoft JhengHei"/>
-              </a:rPr>
-              <a:t>其他</a:t>
-            </a:r>
-          </a:p>
-        </p:txBody>
-      </p:sp>
-      <p:sp>
-        <p:nvSpPr>
-          <p:cNvPr id="17" name="TextBox 16"/>
-          <p:cNvSpPr txBox="1"/>
-          <p:nvPr/>
-        </p:nvSpPr>
-        <p:spPr>
-          <a:xfrm>
-            <a:off x="6400800" y="2267712"/>
-            <a:ext cx="4937760" cy="640080"/>
-          </a:xfrm>
-          <a:prstGeom prst="rect">
-            <a:avLst/>
-          </a:prstGeom>
-          <a:noFill/>
-        </p:spPr>
-        <p:txBody>
-          <a:bodyPr wrap="square" anchor="t" lIns="0" rIns="0" tIns="0" bIns="0">
-            <a:spAutoFit/>
-          </a:bodyPr>
-          <a:lstStyle/>
-          <a:p>
-            <a:pPr algn="l">
-              <a:lnSpc>
-                <a:spcPts val="1500"/>
-              </a:lnSpc>
-            </a:pPr>
-            <a:r>
-              <a:rPr sz="1100" b="1">
-                <a:solidFill>
-                  <a:srgbClr val="5C6679"/>
-                </a:solidFill>
-                <a:latin typeface="Microsoft JhengHei"/>
-                <a:ea typeface="Microsoft JhengHei"/>
-                <a:cs typeface="Microsoft JhengHei"/>
-              </a:rPr>
-              <a:t>緣由　</a:t>
-            </a:r>
-            <a:r>
-              <a:rPr sz="1100" b="0">
-                <a:solidFill>
-                  <a:srgbClr val="1A2233"/>
-                </a:solidFill>
-                <a:latin typeface="Microsoft JhengHei"/>
-                <a:ea typeface="Microsoft JhengHei"/>
-                <a:cs typeface="Microsoft JhengHei"/>
-              </a:rPr>
-              <a:t>本公司於115年9月29日發現不明IP異常侵入公司營運資訊設備。</a:t>
-            </a:r>
-          </a:p>
-        </p:txBody>
-      </p:sp>
-      <p:sp>
-        <p:nvSpPr>
-          <p:cNvPr id="18" name="TextBox 17"/>
-          <p:cNvSpPr txBox="1"/>
-          <p:nvPr/>
-        </p:nvSpPr>
-        <p:spPr>
-          <a:xfrm>
-            <a:off x="6400800" y="2926080"/>
-            <a:ext cx="4937760" cy="713232"/>
-          </a:xfrm>
-          <a:prstGeom prst="rect">
-            <a:avLst/>
-          </a:prstGeom>
-          <a:noFill/>
-        </p:spPr>
-        <p:txBody>
-          <a:bodyPr wrap="square" anchor="t" lIns="0" rIns="0" tIns="0" bIns="0">
-            <a:spAutoFit/>
-          </a:bodyPr>
-          <a:lstStyle/>
-          <a:p>
-            <a:pPr algn="l">
-              <a:lnSpc>
-                <a:spcPts val="1500"/>
-              </a:lnSpc>
-            </a:pPr>
-            <a:r>
-              <a:rPr sz="1100" b="1">
-                <a:solidFill>
-                  <a:srgbClr val="5C6679"/>
-                </a:solidFill>
-                <a:latin typeface="Microsoft JhengHei"/>
-                <a:ea typeface="Microsoft JhengHei"/>
-                <a:cs typeface="Microsoft JhengHei"/>
-              </a:rPr>
-              <a:t>因應　</a:t>
-            </a:r>
-            <a:r>
-              <a:rPr sz="1100" b="0">
-                <a:solidFill>
-                  <a:srgbClr val="1A2233"/>
-                </a:solidFill>
-                <a:latin typeface="Microsoft JhengHei"/>
-                <a:ea typeface="Microsoft JhengHei"/>
-                <a:cs typeface="Microsoft JhengHei"/>
-              </a:rPr>
-              <a:t>持續提升資安防禦，強化監控與防護層級。</a:t>
-            </a:r>
-          </a:p>
-        </p:txBody>
-      </p:sp>
-      <p:sp>
-        <p:nvSpPr>
-          <p:cNvPr id="19" name="Rounded Rectangle 18"/>
-          <p:cNvSpPr/>
-          <p:nvPr/>
-        </p:nvSpPr>
-        <p:spPr>
-          <a:xfrm>
-            <a:off x="548640" y="3886200"/>
-            <a:ext cx="5394960" cy="2148840"/>
-          </a:xfrm>
-          <a:prstGeom prst="roundRect">
-            <a:avLst/>
-          </a:prstGeom>
-          <a:solidFill>
-            <a:srgbClr val="FFFFFF"/>
-          </a:solidFill>
-          <a:ln w="12700">
-            <a:solidFill>
-              <a:srgbClr val="DDE3EE"/>
-            </a:solidFill>
-          </a:ln>
-          <a:effectLst/>
-        </p:spPr>
-        <p:style>
-          <a:lnRef idx="1">
-            <a:schemeClr val="accent1"/>
-          </a:lnRef>
-          <a:fillRef idx="3">
-            <a:schemeClr val="accent1"/>
-          </a:fillRef>
-          <a:effectRef idx="2">
-            <a:schemeClr val="accent1"/>
-          </a:effectRef>
-          <a:fontRef idx="minor">
-            <a:schemeClr val="lt1"/>
-          </a:fontRef>
-        </p:style>
-        <p:txBody>
-          <a:bodyPr rtlCol="0" anchor="ctr"/>
-          <a:lstStyle/>
-          <a:p>
-            <a:pPr algn="ctr"/>
-          </a:p>
-        </p:txBody>
-      </p:sp>
-      <p:sp>
-        <p:nvSpPr>
-          <p:cNvPr id="20" name="Rectangle 19"/>
-          <p:cNvSpPr/>
-          <p:nvPr/>
-        </p:nvSpPr>
-        <p:spPr>
-          <a:xfrm>
-            <a:off x="548640" y="3886200"/>
-            <a:ext cx="5394960" cy="109728"/>
-          </a:xfrm>
-          <a:prstGeom prst="rect">
             <a:avLst/>
           </a:prstGeom>
           <a:solidFill>
@@ -13079,105 +12037,13 @@
       </p:sp>
       <p:sp>
         <p:nvSpPr>
-          <p:cNvPr id="21" name="TextBox 20"/>
+          <p:cNvPr id="9" name="TextBox 8"/>
           <p:cNvSpPr txBox="1"/>
           <p:nvPr/>
         </p:nvSpPr>
         <p:spPr>
           <a:xfrm>
-            <a:off x="777240" y="4105656"/>
-            <a:ext cx="3657600" cy="365760"/>
-          </a:xfrm>
-          <a:prstGeom prst="rect">
-            <a:avLst/>
-          </a:prstGeom>
-          <a:noFill/>
-        </p:spPr>
-        <p:txBody>
-          <a:bodyPr wrap="square" anchor="ctr" lIns="0" rIns="0" tIns="0" bIns="0">
-            <a:spAutoFit/>
-          </a:bodyPr>
-          <a:lstStyle/>
-          <a:p>
-            <a:pPr algn="l"/>
-            <a:r>
-              <a:rPr sz="1600" b="1">
-                <a:solidFill>
-                  <a:srgbClr val="1A2233"/>
-                </a:solidFill>
-                <a:latin typeface="Microsoft JhengHei"/>
-                <a:ea typeface="Microsoft JhengHei"/>
-                <a:cs typeface="Microsoft JhengHei"/>
-              </a:rPr>
-              <a:t>柏文 </a:t>
-            </a:r>
-            <a:r>
-              <a:rPr sz="1300" b="0">
-                <a:solidFill>
-                  <a:srgbClr val="5C6679"/>
-                </a:solidFill>
-                <a:latin typeface="Microsoft JhengHei"/>
-                <a:ea typeface="Microsoft JhengHei"/>
-                <a:cs typeface="Microsoft JhengHei"/>
-              </a:rPr>
-              <a:t>8462</a:t>
-            </a:r>
-          </a:p>
-        </p:txBody>
-      </p:sp>
-      <p:sp>
-        <p:nvSpPr>
-          <p:cNvPr id="22" name="Rounded Rectangle 21"/>
-          <p:cNvSpPr/>
-          <p:nvPr/>
-        </p:nvSpPr>
-        <p:spPr>
-          <a:xfrm>
-            <a:off x="4526280" y="4123944"/>
-            <a:ext cx="1234440" cy="347472"/>
-          </a:xfrm>
-          <a:prstGeom prst="roundRect">
-            <a:avLst/>
-          </a:prstGeom>
-          <a:solidFill>
-            <a:srgbClr val="27A6C4"/>
-          </a:solidFill>
-          <a:ln>
-            <a:noFill/>
-          </a:ln>
-          <a:effectLst/>
-        </p:spPr>
-        <p:style>
-          <a:lnRef idx="1">
-            <a:schemeClr val="accent1"/>
-          </a:lnRef>
-          <a:fillRef idx="3">
-            <a:schemeClr val="accent1"/>
-          </a:fillRef>
-          <a:effectRef idx="2">
-            <a:schemeClr val="accent1"/>
-          </a:effectRef>
-          <a:fontRef idx="minor">
-            <a:schemeClr val="lt1"/>
-          </a:fontRef>
-        </p:style>
-        <p:txBody>
-          <a:bodyPr rtlCol="0" anchor="ctr"/>
-          <a:lstStyle/>
-          <a:p>
-            <a:pPr algn="ctr"/>
-          </a:p>
-        </p:txBody>
-      </p:sp>
-      <p:sp>
-        <p:nvSpPr>
-          <p:cNvPr id="23" name="TextBox 22"/>
-          <p:cNvSpPr txBox="1"/>
-          <p:nvPr/>
-        </p:nvSpPr>
-        <p:spPr>
-          <a:xfrm>
-            <a:off x="4526280" y="4123944"/>
+            <a:off x="4526280" y="1792224"/>
             <a:ext cx="1234440" cy="347472"/>
           </a:xfrm>
           <a:prstGeom prst="rect">
@@ -13208,13 +12074,13 @@
       </p:sp>
       <p:sp>
         <p:nvSpPr>
-          <p:cNvPr id="24" name="TextBox 23"/>
+          <p:cNvPr id="10" name="TextBox 9"/>
           <p:cNvSpPr txBox="1"/>
           <p:nvPr/>
         </p:nvSpPr>
         <p:spPr>
           <a:xfrm>
-            <a:off x="777240" y="4599432"/>
+            <a:off x="777240" y="2267712"/>
             <a:ext cx="4937760" cy="640080"/>
           </a:xfrm>
           <a:prstGeom prst="rect">
@@ -13260,13 +12126,13 @@
       </p:sp>
       <p:sp>
         <p:nvSpPr>
-          <p:cNvPr id="25" name="TextBox 24"/>
+          <p:cNvPr id="11" name="TextBox 10"/>
           <p:cNvSpPr txBox="1"/>
           <p:nvPr/>
         </p:nvSpPr>
         <p:spPr>
           <a:xfrm>
-            <a:off x="777240" y="5257800"/>
+            <a:off x="777240" y="2926080"/>
             <a:ext cx="4937760" cy="713232"/>
           </a:xfrm>
           <a:prstGeom prst="rect">

--- a/資安事件因應分析.pptx
+++ b/資安事件因應分析.pptx
@@ -13,6 +13,7 @@
     <p:sldId id="261" r:id="rId12"/>
     <p:sldId id="262" r:id="rId13"/>
     <p:sldId id="263" r:id="rId14"/>
+    <p:sldId id="264" r:id="rId15"/>
   </p:sldIdLst>
   <p:sldSz cx="12191695" cy="6858000" type="screen4x3"/>
   <p:notesSz cx="6858000" cy="9144000"/>
@@ -189,10 +190,10 @@
                   <c:v>3</c:v>
                 </c:pt>
                 <c:pt idx="1">
-                  <c:v>3</c:v>
+                  <c:v>7</c:v>
                 </c:pt>
                 <c:pt idx="2">
-                  <c:v>3</c:v>
+                  <c:v>4</c:v>
                 </c:pt>
               </c:numCache>
             </c:numRef>
@@ -3529,7 +3530,7 @@
                 <a:ea typeface="Microsoft JhengHei"/>
                 <a:cs typeface="Microsoft JhengHei"/>
               </a:rPr>
-              <a:t>資料期間 2026-09-22 ~ 2026-10-22　｜　MOPS 重大訊息全文檢索　｜　9 家公司</a:t>
+              <a:t>資料期間 2026-09-23 ~ 2026-10-23　｜　MOPS 重大訊息全文檢索　｜　14 家公司</a:t>
             </a:r>
           </a:p>
         </p:txBody>
@@ -3746,7 +3747,7 @@
                 <a:ea typeface="Microsoft JhengHei"/>
                 <a:cs typeface="Microsoft JhengHei"/>
               </a:rPr>
-              <a:t>資料期間內 MOPS 揭露之 9 起資安相關重大訊息</a:t>
+              <a:t>資料期間內 MOPS 揭露之 14 起資安相關重大訊息</a:t>
             </a:r>
           </a:p>
         </p:txBody>
@@ -3829,7 +3830,7 @@
                 <a:ea typeface="Microsoft JhengHei"/>
                 <a:cs typeface="Microsoft JhengHei"/>
               </a:rPr>
-              <a:t>9</a:t>
+              <a:t>14</a:t>
             </a:r>
           </a:p>
         </p:txBody>
@@ -4136,7 +4137,7 @@
                 <a:gridCol w="2286000"/>
                 <a:gridCol w="5120640"/>
               </a:tblGrid>
-              <a:tr h="356616">
+              <a:tr h="237744">
                 <a:tc>
                   <a:txBody>
                     <a:bodyPr/>
@@ -4258,7 +4259,251 @@
                   </a:tcPr>
                 </a:tc>
               </a:tr>
-              <a:tr h="356616">
+              <a:tr h="237744">
+                <a:tc>
+                  <a:txBody>
+                    <a:bodyPr/>
+                    <a:lstStyle/>
+                    <a:p>
+                      <a:r>
+                        <a:rPr sz="1150" b="0">
+                          <a:solidFill>
+                            <a:srgbClr val="1A2233"/>
+                          </a:solidFill>
+                          <a:latin typeface="Microsoft JhengHei"/>
+                          <a:ea typeface="Microsoft JhengHei"/>
+                          <a:cs typeface="Microsoft JhengHei"/>
+                        </a:rPr>
+                        <a:t>科懋</a:t>
+                      </a:r>
+                    </a:p>
+                  </a:txBody>
+                  <a:tcPr anchor="ctr" marL="73152" marT="9144" marB="9144">
+                    <a:solidFill>
+                      <a:srgbClr val="FFFFFF"/>
+                    </a:solidFill>
+                  </a:tcPr>
+                </a:tc>
+                <a:tc>
+                  <a:txBody>
+                    <a:bodyPr/>
+                    <a:lstStyle/>
+                    <a:p>
+                      <a:r>
+                        <a:rPr sz="1150" b="0">
+                          <a:solidFill>
+                            <a:srgbClr val="1A2233"/>
+                          </a:solidFill>
+                          <a:latin typeface="Microsoft JhengHei"/>
+                          <a:ea typeface="Microsoft JhengHei"/>
+                          <a:cs typeface="Microsoft JhengHei"/>
+                        </a:rPr>
+                        <a:t>6496</a:t>
+                      </a:r>
+                    </a:p>
+                  </a:txBody>
+                  <a:tcPr anchor="ctr" marL="73152" marT="9144" marB="9144">
+                    <a:solidFill>
+                      <a:srgbClr val="FFFFFF"/>
+                    </a:solidFill>
+                  </a:tcPr>
+                </a:tc>
+                <a:tc>
+                  <a:txBody>
+                    <a:bodyPr/>
+                    <a:lstStyle/>
+                    <a:p>
+                      <a:r>
+                        <a:rPr sz="1150" b="0">
+                          <a:solidFill>
+                            <a:srgbClr val="1A2233"/>
+                          </a:solidFill>
+                          <a:latin typeface="Microsoft JhengHei"/>
+                          <a:ea typeface="Microsoft JhengHei"/>
+                          <a:cs typeface="Microsoft JhengHei"/>
+                        </a:rPr>
+                        <a:t>10/22</a:t>
+                      </a:r>
+                    </a:p>
+                  </a:txBody>
+                  <a:tcPr anchor="ctr" marL="73152" marT="9144" marB="9144">
+                    <a:solidFill>
+                      <a:srgbClr val="FFFFFF"/>
+                    </a:solidFill>
+                  </a:tcPr>
+                </a:tc>
+                <a:tc>
+                  <a:txBody>
+                    <a:bodyPr/>
+                    <a:lstStyle/>
+                    <a:p>
+                      <a:r>
+                        <a:rPr sz="1150" b="1">
+                          <a:solidFill>
+                            <a:srgbClr val="27A6C4"/>
+                          </a:solidFill>
+                          <a:latin typeface="Microsoft JhengHei"/>
+                          <a:ea typeface="Microsoft JhengHei"/>
+                          <a:cs typeface="Microsoft JhengHei"/>
+                        </a:rPr>
+                        <a:t>個資外洩</a:t>
+                      </a:r>
+                    </a:p>
+                  </a:txBody>
+                  <a:tcPr anchor="ctr" marL="73152" marT="9144" marB="9144">
+                    <a:solidFill>
+                      <a:srgbClr val="FFFFFF"/>
+                    </a:solidFill>
+                  </a:tcPr>
+                </a:tc>
+                <a:tc>
+                  <a:txBody>
+                    <a:bodyPr/>
+                    <a:lstStyle/>
+                    <a:p>
+                      <a:r>
+                        <a:rPr sz="1150" b="0">
+                          <a:solidFill>
+                            <a:srgbClr val="1A2233"/>
+                          </a:solidFill>
+                          <a:latin typeface="Microsoft JhengHei"/>
+                          <a:ea typeface="Microsoft JhengHei"/>
+                          <a:cs typeface="Microsoft JhengHei"/>
+                        </a:rPr>
+                        <a:t>目前評估對公司營運無重大影響。</a:t>
+                      </a:r>
+                    </a:p>
+                  </a:txBody>
+                  <a:tcPr anchor="ctr" marL="73152" marT="9144" marB="9144">
+                    <a:solidFill>
+                      <a:srgbClr val="FFFFFF"/>
+                    </a:solidFill>
+                  </a:tcPr>
+                </a:tc>
+              </a:tr>
+              <a:tr h="237744">
+                <a:tc>
+                  <a:txBody>
+                    <a:bodyPr/>
+                    <a:lstStyle/>
+                    <a:p>
+                      <a:r>
+                        <a:rPr sz="1150" b="0">
+                          <a:solidFill>
+                            <a:srgbClr val="1A2233"/>
+                          </a:solidFill>
+                          <a:latin typeface="Microsoft JhengHei"/>
+                          <a:ea typeface="Microsoft JhengHei"/>
+                          <a:cs typeface="Microsoft JhengHei"/>
+                        </a:rPr>
+                        <a:t>立康</a:t>
+                      </a:r>
+                    </a:p>
+                  </a:txBody>
+                  <a:tcPr anchor="ctr" marL="73152" marT="9144" marB="9144">
+                    <a:solidFill>
+                      <a:srgbClr val="EEF2F9"/>
+                    </a:solidFill>
+                  </a:tcPr>
+                </a:tc>
+                <a:tc>
+                  <a:txBody>
+                    <a:bodyPr/>
+                    <a:lstStyle/>
+                    <a:p>
+                      <a:r>
+                        <a:rPr sz="1150" b="0">
+                          <a:solidFill>
+                            <a:srgbClr val="1A2233"/>
+                          </a:solidFill>
+                          <a:latin typeface="Microsoft JhengHei"/>
+                          <a:ea typeface="Microsoft JhengHei"/>
+                          <a:cs typeface="Microsoft JhengHei"/>
+                        </a:rPr>
+                        <a:t>6242</a:t>
+                      </a:r>
+                    </a:p>
+                  </a:txBody>
+                  <a:tcPr anchor="ctr" marL="73152" marT="9144" marB="9144">
+                    <a:solidFill>
+                      <a:srgbClr val="EEF2F9"/>
+                    </a:solidFill>
+                  </a:tcPr>
+                </a:tc>
+                <a:tc>
+                  <a:txBody>
+                    <a:bodyPr/>
+                    <a:lstStyle/>
+                    <a:p>
+                      <a:r>
+                        <a:rPr sz="1150" b="0">
+                          <a:solidFill>
+                            <a:srgbClr val="1A2233"/>
+                          </a:solidFill>
+                          <a:latin typeface="Microsoft JhengHei"/>
+                          <a:ea typeface="Microsoft JhengHei"/>
+                          <a:cs typeface="Microsoft JhengHei"/>
+                        </a:rPr>
+                        <a:t>10/21</a:t>
+                      </a:r>
+                    </a:p>
+                  </a:txBody>
+                  <a:tcPr anchor="ctr" marL="73152" marT="9144" marB="9144">
+                    <a:solidFill>
+                      <a:srgbClr val="EEF2F9"/>
+                    </a:solidFill>
+                  </a:tcPr>
+                </a:tc>
+                <a:tc>
+                  <a:txBody>
+                    <a:bodyPr/>
+                    <a:lstStyle/>
+                    <a:p>
+                      <a:r>
+                        <a:rPr sz="1150" b="1">
+                          <a:solidFill>
+                            <a:srgbClr val="27A6C4"/>
+                          </a:solidFill>
+                          <a:latin typeface="Microsoft JhengHei"/>
+                          <a:ea typeface="Microsoft JhengHei"/>
+                          <a:cs typeface="Microsoft JhengHei"/>
+                        </a:rPr>
+                        <a:t>個資外洩</a:t>
+                      </a:r>
+                    </a:p>
+                  </a:txBody>
+                  <a:tcPr anchor="ctr" marL="73152" marT="9144" marB="9144">
+                    <a:solidFill>
+                      <a:srgbClr val="EEF2F9"/>
+                    </a:solidFill>
+                  </a:tcPr>
+                </a:tc>
+                <a:tc>
+                  <a:txBody>
+                    <a:bodyPr/>
+                    <a:lstStyle/>
+                    <a:p>
+                      <a:r>
+                        <a:rPr sz="1150" b="0">
+                          <a:solidFill>
+                            <a:srgbClr val="1A2233"/>
+                          </a:solidFill>
+                          <a:latin typeface="Microsoft JhengHei"/>
+                          <a:ea typeface="Microsoft JhengHei"/>
+                          <a:cs typeface="Microsoft JhengHei"/>
+                        </a:rPr>
+                        <a:t>截至目前為止對公司財務及業務並無重大影響。</a:t>
+                      </a:r>
+                    </a:p>
+                  </a:txBody>
+                  <a:tcPr anchor="ctr" marL="73152" marT="9144" marB="9144">
+                    <a:solidFill>
+                      <a:srgbClr val="EEF2F9"/>
+                    </a:solidFill>
+                  </a:tcPr>
+                </a:tc>
+              </a:tr>
+              <a:tr h="237744">
                 <a:tc>
                   <a:txBody>
                     <a:bodyPr/>
@@ -4380,7 +4625,7 @@
                   </a:tcPr>
                 </a:tc>
               </a:tr>
-              <a:tr h="356616">
+              <a:tr h="237744">
                 <a:tc>
                   <a:txBody>
                     <a:bodyPr/>
@@ -4502,7 +4747,7 @@
                   </a:tcPr>
                 </a:tc>
               </a:tr>
-              <a:tr h="356616">
+              <a:tr h="237744">
                 <a:tc>
                   <a:txBody>
                     <a:bodyPr/>
@@ -4624,7 +4869,7 @@
                   </a:tcPr>
                 </a:tc>
               </a:tr>
-              <a:tr h="356616">
+              <a:tr h="237744">
                 <a:tc>
                   <a:txBody>
                     <a:bodyPr/>
@@ -4639,7 +4884,7 @@
                           <a:ea typeface="Microsoft JhengHei"/>
                           <a:cs typeface="Microsoft JhengHei"/>
                         </a:rPr>
-                        <a:t>上福</a:t>
+                        <a:t>緯致</a:t>
                       </a:r>
                     </a:p>
                   </a:txBody>
@@ -4663,7 +4908,7 @@
                           <a:ea typeface="Microsoft JhengHei"/>
                           <a:cs typeface="Microsoft JhengHei"/>
                         </a:rPr>
-                        <a:t>6128</a:t>
+                        <a:t>4953</a:t>
                       </a:r>
                     </a:p>
                   </a:txBody>
@@ -4687,7 +4932,7 @@
                           <a:ea typeface="Microsoft JhengHei"/>
                           <a:cs typeface="Microsoft JhengHei"/>
                         </a:rPr>
-                        <a:t>10/07</a:t>
+                        <a:t>10/09</a:t>
                       </a:r>
                     </a:p>
                   </a:txBody>
@@ -4735,7 +4980,7 @@
                           <a:ea typeface="Microsoft JhengHei"/>
                           <a:cs typeface="Microsoft JhengHei"/>
                         </a:rPr>
-                        <a:t>目前評估沒有個資、亦沒有機密或重要文件資料外洩等情事發生，對本公司營…</a:t>
+                        <a:t>目前公司整體系統與營運正常運作，對公司尚無重大影響。</a:t>
                       </a:r>
                     </a:p>
                   </a:txBody>
@@ -4746,7 +4991,251 @@
                   </a:tcPr>
                 </a:tc>
               </a:tr>
-              <a:tr h="356616">
+              <a:tr h="237744">
+                <a:tc>
+                  <a:txBody>
+                    <a:bodyPr/>
+                    <a:lstStyle/>
+                    <a:p>
+                      <a:r>
+                        <a:rPr sz="1150" b="0">
+                          <a:solidFill>
+                            <a:srgbClr val="1A2233"/>
+                          </a:solidFill>
+                          <a:latin typeface="Microsoft JhengHei"/>
+                          <a:ea typeface="Microsoft JhengHei"/>
+                          <a:cs typeface="Microsoft JhengHei"/>
+                        </a:rPr>
+                        <a:t>上福</a:t>
+                      </a:r>
+                    </a:p>
+                  </a:txBody>
+                  <a:tcPr anchor="ctr" marL="73152" marT="9144" marB="9144">
+                    <a:solidFill>
+                      <a:srgbClr val="FFFFFF"/>
+                    </a:solidFill>
+                  </a:tcPr>
+                </a:tc>
+                <a:tc>
+                  <a:txBody>
+                    <a:bodyPr/>
+                    <a:lstStyle/>
+                    <a:p>
+                      <a:r>
+                        <a:rPr sz="1150" b="0">
+                          <a:solidFill>
+                            <a:srgbClr val="1A2233"/>
+                          </a:solidFill>
+                          <a:latin typeface="Microsoft JhengHei"/>
+                          <a:ea typeface="Microsoft JhengHei"/>
+                          <a:cs typeface="Microsoft JhengHei"/>
+                        </a:rPr>
+                        <a:t>6128</a:t>
+                      </a:r>
+                    </a:p>
+                  </a:txBody>
+                  <a:tcPr anchor="ctr" marL="73152" marT="9144" marB="9144">
+                    <a:solidFill>
+                      <a:srgbClr val="FFFFFF"/>
+                    </a:solidFill>
+                  </a:tcPr>
+                </a:tc>
+                <a:tc>
+                  <a:txBody>
+                    <a:bodyPr/>
+                    <a:lstStyle/>
+                    <a:p>
+                      <a:r>
+                        <a:rPr sz="1150" b="0">
+                          <a:solidFill>
+                            <a:srgbClr val="1A2233"/>
+                          </a:solidFill>
+                          <a:latin typeface="Microsoft JhengHei"/>
+                          <a:ea typeface="Microsoft JhengHei"/>
+                          <a:cs typeface="Microsoft JhengHei"/>
+                        </a:rPr>
+                        <a:t>10/07</a:t>
+                      </a:r>
+                    </a:p>
+                  </a:txBody>
+                  <a:tcPr anchor="ctr" marL="73152" marT="9144" marB="9144">
+                    <a:solidFill>
+                      <a:srgbClr val="FFFFFF"/>
+                    </a:solidFill>
+                  </a:tcPr>
+                </a:tc>
+                <a:tc>
+                  <a:txBody>
+                    <a:bodyPr/>
+                    <a:lstStyle/>
+                    <a:p>
+                      <a:r>
+                        <a:rPr sz="1150" b="1">
+                          <a:solidFill>
+                            <a:srgbClr val="5C6679"/>
+                          </a:solidFill>
+                          <a:latin typeface="Microsoft JhengHei"/>
+                          <a:ea typeface="Microsoft JhengHei"/>
+                          <a:cs typeface="Microsoft JhengHei"/>
+                        </a:rPr>
+                        <a:t>其他</a:t>
+                      </a:r>
+                    </a:p>
+                  </a:txBody>
+                  <a:tcPr anchor="ctr" marL="73152" marT="9144" marB="9144">
+                    <a:solidFill>
+                      <a:srgbClr val="FFFFFF"/>
+                    </a:solidFill>
+                  </a:tcPr>
+                </a:tc>
+                <a:tc>
+                  <a:txBody>
+                    <a:bodyPr/>
+                    <a:lstStyle/>
+                    <a:p>
+                      <a:r>
+                        <a:rPr sz="1150" b="0">
+                          <a:solidFill>
+                            <a:srgbClr val="1A2233"/>
+                          </a:solidFill>
+                          <a:latin typeface="Microsoft JhengHei"/>
+                          <a:ea typeface="Microsoft JhengHei"/>
+                          <a:cs typeface="Microsoft JhengHei"/>
+                        </a:rPr>
+                        <a:t>目前評估沒有個資、亦沒有機密或重要文件資料外洩等情事發生，對本公司營…</a:t>
+                      </a:r>
+                    </a:p>
+                  </a:txBody>
+                  <a:tcPr anchor="ctr" marL="73152" marT="9144" marB="9144">
+                    <a:solidFill>
+                      <a:srgbClr val="FFFFFF"/>
+                    </a:solidFill>
+                  </a:tcPr>
+                </a:tc>
+              </a:tr>
+              <a:tr h="237744">
+                <a:tc>
+                  <a:txBody>
+                    <a:bodyPr/>
+                    <a:lstStyle/>
+                    <a:p>
+                      <a:r>
+                        <a:rPr sz="1150" b="0">
+                          <a:solidFill>
+                            <a:srgbClr val="1A2233"/>
+                          </a:solidFill>
+                          <a:latin typeface="Microsoft JhengHei"/>
+                          <a:ea typeface="Microsoft JhengHei"/>
+                          <a:cs typeface="Microsoft JhengHei"/>
+                        </a:rPr>
+                        <a:t>杏一</a:t>
+                      </a:r>
+                    </a:p>
+                  </a:txBody>
+                  <a:tcPr anchor="ctr" marL="73152" marT="9144" marB="9144">
+                    <a:solidFill>
+                      <a:srgbClr val="EEF2F9"/>
+                    </a:solidFill>
+                  </a:tcPr>
+                </a:tc>
+                <a:tc>
+                  <a:txBody>
+                    <a:bodyPr/>
+                    <a:lstStyle/>
+                    <a:p>
+                      <a:r>
+                        <a:rPr sz="1150" b="0">
+                          <a:solidFill>
+                            <a:srgbClr val="1A2233"/>
+                          </a:solidFill>
+                          <a:latin typeface="Microsoft JhengHei"/>
+                          <a:ea typeface="Microsoft JhengHei"/>
+                          <a:cs typeface="Microsoft JhengHei"/>
+                        </a:rPr>
+                        <a:t>4175</a:t>
+                      </a:r>
+                    </a:p>
+                  </a:txBody>
+                  <a:tcPr anchor="ctr" marL="73152" marT="9144" marB="9144">
+                    <a:solidFill>
+                      <a:srgbClr val="EEF2F9"/>
+                    </a:solidFill>
+                  </a:tcPr>
+                </a:tc>
+                <a:tc>
+                  <a:txBody>
+                    <a:bodyPr/>
+                    <a:lstStyle/>
+                    <a:p>
+                      <a:r>
+                        <a:rPr sz="1150" b="0">
+                          <a:solidFill>
+                            <a:srgbClr val="1A2233"/>
+                          </a:solidFill>
+                          <a:latin typeface="Microsoft JhengHei"/>
+                          <a:ea typeface="Microsoft JhengHei"/>
+                          <a:cs typeface="Microsoft JhengHei"/>
+                        </a:rPr>
+                        <a:t>10/07</a:t>
+                      </a:r>
+                    </a:p>
+                  </a:txBody>
+                  <a:tcPr anchor="ctr" marL="73152" marT="9144" marB="9144">
+                    <a:solidFill>
+                      <a:srgbClr val="EEF2F9"/>
+                    </a:solidFill>
+                  </a:tcPr>
+                </a:tc>
+                <a:tc>
+                  <a:txBody>
+                    <a:bodyPr/>
+                    <a:lstStyle/>
+                    <a:p>
+                      <a:r>
+                        <a:rPr sz="1150" b="1">
+                          <a:solidFill>
+                            <a:srgbClr val="27A6C4"/>
+                          </a:solidFill>
+                          <a:latin typeface="Microsoft JhengHei"/>
+                          <a:ea typeface="Microsoft JhengHei"/>
+                          <a:cs typeface="Microsoft JhengHei"/>
+                        </a:rPr>
+                        <a:t>個資外洩</a:t>
+                      </a:r>
+                    </a:p>
+                  </a:txBody>
+                  <a:tcPr anchor="ctr" marL="73152" marT="9144" marB="9144">
+                    <a:solidFill>
+                      <a:srgbClr val="EEF2F9"/>
+                    </a:solidFill>
+                  </a:tcPr>
+                </a:tc>
+                <a:tc>
+                  <a:txBody>
+                    <a:bodyPr/>
+                    <a:lstStyle/>
+                    <a:p>
+                      <a:r>
+                        <a:rPr sz="1150" b="0">
+                          <a:solidFill>
+                            <a:srgbClr val="1A2233"/>
+                          </a:solidFill>
+                          <a:latin typeface="Microsoft JhengHei"/>
+                          <a:ea typeface="Microsoft JhengHei"/>
+                          <a:cs typeface="Microsoft JhengHei"/>
+                        </a:rPr>
+                        <a:t>截至目前為止對公司財務及業務並無重大影響。</a:t>
+                      </a:r>
+                    </a:p>
+                  </a:txBody>
+                  <a:tcPr anchor="ctr" marL="73152" marT="9144" marB="9144">
+                    <a:solidFill>
+                      <a:srgbClr val="EEF2F9"/>
+                    </a:solidFill>
+                  </a:tcPr>
+                </a:tc>
+              </a:tr>
+              <a:tr h="237744">
                 <a:tc>
                   <a:txBody>
                     <a:bodyPr/>
@@ -4868,7 +5357,7 @@
                   </a:tcPr>
                 </a:tc>
               </a:tr>
-              <a:tr h="356616">
+              <a:tr h="237744">
                 <a:tc>
                   <a:txBody>
                     <a:bodyPr/>
@@ -4990,7 +5479,7 @@
                   </a:tcPr>
                 </a:tc>
               </a:tr>
-              <a:tr h="356616">
+              <a:tr h="237744">
                 <a:tc>
                   <a:txBody>
                     <a:bodyPr/>
@@ -5005,7 +5494,7 @@
                           <a:ea typeface="Microsoft JhengHei"/>
                           <a:cs typeface="Microsoft JhengHei"/>
                         </a:rPr>
-                        <a:t>神腦</a:t>
+                        <a:t>安心</a:t>
                       </a:r>
                     </a:p>
                   </a:txBody>
@@ -5029,7 +5518,7 @@
                           <a:ea typeface="Microsoft JhengHei"/>
                           <a:cs typeface="Microsoft JhengHei"/>
                         </a:rPr>
-                        <a:t>2450</a:t>
+                        <a:t>1259</a:t>
                       </a:r>
                     </a:p>
                   </a:txBody>
@@ -5053,251 +5542,7 @@
                           <a:ea typeface="Microsoft JhengHei"/>
                           <a:cs typeface="Microsoft JhengHei"/>
                         </a:rPr>
-                        <a:t>09/29</a:t>
-                      </a:r>
-                    </a:p>
-                  </a:txBody>
-                  <a:tcPr anchor="ctr" marL="73152" marT="9144" marB="9144">
-                    <a:solidFill>
-                      <a:srgbClr val="FFFFFF"/>
-                    </a:solidFill>
-                  </a:tcPr>
-                </a:tc>
-                <a:tc>
-                  <a:txBody>
-                    <a:bodyPr/>
-                    <a:lstStyle/>
-                    <a:p>
-                      <a:r>
-                        <a:rPr sz="1150" b="1">
-                          <a:solidFill>
-                            <a:srgbClr val="E63946"/>
-                          </a:solidFill>
-                          <a:latin typeface="Microsoft JhengHei"/>
-                          <a:ea typeface="Microsoft JhengHei"/>
-                          <a:cs typeface="Microsoft JhengHei"/>
-                        </a:rPr>
-                        <a:t>駭客攻擊</a:t>
-                      </a:r>
-                    </a:p>
-                  </a:txBody>
-                  <a:tcPr anchor="ctr" marL="73152" marT="9144" marB="9144">
-                    <a:solidFill>
-                      <a:srgbClr val="FFFFFF"/>
-                    </a:solidFill>
-                  </a:tcPr>
-                </a:tc>
-                <a:tc>
-                  <a:txBody>
-                    <a:bodyPr/>
-                    <a:lstStyle/>
-                    <a:p>
-                      <a:r>
-                        <a:rPr sz="1150" b="0">
-                          <a:solidFill>
-                            <a:srgbClr val="1A2233"/>
-                          </a:solidFill>
-                          <a:latin typeface="Microsoft JhengHei"/>
-                          <a:ea typeface="Microsoft JhengHei"/>
-                          <a:cs typeface="Microsoft JhengHei"/>
-                        </a:rPr>
-                        <a:t>評估對本公司營運、財務及服務提供無重大影響。</a:t>
-                      </a:r>
-                    </a:p>
-                  </a:txBody>
-                  <a:tcPr anchor="ctr" marL="73152" marT="9144" marB="9144">
-                    <a:solidFill>
-                      <a:srgbClr val="FFFFFF"/>
-                    </a:solidFill>
-                  </a:tcPr>
-                </a:tc>
-              </a:tr>
-              <a:tr h="356616">
-                <a:tc>
-                  <a:txBody>
-                    <a:bodyPr/>
-                    <a:lstStyle/>
-                    <a:p>
-                      <a:r>
-                        <a:rPr sz="1150" b="0">
-                          <a:solidFill>
-                            <a:srgbClr val="1A2233"/>
-                          </a:solidFill>
-                          <a:latin typeface="Microsoft JhengHei"/>
-                          <a:ea typeface="Microsoft JhengHei"/>
-                          <a:cs typeface="Microsoft JhengHei"/>
-                        </a:rPr>
-                        <a:t>鈊象</a:t>
-                      </a:r>
-                    </a:p>
-                  </a:txBody>
-                  <a:tcPr anchor="ctr" marL="73152" marT="9144" marB="9144">
-                    <a:solidFill>
-                      <a:srgbClr val="EEF2F9"/>
-                    </a:solidFill>
-                  </a:tcPr>
-                </a:tc>
-                <a:tc>
-                  <a:txBody>
-                    <a:bodyPr/>
-                    <a:lstStyle/>
-                    <a:p>
-                      <a:r>
-                        <a:rPr sz="1150" b="0">
-                          <a:solidFill>
-                            <a:srgbClr val="1A2233"/>
-                          </a:solidFill>
-                          <a:latin typeface="Microsoft JhengHei"/>
-                          <a:ea typeface="Microsoft JhengHei"/>
-                          <a:cs typeface="Microsoft JhengHei"/>
-                        </a:rPr>
-                        <a:t>3293</a:t>
-                      </a:r>
-                    </a:p>
-                  </a:txBody>
-                  <a:tcPr anchor="ctr" marL="73152" marT="9144" marB="9144">
-                    <a:solidFill>
-                      <a:srgbClr val="EEF2F9"/>
-                    </a:solidFill>
-                  </a:tcPr>
-                </a:tc>
-                <a:tc>
-                  <a:txBody>
-                    <a:bodyPr/>
-                    <a:lstStyle/>
-                    <a:p>
-                      <a:r>
-                        <a:rPr sz="1150" b="0">
-                          <a:solidFill>
-                            <a:srgbClr val="1A2233"/>
-                          </a:solidFill>
-                          <a:latin typeface="Microsoft JhengHei"/>
-                          <a:ea typeface="Microsoft JhengHei"/>
-                          <a:cs typeface="Microsoft JhengHei"/>
-                        </a:rPr>
-                        <a:t>09/29</a:t>
-                      </a:r>
-                    </a:p>
-                  </a:txBody>
-                  <a:tcPr anchor="ctr" marL="73152" marT="9144" marB="9144">
-                    <a:solidFill>
-                      <a:srgbClr val="EEF2F9"/>
-                    </a:solidFill>
-                  </a:tcPr>
-                </a:tc>
-                <a:tc>
-                  <a:txBody>
-                    <a:bodyPr/>
-                    <a:lstStyle/>
-                    <a:p>
-                      <a:r>
-                        <a:rPr sz="1150" b="1">
-                          <a:solidFill>
-                            <a:srgbClr val="5C6679"/>
-                          </a:solidFill>
-                          <a:latin typeface="Microsoft JhengHei"/>
-                          <a:ea typeface="Microsoft JhengHei"/>
-                          <a:cs typeface="Microsoft JhengHei"/>
-                        </a:rPr>
-                        <a:t>其他</a:t>
-                      </a:r>
-                    </a:p>
-                  </a:txBody>
-                  <a:tcPr anchor="ctr" marL="73152" marT="9144" marB="9144">
-                    <a:solidFill>
-                      <a:srgbClr val="EEF2F9"/>
-                    </a:solidFill>
-                  </a:tcPr>
-                </a:tc>
-                <a:tc>
-                  <a:txBody>
-                    <a:bodyPr/>
-                    <a:lstStyle/>
-                    <a:p>
-                      <a:r>
-                        <a:rPr sz="1150" b="0">
-                          <a:solidFill>
-                            <a:srgbClr val="1A2233"/>
-                          </a:solidFill>
-                          <a:latin typeface="Microsoft JhengHei"/>
-                          <a:ea typeface="Microsoft JhengHei"/>
-                          <a:cs typeface="Microsoft JhengHei"/>
-                        </a:rPr>
-                        <a:t>目前評估對公司營運尚無重大影響。</a:t>
-                      </a:r>
-                    </a:p>
-                  </a:txBody>
-                  <a:tcPr anchor="ctr" marL="73152" marT="9144" marB="9144">
-                    <a:solidFill>
-                      <a:srgbClr val="EEF2F9"/>
-                    </a:solidFill>
-                  </a:tcPr>
-                </a:tc>
-              </a:tr>
-              <a:tr h="356616">
-                <a:tc>
-                  <a:txBody>
-                    <a:bodyPr/>
-                    <a:lstStyle/>
-                    <a:p>
-                      <a:r>
-                        <a:rPr sz="1150" b="0">
-                          <a:solidFill>
-                            <a:srgbClr val="1A2233"/>
-                          </a:solidFill>
-                          <a:latin typeface="Microsoft JhengHei"/>
-                          <a:ea typeface="Microsoft JhengHei"/>
-                          <a:cs typeface="Microsoft JhengHei"/>
-                        </a:rPr>
-                        <a:t>柏文</a:t>
-                      </a:r>
-                    </a:p>
-                  </a:txBody>
-                  <a:tcPr anchor="ctr" marL="73152" marT="9144" marB="9144">
-                    <a:solidFill>
-                      <a:srgbClr val="FFFFFF"/>
-                    </a:solidFill>
-                  </a:tcPr>
-                </a:tc>
-                <a:tc>
-                  <a:txBody>
-                    <a:bodyPr/>
-                    <a:lstStyle/>
-                    <a:p>
-                      <a:r>
-                        <a:rPr sz="1150" b="0">
-                          <a:solidFill>
-                            <a:srgbClr val="1A2233"/>
-                          </a:solidFill>
-                          <a:latin typeface="Microsoft JhengHei"/>
-                          <a:ea typeface="Microsoft JhengHei"/>
-                          <a:cs typeface="Microsoft JhengHei"/>
-                        </a:rPr>
-                        <a:t>8462</a:t>
-                      </a:r>
-                    </a:p>
-                  </a:txBody>
-                  <a:tcPr anchor="ctr" marL="73152" marT="9144" marB="9144">
-                    <a:solidFill>
-                      <a:srgbClr val="FFFFFF"/>
-                    </a:solidFill>
-                  </a:tcPr>
-                </a:tc>
-                <a:tc>
-                  <a:txBody>
-                    <a:bodyPr/>
-                    <a:lstStyle/>
-                    <a:p>
-                      <a:r>
-                        <a:rPr sz="1150" b="0">
-                          <a:solidFill>
-                            <a:srgbClr val="1A2233"/>
-                          </a:solidFill>
-                          <a:latin typeface="Microsoft JhengHei"/>
-                          <a:ea typeface="Microsoft JhengHei"/>
-                          <a:cs typeface="Microsoft JhengHei"/>
-                        </a:rPr>
-                        <a:t>09/23</a:t>
+                        <a:t>10/01</a:t>
                       </a:r>
                     </a:p>
                   </a:txBody>
@@ -5345,13 +5590,379 @@
                           <a:ea typeface="Microsoft JhengHei"/>
                           <a:cs typeface="Microsoft JhengHei"/>
                         </a:rPr>
+                        <a:t>截至目前為止對公司財務及業務並無重大影響。</a:t>
+                      </a:r>
+                    </a:p>
+                  </a:txBody>
+                  <a:tcPr anchor="ctr" marL="73152" marT="9144" marB="9144">
+                    <a:solidFill>
+                      <a:srgbClr val="FFFFFF"/>
+                    </a:solidFill>
+                  </a:tcPr>
+                </a:tc>
+              </a:tr>
+              <a:tr h="237744">
+                <a:tc>
+                  <a:txBody>
+                    <a:bodyPr/>
+                    <a:lstStyle/>
+                    <a:p>
+                      <a:r>
+                        <a:rPr sz="1150" b="0">
+                          <a:solidFill>
+                            <a:srgbClr val="1A2233"/>
+                          </a:solidFill>
+                          <a:latin typeface="Microsoft JhengHei"/>
+                          <a:ea typeface="Microsoft JhengHei"/>
+                          <a:cs typeface="Microsoft JhengHei"/>
+                        </a:rPr>
+                        <a:t>神腦</a:t>
+                      </a:r>
+                    </a:p>
+                  </a:txBody>
+                  <a:tcPr anchor="ctr" marL="73152" marT="9144" marB="9144">
+                    <a:solidFill>
+                      <a:srgbClr val="EEF2F9"/>
+                    </a:solidFill>
+                  </a:tcPr>
+                </a:tc>
+                <a:tc>
+                  <a:txBody>
+                    <a:bodyPr/>
+                    <a:lstStyle/>
+                    <a:p>
+                      <a:r>
+                        <a:rPr sz="1150" b="0">
+                          <a:solidFill>
+                            <a:srgbClr val="1A2233"/>
+                          </a:solidFill>
+                          <a:latin typeface="Microsoft JhengHei"/>
+                          <a:ea typeface="Microsoft JhengHei"/>
+                          <a:cs typeface="Microsoft JhengHei"/>
+                        </a:rPr>
+                        <a:t>2450</a:t>
+                      </a:r>
+                    </a:p>
+                  </a:txBody>
+                  <a:tcPr anchor="ctr" marL="73152" marT="9144" marB="9144">
+                    <a:solidFill>
+                      <a:srgbClr val="EEF2F9"/>
+                    </a:solidFill>
+                  </a:tcPr>
+                </a:tc>
+                <a:tc>
+                  <a:txBody>
+                    <a:bodyPr/>
+                    <a:lstStyle/>
+                    <a:p>
+                      <a:r>
+                        <a:rPr sz="1150" b="0">
+                          <a:solidFill>
+                            <a:srgbClr val="1A2233"/>
+                          </a:solidFill>
+                          <a:latin typeface="Microsoft JhengHei"/>
+                          <a:ea typeface="Microsoft JhengHei"/>
+                          <a:cs typeface="Microsoft JhengHei"/>
+                        </a:rPr>
+                        <a:t>09/29</a:t>
+                      </a:r>
+                    </a:p>
+                  </a:txBody>
+                  <a:tcPr anchor="ctr" marL="73152" marT="9144" marB="9144">
+                    <a:solidFill>
+                      <a:srgbClr val="EEF2F9"/>
+                    </a:solidFill>
+                  </a:tcPr>
+                </a:tc>
+                <a:tc>
+                  <a:txBody>
+                    <a:bodyPr/>
+                    <a:lstStyle/>
+                    <a:p>
+                      <a:r>
+                        <a:rPr sz="1150" b="1">
+                          <a:solidFill>
+                            <a:srgbClr val="E63946"/>
+                          </a:solidFill>
+                          <a:latin typeface="Microsoft JhengHei"/>
+                          <a:ea typeface="Microsoft JhengHei"/>
+                          <a:cs typeface="Microsoft JhengHei"/>
+                        </a:rPr>
+                        <a:t>駭客攻擊</a:t>
+                      </a:r>
+                    </a:p>
+                  </a:txBody>
+                  <a:tcPr anchor="ctr" marL="73152" marT="9144" marB="9144">
+                    <a:solidFill>
+                      <a:srgbClr val="EEF2F9"/>
+                    </a:solidFill>
+                  </a:tcPr>
+                </a:tc>
+                <a:tc>
+                  <a:txBody>
+                    <a:bodyPr/>
+                    <a:lstStyle/>
+                    <a:p>
+                      <a:r>
+                        <a:rPr sz="1150" b="0">
+                          <a:solidFill>
+                            <a:srgbClr val="1A2233"/>
+                          </a:solidFill>
+                          <a:latin typeface="Microsoft JhengHei"/>
+                          <a:ea typeface="Microsoft JhengHei"/>
+                          <a:cs typeface="Microsoft JhengHei"/>
+                        </a:rPr>
+                        <a:t>評估對本公司營運、財務及服務提供無重大影響。</a:t>
+                      </a:r>
+                    </a:p>
+                  </a:txBody>
+                  <a:tcPr anchor="ctr" marL="73152" marT="9144" marB="9144">
+                    <a:solidFill>
+                      <a:srgbClr val="EEF2F9"/>
+                    </a:solidFill>
+                  </a:tcPr>
+                </a:tc>
+              </a:tr>
+              <a:tr h="237744">
+                <a:tc>
+                  <a:txBody>
+                    <a:bodyPr/>
+                    <a:lstStyle/>
+                    <a:p>
+                      <a:r>
+                        <a:rPr sz="1150" b="0">
+                          <a:solidFill>
+                            <a:srgbClr val="1A2233"/>
+                          </a:solidFill>
+                          <a:latin typeface="Microsoft JhengHei"/>
+                          <a:ea typeface="Microsoft JhengHei"/>
+                          <a:cs typeface="Microsoft JhengHei"/>
+                        </a:rPr>
+                        <a:t>鈊象</a:t>
+                      </a:r>
+                    </a:p>
+                  </a:txBody>
+                  <a:tcPr anchor="ctr" marL="73152" marT="9144" marB="9144">
+                    <a:solidFill>
+                      <a:srgbClr val="FFFFFF"/>
+                    </a:solidFill>
+                  </a:tcPr>
+                </a:tc>
+                <a:tc>
+                  <a:txBody>
+                    <a:bodyPr/>
+                    <a:lstStyle/>
+                    <a:p>
+                      <a:r>
+                        <a:rPr sz="1150" b="0">
+                          <a:solidFill>
+                            <a:srgbClr val="1A2233"/>
+                          </a:solidFill>
+                          <a:latin typeface="Microsoft JhengHei"/>
+                          <a:ea typeface="Microsoft JhengHei"/>
+                          <a:cs typeface="Microsoft JhengHei"/>
+                        </a:rPr>
+                        <a:t>3293</a:t>
+                      </a:r>
+                    </a:p>
+                  </a:txBody>
+                  <a:tcPr anchor="ctr" marL="73152" marT="9144" marB="9144">
+                    <a:solidFill>
+                      <a:srgbClr val="FFFFFF"/>
+                    </a:solidFill>
+                  </a:tcPr>
+                </a:tc>
+                <a:tc>
+                  <a:txBody>
+                    <a:bodyPr/>
+                    <a:lstStyle/>
+                    <a:p>
+                      <a:r>
+                        <a:rPr sz="1150" b="0">
+                          <a:solidFill>
+                            <a:srgbClr val="1A2233"/>
+                          </a:solidFill>
+                          <a:latin typeface="Microsoft JhengHei"/>
+                          <a:ea typeface="Microsoft JhengHei"/>
+                          <a:cs typeface="Microsoft JhengHei"/>
+                        </a:rPr>
+                        <a:t>09/29</a:t>
+                      </a:r>
+                    </a:p>
+                  </a:txBody>
+                  <a:tcPr anchor="ctr" marL="73152" marT="9144" marB="9144">
+                    <a:solidFill>
+                      <a:srgbClr val="FFFFFF"/>
+                    </a:solidFill>
+                  </a:tcPr>
+                </a:tc>
+                <a:tc>
+                  <a:txBody>
+                    <a:bodyPr/>
+                    <a:lstStyle/>
+                    <a:p>
+                      <a:r>
+                        <a:rPr sz="1150" b="1">
+                          <a:solidFill>
+                            <a:srgbClr val="5C6679"/>
+                          </a:solidFill>
+                          <a:latin typeface="Microsoft JhengHei"/>
+                          <a:ea typeface="Microsoft JhengHei"/>
+                          <a:cs typeface="Microsoft JhengHei"/>
+                        </a:rPr>
+                        <a:t>其他</a:t>
+                      </a:r>
+                    </a:p>
+                  </a:txBody>
+                  <a:tcPr anchor="ctr" marL="73152" marT="9144" marB="9144">
+                    <a:solidFill>
+                      <a:srgbClr val="FFFFFF"/>
+                    </a:solidFill>
+                  </a:tcPr>
+                </a:tc>
+                <a:tc>
+                  <a:txBody>
+                    <a:bodyPr/>
+                    <a:lstStyle/>
+                    <a:p>
+                      <a:r>
+                        <a:rPr sz="1150" b="0">
+                          <a:solidFill>
+                            <a:srgbClr val="1A2233"/>
+                          </a:solidFill>
+                          <a:latin typeface="Microsoft JhengHei"/>
+                          <a:ea typeface="Microsoft JhengHei"/>
+                          <a:cs typeface="Microsoft JhengHei"/>
+                        </a:rPr>
+                        <a:t>目前評估對公司營運尚無重大影響。</a:t>
+                      </a:r>
+                    </a:p>
+                  </a:txBody>
+                  <a:tcPr anchor="ctr" marL="73152" marT="9144" marB="9144">
+                    <a:solidFill>
+                      <a:srgbClr val="FFFFFF"/>
+                    </a:solidFill>
+                  </a:tcPr>
+                </a:tc>
+              </a:tr>
+              <a:tr h="237744">
+                <a:tc>
+                  <a:txBody>
+                    <a:bodyPr/>
+                    <a:lstStyle/>
+                    <a:p>
+                      <a:r>
+                        <a:rPr sz="1150" b="0">
+                          <a:solidFill>
+                            <a:srgbClr val="1A2233"/>
+                          </a:solidFill>
+                          <a:latin typeface="Microsoft JhengHei"/>
+                          <a:ea typeface="Microsoft JhengHei"/>
+                          <a:cs typeface="Microsoft JhengHei"/>
+                        </a:rPr>
+                        <a:t>柏文</a:t>
+                      </a:r>
+                    </a:p>
+                  </a:txBody>
+                  <a:tcPr anchor="ctr" marL="73152" marT="9144" marB="9144">
+                    <a:solidFill>
+                      <a:srgbClr val="EEF2F9"/>
+                    </a:solidFill>
+                  </a:tcPr>
+                </a:tc>
+                <a:tc>
+                  <a:txBody>
+                    <a:bodyPr/>
+                    <a:lstStyle/>
+                    <a:p>
+                      <a:r>
+                        <a:rPr sz="1150" b="0">
+                          <a:solidFill>
+                            <a:srgbClr val="1A2233"/>
+                          </a:solidFill>
+                          <a:latin typeface="Microsoft JhengHei"/>
+                          <a:ea typeface="Microsoft JhengHei"/>
+                          <a:cs typeface="Microsoft JhengHei"/>
+                        </a:rPr>
+                        <a:t>8462</a:t>
+                      </a:r>
+                    </a:p>
+                  </a:txBody>
+                  <a:tcPr anchor="ctr" marL="73152" marT="9144" marB="9144">
+                    <a:solidFill>
+                      <a:srgbClr val="EEF2F9"/>
+                    </a:solidFill>
+                  </a:tcPr>
+                </a:tc>
+                <a:tc>
+                  <a:txBody>
+                    <a:bodyPr/>
+                    <a:lstStyle/>
+                    <a:p>
+                      <a:r>
+                        <a:rPr sz="1150" b="0">
+                          <a:solidFill>
+                            <a:srgbClr val="1A2233"/>
+                          </a:solidFill>
+                          <a:latin typeface="Microsoft JhengHei"/>
+                          <a:ea typeface="Microsoft JhengHei"/>
+                          <a:cs typeface="Microsoft JhengHei"/>
+                        </a:rPr>
+                        <a:t>09/23</a:t>
+                      </a:r>
+                    </a:p>
+                  </a:txBody>
+                  <a:tcPr anchor="ctr" marL="73152" marT="9144" marB="9144">
+                    <a:solidFill>
+                      <a:srgbClr val="EEF2F9"/>
+                    </a:solidFill>
+                  </a:tcPr>
+                </a:tc>
+                <a:tc>
+                  <a:txBody>
+                    <a:bodyPr/>
+                    <a:lstStyle/>
+                    <a:p>
+                      <a:r>
+                        <a:rPr sz="1150" b="1">
+                          <a:solidFill>
+                            <a:srgbClr val="27A6C4"/>
+                          </a:solidFill>
+                          <a:latin typeface="Microsoft JhengHei"/>
+                          <a:ea typeface="Microsoft JhengHei"/>
+                          <a:cs typeface="Microsoft JhengHei"/>
+                        </a:rPr>
+                        <a:t>個資外洩</a:t>
+                      </a:r>
+                    </a:p>
+                  </a:txBody>
+                  <a:tcPr anchor="ctr" marL="73152" marT="9144" marB="9144">
+                    <a:solidFill>
+                      <a:srgbClr val="EEF2F9"/>
+                    </a:solidFill>
+                  </a:tcPr>
+                </a:tc>
+                <a:tc>
+                  <a:txBody>
+                    <a:bodyPr/>
+                    <a:lstStyle/>
+                    <a:p>
+                      <a:r>
+                        <a:rPr sz="1150" b="0">
+                          <a:solidFill>
+                            <a:srgbClr val="1A2233"/>
+                          </a:solidFill>
+                          <a:latin typeface="Microsoft JhengHei"/>
+                          <a:ea typeface="Microsoft JhengHei"/>
+                          <a:cs typeface="Microsoft JhengHei"/>
+                        </a:rPr>
                         <a:t>目前評估對公司營運無重大影響。</a:t>
                       </a:r>
                     </a:p>
                   </a:txBody>
                   <a:tcPr anchor="ctr" marL="73152" marT="9144" marB="9144">
                     <a:solidFill>
-                      <a:srgbClr val="FFFFFF"/>
+                      <a:srgbClr val="EEF2F9"/>
                     </a:solidFill>
                   </a:tcPr>
                 </a:tc>
@@ -5911,7 +6522,7 @@
                 <a:ea typeface="Microsoft JhengHei"/>
                 <a:cs typeface="Microsoft JhengHei"/>
               </a:rPr>
-              <a:t>3 起</a:t>
+              <a:t>7 起</a:t>
             </a:r>
           </a:p>
         </p:txBody>
@@ -5948,7 +6559,7 @@
                 <a:ea typeface="Microsoft JhengHei"/>
                 <a:cs typeface="Microsoft JhengHei"/>
               </a:rPr>
-              <a:t>滿心、鈊象、柏文</a:t>
+              <a:t>科懋、立康、滿心、杏一、鈊象、安心、柏文</a:t>
             </a:r>
           </a:p>
         </p:txBody>
@@ -6149,7 +6760,7 @@
                 <a:ea typeface="Microsoft JhengHei"/>
                 <a:cs typeface="Microsoft JhengHei"/>
               </a:rPr>
-              <a:t>3 起</a:t>
+              <a:t>4 起</a:t>
             </a:r>
           </a:p>
         </p:txBody>
@@ -6186,7 +6797,7 @@
                 <a:ea typeface="Microsoft JhengHei"/>
                 <a:cs typeface="Microsoft JhengHei"/>
               </a:rPr>
-              <a:t>上福、一零四、鈊象</a:t>
+              <a:t>緯致、上福、一零四、鈊象</a:t>
             </a:r>
           </a:p>
         </p:txBody>
@@ -6389,7 +7000,7 @@
                 <a:gridCol w="3383280"/>
                 <a:gridCol w="2606040"/>
               </a:tblGrid>
-              <a:tr h="448056">
+              <a:tr h="298704">
                 <a:tc>
                   <a:txBody>
                     <a:bodyPr/>
@@ -6511,7 +7122,251 @@
                   </a:tcPr>
                 </a:tc>
               </a:tr>
-              <a:tr h="448056">
+              <a:tr h="298704">
+                <a:tc>
+                  <a:txBody>
+                    <a:bodyPr/>
+                    <a:lstStyle/>
+                    <a:p>
+                      <a:r>
+                        <a:rPr sz="1150" b="0">
+                          <a:solidFill>
+                            <a:srgbClr val="1A2233"/>
+                          </a:solidFill>
+                          <a:latin typeface="Microsoft JhengHei"/>
+                          <a:ea typeface="Microsoft JhengHei"/>
+                          <a:cs typeface="Microsoft JhengHei"/>
+                        </a:rPr>
+                        <a:t>科懋</a:t>
+                      </a:r>
+                    </a:p>
+                  </a:txBody>
+                  <a:tcPr anchor="ctr" marL="73152" marT="9144" marB="9144">
+                    <a:solidFill>
+                      <a:srgbClr val="FFFFFF"/>
+                    </a:solidFill>
+                  </a:tcPr>
+                </a:tc>
+                <a:tc>
+                  <a:txBody>
+                    <a:bodyPr/>
+                    <a:lstStyle/>
+                    <a:p>
+                      <a:r>
+                        <a:rPr sz="1150" b="0">
+                          <a:solidFill>
+                            <a:srgbClr val="1A2233"/>
+                          </a:solidFill>
+                          <a:latin typeface="Microsoft JhengHei"/>
+                          <a:ea typeface="Microsoft JhengHei"/>
+                          <a:cs typeface="Microsoft JhengHei"/>
+                        </a:rPr>
+                        <a:t>6496</a:t>
+                      </a:r>
+                    </a:p>
+                  </a:txBody>
+                  <a:tcPr anchor="ctr" marL="73152" marT="9144" marB="9144">
+                    <a:solidFill>
+                      <a:srgbClr val="FFFFFF"/>
+                    </a:solidFill>
+                  </a:tcPr>
+                </a:tc>
+                <a:tc>
+                  <a:txBody>
+                    <a:bodyPr/>
+                    <a:lstStyle/>
+                    <a:p>
+                      <a:r>
+                        <a:rPr sz="1150" b="1">
+                          <a:solidFill>
+                            <a:srgbClr val="27A6C4"/>
+                          </a:solidFill>
+                          <a:latin typeface="Microsoft JhengHei"/>
+                          <a:ea typeface="Microsoft JhengHei"/>
+                          <a:cs typeface="Microsoft JhengHei"/>
+                        </a:rPr>
+                        <a:t>個資外洩</a:t>
+                      </a:r>
+                    </a:p>
+                  </a:txBody>
+                  <a:tcPr anchor="ctr" marL="73152" marT="9144" marB="9144">
+                    <a:solidFill>
+                      <a:srgbClr val="FFFFFF"/>
+                    </a:solidFill>
+                  </a:tcPr>
+                </a:tc>
+                <a:tc>
+                  <a:txBody>
+                    <a:bodyPr/>
+                    <a:lstStyle/>
+                    <a:p>
+                      <a:r>
+                        <a:rPr sz="1150" b="0">
+                          <a:solidFill>
+                            <a:srgbClr val="1A2233"/>
+                          </a:solidFill>
+                          <a:latin typeface="Microsoft JhengHei"/>
+                          <a:ea typeface="Microsoft JhengHei"/>
+                          <a:cs typeface="Microsoft JhengHei"/>
+                        </a:rPr>
+                        <a:t>安侯建業聯合會計師事務所</a:t>
+                      </a:r>
+                    </a:p>
+                  </a:txBody>
+                  <a:tcPr anchor="ctr" marL="73152" marT="9144" marB="9144">
+                    <a:solidFill>
+                      <a:srgbClr val="FFFFFF"/>
+                    </a:solidFill>
+                  </a:tcPr>
+                </a:tc>
+                <a:tc>
+                  <a:txBody>
+                    <a:bodyPr/>
+                    <a:lstStyle/>
+                    <a:p>
+                      <a:r>
+                        <a:rPr sz="1150" b="0">
+                          <a:solidFill>
+                            <a:srgbClr val="1A2233"/>
+                          </a:solidFill>
+                          <a:latin typeface="Microsoft JhengHei"/>
+                          <a:ea typeface="Microsoft JhengHei"/>
+                          <a:cs typeface="Microsoft JhengHei"/>
+                        </a:rPr>
+                        <a:t>黃柏淑、黃采絹</a:t>
+                      </a:r>
+                    </a:p>
+                  </a:txBody>
+                  <a:tcPr anchor="ctr" marL="73152" marT="9144" marB="9144">
+                    <a:solidFill>
+                      <a:srgbClr val="FFFFFF"/>
+                    </a:solidFill>
+                  </a:tcPr>
+                </a:tc>
+              </a:tr>
+              <a:tr h="298704">
+                <a:tc>
+                  <a:txBody>
+                    <a:bodyPr/>
+                    <a:lstStyle/>
+                    <a:p>
+                      <a:r>
+                        <a:rPr sz="1150" b="0">
+                          <a:solidFill>
+                            <a:srgbClr val="1A2233"/>
+                          </a:solidFill>
+                          <a:latin typeface="Microsoft JhengHei"/>
+                          <a:ea typeface="Microsoft JhengHei"/>
+                          <a:cs typeface="Microsoft JhengHei"/>
+                        </a:rPr>
+                        <a:t>立康</a:t>
+                      </a:r>
+                    </a:p>
+                  </a:txBody>
+                  <a:tcPr anchor="ctr" marL="73152" marT="9144" marB="9144">
+                    <a:solidFill>
+                      <a:srgbClr val="EEF2F9"/>
+                    </a:solidFill>
+                  </a:tcPr>
+                </a:tc>
+                <a:tc>
+                  <a:txBody>
+                    <a:bodyPr/>
+                    <a:lstStyle/>
+                    <a:p>
+                      <a:r>
+                        <a:rPr sz="1150" b="0">
+                          <a:solidFill>
+                            <a:srgbClr val="1A2233"/>
+                          </a:solidFill>
+                          <a:latin typeface="Microsoft JhengHei"/>
+                          <a:ea typeface="Microsoft JhengHei"/>
+                          <a:cs typeface="Microsoft JhengHei"/>
+                        </a:rPr>
+                        <a:t>6242</a:t>
+                      </a:r>
+                    </a:p>
+                  </a:txBody>
+                  <a:tcPr anchor="ctr" marL="73152" marT="9144" marB="9144">
+                    <a:solidFill>
+                      <a:srgbClr val="EEF2F9"/>
+                    </a:solidFill>
+                  </a:tcPr>
+                </a:tc>
+                <a:tc>
+                  <a:txBody>
+                    <a:bodyPr/>
+                    <a:lstStyle/>
+                    <a:p>
+                      <a:r>
+                        <a:rPr sz="1150" b="1">
+                          <a:solidFill>
+                            <a:srgbClr val="27A6C4"/>
+                          </a:solidFill>
+                          <a:latin typeface="Microsoft JhengHei"/>
+                          <a:ea typeface="Microsoft JhengHei"/>
+                          <a:cs typeface="Microsoft JhengHei"/>
+                        </a:rPr>
+                        <a:t>個資外洩</a:t>
+                      </a:r>
+                    </a:p>
+                  </a:txBody>
+                  <a:tcPr anchor="ctr" marL="73152" marT="9144" marB="9144">
+                    <a:solidFill>
+                      <a:srgbClr val="EEF2F9"/>
+                    </a:solidFill>
+                  </a:tcPr>
+                </a:tc>
+                <a:tc>
+                  <a:txBody>
+                    <a:bodyPr/>
+                    <a:lstStyle/>
+                    <a:p>
+                      <a:r>
+                        <a:rPr sz="1150" b="0">
+                          <a:solidFill>
+                            <a:srgbClr val="1A2233"/>
+                          </a:solidFill>
+                          <a:latin typeface="Microsoft JhengHei"/>
+                          <a:ea typeface="Microsoft JhengHei"/>
+                          <a:cs typeface="Microsoft JhengHei"/>
+                        </a:rPr>
+                        <a:t>勤業眾信聯合會計師事務所</a:t>
+                      </a:r>
+                    </a:p>
+                  </a:txBody>
+                  <a:tcPr anchor="ctr" marL="73152" marT="9144" marB="9144">
+                    <a:solidFill>
+                      <a:srgbClr val="EEF2F9"/>
+                    </a:solidFill>
+                  </a:tcPr>
+                </a:tc>
+                <a:tc>
+                  <a:txBody>
+                    <a:bodyPr/>
+                    <a:lstStyle/>
+                    <a:p>
+                      <a:r>
+                        <a:rPr sz="1150" b="0">
+                          <a:solidFill>
+                            <a:srgbClr val="1A2233"/>
+                          </a:solidFill>
+                          <a:latin typeface="Microsoft JhengHei"/>
+                          <a:ea typeface="Microsoft JhengHei"/>
+                          <a:cs typeface="Microsoft JhengHei"/>
+                        </a:rPr>
+                        <a:t>李季珍、廖鴻儒</a:t>
+                      </a:r>
+                    </a:p>
+                  </a:txBody>
+                  <a:tcPr anchor="ctr" marL="73152" marT="9144" marB="9144">
+                    <a:solidFill>
+                      <a:srgbClr val="EEF2F9"/>
+                    </a:solidFill>
+                  </a:tcPr>
+                </a:tc>
+              </a:tr>
+              <a:tr h="298704">
                 <a:tc>
                   <a:txBody>
                     <a:bodyPr/>
@@ -6633,7 +7488,7 @@
                   </a:tcPr>
                 </a:tc>
               </a:tr>
-              <a:tr h="448056">
+              <a:tr h="298704">
                 <a:tc>
                   <a:txBody>
                     <a:bodyPr/>
@@ -6755,7 +7610,7 @@
                   </a:tcPr>
                 </a:tc>
               </a:tr>
-              <a:tr h="448056">
+              <a:tr h="298704">
                 <a:tc>
                   <a:txBody>
                     <a:bodyPr/>
@@ -6877,7 +7732,7 @@
                   </a:tcPr>
                 </a:tc>
               </a:tr>
-              <a:tr h="448056">
+              <a:tr h="298704">
                 <a:tc>
                   <a:txBody>
                     <a:bodyPr/>
@@ -6892,7 +7747,7 @@
                           <a:ea typeface="Microsoft JhengHei"/>
                           <a:cs typeface="Microsoft JhengHei"/>
                         </a:rPr>
-                        <a:t>上福</a:t>
+                        <a:t>緯致</a:t>
                       </a:r>
                     </a:p>
                   </a:txBody>
@@ -6916,7 +7771,7 @@
                           <a:ea typeface="Microsoft JhengHei"/>
                           <a:cs typeface="Microsoft JhengHei"/>
                         </a:rPr>
-                        <a:t>6128</a:t>
+                        <a:t>4953</a:t>
                       </a:r>
                     </a:p>
                   </a:txBody>
@@ -6964,7 +7819,7 @@
                           <a:ea typeface="Microsoft JhengHei"/>
                           <a:cs typeface="Microsoft JhengHei"/>
                         </a:rPr>
-                        <a:t>安永聯合會計師事務所</a:t>
+                        <a:t>安侯建業聯合會計師事務所</a:t>
                       </a:r>
                     </a:p>
                   </a:txBody>
@@ -6988,7 +7843,7 @@
                           <a:ea typeface="Microsoft JhengHei"/>
                           <a:cs typeface="Microsoft JhengHei"/>
                         </a:rPr>
-                        <a:t>黃宇廷、賴書晨</a:t>
+                        <a:t>唐嘉鍵、楊雲筑</a:t>
                       </a:r>
                     </a:p>
                   </a:txBody>
@@ -6999,7 +7854,251 @@
                   </a:tcPr>
                 </a:tc>
               </a:tr>
-              <a:tr h="448056">
+              <a:tr h="298704">
+                <a:tc>
+                  <a:txBody>
+                    <a:bodyPr/>
+                    <a:lstStyle/>
+                    <a:p>
+                      <a:r>
+                        <a:rPr sz="1150" b="0">
+                          <a:solidFill>
+                            <a:srgbClr val="1A2233"/>
+                          </a:solidFill>
+                          <a:latin typeface="Microsoft JhengHei"/>
+                          <a:ea typeface="Microsoft JhengHei"/>
+                          <a:cs typeface="Microsoft JhengHei"/>
+                        </a:rPr>
+                        <a:t>上福</a:t>
+                      </a:r>
+                    </a:p>
+                  </a:txBody>
+                  <a:tcPr anchor="ctr" marL="73152" marT="9144" marB="9144">
+                    <a:solidFill>
+                      <a:srgbClr val="FFFFFF"/>
+                    </a:solidFill>
+                  </a:tcPr>
+                </a:tc>
+                <a:tc>
+                  <a:txBody>
+                    <a:bodyPr/>
+                    <a:lstStyle/>
+                    <a:p>
+                      <a:r>
+                        <a:rPr sz="1150" b="0">
+                          <a:solidFill>
+                            <a:srgbClr val="1A2233"/>
+                          </a:solidFill>
+                          <a:latin typeface="Microsoft JhengHei"/>
+                          <a:ea typeface="Microsoft JhengHei"/>
+                          <a:cs typeface="Microsoft JhengHei"/>
+                        </a:rPr>
+                        <a:t>6128</a:t>
+                      </a:r>
+                    </a:p>
+                  </a:txBody>
+                  <a:tcPr anchor="ctr" marL="73152" marT="9144" marB="9144">
+                    <a:solidFill>
+                      <a:srgbClr val="FFFFFF"/>
+                    </a:solidFill>
+                  </a:tcPr>
+                </a:tc>
+                <a:tc>
+                  <a:txBody>
+                    <a:bodyPr/>
+                    <a:lstStyle/>
+                    <a:p>
+                      <a:r>
+                        <a:rPr sz="1150" b="1">
+                          <a:solidFill>
+                            <a:srgbClr val="5C6679"/>
+                          </a:solidFill>
+                          <a:latin typeface="Microsoft JhengHei"/>
+                          <a:ea typeface="Microsoft JhengHei"/>
+                          <a:cs typeface="Microsoft JhengHei"/>
+                        </a:rPr>
+                        <a:t>其他</a:t>
+                      </a:r>
+                    </a:p>
+                  </a:txBody>
+                  <a:tcPr anchor="ctr" marL="73152" marT="9144" marB="9144">
+                    <a:solidFill>
+                      <a:srgbClr val="FFFFFF"/>
+                    </a:solidFill>
+                  </a:tcPr>
+                </a:tc>
+                <a:tc>
+                  <a:txBody>
+                    <a:bodyPr/>
+                    <a:lstStyle/>
+                    <a:p>
+                      <a:r>
+                        <a:rPr sz="1150" b="0">
+                          <a:solidFill>
+                            <a:srgbClr val="1A2233"/>
+                          </a:solidFill>
+                          <a:latin typeface="Microsoft JhengHei"/>
+                          <a:ea typeface="Microsoft JhengHei"/>
+                          <a:cs typeface="Microsoft JhengHei"/>
+                        </a:rPr>
+                        <a:t>安永聯合會計師事務所</a:t>
+                      </a:r>
+                    </a:p>
+                  </a:txBody>
+                  <a:tcPr anchor="ctr" marL="73152" marT="9144" marB="9144">
+                    <a:solidFill>
+                      <a:srgbClr val="FFFFFF"/>
+                    </a:solidFill>
+                  </a:tcPr>
+                </a:tc>
+                <a:tc>
+                  <a:txBody>
+                    <a:bodyPr/>
+                    <a:lstStyle/>
+                    <a:p>
+                      <a:r>
+                        <a:rPr sz="1150" b="0">
+                          <a:solidFill>
+                            <a:srgbClr val="1A2233"/>
+                          </a:solidFill>
+                          <a:latin typeface="Microsoft JhengHei"/>
+                          <a:ea typeface="Microsoft JhengHei"/>
+                          <a:cs typeface="Microsoft JhengHei"/>
+                        </a:rPr>
+                        <a:t>黃宇廷、賴書晨</a:t>
+                      </a:r>
+                    </a:p>
+                  </a:txBody>
+                  <a:tcPr anchor="ctr" marL="73152" marT="9144" marB="9144">
+                    <a:solidFill>
+                      <a:srgbClr val="FFFFFF"/>
+                    </a:solidFill>
+                  </a:tcPr>
+                </a:tc>
+              </a:tr>
+              <a:tr h="298704">
+                <a:tc>
+                  <a:txBody>
+                    <a:bodyPr/>
+                    <a:lstStyle/>
+                    <a:p>
+                      <a:r>
+                        <a:rPr sz="1150" b="0">
+                          <a:solidFill>
+                            <a:srgbClr val="1A2233"/>
+                          </a:solidFill>
+                          <a:latin typeface="Microsoft JhengHei"/>
+                          <a:ea typeface="Microsoft JhengHei"/>
+                          <a:cs typeface="Microsoft JhengHei"/>
+                        </a:rPr>
+                        <a:t>杏一</a:t>
+                      </a:r>
+                    </a:p>
+                  </a:txBody>
+                  <a:tcPr anchor="ctr" marL="73152" marT="9144" marB="9144">
+                    <a:solidFill>
+                      <a:srgbClr val="EEF2F9"/>
+                    </a:solidFill>
+                  </a:tcPr>
+                </a:tc>
+                <a:tc>
+                  <a:txBody>
+                    <a:bodyPr/>
+                    <a:lstStyle/>
+                    <a:p>
+                      <a:r>
+                        <a:rPr sz="1150" b="0">
+                          <a:solidFill>
+                            <a:srgbClr val="1A2233"/>
+                          </a:solidFill>
+                          <a:latin typeface="Microsoft JhengHei"/>
+                          <a:ea typeface="Microsoft JhengHei"/>
+                          <a:cs typeface="Microsoft JhengHei"/>
+                        </a:rPr>
+                        <a:t>4175</a:t>
+                      </a:r>
+                    </a:p>
+                  </a:txBody>
+                  <a:tcPr anchor="ctr" marL="73152" marT="9144" marB="9144">
+                    <a:solidFill>
+                      <a:srgbClr val="EEF2F9"/>
+                    </a:solidFill>
+                  </a:tcPr>
+                </a:tc>
+                <a:tc>
+                  <a:txBody>
+                    <a:bodyPr/>
+                    <a:lstStyle/>
+                    <a:p>
+                      <a:r>
+                        <a:rPr sz="1150" b="1">
+                          <a:solidFill>
+                            <a:srgbClr val="27A6C4"/>
+                          </a:solidFill>
+                          <a:latin typeface="Microsoft JhengHei"/>
+                          <a:ea typeface="Microsoft JhengHei"/>
+                          <a:cs typeface="Microsoft JhengHei"/>
+                        </a:rPr>
+                        <a:t>個資外洩</a:t>
+                      </a:r>
+                    </a:p>
+                  </a:txBody>
+                  <a:tcPr anchor="ctr" marL="73152" marT="9144" marB="9144">
+                    <a:solidFill>
+                      <a:srgbClr val="EEF2F9"/>
+                    </a:solidFill>
+                  </a:tcPr>
+                </a:tc>
+                <a:tc>
+                  <a:txBody>
+                    <a:bodyPr/>
+                    <a:lstStyle/>
+                    <a:p>
+                      <a:r>
+                        <a:rPr sz="1150" b="0">
+                          <a:solidFill>
+                            <a:srgbClr val="1A2233"/>
+                          </a:solidFill>
+                          <a:latin typeface="Microsoft JhengHei"/>
+                          <a:ea typeface="Microsoft JhengHei"/>
+                          <a:cs typeface="Microsoft JhengHei"/>
+                        </a:rPr>
+                        <a:t>勤業眾信聯合會計師事務所</a:t>
+                      </a:r>
+                    </a:p>
+                  </a:txBody>
+                  <a:tcPr anchor="ctr" marL="73152" marT="9144" marB="9144">
+                    <a:solidFill>
+                      <a:srgbClr val="EEF2F9"/>
+                    </a:solidFill>
+                  </a:tcPr>
+                </a:tc>
+                <a:tc>
+                  <a:txBody>
+                    <a:bodyPr/>
+                    <a:lstStyle/>
+                    <a:p>
+                      <a:r>
+                        <a:rPr sz="1150" b="0">
+                          <a:solidFill>
+                            <a:srgbClr val="1A2233"/>
+                          </a:solidFill>
+                          <a:latin typeface="Microsoft JhengHei"/>
+                          <a:ea typeface="Microsoft JhengHei"/>
+                          <a:cs typeface="Microsoft JhengHei"/>
+                        </a:rPr>
+                        <a:t>池瑞全、蔡宗遠</a:t>
+                      </a:r>
+                    </a:p>
+                  </a:txBody>
+                  <a:tcPr anchor="ctr" marL="73152" marT="9144" marB="9144">
+                    <a:solidFill>
+                      <a:srgbClr val="EEF2F9"/>
+                    </a:solidFill>
+                  </a:tcPr>
+                </a:tc>
+              </a:tr>
+              <a:tr h="298704">
                 <a:tc>
                   <a:txBody>
                     <a:bodyPr/>
@@ -7121,7 +8220,7 @@
                   </a:tcPr>
                 </a:tc>
               </a:tr>
-              <a:tr h="448056">
+              <a:tr h="298704">
                 <a:tc>
                   <a:txBody>
                     <a:bodyPr/>
@@ -7243,7 +8342,7 @@
                   </a:tcPr>
                 </a:tc>
               </a:tr>
-              <a:tr h="448056">
+              <a:tr h="298704">
                 <a:tc>
                   <a:txBody>
                     <a:bodyPr/>
@@ -7258,7 +8357,7 @@
                           <a:ea typeface="Microsoft JhengHei"/>
                           <a:cs typeface="Microsoft JhengHei"/>
                         </a:rPr>
-                        <a:t>神腦</a:t>
+                        <a:t>安心</a:t>
                       </a:r>
                     </a:p>
                   </a:txBody>
@@ -7282,7 +8381,7 @@
                           <a:ea typeface="Microsoft JhengHei"/>
                           <a:cs typeface="Microsoft JhengHei"/>
                         </a:rPr>
-                        <a:t>2450</a:t>
+                        <a:t>1259</a:t>
                       </a:r>
                     </a:p>
                   </a:txBody>
@@ -7300,13 +8399,13 @@
                       <a:r>
                         <a:rPr sz="1150" b="1">
                           <a:solidFill>
-                            <a:srgbClr val="E63946"/>
+                            <a:srgbClr val="27A6C4"/>
                           </a:solidFill>
                           <a:latin typeface="Microsoft JhengHei"/>
                           <a:ea typeface="Microsoft JhengHei"/>
                           <a:cs typeface="Microsoft JhengHei"/>
                         </a:rPr>
-                        <a:t>駭客攻擊</a:t>
+                        <a:t>個資外洩</a:t>
                       </a:r>
                     </a:p>
                   </a:txBody>
@@ -7354,7 +8453,7 @@
                           <a:ea typeface="Microsoft JhengHei"/>
                           <a:cs typeface="Microsoft JhengHei"/>
                         </a:rPr>
-                        <a:t>王銘義、林永智</a:t>
+                        <a:t>徐明釧、陳怡婷</a:t>
                       </a:r>
                     </a:p>
                   </a:txBody>
@@ -7365,7 +8464,7 @@
                   </a:tcPr>
                 </a:tc>
               </a:tr>
-              <a:tr h="448056">
+              <a:tr h="298704">
                 <a:tc>
                   <a:txBody>
                     <a:bodyPr/>
@@ -7380,7 +8479,7 @@
                           <a:ea typeface="Microsoft JhengHei"/>
                           <a:cs typeface="Microsoft JhengHei"/>
                         </a:rPr>
-                        <a:t>鈊象</a:t>
+                        <a:t>神腦</a:t>
                       </a:r>
                     </a:p>
                   </a:txBody>
@@ -7404,13 +8503,135 @@
                           <a:ea typeface="Microsoft JhengHei"/>
                           <a:cs typeface="Microsoft JhengHei"/>
                         </a:rPr>
+                        <a:t>2450</a:t>
+                      </a:r>
+                    </a:p>
+                  </a:txBody>
+                  <a:tcPr anchor="ctr" marL="73152" marT="9144" marB="9144">
+                    <a:solidFill>
+                      <a:srgbClr val="EEF2F9"/>
+                    </a:solidFill>
+                  </a:tcPr>
+                </a:tc>
+                <a:tc>
+                  <a:txBody>
+                    <a:bodyPr/>
+                    <a:lstStyle/>
+                    <a:p>
+                      <a:r>
+                        <a:rPr sz="1150" b="1">
+                          <a:solidFill>
+                            <a:srgbClr val="E63946"/>
+                          </a:solidFill>
+                          <a:latin typeface="Microsoft JhengHei"/>
+                          <a:ea typeface="Microsoft JhengHei"/>
+                          <a:cs typeface="Microsoft JhengHei"/>
+                        </a:rPr>
+                        <a:t>駭客攻擊</a:t>
+                      </a:r>
+                    </a:p>
+                  </a:txBody>
+                  <a:tcPr anchor="ctr" marL="73152" marT="9144" marB="9144">
+                    <a:solidFill>
+                      <a:srgbClr val="EEF2F9"/>
+                    </a:solidFill>
+                  </a:tcPr>
+                </a:tc>
+                <a:tc>
+                  <a:txBody>
+                    <a:bodyPr/>
+                    <a:lstStyle/>
+                    <a:p>
+                      <a:r>
+                        <a:rPr sz="1150" b="0">
+                          <a:solidFill>
+                            <a:srgbClr val="1A2233"/>
+                          </a:solidFill>
+                          <a:latin typeface="Microsoft JhengHei"/>
+                          <a:ea typeface="Microsoft JhengHei"/>
+                          <a:cs typeface="Microsoft JhengHei"/>
+                        </a:rPr>
+                        <a:t>資誠聯合會計師事務所</a:t>
+                      </a:r>
+                    </a:p>
+                  </a:txBody>
+                  <a:tcPr anchor="ctr" marL="73152" marT="9144" marB="9144">
+                    <a:solidFill>
+                      <a:srgbClr val="EEF2F9"/>
+                    </a:solidFill>
+                  </a:tcPr>
+                </a:tc>
+                <a:tc>
+                  <a:txBody>
+                    <a:bodyPr/>
+                    <a:lstStyle/>
+                    <a:p>
+                      <a:r>
+                        <a:rPr sz="1150" b="0">
+                          <a:solidFill>
+                            <a:srgbClr val="1A2233"/>
+                          </a:solidFill>
+                          <a:latin typeface="Microsoft JhengHei"/>
+                          <a:ea typeface="Microsoft JhengHei"/>
+                          <a:cs typeface="Microsoft JhengHei"/>
+                        </a:rPr>
+                        <a:t>王銘義、林永智</a:t>
+                      </a:r>
+                    </a:p>
+                  </a:txBody>
+                  <a:tcPr anchor="ctr" marL="73152" marT="9144" marB="9144">
+                    <a:solidFill>
+                      <a:srgbClr val="EEF2F9"/>
+                    </a:solidFill>
+                  </a:tcPr>
+                </a:tc>
+              </a:tr>
+              <a:tr h="298704">
+                <a:tc>
+                  <a:txBody>
+                    <a:bodyPr/>
+                    <a:lstStyle/>
+                    <a:p>
+                      <a:r>
+                        <a:rPr sz="1150" b="0">
+                          <a:solidFill>
+                            <a:srgbClr val="1A2233"/>
+                          </a:solidFill>
+                          <a:latin typeface="Microsoft JhengHei"/>
+                          <a:ea typeface="Microsoft JhengHei"/>
+                          <a:cs typeface="Microsoft JhengHei"/>
+                        </a:rPr>
+                        <a:t>鈊象</a:t>
+                      </a:r>
+                    </a:p>
+                  </a:txBody>
+                  <a:tcPr anchor="ctr" marL="73152" marT="9144" marB="9144">
+                    <a:solidFill>
+                      <a:srgbClr val="FFFFFF"/>
+                    </a:solidFill>
+                  </a:tcPr>
+                </a:tc>
+                <a:tc>
+                  <a:txBody>
+                    <a:bodyPr/>
+                    <a:lstStyle/>
+                    <a:p>
+                      <a:r>
+                        <a:rPr sz="1150" b="0">
+                          <a:solidFill>
+                            <a:srgbClr val="1A2233"/>
+                          </a:solidFill>
+                          <a:latin typeface="Microsoft JhengHei"/>
+                          <a:ea typeface="Microsoft JhengHei"/>
+                          <a:cs typeface="Microsoft JhengHei"/>
+                        </a:rPr>
                         <a:t>3293</a:t>
                       </a:r>
                     </a:p>
                   </a:txBody>
                   <a:tcPr anchor="ctr" marL="73152" marT="9144" marB="9144">
                     <a:solidFill>
-                      <a:srgbClr val="EEF2F9"/>
+                      <a:srgbClr val="FFFFFF"/>
                     </a:solidFill>
                   </a:tcPr>
                 </a:tc>
@@ -7434,7 +8655,7 @@
                   </a:txBody>
                   <a:tcPr anchor="ctr" marL="73152" marT="9144" marB="9144">
                     <a:solidFill>
-                      <a:srgbClr val="EEF2F9"/>
+                      <a:srgbClr val="FFFFFF"/>
                     </a:solidFill>
                   </a:tcPr>
                 </a:tc>
@@ -7458,7 +8679,7 @@
                   </a:txBody>
                   <a:tcPr anchor="ctr" marL="73152" marT="9144" marB="9144">
                     <a:solidFill>
-                      <a:srgbClr val="EEF2F9"/>
+                      <a:srgbClr val="FFFFFF"/>
                     </a:solidFill>
                   </a:tcPr>
                 </a:tc>
@@ -7482,12 +8703,12 @@
                   </a:txBody>
                   <a:tcPr anchor="ctr" marL="73152" marT="9144" marB="9144">
                     <a:solidFill>
-                      <a:srgbClr val="EEF2F9"/>
+                      <a:srgbClr val="FFFFFF"/>
                     </a:solidFill>
                   </a:tcPr>
                 </a:tc>
               </a:tr>
-              <a:tr h="448056">
+              <a:tr h="298704">
                 <a:tc>
                   <a:txBody>
                     <a:bodyPr/>
@@ -7508,7 +8729,7 @@
                   </a:txBody>
                   <a:tcPr anchor="ctr" marL="73152" marT="9144" marB="9144">
                     <a:solidFill>
-                      <a:srgbClr val="FFFFFF"/>
+                      <a:srgbClr val="EEF2F9"/>
                     </a:solidFill>
                   </a:tcPr>
                 </a:tc>
@@ -7532,7 +8753,7 @@
                   </a:txBody>
                   <a:tcPr anchor="ctr" marL="73152" marT="9144" marB="9144">
                     <a:solidFill>
-                      <a:srgbClr val="FFFFFF"/>
+                      <a:srgbClr val="EEF2F9"/>
                     </a:solidFill>
                   </a:tcPr>
                 </a:tc>
@@ -7556,7 +8777,7 @@
                   </a:txBody>
                   <a:tcPr anchor="ctr" marL="73152" marT="9144" marB="9144">
                     <a:solidFill>
-                      <a:srgbClr val="FFFFFF"/>
+                      <a:srgbClr val="EEF2F9"/>
                     </a:solidFill>
                   </a:tcPr>
                 </a:tc>
@@ -7580,7 +8801,7 @@
                   </a:txBody>
                   <a:tcPr anchor="ctr" marL="73152" marT="9144" marB="9144">
                     <a:solidFill>
-                      <a:srgbClr val="FFFFFF"/>
+                      <a:srgbClr val="EEF2F9"/>
                     </a:solidFill>
                   </a:tcPr>
                 </a:tc>
@@ -7604,7 +8825,7 @@
                   </a:txBody>
                   <a:tcPr anchor="ctr" marL="73152" marT="9144" marB="9144">
                     <a:solidFill>
-                      <a:srgbClr val="FFFFFF"/>
+                      <a:srgbClr val="EEF2F9"/>
                     </a:solidFill>
                   </a:tcPr>
                 </a:tc>
@@ -9058,7 +10279,7 @@
             <a:avLst/>
           </a:prstGeom>
           <a:solidFill>
-            <a:srgbClr val="E63946"/>
+            <a:srgbClr val="27A6C4"/>
           </a:solidFill>
           <a:ln>
             <a:noFill/>
@@ -9119,7 +10340,7 @@
                 <a:ea typeface="Microsoft JhengHei"/>
                 <a:cs typeface="Microsoft JhengHei"/>
               </a:rPr>
-              <a:t>美食-KY </a:t>
+              <a:t>科懋 </a:t>
             </a:r>
             <a:r>
               <a:rPr sz="1300" b="0">
@@ -9130,7 +10351,7 @@
                 <a:ea typeface="Microsoft JhengHei"/>
                 <a:cs typeface="Microsoft JhengHei"/>
               </a:rPr>
-              <a:t>2723</a:t>
+              <a:t>6496</a:t>
             </a:r>
           </a:p>
         </p:txBody>
@@ -9150,7 +10371,7 @@
             <a:avLst/>
           </a:prstGeom>
           <a:solidFill>
-            <a:srgbClr val="E63946"/>
+            <a:srgbClr val="27A6C4"/>
           </a:solidFill>
           <a:ln>
             <a:noFill/>
@@ -9211,7 +10432,7 @@
                 <a:ea typeface="Microsoft JhengHei"/>
                 <a:cs typeface="Microsoft JhengHei"/>
               </a:rPr>
-              <a:t>駭客攻擊</a:t>
+              <a:t>個資外洩</a:t>
             </a:r>
           </a:p>
         </p:txBody>
@@ -9246,7 +10467,7 @@
             <a:r>
               <a:rPr sz="1100" b="1">
                 <a:solidFill>
-                  <a:srgbClr val="E63946"/>
+                  <a:srgbClr val="27A6C4"/>
                 </a:solidFill>
                 <a:latin typeface="Microsoft JhengHei"/>
                 <a:ea typeface="Microsoft JhengHei"/>
@@ -9263,7 +10484,7 @@
                 <a:ea typeface="Microsoft JhengHei"/>
                 <a:cs typeface="Microsoft JhengHei"/>
               </a:rPr>
-              <a:t>台灣子公司美食達人股份有限公司於今日發現部分資訊系統遭受網路攻擊，已立即啟動資安應變機制，並委請…</a:t>
+              <a:t>本公司接獲線上會員通知有個資洩漏情形，經查主因本公司產品線上銷售平台之系統服務委外廠商其對外服務…</a:t>
             </a:r>
           </a:p>
         </p:txBody>
@@ -9298,7 +10519,7 @@
             <a:r>
               <a:rPr sz="1100" b="1">
                 <a:solidFill>
-                  <a:srgbClr val="E63946"/>
+                  <a:srgbClr val="27A6C4"/>
                 </a:solidFill>
                 <a:latin typeface="Microsoft JhengHei"/>
                 <a:ea typeface="Microsoft JhengHei"/>
@@ -9315,7 +10536,7 @@
                 <a:ea typeface="Microsoft JhengHei"/>
                 <a:cs typeface="Microsoft JhengHei"/>
               </a:rPr>
-              <a:t>公司將持續進行資安鑑識、系統安全強化及相關風險控管作業，受影響系統預期可逐步恢復運作；後續如調查結果或事件發展有重大變化…</a:t>
+              <a:t>本公司已要求系統服務委外廠商重新檢視造成資安疑慮因子並加以改善及防範，同時持續針對系統服務委外廠商加強監控。</a:t>
             </a:r>
           </a:p>
         </p:txBody>
@@ -9442,7 +10663,7 @@
                 <a:ea typeface="Microsoft JhengHei"/>
                 <a:cs typeface="Microsoft JhengHei"/>
               </a:rPr>
-              <a:t>滿心 </a:t>
+              <a:t>立康 </a:t>
             </a:r>
             <a:r>
               <a:rPr sz="1300" b="0">
@@ -9453,7 +10674,7 @@
                 <a:ea typeface="Microsoft JhengHei"/>
                 <a:cs typeface="Microsoft JhengHei"/>
               </a:rPr>
-              <a:t>2916</a:t>
+              <a:t>6242</a:t>
             </a:r>
           </a:p>
         </p:txBody>
@@ -9586,7 +10807,7 @@
                 <a:ea typeface="Microsoft JhengHei"/>
                 <a:cs typeface="Microsoft JhengHei"/>
               </a:rPr>
-              <a:t>本公司委外服務平台業者所提供之資料庫發生自動化攻擊事件,部分資訊遭非法擷取,本公司近日接獲消費者…</a:t>
+              <a:t>本公司接獲消費者反映疑似個資外洩事件</a:t>
             </a:r>
           </a:p>
         </p:txBody>
@@ -9638,7 +10859,7 @@
                 <a:ea typeface="Microsoft JhengHei"/>
                 <a:cs typeface="Microsoft JhengHei"/>
               </a:rPr>
-              <a:t>(1)本公司已立即啟動資安事件應變作業,針對相關系統與存取紀錄及可能涉及之資料範圍進行調查,並要求委外服務平台業者同步進…</a:t>
+              <a:t>(1)本公司已立即啟動資安事件應變作業，針對相關系統、存取紀錄及可能涉及之資料範圍進行調查，並要求購物網平台委外廠商同步…</a:t>
             </a:r>
           </a:p>
         </p:txBody>
@@ -9765,7 +10986,7 @@
                 <a:ea typeface="Microsoft JhengHei"/>
                 <a:cs typeface="Microsoft JhengHei"/>
               </a:rPr>
-              <a:t>91APP*-KY </a:t>
+              <a:t>美食-KY </a:t>
             </a:r>
             <a:r>
               <a:rPr sz="1300" b="0">
@@ -9776,7 +10997,7 @@
                 <a:ea typeface="Microsoft JhengHei"/>
                 <a:cs typeface="Microsoft JhengHei"/>
               </a:rPr>
-              <a:t>6741</a:t>
+              <a:t>2723</a:t>
             </a:r>
           </a:p>
         </p:txBody>
@@ -9909,7 +11130,7 @@
                 <a:ea typeface="Microsoft JhengHei"/>
                 <a:cs typeface="Microsoft JhengHei"/>
               </a:rPr>
-              <a:t>本公司CommerceCloud資料庫受到自動化攻擊事件說明。</a:t>
+              <a:t>台灣子公司美食達人股份有限公司於今日發現部分資訊系統遭受網路攻擊，已立即啟動資安應變機制，並委請…</a:t>
             </a:r>
           </a:p>
         </p:txBody>
@@ -9961,7 +11182,7 @@
                 <a:ea typeface="Microsoft JhengHei"/>
                 <a:cs typeface="Microsoft JhengHei"/>
               </a:rPr>
-              <a:t>(1)強化監控防禦：升級全天候監控，全面提升系統防護層級。(2)委外第三方公正單位調查：協同外部專家深入調查，並於相關主…</a:t>
+              <a:t>公司將持續進行資安鑑識、系統安全強化及相關風險控管作業，受影響系統預期可逐步恢復運作；後續如調查結果或事件發展有重大變化…</a:t>
             </a:r>
           </a:p>
         </p:txBody>
@@ -10027,7 +11248,7 @@
             <a:avLst/>
           </a:prstGeom>
           <a:solidFill>
-            <a:srgbClr val="5C6679"/>
+            <a:srgbClr val="27A6C4"/>
           </a:solidFill>
           <a:ln>
             <a:noFill/>
@@ -10088,7 +11309,7 @@
                 <a:ea typeface="Microsoft JhengHei"/>
                 <a:cs typeface="Microsoft JhengHei"/>
               </a:rPr>
-              <a:t>上福 </a:t>
+              <a:t>滿心 </a:t>
             </a:r>
             <a:r>
               <a:rPr sz="1300" b="0">
@@ -10099,7 +11320,7 @@
                 <a:ea typeface="Microsoft JhengHei"/>
                 <a:cs typeface="Microsoft JhengHei"/>
               </a:rPr>
-              <a:t>6128</a:t>
+              <a:t>2916</a:t>
             </a:r>
           </a:p>
         </p:txBody>
@@ -10119,7 +11340,7 @@
             <a:avLst/>
           </a:prstGeom>
           <a:solidFill>
-            <a:srgbClr val="5C6679"/>
+            <a:srgbClr val="27A6C4"/>
           </a:solidFill>
           <a:ln>
             <a:noFill/>
@@ -10180,7 +11401,7 @@
                 <a:ea typeface="Microsoft JhengHei"/>
                 <a:cs typeface="Microsoft JhengHei"/>
               </a:rPr>
-              <a:t>其他</a:t>
+              <a:t>個資外洩</a:t>
             </a:r>
           </a:p>
         </p:txBody>
@@ -10215,7 +11436,7 @@
             <a:r>
               <a:rPr sz="1100" b="1">
                 <a:solidFill>
-                  <a:srgbClr val="5C6679"/>
+                  <a:srgbClr val="27A6C4"/>
                 </a:solidFill>
                 <a:latin typeface="Microsoft JhengHei"/>
                 <a:ea typeface="Microsoft JhengHei"/>
@@ -10232,7 +11453,7 @@
                 <a:ea typeface="Microsoft JhengHei"/>
                 <a:cs typeface="Microsoft JhengHei"/>
               </a:rPr>
-              <a:t>KatunCorporation發現資訊安全異常事件，經調查發現部分資訊系統有異常存取行為。</a:t>
+              <a:t>本公司委外服務平台業者所提供之資料庫發生自動化攻擊事件,部分資訊遭非法擷取,本公司近日接獲消費者…</a:t>
             </a:r>
           </a:p>
         </p:txBody>
@@ -10267,7 +11488,7 @@
             <a:r>
               <a:rPr sz="1100" b="1">
                 <a:solidFill>
-                  <a:srgbClr val="5C6679"/>
+                  <a:srgbClr val="27A6C4"/>
                 </a:solidFill>
                 <a:latin typeface="Microsoft JhengHei"/>
                 <a:ea typeface="Microsoft JhengHei"/>
@@ -10284,7 +11505,7 @@
                 <a:ea typeface="Microsoft JhengHei"/>
                 <a:cs typeface="Microsoft JhengHei"/>
               </a:rPr>
-              <a:t>KatunCorporation將持續進行事件調查、鑑識分析及監控作業，並進一步強化資訊安全管理、遠端存取管控、網路安全…</a:t>
+              <a:t>(1)本公司已立即啟動資安事件應變作業,針對相關系統與存取紀錄及可能涉及之資料範圍進行調查,並要求委外服務平台業者同步進…</a:t>
             </a:r>
           </a:p>
         </p:txBody>
@@ -10486,7 +11707,7 @@
             <a:avLst/>
           </a:prstGeom>
           <a:solidFill>
-            <a:srgbClr val="27A6C4"/>
+            <a:srgbClr val="E63946"/>
           </a:solidFill>
           <a:ln>
             <a:noFill/>
@@ -10547,7 +11768,7 @@
                 <a:ea typeface="Microsoft JhengHei"/>
                 <a:cs typeface="Microsoft JhengHei"/>
               </a:rPr>
-              <a:t>鈊象 </a:t>
+              <a:t>91APP*-KY </a:t>
             </a:r>
             <a:r>
               <a:rPr sz="1300" b="0">
@@ -10558,7 +11779,7 @@
                 <a:ea typeface="Microsoft JhengHei"/>
                 <a:cs typeface="Microsoft JhengHei"/>
               </a:rPr>
-              <a:t>3293</a:t>
+              <a:t>6741</a:t>
             </a:r>
           </a:p>
         </p:txBody>
@@ -10578,7 +11799,7 @@
             <a:avLst/>
           </a:prstGeom>
           <a:solidFill>
-            <a:srgbClr val="27A6C4"/>
+            <a:srgbClr val="E63946"/>
           </a:solidFill>
           <a:ln>
             <a:noFill/>
@@ -10639,7 +11860,7 @@
                 <a:ea typeface="Microsoft JhengHei"/>
                 <a:cs typeface="Microsoft JhengHei"/>
               </a:rPr>
-              <a:t>個資外洩</a:t>
+              <a:t>駭客攻擊</a:t>
             </a:r>
           </a:p>
         </p:txBody>
@@ -10674,7 +11895,7 @@
             <a:r>
               <a:rPr sz="1100" b="1">
                 <a:solidFill>
-                  <a:srgbClr val="27A6C4"/>
+                  <a:srgbClr val="E63946"/>
                 </a:solidFill>
                 <a:latin typeface="Microsoft JhengHei"/>
                 <a:ea typeface="Microsoft JhengHei"/>
@@ -10691,7 +11912,7 @@
                 <a:ea typeface="Microsoft JhengHei"/>
                 <a:cs typeface="Microsoft JhengHei"/>
               </a:rPr>
-              <a:t>本公司於115年9月29日發現不明IP異常侵入公司營運資訊設備，造成公司遊戲營運資料外洩，包含部…</a:t>
+              <a:t>本公司CommerceCloud資料庫受到自動化攻擊事件說明。</a:t>
             </a:r>
           </a:p>
         </p:txBody>
@@ -10726,7 +11947,7 @@
             <a:r>
               <a:rPr sz="1100" b="1">
                 <a:solidFill>
-                  <a:srgbClr val="27A6C4"/>
+                  <a:srgbClr val="E63946"/>
                 </a:solidFill>
                 <a:latin typeface="Microsoft JhengHei"/>
                 <a:ea typeface="Microsoft JhengHei"/>
@@ -10743,7 +11964,7 @@
                 <a:ea typeface="Microsoft JhengHei"/>
                 <a:cs typeface="Microsoft JhengHei"/>
               </a:rPr>
-              <a:t>(1)持續提升資安防禦，強化監控與防護層級。(2)委由外部專業資安團隊協助事件調查，並於相關主機部署偵測及防護機制。(3…</a:t>
+              <a:t>(1)強化監控防禦：升級全天候監控，全面提升系統防護層級。(2)委外第三方公正單位調查：協同外部專家深入調查，並於相關主…</a:t>
             </a:r>
           </a:p>
         </p:txBody>
@@ -10870,7 +12091,7 @@
                 <a:ea typeface="Microsoft JhengHei"/>
                 <a:cs typeface="Microsoft JhengHei"/>
               </a:rPr>
-              <a:t>一零四 </a:t>
+              <a:t>緯致 </a:t>
             </a:r>
             <a:r>
               <a:rPr sz="1300" b="0">
@@ -10881,7 +12102,7 @@
                 <a:ea typeface="Microsoft JhengHei"/>
                 <a:cs typeface="Microsoft JhengHei"/>
               </a:rPr>
-              <a:t>3130</a:t>
+              <a:t>4953</a:t>
             </a:r>
           </a:p>
         </p:txBody>
@@ -11014,7 +12235,7 @@
                 <a:ea typeface="Microsoft JhengHei"/>
                 <a:cs typeface="Microsoft JhengHei"/>
               </a:rPr>
-              <a:t>本公司偵測到APP系統有異常讀取情形，經調查確認，約12萬筆履歷資料遭未經授權讀取。</a:t>
+              <a:t>本公司偵測到內部系統有異常存取情形，經調查確認，部分員工資訊與公務聯繫資訊遭未經授權存取。</a:t>
             </a:r>
           </a:p>
         </p:txBody>
@@ -11066,7 +12287,7 @@
                 <a:ea typeface="Microsoft JhengHei"/>
                 <a:cs typeface="Microsoft JhengHei"/>
               </a:rPr>
-              <a:t>本公司已採取相關防護及阻斷措施，並持續進行資安鑑識及強化資訊安全防護機制。本公司將依調查結果及相關法令辦理後續事宜，如有…</a:t>
+              <a:t>本公司已採取相關防護、阻斷及修補措施，並持續強化資訊安全防護機制。</a:t>
             </a:r>
           </a:p>
         </p:txBody>
@@ -11132,7 +12353,7 @@
             <a:avLst/>
           </a:prstGeom>
           <a:solidFill>
-            <a:srgbClr val="E63946"/>
+            <a:srgbClr val="5C6679"/>
           </a:solidFill>
           <a:ln>
             <a:noFill/>
@@ -11193,7 +12414,7 @@
                 <a:ea typeface="Microsoft JhengHei"/>
                 <a:cs typeface="Microsoft JhengHei"/>
               </a:rPr>
-              <a:t>神腦 </a:t>
+              <a:t>上福 </a:t>
             </a:r>
             <a:r>
               <a:rPr sz="1300" b="0">
@@ -11204,7 +12425,7 @@
                 <a:ea typeface="Microsoft JhengHei"/>
                 <a:cs typeface="Microsoft JhengHei"/>
               </a:rPr>
-              <a:t>2450</a:t>
+              <a:t>6128</a:t>
             </a:r>
           </a:p>
         </p:txBody>
@@ -11224,7 +12445,7 @@
             <a:avLst/>
           </a:prstGeom>
           <a:solidFill>
-            <a:srgbClr val="E63946"/>
+            <a:srgbClr val="5C6679"/>
           </a:solidFill>
           <a:ln>
             <a:noFill/>
@@ -11285,7 +12506,7 @@
                 <a:ea typeface="Microsoft JhengHei"/>
                 <a:cs typeface="Microsoft JhengHei"/>
               </a:rPr>
-              <a:t>駭客攻擊</a:t>
+              <a:t>其他</a:t>
             </a:r>
           </a:p>
         </p:txBody>
@@ -11320,7 +12541,7 @@
             <a:r>
               <a:rPr sz="1100" b="1">
                 <a:solidFill>
-                  <a:srgbClr val="E63946"/>
+                  <a:srgbClr val="5C6679"/>
                 </a:solidFill>
                 <a:latin typeface="Microsoft JhengHei"/>
                 <a:ea typeface="Microsoft JhengHei"/>
@@ -11337,7 +12558,7 @@
                 <a:ea typeface="Microsoft JhengHei"/>
                 <a:cs typeface="Microsoft JhengHei"/>
               </a:rPr>
-              <a:t>本公司外部伺服器遭受自動化攻擊事件說明。</a:t>
+              <a:t>KatunCorporation發現資訊安全異常事件，經調查發現部分資訊系統有異常存取行為。</a:t>
             </a:r>
           </a:p>
         </p:txBody>
@@ -11372,7 +12593,7 @@
             <a:r>
               <a:rPr sz="1100" b="1">
                 <a:solidFill>
-                  <a:srgbClr val="E63946"/>
+                  <a:srgbClr val="5C6679"/>
                 </a:solidFill>
                 <a:latin typeface="Microsoft JhengHei"/>
                 <a:ea typeface="Microsoft JhengHei"/>
@@ -11389,7 +12610,7 @@
                 <a:ea typeface="Microsoft JhengHei"/>
                 <a:cs typeface="Microsoft JhengHei"/>
               </a:rPr>
-              <a:t>本公司已與第三方資安廠商合作，全面強化網路偵測、系統監控與安全管控，以確保資訊安全。</a:t>
+              <a:t>KatunCorporation將持續進行事件調查、鑑識分析及監控作業，並進一步強化資訊安全管理、遠端存取管控、網路安全…</a:t>
             </a:r>
           </a:p>
         </p:txBody>
@@ -11455,7 +12676,7 @@
             <a:avLst/>
           </a:prstGeom>
           <a:solidFill>
-            <a:srgbClr val="5C6679"/>
+            <a:srgbClr val="27A6C4"/>
           </a:solidFill>
           <a:ln>
             <a:noFill/>
@@ -11516,7 +12737,7 @@
                 <a:ea typeface="Microsoft JhengHei"/>
                 <a:cs typeface="Microsoft JhengHei"/>
               </a:rPr>
-              <a:t>鈊象 </a:t>
+              <a:t>杏一 </a:t>
             </a:r>
             <a:r>
               <a:rPr sz="1300" b="0">
@@ -11527,7 +12748,7 @@
                 <a:ea typeface="Microsoft JhengHei"/>
                 <a:cs typeface="Microsoft JhengHei"/>
               </a:rPr>
-              <a:t>3293</a:t>
+              <a:t>4175</a:t>
             </a:r>
           </a:p>
         </p:txBody>
@@ -11547,7 +12768,7 @@
             <a:avLst/>
           </a:prstGeom>
           <a:solidFill>
-            <a:srgbClr val="5C6679"/>
+            <a:srgbClr val="27A6C4"/>
           </a:solidFill>
           <a:ln>
             <a:noFill/>
@@ -11608,7 +12829,7 @@
                 <a:ea typeface="Microsoft JhengHei"/>
                 <a:cs typeface="Microsoft JhengHei"/>
               </a:rPr>
-              <a:t>其他</a:t>
+              <a:t>個資外洩</a:t>
             </a:r>
           </a:p>
         </p:txBody>
@@ -11643,7 +12864,7 @@
             <a:r>
               <a:rPr sz="1100" b="1">
                 <a:solidFill>
-                  <a:srgbClr val="5C6679"/>
+                  <a:srgbClr val="27A6C4"/>
                 </a:solidFill>
                 <a:latin typeface="Microsoft JhengHei"/>
                 <a:ea typeface="Microsoft JhengHei"/>
@@ -11660,7 +12881,7 @@
                 <a:ea typeface="Microsoft JhengHei"/>
                 <a:cs typeface="Microsoft JhengHei"/>
               </a:rPr>
-              <a:t>本公司於115年9月29日發現不明IP異常侵入公司營運資訊設備。</a:t>
+              <a:t>本公司接獲消費者反映疑似個資外洩事件</a:t>
             </a:r>
           </a:p>
         </p:txBody>
@@ -11695,7 +12916,7 @@
             <a:r>
               <a:rPr sz="1100" b="1">
                 <a:solidFill>
-                  <a:srgbClr val="5C6679"/>
+                  <a:srgbClr val="27A6C4"/>
                 </a:solidFill>
                 <a:latin typeface="Microsoft JhengHei"/>
                 <a:ea typeface="Microsoft JhengHei"/>
@@ -11712,7 +12933,7 @@
                 <a:ea typeface="Microsoft JhengHei"/>
                 <a:cs typeface="Microsoft JhengHei"/>
               </a:rPr>
-              <a:t>持續提升資安防禦，強化監控與防護層級。</a:t>
+              <a:t>(1)本公司已立即啟動資安事件應變作業，針對相關系統、存取紀錄及可能涉及之資料範圍進行調查，並要求官網平台委外廠商同步進…</a:t>
             </a:r>
           </a:p>
         </p:txBody>
@@ -11975,7 +13196,7 @@
                 <a:ea typeface="Microsoft JhengHei"/>
                 <a:cs typeface="Microsoft JhengHei"/>
               </a:rPr>
-              <a:t>柏文 </a:t>
+              <a:t>鈊象 </a:t>
             </a:r>
             <a:r>
               <a:rPr sz="1300" b="0">
@@ -11986,7 +13207,7 @@
                 <a:ea typeface="Microsoft JhengHei"/>
                 <a:cs typeface="Microsoft JhengHei"/>
               </a:rPr>
-              <a:t>8462</a:t>
+              <a:t>3293</a:t>
             </a:r>
           </a:p>
         </p:txBody>
@@ -12119,7 +13340,7 @@
                 <a:ea typeface="Microsoft JhengHei"/>
                 <a:cs typeface="Microsoft JhengHei"/>
               </a:rPr>
-              <a:t>本公司接獲系統委外廠商通知其對外服務系統遭自動化攻擊，並對客戶資料表分頁擷取，其中部分涉及本公司…</a:t>
+              <a:t>本公司於115年9月29日發現不明IP異常侵入公司營運資訊設備，造成公司遊戲營運資料外洩，包含部…</a:t>
             </a:r>
           </a:p>
         </p:txBody>
@@ -12133,6 +13354,1757 @@
         <p:spPr>
           <a:xfrm>
             <a:off x="777240" y="2926080"/>
+            <a:ext cx="4937760" cy="713232"/>
+          </a:xfrm>
+          <a:prstGeom prst="rect">
+            <a:avLst/>
+          </a:prstGeom>
+          <a:noFill/>
+        </p:spPr>
+        <p:txBody>
+          <a:bodyPr wrap="square" anchor="t" lIns="0" rIns="0" tIns="0" bIns="0">
+            <a:spAutoFit/>
+          </a:bodyPr>
+          <a:lstStyle/>
+          <a:p>
+            <a:pPr algn="l">
+              <a:lnSpc>
+                <a:spcPts val="1500"/>
+              </a:lnSpc>
+            </a:pPr>
+            <a:r>
+              <a:rPr sz="1100" b="1">
+                <a:solidFill>
+      